--- a/1개월차_AI에이전트_활용방안_및_DOE결과.pptx
+++ b/1개월차_AI에이전트_활용방안_및_DOE결과.pptx
@@ -1564,7 +1564,7 @@
         </p:nvSpPr>
         <p:spPr>
           <a:xfrm>
-            <a:off x="777240" y="1417320"/>
+            <a:off x="777240" y="1298448"/>
             <a:ext cx="7315200" cy="292608"/>
           </a:xfrm>
           <a:prstGeom prst="rect">
@@ -1589,7 +1589,7 @@
                 <a:ea typeface="Malgun Gothic" pitchFamily="34" charset="-122"/>
                 <a:cs typeface="Malgun Gothic" pitchFamily="34" charset="-120"/>
               </a:rPr>
-              <a:t>학습조직 1개월차 산출물</a:t>
+              <a:t>학습조직</a:t>
             </a:r>
             <a:endParaRPr lang="en-US" sz="1200" dirty="0"/>
           </a:p>
@@ -1603,7 +1603,7 @@
         </p:nvSpPr>
         <p:spPr>
           <a:xfrm>
-            <a:off x="777240" y="1874520"/>
+            <a:off x="777240" y="1755648"/>
             <a:ext cx="8412480" cy="1737360"/>
           </a:xfrm>
           <a:prstGeom prst="rect">
@@ -1631,7 +1631,7 @@
                 <a:ea typeface="Malgun Gothic" pitchFamily="34" charset="-122"/>
                 <a:cs typeface="Malgun Gothic" pitchFamily="34" charset="-120"/>
               </a:rPr>
-              <a:t>AI 에이전트 활용방안 및</a:t>
+              <a:t>AI 기반 열유체 해석 자동화 및</a:t>
             </a:r>
             <a:endParaRPr lang="en-US" sz="3800" dirty="0"/>
           </a:p>
@@ -1651,7 +1651,7 @@
                 <a:ea typeface="Malgun Gothic" pitchFamily="34" charset="-122"/>
                 <a:cs typeface="Malgun Gothic" pitchFamily="34" charset="-120"/>
               </a:rPr>
-              <a:t>DOE 기반 해석 데이터 확보</a:t>
+              <a:t>설계최적화</a:t>
             </a:r>
             <a:endParaRPr lang="en-US" sz="3800" dirty="0"/>
           </a:p>
@@ -1665,7 +1665,7 @@
         </p:nvSpPr>
         <p:spPr>
           <a:xfrm>
-            <a:off x="777240" y="3703320"/>
+            <a:off x="777240" y="3584448"/>
             <a:ext cx="8229600" cy="365760"/>
           </a:xfrm>
           <a:prstGeom prst="rect">
@@ -1690,7 +1690,7 @@
                 <a:ea typeface="Malgun Gothic" pitchFamily="34" charset="-122"/>
                 <a:cs typeface="Malgun Gothic" pitchFamily="34" charset="-120"/>
               </a:rPr>
-              <a:t>수냉식 냉각판 유로·방열핀 설계최적화</a:t>
+              <a:t>수냉식 냉각판 유로·방열핀 설계 사례</a:t>
             </a:r>
             <a:endParaRPr lang="en-US" sz="1500" dirty="0"/>
           </a:p>
@@ -1704,18 +1704,20 @@
         </p:nvSpPr>
         <p:spPr>
           <a:xfrm>
-            <a:off x="777240" y="4617720"/>
-            <a:ext cx="1005840" cy="32004"/>
-          </a:xfrm>
-          <a:prstGeom prst="rect">
-            <a:avLst/>
+            <a:off x="777240" y="4315968"/>
+            <a:ext cx="6035040" cy="566928"/>
+          </a:xfrm>
+          <a:prstGeom prst="roundRect">
+            <a:avLst>
+              <a:gd name="adj" fmla="val 12903"/>
+            </a:avLst>
           </a:prstGeom>
           <a:solidFill>
-            <a:srgbClr val="00A3C4"/>
+            <a:srgbClr val="2C4E82"/>
           </a:solidFill>
           <a:ln w="12700">
             <a:solidFill>
-              <a:srgbClr val="00A3C4"/>
+              <a:srgbClr val="2C4E82"/>
             </a:solidFill>
             <a:prstDash val="solid"/>
           </a:ln>
@@ -1729,7 +1731,46 @@
         </p:nvSpPr>
         <p:spPr>
           <a:xfrm>
-            <a:off x="777240" y="4846320"/>
+            <a:off x="777240" y="4315968"/>
+            <a:ext cx="6035040" cy="566928"/>
+          </a:xfrm>
+          <a:prstGeom prst="rect">
+            <a:avLst/>
+          </a:prstGeom>
+          <a:noFill/>
+          <a:ln/>
+        </p:spPr>
+        <p:txBody>
+          <a:bodyPr wrap="square" lIns="0" tIns="0" rIns="0" bIns="0" rtlCol="0" anchor="ctr"/>
+          <a:lstStyle/>
+          <a:p>
+            <a:pPr algn="ctr" indent="0" marL="0">
+              <a:buNone/>
+            </a:pPr>
+            <a:r>
+              <a:rPr lang="en-US" sz="1300" b="1" dirty="0">
+                <a:solidFill>
+                  <a:srgbClr val="FFFFFF"/>
+                </a:solidFill>
+                <a:latin typeface="Malgun Gothic" pitchFamily="34" charset="0"/>
+                <a:ea typeface="Malgun Gothic" pitchFamily="34" charset="-122"/>
+                <a:cs typeface="Malgun Gothic" pitchFamily="34" charset="-120"/>
+              </a:rPr>
+              <a:t>1개월차   |   AI 에이전트 활용방안 및 DOE 결과</a:t>
+            </a:r>
+            <a:endParaRPr lang="en-US" sz="1300" dirty="0"/>
+          </a:p>
+        </p:txBody>
+      </p:sp>
+      <p:sp>
+        <p:nvSpPr>
+          <p:cNvPr id="9" name="Text 7"/>
+          <p:cNvSpPr txBox="1"/>
+          <p:nvPr/>
+        </p:nvSpPr>
+        <p:spPr>
+          <a:xfrm>
+            <a:off x="777240" y="5257800"/>
             <a:ext cx="7315200" cy="292608"/>
           </a:xfrm>
           <a:prstGeom prst="rect">

--- a/1개월차_AI에이전트_활용방안_및_DOE결과.pptx
+++ b/1개월차_AI에이전트_활용방안_및_DOE결과.pptx
@@ -15,9 +15,10 @@
     <p:sldId id="263" r:id="rId9"/>
     <p:sldId id="264" r:id="rId10"/>
     <p:sldId id="265" r:id="rId11"/>
+    <p:sldId id="266" r:id="rId12"/>
   </p:sldIdLst>
   <p:notesMasterIdLst>
-    <p:notesMasterId r:id="rId12"/>
+    <p:notesMasterId r:id="rId13"/>
   </p:notesMasterIdLst>
   <p:sldSz cx="12192000" cy="6858000"/>
   <p:notesSz cx="6858000" cy="12192000"/>
@@ -599,7 +600,7 @@
           <a:p>
             <a:r>
               <a:rPr lang="en-US" dirty="0"/>
-              <a:t>이번 달은 데이터 생산 설비를 만들고 초기 데이터셋을 확보한 단계. 다음 달부터 이 데이터를 학습시킨다.</a:t>
+              <a:t>1회 해석에 수십 분이 걸리므로 무인 연속 운전이 전제 조건. 사람이 붙어 있지 않아도 데이터가 쌓이는 구조를 만든 것이 이번 달의 실질적 성과.</a:t>
             </a:r>
             <a:endParaRPr lang="en-US" dirty="0"/>
           </a:p>
@@ -623,6 +624,94 @@
             <a:fld id="{F7021451-1387-4CA6-816F-3879F97B5CBC}" type="slidenum">
               <a:rPr lang="en-US"/>
               <a:t>10</a:t>
+            </a:fld>
+            <a:endParaRPr lang="en-US"/>
+          </a:p>
+        </p:txBody>
+      </p:sp>
+    </p:spTree>
+    <p:extLst>
+      <p:ext uri="{BB962C8B-B14F-4D97-AF65-F5344CB8AC3E}">
+        <p14:creationId xmlns:p14="http://schemas.microsoft.com/office/powerpoint/2010/main" val="1024086991"/>
+      </p:ext>
+    </p:extLst>
+  </p:cSld>
+  <p:clrMapOvr>
+    <a:masterClrMapping/>
+  </p:clrMapOvr>
+</p:notes>
+</file>
+
+<file path=ppt/notesSlides/notesSlide11.xml><?xml version="1.0" encoding="utf-8"?>
+<p:notes xmlns:a="http://schemas.openxmlformats.org/drawingml/2006/main" xmlns:r="http://schemas.openxmlformats.org/officeDocument/2006/relationships" xmlns:p="http://schemas.openxmlformats.org/presentationml/2006/main">
+  <p:cSld>
+    <p:spTree>
+      <p:nvGrpSpPr>
+        <p:cNvPr id="1" name=""/>
+        <p:cNvGrpSpPr/>
+        <p:nvPr/>
+      </p:nvGrpSpPr>
+      <p:grpSpPr>
+        <a:xfrm>
+          <a:off x="0" y="0"/>
+          <a:ext cx="0" cy="0"/>
+          <a:chOff x="0" y="0"/>
+          <a:chExt cx="0" cy="0"/>
+        </a:xfrm>
+      </p:grpSpPr>
+      <p:sp>
+        <p:nvSpPr>
+          <p:cNvPr id="2" name="Slide Image Placeholder 1"/>
+          <p:cNvSpPr>
+            <a:spLocks noGrp="1" noRot="1" noChangeAspect="1"/>
+          </p:cNvSpPr>
+          <p:nvPr>
+            <p:ph type="sldImg"/>
+          </p:nvPr>
+        </p:nvSpPr>
+        <p:spPr/>
+      </p:sp>
+      <p:sp>
+        <p:nvSpPr>
+          <p:cNvPr id="3" name="Notes Placeholder 2"/>
+          <p:cNvSpPr>
+            <a:spLocks noGrp="1"/>
+          </p:cNvSpPr>
+          <p:nvPr>
+            <p:ph type="body" idx="1"/>
+          </p:nvPr>
+        </p:nvSpPr>
+        <p:spPr/>
+        <p:txBody>
+          <a:bodyPr/>
+          <a:lstStyle/>
+          <a:p>
+            <a:r>
+              <a:rPr lang="en-US" dirty="0"/>
+              <a:t>이번 달은 데이터 생산 설비를 만들고 초기 데이터셋을 확보한 단계. 다음 달부터 이 데이터를 학습시킨다.</a:t>
+            </a:r>
+            <a:endParaRPr lang="en-US" dirty="0"/>
+          </a:p>
+        </p:txBody>
+      </p:sp>
+      <p:sp>
+        <p:nvSpPr>
+          <p:cNvPr id="4" name="Slide Number Placeholder 3"/>
+          <p:cNvSpPr>
+            <a:spLocks noGrp="1"/>
+          </p:cNvSpPr>
+          <p:nvPr>
+            <p:ph type="sldNum" sz="quarter" idx="10"/>
+          </p:nvPr>
+        </p:nvSpPr>
+        <p:spPr/>
+        <p:txBody>
+          <a:bodyPr/>
+          <a:lstStyle/>
+          <a:p>
+            <a:fld id="{F7021451-1387-4CA6-816F-3879F97B5CBC}" type="slidenum">
+              <a:rPr lang="en-US"/>
+              <a:t>11</a:t>
             </a:fld>
             <a:endParaRPr lang="en-US"/>
           </a:p>
@@ -1215,7 +1304,7 @@
           <a:p>
             <a:r>
               <a:rPr lang="en-US" dirty="0"/>
-              <a:t>조용히 잘못된 데이터가 쌓이는 실패 모드를 어떻게 막았는지가 이 장의 요지.</a:t>
+              <a:t>설계값을 Equation Manager 전역변수에 써넣고 리빌드한 뒤 질량 특성과 STEP 파일을 얻는 과정이다. 변수명이 어긋나면 즉시 중단해 형상이 바뀌지 않은 채 해석되는 사고를 막았고, 핀 간격처럼 다른 변수에서 결정되는 값은 CAD 수식에 맡겨 두 곳에서 따로 계산하지 않도록 했다. 코드는 주요 호출부만 발췌했다.</a:t>
             </a:r>
             <a:endParaRPr lang="en-US" dirty="0"/>
           </a:p>
@@ -1303,7 +1392,7 @@
           <a:p>
             <a:r>
               <a:rPr lang="en-US" dirty="0"/>
-              <a:t>1회 해석에 수십 분이 걸리므로 무인 연속 운전이 전제 조건. 사람이 붙어 있지 않아도 데이터가 쌓이는 구조를 만든 것이 이번 달의 실질적 성과.</a:t>
+              <a:t>SolidWorks에서 내보낸 STEP 파일을 받아 Icepak 해석 모델을 매 회차 새로 구성한다. 유체 영역 생성, 경계조건 지정, 메시 설정, 측정면 생성, 해석 실행, 결과 추출까지 전 과정이 코드로 수행된다. 형상이 바뀌면 팬·개구부 면과 측정면 위치가 달라지므로, 이를 좌표와 설계변수로부터 자동으로 계산하도록 구성했다. 코드는 주요 호출부만 발췌했고 인자는 생략했다.</a:t>
             </a:r>
             <a:endParaRPr lang="en-US" dirty="0"/>
           </a:p>
@@ -2186,6 +2275,2141 @@
                 <a:ea typeface="Malgun Gothic" pitchFamily="34" charset="-122"/>
                 <a:cs typeface="Malgun Gothic" pitchFamily="34" charset="-120"/>
               </a:rPr>
+              <a:t>DOE 기법 선정 및 무인 자동 해석 루프</a:t>
+            </a:r>
+            <a:endParaRPr lang="en-US" sz="2200" dirty="0"/>
+          </a:p>
+        </p:txBody>
+      </p:sp>
+      <p:sp>
+        <p:nvSpPr>
+          <p:cNvPr id="6" name="Shape 4"/>
+          <p:cNvSpPr/>
+          <p:nvPr/>
+        </p:nvSpPr>
+        <p:spPr>
+          <a:xfrm>
+            <a:off x="502920" y="1188720"/>
+            <a:ext cx="5440680" cy="2487168"/>
+          </a:xfrm>
+          <a:prstGeom prst="roundRect">
+            <a:avLst>
+              <a:gd name="adj" fmla="val 2206"/>
+            </a:avLst>
+          </a:prstGeom>
+          <a:solidFill>
+            <a:srgbClr val="FFFFFF"/>
+          </a:solidFill>
+          <a:ln w="9525">
+            <a:solidFill>
+              <a:srgbClr val="DDE3EB"/>
+            </a:solidFill>
+            <a:prstDash val="solid"/>
+          </a:ln>
+          <a:effectLst>
+            <a:outerShdw sx="100000" sy="100000" kx="0" ky="0" algn="bl" rotWithShape="0" blurRad="101600" dist="12700" dir="5400000">
+              <a:srgbClr val="9AA8BC">
+                <a:alpha val="18000"/>
+              </a:srgbClr>
+            </a:outerShdw>
+          </a:effectLst>
+        </p:spPr>
+      </p:sp>
+      <p:sp>
+        <p:nvSpPr>
+          <p:cNvPr id="7" name="Shape 5"/>
+          <p:cNvSpPr/>
+          <p:nvPr/>
+        </p:nvSpPr>
+        <p:spPr>
+          <a:xfrm>
+            <a:off x="758952" y="1463040"/>
+            <a:ext cx="82296" cy="182880"/>
+          </a:xfrm>
+          <a:prstGeom prst="rect">
+            <a:avLst/>
+          </a:prstGeom>
+          <a:solidFill>
+            <a:srgbClr val="00A3C4"/>
+          </a:solidFill>
+          <a:ln w="12700">
+            <a:solidFill>
+              <a:srgbClr val="00A3C4"/>
+            </a:solidFill>
+            <a:prstDash val="solid"/>
+          </a:ln>
+        </p:spPr>
+      </p:sp>
+      <p:sp>
+        <p:nvSpPr>
+          <p:cNvPr id="8" name="Text 6"/>
+          <p:cNvSpPr txBox="1"/>
+          <p:nvPr/>
+        </p:nvSpPr>
+        <p:spPr>
+          <a:xfrm>
+            <a:off x="923544" y="1371600"/>
+            <a:ext cx="4480560" cy="365760"/>
+          </a:xfrm>
+          <a:prstGeom prst="rect">
+            <a:avLst/>
+          </a:prstGeom>
+          <a:noFill/>
+          <a:ln/>
+        </p:spPr>
+        <p:txBody>
+          <a:bodyPr wrap="square" lIns="0" tIns="0" rIns="0" bIns="0" rtlCol="0" anchor="ctr"/>
+          <a:lstStyle/>
+          <a:p>
+            <a:pPr indent="0" marL="0">
+              <a:buNone/>
+            </a:pPr>
+            <a:r>
+              <a:rPr lang="en-US" sz="1300" b="1" dirty="0">
+                <a:solidFill>
+                  <a:srgbClr val="16305B"/>
+                </a:solidFill>
+                <a:latin typeface="Malgun Gothic" pitchFamily="34" charset="0"/>
+                <a:ea typeface="Malgun Gothic" pitchFamily="34" charset="-122"/>
+                <a:cs typeface="Malgun Gothic" pitchFamily="34" charset="-120"/>
+              </a:rPr>
+              <a:t>DOE 기법 선정</a:t>
+            </a:r>
+            <a:endParaRPr lang="en-US" sz="1300" dirty="0"/>
+          </a:p>
+        </p:txBody>
+      </p:sp>
+      <p:graphicFrame>
+        <p:nvGraphicFramePr>
+          <p:cNvPr id="11" name="Table 0"/>
+          <p:cNvGraphicFramePr>
+            <a:graphicFrameLocks noGrp="1"/>
+          </p:cNvGraphicFramePr>
+          <p:nvPr>
+            <p:extLst>
+              <p:ext uri="{D42A27DB-BD31-4B8C-83A1-F6EECF244321}">
+                <p14:modId xmlns:p14="http://schemas.microsoft.com/office/powerpoint/2010/main" val="1579011935"/>
+              </p:ext>
+            </p:extLst>
+          </p:nvPr>
+        </p:nvGraphicFramePr>
+        <p:xfrm>
+          <a:off x="813816" y="1901952"/>
+          <a:ext cx="4846320" cy="914400"/>
+        </p:xfrm>
+        <a:graphic>
+          <a:graphicData uri="http://schemas.openxmlformats.org/drawingml/2006/table">
+            <a:tbl>
+              <a:tblPr/>
+              <a:tblGrid>
+                <a:gridCol w="2286000"/>
+                <a:gridCol w="2560320"/>
+              </a:tblGrid>
+              <a:tr h="310896">
+                <a:tc>
+                  <a:txBody>
+                    <a:bodyPr/>
+                    <a:lstStyle/>
+                    <a:p>
+                      <a:pPr indent="0" marL="0">
+                        <a:buNone/>
+                      </a:pPr>
+                      <a:r>
+                        <a:rPr lang="en-US" sz="950" b="1" dirty="0">
+                          <a:solidFill>
+                            <a:srgbClr val="16305B"/>
+                          </a:solidFill>
+                          <a:latin typeface="Malgun Gothic" pitchFamily="34" charset="0"/>
+                          <a:ea typeface="Malgun Gothic" pitchFamily="34" charset="-122"/>
+                          <a:cs typeface="Malgun Gothic" pitchFamily="34" charset="-120"/>
+                        </a:rPr>
+                        <a:t>방식</a:t>
+                      </a:r>
+                      <a:endParaRPr lang="en-US" sz="950" dirty="0">
+                        <a:latin typeface="Malgun Gothic" charset="0"/>
+                        <a:ea typeface="Malgun Gothic" charset="0"/>
+                        <a:cs typeface="Malgun Gothic" charset="0"/>
+                      </a:endParaRPr>
+                    </a:p>
+                  </a:txBody>
+                  <a:tcPr marL="50800" marR="50800" marT="25400" marB="25400" anchor="ctr">
+                    <a:lnL w="0" cap="flat" cmpd="sng" algn="ctr">
+                      <a:noFill/>
+                    </a:lnL>
+                    <a:lnR w="0" cap="flat" cmpd="sng" algn="ctr">
+                      <a:noFill/>
+                    </a:lnR>
+                    <a:lnT w="0" cap="flat" cmpd="sng" algn="ctr">
+                      <a:noFill/>
+                    </a:lnT>
+                    <a:lnB w="6350" cap="flat" cmpd="sng" algn="ctr">
+                      <a:solidFill>
+                        <a:srgbClr val="DDE3EB"/>
+                      </a:solidFill>
+                      <a:prstDash val="solid"/>
+                      <a:round/>
+                      <a:headEnd type="none" w="med" len="med"/>
+                      <a:tailEnd type="none" w="med" len="med"/>
+                    </a:lnB>
+                    <a:solidFill>
+                      <a:srgbClr val="EEF2F7"/>
+                    </a:solidFill>
+                  </a:tcPr>
+                </a:tc>
+                <a:tc>
+                  <a:txBody>
+                    <a:bodyPr/>
+                    <a:lstStyle/>
+                    <a:p>
+                      <a:pPr indent="0" marL="0">
+                        <a:buNone/>
+                      </a:pPr>
+                      <a:r>
+                        <a:rPr lang="en-US" sz="950" b="1" dirty="0">
+                          <a:solidFill>
+                            <a:srgbClr val="16305B"/>
+                          </a:solidFill>
+                          <a:latin typeface="Malgun Gothic" pitchFamily="34" charset="0"/>
+                          <a:ea typeface="Malgun Gothic" pitchFamily="34" charset="-122"/>
+                          <a:cs typeface="Malgun Gothic" pitchFamily="34" charset="-120"/>
+                        </a:rPr>
+                        <a:t>판정</a:t>
+                      </a:r>
+                      <a:endParaRPr lang="en-US" sz="950" dirty="0">
+                        <a:latin typeface="Malgun Gothic" charset="0"/>
+                        <a:ea typeface="Malgun Gothic" charset="0"/>
+                        <a:cs typeface="Malgun Gothic" charset="0"/>
+                      </a:endParaRPr>
+                    </a:p>
+                  </a:txBody>
+                  <a:tcPr marL="50800" marR="50800" marT="25400" marB="25400" anchor="ctr">
+                    <a:lnL w="0" cap="flat" cmpd="sng" algn="ctr">
+                      <a:noFill/>
+                    </a:lnL>
+                    <a:lnR w="0" cap="flat" cmpd="sng" algn="ctr">
+                      <a:noFill/>
+                    </a:lnR>
+                    <a:lnT w="0" cap="flat" cmpd="sng" algn="ctr">
+                      <a:noFill/>
+                    </a:lnT>
+                    <a:lnB w="6350" cap="flat" cmpd="sng" algn="ctr">
+                      <a:solidFill>
+                        <a:srgbClr val="DDE3EB"/>
+                      </a:solidFill>
+                      <a:prstDash val="solid"/>
+                      <a:round/>
+                      <a:headEnd type="none" w="med" len="med"/>
+                      <a:tailEnd type="none" w="med" len="med"/>
+                    </a:lnB>
+                    <a:solidFill>
+                      <a:srgbClr val="EEF2F7"/>
+                    </a:solidFill>
+                  </a:tcPr>
+                </a:tc>
+              </a:tr>
+              <a:tr h="310896">
+                <a:tc>
+                  <a:txBody>
+                    <a:bodyPr/>
+                    <a:lstStyle/>
+                    <a:p>
+                      <a:pPr indent="0" marL="0">
+                        <a:buNone/>
+                      </a:pPr>
+                      <a:r>
+                        <a:rPr lang="en-US" sz="950" dirty="0">
+                          <a:solidFill>
+                            <a:srgbClr val="1C2733"/>
+                          </a:solidFill>
+                          <a:latin typeface="Malgun Gothic" pitchFamily="34" charset="0"/>
+                          <a:ea typeface="Malgun Gothic" pitchFamily="34" charset="-122"/>
+                          <a:cs typeface="Malgun Gothic" pitchFamily="34" charset="-120"/>
+                        </a:rPr>
+                        <a:t>격자 전수탐색</a:t>
+                      </a:r>
+                      <a:endParaRPr lang="en-US" sz="950" dirty="0">
+                        <a:latin typeface="Malgun Gothic" charset="0"/>
+                        <a:ea typeface="Malgun Gothic" charset="0"/>
+                        <a:cs typeface="Malgun Gothic" charset="0"/>
+                      </a:endParaRPr>
+                    </a:p>
+                  </a:txBody>
+                  <a:tcPr marL="50800" marR="50800" marT="25400" marB="25400" anchor="ctr">
+                    <a:lnL w="0" cap="flat" cmpd="sng" algn="ctr">
+                      <a:noFill/>
+                    </a:lnL>
+                    <a:lnR w="0" cap="flat" cmpd="sng" algn="ctr">
+                      <a:noFill/>
+                    </a:lnR>
+                    <a:lnT w="0" cap="flat" cmpd="sng" algn="ctr">
+                      <a:noFill/>
+                    </a:lnT>
+                    <a:lnB w="6350" cap="flat" cmpd="sng" algn="ctr">
+                      <a:solidFill>
+                        <a:srgbClr val="DDE3EB"/>
+                      </a:solidFill>
+                      <a:prstDash val="solid"/>
+                      <a:round/>
+                      <a:headEnd type="none" w="med" len="med"/>
+                      <a:tailEnd type="none" w="med" len="med"/>
+                    </a:lnB>
+                  </a:tcPr>
+                </a:tc>
+                <a:tc>
+                  <a:txBody>
+                    <a:bodyPr/>
+                    <a:lstStyle/>
+                    <a:p>
+                      <a:pPr indent="0" marL="0">
+                        <a:buNone/>
+                      </a:pPr>
+                      <a:r>
+                        <a:rPr lang="en-US" sz="950" dirty="0">
+                          <a:solidFill>
+                            <a:srgbClr val="1C2733"/>
+                          </a:solidFill>
+                          <a:latin typeface="Malgun Gothic" pitchFamily="34" charset="0"/>
+                          <a:ea typeface="Malgun Gothic" pitchFamily="34" charset="-122"/>
+                          <a:cs typeface="Malgun Gothic" pitchFamily="34" charset="-120"/>
+                        </a:rPr>
+                        <a:t>✕   9차원 조합 수 폭증</a:t>
+                      </a:r>
+                      <a:endParaRPr lang="en-US" sz="950" dirty="0">
+                        <a:latin typeface="Malgun Gothic" charset="0"/>
+                        <a:ea typeface="Malgun Gothic" charset="0"/>
+                        <a:cs typeface="Malgun Gothic" charset="0"/>
+                      </a:endParaRPr>
+                    </a:p>
+                  </a:txBody>
+                  <a:tcPr marL="50800" marR="50800" marT="25400" marB="25400" anchor="ctr">
+                    <a:lnL w="0" cap="flat" cmpd="sng" algn="ctr">
+                      <a:noFill/>
+                    </a:lnL>
+                    <a:lnR w="0" cap="flat" cmpd="sng" algn="ctr">
+                      <a:noFill/>
+                    </a:lnR>
+                    <a:lnT w="0" cap="flat" cmpd="sng" algn="ctr">
+                      <a:noFill/>
+                    </a:lnT>
+                    <a:lnB w="6350" cap="flat" cmpd="sng" algn="ctr">
+                      <a:solidFill>
+                        <a:srgbClr val="DDE3EB"/>
+                      </a:solidFill>
+                      <a:prstDash val="solid"/>
+                      <a:round/>
+                      <a:headEnd type="none" w="med" len="med"/>
+                      <a:tailEnd type="none" w="med" len="med"/>
+                    </a:lnB>
+                  </a:tcPr>
+                </a:tc>
+              </a:tr>
+              <a:tr h="310896">
+                <a:tc>
+                  <a:txBody>
+                    <a:bodyPr/>
+                    <a:lstStyle/>
+                    <a:p>
+                      <a:pPr indent="0" marL="0">
+                        <a:buNone/>
+                      </a:pPr>
+                      <a:r>
+                        <a:rPr lang="en-US" sz="950" dirty="0">
+                          <a:solidFill>
+                            <a:srgbClr val="1C2733"/>
+                          </a:solidFill>
+                          <a:latin typeface="Malgun Gothic" pitchFamily="34" charset="0"/>
+                          <a:ea typeface="Malgun Gothic" pitchFamily="34" charset="-122"/>
+                          <a:cs typeface="Malgun Gothic" pitchFamily="34" charset="-120"/>
+                        </a:rPr>
+                        <a:t>무작위 샘플링</a:t>
+                      </a:r>
+                      <a:endParaRPr lang="en-US" sz="950" dirty="0">
+                        <a:latin typeface="Malgun Gothic" charset="0"/>
+                        <a:ea typeface="Malgun Gothic" charset="0"/>
+                        <a:cs typeface="Malgun Gothic" charset="0"/>
+                      </a:endParaRPr>
+                    </a:p>
+                  </a:txBody>
+                  <a:tcPr marL="50800" marR="50800" marT="25400" marB="25400" anchor="ctr">
+                    <a:lnL w="0" cap="flat" cmpd="sng" algn="ctr">
+                      <a:noFill/>
+                    </a:lnL>
+                    <a:lnR w="0" cap="flat" cmpd="sng" algn="ctr">
+                      <a:noFill/>
+                    </a:lnR>
+                    <a:lnT w="0" cap="flat" cmpd="sng" algn="ctr">
+                      <a:noFill/>
+                    </a:lnT>
+                    <a:lnB w="6350" cap="flat" cmpd="sng" algn="ctr">
+                      <a:solidFill>
+                        <a:srgbClr val="DDE3EB"/>
+                      </a:solidFill>
+                      <a:prstDash val="solid"/>
+                      <a:round/>
+                      <a:headEnd type="none" w="med" len="med"/>
+                      <a:tailEnd type="none" w="med" len="med"/>
+                    </a:lnB>
+                  </a:tcPr>
+                </a:tc>
+                <a:tc>
+                  <a:txBody>
+                    <a:bodyPr/>
+                    <a:lstStyle/>
+                    <a:p>
+                      <a:pPr indent="0" marL="0">
+                        <a:buNone/>
+                      </a:pPr>
+                      <a:r>
+                        <a:rPr lang="en-US" sz="950" dirty="0">
+                          <a:solidFill>
+                            <a:srgbClr val="1C2733"/>
+                          </a:solidFill>
+                          <a:latin typeface="Malgun Gothic" pitchFamily="34" charset="0"/>
+                          <a:ea typeface="Malgun Gothic" pitchFamily="34" charset="-122"/>
+                          <a:cs typeface="Malgun Gothic" pitchFamily="34" charset="-120"/>
+                        </a:rPr>
+                        <a:t>✕   설계공간 편중 발생</a:t>
+                      </a:r>
+                      <a:endParaRPr lang="en-US" sz="950" dirty="0">
+                        <a:latin typeface="Malgun Gothic" charset="0"/>
+                        <a:ea typeface="Malgun Gothic" charset="0"/>
+                        <a:cs typeface="Malgun Gothic" charset="0"/>
+                      </a:endParaRPr>
+                    </a:p>
+                  </a:txBody>
+                  <a:tcPr marL="50800" marR="50800" marT="25400" marB="25400" anchor="ctr">
+                    <a:lnL w="0" cap="flat" cmpd="sng" algn="ctr">
+                      <a:noFill/>
+                    </a:lnL>
+                    <a:lnR w="0" cap="flat" cmpd="sng" algn="ctr">
+                      <a:noFill/>
+                    </a:lnR>
+                    <a:lnT w="0" cap="flat" cmpd="sng" algn="ctr">
+                      <a:noFill/>
+                    </a:lnT>
+                    <a:lnB w="6350" cap="flat" cmpd="sng" algn="ctr">
+                      <a:solidFill>
+                        <a:srgbClr val="DDE3EB"/>
+                      </a:solidFill>
+                      <a:prstDash val="solid"/>
+                      <a:round/>
+                      <a:headEnd type="none" w="med" len="med"/>
+                      <a:tailEnd type="none" w="med" len="med"/>
+                    </a:lnB>
+                  </a:tcPr>
+                </a:tc>
+              </a:tr>
+              <a:tr h="310896">
+                <a:tc>
+                  <a:txBody>
+                    <a:bodyPr/>
+                    <a:lstStyle/>
+                    <a:p>
+                      <a:pPr indent="0" marL="0">
+                        <a:buNone/>
+                      </a:pPr>
+                      <a:r>
+                        <a:rPr lang="en-US" sz="950" b="1" dirty="0">
+                          <a:solidFill>
+                            <a:srgbClr val="16305B"/>
+                          </a:solidFill>
+                          <a:latin typeface="Malgun Gothic" pitchFamily="34" charset="0"/>
+                          <a:ea typeface="Malgun Gothic" pitchFamily="34" charset="-122"/>
+                          <a:cs typeface="Malgun Gothic" pitchFamily="34" charset="-120"/>
+                        </a:rPr>
+                        <a:t>최적라틴방격법 (OLHD)</a:t>
+                      </a:r>
+                      <a:endParaRPr lang="en-US" sz="950" dirty="0">
+                        <a:latin typeface="Malgun Gothic" charset="0"/>
+                        <a:ea typeface="Malgun Gothic" charset="0"/>
+                        <a:cs typeface="Malgun Gothic" charset="0"/>
+                      </a:endParaRPr>
+                    </a:p>
+                  </a:txBody>
+                  <a:tcPr marL="50800" marR="50800" marT="25400" marB="25400" anchor="ctr">
+                    <a:lnL w="0" cap="flat" cmpd="sng" algn="ctr">
+                      <a:noFill/>
+                    </a:lnL>
+                    <a:lnR w="0" cap="flat" cmpd="sng" algn="ctr">
+                      <a:noFill/>
+                    </a:lnR>
+                    <a:lnT w="0" cap="flat" cmpd="sng" algn="ctr">
+                      <a:noFill/>
+                    </a:lnT>
+                    <a:lnB w="6350" cap="flat" cmpd="sng" algn="ctr">
+                      <a:solidFill>
+                        <a:srgbClr val="DDE3EB"/>
+                      </a:solidFill>
+                      <a:prstDash val="solid"/>
+                      <a:round/>
+                      <a:headEnd type="none" w="med" len="med"/>
+                      <a:tailEnd type="none" w="med" len="med"/>
+                    </a:lnB>
+                  </a:tcPr>
+                </a:tc>
+                <a:tc>
+                  <a:txBody>
+                    <a:bodyPr/>
+                    <a:lstStyle/>
+                    <a:p>
+                      <a:pPr indent="0" marL="0">
+                        <a:buNone/>
+                      </a:pPr>
+                      <a:r>
+                        <a:rPr lang="en-US" sz="950" b="1" dirty="0">
+                          <a:solidFill>
+                            <a:srgbClr val="16305B"/>
+                          </a:solidFill>
+                          <a:latin typeface="Malgun Gothic" pitchFamily="34" charset="0"/>
+                          <a:ea typeface="Malgun Gothic" pitchFamily="34" charset="-122"/>
+                          <a:cs typeface="Malgun Gothic" pitchFamily="34" charset="-120"/>
+                        </a:rPr>
+                        <a:t>○   적은 점으로 균일 분포</a:t>
+                      </a:r>
+                      <a:endParaRPr lang="en-US" sz="950" dirty="0">
+                        <a:latin typeface="Malgun Gothic" charset="0"/>
+                        <a:ea typeface="Malgun Gothic" charset="0"/>
+                        <a:cs typeface="Malgun Gothic" charset="0"/>
+                      </a:endParaRPr>
+                    </a:p>
+                  </a:txBody>
+                  <a:tcPr marL="50800" marR="50800" marT="25400" marB="25400" anchor="ctr">
+                    <a:lnL w="0" cap="flat" cmpd="sng" algn="ctr">
+                      <a:noFill/>
+                    </a:lnL>
+                    <a:lnR w="0" cap="flat" cmpd="sng" algn="ctr">
+                      <a:noFill/>
+                    </a:lnR>
+                    <a:lnT w="0" cap="flat" cmpd="sng" algn="ctr">
+                      <a:noFill/>
+                    </a:lnT>
+                    <a:lnB w="6350" cap="flat" cmpd="sng" algn="ctr">
+                      <a:solidFill>
+                        <a:srgbClr val="DDE3EB"/>
+                      </a:solidFill>
+                      <a:prstDash val="solid"/>
+                      <a:round/>
+                      <a:headEnd type="none" w="med" len="med"/>
+                      <a:tailEnd type="none" w="med" len="med"/>
+                    </a:lnB>
+                  </a:tcPr>
+                </a:tc>
+              </a:tr>
+            </a:tbl>
+          </a:graphicData>
+        </a:graphic>
+      </p:graphicFrame>
+      <p:sp>
+        <p:nvSpPr>
+          <p:cNvPr id="10" name="Shape 7"/>
+          <p:cNvSpPr/>
+          <p:nvPr/>
+        </p:nvSpPr>
+        <p:spPr>
+          <a:xfrm>
+            <a:off x="813816" y="3182112"/>
+            <a:ext cx="4846320" cy="411480"/>
+          </a:xfrm>
+          <a:prstGeom prst="roundRect">
+            <a:avLst>
+              <a:gd name="adj" fmla="val 13333"/>
+            </a:avLst>
+          </a:prstGeom>
+          <a:solidFill>
+            <a:srgbClr val="16305B"/>
+          </a:solidFill>
+          <a:ln/>
+        </p:spPr>
+      </p:sp>
+      <p:sp>
+        <p:nvSpPr>
+          <p:cNvPr id="11" name="Text 8"/>
+          <p:cNvSpPr txBox="1"/>
+          <p:nvPr/>
+        </p:nvSpPr>
+        <p:spPr>
+          <a:xfrm>
+            <a:off x="813816" y="3182112"/>
+            <a:ext cx="4846320" cy="411480"/>
+          </a:xfrm>
+          <a:prstGeom prst="rect">
+            <a:avLst/>
+          </a:prstGeom>
+          <a:noFill/>
+          <a:ln/>
+        </p:spPr>
+        <p:txBody>
+          <a:bodyPr wrap="square" lIns="0" tIns="0" rIns="0" bIns="0" rtlCol="0" anchor="ctr"/>
+          <a:lstStyle/>
+          <a:p>
+            <a:pPr algn="ctr" indent="0" marL="0">
+              <a:buNone/>
+            </a:pPr>
+            <a:r>
+              <a:rPr lang="en-US" sz="1100" b="1" dirty="0">
+                <a:solidFill>
+                  <a:srgbClr val="FFFFFF"/>
+                </a:solidFill>
+                <a:latin typeface="Malgun Gothic" pitchFamily="34" charset="0"/>
+                <a:ea typeface="Malgun Gothic" pitchFamily="34" charset="-122"/>
+                <a:cs typeface="Malgun Gothic" pitchFamily="34" charset="-120"/>
+              </a:rPr>
+              <a:t>초기 실험점 = 10 × 변수 수 = 90 점</a:t>
+            </a:r>
+            <a:endParaRPr lang="en-US" sz="1100" dirty="0"/>
+          </a:p>
+        </p:txBody>
+      </p:sp>
+      <p:sp>
+        <p:nvSpPr>
+          <p:cNvPr id="12" name="Shape 9"/>
+          <p:cNvSpPr/>
+          <p:nvPr/>
+        </p:nvSpPr>
+        <p:spPr>
+          <a:xfrm>
+            <a:off x="6336792" y="1188720"/>
+            <a:ext cx="5440680" cy="2487168"/>
+          </a:xfrm>
+          <a:prstGeom prst="roundRect">
+            <a:avLst>
+              <a:gd name="adj" fmla="val 2206"/>
+            </a:avLst>
+          </a:prstGeom>
+          <a:solidFill>
+            <a:srgbClr val="FFFFFF"/>
+          </a:solidFill>
+          <a:ln w="9525">
+            <a:solidFill>
+              <a:srgbClr val="DDE3EB"/>
+            </a:solidFill>
+            <a:prstDash val="solid"/>
+          </a:ln>
+          <a:effectLst>
+            <a:outerShdw sx="100000" sy="100000" kx="0" ky="0" algn="bl" rotWithShape="0" blurRad="101600" dist="12700" dir="5400000">
+              <a:srgbClr val="9AA8BC">
+                <a:alpha val="18000"/>
+              </a:srgbClr>
+            </a:outerShdw>
+          </a:effectLst>
+        </p:spPr>
+      </p:sp>
+      <p:sp>
+        <p:nvSpPr>
+          <p:cNvPr id="13" name="Shape 10"/>
+          <p:cNvSpPr/>
+          <p:nvPr/>
+        </p:nvSpPr>
+        <p:spPr>
+          <a:xfrm>
+            <a:off x="6592824" y="1463040"/>
+            <a:ext cx="82296" cy="182880"/>
+          </a:xfrm>
+          <a:prstGeom prst="rect">
+            <a:avLst/>
+          </a:prstGeom>
+          <a:solidFill>
+            <a:srgbClr val="00A3C4"/>
+          </a:solidFill>
+          <a:ln w="12700">
+            <a:solidFill>
+              <a:srgbClr val="00A3C4"/>
+            </a:solidFill>
+            <a:prstDash val="solid"/>
+          </a:ln>
+        </p:spPr>
+      </p:sp>
+      <p:sp>
+        <p:nvSpPr>
+          <p:cNvPr id="14" name="Text 11"/>
+          <p:cNvSpPr txBox="1"/>
+          <p:nvPr/>
+        </p:nvSpPr>
+        <p:spPr>
+          <a:xfrm>
+            <a:off x="6757416" y="1371600"/>
+            <a:ext cx="4480560" cy="365760"/>
+          </a:xfrm>
+          <a:prstGeom prst="rect">
+            <a:avLst/>
+          </a:prstGeom>
+          <a:noFill/>
+          <a:ln/>
+        </p:spPr>
+        <p:txBody>
+          <a:bodyPr wrap="square" lIns="0" tIns="0" rIns="0" bIns="0" rtlCol="0" anchor="ctr"/>
+          <a:lstStyle/>
+          <a:p>
+            <a:pPr indent="0" marL="0">
+              <a:buNone/>
+            </a:pPr>
+            <a:r>
+              <a:rPr lang="en-US" sz="1300" b="1" dirty="0">
+                <a:solidFill>
+                  <a:srgbClr val="16305B"/>
+                </a:solidFill>
+                <a:latin typeface="Malgun Gothic" pitchFamily="34" charset="0"/>
+                <a:ea typeface="Malgun Gothic" pitchFamily="34" charset="-122"/>
+                <a:cs typeface="Malgun Gothic" pitchFamily="34" charset="-120"/>
+              </a:rPr>
+              <a:t>가공 제약 반영 방식</a:t>
+            </a:r>
+            <a:endParaRPr lang="en-US" sz="1300" dirty="0"/>
+          </a:p>
+        </p:txBody>
+      </p:sp>
+      <p:sp>
+        <p:nvSpPr>
+          <p:cNvPr id="15" name="Shape 12"/>
+          <p:cNvSpPr/>
+          <p:nvPr/>
+        </p:nvSpPr>
+        <p:spPr>
+          <a:xfrm>
+            <a:off x="6647688" y="1920240"/>
+            <a:ext cx="4846320" cy="713232"/>
+          </a:xfrm>
+          <a:prstGeom prst="roundRect">
+            <a:avLst>
+              <a:gd name="adj" fmla="val 7692"/>
+            </a:avLst>
+          </a:prstGeom>
+          <a:solidFill>
+            <a:srgbClr val="F7F9FC"/>
+          </a:solidFill>
+          <a:ln w="9525">
+            <a:solidFill>
+              <a:srgbClr val="DDE3EB"/>
+            </a:solidFill>
+            <a:prstDash val="solid"/>
+          </a:ln>
+        </p:spPr>
+      </p:sp>
+      <p:sp>
+        <p:nvSpPr>
+          <p:cNvPr id="16" name="Text 13"/>
+          <p:cNvSpPr txBox="1"/>
+          <p:nvPr/>
+        </p:nvSpPr>
+        <p:spPr>
+          <a:xfrm>
+            <a:off x="6793992" y="1993392"/>
+            <a:ext cx="4572000" cy="566928"/>
+          </a:xfrm>
+          <a:prstGeom prst="rect">
+            <a:avLst/>
+          </a:prstGeom>
+          <a:noFill/>
+          <a:ln/>
+        </p:spPr>
+        <p:txBody>
+          <a:bodyPr wrap="square" lIns="0" tIns="0" rIns="0" bIns="0" rtlCol="0" anchor="ctr"/>
+          <a:lstStyle/>
+          <a:p>
+            <a:pPr indent="0" marL="0">
+              <a:lnSpc>
+                <a:spcPct val="125000"/>
+              </a:lnSpc>
+              <a:buNone/>
+            </a:pPr>
+            <a:r>
+              <a:rPr lang="en-US" sz="950" b="1" dirty="0">
+                <a:solidFill>
+                  <a:srgbClr val="6B7A8F"/>
+                </a:solidFill>
+                <a:latin typeface="Malgun Gothic" pitchFamily="34" charset="0"/>
+                <a:ea typeface="Malgun Gothic" pitchFamily="34" charset="-122"/>
+                <a:cs typeface="Malgun Gothic" pitchFamily="34" charset="-120"/>
+              </a:rPr>
+              <a:t>기각 방식</a:t>
+            </a:r>
+            <a:endParaRPr lang="en-US" sz="950" dirty="0"/>
+          </a:p>
+          <a:p>
+            <a:pPr indent="0" marL="0">
+              <a:lnSpc>
+                <a:spcPct val="125000"/>
+              </a:lnSpc>
+              <a:buNone/>
+            </a:pPr>
+            <a:r>
+              <a:rPr lang="en-US" sz="950" dirty="0">
+                <a:solidFill>
+                  <a:srgbClr val="6B7A8F"/>
+                </a:solidFill>
+                <a:latin typeface="Malgun Gothic" pitchFamily="34" charset="0"/>
+                <a:ea typeface="Malgun Gothic" pitchFamily="34" charset="-122"/>
+                <a:cs typeface="Malgun Gothic" pitchFamily="34" charset="-120"/>
+              </a:rPr>
+              <a:t>뽑은 뒤 제약 위반이면 폐기 → 후보 30% 낭비 · 층화 붕괴</a:t>
+            </a:r>
+            <a:endParaRPr lang="en-US" sz="950" dirty="0"/>
+          </a:p>
+        </p:txBody>
+      </p:sp>
+      <p:sp>
+        <p:nvSpPr>
+          <p:cNvPr id="17" name="Shape 14"/>
+          <p:cNvSpPr/>
+          <p:nvPr/>
+        </p:nvSpPr>
+        <p:spPr>
+          <a:xfrm>
+            <a:off x="6647688" y="2743200"/>
+            <a:ext cx="4846320" cy="713232"/>
+          </a:xfrm>
+          <a:prstGeom prst="roundRect">
+            <a:avLst>
+              <a:gd name="adj" fmla="val 7692"/>
+            </a:avLst>
+          </a:prstGeom>
+          <a:solidFill>
+            <a:srgbClr val="E8F4F8"/>
+          </a:solidFill>
+          <a:ln w="9525">
+            <a:solidFill>
+              <a:srgbClr val="00A3C4"/>
+            </a:solidFill>
+            <a:prstDash val="solid"/>
+          </a:ln>
+        </p:spPr>
+      </p:sp>
+      <p:sp>
+        <p:nvSpPr>
+          <p:cNvPr id="18" name="Text 15"/>
+          <p:cNvSpPr txBox="1"/>
+          <p:nvPr/>
+        </p:nvSpPr>
+        <p:spPr>
+          <a:xfrm>
+            <a:off x="6793992" y="2816352"/>
+            <a:ext cx="4572000" cy="566928"/>
+          </a:xfrm>
+          <a:prstGeom prst="rect">
+            <a:avLst/>
+          </a:prstGeom>
+          <a:noFill/>
+          <a:ln/>
+        </p:spPr>
+        <p:txBody>
+          <a:bodyPr wrap="square" lIns="0" tIns="0" rIns="0" bIns="0" rtlCol="0" anchor="ctr"/>
+          <a:lstStyle/>
+          <a:p>
+            <a:pPr indent="0" marL="0">
+              <a:lnSpc>
+                <a:spcPct val="125000"/>
+              </a:lnSpc>
+              <a:buNone/>
+            </a:pPr>
+            <a:r>
+              <a:rPr lang="en-US" sz="950" b="1" dirty="0">
+                <a:solidFill>
+                  <a:srgbClr val="16305B"/>
+                </a:solidFill>
+                <a:latin typeface="Malgun Gothic" pitchFamily="34" charset="0"/>
+                <a:ea typeface="Malgun Gothic" pitchFamily="34" charset="-122"/>
+                <a:cs typeface="Malgun Gothic" pitchFamily="34" charset="-120"/>
+              </a:rPr>
+              <a:t>채택 방식</a:t>
+            </a:r>
+            <a:endParaRPr lang="en-US" sz="950" dirty="0"/>
+          </a:p>
+          <a:p>
+            <a:pPr indent="0" marL="0">
+              <a:lnSpc>
+                <a:spcPct val="125000"/>
+              </a:lnSpc>
+              <a:buNone/>
+            </a:pPr>
+            <a:r>
+              <a:rPr lang="en-US" sz="950" dirty="0">
+                <a:solidFill>
+                  <a:srgbClr val="1C2733"/>
+                </a:solidFill>
+                <a:latin typeface="Malgun Gothic" pitchFamily="34" charset="0"/>
+                <a:ea typeface="Malgun Gothic" pitchFamily="34" charset="-122"/>
+                <a:cs typeface="Malgun Gothic" pitchFamily="34" charset="-120"/>
+              </a:rPr>
+              <a:t>두께별 허용 개수 범위 안으로 접어 넣어 생성 → 낭비 0 · 층화 유지</a:t>
+            </a:r>
+            <a:endParaRPr lang="en-US" sz="950" dirty="0"/>
+          </a:p>
+        </p:txBody>
+      </p:sp>
+      <p:sp>
+        <p:nvSpPr>
+          <p:cNvPr id="19" name="Shape 16"/>
+          <p:cNvSpPr/>
+          <p:nvPr/>
+        </p:nvSpPr>
+        <p:spPr>
+          <a:xfrm>
+            <a:off x="502920" y="3822192"/>
+            <a:ext cx="5440680" cy="2487168"/>
+          </a:xfrm>
+          <a:prstGeom prst="roundRect">
+            <a:avLst>
+              <a:gd name="adj" fmla="val 2206"/>
+            </a:avLst>
+          </a:prstGeom>
+          <a:solidFill>
+            <a:srgbClr val="FFFFFF"/>
+          </a:solidFill>
+          <a:ln w="9525">
+            <a:solidFill>
+              <a:srgbClr val="DDE3EB"/>
+            </a:solidFill>
+            <a:prstDash val="solid"/>
+          </a:ln>
+          <a:effectLst>
+            <a:outerShdw sx="100000" sy="100000" kx="0" ky="0" algn="bl" rotWithShape="0" blurRad="101600" dist="12700" dir="5400000">
+              <a:srgbClr val="9AA8BC">
+                <a:alpha val="18000"/>
+              </a:srgbClr>
+            </a:outerShdw>
+          </a:effectLst>
+        </p:spPr>
+      </p:sp>
+      <p:sp>
+        <p:nvSpPr>
+          <p:cNvPr id="20" name="Shape 17"/>
+          <p:cNvSpPr/>
+          <p:nvPr/>
+        </p:nvSpPr>
+        <p:spPr>
+          <a:xfrm>
+            <a:off x="758952" y="4096512"/>
+            <a:ext cx="82296" cy="182880"/>
+          </a:xfrm>
+          <a:prstGeom prst="rect">
+            <a:avLst/>
+          </a:prstGeom>
+          <a:solidFill>
+            <a:srgbClr val="00A3C4"/>
+          </a:solidFill>
+          <a:ln w="12700">
+            <a:solidFill>
+              <a:srgbClr val="00A3C4"/>
+            </a:solidFill>
+            <a:prstDash val="solid"/>
+          </a:ln>
+        </p:spPr>
+      </p:sp>
+      <p:sp>
+        <p:nvSpPr>
+          <p:cNvPr id="21" name="Text 18"/>
+          <p:cNvSpPr txBox="1"/>
+          <p:nvPr/>
+        </p:nvSpPr>
+        <p:spPr>
+          <a:xfrm>
+            <a:off x="923544" y="4005072"/>
+            <a:ext cx="4480560" cy="365760"/>
+          </a:xfrm>
+          <a:prstGeom prst="rect">
+            <a:avLst/>
+          </a:prstGeom>
+          <a:noFill/>
+          <a:ln/>
+        </p:spPr>
+        <p:txBody>
+          <a:bodyPr wrap="square" lIns="0" tIns="0" rIns="0" bIns="0" rtlCol="0" anchor="ctr"/>
+          <a:lstStyle/>
+          <a:p>
+            <a:pPr indent="0" marL="0">
+              <a:buNone/>
+            </a:pPr>
+            <a:r>
+              <a:rPr lang="en-US" sz="1300" b="1" dirty="0">
+                <a:solidFill>
+                  <a:srgbClr val="16305B"/>
+                </a:solidFill>
+                <a:latin typeface="Malgun Gothic" pitchFamily="34" charset="0"/>
+                <a:ea typeface="Malgun Gothic" pitchFamily="34" charset="-122"/>
+                <a:cs typeface="Malgun Gothic" pitchFamily="34" charset="-120"/>
+              </a:rPr>
+              <a:t>자동 해석 루프</a:t>
+            </a:r>
+            <a:endParaRPr lang="en-US" sz="1300" dirty="0"/>
+          </a:p>
+        </p:txBody>
+      </p:sp>
+      <p:sp>
+        <p:nvSpPr>
+          <p:cNvPr id="22" name="Shape 19"/>
+          <p:cNvSpPr/>
+          <p:nvPr/>
+        </p:nvSpPr>
+        <p:spPr>
+          <a:xfrm>
+            <a:off x="832104" y="4517136"/>
+            <a:ext cx="274320" cy="274320"/>
+          </a:xfrm>
+          <a:prstGeom prst="ellipse">
+            <a:avLst/>
+          </a:prstGeom>
+          <a:solidFill>
+            <a:srgbClr val="16305B"/>
+          </a:solidFill>
+          <a:ln w="12700">
+            <a:solidFill>
+              <a:srgbClr val="16305B"/>
+            </a:solidFill>
+            <a:prstDash val="solid"/>
+          </a:ln>
+        </p:spPr>
+      </p:sp>
+      <p:sp>
+        <p:nvSpPr>
+          <p:cNvPr id="23" name="Text 20"/>
+          <p:cNvSpPr txBox="1"/>
+          <p:nvPr/>
+        </p:nvSpPr>
+        <p:spPr>
+          <a:xfrm>
+            <a:off x="832104" y="4517136"/>
+            <a:ext cx="274320" cy="274320"/>
+          </a:xfrm>
+          <a:prstGeom prst="rect">
+            <a:avLst/>
+          </a:prstGeom>
+          <a:noFill/>
+          <a:ln/>
+        </p:spPr>
+        <p:txBody>
+          <a:bodyPr wrap="square" lIns="0" tIns="0" rIns="0" bIns="0" rtlCol="0" anchor="ctr"/>
+          <a:lstStyle/>
+          <a:p>
+            <a:pPr algn="ctr" indent="0" marL="0">
+              <a:buNone/>
+            </a:pPr>
+            <a:r>
+              <a:rPr lang="en-US" sz="900" b="1" dirty="0">
+                <a:solidFill>
+                  <a:srgbClr val="FFFFFF"/>
+                </a:solidFill>
+                <a:latin typeface="Malgun Gothic" pitchFamily="34" charset="0"/>
+                <a:ea typeface="Malgun Gothic" pitchFamily="34" charset="-122"/>
+                <a:cs typeface="Malgun Gothic" pitchFamily="34" charset="-120"/>
+              </a:rPr>
+              <a:t>1</a:t>
+            </a:r>
+            <a:endParaRPr lang="en-US" sz="900" dirty="0"/>
+          </a:p>
+        </p:txBody>
+      </p:sp>
+      <p:sp>
+        <p:nvSpPr>
+          <p:cNvPr id="24" name="Text 21"/>
+          <p:cNvSpPr txBox="1"/>
+          <p:nvPr/>
+        </p:nvSpPr>
+        <p:spPr>
+          <a:xfrm>
+            <a:off x="1216152" y="4517136"/>
+            <a:ext cx="4389120" cy="274320"/>
+          </a:xfrm>
+          <a:prstGeom prst="rect">
+            <a:avLst/>
+          </a:prstGeom>
+          <a:noFill/>
+          <a:ln/>
+        </p:spPr>
+        <p:txBody>
+          <a:bodyPr wrap="square" lIns="0" tIns="0" rIns="0" bIns="0" rtlCol="0" anchor="ctr"/>
+          <a:lstStyle/>
+          <a:p>
+            <a:pPr indent="0" marL="0">
+              <a:buNone/>
+            </a:pPr>
+            <a:r>
+              <a:rPr lang="en-US" sz="1050" dirty="0">
+                <a:solidFill>
+                  <a:srgbClr val="1C2733"/>
+                </a:solidFill>
+                <a:latin typeface="Malgun Gothic" pitchFamily="34" charset="0"/>
+                <a:ea typeface="Malgun Gothic" pitchFamily="34" charset="-122"/>
+                <a:cs typeface="Malgun Gothic" pitchFamily="34" charset="-120"/>
+              </a:rPr>
+              <a:t>DOE 실험점 선정</a:t>
+            </a:r>
+            <a:endParaRPr lang="en-US" sz="1050" dirty="0"/>
+          </a:p>
+        </p:txBody>
+      </p:sp>
+      <p:sp>
+        <p:nvSpPr>
+          <p:cNvPr id="25" name="Shape 22"/>
+          <p:cNvSpPr/>
+          <p:nvPr/>
+        </p:nvSpPr>
+        <p:spPr>
+          <a:xfrm>
+            <a:off x="832104" y="4864608"/>
+            <a:ext cx="274320" cy="274320"/>
+          </a:xfrm>
+          <a:prstGeom prst="ellipse">
+            <a:avLst/>
+          </a:prstGeom>
+          <a:solidFill>
+            <a:srgbClr val="16305B"/>
+          </a:solidFill>
+          <a:ln w="12700">
+            <a:solidFill>
+              <a:srgbClr val="16305B"/>
+            </a:solidFill>
+            <a:prstDash val="solid"/>
+          </a:ln>
+        </p:spPr>
+      </p:sp>
+      <p:sp>
+        <p:nvSpPr>
+          <p:cNvPr id="26" name="Text 23"/>
+          <p:cNvSpPr txBox="1"/>
+          <p:nvPr/>
+        </p:nvSpPr>
+        <p:spPr>
+          <a:xfrm>
+            <a:off x="832104" y="4864608"/>
+            <a:ext cx="274320" cy="274320"/>
+          </a:xfrm>
+          <a:prstGeom prst="rect">
+            <a:avLst/>
+          </a:prstGeom>
+          <a:noFill/>
+          <a:ln/>
+        </p:spPr>
+        <p:txBody>
+          <a:bodyPr wrap="square" lIns="0" tIns="0" rIns="0" bIns="0" rtlCol="0" anchor="ctr"/>
+          <a:lstStyle/>
+          <a:p>
+            <a:pPr algn="ctr" indent="0" marL="0">
+              <a:buNone/>
+            </a:pPr>
+            <a:r>
+              <a:rPr lang="en-US" sz="900" b="1" dirty="0">
+                <a:solidFill>
+                  <a:srgbClr val="FFFFFF"/>
+                </a:solidFill>
+                <a:latin typeface="Malgun Gothic" pitchFamily="34" charset="0"/>
+                <a:ea typeface="Malgun Gothic" pitchFamily="34" charset="-122"/>
+                <a:cs typeface="Malgun Gothic" pitchFamily="34" charset="-120"/>
+              </a:rPr>
+              <a:t>2</a:t>
+            </a:r>
+            <a:endParaRPr lang="en-US" sz="900" dirty="0"/>
+          </a:p>
+        </p:txBody>
+      </p:sp>
+      <p:sp>
+        <p:nvSpPr>
+          <p:cNvPr id="27" name="Text 24"/>
+          <p:cNvSpPr txBox="1"/>
+          <p:nvPr/>
+        </p:nvSpPr>
+        <p:spPr>
+          <a:xfrm>
+            <a:off x="1216152" y="4864608"/>
+            <a:ext cx="4389120" cy="274320"/>
+          </a:xfrm>
+          <a:prstGeom prst="rect">
+            <a:avLst/>
+          </a:prstGeom>
+          <a:noFill/>
+          <a:ln/>
+        </p:spPr>
+        <p:txBody>
+          <a:bodyPr wrap="square" lIns="0" tIns="0" rIns="0" bIns="0" rtlCol="0" anchor="ctr"/>
+          <a:lstStyle/>
+          <a:p>
+            <a:pPr indent="0" marL="0">
+              <a:buNone/>
+            </a:pPr>
+            <a:r>
+              <a:rPr lang="en-US" sz="1050" dirty="0">
+                <a:solidFill>
+                  <a:srgbClr val="1C2733"/>
+                </a:solidFill>
+                <a:latin typeface="Malgun Gothic" pitchFamily="34" charset="0"/>
+                <a:ea typeface="Malgun Gothic" pitchFamily="34" charset="-122"/>
+                <a:cs typeface="Malgun Gothic" pitchFamily="34" charset="-120"/>
+              </a:rPr>
+              <a:t>CAD 리빌드 · STEP 저장</a:t>
+            </a:r>
+            <a:endParaRPr lang="en-US" sz="1050" dirty="0"/>
+          </a:p>
+        </p:txBody>
+      </p:sp>
+      <p:sp>
+        <p:nvSpPr>
+          <p:cNvPr id="28" name="Shape 25"/>
+          <p:cNvSpPr/>
+          <p:nvPr/>
+        </p:nvSpPr>
+        <p:spPr>
+          <a:xfrm>
+            <a:off x="832104" y="5212080"/>
+            <a:ext cx="274320" cy="274320"/>
+          </a:xfrm>
+          <a:prstGeom prst="ellipse">
+            <a:avLst/>
+          </a:prstGeom>
+          <a:solidFill>
+            <a:srgbClr val="16305B"/>
+          </a:solidFill>
+          <a:ln w="12700">
+            <a:solidFill>
+              <a:srgbClr val="16305B"/>
+            </a:solidFill>
+            <a:prstDash val="solid"/>
+          </a:ln>
+        </p:spPr>
+      </p:sp>
+      <p:sp>
+        <p:nvSpPr>
+          <p:cNvPr id="29" name="Text 26"/>
+          <p:cNvSpPr txBox="1"/>
+          <p:nvPr/>
+        </p:nvSpPr>
+        <p:spPr>
+          <a:xfrm>
+            <a:off x="832104" y="5212080"/>
+            <a:ext cx="274320" cy="274320"/>
+          </a:xfrm>
+          <a:prstGeom prst="rect">
+            <a:avLst/>
+          </a:prstGeom>
+          <a:noFill/>
+          <a:ln/>
+        </p:spPr>
+        <p:txBody>
+          <a:bodyPr wrap="square" lIns="0" tIns="0" rIns="0" bIns="0" rtlCol="0" anchor="ctr"/>
+          <a:lstStyle/>
+          <a:p>
+            <a:pPr algn="ctr" indent="0" marL="0">
+              <a:buNone/>
+            </a:pPr>
+            <a:r>
+              <a:rPr lang="en-US" sz="900" b="1" dirty="0">
+                <a:solidFill>
+                  <a:srgbClr val="FFFFFF"/>
+                </a:solidFill>
+                <a:latin typeface="Malgun Gothic" pitchFamily="34" charset="0"/>
+                <a:ea typeface="Malgun Gothic" pitchFamily="34" charset="-122"/>
+                <a:cs typeface="Malgun Gothic" pitchFamily="34" charset="-120"/>
+              </a:rPr>
+              <a:t>3</a:t>
+            </a:r>
+            <a:endParaRPr lang="en-US" sz="900" dirty="0"/>
+          </a:p>
+        </p:txBody>
+      </p:sp>
+      <p:sp>
+        <p:nvSpPr>
+          <p:cNvPr id="30" name="Text 27"/>
+          <p:cNvSpPr txBox="1"/>
+          <p:nvPr/>
+        </p:nvSpPr>
+        <p:spPr>
+          <a:xfrm>
+            <a:off x="1216152" y="5212080"/>
+            <a:ext cx="4389120" cy="274320"/>
+          </a:xfrm>
+          <a:prstGeom prst="rect">
+            <a:avLst/>
+          </a:prstGeom>
+          <a:noFill/>
+          <a:ln/>
+        </p:spPr>
+        <p:txBody>
+          <a:bodyPr wrap="square" lIns="0" tIns="0" rIns="0" bIns="0" rtlCol="0" anchor="ctr"/>
+          <a:lstStyle/>
+          <a:p>
+            <a:pPr indent="0" marL="0">
+              <a:buNone/>
+            </a:pPr>
+            <a:r>
+              <a:rPr lang="en-US" sz="1050" dirty="0">
+                <a:solidFill>
+                  <a:srgbClr val="1C2733"/>
+                </a:solidFill>
+                <a:latin typeface="Malgun Gothic" pitchFamily="34" charset="0"/>
+                <a:ea typeface="Malgun Gothic" pitchFamily="34" charset="-122"/>
+                <a:cs typeface="Malgun Gothic" pitchFamily="34" charset="-120"/>
+              </a:rPr>
+              <a:t>Icepak 해석 수행</a:t>
+            </a:r>
+            <a:endParaRPr lang="en-US" sz="1050" dirty="0"/>
+          </a:p>
+        </p:txBody>
+      </p:sp>
+      <p:sp>
+        <p:nvSpPr>
+          <p:cNvPr id="31" name="Shape 28"/>
+          <p:cNvSpPr/>
+          <p:nvPr/>
+        </p:nvSpPr>
+        <p:spPr>
+          <a:xfrm>
+            <a:off x="832104" y="5559552"/>
+            <a:ext cx="274320" cy="274320"/>
+          </a:xfrm>
+          <a:prstGeom prst="ellipse">
+            <a:avLst/>
+          </a:prstGeom>
+          <a:solidFill>
+            <a:srgbClr val="16305B"/>
+          </a:solidFill>
+          <a:ln w="12700">
+            <a:solidFill>
+              <a:srgbClr val="16305B"/>
+            </a:solidFill>
+            <a:prstDash val="solid"/>
+          </a:ln>
+        </p:spPr>
+      </p:sp>
+      <p:sp>
+        <p:nvSpPr>
+          <p:cNvPr id="32" name="Text 29"/>
+          <p:cNvSpPr txBox="1"/>
+          <p:nvPr/>
+        </p:nvSpPr>
+        <p:spPr>
+          <a:xfrm>
+            <a:off x="832104" y="5559552"/>
+            <a:ext cx="274320" cy="274320"/>
+          </a:xfrm>
+          <a:prstGeom prst="rect">
+            <a:avLst/>
+          </a:prstGeom>
+          <a:noFill/>
+          <a:ln/>
+        </p:spPr>
+        <p:txBody>
+          <a:bodyPr wrap="square" lIns="0" tIns="0" rIns="0" bIns="0" rtlCol="0" anchor="ctr"/>
+          <a:lstStyle/>
+          <a:p>
+            <a:pPr algn="ctr" indent="0" marL="0">
+              <a:buNone/>
+            </a:pPr>
+            <a:r>
+              <a:rPr lang="en-US" sz="900" b="1" dirty="0">
+                <a:solidFill>
+                  <a:srgbClr val="FFFFFF"/>
+                </a:solidFill>
+                <a:latin typeface="Malgun Gothic" pitchFamily="34" charset="0"/>
+                <a:ea typeface="Malgun Gothic" pitchFamily="34" charset="-122"/>
+                <a:cs typeface="Malgun Gothic" pitchFamily="34" charset="-120"/>
+              </a:rPr>
+              <a:t>4</a:t>
+            </a:r>
+            <a:endParaRPr lang="en-US" sz="900" dirty="0"/>
+          </a:p>
+        </p:txBody>
+      </p:sp>
+      <p:sp>
+        <p:nvSpPr>
+          <p:cNvPr id="33" name="Text 30"/>
+          <p:cNvSpPr txBox="1"/>
+          <p:nvPr/>
+        </p:nvSpPr>
+        <p:spPr>
+          <a:xfrm>
+            <a:off x="1216152" y="5559552"/>
+            <a:ext cx="4389120" cy="274320"/>
+          </a:xfrm>
+          <a:prstGeom prst="rect">
+            <a:avLst/>
+          </a:prstGeom>
+          <a:noFill/>
+          <a:ln/>
+        </p:spPr>
+        <p:txBody>
+          <a:bodyPr wrap="square" lIns="0" tIns="0" rIns="0" bIns="0" rtlCol="0" anchor="ctr"/>
+          <a:lstStyle/>
+          <a:p>
+            <a:pPr indent="0" marL="0">
+              <a:buNone/>
+            </a:pPr>
+            <a:r>
+              <a:rPr lang="en-US" sz="1050" dirty="0">
+                <a:solidFill>
+                  <a:srgbClr val="1C2733"/>
+                </a:solidFill>
+                <a:latin typeface="Malgun Gothic" pitchFamily="34" charset="0"/>
+                <a:ea typeface="Malgun Gothic" pitchFamily="34" charset="-122"/>
+                <a:cs typeface="Malgun Gothic" pitchFamily="34" charset="-120"/>
+              </a:rPr>
+              <a:t>결과 파싱 · 데이터 누적</a:t>
+            </a:r>
+            <a:endParaRPr lang="en-US" sz="1050" dirty="0"/>
+          </a:p>
+        </p:txBody>
+      </p:sp>
+      <p:sp>
+        <p:nvSpPr>
+          <p:cNvPr id="34" name="Text 31"/>
+          <p:cNvSpPr txBox="1"/>
+          <p:nvPr/>
+        </p:nvSpPr>
+        <p:spPr>
+          <a:xfrm>
+            <a:off x="832104" y="5907024"/>
+            <a:ext cx="4754880" cy="274320"/>
+          </a:xfrm>
+          <a:prstGeom prst="rect">
+            <a:avLst/>
+          </a:prstGeom>
+          <a:noFill/>
+          <a:ln/>
+        </p:spPr>
+        <p:txBody>
+          <a:bodyPr wrap="square" lIns="0" tIns="0" rIns="0" bIns="0" rtlCol="0" anchor="ctr"/>
+          <a:lstStyle/>
+          <a:p>
+            <a:pPr indent="0" marL="0">
+              <a:buNone/>
+            </a:pPr>
+            <a:r>
+              <a:rPr lang="en-US" sz="1000" b="1" dirty="0">
+                <a:solidFill>
+                  <a:srgbClr val="00A3C4"/>
+                </a:solidFill>
+                <a:latin typeface="Malgun Gothic" pitchFamily="34" charset="0"/>
+                <a:ea typeface="Malgun Gothic" pitchFamily="34" charset="-122"/>
+                <a:cs typeface="Malgun Gothic" pitchFamily="34" charset="-120"/>
+              </a:rPr>
+              <a:t>▶   종료 조건까지 자동 반복 — 1회차 약 17분</a:t>
+            </a:r>
+            <a:endParaRPr lang="en-US" sz="1000" dirty="0"/>
+          </a:p>
+        </p:txBody>
+      </p:sp>
+      <p:sp>
+        <p:nvSpPr>
+          <p:cNvPr id="35" name="Shape 32"/>
+          <p:cNvSpPr/>
+          <p:nvPr/>
+        </p:nvSpPr>
+        <p:spPr>
+          <a:xfrm>
+            <a:off x="6336792" y="3822192"/>
+            <a:ext cx="5440680" cy="2487168"/>
+          </a:xfrm>
+          <a:prstGeom prst="roundRect">
+            <a:avLst>
+              <a:gd name="adj" fmla="val 2206"/>
+            </a:avLst>
+          </a:prstGeom>
+          <a:solidFill>
+            <a:srgbClr val="FFFFFF"/>
+          </a:solidFill>
+          <a:ln w="9525">
+            <a:solidFill>
+              <a:srgbClr val="DDE3EB"/>
+            </a:solidFill>
+            <a:prstDash val="solid"/>
+          </a:ln>
+          <a:effectLst>
+            <a:outerShdw sx="100000" sy="100000" kx="0" ky="0" algn="bl" rotWithShape="0" blurRad="101600" dist="12700" dir="5400000">
+              <a:srgbClr val="9AA8BC">
+                <a:alpha val="18000"/>
+              </a:srgbClr>
+            </a:outerShdw>
+          </a:effectLst>
+        </p:spPr>
+      </p:sp>
+      <p:sp>
+        <p:nvSpPr>
+          <p:cNvPr id="36" name="Shape 33"/>
+          <p:cNvSpPr/>
+          <p:nvPr/>
+        </p:nvSpPr>
+        <p:spPr>
+          <a:xfrm>
+            <a:off x="6592824" y="4096512"/>
+            <a:ext cx="82296" cy="182880"/>
+          </a:xfrm>
+          <a:prstGeom prst="rect">
+            <a:avLst/>
+          </a:prstGeom>
+          <a:solidFill>
+            <a:srgbClr val="00A3C4"/>
+          </a:solidFill>
+          <a:ln w="12700">
+            <a:solidFill>
+              <a:srgbClr val="00A3C4"/>
+            </a:solidFill>
+            <a:prstDash val="solid"/>
+          </a:ln>
+        </p:spPr>
+      </p:sp>
+      <p:sp>
+        <p:nvSpPr>
+          <p:cNvPr id="37" name="Text 34"/>
+          <p:cNvSpPr txBox="1"/>
+          <p:nvPr/>
+        </p:nvSpPr>
+        <p:spPr>
+          <a:xfrm>
+            <a:off x="6757416" y="4005072"/>
+            <a:ext cx="4480560" cy="365760"/>
+          </a:xfrm>
+          <a:prstGeom prst="rect">
+            <a:avLst/>
+          </a:prstGeom>
+          <a:noFill/>
+          <a:ln/>
+        </p:spPr>
+        <p:txBody>
+          <a:bodyPr wrap="square" lIns="0" tIns="0" rIns="0" bIns="0" rtlCol="0" anchor="ctr"/>
+          <a:lstStyle/>
+          <a:p>
+            <a:pPr indent="0" marL="0">
+              <a:buNone/>
+            </a:pPr>
+            <a:r>
+              <a:rPr lang="en-US" sz="1300" b="1" dirty="0">
+                <a:solidFill>
+                  <a:srgbClr val="16305B"/>
+                </a:solidFill>
+                <a:latin typeface="Malgun Gothic" pitchFamily="34" charset="0"/>
+                <a:ea typeface="Malgun Gothic" pitchFamily="34" charset="-122"/>
+                <a:cs typeface="Malgun Gothic" pitchFamily="34" charset="-120"/>
+              </a:rPr>
+              <a:t>예외 처리 및 무인 운전</a:t>
+            </a:r>
+            <a:endParaRPr lang="en-US" sz="1300" dirty="0"/>
+          </a:p>
+        </p:txBody>
+      </p:sp>
+      <p:graphicFrame>
+        <p:nvGraphicFramePr>
+          <p:cNvPr id="21" name="Table 1"/>
+          <p:cNvGraphicFramePr>
+            <a:graphicFrameLocks noGrp="1"/>
+          </p:cNvGraphicFramePr>
+          <p:nvPr>
+            <p:extLst>
+              <p:ext uri="{D42A27DB-BD31-4B8C-83A1-F6EECF244321}">
+                <p14:modId xmlns:p14="http://schemas.microsoft.com/office/powerpoint/2010/main" val="1579011935"/>
+              </p:ext>
+            </p:extLst>
+          </p:nvPr>
+        </p:nvGraphicFramePr>
+        <p:xfrm>
+          <a:off x="6647688" y="4535424"/>
+          <a:ext cx="4846320" cy="914400"/>
+        </p:xfrm>
+        <a:graphic>
+          <a:graphicData uri="http://schemas.openxmlformats.org/drawingml/2006/table">
+            <a:tbl>
+              <a:tblPr/>
+              <a:tblGrid>
+                <a:gridCol w="1417320"/>
+                <a:gridCol w="3429000"/>
+              </a:tblGrid>
+              <a:tr h="329184">
+                <a:tc>
+                  <a:txBody>
+                    <a:bodyPr/>
+                    <a:lstStyle/>
+                    <a:p>
+                      <a:pPr indent="0" marL="0">
+                        <a:buNone/>
+                      </a:pPr>
+                      <a:r>
+                        <a:rPr lang="en-US" sz="950" b="1" dirty="0">
+                          <a:solidFill>
+                            <a:srgbClr val="16305B"/>
+                          </a:solidFill>
+                          <a:latin typeface="Malgun Gothic" pitchFamily="34" charset="0"/>
+                          <a:ea typeface="Malgun Gothic" pitchFamily="34" charset="-122"/>
+                          <a:cs typeface="Malgun Gothic" pitchFamily="34" charset="-120"/>
+                        </a:rPr>
+                        <a:t>상황</a:t>
+                      </a:r>
+                      <a:endParaRPr lang="en-US" sz="950" dirty="0">
+                        <a:latin typeface="Malgun Gothic" charset="0"/>
+                        <a:ea typeface="Malgun Gothic" charset="0"/>
+                        <a:cs typeface="Malgun Gothic" charset="0"/>
+                      </a:endParaRPr>
+                    </a:p>
+                  </a:txBody>
+                  <a:tcPr marL="50800" marR="50800" marT="25400" marB="25400" anchor="ctr">
+                    <a:lnL w="0" cap="flat" cmpd="sng" algn="ctr">
+                      <a:noFill/>
+                    </a:lnL>
+                    <a:lnR w="0" cap="flat" cmpd="sng" algn="ctr">
+                      <a:noFill/>
+                    </a:lnR>
+                    <a:lnT w="0" cap="flat" cmpd="sng" algn="ctr">
+                      <a:noFill/>
+                    </a:lnT>
+                    <a:lnB w="6350" cap="flat" cmpd="sng" algn="ctr">
+                      <a:solidFill>
+                        <a:srgbClr val="DDE3EB"/>
+                      </a:solidFill>
+                      <a:prstDash val="solid"/>
+                      <a:round/>
+                      <a:headEnd type="none" w="med" len="med"/>
+                      <a:tailEnd type="none" w="med" len="med"/>
+                    </a:lnB>
+                    <a:solidFill>
+                      <a:srgbClr val="EEF2F7"/>
+                    </a:solidFill>
+                  </a:tcPr>
+                </a:tc>
+                <a:tc>
+                  <a:txBody>
+                    <a:bodyPr/>
+                    <a:lstStyle/>
+                    <a:p>
+                      <a:pPr indent="0" marL="0">
+                        <a:buNone/>
+                      </a:pPr>
+                      <a:r>
+                        <a:rPr lang="en-US" sz="950" b="1" dirty="0">
+                          <a:solidFill>
+                            <a:srgbClr val="16305B"/>
+                          </a:solidFill>
+                          <a:latin typeface="Malgun Gothic" pitchFamily="34" charset="0"/>
+                          <a:ea typeface="Malgun Gothic" pitchFamily="34" charset="-122"/>
+                          <a:cs typeface="Malgun Gothic" pitchFamily="34" charset="-120"/>
+                        </a:rPr>
+                        <a:t>처리</a:t>
+                      </a:r>
+                      <a:endParaRPr lang="en-US" sz="950" dirty="0">
+                        <a:latin typeface="Malgun Gothic" charset="0"/>
+                        <a:ea typeface="Malgun Gothic" charset="0"/>
+                        <a:cs typeface="Malgun Gothic" charset="0"/>
+                      </a:endParaRPr>
+                    </a:p>
+                  </a:txBody>
+                  <a:tcPr marL="50800" marR="50800" marT="25400" marB="25400" anchor="ctr">
+                    <a:lnL w="0" cap="flat" cmpd="sng" algn="ctr">
+                      <a:noFill/>
+                    </a:lnL>
+                    <a:lnR w="0" cap="flat" cmpd="sng" algn="ctr">
+                      <a:noFill/>
+                    </a:lnR>
+                    <a:lnT w="0" cap="flat" cmpd="sng" algn="ctr">
+                      <a:noFill/>
+                    </a:lnT>
+                    <a:lnB w="6350" cap="flat" cmpd="sng" algn="ctr">
+                      <a:solidFill>
+                        <a:srgbClr val="DDE3EB"/>
+                      </a:solidFill>
+                      <a:prstDash val="solid"/>
+                      <a:round/>
+                      <a:headEnd type="none" w="med" len="med"/>
+                      <a:tailEnd type="none" w="med" len="med"/>
+                    </a:lnB>
+                    <a:solidFill>
+                      <a:srgbClr val="EEF2F7"/>
+                    </a:solidFill>
+                  </a:tcPr>
+                </a:tc>
+              </a:tr>
+              <a:tr h="329184">
+                <a:tc>
+                  <a:txBody>
+                    <a:bodyPr/>
+                    <a:lstStyle/>
+                    <a:p>
+                      <a:pPr indent="0" marL="0">
+                        <a:buNone/>
+                      </a:pPr>
+                      <a:r>
+                        <a:rPr lang="en-US" sz="950" dirty="0">
+                          <a:solidFill>
+                            <a:srgbClr val="1C2733"/>
+                          </a:solidFill>
+                          <a:latin typeface="Malgun Gothic" pitchFamily="34" charset="0"/>
+                          <a:ea typeface="Malgun Gothic" pitchFamily="34" charset="-122"/>
+                          <a:cs typeface="Malgun Gothic" pitchFamily="34" charset="-120"/>
+                        </a:rPr>
+                        <a:t>형상 미성립</a:t>
+                      </a:r>
+                      <a:endParaRPr lang="en-US" sz="950" dirty="0">
+                        <a:latin typeface="Malgun Gothic" charset="0"/>
+                        <a:ea typeface="Malgun Gothic" charset="0"/>
+                        <a:cs typeface="Malgun Gothic" charset="0"/>
+                      </a:endParaRPr>
+                    </a:p>
+                  </a:txBody>
+                  <a:tcPr marL="50800" marR="50800" marT="25400" marB="25400" anchor="ctr">
+                    <a:lnL w="0" cap="flat" cmpd="sng" algn="ctr">
+                      <a:noFill/>
+                    </a:lnL>
+                    <a:lnR w="0" cap="flat" cmpd="sng" algn="ctr">
+                      <a:noFill/>
+                    </a:lnR>
+                    <a:lnT w="0" cap="flat" cmpd="sng" algn="ctr">
+                      <a:noFill/>
+                    </a:lnT>
+                    <a:lnB w="6350" cap="flat" cmpd="sng" algn="ctr">
+                      <a:solidFill>
+                        <a:srgbClr val="DDE3EB"/>
+                      </a:solidFill>
+                      <a:prstDash val="solid"/>
+                      <a:round/>
+                      <a:headEnd type="none" w="med" len="med"/>
+                      <a:tailEnd type="none" w="med" len="med"/>
+                    </a:lnB>
+                  </a:tcPr>
+                </a:tc>
+                <a:tc>
+                  <a:txBody>
+                    <a:bodyPr/>
+                    <a:lstStyle/>
+                    <a:p>
+                      <a:pPr indent="0" marL="0">
+                        <a:buNone/>
+                      </a:pPr>
+                      <a:r>
+                        <a:rPr lang="en-US" sz="950" dirty="0">
+                          <a:solidFill>
+                            <a:srgbClr val="1C2733"/>
+                          </a:solidFill>
+                          <a:latin typeface="Malgun Gothic" pitchFamily="34" charset="0"/>
+                          <a:ea typeface="Malgun Gothic" pitchFamily="34" charset="-122"/>
+                          <a:cs typeface="Malgun Gothic" pitchFamily="34" charset="-120"/>
+                        </a:rPr>
+                        <a:t>이력 기록 후 다음 점 진행, 해당 영역 회피</a:t>
+                      </a:r>
+                      <a:endParaRPr lang="en-US" sz="950" dirty="0">
+                        <a:latin typeface="Malgun Gothic" charset="0"/>
+                        <a:ea typeface="Malgun Gothic" charset="0"/>
+                        <a:cs typeface="Malgun Gothic" charset="0"/>
+                      </a:endParaRPr>
+                    </a:p>
+                  </a:txBody>
+                  <a:tcPr marL="50800" marR="50800" marT="25400" marB="25400" anchor="ctr">
+                    <a:lnL w="0" cap="flat" cmpd="sng" algn="ctr">
+                      <a:noFill/>
+                    </a:lnL>
+                    <a:lnR w="0" cap="flat" cmpd="sng" algn="ctr">
+                      <a:noFill/>
+                    </a:lnR>
+                    <a:lnT w="0" cap="flat" cmpd="sng" algn="ctr">
+                      <a:noFill/>
+                    </a:lnT>
+                    <a:lnB w="6350" cap="flat" cmpd="sng" algn="ctr">
+                      <a:solidFill>
+                        <a:srgbClr val="DDE3EB"/>
+                      </a:solidFill>
+                      <a:prstDash val="solid"/>
+                      <a:round/>
+                      <a:headEnd type="none" w="med" len="med"/>
+                      <a:tailEnd type="none" w="med" len="med"/>
+                    </a:lnB>
+                  </a:tcPr>
+                </a:tc>
+              </a:tr>
+              <a:tr h="329184">
+                <a:tc>
+                  <a:txBody>
+                    <a:bodyPr/>
+                    <a:lstStyle/>
+                    <a:p>
+                      <a:pPr indent="0" marL="0">
+                        <a:buNone/>
+                      </a:pPr>
+                      <a:r>
+                        <a:rPr lang="en-US" sz="950" dirty="0">
+                          <a:solidFill>
+                            <a:srgbClr val="1C2733"/>
+                          </a:solidFill>
+                          <a:latin typeface="Malgun Gothic" pitchFamily="34" charset="0"/>
+                          <a:ea typeface="Malgun Gothic" pitchFamily="34" charset="-122"/>
+                          <a:cs typeface="Malgun Gothic" pitchFamily="34" charset="-120"/>
+                        </a:rPr>
+                        <a:t>솔버 비정상 종료</a:t>
+                      </a:r>
+                      <a:endParaRPr lang="en-US" sz="950" dirty="0">
+                        <a:latin typeface="Malgun Gothic" charset="0"/>
+                        <a:ea typeface="Malgun Gothic" charset="0"/>
+                        <a:cs typeface="Malgun Gothic" charset="0"/>
+                      </a:endParaRPr>
+                    </a:p>
+                  </a:txBody>
+                  <a:tcPr marL="50800" marR="50800" marT="25400" marB="25400" anchor="ctr">
+                    <a:lnL w="0" cap="flat" cmpd="sng" algn="ctr">
+                      <a:noFill/>
+                    </a:lnL>
+                    <a:lnR w="0" cap="flat" cmpd="sng" algn="ctr">
+                      <a:noFill/>
+                    </a:lnR>
+                    <a:lnT w="0" cap="flat" cmpd="sng" algn="ctr">
+                      <a:noFill/>
+                    </a:lnT>
+                    <a:lnB w="6350" cap="flat" cmpd="sng" algn="ctr">
+                      <a:solidFill>
+                        <a:srgbClr val="DDE3EB"/>
+                      </a:solidFill>
+                      <a:prstDash val="solid"/>
+                      <a:round/>
+                      <a:headEnd type="none" w="med" len="med"/>
+                      <a:tailEnd type="none" w="med" len="med"/>
+                    </a:lnB>
+                  </a:tcPr>
+                </a:tc>
+                <a:tc>
+                  <a:txBody>
+                    <a:bodyPr/>
+                    <a:lstStyle/>
+                    <a:p>
+                      <a:pPr indent="0" marL="0">
+                        <a:buNone/>
+                      </a:pPr>
+                      <a:r>
+                        <a:rPr lang="en-US" sz="950" dirty="0">
+                          <a:solidFill>
+                            <a:srgbClr val="1C2733"/>
+                          </a:solidFill>
+                          <a:latin typeface="Malgun Gothic" pitchFamily="34" charset="0"/>
+                          <a:ea typeface="Malgun Gothic" pitchFamily="34" charset="-122"/>
+                          <a:cs typeface="Malgun Gothic" pitchFamily="34" charset="-120"/>
+                        </a:rPr>
+                        <a:t>자동 재연결 후 동일 실험점 재시도</a:t>
+                      </a:r>
+                      <a:endParaRPr lang="en-US" sz="950" dirty="0">
+                        <a:latin typeface="Malgun Gothic" charset="0"/>
+                        <a:ea typeface="Malgun Gothic" charset="0"/>
+                        <a:cs typeface="Malgun Gothic" charset="0"/>
+                      </a:endParaRPr>
+                    </a:p>
+                  </a:txBody>
+                  <a:tcPr marL="50800" marR="50800" marT="25400" marB="25400" anchor="ctr">
+                    <a:lnL w="0" cap="flat" cmpd="sng" algn="ctr">
+                      <a:noFill/>
+                    </a:lnL>
+                    <a:lnR w="0" cap="flat" cmpd="sng" algn="ctr">
+                      <a:noFill/>
+                    </a:lnR>
+                    <a:lnT w="0" cap="flat" cmpd="sng" algn="ctr">
+                      <a:noFill/>
+                    </a:lnT>
+                    <a:lnB w="6350" cap="flat" cmpd="sng" algn="ctr">
+                      <a:solidFill>
+                        <a:srgbClr val="DDE3EB"/>
+                      </a:solidFill>
+                      <a:prstDash val="solid"/>
+                      <a:round/>
+                      <a:headEnd type="none" w="med" len="med"/>
+                      <a:tailEnd type="none" w="med" len="med"/>
+                    </a:lnB>
+                  </a:tcPr>
+                </a:tc>
+              </a:tr>
+              <a:tr h="329184">
+                <a:tc>
+                  <a:txBody>
+                    <a:bodyPr/>
+                    <a:lstStyle/>
+                    <a:p>
+                      <a:pPr indent="0" marL="0">
+                        <a:buNone/>
+                      </a:pPr>
+                      <a:r>
+                        <a:rPr lang="en-US" sz="950" dirty="0">
+                          <a:solidFill>
+                            <a:srgbClr val="1C2733"/>
+                          </a:solidFill>
+                          <a:latin typeface="Malgun Gothic" pitchFamily="34" charset="0"/>
+                          <a:ea typeface="Malgun Gothic" pitchFamily="34" charset="-122"/>
+                          <a:cs typeface="Malgun Gothic" pitchFamily="34" charset="-120"/>
+                        </a:rPr>
+                        <a:t>연속 실패</a:t>
+                      </a:r>
+                      <a:endParaRPr lang="en-US" sz="950" dirty="0">
+                        <a:latin typeface="Malgun Gothic" charset="0"/>
+                        <a:ea typeface="Malgun Gothic" charset="0"/>
+                        <a:cs typeface="Malgun Gothic" charset="0"/>
+                      </a:endParaRPr>
+                    </a:p>
+                  </a:txBody>
+                  <a:tcPr marL="50800" marR="50800" marT="25400" marB="25400" anchor="ctr">
+                    <a:lnL w="0" cap="flat" cmpd="sng" algn="ctr">
+                      <a:noFill/>
+                    </a:lnL>
+                    <a:lnR w="0" cap="flat" cmpd="sng" algn="ctr">
+                      <a:noFill/>
+                    </a:lnR>
+                    <a:lnT w="0" cap="flat" cmpd="sng" algn="ctr">
+                      <a:noFill/>
+                    </a:lnT>
+                    <a:lnB w="6350" cap="flat" cmpd="sng" algn="ctr">
+                      <a:solidFill>
+                        <a:srgbClr val="DDE3EB"/>
+                      </a:solidFill>
+                      <a:prstDash val="solid"/>
+                      <a:round/>
+                      <a:headEnd type="none" w="med" len="med"/>
+                      <a:tailEnd type="none" w="med" len="med"/>
+                    </a:lnB>
+                  </a:tcPr>
+                </a:tc>
+                <a:tc>
+                  <a:txBody>
+                    <a:bodyPr/>
+                    <a:lstStyle/>
+                    <a:p>
+                      <a:pPr indent="0" marL="0">
+                        <a:buNone/>
+                      </a:pPr>
+                      <a:r>
+                        <a:rPr lang="en-US" sz="950" dirty="0">
+                          <a:solidFill>
+                            <a:srgbClr val="1C2733"/>
+                          </a:solidFill>
+                          <a:latin typeface="Malgun Gothic" pitchFamily="34" charset="0"/>
+                          <a:ea typeface="Malgun Gothic" pitchFamily="34" charset="-122"/>
+                          <a:cs typeface="Malgun Gothic" pitchFamily="34" charset="-120"/>
+                        </a:rPr>
+                        <a:t>설정 오류로 판단하고 캠페인 중단</a:t>
+                      </a:r>
+                      <a:endParaRPr lang="en-US" sz="950" dirty="0">
+                        <a:latin typeface="Malgun Gothic" charset="0"/>
+                        <a:ea typeface="Malgun Gothic" charset="0"/>
+                        <a:cs typeface="Malgun Gothic" charset="0"/>
+                      </a:endParaRPr>
+                    </a:p>
+                  </a:txBody>
+                  <a:tcPr marL="50800" marR="50800" marT="25400" marB="25400" anchor="ctr">
+                    <a:lnL w="0" cap="flat" cmpd="sng" algn="ctr">
+                      <a:noFill/>
+                    </a:lnL>
+                    <a:lnR w="0" cap="flat" cmpd="sng" algn="ctr">
+                      <a:noFill/>
+                    </a:lnR>
+                    <a:lnT w="0" cap="flat" cmpd="sng" algn="ctr">
+                      <a:noFill/>
+                    </a:lnT>
+                    <a:lnB w="6350" cap="flat" cmpd="sng" algn="ctr">
+                      <a:solidFill>
+                        <a:srgbClr val="DDE3EB"/>
+                      </a:solidFill>
+                      <a:prstDash val="solid"/>
+                      <a:round/>
+                      <a:headEnd type="none" w="med" len="med"/>
+                      <a:tailEnd type="none" w="med" len="med"/>
+                    </a:lnB>
+                  </a:tcPr>
+                </a:tc>
+              </a:tr>
+            </a:tbl>
+          </a:graphicData>
+        </a:graphic>
+      </p:graphicFrame>
+      <p:sp>
+        <p:nvSpPr>
+          <p:cNvPr id="39" name="Text 35"/>
+          <p:cNvSpPr txBox="1"/>
+          <p:nvPr/>
+        </p:nvSpPr>
+        <p:spPr>
+          <a:xfrm>
+            <a:off x="6647688" y="5815584"/>
+            <a:ext cx="4846320" cy="274320"/>
+          </a:xfrm>
+          <a:prstGeom prst="rect">
+            <a:avLst/>
+          </a:prstGeom>
+          <a:noFill/>
+          <a:ln/>
+        </p:spPr>
+        <p:txBody>
+          <a:bodyPr wrap="square" lIns="0" tIns="0" rIns="0" bIns="0" rtlCol="0" anchor="ctr"/>
+          <a:lstStyle/>
+          <a:p>
+            <a:pPr indent="0" marL="0">
+              <a:buNone/>
+            </a:pPr>
+            <a:r>
+              <a:rPr lang="en-US" sz="950" i="1" dirty="0">
+                <a:solidFill>
+                  <a:srgbClr val="6B7A8F"/>
+                </a:solidFill>
+                <a:latin typeface="Malgun Gothic" pitchFamily="34" charset="0"/>
+                <a:ea typeface="Malgun Gothic" pitchFamily="34" charset="-122"/>
+                <a:cs typeface="Malgun Gothic" pitchFamily="34" charset="-120"/>
+              </a:rPr>
+              <a:t>CAD · 해석 프로그램 GUI 비활성화로 장기 연속 구동 확보</a:t>
+            </a:r>
+            <a:endParaRPr lang="en-US" sz="950" dirty="0"/>
+          </a:p>
+        </p:txBody>
+      </p:sp>
+    </p:spTree>
+  </p:cSld>
+  <p:clrMapOvr>
+    <a:masterClrMapping/>
+  </p:clrMapOvr>
+</p:sld>
+</file>
+
+<file path=ppt/slides/slide11.xml><?xml version="1.0" encoding="utf-8"?>
+<p:sld xmlns:a="http://schemas.openxmlformats.org/drawingml/2006/main" xmlns:r="http://schemas.openxmlformats.org/officeDocument/2006/relationships" xmlns:p="http://schemas.openxmlformats.org/presentationml/2006/main">
+  <p:cSld name="Slide 11">
+    <p:bg>
+      <p:bgPr>
+        <a:solidFill>
+          <a:srgbClr val="F3F5F8"/>
+        </a:solidFill>
+      </p:bgPr>
+    </p:bg>
+    <p:spTree>
+      <p:nvGrpSpPr>
+        <p:cNvPr id="1" name=""/>
+        <p:cNvGrpSpPr/>
+        <p:nvPr/>
+      </p:nvGrpSpPr>
+      <p:grpSpPr>
+        <a:xfrm>
+          <a:off x="0" y="0"/>
+          <a:ext cx="0" cy="0"/>
+          <a:chOff x="0" y="0"/>
+          <a:chExt cx="0" cy="0"/>
+        </a:xfrm>
+      </p:grpSpPr>
+      <p:sp>
+        <p:nvSpPr>
+          <p:cNvPr id="2" name="Shape 0"/>
+          <p:cNvSpPr/>
+          <p:nvPr/>
+        </p:nvSpPr>
+        <p:spPr>
+          <a:xfrm>
+            <a:off x="502920" y="384048"/>
+            <a:ext cx="475488" cy="475488"/>
+          </a:xfrm>
+          <a:prstGeom prst="rect">
+            <a:avLst/>
+          </a:prstGeom>
+          <a:solidFill>
+            <a:srgbClr val="16305B"/>
+          </a:solidFill>
+          <a:ln w="12700">
+            <a:solidFill>
+              <a:srgbClr val="16305B"/>
+            </a:solidFill>
+            <a:prstDash val="solid"/>
+          </a:ln>
+        </p:spPr>
+      </p:sp>
+      <p:sp>
+        <p:nvSpPr>
+          <p:cNvPr id="3" name="Text 1"/>
+          <p:cNvSpPr txBox="1"/>
+          <p:nvPr/>
+        </p:nvSpPr>
+        <p:spPr>
+          <a:xfrm>
+            <a:off x="502920" y="384048"/>
+            <a:ext cx="475488" cy="475488"/>
+          </a:xfrm>
+          <a:prstGeom prst="rect">
+            <a:avLst/>
+          </a:prstGeom>
+          <a:noFill/>
+          <a:ln/>
+        </p:spPr>
+        <p:txBody>
+          <a:bodyPr wrap="square" lIns="0" tIns="0" rIns="0" bIns="0" rtlCol="0" anchor="ctr"/>
+          <a:lstStyle/>
+          <a:p>
+            <a:pPr algn="ctr" indent="0" marL="0">
+              <a:buNone/>
+            </a:pPr>
+            <a:r>
+              <a:rPr lang="en-US" sz="1600" b="1" dirty="0">
+                <a:solidFill>
+                  <a:srgbClr val="FFFFFF"/>
+                </a:solidFill>
+                <a:latin typeface="Malgun Gothic" pitchFamily="34" charset="0"/>
+                <a:ea typeface="Malgun Gothic" pitchFamily="34" charset="-122"/>
+                <a:cs typeface="Malgun Gothic" pitchFamily="34" charset="-120"/>
+              </a:rPr>
+              <a:t>03</a:t>
+            </a:r>
+            <a:endParaRPr lang="en-US" sz="1600" dirty="0"/>
+          </a:p>
+        </p:txBody>
+      </p:sp>
+      <p:sp>
+        <p:nvSpPr>
+          <p:cNvPr id="4" name="Text 2"/>
+          <p:cNvSpPr txBox="1"/>
+          <p:nvPr/>
+        </p:nvSpPr>
+        <p:spPr>
+          <a:xfrm>
+            <a:off x="1124712" y="365760"/>
+            <a:ext cx="7315200" cy="237744"/>
+          </a:xfrm>
+          <a:prstGeom prst="rect">
+            <a:avLst/>
+          </a:prstGeom>
+          <a:noFill/>
+          <a:ln/>
+        </p:spPr>
+        <p:txBody>
+          <a:bodyPr wrap="square" lIns="0" tIns="0" rIns="0" bIns="0" rtlCol="0" anchor="ctr"/>
+          <a:lstStyle/>
+          <a:p>
+            <a:pPr indent="0" marL="0">
+              <a:buNone/>
+            </a:pPr>
+            <a:r>
+              <a:rPr lang="en-US" sz="1050" b="1" spc="100" kern="0" dirty="0">
+                <a:solidFill>
+                  <a:srgbClr val="00A3C4"/>
+                </a:solidFill>
+                <a:latin typeface="Malgun Gothic" pitchFamily="34" charset="0"/>
+                <a:ea typeface="Malgun Gothic" pitchFamily="34" charset="-122"/>
+                <a:cs typeface="Malgun Gothic" pitchFamily="34" charset="-120"/>
+              </a:rPr>
+              <a:t>실험계획법 기반 자동해석 수행 및 데이터 확보</a:t>
+            </a:r>
+            <a:endParaRPr lang="en-US" sz="1050" dirty="0"/>
+          </a:p>
+        </p:txBody>
+      </p:sp>
+      <p:sp>
+        <p:nvSpPr>
+          <p:cNvPr id="5" name="Text 3"/>
+          <p:cNvSpPr txBox="1"/>
+          <p:nvPr/>
+        </p:nvSpPr>
+        <p:spPr>
+          <a:xfrm>
+            <a:off x="1124712" y="548640"/>
+            <a:ext cx="10607040" cy="384048"/>
+          </a:xfrm>
+          <a:prstGeom prst="rect">
+            <a:avLst/>
+          </a:prstGeom>
+          <a:noFill/>
+          <a:ln/>
+        </p:spPr>
+        <p:txBody>
+          <a:bodyPr wrap="square" lIns="0" tIns="0" rIns="0" bIns="0" rtlCol="0" anchor="ctr"/>
+          <a:lstStyle/>
+          <a:p>
+            <a:pPr indent="0" marL="0">
+              <a:buNone/>
+            </a:pPr>
+            <a:r>
+              <a:rPr lang="en-US" sz="2200" b="1" dirty="0">
+                <a:solidFill>
+                  <a:srgbClr val="16305B"/>
+                </a:solidFill>
+                <a:latin typeface="Malgun Gothic" pitchFamily="34" charset="0"/>
+                <a:ea typeface="Malgun Gothic" pitchFamily="34" charset="-122"/>
+                <a:cs typeface="Malgun Gothic" pitchFamily="34" charset="-120"/>
+              </a:rPr>
               <a:t>DOE 데이터 확보 현황 및 차월 계획</a:t>
             </a:r>
             <a:endParaRPr lang="en-US" sz="2200" dirty="0"/>
@@ -2796,7 +5020,7 @@
       </p:sp>
       <p:graphicFrame>
         <p:nvGraphicFramePr>
-          <p:cNvPr id="11" name="Table 0"/>
+          <p:cNvPr id="12" name="Table 0"/>
           <p:cNvGraphicFramePr>
             <a:graphicFrameLocks noGrp="1"/>
           </p:cNvGraphicFramePr>
@@ -4257,7 +6481,7 @@
                 <a:ea typeface="Malgun Gothic" pitchFamily="34" charset="-122"/>
                 <a:cs typeface="Malgun Gothic" pitchFamily="34" charset="-120"/>
               </a:rPr>
-              <a:t>1.  형상 자동 빌드 및 중량 산출</a:t>
+              <a:t>1.  형상 자동 빌드 및 중량 산출 (SolidWorks)</a:t>
             </a:r>
             <a:endParaRPr lang="en-US" sz="1100" dirty="0"/>
           </a:p>
@@ -4277,7 +6501,7 @@
                 <a:ea typeface="Malgun Gothic" pitchFamily="34" charset="-122"/>
                 <a:cs typeface="Malgun Gothic" pitchFamily="34" charset="-120"/>
               </a:rPr>
-              <a:t>2.  DOE 기법 및 무인 자동 해석 루프</a:t>
+              <a:t>2.  해석 모델 자동 구성 및 결과 추출 (Icepak)</a:t>
             </a:r>
             <a:endParaRPr lang="en-US" sz="1100" dirty="0"/>
           </a:p>
@@ -4297,7 +6521,27 @@
                 <a:ea typeface="Malgun Gothic" pitchFamily="34" charset="-122"/>
                 <a:cs typeface="Malgun Gothic" pitchFamily="34" charset="-120"/>
               </a:rPr>
-              <a:t>3.  DOE 데이터 확보 현황</a:t>
+              <a:t>3.  DOE 기법 및 무인 자동 해석 루프</a:t>
+            </a:r>
+            <a:endParaRPr lang="en-US" sz="1100" dirty="0"/>
+          </a:p>
+          <a:p>
+            <a:pPr indent="0" marL="0">
+              <a:lnSpc>
+                <a:spcPct val="145000"/>
+              </a:lnSpc>
+              <a:buNone/>
+            </a:pPr>
+            <a:r>
+              <a:rPr lang="en-US" sz="1100" dirty="0">
+                <a:solidFill>
+                  <a:srgbClr val="1C2733"/>
+                </a:solidFill>
+                <a:latin typeface="Malgun Gothic" pitchFamily="34" charset="0"/>
+                <a:ea typeface="Malgun Gothic" pitchFamily="34" charset="-122"/>
+                <a:cs typeface="Malgun Gothic" pitchFamily="34" charset="-120"/>
+              </a:rPr>
+              <a:t>4.  DOE 데이터 확보 현황</a:t>
             </a:r>
             <a:endParaRPr lang="en-US" sz="1100" dirty="0"/>
           </a:p>
@@ -13855,7 +16099,7 @@
                 <a:ea typeface="Malgun Gothic" pitchFamily="34" charset="-122"/>
                 <a:cs typeface="Malgun Gothic" pitchFamily="34" charset="-120"/>
               </a:rPr>
-              <a:t>형상 자동 빌드 및 중량 산출</a:t>
+              <a:t>형상 자동 빌드 및 중량 산출 — SolidWorks</a:t>
             </a:r>
             <a:endParaRPr lang="en-US" sz="2200" dirty="0"/>
           </a:p>
@@ -13870,11 +16114,11 @@
         <p:spPr>
           <a:xfrm>
             <a:off x="502920" y="1188720"/>
-            <a:ext cx="5440680" cy="5120640"/>
+            <a:ext cx="5440680" cy="4160520"/>
           </a:xfrm>
           <a:prstGeom prst="roundRect">
             <a:avLst>
-              <a:gd name="adj" fmla="val 1071"/>
+              <a:gd name="adj" fmla="val 1319"/>
             </a:avLst>
           </a:prstGeom>
           <a:solidFill>
@@ -13967,12 +16211,12 @@
         </p:nvSpPr>
         <p:spPr>
           <a:xfrm>
-            <a:off x="813816" y="1938528"/>
-            <a:ext cx="1463040" cy="457200"/>
+            <a:off x="813816" y="1920240"/>
+            <a:ext cx="1463040" cy="420624"/>
           </a:xfrm>
           <a:prstGeom prst="roundRect">
             <a:avLst>
-              <a:gd name="adj" fmla="val 14000"/>
+              <a:gd name="adj" fmla="val 15217"/>
             </a:avLst>
           </a:prstGeom>
           <a:solidFill>
@@ -13994,8 +16238,8 @@
         </p:nvSpPr>
         <p:spPr>
           <a:xfrm>
-            <a:off x="813816" y="1938528"/>
-            <a:ext cx="1463040" cy="457200"/>
+            <a:off x="813816" y="1920240"/>
+            <a:ext cx="1463040" cy="420624"/>
           </a:xfrm>
           <a:prstGeom prst="rect">
             <a:avLst/>
@@ -14033,8 +16277,8 @@
         </p:nvSpPr>
         <p:spPr>
           <a:xfrm>
-            <a:off x="2276856" y="1938528"/>
-            <a:ext cx="201168" cy="457200"/>
+            <a:off x="2276856" y="1920240"/>
+            <a:ext cx="201168" cy="420624"/>
           </a:xfrm>
           <a:prstGeom prst="rect">
             <a:avLst/>
@@ -14072,12 +16316,12 @@
         </p:nvSpPr>
         <p:spPr>
           <a:xfrm>
-            <a:off x="2478024" y="1938528"/>
-            <a:ext cx="1463040" cy="457200"/>
+            <a:off x="2478024" y="1920240"/>
+            <a:ext cx="1463040" cy="420624"/>
           </a:xfrm>
           <a:prstGeom prst="roundRect">
             <a:avLst>
-              <a:gd name="adj" fmla="val 14000"/>
+              <a:gd name="adj" fmla="val 15217"/>
             </a:avLst>
           </a:prstGeom>
           <a:solidFill>
@@ -14099,8 +16343,8 @@
         </p:nvSpPr>
         <p:spPr>
           <a:xfrm>
-            <a:off x="2478024" y="1938528"/>
-            <a:ext cx="1463040" cy="457200"/>
+            <a:off x="2478024" y="1920240"/>
+            <a:ext cx="1463040" cy="420624"/>
           </a:xfrm>
           <a:prstGeom prst="rect">
             <a:avLst/>
@@ -14138,8 +16382,8 @@
         </p:nvSpPr>
         <p:spPr>
           <a:xfrm>
-            <a:off x="3941064" y="1938528"/>
-            <a:ext cx="201168" cy="457200"/>
+            <a:off x="3941064" y="1920240"/>
+            <a:ext cx="201168" cy="420624"/>
           </a:xfrm>
           <a:prstGeom prst="rect">
             <a:avLst/>
@@ -14177,12 +16421,12 @@
         </p:nvSpPr>
         <p:spPr>
           <a:xfrm>
-            <a:off x="4142232" y="1938528"/>
-            <a:ext cx="1463040" cy="457200"/>
+            <a:off x="4142232" y="1920240"/>
+            <a:ext cx="1463040" cy="420624"/>
           </a:xfrm>
           <a:prstGeom prst="roundRect">
             <a:avLst>
-              <a:gd name="adj" fmla="val 14000"/>
+              <a:gd name="adj" fmla="val 15217"/>
             </a:avLst>
           </a:prstGeom>
           <a:solidFill>
@@ -14204,8 +16448,8 @@
         </p:nvSpPr>
         <p:spPr>
           <a:xfrm>
-            <a:off x="4142232" y="1938528"/>
-            <a:ext cx="1463040" cy="457200"/>
+            <a:off x="4142232" y="1920240"/>
+            <a:ext cx="1463040" cy="420624"/>
           </a:xfrm>
           <a:prstGeom prst="rect">
             <a:avLst/>
@@ -14250,7 +16494,7 @@
           </p:nvPr>
         </p:nvGraphicFramePr>
         <p:xfrm>
-          <a:off x="813816" y="2606040"/>
+          <a:off x="813816" y="2542032"/>
           <a:ext cx="4846320" cy="914400"/>
         </p:xfrm>
         <a:graphic>
@@ -14258,3127 +16502,8 @@
             <a:tbl>
               <a:tblPr/>
               <a:tblGrid>
-                <a:gridCol w="1188720"/>
-                <a:gridCol w="3657600"/>
-              </a:tblGrid>
-              <a:tr h="411480">
-                <a:tc>
-                  <a:txBody>
-                    <a:bodyPr/>
-                    <a:lstStyle/>
-                    <a:p>
-                      <a:pPr indent="0" marL="0">
-                        <a:buNone/>
-                      </a:pPr>
-                      <a:r>
-                        <a:rPr lang="en-US" sz="950" b="1" dirty="0">
-                          <a:solidFill>
-                            <a:srgbClr val="16305B"/>
-                          </a:solidFill>
-                          <a:latin typeface="Malgun Gothic" pitchFamily="34" charset="0"/>
-                          <a:ea typeface="Malgun Gothic" pitchFamily="34" charset="-122"/>
-                          <a:cs typeface="Malgun Gothic" pitchFamily="34" charset="-120"/>
-                        </a:rPr>
-                        <a:t>항목</a:t>
-                      </a:r>
-                      <a:endParaRPr lang="en-US" sz="950" dirty="0">
-                        <a:latin typeface="Malgun Gothic" charset="0"/>
-                        <a:ea typeface="Malgun Gothic" charset="0"/>
-                        <a:cs typeface="Malgun Gothic" charset="0"/>
-                      </a:endParaRPr>
-                    </a:p>
-                  </a:txBody>
-                  <a:tcPr marL="50800" marR="50800" marT="25400" marB="25400" anchor="ctr">
-                    <a:lnL w="0" cap="flat" cmpd="sng" algn="ctr">
-                      <a:noFill/>
-                    </a:lnL>
-                    <a:lnR w="0" cap="flat" cmpd="sng" algn="ctr">
-                      <a:noFill/>
-                    </a:lnR>
-                    <a:lnT w="0" cap="flat" cmpd="sng" algn="ctr">
-                      <a:noFill/>
-                    </a:lnT>
-                    <a:lnB w="6350" cap="flat" cmpd="sng" algn="ctr">
-                      <a:solidFill>
-                        <a:srgbClr val="DDE3EB"/>
-                      </a:solidFill>
-                      <a:prstDash val="solid"/>
-                      <a:round/>
-                      <a:headEnd type="none" w="med" len="med"/>
-                      <a:tailEnd type="none" w="med" len="med"/>
-                    </a:lnB>
-                    <a:solidFill>
-                      <a:srgbClr val="EEF2F7"/>
-                    </a:solidFill>
-                  </a:tcPr>
-                </a:tc>
-                <a:tc>
-                  <a:txBody>
-                    <a:bodyPr/>
-                    <a:lstStyle/>
-                    <a:p>
-                      <a:pPr indent="0" marL="0">
-                        <a:buNone/>
-                      </a:pPr>
-                      <a:r>
-                        <a:rPr lang="en-US" sz="950" b="1" dirty="0">
-                          <a:solidFill>
-                            <a:srgbClr val="16305B"/>
-                          </a:solidFill>
-                          <a:latin typeface="Malgun Gothic" pitchFamily="34" charset="0"/>
-                          <a:ea typeface="Malgun Gothic" pitchFamily="34" charset="-122"/>
-                          <a:cs typeface="Malgun Gothic" pitchFamily="34" charset="-120"/>
-                        </a:rPr>
-                        <a:t>처리 방식</a:t>
-                      </a:r>
-                      <a:endParaRPr lang="en-US" sz="950" dirty="0">
-                        <a:latin typeface="Malgun Gothic" charset="0"/>
-                        <a:ea typeface="Malgun Gothic" charset="0"/>
-                        <a:cs typeface="Malgun Gothic" charset="0"/>
-                      </a:endParaRPr>
-                    </a:p>
-                  </a:txBody>
-                  <a:tcPr marL="50800" marR="50800" marT="25400" marB="25400" anchor="ctr">
-                    <a:lnL w="0" cap="flat" cmpd="sng" algn="ctr">
-                      <a:noFill/>
-                    </a:lnL>
-                    <a:lnR w="0" cap="flat" cmpd="sng" algn="ctr">
-                      <a:noFill/>
-                    </a:lnR>
-                    <a:lnT w="0" cap="flat" cmpd="sng" algn="ctr">
-                      <a:noFill/>
-                    </a:lnT>
-                    <a:lnB w="6350" cap="flat" cmpd="sng" algn="ctr">
-                      <a:solidFill>
-                        <a:srgbClr val="DDE3EB"/>
-                      </a:solidFill>
-                      <a:prstDash val="solid"/>
-                      <a:round/>
-                      <a:headEnd type="none" w="med" len="med"/>
-                      <a:tailEnd type="none" w="med" len="med"/>
-                    </a:lnB>
-                    <a:solidFill>
-                      <a:srgbClr val="EEF2F7"/>
-                    </a:solidFill>
-                  </a:tcPr>
-                </a:tc>
-              </a:tr>
-              <a:tr h="411480">
-                <a:tc>
-                  <a:txBody>
-                    <a:bodyPr/>
-                    <a:lstStyle/>
-                    <a:p>
-                      <a:pPr indent="0" marL="0">
-                        <a:buNone/>
-                      </a:pPr>
-                      <a:r>
-                        <a:rPr lang="en-US" sz="950" dirty="0">
-                          <a:solidFill>
-                            <a:srgbClr val="1C2733"/>
-                          </a:solidFill>
-                          <a:latin typeface="Malgun Gothic" pitchFamily="34" charset="0"/>
-                          <a:ea typeface="Malgun Gothic" pitchFamily="34" charset="-122"/>
-                          <a:cs typeface="Malgun Gothic" pitchFamily="34" charset="-120"/>
-                        </a:rPr>
-                        <a:t>변수 기입</a:t>
-                      </a:r>
-                      <a:endParaRPr lang="en-US" sz="950" dirty="0">
-                        <a:latin typeface="Malgun Gothic" charset="0"/>
-                        <a:ea typeface="Malgun Gothic" charset="0"/>
-                        <a:cs typeface="Malgun Gothic" charset="0"/>
-                      </a:endParaRPr>
-                    </a:p>
-                  </a:txBody>
-                  <a:tcPr marL="50800" marR="50800" marT="25400" marB="25400" anchor="ctr">
-                    <a:lnL w="0" cap="flat" cmpd="sng" algn="ctr">
-                      <a:noFill/>
-                    </a:lnL>
-                    <a:lnR w="0" cap="flat" cmpd="sng" algn="ctr">
-                      <a:noFill/>
-                    </a:lnR>
-                    <a:lnT w="0" cap="flat" cmpd="sng" algn="ctr">
-                      <a:noFill/>
-                    </a:lnT>
-                    <a:lnB w="6350" cap="flat" cmpd="sng" algn="ctr">
-                      <a:solidFill>
-                        <a:srgbClr val="DDE3EB"/>
-                      </a:solidFill>
-                      <a:prstDash val="solid"/>
-                      <a:round/>
-                      <a:headEnd type="none" w="med" len="med"/>
-                      <a:tailEnd type="none" w="med" len="med"/>
-                    </a:lnB>
-                  </a:tcPr>
-                </a:tc>
-                <a:tc>
-                  <a:txBody>
-                    <a:bodyPr/>
-                    <a:lstStyle/>
-                    <a:p>
-                      <a:pPr indent="0" marL="0">
-                        <a:buNone/>
-                      </a:pPr>
-                      <a:r>
-                        <a:rPr lang="en-US" sz="950" dirty="0">
-                          <a:solidFill>
-                            <a:srgbClr val="1C2733"/>
-                          </a:solidFill>
-                          <a:latin typeface="Malgun Gothic" pitchFamily="34" charset="0"/>
-                          <a:ea typeface="Malgun Gothic" pitchFamily="34" charset="-122"/>
-                          <a:cs typeface="Malgun Gothic" pitchFamily="34" charset="-120"/>
-                        </a:rPr>
-                        <a:t>수식 목록에서 변수명 → 인덱스 매핑 후 치환</a:t>
-                      </a:r>
-                      <a:endParaRPr lang="en-US" sz="950" dirty="0">
-                        <a:latin typeface="Malgun Gothic" charset="0"/>
-                        <a:ea typeface="Malgun Gothic" charset="0"/>
-                        <a:cs typeface="Malgun Gothic" charset="0"/>
-                      </a:endParaRPr>
-                    </a:p>
-                  </a:txBody>
-                  <a:tcPr marL="50800" marR="50800" marT="25400" marB="25400" anchor="ctr">
-                    <a:lnL w="0" cap="flat" cmpd="sng" algn="ctr">
-                      <a:noFill/>
-                    </a:lnL>
-                    <a:lnR w="0" cap="flat" cmpd="sng" algn="ctr">
-                      <a:noFill/>
-                    </a:lnR>
-                    <a:lnT w="0" cap="flat" cmpd="sng" algn="ctr">
-                      <a:noFill/>
-                    </a:lnT>
-                    <a:lnB w="6350" cap="flat" cmpd="sng" algn="ctr">
-                      <a:solidFill>
-                        <a:srgbClr val="DDE3EB"/>
-                      </a:solidFill>
-                      <a:prstDash val="solid"/>
-                      <a:round/>
-                      <a:headEnd type="none" w="med" len="med"/>
-                      <a:tailEnd type="none" w="med" len="med"/>
-                    </a:lnB>
-                  </a:tcPr>
-                </a:tc>
-              </a:tr>
-              <a:tr h="411480">
-                <a:tc>
-                  <a:txBody>
-                    <a:bodyPr/>
-                    <a:lstStyle/>
-                    <a:p>
-                      <a:pPr indent="0" marL="0">
-                        <a:buNone/>
-                      </a:pPr>
-                      <a:r>
-                        <a:rPr lang="en-US" sz="950" dirty="0">
-                          <a:solidFill>
-                            <a:srgbClr val="1C2733"/>
-                          </a:solidFill>
-                          <a:latin typeface="Malgun Gothic" pitchFamily="34" charset="0"/>
-                          <a:ea typeface="Malgun Gothic" pitchFamily="34" charset="-122"/>
-                          <a:cs typeface="Malgun Gothic" pitchFamily="34" charset="-120"/>
-                        </a:rPr>
-                        <a:t>변수명 검증</a:t>
-                      </a:r>
-                      <a:endParaRPr lang="en-US" sz="950" dirty="0">
-                        <a:latin typeface="Malgun Gothic" charset="0"/>
-                        <a:ea typeface="Malgun Gothic" charset="0"/>
-                        <a:cs typeface="Malgun Gothic" charset="0"/>
-                      </a:endParaRPr>
-                    </a:p>
-                  </a:txBody>
-                  <a:tcPr marL="50800" marR="50800" marT="25400" marB="25400" anchor="ctr">
-                    <a:lnL w="0" cap="flat" cmpd="sng" algn="ctr">
-                      <a:noFill/>
-                    </a:lnL>
-                    <a:lnR w="0" cap="flat" cmpd="sng" algn="ctr">
-                      <a:noFill/>
-                    </a:lnR>
-                    <a:lnT w="0" cap="flat" cmpd="sng" algn="ctr">
-                      <a:noFill/>
-                    </a:lnT>
-                    <a:lnB w="6350" cap="flat" cmpd="sng" algn="ctr">
-                      <a:solidFill>
-                        <a:srgbClr val="DDE3EB"/>
-                      </a:solidFill>
-                      <a:prstDash val="solid"/>
-                      <a:round/>
-                      <a:headEnd type="none" w="med" len="med"/>
-                      <a:tailEnd type="none" w="med" len="med"/>
-                    </a:lnB>
-                  </a:tcPr>
-                </a:tc>
-                <a:tc>
-                  <a:txBody>
-                    <a:bodyPr/>
-                    <a:lstStyle/>
-                    <a:p>
-                      <a:pPr indent="0" marL="0">
-                        <a:buNone/>
-                      </a:pPr>
-                      <a:r>
-                        <a:rPr lang="en-US" sz="950" dirty="0">
-                          <a:solidFill>
-                            <a:srgbClr val="1C2733"/>
-                          </a:solidFill>
-                          <a:latin typeface="Malgun Gothic" pitchFamily="34" charset="0"/>
-                          <a:ea typeface="Malgun Gothic" pitchFamily="34" charset="-122"/>
-                          <a:cs typeface="Malgun Gothic" pitchFamily="34" charset="-120"/>
-                        </a:rPr>
-                        <a:t>없는 변수명이면 즉시 중단 + 실제 변수 목록 출력</a:t>
-                      </a:r>
-                      <a:endParaRPr lang="en-US" sz="950" dirty="0">
-                        <a:latin typeface="Malgun Gothic" charset="0"/>
-                        <a:ea typeface="Malgun Gothic" charset="0"/>
-                        <a:cs typeface="Malgun Gothic" charset="0"/>
-                      </a:endParaRPr>
-                    </a:p>
-                  </a:txBody>
-                  <a:tcPr marL="50800" marR="50800" marT="25400" marB="25400" anchor="ctr">
-                    <a:lnL w="0" cap="flat" cmpd="sng" algn="ctr">
-                      <a:noFill/>
-                    </a:lnL>
-                    <a:lnR w="0" cap="flat" cmpd="sng" algn="ctr">
-                      <a:noFill/>
-                    </a:lnR>
-                    <a:lnT w="0" cap="flat" cmpd="sng" algn="ctr">
-                      <a:noFill/>
-                    </a:lnT>
-                    <a:lnB w="6350" cap="flat" cmpd="sng" algn="ctr">
-                      <a:solidFill>
-                        <a:srgbClr val="DDE3EB"/>
-                      </a:solidFill>
-                      <a:prstDash val="solid"/>
-                      <a:round/>
-                      <a:headEnd type="none" w="med" len="med"/>
-                      <a:tailEnd type="none" w="med" len="med"/>
-                    </a:lnB>
-                  </a:tcPr>
-                </a:tc>
-              </a:tr>
-              <a:tr h="411480">
-                <a:tc>
-                  <a:txBody>
-                    <a:bodyPr/>
-                    <a:lstStyle/>
-                    <a:p>
-                      <a:pPr indent="0" marL="0">
-                        <a:buNone/>
-                      </a:pPr>
-                      <a:r>
-                        <a:rPr lang="en-US" sz="950" dirty="0">
-                          <a:solidFill>
-                            <a:srgbClr val="1C2733"/>
-                          </a:solidFill>
-                          <a:latin typeface="Malgun Gothic" pitchFamily="34" charset="0"/>
-                          <a:ea typeface="Malgun Gothic" pitchFamily="34" charset="-122"/>
-                          <a:cs typeface="Malgun Gothic" pitchFamily="34" charset="-120"/>
-                        </a:rPr>
-                        <a:t>정수 변수</a:t>
-                      </a:r>
-                      <a:endParaRPr lang="en-US" sz="950" dirty="0">
-                        <a:latin typeface="Malgun Gothic" charset="0"/>
-                        <a:ea typeface="Malgun Gothic" charset="0"/>
-                        <a:cs typeface="Malgun Gothic" charset="0"/>
-                      </a:endParaRPr>
-                    </a:p>
-                  </a:txBody>
-                  <a:tcPr marL="50800" marR="50800" marT="25400" marB="25400" anchor="ctr">
-                    <a:lnL w="0" cap="flat" cmpd="sng" algn="ctr">
-                      <a:noFill/>
-                    </a:lnL>
-                    <a:lnR w="0" cap="flat" cmpd="sng" algn="ctr">
-                      <a:noFill/>
-                    </a:lnR>
-                    <a:lnT w="0" cap="flat" cmpd="sng" algn="ctr">
-                      <a:noFill/>
-                    </a:lnT>
-                    <a:lnB w="6350" cap="flat" cmpd="sng" algn="ctr">
-                      <a:solidFill>
-                        <a:srgbClr val="DDE3EB"/>
-                      </a:solidFill>
-                      <a:prstDash val="solid"/>
-                      <a:round/>
-                      <a:headEnd type="none" w="med" len="med"/>
-                      <a:tailEnd type="none" w="med" len="med"/>
-                    </a:lnB>
-                  </a:tcPr>
-                </a:tc>
-                <a:tc>
-                  <a:txBody>
-                    <a:bodyPr/>
-                    <a:lstStyle/>
-                    <a:p>
-                      <a:pPr indent="0" marL="0">
-                        <a:buNone/>
-                      </a:pPr>
-                      <a:r>
-                        <a:rPr lang="en-US" sz="950" dirty="0">
-                          <a:solidFill>
-                            <a:srgbClr val="1C2733"/>
-                          </a:solidFill>
-                          <a:latin typeface="Malgun Gothic" pitchFamily="34" charset="0"/>
-                          <a:ea typeface="Malgun Gothic" pitchFamily="34" charset="-122"/>
-                          <a:cs typeface="Malgun Gothic" pitchFamily="34" charset="-120"/>
-                        </a:rPr>
-                        <a:t>핀 개수는 정수 문자열로 기입 (패턴 개수 해석)</a:t>
-                      </a:r>
-                      <a:endParaRPr lang="en-US" sz="950" dirty="0">
-                        <a:latin typeface="Malgun Gothic" charset="0"/>
-                        <a:ea typeface="Malgun Gothic" charset="0"/>
-                        <a:cs typeface="Malgun Gothic" charset="0"/>
-                      </a:endParaRPr>
-                    </a:p>
-                  </a:txBody>
-                  <a:tcPr marL="50800" marR="50800" marT="25400" marB="25400" anchor="ctr">
-                    <a:lnL w="0" cap="flat" cmpd="sng" algn="ctr">
-                      <a:noFill/>
-                    </a:lnL>
-                    <a:lnR w="0" cap="flat" cmpd="sng" algn="ctr">
-                      <a:noFill/>
-                    </a:lnR>
-                    <a:lnT w="0" cap="flat" cmpd="sng" algn="ctr">
-                      <a:noFill/>
-                    </a:lnT>
-                    <a:lnB w="6350" cap="flat" cmpd="sng" algn="ctr">
-                      <a:solidFill>
-                        <a:srgbClr val="DDE3EB"/>
-                      </a:solidFill>
-                      <a:prstDash val="solid"/>
-                      <a:round/>
-                      <a:headEnd type="none" w="med" len="med"/>
-                      <a:tailEnd type="none" w="med" len="med"/>
-                    </a:lnB>
-                  </a:tcPr>
-                </a:tc>
-              </a:tr>
-              <a:tr h="411480">
-                <a:tc>
-                  <a:txBody>
-                    <a:bodyPr/>
-                    <a:lstStyle/>
-                    <a:p>
-                      <a:pPr indent="0" marL="0">
-                        <a:buNone/>
-                      </a:pPr>
-                      <a:r>
-                        <a:rPr lang="en-US" sz="950" dirty="0">
-                          <a:solidFill>
-                            <a:srgbClr val="1C2733"/>
-                          </a:solidFill>
-                          <a:latin typeface="Malgun Gothic" pitchFamily="34" charset="0"/>
-                          <a:ea typeface="Malgun Gothic" pitchFamily="34" charset="-122"/>
-                          <a:cs typeface="Malgun Gothic" pitchFamily="34" charset="-120"/>
-                        </a:rPr>
-                        <a:t>종속값</a:t>
-                      </a:r>
-                      <a:endParaRPr lang="en-US" sz="950" dirty="0">
-                        <a:latin typeface="Malgun Gothic" charset="0"/>
-                        <a:ea typeface="Malgun Gothic" charset="0"/>
-                        <a:cs typeface="Malgun Gothic" charset="0"/>
-                      </a:endParaRPr>
-                    </a:p>
-                  </a:txBody>
-                  <a:tcPr marL="50800" marR="50800" marT="25400" marB="25400" anchor="ctr">
-                    <a:lnL w="0" cap="flat" cmpd="sng" algn="ctr">
-                      <a:noFill/>
-                    </a:lnL>
-                    <a:lnR w="0" cap="flat" cmpd="sng" algn="ctr">
-                      <a:noFill/>
-                    </a:lnR>
-                    <a:lnT w="0" cap="flat" cmpd="sng" algn="ctr">
-                      <a:noFill/>
-                    </a:lnT>
-                    <a:lnB w="6350" cap="flat" cmpd="sng" algn="ctr">
-                      <a:solidFill>
-                        <a:srgbClr val="DDE3EB"/>
-                      </a:solidFill>
-                      <a:prstDash val="solid"/>
-                      <a:round/>
-                      <a:headEnd type="none" w="med" len="med"/>
-                      <a:tailEnd type="none" w="med" len="med"/>
-                    </a:lnB>
-                  </a:tcPr>
-                </a:tc>
-                <a:tc>
-                  <a:txBody>
-                    <a:bodyPr/>
-                    <a:lstStyle/>
-                    <a:p>
-                      <a:pPr indent="0" marL="0">
-                        <a:buNone/>
-                      </a:pPr>
-                      <a:r>
-                        <a:rPr lang="en-US" sz="950" dirty="0">
-                          <a:solidFill>
-                            <a:srgbClr val="1C2733"/>
-                          </a:solidFill>
-                          <a:latin typeface="Malgun Gothic" pitchFamily="34" charset="0"/>
-                          <a:ea typeface="Malgun Gothic" pitchFamily="34" charset="-122"/>
-                          <a:cs typeface="Malgun Gothic" pitchFamily="34" charset="-120"/>
-                        </a:rPr>
-                        <a:t>핀 간격은 CAD 수식이 자체 계산 — 이중 계산 방지</a:t>
-                      </a:r>
-                      <a:endParaRPr lang="en-US" sz="950" dirty="0">
-                        <a:latin typeface="Malgun Gothic" charset="0"/>
-                        <a:ea typeface="Malgun Gothic" charset="0"/>
-                        <a:cs typeface="Malgun Gothic" charset="0"/>
-                      </a:endParaRPr>
-                    </a:p>
-                  </a:txBody>
-                  <a:tcPr marL="50800" marR="50800" marT="25400" marB="25400" anchor="ctr">
-                    <a:lnL w="0" cap="flat" cmpd="sng" algn="ctr">
-                      <a:noFill/>
-                    </a:lnL>
-                    <a:lnR w="0" cap="flat" cmpd="sng" algn="ctr">
-                      <a:noFill/>
-                    </a:lnR>
-                    <a:lnT w="0" cap="flat" cmpd="sng" algn="ctr">
-                      <a:noFill/>
-                    </a:lnT>
-                    <a:lnB w="6350" cap="flat" cmpd="sng" algn="ctr">
-                      <a:solidFill>
-                        <a:srgbClr val="DDE3EB"/>
-                      </a:solidFill>
-                      <a:prstDash val="solid"/>
-                      <a:round/>
-                      <a:headEnd type="none" w="med" len="med"/>
-                      <a:tailEnd type="none" w="med" len="med"/>
-                    </a:lnB>
-                  </a:tcPr>
-                </a:tc>
-              </a:tr>
-              <a:tr h="411480">
-                <a:tc>
-                  <a:txBody>
-                    <a:bodyPr/>
-                    <a:lstStyle/>
-                    <a:p>
-                      <a:pPr indent="0" marL="0">
-                        <a:buNone/>
-                      </a:pPr>
-                      <a:r>
-                        <a:rPr lang="en-US" sz="950" dirty="0">
-                          <a:solidFill>
-                            <a:srgbClr val="1C2733"/>
-                          </a:solidFill>
-                          <a:latin typeface="Malgun Gothic" pitchFamily="34" charset="0"/>
-                          <a:ea typeface="Malgun Gothic" pitchFamily="34" charset="-122"/>
-                          <a:cs typeface="Malgun Gothic" pitchFamily="34" charset="-120"/>
-                        </a:rPr>
-                        <a:t>고정값</a:t>
-                      </a:r>
-                      <a:endParaRPr lang="en-US" sz="950" dirty="0">
-                        <a:latin typeface="Malgun Gothic" charset="0"/>
-                        <a:ea typeface="Malgun Gothic" charset="0"/>
-                        <a:cs typeface="Malgun Gothic" charset="0"/>
-                      </a:endParaRPr>
-                    </a:p>
-                  </a:txBody>
-                  <a:tcPr marL="50800" marR="50800" marT="25400" marB="25400" anchor="ctr">
-                    <a:lnL w="0" cap="flat" cmpd="sng" algn="ctr">
-                      <a:noFill/>
-                    </a:lnL>
-                    <a:lnR w="0" cap="flat" cmpd="sng" algn="ctr">
-                      <a:noFill/>
-                    </a:lnR>
-                    <a:lnT w="0" cap="flat" cmpd="sng" algn="ctr">
-                      <a:noFill/>
-                    </a:lnT>
-                    <a:lnB w="6350" cap="flat" cmpd="sng" algn="ctr">
-                      <a:solidFill>
-                        <a:srgbClr val="DDE3EB"/>
-                      </a:solidFill>
-                      <a:prstDash val="solid"/>
-                      <a:round/>
-                      <a:headEnd type="none" w="med" len="med"/>
-                      <a:tailEnd type="none" w="med" len="med"/>
-                    </a:lnB>
-                  </a:tcPr>
-                </a:tc>
-                <a:tc>
-                  <a:txBody>
-                    <a:bodyPr/>
-                    <a:lstStyle/>
-                    <a:p>
-                      <a:pPr indent="0" marL="0">
-                        <a:buNone/>
-                      </a:pPr>
-                      <a:r>
-                        <a:rPr lang="en-US" sz="950" dirty="0">
-                          <a:solidFill>
-                            <a:srgbClr val="1C2733"/>
-                          </a:solidFill>
-                          <a:latin typeface="Malgun Gothic" pitchFamily="34" charset="0"/>
-                          <a:ea typeface="Malgun Gothic" pitchFamily="34" charset="-122"/>
-                          <a:cs typeface="Malgun Gothic" pitchFamily="34" charset="-120"/>
-                        </a:rPr>
-                        <a:t>전역변수로 만들지 않고 스케치에 직접 기입</a:t>
-                      </a:r>
-                      <a:endParaRPr lang="en-US" sz="950" dirty="0">
-                        <a:latin typeface="Malgun Gothic" charset="0"/>
-                        <a:ea typeface="Malgun Gothic" charset="0"/>
-                        <a:cs typeface="Malgun Gothic" charset="0"/>
-                      </a:endParaRPr>
-                    </a:p>
-                  </a:txBody>
-                  <a:tcPr marL="50800" marR="50800" marT="25400" marB="25400" anchor="ctr">
-                    <a:lnL w="0" cap="flat" cmpd="sng" algn="ctr">
-                      <a:noFill/>
-                    </a:lnL>
-                    <a:lnR w="0" cap="flat" cmpd="sng" algn="ctr">
-                      <a:noFill/>
-                    </a:lnR>
-                    <a:lnT w="0" cap="flat" cmpd="sng" algn="ctr">
-                      <a:noFill/>
-                    </a:lnT>
-                    <a:lnB w="6350" cap="flat" cmpd="sng" algn="ctr">
-                      <a:solidFill>
-                        <a:srgbClr val="DDE3EB"/>
-                      </a:solidFill>
-                      <a:prstDash val="solid"/>
-                      <a:round/>
-                      <a:headEnd type="none" w="med" len="med"/>
-                      <a:tailEnd type="none" w="med" len="med"/>
-                    </a:lnB>
-                  </a:tcPr>
-                </a:tc>
-              </a:tr>
-            </a:tbl>
-          </a:graphicData>
-        </a:graphic>
-      </p:graphicFrame>
-      <p:sp>
-        <p:nvSpPr>
-          <p:cNvPr id="18" name="Shape 15"/>
-          <p:cNvSpPr/>
-          <p:nvPr/>
-        </p:nvSpPr>
-        <p:spPr>
-          <a:xfrm>
-            <a:off x="813816" y="5303520"/>
-            <a:ext cx="4846320" cy="658368"/>
-          </a:xfrm>
-          <a:prstGeom prst="roundRect">
-            <a:avLst>
-              <a:gd name="adj" fmla="val 8333"/>
-            </a:avLst>
-          </a:prstGeom>
-          <a:solidFill>
-            <a:srgbClr val="EEF2F7"/>
-          </a:solidFill>
-          <a:ln w="12700">
-            <a:solidFill>
-              <a:srgbClr val="EEF2F7"/>
-            </a:solidFill>
-            <a:prstDash val="solid"/>
-          </a:ln>
-        </p:spPr>
-      </p:sp>
-      <p:sp>
-        <p:nvSpPr>
-          <p:cNvPr id="19" name="Text 16"/>
-          <p:cNvSpPr txBox="1"/>
-          <p:nvPr/>
-        </p:nvSpPr>
-        <p:spPr>
-          <a:xfrm>
-            <a:off x="941832" y="5303520"/>
-            <a:ext cx="4617720" cy="658368"/>
-          </a:xfrm>
-          <a:prstGeom prst="rect">
-            <a:avLst/>
-          </a:prstGeom>
-          <a:noFill/>
-          <a:ln/>
-        </p:spPr>
-        <p:txBody>
-          <a:bodyPr wrap="square" lIns="0" tIns="0" rIns="0" bIns="0" rtlCol="0" anchor="ctr"/>
-          <a:lstStyle/>
-          <a:p>
-            <a:pPr indent="0" marL="0">
-              <a:lnSpc>
-                <a:spcPct val="120000"/>
-              </a:lnSpc>
-              <a:buNone/>
-            </a:pPr>
-            <a:r>
-              <a:rPr lang="en-US" sz="950" dirty="0">
-                <a:solidFill>
-                  <a:srgbClr val="16305B"/>
-                </a:solidFill>
-                <a:latin typeface="Malgun Gothic" pitchFamily="34" charset="0"/>
-                <a:ea typeface="Malgun Gothic" pitchFamily="34" charset="-122"/>
-                <a:cs typeface="Malgun Gothic" pitchFamily="34" charset="-120"/>
-              </a:rPr>
-              <a:t>변수명이 어긋나면 형상이 바뀌지 않은 채 해석이 수행될 수 있음</a:t>
-            </a:r>
-            <a:endParaRPr lang="en-US" sz="950" dirty="0"/>
-          </a:p>
-          <a:p>
-            <a:pPr indent="0" marL="0">
-              <a:lnSpc>
-                <a:spcPct val="120000"/>
-              </a:lnSpc>
-              <a:buNone/>
-            </a:pPr>
-            <a:r>
-              <a:rPr lang="en-US" sz="950" dirty="0">
-                <a:solidFill>
-                  <a:srgbClr val="16305B"/>
-                </a:solidFill>
-                <a:latin typeface="Malgun Gothic" pitchFamily="34" charset="0"/>
-                <a:ea typeface="Malgun Gothic" pitchFamily="34" charset="-122"/>
-                <a:cs typeface="Malgun Gothic" pitchFamily="34" charset="-120"/>
-              </a:rPr>
-              <a:t>→ 사전 차단이 데이터 신뢰성의 핵심</a:t>
-            </a:r>
-            <a:endParaRPr lang="en-US" sz="950" dirty="0"/>
-          </a:p>
-        </p:txBody>
-      </p:sp>
-      <p:sp>
-        <p:nvSpPr>
-          <p:cNvPr id="20" name="Shape 17"/>
-          <p:cNvSpPr/>
-          <p:nvPr/>
-        </p:nvSpPr>
-        <p:spPr>
-          <a:xfrm>
-            <a:off x="6336792" y="1188720"/>
-            <a:ext cx="5440680" cy="5120640"/>
-          </a:xfrm>
-          <a:prstGeom prst="roundRect">
-            <a:avLst>
-              <a:gd name="adj" fmla="val 1071"/>
-            </a:avLst>
-          </a:prstGeom>
-          <a:solidFill>
-            <a:srgbClr val="FFFFFF"/>
-          </a:solidFill>
-          <a:ln w="9525">
-            <a:solidFill>
-              <a:srgbClr val="DDE3EB"/>
-            </a:solidFill>
-            <a:prstDash val="solid"/>
-          </a:ln>
-          <a:effectLst>
-            <a:outerShdw sx="100000" sy="100000" kx="0" ky="0" algn="bl" rotWithShape="0" blurRad="101600" dist="12700" dir="5400000">
-              <a:srgbClr val="9AA8BC">
-                <a:alpha val="18000"/>
-              </a:srgbClr>
-            </a:outerShdw>
-          </a:effectLst>
-        </p:spPr>
-      </p:sp>
-      <p:sp>
-        <p:nvSpPr>
-          <p:cNvPr id="21" name="Shape 18"/>
-          <p:cNvSpPr/>
-          <p:nvPr/>
-        </p:nvSpPr>
-        <p:spPr>
-          <a:xfrm>
-            <a:off x="6592824" y="1463040"/>
-            <a:ext cx="82296" cy="182880"/>
-          </a:xfrm>
-          <a:prstGeom prst="rect">
-            <a:avLst/>
-          </a:prstGeom>
-          <a:solidFill>
-            <a:srgbClr val="00A3C4"/>
-          </a:solidFill>
-          <a:ln w="12700">
-            <a:solidFill>
-              <a:srgbClr val="00A3C4"/>
-            </a:solidFill>
-            <a:prstDash val="solid"/>
-          </a:ln>
-        </p:spPr>
-      </p:sp>
-      <p:sp>
-        <p:nvSpPr>
-          <p:cNvPr id="22" name="Text 19"/>
-          <p:cNvSpPr txBox="1"/>
-          <p:nvPr/>
-        </p:nvSpPr>
-        <p:spPr>
-          <a:xfrm>
-            <a:off x="6757416" y="1371600"/>
-            <a:ext cx="4480560" cy="365760"/>
-          </a:xfrm>
-          <a:prstGeom prst="rect">
-            <a:avLst/>
-          </a:prstGeom>
-          <a:noFill/>
-          <a:ln/>
-        </p:spPr>
-        <p:txBody>
-          <a:bodyPr wrap="square" lIns="0" tIns="0" rIns="0" bIns="0" rtlCol="0" anchor="ctr"/>
-          <a:lstStyle/>
-          <a:p>
-            <a:pPr indent="0" marL="0">
-              <a:buNone/>
-            </a:pPr>
-            <a:r>
-              <a:rPr lang="en-US" sz="1300" b="1" dirty="0">
-                <a:solidFill>
-                  <a:srgbClr val="16305B"/>
-                </a:solidFill>
-                <a:latin typeface="Malgun Gothic" pitchFamily="34" charset="0"/>
-                <a:ea typeface="Malgun Gothic" pitchFamily="34" charset="-122"/>
-                <a:cs typeface="Malgun Gothic" pitchFamily="34" charset="-120"/>
-              </a:rPr>
-              <a:t>중량 산출</a:t>
-            </a:r>
-            <a:endParaRPr lang="en-US" sz="1300" dirty="0"/>
-          </a:p>
-        </p:txBody>
-      </p:sp>
-      <p:sp>
-        <p:nvSpPr>
-          <p:cNvPr id="23" name="Shape 20"/>
-          <p:cNvSpPr/>
-          <p:nvPr/>
-        </p:nvSpPr>
-        <p:spPr>
-          <a:xfrm>
-            <a:off x="6647688" y="1920240"/>
-            <a:ext cx="4846320" cy="914400"/>
-          </a:xfrm>
-          <a:prstGeom prst="roundRect">
-            <a:avLst>
-              <a:gd name="adj" fmla="val 6000"/>
-            </a:avLst>
-          </a:prstGeom>
-          <a:solidFill>
-            <a:srgbClr val="F7F9FC"/>
-          </a:solidFill>
-          <a:ln w="9525">
-            <a:solidFill>
-              <a:srgbClr val="DDE3EB"/>
-            </a:solidFill>
-            <a:prstDash val="solid"/>
-          </a:ln>
-        </p:spPr>
-      </p:sp>
-      <p:sp>
-        <p:nvSpPr>
-          <p:cNvPr id="24" name="Text 21"/>
-          <p:cNvSpPr txBox="1"/>
-          <p:nvPr/>
-        </p:nvSpPr>
-        <p:spPr>
-          <a:xfrm>
-            <a:off x="6793992" y="2011680"/>
-            <a:ext cx="4572000" cy="749808"/>
-          </a:xfrm>
-          <a:prstGeom prst="rect">
-            <a:avLst/>
-          </a:prstGeom>
-          <a:noFill/>
-          <a:ln/>
-        </p:spPr>
-        <p:txBody>
-          <a:bodyPr wrap="square" lIns="0" tIns="0" rIns="0" bIns="0" rtlCol="0" anchor="ctr"/>
-          <a:lstStyle/>
-          <a:p>
-            <a:pPr indent="0" marL="0">
-              <a:lnSpc>
-                <a:spcPct val="135000"/>
-              </a:lnSpc>
-              <a:buNone/>
-            </a:pPr>
-            <a:r>
-              <a:rPr lang="en-US" sz="1050" dirty="0">
-                <a:solidFill>
-                  <a:srgbClr val="1C2733"/>
-                </a:solidFill>
-                <a:latin typeface="Malgun Gothic" pitchFamily="34" charset="0"/>
-                <a:ea typeface="Malgun Gothic" pitchFamily="34" charset="-122"/>
-                <a:cs typeface="Malgun Gothic" pitchFamily="34" charset="-120"/>
-              </a:rPr>
-              <a:t>PAO 부피 = 완전충진 형상 부피(상수) − 알루미늄 부피</a:t>
-            </a:r>
-            <a:endParaRPr lang="en-US" sz="1050" dirty="0"/>
-          </a:p>
-          <a:p>
-            <a:pPr indent="0" marL="0">
-              <a:lnSpc>
-                <a:spcPct val="135000"/>
-              </a:lnSpc>
-              <a:buNone/>
-            </a:pPr>
-            <a:r>
-              <a:rPr lang="en-US" sz="1050" b="1" dirty="0">
-                <a:solidFill>
-                  <a:srgbClr val="16305B"/>
-                </a:solidFill>
-                <a:latin typeface="Malgun Gothic" pitchFamily="34" charset="0"/>
-                <a:ea typeface="Malgun Gothic" pitchFamily="34" charset="-122"/>
-                <a:cs typeface="Malgun Gothic" pitchFamily="34" charset="-120"/>
-              </a:rPr>
-              <a:t>중  량   = 알루미늄 질량 + PAO 부피 × 794 kg/m³</a:t>
-            </a:r>
-            <a:endParaRPr lang="en-US" sz="1050" dirty="0"/>
-          </a:p>
-        </p:txBody>
-      </p:sp>
-      <p:graphicFrame>
-        <p:nvGraphicFramePr>
-          <p:cNvPr id="17" name="Table 1"/>
-          <p:cNvGraphicFramePr>
-            <a:graphicFrameLocks noGrp="1"/>
-          </p:cNvGraphicFramePr>
-          <p:nvPr>
-            <p:extLst>
-              <p:ext uri="{D42A27DB-BD31-4B8C-83A1-F6EECF244321}">
-                <p14:modId xmlns:p14="http://schemas.microsoft.com/office/powerpoint/2010/main" val="1579011935"/>
-              </p:ext>
-            </p:extLst>
-          </p:nvPr>
-        </p:nvGraphicFramePr>
-        <p:xfrm>
-          <a:off x="6647688" y="3017520"/>
-          <a:ext cx="4846320" cy="914400"/>
-        </p:xfrm>
-        <a:graphic>
-          <a:graphicData uri="http://schemas.openxmlformats.org/drawingml/2006/table">
-            <a:tbl>
-              <a:tblPr/>
-              <a:tblGrid>
-                <a:gridCol w="1188720"/>
-                <a:gridCol w="3657600"/>
-              </a:tblGrid>
-              <a:tr h="457200">
-                <a:tc>
-                  <a:txBody>
-                    <a:bodyPr/>
-                    <a:lstStyle/>
-                    <a:p>
-                      <a:pPr indent="0" marL="0">
-                        <a:buNone/>
-                      </a:pPr>
-                      <a:r>
-                        <a:rPr lang="en-US" sz="950" b="1" dirty="0">
-                          <a:solidFill>
-                            <a:srgbClr val="16305B"/>
-                          </a:solidFill>
-                          <a:latin typeface="Malgun Gothic" pitchFamily="34" charset="0"/>
-                          <a:ea typeface="Malgun Gothic" pitchFamily="34" charset="-122"/>
-                          <a:cs typeface="Malgun Gothic" pitchFamily="34" charset="-120"/>
-                        </a:rPr>
-                        <a:t>항목</a:t>
-                      </a:r>
-                      <a:endParaRPr lang="en-US" sz="950" dirty="0">
-                        <a:latin typeface="Malgun Gothic" charset="0"/>
-                        <a:ea typeface="Malgun Gothic" charset="0"/>
-                        <a:cs typeface="Malgun Gothic" charset="0"/>
-                      </a:endParaRPr>
-                    </a:p>
-                  </a:txBody>
-                  <a:tcPr marL="50800" marR="50800" marT="25400" marB="25400" anchor="ctr">
-                    <a:lnL w="0" cap="flat" cmpd="sng" algn="ctr">
-                      <a:noFill/>
-                    </a:lnL>
-                    <a:lnR w="0" cap="flat" cmpd="sng" algn="ctr">
-                      <a:noFill/>
-                    </a:lnR>
-                    <a:lnT w="0" cap="flat" cmpd="sng" algn="ctr">
-                      <a:noFill/>
-                    </a:lnT>
-                    <a:lnB w="6350" cap="flat" cmpd="sng" algn="ctr">
-                      <a:solidFill>
-                        <a:srgbClr val="DDE3EB"/>
-                      </a:solidFill>
-                      <a:prstDash val="solid"/>
-                      <a:round/>
-                      <a:headEnd type="none" w="med" len="med"/>
-                      <a:tailEnd type="none" w="med" len="med"/>
-                    </a:lnB>
-                    <a:solidFill>
-                      <a:srgbClr val="EEF2F7"/>
-                    </a:solidFill>
-                  </a:tcPr>
-                </a:tc>
-                <a:tc>
-                  <a:txBody>
-                    <a:bodyPr/>
-                    <a:lstStyle/>
-                    <a:p>
-                      <a:pPr indent="0" marL="0">
-                        <a:buNone/>
-                      </a:pPr>
-                      <a:r>
-                        <a:rPr lang="en-US" sz="950" b="1" dirty="0">
-                          <a:solidFill>
-                            <a:srgbClr val="16305B"/>
-                          </a:solidFill>
-                          <a:latin typeface="Malgun Gothic" pitchFamily="34" charset="0"/>
-                          <a:ea typeface="Malgun Gothic" pitchFamily="34" charset="-122"/>
-                          <a:cs typeface="Malgun Gothic" pitchFamily="34" charset="-120"/>
-                        </a:rPr>
-                        <a:t>내용</a:t>
-                      </a:r>
-                      <a:endParaRPr lang="en-US" sz="950" dirty="0">
-                        <a:latin typeface="Malgun Gothic" charset="0"/>
-                        <a:ea typeface="Malgun Gothic" charset="0"/>
-                        <a:cs typeface="Malgun Gothic" charset="0"/>
-                      </a:endParaRPr>
-                    </a:p>
-                  </a:txBody>
-                  <a:tcPr marL="50800" marR="50800" marT="25400" marB="25400" anchor="ctr">
-                    <a:lnL w="0" cap="flat" cmpd="sng" algn="ctr">
-                      <a:noFill/>
-                    </a:lnL>
-                    <a:lnR w="0" cap="flat" cmpd="sng" algn="ctr">
-                      <a:noFill/>
-                    </a:lnR>
-                    <a:lnT w="0" cap="flat" cmpd="sng" algn="ctr">
-                      <a:noFill/>
-                    </a:lnT>
-                    <a:lnB w="6350" cap="flat" cmpd="sng" algn="ctr">
-                      <a:solidFill>
-                        <a:srgbClr val="DDE3EB"/>
-                      </a:solidFill>
-                      <a:prstDash val="solid"/>
-                      <a:round/>
-                      <a:headEnd type="none" w="med" len="med"/>
-                      <a:tailEnd type="none" w="med" len="med"/>
-                    </a:lnB>
-                    <a:solidFill>
-                      <a:srgbClr val="EEF2F7"/>
-                    </a:solidFill>
-                  </a:tcPr>
-                </a:tc>
-              </a:tr>
-              <a:tr h="457200">
-                <a:tc>
-                  <a:txBody>
-                    <a:bodyPr/>
-                    <a:lstStyle/>
-                    <a:p>
-                      <a:pPr indent="0" marL="0">
-                        <a:buNone/>
-                      </a:pPr>
-                      <a:r>
-                        <a:rPr lang="en-US" sz="950" dirty="0">
-                          <a:solidFill>
-                            <a:srgbClr val="1C2733"/>
-                          </a:solidFill>
-                          <a:latin typeface="Malgun Gothic" pitchFamily="34" charset="0"/>
-                          <a:ea typeface="Malgun Gothic" pitchFamily="34" charset="-122"/>
-                          <a:cs typeface="Malgun Gothic" pitchFamily="34" charset="-120"/>
-                        </a:rPr>
-                        <a:t>취득 시점</a:t>
-                      </a:r>
-                      <a:endParaRPr lang="en-US" sz="950" dirty="0">
-                        <a:latin typeface="Malgun Gothic" charset="0"/>
-                        <a:ea typeface="Malgun Gothic" charset="0"/>
-                        <a:cs typeface="Malgun Gothic" charset="0"/>
-                      </a:endParaRPr>
-                    </a:p>
-                  </a:txBody>
-                  <a:tcPr marL="50800" marR="50800" marT="25400" marB="25400" anchor="ctr">
-                    <a:lnL w="0" cap="flat" cmpd="sng" algn="ctr">
-                      <a:noFill/>
-                    </a:lnL>
-                    <a:lnR w="0" cap="flat" cmpd="sng" algn="ctr">
-                      <a:noFill/>
-                    </a:lnR>
-                    <a:lnT w="0" cap="flat" cmpd="sng" algn="ctr">
-                      <a:noFill/>
-                    </a:lnT>
-                    <a:lnB w="6350" cap="flat" cmpd="sng" algn="ctr">
-                      <a:solidFill>
-                        <a:srgbClr val="DDE3EB"/>
-                      </a:solidFill>
-                      <a:prstDash val="solid"/>
-                      <a:round/>
-                      <a:headEnd type="none" w="med" len="med"/>
-                      <a:tailEnd type="none" w="med" len="med"/>
-                    </a:lnB>
-                  </a:tcPr>
-                </a:tc>
-                <a:tc>
-                  <a:txBody>
-                    <a:bodyPr/>
-                    <a:lstStyle/>
-                    <a:p>
-                      <a:pPr indent="0" marL="0">
-                        <a:buNone/>
-                      </a:pPr>
-                      <a:r>
-                        <a:rPr lang="en-US" sz="950" dirty="0">
-                          <a:solidFill>
-                            <a:srgbClr val="1C2733"/>
-                          </a:solidFill>
-                          <a:latin typeface="Malgun Gothic" pitchFamily="34" charset="0"/>
-                          <a:ea typeface="Malgun Gothic" pitchFamily="34" charset="-122"/>
-                          <a:cs typeface="Malgun Gothic" pitchFamily="34" charset="-120"/>
-                        </a:rPr>
-                        <a:t>리빌드 직후 어셈블리에서 질량 특성 일괄 취득</a:t>
-                      </a:r>
-                      <a:endParaRPr lang="en-US" sz="950" dirty="0">
-                        <a:latin typeface="Malgun Gothic" charset="0"/>
-                        <a:ea typeface="Malgun Gothic" charset="0"/>
-                        <a:cs typeface="Malgun Gothic" charset="0"/>
-                      </a:endParaRPr>
-                    </a:p>
-                  </a:txBody>
-                  <a:tcPr marL="50800" marR="50800" marT="25400" marB="25400" anchor="ctr">
-                    <a:lnL w="0" cap="flat" cmpd="sng" algn="ctr">
-                      <a:noFill/>
-                    </a:lnL>
-                    <a:lnR w="0" cap="flat" cmpd="sng" algn="ctr">
-                      <a:noFill/>
-                    </a:lnR>
-                    <a:lnT w="0" cap="flat" cmpd="sng" algn="ctr">
-                      <a:noFill/>
-                    </a:lnT>
-                    <a:lnB w="6350" cap="flat" cmpd="sng" algn="ctr">
-                      <a:solidFill>
-                        <a:srgbClr val="DDE3EB"/>
-                      </a:solidFill>
-                      <a:prstDash val="solid"/>
-                      <a:round/>
-                      <a:headEnd type="none" w="med" len="med"/>
-                      <a:tailEnd type="none" w="med" len="med"/>
-                    </a:lnB>
-                  </a:tcPr>
-                </a:tc>
-              </a:tr>
-              <a:tr h="457200">
-                <a:tc>
-                  <a:txBody>
-                    <a:bodyPr/>
-                    <a:lstStyle/>
-                    <a:p>
-                      <a:pPr indent="0" marL="0">
-                        <a:buNone/>
-                      </a:pPr>
-                      <a:r>
-                        <a:rPr lang="en-US" sz="950" dirty="0">
-                          <a:solidFill>
-                            <a:srgbClr val="1C2733"/>
-                          </a:solidFill>
-                          <a:latin typeface="Malgun Gothic" pitchFamily="34" charset="0"/>
-                          <a:ea typeface="Malgun Gothic" pitchFamily="34" charset="-122"/>
-                          <a:cs typeface="Malgun Gothic" pitchFamily="34" charset="-120"/>
-                        </a:rPr>
-                        <a:t>반환값 해석</a:t>
-                      </a:r>
-                      <a:endParaRPr lang="en-US" sz="950" dirty="0">
-                        <a:latin typeface="Malgun Gothic" charset="0"/>
-                        <a:ea typeface="Malgun Gothic" charset="0"/>
-                        <a:cs typeface="Malgun Gothic" charset="0"/>
-                      </a:endParaRPr>
-                    </a:p>
-                  </a:txBody>
-                  <a:tcPr marL="50800" marR="50800" marT="25400" marB="25400" anchor="ctr">
-                    <a:lnL w="0" cap="flat" cmpd="sng" algn="ctr">
-                      <a:noFill/>
-                    </a:lnL>
-                    <a:lnR w="0" cap="flat" cmpd="sng" algn="ctr">
-                      <a:noFill/>
-                    </a:lnR>
-                    <a:lnT w="0" cap="flat" cmpd="sng" algn="ctr">
-                      <a:noFill/>
-                    </a:lnT>
-                    <a:lnB w="6350" cap="flat" cmpd="sng" algn="ctr">
-                      <a:solidFill>
-                        <a:srgbClr val="DDE3EB"/>
-                      </a:solidFill>
-                      <a:prstDash val="solid"/>
-                      <a:round/>
-                      <a:headEnd type="none" w="med" len="med"/>
-                      <a:tailEnd type="none" w="med" len="med"/>
-                    </a:lnB>
-                  </a:tcPr>
-                </a:tc>
-                <a:tc>
-                  <a:txBody>
-                    <a:bodyPr/>
-                    <a:lstStyle/>
-                    <a:p>
-                      <a:pPr indent="0" marL="0">
-                        <a:buNone/>
-                      </a:pPr>
-                      <a:r>
-                        <a:rPr lang="en-US" sz="950" dirty="0">
-                          <a:solidFill>
-                            <a:srgbClr val="1C2733"/>
-                          </a:solidFill>
-                          <a:latin typeface="Malgun Gothic" pitchFamily="34" charset="0"/>
-                          <a:ea typeface="Malgun Gothic" pitchFamily="34" charset="-122"/>
-                          <a:cs typeface="Malgun Gothic" pitchFamily="34" charset="-120"/>
-                        </a:rPr>
-                        <a:t>반환 순서가 미문서화 → CAD 질량특성 패널과 전량 대조하여 부피·질량 위치 확정</a:t>
-                      </a:r>
-                      <a:endParaRPr lang="en-US" sz="950" dirty="0">
-                        <a:latin typeface="Malgun Gothic" charset="0"/>
-                        <a:ea typeface="Malgun Gothic" charset="0"/>
-                        <a:cs typeface="Malgun Gothic" charset="0"/>
-                      </a:endParaRPr>
-                    </a:p>
-                  </a:txBody>
-                  <a:tcPr marL="50800" marR="50800" marT="25400" marB="25400" anchor="ctr">
-                    <a:lnL w="0" cap="flat" cmpd="sng" algn="ctr">
-                      <a:noFill/>
-                    </a:lnL>
-                    <a:lnR w="0" cap="flat" cmpd="sng" algn="ctr">
-                      <a:noFill/>
-                    </a:lnR>
-                    <a:lnT w="0" cap="flat" cmpd="sng" algn="ctr">
-                      <a:noFill/>
-                    </a:lnT>
-                    <a:lnB w="6350" cap="flat" cmpd="sng" algn="ctr">
-                      <a:solidFill>
-                        <a:srgbClr val="DDE3EB"/>
-                      </a:solidFill>
-                      <a:prstDash val="solid"/>
-                      <a:round/>
-                      <a:headEnd type="none" w="med" len="med"/>
-                      <a:tailEnd type="none" w="med" len="med"/>
-                    </a:lnB>
-                  </a:tcPr>
-                </a:tc>
-              </a:tr>
-              <a:tr h="457200">
-                <a:tc>
-                  <a:txBody>
-                    <a:bodyPr/>
-                    <a:lstStyle/>
-                    <a:p>
-                      <a:pPr indent="0" marL="0">
-                        <a:buNone/>
-                      </a:pPr>
-                      <a:r>
-                        <a:rPr lang="en-US" sz="950" dirty="0">
-                          <a:solidFill>
-                            <a:srgbClr val="1C2733"/>
-                          </a:solidFill>
-                          <a:latin typeface="Malgun Gothic" pitchFamily="34" charset="0"/>
-                          <a:ea typeface="Malgun Gothic" pitchFamily="34" charset="-122"/>
-                          <a:cs typeface="Malgun Gothic" pitchFamily="34" charset="-120"/>
-                        </a:rPr>
-                        <a:t>검산</a:t>
-                      </a:r>
-                      <a:endParaRPr lang="en-US" sz="950" dirty="0">
-                        <a:latin typeface="Malgun Gothic" charset="0"/>
-                        <a:ea typeface="Malgun Gothic" charset="0"/>
-                        <a:cs typeface="Malgun Gothic" charset="0"/>
-                      </a:endParaRPr>
-                    </a:p>
-                  </a:txBody>
-                  <a:tcPr marL="50800" marR="50800" marT="25400" marB="25400" anchor="ctr">
-                    <a:lnL w="0" cap="flat" cmpd="sng" algn="ctr">
-                      <a:noFill/>
-                    </a:lnL>
-                    <a:lnR w="0" cap="flat" cmpd="sng" algn="ctr">
-                      <a:noFill/>
-                    </a:lnR>
-                    <a:lnT w="0" cap="flat" cmpd="sng" algn="ctr">
-                      <a:noFill/>
-                    </a:lnT>
-                    <a:lnB w="6350" cap="flat" cmpd="sng" algn="ctr">
-                      <a:solidFill>
-                        <a:srgbClr val="DDE3EB"/>
-                      </a:solidFill>
-                      <a:prstDash val="solid"/>
-                      <a:round/>
-                      <a:headEnd type="none" w="med" len="med"/>
-                      <a:tailEnd type="none" w="med" len="med"/>
-                    </a:lnB>
-                  </a:tcPr>
-                </a:tc>
-                <a:tc>
-                  <a:txBody>
-                    <a:bodyPr/>
-                    <a:lstStyle/>
-                    <a:p>
-                      <a:pPr indent="0" marL="0">
-                        <a:buNone/>
-                      </a:pPr>
-                      <a:r>
-                        <a:rPr lang="en-US" sz="950" dirty="0">
-                          <a:solidFill>
-                            <a:srgbClr val="1C2733"/>
-                          </a:solidFill>
-                          <a:latin typeface="Malgun Gothic" pitchFamily="34" charset="0"/>
-                          <a:ea typeface="Malgun Gothic" pitchFamily="34" charset="-122"/>
-                          <a:cs typeface="Malgun Gothic" pitchFamily="34" charset="-120"/>
-                        </a:rPr>
-                        <a:t>산출값이 수기 계산값과 소수점까지 일치 확인</a:t>
-                      </a:r>
-                      <a:endParaRPr lang="en-US" sz="950" dirty="0">
-                        <a:latin typeface="Malgun Gothic" charset="0"/>
-                        <a:ea typeface="Malgun Gothic" charset="0"/>
-                        <a:cs typeface="Malgun Gothic" charset="0"/>
-                      </a:endParaRPr>
-                    </a:p>
-                  </a:txBody>
-                  <a:tcPr marL="50800" marR="50800" marT="25400" marB="25400" anchor="ctr">
-                    <a:lnL w="0" cap="flat" cmpd="sng" algn="ctr">
-                      <a:noFill/>
-                    </a:lnL>
-                    <a:lnR w="0" cap="flat" cmpd="sng" algn="ctr">
-                      <a:noFill/>
-                    </a:lnR>
-                    <a:lnT w="0" cap="flat" cmpd="sng" algn="ctr">
-                      <a:noFill/>
-                    </a:lnT>
-                    <a:lnB w="6350" cap="flat" cmpd="sng" algn="ctr">
-                      <a:solidFill>
-                        <a:srgbClr val="DDE3EB"/>
-                      </a:solidFill>
-                      <a:prstDash val="solid"/>
-                      <a:round/>
-                      <a:headEnd type="none" w="med" len="med"/>
-                      <a:tailEnd type="none" w="med" len="med"/>
-                    </a:lnB>
-                  </a:tcPr>
-                </a:tc>
-              </a:tr>
-              <a:tr h="457200">
-                <a:tc>
-                  <a:txBody>
-                    <a:bodyPr/>
-                    <a:lstStyle/>
-                    <a:p>
-                      <a:pPr indent="0" marL="0">
-                        <a:buNone/>
-                      </a:pPr>
-                      <a:r>
-                        <a:rPr lang="en-US" sz="950" dirty="0">
-                          <a:solidFill>
-                            <a:srgbClr val="1C2733"/>
-                          </a:solidFill>
-                          <a:latin typeface="Malgun Gothic" pitchFamily="34" charset="0"/>
-                          <a:ea typeface="Malgun Gothic" pitchFamily="34" charset="-122"/>
-                          <a:cs typeface="Malgun Gothic" pitchFamily="34" charset="-120"/>
-                        </a:rPr>
-                        <a:t>교차검증</a:t>
-                      </a:r>
-                      <a:endParaRPr lang="en-US" sz="950" dirty="0">
-                        <a:latin typeface="Malgun Gothic" charset="0"/>
-                        <a:ea typeface="Malgun Gothic" charset="0"/>
-                        <a:cs typeface="Malgun Gothic" charset="0"/>
-                      </a:endParaRPr>
-                    </a:p>
-                  </a:txBody>
-                  <a:tcPr marL="50800" marR="50800" marT="25400" marB="25400" anchor="ctr">
-                    <a:lnL w="0" cap="flat" cmpd="sng" algn="ctr">
-                      <a:noFill/>
-                    </a:lnL>
-                    <a:lnR w="0" cap="flat" cmpd="sng" algn="ctr">
-                      <a:noFill/>
-                    </a:lnR>
-                    <a:lnT w="0" cap="flat" cmpd="sng" algn="ctr">
-                      <a:noFill/>
-                    </a:lnT>
-                    <a:lnB w="6350" cap="flat" cmpd="sng" algn="ctr">
-                      <a:solidFill>
-                        <a:srgbClr val="DDE3EB"/>
-                      </a:solidFill>
-                      <a:prstDash val="solid"/>
-                      <a:round/>
-                      <a:headEnd type="none" w="med" len="med"/>
-                      <a:tailEnd type="none" w="med" len="med"/>
-                    </a:lnB>
-                  </a:tcPr>
-                </a:tc>
-                <a:tc>
-                  <a:txBody>
-                    <a:bodyPr/>
-                    <a:lstStyle/>
-                    <a:p>
-                      <a:pPr indent="0" marL="0">
-                        <a:buNone/>
-                      </a:pPr>
-                      <a:r>
-                        <a:rPr lang="en-US" sz="950" dirty="0">
-                          <a:solidFill>
-                            <a:srgbClr val="1C2733"/>
-                          </a:solidFill>
-                          <a:latin typeface="Malgun Gothic" pitchFamily="34" charset="0"/>
-                          <a:ea typeface="Malgun Gothic" pitchFamily="34" charset="-122"/>
-                          <a:cs typeface="Malgun Gothic" pitchFamily="34" charset="-120"/>
-                        </a:rPr>
-                        <a:t>해석 측 유체 부피값과 대조, 이상 시 로그 경고</a:t>
-                      </a:r>
-                      <a:endParaRPr lang="en-US" sz="950" dirty="0">
-                        <a:latin typeface="Malgun Gothic" charset="0"/>
-                        <a:ea typeface="Malgun Gothic" charset="0"/>
-                        <a:cs typeface="Malgun Gothic" charset="0"/>
-                      </a:endParaRPr>
-                    </a:p>
-                  </a:txBody>
-                  <a:tcPr marL="50800" marR="50800" marT="25400" marB="25400" anchor="ctr">
-                    <a:lnL w="0" cap="flat" cmpd="sng" algn="ctr">
-                      <a:noFill/>
-                    </a:lnL>
-                    <a:lnR w="0" cap="flat" cmpd="sng" algn="ctr">
-                      <a:noFill/>
-                    </a:lnR>
-                    <a:lnT w="0" cap="flat" cmpd="sng" algn="ctr">
-                      <a:noFill/>
-                    </a:lnT>
-                    <a:lnB w="6350" cap="flat" cmpd="sng" algn="ctr">
-                      <a:solidFill>
-                        <a:srgbClr val="DDE3EB"/>
-                      </a:solidFill>
-                      <a:prstDash val="solid"/>
-                      <a:round/>
-                      <a:headEnd type="none" w="med" len="med"/>
-                      <a:tailEnd type="none" w="med" len="med"/>
-                    </a:lnB>
-                  </a:tcPr>
-                </a:tc>
-              </a:tr>
-            </a:tbl>
-          </a:graphicData>
-        </a:graphic>
-      </p:graphicFrame>
-      <p:sp>
-        <p:nvSpPr>
-          <p:cNvPr id="26" name="Text 22"/>
-          <p:cNvSpPr txBox="1"/>
-          <p:nvPr/>
-        </p:nvSpPr>
-        <p:spPr>
-          <a:xfrm>
-            <a:off x="6647688" y="5532120"/>
-            <a:ext cx="4846320" cy="365760"/>
-          </a:xfrm>
-          <a:prstGeom prst="rect">
-            <a:avLst/>
-          </a:prstGeom>
-          <a:noFill/>
-          <a:ln/>
-        </p:spPr>
-        <p:txBody>
-          <a:bodyPr wrap="square" lIns="0" tIns="0" rIns="0" bIns="0" rtlCol="0" anchor="ctr"/>
-          <a:lstStyle/>
-          <a:p>
-            <a:pPr indent="0" marL="0">
-              <a:buNone/>
-            </a:pPr>
-            <a:r>
-              <a:rPr lang="en-US" sz="950" i="1" dirty="0">
-                <a:solidFill>
-                  <a:srgbClr val="6B7A8F"/>
-                </a:solidFill>
-                <a:latin typeface="Malgun Gothic" pitchFamily="34" charset="0"/>
-                <a:ea typeface="Malgun Gothic" pitchFamily="34" charset="-122"/>
-                <a:cs typeface="Malgun Gothic" pitchFamily="34" charset="-120"/>
-              </a:rPr>
-              <a:t>유로(빈 공간)는 형상에 존재하지 않는 개념 → 완전충진 부피 기준으로 역산</a:t>
-            </a:r>
-            <a:endParaRPr lang="en-US" sz="950" dirty="0"/>
-          </a:p>
-        </p:txBody>
-      </p:sp>
-    </p:spTree>
-  </p:cSld>
-  <p:clrMapOvr>
-    <a:masterClrMapping/>
-  </p:clrMapOvr>
-</p:sld>
-</file>
-
-<file path=ppt/slides/slide9.xml><?xml version="1.0" encoding="utf-8"?>
-<p:sld xmlns:a="http://schemas.openxmlformats.org/drawingml/2006/main" xmlns:r="http://schemas.openxmlformats.org/officeDocument/2006/relationships" xmlns:p="http://schemas.openxmlformats.org/presentationml/2006/main">
-  <p:cSld name="Slide 9">
-    <p:bg>
-      <p:bgPr>
-        <a:solidFill>
-          <a:srgbClr val="F3F5F8"/>
-        </a:solidFill>
-      </p:bgPr>
-    </p:bg>
-    <p:spTree>
-      <p:nvGrpSpPr>
-        <p:cNvPr id="1" name=""/>
-        <p:cNvGrpSpPr/>
-        <p:nvPr/>
-      </p:nvGrpSpPr>
-      <p:grpSpPr>
-        <a:xfrm>
-          <a:off x="0" y="0"/>
-          <a:ext cx="0" cy="0"/>
-          <a:chOff x="0" y="0"/>
-          <a:chExt cx="0" cy="0"/>
-        </a:xfrm>
-      </p:grpSpPr>
-      <p:sp>
-        <p:nvSpPr>
-          <p:cNvPr id="2" name="Shape 0"/>
-          <p:cNvSpPr/>
-          <p:nvPr/>
-        </p:nvSpPr>
-        <p:spPr>
-          <a:xfrm>
-            <a:off x="502920" y="384048"/>
-            <a:ext cx="475488" cy="475488"/>
-          </a:xfrm>
-          <a:prstGeom prst="rect">
-            <a:avLst/>
-          </a:prstGeom>
-          <a:solidFill>
-            <a:srgbClr val="16305B"/>
-          </a:solidFill>
-          <a:ln w="12700">
-            <a:solidFill>
-              <a:srgbClr val="16305B"/>
-            </a:solidFill>
-            <a:prstDash val="solid"/>
-          </a:ln>
-        </p:spPr>
-      </p:sp>
-      <p:sp>
-        <p:nvSpPr>
-          <p:cNvPr id="3" name="Text 1"/>
-          <p:cNvSpPr txBox="1"/>
-          <p:nvPr/>
-        </p:nvSpPr>
-        <p:spPr>
-          <a:xfrm>
-            <a:off x="502920" y="384048"/>
-            <a:ext cx="475488" cy="475488"/>
-          </a:xfrm>
-          <a:prstGeom prst="rect">
-            <a:avLst/>
-          </a:prstGeom>
-          <a:noFill/>
-          <a:ln/>
-        </p:spPr>
-        <p:txBody>
-          <a:bodyPr wrap="square" lIns="0" tIns="0" rIns="0" bIns="0" rtlCol="0" anchor="ctr"/>
-          <a:lstStyle/>
-          <a:p>
-            <a:pPr algn="ctr" indent="0" marL="0">
-              <a:buNone/>
-            </a:pPr>
-            <a:r>
-              <a:rPr lang="en-US" sz="1600" b="1" dirty="0">
-                <a:solidFill>
-                  <a:srgbClr val="FFFFFF"/>
-                </a:solidFill>
-                <a:latin typeface="Malgun Gothic" pitchFamily="34" charset="0"/>
-                <a:ea typeface="Malgun Gothic" pitchFamily="34" charset="-122"/>
-                <a:cs typeface="Malgun Gothic" pitchFamily="34" charset="-120"/>
-              </a:rPr>
-              <a:t>03</a:t>
-            </a:r>
-            <a:endParaRPr lang="en-US" sz="1600" dirty="0"/>
-          </a:p>
-        </p:txBody>
-      </p:sp>
-      <p:sp>
-        <p:nvSpPr>
-          <p:cNvPr id="4" name="Text 2"/>
-          <p:cNvSpPr txBox="1"/>
-          <p:nvPr/>
-        </p:nvSpPr>
-        <p:spPr>
-          <a:xfrm>
-            <a:off x="1124712" y="365760"/>
-            <a:ext cx="7315200" cy="237744"/>
-          </a:xfrm>
-          <a:prstGeom prst="rect">
-            <a:avLst/>
-          </a:prstGeom>
-          <a:noFill/>
-          <a:ln/>
-        </p:spPr>
-        <p:txBody>
-          <a:bodyPr wrap="square" lIns="0" tIns="0" rIns="0" bIns="0" rtlCol="0" anchor="ctr"/>
-          <a:lstStyle/>
-          <a:p>
-            <a:pPr indent="0" marL="0">
-              <a:buNone/>
-            </a:pPr>
-            <a:r>
-              <a:rPr lang="en-US" sz="1050" b="1" spc="100" kern="0" dirty="0">
-                <a:solidFill>
-                  <a:srgbClr val="00A3C4"/>
-                </a:solidFill>
-                <a:latin typeface="Malgun Gothic" pitchFamily="34" charset="0"/>
-                <a:ea typeface="Malgun Gothic" pitchFamily="34" charset="-122"/>
-                <a:cs typeface="Malgun Gothic" pitchFamily="34" charset="-120"/>
-              </a:rPr>
-              <a:t>실험계획법 기반 자동해석 수행 및 데이터 확보</a:t>
-            </a:r>
-            <a:endParaRPr lang="en-US" sz="1050" dirty="0"/>
-          </a:p>
-        </p:txBody>
-      </p:sp>
-      <p:sp>
-        <p:nvSpPr>
-          <p:cNvPr id="5" name="Text 3"/>
-          <p:cNvSpPr txBox="1"/>
-          <p:nvPr/>
-        </p:nvSpPr>
-        <p:spPr>
-          <a:xfrm>
-            <a:off x="1124712" y="548640"/>
-            <a:ext cx="10607040" cy="384048"/>
-          </a:xfrm>
-          <a:prstGeom prst="rect">
-            <a:avLst/>
-          </a:prstGeom>
-          <a:noFill/>
-          <a:ln/>
-        </p:spPr>
-        <p:txBody>
-          <a:bodyPr wrap="square" lIns="0" tIns="0" rIns="0" bIns="0" rtlCol="0" anchor="ctr"/>
-          <a:lstStyle/>
-          <a:p>
-            <a:pPr indent="0" marL="0">
-              <a:buNone/>
-            </a:pPr>
-            <a:r>
-              <a:rPr lang="en-US" sz="2200" b="1" dirty="0">
-                <a:solidFill>
-                  <a:srgbClr val="16305B"/>
-                </a:solidFill>
-                <a:latin typeface="Malgun Gothic" pitchFamily="34" charset="0"/>
-                <a:ea typeface="Malgun Gothic" pitchFamily="34" charset="-122"/>
-                <a:cs typeface="Malgun Gothic" pitchFamily="34" charset="-120"/>
-              </a:rPr>
-              <a:t>DOE 기법 선정 및 무인 자동 해석 루프</a:t>
-            </a:r>
-            <a:endParaRPr lang="en-US" sz="2200" dirty="0"/>
-          </a:p>
-        </p:txBody>
-      </p:sp>
-      <p:sp>
-        <p:nvSpPr>
-          <p:cNvPr id="6" name="Shape 4"/>
-          <p:cNvSpPr/>
-          <p:nvPr/>
-        </p:nvSpPr>
-        <p:spPr>
-          <a:xfrm>
-            <a:off x="502920" y="1188720"/>
-            <a:ext cx="5440680" cy="2487168"/>
-          </a:xfrm>
-          <a:prstGeom prst="roundRect">
-            <a:avLst>
-              <a:gd name="adj" fmla="val 2206"/>
-            </a:avLst>
-          </a:prstGeom>
-          <a:solidFill>
-            <a:srgbClr val="FFFFFF"/>
-          </a:solidFill>
-          <a:ln w="9525">
-            <a:solidFill>
-              <a:srgbClr val="DDE3EB"/>
-            </a:solidFill>
-            <a:prstDash val="solid"/>
-          </a:ln>
-          <a:effectLst>
-            <a:outerShdw sx="100000" sy="100000" kx="0" ky="0" algn="bl" rotWithShape="0" blurRad="101600" dist="12700" dir="5400000">
-              <a:srgbClr val="9AA8BC">
-                <a:alpha val="18000"/>
-              </a:srgbClr>
-            </a:outerShdw>
-          </a:effectLst>
-        </p:spPr>
-      </p:sp>
-      <p:sp>
-        <p:nvSpPr>
-          <p:cNvPr id="7" name="Shape 5"/>
-          <p:cNvSpPr/>
-          <p:nvPr/>
-        </p:nvSpPr>
-        <p:spPr>
-          <a:xfrm>
-            <a:off x="758952" y="1463040"/>
-            <a:ext cx="82296" cy="182880"/>
-          </a:xfrm>
-          <a:prstGeom prst="rect">
-            <a:avLst/>
-          </a:prstGeom>
-          <a:solidFill>
-            <a:srgbClr val="00A3C4"/>
-          </a:solidFill>
-          <a:ln w="12700">
-            <a:solidFill>
-              <a:srgbClr val="00A3C4"/>
-            </a:solidFill>
-            <a:prstDash val="solid"/>
-          </a:ln>
-        </p:spPr>
-      </p:sp>
-      <p:sp>
-        <p:nvSpPr>
-          <p:cNvPr id="8" name="Text 6"/>
-          <p:cNvSpPr txBox="1"/>
-          <p:nvPr/>
-        </p:nvSpPr>
-        <p:spPr>
-          <a:xfrm>
-            <a:off x="923544" y="1371600"/>
-            <a:ext cx="4480560" cy="365760"/>
-          </a:xfrm>
-          <a:prstGeom prst="rect">
-            <a:avLst/>
-          </a:prstGeom>
-          <a:noFill/>
-          <a:ln/>
-        </p:spPr>
-        <p:txBody>
-          <a:bodyPr wrap="square" lIns="0" tIns="0" rIns="0" bIns="0" rtlCol="0" anchor="ctr"/>
-          <a:lstStyle/>
-          <a:p>
-            <a:pPr indent="0" marL="0">
-              <a:buNone/>
-            </a:pPr>
-            <a:r>
-              <a:rPr lang="en-US" sz="1300" b="1" dirty="0">
-                <a:solidFill>
-                  <a:srgbClr val="16305B"/>
-                </a:solidFill>
-                <a:latin typeface="Malgun Gothic" pitchFamily="34" charset="0"/>
-                <a:ea typeface="Malgun Gothic" pitchFamily="34" charset="-122"/>
-                <a:cs typeface="Malgun Gothic" pitchFamily="34" charset="-120"/>
-              </a:rPr>
-              <a:t>DOE 기법 선정</a:t>
-            </a:r>
-            <a:endParaRPr lang="en-US" sz="1300" dirty="0"/>
-          </a:p>
-        </p:txBody>
-      </p:sp>
-      <p:graphicFrame>
-        <p:nvGraphicFramePr>
-          <p:cNvPr id="10" name="Table 0"/>
-          <p:cNvGraphicFramePr>
-            <a:graphicFrameLocks noGrp="1"/>
-          </p:cNvGraphicFramePr>
-          <p:nvPr>
-            <p:extLst>
-              <p:ext uri="{D42A27DB-BD31-4B8C-83A1-F6EECF244321}">
-                <p14:modId xmlns:p14="http://schemas.microsoft.com/office/powerpoint/2010/main" val="1579011935"/>
-              </p:ext>
-            </p:extLst>
-          </p:nvPr>
-        </p:nvGraphicFramePr>
-        <p:xfrm>
-          <a:off x="813816" y="1901952"/>
-          <a:ext cx="4846320" cy="914400"/>
-        </p:xfrm>
-        <a:graphic>
-          <a:graphicData uri="http://schemas.openxmlformats.org/drawingml/2006/table">
-            <a:tbl>
-              <a:tblPr/>
-              <a:tblGrid>
-                <a:gridCol w="2286000"/>
-                <a:gridCol w="2560320"/>
-              </a:tblGrid>
-              <a:tr h="310896">
-                <a:tc>
-                  <a:txBody>
-                    <a:bodyPr/>
-                    <a:lstStyle/>
-                    <a:p>
-                      <a:pPr indent="0" marL="0">
-                        <a:buNone/>
-                      </a:pPr>
-                      <a:r>
-                        <a:rPr lang="en-US" sz="950" b="1" dirty="0">
-                          <a:solidFill>
-                            <a:srgbClr val="16305B"/>
-                          </a:solidFill>
-                          <a:latin typeface="Malgun Gothic" pitchFamily="34" charset="0"/>
-                          <a:ea typeface="Malgun Gothic" pitchFamily="34" charset="-122"/>
-                          <a:cs typeface="Malgun Gothic" pitchFamily="34" charset="-120"/>
-                        </a:rPr>
-                        <a:t>방식</a:t>
-                      </a:r>
-                      <a:endParaRPr lang="en-US" sz="950" dirty="0">
-                        <a:latin typeface="Malgun Gothic" charset="0"/>
-                        <a:ea typeface="Malgun Gothic" charset="0"/>
-                        <a:cs typeface="Malgun Gothic" charset="0"/>
-                      </a:endParaRPr>
-                    </a:p>
-                  </a:txBody>
-                  <a:tcPr marL="50800" marR="50800" marT="25400" marB="25400" anchor="ctr">
-                    <a:lnL w="0" cap="flat" cmpd="sng" algn="ctr">
-                      <a:noFill/>
-                    </a:lnL>
-                    <a:lnR w="0" cap="flat" cmpd="sng" algn="ctr">
-                      <a:noFill/>
-                    </a:lnR>
-                    <a:lnT w="0" cap="flat" cmpd="sng" algn="ctr">
-                      <a:noFill/>
-                    </a:lnT>
-                    <a:lnB w="6350" cap="flat" cmpd="sng" algn="ctr">
-                      <a:solidFill>
-                        <a:srgbClr val="DDE3EB"/>
-                      </a:solidFill>
-                      <a:prstDash val="solid"/>
-                      <a:round/>
-                      <a:headEnd type="none" w="med" len="med"/>
-                      <a:tailEnd type="none" w="med" len="med"/>
-                    </a:lnB>
-                    <a:solidFill>
-                      <a:srgbClr val="EEF2F7"/>
-                    </a:solidFill>
-                  </a:tcPr>
-                </a:tc>
-                <a:tc>
-                  <a:txBody>
-                    <a:bodyPr/>
-                    <a:lstStyle/>
-                    <a:p>
-                      <a:pPr indent="0" marL="0">
-                        <a:buNone/>
-                      </a:pPr>
-                      <a:r>
-                        <a:rPr lang="en-US" sz="950" b="1" dirty="0">
-                          <a:solidFill>
-                            <a:srgbClr val="16305B"/>
-                          </a:solidFill>
-                          <a:latin typeface="Malgun Gothic" pitchFamily="34" charset="0"/>
-                          <a:ea typeface="Malgun Gothic" pitchFamily="34" charset="-122"/>
-                          <a:cs typeface="Malgun Gothic" pitchFamily="34" charset="-120"/>
-                        </a:rPr>
-                        <a:t>판정</a:t>
-                      </a:r>
-                      <a:endParaRPr lang="en-US" sz="950" dirty="0">
-                        <a:latin typeface="Malgun Gothic" charset="0"/>
-                        <a:ea typeface="Malgun Gothic" charset="0"/>
-                        <a:cs typeface="Malgun Gothic" charset="0"/>
-                      </a:endParaRPr>
-                    </a:p>
-                  </a:txBody>
-                  <a:tcPr marL="50800" marR="50800" marT="25400" marB="25400" anchor="ctr">
-                    <a:lnL w="0" cap="flat" cmpd="sng" algn="ctr">
-                      <a:noFill/>
-                    </a:lnL>
-                    <a:lnR w="0" cap="flat" cmpd="sng" algn="ctr">
-                      <a:noFill/>
-                    </a:lnR>
-                    <a:lnT w="0" cap="flat" cmpd="sng" algn="ctr">
-                      <a:noFill/>
-                    </a:lnT>
-                    <a:lnB w="6350" cap="flat" cmpd="sng" algn="ctr">
-                      <a:solidFill>
-                        <a:srgbClr val="DDE3EB"/>
-                      </a:solidFill>
-                      <a:prstDash val="solid"/>
-                      <a:round/>
-                      <a:headEnd type="none" w="med" len="med"/>
-                      <a:tailEnd type="none" w="med" len="med"/>
-                    </a:lnB>
-                    <a:solidFill>
-                      <a:srgbClr val="EEF2F7"/>
-                    </a:solidFill>
-                  </a:tcPr>
-                </a:tc>
-              </a:tr>
-              <a:tr h="310896">
-                <a:tc>
-                  <a:txBody>
-                    <a:bodyPr/>
-                    <a:lstStyle/>
-                    <a:p>
-                      <a:pPr indent="0" marL="0">
-                        <a:buNone/>
-                      </a:pPr>
-                      <a:r>
-                        <a:rPr lang="en-US" sz="950" dirty="0">
-                          <a:solidFill>
-                            <a:srgbClr val="1C2733"/>
-                          </a:solidFill>
-                          <a:latin typeface="Malgun Gothic" pitchFamily="34" charset="0"/>
-                          <a:ea typeface="Malgun Gothic" pitchFamily="34" charset="-122"/>
-                          <a:cs typeface="Malgun Gothic" pitchFamily="34" charset="-120"/>
-                        </a:rPr>
-                        <a:t>격자 전수탐색</a:t>
-                      </a:r>
-                      <a:endParaRPr lang="en-US" sz="950" dirty="0">
-                        <a:latin typeface="Malgun Gothic" charset="0"/>
-                        <a:ea typeface="Malgun Gothic" charset="0"/>
-                        <a:cs typeface="Malgun Gothic" charset="0"/>
-                      </a:endParaRPr>
-                    </a:p>
-                  </a:txBody>
-                  <a:tcPr marL="50800" marR="50800" marT="25400" marB="25400" anchor="ctr">
-                    <a:lnL w="0" cap="flat" cmpd="sng" algn="ctr">
-                      <a:noFill/>
-                    </a:lnL>
-                    <a:lnR w="0" cap="flat" cmpd="sng" algn="ctr">
-                      <a:noFill/>
-                    </a:lnR>
-                    <a:lnT w="0" cap="flat" cmpd="sng" algn="ctr">
-                      <a:noFill/>
-                    </a:lnT>
-                    <a:lnB w="6350" cap="flat" cmpd="sng" algn="ctr">
-                      <a:solidFill>
-                        <a:srgbClr val="DDE3EB"/>
-                      </a:solidFill>
-                      <a:prstDash val="solid"/>
-                      <a:round/>
-                      <a:headEnd type="none" w="med" len="med"/>
-                      <a:tailEnd type="none" w="med" len="med"/>
-                    </a:lnB>
-                  </a:tcPr>
-                </a:tc>
-                <a:tc>
-                  <a:txBody>
-                    <a:bodyPr/>
-                    <a:lstStyle/>
-                    <a:p>
-                      <a:pPr indent="0" marL="0">
-                        <a:buNone/>
-                      </a:pPr>
-                      <a:r>
-                        <a:rPr lang="en-US" sz="950" dirty="0">
-                          <a:solidFill>
-                            <a:srgbClr val="1C2733"/>
-                          </a:solidFill>
-                          <a:latin typeface="Malgun Gothic" pitchFamily="34" charset="0"/>
-                          <a:ea typeface="Malgun Gothic" pitchFamily="34" charset="-122"/>
-                          <a:cs typeface="Malgun Gothic" pitchFamily="34" charset="-120"/>
-                        </a:rPr>
-                        <a:t>✕   9차원 조합 수 폭증</a:t>
-                      </a:r>
-                      <a:endParaRPr lang="en-US" sz="950" dirty="0">
-                        <a:latin typeface="Malgun Gothic" charset="0"/>
-                        <a:ea typeface="Malgun Gothic" charset="0"/>
-                        <a:cs typeface="Malgun Gothic" charset="0"/>
-                      </a:endParaRPr>
-                    </a:p>
-                  </a:txBody>
-                  <a:tcPr marL="50800" marR="50800" marT="25400" marB="25400" anchor="ctr">
-                    <a:lnL w="0" cap="flat" cmpd="sng" algn="ctr">
-                      <a:noFill/>
-                    </a:lnL>
-                    <a:lnR w="0" cap="flat" cmpd="sng" algn="ctr">
-                      <a:noFill/>
-                    </a:lnR>
-                    <a:lnT w="0" cap="flat" cmpd="sng" algn="ctr">
-                      <a:noFill/>
-                    </a:lnT>
-                    <a:lnB w="6350" cap="flat" cmpd="sng" algn="ctr">
-                      <a:solidFill>
-                        <a:srgbClr val="DDE3EB"/>
-                      </a:solidFill>
-                      <a:prstDash val="solid"/>
-                      <a:round/>
-                      <a:headEnd type="none" w="med" len="med"/>
-                      <a:tailEnd type="none" w="med" len="med"/>
-                    </a:lnB>
-                  </a:tcPr>
-                </a:tc>
-              </a:tr>
-              <a:tr h="310896">
-                <a:tc>
-                  <a:txBody>
-                    <a:bodyPr/>
-                    <a:lstStyle/>
-                    <a:p>
-                      <a:pPr indent="0" marL="0">
-                        <a:buNone/>
-                      </a:pPr>
-                      <a:r>
-                        <a:rPr lang="en-US" sz="950" dirty="0">
-                          <a:solidFill>
-                            <a:srgbClr val="1C2733"/>
-                          </a:solidFill>
-                          <a:latin typeface="Malgun Gothic" pitchFamily="34" charset="0"/>
-                          <a:ea typeface="Malgun Gothic" pitchFamily="34" charset="-122"/>
-                          <a:cs typeface="Malgun Gothic" pitchFamily="34" charset="-120"/>
-                        </a:rPr>
-                        <a:t>무작위 샘플링</a:t>
-                      </a:r>
-                      <a:endParaRPr lang="en-US" sz="950" dirty="0">
-                        <a:latin typeface="Malgun Gothic" charset="0"/>
-                        <a:ea typeface="Malgun Gothic" charset="0"/>
-                        <a:cs typeface="Malgun Gothic" charset="0"/>
-                      </a:endParaRPr>
-                    </a:p>
-                  </a:txBody>
-                  <a:tcPr marL="50800" marR="50800" marT="25400" marB="25400" anchor="ctr">
-                    <a:lnL w="0" cap="flat" cmpd="sng" algn="ctr">
-                      <a:noFill/>
-                    </a:lnL>
-                    <a:lnR w="0" cap="flat" cmpd="sng" algn="ctr">
-                      <a:noFill/>
-                    </a:lnR>
-                    <a:lnT w="0" cap="flat" cmpd="sng" algn="ctr">
-                      <a:noFill/>
-                    </a:lnT>
-                    <a:lnB w="6350" cap="flat" cmpd="sng" algn="ctr">
-                      <a:solidFill>
-                        <a:srgbClr val="DDE3EB"/>
-                      </a:solidFill>
-                      <a:prstDash val="solid"/>
-                      <a:round/>
-                      <a:headEnd type="none" w="med" len="med"/>
-                      <a:tailEnd type="none" w="med" len="med"/>
-                    </a:lnB>
-                  </a:tcPr>
-                </a:tc>
-                <a:tc>
-                  <a:txBody>
-                    <a:bodyPr/>
-                    <a:lstStyle/>
-                    <a:p>
-                      <a:pPr indent="0" marL="0">
-                        <a:buNone/>
-                      </a:pPr>
-                      <a:r>
-                        <a:rPr lang="en-US" sz="950" dirty="0">
-                          <a:solidFill>
-                            <a:srgbClr val="1C2733"/>
-                          </a:solidFill>
-                          <a:latin typeface="Malgun Gothic" pitchFamily="34" charset="0"/>
-                          <a:ea typeface="Malgun Gothic" pitchFamily="34" charset="-122"/>
-                          <a:cs typeface="Malgun Gothic" pitchFamily="34" charset="-120"/>
-                        </a:rPr>
-                        <a:t>✕   설계공간 편중 발생</a:t>
-                      </a:r>
-                      <a:endParaRPr lang="en-US" sz="950" dirty="0">
-                        <a:latin typeface="Malgun Gothic" charset="0"/>
-                        <a:ea typeface="Malgun Gothic" charset="0"/>
-                        <a:cs typeface="Malgun Gothic" charset="0"/>
-                      </a:endParaRPr>
-                    </a:p>
-                  </a:txBody>
-                  <a:tcPr marL="50800" marR="50800" marT="25400" marB="25400" anchor="ctr">
-                    <a:lnL w="0" cap="flat" cmpd="sng" algn="ctr">
-                      <a:noFill/>
-                    </a:lnL>
-                    <a:lnR w="0" cap="flat" cmpd="sng" algn="ctr">
-                      <a:noFill/>
-                    </a:lnR>
-                    <a:lnT w="0" cap="flat" cmpd="sng" algn="ctr">
-                      <a:noFill/>
-                    </a:lnT>
-                    <a:lnB w="6350" cap="flat" cmpd="sng" algn="ctr">
-                      <a:solidFill>
-                        <a:srgbClr val="DDE3EB"/>
-                      </a:solidFill>
-                      <a:prstDash val="solid"/>
-                      <a:round/>
-                      <a:headEnd type="none" w="med" len="med"/>
-                      <a:tailEnd type="none" w="med" len="med"/>
-                    </a:lnB>
-                  </a:tcPr>
-                </a:tc>
-              </a:tr>
-              <a:tr h="310896">
-                <a:tc>
-                  <a:txBody>
-                    <a:bodyPr/>
-                    <a:lstStyle/>
-                    <a:p>
-                      <a:pPr indent="0" marL="0">
-                        <a:buNone/>
-                      </a:pPr>
-                      <a:r>
-                        <a:rPr lang="en-US" sz="950" b="1" dirty="0">
-                          <a:solidFill>
-                            <a:srgbClr val="16305B"/>
-                          </a:solidFill>
-                          <a:latin typeface="Malgun Gothic" pitchFamily="34" charset="0"/>
-                          <a:ea typeface="Malgun Gothic" pitchFamily="34" charset="-122"/>
-                          <a:cs typeface="Malgun Gothic" pitchFamily="34" charset="-120"/>
-                        </a:rPr>
-                        <a:t>최적라틴방격법 (OLHD)</a:t>
-                      </a:r>
-                      <a:endParaRPr lang="en-US" sz="950" dirty="0">
-                        <a:latin typeface="Malgun Gothic" charset="0"/>
-                        <a:ea typeface="Malgun Gothic" charset="0"/>
-                        <a:cs typeface="Malgun Gothic" charset="0"/>
-                      </a:endParaRPr>
-                    </a:p>
-                  </a:txBody>
-                  <a:tcPr marL="50800" marR="50800" marT="25400" marB="25400" anchor="ctr">
-                    <a:lnL w="0" cap="flat" cmpd="sng" algn="ctr">
-                      <a:noFill/>
-                    </a:lnL>
-                    <a:lnR w="0" cap="flat" cmpd="sng" algn="ctr">
-                      <a:noFill/>
-                    </a:lnR>
-                    <a:lnT w="0" cap="flat" cmpd="sng" algn="ctr">
-                      <a:noFill/>
-                    </a:lnT>
-                    <a:lnB w="6350" cap="flat" cmpd="sng" algn="ctr">
-                      <a:solidFill>
-                        <a:srgbClr val="DDE3EB"/>
-                      </a:solidFill>
-                      <a:prstDash val="solid"/>
-                      <a:round/>
-                      <a:headEnd type="none" w="med" len="med"/>
-                      <a:tailEnd type="none" w="med" len="med"/>
-                    </a:lnB>
-                  </a:tcPr>
-                </a:tc>
-                <a:tc>
-                  <a:txBody>
-                    <a:bodyPr/>
-                    <a:lstStyle/>
-                    <a:p>
-                      <a:pPr indent="0" marL="0">
-                        <a:buNone/>
-                      </a:pPr>
-                      <a:r>
-                        <a:rPr lang="en-US" sz="950" b="1" dirty="0">
-                          <a:solidFill>
-                            <a:srgbClr val="16305B"/>
-                          </a:solidFill>
-                          <a:latin typeface="Malgun Gothic" pitchFamily="34" charset="0"/>
-                          <a:ea typeface="Malgun Gothic" pitchFamily="34" charset="-122"/>
-                          <a:cs typeface="Malgun Gothic" pitchFamily="34" charset="-120"/>
-                        </a:rPr>
-                        <a:t>○   적은 점으로 균일 분포</a:t>
-                      </a:r>
-                      <a:endParaRPr lang="en-US" sz="950" dirty="0">
-                        <a:latin typeface="Malgun Gothic" charset="0"/>
-                        <a:ea typeface="Malgun Gothic" charset="0"/>
-                        <a:cs typeface="Malgun Gothic" charset="0"/>
-                      </a:endParaRPr>
-                    </a:p>
-                  </a:txBody>
-                  <a:tcPr marL="50800" marR="50800" marT="25400" marB="25400" anchor="ctr">
-                    <a:lnL w="0" cap="flat" cmpd="sng" algn="ctr">
-                      <a:noFill/>
-                    </a:lnL>
-                    <a:lnR w="0" cap="flat" cmpd="sng" algn="ctr">
-                      <a:noFill/>
-                    </a:lnR>
-                    <a:lnT w="0" cap="flat" cmpd="sng" algn="ctr">
-                      <a:noFill/>
-                    </a:lnT>
-                    <a:lnB w="6350" cap="flat" cmpd="sng" algn="ctr">
-                      <a:solidFill>
-                        <a:srgbClr val="DDE3EB"/>
-                      </a:solidFill>
-                      <a:prstDash val="solid"/>
-                      <a:round/>
-                      <a:headEnd type="none" w="med" len="med"/>
-                      <a:tailEnd type="none" w="med" len="med"/>
-                    </a:lnB>
-                  </a:tcPr>
-                </a:tc>
-              </a:tr>
-            </a:tbl>
-          </a:graphicData>
-        </a:graphic>
-      </p:graphicFrame>
-      <p:sp>
-        <p:nvSpPr>
-          <p:cNvPr id="10" name="Shape 7"/>
-          <p:cNvSpPr/>
-          <p:nvPr/>
-        </p:nvSpPr>
-        <p:spPr>
-          <a:xfrm>
-            <a:off x="813816" y="3182112"/>
-            <a:ext cx="4846320" cy="411480"/>
-          </a:xfrm>
-          <a:prstGeom prst="roundRect">
-            <a:avLst>
-              <a:gd name="adj" fmla="val 13333"/>
-            </a:avLst>
-          </a:prstGeom>
-          <a:solidFill>
-            <a:srgbClr val="16305B"/>
-          </a:solidFill>
-          <a:ln/>
-        </p:spPr>
-      </p:sp>
-      <p:sp>
-        <p:nvSpPr>
-          <p:cNvPr id="11" name="Text 8"/>
-          <p:cNvSpPr txBox="1"/>
-          <p:nvPr/>
-        </p:nvSpPr>
-        <p:spPr>
-          <a:xfrm>
-            <a:off x="813816" y="3182112"/>
-            <a:ext cx="4846320" cy="411480"/>
-          </a:xfrm>
-          <a:prstGeom prst="rect">
-            <a:avLst/>
-          </a:prstGeom>
-          <a:noFill/>
-          <a:ln/>
-        </p:spPr>
-        <p:txBody>
-          <a:bodyPr wrap="square" lIns="0" tIns="0" rIns="0" bIns="0" rtlCol="0" anchor="ctr"/>
-          <a:lstStyle/>
-          <a:p>
-            <a:pPr algn="ctr" indent="0" marL="0">
-              <a:buNone/>
-            </a:pPr>
-            <a:r>
-              <a:rPr lang="en-US" sz="1100" b="1" dirty="0">
-                <a:solidFill>
-                  <a:srgbClr val="FFFFFF"/>
-                </a:solidFill>
-                <a:latin typeface="Malgun Gothic" pitchFamily="34" charset="0"/>
-                <a:ea typeface="Malgun Gothic" pitchFamily="34" charset="-122"/>
-                <a:cs typeface="Malgun Gothic" pitchFamily="34" charset="-120"/>
-              </a:rPr>
-              <a:t>초기 실험점 = 10 × 변수 수 = 90 점</a:t>
-            </a:r>
-            <a:endParaRPr lang="en-US" sz="1100" dirty="0"/>
-          </a:p>
-        </p:txBody>
-      </p:sp>
-      <p:sp>
-        <p:nvSpPr>
-          <p:cNvPr id="12" name="Shape 9"/>
-          <p:cNvSpPr/>
-          <p:nvPr/>
-        </p:nvSpPr>
-        <p:spPr>
-          <a:xfrm>
-            <a:off x="6336792" y="1188720"/>
-            <a:ext cx="5440680" cy="2487168"/>
-          </a:xfrm>
-          <a:prstGeom prst="roundRect">
-            <a:avLst>
-              <a:gd name="adj" fmla="val 2206"/>
-            </a:avLst>
-          </a:prstGeom>
-          <a:solidFill>
-            <a:srgbClr val="FFFFFF"/>
-          </a:solidFill>
-          <a:ln w="9525">
-            <a:solidFill>
-              <a:srgbClr val="DDE3EB"/>
-            </a:solidFill>
-            <a:prstDash val="solid"/>
-          </a:ln>
-          <a:effectLst>
-            <a:outerShdw sx="100000" sy="100000" kx="0" ky="0" algn="bl" rotWithShape="0" blurRad="101600" dist="12700" dir="5400000">
-              <a:srgbClr val="9AA8BC">
-                <a:alpha val="18000"/>
-              </a:srgbClr>
-            </a:outerShdw>
-          </a:effectLst>
-        </p:spPr>
-      </p:sp>
-      <p:sp>
-        <p:nvSpPr>
-          <p:cNvPr id="13" name="Shape 10"/>
-          <p:cNvSpPr/>
-          <p:nvPr/>
-        </p:nvSpPr>
-        <p:spPr>
-          <a:xfrm>
-            <a:off x="6592824" y="1463040"/>
-            <a:ext cx="82296" cy="182880"/>
-          </a:xfrm>
-          <a:prstGeom prst="rect">
-            <a:avLst/>
-          </a:prstGeom>
-          <a:solidFill>
-            <a:srgbClr val="00A3C4"/>
-          </a:solidFill>
-          <a:ln w="12700">
-            <a:solidFill>
-              <a:srgbClr val="00A3C4"/>
-            </a:solidFill>
-            <a:prstDash val="solid"/>
-          </a:ln>
-        </p:spPr>
-      </p:sp>
-      <p:sp>
-        <p:nvSpPr>
-          <p:cNvPr id="14" name="Text 11"/>
-          <p:cNvSpPr txBox="1"/>
-          <p:nvPr/>
-        </p:nvSpPr>
-        <p:spPr>
-          <a:xfrm>
-            <a:off x="6757416" y="1371600"/>
-            <a:ext cx="4480560" cy="365760"/>
-          </a:xfrm>
-          <a:prstGeom prst="rect">
-            <a:avLst/>
-          </a:prstGeom>
-          <a:noFill/>
-          <a:ln/>
-        </p:spPr>
-        <p:txBody>
-          <a:bodyPr wrap="square" lIns="0" tIns="0" rIns="0" bIns="0" rtlCol="0" anchor="ctr"/>
-          <a:lstStyle/>
-          <a:p>
-            <a:pPr indent="0" marL="0">
-              <a:buNone/>
-            </a:pPr>
-            <a:r>
-              <a:rPr lang="en-US" sz="1300" b="1" dirty="0">
-                <a:solidFill>
-                  <a:srgbClr val="16305B"/>
-                </a:solidFill>
-                <a:latin typeface="Malgun Gothic" pitchFamily="34" charset="0"/>
-                <a:ea typeface="Malgun Gothic" pitchFamily="34" charset="-122"/>
-                <a:cs typeface="Malgun Gothic" pitchFamily="34" charset="-120"/>
-              </a:rPr>
-              <a:t>가공 제약 반영 방식</a:t>
-            </a:r>
-            <a:endParaRPr lang="en-US" sz="1300" dirty="0"/>
-          </a:p>
-        </p:txBody>
-      </p:sp>
-      <p:sp>
-        <p:nvSpPr>
-          <p:cNvPr id="15" name="Shape 12"/>
-          <p:cNvSpPr/>
-          <p:nvPr/>
-        </p:nvSpPr>
-        <p:spPr>
-          <a:xfrm>
-            <a:off x="6647688" y="1920240"/>
-            <a:ext cx="4846320" cy="713232"/>
-          </a:xfrm>
-          <a:prstGeom prst="roundRect">
-            <a:avLst>
-              <a:gd name="adj" fmla="val 7692"/>
-            </a:avLst>
-          </a:prstGeom>
-          <a:solidFill>
-            <a:srgbClr val="F7F9FC"/>
-          </a:solidFill>
-          <a:ln w="9525">
-            <a:solidFill>
-              <a:srgbClr val="DDE3EB"/>
-            </a:solidFill>
-            <a:prstDash val="solid"/>
-          </a:ln>
-        </p:spPr>
-      </p:sp>
-      <p:sp>
-        <p:nvSpPr>
-          <p:cNvPr id="16" name="Text 13"/>
-          <p:cNvSpPr txBox="1"/>
-          <p:nvPr/>
-        </p:nvSpPr>
-        <p:spPr>
-          <a:xfrm>
-            <a:off x="6793992" y="1993392"/>
-            <a:ext cx="4572000" cy="566928"/>
-          </a:xfrm>
-          <a:prstGeom prst="rect">
-            <a:avLst/>
-          </a:prstGeom>
-          <a:noFill/>
-          <a:ln/>
-        </p:spPr>
-        <p:txBody>
-          <a:bodyPr wrap="square" lIns="0" tIns="0" rIns="0" bIns="0" rtlCol="0" anchor="ctr"/>
-          <a:lstStyle/>
-          <a:p>
-            <a:pPr indent="0" marL="0">
-              <a:lnSpc>
-                <a:spcPct val="125000"/>
-              </a:lnSpc>
-              <a:buNone/>
-            </a:pPr>
-            <a:r>
-              <a:rPr lang="en-US" sz="950" b="1" dirty="0">
-                <a:solidFill>
-                  <a:srgbClr val="6B7A8F"/>
-                </a:solidFill>
-                <a:latin typeface="Malgun Gothic" pitchFamily="34" charset="0"/>
-                <a:ea typeface="Malgun Gothic" pitchFamily="34" charset="-122"/>
-                <a:cs typeface="Malgun Gothic" pitchFamily="34" charset="-120"/>
-              </a:rPr>
-              <a:t>기각 방식</a:t>
-            </a:r>
-            <a:endParaRPr lang="en-US" sz="950" dirty="0"/>
-          </a:p>
-          <a:p>
-            <a:pPr indent="0" marL="0">
-              <a:lnSpc>
-                <a:spcPct val="125000"/>
-              </a:lnSpc>
-              <a:buNone/>
-            </a:pPr>
-            <a:r>
-              <a:rPr lang="en-US" sz="950" dirty="0">
-                <a:solidFill>
-                  <a:srgbClr val="6B7A8F"/>
-                </a:solidFill>
-                <a:latin typeface="Malgun Gothic" pitchFamily="34" charset="0"/>
-                <a:ea typeface="Malgun Gothic" pitchFamily="34" charset="-122"/>
-                <a:cs typeface="Malgun Gothic" pitchFamily="34" charset="-120"/>
-              </a:rPr>
-              <a:t>뽑은 뒤 제약 위반이면 폐기 → 후보 30% 낭비 · 층화 붕괴</a:t>
-            </a:r>
-            <a:endParaRPr lang="en-US" sz="950" dirty="0"/>
-          </a:p>
-        </p:txBody>
-      </p:sp>
-      <p:sp>
-        <p:nvSpPr>
-          <p:cNvPr id="17" name="Shape 14"/>
-          <p:cNvSpPr/>
-          <p:nvPr/>
-        </p:nvSpPr>
-        <p:spPr>
-          <a:xfrm>
-            <a:off x="6647688" y="2743200"/>
-            <a:ext cx="4846320" cy="713232"/>
-          </a:xfrm>
-          <a:prstGeom prst="roundRect">
-            <a:avLst>
-              <a:gd name="adj" fmla="val 7692"/>
-            </a:avLst>
-          </a:prstGeom>
-          <a:solidFill>
-            <a:srgbClr val="E8F4F8"/>
-          </a:solidFill>
-          <a:ln w="9525">
-            <a:solidFill>
-              <a:srgbClr val="00A3C4"/>
-            </a:solidFill>
-            <a:prstDash val="solid"/>
-          </a:ln>
-        </p:spPr>
-      </p:sp>
-      <p:sp>
-        <p:nvSpPr>
-          <p:cNvPr id="18" name="Text 15"/>
-          <p:cNvSpPr txBox="1"/>
-          <p:nvPr/>
-        </p:nvSpPr>
-        <p:spPr>
-          <a:xfrm>
-            <a:off x="6793992" y="2816352"/>
-            <a:ext cx="4572000" cy="566928"/>
-          </a:xfrm>
-          <a:prstGeom prst="rect">
-            <a:avLst/>
-          </a:prstGeom>
-          <a:noFill/>
-          <a:ln/>
-        </p:spPr>
-        <p:txBody>
-          <a:bodyPr wrap="square" lIns="0" tIns="0" rIns="0" bIns="0" rtlCol="0" anchor="ctr"/>
-          <a:lstStyle/>
-          <a:p>
-            <a:pPr indent="0" marL="0">
-              <a:lnSpc>
-                <a:spcPct val="125000"/>
-              </a:lnSpc>
-              <a:buNone/>
-            </a:pPr>
-            <a:r>
-              <a:rPr lang="en-US" sz="950" b="1" dirty="0">
-                <a:solidFill>
-                  <a:srgbClr val="16305B"/>
-                </a:solidFill>
-                <a:latin typeface="Malgun Gothic" pitchFamily="34" charset="0"/>
-                <a:ea typeface="Malgun Gothic" pitchFamily="34" charset="-122"/>
-                <a:cs typeface="Malgun Gothic" pitchFamily="34" charset="-120"/>
-              </a:rPr>
-              <a:t>채택 방식</a:t>
-            </a:r>
-            <a:endParaRPr lang="en-US" sz="950" dirty="0"/>
-          </a:p>
-          <a:p>
-            <a:pPr indent="0" marL="0">
-              <a:lnSpc>
-                <a:spcPct val="125000"/>
-              </a:lnSpc>
-              <a:buNone/>
-            </a:pPr>
-            <a:r>
-              <a:rPr lang="en-US" sz="950" dirty="0">
-                <a:solidFill>
-                  <a:srgbClr val="1C2733"/>
-                </a:solidFill>
-                <a:latin typeface="Malgun Gothic" pitchFamily="34" charset="0"/>
-                <a:ea typeface="Malgun Gothic" pitchFamily="34" charset="-122"/>
-                <a:cs typeface="Malgun Gothic" pitchFamily="34" charset="-120"/>
-              </a:rPr>
-              <a:t>두께별 허용 개수 범위 안으로 접어 넣어 생성 → 낭비 0 · 층화 유지</a:t>
-            </a:r>
-            <a:endParaRPr lang="en-US" sz="950" dirty="0"/>
-          </a:p>
-        </p:txBody>
-      </p:sp>
-      <p:sp>
-        <p:nvSpPr>
-          <p:cNvPr id="19" name="Shape 16"/>
-          <p:cNvSpPr/>
-          <p:nvPr/>
-        </p:nvSpPr>
-        <p:spPr>
-          <a:xfrm>
-            <a:off x="502920" y="3822192"/>
-            <a:ext cx="5440680" cy="2487168"/>
-          </a:xfrm>
-          <a:prstGeom prst="roundRect">
-            <a:avLst>
-              <a:gd name="adj" fmla="val 2206"/>
-            </a:avLst>
-          </a:prstGeom>
-          <a:solidFill>
-            <a:srgbClr val="FFFFFF"/>
-          </a:solidFill>
-          <a:ln w="9525">
-            <a:solidFill>
-              <a:srgbClr val="DDE3EB"/>
-            </a:solidFill>
-            <a:prstDash val="solid"/>
-          </a:ln>
-          <a:effectLst>
-            <a:outerShdw sx="100000" sy="100000" kx="0" ky="0" algn="bl" rotWithShape="0" blurRad="101600" dist="12700" dir="5400000">
-              <a:srgbClr val="9AA8BC">
-                <a:alpha val="18000"/>
-              </a:srgbClr>
-            </a:outerShdw>
-          </a:effectLst>
-        </p:spPr>
-      </p:sp>
-      <p:sp>
-        <p:nvSpPr>
-          <p:cNvPr id="20" name="Shape 17"/>
-          <p:cNvSpPr/>
-          <p:nvPr/>
-        </p:nvSpPr>
-        <p:spPr>
-          <a:xfrm>
-            <a:off x="758952" y="4096512"/>
-            <a:ext cx="82296" cy="182880"/>
-          </a:xfrm>
-          <a:prstGeom prst="rect">
-            <a:avLst/>
-          </a:prstGeom>
-          <a:solidFill>
-            <a:srgbClr val="00A3C4"/>
-          </a:solidFill>
-          <a:ln w="12700">
-            <a:solidFill>
-              <a:srgbClr val="00A3C4"/>
-            </a:solidFill>
-            <a:prstDash val="solid"/>
-          </a:ln>
-        </p:spPr>
-      </p:sp>
-      <p:sp>
-        <p:nvSpPr>
-          <p:cNvPr id="21" name="Text 18"/>
-          <p:cNvSpPr txBox="1"/>
-          <p:nvPr/>
-        </p:nvSpPr>
-        <p:spPr>
-          <a:xfrm>
-            <a:off x="923544" y="4005072"/>
-            <a:ext cx="4480560" cy="365760"/>
-          </a:xfrm>
-          <a:prstGeom prst="rect">
-            <a:avLst/>
-          </a:prstGeom>
-          <a:noFill/>
-          <a:ln/>
-        </p:spPr>
-        <p:txBody>
-          <a:bodyPr wrap="square" lIns="0" tIns="0" rIns="0" bIns="0" rtlCol="0" anchor="ctr"/>
-          <a:lstStyle/>
-          <a:p>
-            <a:pPr indent="0" marL="0">
-              <a:buNone/>
-            </a:pPr>
-            <a:r>
-              <a:rPr lang="en-US" sz="1300" b="1" dirty="0">
-                <a:solidFill>
-                  <a:srgbClr val="16305B"/>
-                </a:solidFill>
-                <a:latin typeface="Malgun Gothic" pitchFamily="34" charset="0"/>
-                <a:ea typeface="Malgun Gothic" pitchFamily="34" charset="-122"/>
-                <a:cs typeface="Malgun Gothic" pitchFamily="34" charset="-120"/>
-              </a:rPr>
-              <a:t>자동 해석 루프</a:t>
-            </a:r>
-            <a:endParaRPr lang="en-US" sz="1300" dirty="0"/>
-          </a:p>
-        </p:txBody>
-      </p:sp>
-      <p:sp>
-        <p:nvSpPr>
-          <p:cNvPr id="22" name="Shape 19"/>
-          <p:cNvSpPr/>
-          <p:nvPr/>
-        </p:nvSpPr>
-        <p:spPr>
-          <a:xfrm>
-            <a:off x="832104" y="4517136"/>
-            <a:ext cx="274320" cy="274320"/>
-          </a:xfrm>
-          <a:prstGeom prst="ellipse">
-            <a:avLst/>
-          </a:prstGeom>
-          <a:solidFill>
-            <a:srgbClr val="16305B"/>
-          </a:solidFill>
-          <a:ln w="12700">
-            <a:solidFill>
-              <a:srgbClr val="16305B"/>
-            </a:solidFill>
-            <a:prstDash val="solid"/>
-          </a:ln>
-        </p:spPr>
-      </p:sp>
-      <p:sp>
-        <p:nvSpPr>
-          <p:cNvPr id="23" name="Text 20"/>
-          <p:cNvSpPr txBox="1"/>
-          <p:nvPr/>
-        </p:nvSpPr>
-        <p:spPr>
-          <a:xfrm>
-            <a:off x="832104" y="4517136"/>
-            <a:ext cx="274320" cy="274320"/>
-          </a:xfrm>
-          <a:prstGeom prst="rect">
-            <a:avLst/>
-          </a:prstGeom>
-          <a:noFill/>
-          <a:ln/>
-        </p:spPr>
-        <p:txBody>
-          <a:bodyPr wrap="square" lIns="0" tIns="0" rIns="0" bIns="0" rtlCol="0" anchor="ctr"/>
-          <a:lstStyle/>
-          <a:p>
-            <a:pPr algn="ctr" indent="0" marL="0">
-              <a:buNone/>
-            </a:pPr>
-            <a:r>
-              <a:rPr lang="en-US" sz="900" b="1" dirty="0">
-                <a:solidFill>
-                  <a:srgbClr val="FFFFFF"/>
-                </a:solidFill>
-                <a:latin typeface="Malgun Gothic" pitchFamily="34" charset="0"/>
-                <a:ea typeface="Malgun Gothic" pitchFamily="34" charset="-122"/>
-                <a:cs typeface="Malgun Gothic" pitchFamily="34" charset="-120"/>
-              </a:rPr>
-              <a:t>1</a:t>
-            </a:r>
-            <a:endParaRPr lang="en-US" sz="900" dirty="0"/>
-          </a:p>
-        </p:txBody>
-      </p:sp>
-      <p:sp>
-        <p:nvSpPr>
-          <p:cNvPr id="24" name="Text 21"/>
-          <p:cNvSpPr txBox="1"/>
-          <p:nvPr/>
-        </p:nvSpPr>
-        <p:spPr>
-          <a:xfrm>
-            <a:off x="1216152" y="4517136"/>
-            <a:ext cx="4389120" cy="274320"/>
-          </a:xfrm>
-          <a:prstGeom prst="rect">
-            <a:avLst/>
-          </a:prstGeom>
-          <a:noFill/>
-          <a:ln/>
-        </p:spPr>
-        <p:txBody>
-          <a:bodyPr wrap="square" lIns="0" tIns="0" rIns="0" bIns="0" rtlCol="0" anchor="ctr"/>
-          <a:lstStyle/>
-          <a:p>
-            <a:pPr indent="0" marL="0">
-              <a:buNone/>
-            </a:pPr>
-            <a:r>
-              <a:rPr lang="en-US" sz="1050" dirty="0">
-                <a:solidFill>
-                  <a:srgbClr val="1C2733"/>
-                </a:solidFill>
-                <a:latin typeface="Malgun Gothic" pitchFamily="34" charset="0"/>
-                <a:ea typeface="Malgun Gothic" pitchFamily="34" charset="-122"/>
-                <a:cs typeface="Malgun Gothic" pitchFamily="34" charset="-120"/>
-              </a:rPr>
-              <a:t>DOE 실험점 선정</a:t>
-            </a:r>
-            <a:endParaRPr lang="en-US" sz="1050" dirty="0"/>
-          </a:p>
-        </p:txBody>
-      </p:sp>
-      <p:sp>
-        <p:nvSpPr>
-          <p:cNvPr id="25" name="Shape 22"/>
-          <p:cNvSpPr/>
-          <p:nvPr/>
-        </p:nvSpPr>
-        <p:spPr>
-          <a:xfrm>
-            <a:off x="832104" y="4864608"/>
-            <a:ext cx="274320" cy="274320"/>
-          </a:xfrm>
-          <a:prstGeom prst="ellipse">
-            <a:avLst/>
-          </a:prstGeom>
-          <a:solidFill>
-            <a:srgbClr val="16305B"/>
-          </a:solidFill>
-          <a:ln w="12700">
-            <a:solidFill>
-              <a:srgbClr val="16305B"/>
-            </a:solidFill>
-            <a:prstDash val="solid"/>
-          </a:ln>
-        </p:spPr>
-      </p:sp>
-      <p:sp>
-        <p:nvSpPr>
-          <p:cNvPr id="26" name="Text 23"/>
-          <p:cNvSpPr txBox="1"/>
-          <p:nvPr/>
-        </p:nvSpPr>
-        <p:spPr>
-          <a:xfrm>
-            <a:off x="832104" y="4864608"/>
-            <a:ext cx="274320" cy="274320"/>
-          </a:xfrm>
-          <a:prstGeom prst="rect">
-            <a:avLst/>
-          </a:prstGeom>
-          <a:noFill/>
-          <a:ln/>
-        </p:spPr>
-        <p:txBody>
-          <a:bodyPr wrap="square" lIns="0" tIns="0" rIns="0" bIns="0" rtlCol="0" anchor="ctr"/>
-          <a:lstStyle/>
-          <a:p>
-            <a:pPr algn="ctr" indent="0" marL="0">
-              <a:buNone/>
-            </a:pPr>
-            <a:r>
-              <a:rPr lang="en-US" sz="900" b="1" dirty="0">
-                <a:solidFill>
-                  <a:srgbClr val="FFFFFF"/>
-                </a:solidFill>
-                <a:latin typeface="Malgun Gothic" pitchFamily="34" charset="0"/>
-                <a:ea typeface="Malgun Gothic" pitchFamily="34" charset="-122"/>
-                <a:cs typeface="Malgun Gothic" pitchFamily="34" charset="-120"/>
-              </a:rPr>
-              <a:t>2</a:t>
-            </a:r>
-            <a:endParaRPr lang="en-US" sz="900" dirty="0"/>
-          </a:p>
-        </p:txBody>
-      </p:sp>
-      <p:sp>
-        <p:nvSpPr>
-          <p:cNvPr id="27" name="Text 24"/>
-          <p:cNvSpPr txBox="1"/>
-          <p:nvPr/>
-        </p:nvSpPr>
-        <p:spPr>
-          <a:xfrm>
-            <a:off x="1216152" y="4864608"/>
-            <a:ext cx="4389120" cy="274320"/>
-          </a:xfrm>
-          <a:prstGeom prst="rect">
-            <a:avLst/>
-          </a:prstGeom>
-          <a:noFill/>
-          <a:ln/>
-        </p:spPr>
-        <p:txBody>
-          <a:bodyPr wrap="square" lIns="0" tIns="0" rIns="0" bIns="0" rtlCol="0" anchor="ctr"/>
-          <a:lstStyle/>
-          <a:p>
-            <a:pPr indent="0" marL="0">
-              <a:buNone/>
-            </a:pPr>
-            <a:r>
-              <a:rPr lang="en-US" sz="1050" dirty="0">
-                <a:solidFill>
-                  <a:srgbClr val="1C2733"/>
-                </a:solidFill>
-                <a:latin typeface="Malgun Gothic" pitchFamily="34" charset="0"/>
-                <a:ea typeface="Malgun Gothic" pitchFamily="34" charset="-122"/>
-                <a:cs typeface="Malgun Gothic" pitchFamily="34" charset="-120"/>
-              </a:rPr>
-              <a:t>CAD 리빌드 · STEP 저장</a:t>
-            </a:r>
-            <a:endParaRPr lang="en-US" sz="1050" dirty="0"/>
-          </a:p>
-        </p:txBody>
-      </p:sp>
-      <p:sp>
-        <p:nvSpPr>
-          <p:cNvPr id="28" name="Shape 25"/>
-          <p:cNvSpPr/>
-          <p:nvPr/>
-        </p:nvSpPr>
-        <p:spPr>
-          <a:xfrm>
-            <a:off x="832104" y="5212080"/>
-            <a:ext cx="274320" cy="274320"/>
-          </a:xfrm>
-          <a:prstGeom prst="ellipse">
-            <a:avLst/>
-          </a:prstGeom>
-          <a:solidFill>
-            <a:srgbClr val="16305B"/>
-          </a:solidFill>
-          <a:ln w="12700">
-            <a:solidFill>
-              <a:srgbClr val="16305B"/>
-            </a:solidFill>
-            <a:prstDash val="solid"/>
-          </a:ln>
-        </p:spPr>
-      </p:sp>
-      <p:sp>
-        <p:nvSpPr>
-          <p:cNvPr id="29" name="Text 26"/>
-          <p:cNvSpPr txBox="1"/>
-          <p:nvPr/>
-        </p:nvSpPr>
-        <p:spPr>
-          <a:xfrm>
-            <a:off x="832104" y="5212080"/>
-            <a:ext cx="274320" cy="274320"/>
-          </a:xfrm>
-          <a:prstGeom prst="rect">
-            <a:avLst/>
-          </a:prstGeom>
-          <a:noFill/>
-          <a:ln/>
-        </p:spPr>
-        <p:txBody>
-          <a:bodyPr wrap="square" lIns="0" tIns="0" rIns="0" bIns="0" rtlCol="0" anchor="ctr"/>
-          <a:lstStyle/>
-          <a:p>
-            <a:pPr algn="ctr" indent="0" marL="0">
-              <a:buNone/>
-            </a:pPr>
-            <a:r>
-              <a:rPr lang="en-US" sz="900" b="1" dirty="0">
-                <a:solidFill>
-                  <a:srgbClr val="FFFFFF"/>
-                </a:solidFill>
-                <a:latin typeface="Malgun Gothic" pitchFamily="34" charset="0"/>
-                <a:ea typeface="Malgun Gothic" pitchFamily="34" charset="-122"/>
-                <a:cs typeface="Malgun Gothic" pitchFamily="34" charset="-120"/>
-              </a:rPr>
-              <a:t>3</a:t>
-            </a:r>
-            <a:endParaRPr lang="en-US" sz="900" dirty="0"/>
-          </a:p>
-        </p:txBody>
-      </p:sp>
-      <p:sp>
-        <p:nvSpPr>
-          <p:cNvPr id="30" name="Text 27"/>
-          <p:cNvSpPr txBox="1"/>
-          <p:nvPr/>
-        </p:nvSpPr>
-        <p:spPr>
-          <a:xfrm>
-            <a:off x="1216152" y="5212080"/>
-            <a:ext cx="4389120" cy="274320"/>
-          </a:xfrm>
-          <a:prstGeom prst="rect">
-            <a:avLst/>
-          </a:prstGeom>
-          <a:noFill/>
-          <a:ln/>
-        </p:spPr>
-        <p:txBody>
-          <a:bodyPr wrap="square" lIns="0" tIns="0" rIns="0" bIns="0" rtlCol="0" anchor="ctr"/>
-          <a:lstStyle/>
-          <a:p>
-            <a:pPr indent="0" marL="0">
-              <a:buNone/>
-            </a:pPr>
-            <a:r>
-              <a:rPr lang="en-US" sz="1050" dirty="0">
-                <a:solidFill>
-                  <a:srgbClr val="1C2733"/>
-                </a:solidFill>
-                <a:latin typeface="Malgun Gothic" pitchFamily="34" charset="0"/>
-                <a:ea typeface="Malgun Gothic" pitchFamily="34" charset="-122"/>
-                <a:cs typeface="Malgun Gothic" pitchFamily="34" charset="-120"/>
-              </a:rPr>
-              <a:t>Icepak 해석 수행</a:t>
-            </a:r>
-            <a:endParaRPr lang="en-US" sz="1050" dirty="0"/>
-          </a:p>
-        </p:txBody>
-      </p:sp>
-      <p:sp>
-        <p:nvSpPr>
-          <p:cNvPr id="31" name="Shape 28"/>
-          <p:cNvSpPr/>
-          <p:nvPr/>
-        </p:nvSpPr>
-        <p:spPr>
-          <a:xfrm>
-            <a:off x="832104" y="5559552"/>
-            <a:ext cx="274320" cy="274320"/>
-          </a:xfrm>
-          <a:prstGeom prst="ellipse">
-            <a:avLst/>
-          </a:prstGeom>
-          <a:solidFill>
-            <a:srgbClr val="16305B"/>
-          </a:solidFill>
-          <a:ln w="12700">
-            <a:solidFill>
-              <a:srgbClr val="16305B"/>
-            </a:solidFill>
-            <a:prstDash val="solid"/>
-          </a:ln>
-        </p:spPr>
-      </p:sp>
-      <p:sp>
-        <p:nvSpPr>
-          <p:cNvPr id="32" name="Text 29"/>
-          <p:cNvSpPr txBox="1"/>
-          <p:nvPr/>
-        </p:nvSpPr>
-        <p:spPr>
-          <a:xfrm>
-            <a:off x="832104" y="5559552"/>
-            <a:ext cx="274320" cy="274320"/>
-          </a:xfrm>
-          <a:prstGeom prst="rect">
-            <a:avLst/>
-          </a:prstGeom>
-          <a:noFill/>
-          <a:ln/>
-        </p:spPr>
-        <p:txBody>
-          <a:bodyPr wrap="square" lIns="0" tIns="0" rIns="0" bIns="0" rtlCol="0" anchor="ctr"/>
-          <a:lstStyle/>
-          <a:p>
-            <a:pPr algn="ctr" indent="0" marL="0">
-              <a:buNone/>
-            </a:pPr>
-            <a:r>
-              <a:rPr lang="en-US" sz="900" b="1" dirty="0">
-                <a:solidFill>
-                  <a:srgbClr val="FFFFFF"/>
-                </a:solidFill>
-                <a:latin typeface="Malgun Gothic" pitchFamily="34" charset="0"/>
-                <a:ea typeface="Malgun Gothic" pitchFamily="34" charset="-122"/>
-                <a:cs typeface="Malgun Gothic" pitchFamily="34" charset="-120"/>
-              </a:rPr>
-              <a:t>4</a:t>
-            </a:r>
-            <a:endParaRPr lang="en-US" sz="900" dirty="0"/>
-          </a:p>
-        </p:txBody>
-      </p:sp>
-      <p:sp>
-        <p:nvSpPr>
-          <p:cNvPr id="33" name="Text 30"/>
-          <p:cNvSpPr txBox="1"/>
-          <p:nvPr/>
-        </p:nvSpPr>
-        <p:spPr>
-          <a:xfrm>
-            <a:off x="1216152" y="5559552"/>
-            <a:ext cx="4389120" cy="274320"/>
-          </a:xfrm>
-          <a:prstGeom prst="rect">
-            <a:avLst/>
-          </a:prstGeom>
-          <a:noFill/>
-          <a:ln/>
-        </p:spPr>
-        <p:txBody>
-          <a:bodyPr wrap="square" lIns="0" tIns="0" rIns="0" bIns="0" rtlCol="0" anchor="ctr"/>
-          <a:lstStyle/>
-          <a:p>
-            <a:pPr indent="0" marL="0">
-              <a:buNone/>
-            </a:pPr>
-            <a:r>
-              <a:rPr lang="en-US" sz="1050" dirty="0">
-                <a:solidFill>
-                  <a:srgbClr val="1C2733"/>
-                </a:solidFill>
-                <a:latin typeface="Malgun Gothic" pitchFamily="34" charset="0"/>
-                <a:ea typeface="Malgun Gothic" pitchFamily="34" charset="-122"/>
-                <a:cs typeface="Malgun Gothic" pitchFamily="34" charset="-120"/>
-              </a:rPr>
-              <a:t>결과 파싱 · 데이터 누적</a:t>
-            </a:r>
-            <a:endParaRPr lang="en-US" sz="1050" dirty="0"/>
-          </a:p>
-        </p:txBody>
-      </p:sp>
-      <p:sp>
-        <p:nvSpPr>
-          <p:cNvPr id="34" name="Text 31"/>
-          <p:cNvSpPr txBox="1"/>
-          <p:nvPr/>
-        </p:nvSpPr>
-        <p:spPr>
-          <a:xfrm>
-            <a:off x="832104" y="5907024"/>
-            <a:ext cx="4754880" cy="274320"/>
-          </a:xfrm>
-          <a:prstGeom prst="rect">
-            <a:avLst/>
-          </a:prstGeom>
-          <a:noFill/>
-          <a:ln/>
-        </p:spPr>
-        <p:txBody>
-          <a:bodyPr wrap="square" lIns="0" tIns="0" rIns="0" bIns="0" rtlCol="0" anchor="ctr"/>
-          <a:lstStyle/>
-          <a:p>
-            <a:pPr indent="0" marL="0">
-              <a:buNone/>
-            </a:pPr>
-            <a:r>
-              <a:rPr lang="en-US" sz="1000" b="1" dirty="0">
-                <a:solidFill>
-                  <a:srgbClr val="00A3C4"/>
-                </a:solidFill>
-                <a:latin typeface="Malgun Gothic" pitchFamily="34" charset="0"/>
-                <a:ea typeface="Malgun Gothic" pitchFamily="34" charset="-122"/>
-                <a:cs typeface="Malgun Gothic" pitchFamily="34" charset="-120"/>
-              </a:rPr>
-              <a:t>▶   종료 조건까지 자동 반복 — 1회차 약 17분</a:t>
-            </a:r>
-            <a:endParaRPr lang="en-US" sz="1000" dirty="0"/>
-          </a:p>
-        </p:txBody>
-      </p:sp>
-      <p:sp>
-        <p:nvSpPr>
-          <p:cNvPr id="35" name="Shape 32"/>
-          <p:cNvSpPr/>
-          <p:nvPr/>
-        </p:nvSpPr>
-        <p:spPr>
-          <a:xfrm>
-            <a:off x="6336792" y="3822192"/>
-            <a:ext cx="5440680" cy="2487168"/>
-          </a:xfrm>
-          <a:prstGeom prst="roundRect">
-            <a:avLst>
-              <a:gd name="adj" fmla="val 2206"/>
-            </a:avLst>
-          </a:prstGeom>
-          <a:solidFill>
-            <a:srgbClr val="FFFFFF"/>
-          </a:solidFill>
-          <a:ln w="9525">
-            <a:solidFill>
-              <a:srgbClr val="DDE3EB"/>
-            </a:solidFill>
-            <a:prstDash val="solid"/>
-          </a:ln>
-          <a:effectLst>
-            <a:outerShdw sx="100000" sy="100000" kx="0" ky="0" algn="bl" rotWithShape="0" blurRad="101600" dist="12700" dir="5400000">
-              <a:srgbClr val="9AA8BC">
-                <a:alpha val="18000"/>
-              </a:srgbClr>
-            </a:outerShdw>
-          </a:effectLst>
-        </p:spPr>
-      </p:sp>
-      <p:sp>
-        <p:nvSpPr>
-          <p:cNvPr id="36" name="Shape 33"/>
-          <p:cNvSpPr/>
-          <p:nvPr/>
-        </p:nvSpPr>
-        <p:spPr>
-          <a:xfrm>
-            <a:off x="6592824" y="4096512"/>
-            <a:ext cx="82296" cy="182880"/>
-          </a:xfrm>
-          <a:prstGeom prst="rect">
-            <a:avLst/>
-          </a:prstGeom>
-          <a:solidFill>
-            <a:srgbClr val="00A3C4"/>
-          </a:solidFill>
-          <a:ln w="12700">
-            <a:solidFill>
-              <a:srgbClr val="00A3C4"/>
-            </a:solidFill>
-            <a:prstDash val="solid"/>
-          </a:ln>
-        </p:spPr>
-      </p:sp>
-      <p:sp>
-        <p:nvSpPr>
-          <p:cNvPr id="37" name="Text 34"/>
-          <p:cNvSpPr txBox="1"/>
-          <p:nvPr/>
-        </p:nvSpPr>
-        <p:spPr>
-          <a:xfrm>
-            <a:off x="6757416" y="4005072"/>
-            <a:ext cx="4480560" cy="365760"/>
-          </a:xfrm>
-          <a:prstGeom prst="rect">
-            <a:avLst/>
-          </a:prstGeom>
-          <a:noFill/>
-          <a:ln/>
-        </p:spPr>
-        <p:txBody>
-          <a:bodyPr wrap="square" lIns="0" tIns="0" rIns="0" bIns="0" rtlCol="0" anchor="ctr"/>
-          <a:lstStyle/>
-          <a:p>
-            <a:pPr indent="0" marL="0">
-              <a:buNone/>
-            </a:pPr>
-            <a:r>
-              <a:rPr lang="en-US" sz="1300" b="1" dirty="0">
-                <a:solidFill>
-                  <a:srgbClr val="16305B"/>
-                </a:solidFill>
-                <a:latin typeface="Malgun Gothic" pitchFamily="34" charset="0"/>
-                <a:ea typeface="Malgun Gothic" pitchFamily="34" charset="-122"/>
-                <a:cs typeface="Malgun Gothic" pitchFamily="34" charset="-120"/>
-              </a:rPr>
-              <a:t>예외 처리 및 무인 운전</a:t>
-            </a:r>
-            <a:endParaRPr lang="en-US" sz="1300" dirty="0"/>
-          </a:p>
-        </p:txBody>
-      </p:sp>
-      <p:graphicFrame>
-        <p:nvGraphicFramePr>
-          <p:cNvPr id="19" name="Table 1"/>
-          <p:cNvGraphicFramePr>
-            <a:graphicFrameLocks noGrp="1"/>
-          </p:cNvGraphicFramePr>
-          <p:nvPr>
-            <p:extLst>
-              <p:ext uri="{D42A27DB-BD31-4B8C-83A1-F6EECF244321}">
-                <p14:modId xmlns:p14="http://schemas.microsoft.com/office/powerpoint/2010/main" val="1579011935"/>
-              </p:ext>
-            </p:extLst>
-          </p:nvPr>
-        </p:nvGraphicFramePr>
-        <p:xfrm>
-          <a:off x="6647688" y="4535424"/>
-          <a:ext cx="4846320" cy="914400"/>
-        </p:xfrm>
-        <a:graphic>
-          <a:graphicData uri="http://schemas.openxmlformats.org/drawingml/2006/table">
-            <a:tbl>
-              <a:tblPr/>
-              <a:tblGrid>
-                <a:gridCol w="1417320"/>
-                <a:gridCol w="3429000"/>
+                <a:gridCol w="1097280"/>
+                <a:gridCol w="3749040"/>
               </a:tblGrid>
               <a:tr h="329184">
                 <a:tc>
@@ -17398,7 +16523,7 @@
                           <a:ea typeface="Malgun Gothic" pitchFamily="34" charset="-122"/>
                           <a:cs typeface="Malgun Gothic" pitchFamily="34" charset="-120"/>
                         </a:rPr>
-                        <a:t>상황</a:t>
+                        <a:t>단계</a:t>
                       </a:r>
                       <a:endParaRPr lang="en-US" sz="950" dirty="0">
                         <a:latin typeface="Malgun Gothic" charset="0"/>
@@ -17500,7 +16625,7 @@
                           <a:ea typeface="Malgun Gothic" pitchFamily="34" charset="-122"/>
                           <a:cs typeface="Malgun Gothic" pitchFamily="34" charset="-120"/>
                         </a:rPr>
-                        <a:t>형상 미성립</a:t>
+                        <a:t>변수 갱신</a:t>
                       </a:r>
                       <a:endParaRPr lang="en-US" sz="950" dirty="0">
                         <a:latin typeface="Malgun Gothic" charset="0"/>
@@ -17547,7 +16672,7 @@
                           <a:ea typeface="Malgun Gothic" pitchFamily="34" charset="-122"/>
                           <a:cs typeface="Malgun Gothic" pitchFamily="34" charset="-120"/>
                         </a:rPr>
-                        <a:t>이력 기록 후 다음 점 진행, 해당 영역 회피</a:t>
+                        <a:t>수식 목록에서 변수명 → 인덱스 매핑 후 값 치환</a:t>
                       </a:r>
                       <a:endParaRPr lang="en-US" sz="950" dirty="0">
                         <a:latin typeface="Malgun Gothic" charset="0"/>
@@ -17596,7 +16721,7 @@
                           <a:ea typeface="Malgun Gothic" pitchFamily="34" charset="-122"/>
                           <a:cs typeface="Malgun Gothic" pitchFamily="34" charset="-120"/>
                         </a:rPr>
-                        <a:t>솔버 비정상 종료</a:t>
+                        <a:t>정수 변수</a:t>
                       </a:r>
                       <a:endParaRPr lang="en-US" sz="950" dirty="0">
                         <a:latin typeface="Malgun Gothic" charset="0"/>
@@ -17643,7 +16768,7 @@
                           <a:ea typeface="Malgun Gothic" pitchFamily="34" charset="-122"/>
                           <a:cs typeface="Malgun Gothic" pitchFamily="34" charset="-120"/>
                         </a:rPr>
-                        <a:t>자동 재연결 후 동일 실험점 재시도</a:t>
+                        <a:t>핀 개수는 정수 문자열로 기입 (선형패턴 개수)</a:t>
                       </a:r>
                       <a:endParaRPr lang="en-US" sz="950" dirty="0">
                         <a:latin typeface="Malgun Gothic" charset="0"/>
@@ -17692,7 +16817,7 @@
                           <a:ea typeface="Malgun Gothic" pitchFamily="34" charset="-122"/>
                           <a:cs typeface="Malgun Gothic" pitchFamily="34" charset="-120"/>
                         </a:rPr>
-                        <a:t>연속 실패</a:t>
+                        <a:t>리빌드</a:t>
                       </a:r>
                       <a:endParaRPr lang="en-US" sz="950" dirty="0">
                         <a:latin typeface="Malgun Gothic" charset="0"/>
@@ -17739,7 +16864,199 @@
                           <a:ea typeface="Malgun Gothic" pitchFamily="34" charset="-122"/>
                           <a:cs typeface="Malgun Gothic" pitchFamily="34" charset="-120"/>
                         </a:rPr>
-                        <a:t>설정 오류로 판단하고 캠페인 중단</a:t>
+                        <a:t>파트 → 어셈블리 순으로 리빌드 후 저장</a:t>
+                      </a:r>
+                      <a:endParaRPr lang="en-US" sz="950" dirty="0">
+                        <a:latin typeface="Malgun Gothic" charset="0"/>
+                        <a:ea typeface="Malgun Gothic" charset="0"/>
+                        <a:cs typeface="Malgun Gothic" charset="0"/>
+                      </a:endParaRPr>
+                    </a:p>
+                  </a:txBody>
+                  <a:tcPr marL="50800" marR="50800" marT="25400" marB="25400" anchor="ctr">
+                    <a:lnL w="0" cap="flat" cmpd="sng" algn="ctr">
+                      <a:noFill/>
+                    </a:lnL>
+                    <a:lnR w="0" cap="flat" cmpd="sng" algn="ctr">
+                      <a:noFill/>
+                    </a:lnR>
+                    <a:lnT w="0" cap="flat" cmpd="sng" algn="ctr">
+                      <a:noFill/>
+                    </a:lnT>
+                    <a:lnB w="6350" cap="flat" cmpd="sng" algn="ctr">
+                      <a:solidFill>
+                        <a:srgbClr val="DDE3EB"/>
+                      </a:solidFill>
+                      <a:prstDash val="solid"/>
+                      <a:round/>
+                      <a:headEnd type="none" w="med" len="med"/>
+                      <a:tailEnd type="none" w="med" len="med"/>
+                    </a:lnB>
+                  </a:tcPr>
+                </a:tc>
+              </a:tr>
+              <a:tr h="329184">
+                <a:tc>
+                  <a:txBody>
+                    <a:bodyPr/>
+                    <a:lstStyle/>
+                    <a:p>
+                      <a:pPr indent="0" marL="0">
+                        <a:buNone/>
+                      </a:pPr>
+                      <a:r>
+                        <a:rPr lang="en-US" sz="950" dirty="0">
+                          <a:solidFill>
+                            <a:srgbClr val="1C2733"/>
+                          </a:solidFill>
+                          <a:latin typeface="Malgun Gothic" pitchFamily="34" charset="0"/>
+                          <a:ea typeface="Malgun Gothic" pitchFamily="34" charset="-122"/>
+                          <a:cs typeface="Malgun Gothic" pitchFamily="34" charset="-120"/>
+                        </a:rPr>
+                        <a:t>질량 특성</a:t>
+                      </a:r>
+                      <a:endParaRPr lang="en-US" sz="950" dirty="0">
+                        <a:latin typeface="Malgun Gothic" charset="0"/>
+                        <a:ea typeface="Malgun Gothic" charset="0"/>
+                        <a:cs typeface="Malgun Gothic" charset="0"/>
+                      </a:endParaRPr>
+                    </a:p>
+                  </a:txBody>
+                  <a:tcPr marL="50800" marR="50800" marT="25400" marB="25400" anchor="ctr">
+                    <a:lnL w="0" cap="flat" cmpd="sng" algn="ctr">
+                      <a:noFill/>
+                    </a:lnL>
+                    <a:lnR w="0" cap="flat" cmpd="sng" algn="ctr">
+                      <a:noFill/>
+                    </a:lnR>
+                    <a:lnT w="0" cap="flat" cmpd="sng" algn="ctr">
+                      <a:noFill/>
+                    </a:lnT>
+                    <a:lnB w="6350" cap="flat" cmpd="sng" algn="ctr">
+                      <a:solidFill>
+                        <a:srgbClr val="DDE3EB"/>
+                      </a:solidFill>
+                      <a:prstDash val="solid"/>
+                      <a:round/>
+                      <a:headEnd type="none" w="med" len="med"/>
+                      <a:tailEnd type="none" w="med" len="med"/>
+                    </a:lnB>
+                  </a:tcPr>
+                </a:tc>
+                <a:tc>
+                  <a:txBody>
+                    <a:bodyPr/>
+                    <a:lstStyle/>
+                    <a:p>
+                      <a:pPr indent="0" marL="0">
+                        <a:buNone/>
+                      </a:pPr>
+                      <a:r>
+                        <a:rPr lang="en-US" sz="950" dirty="0">
+                          <a:solidFill>
+                            <a:srgbClr val="1C2733"/>
+                          </a:solidFill>
+                          <a:latin typeface="Malgun Gothic" pitchFamily="34" charset="0"/>
+                          <a:ea typeface="Malgun Gothic" pitchFamily="34" charset="-122"/>
+                          <a:cs typeface="Malgun Gothic" pitchFamily="34" charset="-120"/>
+                        </a:rPr>
+                        <a:t>리빌드 직후 부피·질량 일괄 취득</a:t>
+                      </a:r>
+                      <a:endParaRPr lang="en-US" sz="950" dirty="0">
+                        <a:latin typeface="Malgun Gothic" charset="0"/>
+                        <a:ea typeface="Malgun Gothic" charset="0"/>
+                        <a:cs typeface="Malgun Gothic" charset="0"/>
+                      </a:endParaRPr>
+                    </a:p>
+                  </a:txBody>
+                  <a:tcPr marL="50800" marR="50800" marT="25400" marB="25400" anchor="ctr">
+                    <a:lnL w="0" cap="flat" cmpd="sng" algn="ctr">
+                      <a:noFill/>
+                    </a:lnL>
+                    <a:lnR w="0" cap="flat" cmpd="sng" algn="ctr">
+                      <a:noFill/>
+                    </a:lnR>
+                    <a:lnT w="0" cap="flat" cmpd="sng" algn="ctr">
+                      <a:noFill/>
+                    </a:lnT>
+                    <a:lnB w="6350" cap="flat" cmpd="sng" algn="ctr">
+                      <a:solidFill>
+                        <a:srgbClr val="DDE3EB"/>
+                      </a:solidFill>
+                      <a:prstDash val="solid"/>
+                      <a:round/>
+                      <a:headEnd type="none" w="med" len="med"/>
+                      <a:tailEnd type="none" w="med" len="med"/>
+                    </a:lnB>
+                  </a:tcPr>
+                </a:tc>
+              </a:tr>
+              <a:tr h="329184">
+                <a:tc>
+                  <a:txBody>
+                    <a:bodyPr/>
+                    <a:lstStyle/>
+                    <a:p>
+                      <a:pPr indent="0" marL="0">
+                        <a:buNone/>
+                      </a:pPr>
+                      <a:r>
+                        <a:rPr lang="en-US" sz="950" dirty="0">
+                          <a:solidFill>
+                            <a:srgbClr val="1C2733"/>
+                          </a:solidFill>
+                          <a:latin typeface="Malgun Gothic" pitchFamily="34" charset="0"/>
+                          <a:ea typeface="Malgun Gothic" pitchFamily="34" charset="-122"/>
+                          <a:cs typeface="Malgun Gothic" pitchFamily="34" charset="-120"/>
+                        </a:rPr>
+                        <a:t>형상 저장</a:t>
+                      </a:r>
+                      <a:endParaRPr lang="en-US" sz="950" dirty="0">
+                        <a:latin typeface="Malgun Gothic" charset="0"/>
+                        <a:ea typeface="Malgun Gothic" charset="0"/>
+                        <a:cs typeface="Malgun Gothic" charset="0"/>
+                      </a:endParaRPr>
+                    </a:p>
+                  </a:txBody>
+                  <a:tcPr marL="50800" marR="50800" marT="25400" marB="25400" anchor="ctr">
+                    <a:lnL w="0" cap="flat" cmpd="sng" algn="ctr">
+                      <a:noFill/>
+                    </a:lnL>
+                    <a:lnR w="0" cap="flat" cmpd="sng" algn="ctr">
+                      <a:noFill/>
+                    </a:lnR>
+                    <a:lnT w="0" cap="flat" cmpd="sng" algn="ctr">
+                      <a:noFill/>
+                    </a:lnT>
+                    <a:lnB w="6350" cap="flat" cmpd="sng" algn="ctr">
+                      <a:solidFill>
+                        <a:srgbClr val="DDE3EB"/>
+                      </a:solidFill>
+                      <a:prstDash val="solid"/>
+                      <a:round/>
+                      <a:headEnd type="none" w="med" len="med"/>
+                      <a:tailEnd type="none" w="med" len="med"/>
+                    </a:lnB>
+                  </a:tcPr>
+                </a:tc>
+                <a:tc>
+                  <a:txBody>
+                    <a:bodyPr/>
+                    <a:lstStyle/>
+                    <a:p>
+                      <a:pPr indent="0" marL="0">
+                        <a:buNone/>
+                      </a:pPr>
+                      <a:r>
+                        <a:rPr lang="en-US" sz="950" dirty="0">
+                          <a:solidFill>
+                            <a:srgbClr val="1C2733"/>
+                          </a:solidFill>
+                          <a:latin typeface="Malgun Gothic" pitchFamily="34" charset="0"/>
+                          <a:ea typeface="Malgun Gothic" pitchFamily="34" charset="-122"/>
+                          <a:cs typeface="Malgun Gothic" pitchFamily="34" charset="-120"/>
+                        </a:rPr>
+                        <a:t>실험점 번호별 STEP 파일로 내보내기</a:t>
                       </a:r>
                       <a:endParaRPr lang="en-US" sz="950" dirty="0">
                         <a:latin typeface="Malgun Gothic" charset="0"/>
@@ -17776,14 +17093,41 @@
       </p:graphicFrame>
       <p:sp>
         <p:nvSpPr>
-          <p:cNvPr id="39" name="Text 35"/>
+          <p:cNvPr id="18" name="Shape 15"/>
+          <p:cNvSpPr/>
+          <p:nvPr/>
+        </p:nvSpPr>
+        <p:spPr>
+          <a:xfrm>
+            <a:off x="813816" y="4663440"/>
+            <a:ext cx="4846320" cy="512064"/>
+          </a:xfrm>
+          <a:prstGeom prst="roundRect">
+            <a:avLst>
+              <a:gd name="adj" fmla="val 10714"/>
+            </a:avLst>
+          </a:prstGeom>
+          <a:solidFill>
+            <a:srgbClr val="F7F9FC"/>
+          </a:solidFill>
+          <a:ln w="9525">
+            <a:solidFill>
+              <a:srgbClr val="DDE3EB"/>
+            </a:solidFill>
+            <a:prstDash val="solid"/>
+          </a:ln>
+        </p:spPr>
+      </p:sp>
+      <p:sp>
+        <p:nvSpPr>
+          <p:cNvPr id="19" name="Text 16"/>
           <p:cNvSpPr txBox="1"/>
           <p:nvPr/>
         </p:nvSpPr>
         <p:spPr>
           <a:xfrm>
-            <a:off x="6647688" y="5815584"/>
-            <a:ext cx="4846320" cy="274320"/>
+            <a:off x="941832" y="4663440"/>
+            <a:ext cx="4617720" cy="512064"/>
           </a:xfrm>
           <a:prstGeom prst="rect">
             <a:avLst/>
@@ -17799,7 +17143,1054 @@
               <a:buNone/>
             </a:pPr>
             <a:r>
-              <a:rPr lang="en-US" sz="950" i="1" dirty="0">
+              <a:rPr lang="en-US" sz="950" b="1" dirty="0">
+                <a:solidFill>
+                  <a:srgbClr val="16305B"/>
+                </a:solidFill>
+                <a:latin typeface="Malgun Gothic" pitchFamily="34" charset="0"/>
+                <a:ea typeface="Malgun Gothic" pitchFamily="34" charset="-122"/>
+                <a:cs typeface="Malgun Gothic" pitchFamily="34" charset="-120"/>
+              </a:rPr>
+              <a:t>중량 = </a:t>
+            </a:r>
+            <a:pPr indent="0" marL="0">
+              <a:buNone/>
+            </a:pPr>
+            <a:r>
+              <a:rPr lang="en-US" sz="950" dirty="0">
+                <a:solidFill>
+                  <a:srgbClr val="1C2733"/>
+                </a:solidFill>
+                <a:latin typeface="Malgun Gothic" pitchFamily="34" charset="0"/>
+                <a:ea typeface="Malgun Gothic" pitchFamily="34" charset="-122"/>
+                <a:cs typeface="Malgun Gothic" pitchFamily="34" charset="-120"/>
+              </a:rPr>
+              <a:t>알루미늄 질량 + (완전충진 부피 − 알루미늄 부피) × 794 kg/m³</a:t>
+            </a:r>
+            <a:endParaRPr lang="en-US" sz="950" dirty="0"/>
+          </a:p>
+        </p:txBody>
+      </p:sp>
+      <p:sp>
+        <p:nvSpPr>
+          <p:cNvPr id="20" name="Shape 17"/>
+          <p:cNvSpPr/>
+          <p:nvPr/>
+        </p:nvSpPr>
+        <p:spPr>
+          <a:xfrm>
+            <a:off x="6336792" y="1188720"/>
+            <a:ext cx="5440680" cy="4160520"/>
+          </a:xfrm>
+          <a:prstGeom prst="roundRect">
+            <a:avLst>
+              <a:gd name="adj" fmla="val 1319"/>
+            </a:avLst>
+          </a:prstGeom>
+          <a:solidFill>
+            <a:srgbClr val="FFFFFF"/>
+          </a:solidFill>
+          <a:ln w="9525">
+            <a:solidFill>
+              <a:srgbClr val="DDE3EB"/>
+            </a:solidFill>
+            <a:prstDash val="solid"/>
+          </a:ln>
+          <a:effectLst>
+            <a:outerShdw sx="100000" sy="100000" kx="0" ky="0" algn="bl" rotWithShape="0" blurRad="101600" dist="12700" dir="5400000">
+              <a:srgbClr val="9AA8BC">
+                <a:alpha val="18000"/>
+              </a:srgbClr>
+            </a:outerShdw>
+          </a:effectLst>
+        </p:spPr>
+      </p:sp>
+      <p:sp>
+        <p:nvSpPr>
+          <p:cNvPr id="21" name="Shape 18"/>
+          <p:cNvSpPr/>
+          <p:nvPr/>
+        </p:nvSpPr>
+        <p:spPr>
+          <a:xfrm>
+            <a:off x="6592824" y="1463040"/>
+            <a:ext cx="82296" cy="182880"/>
+          </a:xfrm>
+          <a:prstGeom prst="rect">
+            <a:avLst/>
+          </a:prstGeom>
+          <a:solidFill>
+            <a:srgbClr val="00A3C4"/>
+          </a:solidFill>
+          <a:ln w="12700">
+            <a:solidFill>
+              <a:srgbClr val="00A3C4"/>
+            </a:solidFill>
+            <a:prstDash val="solid"/>
+          </a:ln>
+        </p:spPr>
+      </p:sp>
+      <p:sp>
+        <p:nvSpPr>
+          <p:cNvPr id="22" name="Text 19"/>
+          <p:cNvSpPr txBox="1"/>
+          <p:nvPr/>
+        </p:nvSpPr>
+        <p:spPr>
+          <a:xfrm>
+            <a:off x="6757416" y="1371600"/>
+            <a:ext cx="4480560" cy="365760"/>
+          </a:xfrm>
+          <a:prstGeom prst="rect">
+            <a:avLst/>
+          </a:prstGeom>
+          <a:noFill/>
+          <a:ln/>
+        </p:spPr>
+        <p:txBody>
+          <a:bodyPr wrap="square" lIns="0" tIns="0" rIns="0" bIns="0" rtlCol="0" anchor="ctr"/>
+          <a:lstStyle/>
+          <a:p>
+            <a:pPr indent="0" marL="0">
+              <a:buNone/>
+            </a:pPr>
+            <a:r>
+              <a:rPr lang="en-US" sz="1300" b="1" dirty="0">
+                <a:solidFill>
+                  <a:srgbClr val="16305B"/>
+                </a:solidFill>
+                <a:latin typeface="Malgun Gothic" pitchFamily="34" charset="0"/>
+                <a:ea typeface="Malgun Gothic" pitchFamily="34" charset="-122"/>
+                <a:cs typeface="Malgun Gothic" pitchFamily="34" charset="-120"/>
+              </a:rPr>
+              <a:t>코드 발췌</a:t>
+            </a:r>
+            <a:endParaRPr lang="en-US" sz="1300" dirty="0"/>
+          </a:p>
+        </p:txBody>
+      </p:sp>
+      <p:sp>
+        <p:nvSpPr>
+          <p:cNvPr id="23" name="Shape 20"/>
+          <p:cNvSpPr/>
+          <p:nvPr/>
+        </p:nvSpPr>
+        <p:spPr>
+          <a:xfrm>
+            <a:off x="6574536" y="1865376"/>
+            <a:ext cx="4965192" cy="3264408"/>
+          </a:xfrm>
+          <a:prstGeom prst="roundRect">
+            <a:avLst>
+              <a:gd name="adj" fmla="val 1681"/>
+            </a:avLst>
+          </a:prstGeom>
+          <a:solidFill>
+            <a:srgbClr val="1E2430"/>
+          </a:solidFill>
+          <a:ln w="12700">
+            <a:solidFill>
+              <a:srgbClr val="1E2430"/>
+            </a:solidFill>
+            <a:prstDash val="solid"/>
+          </a:ln>
+        </p:spPr>
+      </p:sp>
+      <p:sp>
+        <p:nvSpPr>
+          <p:cNvPr id="24" name="Shape 21"/>
+          <p:cNvSpPr/>
+          <p:nvPr/>
+        </p:nvSpPr>
+        <p:spPr>
+          <a:xfrm>
+            <a:off x="6739128" y="1993392"/>
+            <a:ext cx="91440" cy="91440"/>
+          </a:xfrm>
+          <a:prstGeom prst="ellipse">
+            <a:avLst/>
+          </a:prstGeom>
+          <a:solidFill>
+            <a:srgbClr val="FF5F57"/>
+          </a:solidFill>
+          <a:ln w="12700">
+            <a:solidFill>
+              <a:srgbClr val="FF5F57"/>
+            </a:solidFill>
+            <a:prstDash val="solid"/>
+          </a:ln>
+        </p:spPr>
+      </p:sp>
+      <p:sp>
+        <p:nvSpPr>
+          <p:cNvPr id="25" name="Shape 22"/>
+          <p:cNvSpPr/>
+          <p:nvPr/>
+        </p:nvSpPr>
+        <p:spPr>
+          <a:xfrm>
+            <a:off x="6894576" y="1993392"/>
+            <a:ext cx="91440" cy="91440"/>
+          </a:xfrm>
+          <a:prstGeom prst="ellipse">
+            <a:avLst/>
+          </a:prstGeom>
+          <a:solidFill>
+            <a:srgbClr val="FEBC2E"/>
+          </a:solidFill>
+          <a:ln w="12700">
+            <a:solidFill>
+              <a:srgbClr val="FEBC2E"/>
+            </a:solidFill>
+            <a:prstDash val="solid"/>
+          </a:ln>
+        </p:spPr>
+      </p:sp>
+      <p:sp>
+        <p:nvSpPr>
+          <p:cNvPr id="26" name="Shape 23"/>
+          <p:cNvSpPr/>
+          <p:nvPr/>
+        </p:nvSpPr>
+        <p:spPr>
+          <a:xfrm>
+            <a:off x="7050024" y="1993392"/>
+            <a:ext cx="91440" cy="91440"/>
+          </a:xfrm>
+          <a:prstGeom prst="ellipse">
+            <a:avLst/>
+          </a:prstGeom>
+          <a:solidFill>
+            <a:srgbClr val="28C840"/>
+          </a:solidFill>
+          <a:ln w="12700">
+            <a:solidFill>
+              <a:srgbClr val="28C840"/>
+            </a:solidFill>
+            <a:prstDash val="solid"/>
+          </a:ln>
+        </p:spPr>
+      </p:sp>
+      <p:sp>
+        <p:nvSpPr>
+          <p:cNvPr id="27" name="Text 24"/>
+          <p:cNvSpPr txBox="1"/>
+          <p:nvPr/>
+        </p:nvSpPr>
+        <p:spPr>
+          <a:xfrm>
+            <a:off x="7232904" y="1929384"/>
+            <a:ext cx="4142232" cy="219456"/>
+          </a:xfrm>
+          <a:prstGeom prst="rect">
+            <a:avLst/>
+          </a:prstGeom>
+          <a:noFill/>
+          <a:ln/>
+        </p:spPr>
+        <p:txBody>
+          <a:bodyPr wrap="square" lIns="0" tIns="0" rIns="0" bIns="0" rtlCol="0" anchor="ctr"/>
+          <a:lstStyle/>
+          <a:p>
+            <a:pPr indent="0" marL="0">
+              <a:buNone/>
+            </a:pPr>
+            <a:r>
+              <a:rPr lang="en-US" sz="850" dirty="0">
+                <a:solidFill>
+                  <a:srgbClr val="8A94A6"/>
+                </a:solidFill>
+                <a:latin typeface="Consolas" pitchFamily="34" charset="0"/>
+                <a:ea typeface="Consolas" pitchFamily="34" charset="-122"/>
+                <a:cs typeface="Consolas" pitchFamily="34" charset="-120"/>
+              </a:rPr>
+              <a:t>Solidworks.py — update_sw()</a:t>
+            </a:r>
+            <a:endParaRPr lang="en-US" sz="850" dirty="0"/>
+          </a:p>
+        </p:txBody>
+      </p:sp>
+      <p:sp>
+        <p:nvSpPr>
+          <p:cNvPr id="28" name="Shape 25"/>
+          <p:cNvSpPr/>
+          <p:nvPr/>
+        </p:nvSpPr>
+        <p:spPr>
+          <a:xfrm>
+            <a:off x="6574536" y="2212848"/>
+            <a:ext cx="4965192" cy="0"/>
+          </a:xfrm>
+          <a:prstGeom prst="line">
+            <a:avLst/>
+          </a:prstGeom>
+          <a:noFill/>
+          <a:ln w="9525">
+            <a:solidFill>
+              <a:srgbClr val="2E3645"/>
+            </a:solidFill>
+            <a:prstDash val="solid"/>
+          </a:ln>
+        </p:spPr>
+      </p:sp>
+      <p:sp>
+        <p:nvSpPr>
+          <p:cNvPr id="29" name="Text 26"/>
+          <p:cNvSpPr txBox="1"/>
+          <p:nvPr/>
+        </p:nvSpPr>
+        <p:spPr>
+          <a:xfrm>
+            <a:off x="6757416" y="2322576"/>
+            <a:ext cx="4672584" cy="2697480"/>
+          </a:xfrm>
+          <a:prstGeom prst="rect">
+            <a:avLst/>
+          </a:prstGeom>
+          <a:noFill/>
+          <a:ln/>
+        </p:spPr>
+        <p:txBody>
+          <a:bodyPr wrap="square" lIns="0" tIns="0" rIns="0" bIns="0" rtlCol="0" anchor="t"/>
+          <a:lstStyle/>
+          <a:p>
+            <a:pPr indent="0" marL="0">
+              <a:lnSpc>
+                <a:spcPct val="112000"/>
+              </a:lnSpc>
+              <a:buNone/>
+            </a:pPr>
+            <a:r>
+              <a:rPr lang="en-US" sz="850" dirty="0">
+                <a:solidFill>
+                  <a:srgbClr val="D6DEEB"/>
+                </a:solidFill>
+                <a:latin typeface="Consolas" pitchFamily="34" charset="0"/>
+                <a:ea typeface="Consolas" pitchFamily="34" charset="-122"/>
+                <a:cs typeface="Consolas" pitchFamily="34" charset="-120"/>
+              </a:rPr>
+              <a:t>part  = app.ActivateDoc3(PART_PATH, False, 0, errors)</a:t>
+            </a:r>
+            <a:endParaRPr lang="en-US" sz="850" dirty="0"/>
+          </a:p>
+          <a:p>
+            <a:pPr indent="0" marL="0">
+              <a:lnSpc>
+                <a:spcPct val="112000"/>
+              </a:lnSpc>
+              <a:buNone/>
+            </a:pPr>
+            <a:r>
+              <a:rPr lang="en-US" sz="850" dirty="0">
+                <a:solidFill>
+                  <a:srgbClr val="D6DEEB"/>
+                </a:solidFill>
+                <a:latin typeface="Consolas" pitchFamily="34" charset="0"/>
+                <a:ea typeface="Consolas" pitchFamily="34" charset="-122"/>
+                <a:cs typeface="Consolas" pitchFamily="34" charset="-120"/>
+              </a:rPr>
+              <a:t>eqMgr = part.GetEquationMgr</a:t>
+            </a:r>
+            <a:endParaRPr lang="en-US" sz="850" dirty="0"/>
+          </a:p>
+          <a:p>
+            <a:pPr indent="0" marL="0">
+              <a:lnSpc>
+                <a:spcPct val="112000"/>
+              </a:lnSpc>
+              <a:buNone/>
+            </a:pPr>
+            <a:r>
+              <a:rPr lang="en-US" sz="850" dirty="0">
+                <a:solidFill>
+                  <a:srgbClr val="D6DEEB"/>
+                </a:solidFill>
+                <a:latin typeface="Consolas" pitchFamily="34" charset="0"/>
+                <a:ea typeface="Consolas" pitchFamily="34" charset="-122"/>
+                <a:cs typeface="Consolas" pitchFamily="34" charset="-120"/>
+              </a:rPr>
+              <a:t> </a:t>
+            </a:r>
+            <a:endParaRPr lang="en-US" sz="850" dirty="0"/>
+          </a:p>
+          <a:p>
+            <a:pPr indent="0" marL="0">
+              <a:lnSpc>
+                <a:spcPct val="112000"/>
+              </a:lnSpc>
+              <a:buNone/>
+            </a:pPr>
+            <a:r>
+              <a:rPr lang="en-US" sz="850" dirty="0">
+                <a:solidFill>
+                  <a:srgbClr val="7F9C7A"/>
+                </a:solidFill>
+                <a:latin typeface="Consolas" pitchFamily="34" charset="0"/>
+                <a:ea typeface="Consolas" pitchFamily="34" charset="-122"/>
+                <a:cs typeface="Consolas" pitchFamily="34" charset="-120"/>
+              </a:rPr>
+              <a:t># 수식 목록에서 변수명 → 인덱스 매핑</a:t>
+            </a:r>
+            <a:endParaRPr lang="en-US" sz="850" dirty="0"/>
+          </a:p>
+          <a:p>
+            <a:pPr indent="0" marL="0">
+              <a:lnSpc>
+                <a:spcPct val="112000"/>
+              </a:lnSpc>
+              <a:buNone/>
+            </a:pPr>
+            <a:r>
+              <a:rPr lang="en-US" sz="850" dirty="0">
+                <a:solidFill>
+                  <a:srgbClr val="C792EA"/>
+                </a:solidFill>
+                <a:latin typeface="Consolas" pitchFamily="34" charset="0"/>
+                <a:ea typeface="Consolas" pitchFamily="34" charset="-122"/>
+                <a:cs typeface="Consolas" pitchFamily="34" charset="-120"/>
+              </a:rPr>
+              <a:t>for</a:t>
+            </a:r>
+            <a:pPr indent="0" marL="0">
+              <a:lnSpc>
+                <a:spcPct val="112000"/>
+              </a:lnSpc>
+              <a:buNone/>
+            </a:pPr>
+            <a:r>
+              <a:rPr lang="en-US" sz="850" dirty="0">
+                <a:solidFill>
+                  <a:srgbClr val="D6DEEB"/>
+                </a:solidFill>
+                <a:latin typeface="Consolas" pitchFamily="34" charset="0"/>
+                <a:ea typeface="Consolas" pitchFamily="34" charset="-122"/>
+                <a:cs typeface="Consolas" pitchFamily="34" charset="-120"/>
+              </a:rPr>
+              <a:t> i </a:t>
+            </a:r>
+            <a:pPr indent="0" marL="0">
+              <a:lnSpc>
+                <a:spcPct val="112000"/>
+              </a:lnSpc>
+              <a:buNone/>
+            </a:pPr>
+            <a:r>
+              <a:rPr lang="en-US" sz="850" dirty="0">
+                <a:solidFill>
+                  <a:srgbClr val="C792EA"/>
+                </a:solidFill>
+                <a:latin typeface="Consolas" pitchFamily="34" charset="0"/>
+                <a:ea typeface="Consolas" pitchFamily="34" charset="-122"/>
+                <a:cs typeface="Consolas" pitchFamily="34" charset="-120"/>
+              </a:rPr>
+              <a:t>in</a:t>
+            </a:r>
+            <a:pPr indent="0" marL="0">
+              <a:lnSpc>
+                <a:spcPct val="112000"/>
+              </a:lnSpc>
+              <a:buNone/>
+            </a:pPr>
+            <a:r>
+              <a:rPr lang="en-US" sz="850" dirty="0">
+                <a:solidFill>
+                  <a:srgbClr val="D6DEEB"/>
+                </a:solidFill>
+                <a:latin typeface="Consolas" pitchFamily="34" charset="0"/>
+                <a:ea typeface="Consolas" pitchFamily="34" charset="-122"/>
+                <a:cs typeface="Consolas" pitchFamily="34" charset="-120"/>
+              </a:rPr>
+              <a:t> range(eqMgr.GetCount):</a:t>
+            </a:r>
+            <a:endParaRPr lang="en-US" sz="850" dirty="0"/>
+          </a:p>
+          <a:p>
+            <a:pPr indent="0" marL="0">
+              <a:lnSpc>
+                <a:spcPct val="112000"/>
+              </a:lnSpc>
+              <a:buNone/>
+            </a:pPr>
+            <a:r>
+              <a:rPr lang="en-US" sz="850" dirty="0">
+                <a:solidFill>
+                  <a:srgbClr val="D6DEEB"/>
+                </a:solidFill>
+                <a:latin typeface="Consolas" pitchFamily="34" charset="0"/>
+                <a:ea typeface="Consolas" pitchFamily="34" charset="-122"/>
+                <a:cs typeface="Consolas" pitchFamily="34" charset="-120"/>
+              </a:rPr>
+              <a:t>    lhs = eqMgr.Equation(i).split(</a:t>
+            </a:r>
+            <a:pPr indent="0" marL="0">
+              <a:lnSpc>
+                <a:spcPct val="112000"/>
+              </a:lnSpc>
+              <a:buNone/>
+            </a:pPr>
+            <a:r>
+              <a:rPr lang="en-US" sz="850" dirty="0">
+                <a:solidFill>
+                  <a:srgbClr val="E6A26B"/>
+                </a:solidFill>
+                <a:latin typeface="Consolas" pitchFamily="34" charset="0"/>
+                <a:ea typeface="Consolas" pitchFamily="34" charset="-122"/>
+                <a:cs typeface="Consolas" pitchFamily="34" charset="-120"/>
+              </a:rPr>
+              <a:t>'='</a:t>
+            </a:r>
+            <a:pPr indent="0" marL="0">
+              <a:lnSpc>
+                <a:spcPct val="112000"/>
+              </a:lnSpc>
+              <a:buNone/>
+            </a:pPr>
+            <a:r>
+              <a:rPr lang="en-US" sz="850" dirty="0">
+                <a:solidFill>
+                  <a:srgbClr val="D6DEEB"/>
+                </a:solidFill>
+                <a:latin typeface="Consolas" pitchFamily="34" charset="0"/>
+                <a:ea typeface="Consolas" pitchFamily="34" charset="-122"/>
+                <a:cs typeface="Consolas" pitchFamily="34" charset="-120"/>
+              </a:rPr>
+              <a:t>)[0].strip()</a:t>
+            </a:r>
+            <a:endParaRPr lang="en-US" sz="850" dirty="0"/>
+          </a:p>
+          <a:p>
+            <a:pPr indent="0" marL="0">
+              <a:lnSpc>
+                <a:spcPct val="112000"/>
+              </a:lnSpc>
+              <a:buNone/>
+            </a:pPr>
+            <a:r>
+              <a:rPr lang="en-US" sz="850" dirty="0">
+                <a:solidFill>
+                  <a:srgbClr val="D6DEEB"/>
+                </a:solidFill>
+                <a:latin typeface="Consolas" pitchFamily="34" charset="0"/>
+                <a:ea typeface="Consolas" pitchFamily="34" charset="-122"/>
+                <a:cs typeface="Consolas" pitchFamily="34" charset="-120"/>
+              </a:rPr>
+              <a:t>    name_to_i[lhs.strip(</a:t>
+            </a:r>
+            <a:pPr indent="0" marL="0">
+              <a:lnSpc>
+                <a:spcPct val="112000"/>
+              </a:lnSpc>
+              <a:buNone/>
+            </a:pPr>
+            <a:r>
+              <a:rPr lang="en-US" sz="850" dirty="0">
+                <a:solidFill>
+                  <a:srgbClr val="E6A26B"/>
+                </a:solidFill>
+                <a:latin typeface="Consolas" pitchFamily="34" charset="0"/>
+                <a:ea typeface="Consolas" pitchFamily="34" charset="-122"/>
+                <a:cs typeface="Consolas" pitchFamily="34" charset="-120"/>
+              </a:rPr>
+              <a:t>'"'</a:t>
+            </a:r>
+            <a:pPr indent="0" marL="0">
+              <a:lnSpc>
+                <a:spcPct val="112000"/>
+              </a:lnSpc>
+              <a:buNone/>
+            </a:pPr>
+            <a:r>
+              <a:rPr lang="en-US" sz="850" dirty="0">
+                <a:solidFill>
+                  <a:srgbClr val="D6DEEB"/>
+                </a:solidFill>
+                <a:latin typeface="Consolas" pitchFamily="34" charset="0"/>
+                <a:ea typeface="Consolas" pitchFamily="34" charset="-122"/>
+                <a:cs typeface="Consolas" pitchFamily="34" charset="-120"/>
+              </a:rPr>
+              <a:t>)] = i</a:t>
+            </a:r>
+            <a:endParaRPr lang="en-US" sz="850" dirty="0"/>
+          </a:p>
+          <a:p>
+            <a:pPr indent="0" marL="0">
+              <a:lnSpc>
+                <a:spcPct val="112000"/>
+              </a:lnSpc>
+              <a:buNone/>
+            </a:pPr>
+            <a:r>
+              <a:rPr lang="en-US" sz="850" dirty="0">
+                <a:solidFill>
+                  <a:srgbClr val="D6DEEB"/>
+                </a:solidFill>
+                <a:latin typeface="Consolas" pitchFamily="34" charset="0"/>
+                <a:ea typeface="Consolas" pitchFamily="34" charset="-122"/>
+                <a:cs typeface="Consolas" pitchFamily="34" charset="-120"/>
+              </a:rPr>
+              <a:t> </a:t>
+            </a:r>
+            <a:endParaRPr lang="en-US" sz="850" dirty="0"/>
+          </a:p>
+          <a:p>
+            <a:pPr indent="0" marL="0">
+              <a:lnSpc>
+                <a:spcPct val="112000"/>
+              </a:lnSpc>
+              <a:buNone/>
+            </a:pPr>
+            <a:r>
+              <a:rPr lang="en-US" sz="850" dirty="0">
+                <a:solidFill>
+                  <a:srgbClr val="7F9C7A"/>
+                </a:solidFill>
+                <a:latin typeface="Consolas" pitchFamily="34" charset="0"/>
+                <a:ea typeface="Consolas" pitchFamily="34" charset="-122"/>
+                <a:cs typeface="Consolas" pitchFamily="34" charset="-120"/>
+              </a:rPr>
+              <a:t># 전역변수 값 치환 (COM 속성 쓰기)</a:t>
+            </a:r>
+            <a:endParaRPr lang="en-US" sz="850" dirty="0"/>
+          </a:p>
+          <a:p>
+            <a:pPr indent="0" marL="0">
+              <a:lnSpc>
+                <a:spcPct val="112000"/>
+              </a:lnSpc>
+              <a:buNone/>
+            </a:pPr>
+            <a:r>
+              <a:rPr lang="en-US" sz="850" dirty="0">
+                <a:solidFill>
+                  <a:srgbClr val="C792EA"/>
+                </a:solidFill>
+                <a:latin typeface="Consolas" pitchFamily="34" charset="0"/>
+                <a:ea typeface="Consolas" pitchFamily="34" charset="-122"/>
+                <a:cs typeface="Consolas" pitchFamily="34" charset="-120"/>
+              </a:rPr>
+              <a:t>for</a:t>
+            </a:r>
+            <a:pPr indent="0" marL="0">
+              <a:lnSpc>
+                <a:spcPct val="112000"/>
+              </a:lnSpc>
+              <a:buNone/>
+            </a:pPr>
+            <a:r>
+              <a:rPr lang="en-US" sz="850" dirty="0">
+                <a:solidFill>
+                  <a:srgbClr val="D6DEEB"/>
+                </a:solidFill>
+                <a:latin typeface="Consolas" pitchFamily="34" charset="0"/>
+                <a:ea typeface="Consolas" pitchFamily="34" charset="-122"/>
+                <a:cs typeface="Consolas" pitchFamily="34" charset="-120"/>
+              </a:rPr>
+              <a:t> name </a:t>
+            </a:r>
+            <a:pPr indent="0" marL="0">
+              <a:lnSpc>
+                <a:spcPct val="112000"/>
+              </a:lnSpc>
+              <a:buNone/>
+            </a:pPr>
+            <a:r>
+              <a:rPr lang="en-US" sz="850" dirty="0">
+                <a:solidFill>
+                  <a:srgbClr val="C792EA"/>
+                </a:solidFill>
+                <a:latin typeface="Consolas" pitchFamily="34" charset="0"/>
+                <a:ea typeface="Consolas" pitchFamily="34" charset="-122"/>
+                <a:cs typeface="Consolas" pitchFamily="34" charset="-120"/>
+              </a:rPr>
+              <a:t>in</a:t>
+            </a:r>
+            <a:pPr indent="0" marL="0">
+              <a:lnSpc>
+                <a:spcPct val="112000"/>
+              </a:lnSpc>
+              <a:buNone/>
+            </a:pPr>
+            <a:r>
+              <a:rPr lang="en-US" sz="850" dirty="0">
+                <a:solidFill>
+                  <a:srgbClr val="D6DEEB"/>
+                </a:solidFill>
+                <a:latin typeface="Consolas" pitchFamily="34" charset="0"/>
+                <a:ea typeface="Consolas" pitchFamily="34" charset="-122"/>
+                <a:cs typeface="Consolas" pitchFamily="34" charset="-120"/>
+              </a:rPr>
+              <a:t> SW_PARAM_NAMES:</a:t>
+            </a:r>
+            <a:endParaRPr lang="en-US" sz="850" dirty="0"/>
+          </a:p>
+          <a:p>
+            <a:pPr indent="0" marL="0">
+              <a:lnSpc>
+                <a:spcPct val="112000"/>
+              </a:lnSpc>
+              <a:buNone/>
+            </a:pPr>
+            <a:r>
+              <a:rPr lang="en-US" sz="850" dirty="0">
+                <a:solidFill>
+                  <a:srgbClr val="D6DEEB"/>
+                </a:solidFill>
+                <a:latin typeface="Consolas" pitchFamily="34" charset="0"/>
+                <a:ea typeface="Consolas" pitchFamily="34" charset="-122"/>
+                <a:cs typeface="Consolas" pitchFamily="34" charset="-120"/>
+              </a:rPr>
+              <a:t>    eqMgr._oleobj_.Invoke(dispid, 0, DISPATCH_PROPERTYPUT,</a:t>
+            </a:r>
+            <a:endParaRPr lang="en-US" sz="850" dirty="0"/>
+          </a:p>
+          <a:p>
+            <a:pPr indent="0" marL="0">
+              <a:lnSpc>
+                <a:spcPct val="112000"/>
+              </a:lnSpc>
+              <a:buNone/>
+            </a:pPr>
+            <a:r>
+              <a:rPr lang="en-US" sz="850" dirty="0">
+                <a:solidFill>
+                  <a:srgbClr val="D6DEEB"/>
+                </a:solidFill>
+                <a:latin typeface="Consolas" pitchFamily="34" charset="0"/>
+                <a:ea typeface="Consolas" pitchFamily="34" charset="-122"/>
+                <a:cs typeface="Consolas" pitchFamily="34" charset="-120"/>
+              </a:rPr>
+              <a:t>        False, name_to_i[name], </a:t>
+            </a:r>
+            <a:pPr indent="0" marL="0">
+              <a:lnSpc>
+                <a:spcPct val="112000"/>
+              </a:lnSpc>
+              <a:buNone/>
+            </a:pPr>
+            <a:r>
+              <a:rPr lang="en-US" sz="850" dirty="0">
+                <a:solidFill>
+                  <a:srgbClr val="E6A26B"/>
+                </a:solidFill>
+                <a:latin typeface="Consolas" pitchFamily="34" charset="0"/>
+                <a:ea typeface="Consolas" pitchFamily="34" charset="-122"/>
+                <a:cs typeface="Consolas" pitchFamily="34" charset="-120"/>
+              </a:rPr>
+              <a:t>'"%s" = %s'</a:t>
+            </a:r>
+            <a:pPr indent="0" marL="0">
+              <a:lnSpc>
+                <a:spcPct val="112000"/>
+              </a:lnSpc>
+              <a:buNone/>
+            </a:pPr>
+            <a:r>
+              <a:rPr lang="en-US" sz="850" dirty="0">
+                <a:solidFill>
+                  <a:srgbClr val="D6DEEB"/>
+                </a:solidFill>
+                <a:latin typeface="Consolas" pitchFamily="34" charset="0"/>
+                <a:ea typeface="Consolas" pitchFamily="34" charset="-122"/>
+                <a:cs typeface="Consolas" pitchFamily="34" charset="-120"/>
+              </a:rPr>
+              <a:t> % (name, text))</a:t>
+            </a:r>
+            <a:endParaRPr lang="en-US" sz="850" dirty="0"/>
+          </a:p>
+          <a:p>
+            <a:pPr indent="0" marL="0">
+              <a:lnSpc>
+                <a:spcPct val="112000"/>
+              </a:lnSpc>
+              <a:buNone/>
+            </a:pPr>
+            <a:r>
+              <a:rPr lang="en-US" sz="850" dirty="0">
+                <a:solidFill>
+                  <a:srgbClr val="D6DEEB"/>
+                </a:solidFill>
+                <a:latin typeface="Consolas" pitchFamily="34" charset="0"/>
+                <a:ea typeface="Consolas" pitchFamily="34" charset="-122"/>
+                <a:cs typeface="Consolas" pitchFamily="34" charset="-120"/>
+              </a:rPr>
+              <a:t> </a:t>
+            </a:r>
+            <a:endParaRPr lang="en-US" sz="850" dirty="0"/>
+          </a:p>
+          <a:p>
+            <a:pPr indent="0" marL="0">
+              <a:lnSpc>
+                <a:spcPct val="112000"/>
+              </a:lnSpc>
+              <a:buNone/>
+            </a:pPr>
+            <a:r>
+              <a:rPr lang="en-US" sz="850" dirty="0">
+                <a:solidFill>
+                  <a:srgbClr val="D6DEEB"/>
+                </a:solidFill>
+                <a:latin typeface="Consolas" pitchFamily="34" charset="0"/>
+                <a:ea typeface="Consolas" pitchFamily="34" charset="-122"/>
+                <a:cs typeface="Consolas" pitchFamily="34" charset="-120"/>
+              </a:rPr>
+              <a:t>part.EditRebuild3              </a:t>
+            </a:r>
+            <a:pPr indent="0" marL="0">
+              <a:lnSpc>
+                <a:spcPct val="112000"/>
+              </a:lnSpc>
+              <a:buNone/>
+            </a:pPr>
+            <a:r>
+              <a:rPr lang="en-US" sz="850" dirty="0">
+                <a:solidFill>
+                  <a:srgbClr val="7F9C7A"/>
+                </a:solidFill>
+                <a:latin typeface="Consolas" pitchFamily="34" charset="0"/>
+                <a:ea typeface="Consolas" pitchFamily="34" charset="-122"/>
+                <a:cs typeface="Consolas" pitchFamily="34" charset="-120"/>
+              </a:rPr>
+              <a:t># 파트 리빌드</a:t>
+            </a:r>
+            <a:endParaRPr lang="en-US" sz="850" dirty="0"/>
+          </a:p>
+          <a:p>
+            <a:pPr indent="0" marL="0">
+              <a:lnSpc>
+                <a:spcPct val="112000"/>
+              </a:lnSpc>
+              <a:buNone/>
+            </a:pPr>
+            <a:r>
+              <a:rPr lang="en-US" sz="850" dirty="0">
+                <a:solidFill>
+                  <a:srgbClr val="D6DEEB"/>
+                </a:solidFill>
+                <a:latin typeface="Consolas" pitchFamily="34" charset="0"/>
+                <a:ea typeface="Consolas" pitchFamily="34" charset="-122"/>
+                <a:cs typeface="Consolas" pitchFamily="34" charset="-120"/>
+              </a:rPr>
+              <a:t>asm.ForceRebuild3(False)       </a:t>
+            </a:r>
+            <a:pPr indent="0" marL="0">
+              <a:lnSpc>
+                <a:spcPct val="112000"/>
+              </a:lnSpc>
+              <a:buNone/>
+            </a:pPr>
+            <a:r>
+              <a:rPr lang="en-US" sz="850" dirty="0">
+                <a:solidFill>
+                  <a:srgbClr val="7F9C7A"/>
+                </a:solidFill>
+                <a:latin typeface="Consolas" pitchFamily="34" charset="0"/>
+                <a:ea typeface="Consolas" pitchFamily="34" charset="-122"/>
+                <a:cs typeface="Consolas" pitchFamily="34" charset="-120"/>
+              </a:rPr>
+              <a:t># 어셈블리 리빌드</a:t>
+            </a:r>
+            <a:endParaRPr lang="en-US" sz="850" dirty="0"/>
+          </a:p>
+          <a:p>
+            <a:pPr indent="0" marL="0">
+              <a:lnSpc>
+                <a:spcPct val="112000"/>
+              </a:lnSpc>
+              <a:buNone/>
+            </a:pPr>
+            <a:r>
+              <a:rPr lang="en-US" sz="850" dirty="0">
+                <a:solidFill>
+                  <a:srgbClr val="D6DEEB"/>
+                </a:solidFill>
+                <a:latin typeface="Consolas" pitchFamily="34" charset="0"/>
+                <a:ea typeface="Consolas" pitchFamily="34" charset="-122"/>
+                <a:cs typeface="Consolas" pitchFamily="34" charset="-120"/>
+              </a:rPr>
+              <a:t>mp = asm.GetMassProperties     </a:t>
+            </a:r>
+            <a:pPr indent="0" marL="0">
+              <a:lnSpc>
+                <a:spcPct val="112000"/>
+              </a:lnSpc>
+              <a:buNone/>
+            </a:pPr>
+            <a:r>
+              <a:rPr lang="en-US" sz="850" dirty="0">
+                <a:solidFill>
+                  <a:srgbClr val="7F9C7A"/>
+                </a:solidFill>
+                <a:latin typeface="Consolas" pitchFamily="34" charset="0"/>
+                <a:ea typeface="Consolas" pitchFamily="34" charset="-122"/>
+                <a:cs typeface="Consolas" pitchFamily="34" charset="-120"/>
+              </a:rPr>
+              <a:t># [3] 부피 · [5] 질량</a:t>
+            </a:r>
+            <a:endParaRPr lang="en-US" sz="850" dirty="0"/>
+          </a:p>
+          <a:p>
+            <a:pPr indent="0" marL="0">
+              <a:lnSpc>
+                <a:spcPct val="112000"/>
+              </a:lnSpc>
+              <a:buNone/>
+            </a:pPr>
+            <a:r>
+              <a:rPr lang="en-US" sz="850" dirty="0">
+                <a:solidFill>
+                  <a:srgbClr val="D6DEEB"/>
+                </a:solidFill>
+                <a:latin typeface="Consolas" pitchFamily="34" charset="0"/>
+                <a:ea typeface="Consolas" pitchFamily="34" charset="-122"/>
+                <a:cs typeface="Consolas" pitchFamily="34" charset="-120"/>
+              </a:rPr>
+              <a:t>asm.SaveAs3(step_path, 0, 0)   </a:t>
+            </a:r>
+            <a:pPr indent="0" marL="0">
+              <a:lnSpc>
+                <a:spcPct val="112000"/>
+              </a:lnSpc>
+              <a:buNone/>
+            </a:pPr>
+            <a:r>
+              <a:rPr lang="en-US" sz="850" dirty="0">
+                <a:solidFill>
+                  <a:srgbClr val="7F9C7A"/>
+                </a:solidFill>
+                <a:latin typeface="Consolas" pitchFamily="34" charset="0"/>
+                <a:ea typeface="Consolas" pitchFamily="34" charset="-122"/>
+                <a:cs typeface="Consolas" pitchFamily="34" charset="-120"/>
+              </a:rPr>
+              <a:t># STEP 내보내기</a:t>
+            </a:r>
+            <a:endParaRPr lang="en-US" sz="850" dirty="0"/>
+          </a:p>
+        </p:txBody>
+      </p:sp>
+      <p:sp>
+        <p:nvSpPr>
+          <p:cNvPr id="30" name="Shape 27"/>
+          <p:cNvSpPr/>
+          <p:nvPr/>
+        </p:nvSpPr>
+        <p:spPr>
+          <a:xfrm>
+            <a:off x="502920" y="5541264"/>
+            <a:ext cx="11183112" cy="841248"/>
+          </a:xfrm>
+          <a:prstGeom prst="roundRect">
+            <a:avLst>
+              <a:gd name="adj" fmla="val 6522"/>
+            </a:avLst>
+          </a:prstGeom>
+          <a:solidFill>
+            <a:srgbClr val="FFFFFF"/>
+          </a:solidFill>
+          <a:ln w="9525">
+            <a:solidFill>
+              <a:srgbClr val="DDE3EB"/>
+            </a:solidFill>
+            <a:prstDash val="solid"/>
+          </a:ln>
+          <a:effectLst>
+            <a:outerShdw sx="100000" sy="100000" kx="0" ky="0" algn="bl" rotWithShape="0" blurRad="101600" dist="12700" dir="5400000">
+              <a:srgbClr val="9AA8BC">
+                <a:alpha val="18000"/>
+              </a:srgbClr>
+            </a:outerShdw>
+          </a:effectLst>
+        </p:spPr>
+      </p:sp>
+      <p:sp>
+        <p:nvSpPr>
+          <p:cNvPr id="31" name="Shape 28"/>
+          <p:cNvSpPr/>
+          <p:nvPr/>
+        </p:nvSpPr>
+        <p:spPr>
+          <a:xfrm>
+            <a:off x="832104" y="5724144"/>
+            <a:ext cx="64008" cy="164592"/>
+          </a:xfrm>
+          <a:prstGeom prst="rect">
+            <a:avLst/>
+          </a:prstGeom>
+          <a:solidFill>
+            <a:srgbClr val="00A3C4"/>
+          </a:solidFill>
+          <a:ln w="12700">
+            <a:solidFill>
+              <a:srgbClr val="00A3C4"/>
+            </a:solidFill>
+            <a:prstDash val="solid"/>
+          </a:ln>
+        </p:spPr>
+      </p:sp>
+      <p:sp>
+        <p:nvSpPr>
+          <p:cNvPr id="32" name="Text 29"/>
+          <p:cNvSpPr txBox="1"/>
+          <p:nvPr/>
+        </p:nvSpPr>
+        <p:spPr>
+          <a:xfrm>
+            <a:off x="978408" y="5669280"/>
+            <a:ext cx="3291840" cy="256032"/>
+          </a:xfrm>
+          <a:prstGeom prst="rect">
+            <a:avLst/>
+          </a:prstGeom>
+          <a:noFill/>
+          <a:ln/>
+        </p:spPr>
+        <p:txBody>
+          <a:bodyPr wrap="square" lIns="0" tIns="0" rIns="0" bIns="0" rtlCol="0" anchor="ctr"/>
+          <a:lstStyle/>
+          <a:p>
+            <a:pPr indent="0" marL="0">
+              <a:buNone/>
+            </a:pPr>
+            <a:r>
+              <a:rPr lang="en-US" sz="1050" b="1" dirty="0">
+                <a:solidFill>
+                  <a:srgbClr val="16305B"/>
+                </a:solidFill>
+                <a:latin typeface="Malgun Gothic" pitchFamily="34" charset="0"/>
+                <a:ea typeface="Malgun Gothic" pitchFamily="34" charset="-122"/>
+                <a:cs typeface="Malgun Gothic" pitchFamily="34" charset="-120"/>
+              </a:rPr>
+              <a:t>변수명 검증</a:t>
+            </a:r>
+            <a:endParaRPr lang="en-US" sz="1050" dirty="0"/>
+          </a:p>
+        </p:txBody>
+      </p:sp>
+      <p:sp>
+        <p:nvSpPr>
+          <p:cNvPr id="33" name="Text 30"/>
+          <p:cNvSpPr txBox="1"/>
+          <p:nvPr/>
+        </p:nvSpPr>
+        <p:spPr>
+          <a:xfrm>
+            <a:off x="978408" y="5943600"/>
+            <a:ext cx="3383280" cy="310896"/>
+          </a:xfrm>
+          <a:prstGeom prst="rect">
+            <a:avLst/>
+          </a:prstGeom>
+          <a:noFill/>
+          <a:ln/>
+        </p:spPr>
+        <p:txBody>
+          <a:bodyPr wrap="square" lIns="0" tIns="0" rIns="0" bIns="0" rtlCol="0" anchor="ctr"/>
+          <a:lstStyle/>
+          <a:p>
+            <a:pPr indent="0" marL="0">
+              <a:buNone/>
+            </a:pPr>
+            <a:r>
+              <a:rPr lang="en-US" sz="950" dirty="0">
                 <a:solidFill>
                   <a:srgbClr val="6B7A8F"/>
                 </a:solidFill>
@@ -17807,7 +18198,2927 @@
                 <a:ea typeface="Malgun Gothic" pitchFamily="34" charset="-122"/>
                 <a:cs typeface="Malgun Gothic" pitchFamily="34" charset="-120"/>
               </a:rPr>
-              <a:t>CAD · 해석 프로그램 GUI 비활성화로 장기 연속 구동 확보</a:t>
+              <a:t>불일치 시 즉시 중단 — 형상 미변경 해석 차단</a:t>
+            </a:r>
+            <a:endParaRPr lang="en-US" sz="950" dirty="0"/>
+          </a:p>
+        </p:txBody>
+      </p:sp>
+      <p:sp>
+        <p:nvSpPr>
+          <p:cNvPr id="34" name="Shape 31"/>
+          <p:cNvSpPr/>
+          <p:nvPr/>
+        </p:nvSpPr>
+        <p:spPr>
+          <a:xfrm>
+            <a:off x="4489704" y="5724144"/>
+            <a:ext cx="64008" cy="164592"/>
+          </a:xfrm>
+          <a:prstGeom prst="rect">
+            <a:avLst/>
+          </a:prstGeom>
+          <a:solidFill>
+            <a:srgbClr val="00A3C4"/>
+          </a:solidFill>
+          <a:ln w="12700">
+            <a:solidFill>
+              <a:srgbClr val="00A3C4"/>
+            </a:solidFill>
+            <a:prstDash val="solid"/>
+          </a:ln>
+        </p:spPr>
+      </p:sp>
+      <p:sp>
+        <p:nvSpPr>
+          <p:cNvPr id="35" name="Text 32"/>
+          <p:cNvSpPr txBox="1"/>
+          <p:nvPr/>
+        </p:nvSpPr>
+        <p:spPr>
+          <a:xfrm>
+            <a:off x="4636008" y="5669280"/>
+            <a:ext cx="3291840" cy="256032"/>
+          </a:xfrm>
+          <a:prstGeom prst="rect">
+            <a:avLst/>
+          </a:prstGeom>
+          <a:noFill/>
+          <a:ln/>
+        </p:spPr>
+        <p:txBody>
+          <a:bodyPr wrap="square" lIns="0" tIns="0" rIns="0" bIns="0" rtlCol="0" anchor="ctr"/>
+          <a:lstStyle/>
+          <a:p>
+            <a:pPr indent="0" marL="0">
+              <a:buNone/>
+            </a:pPr>
+            <a:r>
+              <a:rPr lang="en-US" sz="1050" b="1" dirty="0">
+                <a:solidFill>
+                  <a:srgbClr val="16305B"/>
+                </a:solidFill>
+                <a:latin typeface="Malgun Gothic" pitchFamily="34" charset="0"/>
+                <a:ea typeface="Malgun Gothic" pitchFamily="34" charset="-122"/>
+                <a:cs typeface="Malgun Gothic" pitchFamily="34" charset="-120"/>
+              </a:rPr>
+              <a:t>종속값 CAD 위임</a:t>
+            </a:r>
+            <a:endParaRPr lang="en-US" sz="1050" dirty="0"/>
+          </a:p>
+        </p:txBody>
+      </p:sp>
+      <p:sp>
+        <p:nvSpPr>
+          <p:cNvPr id="36" name="Text 33"/>
+          <p:cNvSpPr txBox="1"/>
+          <p:nvPr/>
+        </p:nvSpPr>
+        <p:spPr>
+          <a:xfrm>
+            <a:off x="4636008" y="5943600"/>
+            <a:ext cx="3383280" cy="310896"/>
+          </a:xfrm>
+          <a:prstGeom prst="rect">
+            <a:avLst/>
+          </a:prstGeom>
+          <a:noFill/>
+          <a:ln/>
+        </p:spPr>
+        <p:txBody>
+          <a:bodyPr wrap="square" lIns="0" tIns="0" rIns="0" bIns="0" rtlCol="0" anchor="ctr"/>
+          <a:lstStyle/>
+          <a:p>
+            <a:pPr indent="0" marL="0">
+              <a:buNone/>
+            </a:pPr>
+            <a:r>
+              <a:rPr lang="en-US" sz="950" dirty="0">
+                <a:solidFill>
+                  <a:srgbClr val="6B7A8F"/>
+                </a:solidFill>
+                <a:latin typeface="Malgun Gothic" pitchFamily="34" charset="0"/>
+                <a:ea typeface="Malgun Gothic" pitchFamily="34" charset="-122"/>
+                <a:cs typeface="Malgun Gothic" pitchFamily="34" charset="-120"/>
+              </a:rPr>
+              <a:t>핀 간격은 CAD 수식이 계산 — 이중 계산 방지</a:t>
+            </a:r>
+            <a:endParaRPr lang="en-US" sz="950" dirty="0"/>
+          </a:p>
+        </p:txBody>
+      </p:sp>
+      <p:sp>
+        <p:nvSpPr>
+          <p:cNvPr id="37" name="Shape 34"/>
+          <p:cNvSpPr/>
+          <p:nvPr/>
+        </p:nvSpPr>
+        <p:spPr>
+          <a:xfrm>
+            <a:off x="8147304" y="5724144"/>
+            <a:ext cx="64008" cy="164592"/>
+          </a:xfrm>
+          <a:prstGeom prst="rect">
+            <a:avLst/>
+          </a:prstGeom>
+          <a:solidFill>
+            <a:srgbClr val="00A3C4"/>
+          </a:solidFill>
+          <a:ln w="12700">
+            <a:solidFill>
+              <a:srgbClr val="00A3C4"/>
+            </a:solidFill>
+            <a:prstDash val="solid"/>
+          </a:ln>
+        </p:spPr>
+      </p:sp>
+      <p:sp>
+        <p:nvSpPr>
+          <p:cNvPr id="38" name="Text 35"/>
+          <p:cNvSpPr txBox="1"/>
+          <p:nvPr/>
+        </p:nvSpPr>
+        <p:spPr>
+          <a:xfrm>
+            <a:off x="8293608" y="5669280"/>
+            <a:ext cx="3291840" cy="256032"/>
+          </a:xfrm>
+          <a:prstGeom prst="rect">
+            <a:avLst/>
+          </a:prstGeom>
+          <a:noFill/>
+          <a:ln/>
+        </p:spPr>
+        <p:txBody>
+          <a:bodyPr wrap="square" lIns="0" tIns="0" rIns="0" bIns="0" rtlCol="0" anchor="ctr"/>
+          <a:lstStyle/>
+          <a:p>
+            <a:pPr indent="0" marL="0">
+              <a:buNone/>
+            </a:pPr>
+            <a:r>
+              <a:rPr lang="en-US" sz="1050" b="1" dirty="0">
+                <a:solidFill>
+                  <a:srgbClr val="16305B"/>
+                </a:solidFill>
+                <a:latin typeface="Malgun Gothic" pitchFamily="34" charset="0"/>
+                <a:ea typeface="Malgun Gothic" pitchFamily="34" charset="-122"/>
+                <a:cs typeface="Malgun Gothic" pitchFamily="34" charset="-120"/>
+              </a:rPr>
+              <a:t>질량 특성 검증</a:t>
+            </a:r>
+            <a:endParaRPr lang="en-US" sz="1050" dirty="0"/>
+          </a:p>
+        </p:txBody>
+      </p:sp>
+      <p:sp>
+        <p:nvSpPr>
+          <p:cNvPr id="39" name="Text 36"/>
+          <p:cNvSpPr txBox="1"/>
+          <p:nvPr/>
+        </p:nvSpPr>
+        <p:spPr>
+          <a:xfrm>
+            <a:off x="8293608" y="5943600"/>
+            <a:ext cx="3383280" cy="310896"/>
+          </a:xfrm>
+          <a:prstGeom prst="rect">
+            <a:avLst/>
+          </a:prstGeom>
+          <a:noFill/>
+          <a:ln/>
+        </p:spPr>
+        <p:txBody>
+          <a:bodyPr wrap="square" lIns="0" tIns="0" rIns="0" bIns="0" rtlCol="0" anchor="ctr"/>
+          <a:lstStyle/>
+          <a:p>
+            <a:pPr indent="0" marL="0">
+              <a:buNone/>
+            </a:pPr>
+            <a:r>
+              <a:rPr lang="en-US" sz="950" dirty="0">
+                <a:solidFill>
+                  <a:srgbClr val="6B7A8F"/>
+                </a:solidFill>
+                <a:latin typeface="Malgun Gothic" pitchFamily="34" charset="0"/>
+                <a:ea typeface="Malgun Gothic" pitchFamily="34" charset="-122"/>
+                <a:cs typeface="Malgun Gothic" pitchFamily="34" charset="-120"/>
+              </a:rPr>
+              <a:t>미문서화 반환값을 GUI 패널과 대조해 확정</a:t>
+            </a:r>
+            <a:endParaRPr lang="en-US" sz="950" dirty="0"/>
+          </a:p>
+        </p:txBody>
+      </p:sp>
+    </p:spTree>
+  </p:cSld>
+  <p:clrMapOvr>
+    <a:masterClrMapping/>
+  </p:clrMapOvr>
+</p:sld>
+</file>
+
+<file path=ppt/slides/slide9.xml><?xml version="1.0" encoding="utf-8"?>
+<p:sld xmlns:a="http://schemas.openxmlformats.org/drawingml/2006/main" xmlns:r="http://schemas.openxmlformats.org/officeDocument/2006/relationships" xmlns:p="http://schemas.openxmlformats.org/presentationml/2006/main">
+  <p:cSld name="Slide 9">
+    <p:bg>
+      <p:bgPr>
+        <a:solidFill>
+          <a:srgbClr val="F3F5F8"/>
+        </a:solidFill>
+      </p:bgPr>
+    </p:bg>
+    <p:spTree>
+      <p:nvGrpSpPr>
+        <p:cNvPr id="1" name=""/>
+        <p:cNvGrpSpPr/>
+        <p:nvPr/>
+      </p:nvGrpSpPr>
+      <p:grpSpPr>
+        <a:xfrm>
+          <a:off x="0" y="0"/>
+          <a:ext cx="0" cy="0"/>
+          <a:chOff x="0" y="0"/>
+          <a:chExt cx="0" cy="0"/>
+        </a:xfrm>
+      </p:grpSpPr>
+      <p:sp>
+        <p:nvSpPr>
+          <p:cNvPr id="2" name="Shape 0"/>
+          <p:cNvSpPr/>
+          <p:nvPr/>
+        </p:nvSpPr>
+        <p:spPr>
+          <a:xfrm>
+            <a:off x="502920" y="384048"/>
+            <a:ext cx="475488" cy="475488"/>
+          </a:xfrm>
+          <a:prstGeom prst="rect">
+            <a:avLst/>
+          </a:prstGeom>
+          <a:solidFill>
+            <a:srgbClr val="16305B"/>
+          </a:solidFill>
+          <a:ln w="12700">
+            <a:solidFill>
+              <a:srgbClr val="16305B"/>
+            </a:solidFill>
+            <a:prstDash val="solid"/>
+          </a:ln>
+        </p:spPr>
+      </p:sp>
+      <p:sp>
+        <p:nvSpPr>
+          <p:cNvPr id="3" name="Text 1"/>
+          <p:cNvSpPr txBox="1"/>
+          <p:nvPr/>
+        </p:nvSpPr>
+        <p:spPr>
+          <a:xfrm>
+            <a:off x="502920" y="384048"/>
+            <a:ext cx="475488" cy="475488"/>
+          </a:xfrm>
+          <a:prstGeom prst="rect">
+            <a:avLst/>
+          </a:prstGeom>
+          <a:noFill/>
+          <a:ln/>
+        </p:spPr>
+        <p:txBody>
+          <a:bodyPr wrap="square" lIns="0" tIns="0" rIns="0" bIns="0" rtlCol="0" anchor="ctr"/>
+          <a:lstStyle/>
+          <a:p>
+            <a:pPr algn="ctr" indent="0" marL="0">
+              <a:buNone/>
+            </a:pPr>
+            <a:r>
+              <a:rPr lang="en-US" sz="1600" b="1" dirty="0">
+                <a:solidFill>
+                  <a:srgbClr val="FFFFFF"/>
+                </a:solidFill>
+                <a:latin typeface="Malgun Gothic" pitchFamily="34" charset="0"/>
+                <a:ea typeface="Malgun Gothic" pitchFamily="34" charset="-122"/>
+                <a:cs typeface="Malgun Gothic" pitchFamily="34" charset="-120"/>
+              </a:rPr>
+              <a:t>03</a:t>
+            </a:r>
+            <a:endParaRPr lang="en-US" sz="1600" dirty="0"/>
+          </a:p>
+        </p:txBody>
+      </p:sp>
+      <p:sp>
+        <p:nvSpPr>
+          <p:cNvPr id="4" name="Text 2"/>
+          <p:cNvSpPr txBox="1"/>
+          <p:nvPr/>
+        </p:nvSpPr>
+        <p:spPr>
+          <a:xfrm>
+            <a:off x="1124712" y="365760"/>
+            <a:ext cx="7315200" cy="237744"/>
+          </a:xfrm>
+          <a:prstGeom prst="rect">
+            <a:avLst/>
+          </a:prstGeom>
+          <a:noFill/>
+          <a:ln/>
+        </p:spPr>
+        <p:txBody>
+          <a:bodyPr wrap="square" lIns="0" tIns="0" rIns="0" bIns="0" rtlCol="0" anchor="ctr"/>
+          <a:lstStyle/>
+          <a:p>
+            <a:pPr indent="0" marL="0">
+              <a:buNone/>
+            </a:pPr>
+            <a:r>
+              <a:rPr lang="en-US" sz="1050" b="1" spc="100" kern="0" dirty="0">
+                <a:solidFill>
+                  <a:srgbClr val="00A3C4"/>
+                </a:solidFill>
+                <a:latin typeface="Malgun Gothic" pitchFamily="34" charset="0"/>
+                <a:ea typeface="Malgun Gothic" pitchFamily="34" charset="-122"/>
+                <a:cs typeface="Malgun Gothic" pitchFamily="34" charset="-120"/>
+              </a:rPr>
+              <a:t>실험계획법 기반 자동해석 수행 및 데이터 확보</a:t>
+            </a:r>
+            <a:endParaRPr lang="en-US" sz="1050" dirty="0"/>
+          </a:p>
+        </p:txBody>
+      </p:sp>
+      <p:sp>
+        <p:nvSpPr>
+          <p:cNvPr id="5" name="Text 3"/>
+          <p:cNvSpPr txBox="1"/>
+          <p:nvPr/>
+        </p:nvSpPr>
+        <p:spPr>
+          <a:xfrm>
+            <a:off x="1124712" y="548640"/>
+            <a:ext cx="10607040" cy="384048"/>
+          </a:xfrm>
+          <a:prstGeom prst="rect">
+            <a:avLst/>
+          </a:prstGeom>
+          <a:noFill/>
+          <a:ln/>
+        </p:spPr>
+        <p:txBody>
+          <a:bodyPr wrap="square" lIns="0" tIns="0" rIns="0" bIns="0" rtlCol="0" anchor="ctr"/>
+          <a:lstStyle/>
+          <a:p>
+            <a:pPr indent="0" marL="0">
+              <a:buNone/>
+            </a:pPr>
+            <a:r>
+              <a:rPr lang="en-US" sz="2200" b="1" dirty="0">
+                <a:solidFill>
+                  <a:srgbClr val="16305B"/>
+                </a:solidFill>
+                <a:latin typeface="Malgun Gothic" pitchFamily="34" charset="0"/>
+                <a:ea typeface="Malgun Gothic" pitchFamily="34" charset="-122"/>
+                <a:cs typeface="Malgun Gothic" pitchFamily="34" charset="-120"/>
+              </a:rPr>
+              <a:t>해석 모델 자동 구성 및 결과 추출 — Icepak</a:t>
+            </a:r>
+            <a:endParaRPr lang="en-US" sz="2200" dirty="0"/>
+          </a:p>
+        </p:txBody>
+      </p:sp>
+      <p:sp>
+        <p:nvSpPr>
+          <p:cNvPr id="6" name="Shape 4"/>
+          <p:cNvSpPr/>
+          <p:nvPr/>
+        </p:nvSpPr>
+        <p:spPr>
+          <a:xfrm>
+            <a:off x="502920" y="1188720"/>
+            <a:ext cx="5440680" cy="4160520"/>
+          </a:xfrm>
+          <a:prstGeom prst="roundRect">
+            <a:avLst>
+              <a:gd name="adj" fmla="val 1319"/>
+            </a:avLst>
+          </a:prstGeom>
+          <a:solidFill>
+            <a:srgbClr val="FFFFFF"/>
+          </a:solidFill>
+          <a:ln w="9525">
+            <a:solidFill>
+              <a:srgbClr val="DDE3EB"/>
+            </a:solidFill>
+            <a:prstDash val="solid"/>
+          </a:ln>
+          <a:effectLst>
+            <a:outerShdw sx="100000" sy="100000" kx="0" ky="0" algn="bl" rotWithShape="0" blurRad="101600" dist="12700" dir="5400000">
+              <a:srgbClr val="9AA8BC">
+                <a:alpha val="18000"/>
+              </a:srgbClr>
+            </a:outerShdw>
+          </a:effectLst>
+        </p:spPr>
+      </p:sp>
+      <p:sp>
+        <p:nvSpPr>
+          <p:cNvPr id="7" name="Shape 5"/>
+          <p:cNvSpPr/>
+          <p:nvPr/>
+        </p:nvSpPr>
+        <p:spPr>
+          <a:xfrm>
+            <a:off x="758952" y="1463040"/>
+            <a:ext cx="82296" cy="182880"/>
+          </a:xfrm>
+          <a:prstGeom prst="rect">
+            <a:avLst/>
+          </a:prstGeom>
+          <a:solidFill>
+            <a:srgbClr val="00A3C4"/>
+          </a:solidFill>
+          <a:ln w="12700">
+            <a:solidFill>
+              <a:srgbClr val="00A3C4"/>
+            </a:solidFill>
+            <a:prstDash val="solid"/>
+          </a:ln>
+        </p:spPr>
+      </p:sp>
+      <p:sp>
+        <p:nvSpPr>
+          <p:cNvPr id="8" name="Text 6"/>
+          <p:cNvSpPr txBox="1"/>
+          <p:nvPr/>
+        </p:nvSpPr>
+        <p:spPr>
+          <a:xfrm>
+            <a:off x="923544" y="1371600"/>
+            <a:ext cx="4480560" cy="365760"/>
+          </a:xfrm>
+          <a:prstGeom prst="rect">
+            <a:avLst/>
+          </a:prstGeom>
+          <a:noFill/>
+          <a:ln/>
+        </p:spPr>
+        <p:txBody>
+          <a:bodyPr wrap="square" lIns="0" tIns="0" rIns="0" bIns="0" rtlCol="0" anchor="ctr"/>
+          <a:lstStyle/>
+          <a:p>
+            <a:pPr indent="0" marL="0">
+              <a:buNone/>
+            </a:pPr>
+            <a:r>
+              <a:rPr lang="en-US" sz="1300" b="1" dirty="0">
+                <a:solidFill>
+                  <a:srgbClr val="16305B"/>
+                </a:solidFill>
+                <a:latin typeface="Malgun Gothic" pitchFamily="34" charset="0"/>
+                <a:ea typeface="Malgun Gothic" pitchFamily="34" charset="-122"/>
+                <a:cs typeface="Malgun Gothic" pitchFamily="34" charset="-120"/>
+              </a:rPr>
+              <a:t>해석 모델 구성 절차</a:t>
+            </a:r>
+            <a:endParaRPr lang="en-US" sz="1300" dirty="0"/>
+          </a:p>
+        </p:txBody>
+      </p:sp>
+      <p:sp>
+        <p:nvSpPr>
+          <p:cNvPr id="9" name="Shape 7"/>
+          <p:cNvSpPr/>
+          <p:nvPr/>
+        </p:nvSpPr>
+        <p:spPr>
+          <a:xfrm>
+            <a:off x="832104" y="1975104"/>
+            <a:ext cx="274320" cy="274320"/>
+          </a:xfrm>
+          <a:prstGeom prst="ellipse">
+            <a:avLst/>
+          </a:prstGeom>
+          <a:solidFill>
+            <a:srgbClr val="16305B"/>
+          </a:solidFill>
+          <a:ln w="12700">
+            <a:solidFill>
+              <a:srgbClr val="16305B"/>
+            </a:solidFill>
+            <a:prstDash val="solid"/>
+          </a:ln>
+        </p:spPr>
+      </p:sp>
+      <p:sp>
+        <p:nvSpPr>
+          <p:cNvPr id="10" name="Text 8"/>
+          <p:cNvSpPr txBox="1"/>
+          <p:nvPr/>
+        </p:nvSpPr>
+        <p:spPr>
+          <a:xfrm>
+            <a:off x="832104" y="1975104"/>
+            <a:ext cx="274320" cy="274320"/>
+          </a:xfrm>
+          <a:prstGeom prst="rect">
+            <a:avLst/>
+          </a:prstGeom>
+          <a:noFill/>
+          <a:ln/>
+        </p:spPr>
+        <p:txBody>
+          <a:bodyPr wrap="square" lIns="0" tIns="0" rIns="0" bIns="0" rtlCol="0" anchor="ctr"/>
+          <a:lstStyle/>
+          <a:p>
+            <a:pPr algn="ctr" indent="0" marL="0">
+              <a:buNone/>
+            </a:pPr>
+            <a:r>
+              <a:rPr lang="en-US" sz="900" b="1" dirty="0">
+                <a:solidFill>
+                  <a:srgbClr val="FFFFFF"/>
+                </a:solidFill>
+                <a:latin typeface="Malgun Gothic" pitchFamily="34" charset="0"/>
+                <a:ea typeface="Malgun Gothic" pitchFamily="34" charset="-122"/>
+                <a:cs typeface="Malgun Gothic" pitchFamily="34" charset="-120"/>
+              </a:rPr>
+              <a:t>1</a:t>
+            </a:r>
+            <a:endParaRPr lang="en-US" sz="900" dirty="0"/>
+          </a:p>
+        </p:txBody>
+      </p:sp>
+      <p:sp>
+        <p:nvSpPr>
+          <p:cNvPr id="11" name="Text 9"/>
+          <p:cNvSpPr txBox="1"/>
+          <p:nvPr/>
+        </p:nvSpPr>
+        <p:spPr>
+          <a:xfrm>
+            <a:off x="1234440" y="1920240"/>
+            <a:ext cx="1234440" cy="384048"/>
+          </a:xfrm>
+          <a:prstGeom prst="rect">
+            <a:avLst/>
+          </a:prstGeom>
+          <a:noFill/>
+          <a:ln/>
+        </p:spPr>
+        <p:txBody>
+          <a:bodyPr wrap="square" lIns="0" tIns="0" rIns="0" bIns="0" rtlCol="0" anchor="ctr"/>
+          <a:lstStyle/>
+          <a:p>
+            <a:pPr indent="0" marL="0">
+              <a:buNone/>
+            </a:pPr>
+            <a:r>
+              <a:rPr lang="en-US" sz="1000" b="1" dirty="0">
+                <a:solidFill>
+                  <a:srgbClr val="16305B"/>
+                </a:solidFill>
+                <a:latin typeface="Malgun Gothic" pitchFamily="34" charset="0"/>
+                <a:ea typeface="Malgun Gothic" pitchFamily="34" charset="-122"/>
+                <a:cs typeface="Malgun Gothic" pitchFamily="34" charset="-120"/>
+              </a:rPr>
+              <a:t>프로젝트 생성</a:t>
+            </a:r>
+            <a:endParaRPr lang="en-US" sz="1000" dirty="0"/>
+          </a:p>
+        </p:txBody>
+      </p:sp>
+      <p:sp>
+        <p:nvSpPr>
+          <p:cNvPr id="12" name="Text 10"/>
+          <p:cNvSpPr txBox="1"/>
+          <p:nvPr/>
+        </p:nvSpPr>
+        <p:spPr>
+          <a:xfrm>
+            <a:off x="2468880" y="1920240"/>
+            <a:ext cx="3246120" cy="384048"/>
+          </a:xfrm>
+          <a:prstGeom prst="rect">
+            <a:avLst/>
+          </a:prstGeom>
+          <a:noFill/>
+          <a:ln/>
+        </p:spPr>
+        <p:txBody>
+          <a:bodyPr wrap="square" lIns="0" tIns="0" rIns="0" bIns="0" rtlCol="0" anchor="ctr"/>
+          <a:lstStyle/>
+          <a:p>
+            <a:pPr indent="0" marL="0">
+              <a:buNone/>
+            </a:pPr>
+            <a:r>
+              <a:rPr lang="en-US" sz="950" dirty="0">
+                <a:solidFill>
+                  <a:srgbClr val="1C2733"/>
+                </a:solidFill>
+                <a:latin typeface="Malgun Gothic" pitchFamily="34" charset="0"/>
+                <a:ea typeface="Malgun Gothic" pitchFamily="34" charset="-122"/>
+                <a:cs typeface="Malgun Gothic" pitchFamily="34" charset="-120"/>
+              </a:rPr>
+              <a:t>회차마다 새로 생성, 잔여·잠금 파일 정리</a:t>
+            </a:r>
+            <a:endParaRPr lang="en-US" sz="950" dirty="0"/>
+          </a:p>
+        </p:txBody>
+      </p:sp>
+      <p:sp>
+        <p:nvSpPr>
+          <p:cNvPr id="13" name="Shape 11"/>
+          <p:cNvSpPr/>
+          <p:nvPr/>
+        </p:nvSpPr>
+        <p:spPr>
+          <a:xfrm>
+            <a:off x="1234440" y="2350008"/>
+            <a:ext cx="4480560" cy="0"/>
+          </a:xfrm>
+          <a:prstGeom prst="line">
+            <a:avLst/>
+          </a:prstGeom>
+          <a:noFill/>
+          <a:ln w="6350">
+            <a:solidFill>
+              <a:srgbClr val="DDE3EB"/>
+            </a:solidFill>
+            <a:prstDash val="solid"/>
+          </a:ln>
+        </p:spPr>
+      </p:sp>
+      <p:sp>
+        <p:nvSpPr>
+          <p:cNvPr id="14" name="Shape 12"/>
+          <p:cNvSpPr/>
+          <p:nvPr/>
+        </p:nvSpPr>
+        <p:spPr>
+          <a:xfrm>
+            <a:off x="832104" y="2450592"/>
+            <a:ext cx="274320" cy="274320"/>
+          </a:xfrm>
+          <a:prstGeom prst="ellipse">
+            <a:avLst/>
+          </a:prstGeom>
+          <a:solidFill>
+            <a:srgbClr val="16305B"/>
+          </a:solidFill>
+          <a:ln w="12700">
+            <a:solidFill>
+              <a:srgbClr val="16305B"/>
+            </a:solidFill>
+            <a:prstDash val="solid"/>
+          </a:ln>
+        </p:spPr>
+      </p:sp>
+      <p:sp>
+        <p:nvSpPr>
+          <p:cNvPr id="15" name="Text 13"/>
+          <p:cNvSpPr txBox="1"/>
+          <p:nvPr/>
+        </p:nvSpPr>
+        <p:spPr>
+          <a:xfrm>
+            <a:off x="832104" y="2450592"/>
+            <a:ext cx="274320" cy="274320"/>
+          </a:xfrm>
+          <a:prstGeom prst="rect">
+            <a:avLst/>
+          </a:prstGeom>
+          <a:noFill/>
+          <a:ln/>
+        </p:spPr>
+        <p:txBody>
+          <a:bodyPr wrap="square" lIns="0" tIns="0" rIns="0" bIns="0" rtlCol="0" anchor="ctr"/>
+          <a:lstStyle/>
+          <a:p>
+            <a:pPr algn="ctr" indent="0" marL="0">
+              <a:buNone/>
+            </a:pPr>
+            <a:r>
+              <a:rPr lang="en-US" sz="900" b="1" dirty="0">
+                <a:solidFill>
+                  <a:srgbClr val="FFFFFF"/>
+                </a:solidFill>
+                <a:latin typeface="Malgun Gothic" pitchFamily="34" charset="0"/>
+                <a:ea typeface="Malgun Gothic" pitchFamily="34" charset="-122"/>
+                <a:cs typeface="Malgun Gothic" pitchFamily="34" charset="-120"/>
+              </a:rPr>
+              <a:t>2</a:t>
+            </a:r>
+            <a:endParaRPr lang="en-US" sz="900" dirty="0"/>
+          </a:p>
+        </p:txBody>
+      </p:sp>
+      <p:sp>
+        <p:nvSpPr>
+          <p:cNvPr id="16" name="Text 14"/>
+          <p:cNvSpPr txBox="1"/>
+          <p:nvPr/>
+        </p:nvSpPr>
+        <p:spPr>
+          <a:xfrm>
+            <a:off x="1234440" y="2395728"/>
+            <a:ext cx="1234440" cy="384048"/>
+          </a:xfrm>
+          <a:prstGeom prst="rect">
+            <a:avLst/>
+          </a:prstGeom>
+          <a:noFill/>
+          <a:ln/>
+        </p:spPr>
+        <p:txBody>
+          <a:bodyPr wrap="square" lIns="0" tIns="0" rIns="0" bIns="0" rtlCol="0" anchor="ctr"/>
+          <a:lstStyle/>
+          <a:p>
+            <a:pPr indent="0" marL="0">
+              <a:buNone/>
+            </a:pPr>
+            <a:r>
+              <a:rPr lang="en-US" sz="1000" b="1" dirty="0">
+                <a:solidFill>
+                  <a:srgbClr val="16305B"/>
+                </a:solidFill>
+                <a:latin typeface="Malgun Gothic" pitchFamily="34" charset="0"/>
+                <a:ea typeface="Malgun Gothic" pitchFamily="34" charset="-122"/>
+                <a:cs typeface="Malgun Gothic" pitchFamily="34" charset="-120"/>
+              </a:rPr>
+              <a:t>형상 불러오기</a:t>
+            </a:r>
+            <a:endParaRPr lang="en-US" sz="1000" dirty="0"/>
+          </a:p>
+        </p:txBody>
+      </p:sp>
+      <p:sp>
+        <p:nvSpPr>
+          <p:cNvPr id="17" name="Text 15"/>
+          <p:cNvSpPr txBox="1"/>
+          <p:nvPr/>
+        </p:nvSpPr>
+        <p:spPr>
+          <a:xfrm>
+            <a:off x="2468880" y="2395728"/>
+            <a:ext cx="3246120" cy="384048"/>
+          </a:xfrm>
+          <a:prstGeom prst="rect">
+            <a:avLst/>
+          </a:prstGeom>
+          <a:noFill/>
+          <a:ln/>
+        </p:spPr>
+        <p:txBody>
+          <a:bodyPr wrap="square" lIns="0" tIns="0" rIns="0" bIns="0" rtlCol="0" anchor="ctr"/>
+          <a:lstStyle/>
+          <a:p>
+            <a:pPr indent="0" marL="0">
+              <a:buNone/>
+            </a:pPr>
+            <a:r>
+              <a:rPr lang="en-US" sz="950" dirty="0">
+                <a:solidFill>
+                  <a:srgbClr val="1C2733"/>
+                </a:solidFill>
+                <a:latin typeface="Malgun Gothic" pitchFamily="34" charset="0"/>
+                <a:ea typeface="Malgun Gothic" pitchFamily="34" charset="-122"/>
+                <a:cs typeface="Malgun Gothic" pitchFamily="34" charset="-120"/>
+              </a:rPr>
+              <a:t>STEP 불러오기 → 부품 이름·재질 지정</a:t>
+            </a:r>
+            <a:endParaRPr lang="en-US" sz="950" dirty="0"/>
+          </a:p>
+        </p:txBody>
+      </p:sp>
+      <p:sp>
+        <p:nvSpPr>
+          <p:cNvPr id="18" name="Shape 16"/>
+          <p:cNvSpPr/>
+          <p:nvPr/>
+        </p:nvSpPr>
+        <p:spPr>
+          <a:xfrm>
+            <a:off x="1234440" y="2825496"/>
+            <a:ext cx="4480560" cy="0"/>
+          </a:xfrm>
+          <a:prstGeom prst="line">
+            <a:avLst/>
+          </a:prstGeom>
+          <a:noFill/>
+          <a:ln w="6350">
+            <a:solidFill>
+              <a:srgbClr val="DDE3EB"/>
+            </a:solidFill>
+            <a:prstDash val="solid"/>
+          </a:ln>
+        </p:spPr>
+      </p:sp>
+      <p:sp>
+        <p:nvSpPr>
+          <p:cNvPr id="19" name="Shape 17"/>
+          <p:cNvSpPr/>
+          <p:nvPr/>
+        </p:nvSpPr>
+        <p:spPr>
+          <a:xfrm>
+            <a:off x="832104" y="2926080"/>
+            <a:ext cx="274320" cy="274320"/>
+          </a:xfrm>
+          <a:prstGeom prst="ellipse">
+            <a:avLst/>
+          </a:prstGeom>
+          <a:solidFill>
+            <a:srgbClr val="16305B"/>
+          </a:solidFill>
+          <a:ln w="12700">
+            <a:solidFill>
+              <a:srgbClr val="16305B"/>
+            </a:solidFill>
+            <a:prstDash val="solid"/>
+          </a:ln>
+        </p:spPr>
+      </p:sp>
+      <p:sp>
+        <p:nvSpPr>
+          <p:cNvPr id="20" name="Text 18"/>
+          <p:cNvSpPr txBox="1"/>
+          <p:nvPr/>
+        </p:nvSpPr>
+        <p:spPr>
+          <a:xfrm>
+            <a:off x="832104" y="2926080"/>
+            <a:ext cx="274320" cy="274320"/>
+          </a:xfrm>
+          <a:prstGeom prst="rect">
+            <a:avLst/>
+          </a:prstGeom>
+          <a:noFill/>
+          <a:ln/>
+        </p:spPr>
+        <p:txBody>
+          <a:bodyPr wrap="square" lIns="0" tIns="0" rIns="0" bIns="0" rtlCol="0" anchor="ctr"/>
+          <a:lstStyle/>
+          <a:p>
+            <a:pPr algn="ctr" indent="0" marL="0">
+              <a:buNone/>
+            </a:pPr>
+            <a:r>
+              <a:rPr lang="en-US" sz="900" b="1" dirty="0">
+                <a:solidFill>
+                  <a:srgbClr val="FFFFFF"/>
+                </a:solidFill>
+                <a:latin typeface="Malgun Gothic" pitchFamily="34" charset="0"/>
+                <a:ea typeface="Malgun Gothic" pitchFamily="34" charset="-122"/>
+                <a:cs typeface="Malgun Gothic" pitchFamily="34" charset="-120"/>
+              </a:rPr>
+              <a:t>3</a:t>
+            </a:r>
+            <a:endParaRPr lang="en-US" sz="900" dirty="0"/>
+          </a:p>
+        </p:txBody>
+      </p:sp>
+      <p:sp>
+        <p:nvSpPr>
+          <p:cNvPr id="21" name="Text 19"/>
+          <p:cNvSpPr txBox="1"/>
+          <p:nvPr/>
+        </p:nvSpPr>
+        <p:spPr>
+          <a:xfrm>
+            <a:off x="1234440" y="2871216"/>
+            <a:ext cx="1234440" cy="384048"/>
+          </a:xfrm>
+          <a:prstGeom prst="rect">
+            <a:avLst/>
+          </a:prstGeom>
+          <a:noFill/>
+          <a:ln/>
+        </p:spPr>
+        <p:txBody>
+          <a:bodyPr wrap="square" lIns="0" tIns="0" rIns="0" bIns="0" rtlCol="0" anchor="ctr"/>
+          <a:lstStyle/>
+          <a:p>
+            <a:pPr indent="0" marL="0">
+              <a:buNone/>
+            </a:pPr>
+            <a:r>
+              <a:rPr lang="en-US" sz="1000" b="1" dirty="0">
+                <a:solidFill>
+                  <a:srgbClr val="16305B"/>
+                </a:solidFill>
+                <a:latin typeface="Malgun Gothic" pitchFamily="34" charset="0"/>
+                <a:ea typeface="Malgun Gothic" pitchFamily="34" charset="-122"/>
+                <a:cs typeface="Malgun Gothic" pitchFamily="34" charset="-120"/>
+              </a:rPr>
+              <a:t>유체 영역</a:t>
+            </a:r>
+            <a:endParaRPr lang="en-US" sz="1000" dirty="0"/>
+          </a:p>
+        </p:txBody>
+      </p:sp>
+      <p:sp>
+        <p:nvSpPr>
+          <p:cNvPr id="22" name="Text 20"/>
+          <p:cNvSpPr txBox="1"/>
+          <p:nvPr/>
+        </p:nvSpPr>
+        <p:spPr>
+          <a:xfrm>
+            <a:off x="2468880" y="2871216"/>
+            <a:ext cx="3246120" cy="384048"/>
+          </a:xfrm>
+          <a:prstGeom prst="rect">
+            <a:avLst/>
+          </a:prstGeom>
+          <a:noFill/>
+          <a:ln/>
+        </p:spPr>
+        <p:txBody>
+          <a:bodyPr wrap="square" lIns="0" tIns="0" rIns="0" bIns="0" rtlCol="0" anchor="ctr"/>
+          <a:lstStyle/>
+          <a:p>
+            <a:pPr indent="0" marL="0">
+              <a:buNone/>
+            </a:pPr>
+            <a:r>
+              <a:rPr lang="en-US" sz="950" dirty="0">
+                <a:solidFill>
+                  <a:srgbClr val="1C2733"/>
+                </a:solidFill>
+                <a:latin typeface="Malgun Gothic" pitchFamily="34" charset="0"/>
+                <a:ea typeface="Malgun Gothic" pitchFamily="34" charset="-122"/>
+                <a:cs typeface="Malgun Gothic" pitchFamily="34" charset="-120"/>
+              </a:rPr>
+              <a:t>박스에서 형상을 빼 냉각유(PAO) 영역 생성</a:t>
+            </a:r>
+            <a:endParaRPr lang="en-US" sz="950" dirty="0"/>
+          </a:p>
+        </p:txBody>
+      </p:sp>
+      <p:sp>
+        <p:nvSpPr>
+          <p:cNvPr id="23" name="Shape 21"/>
+          <p:cNvSpPr/>
+          <p:nvPr/>
+        </p:nvSpPr>
+        <p:spPr>
+          <a:xfrm>
+            <a:off x="1234440" y="3300984"/>
+            <a:ext cx="4480560" cy="0"/>
+          </a:xfrm>
+          <a:prstGeom prst="line">
+            <a:avLst/>
+          </a:prstGeom>
+          <a:noFill/>
+          <a:ln w="6350">
+            <a:solidFill>
+              <a:srgbClr val="DDE3EB"/>
+            </a:solidFill>
+            <a:prstDash val="solid"/>
+          </a:ln>
+        </p:spPr>
+      </p:sp>
+      <p:sp>
+        <p:nvSpPr>
+          <p:cNvPr id="24" name="Shape 22"/>
+          <p:cNvSpPr/>
+          <p:nvPr/>
+        </p:nvSpPr>
+        <p:spPr>
+          <a:xfrm>
+            <a:off x="832104" y="3401568"/>
+            <a:ext cx="274320" cy="274320"/>
+          </a:xfrm>
+          <a:prstGeom prst="ellipse">
+            <a:avLst/>
+          </a:prstGeom>
+          <a:solidFill>
+            <a:srgbClr val="16305B"/>
+          </a:solidFill>
+          <a:ln w="12700">
+            <a:solidFill>
+              <a:srgbClr val="16305B"/>
+            </a:solidFill>
+            <a:prstDash val="solid"/>
+          </a:ln>
+        </p:spPr>
+      </p:sp>
+      <p:sp>
+        <p:nvSpPr>
+          <p:cNvPr id="25" name="Text 23"/>
+          <p:cNvSpPr txBox="1"/>
+          <p:nvPr/>
+        </p:nvSpPr>
+        <p:spPr>
+          <a:xfrm>
+            <a:off x="832104" y="3401568"/>
+            <a:ext cx="274320" cy="274320"/>
+          </a:xfrm>
+          <a:prstGeom prst="rect">
+            <a:avLst/>
+          </a:prstGeom>
+          <a:noFill/>
+          <a:ln/>
+        </p:spPr>
+        <p:txBody>
+          <a:bodyPr wrap="square" lIns="0" tIns="0" rIns="0" bIns="0" rtlCol="0" anchor="ctr"/>
+          <a:lstStyle/>
+          <a:p>
+            <a:pPr algn="ctr" indent="0" marL="0">
+              <a:buNone/>
+            </a:pPr>
+            <a:r>
+              <a:rPr lang="en-US" sz="900" b="1" dirty="0">
+                <a:solidFill>
+                  <a:srgbClr val="FFFFFF"/>
+                </a:solidFill>
+                <a:latin typeface="Malgun Gothic" pitchFamily="34" charset="0"/>
+                <a:ea typeface="Malgun Gothic" pitchFamily="34" charset="-122"/>
+                <a:cs typeface="Malgun Gothic" pitchFamily="34" charset="-120"/>
+              </a:rPr>
+              <a:t>4</a:t>
+            </a:r>
+            <a:endParaRPr lang="en-US" sz="900" dirty="0"/>
+          </a:p>
+        </p:txBody>
+      </p:sp>
+      <p:sp>
+        <p:nvSpPr>
+          <p:cNvPr id="26" name="Text 24"/>
+          <p:cNvSpPr txBox="1"/>
+          <p:nvPr/>
+        </p:nvSpPr>
+        <p:spPr>
+          <a:xfrm>
+            <a:off x="1234440" y="3346704"/>
+            <a:ext cx="1234440" cy="384048"/>
+          </a:xfrm>
+          <a:prstGeom prst="rect">
+            <a:avLst/>
+          </a:prstGeom>
+          <a:noFill/>
+          <a:ln/>
+        </p:spPr>
+        <p:txBody>
+          <a:bodyPr wrap="square" lIns="0" tIns="0" rIns="0" bIns="0" rtlCol="0" anchor="ctr"/>
+          <a:lstStyle/>
+          <a:p>
+            <a:pPr indent="0" marL="0">
+              <a:buNone/>
+            </a:pPr>
+            <a:r>
+              <a:rPr lang="en-US" sz="1000" b="1" dirty="0">
+                <a:solidFill>
+                  <a:srgbClr val="16305B"/>
+                </a:solidFill>
+                <a:latin typeface="Malgun Gothic" pitchFamily="34" charset="0"/>
+                <a:ea typeface="Malgun Gothic" pitchFamily="34" charset="-122"/>
+                <a:cs typeface="Malgun Gothic" pitchFamily="34" charset="-120"/>
+              </a:rPr>
+              <a:t>경계조건</a:t>
+            </a:r>
+            <a:endParaRPr lang="en-US" sz="1000" dirty="0"/>
+          </a:p>
+        </p:txBody>
+      </p:sp>
+      <p:sp>
+        <p:nvSpPr>
+          <p:cNvPr id="27" name="Text 25"/>
+          <p:cNvSpPr txBox="1"/>
+          <p:nvPr/>
+        </p:nvSpPr>
+        <p:spPr>
+          <a:xfrm>
+            <a:off x="2468880" y="3346704"/>
+            <a:ext cx="3246120" cy="384048"/>
+          </a:xfrm>
+          <a:prstGeom prst="rect">
+            <a:avLst/>
+          </a:prstGeom>
+          <a:noFill/>
+          <a:ln/>
+        </p:spPr>
+        <p:txBody>
+          <a:bodyPr wrap="square" lIns="0" tIns="0" rIns="0" bIns="0" rtlCol="0" anchor="ctr"/>
+          <a:lstStyle/>
+          <a:p>
+            <a:pPr indent="0" marL="0">
+              <a:buNone/>
+            </a:pPr>
+            <a:r>
+              <a:rPr lang="en-US" sz="950" dirty="0">
+                <a:solidFill>
+                  <a:srgbClr val="1C2733"/>
+                </a:solidFill>
+                <a:latin typeface="Malgun Gothic" pitchFamily="34" charset="0"/>
+                <a:ea typeface="Malgun Gothic" pitchFamily="34" charset="-122"/>
+                <a:cs typeface="Malgun Gothic" pitchFamily="34" charset="-120"/>
+              </a:rPr>
+              <a:t>발열원 9개 · 팬(입구) · 개구부(출구) 지정</a:t>
+            </a:r>
+            <a:endParaRPr lang="en-US" sz="950" dirty="0"/>
+          </a:p>
+        </p:txBody>
+      </p:sp>
+      <p:sp>
+        <p:nvSpPr>
+          <p:cNvPr id="28" name="Shape 26"/>
+          <p:cNvSpPr/>
+          <p:nvPr/>
+        </p:nvSpPr>
+        <p:spPr>
+          <a:xfrm>
+            <a:off x="1234440" y="3776472"/>
+            <a:ext cx="4480560" cy="0"/>
+          </a:xfrm>
+          <a:prstGeom prst="line">
+            <a:avLst/>
+          </a:prstGeom>
+          <a:noFill/>
+          <a:ln w="6350">
+            <a:solidFill>
+              <a:srgbClr val="DDE3EB"/>
+            </a:solidFill>
+            <a:prstDash val="solid"/>
+          </a:ln>
+        </p:spPr>
+      </p:sp>
+      <p:sp>
+        <p:nvSpPr>
+          <p:cNvPr id="29" name="Shape 27"/>
+          <p:cNvSpPr/>
+          <p:nvPr/>
+        </p:nvSpPr>
+        <p:spPr>
+          <a:xfrm>
+            <a:off x="832104" y="3877056"/>
+            <a:ext cx="274320" cy="274320"/>
+          </a:xfrm>
+          <a:prstGeom prst="ellipse">
+            <a:avLst/>
+          </a:prstGeom>
+          <a:solidFill>
+            <a:srgbClr val="16305B"/>
+          </a:solidFill>
+          <a:ln w="12700">
+            <a:solidFill>
+              <a:srgbClr val="16305B"/>
+            </a:solidFill>
+            <a:prstDash val="solid"/>
+          </a:ln>
+        </p:spPr>
+      </p:sp>
+      <p:sp>
+        <p:nvSpPr>
+          <p:cNvPr id="30" name="Text 28"/>
+          <p:cNvSpPr txBox="1"/>
+          <p:nvPr/>
+        </p:nvSpPr>
+        <p:spPr>
+          <a:xfrm>
+            <a:off x="832104" y="3877056"/>
+            <a:ext cx="274320" cy="274320"/>
+          </a:xfrm>
+          <a:prstGeom prst="rect">
+            <a:avLst/>
+          </a:prstGeom>
+          <a:noFill/>
+          <a:ln/>
+        </p:spPr>
+        <p:txBody>
+          <a:bodyPr wrap="square" lIns="0" tIns="0" rIns="0" bIns="0" rtlCol="0" anchor="ctr"/>
+          <a:lstStyle/>
+          <a:p>
+            <a:pPr algn="ctr" indent="0" marL="0">
+              <a:buNone/>
+            </a:pPr>
+            <a:r>
+              <a:rPr lang="en-US" sz="900" b="1" dirty="0">
+                <a:solidFill>
+                  <a:srgbClr val="FFFFFF"/>
+                </a:solidFill>
+                <a:latin typeface="Malgun Gothic" pitchFamily="34" charset="0"/>
+                <a:ea typeface="Malgun Gothic" pitchFamily="34" charset="-122"/>
+                <a:cs typeface="Malgun Gothic" pitchFamily="34" charset="-120"/>
+              </a:rPr>
+              <a:t>5</a:t>
+            </a:r>
+            <a:endParaRPr lang="en-US" sz="900" dirty="0"/>
+          </a:p>
+        </p:txBody>
+      </p:sp>
+      <p:sp>
+        <p:nvSpPr>
+          <p:cNvPr id="31" name="Text 29"/>
+          <p:cNvSpPr txBox="1"/>
+          <p:nvPr/>
+        </p:nvSpPr>
+        <p:spPr>
+          <a:xfrm>
+            <a:off x="1234440" y="3822192"/>
+            <a:ext cx="1234440" cy="384048"/>
+          </a:xfrm>
+          <a:prstGeom prst="rect">
+            <a:avLst/>
+          </a:prstGeom>
+          <a:noFill/>
+          <a:ln/>
+        </p:spPr>
+        <p:txBody>
+          <a:bodyPr wrap="square" lIns="0" tIns="0" rIns="0" bIns="0" rtlCol="0" anchor="ctr"/>
+          <a:lstStyle/>
+          <a:p>
+            <a:pPr indent="0" marL="0">
+              <a:buNone/>
+            </a:pPr>
+            <a:r>
+              <a:rPr lang="en-US" sz="1000" b="1" dirty="0">
+                <a:solidFill>
+                  <a:srgbClr val="16305B"/>
+                </a:solidFill>
+                <a:latin typeface="Malgun Gothic" pitchFamily="34" charset="0"/>
+                <a:ea typeface="Malgun Gothic" pitchFamily="34" charset="-122"/>
+                <a:cs typeface="Malgun Gothic" pitchFamily="34" charset="-120"/>
+              </a:rPr>
+              <a:t>메시</a:t>
+            </a:r>
+            <a:endParaRPr lang="en-US" sz="1000" dirty="0"/>
+          </a:p>
+        </p:txBody>
+      </p:sp>
+      <p:sp>
+        <p:nvSpPr>
+          <p:cNvPr id="32" name="Text 30"/>
+          <p:cNvSpPr txBox="1"/>
+          <p:nvPr/>
+        </p:nvSpPr>
+        <p:spPr>
+          <a:xfrm>
+            <a:off x="2468880" y="3822192"/>
+            <a:ext cx="3246120" cy="384048"/>
+          </a:xfrm>
+          <a:prstGeom prst="rect">
+            <a:avLst/>
+          </a:prstGeom>
+          <a:noFill/>
+          <a:ln/>
+        </p:spPr>
+        <p:txBody>
+          <a:bodyPr wrap="square" lIns="0" tIns="0" rIns="0" bIns="0" rtlCol="0" anchor="ctr"/>
+          <a:lstStyle/>
+          <a:p>
+            <a:pPr indent="0" marL="0">
+              <a:buNone/>
+            </a:pPr>
+            <a:r>
+              <a:rPr lang="en-US" sz="950" dirty="0">
+                <a:solidFill>
+                  <a:srgbClr val="1C2733"/>
+                </a:solidFill>
+                <a:latin typeface="Malgun Gothic" pitchFamily="34" charset="0"/>
+                <a:ea typeface="Malgun Gothic" pitchFamily="34" charset="-122"/>
+                <a:cs typeface="Malgun Gothic" pitchFamily="34" charset="-120"/>
+              </a:rPr>
+              <a:t>유체 영역 로컬 메시 + 전체 글로벌 메시</a:t>
+            </a:r>
+            <a:endParaRPr lang="en-US" sz="950" dirty="0"/>
+          </a:p>
+        </p:txBody>
+      </p:sp>
+      <p:sp>
+        <p:nvSpPr>
+          <p:cNvPr id="33" name="Shape 31"/>
+          <p:cNvSpPr/>
+          <p:nvPr/>
+        </p:nvSpPr>
+        <p:spPr>
+          <a:xfrm>
+            <a:off x="1234440" y="4251960"/>
+            <a:ext cx="4480560" cy="0"/>
+          </a:xfrm>
+          <a:prstGeom prst="line">
+            <a:avLst/>
+          </a:prstGeom>
+          <a:noFill/>
+          <a:ln w="6350">
+            <a:solidFill>
+              <a:srgbClr val="DDE3EB"/>
+            </a:solidFill>
+            <a:prstDash val="solid"/>
+          </a:ln>
+        </p:spPr>
+      </p:sp>
+      <p:sp>
+        <p:nvSpPr>
+          <p:cNvPr id="34" name="Shape 32"/>
+          <p:cNvSpPr/>
+          <p:nvPr/>
+        </p:nvSpPr>
+        <p:spPr>
+          <a:xfrm>
+            <a:off x="832104" y="4352544"/>
+            <a:ext cx="274320" cy="274320"/>
+          </a:xfrm>
+          <a:prstGeom prst="ellipse">
+            <a:avLst/>
+          </a:prstGeom>
+          <a:solidFill>
+            <a:srgbClr val="16305B"/>
+          </a:solidFill>
+          <a:ln w="12700">
+            <a:solidFill>
+              <a:srgbClr val="16305B"/>
+            </a:solidFill>
+            <a:prstDash val="solid"/>
+          </a:ln>
+        </p:spPr>
+      </p:sp>
+      <p:sp>
+        <p:nvSpPr>
+          <p:cNvPr id="35" name="Text 33"/>
+          <p:cNvSpPr txBox="1"/>
+          <p:nvPr/>
+        </p:nvSpPr>
+        <p:spPr>
+          <a:xfrm>
+            <a:off x="832104" y="4352544"/>
+            <a:ext cx="274320" cy="274320"/>
+          </a:xfrm>
+          <a:prstGeom prst="rect">
+            <a:avLst/>
+          </a:prstGeom>
+          <a:noFill/>
+          <a:ln/>
+        </p:spPr>
+        <p:txBody>
+          <a:bodyPr wrap="square" lIns="0" tIns="0" rIns="0" bIns="0" rtlCol="0" anchor="ctr"/>
+          <a:lstStyle/>
+          <a:p>
+            <a:pPr algn="ctr" indent="0" marL="0">
+              <a:buNone/>
+            </a:pPr>
+            <a:r>
+              <a:rPr lang="en-US" sz="900" b="1" dirty="0">
+                <a:solidFill>
+                  <a:srgbClr val="FFFFFF"/>
+                </a:solidFill>
+                <a:latin typeface="Malgun Gothic" pitchFamily="34" charset="0"/>
+                <a:ea typeface="Malgun Gothic" pitchFamily="34" charset="-122"/>
+                <a:cs typeface="Malgun Gothic" pitchFamily="34" charset="-120"/>
+              </a:rPr>
+              <a:t>6</a:t>
+            </a:r>
+            <a:endParaRPr lang="en-US" sz="900" dirty="0"/>
+          </a:p>
+        </p:txBody>
+      </p:sp>
+      <p:sp>
+        <p:nvSpPr>
+          <p:cNvPr id="36" name="Text 34"/>
+          <p:cNvSpPr txBox="1"/>
+          <p:nvPr/>
+        </p:nvSpPr>
+        <p:spPr>
+          <a:xfrm>
+            <a:off x="1234440" y="4297680"/>
+            <a:ext cx="1234440" cy="384048"/>
+          </a:xfrm>
+          <a:prstGeom prst="rect">
+            <a:avLst/>
+          </a:prstGeom>
+          <a:noFill/>
+          <a:ln/>
+        </p:spPr>
+        <p:txBody>
+          <a:bodyPr wrap="square" lIns="0" tIns="0" rIns="0" bIns="0" rtlCol="0" anchor="ctr"/>
+          <a:lstStyle/>
+          <a:p>
+            <a:pPr indent="0" marL="0">
+              <a:buNone/>
+            </a:pPr>
+            <a:r>
+              <a:rPr lang="en-US" sz="1000" b="1" dirty="0">
+                <a:solidFill>
+                  <a:srgbClr val="16305B"/>
+                </a:solidFill>
+                <a:latin typeface="Malgun Gothic" pitchFamily="34" charset="0"/>
+                <a:ea typeface="Malgun Gothic" pitchFamily="34" charset="-122"/>
+                <a:cs typeface="Malgun Gothic" pitchFamily="34" charset="-120"/>
+              </a:rPr>
+              <a:t>측정면</a:t>
+            </a:r>
+            <a:endParaRPr lang="en-US" sz="1000" dirty="0"/>
+          </a:p>
+        </p:txBody>
+      </p:sp>
+      <p:sp>
+        <p:nvSpPr>
+          <p:cNvPr id="37" name="Text 35"/>
+          <p:cNvSpPr txBox="1"/>
+          <p:nvPr/>
+        </p:nvSpPr>
+        <p:spPr>
+          <a:xfrm>
+            <a:off x="2468880" y="4297680"/>
+            <a:ext cx="3246120" cy="384048"/>
+          </a:xfrm>
+          <a:prstGeom prst="rect">
+            <a:avLst/>
+          </a:prstGeom>
+          <a:noFill/>
+          <a:ln/>
+        </p:spPr>
+        <p:txBody>
+          <a:bodyPr wrap="square" lIns="0" tIns="0" rIns="0" bIns="0" rtlCol="0" anchor="ctr"/>
+          <a:lstStyle/>
+          <a:p>
+            <a:pPr indent="0" marL="0">
+              <a:buNone/>
+            </a:pPr>
+            <a:r>
+              <a:rPr lang="en-US" sz="950" dirty="0">
+                <a:solidFill>
+                  <a:srgbClr val="1C2733"/>
+                </a:solidFill>
+                <a:latin typeface="Malgun Gothic" pitchFamily="34" charset="0"/>
+                <a:ea typeface="Malgun Gothic" pitchFamily="34" charset="-122"/>
+                <a:cs typeface="Malgun Gothic" pitchFamily="34" charset="-120"/>
+              </a:rPr>
+              <a:t>설계변수에 따라 위치·개수 동적 생성</a:t>
+            </a:r>
+            <a:endParaRPr lang="en-US" sz="950" dirty="0"/>
+          </a:p>
+        </p:txBody>
+      </p:sp>
+      <p:sp>
+        <p:nvSpPr>
+          <p:cNvPr id="38" name="Shape 36"/>
+          <p:cNvSpPr/>
+          <p:nvPr/>
+        </p:nvSpPr>
+        <p:spPr>
+          <a:xfrm>
+            <a:off x="1234440" y="4727448"/>
+            <a:ext cx="4480560" cy="0"/>
+          </a:xfrm>
+          <a:prstGeom prst="line">
+            <a:avLst/>
+          </a:prstGeom>
+          <a:noFill/>
+          <a:ln w="6350">
+            <a:solidFill>
+              <a:srgbClr val="DDE3EB"/>
+            </a:solidFill>
+            <a:prstDash val="solid"/>
+          </a:ln>
+        </p:spPr>
+      </p:sp>
+      <p:sp>
+        <p:nvSpPr>
+          <p:cNvPr id="39" name="Shape 37"/>
+          <p:cNvSpPr/>
+          <p:nvPr/>
+        </p:nvSpPr>
+        <p:spPr>
+          <a:xfrm>
+            <a:off x="832104" y="4828032"/>
+            <a:ext cx="274320" cy="274320"/>
+          </a:xfrm>
+          <a:prstGeom prst="ellipse">
+            <a:avLst/>
+          </a:prstGeom>
+          <a:solidFill>
+            <a:srgbClr val="00A3C4"/>
+          </a:solidFill>
+          <a:ln w="12700">
+            <a:solidFill>
+              <a:srgbClr val="00A3C4"/>
+            </a:solidFill>
+            <a:prstDash val="solid"/>
+          </a:ln>
+        </p:spPr>
+      </p:sp>
+      <p:sp>
+        <p:nvSpPr>
+          <p:cNvPr id="40" name="Text 38"/>
+          <p:cNvSpPr txBox="1"/>
+          <p:nvPr/>
+        </p:nvSpPr>
+        <p:spPr>
+          <a:xfrm>
+            <a:off x="832104" y="4828032"/>
+            <a:ext cx="274320" cy="274320"/>
+          </a:xfrm>
+          <a:prstGeom prst="rect">
+            <a:avLst/>
+          </a:prstGeom>
+          <a:noFill/>
+          <a:ln/>
+        </p:spPr>
+        <p:txBody>
+          <a:bodyPr wrap="square" lIns="0" tIns="0" rIns="0" bIns="0" rtlCol="0" anchor="ctr"/>
+          <a:lstStyle/>
+          <a:p>
+            <a:pPr algn="ctr" indent="0" marL="0">
+              <a:buNone/>
+            </a:pPr>
+            <a:r>
+              <a:rPr lang="en-US" sz="900" b="1" dirty="0">
+                <a:solidFill>
+                  <a:srgbClr val="FFFFFF"/>
+                </a:solidFill>
+                <a:latin typeface="Malgun Gothic" pitchFamily="34" charset="0"/>
+                <a:ea typeface="Malgun Gothic" pitchFamily="34" charset="-122"/>
+                <a:cs typeface="Malgun Gothic" pitchFamily="34" charset="-120"/>
+              </a:rPr>
+              <a:t>7</a:t>
+            </a:r>
+            <a:endParaRPr lang="en-US" sz="900" dirty="0"/>
+          </a:p>
+        </p:txBody>
+      </p:sp>
+      <p:sp>
+        <p:nvSpPr>
+          <p:cNvPr id="41" name="Text 39"/>
+          <p:cNvSpPr txBox="1"/>
+          <p:nvPr/>
+        </p:nvSpPr>
+        <p:spPr>
+          <a:xfrm>
+            <a:off x="1234440" y="4773168"/>
+            <a:ext cx="1234440" cy="384048"/>
+          </a:xfrm>
+          <a:prstGeom prst="rect">
+            <a:avLst/>
+          </a:prstGeom>
+          <a:noFill/>
+          <a:ln/>
+        </p:spPr>
+        <p:txBody>
+          <a:bodyPr wrap="square" lIns="0" tIns="0" rIns="0" bIns="0" rtlCol="0" anchor="ctr"/>
+          <a:lstStyle/>
+          <a:p>
+            <a:pPr indent="0" marL="0">
+              <a:buNone/>
+            </a:pPr>
+            <a:r>
+              <a:rPr lang="en-US" sz="1000" b="1" dirty="0">
+                <a:solidFill>
+                  <a:srgbClr val="16305B"/>
+                </a:solidFill>
+                <a:latin typeface="Malgun Gothic" pitchFamily="34" charset="0"/>
+                <a:ea typeface="Malgun Gothic" pitchFamily="34" charset="-122"/>
+                <a:cs typeface="Malgun Gothic" pitchFamily="34" charset="-120"/>
+              </a:rPr>
+              <a:t>해석 · 추출</a:t>
+            </a:r>
+            <a:endParaRPr lang="en-US" sz="1000" dirty="0"/>
+          </a:p>
+        </p:txBody>
+      </p:sp>
+      <p:sp>
+        <p:nvSpPr>
+          <p:cNvPr id="42" name="Text 40"/>
+          <p:cNvSpPr txBox="1"/>
+          <p:nvPr/>
+        </p:nvSpPr>
+        <p:spPr>
+          <a:xfrm>
+            <a:off x="2468880" y="4773168"/>
+            <a:ext cx="3246120" cy="384048"/>
+          </a:xfrm>
+          <a:prstGeom prst="rect">
+            <a:avLst/>
+          </a:prstGeom>
+          <a:noFill/>
+          <a:ln/>
+        </p:spPr>
+        <p:txBody>
+          <a:bodyPr wrap="square" lIns="0" tIns="0" rIns="0" bIns="0" rtlCol="0" anchor="ctr"/>
+          <a:lstStyle/>
+          <a:p>
+            <a:pPr indent="0" marL="0">
+              <a:buNone/>
+            </a:pPr>
+            <a:r>
+              <a:rPr lang="en-US" sz="950" dirty="0">
+                <a:solidFill>
+                  <a:srgbClr val="1C2733"/>
+                </a:solidFill>
+                <a:latin typeface="Malgun Gothic" pitchFamily="34" charset="0"/>
+                <a:ea typeface="Malgun Gothic" pitchFamily="34" charset="-122"/>
+                <a:cs typeface="Malgun Gothic" pitchFamily="34" charset="-120"/>
+              </a:rPr>
+              <a:t>정상상태 해석 → 온도·차압·유량 CSV 추출</a:t>
+            </a:r>
+            <a:endParaRPr lang="en-US" sz="950" dirty="0"/>
+          </a:p>
+        </p:txBody>
+      </p:sp>
+      <p:sp>
+        <p:nvSpPr>
+          <p:cNvPr id="43" name="Shape 41"/>
+          <p:cNvSpPr/>
+          <p:nvPr/>
+        </p:nvSpPr>
+        <p:spPr>
+          <a:xfrm>
+            <a:off x="6336792" y="1188720"/>
+            <a:ext cx="5440680" cy="4160520"/>
+          </a:xfrm>
+          <a:prstGeom prst="roundRect">
+            <a:avLst>
+              <a:gd name="adj" fmla="val 1319"/>
+            </a:avLst>
+          </a:prstGeom>
+          <a:solidFill>
+            <a:srgbClr val="FFFFFF"/>
+          </a:solidFill>
+          <a:ln w="9525">
+            <a:solidFill>
+              <a:srgbClr val="DDE3EB"/>
+            </a:solidFill>
+            <a:prstDash val="solid"/>
+          </a:ln>
+          <a:effectLst>
+            <a:outerShdw sx="100000" sy="100000" kx="0" ky="0" algn="bl" rotWithShape="0" blurRad="101600" dist="12700" dir="5400000">
+              <a:srgbClr val="9AA8BC">
+                <a:alpha val="18000"/>
+              </a:srgbClr>
+            </a:outerShdw>
+          </a:effectLst>
+        </p:spPr>
+      </p:sp>
+      <p:sp>
+        <p:nvSpPr>
+          <p:cNvPr id="44" name="Shape 42"/>
+          <p:cNvSpPr/>
+          <p:nvPr/>
+        </p:nvSpPr>
+        <p:spPr>
+          <a:xfrm>
+            <a:off x="6592824" y="1463040"/>
+            <a:ext cx="82296" cy="182880"/>
+          </a:xfrm>
+          <a:prstGeom prst="rect">
+            <a:avLst/>
+          </a:prstGeom>
+          <a:solidFill>
+            <a:srgbClr val="00A3C4"/>
+          </a:solidFill>
+          <a:ln w="12700">
+            <a:solidFill>
+              <a:srgbClr val="00A3C4"/>
+            </a:solidFill>
+            <a:prstDash val="solid"/>
+          </a:ln>
+        </p:spPr>
+      </p:sp>
+      <p:sp>
+        <p:nvSpPr>
+          <p:cNvPr id="45" name="Text 43"/>
+          <p:cNvSpPr txBox="1"/>
+          <p:nvPr/>
+        </p:nvSpPr>
+        <p:spPr>
+          <a:xfrm>
+            <a:off x="6757416" y="1371600"/>
+            <a:ext cx="4480560" cy="365760"/>
+          </a:xfrm>
+          <a:prstGeom prst="rect">
+            <a:avLst/>
+          </a:prstGeom>
+          <a:noFill/>
+          <a:ln/>
+        </p:spPr>
+        <p:txBody>
+          <a:bodyPr wrap="square" lIns="0" tIns="0" rIns="0" bIns="0" rtlCol="0" anchor="ctr"/>
+          <a:lstStyle/>
+          <a:p>
+            <a:pPr indent="0" marL="0">
+              <a:buNone/>
+            </a:pPr>
+            <a:r>
+              <a:rPr lang="en-US" sz="1300" b="1" dirty="0">
+                <a:solidFill>
+                  <a:srgbClr val="16305B"/>
+                </a:solidFill>
+                <a:latin typeface="Malgun Gothic" pitchFamily="34" charset="0"/>
+                <a:ea typeface="Malgun Gothic" pitchFamily="34" charset="-122"/>
+                <a:cs typeface="Malgun Gothic" pitchFamily="34" charset="-120"/>
+              </a:rPr>
+              <a:t>코드 발췌</a:t>
+            </a:r>
+            <a:endParaRPr lang="en-US" sz="1300" dirty="0"/>
+          </a:p>
+        </p:txBody>
+      </p:sp>
+      <p:sp>
+        <p:nvSpPr>
+          <p:cNvPr id="46" name="Shape 44"/>
+          <p:cNvSpPr/>
+          <p:nvPr/>
+        </p:nvSpPr>
+        <p:spPr>
+          <a:xfrm>
+            <a:off x="6574536" y="1865376"/>
+            <a:ext cx="4965192" cy="3264408"/>
+          </a:xfrm>
+          <a:prstGeom prst="roundRect">
+            <a:avLst>
+              <a:gd name="adj" fmla="val 1681"/>
+            </a:avLst>
+          </a:prstGeom>
+          <a:solidFill>
+            <a:srgbClr val="1E2430"/>
+          </a:solidFill>
+          <a:ln w="12700">
+            <a:solidFill>
+              <a:srgbClr val="1E2430"/>
+            </a:solidFill>
+            <a:prstDash val="solid"/>
+          </a:ln>
+        </p:spPr>
+      </p:sp>
+      <p:sp>
+        <p:nvSpPr>
+          <p:cNvPr id="47" name="Shape 45"/>
+          <p:cNvSpPr/>
+          <p:nvPr/>
+        </p:nvSpPr>
+        <p:spPr>
+          <a:xfrm>
+            <a:off x="6739128" y="1993392"/>
+            <a:ext cx="91440" cy="91440"/>
+          </a:xfrm>
+          <a:prstGeom prst="ellipse">
+            <a:avLst/>
+          </a:prstGeom>
+          <a:solidFill>
+            <a:srgbClr val="FF5F57"/>
+          </a:solidFill>
+          <a:ln w="12700">
+            <a:solidFill>
+              <a:srgbClr val="FF5F57"/>
+            </a:solidFill>
+            <a:prstDash val="solid"/>
+          </a:ln>
+        </p:spPr>
+      </p:sp>
+      <p:sp>
+        <p:nvSpPr>
+          <p:cNvPr id="48" name="Shape 46"/>
+          <p:cNvSpPr/>
+          <p:nvPr/>
+        </p:nvSpPr>
+        <p:spPr>
+          <a:xfrm>
+            <a:off x="6894576" y="1993392"/>
+            <a:ext cx="91440" cy="91440"/>
+          </a:xfrm>
+          <a:prstGeom prst="ellipse">
+            <a:avLst/>
+          </a:prstGeom>
+          <a:solidFill>
+            <a:srgbClr val="FEBC2E"/>
+          </a:solidFill>
+          <a:ln w="12700">
+            <a:solidFill>
+              <a:srgbClr val="FEBC2E"/>
+            </a:solidFill>
+            <a:prstDash val="solid"/>
+          </a:ln>
+        </p:spPr>
+      </p:sp>
+      <p:sp>
+        <p:nvSpPr>
+          <p:cNvPr id="49" name="Shape 47"/>
+          <p:cNvSpPr/>
+          <p:nvPr/>
+        </p:nvSpPr>
+        <p:spPr>
+          <a:xfrm>
+            <a:off x="7050024" y="1993392"/>
+            <a:ext cx="91440" cy="91440"/>
+          </a:xfrm>
+          <a:prstGeom prst="ellipse">
+            <a:avLst/>
+          </a:prstGeom>
+          <a:solidFill>
+            <a:srgbClr val="28C840"/>
+          </a:solidFill>
+          <a:ln w="12700">
+            <a:solidFill>
+              <a:srgbClr val="28C840"/>
+            </a:solidFill>
+            <a:prstDash val="solid"/>
+          </a:ln>
+        </p:spPr>
+      </p:sp>
+      <p:sp>
+        <p:nvSpPr>
+          <p:cNvPr id="50" name="Text 48"/>
+          <p:cNvSpPr txBox="1"/>
+          <p:nvPr/>
+        </p:nvSpPr>
+        <p:spPr>
+          <a:xfrm>
+            <a:off x="7232904" y="1929384"/>
+            <a:ext cx="4142232" cy="219456"/>
+          </a:xfrm>
+          <a:prstGeom prst="rect">
+            <a:avLst/>
+          </a:prstGeom>
+          <a:noFill/>
+          <a:ln/>
+        </p:spPr>
+        <p:txBody>
+          <a:bodyPr wrap="square" lIns="0" tIns="0" rIns="0" bIns="0" rtlCol="0" anchor="ctr"/>
+          <a:lstStyle/>
+          <a:p>
+            <a:pPr indent="0" marL="0">
+              <a:buNone/>
+            </a:pPr>
+            <a:r>
+              <a:rPr lang="en-US" sz="850" dirty="0">
+                <a:solidFill>
+                  <a:srgbClr val="8A94A6"/>
+                </a:solidFill>
+                <a:latin typeface="Consolas" pitchFamily="34" charset="0"/>
+                <a:ea typeface="Consolas" pitchFamily="34" charset="-122"/>
+                <a:cs typeface="Consolas" pitchFamily="34" charset="-120"/>
+              </a:rPr>
+              <a:t>icepak.py — run_icepak()</a:t>
+            </a:r>
+            <a:endParaRPr lang="en-US" sz="850" dirty="0"/>
+          </a:p>
+        </p:txBody>
+      </p:sp>
+      <p:sp>
+        <p:nvSpPr>
+          <p:cNvPr id="51" name="Shape 49"/>
+          <p:cNvSpPr/>
+          <p:nvPr/>
+        </p:nvSpPr>
+        <p:spPr>
+          <a:xfrm>
+            <a:off x="6574536" y="2212848"/>
+            <a:ext cx="4965192" cy="0"/>
+          </a:xfrm>
+          <a:prstGeom prst="line">
+            <a:avLst/>
+          </a:prstGeom>
+          <a:noFill/>
+          <a:ln w="9525">
+            <a:solidFill>
+              <a:srgbClr val="2E3645"/>
+            </a:solidFill>
+            <a:prstDash val="solid"/>
+          </a:ln>
+        </p:spPr>
+      </p:sp>
+      <p:sp>
+        <p:nvSpPr>
+          <p:cNvPr id="52" name="Text 50"/>
+          <p:cNvSpPr txBox="1"/>
+          <p:nvPr/>
+        </p:nvSpPr>
+        <p:spPr>
+          <a:xfrm>
+            <a:off x="6757416" y="2322576"/>
+            <a:ext cx="4672584" cy="2697480"/>
+          </a:xfrm>
+          <a:prstGeom prst="rect">
+            <a:avLst/>
+          </a:prstGeom>
+          <a:noFill/>
+          <a:ln/>
+        </p:spPr>
+        <p:txBody>
+          <a:bodyPr wrap="square" lIns="0" tIns="0" rIns="0" bIns="0" rtlCol="0" anchor="t"/>
+          <a:lstStyle/>
+          <a:p>
+            <a:pPr indent="0" marL="0">
+              <a:lnSpc>
+                <a:spcPct val="112000"/>
+              </a:lnSpc>
+              <a:buNone/>
+            </a:pPr>
+            <a:r>
+              <a:rPr lang="en-US" sz="850" dirty="0">
+                <a:solidFill>
+                  <a:srgbClr val="D6DEEB"/>
+                </a:solidFill>
+                <a:latin typeface="Consolas" pitchFamily="34" charset="0"/>
+                <a:ea typeface="Consolas" pitchFamily="34" charset="-122"/>
+                <a:cs typeface="Consolas" pitchFamily="34" charset="-120"/>
+              </a:rPr>
+              <a:t>ipk = Icepak(project=PROJ_PATH, design=</a:t>
+            </a:r>
+            <a:pPr indent="0" marL="0">
+              <a:lnSpc>
+                <a:spcPct val="112000"/>
+              </a:lnSpc>
+              <a:buNone/>
+            </a:pPr>
+            <a:r>
+              <a:rPr lang="en-US" sz="850" dirty="0">
+                <a:solidFill>
+                  <a:srgbClr val="E6A26B"/>
+                </a:solidFill>
+                <a:latin typeface="Consolas" pitchFamily="34" charset="0"/>
+                <a:ea typeface="Consolas" pitchFamily="34" charset="-122"/>
+                <a:cs typeface="Consolas" pitchFamily="34" charset="-120"/>
+              </a:rPr>
+              <a:t>f"IcepakDesign_{idx:03d}"</a:t>
+            </a:r>
+            <a:pPr indent="0" marL="0">
+              <a:lnSpc>
+                <a:spcPct val="112000"/>
+              </a:lnSpc>
+              <a:buNone/>
+            </a:pPr>
+            <a:r>
+              <a:rPr lang="en-US" sz="850" dirty="0">
+                <a:solidFill>
+                  <a:srgbClr val="D6DEEB"/>
+                </a:solidFill>
+                <a:latin typeface="Consolas" pitchFamily="34" charset="0"/>
+                <a:ea typeface="Consolas" pitchFamily="34" charset="-122"/>
+                <a:cs typeface="Consolas" pitchFamily="34" charset="-120"/>
+              </a:rPr>
+              <a:t>)</a:t>
+            </a:r>
+            <a:endParaRPr lang="en-US" sz="850" dirty="0"/>
+          </a:p>
+          <a:p>
+            <a:pPr indent="0" marL="0">
+              <a:lnSpc>
+                <a:spcPct val="112000"/>
+              </a:lnSpc>
+              <a:buNone/>
+            </a:pPr>
+            <a:r>
+              <a:rPr lang="en-US" sz="850" dirty="0">
+                <a:solidFill>
+                  <a:srgbClr val="D6DEEB"/>
+                </a:solidFill>
+                <a:latin typeface="Consolas" pitchFamily="34" charset="0"/>
+                <a:ea typeface="Consolas" pitchFamily="34" charset="-122"/>
+                <a:cs typeface="Consolas" pitchFamily="34" charset="-120"/>
+              </a:rPr>
+              <a:t>ipk.modeler.import_3d_cad(step_file)       </a:t>
+            </a:r>
+            <a:pPr indent="0" marL="0">
+              <a:lnSpc>
+                <a:spcPct val="112000"/>
+              </a:lnSpc>
+              <a:buNone/>
+            </a:pPr>
+            <a:r>
+              <a:rPr lang="en-US" sz="850" dirty="0">
+                <a:solidFill>
+                  <a:srgbClr val="7F9C7A"/>
+                </a:solidFill>
+                <a:latin typeface="Consolas" pitchFamily="34" charset="0"/>
+                <a:ea typeface="Consolas" pitchFamily="34" charset="-122"/>
+                <a:cs typeface="Consolas" pitchFamily="34" charset="-120"/>
+              </a:rPr>
+              <a:t># STEP 불러오기</a:t>
+            </a:r>
+            <a:endParaRPr lang="en-US" sz="850" dirty="0"/>
+          </a:p>
+          <a:p>
+            <a:pPr indent="0" marL="0">
+              <a:lnSpc>
+                <a:spcPct val="112000"/>
+              </a:lnSpc>
+              <a:buNone/>
+            </a:pPr>
+            <a:r>
+              <a:rPr lang="en-US" sz="850" dirty="0">
+                <a:solidFill>
+                  <a:srgbClr val="D6DEEB"/>
+                </a:solidFill>
+                <a:latin typeface="Consolas" pitchFamily="34" charset="0"/>
+                <a:ea typeface="Consolas" pitchFamily="34" charset="-122"/>
+                <a:cs typeface="Consolas" pitchFamily="34" charset="-120"/>
+              </a:rPr>
+              <a:t> </a:t>
+            </a:r>
+            <a:endParaRPr lang="en-US" sz="850" dirty="0"/>
+          </a:p>
+          <a:p>
+            <a:pPr indent="0" marL="0">
+              <a:lnSpc>
+                <a:spcPct val="112000"/>
+              </a:lnSpc>
+              <a:buNone/>
+            </a:pPr>
+            <a:r>
+              <a:rPr lang="en-US" sz="850" dirty="0">
+                <a:solidFill>
+                  <a:srgbClr val="D6DEEB"/>
+                </a:solidFill>
+                <a:latin typeface="Consolas" pitchFamily="34" charset="0"/>
+                <a:ea typeface="Consolas" pitchFamily="34" charset="-122"/>
+                <a:cs typeface="Consolas" pitchFamily="34" charset="-120"/>
+              </a:rPr>
+              <a:t>oEditor.Subtract(...)                      </a:t>
+            </a:r>
+            <a:pPr indent="0" marL="0">
+              <a:lnSpc>
+                <a:spcPct val="112000"/>
+              </a:lnSpc>
+              <a:buNone/>
+            </a:pPr>
+            <a:r>
+              <a:rPr lang="en-US" sz="850" dirty="0">
+                <a:solidFill>
+                  <a:srgbClr val="7F9C7A"/>
+                </a:solidFill>
+                <a:latin typeface="Consolas" pitchFamily="34" charset="0"/>
+                <a:ea typeface="Consolas" pitchFamily="34" charset="-122"/>
+                <a:cs typeface="Consolas" pitchFamily="34" charset="-120"/>
+              </a:rPr>
+              <a:t># 유체 영역 = 박스 − 형상</a:t>
+            </a:r>
+            <a:endParaRPr lang="en-US" sz="850" dirty="0"/>
+          </a:p>
+          <a:p>
+            <a:pPr indent="0" marL="0">
+              <a:lnSpc>
+                <a:spcPct val="112000"/>
+              </a:lnSpc>
+              <a:buNone/>
+            </a:pPr>
+            <a:r>
+              <a:rPr lang="en-US" sz="850" dirty="0">
+                <a:solidFill>
+                  <a:srgbClr val="D6DEEB"/>
+                </a:solidFill>
+                <a:latin typeface="Consolas" pitchFamily="34" charset="0"/>
+                <a:ea typeface="Consolas" pitchFamily="34" charset="-122"/>
+                <a:cs typeface="Consolas" pitchFamily="34" charset="-120"/>
+              </a:rPr>
+              <a:t>oEditor.SeparateBody(...)</a:t>
+            </a:r>
+            <a:endParaRPr lang="en-US" sz="850" dirty="0"/>
+          </a:p>
+          <a:p>
+            <a:pPr indent="0" marL="0">
+              <a:lnSpc>
+                <a:spcPct val="112000"/>
+              </a:lnSpc>
+              <a:buNone/>
+            </a:pPr>
+            <a:r>
+              <a:rPr lang="en-US" sz="850" dirty="0">
+                <a:solidFill>
+                  <a:srgbClr val="D6DEEB"/>
+                </a:solidFill>
+                <a:latin typeface="Consolas" pitchFamily="34" charset="0"/>
+                <a:ea typeface="Consolas" pitchFamily="34" charset="-122"/>
+                <a:cs typeface="Consolas" pitchFamily="34" charset="-120"/>
+              </a:rPr>
+              <a:t> </a:t>
+            </a:r>
+            <a:endParaRPr lang="en-US" sz="850" dirty="0"/>
+          </a:p>
+          <a:p>
+            <a:pPr indent="0" marL="0">
+              <a:lnSpc>
+                <a:spcPct val="112000"/>
+              </a:lnSpc>
+              <a:buNone/>
+            </a:pPr>
+            <a:r>
+              <a:rPr lang="en-US" sz="850" dirty="0">
+                <a:solidFill>
+                  <a:srgbClr val="7F9C7A"/>
+                </a:solidFill>
+                <a:latin typeface="Consolas" pitchFamily="34" charset="0"/>
+                <a:ea typeface="Consolas" pitchFamily="34" charset="-122"/>
+                <a:cs typeface="Consolas" pitchFamily="34" charset="-120"/>
+              </a:rPr>
+              <a:t># 팬·개구부 면을 좌표 기준으로 자동 탐지</a:t>
+            </a:r>
+            <a:endParaRPr lang="en-US" sz="850" dirty="0"/>
+          </a:p>
+          <a:p>
+            <a:pPr indent="0" marL="0">
+              <a:lnSpc>
+                <a:spcPct val="112000"/>
+              </a:lnSpc>
+              <a:buNone/>
+            </a:pPr>
+            <a:r>
+              <a:rPr lang="en-US" sz="850" dirty="0">
+                <a:solidFill>
+                  <a:srgbClr val="D6DEEB"/>
+                </a:solidFill>
+                <a:latin typeface="Consolas" pitchFamily="34" charset="0"/>
+                <a:ea typeface="Consolas" pitchFamily="34" charset="-122"/>
+                <a:cs typeface="Consolas" pitchFamily="34" charset="-120"/>
+              </a:rPr>
+              <a:t>faces = [f </a:t>
+            </a:r>
+            <a:pPr indent="0" marL="0">
+              <a:lnSpc>
+                <a:spcPct val="112000"/>
+              </a:lnSpc>
+              <a:buNone/>
+            </a:pPr>
+            <a:r>
+              <a:rPr lang="en-US" sz="850" dirty="0">
+                <a:solidFill>
+                  <a:srgbClr val="C792EA"/>
+                </a:solidFill>
+                <a:latin typeface="Consolas" pitchFamily="34" charset="0"/>
+                <a:ea typeface="Consolas" pitchFamily="34" charset="-122"/>
+                <a:cs typeface="Consolas" pitchFamily="34" charset="-120"/>
+              </a:rPr>
+              <a:t>for</a:t>
+            </a:r>
+            <a:pPr indent="0" marL="0">
+              <a:lnSpc>
+                <a:spcPct val="112000"/>
+              </a:lnSpc>
+              <a:buNone/>
+            </a:pPr>
+            <a:r>
+              <a:rPr lang="en-US" sz="850" dirty="0">
+                <a:solidFill>
+                  <a:srgbClr val="D6DEEB"/>
+                </a:solidFill>
+                <a:latin typeface="Consolas" pitchFamily="34" charset="0"/>
+                <a:ea typeface="Consolas" pitchFamily="34" charset="-122"/>
+                <a:cs typeface="Consolas" pitchFamily="34" charset="-120"/>
+              </a:rPr>
+              <a:t> f </a:t>
+            </a:r>
+            <a:pPr indent="0" marL="0">
+              <a:lnSpc>
+                <a:spcPct val="112000"/>
+              </a:lnSpc>
+              <a:buNone/>
+            </a:pPr>
+            <a:r>
+              <a:rPr lang="en-US" sz="850" dirty="0">
+                <a:solidFill>
+                  <a:srgbClr val="C792EA"/>
+                </a:solidFill>
+                <a:latin typeface="Consolas" pitchFamily="34" charset="0"/>
+                <a:ea typeface="Consolas" pitchFamily="34" charset="-122"/>
+                <a:cs typeface="Consolas" pitchFamily="34" charset="-120"/>
+              </a:rPr>
+              <a:t>in</a:t>
+            </a:r>
+            <a:pPr indent="0" marL="0">
+              <a:lnSpc>
+                <a:spcPct val="112000"/>
+              </a:lnSpc>
+              <a:buNone/>
+            </a:pPr>
+            <a:r>
+              <a:rPr lang="en-US" sz="850" dirty="0">
+                <a:solidFill>
+                  <a:srgbClr val="D6DEEB"/>
+                </a:solidFill>
+                <a:latin typeface="Consolas" pitchFamily="34" charset="0"/>
+                <a:ea typeface="Consolas" pitchFamily="34" charset="-122"/>
+                <a:cs typeface="Consolas" pitchFamily="34" charset="-120"/>
+              </a:rPr>
+              <a:t> box.faces </a:t>
+            </a:r>
+            <a:pPr indent="0" marL="0">
+              <a:lnSpc>
+                <a:spcPct val="112000"/>
+              </a:lnSpc>
+              <a:buNone/>
+            </a:pPr>
+            <a:r>
+              <a:rPr lang="en-US" sz="850" dirty="0">
+                <a:solidFill>
+                  <a:srgbClr val="C792EA"/>
+                </a:solidFill>
+                <a:latin typeface="Consolas" pitchFamily="34" charset="0"/>
+                <a:ea typeface="Consolas" pitchFamily="34" charset="-122"/>
+                <a:cs typeface="Consolas" pitchFamily="34" charset="-120"/>
+              </a:rPr>
+              <a:t>if</a:t>
+            </a:r>
+            <a:pPr indent="0" marL="0">
+              <a:lnSpc>
+                <a:spcPct val="112000"/>
+              </a:lnSpc>
+              <a:buNone/>
+            </a:pPr>
+            <a:r>
+              <a:rPr lang="en-US" sz="850" dirty="0">
+                <a:solidFill>
+                  <a:srgbClr val="D6DEEB"/>
+                </a:solidFill>
+                <a:latin typeface="Consolas" pitchFamily="34" charset="0"/>
+                <a:ea typeface="Consolas" pitchFamily="34" charset="-122"/>
+                <a:cs typeface="Consolas" pitchFamily="34" charset="-120"/>
+              </a:rPr>
+              <a:t> abs(f.center[2] - z_top) &lt; 0.1]</a:t>
+            </a:r>
+            <a:endParaRPr lang="en-US" sz="850" dirty="0"/>
+          </a:p>
+          <a:p>
+            <a:pPr indent="0" marL="0">
+              <a:lnSpc>
+                <a:spcPct val="112000"/>
+              </a:lnSpc>
+              <a:buNone/>
+            </a:pPr>
+            <a:r>
+              <a:rPr lang="en-US" sz="850" dirty="0">
+                <a:solidFill>
+                  <a:srgbClr val="D6DEEB"/>
+                </a:solidFill>
+                <a:latin typeface="Consolas" pitchFamily="34" charset="0"/>
+                <a:ea typeface="Consolas" pitchFamily="34" charset="-122"/>
+                <a:cs typeface="Consolas" pitchFamily="34" charset="-120"/>
+              </a:rPr>
+              <a:t>faces.sort(key=</a:t>
+            </a:r>
+            <a:pPr indent="0" marL="0">
+              <a:lnSpc>
+                <a:spcPct val="112000"/>
+              </a:lnSpc>
+              <a:buNone/>
+            </a:pPr>
+            <a:r>
+              <a:rPr lang="en-US" sz="850" dirty="0">
+                <a:solidFill>
+                  <a:srgbClr val="C792EA"/>
+                </a:solidFill>
+                <a:latin typeface="Consolas" pitchFamily="34" charset="0"/>
+                <a:ea typeface="Consolas" pitchFamily="34" charset="-122"/>
+                <a:cs typeface="Consolas" pitchFamily="34" charset="-120"/>
+              </a:rPr>
+              <a:t>lambda</a:t>
+            </a:r>
+            <a:pPr indent="0" marL="0">
+              <a:lnSpc>
+                <a:spcPct val="112000"/>
+              </a:lnSpc>
+              <a:buNone/>
+            </a:pPr>
+            <a:r>
+              <a:rPr lang="en-US" sz="850" dirty="0">
+                <a:solidFill>
+                  <a:srgbClr val="D6DEEB"/>
+                </a:solidFill>
+                <a:latin typeface="Consolas" pitchFamily="34" charset="0"/>
+                <a:ea typeface="Consolas" pitchFamily="34" charset="-122"/>
+                <a:cs typeface="Consolas" pitchFamily="34" charset="-120"/>
+              </a:rPr>
+              <a:t> f: f.center[0])</a:t>
+            </a:r>
+            <a:endParaRPr lang="en-US" sz="850" dirty="0"/>
+          </a:p>
+          <a:p>
+            <a:pPr indent="0" marL="0">
+              <a:lnSpc>
+                <a:spcPct val="112000"/>
+              </a:lnSpc>
+              <a:buNone/>
+            </a:pPr>
+            <a:r>
+              <a:rPr lang="en-US" sz="850" dirty="0">
+                <a:solidFill>
+                  <a:srgbClr val="D6DEEB"/>
+                </a:solidFill>
+                <a:latin typeface="Consolas" pitchFamily="34" charset="0"/>
+                <a:ea typeface="Consolas" pitchFamily="34" charset="-122"/>
+                <a:cs typeface="Consolas" pitchFamily="34" charset="-120"/>
+              </a:rPr>
+              <a:t>oModule.AssignOpeningBoundary(...)          </a:t>
+            </a:r>
+            <a:pPr indent="0" marL="0">
+              <a:lnSpc>
+                <a:spcPct val="112000"/>
+              </a:lnSpc>
+              <a:buNone/>
+            </a:pPr>
+            <a:r>
+              <a:rPr lang="en-US" sz="850" dirty="0">
+                <a:solidFill>
+                  <a:srgbClr val="7F9C7A"/>
+                </a:solidFill>
+                <a:latin typeface="Consolas" pitchFamily="34" charset="0"/>
+                <a:ea typeface="Consolas" pitchFamily="34" charset="-122"/>
+                <a:cs typeface="Consolas" pitchFamily="34" charset="-120"/>
+              </a:rPr>
+              <a:t># 출구 경계</a:t>
+            </a:r>
+            <a:endParaRPr lang="en-US" sz="850" dirty="0"/>
+          </a:p>
+          <a:p>
+            <a:pPr indent="0" marL="0">
+              <a:lnSpc>
+                <a:spcPct val="112000"/>
+              </a:lnSpc>
+              <a:buNone/>
+            </a:pPr>
+            <a:r>
+              <a:rPr lang="en-US" sz="850" dirty="0">
+                <a:solidFill>
+                  <a:srgbClr val="D6DEEB"/>
+                </a:solidFill>
+                <a:latin typeface="Consolas" pitchFamily="34" charset="0"/>
+                <a:ea typeface="Consolas" pitchFamily="34" charset="-122"/>
+                <a:cs typeface="Consolas" pitchFamily="34" charset="-120"/>
+              </a:rPr>
+              <a:t>oModule.AssignMeshRegion(...)               </a:t>
+            </a:r>
+            <a:pPr indent="0" marL="0">
+              <a:lnSpc>
+                <a:spcPct val="112000"/>
+              </a:lnSpc>
+              <a:buNone/>
+            </a:pPr>
+            <a:r>
+              <a:rPr lang="en-US" sz="850" dirty="0">
+                <a:solidFill>
+                  <a:srgbClr val="7F9C7A"/>
+                </a:solidFill>
+                <a:latin typeface="Consolas" pitchFamily="34" charset="0"/>
+                <a:ea typeface="Consolas" pitchFamily="34" charset="-122"/>
+                <a:cs typeface="Consolas" pitchFamily="34" charset="-120"/>
+              </a:rPr>
+              <a:t># 로컬 메시</a:t>
+            </a:r>
+            <a:endParaRPr lang="en-US" sz="850" dirty="0"/>
+          </a:p>
+          <a:p>
+            <a:pPr indent="0" marL="0">
+              <a:lnSpc>
+                <a:spcPct val="112000"/>
+              </a:lnSpc>
+              <a:buNone/>
+            </a:pPr>
+            <a:r>
+              <a:rPr lang="en-US" sz="850" dirty="0">
+                <a:solidFill>
+                  <a:srgbClr val="D6DEEB"/>
+                </a:solidFill>
+                <a:latin typeface="Consolas" pitchFamily="34" charset="0"/>
+                <a:ea typeface="Consolas" pitchFamily="34" charset="-122"/>
+                <a:cs typeface="Consolas" pitchFamily="34" charset="-120"/>
+              </a:rPr>
+              <a:t> </a:t>
+            </a:r>
+            <a:endParaRPr lang="en-US" sz="850" dirty="0"/>
+          </a:p>
+          <a:p>
+            <a:pPr indent="0" marL="0">
+              <a:lnSpc>
+                <a:spcPct val="112000"/>
+              </a:lnSpc>
+              <a:buNone/>
+            </a:pPr>
+            <a:r>
+              <a:rPr lang="en-US" sz="850" dirty="0">
+                <a:solidFill>
+                  <a:srgbClr val="7F9C7A"/>
+                </a:solidFill>
+                <a:latin typeface="Consolas" pitchFamily="34" charset="0"/>
+                <a:ea typeface="Consolas" pitchFamily="34" charset="-122"/>
+                <a:cs typeface="Consolas" pitchFamily="34" charset="-120"/>
+              </a:rPr>
+              <a:t># 설계변수에 맞춰 유로 전체에 측정면 생성</a:t>
+            </a:r>
+            <a:endParaRPr lang="en-US" sz="850" dirty="0"/>
+          </a:p>
+          <a:p>
+            <a:pPr indent="0" marL="0">
+              <a:lnSpc>
+                <a:spcPct val="112000"/>
+              </a:lnSpc>
+              <a:buNone/>
+            </a:pPr>
+            <a:r>
+              <a:rPr lang="en-US" sz="850" dirty="0">
+                <a:solidFill>
+                  <a:srgbClr val="C792EA"/>
+                </a:solidFill>
+                <a:latin typeface="Consolas" pitchFamily="34" charset="0"/>
+                <a:ea typeface="Consolas" pitchFamily="34" charset="-122"/>
+                <a:cs typeface="Consolas" pitchFamily="34" charset="-120"/>
+              </a:rPr>
+              <a:t>for</a:t>
+            </a:r>
+            <a:pPr indent="0" marL="0">
+              <a:lnSpc>
+                <a:spcPct val="112000"/>
+              </a:lnSpc>
+              <a:buNone/>
+            </a:pPr>
+            <a:r>
+              <a:rPr lang="en-US" sz="850" dirty="0">
+                <a:solidFill>
+                  <a:srgbClr val="D6DEEB"/>
+                </a:solidFill>
+                <a:latin typeface="Consolas" pitchFamily="34" charset="0"/>
+                <a:ea typeface="Consolas" pitchFamily="34" charset="-122"/>
+                <a:cs typeface="Consolas" pitchFamily="34" charset="-120"/>
+              </a:rPr>
+              <a:t> k, (offset, gap) </a:t>
+            </a:r>
+            <a:pPr indent="0" marL="0">
+              <a:lnSpc>
+                <a:spcPct val="112000"/>
+              </a:lnSpc>
+              <a:buNone/>
+            </a:pPr>
+            <a:r>
+              <a:rPr lang="en-US" sz="850" dirty="0">
+                <a:solidFill>
+                  <a:srgbClr val="C792EA"/>
+                </a:solidFill>
+                <a:latin typeface="Consolas" pitchFamily="34" charset="0"/>
+                <a:ea typeface="Consolas" pitchFamily="34" charset="-122"/>
+                <a:cs typeface="Consolas" pitchFamily="34" charset="-120"/>
+              </a:rPr>
+              <a:t>in</a:t>
+            </a:r>
+            <a:pPr indent="0" marL="0">
+              <a:lnSpc>
+                <a:spcPct val="112000"/>
+              </a:lnSpc>
+              <a:buNone/>
+            </a:pPr>
+            <a:r>
+              <a:rPr lang="en-US" sz="850" dirty="0">
+                <a:solidFill>
+                  <a:srgbClr val="D6DEEB"/>
+                </a:solidFill>
+                <a:latin typeface="Consolas" pitchFamily="34" charset="0"/>
+                <a:ea typeface="Consolas" pitchFamily="34" charset="-122"/>
+                <a:cs typeface="Consolas" pitchFamily="34" charset="-120"/>
+              </a:rPr>
+              <a:t> enumerate(channel_offsets(t, n)):</a:t>
+            </a:r>
+            <a:endParaRPr lang="en-US" sz="850" dirty="0"/>
+          </a:p>
+          <a:p>
+            <a:pPr indent="0" marL="0">
+              <a:lnSpc>
+                <a:spcPct val="112000"/>
+              </a:lnSpc>
+              <a:buNone/>
+            </a:pPr>
+            <a:r>
+              <a:rPr lang="en-US" sz="850" dirty="0">
+                <a:solidFill>
+                  <a:srgbClr val="D6DEEB"/>
+                </a:solidFill>
+                <a:latin typeface="Consolas" pitchFamily="34" charset="0"/>
+                <a:ea typeface="Consolas" pitchFamily="34" charset="-122"/>
+                <a:cs typeface="Consolas" pitchFamily="34" charset="-120"/>
+              </a:rPr>
+              <a:t>    oEditor.CreateRectangle(...)</a:t>
+            </a:r>
+            <a:endParaRPr lang="en-US" sz="850" dirty="0"/>
+          </a:p>
+          <a:p>
+            <a:pPr indent="0" marL="0">
+              <a:lnSpc>
+                <a:spcPct val="112000"/>
+              </a:lnSpc>
+              <a:buNone/>
+            </a:pPr>
+            <a:r>
+              <a:rPr lang="en-US" sz="850" dirty="0">
+                <a:solidFill>
+                  <a:srgbClr val="D6DEEB"/>
+                </a:solidFill>
+                <a:latin typeface="Consolas" pitchFamily="34" charset="0"/>
+                <a:ea typeface="Consolas" pitchFamily="34" charset="-122"/>
+                <a:cs typeface="Consolas" pitchFamily="34" charset="-120"/>
+              </a:rPr>
+              <a:t> </a:t>
+            </a:r>
+            <a:endParaRPr lang="en-US" sz="850" dirty="0"/>
+          </a:p>
+          <a:p>
+            <a:pPr indent="0" marL="0">
+              <a:lnSpc>
+                <a:spcPct val="112000"/>
+              </a:lnSpc>
+              <a:buNone/>
+            </a:pPr>
+            <a:r>
+              <a:rPr lang="en-US" sz="850" dirty="0">
+                <a:solidFill>
+                  <a:srgbClr val="D6DEEB"/>
+                </a:solidFill>
+                <a:latin typeface="Consolas" pitchFamily="34" charset="0"/>
+                <a:ea typeface="Consolas" pitchFamily="34" charset="-122"/>
+                <a:cs typeface="Consolas" pitchFamily="34" charset="-120"/>
+              </a:rPr>
+              <a:t>oDesign.AnalyzeAll()                        </a:t>
+            </a:r>
+            <a:pPr indent="0" marL="0">
+              <a:lnSpc>
+                <a:spcPct val="112000"/>
+              </a:lnSpc>
+              <a:buNone/>
+            </a:pPr>
+            <a:r>
+              <a:rPr lang="en-US" sz="850" dirty="0">
+                <a:solidFill>
+                  <a:srgbClr val="7F9C7A"/>
+                </a:solidFill>
+                <a:latin typeface="Consolas" pitchFamily="34" charset="0"/>
+                <a:ea typeface="Consolas" pitchFamily="34" charset="-122"/>
+                <a:cs typeface="Consolas" pitchFamily="34" charset="-120"/>
+              </a:rPr>
+              <a:t># 메싱 + 솔브</a:t>
+            </a:r>
+            <a:endParaRPr lang="en-US" sz="850" dirty="0"/>
+          </a:p>
+          <a:p>
+            <a:pPr indent="0" marL="0">
+              <a:lnSpc>
+                <a:spcPct val="112000"/>
+              </a:lnSpc>
+              <a:buNone/>
+            </a:pPr>
+            <a:r>
+              <a:rPr lang="en-US" sz="850" dirty="0">
+                <a:solidFill>
+                  <a:srgbClr val="D6DEEB"/>
+                </a:solidFill>
+                <a:latin typeface="Consolas" pitchFamily="34" charset="0"/>
+                <a:ea typeface="Consolas" pitchFamily="34" charset="-122"/>
+                <a:cs typeface="Consolas" pitchFamily="34" charset="-120"/>
+              </a:rPr>
+              <a:t>oModule.ExportFieldsSummary(...)            </a:t>
+            </a:r>
+            <a:pPr indent="0" marL="0">
+              <a:lnSpc>
+                <a:spcPct val="112000"/>
+              </a:lnSpc>
+              <a:buNone/>
+            </a:pPr>
+            <a:r>
+              <a:rPr lang="en-US" sz="850" dirty="0">
+                <a:solidFill>
+                  <a:srgbClr val="7F9C7A"/>
+                </a:solidFill>
+                <a:latin typeface="Consolas" pitchFamily="34" charset="0"/>
+                <a:ea typeface="Consolas" pitchFamily="34" charset="-122"/>
+                <a:cs typeface="Consolas" pitchFamily="34" charset="-120"/>
+              </a:rPr>
+              <a:t># 결과 CSV 추출</a:t>
+            </a:r>
+            <a:endParaRPr lang="en-US" sz="850" dirty="0"/>
+          </a:p>
+        </p:txBody>
+      </p:sp>
+      <p:sp>
+        <p:nvSpPr>
+          <p:cNvPr id="53" name="Shape 51"/>
+          <p:cNvSpPr/>
+          <p:nvPr/>
+        </p:nvSpPr>
+        <p:spPr>
+          <a:xfrm>
+            <a:off x="502920" y="5541264"/>
+            <a:ext cx="11183112" cy="841248"/>
+          </a:xfrm>
+          <a:prstGeom prst="roundRect">
+            <a:avLst>
+              <a:gd name="adj" fmla="val 6522"/>
+            </a:avLst>
+          </a:prstGeom>
+          <a:solidFill>
+            <a:srgbClr val="FFFFFF"/>
+          </a:solidFill>
+          <a:ln w="9525">
+            <a:solidFill>
+              <a:srgbClr val="DDE3EB"/>
+            </a:solidFill>
+            <a:prstDash val="solid"/>
+          </a:ln>
+          <a:effectLst>
+            <a:outerShdw sx="100000" sy="100000" kx="0" ky="0" algn="bl" rotWithShape="0" blurRad="101600" dist="12700" dir="5400000">
+              <a:srgbClr val="9AA8BC">
+                <a:alpha val="18000"/>
+              </a:srgbClr>
+            </a:outerShdw>
+          </a:effectLst>
+        </p:spPr>
+      </p:sp>
+      <p:sp>
+        <p:nvSpPr>
+          <p:cNvPr id="54" name="Shape 52"/>
+          <p:cNvSpPr/>
+          <p:nvPr/>
+        </p:nvSpPr>
+        <p:spPr>
+          <a:xfrm>
+            <a:off x="832104" y="5724144"/>
+            <a:ext cx="64008" cy="164592"/>
+          </a:xfrm>
+          <a:prstGeom prst="rect">
+            <a:avLst/>
+          </a:prstGeom>
+          <a:solidFill>
+            <a:srgbClr val="00A3C4"/>
+          </a:solidFill>
+          <a:ln w="12700">
+            <a:solidFill>
+              <a:srgbClr val="00A3C4"/>
+            </a:solidFill>
+            <a:prstDash val="solid"/>
+          </a:ln>
+        </p:spPr>
+      </p:sp>
+      <p:sp>
+        <p:nvSpPr>
+          <p:cNvPr id="55" name="Text 53"/>
+          <p:cNvSpPr txBox="1"/>
+          <p:nvPr/>
+        </p:nvSpPr>
+        <p:spPr>
+          <a:xfrm>
+            <a:off x="978408" y="5669280"/>
+            <a:ext cx="3291840" cy="256032"/>
+          </a:xfrm>
+          <a:prstGeom prst="rect">
+            <a:avLst/>
+          </a:prstGeom>
+          <a:noFill/>
+          <a:ln/>
+        </p:spPr>
+        <p:txBody>
+          <a:bodyPr wrap="square" lIns="0" tIns="0" rIns="0" bIns="0" rtlCol="0" anchor="ctr"/>
+          <a:lstStyle/>
+          <a:p>
+            <a:pPr indent="0" marL="0">
+              <a:buNone/>
+            </a:pPr>
+            <a:r>
+              <a:rPr lang="en-US" sz="1050" b="1" dirty="0">
+                <a:solidFill>
+                  <a:srgbClr val="16305B"/>
+                </a:solidFill>
+                <a:latin typeface="Malgun Gothic" pitchFamily="34" charset="0"/>
+                <a:ea typeface="Malgun Gothic" pitchFamily="34" charset="-122"/>
+                <a:cs typeface="Malgun Gothic" pitchFamily="34" charset="-120"/>
+              </a:rPr>
+              <a:t>회차별 새 프로젝트</a:t>
+            </a:r>
+            <a:endParaRPr lang="en-US" sz="1050" dirty="0"/>
+          </a:p>
+        </p:txBody>
+      </p:sp>
+      <p:sp>
+        <p:nvSpPr>
+          <p:cNvPr id="56" name="Text 54"/>
+          <p:cNvSpPr txBox="1"/>
+          <p:nvPr/>
+        </p:nvSpPr>
+        <p:spPr>
+          <a:xfrm>
+            <a:off x="978408" y="5943600"/>
+            <a:ext cx="3383280" cy="310896"/>
+          </a:xfrm>
+          <a:prstGeom prst="rect">
+            <a:avLst/>
+          </a:prstGeom>
+          <a:noFill/>
+          <a:ln/>
+        </p:spPr>
+        <p:txBody>
+          <a:bodyPr wrap="square" lIns="0" tIns="0" rIns="0" bIns="0" rtlCol="0" anchor="ctr"/>
+          <a:lstStyle/>
+          <a:p>
+            <a:pPr indent="0" marL="0">
+              <a:buNone/>
+            </a:pPr>
+            <a:r>
+              <a:rPr lang="en-US" sz="950" dirty="0">
+                <a:solidFill>
+                  <a:srgbClr val="6B7A8F"/>
+                </a:solidFill>
+                <a:latin typeface="Malgun Gothic" pitchFamily="34" charset="0"/>
+                <a:ea typeface="Malgun Gothic" pitchFamily="34" charset="-122"/>
+                <a:cs typeface="Malgun Gothic" pitchFamily="34" charset="-120"/>
+              </a:rPr>
+              <a:t>이전 회차 설정 간섭·잠금 파일로 인한 정지 방지</a:t>
+            </a:r>
+            <a:endParaRPr lang="en-US" sz="950" dirty="0"/>
+          </a:p>
+        </p:txBody>
+      </p:sp>
+      <p:sp>
+        <p:nvSpPr>
+          <p:cNvPr id="57" name="Shape 55"/>
+          <p:cNvSpPr/>
+          <p:nvPr/>
+        </p:nvSpPr>
+        <p:spPr>
+          <a:xfrm>
+            <a:off x="4489704" y="5724144"/>
+            <a:ext cx="64008" cy="164592"/>
+          </a:xfrm>
+          <a:prstGeom prst="rect">
+            <a:avLst/>
+          </a:prstGeom>
+          <a:solidFill>
+            <a:srgbClr val="00A3C4"/>
+          </a:solidFill>
+          <a:ln w="12700">
+            <a:solidFill>
+              <a:srgbClr val="00A3C4"/>
+            </a:solidFill>
+            <a:prstDash val="solid"/>
+          </a:ln>
+        </p:spPr>
+      </p:sp>
+      <p:sp>
+        <p:nvSpPr>
+          <p:cNvPr id="58" name="Text 56"/>
+          <p:cNvSpPr txBox="1"/>
+          <p:nvPr/>
+        </p:nvSpPr>
+        <p:spPr>
+          <a:xfrm>
+            <a:off x="4636008" y="5669280"/>
+            <a:ext cx="3291840" cy="256032"/>
+          </a:xfrm>
+          <a:prstGeom prst="rect">
+            <a:avLst/>
+          </a:prstGeom>
+          <a:noFill/>
+          <a:ln/>
+        </p:spPr>
+        <p:txBody>
+          <a:bodyPr wrap="square" lIns="0" tIns="0" rIns="0" bIns="0" rtlCol="0" anchor="ctr"/>
+          <a:lstStyle/>
+          <a:p>
+            <a:pPr indent="0" marL="0">
+              <a:buNone/>
+            </a:pPr>
+            <a:r>
+              <a:rPr lang="en-US" sz="1050" b="1" dirty="0">
+                <a:solidFill>
+                  <a:srgbClr val="16305B"/>
+                </a:solidFill>
+                <a:latin typeface="Malgun Gothic" pitchFamily="34" charset="0"/>
+                <a:ea typeface="Malgun Gothic" pitchFamily="34" charset="-122"/>
+                <a:cs typeface="Malgun Gothic" pitchFamily="34" charset="-120"/>
+              </a:rPr>
+              <a:t>경계면 자동 탐지</a:t>
+            </a:r>
+            <a:endParaRPr lang="en-US" sz="1050" dirty="0"/>
+          </a:p>
+        </p:txBody>
+      </p:sp>
+      <p:sp>
+        <p:nvSpPr>
+          <p:cNvPr id="59" name="Text 57"/>
+          <p:cNvSpPr txBox="1"/>
+          <p:nvPr/>
+        </p:nvSpPr>
+        <p:spPr>
+          <a:xfrm>
+            <a:off x="4636008" y="5943600"/>
+            <a:ext cx="3383280" cy="310896"/>
+          </a:xfrm>
+          <a:prstGeom prst="rect">
+            <a:avLst/>
+          </a:prstGeom>
+          <a:noFill/>
+          <a:ln/>
+        </p:spPr>
+        <p:txBody>
+          <a:bodyPr wrap="square" lIns="0" tIns="0" rIns="0" bIns="0" rtlCol="0" anchor="ctr"/>
+          <a:lstStyle/>
+          <a:p>
+            <a:pPr indent="0" marL="0">
+              <a:buNone/>
+            </a:pPr>
+            <a:r>
+              <a:rPr lang="en-US" sz="950" dirty="0">
+                <a:solidFill>
+                  <a:srgbClr val="6B7A8F"/>
+                </a:solidFill>
+                <a:latin typeface="Malgun Gothic" pitchFamily="34" charset="0"/>
+                <a:ea typeface="Malgun Gothic" pitchFamily="34" charset="-122"/>
+                <a:cs typeface="Malgun Gothic" pitchFamily="34" charset="-120"/>
+              </a:rPr>
+              <a:t>형상이 바뀌어도 팬·개구부 면을 좌표로 식별</a:t>
+            </a:r>
+            <a:endParaRPr lang="en-US" sz="950" dirty="0"/>
+          </a:p>
+        </p:txBody>
+      </p:sp>
+      <p:sp>
+        <p:nvSpPr>
+          <p:cNvPr id="60" name="Shape 58"/>
+          <p:cNvSpPr/>
+          <p:nvPr/>
+        </p:nvSpPr>
+        <p:spPr>
+          <a:xfrm>
+            <a:off x="8147304" y="5724144"/>
+            <a:ext cx="64008" cy="164592"/>
+          </a:xfrm>
+          <a:prstGeom prst="rect">
+            <a:avLst/>
+          </a:prstGeom>
+          <a:solidFill>
+            <a:srgbClr val="00A3C4"/>
+          </a:solidFill>
+          <a:ln w="12700">
+            <a:solidFill>
+              <a:srgbClr val="00A3C4"/>
+            </a:solidFill>
+            <a:prstDash val="solid"/>
+          </a:ln>
+        </p:spPr>
+      </p:sp>
+      <p:sp>
+        <p:nvSpPr>
+          <p:cNvPr id="61" name="Text 59"/>
+          <p:cNvSpPr txBox="1"/>
+          <p:nvPr/>
+        </p:nvSpPr>
+        <p:spPr>
+          <a:xfrm>
+            <a:off x="8293608" y="5669280"/>
+            <a:ext cx="3291840" cy="256032"/>
+          </a:xfrm>
+          <a:prstGeom prst="rect">
+            <a:avLst/>
+          </a:prstGeom>
+          <a:noFill/>
+          <a:ln/>
+        </p:spPr>
+        <p:txBody>
+          <a:bodyPr wrap="square" lIns="0" tIns="0" rIns="0" bIns="0" rtlCol="0" anchor="ctr"/>
+          <a:lstStyle/>
+          <a:p>
+            <a:pPr indent="0" marL="0">
+              <a:buNone/>
+            </a:pPr>
+            <a:r>
+              <a:rPr lang="en-US" sz="1050" b="1" dirty="0">
+                <a:solidFill>
+                  <a:srgbClr val="16305B"/>
+                </a:solidFill>
+                <a:latin typeface="Malgun Gothic" pitchFamily="34" charset="0"/>
+                <a:ea typeface="Malgun Gothic" pitchFamily="34" charset="-122"/>
+                <a:cs typeface="Malgun Gothic" pitchFamily="34" charset="-120"/>
+              </a:rPr>
+              <a:t>측정면 동적 생성</a:t>
+            </a:r>
+            <a:endParaRPr lang="en-US" sz="1050" dirty="0"/>
+          </a:p>
+        </p:txBody>
+      </p:sp>
+      <p:sp>
+        <p:nvSpPr>
+          <p:cNvPr id="62" name="Text 60"/>
+          <p:cNvSpPr txBox="1"/>
+          <p:nvPr/>
+        </p:nvSpPr>
+        <p:spPr>
+          <a:xfrm>
+            <a:off x="8293608" y="5943600"/>
+            <a:ext cx="3383280" cy="310896"/>
+          </a:xfrm>
+          <a:prstGeom prst="rect">
+            <a:avLst/>
+          </a:prstGeom>
+          <a:noFill/>
+          <a:ln/>
+        </p:spPr>
+        <p:txBody>
+          <a:bodyPr wrap="square" lIns="0" tIns="0" rIns="0" bIns="0" rtlCol="0" anchor="ctr"/>
+          <a:lstStyle/>
+          <a:p>
+            <a:pPr indent="0" marL="0">
+              <a:buNone/>
+            </a:pPr>
+            <a:r>
+              <a:rPr lang="en-US" sz="950" dirty="0">
+                <a:solidFill>
+                  <a:srgbClr val="6B7A8F"/>
+                </a:solidFill>
+                <a:latin typeface="Malgun Gothic" pitchFamily="34" charset="0"/>
+                <a:ea typeface="Malgun Gothic" pitchFamily="34" charset="-122"/>
+                <a:cs typeface="Malgun Gothic" pitchFamily="34" charset="-120"/>
+              </a:rPr>
+              <a:t>핀 개수 변화에 맞춰 유로 전체 측정면 자동 배치</a:t>
             </a:r>
             <a:endParaRPr lang="en-US" sz="950" dirty="0"/>
           </a:p>

--- a/1개월차_AI에이전트_활용방안_및_DOE결과.pptx
+++ b/1개월차_AI에이전트_활용방안_및_DOE결과.pptx
@@ -16,9 +16,11 @@
     <p:sldId id="264" r:id="rId10"/>
     <p:sldId id="265" r:id="rId11"/>
     <p:sldId id="266" r:id="rId12"/>
+    <p:sldId id="267" r:id="rId13"/>
+    <p:sldId id="268" r:id="rId14"/>
   </p:sldIdLst>
   <p:notesMasterIdLst>
-    <p:notesMasterId r:id="rId13"/>
+    <p:notesMasterId r:id="rId15"/>
   </p:notesMasterIdLst>
   <p:sldSz cx="12192000" cy="6858000"/>
   <p:notesSz cx="6858000" cy="12192000"/>
@@ -730,6 +732,182 @@
 </p:notes>
 </file>
 
+<file path=ppt/notesSlides/notesSlide12.xml><?xml version="1.0" encoding="utf-8"?>
+<p:notes xmlns:a="http://schemas.openxmlformats.org/drawingml/2006/main" xmlns:r="http://schemas.openxmlformats.org/officeDocument/2006/relationships" xmlns:p="http://schemas.openxmlformats.org/presentationml/2006/main">
+  <p:cSld>
+    <p:spTree>
+      <p:nvGrpSpPr>
+        <p:cNvPr id="1" name=""/>
+        <p:cNvGrpSpPr/>
+        <p:nvPr/>
+      </p:nvGrpSpPr>
+      <p:grpSpPr>
+        <a:xfrm>
+          <a:off x="0" y="0"/>
+          <a:ext cx="0" cy="0"/>
+          <a:chOff x="0" y="0"/>
+          <a:chExt cx="0" cy="0"/>
+        </a:xfrm>
+      </p:grpSpPr>
+      <p:sp>
+        <p:nvSpPr>
+          <p:cNvPr id="2" name="Slide Image Placeholder 1"/>
+          <p:cNvSpPr>
+            <a:spLocks noGrp="1" noRot="1" noChangeAspect="1"/>
+          </p:cNvSpPr>
+          <p:nvPr>
+            <p:ph type="sldImg"/>
+          </p:nvPr>
+        </p:nvSpPr>
+        <p:spPr/>
+      </p:sp>
+      <p:sp>
+        <p:nvSpPr>
+          <p:cNvPr id="3" name="Notes Placeholder 2"/>
+          <p:cNvSpPr>
+            <a:spLocks noGrp="1"/>
+          </p:cNvSpPr>
+          <p:nvPr>
+            <p:ph type="body" idx="1"/>
+          </p:nvPr>
+        </p:nvSpPr>
+        <p:spPr/>
+        <p:txBody>
+          <a:bodyPr/>
+          <a:lstStyle/>
+          <a:p>
+            <a:r>
+              <a:rPr lang="en-US" dirty="0"/>
+              <a:t/>
+            </a:r>
+            <a:endParaRPr lang="en-US" dirty="0"/>
+          </a:p>
+        </p:txBody>
+      </p:sp>
+      <p:sp>
+        <p:nvSpPr>
+          <p:cNvPr id="4" name="Slide Number Placeholder 3"/>
+          <p:cNvSpPr>
+            <a:spLocks noGrp="1"/>
+          </p:cNvSpPr>
+          <p:nvPr>
+            <p:ph type="sldNum" sz="quarter" idx="10"/>
+          </p:nvPr>
+        </p:nvSpPr>
+        <p:spPr/>
+        <p:txBody>
+          <a:bodyPr/>
+          <a:lstStyle/>
+          <a:p>
+            <a:fld id="{F7021451-1387-4CA6-816F-3879F97B5CBC}" type="slidenum">
+              <a:rPr lang="en-US"/>
+              <a:t>12</a:t>
+            </a:fld>
+            <a:endParaRPr lang="en-US"/>
+          </a:p>
+        </p:txBody>
+      </p:sp>
+    </p:spTree>
+    <p:extLst>
+      <p:ext uri="{BB962C8B-B14F-4D97-AF65-F5344CB8AC3E}">
+        <p14:creationId xmlns:p14="http://schemas.microsoft.com/office/powerpoint/2010/main" val="1024086991"/>
+      </p:ext>
+    </p:extLst>
+  </p:cSld>
+  <p:clrMapOvr>
+    <a:masterClrMapping/>
+  </p:clrMapOvr>
+</p:notes>
+</file>
+
+<file path=ppt/notesSlides/notesSlide13.xml><?xml version="1.0" encoding="utf-8"?>
+<p:notes xmlns:a="http://schemas.openxmlformats.org/drawingml/2006/main" xmlns:r="http://schemas.openxmlformats.org/officeDocument/2006/relationships" xmlns:p="http://schemas.openxmlformats.org/presentationml/2006/main">
+  <p:cSld>
+    <p:spTree>
+      <p:nvGrpSpPr>
+        <p:cNvPr id="1" name=""/>
+        <p:cNvGrpSpPr/>
+        <p:nvPr/>
+      </p:nvGrpSpPr>
+      <p:grpSpPr>
+        <a:xfrm>
+          <a:off x="0" y="0"/>
+          <a:ext cx="0" cy="0"/>
+          <a:chOff x="0" y="0"/>
+          <a:chExt cx="0" cy="0"/>
+        </a:xfrm>
+      </p:grpSpPr>
+      <p:sp>
+        <p:nvSpPr>
+          <p:cNvPr id="2" name="Slide Image Placeholder 1"/>
+          <p:cNvSpPr>
+            <a:spLocks noGrp="1" noRot="1" noChangeAspect="1"/>
+          </p:cNvSpPr>
+          <p:nvPr>
+            <p:ph type="sldImg"/>
+          </p:nvPr>
+        </p:nvSpPr>
+        <p:spPr/>
+      </p:sp>
+      <p:sp>
+        <p:nvSpPr>
+          <p:cNvPr id="3" name="Notes Placeholder 2"/>
+          <p:cNvSpPr>
+            <a:spLocks noGrp="1"/>
+          </p:cNvSpPr>
+          <p:nvPr>
+            <p:ph type="body" idx="1"/>
+          </p:nvPr>
+        </p:nvSpPr>
+        <p:spPr/>
+        <p:txBody>
+          <a:bodyPr/>
+          <a:lstStyle/>
+          <a:p>
+            <a:r>
+              <a:rPr lang="en-US" dirty="0"/>
+              <a:t/>
+            </a:r>
+            <a:endParaRPr lang="en-US" dirty="0"/>
+          </a:p>
+        </p:txBody>
+      </p:sp>
+      <p:sp>
+        <p:nvSpPr>
+          <p:cNvPr id="4" name="Slide Number Placeholder 3"/>
+          <p:cNvSpPr>
+            <a:spLocks noGrp="1"/>
+          </p:cNvSpPr>
+          <p:nvPr>
+            <p:ph type="sldNum" sz="quarter" idx="10"/>
+          </p:nvPr>
+        </p:nvSpPr>
+        <p:spPr/>
+        <p:txBody>
+          <a:bodyPr/>
+          <a:lstStyle/>
+          <a:p>
+            <a:fld id="{F7021451-1387-4CA6-816F-3879F97B5CBC}" type="slidenum">
+              <a:rPr lang="en-US"/>
+              <a:t>13</a:t>
+            </a:fld>
+            <a:endParaRPr lang="en-US"/>
+          </a:p>
+        </p:txBody>
+      </p:sp>
+    </p:spTree>
+    <p:extLst>
+      <p:ext uri="{BB962C8B-B14F-4D97-AF65-F5344CB8AC3E}">
+        <p14:creationId xmlns:p14="http://schemas.microsoft.com/office/powerpoint/2010/main" val="1024086991"/>
+      </p:ext>
+    </p:extLst>
+  </p:cSld>
+  <p:clrMapOvr>
+    <a:masterClrMapping/>
+  </p:clrMapOvr>
+</p:notes>
+</file>
+
 <file path=ppt/notesSlides/notesSlide2.xml><?xml version="1.0" encoding="utf-8"?>
 <p:notes xmlns:a="http://schemas.openxmlformats.org/drawingml/2006/main" xmlns:r="http://schemas.openxmlformats.org/officeDocument/2006/relationships" xmlns:p="http://schemas.openxmlformats.org/presentationml/2006/main">
   <p:cSld>
@@ -1304,7 +1482,7 @@
           <a:p>
             <a:r>
               <a:rPr lang="en-US" dirty="0"/>
-              <a:t>설계값을 Equation Manager 전역변수에 써넣고 리빌드한 뒤 질량 특성과 STEP 파일을 얻는 과정이다. 변수명이 어긋나면 즉시 중단해 형상이 바뀌지 않은 채 해석되는 사고를 막았고, 핀 간격처럼 다른 변수에서 결정되는 값은 CAD 수식에 맡겨 두 곳에서 따로 계산하지 않도록 했다. 코드는 주요 호출부만 발췌했다.</a:t>
+              <a:t>설계값을 Equation Manager 전역변수에 써넣고 리빌드한 뒤 질량 특성과 STEP 파일을 얻는 과정이다. 변수명이 어긋나면 즉시 중단해 형상이 바뀌지 않은 채 해석되는 사고를 막았고, 핀 간격처럼 다른 변수에서 결정되는 값은 CAD 수식에 맡겨 두 곳에서 따로 계산하지 않도록 했다. 주요 코드는 부록 A-1에 정리했다.</a:t>
             </a:r>
             <a:endParaRPr lang="en-US" dirty="0"/>
           </a:p>
@@ -1392,7 +1570,7 @@
           <a:p>
             <a:r>
               <a:rPr lang="en-US" dirty="0"/>
-              <a:t>SolidWorks에서 내보낸 STEP 파일을 받아 Icepak 해석 모델을 매 회차 새로 구성한다. 유체 영역 생성, 경계조건 지정, 메시 설정, 측정면 생성, 해석 실행, 결과 추출까지 전 과정이 코드로 수행된다. 형상이 바뀌면 팬·개구부 면과 측정면 위치가 달라지므로, 이를 좌표와 설계변수로부터 자동으로 계산하도록 구성했다. 코드는 주요 호출부만 발췌했고 인자는 생략했다.</a:t>
+              <a:t>SolidWorks에서 내보낸 STEP 파일을 받아 Icepak 해석 모델을 매 회차 새로 구성한다. 유체 영역 생성, 경계조건 지정, 메시 설정, 측정면 생성, 해석 실행, 결과 추출까지 전 과정이 코드로 수행된다. 형상이 바뀌면 팬·개구부 면과 측정면 위치가 달라지므로, 이를 좌표와 설계변수로부터 자동으로 계산하도록 구성했다. 주요 코드는 부록 A-2에 정리했다.</a:t>
             </a:r>
             <a:endParaRPr lang="en-US" dirty="0"/>
           </a:p>
@@ -5798,6 +5976,4011 @@
 </p:sld>
 </file>
 
+<file path=ppt/slides/slide12.xml><?xml version="1.0" encoding="utf-8"?>
+<p:sld xmlns:a="http://schemas.openxmlformats.org/drawingml/2006/main" xmlns:r="http://schemas.openxmlformats.org/officeDocument/2006/relationships" xmlns:p="http://schemas.openxmlformats.org/presentationml/2006/main">
+  <p:cSld name="Slide 12">
+    <p:bg>
+      <p:bgPr>
+        <a:solidFill>
+          <a:srgbClr val="F3F5F8"/>
+        </a:solidFill>
+      </p:bgPr>
+    </p:bg>
+    <p:spTree>
+      <p:nvGrpSpPr>
+        <p:cNvPr id="1" name=""/>
+        <p:cNvGrpSpPr/>
+        <p:nvPr/>
+      </p:nvGrpSpPr>
+      <p:grpSpPr>
+        <a:xfrm>
+          <a:off x="0" y="0"/>
+          <a:ext cx="0" cy="0"/>
+          <a:chOff x="0" y="0"/>
+          <a:chExt cx="0" cy="0"/>
+        </a:xfrm>
+      </p:grpSpPr>
+      <p:sp>
+        <p:nvSpPr>
+          <p:cNvPr id="2" name="Shape 0"/>
+          <p:cNvSpPr/>
+          <p:nvPr/>
+        </p:nvSpPr>
+        <p:spPr>
+          <a:xfrm>
+            <a:off x="502920" y="384048"/>
+            <a:ext cx="475488" cy="475488"/>
+          </a:xfrm>
+          <a:prstGeom prst="rect">
+            <a:avLst/>
+          </a:prstGeom>
+          <a:solidFill>
+            <a:srgbClr val="16305B"/>
+          </a:solidFill>
+          <a:ln w="12700">
+            <a:solidFill>
+              <a:srgbClr val="16305B"/>
+            </a:solidFill>
+            <a:prstDash val="solid"/>
+          </a:ln>
+        </p:spPr>
+      </p:sp>
+      <p:sp>
+        <p:nvSpPr>
+          <p:cNvPr id="3" name="Text 1"/>
+          <p:cNvSpPr txBox="1"/>
+          <p:nvPr/>
+        </p:nvSpPr>
+        <p:spPr>
+          <a:xfrm>
+            <a:off x="502920" y="384048"/>
+            <a:ext cx="475488" cy="475488"/>
+          </a:xfrm>
+          <a:prstGeom prst="rect">
+            <a:avLst/>
+          </a:prstGeom>
+          <a:noFill/>
+          <a:ln/>
+        </p:spPr>
+        <p:txBody>
+          <a:bodyPr wrap="square" lIns="0" tIns="0" rIns="0" bIns="0" rtlCol="0" anchor="ctr"/>
+          <a:lstStyle/>
+          <a:p>
+            <a:pPr algn="ctr" indent="0" marL="0">
+              <a:buNone/>
+            </a:pPr>
+            <a:r>
+              <a:rPr lang="en-US" sz="1600" b="1" dirty="0">
+                <a:solidFill>
+                  <a:srgbClr val="FFFFFF"/>
+                </a:solidFill>
+                <a:latin typeface="Malgun Gothic" pitchFamily="34" charset="0"/>
+                <a:ea typeface="Malgun Gothic" pitchFamily="34" charset="-122"/>
+                <a:cs typeface="Malgun Gothic" pitchFamily="34" charset="-120"/>
+              </a:rPr>
+              <a:t>A-1</a:t>
+            </a:r>
+            <a:endParaRPr lang="en-US" sz="1600" dirty="0"/>
+          </a:p>
+        </p:txBody>
+      </p:sp>
+      <p:sp>
+        <p:nvSpPr>
+          <p:cNvPr id="4" name="Text 2"/>
+          <p:cNvSpPr txBox="1"/>
+          <p:nvPr/>
+        </p:nvSpPr>
+        <p:spPr>
+          <a:xfrm>
+            <a:off x="1124712" y="365760"/>
+            <a:ext cx="7315200" cy="237744"/>
+          </a:xfrm>
+          <a:prstGeom prst="rect">
+            <a:avLst/>
+          </a:prstGeom>
+          <a:noFill/>
+          <a:ln/>
+        </p:spPr>
+        <p:txBody>
+          <a:bodyPr wrap="square" lIns="0" tIns="0" rIns="0" bIns="0" rtlCol="0" anchor="ctr"/>
+          <a:lstStyle/>
+          <a:p>
+            <a:pPr indent="0" marL="0">
+              <a:buNone/>
+            </a:pPr>
+            <a:r>
+              <a:rPr lang="en-US" sz="1050" b="1" spc="100" kern="0" dirty="0">
+                <a:solidFill>
+                  <a:srgbClr val="00A3C4"/>
+                </a:solidFill>
+                <a:latin typeface="Malgun Gothic" pitchFamily="34" charset="0"/>
+                <a:ea typeface="Malgun Gothic" pitchFamily="34" charset="-122"/>
+                <a:cs typeface="Malgun Gothic" pitchFamily="34" charset="-120"/>
+              </a:rPr>
+              <a:t>부록</a:t>
+            </a:r>
+            <a:endParaRPr lang="en-US" sz="1050" dirty="0"/>
+          </a:p>
+        </p:txBody>
+      </p:sp>
+      <p:sp>
+        <p:nvSpPr>
+          <p:cNvPr id="5" name="Text 3"/>
+          <p:cNvSpPr txBox="1"/>
+          <p:nvPr/>
+        </p:nvSpPr>
+        <p:spPr>
+          <a:xfrm>
+            <a:off x="1124712" y="548640"/>
+            <a:ext cx="10607040" cy="384048"/>
+          </a:xfrm>
+          <a:prstGeom prst="rect">
+            <a:avLst/>
+          </a:prstGeom>
+          <a:noFill/>
+          <a:ln/>
+        </p:spPr>
+        <p:txBody>
+          <a:bodyPr wrap="square" lIns="0" tIns="0" rIns="0" bIns="0" rtlCol="0" anchor="ctr"/>
+          <a:lstStyle/>
+          <a:p>
+            <a:pPr indent="0" marL="0">
+              <a:buNone/>
+            </a:pPr>
+            <a:r>
+              <a:rPr lang="en-US" sz="2200" b="1" dirty="0">
+                <a:solidFill>
+                  <a:srgbClr val="16305B"/>
+                </a:solidFill>
+                <a:latin typeface="Malgun Gothic" pitchFamily="34" charset="0"/>
+                <a:ea typeface="Malgun Gothic" pitchFamily="34" charset="-122"/>
+                <a:cs typeface="Malgun Gothic" pitchFamily="34" charset="-120"/>
+              </a:rPr>
+              <a:t>SolidWorks 제어 코드 — 형상 빌드 · 질량 특성 · STEP 저장</a:t>
+            </a:r>
+            <a:endParaRPr lang="en-US" sz="2200" dirty="0"/>
+          </a:p>
+        </p:txBody>
+      </p:sp>
+      <p:sp>
+        <p:nvSpPr>
+          <p:cNvPr id="6" name="Shape 4"/>
+          <p:cNvSpPr/>
+          <p:nvPr/>
+        </p:nvSpPr>
+        <p:spPr>
+          <a:xfrm>
+            <a:off x="502920" y="1170432"/>
+            <a:ext cx="11183112" cy="5230368"/>
+          </a:xfrm>
+          <a:prstGeom prst="roundRect">
+            <a:avLst>
+              <a:gd name="adj" fmla="val 1049"/>
+            </a:avLst>
+          </a:prstGeom>
+          <a:solidFill>
+            <a:srgbClr val="1E2430"/>
+          </a:solidFill>
+          <a:ln w="12700">
+            <a:solidFill>
+              <a:srgbClr val="1E2430"/>
+            </a:solidFill>
+            <a:prstDash val="solid"/>
+          </a:ln>
+        </p:spPr>
+      </p:sp>
+      <p:sp>
+        <p:nvSpPr>
+          <p:cNvPr id="7" name="Shape 5"/>
+          <p:cNvSpPr/>
+          <p:nvPr/>
+        </p:nvSpPr>
+        <p:spPr>
+          <a:xfrm>
+            <a:off x="667512" y="1298448"/>
+            <a:ext cx="91440" cy="91440"/>
+          </a:xfrm>
+          <a:prstGeom prst="ellipse">
+            <a:avLst/>
+          </a:prstGeom>
+          <a:solidFill>
+            <a:srgbClr val="FF5F57"/>
+          </a:solidFill>
+          <a:ln w="12700">
+            <a:solidFill>
+              <a:srgbClr val="FF5F57"/>
+            </a:solidFill>
+            <a:prstDash val="solid"/>
+          </a:ln>
+        </p:spPr>
+      </p:sp>
+      <p:sp>
+        <p:nvSpPr>
+          <p:cNvPr id="8" name="Shape 6"/>
+          <p:cNvSpPr/>
+          <p:nvPr/>
+        </p:nvSpPr>
+        <p:spPr>
+          <a:xfrm>
+            <a:off x="822960" y="1298448"/>
+            <a:ext cx="91440" cy="91440"/>
+          </a:xfrm>
+          <a:prstGeom prst="ellipse">
+            <a:avLst/>
+          </a:prstGeom>
+          <a:solidFill>
+            <a:srgbClr val="FEBC2E"/>
+          </a:solidFill>
+          <a:ln w="12700">
+            <a:solidFill>
+              <a:srgbClr val="FEBC2E"/>
+            </a:solidFill>
+            <a:prstDash val="solid"/>
+          </a:ln>
+        </p:spPr>
+      </p:sp>
+      <p:sp>
+        <p:nvSpPr>
+          <p:cNvPr id="9" name="Shape 7"/>
+          <p:cNvSpPr/>
+          <p:nvPr/>
+        </p:nvSpPr>
+        <p:spPr>
+          <a:xfrm>
+            <a:off x="978408" y="1298448"/>
+            <a:ext cx="91440" cy="91440"/>
+          </a:xfrm>
+          <a:prstGeom prst="ellipse">
+            <a:avLst/>
+          </a:prstGeom>
+          <a:solidFill>
+            <a:srgbClr val="28C840"/>
+          </a:solidFill>
+          <a:ln w="12700">
+            <a:solidFill>
+              <a:srgbClr val="28C840"/>
+            </a:solidFill>
+            <a:prstDash val="solid"/>
+          </a:ln>
+        </p:spPr>
+      </p:sp>
+      <p:sp>
+        <p:nvSpPr>
+          <p:cNvPr id="10" name="Text 8"/>
+          <p:cNvSpPr txBox="1"/>
+          <p:nvPr/>
+        </p:nvSpPr>
+        <p:spPr>
+          <a:xfrm>
+            <a:off x="1161288" y="1234440"/>
+            <a:ext cx="10360152" cy="219456"/>
+          </a:xfrm>
+          <a:prstGeom prst="rect">
+            <a:avLst/>
+          </a:prstGeom>
+          <a:noFill/>
+          <a:ln/>
+        </p:spPr>
+        <p:txBody>
+          <a:bodyPr wrap="square" lIns="0" tIns="0" rIns="0" bIns="0" rtlCol="0" anchor="ctr"/>
+          <a:lstStyle/>
+          <a:p>
+            <a:pPr indent="0" marL="0">
+              <a:buNone/>
+            </a:pPr>
+            <a:r>
+              <a:rPr lang="en-US" sz="850" dirty="0">
+                <a:solidFill>
+                  <a:srgbClr val="8A94A6"/>
+                </a:solidFill>
+                <a:latin typeface="Consolas" pitchFamily="34" charset="0"/>
+                <a:ea typeface="Consolas" pitchFamily="34" charset="-122"/>
+                <a:cs typeface="Consolas" pitchFamily="34" charset="-120"/>
+              </a:rPr>
+              <a:t>Solidworks.py</a:t>
+            </a:r>
+            <a:endParaRPr lang="en-US" sz="850" dirty="0"/>
+          </a:p>
+        </p:txBody>
+      </p:sp>
+      <p:sp>
+        <p:nvSpPr>
+          <p:cNvPr id="11" name="Shape 9"/>
+          <p:cNvSpPr/>
+          <p:nvPr/>
+        </p:nvSpPr>
+        <p:spPr>
+          <a:xfrm>
+            <a:off x="502920" y="1517904"/>
+            <a:ext cx="11183112" cy="0"/>
+          </a:xfrm>
+          <a:prstGeom prst="line">
+            <a:avLst/>
+          </a:prstGeom>
+          <a:noFill/>
+          <a:ln w="9525">
+            <a:solidFill>
+              <a:srgbClr val="2E3645"/>
+            </a:solidFill>
+            <a:prstDash val="solid"/>
+          </a:ln>
+        </p:spPr>
+      </p:sp>
+      <p:sp>
+        <p:nvSpPr>
+          <p:cNvPr id="12" name="Text 10"/>
+          <p:cNvSpPr txBox="1"/>
+          <p:nvPr/>
+        </p:nvSpPr>
+        <p:spPr>
+          <a:xfrm>
+            <a:off x="685800" y="1627632"/>
+            <a:ext cx="10890504" cy="4663440"/>
+          </a:xfrm>
+          <a:prstGeom prst="rect">
+            <a:avLst/>
+          </a:prstGeom>
+          <a:noFill/>
+          <a:ln/>
+        </p:spPr>
+        <p:txBody>
+          <a:bodyPr wrap="square" lIns="0" tIns="0" rIns="0" bIns="0" rtlCol="0" anchor="t"/>
+          <a:lstStyle/>
+          <a:p>
+            <a:pPr indent="0" marL="0">
+              <a:lnSpc>
+                <a:spcPct val="108000"/>
+              </a:lnSpc>
+              <a:buNone/>
+            </a:pPr>
+            <a:r>
+              <a:rPr lang="en-US" sz="820" dirty="0">
+                <a:solidFill>
+                  <a:srgbClr val="C792EA"/>
+                </a:solidFill>
+                <a:latin typeface="Consolas" pitchFamily="34" charset="0"/>
+                <a:ea typeface="Consolas" pitchFamily="34" charset="-122"/>
+                <a:cs typeface="Consolas" pitchFamily="34" charset="-120"/>
+              </a:rPr>
+              <a:t>def</a:t>
+            </a:r>
+            <a:pPr indent="0" marL="0">
+              <a:lnSpc>
+                <a:spcPct val="108000"/>
+              </a:lnSpc>
+              <a:buNone/>
+            </a:pPr>
+            <a:r>
+              <a:rPr lang="en-US" sz="820" dirty="0">
+                <a:solidFill>
+                  <a:srgbClr val="D6DEEB"/>
+                </a:solidFill>
+                <a:latin typeface="Consolas" pitchFamily="34" charset="0"/>
+                <a:ea typeface="Consolas" pitchFamily="34" charset="-122"/>
+                <a:cs typeface="Consolas" pitchFamily="34" charset="-120"/>
+              </a:rPr>
+              <a:t> connect_sw():</a:t>
+            </a:r>
+            <a:endParaRPr lang="en-US" sz="820" dirty="0"/>
+          </a:p>
+          <a:p>
+            <a:pPr indent="0" marL="0">
+              <a:lnSpc>
+                <a:spcPct val="108000"/>
+              </a:lnSpc>
+              <a:buNone/>
+            </a:pPr>
+            <a:r>
+              <a:rPr lang="en-US" sz="820" dirty="0">
+                <a:solidFill>
+                  <a:srgbClr val="D6DEEB"/>
+                </a:solidFill>
+                <a:latin typeface="Consolas" pitchFamily="34" charset="0"/>
+                <a:ea typeface="Consolas" pitchFamily="34" charset="-122"/>
+                <a:cs typeface="Consolas" pitchFamily="34" charset="-120"/>
+              </a:rPr>
+              <a:t>    pythoncom.CoInitialize()</a:t>
+            </a:r>
+            <a:endParaRPr lang="en-US" sz="820" dirty="0"/>
+          </a:p>
+          <a:p>
+            <a:pPr indent="0" marL="0">
+              <a:lnSpc>
+                <a:spcPct val="108000"/>
+              </a:lnSpc>
+              <a:buNone/>
+            </a:pPr>
+            <a:r>
+              <a:rPr lang="en-US" sz="820" dirty="0">
+                <a:solidFill>
+                  <a:srgbClr val="D6DEEB"/>
+                </a:solidFill>
+                <a:latin typeface="Consolas" pitchFamily="34" charset="0"/>
+                <a:ea typeface="Consolas" pitchFamily="34" charset="-122"/>
+                <a:cs typeface="Consolas" pitchFamily="34" charset="-120"/>
+              </a:rPr>
+              <a:t>    app = win32com.client.Dispatch(</a:t>
+            </a:r>
+            <a:pPr indent="0" marL="0">
+              <a:lnSpc>
+                <a:spcPct val="108000"/>
+              </a:lnSpc>
+              <a:buNone/>
+            </a:pPr>
+            <a:r>
+              <a:rPr lang="en-US" sz="820" dirty="0">
+                <a:solidFill>
+                  <a:srgbClr val="E6A26B"/>
+                </a:solidFill>
+                <a:latin typeface="Consolas" pitchFamily="34" charset="0"/>
+                <a:ea typeface="Consolas" pitchFamily="34" charset="-122"/>
+                <a:cs typeface="Consolas" pitchFamily="34" charset="-120"/>
+              </a:rPr>
+              <a:t>"SldWorks.Application"</a:t>
+            </a:r>
+            <a:pPr indent="0" marL="0">
+              <a:lnSpc>
+                <a:spcPct val="108000"/>
+              </a:lnSpc>
+              <a:buNone/>
+            </a:pPr>
+            <a:r>
+              <a:rPr lang="en-US" sz="820" dirty="0">
+                <a:solidFill>
+                  <a:srgbClr val="D6DEEB"/>
+                </a:solidFill>
+                <a:latin typeface="Consolas" pitchFamily="34" charset="0"/>
+                <a:ea typeface="Consolas" pitchFamily="34" charset="-122"/>
+                <a:cs typeface="Consolas" pitchFamily="34" charset="-120"/>
+              </a:rPr>
+              <a:t>)</a:t>
+            </a:r>
+            <a:endParaRPr lang="en-US" sz="820" dirty="0"/>
+          </a:p>
+          <a:p>
+            <a:pPr indent="0" marL="0">
+              <a:lnSpc>
+                <a:spcPct val="108000"/>
+              </a:lnSpc>
+              <a:buNone/>
+            </a:pPr>
+            <a:r>
+              <a:rPr lang="en-US" sz="820" dirty="0">
+                <a:solidFill>
+                  <a:srgbClr val="D6DEEB"/>
+                </a:solidFill>
+                <a:latin typeface="Consolas" pitchFamily="34" charset="0"/>
+                <a:ea typeface="Consolas" pitchFamily="34" charset="-122"/>
+                <a:cs typeface="Consolas" pitchFamily="34" charset="-120"/>
+              </a:rPr>
+              <a:t>    app.Visible = False                                   </a:t>
+            </a:r>
+            <a:pPr indent="0" marL="0">
+              <a:lnSpc>
+                <a:spcPct val="108000"/>
+              </a:lnSpc>
+              <a:buNone/>
+            </a:pPr>
+            <a:r>
+              <a:rPr lang="en-US" sz="820" dirty="0">
+                <a:solidFill>
+                  <a:srgbClr val="7F9C7A"/>
+                </a:solidFill>
+                <a:latin typeface="Consolas" pitchFamily="34" charset="0"/>
+                <a:ea typeface="Consolas" pitchFamily="34" charset="-122"/>
+                <a:cs typeface="Consolas" pitchFamily="34" charset="-120"/>
+              </a:rPr>
+              <a:t># 무인 장기구동</a:t>
+            </a:r>
+            <a:endParaRPr lang="en-US" sz="820" dirty="0"/>
+          </a:p>
+          <a:p>
+            <a:pPr indent="0" marL="0">
+              <a:lnSpc>
+                <a:spcPct val="108000"/>
+              </a:lnSpc>
+              <a:buNone/>
+            </a:pPr>
+            <a:r>
+              <a:rPr lang="en-US" sz="820" dirty="0">
+                <a:solidFill>
+                  <a:srgbClr val="D6DEEB"/>
+                </a:solidFill>
+                <a:latin typeface="Consolas" pitchFamily="34" charset="0"/>
+                <a:ea typeface="Consolas" pitchFamily="34" charset="-122"/>
+                <a:cs typeface="Consolas" pitchFamily="34" charset="-120"/>
+              </a:rPr>
+              <a:t>    model = app.OpenDoc6(ASM_PATH, swDocASSEMBLY, 1, </a:t>
+            </a:r>
+            <a:pPr indent="0" marL="0">
+              <a:lnSpc>
+                <a:spcPct val="108000"/>
+              </a:lnSpc>
+              <a:buNone/>
+            </a:pPr>
+            <a:r>
+              <a:rPr lang="en-US" sz="820" dirty="0">
+                <a:solidFill>
+                  <a:srgbClr val="E6A26B"/>
+                </a:solidFill>
+                <a:latin typeface="Consolas" pitchFamily="34" charset="0"/>
+                <a:ea typeface="Consolas" pitchFamily="34" charset="-122"/>
+                <a:cs typeface="Consolas" pitchFamily="34" charset="-120"/>
+              </a:rPr>
+              <a:t>""</a:t>
+            </a:r>
+            <a:pPr indent="0" marL="0">
+              <a:lnSpc>
+                <a:spcPct val="108000"/>
+              </a:lnSpc>
+              <a:buNone/>
+            </a:pPr>
+            <a:r>
+              <a:rPr lang="en-US" sz="820" dirty="0">
+                <a:solidFill>
+                  <a:srgbClr val="D6DEEB"/>
+                </a:solidFill>
+                <a:latin typeface="Consolas" pitchFamily="34" charset="0"/>
+                <a:ea typeface="Consolas" pitchFamily="34" charset="-122"/>
+                <a:cs typeface="Consolas" pitchFamily="34" charset="-120"/>
+              </a:rPr>
+              <a:t>, errors, warnings)</a:t>
+            </a:r>
+            <a:endParaRPr lang="en-US" sz="820" dirty="0"/>
+          </a:p>
+          <a:p>
+            <a:pPr indent="0" marL="0">
+              <a:lnSpc>
+                <a:spcPct val="108000"/>
+              </a:lnSpc>
+              <a:buNone/>
+            </a:pPr>
+            <a:r>
+              <a:rPr lang="en-US" sz="820" dirty="0">
+                <a:solidFill>
+                  <a:srgbClr val="D6DEEB"/>
+                </a:solidFill>
+                <a:latin typeface="Consolas" pitchFamily="34" charset="0"/>
+                <a:ea typeface="Consolas" pitchFamily="34" charset="-122"/>
+                <a:cs typeface="Consolas" pitchFamily="34" charset="-120"/>
+              </a:rPr>
+              <a:t>    </a:t>
+            </a:r>
+            <a:pPr indent="0" marL="0">
+              <a:lnSpc>
+                <a:spcPct val="108000"/>
+              </a:lnSpc>
+              <a:buNone/>
+            </a:pPr>
+            <a:r>
+              <a:rPr lang="en-US" sz="820" dirty="0">
+                <a:solidFill>
+                  <a:srgbClr val="C792EA"/>
+                </a:solidFill>
+                <a:latin typeface="Consolas" pitchFamily="34" charset="0"/>
+                <a:ea typeface="Consolas" pitchFamily="34" charset="-122"/>
+                <a:cs typeface="Consolas" pitchFamily="34" charset="-120"/>
+              </a:rPr>
+              <a:t>return</a:t>
+            </a:r>
+            <a:pPr indent="0" marL="0">
+              <a:lnSpc>
+                <a:spcPct val="108000"/>
+              </a:lnSpc>
+              <a:buNone/>
+            </a:pPr>
+            <a:r>
+              <a:rPr lang="en-US" sz="820" dirty="0">
+                <a:solidFill>
+                  <a:srgbClr val="D6DEEB"/>
+                </a:solidFill>
+                <a:latin typeface="Consolas" pitchFamily="34" charset="0"/>
+                <a:ea typeface="Consolas" pitchFamily="34" charset="-122"/>
+                <a:cs typeface="Consolas" pitchFamily="34" charset="-120"/>
+              </a:rPr>
+              <a:t> app, errors, warnings</a:t>
+            </a:r>
+            <a:endParaRPr lang="en-US" sz="820" dirty="0"/>
+          </a:p>
+          <a:p>
+            <a:pPr indent="0" marL="0">
+              <a:lnSpc>
+                <a:spcPct val="108000"/>
+              </a:lnSpc>
+              <a:buNone/>
+            </a:pPr>
+            <a:r>
+              <a:rPr lang="en-US" sz="820" dirty="0">
+                <a:solidFill>
+                  <a:srgbClr val="C792EA"/>
+                </a:solidFill>
+                <a:latin typeface="Consolas" pitchFamily="34" charset="0"/>
+                <a:ea typeface="Consolas" pitchFamily="34" charset="-122"/>
+                <a:cs typeface="Consolas" pitchFamily="34" charset="-120"/>
+              </a:rPr>
+              <a:t>def</a:t>
+            </a:r>
+            <a:pPr indent="0" marL="0">
+              <a:lnSpc>
+                <a:spcPct val="108000"/>
+              </a:lnSpc>
+              <a:buNone/>
+            </a:pPr>
+            <a:r>
+              <a:rPr lang="en-US" sz="820" dirty="0">
+                <a:solidFill>
+                  <a:srgbClr val="D6DEEB"/>
+                </a:solidFill>
+                <a:latin typeface="Consolas" pitchFamily="34" charset="0"/>
+                <a:ea typeface="Consolas" pitchFamily="34" charset="-122"/>
+                <a:cs typeface="Consolas" pitchFamily="34" charset="-120"/>
+              </a:rPr>
+              <a:t> update_sw(app, errors, warnings, params):</a:t>
+            </a:r>
+            <a:endParaRPr lang="en-US" sz="820" dirty="0"/>
+          </a:p>
+          <a:p>
+            <a:pPr indent="0" marL="0">
+              <a:lnSpc>
+                <a:spcPct val="108000"/>
+              </a:lnSpc>
+              <a:buNone/>
+            </a:pPr>
+            <a:r>
+              <a:rPr lang="en-US" sz="820" dirty="0">
+                <a:solidFill>
+                  <a:srgbClr val="D6DEEB"/>
+                </a:solidFill>
+                <a:latin typeface="Consolas" pitchFamily="34" charset="0"/>
+                <a:ea typeface="Consolas" pitchFamily="34" charset="-122"/>
+                <a:cs typeface="Consolas" pitchFamily="34" charset="-120"/>
+              </a:rPr>
+              <a:t>    _validate(params)                                     </a:t>
+            </a:r>
+            <a:pPr indent="0" marL="0">
+              <a:lnSpc>
+                <a:spcPct val="108000"/>
+              </a:lnSpc>
+              <a:buNone/>
+            </a:pPr>
+            <a:r>
+              <a:rPr lang="en-US" sz="820" dirty="0">
+                <a:solidFill>
+                  <a:srgbClr val="7F9C7A"/>
+                </a:solidFill>
+                <a:latin typeface="Consolas" pitchFamily="34" charset="0"/>
+                <a:ea typeface="Consolas" pitchFamily="34" charset="-122"/>
+                <a:cs typeface="Consolas" pitchFamily="34" charset="-120"/>
+              </a:rPr>
+              <a:t># 누락 변수 · 정수 · 갭 제약 사전 검증</a:t>
+            </a:r>
+            <a:endParaRPr lang="en-US" sz="820" dirty="0"/>
+          </a:p>
+          <a:p>
+            <a:pPr indent="0" marL="0">
+              <a:lnSpc>
+                <a:spcPct val="108000"/>
+              </a:lnSpc>
+              <a:buNone/>
+            </a:pPr>
+            <a:r>
+              <a:rPr lang="en-US" sz="820" dirty="0">
+                <a:solidFill>
+                  <a:srgbClr val="D6DEEB"/>
+                </a:solidFill>
+                <a:latin typeface="Consolas" pitchFamily="34" charset="0"/>
+                <a:ea typeface="Consolas" pitchFamily="34" charset="-122"/>
+                <a:cs typeface="Consolas" pitchFamily="34" charset="-120"/>
+              </a:rPr>
+              <a:t>    part  = app.ActivateDoc3(PART_PATH, False, 0, errors)</a:t>
+            </a:r>
+            <a:endParaRPr lang="en-US" sz="820" dirty="0"/>
+          </a:p>
+          <a:p>
+            <a:pPr indent="0" marL="0">
+              <a:lnSpc>
+                <a:spcPct val="108000"/>
+              </a:lnSpc>
+              <a:buNone/>
+            </a:pPr>
+            <a:r>
+              <a:rPr lang="en-US" sz="820" dirty="0">
+                <a:solidFill>
+                  <a:srgbClr val="D6DEEB"/>
+                </a:solidFill>
+                <a:latin typeface="Consolas" pitchFamily="34" charset="0"/>
+                <a:ea typeface="Consolas" pitchFamily="34" charset="-122"/>
+                <a:cs typeface="Consolas" pitchFamily="34" charset="-120"/>
+              </a:rPr>
+              <a:t>    eqMgr = part.GetEquationMgr</a:t>
+            </a:r>
+            <a:endParaRPr lang="en-US" sz="820" dirty="0"/>
+          </a:p>
+          <a:p>
+            <a:pPr indent="0" marL="0">
+              <a:lnSpc>
+                <a:spcPct val="108000"/>
+              </a:lnSpc>
+              <a:buNone/>
+            </a:pPr>
+            <a:r>
+              <a:rPr lang="en-US" sz="820" dirty="0">
+                <a:solidFill>
+                  <a:srgbClr val="D6DEEB"/>
+                </a:solidFill>
+                <a:latin typeface="Consolas" pitchFamily="34" charset="0"/>
+                <a:ea typeface="Consolas" pitchFamily="34" charset="-122"/>
+                <a:cs typeface="Consolas" pitchFamily="34" charset="-120"/>
+              </a:rPr>
+              <a:t>    dispid = eqMgr._oleobj_.GetIDsOfNames(</a:t>
+            </a:r>
+            <a:pPr indent="0" marL="0">
+              <a:lnSpc>
+                <a:spcPct val="108000"/>
+              </a:lnSpc>
+              <a:buNone/>
+            </a:pPr>
+            <a:r>
+              <a:rPr lang="en-US" sz="820" dirty="0">
+                <a:solidFill>
+                  <a:srgbClr val="E6A26B"/>
+                </a:solidFill>
+                <a:latin typeface="Consolas" pitchFamily="34" charset="0"/>
+                <a:ea typeface="Consolas" pitchFamily="34" charset="-122"/>
+                <a:cs typeface="Consolas" pitchFamily="34" charset="-120"/>
+              </a:rPr>
+              <a:t>"Equation"</a:t>
+            </a:r>
+            <a:pPr indent="0" marL="0">
+              <a:lnSpc>
+                <a:spcPct val="108000"/>
+              </a:lnSpc>
+              <a:buNone/>
+            </a:pPr>
+            <a:r>
+              <a:rPr lang="en-US" sz="820" dirty="0">
+                <a:solidFill>
+                  <a:srgbClr val="D6DEEB"/>
+                </a:solidFill>
+                <a:latin typeface="Consolas" pitchFamily="34" charset="0"/>
+                <a:ea typeface="Consolas" pitchFamily="34" charset="-122"/>
+                <a:cs typeface="Consolas" pitchFamily="34" charset="-120"/>
+              </a:rPr>
+              <a:t>)</a:t>
+            </a:r>
+            <a:endParaRPr lang="en-US" sz="820" dirty="0"/>
+          </a:p>
+          <a:p>
+            <a:pPr indent="0" marL="0">
+              <a:lnSpc>
+                <a:spcPct val="108000"/>
+              </a:lnSpc>
+              <a:buNone/>
+            </a:pPr>
+            <a:r>
+              <a:rPr lang="en-US" sz="820" dirty="0">
+                <a:solidFill>
+                  <a:srgbClr val="D6DEEB"/>
+                </a:solidFill>
+                <a:latin typeface="Consolas" pitchFamily="34" charset="0"/>
+                <a:ea typeface="Consolas" pitchFamily="34" charset="-122"/>
+                <a:cs typeface="Consolas" pitchFamily="34" charset="-120"/>
+              </a:rPr>
+              <a:t> </a:t>
+            </a:r>
+            <a:endParaRPr lang="en-US" sz="820" dirty="0"/>
+          </a:p>
+          <a:p>
+            <a:pPr indent="0" marL="0">
+              <a:lnSpc>
+                <a:spcPct val="108000"/>
+              </a:lnSpc>
+              <a:buNone/>
+            </a:pPr>
+            <a:r>
+              <a:rPr lang="en-US" sz="820" dirty="0">
+                <a:solidFill>
+                  <a:srgbClr val="D6DEEB"/>
+                </a:solidFill>
+                <a:latin typeface="Consolas" pitchFamily="34" charset="0"/>
+                <a:ea typeface="Consolas" pitchFamily="34" charset="-122"/>
+                <a:cs typeface="Consolas" pitchFamily="34" charset="-120"/>
+              </a:rPr>
+              <a:t>    name_to_i = {}                                        </a:t>
+            </a:r>
+            <a:pPr indent="0" marL="0">
+              <a:lnSpc>
+                <a:spcPct val="108000"/>
+              </a:lnSpc>
+              <a:buNone/>
+            </a:pPr>
+            <a:r>
+              <a:rPr lang="en-US" sz="820" dirty="0">
+                <a:solidFill>
+                  <a:srgbClr val="7F9C7A"/>
+                </a:solidFill>
+                <a:latin typeface="Consolas" pitchFamily="34" charset="0"/>
+                <a:ea typeface="Consolas" pitchFamily="34" charset="-122"/>
+                <a:cs typeface="Consolas" pitchFamily="34" charset="-120"/>
+              </a:rPr>
+              <a:t># 수식 목록에서 변수명 → 인덱스 매핑</a:t>
+            </a:r>
+            <a:endParaRPr lang="en-US" sz="820" dirty="0"/>
+          </a:p>
+          <a:p>
+            <a:pPr indent="0" marL="0">
+              <a:lnSpc>
+                <a:spcPct val="108000"/>
+              </a:lnSpc>
+              <a:buNone/>
+            </a:pPr>
+            <a:r>
+              <a:rPr lang="en-US" sz="820" dirty="0">
+                <a:solidFill>
+                  <a:srgbClr val="D6DEEB"/>
+                </a:solidFill>
+                <a:latin typeface="Consolas" pitchFamily="34" charset="0"/>
+                <a:ea typeface="Consolas" pitchFamily="34" charset="-122"/>
+                <a:cs typeface="Consolas" pitchFamily="34" charset="-120"/>
+              </a:rPr>
+              <a:t>    </a:t>
+            </a:r>
+            <a:pPr indent="0" marL="0">
+              <a:lnSpc>
+                <a:spcPct val="108000"/>
+              </a:lnSpc>
+              <a:buNone/>
+            </a:pPr>
+            <a:r>
+              <a:rPr lang="en-US" sz="820" dirty="0">
+                <a:solidFill>
+                  <a:srgbClr val="C792EA"/>
+                </a:solidFill>
+                <a:latin typeface="Consolas" pitchFamily="34" charset="0"/>
+                <a:ea typeface="Consolas" pitchFamily="34" charset="-122"/>
+                <a:cs typeface="Consolas" pitchFamily="34" charset="-120"/>
+              </a:rPr>
+              <a:t>for</a:t>
+            </a:r>
+            <a:pPr indent="0" marL="0">
+              <a:lnSpc>
+                <a:spcPct val="108000"/>
+              </a:lnSpc>
+              <a:buNone/>
+            </a:pPr>
+            <a:r>
+              <a:rPr lang="en-US" sz="820" dirty="0">
+                <a:solidFill>
+                  <a:srgbClr val="D6DEEB"/>
+                </a:solidFill>
+                <a:latin typeface="Consolas" pitchFamily="34" charset="0"/>
+                <a:ea typeface="Consolas" pitchFamily="34" charset="-122"/>
+                <a:cs typeface="Consolas" pitchFamily="34" charset="-120"/>
+              </a:rPr>
+              <a:t> i </a:t>
+            </a:r>
+            <a:pPr indent="0" marL="0">
+              <a:lnSpc>
+                <a:spcPct val="108000"/>
+              </a:lnSpc>
+              <a:buNone/>
+            </a:pPr>
+            <a:r>
+              <a:rPr lang="en-US" sz="820" dirty="0">
+                <a:solidFill>
+                  <a:srgbClr val="C792EA"/>
+                </a:solidFill>
+                <a:latin typeface="Consolas" pitchFamily="34" charset="0"/>
+                <a:ea typeface="Consolas" pitchFamily="34" charset="-122"/>
+                <a:cs typeface="Consolas" pitchFamily="34" charset="-120"/>
+              </a:rPr>
+              <a:t>in</a:t>
+            </a:r>
+            <a:pPr indent="0" marL="0">
+              <a:lnSpc>
+                <a:spcPct val="108000"/>
+              </a:lnSpc>
+              <a:buNone/>
+            </a:pPr>
+            <a:r>
+              <a:rPr lang="en-US" sz="820" dirty="0">
+                <a:solidFill>
+                  <a:srgbClr val="D6DEEB"/>
+                </a:solidFill>
+                <a:latin typeface="Consolas" pitchFamily="34" charset="0"/>
+                <a:ea typeface="Consolas" pitchFamily="34" charset="-122"/>
+                <a:cs typeface="Consolas" pitchFamily="34" charset="-120"/>
+              </a:rPr>
+              <a:t> range(eqMgr.GetCount):</a:t>
+            </a:r>
+            <a:endParaRPr lang="en-US" sz="820" dirty="0"/>
+          </a:p>
+          <a:p>
+            <a:pPr indent="0" marL="0">
+              <a:lnSpc>
+                <a:spcPct val="108000"/>
+              </a:lnSpc>
+              <a:buNone/>
+            </a:pPr>
+            <a:r>
+              <a:rPr lang="en-US" sz="820" dirty="0">
+                <a:solidFill>
+                  <a:srgbClr val="D6DEEB"/>
+                </a:solidFill>
+                <a:latin typeface="Consolas" pitchFamily="34" charset="0"/>
+                <a:ea typeface="Consolas" pitchFamily="34" charset="-122"/>
+                <a:cs typeface="Consolas" pitchFamily="34" charset="-120"/>
+              </a:rPr>
+              <a:t>        lhs = eqMgr.Equation(i).split(</a:t>
+            </a:r>
+            <a:pPr indent="0" marL="0">
+              <a:lnSpc>
+                <a:spcPct val="108000"/>
+              </a:lnSpc>
+              <a:buNone/>
+            </a:pPr>
+            <a:r>
+              <a:rPr lang="en-US" sz="820" dirty="0">
+                <a:solidFill>
+                  <a:srgbClr val="E6A26B"/>
+                </a:solidFill>
+                <a:latin typeface="Consolas" pitchFamily="34" charset="0"/>
+                <a:ea typeface="Consolas" pitchFamily="34" charset="-122"/>
+                <a:cs typeface="Consolas" pitchFamily="34" charset="-120"/>
+              </a:rPr>
+              <a:t>"="</a:t>
+            </a:r>
+            <a:pPr indent="0" marL="0">
+              <a:lnSpc>
+                <a:spcPct val="108000"/>
+              </a:lnSpc>
+              <a:buNone/>
+            </a:pPr>
+            <a:r>
+              <a:rPr lang="en-US" sz="820" dirty="0">
+                <a:solidFill>
+                  <a:srgbClr val="D6DEEB"/>
+                </a:solidFill>
+                <a:latin typeface="Consolas" pitchFamily="34" charset="0"/>
+                <a:ea typeface="Consolas" pitchFamily="34" charset="-122"/>
+                <a:cs typeface="Consolas" pitchFamily="34" charset="-120"/>
+              </a:rPr>
+              <a:t>)[0].strip()</a:t>
+            </a:r>
+            <a:endParaRPr lang="en-US" sz="820" dirty="0"/>
+          </a:p>
+          <a:p>
+            <a:pPr indent="0" marL="0">
+              <a:lnSpc>
+                <a:spcPct val="108000"/>
+              </a:lnSpc>
+              <a:buNone/>
+            </a:pPr>
+            <a:r>
+              <a:rPr lang="en-US" sz="820" dirty="0">
+                <a:solidFill>
+                  <a:srgbClr val="D6DEEB"/>
+                </a:solidFill>
+                <a:latin typeface="Consolas" pitchFamily="34" charset="0"/>
+                <a:ea typeface="Consolas" pitchFamily="34" charset="-122"/>
+                <a:cs typeface="Consolas" pitchFamily="34" charset="-120"/>
+              </a:rPr>
+              <a:t>        name_to_i[lhs.strip(</a:t>
+            </a:r>
+            <a:pPr indent="0" marL="0">
+              <a:lnSpc>
+                <a:spcPct val="108000"/>
+              </a:lnSpc>
+              <a:buNone/>
+            </a:pPr>
+            <a:r>
+              <a:rPr lang="en-US" sz="820" dirty="0">
+                <a:solidFill>
+                  <a:srgbClr val="E6A26B"/>
+                </a:solidFill>
+                <a:latin typeface="Consolas" pitchFamily="34" charset="0"/>
+                <a:ea typeface="Consolas" pitchFamily="34" charset="-122"/>
+                <a:cs typeface="Consolas" pitchFamily="34" charset="-120"/>
+              </a:rPr>
+              <a:t>'"'</a:t>
+            </a:r>
+            <a:pPr indent="0" marL="0">
+              <a:lnSpc>
+                <a:spcPct val="108000"/>
+              </a:lnSpc>
+              <a:buNone/>
+            </a:pPr>
+            <a:r>
+              <a:rPr lang="en-US" sz="820" dirty="0">
+                <a:solidFill>
+                  <a:srgbClr val="D6DEEB"/>
+                </a:solidFill>
+                <a:latin typeface="Consolas" pitchFamily="34" charset="0"/>
+                <a:ea typeface="Consolas" pitchFamily="34" charset="-122"/>
+                <a:cs typeface="Consolas" pitchFamily="34" charset="-120"/>
+              </a:rPr>
+              <a:t>)] = i</a:t>
+            </a:r>
+            <a:endParaRPr lang="en-US" sz="820" dirty="0"/>
+          </a:p>
+          <a:p>
+            <a:pPr indent="0" marL="0">
+              <a:lnSpc>
+                <a:spcPct val="108000"/>
+              </a:lnSpc>
+              <a:buNone/>
+            </a:pPr>
+            <a:r>
+              <a:rPr lang="en-US" sz="820" dirty="0">
+                <a:solidFill>
+                  <a:srgbClr val="D6DEEB"/>
+                </a:solidFill>
+                <a:latin typeface="Consolas" pitchFamily="34" charset="0"/>
+                <a:ea typeface="Consolas" pitchFamily="34" charset="-122"/>
+                <a:cs typeface="Consolas" pitchFamily="34" charset="-120"/>
+              </a:rPr>
+              <a:t>    missing = [n </a:t>
+            </a:r>
+            <a:pPr indent="0" marL="0">
+              <a:lnSpc>
+                <a:spcPct val="108000"/>
+              </a:lnSpc>
+              <a:buNone/>
+            </a:pPr>
+            <a:r>
+              <a:rPr lang="en-US" sz="820" dirty="0">
+                <a:solidFill>
+                  <a:srgbClr val="C792EA"/>
+                </a:solidFill>
+                <a:latin typeface="Consolas" pitchFamily="34" charset="0"/>
+                <a:ea typeface="Consolas" pitchFamily="34" charset="-122"/>
+                <a:cs typeface="Consolas" pitchFamily="34" charset="-120"/>
+              </a:rPr>
+              <a:t>for</a:t>
+            </a:r>
+            <a:pPr indent="0" marL="0">
+              <a:lnSpc>
+                <a:spcPct val="108000"/>
+              </a:lnSpc>
+              <a:buNone/>
+            </a:pPr>
+            <a:r>
+              <a:rPr lang="en-US" sz="820" dirty="0">
+                <a:solidFill>
+                  <a:srgbClr val="D6DEEB"/>
+                </a:solidFill>
+                <a:latin typeface="Consolas" pitchFamily="34" charset="0"/>
+                <a:ea typeface="Consolas" pitchFamily="34" charset="-122"/>
+                <a:cs typeface="Consolas" pitchFamily="34" charset="-120"/>
+              </a:rPr>
+              <a:t> n </a:t>
+            </a:r>
+            <a:pPr indent="0" marL="0">
+              <a:lnSpc>
+                <a:spcPct val="108000"/>
+              </a:lnSpc>
+              <a:buNone/>
+            </a:pPr>
+            <a:r>
+              <a:rPr lang="en-US" sz="820" dirty="0">
+                <a:solidFill>
+                  <a:srgbClr val="C792EA"/>
+                </a:solidFill>
+                <a:latin typeface="Consolas" pitchFamily="34" charset="0"/>
+                <a:ea typeface="Consolas" pitchFamily="34" charset="-122"/>
+                <a:cs typeface="Consolas" pitchFamily="34" charset="-120"/>
+              </a:rPr>
+              <a:t>in</a:t>
+            </a:r>
+            <a:pPr indent="0" marL="0">
+              <a:lnSpc>
+                <a:spcPct val="108000"/>
+              </a:lnSpc>
+              <a:buNone/>
+            </a:pPr>
+            <a:r>
+              <a:rPr lang="en-US" sz="820" dirty="0">
+                <a:solidFill>
+                  <a:srgbClr val="D6DEEB"/>
+                </a:solidFill>
+                <a:latin typeface="Consolas" pitchFamily="34" charset="0"/>
+                <a:ea typeface="Consolas" pitchFamily="34" charset="-122"/>
+                <a:cs typeface="Consolas" pitchFamily="34" charset="-120"/>
+              </a:rPr>
+              <a:t> SW_PARAM_NAMES </a:t>
+            </a:r>
+            <a:pPr indent="0" marL="0">
+              <a:lnSpc>
+                <a:spcPct val="108000"/>
+              </a:lnSpc>
+              <a:buNone/>
+            </a:pPr>
+            <a:r>
+              <a:rPr lang="en-US" sz="820" dirty="0">
+                <a:solidFill>
+                  <a:srgbClr val="C792EA"/>
+                </a:solidFill>
+                <a:latin typeface="Consolas" pitchFamily="34" charset="0"/>
+                <a:ea typeface="Consolas" pitchFamily="34" charset="-122"/>
+                <a:cs typeface="Consolas" pitchFamily="34" charset="-120"/>
+              </a:rPr>
+              <a:t>if</a:t>
+            </a:r>
+            <a:pPr indent="0" marL="0">
+              <a:lnSpc>
+                <a:spcPct val="108000"/>
+              </a:lnSpc>
+              <a:buNone/>
+            </a:pPr>
+            <a:r>
+              <a:rPr lang="en-US" sz="820" dirty="0">
+                <a:solidFill>
+                  <a:srgbClr val="D6DEEB"/>
+                </a:solidFill>
+                <a:latin typeface="Consolas" pitchFamily="34" charset="0"/>
+                <a:ea typeface="Consolas" pitchFamily="34" charset="-122"/>
+                <a:cs typeface="Consolas" pitchFamily="34" charset="-120"/>
+              </a:rPr>
+              <a:t> n not </a:t>
+            </a:r>
+            <a:pPr indent="0" marL="0">
+              <a:lnSpc>
+                <a:spcPct val="108000"/>
+              </a:lnSpc>
+              <a:buNone/>
+            </a:pPr>
+            <a:r>
+              <a:rPr lang="en-US" sz="820" dirty="0">
+                <a:solidFill>
+                  <a:srgbClr val="C792EA"/>
+                </a:solidFill>
+                <a:latin typeface="Consolas" pitchFamily="34" charset="0"/>
+                <a:ea typeface="Consolas" pitchFamily="34" charset="-122"/>
+                <a:cs typeface="Consolas" pitchFamily="34" charset="-120"/>
+              </a:rPr>
+              <a:t>in</a:t>
+            </a:r>
+            <a:pPr indent="0" marL="0">
+              <a:lnSpc>
+                <a:spcPct val="108000"/>
+              </a:lnSpc>
+              <a:buNone/>
+            </a:pPr>
+            <a:r>
+              <a:rPr lang="en-US" sz="820" dirty="0">
+                <a:solidFill>
+                  <a:srgbClr val="D6DEEB"/>
+                </a:solidFill>
+                <a:latin typeface="Consolas" pitchFamily="34" charset="0"/>
+                <a:ea typeface="Consolas" pitchFamily="34" charset="-122"/>
+                <a:cs typeface="Consolas" pitchFamily="34" charset="-120"/>
+              </a:rPr>
+              <a:t> name_to_i]</a:t>
+            </a:r>
+            <a:endParaRPr lang="en-US" sz="820" dirty="0"/>
+          </a:p>
+          <a:p>
+            <a:pPr indent="0" marL="0">
+              <a:lnSpc>
+                <a:spcPct val="108000"/>
+              </a:lnSpc>
+              <a:buNone/>
+            </a:pPr>
+            <a:r>
+              <a:rPr lang="en-US" sz="820" dirty="0">
+                <a:solidFill>
+                  <a:srgbClr val="D6DEEB"/>
+                </a:solidFill>
+                <a:latin typeface="Consolas" pitchFamily="34" charset="0"/>
+                <a:ea typeface="Consolas" pitchFamily="34" charset="-122"/>
+                <a:cs typeface="Consolas" pitchFamily="34" charset="-120"/>
+              </a:rPr>
+              <a:t>    </a:t>
+            </a:r>
+            <a:pPr indent="0" marL="0">
+              <a:lnSpc>
+                <a:spcPct val="108000"/>
+              </a:lnSpc>
+              <a:buNone/>
+            </a:pPr>
+            <a:r>
+              <a:rPr lang="en-US" sz="820" dirty="0">
+                <a:solidFill>
+                  <a:srgbClr val="C792EA"/>
+                </a:solidFill>
+                <a:latin typeface="Consolas" pitchFamily="34" charset="0"/>
+                <a:ea typeface="Consolas" pitchFamily="34" charset="-122"/>
+                <a:cs typeface="Consolas" pitchFamily="34" charset="-120"/>
+              </a:rPr>
+              <a:t>if</a:t>
+            </a:r>
+            <a:pPr indent="0" marL="0">
+              <a:lnSpc>
+                <a:spcPct val="108000"/>
+              </a:lnSpc>
+              <a:buNone/>
+            </a:pPr>
+            <a:r>
+              <a:rPr lang="en-US" sz="820" dirty="0">
+                <a:solidFill>
+                  <a:srgbClr val="D6DEEB"/>
+                </a:solidFill>
+                <a:latin typeface="Consolas" pitchFamily="34" charset="0"/>
+                <a:ea typeface="Consolas" pitchFamily="34" charset="-122"/>
+                <a:cs typeface="Consolas" pitchFamily="34" charset="-120"/>
+              </a:rPr>
+              <a:t> missing: raise KeyError(</a:t>
+            </a:r>
+            <a:pPr indent="0" marL="0">
+              <a:lnSpc>
+                <a:spcPct val="108000"/>
+              </a:lnSpc>
+              <a:buNone/>
+            </a:pPr>
+            <a:r>
+              <a:rPr lang="en-US" sz="820" dirty="0">
+                <a:solidFill>
+                  <a:srgbClr val="E6A26B"/>
+                </a:solidFill>
+                <a:latin typeface="Consolas" pitchFamily="34" charset="0"/>
+                <a:ea typeface="Consolas" pitchFamily="34" charset="-122"/>
+                <a:cs typeface="Consolas" pitchFamily="34" charset="-120"/>
+              </a:rPr>
+              <a:t>f"SolidWorks에 없는 글로벌 변수: {missing}"</a:t>
+            </a:r>
+            <a:pPr indent="0" marL="0">
+              <a:lnSpc>
+                <a:spcPct val="108000"/>
+              </a:lnSpc>
+              <a:buNone/>
+            </a:pPr>
+            <a:r>
+              <a:rPr lang="en-US" sz="820" dirty="0">
+                <a:solidFill>
+                  <a:srgbClr val="D6DEEB"/>
+                </a:solidFill>
+                <a:latin typeface="Consolas" pitchFamily="34" charset="0"/>
+                <a:ea typeface="Consolas" pitchFamily="34" charset="-122"/>
+                <a:cs typeface="Consolas" pitchFamily="34" charset="-120"/>
+              </a:rPr>
+              <a:t>)</a:t>
+            </a:r>
+            <a:endParaRPr lang="en-US" sz="820" dirty="0"/>
+          </a:p>
+          <a:p>
+            <a:pPr indent="0" marL="0">
+              <a:lnSpc>
+                <a:spcPct val="108000"/>
+              </a:lnSpc>
+              <a:buNone/>
+            </a:pPr>
+            <a:r>
+              <a:rPr lang="en-US" sz="820" dirty="0">
+                <a:solidFill>
+                  <a:srgbClr val="D6DEEB"/>
+                </a:solidFill>
+                <a:latin typeface="Consolas" pitchFamily="34" charset="0"/>
+                <a:ea typeface="Consolas" pitchFamily="34" charset="-122"/>
+                <a:cs typeface="Consolas" pitchFamily="34" charset="-120"/>
+              </a:rPr>
+              <a:t> </a:t>
+            </a:r>
+            <a:endParaRPr lang="en-US" sz="820" dirty="0"/>
+          </a:p>
+          <a:p>
+            <a:pPr indent="0" marL="0">
+              <a:lnSpc>
+                <a:spcPct val="108000"/>
+              </a:lnSpc>
+              <a:buNone/>
+            </a:pPr>
+            <a:r>
+              <a:rPr lang="en-US" sz="820" dirty="0">
+                <a:solidFill>
+                  <a:srgbClr val="D6DEEB"/>
+                </a:solidFill>
+                <a:latin typeface="Consolas" pitchFamily="34" charset="0"/>
+                <a:ea typeface="Consolas" pitchFamily="34" charset="-122"/>
+                <a:cs typeface="Consolas" pitchFamily="34" charset="-120"/>
+              </a:rPr>
+              <a:t>    </a:t>
+            </a:r>
+            <a:pPr indent="0" marL="0">
+              <a:lnSpc>
+                <a:spcPct val="108000"/>
+              </a:lnSpc>
+              <a:buNone/>
+            </a:pPr>
+            <a:r>
+              <a:rPr lang="en-US" sz="820" dirty="0">
+                <a:solidFill>
+                  <a:srgbClr val="C792EA"/>
+                </a:solidFill>
+                <a:latin typeface="Consolas" pitchFamily="34" charset="0"/>
+                <a:ea typeface="Consolas" pitchFamily="34" charset="-122"/>
+                <a:cs typeface="Consolas" pitchFamily="34" charset="-120"/>
+              </a:rPr>
+              <a:t>for</a:t>
+            </a:r>
+            <a:pPr indent="0" marL="0">
+              <a:lnSpc>
+                <a:spcPct val="108000"/>
+              </a:lnSpc>
+              <a:buNone/>
+            </a:pPr>
+            <a:r>
+              <a:rPr lang="en-US" sz="820" dirty="0">
+                <a:solidFill>
+                  <a:srgbClr val="D6DEEB"/>
+                </a:solidFill>
+                <a:latin typeface="Consolas" pitchFamily="34" charset="0"/>
+                <a:ea typeface="Consolas" pitchFamily="34" charset="-122"/>
+                <a:cs typeface="Consolas" pitchFamily="34" charset="-120"/>
+              </a:rPr>
+              <a:t> name </a:t>
+            </a:r>
+            <a:pPr indent="0" marL="0">
+              <a:lnSpc>
+                <a:spcPct val="108000"/>
+              </a:lnSpc>
+              <a:buNone/>
+            </a:pPr>
+            <a:r>
+              <a:rPr lang="en-US" sz="820" dirty="0">
+                <a:solidFill>
+                  <a:srgbClr val="C792EA"/>
+                </a:solidFill>
+                <a:latin typeface="Consolas" pitchFamily="34" charset="0"/>
+                <a:ea typeface="Consolas" pitchFamily="34" charset="-122"/>
+                <a:cs typeface="Consolas" pitchFamily="34" charset="-120"/>
+              </a:rPr>
+              <a:t>in</a:t>
+            </a:r>
+            <a:pPr indent="0" marL="0">
+              <a:lnSpc>
+                <a:spcPct val="108000"/>
+              </a:lnSpc>
+              <a:buNone/>
+            </a:pPr>
+            <a:r>
+              <a:rPr lang="en-US" sz="820" dirty="0">
+                <a:solidFill>
+                  <a:srgbClr val="D6DEEB"/>
+                </a:solidFill>
+                <a:latin typeface="Consolas" pitchFamily="34" charset="0"/>
+                <a:ea typeface="Consolas" pitchFamily="34" charset="-122"/>
+                <a:cs typeface="Consolas" pitchFamily="34" charset="-120"/>
+              </a:rPr>
+              <a:t> SW_PARAM_NAMES:                           </a:t>
+            </a:r>
+            <a:pPr indent="0" marL="0">
+              <a:lnSpc>
+                <a:spcPct val="108000"/>
+              </a:lnSpc>
+              <a:buNone/>
+            </a:pPr>
+            <a:r>
+              <a:rPr lang="en-US" sz="820" dirty="0">
+                <a:solidFill>
+                  <a:srgbClr val="7F9C7A"/>
+                </a:solidFill>
+                <a:latin typeface="Consolas" pitchFamily="34" charset="0"/>
+                <a:ea typeface="Consolas" pitchFamily="34" charset="-122"/>
+                <a:cs typeface="Consolas" pitchFamily="34" charset="-120"/>
+              </a:rPr>
+              <a:t># 전역변수 값 치환 (COM 속성 쓰기)</a:t>
+            </a:r>
+            <a:endParaRPr lang="en-US" sz="820" dirty="0"/>
+          </a:p>
+          <a:p>
+            <a:pPr indent="0" marL="0">
+              <a:lnSpc>
+                <a:spcPct val="108000"/>
+              </a:lnSpc>
+              <a:buNone/>
+            </a:pPr>
+            <a:r>
+              <a:rPr lang="en-US" sz="820" dirty="0">
+                <a:solidFill>
+                  <a:srgbClr val="D6DEEB"/>
+                </a:solidFill>
+                <a:latin typeface="Consolas" pitchFamily="34" charset="0"/>
+                <a:ea typeface="Consolas" pitchFamily="34" charset="-122"/>
+                <a:cs typeface="Consolas" pitchFamily="34" charset="-120"/>
+              </a:rPr>
+              <a:t>        text = str(int(params[name])) </a:t>
+            </a:r>
+            <a:pPr indent="0" marL="0">
+              <a:lnSpc>
+                <a:spcPct val="108000"/>
+              </a:lnSpc>
+              <a:buNone/>
+            </a:pPr>
+            <a:r>
+              <a:rPr lang="en-US" sz="820" dirty="0">
+                <a:solidFill>
+                  <a:srgbClr val="C792EA"/>
+                </a:solidFill>
+                <a:latin typeface="Consolas" pitchFamily="34" charset="0"/>
+                <a:ea typeface="Consolas" pitchFamily="34" charset="-122"/>
+                <a:cs typeface="Consolas" pitchFamily="34" charset="-120"/>
+              </a:rPr>
+              <a:t>if</a:t>
+            </a:r>
+            <a:pPr indent="0" marL="0">
+              <a:lnSpc>
+                <a:spcPct val="108000"/>
+              </a:lnSpc>
+              <a:buNone/>
+            </a:pPr>
+            <a:r>
+              <a:rPr lang="en-US" sz="820" dirty="0">
+                <a:solidFill>
+                  <a:srgbClr val="D6DEEB"/>
+                </a:solidFill>
+                <a:latin typeface="Consolas" pitchFamily="34" charset="0"/>
+                <a:ea typeface="Consolas" pitchFamily="34" charset="-122"/>
+                <a:cs typeface="Consolas" pitchFamily="34" charset="-120"/>
+              </a:rPr>
+              <a:t> name </a:t>
+            </a:r>
+            <a:pPr indent="0" marL="0">
+              <a:lnSpc>
+                <a:spcPct val="108000"/>
+              </a:lnSpc>
+              <a:buNone/>
+            </a:pPr>
+            <a:r>
+              <a:rPr lang="en-US" sz="820" dirty="0">
+                <a:solidFill>
+                  <a:srgbClr val="C792EA"/>
+                </a:solidFill>
+                <a:latin typeface="Consolas" pitchFamily="34" charset="0"/>
+                <a:ea typeface="Consolas" pitchFamily="34" charset="-122"/>
+                <a:cs typeface="Consolas" pitchFamily="34" charset="-120"/>
+              </a:rPr>
+              <a:t>in</a:t>
+            </a:r>
+            <a:pPr indent="0" marL="0">
+              <a:lnSpc>
+                <a:spcPct val="108000"/>
+              </a:lnSpc>
+              <a:buNone/>
+            </a:pPr>
+            <a:r>
+              <a:rPr lang="en-US" sz="820" dirty="0">
+                <a:solidFill>
+                  <a:srgbClr val="D6DEEB"/>
+                </a:solidFill>
+                <a:latin typeface="Consolas" pitchFamily="34" charset="0"/>
+                <a:ea typeface="Consolas" pitchFamily="34" charset="-122"/>
+                <a:cs typeface="Consolas" pitchFamily="34" charset="-120"/>
+              </a:rPr>
+              <a:t> INT_PARAMS else str(params[name])</a:t>
+            </a:r>
+            <a:endParaRPr lang="en-US" sz="820" dirty="0"/>
+          </a:p>
+          <a:p>
+            <a:pPr indent="0" marL="0">
+              <a:lnSpc>
+                <a:spcPct val="108000"/>
+              </a:lnSpc>
+              <a:buNone/>
+            </a:pPr>
+            <a:r>
+              <a:rPr lang="en-US" sz="820" dirty="0">
+                <a:solidFill>
+                  <a:srgbClr val="D6DEEB"/>
+                </a:solidFill>
+                <a:latin typeface="Consolas" pitchFamily="34" charset="0"/>
+                <a:ea typeface="Consolas" pitchFamily="34" charset="-122"/>
+                <a:cs typeface="Consolas" pitchFamily="34" charset="-120"/>
+              </a:rPr>
+              <a:t>        eqMgr._oleobj_.Invoke(dispid, 0, pythoncom.DISPATCH_PROPERTYPUT,</a:t>
+            </a:r>
+            <a:endParaRPr lang="en-US" sz="820" dirty="0"/>
+          </a:p>
+          <a:p>
+            <a:pPr indent="0" marL="0">
+              <a:lnSpc>
+                <a:spcPct val="108000"/>
+              </a:lnSpc>
+              <a:buNone/>
+            </a:pPr>
+            <a:r>
+              <a:rPr lang="en-US" sz="820" dirty="0">
+                <a:solidFill>
+                  <a:srgbClr val="D6DEEB"/>
+                </a:solidFill>
+                <a:latin typeface="Consolas" pitchFamily="34" charset="0"/>
+                <a:ea typeface="Consolas" pitchFamily="34" charset="-122"/>
+                <a:cs typeface="Consolas" pitchFamily="34" charset="-120"/>
+              </a:rPr>
+              <a:t>                              False, name_to_i[name], </a:t>
+            </a:r>
+            <a:pPr indent="0" marL="0">
+              <a:lnSpc>
+                <a:spcPct val="108000"/>
+              </a:lnSpc>
+              <a:buNone/>
+            </a:pPr>
+            <a:r>
+              <a:rPr lang="en-US" sz="820" dirty="0">
+                <a:solidFill>
+                  <a:srgbClr val="E6A26B"/>
+                </a:solidFill>
+                <a:latin typeface="Consolas" pitchFamily="34" charset="0"/>
+                <a:ea typeface="Consolas" pitchFamily="34" charset="-122"/>
+                <a:cs typeface="Consolas" pitchFamily="34" charset="-120"/>
+              </a:rPr>
+              <a:t>'"%s" = %s'</a:t>
+            </a:r>
+            <a:pPr indent="0" marL="0">
+              <a:lnSpc>
+                <a:spcPct val="108000"/>
+              </a:lnSpc>
+              <a:buNone/>
+            </a:pPr>
+            <a:r>
+              <a:rPr lang="en-US" sz="820" dirty="0">
+                <a:solidFill>
+                  <a:srgbClr val="D6DEEB"/>
+                </a:solidFill>
+                <a:latin typeface="Consolas" pitchFamily="34" charset="0"/>
+                <a:ea typeface="Consolas" pitchFamily="34" charset="-122"/>
+                <a:cs typeface="Consolas" pitchFamily="34" charset="-120"/>
+              </a:rPr>
+              <a:t> % (name, text))</a:t>
+            </a:r>
+            <a:endParaRPr lang="en-US" sz="820" dirty="0"/>
+          </a:p>
+          <a:p>
+            <a:pPr indent="0" marL="0">
+              <a:lnSpc>
+                <a:spcPct val="108000"/>
+              </a:lnSpc>
+              <a:buNone/>
+            </a:pPr>
+            <a:r>
+              <a:rPr lang="en-US" sz="820" dirty="0">
+                <a:solidFill>
+                  <a:srgbClr val="D6DEEB"/>
+                </a:solidFill>
+                <a:latin typeface="Consolas" pitchFamily="34" charset="0"/>
+                <a:ea typeface="Consolas" pitchFamily="34" charset="-122"/>
+                <a:cs typeface="Consolas" pitchFamily="34" charset="-120"/>
+              </a:rPr>
+              <a:t> </a:t>
+            </a:r>
+            <a:endParaRPr lang="en-US" sz="820" dirty="0"/>
+          </a:p>
+          <a:p>
+            <a:pPr indent="0" marL="0">
+              <a:lnSpc>
+                <a:spcPct val="108000"/>
+              </a:lnSpc>
+              <a:buNone/>
+            </a:pPr>
+            <a:r>
+              <a:rPr lang="en-US" sz="820" dirty="0">
+                <a:solidFill>
+                  <a:srgbClr val="D6DEEB"/>
+                </a:solidFill>
+                <a:latin typeface="Consolas" pitchFamily="34" charset="0"/>
+                <a:ea typeface="Consolas" pitchFamily="34" charset="-122"/>
+                <a:cs typeface="Consolas" pitchFamily="34" charset="-120"/>
+              </a:rPr>
+              <a:t>    part.EditRebuild3;  part.Save3(1, errors, warnings)   </a:t>
+            </a:r>
+            <a:pPr indent="0" marL="0">
+              <a:lnSpc>
+                <a:spcPct val="108000"/>
+              </a:lnSpc>
+              <a:buNone/>
+            </a:pPr>
+            <a:r>
+              <a:rPr lang="en-US" sz="820" dirty="0">
+                <a:solidFill>
+                  <a:srgbClr val="7F9C7A"/>
+                </a:solidFill>
+                <a:latin typeface="Consolas" pitchFamily="34" charset="0"/>
+                <a:ea typeface="Consolas" pitchFamily="34" charset="-122"/>
+                <a:cs typeface="Consolas" pitchFamily="34" charset="-120"/>
+              </a:rPr>
+              <a:t># 파트 리빌드 · 저장</a:t>
+            </a:r>
+            <a:endParaRPr lang="en-US" sz="820" dirty="0"/>
+          </a:p>
+          <a:p>
+            <a:pPr indent="0" marL="0">
+              <a:lnSpc>
+                <a:spcPct val="108000"/>
+              </a:lnSpc>
+              <a:buNone/>
+            </a:pPr>
+            <a:r>
+              <a:rPr lang="en-US" sz="820" dirty="0">
+                <a:solidFill>
+                  <a:srgbClr val="D6DEEB"/>
+                </a:solidFill>
+                <a:latin typeface="Consolas" pitchFamily="34" charset="0"/>
+                <a:ea typeface="Consolas" pitchFamily="34" charset="-122"/>
+                <a:cs typeface="Consolas" pitchFamily="34" charset="-120"/>
+              </a:rPr>
+              <a:t>    asm = app.ActivateDoc3(ASM_PATH, False, 0, errors)</a:t>
+            </a:r>
+            <a:endParaRPr lang="en-US" sz="820" dirty="0"/>
+          </a:p>
+          <a:p>
+            <a:pPr indent="0" marL="0">
+              <a:lnSpc>
+                <a:spcPct val="108000"/>
+              </a:lnSpc>
+              <a:buNone/>
+            </a:pPr>
+            <a:r>
+              <a:rPr lang="en-US" sz="820" dirty="0">
+                <a:solidFill>
+                  <a:srgbClr val="D6DEEB"/>
+                </a:solidFill>
+                <a:latin typeface="Consolas" pitchFamily="34" charset="0"/>
+                <a:ea typeface="Consolas" pitchFamily="34" charset="-122"/>
+                <a:cs typeface="Consolas" pitchFamily="34" charset="-120"/>
+              </a:rPr>
+              <a:t>    asm.ForceRebuild3(False);  asm.Save3(1, errors, warnings)</a:t>
+            </a:r>
+            <a:endParaRPr lang="en-US" sz="820" dirty="0"/>
+          </a:p>
+          <a:p>
+            <a:pPr indent="0" marL="0">
+              <a:lnSpc>
+                <a:spcPct val="108000"/>
+              </a:lnSpc>
+              <a:buNone/>
+            </a:pPr>
+            <a:r>
+              <a:rPr lang="en-US" sz="820" dirty="0">
+                <a:solidFill>
+                  <a:srgbClr val="D6DEEB"/>
+                </a:solidFill>
+                <a:latin typeface="Consolas" pitchFamily="34" charset="0"/>
+                <a:ea typeface="Consolas" pitchFamily="34" charset="-122"/>
+                <a:cs typeface="Consolas" pitchFamily="34" charset="-120"/>
+              </a:rPr>
+              <a:t> </a:t>
+            </a:r>
+            <a:endParaRPr lang="en-US" sz="820" dirty="0"/>
+          </a:p>
+          <a:p>
+            <a:pPr indent="0" marL="0">
+              <a:lnSpc>
+                <a:spcPct val="108000"/>
+              </a:lnSpc>
+              <a:buNone/>
+            </a:pPr>
+            <a:r>
+              <a:rPr lang="en-US" sz="820" dirty="0">
+                <a:solidFill>
+                  <a:srgbClr val="D6DEEB"/>
+                </a:solidFill>
+                <a:latin typeface="Consolas" pitchFamily="34" charset="0"/>
+                <a:ea typeface="Consolas" pitchFamily="34" charset="-122"/>
+                <a:cs typeface="Consolas" pitchFamily="34" charset="-120"/>
+              </a:rPr>
+              <a:t>    mp = asm.GetMassProperties                            </a:t>
+            </a:r>
+            <a:pPr indent="0" marL="0">
+              <a:lnSpc>
+                <a:spcPct val="108000"/>
+              </a:lnSpc>
+              <a:buNone/>
+            </a:pPr>
+            <a:r>
+              <a:rPr lang="en-US" sz="820" dirty="0">
+                <a:solidFill>
+                  <a:srgbClr val="7F9C7A"/>
+                </a:solidFill>
+                <a:latin typeface="Consolas" pitchFamily="34" charset="0"/>
+                <a:ea typeface="Consolas" pitchFamily="34" charset="-122"/>
+                <a:cs typeface="Consolas" pitchFamily="34" charset="-120"/>
+              </a:rPr>
+              <a:t># [3] 부피(m³) · [5] 질량(kg)</a:t>
+            </a:r>
+            <a:endParaRPr lang="en-US" sz="820" dirty="0"/>
+          </a:p>
+          <a:p>
+            <a:pPr indent="0" marL="0">
+              <a:lnSpc>
+                <a:spcPct val="108000"/>
+              </a:lnSpc>
+              <a:buNone/>
+            </a:pPr>
+            <a:r>
+              <a:rPr lang="en-US" sz="820" dirty="0">
+                <a:solidFill>
+                  <a:srgbClr val="D6DEEB"/>
+                </a:solidFill>
+                <a:latin typeface="Consolas" pitchFamily="34" charset="0"/>
+                <a:ea typeface="Consolas" pitchFamily="34" charset="-122"/>
+                <a:cs typeface="Consolas" pitchFamily="34" charset="-120"/>
+              </a:rPr>
+              <a:t>    </a:t>
+            </a:r>
+            <a:pPr indent="0" marL="0">
+              <a:lnSpc>
+                <a:spcPct val="108000"/>
+              </a:lnSpc>
+              <a:buNone/>
+            </a:pPr>
+            <a:r>
+              <a:rPr lang="en-US" sz="820" dirty="0">
+                <a:solidFill>
+                  <a:srgbClr val="C792EA"/>
+                </a:solidFill>
+                <a:latin typeface="Consolas" pitchFamily="34" charset="0"/>
+                <a:ea typeface="Consolas" pitchFamily="34" charset="-122"/>
+                <a:cs typeface="Consolas" pitchFamily="34" charset="-120"/>
+              </a:rPr>
+              <a:t>return</a:t>
+            </a:r>
+            <a:pPr indent="0" marL="0">
+              <a:lnSpc>
+                <a:spcPct val="108000"/>
+              </a:lnSpc>
+              <a:buNone/>
+            </a:pPr>
+            <a:r>
+              <a:rPr lang="en-US" sz="820" dirty="0">
+                <a:solidFill>
+                  <a:srgbClr val="D6DEEB"/>
+                </a:solidFill>
+                <a:latin typeface="Consolas" pitchFamily="34" charset="0"/>
+                <a:ea typeface="Consolas" pitchFamily="34" charset="-122"/>
+                <a:cs typeface="Consolas" pitchFamily="34" charset="-120"/>
+              </a:rPr>
+              <a:t> float(mp[5]), float(mp[3]) * 1e9</a:t>
+            </a:r>
+            <a:endParaRPr lang="en-US" sz="820" dirty="0"/>
+          </a:p>
+          <a:p>
+            <a:pPr indent="0" marL="0">
+              <a:lnSpc>
+                <a:spcPct val="108000"/>
+              </a:lnSpc>
+              <a:buNone/>
+            </a:pPr>
+            <a:r>
+              <a:rPr lang="en-US" sz="820" dirty="0">
+                <a:solidFill>
+                  <a:srgbClr val="C792EA"/>
+                </a:solidFill>
+                <a:latin typeface="Consolas" pitchFamily="34" charset="0"/>
+                <a:ea typeface="Consolas" pitchFamily="34" charset="-122"/>
+                <a:cs typeface="Consolas" pitchFamily="34" charset="-120"/>
+              </a:rPr>
+              <a:t>def</a:t>
+            </a:r>
+            <a:pPr indent="0" marL="0">
+              <a:lnSpc>
+                <a:spcPct val="108000"/>
+              </a:lnSpc>
+              <a:buNone/>
+            </a:pPr>
+            <a:r>
+              <a:rPr lang="en-US" sz="820" dirty="0">
+                <a:solidFill>
+                  <a:srgbClr val="D6DEEB"/>
+                </a:solidFill>
+                <a:latin typeface="Consolas" pitchFamily="34" charset="0"/>
+                <a:ea typeface="Consolas" pitchFamily="34" charset="-122"/>
+                <a:cs typeface="Consolas" pitchFamily="34" charset="-120"/>
+              </a:rPr>
+              <a:t> export_step(app, errors, idx):</a:t>
+            </a:r>
+            <a:endParaRPr lang="en-US" sz="820" dirty="0"/>
+          </a:p>
+          <a:p>
+            <a:pPr indent="0" marL="0">
+              <a:lnSpc>
+                <a:spcPct val="108000"/>
+              </a:lnSpc>
+              <a:buNone/>
+            </a:pPr>
+            <a:r>
+              <a:rPr lang="en-US" sz="820" dirty="0">
+                <a:solidFill>
+                  <a:srgbClr val="D6DEEB"/>
+                </a:solidFill>
+                <a:latin typeface="Consolas" pitchFamily="34" charset="0"/>
+                <a:ea typeface="Consolas" pitchFamily="34" charset="-122"/>
+                <a:cs typeface="Consolas" pitchFamily="34" charset="-120"/>
+              </a:rPr>
+              <a:t>    asm = app.ActivateDoc3(ASM_PATH, False, 0, errors)</a:t>
+            </a:r>
+            <a:endParaRPr lang="en-US" sz="820" dirty="0"/>
+          </a:p>
+          <a:p>
+            <a:pPr indent="0" marL="0">
+              <a:lnSpc>
+                <a:spcPct val="108000"/>
+              </a:lnSpc>
+              <a:buNone/>
+            </a:pPr>
+            <a:r>
+              <a:rPr lang="en-US" sz="820" dirty="0">
+                <a:solidFill>
+                  <a:srgbClr val="D6DEEB"/>
+                </a:solidFill>
+                <a:latin typeface="Consolas" pitchFamily="34" charset="0"/>
+                <a:ea typeface="Consolas" pitchFamily="34" charset="-122"/>
+                <a:cs typeface="Consolas" pitchFamily="34" charset="-120"/>
+              </a:rPr>
+              <a:t>    asm.SaveAs3(os.path.join(STEP_DIR, </a:t>
+            </a:r>
+            <a:pPr indent="0" marL="0">
+              <a:lnSpc>
+                <a:spcPct val="108000"/>
+              </a:lnSpc>
+              <a:buNone/>
+            </a:pPr>
+            <a:r>
+              <a:rPr lang="en-US" sz="820" dirty="0">
+                <a:solidFill>
+                  <a:srgbClr val="E6A26B"/>
+                </a:solidFill>
+                <a:latin typeface="Consolas" pitchFamily="34" charset="0"/>
+                <a:ea typeface="Consolas" pitchFamily="34" charset="-122"/>
+                <a:cs typeface="Consolas" pitchFamily="34" charset="-120"/>
+              </a:rPr>
+              <a:t>f"flowpath_{idx:03d}.STEP"</a:t>
+            </a:r>
+            <a:pPr indent="0" marL="0">
+              <a:lnSpc>
+                <a:spcPct val="108000"/>
+              </a:lnSpc>
+              <a:buNone/>
+            </a:pPr>
+            <a:r>
+              <a:rPr lang="en-US" sz="820" dirty="0">
+                <a:solidFill>
+                  <a:srgbClr val="D6DEEB"/>
+                </a:solidFill>
+                <a:latin typeface="Consolas" pitchFamily="34" charset="0"/>
+                <a:ea typeface="Consolas" pitchFamily="34" charset="-122"/>
+                <a:cs typeface="Consolas" pitchFamily="34" charset="-120"/>
+              </a:rPr>
+              <a:t>), 0, 0)</a:t>
+            </a:r>
+            <a:endParaRPr lang="en-US" sz="820" dirty="0"/>
+          </a:p>
+        </p:txBody>
+      </p:sp>
+      <p:sp>
+        <p:nvSpPr>
+          <p:cNvPr id="13" name="Text 11"/>
+          <p:cNvSpPr txBox="1"/>
+          <p:nvPr/>
+        </p:nvSpPr>
+        <p:spPr>
+          <a:xfrm>
+            <a:off x="502920" y="6455664"/>
+            <a:ext cx="11183112" cy="219456"/>
+          </a:xfrm>
+          <a:prstGeom prst="rect">
+            <a:avLst/>
+          </a:prstGeom>
+          <a:noFill/>
+          <a:ln/>
+        </p:spPr>
+        <p:txBody>
+          <a:bodyPr wrap="square" lIns="0" tIns="0" rIns="0" bIns="0" rtlCol="0" anchor="ctr"/>
+          <a:lstStyle/>
+          <a:p>
+            <a:pPr indent="0" marL="0">
+              <a:buNone/>
+            </a:pPr>
+            <a:r>
+              <a:rPr lang="en-US" sz="850" i="1" dirty="0">
+                <a:solidFill>
+                  <a:srgbClr val="6B7A8F"/>
+                </a:solidFill>
+                <a:latin typeface="Malgun Gothic" pitchFamily="34" charset="0"/>
+                <a:ea typeface="Malgun Gothic" pitchFamily="34" charset="-122"/>
+                <a:cs typeface="Malgun Gothic" pitchFamily="34" charset="-120"/>
+              </a:rPr>
+              <a:t>※ 주요 흐름 위주로 발췌 · 일부 로그 출력 및 예외 처리 생략</a:t>
+            </a:r>
+            <a:endParaRPr lang="en-US" sz="850" dirty="0"/>
+          </a:p>
+        </p:txBody>
+      </p:sp>
+    </p:spTree>
+  </p:cSld>
+  <p:clrMapOvr>
+    <a:masterClrMapping/>
+  </p:clrMapOvr>
+</p:sld>
+</file>
+
+<file path=ppt/slides/slide13.xml><?xml version="1.0" encoding="utf-8"?>
+<p:sld xmlns:a="http://schemas.openxmlformats.org/drawingml/2006/main" xmlns:r="http://schemas.openxmlformats.org/officeDocument/2006/relationships" xmlns:p="http://schemas.openxmlformats.org/presentationml/2006/main">
+  <p:cSld name="Slide 13">
+    <p:bg>
+      <p:bgPr>
+        <a:solidFill>
+          <a:srgbClr val="F3F5F8"/>
+        </a:solidFill>
+      </p:bgPr>
+    </p:bg>
+    <p:spTree>
+      <p:nvGrpSpPr>
+        <p:cNvPr id="1" name=""/>
+        <p:cNvGrpSpPr/>
+        <p:nvPr/>
+      </p:nvGrpSpPr>
+      <p:grpSpPr>
+        <a:xfrm>
+          <a:off x="0" y="0"/>
+          <a:ext cx="0" cy="0"/>
+          <a:chOff x="0" y="0"/>
+          <a:chExt cx="0" cy="0"/>
+        </a:xfrm>
+      </p:grpSpPr>
+      <p:sp>
+        <p:nvSpPr>
+          <p:cNvPr id="2" name="Shape 0"/>
+          <p:cNvSpPr/>
+          <p:nvPr/>
+        </p:nvSpPr>
+        <p:spPr>
+          <a:xfrm>
+            <a:off x="502920" y="384048"/>
+            <a:ext cx="475488" cy="475488"/>
+          </a:xfrm>
+          <a:prstGeom prst="rect">
+            <a:avLst/>
+          </a:prstGeom>
+          <a:solidFill>
+            <a:srgbClr val="16305B"/>
+          </a:solidFill>
+          <a:ln w="12700">
+            <a:solidFill>
+              <a:srgbClr val="16305B"/>
+            </a:solidFill>
+            <a:prstDash val="solid"/>
+          </a:ln>
+        </p:spPr>
+      </p:sp>
+      <p:sp>
+        <p:nvSpPr>
+          <p:cNvPr id="3" name="Text 1"/>
+          <p:cNvSpPr txBox="1"/>
+          <p:nvPr/>
+        </p:nvSpPr>
+        <p:spPr>
+          <a:xfrm>
+            <a:off x="502920" y="384048"/>
+            <a:ext cx="475488" cy="475488"/>
+          </a:xfrm>
+          <a:prstGeom prst="rect">
+            <a:avLst/>
+          </a:prstGeom>
+          <a:noFill/>
+          <a:ln/>
+        </p:spPr>
+        <p:txBody>
+          <a:bodyPr wrap="square" lIns="0" tIns="0" rIns="0" bIns="0" rtlCol="0" anchor="ctr"/>
+          <a:lstStyle/>
+          <a:p>
+            <a:pPr algn="ctr" indent="0" marL="0">
+              <a:buNone/>
+            </a:pPr>
+            <a:r>
+              <a:rPr lang="en-US" sz="1600" b="1" dirty="0">
+                <a:solidFill>
+                  <a:srgbClr val="FFFFFF"/>
+                </a:solidFill>
+                <a:latin typeface="Malgun Gothic" pitchFamily="34" charset="0"/>
+                <a:ea typeface="Malgun Gothic" pitchFamily="34" charset="-122"/>
+                <a:cs typeface="Malgun Gothic" pitchFamily="34" charset="-120"/>
+              </a:rPr>
+              <a:t>A-2</a:t>
+            </a:r>
+            <a:endParaRPr lang="en-US" sz="1600" dirty="0"/>
+          </a:p>
+        </p:txBody>
+      </p:sp>
+      <p:sp>
+        <p:nvSpPr>
+          <p:cNvPr id="4" name="Text 2"/>
+          <p:cNvSpPr txBox="1"/>
+          <p:nvPr/>
+        </p:nvSpPr>
+        <p:spPr>
+          <a:xfrm>
+            <a:off x="1124712" y="365760"/>
+            <a:ext cx="7315200" cy="237744"/>
+          </a:xfrm>
+          <a:prstGeom prst="rect">
+            <a:avLst/>
+          </a:prstGeom>
+          <a:noFill/>
+          <a:ln/>
+        </p:spPr>
+        <p:txBody>
+          <a:bodyPr wrap="square" lIns="0" tIns="0" rIns="0" bIns="0" rtlCol="0" anchor="ctr"/>
+          <a:lstStyle/>
+          <a:p>
+            <a:pPr indent="0" marL="0">
+              <a:buNone/>
+            </a:pPr>
+            <a:r>
+              <a:rPr lang="en-US" sz="1050" b="1" spc="100" kern="0" dirty="0">
+                <a:solidFill>
+                  <a:srgbClr val="00A3C4"/>
+                </a:solidFill>
+                <a:latin typeface="Malgun Gothic" pitchFamily="34" charset="0"/>
+                <a:ea typeface="Malgun Gothic" pitchFamily="34" charset="-122"/>
+                <a:cs typeface="Malgun Gothic" pitchFamily="34" charset="-120"/>
+              </a:rPr>
+              <a:t>부록</a:t>
+            </a:r>
+            <a:endParaRPr lang="en-US" sz="1050" dirty="0"/>
+          </a:p>
+        </p:txBody>
+      </p:sp>
+      <p:sp>
+        <p:nvSpPr>
+          <p:cNvPr id="5" name="Text 3"/>
+          <p:cNvSpPr txBox="1"/>
+          <p:nvPr/>
+        </p:nvSpPr>
+        <p:spPr>
+          <a:xfrm>
+            <a:off x="1124712" y="548640"/>
+            <a:ext cx="10607040" cy="384048"/>
+          </a:xfrm>
+          <a:prstGeom prst="rect">
+            <a:avLst/>
+          </a:prstGeom>
+          <a:noFill/>
+          <a:ln/>
+        </p:spPr>
+        <p:txBody>
+          <a:bodyPr wrap="square" lIns="0" tIns="0" rIns="0" bIns="0" rtlCol="0" anchor="ctr"/>
+          <a:lstStyle/>
+          <a:p>
+            <a:pPr indent="0" marL="0">
+              <a:buNone/>
+            </a:pPr>
+            <a:r>
+              <a:rPr lang="en-US" sz="2200" b="1" dirty="0">
+                <a:solidFill>
+                  <a:srgbClr val="16305B"/>
+                </a:solidFill>
+                <a:latin typeface="Malgun Gothic" pitchFamily="34" charset="0"/>
+                <a:ea typeface="Malgun Gothic" pitchFamily="34" charset="-122"/>
+                <a:cs typeface="Malgun Gothic" pitchFamily="34" charset="-120"/>
+              </a:rPr>
+              <a:t>Icepak 제어 코드 — 해석 모델 구성 · 해석 실행 · 결과 추출</a:t>
+            </a:r>
+            <a:endParaRPr lang="en-US" sz="2200" dirty="0"/>
+          </a:p>
+        </p:txBody>
+      </p:sp>
+      <p:sp>
+        <p:nvSpPr>
+          <p:cNvPr id="6" name="Shape 4"/>
+          <p:cNvSpPr/>
+          <p:nvPr/>
+        </p:nvSpPr>
+        <p:spPr>
+          <a:xfrm>
+            <a:off x="502920" y="1170432"/>
+            <a:ext cx="11183112" cy="5230368"/>
+          </a:xfrm>
+          <a:prstGeom prst="roundRect">
+            <a:avLst>
+              <a:gd name="adj" fmla="val 1049"/>
+            </a:avLst>
+          </a:prstGeom>
+          <a:solidFill>
+            <a:srgbClr val="1E2430"/>
+          </a:solidFill>
+          <a:ln w="12700">
+            <a:solidFill>
+              <a:srgbClr val="1E2430"/>
+            </a:solidFill>
+            <a:prstDash val="solid"/>
+          </a:ln>
+        </p:spPr>
+      </p:sp>
+      <p:sp>
+        <p:nvSpPr>
+          <p:cNvPr id="7" name="Shape 5"/>
+          <p:cNvSpPr/>
+          <p:nvPr/>
+        </p:nvSpPr>
+        <p:spPr>
+          <a:xfrm>
+            <a:off x="667512" y="1298448"/>
+            <a:ext cx="91440" cy="91440"/>
+          </a:xfrm>
+          <a:prstGeom prst="ellipse">
+            <a:avLst/>
+          </a:prstGeom>
+          <a:solidFill>
+            <a:srgbClr val="FF5F57"/>
+          </a:solidFill>
+          <a:ln w="12700">
+            <a:solidFill>
+              <a:srgbClr val="FF5F57"/>
+            </a:solidFill>
+            <a:prstDash val="solid"/>
+          </a:ln>
+        </p:spPr>
+      </p:sp>
+      <p:sp>
+        <p:nvSpPr>
+          <p:cNvPr id="8" name="Shape 6"/>
+          <p:cNvSpPr/>
+          <p:nvPr/>
+        </p:nvSpPr>
+        <p:spPr>
+          <a:xfrm>
+            <a:off x="822960" y="1298448"/>
+            <a:ext cx="91440" cy="91440"/>
+          </a:xfrm>
+          <a:prstGeom prst="ellipse">
+            <a:avLst/>
+          </a:prstGeom>
+          <a:solidFill>
+            <a:srgbClr val="FEBC2E"/>
+          </a:solidFill>
+          <a:ln w="12700">
+            <a:solidFill>
+              <a:srgbClr val="FEBC2E"/>
+            </a:solidFill>
+            <a:prstDash val="solid"/>
+          </a:ln>
+        </p:spPr>
+      </p:sp>
+      <p:sp>
+        <p:nvSpPr>
+          <p:cNvPr id="9" name="Shape 7"/>
+          <p:cNvSpPr/>
+          <p:nvPr/>
+        </p:nvSpPr>
+        <p:spPr>
+          <a:xfrm>
+            <a:off x="978408" y="1298448"/>
+            <a:ext cx="91440" cy="91440"/>
+          </a:xfrm>
+          <a:prstGeom prst="ellipse">
+            <a:avLst/>
+          </a:prstGeom>
+          <a:solidFill>
+            <a:srgbClr val="28C840"/>
+          </a:solidFill>
+          <a:ln w="12700">
+            <a:solidFill>
+              <a:srgbClr val="28C840"/>
+            </a:solidFill>
+            <a:prstDash val="solid"/>
+          </a:ln>
+        </p:spPr>
+      </p:sp>
+      <p:sp>
+        <p:nvSpPr>
+          <p:cNvPr id="10" name="Text 8"/>
+          <p:cNvSpPr txBox="1"/>
+          <p:nvPr/>
+        </p:nvSpPr>
+        <p:spPr>
+          <a:xfrm>
+            <a:off x="1161288" y="1234440"/>
+            <a:ext cx="10360152" cy="219456"/>
+          </a:xfrm>
+          <a:prstGeom prst="rect">
+            <a:avLst/>
+          </a:prstGeom>
+          <a:noFill/>
+          <a:ln/>
+        </p:spPr>
+        <p:txBody>
+          <a:bodyPr wrap="square" lIns="0" tIns="0" rIns="0" bIns="0" rtlCol="0" anchor="ctr"/>
+          <a:lstStyle/>
+          <a:p>
+            <a:pPr indent="0" marL="0">
+              <a:buNone/>
+            </a:pPr>
+            <a:r>
+              <a:rPr lang="en-US" sz="850" dirty="0">
+                <a:solidFill>
+                  <a:srgbClr val="8A94A6"/>
+                </a:solidFill>
+                <a:latin typeface="Consolas" pitchFamily="34" charset="0"/>
+                <a:ea typeface="Consolas" pitchFamily="34" charset="-122"/>
+                <a:cs typeface="Consolas" pitchFamily="34" charset="-120"/>
+              </a:rPr>
+              <a:t>icepak.py — run_icepak()</a:t>
+            </a:r>
+            <a:endParaRPr lang="en-US" sz="850" dirty="0"/>
+          </a:p>
+        </p:txBody>
+      </p:sp>
+      <p:sp>
+        <p:nvSpPr>
+          <p:cNvPr id="11" name="Shape 9"/>
+          <p:cNvSpPr/>
+          <p:nvPr/>
+        </p:nvSpPr>
+        <p:spPr>
+          <a:xfrm>
+            <a:off x="502920" y="1517904"/>
+            <a:ext cx="11183112" cy="0"/>
+          </a:xfrm>
+          <a:prstGeom prst="line">
+            <a:avLst/>
+          </a:prstGeom>
+          <a:noFill/>
+          <a:ln w="9525">
+            <a:solidFill>
+              <a:srgbClr val="2E3645"/>
+            </a:solidFill>
+            <a:prstDash val="solid"/>
+          </a:ln>
+        </p:spPr>
+      </p:sp>
+      <p:sp>
+        <p:nvSpPr>
+          <p:cNvPr id="12" name="Text 10"/>
+          <p:cNvSpPr txBox="1"/>
+          <p:nvPr/>
+        </p:nvSpPr>
+        <p:spPr>
+          <a:xfrm>
+            <a:off x="685800" y="1627632"/>
+            <a:ext cx="10890504" cy="4663440"/>
+          </a:xfrm>
+          <a:prstGeom prst="rect">
+            <a:avLst/>
+          </a:prstGeom>
+          <a:noFill/>
+          <a:ln/>
+        </p:spPr>
+        <p:txBody>
+          <a:bodyPr wrap="square" lIns="0" tIns="0" rIns="0" bIns="0" rtlCol="0" anchor="t"/>
+          <a:lstStyle/>
+          <a:p>
+            <a:pPr indent="0" marL="0">
+              <a:lnSpc>
+                <a:spcPct val="108000"/>
+              </a:lnSpc>
+              <a:buNone/>
+            </a:pPr>
+            <a:r>
+              <a:rPr lang="en-US" sz="850" dirty="0">
+                <a:solidFill>
+                  <a:srgbClr val="C792EA"/>
+                </a:solidFill>
+                <a:latin typeface="Consolas" pitchFamily="34" charset="0"/>
+                <a:ea typeface="Consolas" pitchFamily="34" charset="-122"/>
+                <a:cs typeface="Consolas" pitchFamily="34" charset="-120"/>
+              </a:rPr>
+              <a:t>def</a:t>
+            </a:r>
+            <a:pPr indent="0" marL="0">
+              <a:lnSpc>
+                <a:spcPct val="108000"/>
+              </a:lnSpc>
+              <a:buNone/>
+            </a:pPr>
+            <a:r>
+              <a:rPr lang="en-US" sz="850" dirty="0">
+                <a:solidFill>
+                  <a:srgbClr val="D6DEEB"/>
+                </a:solidFill>
+                <a:latin typeface="Consolas" pitchFamily="34" charset="0"/>
+                <a:ea typeface="Consolas" pitchFamily="34" charset="-122"/>
+                <a:cs typeface="Consolas" pitchFamily="34" charset="-120"/>
+              </a:rPr>
+              <a:t> run_icepak(desktop, ipk, step_file, idx, params):</a:t>
+            </a:r>
+            <a:endParaRPr lang="en-US" sz="850" dirty="0"/>
+          </a:p>
+          <a:p>
+            <a:pPr indent="0" marL="0">
+              <a:lnSpc>
+                <a:spcPct val="108000"/>
+              </a:lnSpc>
+              <a:buNone/>
+            </a:pPr>
+            <a:r>
+              <a:rPr lang="en-US" sz="850" dirty="0">
+                <a:solidFill>
+                  <a:srgbClr val="D6DEEB"/>
+                </a:solidFill>
+                <a:latin typeface="Consolas" pitchFamily="34" charset="0"/>
+                <a:ea typeface="Consolas" pitchFamily="34" charset="-122"/>
+                <a:cs typeface="Consolas" pitchFamily="34" charset="-120"/>
+              </a:rPr>
+              <a:t>    </a:t>
+            </a:r>
+            <a:pPr indent="0" marL="0">
+              <a:lnSpc>
+                <a:spcPct val="108000"/>
+              </a:lnSpc>
+              <a:buNone/>
+            </a:pPr>
+            <a:r>
+              <a:rPr lang="en-US" sz="850" dirty="0">
+                <a:solidFill>
+                  <a:srgbClr val="C792EA"/>
+                </a:solidFill>
+                <a:latin typeface="Consolas" pitchFamily="34" charset="0"/>
+                <a:ea typeface="Consolas" pitchFamily="34" charset="-122"/>
+                <a:cs typeface="Consolas" pitchFamily="34" charset="-120"/>
+              </a:rPr>
+              <a:t>if</a:t>
+            </a:r>
+            <a:pPr indent="0" marL="0">
+              <a:lnSpc>
+                <a:spcPct val="108000"/>
+              </a:lnSpc>
+              <a:buNone/>
+            </a:pPr>
+            <a:r>
+              <a:rPr lang="en-US" sz="850" dirty="0">
+                <a:solidFill>
+                  <a:srgbClr val="D6DEEB"/>
+                </a:solidFill>
+                <a:latin typeface="Consolas" pitchFamily="34" charset="0"/>
+                <a:ea typeface="Consolas" pitchFamily="34" charset="-122"/>
+                <a:cs typeface="Consolas" pitchFamily="34" charset="-120"/>
+              </a:rPr>
+              <a:t> ipk is not None:                                   </a:t>
+            </a:r>
+            <a:pPr indent="0" marL="0">
+              <a:lnSpc>
+                <a:spcPct val="108000"/>
+              </a:lnSpc>
+              <a:buNone/>
+            </a:pPr>
+            <a:r>
+              <a:rPr lang="en-US" sz="850" dirty="0">
+                <a:solidFill>
+                  <a:srgbClr val="7F9C7A"/>
+                </a:solidFill>
+                <a:latin typeface="Consolas" pitchFamily="34" charset="0"/>
+                <a:ea typeface="Consolas" pitchFamily="34" charset="-122"/>
+                <a:cs typeface="Consolas" pitchFamily="34" charset="-120"/>
+              </a:rPr>
+              <a:t># 이전 회차 프로젝트 닫기</a:t>
+            </a:r>
+            <a:endParaRPr lang="en-US" sz="850" dirty="0"/>
+          </a:p>
+          <a:p>
+            <a:pPr indent="0" marL="0">
+              <a:lnSpc>
+                <a:spcPct val="108000"/>
+              </a:lnSpc>
+              <a:buNone/>
+            </a:pPr>
+            <a:r>
+              <a:rPr lang="en-US" sz="850" dirty="0">
+                <a:solidFill>
+                  <a:srgbClr val="D6DEEB"/>
+                </a:solidFill>
+                <a:latin typeface="Consolas" pitchFamily="34" charset="0"/>
+                <a:ea typeface="Consolas" pitchFamily="34" charset="-122"/>
+                <a:cs typeface="Consolas" pitchFamily="34" charset="-120"/>
+              </a:rPr>
+              <a:t>        ipk.odesktop.CloseProject(ipk.project_name)</a:t>
+            </a:r>
+            <a:endParaRPr lang="en-US" sz="850" dirty="0"/>
+          </a:p>
+          <a:p>
+            <a:pPr indent="0" marL="0">
+              <a:lnSpc>
+                <a:spcPct val="108000"/>
+              </a:lnSpc>
+              <a:buNone/>
+            </a:pPr>
+            <a:r>
+              <a:rPr lang="en-US" sz="850" dirty="0">
+                <a:solidFill>
+                  <a:srgbClr val="D6DEEB"/>
+                </a:solidFill>
+                <a:latin typeface="Consolas" pitchFamily="34" charset="0"/>
+                <a:ea typeface="Consolas" pitchFamily="34" charset="-122"/>
+                <a:cs typeface="Consolas" pitchFamily="34" charset="-120"/>
+              </a:rPr>
+              <a:t>    </a:t>
+            </a:r>
+            <a:pPr indent="0" marL="0">
+              <a:lnSpc>
+                <a:spcPct val="108000"/>
+              </a:lnSpc>
+              <a:buNone/>
+            </a:pPr>
+            <a:r>
+              <a:rPr lang="en-US" sz="850" dirty="0">
+                <a:solidFill>
+                  <a:srgbClr val="C792EA"/>
+                </a:solidFill>
+                <a:latin typeface="Consolas" pitchFamily="34" charset="0"/>
+                <a:ea typeface="Consolas" pitchFamily="34" charset="-122"/>
+                <a:cs typeface="Consolas" pitchFamily="34" charset="-120"/>
+              </a:rPr>
+              <a:t>for</a:t>
+            </a:r>
+            <a:pPr indent="0" marL="0">
+              <a:lnSpc>
+                <a:spcPct val="108000"/>
+              </a:lnSpc>
+              <a:buNone/>
+            </a:pPr>
+            <a:r>
+              <a:rPr lang="en-US" sz="850" dirty="0">
+                <a:solidFill>
+                  <a:srgbClr val="D6DEEB"/>
+                </a:solidFill>
+                <a:latin typeface="Consolas" pitchFamily="34" charset="0"/>
+                <a:ea typeface="Consolas" pitchFamily="34" charset="-122"/>
+                <a:cs typeface="Consolas" pitchFamily="34" charset="-120"/>
+              </a:rPr>
+              <a:t> ext </a:t>
+            </a:r>
+            <a:pPr indent="0" marL="0">
+              <a:lnSpc>
+                <a:spcPct val="108000"/>
+              </a:lnSpc>
+              <a:buNone/>
+            </a:pPr>
+            <a:r>
+              <a:rPr lang="en-US" sz="850" dirty="0">
+                <a:solidFill>
+                  <a:srgbClr val="C792EA"/>
+                </a:solidFill>
+                <a:latin typeface="Consolas" pitchFamily="34" charset="0"/>
+                <a:ea typeface="Consolas" pitchFamily="34" charset="-122"/>
+                <a:cs typeface="Consolas" pitchFamily="34" charset="-120"/>
+              </a:rPr>
+              <a:t>in</a:t>
+            </a:r>
+            <a:pPr indent="0" marL="0">
+              <a:lnSpc>
+                <a:spcPct val="108000"/>
+              </a:lnSpc>
+              <a:buNone/>
+            </a:pPr>
+            <a:r>
+              <a:rPr lang="en-US" sz="850" dirty="0">
+                <a:solidFill>
+                  <a:srgbClr val="D6DEEB"/>
+                </a:solidFill>
+                <a:latin typeface="Consolas" pitchFamily="34" charset="0"/>
+                <a:ea typeface="Consolas" pitchFamily="34" charset="-122"/>
+                <a:cs typeface="Consolas" pitchFamily="34" charset="-120"/>
+              </a:rPr>
+              <a:t> (</a:t>
+            </a:r>
+            <a:pPr indent="0" marL="0">
+              <a:lnSpc>
+                <a:spcPct val="108000"/>
+              </a:lnSpc>
+              <a:buNone/>
+            </a:pPr>
+            <a:r>
+              <a:rPr lang="en-US" sz="850" dirty="0">
+                <a:solidFill>
+                  <a:srgbClr val="E6A26B"/>
+                </a:solidFill>
+                <a:latin typeface="Consolas" pitchFamily="34" charset="0"/>
+                <a:ea typeface="Consolas" pitchFamily="34" charset="-122"/>
+                <a:cs typeface="Consolas" pitchFamily="34" charset="-120"/>
+              </a:rPr>
+              <a:t>".aedt"</a:t>
+            </a:r>
+            <a:pPr indent="0" marL="0">
+              <a:lnSpc>
+                <a:spcPct val="108000"/>
+              </a:lnSpc>
+              <a:buNone/>
+            </a:pPr>
+            <a:r>
+              <a:rPr lang="en-US" sz="850" dirty="0">
+                <a:solidFill>
+                  <a:srgbClr val="D6DEEB"/>
+                </a:solidFill>
+                <a:latin typeface="Consolas" pitchFamily="34" charset="0"/>
+                <a:ea typeface="Consolas" pitchFamily="34" charset="-122"/>
+                <a:cs typeface="Consolas" pitchFamily="34" charset="-120"/>
+              </a:rPr>
+              <a:t>, </a:t>
+            </a:r>
+            <a:pPr indent="0" marL="0">
+              <a:lnSpc>
+                <a:spcPct val="108000"/>
+              </a:lnSpc>
+              <a:buNone/>
+            </a:pPr>
+            <a:r>
+              <a:rPr lang="en-US" sz="850" dirty="0">
+                <a:solidFill>
+                  <a:srgbClr val="E6A26B"/>
+                </a:solidFill>
+                <a:latin typeface="Consolas" pitchFamily="34" charset="0"/>
+                <a:ea typeface="Consolas" pitchFamily="34" charset="-122"/>
+                <a:cs typeface="Consolas" pitchFamily="34" charset="-120"/>
+              </a:rPr>
+              <a:t>".aedt.lock"</a:t>
+            </a:r>
+            <a:pPr indent="0" marL="0">
+              <a:lnSpc>
+                <a:spcPct val="108000"/>
+              </a:lnSpc>
+              <a:buNone/>
+            </a:pPr>
+            <a:r>
+              <a:rPr lang="en-US" sz="850" dirty="0">
+                <a:solidFill>
+                  <a:srgbClr val="D6DEEB"/>
+                </a:solidFill>
+                <a:latin typeface="Consolas" pitchFamily="34" charset="0"/>
+                <a:ea typeface="Consolas" pitchFamily="34" charset="-122"/>
+                <a:cs typeface="Consolas" pitchFamily="34" charset="-120"/>
+              </a:rPr>
+              <a:t>):                   </a:t>
+            </a:r>
+            <a:pPr indent="0" marL="0">
+              <a:lnSpc>
+                <a:spcPct val="108000"/>
+              </a:lnSpc>
+              <a:buNone/>
+            </a:pPr>
+            <a:r>
+              <a:rPr lang="en-US" sz="850" dirty="0">
+                <a:solidFill>
+                  <a:srgbClr val="7F9C7A"/>
+                </a:solidFill>
+                <a:latin typeface="Consolas" pitchFamily="34" charset="0"/>
+                <a:ea typeface="Consolas" pitchFamily="34" charset="-122"/>
+                <a:cs typeface="Consolas" pitchFamily="34" charset="-120"/>
+              </a:rPr>
+              <a:t># 잔여 · 잠금 파일 정리</a:t>
+            </a:r>
+            <a:endParaRPr lang="en-US" sz="850" dirty="0"/>
+          </a:p>
+          <a:p>
+            <a:pPr indent="0" marL="0">
+              <a:lnSpc>
+                <a:spcPct val="108000"/>
+              </a:lnSpc>
+              <a:buNone/>
+            </a:pPr>
+            <a:r>
+              <a:rPr lang="en-US" sz="850" dirty="0">
+                <a:solidFill>
+                  <a:srgbClr val="D6DEEB"/>
+                </a:solidFill>
+                <a:latin typeface="Consolas" pitchFamily="34" charset="0"/>
+                <a:ea typeface="Consolas" pitchFamily="34" charset="-122"/>
+                <a:cs typeface="Consolas" pitchFamily="34" charset="-120"/>
+              </a:rPr>
+              <a:t>        </a:t>
+            </a:r>
+            <a:pPr indent="0" marL="0">
+              <a:lnSpc>
+                <a:spcPct val="108000"/>
+              </a:lnSpc>
+              <a:buNone/>
+            </a:pPr>
+            <a:r>
+              <a:rPr lang="en-US" sz="850" dirty="0">
+                <a:solidFill>
+                  <a:srgbClr val="C792EA"/>
+                </a:solidFill>
+                <a:latin typeface="Consolas" pitchFamily="34" charset="0"/>
+                <a:ea typeface="Consolas" pitchFamily="34" charset="-122"/>
+                <a:cs typeface="Consolas" pitchFamily="34" charset="-120"/>
+              </a:rPr>
+              <a:t>if</a:t>
+            </a:r>
+            <a:pPr indent="0" marL="0">
+              <a:lnSpc>
+                <a:spcPct val="108000"/>
+              </a:lnSpc>
+              <a:buNone/>
+            </a:pPr>
+            <a:r>
+              <a:rPr lang="en-US" sz="850" dirty="0">
+                <a:solidFill>
+                  <a:srgbClr val="D6DEEB"/>
+                </a:solidFill>
+                <a:latin typeface="Consolas" pitchFamily="34" charset="0"/>
+                <a:ea typeface="Consolas" pitchFamily="34" charset="-122"/>
+                <a:cs typeface="Consolas" pitchFamily="34" charset="-120"/>
+              </a:rPr>
+              <a:t> os.path.exists(PROJ_PATH + ext): os.remove(PROJ_PATH + ext)</a:t>
+            </a:r>
+            <a:endParaRPr lang="en-US" sz="850" dirty="0"/>
+          </a:p>
+          <a:p>
+            <a:pPr indent="0" marL="0">
+              <a:lnSpc>
+                <a:spcPct val="108000"/>
+              </a:lnSpc>
+              <a:buNone/>
+            </a:pPr>
+            <a:r>
+              <a:rPr lang="en-US" sz="850" dirty="0">
+                <a:solidFill>
+                  <a:srgbClr val="D6DEEB"/>
+                </a:solidFill>
+                <a:latin typeface="Consolas" pitchFamily="34" charset="0"/>
+                <a:ea typeface="Consolas" pitchFamily="34" charset="-122"/>
+                <a:cs typeface="Consolas" pitchFamily="34" charset="-120"/>
+              </a:rPr>
+              <a:t> </a:t>
+            </a:r>
+            <a:endParaRPr lang="en-US" sz="850" dirty="0"/>
+          </a:p>
+          <a:p>
+            <a:pPr indent="0" marL="0">
+              <a:lnSpc>
+                <a:spcPct val="108000"/>
+              </a:lnSpc>
+              <a:buNone/>
+            </a:pPr>
+            <a:r>
+              <a:rPr lang="en-US" sz="850" dirty="0">
+                <a:solidFill>
+                  <a:srgbClr val="D6DEEB"/>
+                </a:solidFill>
+                <a:latin typeface="Consolas" pitchFamily="34" charset="0"/>
+                <a:ea typeface="Consolas" pitchFamily="34" charset="-122"/>
+                <a:cs typeface="Consolas" pitchFamily="34" charset="-120"/>
+              </a:rPr>
+              <a:t>    ipk = Icepak(project=PROJ_PATH, design=</a:t>
+            </a:r>
+            <a:pPr indent="0" marL="0">
+              <a:lnSpc>
+                <a:spcPct val="108000"/>
+              </a:lnSpc>
+              <a:buNone/>
+            </a:pPr>
+            <a:r>
+              <a:rPr lang="en-US" sz="850" dirty="0">
+                <a:solidFill>
+                  <a:srgbClr val="E6A26B"/>
+                </a:solidFill>
+                <a:latin typeface="Consolas" pitchFamily="34" charset="0"/>
+                <a:ea typeface="Consolas" pitchFamily="34" charset="-122"/>
+                <a:cs typeface="Consolas" pitchFamily="34" charset="-120"/>
+              </a:rPr>
+              <a:t>f"IcepakDesign_{idx:03d}"</a:t>
+            </a:r>
+            <a:pPr indent="0" marL="0">
+              <a:lnSpc>
+                <a:spcPct val="108000"/>
+              </a:lnSpc>
+              <a:buNone/>
+            </a:pPr>
+            <a:r>
+              <a:rPr lang="en-US" sz="850" dirty="0">
+                <a:solidFill>
+                  <a:srgbClr val="D6DEEB"/>
+                </a:solidFill>
+                <a:latin typeface="Consolas" pitchFamily="34" charset="0"/>
+                <a:ea typeface="Consolas" pitchFamily="34" charset="-122"/>
+                <a:cs typeface="Consolas" pitchFamily="34" charset="-120"/>
+              </a:rPr>
+              <a:t>,</a:t>
+            </a:r>
+            <a:endParaRPr lang="en-US" sz="850" dirty="0"/>
+          </a:p>
+          <a:p>
+            <a:pPr indent="0" marL="0">
+              <a:lnSpc>
+                <a:spcPct val="108000"/>
+              </a:lnSpc>
+              <a:buNone/>
+            </a:pPr>
+            <a:r>
+              <a:rPr lang="en-US" sz="850" dirty="0">
+                <a:solidFill>
+                  <a:srgbClr val="D6DEEB"/>
+                </a:solidFill>
+                <a:latin typeface="Consolas" pitchFamily="34" charset="0"/>
+                <a:ea typeface="Consolas" pitchFamily="34" charset="-122"/>
+                <a:cs typeface="Consolas" pitchFamily="34" charset="-120"/>
+              </a:rPr>
+              <a:t>                 new_desktop=False, close_on_exit=False)</a:t>
+            </a:r>
+            <a:endParaRPr lang="en-US" sz="850" dirty="0"/>
+          </a:p>
+          <a:p>
+            <a:pPr indent="0" marL="0">
+              <a:lnSpc>
+                <a:spcPct val="108000"/>
+              </a:lnSpc>
+              <a:buNone/>
+            </a:pPr>
+            <a:r>
+              <a:rPr lang="en-US" sz="850" dirty="0">
+                <a:solidFill>
+                  <a:srgbClr val="D6DEEB"/>
+                </a:solidFill>
+                <a:latin typeface="Consolas" pitchFamily="34" charset="0"/>
+                <a:ea typeface="Consolas" pitchFamily="34" charset="-122"/>
+                <a:cs typeface="Consolas" pitchFamily="34" charset="-120"/>
+              </a:rPr>
+              <a:t>    ipk.modeler.import_3d_cad(step_file)                  </a:t>
+            </a:r>
+            <a:pPr indent="0" marL="0">
+              <a:lnSpc>
+                <a:spcPct val="108000"/>
+              </a:lnSpc>
+              <a:buNone/>
+            </a:pPr>
+            <a:r>
+              <a:rPr lang="en-US" sz="850" dirty="0">
+                <a:solidFill>
+                  <a:srgbClr val="7F9C7A"/>
+                </a:solidFill>
+                <a:latin typeface="Consolas" pitchFamily="34" charset="0"/>
+                <a:ea typeface="Consolas" pitchFamily="34" charset="-122"/>
+                <a:cs typeface="Consolas" pitchFamily="34" charset="-120"/>
+              </a:rPr>
+              <a:t># STEP 불러오기</a:t>
+            </a:r>
+            <a:endParaRPr lang="en-US" sz="850" dirty="0"/>
+          </a:p>
+          <a:p>
+            <a:pPr indent="0" marL="0">
+              <a:lnSpc>
+                <a:spcPct val="108000"/>
+              </a:lnSpc>
+              <a:buNone/>
+            </a:pPr>
+            <a:r>
+              <a:rPr lang="en-US" sz="850" dirty="0">
+                <a:solidFill>
+                  <a:srgbClr val="D6DEEB"/>
+                </a:solidFill>
+                <a:latin typeface="Consolas" pitchFamily="34" charset="0"/>
+                <a:ea typeface="Consolas" pitchFamily="34" charset="-122"/>
+                <a:cs typeface="Consolas" pitchFamily="34" charset="-120"/>
+              </a:rPr>
+              <a:t>    oDesign = ipk.odesign</a:t>
+            </a:r>
+            <a:endParaRPr lang="en-US" sz="850" dirty="0"/>
+          </a:p>
+          <a:p>
+            <a:pPr indent="0" marL="0">
+              <a:lnSpc>
+                <a:spcPct val="108000"/>
+              </a:lnSpc>
+              <a:buNone/>
+            </a:pPr>
+            <a:r>
+              <a:rPr lang="en-US" sz="850" dirty="0">
+                <a:solidFill>
+                  <a:srgbClr val="D6DEEB"/>
+                </a:solidFill>
+                <a:latin typeface="Consolas" pitchFamily="34" charset="0"/>
+                <a:ea typeface="Consolas" pitchFamily="34" charset="-122"/>
+                <a:cs typeface="Consolas" pitchFamily="34" charset="-120"/>
+              </a:rPr>
+              <a:t>    oEditor = oDesign.SetActiveEditor(</a:t>
+            </a:r>
+            <a:pPr indent="0" marL="0">
+              <a:lnSpc>
+                <a:spcPct val="108000"/>
+              </a:lnSpc>
+              <a:buNone/>
+            </a:pPr>
+            <a:r>
+              <a:rPr lang="en-US" sz="850" dirty="0">
+                <a:solidFill>
+                  <a:srgbClr val="E6A26B"/>
+                </a:solidFill>
+                <a:latin typeface="Consolas" pitchFamily="34" charset="0"/>
+                <a:ea typeface="Consolas" pitchFamily="34" charset="-122"/>
+                <a:cs typeface="Consolas" pitchFamily="34" charset="-120"/>
+              </a:rPr>
+              <a:t>"3D Modeler"</a:t>
+            </a:r>
+            <a:pPr indent="0" marL="0">
+              <a:lnSpc>
+                <a:spcPct val="108000"/>
+              </a:lnSpc>
+              <a:buNone/>
+            </a:pPr>
+            <a:r>
+              <a:rPr lang="en-US" sz="850" dirty="0">
+                <a:solidFill>
+                  <a:srgbClr val="D6DEEB"/>
+                </a:solidFill>
+                <a:latin typeface="Consolas" pitchFamily="34" charset="0"/>
+                <a:ea typeface="Consolas" pitchFamily="34" charset="-122"/>
+                <a:cs typeface="Consolas" pitchFamily="34" charset="-120"/>
+              </a:rPr>
+              <a:t>)</a:t>
+            </a:r>
+            <a:endParaRPr lang="en-US" sz="850" dirty="0"/>
+          </a:p>
+          <a:p>
+            <a:pPr indent="0" marL="0">
+              <a:lnSpc>
+                <a:spcPct val="108000"/>
+              </a:lnSpc>
+              <a:buNone/>
+            </a:pPr>
+            <a:r>
+              <a:rPr lang="en-US" sz="850" dirty="0">
+                <a:solidFill>
+                  <a:srgbClr val="D6DEEB"/>
+                </a:solidFill>
+                <a:latin typeface="Consolas" pitchFamily="34" charset="0"/>
+                <a:ea typeface="Consolas" pitchFamily="34" charset="-122"/>
+                <a:cs typeface="Consolas" pitchFamily="34" charset="-120"/>
+              </a:rPr>
+              <a:t> </a:t>
+            </a:r>
+            <a:endParaRPr lang="en-US" sz="850" dirty="0"/>
+          </a:p>
+          <a:p>
+            <a:pPr indent="0" marL="0">
+              <a:lnSpc>
+                <a:spcPct val="108000"/>
+              </a:lnSpc>
+              <a:buNone/>
+            </a:pPr>
+            <a:r>
+              <a:rPr lang="en-US" sz="850" dirty="0">
+                <a:solidFill>
+                  <a:srgbClr val="D6DEEB"/>
+                </a:solidFill>
+                <a:latin typeface="Consolas" pitchFamily="34" charset="0"/>
+                <a:ea typeface="Consolas" pitchFamily="34" charset="-122"/>
+                <a:cs typeface="Consolas" pitchFamily="34" charset="-120"/>
+              </a:rPr>
+              <a:t>    oEditor.CreateBox(...)                                </a:t>
+            </a:r>
+            <a:pPr indent="0" marL="0">
+              <a:lnSpc>
+                <a:spcPct val="108000"/>
+              </a:lnSpc>
+              <a:buNone/>
+            </a:pPr>
+            <a:r>
+              <a:rPr lang="en-US" sz="850" dirty="0">
+                <a:solidFill>
+                  <a:srgbClr val="7F9C7A"/>
+                </a:solidFill>
+                <a:latin typeface="Consolas" pitchFamily="34" charset="0"/>
+                <a:ea typeface="Consolas" pitchFamily="34" charset="-122"/>
+                <a:cs typeface="Consolas" pitchFamily="34" charset="-120"/>
+              </a:rPr>
+              <a:t># 냉각유(PAO) 박스</a:t>
+            </a:r>
+            <a:endParaRPr lang="en-US" sz="850" dirty="0"/>
+          </a:p>
+          <a:p>
+            <a:pPr indent="0" marL="0">
+              <a:lnSpc>
+                <a:spcPct val="108000"/>
+              </a:lnSpc>
+              <a:buNone/>
+            </a:pPr>
+            <a:r>
+              <a:rPr lang="en-US" sz="850" dirty="0">
+                <a:solidFill>
+                  <a:srgbClr val="D6DEEB"/>
+                </a:solidFill>
+                <a:latin typeface="Consolas" pitchFamily="34" charset="0"/>
+                <a:ea typeface="Consolas" pitchFamily="34" charset="-122"/>
+                <a:cs typeface="Consolas" pitchFamily="34" charset="-120"/>
+              </a:rPr>
+              <a:t>    oEditor.Subtract(...);  oEditor.SeparateBody(...)     </a:t>
+            </a:r>
+            <a:pPr indent="0" marL="0">
+              <a:lnSpc>
+                <a:spcPct val="108000"/>
+              </a:lnSpc>
+              <a:buNone/>
+            </a:pPr>
+            <a:r>
+              <a:rPr lang="en-US" sz="850" dirty="0">
+                <a:solidFill>
+                  <a:srgbClr val="7F9C7A"/>
+                </a:solidFill>
+                <a:latin typeface="Consolas" pitchFamily="34" charset="0"/>
+                <a:ea typeface="Consolas" pitchFamily="34" charset="-122"/>
+                <a:cs typeface="Consolas" pitchFamily="34" charset="-120"/>
+              </a:rPr>
+              <a:t># 유체 영역 = 박스 − 형상</a:t>
+            </a:r>
+            <a:endParaRPr lang="en-US" sz="850" dirty="0"/>
+          </a:p>
+          <a:p>
+            <a:pPr indent="0" marL="0">
+              <a:lnSpc>
+                <a:spcPct val="108000"/>
+              </a:lnSpc>
+              <a:buNone/>
+            </a:pPr>
+            <a:r>
+              <a:rPr lang="en-US" sz="850" dirty="0">
+                <a:solidFill>
+                  <a:srgbClr val="D6DEEB"/>
+                </a:solidFill>
+                <a:latin typeface="Consolas" pitchFamily="34" charset="0"/>
+                <a:ea typeface="Consolas" pitchFamily="34" charset="-122"/>
+                <a:cs typeface="Consolas" pitchFamily="34" charset="-120"/>
+              </a:rPr>
+              <a:t>    </a:t>
+            </a:r>
+            <a:pPr indent="0" marL="0">
+              <a:lnSpc>
+                <a:spcPct val="108000"/>
+              </a:lnSpc>
+              <a:buNone/>
+            </a:pPr>
+            <a:r>
+              <a:rPr lang="en-US" sz="850" dirty="0">
+                <a:solidFill>
+                  <a:srgbClr val="C792EA"/>
+                </a:solidFill>
+                <a:latin typeface="Consolas" pitchFamily="34" charset="0"/>
+                <a:ea typeface="Consolas" pitchFamily="34" charset="-122"/>
+                <a:cs typeface="Consolas" pitchFamily="34" charset="-120"/>
+              </a:rPr>
+              <a:t>for</a:t>
+            </a:r>
+            <a:pPr indent="0" marL="0">
+              <a:lnSpc>
+                <a:spcPct val="108000"/>
+              </a:lnSpc>
+              <a:buNone/>
+            </a:pPr>
+            <a:r>
+              <a:rPr lang="en-US" sz="850" dirty="0">
+                <a:solidFill>
+                  <a:srgbClr val="D6DEEB"/>
+                </a:solidFill>
+                <a:latin typeface="Consolas" pitchFamily="34" charset="0"/>
+                <a:ea typeface="Consolas" pitchFamily="34" charset="-122"/>
+                <a:cs typeface="Consolas" pitchFamily="34" charset="-120"/>
+              </a:rPr>
+              <a:t> i </a:t>
+            </a:r>
+            <a:pPr indent="0" marL="0">
+              <a:lnSpc>
+                <a:spcPct val="108000"/>
+              </a:lnSpc>
+              <a:buNone/>
+            </a:pPr>
+            <a:r>
+              <a:rPr lang="en-US" sz="850" dirty="0">
+                <a:solidFill>
+                  <a:srgbClr val="C792EA"/>
+                </a:solidFill>
+                <a:latin typeface="Consolas" pitchFamily="34" charset="0"/>
+                <a:ea typeface="Consolas" pitchFamily="34" charset="-122"/>
+                <a:cs typeface="Consolas" pitchFamily="34" charset="-120"/>
+              </a:rPr>
+              <a:t>in</a:t>
+            </a:r>
+            <a:pPr indent="0" marL="0">
+              <a:lnSpc>
+                <a:spcPct val="108000"/>
+              </a:lnSpc>
+              <a:buNone/>
+            </a:pPr>
+            <a:r>
+              <a:rPr lang="en-US" sz="850" dirty="0">
+                <a:solidFill>
+                  <a:srgbClr val="D6DEEB"/>
+                </a:solidFill>
+                <a:latin typeface="Consolas" pitchFamily="34" charset="0"/>
+                <a:ea typeface="Consolas" pitchFamily="34" charset="-122"/>
+                <a:cs typeface="Consolas" pitchFamily="34" charset="-120"/>
+              </a:rPr>
+              <a:t> range(N_SOURCE):                             </a:t>
+            </a:r>
+            <a:pPr indent="0" marL="0">
+              <a:lnSpc>
+                <a:spcPct val="108000"/>
+              </a:lnSpc>
+              <a:buNone/>
+            </a:pPr>
+            <a:r>
+              <a:rPr lang="en-US" sz="850" dirty="0">
+                <a:solidFill>
+                  <a:srgbClr val="7F9C7A"/>
+                </a:solidFill>
+                <a:latin typeface="Consolas" pitchFamily="34" charset="0"/>
+                <a:ea typeface="Consolas" pitchFamily="34" charset="-122"/>
+                <a:cs typeface="Consolas" pitchFamily="34" charset="-120"/>
+              </a:rPr>
+              <a:t># 발열원 생성</a:t>
+            </a:r>
+            <a:endParaRPr lang="en-US" sz="850" dirty="0"/>
+          </a:p>
+          <a:p>
+            <a:pPr indent="0" marL="0">
+              <a:lnSpc>
+                <a:spcPct val="108000"/>
+              </a:lnSpc>
+              <a:buNone/>
+            </a:pPr>
+            <a:r>
+              <a:rPr lang="en-US" sz="850" dirty="0">
+                <a:solidFill>
+                  <a:srgbClr val="D6DEEB"/>
+                </a:solidFill>
+                <a:latin typeface="Consolas" pitchFamily="34" charset="0"/>
+                <a:ea typeface="Consolas" pitchFamily="34" charset="-122"/>
+                <a:cs typeface="Consolas" pitchFamily="34" charset="-120"/>
+              </a:rPr>
+              <a:t>        oEditor.CreateBox(...)</a:t>
+            </a:r>
+            <a:endParaRPr lang="en-US" sz="850" dirty="0"/>
+          </a:p>
+          <a:p>
+            <a:pPr indent="0" marL="0">
+              <a:lnSpc>
+                <a:spcPct val="108000"/>
+              </a:lnSpc>
+              <a:buNone/>
+            </a:pPr>
+            <a:r>
+              <a:rPr lang="en-US" sz="850" dirty="0">
+                <a:solidFill>
+                  <a:srgbClr val="D6DEEB"/>
+                </a:solidFill>
+                <a:latin typeface="Consolas" pitchFamily="34" charset="0"/>
+                <a:ea typeface="Consolas" pitchFamily="34" charset="-122"/>
+                <a:cs typeface="Consolas" pitchFamily="34" charset="-120"/>
+              </a:rPr>
+              <a:t> </a:t>
+            </a:r>
+            <a:endParaRPr lang="en-US" sz="850" dirty="0"/>
+          </a:p>
+          <a:p>
+            <a:pPr indent="0" marL="0">
+              <a:lnSpc>
+                <a:spcPct val="108000"/>
+              </a:lnSpc>
+              <a:buNone/>
+            </a:pPr>
+            <a:r>
+              <a:rPr lang="en-US" sz="850" dirty="0">
+                <a:solidFill>
+                  <a:srgbClr val="D6DEEB"/>
+                </a:solidFill>
+                <a:latin typeface="Consolas" pitchFamily="34" charset="0"/>
+                <a:ea typeface="Consolas" pitchFamily="34" charset="-122"/>
+                <a:cs typeface="Consolas" pitchFamily="34" charset="-120"/>
+              </a:rPr>
+              <a:t>    faces = [f </a:t>
+            </a:r>
+            <a:pPr indent="0" marL="0">
+              <a:lnSpc>
+                <a:spcPct val="108000"/>
+              </a:lnSpc>
+              <a:buNone/>
+            </a:pPr>
+            <a:r>
+              <a:rPr lang="en-US" sz="850" dirty="0">
+                <a:solidFill>
+                  <a:srgbClr val="C792EA"/>
+                </a:solidFill>
+                <a:latin typeface="Consolas" pitchFamily="34" charset="0"/>
+                <a:ea typeface="Consolas" pitchFamily="34" charset="-122"/>
+                <a:cs typeface="Consolas" pitchFamily="34" charset="-120"/>
+              </a:rPr>
+              <a:t>for</a:t>
+            </a:r>
+            <a:pPr indent="0" marL="0">
+              <a:lnSpc>
+                <a:spcPct val="108000"/>
+              </a:lnSpc>
+              <a:buNone/>
+            </a:pPr>
+            <a:r>
+              <a:rPr lang="en-US" sz="850" dirty="0">
+                <a:solidFill>
+                  <a:srgbClr val="D6DEEB"/>
+                </a:solidFill>
+                <a:latin typeface="Consolas" pitchFamily="34" charset="0"/>
+                <a:ea typeface="Consolas" pitchFamily="34" charset="-122"/>
+                <a:cs typeface="Consolas" pitchFamily="34" charset="-120"/>
+              </a:rPr>
+              <a:t> f </a:t>
+            </a:r>
+            <a:pPr indent="0" marL="0">
+              <a:lnSpc>
+                <a:spcPct val="108000"/>
+              </a:lnSpc>
+              <a:buNone/>
+            </a:pPr>
+            <a:r>
+              <a:rPr lang="en-US" sz="850" dirty="0">
+                <a:solidFill>
+                  <a:srgbClr val="C792EA"/>
+                </a:solidFill>
+                <a:latin typeface="Consolas" pitchFamily="34" charset="0"/>
+                <a:ea typeface="Consolas" pitchFamily="34" charset="-122"/>
+                <a:cs typeface="Consolas" pitchFamily="34" charset="-120"/>
+              </a:rPr>
+              <a:t>in</a:t>
+            </a:r>
+            <a:pPr indent="0" marL="0">
+              <a:lnSpc>
+                <a:spcPct val="108000"/>
+              </a:lnSpc>
+              <a:buNone/>
+            </a:pPr>
+            <a:r>
+              <a:rPr lang="en-US" sz="850" dirty="0">
+                <a:solidFill>
+                  <a:srgbClr val="D6DEEB"/>
+                </a:solidFill>
+                <a:latin typeface="Consolas" pitchFamily="34" charset="0"/>
+                <a:ea typeface="Consolas" pitchFamily="34" charset="-122"/>
+                <a:cs typeface="Consolas" pitchFamily="34" charset="-120"/>
+              </a:rPr>
+              <a:t> box.faces </a:t>
+            </a:r>
+            <a:pPr indent="0" marL="0">
+              <a:lnSpc>
+                <a:spcPct val="108000"/>
+              </a:lnSpc>
+              <a:buNone/>
+            </a:pPr>
+            <a:r>
+              <a:rPr lang="en-US" sz="850" dirty="0">
+                <a:solidFill>
+                  <a:srgbClr val="C792EA"/>
+                </a:solidFill>
+                <a:latin typeface="Consolas" pitchFamily="34" charset="0"/>
+                <a:ea typeface="Consolas" pitchFamily="34" charset="-122"/>
+                <a:cs typeface="Consolas" pitchFamily="34" charset="-120"/>
+              </a:rPr>
+              <a:t>if</a:t>
+            </a:r>
+            <a:pPr indent="0" marL="0">
+              <a:lnSpc>
+                <a:spcPct val="108000"/>
+              </a:lnSpc>
+              <a:buNone/>
+            </a:pPr>
+            <a:r>
+              <a:rPr lang="en-US" sz="850" dirty="0">
+                <a:solidFill>
+                  <a:srgbClr val="D6DEEB"/>
+                </a:solidFill>
+                <a:latin typeface="Consolas" pitchFamily="34" charset="0"/>
+                <a:ea typeface="Consolas" pitchFamily="34" charset="-122"/>
+                <a:cs typeface="Consolas" pitchFamily="34" charset="-120"/>
+              </a:rPr>
+              <a:t> abs(f.center[2] - z_top) &lt; 0.1]</a:t>
+            </a:r>
+            <a:endParaRPr lang="en-US" sz="850" dirty="0"/>
+          </a:p>
+          <a:p>
+            <a:pPr indent="0" marL="0">
+              <a:lnSpc>
+                <a:spcPct val="108000"/>
+              </a:lnSpc>
+              <a:buNone/>
+            </a:pPr>
+            <a:r>
+              <a:rPr lang="en-US" sz="850" dirty="0">
+                <a:solidFill>
+                  <a:srgbClr val="D6DEEB"/>
+                </a:solidFill>
+                <a:latin typeface="Consolas" pitchFamily="34" charset="0"/>
+                <a:ea typeface="Consolas" pitchFamily="34" charset="-122"/>
+                <a:cs typeface="Consolas" pitchFamily="34" charset="-120"/>
+              </a:rPr>
+              <a:t>    faces.sort(key=</a:t>
+            </a:r>
+            <a:pPr indent="0" marL="0">
+              <a:lnSpc>
+                <a:spcPct val="108000"/>
+              </a:lnSpc>
+              <a:buNone/>
+            </a:pPr>
+            <a:r>
+              <a:rPr lang="en-US" sz="850" dirty="0">
+                <a:solidFill>
+                  <a:srgbClr val="C792EA"/>
+                </a:solidFill>
+                <a:latin typeface="Consolas" pitchFamily="34" charset="0"/>
+                <a:ea typeface="Consolas" pitchFamily="34" charset="-122"/>
+                <a:cs typeface="Consolas" pitchFamily="34" charset="-120"/>
+              </a:rPr>
+              <a:t>lambda</a:t>
+            </a:r>
+            <a:pPr indent="0" marL="0">
+              <a:lnSpc>
+                <a:spcPct val="108000"/>
+              </a:lnSpc>
+              <a:buNone/>
+            </a:pPr>
+            <a:r>
+              <a:rPr lang="en-US" sz="850" dirty="0">
+                <a:solidFill>
+                  <a:srgbClr val="D6DEEB"/>
+                </a:solidFill>
+                <a:latin typeface="Consolas" pitchFamily="34" charset="0"/>
+                <a:ea typeface="Consolas" pitchFamily="34" charset="-122"/>
+                <a:cs typeface="Consolas" pitchFamily="34" charset="-120"/>
+              </a:rPr>
+              <a:t> f: f.center[0])                 </a:t>
+            </a:r>
+            <a:pPr indent="0" marL="0">
+              <a:lnSpc>
+                <a:spcPct val="108000"/>
+              </a:lnSpc>
+              <a:buNone/>
+            </a:pPr>
+            <a:r>
+              <a:rPr lang="en-US" sz="850" dirty="0">
+                <a:solidFill>
+                  <a:srgbClr val="7F9C7A"/>
+                </a:solidFill>
+                <a:latin typeface="Consolas" pitchFamily="34" charset="0"/>
+                <a:ea typeface="Consolas" pitchFamily="34" charset="-122"/>
+                <a:cs typeface="Consolas" pitchFamily="34" charset="-120"/>
+              </a:rPr>
+              <a:t># 팬 · 개구부 면 자동 탐지</a:t>
+            </a:r>
+            <a:endParaRPr lang="en-US" sz="850" dirty="0"/>
+          </a:p>
+          <a:p>
+            <a:pPr indent="0" marL="0">
+              <a:lnSpc>
+                <a:spcPct val="108000"/>
+              </a:lnSpc>
+              <a:buNone/>
+            </a:pPr>
+            <a:r>
+              <a:rPr lang="en-US" sz="850" dirty="0">
+                <a:solidFill>
+                  <a:srgbClr val="D6DEEB"/>
+                </a:solidFill>
+                <a:latin typeface="Consolas" pitchFamily="34" charset="0"/>
+                <a:ea typeface="Consolas" pitchFamily="34" charset="-122"/>
+                <a:cs typeface="Consolas" pitchFamily="34" charset="-120"/>
+              </a:rPr>
+              <a:t>    oEditor.InsertNativeComponent(...)                    </a:t>
+            </a:r>
+            <a:pPr indent="0" marL="0">
+              <a:lnSpc>
+                <a:spcPct val="108000"/>
+              </a:lnSpc>
+              <a:buNone/>
+            </a:pPr>
+            <a:r>
+              <a:rPr lang="en-US" sz="850" dirty="0">
+                <a:solidFill>
+                  <a:srgbClr val="7F9C7A"/>
+                </a:solidFill>
+                <a:latin typeface="Consolas" pitchFamily="34" charset="0"/>
+                <a:ea typeface="Consolas" pitchFamily="34" charset="-122"/>
+                <a:cs typeface="Consolas" pitchFamily="34" charset="-120"/>
+              </a:rPr>
+              <a:t># 팬(입구)</a:t>
+            </a:r>
+            <a:endParaRPr lang="en-US" sz="850" dirty="0"/>
+          </a:p>
+          <a:p>
+            <a:pPr indent="0" marL="0">
+              <a:lnSpc>
+                <a:spcPct val="108000"/>
+              </a:lnSpc>
+              <a:buNone/>
+            </a:pPr>
+            <a:r>
+              <a:rPr lang="en-US" sz="850" dirty="0">
+                <a:solidFill>
+                  <a:srgbClr val="D6DEEB"/>
+                </a:solidFill>
+                <a:latin typeface="Consolas" pitchFamily="34" charset="0"/>
+                <a:ea typeface="Consolas" pitchFamily="34" charset="-122"/>
+                <a:cs typeface="Consolas" pitchFamily="34" charset="-120"/>
+              </a:rPr>
+              <a:t>    oDesign.GetModule(</a:t>
+            </a:r>
+            <a:pPr indent="0" marL="0">
+              <a:lnSpc>
+                <a:spcPct val="108000"/>
+              </a:lnSpc>
+              <a:buNone/>
+            </a:pPr>
+            <a:r>
+              <a:rPr lang="en-US" sz="850" dirty="0">
+                <a:solidFill>
+                  <a:srgbClr val="E6A26B"/>
+                </a:solidFill>
+                <a:latin typeface="Consolas" pitchFamily="34" charset="0"/>
+                <a:ea typeface="Consolas" pitchFamily="34" charset="-122"/>
+                <a:cs typeface="Consolas" pitchFamily="34" charset="-120"/>
+              </a:rPr>
+              <a:t>"BoundarySetup"</a:t>
+            </a:r>
+            <a:pPr indent="0" marL="0">
+              <a:lnSpc>
+                <a:spcPct val="108000"/>
+              </a:lnSpc>
+              <a:buNone/>
+            </a:pPr>
+            <a:r>
+              <a:rPr lang="en-US" sz="850" dirty="0">
+                <a:solidFill>
+                  <a:srgbClr val="D6DEEB"/>
+                </a:solidFill>
+                <a:latin typeface="Consolas" pitchFamily="34" charset="0"/>
+                <a:ea typeface="Consolas" pitchFamily="34" charset="-122"/>
+                <a:cs typeface="Consolas" pitchFamily="34" charset="-120"/>
+              </a:rPr>
+              <a:t>).AssignOpeningBoundary(...)   </a:t>
+            </a:r>
+            <a:pPr indent="0" marL="0">
+              <a:lnSpc>
+                <a:spcPct val="108000"/>
+              </a:lnSpc>
+              <a:buNone/>
+            </a:pPr>
+            <a:r>
+              <a:rPr lang="en-US" sz="850" dirty="0">
+                <a:solidFill>
+                  <a:srgbClr val="7F9C7A"/>
+                </a:solidFill>
+                <a:latin typeface="Consolas" pitchFamily="34" charset="0"/>
+                <a:ea typeface="Consolas" pitchFamily="34" charset="-122"/>
+                <a:cs typeface="Consolas" pitchFamily="34" charset="-120"/>
+              </a:rPr>
+              <a:t># 개구부(출구)</a:t>
+            </a:r>
+            <a:endParaRPr lang="en-US" sz="850" dirty="0"/>
+          </a:p>
+          <a:p>
+            <a:pPr indent="0" marL="0">
+              <a:lnSpc>
+                <a:spcPct val="108000"/>
+              </a:lnSpc>
+              <a:buNone/>
+            </a:pPr>
+            <a:r>
+              <a:rPr lang="en-US" sz="850" dirty="0">
+                <a:solidFill>
+                  <a:srgbClr val="D6DEEB"/>
+                </a:solidFill>
+                <a:latin typeface="Consolas" pitchFamily="34" charset="0"/>
+                <a:ea typeface="Consolas" pitchFamily="34" charset="-122"/>
+                <a:cs typeface="Consolas" pitchFamily="34" charset="-120"/>
+              </a:rPr>
+              <a:t>    oDesign.GetModule(</a:t>
+            </a:r>
+            <a:pPr indent="0" marL="0">
+              <a:lnSpc>
+                <a:spcPct val="108000"/>
+              </a:lnSpc>
+              <a:buNone/>
+            </a:pPr>
+            <a:r>
+              <a:rPr lang="en-US" sz="850" dirty="0">
+                <a:solidFill>
+                  <a:srgbClr val="E6A26B"/>
+                </a:solidFill>
+                <a:latin typeface="Consolas" pitchFamily="34" charset="0"/>
+                <a:ea typeface="Consolas" pitchFamily="34" charset="-122"/>
+                <a:cs typeface="Consolas" pitchFamily="34" charset="-120"/>
+              </a:rPr>
+              <a:t>"MeshRegion"</a:t>
+            </a:r>
+            <a:pPr indent="0" marL="0">
+              <a:lnSpc>
+                <a:spcPct val="108000"/>
+              </a:lnSpc>
+              <a:buNone/>
+            </a:pPr>
+            <a:r>
+              <a:rPr lang="en-US" sz="850" dirty="0">
+                <a:solidFill>
+                  <a:srgbClr val="D6DEEB"/>
+                </a:solidFill>
+                <a:latin typeface="Consolas" pitchFamily="34" charset="0"/>
+                <a:ea typeface="Consolas" pitchFamily="34" charset="-122"/>
+                <a:cs typeface="Consolas" pitchFamily="34" charset="-120"/>
+              </a:rPr>
+              <a:t>).AssignMeshRegion(...)           </a:t>
+            </a:r>
+            <a:pPr indent="0" marL="0">
+              <a:lnSpc>
+                <a:spcPct val="108000"/>
+              </a:lnSpc>
+              <a:buNone/>
+            </a:pPr>
+            <a:r>
+              <a:rPr lang="en-US" sz="850" dirty="0">
+                <a:solidFill>
+                  <a:srgbClr val="7F9C7A"/>
+                </a:solidFill>
+                <a:latin typeface="Consolas" pitchFamily="34" charset="0"/>
+                <a:ea typeface="Consolas" pitchFamily="34" charset="-122"/>
+                <a:cs typeface="Consolas" pitchFamily="34" charset="-120"/>
+              </a:rPr>
+              <a:t># 로컬 메시</a:t>
+            </a:r>
+            <a:endParaRPr lang="en-US" sz="850" dirty="0"/>
+          </a:p>
+          <a:p>
+            <a:pPr indent="0" marL="0">
+              <a:lnSpc>
+                <a:spcPct val="108000"/>
+              </a:lnSpc>
+              <a:buNone/>
+            </a:pPr>
+            <a:r>
+              <a:rPr lang="en-US" sz="850" dirty="0">
+                <a:solidFill>
+                  <a:srgbClr val="D6DEEB"/>
+                </a:solidFill>
+                <a:latin typeface="Consolas" pitchFamily="34" charset="0"/>
+                <a:ea typeface="Consolas" pitchFamily="34" charset="-122"/>
+                <a:cs typeface="Consolas" pitchFamily="34" charset="-120"/>
+              </a:rPr>
+              <a:t> </a:t>
+            </a:r>
+            <a:endParaRPr lang="en-US" sz="850" dirty="0"/>
+          </a:p>
+          <a:p>
+            <a:pPr indent="0" marL="0">
+              <a:lnSpc>
+                <a:spcPct val="108000"/>
+              </a:lnSpc>
+              <a:buNone/>
+            </a:pPr>
+            <a:r>
+              <a:rPr lang="en-US" sz="850" dirty="0">
+                <a:solidFill>
+                  <a:srgbClr val="D6DEEB"/>
+                </a:solidFill>
+                <a:latin typeface="Consolas" pitchFamily="34" charset="0"/>
+                <a:ea typeface="Consolas" pitchFamily="34" charset="-122"/>
+                <a:cs typeface="Consolas" pitchFamily="34" charset="-120"/>
+              </a:rPr>
+              <a:t>    _create_lane_rectangles(oEditor, </a:t>
+            </a:r>
+            <a:pPr indent="0" marL="0">
+              <a:lnSpc>
+                <a:spcPct val="108000"/>
+              </a:lnSpc>
+              <a:buNone/>
+            </a:pPr>
+            <a:r>
+              <a:rPr lang="en-US" sz="850" dirty="0">
+                <a:solidFill>
+                  <a:srgbClr val="E6A26B"/>
+                </a:solidFill>
+                <a:latin typeface="Consolas" pitchFamily="34" charset="0"/>
+                <a:ea typeface="Consolas" pitchFamily="34" charset="-122"/>
+                <a:cs typeface="Consolas" pitchFamily="34" charset="-120"/>
+              </a:rPr>
+              <a:t>"V_inlet"</a:t>
+            </a:r>
+            <a:pPr indent="0" marL="0">
+              <a:lnSpc>
+                <a:spcPct val="108000"/>
+              </a:lnSpc>
+              <a:buNone/>
+            </a:pPr>
+            <a:r>
+              <a:rPr lang="en-US" sz="850" dirty="0">
+                <a:solidFill>
+                  <a:srgbClr val="D6DEEB"/>
+                </a:solidFill>
+                <a:latin typeface="Consolas" pitchFamily="34" charset="0"/>
+                <a:ea typeface="Consolas" pitchFamily="34" charset="-122"/>
+                <a:cs typeface="Consolas" pitchFamily="34" charset="-120"/>
+              </a:rPr>
+              <a:t>,  x_pos,  y_bank1, params)   </a:t>
+            </a:r>
+            <a:pPr indent="0" marL="0">
+              <a:lnSpc>
+                <a:spcPct val="108000"/>
+              </a:lnSpc>
+              <a:buNone/>
+            </a:pPr>
+            <a:r>
+              <a:rPr lang="en-US" sz="850" dirty="0">
+                <a:solidFill>
+                  <a:srgbClr val="7F9C7A"/>
+                </a:solidFill>
+                <a:latin typeface="Consolas" pitchFamily="34" charset="0"/>
+                <a:ea typeface="Consolas" pitchFamily="34" charset="-122"/>
+                <a:cs typeface="Consolas" pitchFamily="34" charset="-120"/>
+              </a:rPr>
+              <a:t># 측정면 동적 생성</a:t>
+            </a:r>
+            <a:endParaRPr lang="en-US" sz="850" dirty="0"/>
+          </a:p>
+          <a:p>
+            <a:pPr indent="0" marL="0">
+              <a:lnSpc>
+                <a:spcPct val="108000"/>
+              </a:lnSpc>
+              <a:buNone/>
+            </a:pPr>
+            <a:r>
+              <a:rPr lang="en-US" sz="850" dirty="0">
+                <a:solidFill>
+                  <a:srgbClr val="D6DEEB"/>
+                </a:solidFill>
+                <a:latin typeface="Consolas" pitchFamily="34" charset="0"/>
+                <a:ea typeface="Consolas" pitchFamily="34" charset="-122"/>
+                <a:cs typeface="Consolas" pitchFamily="34" charset="-120"/>
+              </a:rPr>
+              <a:t>    _create_lane_rectangles(oEditor, </a:t>
+            </a:r>
+            <a:pPr indent="0" marL="0">
+              <a:lnSpc>
+                <a:spcPct val="108000"/>
+              </a:lnSpc>
+              <a:buNone/>
+            </a:pPr>
+            <a:r>
+              <a:rPr lang="en-US" sz="850" dirty="0">
+                <a:solidFill>
+                  <a:srgbClr val="E6A26B"/>
+                </a:solidFill>
+                <a:latin typeface="Consolas" pitchFamily="34" charset="0"/>
+                <a:ea typeface="Consolas" pitchFamily="34" charset="-122"/>
+                <a:cs typeface="Consolas" pitchFamily="34" charset="-120"/>
+              </a:rPr>
+              <a:t>"V_inlet2"</a:t>
+            </a:r>
+            <a:pPr indent="0" marL="0">
+              <a:lnSpc>
+                <a:spcPct val="108000"/>
+              </a:lnSpc>
+              <a:buNone/>
+            </a:pPr>
+            <a:r>
+              <a:rPr lang="en-US" sz="850" dirty="0">
+                <a:solidFill>
+                  <a:srgbClr val="D6DEEB"/>
+                </a:solidFill>
+                <a:latin typeface="Consolas" pitchFamily="34" charset="0"/>
+                <a:ea typeface="Consolas" pitchFamily="34" charset="-122"/>
+                <a:cs typeface="Consolas" pitchFamily="34" charset="-120"/>
+              </a:rPr>
+              <a:t>, x_pos2, y_bank2, params)</a:t>
+            </a:r>
+            <a:endParaRPr lang="en-US" sz="850" dirty="0"/>
+          </a:p>
+          <a:p>
+            <a:pPr indent="0" marL="0">
+              <a:lnSpc>
+                <a:spcPct val="108000"/>
+              </a:lnSpc>
+              <a:buNone/>
+            </a:pPr>
+            <a:r>
+              <a:rPr lang="en-US" sz="850" dirty="0">
+                <a:solidFill>
+                  <a:srgbClr val="D6DEEB"/>
+                </a:solidFill>
+                <a:latin typeface="Consolas" pitchFamily="34" charset="0"/>
+                <a:ea typeface="Consolas" pitchFamily="34" charset="-122"/>
+                <a:cs typeface="Consolas" pitchFamily="34" charset="-120"/>
+              </a:rPr>
+              <a:t> </a:t>
+            </a:r>
+            <a:endParaRPr lang="en-US" sz="850" dirty="0"/>
+          </a:p>
+          <a:p>
+            <a:pPr indent="0" marL="0">
+              <a:lnSpc>
+                <a:spcPct val="108000"/>
+              </a:lnSpc>
+              <a:buNone/>
+            </a:pPr>
+            <a:r>
+              <a:rPr lang="en-US" sz="850" dirty="0">
+                <a:solidFill>
+                  <a:srgbClr val="D6DEEB"/>
+                </a:solidFill>
+                <a:latin typeface="Consolas" pitchFamily="34" charset="0"/>
+                <a:ea typeface="Consolas" pitchFamily="34" charset="-122"/>
+                <a:cs typeface="Consolas" pitchFamily="34" charset="-120"/>
+              </a:rPr>
+              <a:t>    oDesign.GetModule(</a:t>
+            </a:r>
+            <a:pPr indent="0" marL="0">
+              <a:lnSpc>
+                <a:spcPct val="108000"/>
+              </a:lnSpc>
+              <a:buNone/>
+            </a:pPr>
+            <a:r>
+              <a:rPr lang="en-US" sz="850" dirty="0">
+                <a:solidFill>
+                  <a:srgbClr val="E6A26B"/>
+                </a:solidFill>
+                <a:latin typeface="Consolas" pitchFamily="34" charset="0"/>
+                <a:ea typeface="Consolas" pitchFamily="34" charset="-122"/>
+                <a:cs typeface="Consolas" pitchFamily="34" charset="-120"/>
+              </a:rPr>
+              <a:t>"AnalysisSetup"</a:t>
+            </a:r>
+            <a:pPr indent="0" marL="0">
+              <a:lnSpc>
+                <a:spcPct val="108000"/>
+              </a:lnSpc>
+              <a:buNone/>
+            </a:pPr>
+            <a:r>
+              <a:rPr lang="en-US" sz="850" dirty="0">
+                <a:solidFill>
+                  <a:srgbClr val="D6DEEB"/>
+                </a:solidFill>
+                <a:latin typeface="Consolas" pitchFamily="34" charset="0"/>
+                <a:ea typeface="Consolas" pitchFamily="34" charset="-122"/>
+                <a:cs typeface="Consolas" pitchFamily="34" charset="-120"/>
+              </a:rPr>
+              <a:t>).InsertSetup(</a:t>
+            </a:r>
+            <a:pPr indent="0" marL="0">
+              <a:lnSpc>
+                <a:spcPct val="108000"/>
+              </a:lnSpc>
+              <a:buNone/>
+            </a:pPr>
+            <a:r>
+              <a:rPr lang="en-US" sz="850" dirty="0">
+                <a:solidFill>
+                  <a:srgbClr val="E6A26B"/>
+                </a:solidFill>
+                <a:latin typeface="Consolas" pitchFamily="34" charset="0"/>
+                <a:ea typeface="Consolas" pitchFamily="34" charset="-122"/>
+                <a:cs typeface="Consolas" pitchFamily="34" charset="-120"/>
+              </a:rPr>
+              <a:t>"IcepakSteadyState"</a:t>
+            </a:r>
+            <a:pPr indent="0" marL="0">
+              <a:lnSpc>
+                <a:spcPct val="108000"/>
+              </a:lnSpc>
+              <a:buNone/>
+            </a:pPr>
+            <a:r>
+              <a:rPr lang="en-US" sz="850" dirty="0">
+                <a:solidFill>
+                  <a:srgbClr val="D6DEEB"/>
+                </a:solidFill>
+                <a:latin typeface="Consolas" pitchFamily="34" charset="0"/>
+                <a:ea typeface="Consolas" pitchFamily="34" charset="-122"/>
+                <a:cs typeface="Consolas" pitchFamily="34" charset="-120"/>
+              </a:rPr>
+              <a:t>, [...])</a:t>
+            </a:r>
+            <a:endParaRPr lang="en-US" sz="850" dirty="0"/>
+          </a:p>
+          <a:p>
+            <a:pPr indent="0" marL="0">
+              <a:lnSpc>
+                <a:spcPct val="108000"/>
+              </a:lnSpc>
+              <a:buNone/>
+            </a:pPr>
+            <a:r>
+              <a:rPr lang="en-US" sz="850" dirty="0">
+                <a:solidFill>
+                  <a:srgbClr val="D6DEEB"/>
+                </a:solidFill>
+                <a:latin typeface="Consolas" pitchFamily="34" charset="0"/>
+                <a:ea typeface="Consolas" pitchFamily="34" charset="-122"/>
+                <a:cs typeface="Consolas" pitchFamily="34" charset="-120"/>
+              </a:rPr>
+              <a:t>    oDesign.AnalyzeAll()                                  </a:t>
+            </a:r>
+            <a:pPr indent="0" marL="0">
+              <a:lnSpc>
+                <a:spcPct val="108000"/>
+              </a:lnSpc>
+              <a:buNone/>
+            </a:pPr>
+            <a:r>
+              <a:rPr lang="en-US" sz="850" dirty="0">
+                <a:solidFill>
+                  <a:srgbClr val="7F9C7A"/>
+                </a:solidFill>
+                <a:latin typeface="Consolas" pitchFamily="34" charset="0"/>
+                <a:ea typeface="Consolas" pitchFamily="34" charset="-122"/>
+                <a:cs typeface="Consolas" pitchFamily="34" charset="-120"/>
+              </a:rPr>
+              <a:t># 메싱 + 솔브</a:t>
+            </a:r>
+            <a:endParaRPr lang="en-US" sz="850" dirty="0"/>
+          </a:p>
+          <a:p>
+            <a:pPr indent="0" marL="0">
+              <a:lnSpc>
+                <a:spcPct val="108000"/>
+              </a:lnSpc>
+              <a:buNone/>
+            </a:pPr>
+            <a:r>
+              <a:rPr lang="en-US" sz="850" dirty="0">
+                <a:solidFill>
+                  <a:srgbClr val="D6DEEB"/>
+                </a:solidFill>
+                <a:latin typeface="Consolas" pitchFamily="34" charset="0"/>
+                <a:ea typeface="Consolas" pitchFamily="34" charset="-122"/>
+                <a:cs typeface="Consolas" pitchFamily="34" charset="-120"/>
+              </a:rPr>
+              <a:t> </a:t>
+            </a:r>
+            <a:endParaRPr lang="en-US" sz="850" dirty="0"/>
+          </a:p>
+          <a:p>
+            <a:pPr indent="0" marL="0">
+              <a:lnSpc>
+                <a:spcPct val="108000"/>
+              </a:lnSpc>
+              <a:buNone/>
+            </a:pPr>
+            <a:r>
+              <a:rPr lang="en-US" sz="850" dirty="0">
+                <a:solidFill>
+                  <a:srgbClr val="D6DEEB"/>
+                </a:solidFill>
+                <a:latin typeface="Consolas" pitchFamily="34" charset="0"/>
+                <a:ea typeface="Consolas" pitchFamily="34" charset="-122"/>
+                <a:cs typeface="Consolas" pitchFamily="34" charset="-120"/>
+              </a:rPr>
+              <a:t>    oModule = oDesign.GetModule(</a:t>
+            </a:r>
+            <a:pPr indent="0" marL="0">
+              <a:lnSpc>
+                <a:spcPct val="108000"/>
+              </a:lnSpc>
+              <a:buNone/>
+            </a:pPr>
+            <a:r>
+              <a:rPr lang="en-US" sz="850" dirty="0">
+                <a:solidFill>
+                  <a:srgbClr val="E6A26B"/>
+                </a:solidFill>
+                <a:latin typeface="Consolas" pitchFamily="34" charset="0"/>
+                <a:ea typeface="Consolas" pitchFamily="34" charset="-122"/>
+                <a:cs typeface="Consolas" pitchFamily="34" charset="-120"/>
+              </a:rPr>
+              <a:t>"Solutions"</a:t>
+            </a:r>
+            <a:pPr indent="0" marL="0">
+              <a:lnSpc>
+                <a:spcPct val="108000"/>
+              </a:lnSpc>
+              <a:buNone/>
+            </a:pPr>
+            <a:r>
+              <a:rPr lang="en-US" sz="850" dirty="0">
+                <a:solidFill>
+                  <a:srgbClr val="D6DEEB"/>
+                </a:solidFill>
+                <a:latin typeface="Consolas" pitchFamily="34" charset="0"/>
+                <a:ea typeface="Consolas" pitchFamily="34" charset="-122"/>
+                <a:cs typeface="Consolas" pitchFamily="34" charset="-120"/>
+              </a:rPr>
+              <a:t>)</a:t>
+            </a:r>
+            <a:endParaRPr lang="en-US" sz="850" dirty="0"/>
+          </a:p>
+          <a:p>
+            <a:pPr indent="0" marL="0">
+              <a:lnSpc>
+                <a:spcPct val="108000"/>
+              </a:lnSpc>
+              <a:buNone/>
+            </a:pPr>
+            <a:r>
+              <a:rPr lang="en-US" sz="850" dirty="0">
+                <a:solidFill>
+                  <a:srgbClr val="D6DEEB"/>
+                </a:solidFill>
+                <a:latin typeface="Consolas" pitchFamily="34" charset="0"/>
+                <a:ea typeface="Consolas" pitchFamily="34" charset="-122"/>
+                <a:cs typeface="Consolas" pitchFamily="34" charset="-120"/>
+              </a:rPr>
+              <a:t>    oModule.EditFieldsSummarySetting(calc_args)           </a:t>
+            </a:r>
+            <a:pPr indent="0" marL="0">
+              <a:lnSpc>
+                <a:spcPct val="108000"/>
+              </a:lnSpc>
+              <a:buNone/>
+            </a:pPr>
+            <a:r>
+              <a:rPr lang="en-US" sz="850" dirty="0">
+                <a:solidFill>
+                  <a:srgbClr val="7F9C7A"/>
+                </a:solidFill>
+                <a:latin typeface="Consolas" pitchFamily="34" charset="0"/>
+                <a:ea typeface="Consolas" pitchFamily="34" charset="-122"/>
+                <a:cs typeface="Consolas" pitchFamily="34" charset="-120"/>
+              </a:rPr>
+              <a:t># 측정 순서 = CSV 행 순서</a:t>
+            </a:r>
+            <a:endParaRPr lang="en-US" sz="850" dirty="0"/>
+          </a:p>
+          <a:p>
+            <a:pPr indent="0" marL="0">
+              <a:lnSpc>
+                <a:spcPct val="108000"/>
+              </a:lnSpc>
+              <a:buNone/>
+            </a:pPr>
+            <a:r>
+              <a:rPr lang="en-US" sz="850" dirty="0">
+                <a:solidFill>
+                  <a:srgbClr val="D6DEEB"/>
+                </a:solidFill>
+                <a:latin typeface="Consolas" pitchFamily="34" charset="0"/>
+                <a:ea typeface="Consolas" pitchFamily="34" charset="-122"/>
+                <a:cs typeface="Consolas" pitchFamily="34" charset="-120"/>
+              </a:rPr>
+              <a:t>    oModule.ExportFieldsSummary([..., </a:t>
+            </a:r>
+            <a:pPr indent="0" marL="0">
+              <a:lnSpc>
+                <a:spcPct val="108000"/>
+              </a:lnSpc>
+              <a:buNone/>
+            </a:pPr>
+            <a:r>
+              <a:rPr lang="en-US" sz="850" dirty="0">
+                <a:solidFill>
+                  <a:srgbClr val="E6A26B"/>
+                </a:solidFill>
+                <a:latin typeface="Consolas" pitchFamily="34" charset="0"/>
+                <a:ea typeface="Consolas" pitchFamily="34" charset="-122"/>
+                <a:cs typeface="Consolas" pitchFamily="34" charset="-120"/>
+              </a:rPr>
+              <a:t>"ExportFileName:="</a:t>
+            </a:r>
+            <a:pPr indent="0" marL="0">
+              <a:lnSpc>
+                <a:spcPct val="108000"/>
+              </a:lnSpc>
+              <a:buNone/>
+            </a:pPr>
+            <a:r>
+              <a:rPr lang="en-US" sz="850" dirty="0">
+                <a:solidFill>
+                  <a:srgbClr val="D6DEEB"/>
+                </a:solidFill>
+                <a:latin typeface="Consolas" pitchFamily="34" charset="0"/>
+                <a:ea typeface="Consolas" pitchFamily="34" charset="-122"/>
+                <a:cs typeface="Consolas" pitchFamily="34" charset="-120"/>
+              </a:rPr>
+              <a:t>, result_path])</a:t>
+            </a:r>
+            <a:endParaRPr lang="en-US" sz="850" dirty="0"/>
+          </a:p>
+          <a:p>
+            <a:pPr indent="0" marL="0">
+              <a:lnSpc>
+                <a:spcPct val="108000"/>
+              </a:lnSpc>
+              <a:buNone/>
+            </a:pPr>
+            <a:r>
+              <a:rPr lang="en-US" sz="850" dirty="0">
+                <a:solidFill>
+                  <a:srgbClr val="D6DEEB"/>
+                </a:solidFill>
+                <a:latin typeface="Consolas" pitchFamily="34" charset="0"/>
+                <a:ea typeface="Consolas" pitchFamily="34" charset="-122"/>
+                <a:cs typeface="Consolas" pitchFamily="34" charset="-120"/>
+              </a:rPr>
+              <a:t>    </a:t>
+            </a:r>
+            <a:pPr indent="0" marL="0">
+              <a:lnSpc>
+                <a:spcPct val="108000"/>
+              </a:lnSpc>
+              <a:buNone/>
+            </a:pPr>
+            <a:r>
+              <a:rPr lang="en-US" sz="850" dirty="0">
+                <a:solidFill>
+                  <a:srgbClr val="C792EA"/>
+                </a:solidFill>
+                <a:latin typeface="Consolas" pitchFamily="34" charset="0"/>
+                <a:ea typeface="Consolas" pitchFamily="34" charset="-122"/>
+                <a:cs typeface="Consolas" pitchFamily="34" charset="-120"/>
+              </a:rPr>
+              <a:t>return</a:t>
+            </a:r>
+            <a:pPr indent="0" marL="0">
+              <a:lnSpc>
+                <a:spcPct val="108000"/>
+              </a:lnSpc>
+              <a:buNone/>
+            </a:pPr>
+            <a:r>
+              <a:rPr lang="en-US" sz="850" dirty="0">
+                <a:solidFill>
+                  <a:srgbClr val="D6DEEB"/>
+                </a:solidFill>
+                <a:latin typeface="Consolas" pitchFamily="34" charset="0"/>
+                <a:ea typeface="Consolas" pitchFamily="34" charset="-122"/>
+                <a:cs typeface="Consolas" pitchFamily="34" charset="-120"/>
+              </a:rPr>
+              <a:t> ipk, result_path, pao_volume_mm3</a:t>
+            </a:r>
+            <a:endParaRPr lang="en-US" sz="850" dirty="0"/>
+          </a:p>
+        </p:txBody>
+      </p:sp>
+      <p:sp>
+        <p:nvSpPr>
+          <p:cNvPr id="13" name="Text 11"/>
+          <p:cNvSpPr txBox="1"/>
+          <p:nvPr/>
+        </p:nvSpPr>
+        <p:spPr>
+          <a:xfrm>
+            <a:off x="502920" y="6455664"/>
+            <a:ext cx="11183112" cy="219456"/>
+          </a:xfrm>
+          <a:prstGeom prst="rect">
+            <a:avLst/>
+          </a:prstGeom>
+          <a:noFill/>
+          <a:ln/>
+        </p:spPr>
+        <p:txBody>
+          <a:bodyPr wrap="square" lIns="0" tIns="0" rIns="0" bIns="0" rtlCol="0" anchor="ctr"/>
+          <a:lstStyle/>
+          <a:p>
+            <a:pPr indent="0" marL="0">
+              <a:buNone/>
+            </a:pPr>
+            <a:r>
+              <a:rPr lang="en-US" sz="850" i="1" dirty="0">
+                <a:solidFill>
+                  <a:srgbClr val="6B7A8F"/>
+                </a:solidFill>
+                <a:latin typeface="Malgun Gothic" pitchFamily="34" charset="0"/>
+                <a:ea typeface="Malgun Gothic" pitchFamily="34" charset="-122"/>
+                <a:cs typeface="Malgun Gothic" pitchFamily="34" charset="-120"/>
+              </a:rPr>
+              <a:t>※ 주요 흐름 위주로 발췌 · 긴 인자 목록은 (...)로 생략, 설계 치수는 변수명으로 대체</a:t>
+            </a:r>
+            <a:endParaRPr lang="en-US" sz="850" dirty="0"/>
+          </a:p>
+        </p:txBody>
+      </p:sp>
+    </p:spTree>
+  </p:cSld>
+  <p:clrMapOvr>
+    <a:masterClrMapping/>
+  </p:clrMapOvr>
+</p:sld>
+</file>
+
 <file path=ppt/slides/slide2.xml><?xml version="1.0" encoding="utf-8"?>
 <p:sld xmlns:a="http://schemas.openxmlformats.org/drawingml/2006/main" xmlns:r="http://schemas.openxmlformats.org/officeDocument/2006/relationships" xmlns:p="http://schemas.openxmlformats.org/presentationml/2006/main">
   <p:cSld name="Slide 2">
@@ -6544,6 +10727,45 @@
               <a:t>4.  DOE 데이터 확보 현황</a:t>
             </a:r>
             <a:endParaRPr lang="en-US" sz="1100" dirty="0"/>
+          </a:p>
+        </p:txBody>
+      </p:sp>
+      <p:sp>
+        <p:nvSpPr>
+          <p:cNvPr id="18" name="Text 16"/>
+          <p:cNvSpPr txBox="1"/>
+          <p:nvPr/>
+        </p:nvSpPr>
+        <p:spPr>
+          <a:xfrm>
+            <a:off x="502920" y="6400800"/>
+            <a:ext cx="11183112" cy="237744"/>
+          </a:xfrm>
+          <a:prstGeom prst="rect">
+            <a:avLst/>
+          </a:prstGeom>
+          <a:noFill/>
+          <a:ln/>
+        </p:spPr>
+        <p:txBody>
+          <a:bodyPr wrap="square" lIns="0" tIns="0" rIns="0" bIns="0" rtlCol="0" anchor="ctr"/>
+          <a:lstStyle/>
+          <a:p>
+            <a:pPr indent="0" marL="0">
+              <a:buNone/>
+            </a:pPr>
+            <a:r>
+              <a:rPr lang="en-US" sz="950" dirty="0">
+                <a:solidFill>
+                  <a:srgbClr val="6B7A8F"/>
+                </a:solidFill>
+                <a:latin typeface="Malgun Gothic" pitchFamily="34" charset="0"/>
+                <a:ea typeface="Malgun Gothic" pitchFamily="34" charset="-122"/>
+                <a:cs typeface="Malgun Gothic" pitchFamily="34" charset="-120"/>
+              </a:rPr>
+              <a:t>부록   A-1  SolidWorks 제어 코드   ·   A-2  Icepak 제어 코드</a:t>
+            </a:r>
+            <a:endParaRPr lang="en-US" sz="950" dirty="0"/>
           </a:p>
         </p:txBody>
       </p:sp>
@@ -17263,7 +21485,7 @@
                 <a:ea typeface="Malgun Gothic" pitchFamily="34" charset="-122"/>
                 <a:cs typeface="Malgun Gothic" pitchFamily="34" charset="-120"/>
               </a:rPr>
-              <a:t>코드 발췌</a:t>
+              <a:t>중량 산출</a:t>
             </a:r>
             <a:endParaRPr lang="en-US" sz="1300" dirty="0"/>
           </a:p>
@@ -17277,20 +21499,20 @@
         </p:nvSpPr>
         <p:spPr>
           <a:xfrm>
-            <a:off x="6574536" y="1865376"/>
-            <a:ext cx="4965192" cy="3264408"/>
+            <a:off x="6647688" y="1920240"/>
+            <a:ext cx="4846320" cy="868680"/>
           </a:xfrm>
           <a:prstGeom prst="roundRect">
             <a:avLst>
-              <a:gd name="adj" fmla="val 1681"/>
+              <a:gd name="adj" fmla="val 6316"/>
             </a:avLst>
           </a:prstGeom>
           <a:solidFill>
-            <a:srgbClr val="1E2430"/>
+            <a:srgbClr val="F7F9FC"/>
           </a:solidFill>
-          <a:ln w="12700">
+          <a:ln w="9525">
             <a:solidFill>
-              <a:srgbClr val="1E2430"/>
+              <a:srgbClr val="DDE3EB"/>
             </a:solidFill>
             <a:prstDash val="solid"/>
           </a:ln>
@@ -17298,89 +21520,14 @@
       </p:sp>
       <p:sp>
         <p:nvSpPr>
-          <p:cNvPr id="24" name="Shape 21"/>
-          <p:cNvSpPr/>
-          <p:nvPr/>
-        </p:nvSpPr>
-        <p:spPr>
-          <a:xfrm>
-            <a:off x="6739128" y="1993392"/>
-            <a:ext cx="91440" cy="91440"/>
-          </a:xfrm>
-          <a:prstGeom prst="ellipse">
-            <a:avLst/>
-          </a:prstGeom>
-          <a:solidFill>
-            <a:srgbClr val="FF5F57"/>
-          </a:solidFill>
-          <a:ln w="12700">
-            <a:solidFill>
-              <a:srgbClr val="FF5F57"/>
-            </a:solidFill>
-            <a:prstDash val="solid"/>
-          </a:ln>
-        </p:spPr>
-      </p:sp>
-      <p:sp>
-        <p:nvSpPr>
-          <p:cNvPr id="25" name="Shape 22"/>
-          <p:cNvSpPr/>
-          <p:nvPr/>
-        </p:nvSpPr>
-        <p:spPr>
-          <a:xfrm>
-            <a:off x="6894576" y="1993392"/>
-            <a:ext cx="91440" cy="91440"/>
-          </a:xfrm>
-          <a:prstGeom prst="ellipse">
-            <a:avLst/>
-          </a:prstGeom>
-          <a:solidFill>
-            <a:srgbClr val="FEBC2E"/>
-          </a:solidFill>
-          <a:ln w="12700">
-            <a:solidFill>
-              <a:srgbClr val="FEBC2E"/>
-            </a:solidFill>
-            <a:prstDash val="solid"/>
-          </a:ln>
-        </p:spPr>
-      </p:sp>
-      <p:sp>
-        <p:nvSpPr>
-          <p:cNvPr id="26" name="Shape 23"/>
-          <p:cNvSpPr/>
-          <p:nvPr/>
-        </p:nvSpPr>
-        <p:spPr>
-          <a:xfrm>
-            <a:off x="7050024" y="1993392"/>
-            <a:ext cx="91440" cy="91440"/>
-          </a:xfrm>
-          <a:prstGeom prst="ellipse">
-            <a:avLst/>
-          </a:prstGeom>
-          <a:solidFill>
-            <a:srgbClr val="28C840"/>
-          </a:solidFill>
-          <a:ln w="12700">
-            <a:solidFill>
-              <a:srgbClr val="28C840"/>
-            </a:solidFill>
-            <a:prstDash val="solid"/>
-          </a:ln>
-        </p:spPr>
-      </p:sp>
-      <p:sp>
-        <p:nvSpPr>
-          <p:cNvPr id="27" name="Text 24"/>
+          <p:cNvPr id="24" name="Text 21"/>
           <p:cNvSpPr txBox="1"/>
           <p:nvPr/>
         </p:nvSpPr>
         <p:spPr>
           <a:xfrm>
-            <a:off x="7232904" y="1929384"/>
-            <a:ext cx="4142232" cy="219456"/>
+            <a:off x="6793992" y="1975104"/>
+            <a:ext cx="4572000" cy="758952"/>
           </a:xfrm>
           <a:prstGeom prst="rect">
             <a:avLst/>
@@ -17393,56 +21540,572 @@
           <a:lstStyle/>
           <a:p>
             <a:pPr indent="0" marL="0">
-              <a:buNone/>
-            </a:pPr>
-            <a:r>
-              <a:rPr lang="en-US" sz="850" dirty="0">
-                <a:solidFill>
-                  <a:srgbClr val="8A94A6"/>
-                </a:solidFill>
-                <a:latin typeface="Consolas" pitchFamily="34" charset="0"/>
-                <a:ea typeface="Consolas" pitchFamily="34" charset="-122"/>
-                <a:cs typeface="Consolas" pitchFamily="34" charset="-120"/>
-              </a:rPr>
-              <a:t>Solidworks.py — update_sw()</a:t>
-            </a:r>
-            <a:endParaRPr lang="en-US" sz="850" dirty="0"/>
+              <a:lnSpc>
+                <a:spcPct val="135000"/>
+              </a:lnSpc>
+              <a:buNone/>
+            </a:pPr>
+            <a:r>
+              <a:rPr lang="en-US" sz="1050" dirty="0">
+                <a:solidFill>
+                  <a:srgbClr val="1C2733"/>
+                </a:solidFill>
+                <a:latin typeface="Malgun Gothic" pitchFamily="34" charset="0"/>
+                <a:ea typeface="Malgun Gothic" pitchFamily="34" charset="-122"/>
+                <a:cs typeface="Malgun Gothic" pitchFamily="34" charset="-120"/>
+              </a:rPr>
+              <a:t>PAO 부피 = 완전충진 형상 부피(상수) − 알루미늄 부피</a:t>
+            </a:r>
+            <a:endParaRPr lang="en-US" sz="1050" dirty="0"/>
+          </a:p>
+          <a:p>
+            <a:pPr indent="0" marL="0">
+              <a:lnSpc>
+                <a:spcPct val="135000"/>
+              </a:lnSpc>
+              <a:buNone/>
+            </a:pPr>
+            <a:r>
+              <a:rPr lang="en-US" sz="1050" b="1" dirty="0">
+                <a:solidFill>
+                  <a:srgbClr val="16305B"/>
+                </a:solidFill>
+                <a:latin typeface="Malgun Gothic" pitchFamily="34" charset="0"/>
+                <a:ea typeface="Malgun Gothic" pitchFamily="34" charset="-122"/>
+                <a:cs typeface="Malgun Gothic" pitchFamily="34" charset="-120"/>
+              </a:rPr>
+              <a:t>중  량   = 알루미늄 질량 + PAO 부피 × 794 kg/m³</a:t>
+            </a:r>
+            <a:endParaRPr lang="en-US" sz="1050" dirty="0"/>
           </a:p>
         </p:txBody>
       </p:sp>
-      <p:sp>
-        <p:nvSpPr>
-          <p:cNvPr id="28" name="Shape 25"/>
-          <p:cNvSpPr/>
-          <p:nvPr/>
-        </p:nvSpPr>
-        <p:spPr>
-          <a:xfrm>
-            <a:off x="6574536" y="2212848"/>
-            <a:ext cx="4965192" cy="0"/>
-          </a:xfrm>
-          <a:prstGeom prst="line">
-            <a:avLst/>
-          </a:prstGeom>
-          <a:noFill/>
-          <a:ln w="9525">
-            <a:solidFill>
-              <a:srgbClr val="2E3645"/>
-            </a:solidFill>
-            <a:prstDash val="solid"/>
-          </a:ln>
-        </p:spPr>
-      </p:sp>
-      <p:sp>
-        <p:nvSpPr>
-          <p:cNvPr id="29" name="Text 26"/>
+      <p:graphicFrame>
+        <p:nvGraphicFramePr>
+          <p:cNvPr id="17" name="Table 1"/>
+          <p:cNvGraphicFramePr>
+            <a:graphicFrameLocks noGrp="1"/>
+          </p:cNvGraphicFramePr>
+          <p:nvPr>
+            <p:extLst>
+              <p:ext uri="{D42A27DB-BD31-4B8C-83A1-F6EECF244321}">
+                <p14:modId xmlns:p14="http://schemas.microsoft.com/office/powerpoint/2010/main" val="1579011935"/>
+              </p:ext>
+            </p:extLst>
+          </p:nvPr>
+        </p:nvGraphicFramePr>
+        <p:xfrm>
+          <a:off x="6647688" y="2971800"/>
+          <a:ext cx="4846320" cy="914400"/>
+        </p:xfrm>
+        <a:graphic>
+          <a:graphicData uri="http://schemas.openxmlformats.org/drawingml/2006/table">
+            <a:tbl>
+              <a:tblPr/>
+              <a:tblGrid>
+                <a:gridCol w="1188720"/>
+                <a:gridCol w="3657600"/>
+              </a:tblGrid>
+              <a:tr h="365760">
+                <a:tc>
+                  <a:txBody>
+                    <a:bodyPr/>
+                    <a:lstStyle/>
+                    <a:p>
+                      <a:pPr indent="0" marL="0">
+                        <a:buNone/>
+                      </a:pPr>
+                      <a:r>
+                        <a:rPr lang="en-US" sz="950" b="1" dirty="0">
+                          <a:solidFill>
+                            <a:srgbClr val="16305B"/>
+                          </a:solidFill>
+                          <a:latin typeface="Malgun Gothic" pitchFamily="34" charset="0"/>
+                          <a:ea typeface="Malgun Gothic" pitchFamily="34" charset="-122"/>
+                          <a:cs typeface="Malgun Gothic" pitchFamily="34" charset="-120"/>
+                        </a:rPr>
+                        <a:t>항목</a:t>
+                      </a:r>
+                      <a:endParaRPr lang="en-US" sz="950" dirty="0">
+                        <a:latin typeface="Malgun Gothic" charset="0"/>
+                        <a:ea typeface="Malgun Gothic" charset="0"/>
+                        <a:cs typeface="Malgun Gothic" charset="0"/>
+                      </a:endParaRPr>
+                    </a:p>
+                  </a:txBody>
+                  <a:tcPr marL="50800" marR="50800" marT="25400" marB="25400" anchor="ctr">
+                    <a:lnL w="0" cap="flat" cmpd="sng" algn="ctr">
+                      <a:noFill/>
+                    </a:lnL>
+                    <a:lnR w="0" cap="flat" cmpd="sng" algn="ctr">
+                      <a:noFill/>
+                    </a:lnR>
+                    <a:lnT w="0" cap="flat" cmpd="sng" algn="ctr">
+                      <a:noFill/>
+                    </a:lnT>
+                    <a:lnB w="6350" cap="flat" cmpd="sng" algn="ctr">
+                      <a:solidFill>
+                        <a:srgbClr val="DDE3EB"/>
+                      </a:solidFill>
+                      <a:prstDash val="solid"/>
+                      <a:round/>
+                      <a:headEnd type="none" w="med" len="med"/>
+                      <a:tailEnd type="none" w="med" len="med"/>
+                    </a:lnB>
+                    <a:solidFill>
+                      <a:srgbClr val="EEF2F7"/>
+                    </a:solidFill>
+                  </a:tcPr>
+                </a:tc>
+                <a:tc>
+                  <a:txBody>
+                    <a:bodyPr/>
+                    <a:lstStyle/>
+                    <a:p>
+                      <a:pPr indent="0" marL="0">
+                        <a:buNone/>
+                      </a:pPr>
+                      <a:r>
+                        <a:rPr lang="en-US" sz="950" b="1" dirty="0">
+                          <a:solidFill>
+                            <a:srgbClr val="16305B"/>
+                          </a:solidFill>
+                          <a:latin typeface="Malgun Gothic" pitchFamily="34" charset="0"/>
+                          <a:ea typeface="Malgun Gothic" pitchFamily="34" charset="-122"/>
+                          <a:cs typeface="Malgun Gothic" pitchFamily="34" charset="-120"/>
+                        </a:rPr>
+                        <a:t>내용</a:t>
+                      </a:r>
+                      <a:endParaRPr lang="en-US" sz="950" dirty="0">
+                        <a:latin typeface="Malgun Gothic" charset="0"/>
+                        <a:ea typeface="Malgun Gothic" charset="0"/>
+                        <a:cs typeface="Malgun Gothic" charset="0"/>
+                      </a:endParaRPr>
+                    </a:p>
+                  </a:txBody>
+                  <a:tcPr marL="50800" marR="50800" marT="25400" marB="25400" anchor="ctr">
+                    <a:lnL w="0" cap="flat" cmpd="sng" algn="ctr">
+                      <a:noFill/>
+                    </a:lnL>
+                    <a:lnR w="0" cap="flat" cmpd="sng" algn="ctr">
+                      <a:noFill/>
+                    </a:lnR>
+                    <a:lnT w="0" cap="flat" cmpd="sng" algn="ctr">
+                      <a:noFill/>
+                    </a:lnT>
+                    <a:lnB w="6350" cap="flat" cmpd="sng" algn="ctr">
+                      <a:solidFill>
+                        <a:srgbClr val="DDE3EB"/>
+                      </a:solidFill>
+                      <a:prstDash val="solid"/>
+                      <a:round/>
+                      <a:headEnd type="none" w="med" len="med"/>
+                      <a:tailEnd type="none" w="med" len="med"/>
+                    </a:lnB>
+                    <a:solidFill>
+                      <a:srgbClr val="EEF2F7"/>
+                    </a:solidFill>
+                  </a:tcPr>
+                </a:tc>
+              </a:tr>
+              <a:tr h="365760">
+                <a:tc>
+                  <a:txBody>
+                    <a:bodyPr/>
+                    <a:lstStyle/>
+                    <a:p>
+                      <a:pPr indent="0" marL="0">
+                        <a:buNone/>
+                      </a:pPr>
+                      <a:r>
+                        <a:rPr lang="en-US" sz="950" dirty="0">
+                          <a:solidFill>
+                            <a:srgbClr val="1C2733"/>
+                          </a:solidFill>
+                          <a:latin typeface="Malgun Gothic" pitchFamily="34" charset="0"/>
+                          <a:ea typeface="Malgun Gothic" pitchFamily="34" charset="-122"/>
+                          <a:cs typeface="Malgun Gothic" pitchFamily="34" charset="-120"/>
+                        </a:rPr>
+                        <a:t>취득 시점</a:t>
+                      </a:r>
+                      <a:endParaRPr lang="en-US" sz="950" dirty="0">
+                        <a:latin typeface="Malgun Gothic" charset="0"/>
+                        <a:ea typeface="Malgun Gothic" charset="0"/>
+                        <a:cs typeface="Malgun Gothic" charset="0"/>
+                      </a:endParaRPr>
+                    </a:p>
+                  </a:txBody>
+                  <a:tcPr marL="50800" marR="50800" marT="25400" marB="25400" anchor="ctr">
+                    <a:lnL w="0" cap="flat" cmpd="sng" algn="ctr">
+                      <a:noFill/>
+                    </a:lnL>
+                    <a:lnR w="0" cap="flat" cmpd="sng" algn="ctr">
+                      <a:noFill/>
+                    </a:lnR>
+                    <a:lnT w="0" cap="flat" cmpd="sng" algn="ctr">
+                      <a:noFill/>
+                    </a:lnT>
+                    <a:lnB w="6350" cap="flat" cmpd="sng" algn="ctr">
+                      <a:solidFill>
+                        <a:srgbClr val="DDE3EB"/>
+                      </a:solidFill>
+                      <a:prstDash val="solid"/>
+                      <a:round/>
+                      <a:headEnd type="none" w="med" len="med"/>
+                      <a:tailEnd type="none" w="med" len="med"/>
+                    </a:lnB>
+                  </a:tcPr>
+                </a:tc>
+                <a:tc>
+                  <a:txBody>
+                    <a:bodyPr/>
+                    <a:lstStyle/>
+                    <a:p>
+                      <a:pPr indent="0" marL="0">
+                        <a:buNone/>
+                      </a:pPr>
+                      <a:r>
+                        <a:rPr lang="en-US" sz="950" dirty="0">
+                          <a:solidFill>
+                            <a:srgbClr val="1C2733"/>
+                          </a:solidFill>
+                          <a:latin typeface="Malgun Gothic" pitchFamily="34" charset="0"/>
+                          <a:ea typeface="Malgun Gothic" pitchFamily="34" charset="-122"/>
+                          <a:cs typeface="Malgun Gothic" pitchFamily="34" charset="-120"/>
+                        </a:rPr>
+                        <a:t>리빌드 직후 어셈블리에서 질량 특성 일괄 취득</a:t>
+                      </a:r>
+                      <a:endParaRPr lang="en-US" sz="950" dirty="0">
+                        <a:latin typeface="Malgun Gothic" charset="0"/>
+                        <a:ea typeface="Malgun Gothic" charset="0"/>
+                        <a:cs typeface="Malgun Gothic" charset="0"/>
+                      </a:endParaRPr>
+                    </a:p>
+                  </a:txBody>
+                  <a:tcPr marL="50800" marR="50800" marT="25400" marB="25400" anchor="ctr">
+                    <a:lnL w="0" cap="flat" cmpd="sng" algn="ctr">
+                      <a:noFill/>
+                    </a:lnL>
+                    <a:lnR w="0" cap="flat" cmpd="sng" algn="ctr">
+                      <a:noFill/>
+                    </a:lnR>
+                    <a:lnT w="0" cap="flat" cmpd="sng" algn="ctr">
+                      <a:noFill/>
+                    </a:lnT>
+                    <a:lnB w="6350" cap="flat" cmpd="sng" algn="ctr">
+                      <a:solidFill>
+                        <a:srgbClr val="DDE3EB"/>
+                      </a:solidFill>
+                      <a:prstDash val="solid"/>
+                      <a:round/>
+                      <a:headEnd type="none" w="med" len="med"/>
+                      <a:tailEnd type="none" w="med" len="med"/>
+                    </a:lnB>
+                  </a:tcPr>
+                </a:tc>
+              </a:tr>
+              <a:tr h="365760">
+                <a:tc>
+                  <a:txBody>
+                    <a:bodyPr/>
+                    <a:lstStyle/>
+                    <a:p>
+                      <a:pPr indent="0" marL="0">
+                        <a:buNone/>
+                      </a:pPr>
+                      <a:r>
+                        <a:rPr lang="en-US" sz="950" dirty="0">
+                          <a:solidFill>
+                            <a:srgbClr val="1C2733"/>
+                          </a:solidFill>
+                          <a:latin typeface="Malgun Gothic" pitchFamily="34" charset="0"/>
+                          <a:ea typeface="Malgun Gothic" pitchFamily="34" charset="-122"/>
+                          <a:cs typeface="Malgun Gothic" pitchFamily="34" charset="-120"/>
+                        </a:rPr>
+                        <a:t>반환값 해석</a:t>
+                      </a:r>
+                      <a:endParaRPr lang="en-US" sz="950" dirty="0">
+                        <a:latin typeface="Malgun Gothic" charset="0"/>
+                        <a:ea typeface="Malgun Gothic" charset="0"/>
+                        <a:cs typeface="Malgun Gothic" charset="0"/>
+                      </a:endParaRPr>
+                    </a:p>
+                  </a:txBody>
+                  <a:tcPr marL="50800" marR="50800" marT="25400" marB="25400" anchor="ctr">
+                    <a:lnL w="0" cap="flat" cmpd="sng" algn="ctr">
+                      <a:noFill/>
+                    </a:lnL>
+                    <a:lnR w="0" cap="flat" cmpd="sng" algn="ctr">
+                      <a:noFill/>
+                    </a:lnR>
+                    <a:lnT w="0" cap="flat" cmpd="sng" algn="ctr">
+                      <a:noFill/>
+                    </a:lnT>
+                    <a:lnB w="6350" cap="flat" cmpd="sng" algn="ctr">
+                      <a:solidFill>
+                        <a:srgbClr val="DDE3EB"/>
+                      </a:solidFill>
+                      <a:prstDash val="solid"/>
+                      <a:round/>
+                      <a:headEnd type="none" w="med" len="med"/>
+                      <a:tailEnd type="none" w="med" len="med"/>
+                    </a:lnB>
+                  </a:tcPr>
+                </a:tc>
+                <a:tc>
+                  <a:txBody>
+                    <a:bodyPr/>
+                    <a:lstStyle/>
+                    <a:p>
+                      <a:pPr indent="0" marL="0">
+                        <a:buNone/>
+                      </a:pPr>
+                      <a:r>
+                        <a:rPr lang="en-US" sz="950" dirty="0">
+                          <a:solidFill>
+                            <a:srgbClr val="1C2733"/>
+                          </a:solidFill>
+                          <a:latin typeface="Malgun Gothic" pitchFamily="34" charset="0"/>
+                          <a:ea typeface="Malgun Gothic" pitchFamily="34" charset="-122"/>
+                          <a:cs typeface="Malgun Gothic" pitchFamily="34" charset="-120"/>
+                        </a:rPr>
+                        <a:t>반환 순서 미문서화 → GUI 패널과 전량 대조해 확정</a:t>
+                      </a:r>
+                      <a:endParaRPr lang="en-US" sz="950" dirty="0">
+                        <a:latin typeface="Malgun Gothic" charset="0"/>
+                        <a:ea typeface="Malgun Gothic" charset="0"/>
+                        <a:cs typeface="Malgun Gothic" charset="0"/>
+                      </a:endParaRPr>
+                    </a:p>
+                  </a:txBody>
+                  <a:tcPr marL="50800" marR="50800" marT="25400" marB="25400" anchor="ctr">
+                    <a:lnL w="0" cap="flat" cmpd="sng" algn="ctr">
+                      <a:noFill/>
+                    </a:lnL>
+                    <a:lnR w="0" cap="flat" cmpd="sng" algn="ctr">
+                      <a:noFill/>
+                    </a:lnR>
+                    <a:lnT w="0" cap="flat" cmpd="sng" algn="ctr">
+                      <a:noFill/>
+                    </a:lnT>
+                    <a:lnB w="6350" cap="flat" cmpd="sng" algn="ctr">
+                      <a:solidFill>
+                        <a:srgbClr val="DDE3EB"/>
+                      </a:solidFill>
+                      <a:prstDash val="solid"/>
+                      <a:round/>
+                      <a:headEnd type="none" w="med" len="med"/>
+                      <a:tailEnd type="none" w="med" len="med"/>
+                    </a:lnB>
+                  </a:tcPr>
+                </a:tc>
+              </a:tr>
+              <a:tr h="365760">
+                <a:tc>
+                  <a:txBody>
+                    <a:bodyPr/>
+                    <a:lstStyle/>
+                    <a:p>
+                      <a:pPr indent="0" marL="0">
+                        <a:buNone/>
+                      </a:pPr>
+                      <a:r>
+                        <a:rPr lang="en-US" sz="950" dirty="0">
+                          <a:solidFill>
+                            <a:srgbClr val="1C2733"/>
+                          </a:solidFill>
+                          <a:latin typeface="Malgun Gothic" pitchFamily="34" charset="0"/>
+                          <a:ea typeface="Malgun Gothic" pitchFamily="34" charset="-122"/>
+                          <a:cs typeface="Malgun Gothic" pitchFamily="34" charset="-120"/>
+                        </a:rPr>
+                        <a:t>검산</a:t>
+                      </a:r>
+                      <a:endParaRPr lang="en-US" sz="950" dirty="0">
+                        <a:latin typeface="Malgun Gothic" charset="0"/>
+                        <a:ea typeface="Malgun Gothic" charset="0"/>
+                        <a:cs typeface="Malgun Gothic" charset="0"/>
+                      </a:endParaRPr>
+                    </a:p>
+                  </a:txBody>
+                  <a:tcPr marL="50800" marR="50800" marT="25400" marB="25400" anchor="ctr">
+                    <a:lnL w="0" cap="flat" cmpd="sng" algn="ctr">
+                      <a:noFill/>
+                    </a:lnL>
+                    <a:lnR w="0" cap="flat" cmpd="sng" algn="ctr">
+                      <a:noFill/>
+                    </a:lnR>
+                    <a:lnT w="0" cap="flat" cmpd="sng" algn="ctr">
+                      <a:noFill/>
+                    </a:lnT>
+                    <a:lnB w="6350" cap="flat" cmpd="sng" algn="ctr">
+                      <a:solidFill>
+                        <a:srgbClr val="DDE3EB"/>
+                      </a:solidFill>
+                      <a:prstDash val="solid"/>
+                      <a:round/>
+                      <a:headEnd type="none" w="med" len="med"/>
+                      <a:tailEnd type="none" w="med" len="med"/>
+                    </a:lnB>
+                  </a:tcPr>
+                </a:tc>
+                <a:tc>
+                  <a:txBody>
+                    <a:bodyPr/>
+                    <a:lstStyle/>
+                    <a:p>
+                      <a:pPr indent="0" marL="0">
+                        <a:buNone/>
+                      </a:pPr>
+                      <a:r>
+                        <a:rPr lang="en-US" sz="950" dirty="0">
+                          <a:solidFill>
+                            <a:srgbClr val="1C2733"/>
+                          </a:solidFill>
+                          <a:latin typeface="Malgun Gothic" pitchFamily="34" charset="0"/>
+                          <a:ea typeface="Malgun Gothic" pitchFamily="34" charset="-122"/>
+                          <a:cs typeface="Malgun Gothic" pitchFamily="34" charset="-120"/>
+                        </a:rPr>
+                        <a:t>산출값이 수기 계산값과 소수점까지 일치</a:t>
+                      </a:r>
+                      <a:endParaRPr lang="en-US" sz="950" dirty="0">
+                        <a:latin typeface="Malgun Gothic" charset="0"/>
+                        <a:ea typeface="Malgun Gothic" charset="0"/>
+                        <a:cs typeface="Malgun Gothic" charset="0"/>
+                      </a:endParaRPr>
+                    </a:p>
+                  </a:txBody>
+                  <a:tcPr marL="50800" marR="50800" marT="25400" marB="25400" anchor="ctr">
+                    <a:lnL w="0" cap="flat" cmpd="sng" algn="ctr">
+                      <a:noFill/>
+                    </a:lnL>
+                    <a:lnR w="0" cap="flat" cmpd="sng" algn="ctr">
+                      <a:noFill/>
+                    </a:lnR>
+                    <a:lnT w="0" cap="flat" cmpd="sng" algn="ctr">
+                      <a:noFill/>
+                    </a:lnT>
+                    <a:lnB w="6350" cap="flat" cmpd="sng" algn="ctr">
+                      <a:solidFill>
+                        <a:srgbClr val="DDE3EB"/>
+                      </a:solidFill>
+                      <a:prstDash val="solid"/>
+                      <a:round/>
+                      <a:headEnd type="none" w="med" len="med"/>
+                      <a:tailEnd type="none" w="med" len="med"/>
+                    </a:lnB>
+                  </a:tcPr>
+                </a:tc>
+              </a:tr>
+              <a:tr h="365760">
+                <a:tc>
+                  <a:txBody>
+                    <a:bodyPr/>
+                    <a:lstStyle/>
+                    <a:p>
+                      <a:pPr indent="0" marL="0">
+                        <a:buNone/>
+                      </a:pPr>
+                      <a:r>
+                        <a:rPr lang="en-US" sz="950" dirty="0">
+                          <a:solidFill>
+                            <a:srgbClr val="1C2733"/>
+                          </a:solidFill>
+                          <a:latin typeface="Malgun Gothic" pitchFamily="34" charset="0"/>
+                          <a:ea typeface="Malgun Gothic" pitchFamily="34" charset="-122"/>
+                          <a:cs typeface="Malgun Gothic" pitchFamily="34" charset="-120"/>
+                        </a:rPr>
+                        <a:t>교차검증</a:t>
+                      </a:r>
+                      <a:endParaRPr lang="en-US" sz="950" dirty="0">
+                        <a:latin typeface="Malgun Gothic" charset="0"/>
+                        <a:ea typeface="Malgun Gothic" charset="0"/>
+                        <a:cs typeface="Malgun Gothic" charset="0"/>
+                      </a:endParaRPr>
+                    </a:p>
+                  </a:txBody>
+                  <a:tcPr marL="50800" marR="50800" marT="25400" marB="25400" anchor="ctr">
+                    <a:lnL w="0" cap="flat" cmpd="sng" algn="ctr">
+                      <a:noFill/>
+                    </a:lnL>
+                    <a:lnR w="0" cap="flat" cmpd="sng" algn="ctr">
+                      <a:noFill/>
+                    </a:lnR>
+                    <a:lnT w="0" cap="flat" cmpd="sng" algn="ctr">
+                      <a:noFill/>
+                    </a:lnT>
+                    <a:lnB w="6350" cap="flat" cmpd="sng" algn="ctr">
+                      <a:solidFill>
+                        <a:srgbClr val="DDE3EB"/>
+                      </a:solidFill>
+                      <a:prstDash val="solid"/>
+                      <a:round/>
+                      <a:headEnd type="none" w="med" len="med"/>
+                      <a:tailEnd type="none" w="med" len="med"/>
+                    </a:lnB>
+                  </a:tcPr>
+                </a:tc>
+                <a:tc>
+                  <a:txBody>
+                    <a:bodyPr/>
+                    <a:lstStyle/>
+                    <a:p>
+                      <a:pPr indent="0" marL="0">
+                        <a:buNone/>
+                      </a:pPr>
+                      <a:r>
+                        <a:rPr lang="en-US" sz="950" dirty="0">
+                          <a:solidFill>
+                            <a:srgbClr val="1C2733"/>
+                          </a:solidFill>
+                          <a:latin typeface="Malgun Gothic" pitchFamily="34" charset="0"/>
+                          <a:ea typeface="Malgun Gothic" pitchFamily="34" charset="-122"/>
+                          <a:cs typeface="Malgun Gothic" pitchFamily="34" charset="-120"/>
+                        </a:rPr>
+                        <a:t>해석 측 유체 부피와 대조, 이상 시 로그 경고</a:t>
+                      </a:r>
+                      <a:endParaRPr lang="en-US" sz="950" dirty="0">
+                        <a:latin typeface="Malgun Gothic" charset="0"/>
+                        <a:ea typeface="Malgun Gothic" charset="0"/>
+                        <a:cs typeface="Malgun Gothic" charset="0"/>
+                      </a:endParaRPr>
+                    </a:p>
+                  </a:txBody>
+                  <a:tcPr marL="50800" marR="50800" marT="25400" marB="25400" anchor="ctr">
+                    <a:lnL w="0" cap="flat" cmpd="sng" algn="ctr">
+                      <a:noFill/>
+                    </a:lnL>
+                    <a:lnR w="0" cap="flat" cmpd="sng" algn="ctr">
+                      <a:noFill/>
+                    </a:lnR>
+                    <a:lnT w="0" cap="flat" cmpd="sng" algn="ctr">
+                      <a:noFill/>
+                    </a:lnT>
+                    <a:lnB w="6350" cap="flat" cmpd="sng" algn="ctr">
+                      <a:solidFill>
+                        <a:srgbClr val="DDE3EB"/>
+                      </a:solidFill>
+                      <a:prstDash val="solid"/>
+                      <a:round/>
+                      <a:headEnd type="none" w="med" len="med"/>
+                      <a:tailEnd type="none" w="med" len="med"/>
+                    </a:lnB>
+                  </a:tcPr>
+                </a:tc>
+              </a:tr>
+            </a:tbl>
+          </a:graphicData>
+        </a:graphic>
+      </p:graphicFrame>
+      <p:sp>
+        <p:nvSpPr>
+          <p:cNvPr id="26" name="Text 22"/>
           <p:cNvSpPr txBox="1"/>
           <p:nvPr/>
         </p:nvSpPr>
         <p:spPr>
           <a:xfrm>
-            <a:off x="6757416" y="2322576"/>
-            <a:ext cx="4672584" cy="2697480"/>
+            <a:off x="6647688" y="4956048"/>
+            <a:ext cx="4846320" cy="237744"/>
           </a:xfrm>
           <a:prstGeom prst="rect">
             <a:avLst/>
@@ -17451,625 +22114,30 @@
           <a:ln/>
         </p:spPr>
         <p:txBody>
-          <a:bodyPr wrap="square" lIns="0" tIns="0" rIns="0" bIns="0" rtlCol="0" anchor="t"/>
+          <a:bodyPr wrap="square" lIns="0" tIns="0" rIns="0" bIns="0" rtlCol="0" anchor="ctr"/>
           <a:lstStyle/>
           <a:p>
             <a:pPr indent="0" marL="0">
-              <a:lnSpc>
-                <a:spcPct val="112000"/>
-              </a:lnSpc>
-              <a:buNone/>
-            </a:pPr>
-            <a:r>
-              <a:rPr lang="en-US" sz="850" dirty="0">
-                <a:solidFill>
-                  <a:srgbClr val="D6DEEB"/>
-                </a:solidFill>
-                <a:latin typeface="Consolas" pitchFamily="34" charset="0"/>
-                <a:ea typeface="Consolas" pitchFamily="34" charset="-122"/>
-                <a:cs typeface="Consolas" pitchFamily="34" charset="-120"/>
-              </a:rPr>
-              <a:t>part  = app.ActivateDoc3(PART_PATH, False, 0, errors)</a:t>
-            </a:r>
-            <a:endParaRPr lang="en-US" sz="850" dirty="0"/>
-          </a:p>
-          <a:p>
-            <a:pPr indent="0" marL="0">
-              <a:lnSpc>
-                <a:spcPct val="112000"/>
-              </a:lnSpc>
-              <a:buNone/>
-            </a:pPr>
-            <a:r>
-              <a:rPr lang="en-US" sz="850" dirty="0">
-                <a:solidFill>
-                  <a:srgbClr val="D6DEEB"/>
-                </a:solidFill>
-                <a:latin typeface="Consolas" pitchFamily="34" charset="0"/>
-                <a:ea typeface="Consolas" pitchFamily="34" charset="-122"/>
-                <a:cs typeface="Consolas" pitchFamily="34" charset="-120"/>
-              </a:rPr>
-              <a:t>eqMgr = part.GetEquationMgr</a:t>
-            </a:r>
-            <a:endParaRPr lang="en-US" sz="850" dirty="0"/>
-          </a:p>
-          <a:p>
-            <a:pPr indent="0" marL="0">
-              <a:lnSpc>
-                <a:spcPct val="112000"/>
-              </a:lnSpc>
-              <a:buNone/>
-            </a:pPr>
-            <a:r>
-              <a:rPr lang="en-US" sz="850" dirty="0">
-                <a:solidFill>
-                  <a:srgbClr val="D6DEEB"/>
-                </a:solidFill>
-                <a:latin typeface="Consolas" pitchFamily="34" charset="0"/>
-                <a:ea typeface="Consolas" pitchFamily="34" charset="-122"/>
-                <a:cs typeface="Consolas" pitchFamily="34" charset="-120"/>
-              </a:rPr>
-              <a:t> </a:t>
-            </a:r>
-            <a:endParaRPr lang="en-US" sz="850" dirty="0"/>
-          </a:p>
-          <a:p>
-            <a:pPr indent="0" marL="0">
-              <a:lnSpc>
-                <a:spcPct val="112000"/>
-              </a:lnSpc>
-              <a:buNone/>
-            </a:pPr>
-            <a:r>
-              <a:rPr lang="en-US" sz="850" dirty="0">
-                <a:solidFill>
-                  <a:srgbClr val="7F9C7A"/>
-                </a:solidFill>
-                <a:latin typeface="Consolas" pitchFamily="34" charset="0"/>
-                <a:ea typeface="Consolas" pitchFamily="34" charset="-122"/>
-                <a:cs typeface="Consolas" pitchFamily="34" charset="-120"/>
-              </a:rPr>
-              <a:t># 수식 목록에서 변수명 → 인덱스 매핑</a:t>
-            </a:r>
-            <a:endParaRPr lang="en-US" sz="850" dirty="0"/>
-          </a:p>
-          <a:p>
-            <a:pPr indent="0" marL="0">
-              <a:lnSpc>
-                <a:spcPct val="112000"/>
-              </a:lnSpc>
-              <a:buNone/>
-            </a:pPr>
-            <a:r>
-              <a:rPr lang="en-US" sz="850" dirty="0">
-                <a:solidFill>
-                  <a:srgbClr val="C792EA"/>
-                </a:solidFill>
-                <a:latin typeface="Consolas" pitchFamily="34" charset="0"/>
-                <a:ea typeface="Consolas" pitchFamily="34" charset="-122"/>
-                <a:cs typeface="Consolas" pitchFamily="34" charset="-120"/>
-              </a:rPr>
-              <a:t>for</a:t>
-            </a:r>
-            <a:pPr indent="0" marL="0">
-              <a:lnSpc>
-                <a:spcPct val="112000"/>
-              </a:lnSpc>
-              <a:buNone/>
-            </a:pPr>
-            <a:r>
-              <a:rPr lang="en-US" sz="850" dirty="0">
-                <a:solidFill>
-                  <a:srgbClr val="D6DEEB"/>
-                </a:solidFill>
-                <a:latin typeface="Consolas" pitchFamily="34" charset="0"/>
-                <a:ea typeface="Consolas" pitchFamily="34" charset="-122"/>
-                <a:cs typeface="Consolas" pitchFamily="34" charset="-120"/>
-              </a:rPr>
-              <a:t> i </a:t>
-            </a:r>
-            <a:pPr indent="0" marL="0">
-              <a:lnSpc>
-                <a:spcPct val="112000"/>
-              </a:lnSpc>
-              <a:buNone/>
-            </a:pPr>
-            <a:r>
-              <a:rPr lang="en-US" sz="850" dirty="0">
-                <a:solidFill>
-                  <a:srgbClr val="C792EA"/>
-                </a:solidFill>
-                <a:latin typeface="Consolas" pitchFamily="34" charset="0"/>
-                <a:ea typeface="Consolas" pitchFamily="34" charset="-122"/>
-                <a:cs typeface="Consolas" pitchFamily="34" charset="-120"/>
-              </a:rPr>
-              <a:t>in</a:t>
-            </a:r>
-            <a:pPr indent="0" marL="0">
-              <a:lnSpc>
-                <a:spcPct val="112000"/>
-              </a:lnSpc>
-              <a:buNone/>
-            </a:pPr>
-            <a:r>
-              <a:rPr lang="en-US" sz="850" dirty="0">
-                <a:solidFill>
-                  <a:srgbClr val="D6DEEB"/>
-                </a:solidFill>
-                <a:latin typeface="Consolas" pitchFamily="34" charset="0"/>
-                <a:ea typeface="Consolas" pitchFamily="34" charset="-122"/>
-                <a:cs typeface="Consolas" pitchFamily="34" charset="-120"/>
-              </a:rPr>
-              <a:t> range(eqMgr.GetCount):</a:t>
-            </a:r>
-            <a:endParaRPr lang="en-US" sz="850" dirty="0"/>
-          </a:p>
-          <a:p>
-            <a:pPr indent="0" marL="0">
-              <a:lnSpc>
-                <a:spcPct val="112000"/>
-              </a:lnSpc>
-              <a:buNone/>
-            </a:pPr>
-            <a:r>
-              <a:rPr lang="en-US" sz="850" dirty="0">
-                <a:solidFill>
-                  <a:srgbClr val="D6DEEB"/>
-                </a:solidFill>
-                <a:latin typeface="Consolas" pitchFamily="34" charset="0"/>
-                <a:ea typeface="Consolas" pitchFamily="34" charset="-122"/>
-                <a:cs typeface="Consolas" pitchFamily="34" charset="-120"/>
-              </a:rPr>
-              <a:t>    lhs = eqMgr.Equation(i).split(</a:t>
-            </a:r>
-            <a:pPr indent="0" marL="0">
-              <a:lnSpc>
-                <a:spcPct val="112000"/>
-              </a:lnSpc>
-              <a:buNone/>
-            </a:pPr>
-            <a:r>
-              <a:rPr lang="en-US" sz="850" dirty="0">
-                <a:solidFill>
-                  <a:srgbClr val="E6A26B"/>
-                </a:solidFill>
-                <a:latin typeface="Consolas" pitchFamily="34" charset="0"/>
-                <a:ea typeface="Consolas" pitchFamily="34" charset="-122"/>
-                <a:cs typeface="Consolas" pitchFamily="34" charset="-120"/>
-              </a:rPr>
-              <a:t>'='</a:t>
-            </a:r>
-            <a:pPr indent="0" marL="0">
-              <a:lnSpc>
-                <a:spcPct val="112000"/>
-              </a:lnSpc>
-              <a:buNone/>
-            </a:pPr>
-            <a:r>
-              <a:rPr lang="en-US" sz="850" dirty="0">
-                <a:solidFill>
-                  <a:srgbClr val="D6DEEB"/>
-                </a:solidFill>
-                <a:latin typeface="Consolas" pitchFamily="34" charset="0"/>
-                <a:ea typeface="Consolas" pitchFamily="34" charset="-122"/>
-                <a:cs typeface="Consolas" pitchFamily="34" charset="-120"/>
-              </a:rPr>
-              <a:t>)[0].strip()</a:t>
-            </a:r>
-            <a:endParaRPr lang="en-US" sz="850" dirty="0"/>
-          </a:p>
-          <a:p>
-            <a:pPr indent="0" marL="0">
-              <a:lnSpc>
-                <a:spcPct val="112000"/>
-              </a:lnSpc>
-              <a:buNone/>
-            </a:pPr>
-            <a:r>
-              <a:rPr lang="en-US" sz="850" dirty="0">
-                <a:solidFill>
-                  <a:srgbClr val="D6DEEB"/>
-                </a:solidFill>
-                <a:latin typeface="Consolas" pitchFamily="34" charset="0"/>
-                <a:ea typeface="Consolas" pitchFamily="34" charset="-122"/>
-                <a:cs typeface="Consolas" pitchFamily="34" charset="-120"/>
-              </a:rPr>
-              <a:t>    name_to_i[lhs.strip(</a:t>
-            </a:r>
-            <a:pPr indent="0" marL="0">
-              <a:lnSpc>
-                <a:spcPct val="112000"/>
-              </a:lnSpc>
-              <a:buNone/>
-            </a:pPr>
-            <a:r>
-              <a:rPr lang="en-US" sz="850" dirty="0">
-                <a:solidFill>
-                  <a:srgbClr val="E6A26B"/>
-                </a:solidFill>
-                <a:latin typeface="Consolas" pitchFamily="34" charset="0"/>
-                <a:ea typeface="Consolas" pitchFamily="34" charset="-122"/>
-                <a:cs typeface="Consolas" pitchFamily="34" charset="-120"/>
-              </a:rPr>
-              <a:t>'"'</a:t>
-            </a:r>
-            <a:pPr indent="0" marL="0">
-              <a:lnSpc>
-                <a:spcPct val="112000"/>
-              </a:lnSpc>
-              <a:buNone/>
-            </a:pPr>
-            <a:r>
-              <a:rPr lang="en-US" sz="850" dirty="0">
-                <a:solidFill>
-                  <a:srgbClr val="D6DEEB"/>
-                </a:solidFill>
-                <a:latin typeface="Consolas" pitchFamily="34" charset="0"/>
-                <a:ea typeface="Consolas" pitchFamily="34" charset="-122"/>
-                <a:cs typeface="Consolas" pitchFamily="34" charset="-120"/>
-              </a:rPr>
-              <a:t>)] = i</a:t>
-            </a:r>
-            <a:endParaRPr lang="en-US" sz="850" dirty="0"/>
-          </a:p>
-          <a:p>
-            <a:pPr indent="0" marL="0">
-              <a:lnSpc>
-                <a:spcPct val="112000"/>
-              </a:lnSpc>
-              <a:buNone/>
-            </a:pPr>
-            <a:r>
-              <a:rPr lang="en-US" sz="850" dirty="0">
-                <a:solidFill>
-                  <a:srgbClr val="D6DEEB"/>
-                </a:solidFill>
-                <a:latin typeface="Consolas" pitchFamily="34" charset="0"/>
-                <a:ea typeface="Consolas" pitchFamily="34" charset="-122"/>
-                <a:cs typeface="Consolas" pitchFamily="34" charset="-120"/>
-              </a:rPr>
-              <a:t> </a:t>
-            </a:r>
-            <a:endParaRPr lang="en-US" sz="850" dirty="0"/>
-          </a:p>
-          <a:p>
-            <a:pPr indent="0" marL="0">
-              <a:lnSpc>
-                <a:spcPct val="112000"/>
-              </a:lnSpc>
-              <a:buNone/>
-            </a:pPr>
-            <a:r>
-              <a:rPr lang="en-US" sz="850" dirty="0">
-                <a:solidFill>
-                  <a:srgbClr val="7F9C7A"/>
-                </a:solidFill>
-                <a:latin typeface="Consolas" pitchFamily="34" charset="0"/>
-                <a:ea typeface="Consolas" pitchFamily="34" charset="-122"/>
-                <a:cs typeface="Consolas" pitchFamily="34" charset="-120"/>
-              </a:rPr>
-              <a:t># 전역변수 값 치환 (COM 속성 쓰기)</a:t>
-            </a:r>
-            <a:endParaRPr lang="en-US" sz="850" dirty="0"/>
-          </a:p>
-          <a:p>
-            <a:pPr indent="0" marL="0">
-              <a:lnSpc>
-                <a:spcPct val="112000"/>
-              </a:lnSpc>
-              <a:buNone/>
-            </a:pPr>
-            <a:r>
-              <a:rPr lang="en-US" sz="850" dirty="0">
-                <a:solidFill>
-                  <a:srgbClr val="C792EA"/>
-                </a:solidFill>
-                <a:latin typeface="Consolas" pitchFamily="34" charset="0"/>
-                <a:ea typeface="Consolas" pitchFamily="34" charset="-122"/>
-                <a:cs typeface="Consolas" pitchFamily="34" charset="-120"/>
-              </a:rPr>
-              <a:t>for</a:t>
-            </a:r>
-            <a:pPr indent="0" marL="0">
-              <a:lnSpc>
-                <a:spcPct val="112000"/>
-              </a:lnSpc>
-              <a:buNone/>
-            </a:pPr>
-            <a:r>
-              <a:rPr lang="en-US" sz="850" dirty="0">
-                <a:solidFill>
-                  <a:srgbClr val="D6DEEB"/>
-                </a:solidFill>
-                <a:latin typeface="Consolas" pitchFamily="34" charset="0"/>
-                <a:ea typeface="Consolas" pitchFamily="34" charset="-122"/>
-                <a:cs typeface="Consolas" pitchFamily="34" charset="-120"/>
-              </a:rPr>
-              <a:t> name </a:t>
-            </a:r>
-            <a:pPr indent="0" marL="0">
-              <a:lnSpc>
-                <a:spcPct val="112000"/>
-              </a:lnSpc>
-              <a:buNone/>
-            </a:pPr>
-            <a:r>
-              <a:rPr lang="en-US" sz="850" dirty="0">
-                <a:solidFill>
-                  <a:srgbClr val="C792EA"/>
-                </a:solidFill>
-                <a:latin typeface="Consolas" pitchFamily="34" charset="0"/>
-                <a:ea typeface="Consolas" pitchFamily="34" charset="-122"/>
-                <a:cs typeface="Consolas" pitchFamily="34" charset="-120"/>
-              </a:rPr>
-              <a:t>in</a:t>
-            </a:r>
-            <a:pPr indent="0" marL="0">
-              <a:lnSpc>
-                <a:spcPct val="112000"/>
-              </a:lnSpc>
-              <a:buNone/>
-            </a:pPr>
-            <a:r>
-              <a:rPr lang="en-US" sz="850" dirty="0">
-                <a:solidFill>
-                  <a:srgbClr val="D6DEEB"/>
-                </a:solidFill>
-                <a:latin typeface="Consolas" pitchFamily="34" charset="0"/>
-                <a:ea typeface="Consolas" pitchFamily="34" charset="-122"/>
-                <a:cs typeface="Consolas" pitchFamily="34" charset="-120"/>
-              </a:rPr>
-              <a:t> SW_PARAM_NAMES:</a:t>
-            </a:r>
-            <a:endParaRPr lang="en-US" sz="850" dirty="0"/>
-          </a:p>
-          <a:p>
-            <a:pPr indent="0" marL="0">
-              <a:lnSpc>
-                <a:spcPct val="112000"/>
-              </a:lnSpc>
-              <a:buNone/>
-            </a:pPr>
-            <a:r>
-              <a:rPr lang="en-US" sz="850" dirty="0">
-                <a:solidFill>
-                  <a:srgbClr val="D6DEEB"/>
-                </a:solidFill>
-                <a:latin typeface="Consolas" pitchFamily="34" charset="0"/>
-                <a:ea typeface="Consolas" pitchFamily="34" charset="-122"/>
-                <a:cs typeface="Consolas" pitchFamily="34" charset="-120"/>
-              </a:rPr>
-              <a:t>    eqMgr._oleobj_.Invoke(dispid, 0, DISPATCH_PROPERTYPUT,</a:t>
-            </a:r>
-            <a:endParaRPr lang="en-US" sz="850" dirty="0"/>
-          </a:p>
-          <a:p>
-            <a:pPr indent="0" marL="0">
-              <a:lnSpc>
-                <a:spcPct val="112000"/>
-              </a:lnSpc>
-              <a:buNone/>
-            </a:pPr>
-            <a:r>
-              <a:rPr lang="en-US" sz="850" dirty="0">
-                <a:solidFill>
-                  <a:srgbClr val="D6DEEB"/>
-                </a:solidFill>
-                <a:latin typeface="Consolas" pitchFamily="34" charset="0"/>
-                <a:ea typeface="Consolas" pitchFamily="34" charset="-122"/>
-                <a:cs typeface="Consolas" pitchFamily="34" charset="-120"/>
-              </a:rPr>
-              <a:t>        False, name_to_i[name], </a:t>
-            </a:r>
-            <a:pPr indent="0" marL="0">
-              <a:lnSpc>
-                <a:spcPct val="112000"/>
-              </a:lnSpc>
-              <a:buNone/>
-            </a:pPr>
-            <a:r>
-              <a:rPr lang="en-US" sz="850" dirty="0">
-                <a:solidFill>
-                  <a:srgbClr val="E6A26B"/>
-                </a:solidFill>
-                <a:latin typeface="Consolas" pitchFamily="34" charset="0"/>
-                <a:ea typeface="Consolas" pitchFamily="34" charset="-122"/>
-                <a:cs typeface="Consolas" pitchFamily="34" charset="-120"/>
-              </a:rPr>
-              <a:t>'"%s" = %s'</a:t>
-            </a:r>
-            <a:pPr indent="0" marL="0">
-              <a:lnSpc>
-                <a:spcPct val="112000"/>
-              </a:lnSpc>
-              <a:buNone/>
-            </a:pPr>
-            <a:r>
-              <a:rPr lang="en-US" sz="850" dirty="0">
-                <a:solidFill>
-                  <a:srgbClr val="D6DEEB"/>
-                </a:solidFill>
-                <a:latin typeface="Consolas" pitchFamily="34" charset="0"/>
-                <a:ea typeface="Consolas" pitchFamily="34" charset="-122"/>
-                <a:cs typeface="Consolas" pitchFamily="34" charset="-120"/>
-              </a:rPr>
-              <a:t> % (name, text))</a:t>
-            </a:r>
-            <a:endParaRPr lang="en-US" sz="850" dirty="0"/>
-          </a:p>
-          <a:p>
-            <a:pPr indent="0" marL="0">
-              <a:lnSpc>
-                <a:spcPct val="112000"/>
-              </a:lnSpc>
-              <a:buNone/>
-            </a:pPr>
-            <a:r>
-              <a:rPr lang="en-US" sz="850" dirty="0">
-                <a:solidFill>
-                  <a:srgbClr val="D6DEEB"/>
-                </a:solidFill>
-                <a:latin typeface="Consolas" pitchFamily="34" charset="0"/>
-                <a:ea typeface="Consolas" pitchFamily="34" charset="-122"/>
-                <a:cs typeface="Consolas" pitchFamily="34" charset="-120"/>
-              </a:rPr>
-              <a:t> </a:t>
-            </a:r>
-            <a:endParaRPr lang="en-US" sz="850" dirty="0"/>
-          </a:p>
-          <a:p>
-            <a:pPr indent="0" marL="0">
-              <a:lnSpc>
-                <a:spcPct val="112000"/>
-              </a:lnSpc>
-              <a:buNone/>
-            </a:pPr>
-            <a:r>
-              <a:rPr lang="en-US" sz="850" dirty="0">
-                <a:solidFill>
-                  <a:srgbClr val="D6DEEB"/>
-                </a:solidFill>
-                <a:latin typeface="Consolas" pitchFamily="34" charset="0"/>
-                <a:ea typeface="Consolas" pitchFamily="34" charset="-122"/>
-                <a:cs typeface="Consolas" pitchFamily="34" charset="-120"/>
-              </a:rPr>
-              <a:t>part.EditRebuild3              </a:t>
-            </a:r>
-            <a:pPr indent="0" marL="0">
-              <a:lnSpc>
-                <a:spcPct val="112000"/>
-              </a:lnSpc>
-              <a:buNone/>
-            </a:pPr>
-            <a:r>
-              <a:rPr lang="en-US" sz="850" dirty="0">
-                <a:solidFill>
-                  <a:srgbClr val="7F9C7A"/>
-                </a:solidFill>
-                <a:latin typeface="Consolas" pitchFamily="34" charset="0"/>
-                <a:ea typeface="Consolas" pitchFamily="34" charset="-122"/>
-                <a:cs typeface="Consolas" pitchFamily="34" charset="-120"/>
-              </a:rPr>
-              <a:t># 파트 리빌드</a:t>
-            </a:r>
-            <a:endParaRPr lang="en-US" sz="850" dirty="0"/>
-          </a:p>
-          <a:p>
-            <a:pPr indent="0" marL="0">
-              <a:lnSpc>
-                <a:spcPct val="112000"/>
-              </a:lnSpc>
-              <a:buNone/>
-            </a:pPr>
-            <a:r>
-              <a:rPr lang="en-US" sz="850" dirty="0">
-                <a:solidFill>
-                  <a:srgbClr val="D6DEEB"/>
-                </a:solidFill>
-                <a:latin typeface="Consolas" pitchFamily="34" charset="0"/>
-                <a:ea typeface="Consolas" pitchFamily="34" charset="-122"/>
-                <a:cs typeface="Consolas" pitchFamily="34" charset="-120"/>
-              </a:rPr>
-              <a:t>asm.ForceRebuild3(False)       </a:t>
-            </a:r>
-            <a:pPr indent="0" marL="0">
-              <a:lnSpc>
-                <a:spcPct val="112000"/>
-              </a:lnSpc>
-              <a:buNone/>
-            </a:pPr>
-            <a:r>
-              <a:rPr lang="en-US" sz="850" dirty="0">
-                <a:solidFill>
-                  <a:srgbClr val="7F9C7A"/>
-                </a:solidFill>
-                <a:latin typeface="Consolas" pitchFamily="34" charset="0"/>
-                <a:ea typeface="Consolas" pitchFamily="34" charset="-122"/>
-                <a:cs typeface="Consolas" pitchFamily="34" charset="-120"/>
-              </a:rPr>
-              <a:t># 어셈블리 리빌드</a:t>
-            </a:r>
-            <a:endParaRPr lang="en-US" sz="850" dirty="0"/>
-          </a:p>
-          <a:p>
-            <a:pPr indent="0" marL="0">
-              <a:lnSpc>
-                <a:spcPct val="112000"/>
-              </a:lnSpc>
-              <a:buNone/>
-            </a:pPr>
-            <a:r>
-              <a:rPr lang="en-US" sz="850" dirty="0">
-                <a:solidFill>
-                  <a:srgbClr val="D6DEEB"/>
-                </a:solidFill>
-                <a:latin typeface="Consolas" pitchFamily="34" charset="0"/>
-                <a:ea typeface="Consolas" pitchFamily="34" charset="-122"/>
-                <a:cs typeface="Consolas" pitchFamily="34" charset="-120"/>
-              </a:rPr>
-              <a:t>mp = asm.GetMassProperties     </a:t>
-            </a:r>
-            <a:pPr indent="0" marL="0">
-              <a:lnSpc>
-                <a:spcPct val="112000"/>
-              </a:lnSpc>
-              <a:buNone/>
-            </a:pPr>
-            <a:r>
-              <a:rPr lang="en-US" sz="850" dirty="0">
-                <a:solidFill>
-                  <a:srgbClr val="7F9C7A"/>
-                </a:solidFill>
-                <a:latin typeface="Consolas" pitchFamily="34" charset="0"/>
-                <a:ea typeface="Consolas" pitchFamily="34" charset="-122"/>
-                <a:cs typeface="Consolas" pitchFamily="34" charset="-120"/>
-              </a:rPr>
-              <a:t># [3] 부피 · [5] 질량</a:t>
-            </a:r>
-            <a:endParaRPr lang="en-US" sz="850" dirty="0"/>
-          </a:p>
-          <a:p>
-            <a:pPr indent="0" marL="0">
-              <a:lnSpc>
-                <a:spcPct val="112000"/>
-              </a:lnSpc>
-              <a:buNone/>
-            </a:pPr>
-            <a:r>
-              <a:rPr lang="en-US" sz="850" dirty="0">
-                <a:solidFill>
-                  <a:srgbClr val="D6DEEB"/>
-                </a:solidFill>
-                <a:latin typeface="Consolas" pitchFamily="34" charset="0"/>
-                <a:ea typeface="Consolas" pitchFamily="34" charset="-122"/>
-                <a:cs typeface="Consolas" pitchFamily="34" charset="-120"/>
-              </a:rPr>
-              <a:t>asm.SaveAs3(step_path, 0, 0)   </a:t>
-            </a:r>
-            <a:pPr indent="0" marL="0">
-              <a:lnSpc>
-                <a:spcPct val="112000"/>
-              </a:lnSpc>
-              <a:buNone/>
-            </a:pPr>
-            <a:r>
-              <a:rPr lang="en-US" sz="850" dirty="0">
-                <a:solidFill>
-                  <a:srgbClr val="7F9C7A"/>
-                </a:solidFill>
-                <a:latin typeface="Consolas" pitchFamily="34" charset="0"/>
-                <a:ea typeface="Consolas" pitchFamily="34" charset="-122"/>
-                <a:cs typeface="Consolas" pitchFamily="34" charset="-120"/>
-              </a:rPr>
-              <a:t># STEP 내보내기</a:t>
-            </a:r>
-            <a:endParaRPr lang="en-US" sz="850" dirty="0"/>
+              <a:buNone/>
+            </a:pPr>
+            <a:r>
+              <a:rPr lang="en-US" sz="900" i="1" dirty="0">
+                <a:solidFill>
+                  <a:srgbClr val="6B7A8F"/>
+                </a:solidFill>
+                <a:latin typeface="Malgun Gothic" pitchFamily="34" charset="0"/>
+                <a:ea typeface="Malgun Gothic" pitchFamily="34" charset="-122"/>
+                <a:cs typeface="Malgun Gothic" pitchFamily="34" charset="-120"/>
+              </a:rPr>
+              <a:t>※ 주요 코드는 부록 A-1 참고</a:t>
+            </a:r>
+            <a:endParaRPr lang="en-US" sz="900" dirty="0"/>
           </a:p>
         </p:txBody>
       </p:sp>
       <p:sp>
         <p:nvSpPr>
-          <p:cNvPr id="30" name="Shape 27"/>
+          <p:cNvPr id="27" name="Shape 23"/>
           <p:cNvSpPr/>
           <p:nvPr/>
         </p:nvSpPr>
@@ -18103,7 +22171,7 @@
       </p:sp>
       <p:sp>
         <p:nvSpPr>
-          <p:cNvPr id="31" name="Shape 28"/>
+          <p:cNvPr id="28" name="Shape 24"/>
           <p:cNvSpPr/>
           <p:nvPr/>
         </p:nvSpPr>
@@ -18128,7 +22196,7 @@
       </p:sp>
       <p:sp>
         <p:nvSpPr>
-          <p:cNvPr id="32" name="Text 29"/>
+          <p:cNvPr id="29" name="Text 25"/>
           <p:cNvSpPr txBox="1"/>
           <p:nvPr/>
         </p:nvSpPr>
@@ -18167,7 +22235,7 @@
       </p:sp>
       <p:sp>
         <p:nvSpPr>
-          <p:cNvPr id="33" name="Text 30"/>
+          <p:cNvPr id="30" name="Text 26"/>
           <p:cNvSpPr txBox="1"/>
           <p:nvPr/>
         </p:nvSpPr>
@@ -18206,7 +22274,7 @@
       </p:sp>
       <p:sp>
         <p:nvSpPr>
-          <p:cNvPr id="34" name="Shape 31"/>
+          <p:cNvPr id="31" name="Shape 27"/>
           <p:cNvSpPr/>
           <p:nvPr/>
         </p:nvSpPr>
@@ -18231,7 +22299,7 @@
       </p:sp>
       <p:sp>
         <p:nvSpPr>
-          <p:cNvPr id="35" name="Text 32"/>
+          <p:cNvPr id="32" name="Text 28"/>
           <p:cNvSpPr txBox="1"/>
           <p:nvPr/>
         </p:nvSpPr>
@@ -18270,7 +22338,7 @@
       </p:sp>
       <p:sp>
         <p:nvSpPr>
-          <p:cNvPr id="36" name="Text 33"/>
+          <p:cNvPr id="33" name="Text 29"/>
           <p:cNvSpPr txBox="1"/>
           <p:nvPr/>
         </p:nvSpPr>
@@ -18309,7 +22377,7 @@
       </p:sp>
       <p:sp>
         <p:nvSpPr>
-          <p:cNvPr id="37" name="Shape 34"/>
+          <p:cNvPr id="34" name="Shape 30"/>
           <p:cNvSpPr/>
           <p:nvPr/>
         </p:nvSpPr>
@@ -18334,7 +22402,7 @@
       </p:sp>
       <p:sp>
         <p:nvSpPr>
-          <p:cNvPr id="38" name="Text 35"/>
+          <p:cNvPr id="35" name="Text 31"/>
           <p:cNvSpPr txBox="1"/>
           <p:nvPr/>
         </p:nvSpPr>
@@ -18373,7 +22441,7 @@
       </p:sp>
       <p:sp>
         <p:nvSpPr>
-          <p:cNvPr id="39" name="Text 36"/>
+          <p:cNvPr id="36" name="Text 32"/>
           <p:cNvSpPr txBox="1"/>
           <p:nvPr/>
         </p:nvSpPr>
@@ -19906,34 +23974,932 @@
                 <a:ea typeface="Malgun Gothic" pitchFamily="34" charset="-122"/>
                 <a:cs typeface="Malgun Gothic" pitchFamily="34" charset="-120"/>
               </a:rPr>
-              <a:t>코드 발췌</a:t>
+              <a:t>측정 항목 및 결과 출력</a:t>
             </a:r>
             <a:endParaRPr lang="en-US" sz="1300" dirty="0"/>
           </a:p>
         </p:txBody>
       </p:sp>
-      <p:sp>
-        <p:nvSpPr>
-          <p:cNvPr id="46" name="Shape 44"/>
+      <p:graphicFrame>
+        <p:nvGraphicFramePr>
+          <p:cNvPr id="10" name="Table 0"/>
+          <p:cNvGraphicFramePr>
+            <a:graphicFrameLocks noGrp="1"/>
+          </p:cNvGraphicFramePr>
+          <p:nvPr>
+            <p:extLst>
+              <p:ext uri="{D42A27DB-BD31-4B8C-83A1-F6EECF244321}">
+                <p14:modId xmlns:p14="http://schemas.microsoft.com/office/powerpoint/2010/main" val="1579011935"/>
+              </p:ext>
+            </p:extLst>
+          </p:nvPr>
+        </p:nvGraphicFramePr>
+        <p:xfrm>
+          <a:off x="6647688" y="1920240"/>
+          <a:ext cx="4846320" cy="914400"/>
+        </p:xfrm>
+        <a:graphic>
+          <a:graphicData uri="http://schemas.openxmlformats.org/drawingml/2006/table">
+            <a:tbl>
+              <a:tblPr/>
+              <a:tblGrid>
+                <a:gridCol w="1737360"/>
+                <a:gridCol w="1645920"/>
+                <a:gridCol w="1463040"/>
+              </a:tblGrid>
+              <a:tr h="347472">
+                <a:tc>
+                  <a:txBody>
+                    <a:bodyPr/>
+                    <a:lstStyle/>
+                    <a:p>
+                      <a:pPr indent="0" marL="0">
+                        <a:buNone/>
+                      </a:pPr>
+                      <a:r>
+                        <a:rPr lang="en-US" sz="950" b="1" dirty="0">
+                          <a:solidFill>
+                            <a:srgbClr val="16305B"/>
+                          </a:solidFill>
+                          <a:latin typeface="Malgun Gothic" pitchFamily="34" charset="0"/>
+                          <a:ea typeface="Malgun Gothic" pitchFamily="34" charset="-122"/>
+                          <a:cs typeface="Malgun Gothic" pitchFamily="34" charset="-120"/>
+                        </a:rPr>
+                        <a:t>측정 대상</a:t>
+                      </a:r>
+                      <a:endParaRPr lang="en-US" sz="950" dirty="0">
+                        <a:latin typeface="Malgun Gothic" charset="0"/>
+                        <a:ea typeface="Malgun Gothic" charset="0"/>
+                        <a:cs typeface="Malgun Gothic" charset="0"/>
+                      </a:endParaRPr>
+                    </a:p>
+                  </a:txBody>
+                  <a:tcPr marL="50800" marR="50800" marT="25400" marB="25400" anchor="ctr">
+                    <a:lnL w="0" cap="flat" cmpd="sng" algn="ctr">
+                      <a:noFill/>
+                    </a:lnL>
+                    <a:lnR w="0" cap="flat" cmpd="sng" algn="ctr">
+                      <a:noFill/>
+                    </a:lnR>
+                    <a:lnT w="0" cap="flat" cmpd="sng" algn="ctr">
+                      <a:noFill/>
+                    </a:lnT>
+                    <a:lnB w="6350" cap="flat" cmpd="sng" algn="ctr">
+                      <a:solidFill>
+                        <a:srgbClr val="DDE3EB"/>
+                      </a:solidFill>
+                      <a:prstDash val="solid"/>
+                      <a:round/>
+                      <a:headEnd type="none" w="med" len="med"/>
+                      <a:tailEnd type="none" w="med" len="med"/>
+                    </a:lnB>
+                    <a:solidFill>
+                      <a:srgbClr val="EEF2F7"/>
+                    </a:solidFill>
+                  </a:tcPr>
+                </a:tc>
+                <a:tc>
+                  <a:txBody>
+                    <a:bodyPr/>
+                    <a:lstStyle/>
+                    <a:p>
+                      <a:pPr indent="0" marL="0">
+                        <a:buNone/>
+                      </a:pPr>
+                      <a:r>
+                        <a:rPr lang="en-US" sz="950" b="1" dirty="0">
+                          <a:solidFill>
+                            <a:srgbClr val="16305B"/>
+                          </a:solidFill>
+                          <a:latin typeface="Malgun Gothic" pitchFamily="34" charset="0"/>
+                          <a:ea typeface="Malgun Gothic" pitchFamily="34" charset="-122"/>
+                          <a:cs typeface="Malgun Gothic" pitchFamily="34" charset="-120"/>
+                        </a:rPr>
+                        <a:t>항목</a:t>
+                      </a:r>
+                      <a:endParaRPr lang="en-US" sz="950" dirty="0">
+                        <a:latin typeface="Malgun Gothic" charset="0"/>
+                        <a:ea typeface="Malgun Gothic" charset="0"/>
+                        <a:cs typeface="Malgun Gothic" charset="0"/>
+                      </a:endParaRPr>
+                    </a:p>
+                  </a:txBody>
+                  <a:tcPr marL="50800" marR="50800" marT="25400" marB="25400" anchor="ctr">
+                    <a:lnL w="0" cap="flat" cmpd="sng" algn="ctr">
+                      <a:noFill/>
+                    </a:lnL>
+                    <a:lnR w="0" cap="flat" cmpd="sng" algn="ctr">
+                      <a:noFill/>
+                    </a:lnR>
+                    <a:lnT w="0" cap="flat" cmpd="sng" algn="ctr">
+                      <a:noFill/>
+                    </a:lnT>
+                    <a:lnB w="6350" cap="flat" cmpd="sng" algn="ctr">
+                      <a:solidFill>
+                        <a:srgbClr val="DDE3EB"/>
+                      </a:solidFill>
+                      <a:prstDash val="solid"/>
+                      <a:round/>
+                      <a:headEnd type="none" w="med" len="med"/>
+                      <a:tailEnd type="none" w="med" len="med"/>
+                    </a:lnB>
+                    <a:solidFill>
+                      <a:srgbClr val="EEF2F7"/>
+                    </a:solidFill>
+                  </a:tcPr>
+                </a:tc>
+                <a:tc>
+                  <a:txBody>
+                    <a:bodyPr/>
+                    <a:lstStyle/>
+                    <a:p>
+                      <a:pPr indent="0" marL="0">
+                        <a:buNone/>
+                      </a:pPr>
+                      <a:r>
+                        <a:rPr lang="en-US" sz="950" b="1" dirty="0">
+                          <a:solidFill>
+                            <a:srgbClr val="16305B"/>
+                          </a:solidFill>
+                          <a:latin typeface="Malgun Gothic" pitchFamily="34" charset="0"/>
+                          <a:ea typeface="Malgun Gothic" pitchFamily="34" charset="-122"/>
+                          <a:cs typeface="Malgun Gothic" pitchFamily="34" charset="-120"/>
+                        </a:rPr>
+                        <a:t>개수</a:t>
+                      </a:r>
+                      <a:endParaRPr lang="en-US" sz="950" dirty="0">
+                        <a:latin typeface="Malgun Gothic" charset="0"/>
+                        <a:ea typeface="Malgun Gothic" charset="0"/>
+                        <a:cs typeface="Malgun Gothic" charset="0"/>
+                      </a:endParaRPr>
+                    </a:p>
+                  </a:txBody>
+                  <a:tcPr marL="50800" marR="50800" marT="25400" marB="25400" anchor="ctr">
+                    <a:lnL w="0" cap="flat" cmpd="sng" algn="ctr">
+                      <a:noFill/>
+                    </a:lnL>
+                    <a:lnR w="0" cap="flat" cmpd="sng" algn="ctr">
+                      <a:noFill/>
+                    </a:lnR>
+                    <a:lnT w="0" cap="flat" cmpd="sng" algn="ctr">
+                      <a:noFill/>
+                    </a:lnT>
+                    <a:lnB w="6350" cap="flat" cmpd="sng" algn="ctr">
+                      <a:solidFill>
+                        <a:srgbClr val="DDE3EB"/>
+                      </a:solidFill>
+                      <a:prstDash val="solid"/>
+                      <a:round/>
+                      <a:headEnd type="none" w="med" len="med"/>
+                      <a:tailEnd type="none" w="med" len="med"/>
+                    </a:lnB>
+                    <a:solidFill>
+                      <a:srgbClr val="EEF2F7"/>
+                    </a:solidFill>
+                  </a:tcPr>
+                </a:tc>
+              </a:tr>
+              <a:tr h="347472">
+                <a:tc>
+                  <a:txBody>
+                    <a:bodyPr/>
+                    <a:lstStyle/>
+                    <a:p>
+                      <a:pPr indent="0" marL="0">
+                        <a:buNone/>
+                      </a:pPr>
+                      <a:r>
+                        <a:rPr lang="en-US" sz="950" dirty="0">
+                          <a:solidFill>
+                            <a:srgbClr val="1C2733"/>
+                          </a:solidFill>
+                          <a:latin typeface="Malgun Gothic" pitchFamily="34" charset="0"/>
+                          <a:ea typeface="Malgun Gothic" pitchFamily="34" charset="-122"/>
+                          <a:cs typeface="Malgun Gothic" pitchFamily="34" charset="-120"/>
+                        </a:rPr>
+                        <a:t>발열원</a:t>
+                      </a:r>
+                      <a:endParaRPr lang="en-US" sz="950" dirty="0">
+                        <a:latin typeface="Malgun Gothic" charset="0"/>
+                        <a:ea typeface="Malgun Gothic" charset="0"/>
+                        <a:cs typeface="Malgun Gothic" charset="0"/>
+                      </a:endParaRPr>
+                    </a:p>
+                  </a:txBody>
+                  <a:tcPr marL="50800" marR="50800" marT="25400" marB="25400" anchor="ctr">
+                    <a:lnL w="0" cap="flat" cmpd="sng" algn="ctr">
+                      <a:noFill/>
+                    </a:lnL>
+                    <a:lnR w="0" cap="flat" cmpd="sng" algn="ctr">
+                      <a:noFill/>
+                    </a:lnR>
+                    <a:lnT w="0" cap="flat" cmpd="sng" algn="ctr">
+                      <a:noFill/>
+                    </a:lnT>
+                    <a:lnB w="6350" cap="flat" cmpd="sng" algn="ctr">
+                      <a:solidFill>
+                        <a:srgbClr val="DDE3EB"/>
+                      </a:solidFill>
+                      <a:prstDash val="solid"/>
+                      <a:round/>
+                      <a:headEnd type="none" w="med" len="med"/>
+                      <a:tailEnd type="none" w="med" len="med"/>
+                    </a:lnB>
+                  </a:tcPr>
+                </a:tc>
+                <a:tc>
+                  <a:txBody>
+                    <a:bodyPr/>
+                    <a:lstStyle/>
+                    <a:p>
+                      <a:pPr indent="0" marL="0">
+                        <a:buNone/>
+                      </a:pPr>
+                      <a:r>
+                        <a:rPr lang="en-US" sz="950" dirty="0">
+                          <a:solidFill>
+                            <a:srgbClr val="1C2733"/>
+                          </a:solidFill>
+                          <a:latin typeface="Malgun Gothic" pitchFamily="34" charset="0"/>
+                          <a:ea typeface="Malgun Gothic" pitchFamily="34" charset="-122"/>
+                          <a:cs typeface="Malgun Gothic" pitchFamily="34" charset="-120"/>
+                        </a:rPr>
+                        <a:t>최고 · 평균 온도</a:t>
+                      </a:r>
+                      <a:endParaRPr lang="en-US" sz="950" dirty="0">
+                        <a:latin typeface="Malgun Gothic" charset="0"/>
+                        <a:ea typeface="Malgun Gothic" charset="0"/>
+                        <a:cs typeface="Malgun Gothic" charset="0"/>
+                      </a:endParaRPr>
+                    </a:p>
+                  </a:txBody>
+                  <a:tcPr marL="50800" marR="50800" marT="25400" marB="25400" anchor="ctr">
+                    <a:lnL w="0" cap="flat" cmpd="sng" algn="ctr">
+                      <a:noFill/>
+                    </a:lnL>
+                    <a:lnR w="0" cap="flat" cmpd="sng" algn="ctr">
+                      <a:noFill/>
+                    </a:lnR>
+                    <a:lnT w="0" cap="flat" cmpd="sng" algn="ctr">
+                      <a:noFill/>
+                    </a:lnT>
+                    <a:lnB w="6350" cap="flat" cmpd="sng" algn="ctr">
+                      <a:solidFill>
+                        <a:srgbClr val="DDE3EB"/>
+                      </a:solidFill>
+                      <a:prstDash val="solid"/>
+                      <a:round/>
+                      <a:headEnd type="none" w="med" len="med"/>
+                      <a:tailEnd type="none" w="med" len="med"/>
+                    </a:lnB>
+                  </a:tcPr>
+                </a:tc>
+                <a:tc>
+                  <a:txBody>
+                    <a:bodyPr/>
+                    <a:lstStyle/>
+                    <a:p>
+                      <a:pPr indent="0" marL="0">
+                        <a:buNone/>
+                      </a:pPr>
+                      <a:r>
+                        <a:rPr lang="en-US" sz="950" dirty="0">
+                          <a:solidFill>
+                            <a:srgbClr val="1C2733"/>
+                          </a:solidFill>
+                          <a:latin typeface="Malgun Gothic" pitchFamily="34" charset="0"/>
+                          <a:ea typeface="Malgun Gothic" pitchFamily="34" charset="-122"/>
+                          <a:cs typeface="Malgun Gothic" pitchFamily="34" charset="-120"/>
+                        </a:rPr>
+                        <a:t>9</a:t>
+                      </a:r>
+                      <a:endParaRPr lang="en-US" sz="950" dirty="0">
+                        <a:latin typeface="Malgun Gothic" charset="0"/>
+                        <a:ea typeface="Malgun Gothic" charset="0"/>
+                        <a:cs typeface="Malgun Gothic" charset="0"/>
+                      </a:endParaRPr>
+                    </a:p>
+                  </a:txBody>
+                  <a:tcPr marL="50800" marR="50800" marT="25400" marB="25400" anchor="ctr">
+                    <a:lnL w="0" cap="flat" cmpd="sng" algn="ctr">
+                      <a:noFill/>
+                    </a:lnL>
+                    <a:lnR w="0" cap="flat" cmpd="sng" algn="ctr">
+                      <a:noFill/>
+                    </a:lnR>
+                    <a:lnT w="0" cap="flat" cmpd="sng" algn="ctr">
+                      <a:noFill/>
+                    </a:lnT>
+                    <a:lnB w="6350" cap="flat" cmpd="sng" algn="ctr">
+                      <a:solidFill>
+                        <a:srgbClr val="DDE3EB"/>
+                      </a:solidFill>
+                      <a:prstDash val="solid"/>
+                      <a:round/>
+                      <a:headEnd type="none" w="med" len="med"/>
+                      <a:tailEnd type="none" w="med" len="med"/>
+                    </a:lnB>
+                  </a:tcPr>
+                </a:tc>
+              </a:tr>
+              <a:tr h="347472">
+                <a:tc>
+                  <a:txBody>
+                    <a:bodyPr/>
+                    <a:lstStyle/>
+                    <a:p>
+                      <a:pPr indent="0" marL="0">
+                        <a:buNone/>
+                      </a:pPr>
+                      <a:r>
+                        <a:rPr lang="en-US" sz="950" dirty="0">
+                          <a:solidFill>
+                            <a:srgbClr val="1C2733"/>
+                          </a:solidFill>
+                          <a:latin typeface="Malgun Gothic" pitchFamily="34" charset="0"/>
+                          <a:ea typeface="Malgun Gothic" pitchFamily="34" charset="-122"/>
+                          <a:cs typeface="Malgun Gothic" pitchFamily="34" charset="-120"/>
+                        </a:rPr>
+                        <a:t>팬 통과면</a:t>
+                      </a:r>
+                      <a:endParaRPr lang="en-US" sz="950" dirty="0">
+                        <a:latin typeface="Malgun Gothic" charset="0"/>
+                        <a:ea typeface="Malgun Gothic" charset="0"/>
+                        <a:cs typeface="Malgun Gothic" charset="0"/>
+                      </a:endParaRPr>
+                    </a:p>
+                  </a:txBody>
+                  <a:tcPr marL="50800" marR="50800" marT="25400" marB="25400" anchor="ctr">
+                    <a:lnL w="0" cap="flat" cmpd="sng" algn="ctr">
+                      <a:noFill/>
+                    </a:lnL>
+                    <a:lnR w="0" cap="flat" cmpd="sng" algn="ctr">
+                      <a:noFill/>
+                    </a:lnR>
+                    <a:lnT w="0" cap="flat" cmpd="sng" algn="ctr">
+                      <a:noFill/>
+                    </a:lnT>
+                    <a:lnB w="6350" cap="flat" cmpd="sng" algn="ctr">
+                      <a:solidFill>
+                        <a:srgbClr val="DDE3EB"/>
+                      </a:solidFill>
+                      <a:prstDash val="solid"/>
+                      <a:round/>
+                      <a:headEnd type="none" w="med" len="med"/>
+                      <a:tailEnd type="none" w="med" len="med"/>
+                    </a:lnB>
+                  </a:tcPr>
+                </a:tc>
+                <a:tc>
+                  <a:txBody>
+                    <a:bodyPr/>
+                    <a:lstStyle/>
+                    <a:p>
+                      <a:pPr indent="0" marL="0">
+                        <a:buNone/>
+                      </a:pPr>
+                      <a:r>
+                        <a:rPr lang="en-US" sz="950" dirty="0">
+                          <a:solidFill>
+                            <a:srgbClr val="1C2733"/>
+                          </a:solidFill>
+                          <a:latin typeface="Malgun Gothic" pitchFamily="34" charset="0"/>
+                          <a:ea typeface="Malgun Gothic" pitchFamily="34" charset="-122"/>
+                          <a:cs typeface="Malgun Gothic" pitchFamily="34" charset="-120"/>
+                        </a:rPr>
+                        <a:t>차압</a:t>
+                      </a:r>
+                      <a:endParaRPr lang="en-US" sz="950" dirty="0">
+                        <a:latin typeface="Malgun Gothic" charset="0"/>
+                        <a:ea typeface="Malgun Gothic" charset="0"/>
+                        <a:cs typeface="Malgun Gothic" charset="0"/>
+                      </a:endParaRPr>
+                    </a:p>
+                  </a:txBody>
+                  <a:tcPr marL="50800" marR="50800" marT="25400" marB="25400" anchor="ctr">
+                    <a:lnL w="0" cap="flat" cmpd="sng" algn="ctr">
+                      <a:noFill/>
+                    </a:lnL>
+                    <a:lnR w="0" cap="flat" cmpd="sng" algn="ctr">
+                      <a:noFill/>
+                    </a:lnR>
+                    <a:lnT w="0" cap="flat" cmpd="sng" algn="ctr">
+                      <a:noFill/>
+                    </a:lnT>
+                    <a:lnB w="6350" cap="flat" cmpd="sng" algn="ctr">
+                      <a:solidFill>
+                        <a:srgbClr val="DDE3EB"/>
+                      </a:solidFill>
+                      <a:prstDash val="solid"/>
+                      <a:round/>
+                      <a:headEnd type="none" w="med" len="med"/>
+                      <a:tailEnd type="none" w="med" len="med"/>
+                    </a:lnB>
+                  </a:tcPr>
+                </a:tc>
+                <a:tc>
+                  <a:txBody>
+                    <a:bodyPr/>
+                    <a:lstStyle/>
+                    <a:p>
+                      <a:pPr indent="0" marL="0">
+                        <a:buNone/>
+                      </a:pPr>
+                      <a:r>
+                        <a:rPr lang="en-US" sz="950" dirty="0">
+                          <a:solidFill>
+                            <a:srgbClr val="1C2733"/>
+                          </a:solidFill>
+                          <a:latin typeface="Malgun Gothic" pitchFamily="34" charset="0"/>
+                          <a:ea typeface="Malgun Gothic" pitchFamily="34" charset="-122"/>
+                          <a:cs typeface="Malgun Gothic" pitchFamily="34" charset="-120"/>
+                        </a:rPr>
+                        <a:t>1</a:t>
+                      </a:r>
+                      <a:endParaRPr lang="en-US" sz="950" dirty="0">
+                        <a:latin typeface="Malgun Gothic" charset="0"/>
+                        <a:ea typeface="Malgun Gothic" charset="0"/>
+                        <a:cs typeface="Malgun Gothic" charset="0"/>
+                      </a:endParaRPr>
+                    </a:p>
+                  </a:txBody>
+                  <a:tcPr marL="50800" marR="50800" marT="25400" marB="25400" anchor="ctr">
+                    <a:lnL w="0" cap="flat" cmpd="sng" algn="ctr">
+                      <a:noFill/>
+                    </a:lnL>
+                    <a:lnR w="0" cap="flat" cmpd="sng" algn="ctr">
+                      <a:noFill/>
+                    </a:lnR>
+                    <a:lnT w="0" cap="flat" cmpd="sng" algn="ctr">
+                      <a:noFill/>
+                    </a:lnT>
+                    <a:lnB w="6350" cap="flat" cmpd="sng" algn="ctr">
+                      <a:solidFill>
+                        <a:srgbClr val="DDE3EB"/>
+                      </a:solidFill>
+                      <a:prstDash val="solid"/>
+                      <a:round/>
+                      <a:headEnd type="none" w="med" len="med"/>
+                      <a:tailEnd type="none" w="med" len="med"/>
+                    </a:lnB>
+                  </a:tcPr>
+                </a:tc>
+              </a:tr>
+              <a:tr h="347472">
+                <a:tc>
+                  <a:txBody>
+                    <a:bodyPr/>
+                    <a:lstStyle/>
+                    <a:p>
+                      <a:pPr indent="0" marL="0">
+                        <a:buNone/>
+                      </a:pPr>
+                      <a:r>
+                        <a:rPr lang="en-US" sz="950" dirty="0">
+                          <a:solidFill>
+                            <a:srgbClr val="1C2733"/>
+                          </a:solidFill>
+                          <a:latin typeface="Malgun Gothic" pitchFamily="34" charset="0"/>
+                          <a:ea typeface="Malgun Gothic" pitchFamily="34" charset="-122"/>
+                          <a:cs typeface="Malgun Gothic" pitchFamily="34" charset="-120"/>
+                        </a:rPr>
+                        <a:t>1차 통과 유로</a:t>
+                      </a:r>
+                      <a:endParaRPr lang="en-US" sz="950" dirty="0">
+                        <a:latin typeface="Malgun Gothic" charset="0"/>
+                        <a:ea typeface="Malgun Gothic" charset="0"/>
+                        <a:cs typeface="Malgun Gothic" charset="0"/>
+                      </a:endParaRPr>
+                    </a:p>
+                  </a:txBody>
+                  <a:tcPr marL="50800" marR="50800" marT="25400" marB="25400" anchor="ctr">
+                    <a:lnL w="0" cap="flat" cmpd="sng" algn="ctr">
+                      <a:noFill/>
+                    </a:lnL>
+                    <a:lnR w="0" cap="flat" cmpd="sng" algn="ctr">
+                      <a:noFill/>
+                    </a:lnR>
+                    <a:lnT w="0" cap="flat" cmpd="sng" algn="ctr">
+                      <a:noFill/>
+                    </a:lnT>
+                    <a:lnB w="6350" cap="flat" cmpd="sng" algn="ctr">
+                      <a:solidFill>
+                        <a:srgbClr val="DDE3EB"/>
+                      </a:solidFill>
+                      <a:prstDash val="solid"/>
+                      <a:round/>
+                      <a:headEnd type="none" w="med" len="med"/>
+                      <a:tailEnd type="none" w="med" len="med"/>
+                    </a:lnB>
+                  </a:tcPr>
+                </a:tc>
+                <a:tc>
+                  <a:txBody>
+                    <a:bodyPr/>
+                    <a:lstStyle/>
+                    <a:p>
+                      <a:pPr indent="0" marL="0">
+                        <a:buNone/>
+                      </a:pPr>
+                      <a:r>
+                        <a:rPr lang="en-US" sz="950" dirty="0">
+                          <a:solidFill>
+                            <a:srgbClr val="1C2733"/>
+                          </a:solidFill>
+                          <a:latin typeface="Malgun Gothic" pitchFamily="34" charset="0"/>
+                          <a:ea typeface="Malgun Gothic" pitchFamily="34" charset="-122"/>
+                          <a:cs typeface="Malgun Gothic" pitchFamily="34" charset="-120"/>
+                        </a:rPr>
+                        <a:t>유량</a:t>
+                      </a:r>
+                      <a:endParaRPr lang="en-US" sz="950" dirty="0">
+                        <a:latin typeface="Malgun Gothic" charset="0"/>
+                        <a:ea typeface="Malgun Gothic" charset="0"/>
+                        <a:cs typeface="Malgun Gothic" charset="0"/>
+                      </a:endParaRPr>
+                    </a:p>
+                  </a:txBody>
+                  <a:tcPr marL="50800" marR="50800" marT="25400" marB="25400" anchor="ctr">
+                    <a:lnL w="0" cap="flat" cmpd="sng" algn="ctr">
+                      <a:noFill/>
+                    </a:lnL>
+                    <a:lnR w="0" cap="flat" cmpd="sng" algn="ctr">
+                      <a:noFill/>
+                    </a:lnR>
+                    <a:lnT w="0" cap="flat" cmpd="sng" algn="ctr">
+                      <a:noFill/>
+                    </a:lnT>
+                    <a:lnB w="6350" cap="flat" cmpd="sng" algn="ctr">
+                      <a:solidFill>
+                        <a:srgbClr val="DDE3EB"/>
+                      </a:solidFill>
+                      <a:prstDash val="solid"/>
+                      <a:round/>
+                      <a:headEnd type="none" w="med" len="med"/>
+                      <a:tailEnd type="none" w="med" len="med"/>
+                    </a:lnB>
+                  </a:tcPr>
+                </a:tc>
+                <a:tc>
+                  <a:txBody>
+                    <a:bodyPr/>
+                    <a:lstStyle/>
+                    <a:p>
+                      <a:pPr indent="0" marL="0">
+                        <a:buNone/>
+                      </a:pPr>
+                      <a:r>
+                        <a:rPr lang="en-US" sz="950" dirty="0">
+                          <a:solidFill>
+                            <a:srgbClr val="1C2733"/>
+                          </a:solidFill>
+                          <a:latin typeface="Malgun Gothic" pitchFamily="34" charset="0"/>
+                          <a:ea typeface="Malgun Gothic" pitchFamily="34" charset="-122"/>
+                          <a:cs typeface="Malgun Gothic" pitchFamily="34" charset="-120"/>
+                        </a:rPr>
+                        <a:t>핀 개수 + 1</a:t>
+                      </a:r>
+                      <a:endParaRPr lang="en-US" sz="950" dirty="0">
+                        <a:latin typeface="Malgun Gothic" charset="0"/>
+                        <a:ea typeface="Malgun Gothic" charset="0"/>
+                        <a:cs typeface="Malgun Gothic" charset="0"/>
+                      </a:endParaRPr>
+                    </a:p>
+                  </a:txBody>
+                  <a:tcPr marL="50800" marR="50800" marT="25400" marB="25400" anchor="ctr">
+                    <a:lnL w="0" cap="flat" cmpd="sng" algn="ctr">
+                      <a:noFill/>
+                    </a:lnL>
+                    <a:lnR w="0" cap="flat" cmpd="sng" algn="ctr">
+                      <a:noFill/>
+                    </a:lnR>
+                    <a:lnT w="0" cap="flat" cmpd="sng" algn="ctr">
+                      <a:noFill/>
+                    </a:lnT>
+                    <a:lnB w="6350" cap="flat" cmpd="sng" algn="ctr">
+                      <a:solidFill>
+                        <a:srgbClr val="DDE3EB"/>
+                      </a:solidFill>
+                      <a:prstDash val="solid"/>
+                      <a:round/>
+                      <a:headEnd type="none" w="med" len="med"/>
+                      <a:tailEnd type="none" w="med" len="med"/>
+                    </a:lnB>
+                  </a:tcPr>
+                </a:tc>
+              </a:tr>
+              <a:tr h="347472">
+                <a:tc>
+                  <a:txBody>
+                    <a:bodyPr/>
+                    <a:lstStyle/>
+                    <a:p>
+                      <a:pPr indent="0" marL="0">
+                        <a:buNone/>
+                      </a:pPr>
+                      <a:r>
+                        <a:rPr lang="en-US" sz="950" dirty="0">
+                          <a:solidFill>
+                            <a:srgbClr val="1C2733"/>
+                          </a:solidFill>
+                          <a:latin typeface="Malgun Gothic" pitchFamily="34" charset="0"/>
+                          <a:ea typeface="Malgun Gothic" pitchFamily="34" charset="-122"/>
+                          <a:cs typeface="Malgun Gothic" pitchFamily="34" charset="-120"/>
+                        </a:rPr>
+                        <a:t>2차 통과 유로</a:t>
+                      </a:r>
+                      <a:endParaRPr lang="en-US" sz="950" dirty="0">
+                        <a:latin typeface="Malgun Gothic" charset="0"/>
+                        <a:ea typeface="Malgun Gothic" charset="0"/>
+                        <a:cs typeface="Malgun Gothic" charset="0"/>
+                      </a:endParaRPr>
+                    </a:p>
+                  </a:txBody>
+                  <a:tcPr marL="50800" marR="50800" marT="25400" marB="25400" anchor="ctr">
+                    <a:lnL w="0" cap="flat" cmpd="sng" algn="ctr">
+                      <a:noFill/>
+                    </a:lnL>
+                    <a:lnR w="0" cap="flat" cmpd="sng" algn="ctr">
+                      <a:noFill/>
+                    </a:lnR>
+                    <a:lnT w="0" cap="flat" cmpd="sng" algn="ctr">
+                      <a:noFill/>
+                    </a:lnT>
+                    <a:lnB w="6350" cap="flat" cmpd="sng" algn="ctr">
+                      <a:solidFill>
+                        <a:srgbClr val="DDE3EB"/>
+                      </a:solidFill>
+                      <a:prstDash val="solid"/>
+                      <a:round/>
+                      <a:headEnd type="none" w="med" len="med"/>
+                      <a:tailEnd type="none" w="med" len="med"/>
+                    </a:lnB>
+                  </a:tcPr>
+                </a:tc>
+                <a:tc>
+                  <a:txBody>
+                    <a:bodyPr/>
+                    <a:lstStyle/>
+                    <a:p>
+                      <a:pPr indent="0" marL="0">
+                        <a:buNone/>
+                      </a:pPr>
+                      <a:r>
+                        <a:rPr lang="en-US" sz="950" dirty="0">
+                          <a:solidFill>
+                            <a:srgbClr val="1C2733"/>
+                          </a:solidFill>
+                          <a:latin typeface="Malgun Gothic" pitchFamily="34" charset="0"/>
+                          <a:ea typeface="Malgun Gothic" pitchFamily="34" charset="-122"/>
+                          <a:cs typeface="Malgun Gothic" pitchFamily="34" charset="-120"/>
+                        </a:rPr>
+                        <a:t>유량</a:t>
+                      </a:r>
+                      <a:endParaRPr lang="en-US" sz="950" dirty="0">
+                        <a:latin typeface="Malgun Gothic" charset="0"/>
+                        <a:ea typeface="Malgun Gothic" charset="0"/>
+                        <a:cs typeface="Malgun Gothic" charset="0"/>
+                      </a:endParaRPr>
+                    </a:p>
+                  </a:txBody>
+                  <a:tcPr marL="50800" marR="50800" marT="25400" marB="25400" anchor="ctr">
+                    <a:lnL w="0" cap="flat" cmpd="sng" algn="ctr">
+                      <a:noFill/>
+                    </a:lnL>
+                    <a:lnR w="0" cap="flat" cmpd="sng" algn="ctr">
+                      <a:noFill/>
+                    </a:lnR>
+                    <a:lnT w="0" cap="flat" cmpd="sng" algn="ctr">
+                      <a:noFill/>
+                    </a:lnT>
+                    <a:lnB w="6350" cap="flat" cmpd="sng" algn="ctr">
+                      <a:solidFill>
+                        <a:srgbClr val="DDE3EB"/>
+                      </a:solidFill>
+                      <a:prstDash val="solid"/>
+                      <a:round/>
+                      <a:headEnd type="none" w="med" len="med"/>
+                      <a:tailEnd type="none" w="med" len="med"/>
+                    </a:lnB>
+                  </a:tcPr>
+                </a:tc>
+                <a:tc>
+                  <a:txBody>
+                    <a:bodyPr/>
+                    <a:lstStyle/>
+                    <a:p>
+                      <a:pPr indent="0" marL="0">
+                        <a:buNone/>
+                      </a:pPr>
+                      <a:r>
+                        <a:rPr lang="en-US" sz="950" dirty="0">
+                          <a:solidFill>
+                            <a:srgbClr val="1C2733"/>
+                          </a:solidFill>
+                          <a:latin typeface="Malgun Gothic" pitchFamily="34" charset="0"/>
+                          <a:ea typeface="Malgun Gothic" pitchFamily="34" charset="-122"/>
+                          <a:cs typeface="Malgun Gothic" pitchFamily="34" charset="-120"/>
+                        </a:rPr>
+                        <a:t>핀 개수 + 1</a:t>
+                      </a:r>
+                      <a:endParaRPr lang="en-US" sz="950" dirty="0">
+                        <a:latin typeface="Malgun Gothic" charset="0"/>
+                        <a:ea typeface="Malgun Gothic" charset="0"/>
+                        <a:cs typeface="Malgun Gothic" charset="0"/>
+                      </a:endParaRPr>
+                    </a:p>
+                  </a:txBody>
+                  <a:tcPr marL="50800" marR="50800" marT="25400" marB="25400" anchor="ctr">
+                    <a:lnL w="0" cap="flat" cmpd="sng" algn="ctr">
+                      <a:noFill/>
+                    </a:lnL>
+                    <a:lnR w="0" cap="flat" cmpd="sng" algn="ctr">
+                      <a:noFill/>
+                    </a:lnR>
+                    <a:lnT w="0" cap="flat" cmpd="sng" algn="ctr">
+                      <a:noFill/>
+                    </a:lnT>
+                    <a:lnB w="6350" cap="flat" cmpd="sng" algn="ctr">
+                      <a:solidFill>
+                        <a:srgbClr val="DDE3EB"/>
+                      </a:solidFill>
+                      <a:prstDash val="solid"/>
+                      <a:round/>
+                      <a:headEnd type="none" w="med" len="med"/>
+                      <a:tailEnd type="none" w="med" len="med"/>
+                    </a:lnB>
+                  </a:tcPr>
+                </a:tc>
+              </a:tr>
+              <a:tr h="347472">
+                <a:tc>
+                  <a:txBody>
+                    <a:bodyPr/>
+                    <a:lstStyle/>
+                    <a:p>
+                      <a:pPr indent="0" marL="0">
+                        <a:buNone/>
+                      </a:pPr>
+                      <a:r>
+                        <a:rPr lang="en-US" sz="950" dirty="0">
+                          <a:solidFill>
+                            <a:srgbClr val="1C2733"/>
+                          </a:solidFill>
+                          <a:latin typeface="Malgun Gothic" pitchFamily="34" charset="0"/>
+                          <a:ea typeface="Malgun Gothic" pitchFamily="34" charset="-122"/>
+                          <a:cs typeface="Malgun Gothic" pitchFamily="34" charset="-120"/>
+                        </a:rPr>
+                        <a:t>전원모듈 분기 입구</a:t>
+                      </a:r>
+                      <a:endParaRPr lang="en-US" sz="950" dirty="0">
+                        <a:latin typeface="Malgun Gothic" charset="0"/>
+                        <a:ea typeface="Malgun Gothic" charset="0"/>
+                        <a:cs typeface="Malgun Gothic" charset="0"/>
+                      </a:endParaRPr>
+                    </a:p>
+                  </a:txBody>
+                  <a:tcPr marL="50800" marR="50800" marT="25400" marB="25400" anchor="ctr">
+                    <a:lnL w="0" cap="flat" cmpd="sng" algn="ctr">
+                      <a:noFill/>
+                    </a:lnL>
+                    <a:lnR w="0" cap="flat" cmpd="sng" algn="ctr">
+                      <a:noFill/>
+                    </a:lnR>
+                    <a:lnT w="0" cap="flat" cmpd="sng" algn="ctr">
+                      <a:noFill/>
+                    </a:lnT>
+                    <a:lnB w="6350" cap="flat" cmpd="sng" algn="ctr">
+                      <a:solidFill>
+                        <a:srgbClr val="DDE3EB"/>
+                      </a:solidFill>
+                      <a:prstDash val="solid"/>
+                      <a:round/>
+                      <a:headEnd type="none" w="med" len="med"/>
+                      <a:tailEnd type="none" w="med" len="med"/>
+                    </a:lnB>
+                  </a:tcPr>
+                </a:tc>
+                <a:tc>
+                  <a:txBody>
+                    <a:bodyPr/>
+                    <a:lstStyle/>
+                    <a:p>
+                      <a:pPr indent="0" marL="0">
+                        <a:buNone/>
+                      </a:pPr>
+                      <a:r>
+                        <a:rPr lang="en-US" sz="950" dirty="0">
+                          <a:solidFill>
+                            <a:srgbClr val="1C2733"/>
+                          </a:solidFill>
+                          <a:latin typeface="Malgun Gothic" pitchFamily="34" charset="0"/>
+                          <a:ea typeface="Malgun Gothic" pitchFamily="34" charset="-122"/>
+                          <a:cs typeface="Malgun Gothic" pitchFamily="34" charset="-120"/>
+                        </a:rPr>
+                        <a:t>유량</a:t>
+                      </a:r>
+                      <a:endParaRPr lang="en-US" sz="950" dirty="0">
+                        <a:latin typeface="Malgun Gothic" charset="0"/>
+                        <a:ea typeface="Malgun Gothic" charset="0"/>
+                        <a:cs typeface="Malgun Gothic" charset="0"/>
+                      </a:endParaRPr>
+                    </a:p>
+                  </a:txBody>
+                  <a:tcPr marL="50800" marR="50800" marT="25400" marB="25400" anchor="ctr">
+                    <a:lnL w="0" cap="flat" cmpd="sng" algn="ctr">
+                      <a:noFill/>
+                    </a:lnL>
+                    <a:lnR w="0" cap="flat" cmpd="sng" algn="ctr">
+                      <a:noFill/>
+                    </a:lnR>
+                    <a:lnT w="0" cap="flat" cmpd="sng" algn="ctr">
+                      <a:noFill/>
+                    </a:lnT>
+                    <a:lnB w="6350" cap="flat" cmpd="sng" algn="ctr">
+                      <a:solidFill>
+                        <a:srgbClr val="DDE3EB"/>
+                      </a:solidFill>
+                      <a:prstDash val="solid"/>
+                      <a:round/>
+                      <a:headEnd type="none" w="med" len="med"/>
+                      <a:tailEnd type="none" w="med" len="med"/>
+                    </a:lnB>
+                  </a:tcPr>
+                </a:tc>
+                <a:tc>
+                  <a:txBody>
+                    <a:bodyPr/>
+                    <a:lstStyle/>
+                    <a:p>
+                      <a:pPr indent="0" marL="0">
+                        <a:buNone/>
+                      </a:pPr>
+                      <a:r>
+                        <a:rPr lang="en-US" sz="950" dirty="0">
+                          <a:solidFill>
+                            <a:srgbClr val="1C2733"/>
+                          </a:solidFill>
+                          <a:latin typeface="Malgun Gothic" pitchFamily="34" charset="0"/>
+                          <a:ea typeface="Malgun Gothic" pitchFamily="34" charset="-122"/>
+                          <a:cs typeface="Malgun Gothic" pitchFamily="34" charset="-120"/>
+                        </a:rPr>
+                        <a:t>1</a:t>
+                      </a:r>
+                      <a:endParaRPr lang="en-US" sz="950" dirty="0">
+                        <a:latin typeface="Malgun Gothic" charset="0"/>
+                        <a:ea typeface="Malgun Gothic" charset="0"/>
+                        <a:cs typeface="Malgun Gothic" charset="0"/>
+                      </a:endParaRPr>
+                    </a:p>
+                  </a:txBody>
+                  <a:tcPr marL="50800" marR="50800" marT="25400" marB="25400" anchor="ctr">
+                    <a:lnL w="0" cap="flat" cmpd="sng" algn="ctr">
+                      <a:noFill/>
+                    </a:lnL>
+                    <a:lnR w="0" cap="flat" cmpd="sng" algn="ctr">
+                      <a:noFill/>
+                    </a:lnR>
+                    <a:lnT w="0" cap="flat" cmpd="sng" algn="ctr">
+                      <a:noFill/>
+                    </a:lnT>
+                    <a:lnB w="6350" cap="flat" cmpd="sng" algn="ctr">
+                      <a:solidFill>
+                        <a:srgbClr val="DDE3EB"/>
+                      </a:solidFill>
+                      <a:prstDash val="solid"/>
+                      <a:round/>
+                      <a:headEnd type="none" w="med" len="med"/>
+                      <a:tailEnd type="none" w="med" len="med"/>
+                    </a:lnB>
+                  </a:tcPr>
+                </a:tc>
+              </a:tr>
+            </a:tbl>
+          </a:graphicData>
+        </a:graphic>
+      </p:graphicFrame>
+      <p:sp>
+        <p:nvSpPr>
+          <p:cNvPr id="47" name="Shape 44"/>
           <p:cNvSpPr/>
           <p:nvPr/>
         </p:nvSpPr>
         <p:spPr>
           <a:xfrm>
-            <a:off x="6574536" y="1865376"/>
-            <a:ext cx="4965192" cy="3264408"/>
+            <a:off x="6647688" y="4160520"/>
+            <a:ext cx="4846320" cy="713232"/>
           </a:xfrm>
           <a:prstGeom prst="roundRect">
             <a:avLst>
-              <a:gd name="adj" fmla="val 1681"/>
+              <a:gd name="adj" fmla="val 7692"/>
             </a:avLst>
           </a:prstGeom>
           <a:solidFill>
-            <a:srgbClr val="1E2430"/>
+            <a:srgbClr val="EEF2F7"/>
           </a:solidFill>
           <a:ln w="12700">
             <a:solidFill>
-              <a:srgbClr val="1E2430"/>
+              <a:srgbClr val="EEF2F7"/>
             </a:solidFill>
             <a:prstDash val="solid"/>
           </a:ln>
@@ -19941,89 +24907,14 @@
       </p:sp>
       <p:sp>
         <p:nvSpPr>
-          <p:cNvPr id="47" name="Shape 45"/>
-          <p:cNvSpPr/>
-          <p:nvPr/>
-        </p:nvSpPr>
-        <p:spPr>
-          <a:xfrm>
-            <a:off x="6739128" y="1993392"/>
-            <a:ext cx="91440" cy="91440"/>
-          </a:xfrm>
-          <a:prstGeom prst="ellipse">
-            <a:avLst/>
-          </a:prstGeom>
-          <a:solidFill>
-            <a:srgbClr val="FF5F57"/>
-          </a:solidFill>
-          <a:ln w="12700">
-            <a:solidFill>
-              <a:srgbClr val="FF5F57"/>
-            </a:solidFill>
-            <a:prstDash val="solid"/>
-          </a:ln>
-        </p:spPr>
-      </p:sp>
-      <p:sp>
-        <p:nvSpPr>
-          <p:cNvPr id="48" name="Shape 46"/>
-          <p:cNvSpPr/>
-          <p:nvPr/>
-        </p:nvSpPr>
-        <p:spPr>
-          <a:xfrm>
-            <a:off x="6894576" y="1993392"/>
-            <a:ext cx="91440" cy="91440"/>
-          </a:xfrm>
-          <a:prstGeom prst="ellipse">
-            <a:avLst/>
-          </a:prstGeom>
-          <a:solidFill>
-            <a:srgbClr val="FEBC2E"/>
-          </a:solidFill>
-          <a:ln w="12700">
-            <a:solidFill>
-              <a:srgbClr val="FEBC2E"/>
-            </a:solidFill>
-            <a:prstDash val="solid"/>
-          </a:ln>
-        </p:spPr>
-      </p:sp>
-      <p:sp>
-        <p:nvSpPr>
-          <p:cNvPr id="49" name="Shape 47"/>
-          <p:cNvSpPr/>
-          <p:nvPr/>
-        </p:nvSpPr>
-        <p:spPr>
-          <a:xfrm>
-            <a:off x="7050024" y="1993392"/>
-            <a:ext cx="91440" cy="91440"/>
-          </a:xfrm>
-          <a:prstGeom prst="ellipse">
-            <a:avLst/>
-          </a:prstGeom>
-          <a:solidFill>
-            <a:srgbClr val="28C840"/>
-          </a:solidFill>
-          <a:ln w="12700">
-            <a:solidFill>
-              <a:srgbClr val="28C840"/>
-            </a:solidFill>
-            <a:prstDash val="solid"/>
-          </a:ln>
-        </p:spPr>
-      </p:sp>
-      <p:sp>
-        <p:nvSpPr>
-          <p:cNvPr id="50" name="Text 48"/>
+          <p:cNvPr id="48" name="Text 45"/>
           <p:cNvSpPr txBox="1"/>
           <p:nvPr/>
         </p:nvSpPr>
         <p:spPr>
           <a:xfrm>
-            <a:off x="7232904" y="1929384"/>
-            <a:ext cx="4142232" cy="219456"/>
+            <a:off x="6775704" y="4160520"/>
+            <a:ext cx="4617720" cy="713232"/>
           </a:xfrm>
           <a:prstGeom prst="rect">
             <a:avLst/>
@@ -20036,56 +24927,56 @@
           <a:lstStyle/>
           <a:p>
             <a:pPr indent="0" marL="0">
-              <a:buNone/>
-            </a:pPr>
-            <a:r>
-              <a:rPr lang="en-US" sz="850" dirty="0">
-                <a:solidFill>
-                  <a:srgbClr val="8A94A6"/>
-                </a:solidFill>
-                <a:latin typeface="Consolas" pitchFamily="34" charset="0"/>
-                <a:ea typeface="Consolas" pitchFamily="34" charset="-122"/>
-                <a:cs typeface="Consolas" pitchFamily="34" charset="-120"/>
-              </a:rPr>
-              <a:t>icepak.py — run_icepak()</a:t>
-            </a:r>
-            <a:endParaRPr lang="en-US" sz="850" dirty="0"/>
+              <a:lnSpc>
+                <a:spcPct val="130000"/>
+              </a:lnSpc>
+              <a:buNone/>
+            </a:pPr>
+            <a:r>
+              <a:rPr lang="en-US" sz="950" b="1" dirty="0">
+                <a:solidFill>
+                  <a:srgbClr val="16305B"/>
+                </a:solidFill>
+                <a:latin typeface="Malgun Gothic" pitchFamily="34" charset="0"/>
+                <a:ea typeface="Malgun Gothic" pitchFamily="34" charset="-122"/>
+                <a:cs typeface="Malgun Gothic" pitchFamily="34" charset="-120"/>
+              </a:rPr>
+              <a:t>측정 순서 = 결과 CSV 행 순서</a:t>
+            </a:r>
+            <a:endParaRPr lang="en-US" sz="950" dirty="0"/>
+          </a:p>
+          <a:p>
+            <a:pPr indent="0" marL="0">
+              <a:lnSpc>
+                <a:spcPct val="130000"/>
+              </a:lnSpc>
+              <a:buNone/>
+            </a:pPr>
+            <a:r>
+              <a:rPr lang="en-US" sz="950" dirty="0">
+                <a:solidFill>
+                  <a:srgbClr val="1C2733"/>
+                </a:solidFill>
+                <a:latin typeface="Malgun Gothic" pitchFamily="34" charset="0"/>
+                <a:ea typeface="Malgun Gothic" pitchFamily="34" charset="-122"/>
+                <a:cs typeface="Malgun Gothic" pitchFamily="34" charset="-120"/>
+              </a:rPr>
+              <a:t>해석 완료 후 Fields Summary로 일괄 추출 → 파싱 모듈이 행 순서대로 해석</a:t>
+            </a:r>
+            <a:endParaRPr lang="en-US" sz="950" dirty="0"/>
           </a:p>
         </p:txBody>
       </p:sp>
       <p:sp>
         <p:nvSpPr>
-          <p:cNvPr id="51" name="Shape 49"/>
-          <p:cNvSpPr/>
-          <p:nvPr/>
-        </p:nvSpPr>
-        <p:spPr>
-          <a:xfrm>
-            <a:off x="6574536" y="2212848"/>
-            <a:ext cx="4965192" cy="0"/>
-          </a:xfrm>
-          <a:prstGeom prst="line">
-            <a:avLst/>
-          </a:prstGeom>
-          <a:noFill/>
-          <a:ln w="9525">
-            <a:solidFill>
-              <a:srgbClr val="2E3645"/>
-            </a:solidFill>
-            <a:prstDash val="solid"/>
-          </a:ln>
-        </p:spPr>
-      </p:sp>
-      <p:sp>
-        <p:nvSpPr>
-          <p:cNvPr id="52" name="Text 50"/>
+          <p:cNvPr id="49" name="Text 46"/>
           <p:cNvSpPr txBox="1"/>
           <p:nvPr/>
         </p:nvSpPr>
         <p:spPr>
           <a:xfrm>
-            <a:off x="6757416" y="2322576"/>
-            <a:ext cx="4672584" cy="2697480"/>
+            <a:off x="6647688" y="4956048"/>
+            <a:ext cx="4846320" cy="237744"/>
           </a:xfrm>
           <a:prstGeom prst="rect">
             <a:avLst/>
@@ -20094,696 +24985,30 @@
           <a:ln/>
         </p:spPr>
         <p:txBody>
-          <a:bodyPr wrap="square" lIns="0" tIns="0" rIns="0" bIns="0" rtlCol="0" anchor="t"/>
+          <a:bodyPr wrap="square" lIns="0" tIns="0" rIns="0" bIns="0" rtlCol="0" anchor="ctr"/>
           <a:lstStyle/>
           <a:p>
             <a:pPr indent="0" marL="0">
-              <a:lnSpc>
-                <a:spcPct val="112000"/>
-              </a:lnSpc>
-              <a:buNone/>
-            </a:pPr>
-            <a:r>
-              <a:rPr lang="en-US" sz="850" dirty="0">
-                <a:solidFill>
-                  <a:srgbClr val="D6DEEB"/>
-                </a:solidFill>
-                <a:latin typeface="Consolas" pitchFamily="34" charset="0"/>
-                <a:ea typeface="Consolas" pitchFamily="34" charset="-122"/>
-                <a:cs typeface="Consolas" pitchFamily="34" charset="-120"/>
-              </a:rPr>
-              <a:t>ipk = Icepak(project=PROJ_PATH, design=</a:t>
-            </a:r>
-            <a:pPr indent="0" marL="0">
-              <a:lnSpc>
-                <a:spcPct val="112000"/>
-              </a:lnSpc>
-              <a:buNone/>
-            </a:pPr>
-            <a:r>
-              <a:rPr lang="en-US" sz="850" dirty="0">
-                <a:solidFill>
-                  <a:srgbClr val="E6A26B"/>
-                </a:solidFill>
-                <a:latin typeface="Consolas" pitchFamily="34" charset="0"/>
-                <a:ea typeface="Consolas" pitchFamily="34" charset="-122"/>
-                <a:cs typeface="Consolas" pitchFamily="34" charset="-120"/>
-              </a:rPr>
-              <a:t>f"IcepakDesign_{idx:03d}"</a:t>
-            </a:r>
-            <a:pPr indent="0" marL="0">
-              <a:lnSpc>
-                <a:spcPct val="112000"/>
-              </a:lnSpc>
-              <a:buNone/>
-            </a:pPr>
-            <a:r>
-              <a:rPr lang="en-US" sz="850" dirty="0">
-                <a:solidFill>
-                  <a:srgbClr val="D6DEEB"/>
-                </a:solidFill>
-                <a:latin typeface="Consolas" pitchFamily="34" charset="0"/>
-                <a:ea typeface="Consolas" pitchFamily="34" charset="-122"/>
-                <a:cs typeface="Consolas" pitchFamily="34" charset="-120"/>
-              </a:rPr>
-              <a:t>)</a:t>
-            </a:r>
-            <a:endParaRPr lang="en-US" sz="850" dirty="0"/>
-          </a:p>
-          <a:p>
-            <a:pPr indent="0" marL="0">
-              <a:lnSpc>
-                <a:spcPct val="112000"/>
-              </a:lnSpc>
-              <a:buNone/>
-            </a:pPr>
-            <a:r>
-              <a:rPr lang="en-US" sz="850" dirty="0">
-                <a:solidFill>
-                  <a:srgbClr val="D6DEEB"/>
-                </a:solidFill>
-                <a:latin typeface="Consolas" pitchFamily="34" charset="0"/>
-                <a:ea typeface="Consolas" pitchFamily="34" charset="-122"/>
-                <a:cs typeface="Consolas" pitchFamily="34" charset="-120"/>
-              </a:rPr>
-              <a:t>ipk.modeler.import_3d_cad(step_file)       </a:t>
-            </a:r>
-            <a:pPr indent="0" marL="0">
-              <a:lnSpc>
-                <a:spcPct val="112000"/>
-              </a:lnSpc>
-              <a:buNone/>
-            </a:pPr>
-            <a:r>
-              <a:rPr lang="en-US" sz="850" dirty="0">
-                <a:solidFill>
-                  <a:srgbClr val="7F9C7A"/>
-                </a:solidFill>
-                <a:latin typeface="Consolas" pitchFamily="34" charset="0"/>
-                <a:ea typeface="Consolas" pitchFamily="34" charset="-122"/>
-                <a:cs typeface="Consolas" pitchFamily="34" charset="-120"/>
-              </a:rPr>
-              <a:t># STEP 불러오기</a:t>
-            </a:r>
-            <a:endParaRPr lang="en-US" sz="850" dirty="0"/>
-          </a:p>
-          <a:p>
-            <a:pPr indent="0" marL="0">
-              <a:lnSpc>
-                <a:spcPct val="112000"/>
-              </a:lnSpc>
-              <a:buNone/>
-            </a:pPr>
-            <a:r>
-              <a:rPr lang="en-US" sz="850" dirty="0">
-                <a:solidFill>
-                  <a:srgbClr val="D6DEEB"/>
-                </a:solidFill>
-                <a:latin typeface="Consolas" pitchFamily="34" charset="0"/>
-                <a:ea typeface="Consolas" pitchFamily="34" charset="-122"/>
-                <a:cs typeface="Consolas" pitchFamily="34" charset="-120"/>
-              </a:rPr>
-              <a:t> </a:t>
-            </a:r>
-            <a:endParaRPr lang="en-US" sz="850" dirty="0"/>
-          </a:p>
-          <a:p>
-            <a:pPr indent="0" marL="0">
-              <a:lnSpc>
-                <a:spcPct val="112000"/>
-              </a:lnSpc>
-              <a:buNone/>
-            </a:pPr>
-            <a:r>
-              <a:rPr lang="en-US" sz="850" dirty="0">
-                <a:solidFill>
-                  <a:srgbClr val="D6DEEB"/>
-                </a:solidFill>
-                <a:latin typeface="Consolas" pitchFamily="34" charset="0"/>
-                <a:ea typeface="Consolas" pitchFamily="34" charset="-122"/>
-                <a:cs typeface="Consolas" pitchFamily="34" charset="-120"/>
-              </a:rPr>
-              <a:t>oEditor.Subtract(...)                      </a:t>
-            </a:r>
-            <a:pPr indent="0" marL="0">
-              <a:lnSpc>
-                <a:spcPct val="112000"/>
-              </a:lnSpc>
-              <a:buNone/>
-            </a:pPr>
-            <a:r>
-              <a:rPr lang="en-US" sz="850" dirty="0">
-                <a:solidFill>
-                  <a:srgbClr val="7F9C7A"/>
-                </a:solidFill>
-                <a:latin typeface="Consolas" pitchFamily="34" charset="0"/>
-                <a:ea typeface="Consolas" pitchFamily="34" charset="-122"/>
-                <a:cs typeface="Consolas" pitchFamily="34" charset="-120"/>
-              </a:rPr>
-              <a:t># 유체 영역 = 박스 − 형상</a:t>
-            </a:r>
-            <a:endParaRPr lang="en-US" sz="850" dirty="0"/>
-          </a:p>
-          <a:p>
-            <a:pPr indent="0" marL="0">
-              <a:lnSpc>
-                <a:spcPct val="112000"/>
-              </a:lnSpc>
-              <a:buNone/>
-            </a:pPr>
-            <a:r>
-              <a:rPr lang="en-US" sz="850" dirty="0">
-                <a:solidFill>
-                  <a:srgbClr val="D6DEEB"/>
-                </a:solidFill>
-                <a:latin typeface="Consolas" pitchFamily="34" charset="0"/>
-                <a:ea typeface="Consolas" pitchFamily="34" charset="-122"/>
-                <a:cs typeface="Consolas" pitchFamily="34" charset="-120"/>
-              </a:rPr>
-              <a:t>oEditor.SeparateBody(...)</a:t>
-            </a:r>
-            <a:endParaRPr lang="en-US" sz="850" dirty="0"/>
-          </a:p>
-          <a:p>
-            <a:pPr indent="0" marL="0">
-              <a:lnSpc>
-                <a:spcPct val="112000"/>
-              </a:lnSpc>
-              <a:buNone/>
-            </a:pPr>
-            <a:r>
-              <a:rPr lang="en-US" sz="850" dirty="0">
-                <a:solidFill>
-                  <a:srgbClr val="D6DEEB"/>
-                </a:solidFill>
-                <a:latin typeface="Consolas" pitchFamily="34" charset="0"/>
-                <a:ea typeface="Consolas" pitchFamily="34" charset="-122"/>
-                <a:cs typeface="Consolas" pitchFamily="34" charset="-120"/>
-              </a:rPr>
-              <a:t> </a:t>
-            </a:r>
-            <a:endParaRPr lang="en-US" sz="850" dirty="0"/>
-          </a:p>
-          <a:p>
-            <a:pPr indent="0" marL="0">
-              <a:lnSpc>
-                <a:spcPct val="112000"/>
-              </a:lnSpc>
-              <a:buNone/>
-            </a:pPr>
-            <a:r>
-              <a:rPr lang="en-US" sz="850" dirty="0">
-                <a:solidFill>
-                  <a:srgbClr val="7F9C7A"/>
-                </a:solidFill>
-                <a:latin typeface="Consolas" pitchFamily="34" charset="0"/>
-                <a:ea typeface="Consolas" pitchFamily="34" charset="-122"/>
-                <a:cs typeface="Consolas" pitchFamily="34" charset="-120"/>
-              </a:rPr>
-              <a:t># 팬·개구부 면을 좌표 기준으로 자동 탐지</a:t>
-            </a:r>
-            <a:endParaRPr lang="en-US" sz="850" dirty="0"/>
-          </a:p>
-          <a:p>
-            <a:pPr indent="0" marL="0">
-              <a:lnSpc>
-                <a:spcPct val="112000"/>
-              </a:lnSpc>
-              <a:buNone/>
-            </a:pPr>
-            <a:r>
-              <a:rPr lang="en-US" sz="850" dirty="0">
-                <a:solidFill>
-                  <a:srgbClr val="D6DEEB"/>
-                </a:solidFill>
-                <a:latin typeface="Consolas" pitchFamily="34" charset="0"/>
-                <a:ea typeface="Consolas" pitchFamily="34" charset="-122"/>
-                <a:cs typeface="Consolas" pitchFamily="34" charset="-120"/>
-              </a:rPr>
-              <a:t>faces = [f </a:t>
-            </a:r>
-            <a:pPr indent="0" marL="0">
-              <a:lnSpc>
-                <a:spcPct val="112000"/>
-              </a:lnSpc>
-              <a:buNone/>
-            </a:pPr>
-            <a:r>
-              <a:rPr lang="en-US" sz="850" dirty="0">
-                <a:solidFill>
-                  <a:srgbClr val="C792EA"/>
-                </a:solidFill>
-                <a:latin typeface="Consolas" pitchFamily="34" charset="0"/>
-                <a:ea typeface="Consolas" pitchFamily="34" charset="-122"/>
-                <a:cs typeface="Consolas" pitchFamily="34" charset="-120"/>
-              </a:rPr>
-              <a:t>for</a:t>
-            </a:r>
-            <a:pPr indent="0" marL="0">
-              <a:lnSpc>
-                <a:spcPct val="112000"/>
-              </a:lnSpc>
-              <a:buNone/>
-            </a:pPr>
-            <a:r>
-              <a:rPr lang="en-US" sz="850" dirty="0">
-                <a:solidFill>
-                  <a:srgbClr val="D6DEEB"/>
-                </a:solidFill>
-                <a:latin typeface="Consolas" pitchFamily="34" charset="0"/>
-                <a:ea typeface="Consolas" pitchFamily="34" charset="-122"/>
-                <a:cs typeface="Consolas" pitchFamily="34" charset="-120"/>
-              </a:rPr>
-              <a:t> f </a:t>
-            </a:r>
-            <a:pPr indent="0" marL="0">
-              <a:lnSpc>
-                <a:spcPct val="112000"/>
-              </a:lnSpc>
-              <a:buNone/>
-            </a:pPr>
-            <a:r>
-              <a:rPr lang="en-US" sz="850" dirty="0">
-                <a:solidFill>
-                  <a:srgbClr val="C792EA"/>
-                </a:solidFill>
-                <a:latin typeface="Consolas" pitchFamily="34" charset="0"/>
-                <a:ea typeface="Consolas" pitchFamily="34" charset="-122"/>
-                <a:cs typeface="Consolas" pitchFamily="34" charset="-120"/>
-              </a:rPr>
-              <a:t>in</a:t>
-            </a:r>
-            <a:pPr indent="0" marL="0">
-              <a:lnSpc>
-                <a:spcPct val="112000"/>
-              </a:lnSpc>
-              <a:buNone/>
-            </a:pPr>
-            <a:r>
-              <a:rPr lang="en-US" sz="850" dirty="0">
-                <a:solidFill>
-                  <a:srgbClr val="D6DEEB"/>
-                </a:solidFill>
-                <a:latin typeface="Consolas" pitchFamily="34" charset="0"/>
-                <a:ea typeface="Consolas" pitchFamily="34" charset="-122"/>
-                <a:cs typeface="Consolas" pitchFamily="34" charset="-120"/>
-              </a:rPr>
-              <a:t> box.faces </a:t>
-            </a:r>
-            <a:pPr indent="0" marL="0">
-              <a:lnSpc>
-                <a:spcPct val="112000"/>
-              </a:lnSpc>
-              <a:buNone/>
-            </a:pPr>
-            <a:r>
-              <a:rPr lang="en-US" sz="850" dirty="0">
-                <a:solidFill>
-                  <a:srgbClr val="C792EA"/>
-                </a:solidFill>
-                <a:latin typeface="Consolas" pitchFamily="34" charset="0"/>
-                <a:ea typeface="Consolas" pitchFamily="34" charset="-122"/>
-                <a:cs typeface="Consolas" pitchFamily="34" charset="-120"/>
-              </a:rPr>
-              <a:t>if</a:t>
-            </a:r>
-            <a:pPr indent="0" marL="0">
-              <a:lnSpc>
-                <a:spcPct val="112000"/>
-              </a:lnSpc>
-              <a:buNone/>
-            </a:pPr>
-            <a:r>
-              <a:rPr lang="en-US" sz="850" dirty="0">
-                <a:solidFill>
-                  <a:srgbClr val="D6DEEB"/>
-                </a:solidFill>
-                <a:latin typeface="Consolas" pitchFamily="34" charset="0"/>
-                <a:ea typeface="Consolas" pitchFamily="34" charset="-122"/>
-                <a:cs typeface="Consolas" pitchFamily="34" charset="-120"/>
-              </a:rPr>
-              <a:t> abs(f.center[2] - z_top) &lt; 0.1]</a:t>
-            </a:r>
-            <a:endParaRPr lang="en-US" sz="850" dirty="0"/>
-          </a:p>
-          <a:p>
-            <a:pPr indent="0" marL="0">
-              <a:lnSpc>
-                <a:spcPct val="112000"/>
-              </a:lnSpc>
-              <a:buNone/>
-            </a:pPr>
-            <a:r>
-              <a:rPr lang="en-US" sz="850" dirty="0">
-                <a:solidFill>
-                  <a:srgbClr val="D6DEEB"/>
-                </a:solidFill>
-                <a:latin typeface="Consolas" pitchFamily="34" charset="0"/>
-                <a:ea typeface="Consolas" pitchFamily="34" charset="-122"/>
-                <a:cs typeface="Consolas" pitchFamily="34" charset="-120"/>
-              </a:rPr>
-              <a:t>faces.sort(key=</a:t>
-            </a:r>
-            <a:pPr indent="0" marL="0">
-              <a:lnSpc>
-                <a:spcPct val="112000"/>
-              </a:lnSpc>
-              <a:buNone/>
-            </a:pPr>
-            <a:r>
-              <a:rPr lang="en-US" sz="850" dirty="0">
-                <a:solidFill>
-                  <a:srgbClr val="C792EA"/>
-                </a:solidFill>
-                <a:latin typeface="Consolas" pitchFamily="34" charset="0"/>
-                <a:ea typeface="Consolas" pitchFamily="34" charset="-122"/>
-                <a:cs typeface="Consolas" pitchFamily="34" charset="-120"/>
-              </a:rPr>
-              <a:t>lambda</a:t>
-            </a:r>
-            <a:pPr indent="0" marL="0">
-              <a:lnSpc>
-                <a:spcPct val="112000"/>
-              </a:lnSpc>
-              <a:buNone/>
-            </a:pPr>
-            <a:r>
-              <a:rPr lang="en-US" sz="850" dirty="0">
-                <a:solidFill>
-                  <a:srgbClr val="D6DEEB"/>
-                </a:solidFill>
-                <a:latin typeface="Consolas" pitchFamily="34" charset="0"/>
-                <a:ea typeface="Consolas" pitchFamily="34" charset="-122"/>
-                <a:cs typeface="Consolas" pitchFamily="34" charset="-120"/>
-              </a:rPr>
-              <a:t> f: f.center[0])</a:t>
-            </a:r>
-            <a:endParaRPr lang="en-US" sz="850" dirty="0"/>
-          </a:p>
-          <a:p>
-            <a:pPr indent="0" marL="0">
-              <a:lnSpc>
-                <a:spcPct val="112000"/>
-              </a:lnSpc>
-              <a:buNone/>
-            </a:pPr>
-            <a:r>
-              <a:rPr lang="en-US" sz="850" dirty="0">
-                <a:solidFill>
-                  <a:srgbClr val="D6DEEB"/>
-                </a:solidFill>
-                <a:latin typeface="Consolas" pitchFamily="34" charset="0"/>
-                <a:ea typeface="Consolas" pitchFamily="34" charset="-122"/>
-                <a:cs typeface="Consolas" pitchFamily="34" charset="-120"/>
-              </a:rPr>
-              <a:t>oModule.AssignOpeningBoundary(...)          </a:t>
-            </a:r>
-            <a:pPr indent="0" marL="0">
-              <a:lnSpc>
-                <a:spcPct val="112000"/>
-              </a:lnSpc>
-              <a:buNone/>
-            </a:pPr>
-            <a:r>
-              <a:rPr lang="en-US" sz="850" dirty="0">
-                <a:solidFill>
-                  <a:srgbClr val="7F9C7A"/>
-                </a:solidFill>
-                <a:latin typeface="Consolas" pitchFamily="34" charset="0"/>
-                <a:ea typeface="Consolas" pitchFamily="34" charset="-122"/>
-                <a:cs typeface="Consolas" pitchFamily="34" charset="-120"/>
-              </a:rPr>
-              <a:t># 출구 경계</a:t>
-            </a:r>
-            <a:endParaRPr lang="en-US" sz="850" dirty="0"/>
-          </a:p>
-          <a:p>
-            <a:pPr indent="0" marL="0">
-              <a:lnSpc>
-                <a:spcPct val="112000"/>
-              </a:lnSpc>
-              <a:buNone/>
-            </a:pPr>
-            <a:r>
-              <a:rPr lang="en-US" sz="850" dirty="0">
-                <a:solidFill>
-                  <a:srgbClr val="D6DEEB"/>
-                </a:solidFill>
-                <a:latin typeface="Consolas" pitchFamily="34" charset="0"/>
-                <a:ea typeface="Consolas" pitchFamily="34" charset="-122"/>
-                <a:cs typeface="Consolas" pitchFamily="34" charset="-120"/>
-              </a:rPr>
-              <a:t>oModule.AssignMeshRegion(...)               </a:t>
-            </a:r>
-            <a:pPr indent="0" marL="0">
-              <a:lnSpc>
-                <a:spcPct val="112000"/>
-              </a:lnSpc>
-              <a:buNone/>
-            </a:pPr>
-            <a:r>
-              <a:rPr lang="en-US" sz="850" dirty="0">
-                <a:solidFill>
-                  <a:srgbClr val="7F9C7A"/>
-                </a:solidFill>
-                <a:latin typeface="Consolas" pitchFamily="34" charset="0"/>
-                <a:ea typeface="Consolas" pitchFamily="34" charset="-122"/>
-                <a:cs typeface="Consolas" pitchFamily="34" charset="-120"/>
-              </a:rPr>
-              <a:t># 로컬 메시</a:t>
-            </a:r>
-            <a:endParaRPr lang="en-US" sz="850" dirty="0"/>
-          </a:p>
-          <a:p>
-            <a:pPr indent="0" marL="0">
-              <a:lnSpc>
-                <a:spcPct val="112000"/>
-              </a:lnSpc>
-              <a:buNone/>
-            </a:pPr>
-            <a:r>
-              <a:rPr lang="en-US" sz="850" dirty="0">
-                <a:solidFill>
-                  <a:srgbClr val="D6DEEB"/>
-                </a:solidFill>
-                <a:latin typeface="Consolas" pitchFamily="34" charset="0"/>
-                <a:ea typeface="Consolas" pitchFamily="34" charset="-122"/>
-                <a:cs typeface="Consolas" pitchFamily="34" charset="-120"/>
-              </a:rPr>
-              <a:t> </a:t>
-            </a:r>
-            <a:endParaRPr lang="en-US" sz="850" dirty="0"/>
-          </a:p>
-          <a:p>
-            <a:pPr indent="0" marL="0">
-              <a:lnSpc>
-                <a:spcPct val="112000"/>
-              </a:lnSpc>
-              <a:buNone/>
-            </a:pPr>
-            <a:r>
-              <a:rPr lang="en-US" sz="850" dirty="0">
-                <a:solidFill>
-                  <a:srgbClr val="7F9C7A"/>
-                </a:solidFill>
-                <a:latin typeface="Consolas" pitchFamily="34" charset="0"/>
-                <a:ea typeface="Consolas" pitchFamily="34" charset="-122"/>
-                <a:cs typeface="Consolas" pitchFamily="34" charset="-120"/>
-              </a:rPr>
-              <a:t># 설계변수에 맞춰 유로 전체에 측정면 생성</a:t>
-            </a:r>
-            <a:endParaRPr lang="en-US" sz="850" dirty="0"/>
-          </a:p>
-          <a:p>
-            <a:pPr indent="0" marL="0">
-              <a:lnSpc>
-                <a:spcPct val="112000"/>
-              </a:lnSpc>
-              <a:buNone/>
-            </a:pPr>
-            <a:r>
-              <a:rPr lang="en-US" sz="850" dirty="0">
-                <a:solidFill>
-                  <a:srgbClr val="C792EA"/>
-                </a:solidFill>
-                <a:latin typeface="Consolas" pitchFamily="34" charset="0"/>
-                <a:ea typeface="Consolas" pitchFamily="34" charset="-122"/>
-                <a:cs typeface="Consolas" pitchFamily="34" charset="-120"/>
-              </a:rPr>
-              <a:t>for</a:t>
-            </a:r>
-            <a:pPr indent="0" marL="0">
-              <a:lnSpc>
-                <a:spcPct val="112000"/>
-              </a:lnSpc>
-              <a:buNone/>
-            </a:pPr>
-            <a:r>
-              <a:rPr lang="en-US" sz="850" dirty="0">
-                <a:solidFill>
-                  <a:srgbClr val="D6DEEB"/>
-                </a:solidFill>
-                <a:latin typeface="Consolas" pitchFamily="34" charset="0"/>
-                <a:ea typeface="Consolas" pitchFamily="34" charset="-122"/>
-                <a:cs typeface="Consolas" pitchFamily="34" charset="-120"/>
-              </a:rPr>
-              <a:t> k, (offset, gap) </a:t>
-            </a:r>
-            <a:pPr indent="0" marL="0">
-              <a:lnSpc>
-                <a:spcPct val="112000"/>
-              </a:lnSpc>
-              <a:buNone/>
-            </a:pPr>
-            <a:r>
-              <a:rPr lang="en-US" sz="850" dirty="0">
-                <a:solidFill>
-                  <a:srgbClr val="C792EA"/>
-                </a:solidFill>
-                <a:latin typeface="Consolas" pitchFamily="34" charset="0"/>
-                <a:ea typeface="Consolas" pitchFamily="34" charset="-122"/>
-                <a:cs typeface="Consolas" pitchFamily="34" charset="-120"/>
-              </a:rPr>
-              <a:t>in</a:t>
-            </a:r>
-            <a:pPr indent="0" marL="0">
-              <a:lnSpc>
-                <a:spcPct val="112000"/>
-              </a:lnSpc>
-              <a:buNone/>
-            </a:pPr>
-            <a:r>
-              <a:rPr lang="en-US" sz="850" dirty="0">
-                <a:solidFill>
-                  <a:srgbClr val="D6DEEB"/>
-                </a:solidFill>
-                <a:latin typeface="Consolas" pitchFamily="34" charset="0"/>
-                <a:ea typeface="Consolas" pitchFamily="34" charset="-122"/>
-                <a:cs typeface="Consolas" pitchFamily="34" charset="-120"/>
-              </a:rPr>
-              <a:t> enumerate(channel_offsets(t, n)):</a:t>
-            </a:r>
-            <a:endParaRPr lang="en-US" sz="850" dirty="0"/>
-          </a:p>
-          <a:p>
-            <a:pPr indent="0" marL="0">
-              <a:lnSpc>
-                <a:spcPct val="112000"/>
-              </a:lnSpc>
-              <a:buNone/>
-            </a:pPr>
-            <a:r>
-              <a:rPr lang="en-US" sz="850" dirty="0">
-                <a:solidFill>
-                  <a:srgbClr val="D6DEEB"/>
-                </a:solidFill>
-                <a:latin typeface="Consolas" pitchFamily="34" charset="0"/>
-                <a:ea typeface="Consolas" pitchFamily="34" charset="-122"/>
-                <a:cs typeface="Consolas" pitchFamily="34" charset="-120"/>
-              </a:rPr>
-              <a:t>    oEditor.CreateRectangle(...)</a:t>
-            </a:r>
-            <a:endParaRPr lang="en-US" sz="850" dirty="0"/>
-          </a:p>
-          <a:p>
-            <a:pPr indent="0" marL="0">
-              <a:lnSpc>
-                <a:spcPct val="112000"/>
-              </a:lnSpc>
-              <a:buNone/>
-            </a:pPr>
-            <a:r>
-              <a:rPr lang="en-US" sz="850" dirty="0">
-                <a:solidFill>
-                  <a:srgbClr val="D6DEEB"/>
-                </a:solidFill>
-                <a:latin typeface="Consolas" pitchFamily="34" charset="0"/>
-                <a:ea typeface="Consolas" pitchFamily="34" charset="-122"/>
-                <a:cs typeface="Consolas" pitchFamily="34" charset="-120"/>
-              </a:rPr>
-              <a:t> </a:t>
-            </a:r>
-            <a:endParaRPr lang="en-US" sz="850" dirty="0"/>
-          </a:p>
-          <a:p>
-            <a:pPr indent="0" marL="0">
-              <a:lnSpc>
-                <a:spcPct val="112000"/>
-              </a:lnSpc>
-              <a:buNone/>
-            </a:pPr>
-            <a:r>
-              <a:rPr lang="en-US" sz="850" dirty="0">
-                <a:solidFill>
-                  <a:srgbClr val="D6DEEB"/>
-                </a:solidFill>
-                <a:latin typeface="Consolas" pitchFamily="34" charset="0"/>
-                <a:ea typeface="Consolas" pitchFamily="34" charset="-122"/>
-                <a:cs typeface="Consolas" pitchFamily="34" charset="-120"/>
-              </a:rPr>
-              <a:t>oDesign.AnalyzeAll()                        </a:t>
-            </a:r>
-            <a:pPr indent="0" marL="0">
-              <a:lnSpc>
-                <a:spcPct val="112000"/>
-              </a:lnSpc>
-              <a:buNone/>
-            </a:pPr>
-            <a:r>
-              <a:rPr lang="en-US" sz="850" dirty="0">
-                <a:solidFill>
-                  <a:srgbClr val="7F9C7A"/>
-                </a:solidFill>
-                <a:latin typeface="Consolas" pitchFamily="34" charset="0"/>
-                <a:ea typeface="Consolas" pitchFamily="34" charset="-122"/>
-                <a:cs typeface="Consolas" pitchFamily="34" charset="-120"/>
-              </a:rPr>
-              <a:t># 메싱 + 솔브</a:t>
-            </a:r>
-            <a:endParaRPr lang="en-US" sz="850" dirty="0"/>
-          </a:p>
-          <a:p>
-            <a:pPr indent="0" marL="0">
-              <a:lnSpc>
-                <a:spcPct val="112000"/>
-              </a:lnSpc>
-              <a:buNone/>
-            </a:pPr>
-            <a:r>
-              <a:rPr lang="en-US" sz="850" dirty="0">
-                <a:solidFill>
-                  <a:srgbClr val="D6DEEB"/>
-                </a:solidFill>
-                <a:latin typeface="Consolas" pitchFamily="34" charset="0"/>
-                <a:ea typeface="Consolas" pitchFamily="34" charset="-122"/>
-                <a:cs typeface="Consolas" pitchFamily="34" charset="-120"/>
-              </a:rPr>
-              <a:t>oModule.ExportFieldsSummary(...)            </a:t>
-            </a:r>
-            <a:pPr indent="0" marL="0">
-              <a:lnSpc>
-                <a:spcPct val="112000"/>
-              </a:lnSpc>
-              <a:buNone/>
-            </a:pPr>
-            <a:r>
-              <a:rPr lang="en-US" sz="850" dirty="0">
-                <a:solidFill>
-                  <a:srgbClr val="7F9C7A"/>
-                </a:solidFill>
-                <a:latin typeface="Consolas" pitchFamily="34" charset="0"/>
-                <a:ea typeface="Consolas" pitchFamily="34" charset="-122"/>
-                <a:cs typeface="Consolas" pitchFamily="34" charset="-120"/>
-              </a:rPr>
-              <a:t># 결과 CSV 추출</a:t>
-            </a:r>
-            <a:endParaRPr lang="en-US" sz="850" dirty="0"/>
+              <a:buNone/>
+            </a:pPr>
+            <a:r>
+              <a:rPr lang="en-US" sz="900" i="1" dirty="0">
+                <a:solidFill>
+                  <a:srgbClr val="6B7A8F"/>
+                </a:solidFill>
+                <a:latin typeface="Malgun Gothic" pitchFamily="34" charset="0"/>
+                <a:ea typeface="Malgun Gothic" pitchFamily="34" charset="-122"/>
+                <a:cs typeface="Malgun Gothic" pitchFamily="34" charset="-120"/>
+              </a:rPr>
+              <a:t>※ 주요 코드는 부록 A-2 참고</a:t>
+            </a:r>
+            <a:endParaRPr lang="en-US" sz="900" dirty="0"/>
           </a:p>
         </p:txBody>
       </p:sp>
       <p:sp>
         <p:nvSpPr>
-          <p:cNvPr id="53" name="Shape 51"/>
+          <p:cNvPr id="50" name="Shape 47"/>
           <p:cNvSpPr/>
           <p:nvPr/>
         </p:nvSpPr>
@@ -20817,7 +25042,7 @@
       </p:sp>
       <p:sp>
         <p:nvSpPr>
-          <p:cNvPr id="54" name="Shape 52"/>
+          <p:cNvPr id="51" name="Shape 48"/>
           <p:cNvSpPr/>
           <p:nvPr/>
         </p:nvSpPr>
@@ -20842,7 +25067,7 @@
       </p:sp>
       <p:sp>
         <p:nvSpPr>
-          <p:cNvPr id="55" name="Text 53"/>
+          <p:cNvPr id="52" name="Text 49"/>
           <p:cNvSpPr txBox="1"/>
           <p:nvPr/>
         </p:nvSpPr>
@@ -20881,7 +25106,7 @@
       </p:sp>
       <p:sp>
         <p:nvSpPr>
-          <p:cNvPr id="56" name="Text 54"/>
+          <p:cNvPr id="53" name="Text 50"/>
           <p:cNvSpPr txBox="1"/>
           <p:nvPr/>
         </p:nvSpPr>
@@ -20920,7 +25145,7 @@
       </p:sp>
       <p:sp>
         <p:nvSpPr>
-          <p:cNvPr id="57" name="Shape 55"/>
+          <p:cNvPr id="54" name="Shape 51"/>
           <p:cNvSpPr/>
           <p:nvPr/>
         </p:nvSpPr>
@@ -20945,7 +25170,7 @@
       </p:sp>
       <p:sp>
         <p:nvSpPr>
-          <p:cNvPr id="58" name="Text 56"/>
+          <p:cNvPr id="55" name="Text 52"/>
           <p:cNvSpPr txBox="1"/>
           <p:nvPr/>
         </p:nvSpPr>
@@ -20984,7 +25209,7 @@
       </p:sp>
       <p:sp>
         <p:nvSpPr>
-          <p:cNvPr id="59" name="Text 57"/>
+          <p:cNvPr id="56" name="Text 53"/>
           <p:cNvSpPr txBox="1"/>
           <p:nvPr/>
         </p:nvSpPr>
@@ -21023,7 +25248,7 @@
       </p:sp>
       <p:sp>
         <p:nvSpPr>
-          <p:cNvPr id="60" name="Shape 58"/>
+          <p:cNvPr id="57" name="Shape 54"/>
           <p:cNvSpPr/>
           <p:nvPr/>
         </p:nvSpPr>
@@ -21048,7 +25273,7 @@
       </p:sp>
       <p:sp>
         <p:nvSpPr>
-          <p:cNvPr id="61" name="Text 59"/>
+          <p:cNvPr id="58" name="Text 55"/>
           <p:cNvSpPr txBox="1"/>
           <p:nvPr/>
         </p:nvSpPr>
@@ -21087,7 +25312,7 @@
       </p:sp>
       <p:sp>
         <p:nvSpPr>
-          <p:cNvPr id="62" name="Text 60"/>
+          <p:cNvPr id="59" name="Text 56"/>
           <p:cNvSpPr txBox="1"/>
           <p:nvPr/>
         </p:nvSpPr>

--- a/1개월차_AI에이전트_활용방안_및_DOE결과.pptx
+++ b/1개월차_AI에이전트_활용방안_및_DOE결과.pptx
@@ -18,9 +18,10 @@
     <p:sldId id="266" r:id="rId12"/>
     <p:sldId id="267" r:id="rId13"/>
     <p:sldId id="268" r:id="rId14"/>
+    <p:sldId id="269" r:id="rId15"/>
   </p:sldIdLst>
   <p:notesMasterIdLst>
-    <p:notesMasterId r:id="rId15"/>
+    <p:notesMasterId r:id="rId16"/>
   </p:notesMasterIdLst>
   <p:sldSz cx="12192000" cy="6858000"/>
   <p:notesSz cx="6858000" cy="12192000"/>
@@ -908,6 +909,94 @@
 </p:notes>
 </file>
 
+<file path=ppt/notesSlides/notesSlide14.xml><?xml version="1.0" encoding="utf-8"?>
+<p:notes xmlns:a="http://schemas.openxmlformats.org/drawingml/2006/main" xmlns:r="http://schemas.openxmlformats.org/officeDocument/2006/relationships" xmlns:p="http://schemas.openxmlformats.org/presentationml/2006/main">
+  <p:cSld>
+    <p:spTree>
+      <p:nvGrpSpPr>
+        <p:cNvPr id="1" name=""/>
+        <p:cNvGrpSpPr/>
+        <p:nvPr/>
+      </p:nvGrpSpPr>
+      <p:grpSpPr>
+        <a:xfrm>
+          <a:off x="0" y="0"/>
+          <a:ext cx="0" cy="0"/>
+          <a:chOff x="0" y="0"/>
+          <a:chExt cx="0" cy="0"/>
+        </a:xfrm>
+      </p:grpSpPr>
+      <p:sp>
+        <p:nvSpPr>
+          <p:cNvPr id="2" name="Slide Image Placeholder 1"/>
+          <p:cNvSpPr>
+            <a:spLocks noGrp="1" noRot="1" noChangeAspect="1"/>
+          </p:cNvSpPr>
+          <p:nvPr>
+            <p:ph type="sldImg"/>
+          </p:nvPr>
+        </p:nvSpPr>
+        <p:spPr/>
+      </p:sp>
+      <p:sp>
+        <p:nvSpPr>
+          <p:cNvPr id="3" name="Notes Placeholder 2"/>
+          <p:cNvSpPr>
+            <a:spLocks noGrp="1"/>
+          </p:cNvSpPr>
+          <p:nvPr>
+            <p:ph type="body" idx="1"/>
+          </p:nvPr>
+        </p:nvSpPr>
+        <p:spPr/>
+        <p:txBody>
+          <a:bodyPr/>
+          <a:lstStyle/>
+          <a:p>
+            <a:r>
+              <a:rPr lang="en-US" dirty="0"/>
+              <a:t/>
+            </a:r>
+            <a:endParaRPr lang="en-US" dirty="0"/>
+          </a:p>
+        </p:txBody>
+      </p:sp>
+      <p:sp>
+        <p:nvSpPr>
+          <p:cNvPr id="4" name="Slide Number Placeholder 3"/>
+          <p:cNvSpPr>
+            <a:spLocks noGrp="1"/>
+          </p:cNvSpPr>
+          <p:nvPr>
+            <p:ph type="sldNum" sz="quarter" idx="10"/>
+          </p:nvPr>
+        </p:nvSpPr>
+        <p:spPr/>
+        <p:txBody>
+          <a:bodyPr/>
+          <a:lstStyle/>
+          <a:p>
+            <a:fld id="{F7021451-1387-4CA6-816F-3879F97B5CBC}" type="slidenum">
+              <a:rPr lang="en-US"/>
+              <a:t>14</a:t>
+            </a:fld>
+            <a:endParaRPr lang="en-US"/>
+          </a:p>
+        </p:txBody>
+      </p:sp>
+    </p:spTree>
+    <p:extLst>
+      <p:ext uri="{BB962C8B-B14F-4D97-AF65-F5344CB8AC3E}">
+        <p14:creationId xmlns:p14="http://schemas.microsoft.com/office/powerpoint/2010/main" val="1024086991"/>
+      </p:ext>
+    </p:extLst>
+  </p:cSld>
+  <p:clrMapOvr>
+    <a:masterClrMapping/>
+  </p:clrMapOvr>
+</p:notes>
+</file>
+
 <file path=ppt/notesSlides/notesSlide2.xml><?xml version="1.0" encoding="utf-8"?>
 <p:notes xmlns:a="http://schemas.openxmlformats.org/drawingml/2006/main" xmlns:r="http://schemas.openxmlformats.org/officeDocument/2006/relationships" xmlns:p="http://schemas.openxmlformats.org/presentationml/2006/main">
   <p:cSld>
@@ -1570,7 +1659,7 @@
           <a:p>
             <a:r>
               <a:rPr lang="en-US" dirty="0"/>
-              <a:t>SolidWorks에서 내보낸 STEP 파일을 받아 Icepak 해석 모델을 매 회차 새로 구성한다. 유체 영역 생성, 경계조건 지정, 메시 설정, 측정면 생성, 해석 실행, 결과 추출까지 전 과정이 코드로 수행된다. 형상이 바뀌면 팬·개구부 면과 측정면 위치가 달라지므로, 이를 좌표와 설계변수로부터 자동으로 계산하도록 구성했다. 주요 코드는 부록 A-2에 정리했다.</a:t>
+              <a:t>해석 모델은 처음에 GUI로 한 번 직접 구성하고, 그 과정을 스크립트 리코더로 기록했다. 기록된 스크립트는 형상 치수가 고정값으로 박혀 있어 그대로는 재사용할 수 없으므로, AI 에이전트와 함께 설계변수 기반 코드로 정리했다. 이후에는 형상 파일만 바뀌면 같은 절차를 코드가 매 회차 재현한다. 단계별 GUI 설정은 부록 A-3, 코드는 부록 A-2에 정리했다.</a:t>
             </a:r>
             <a:endParaRPr lang="en-US" dirty="0"/>
           </a:p>
@@ -9981,6 +10070,1804 @@
 </p:sld>
 </file>
 
+<file path=ppt/slides/slide14.xml><?xml version="1.0" encoding="utf-8"?>
+<p:sld xmlns:a="http://schemas.openxmlformats.org/drawingml/2006/main" xmlns:r="http://schemas.openxmlformats.org/officeDocument/2006/relationships" xmlns:p="http://schemas.openxmlformats.org/presentationml/2006/main">
+  <p:cSld name="Slide 14">
+    <p:bg>
+      <p:bgPr>
+        <a:solidFill>
+          <a:srgbClr val="F3F5F8"/>
+        </a:solidFill>
+      </p:bgPr>
+    </p:bg>
+    <p:spTree>
+      <p:nvGrpSpPr>
+        <p:cNvPr id="1" name=""/>
+        <p:cNvGrpSpPr/>
+        <p:nvPr/>
+      </p:nvGrpSpPr>
+      <p:grpSpPr>
+        <a:xfrm>
+          <a:off x="0" y="0"/>
+          <a:ext cx="0" cy="0"/>
+          <a:chOff x="0" y="0"/>
+          <a:chExt cx="0" cy="0"/>
+        </a:xfrm>
+      </p:grpSpPr>
+      <p:sp>
+        <p:nvSpPr>
+          <p:cNvPr id="2" name="Shape 0"/>
+          <p:cNvSpPr/>
+          <p:nvPr/>
+        </p:nvSpPr>
+        <p:spPr>
+          <a:xfrm>
+            <a:off x="502920" y="384048"/>
+            <a:ext cx="475488" cy="475488"/>
+          </a:xfrm>
+          <a:prstGeom prst="rect">
+            <a:avLst/>
+          </a:prstGeom>
+          <a:solidFill>
+            <a:srgbClr val="16305B"/>
+          </a:solidFill>
+          <a:ln w="12700">
+            <a:solidFill>
+              <a:srgbClr val="16305B"/>
+            </a:solidFill>
+            <a:prstDash val="solid"/>
+          </a:ln>
+        </p:spPr>
+      </p:sp>
+      <p:sp>
+        <p:nvSpPr>
+          <p:cNvPr id="3" name="Text 1"/>
+          <p:cNvSpPr txBox="1"/>
+          <p:nvPr/>
+        </p:nvSpPr>
+        <p:spPr>
+          <a:xfrm>
+            <a:off x="502920" y="384048"/>
+            <a:ext cx="475488" cy="475488"/>
+          </a:xfrm>
+          <a:prstGeom prst="rect">
+            <a:avLst/>
+          </a:prstGeom>
+          <a:noFill/>
+          <a:ln/>
+        </p:spPr>
+        <p:txBody>
+          <a:bodyPr wrap="square" lIns="0" tIns="0" rIns="0" bIns="0" rtlCol="0" anchor="ctr"/>
+          <a:lstStyle/>
+          <a:p>
+            <a:pPr algn="ctr" indent="0" marL="0">
+              <a:buNone/>
+            </a:pPr>
+            <a:r>
+              <a:rPr lang="en-US" sz="1600" b="1" dirty="0">
+                <a:solidFill>
+                  <a:srgbClr val="FFFFFF"/>
+                </a:solidFill>
+                <a:latin typeface="Malgun Gothic" pitchFamily="34" charset="0"/>
+                <a:ea typeface="Malgun Gothic" pitchFamily="34" charset="-122"/>
+                <a:cs typeface="Malgun Gothic" pitchFamily="34" charset="-120"/>
+              </a:rPr>
+              <a:t>A-3</a:t>
+            </a:r>
+            <a:endParaRPr lang="en-US" sz="1600" dirty="0"/>
+          </a:p>
+        </p:txBody>
+      </p:sp>
+      <p:sp>
+        <p:nvSpPr>
+          <p:cNvPr id="4" name="Text 2"/>
+          <p:cNvSpPr txBox="1"/>
+          <p:nvPr/>
+        </p:nvSpPr>
+        <p:spPr>
+          <a:xfrm>
+            <a:off x="1124712" y="365760"/>
+            <a:ext cx="7315200" cy="237744"/>
+          </a:xfrm>
+          <a:prstGeom prst="rect">
+            <a:avLst/>
+          </a:prstGeom>
+          <a:noFill/>
+          <a:ln/>
+        </p:spPr>
+        <p:txBody>
+          <a:bodyPr wrap="square" lIns="0" tIns="0" rIns="0" bIns="0" rtlCol="0" anchor="ctr"/>
+          <a:lstStyle/>
+          <a:p>
+            <a:pPr indent="0" marL="0">
+              <a:buNone/>
+            </a:pPr>
+            <a:r>
+              <a:rPr lang="en-US" sz="1050" b="1" spc="100" kern="0" dirty="0">
+                <a:solidFill>
+                  <a:srgbClr val="00A3C4"/>
+                </a:solidFill>
+                <a:latin typeface="Malgun Gothic" pitchFamily="34" charset="0"/>
+                <a:ea typeface="Malgun Gothic" pitchFamily="34" charset="-122"/>
+                <a:cs typeface="Malgun Gothic" pitchFamily="34" charset="-120"/>
+              </a:rPr>
+              <a:t>부록</a:t>
+            </a:r>
+            <a:endParaRPr lang="en-US" sz="1050" dirty="0"/>
+          </a:p>
+        </p:txBody>
+      </p:sp>
+      <p:sp>
+        <p:nvSpPr>
+          <p:cNvPr id="5" name="Text 3"/>
+          <p:cNvSpPr txBox="1"/>
+          <p:nvPr/>
+        </p:nvSpPr>
+        <p:spPr>
+          <a:xfrm>
+            <a:off x="1124712" y="548640"/>
+            <a:ext cx="10607040" cy="384048"/>
+          </a:xfrm>
+          <a:prstGeom prst="rect">
+            <a:avLst/>
+          </a:prstGeom>
+          <a:noFill/>
+          <a:ln/>
+        </p:spPr>
+        <p:txBody>
+          <a:bodyPr wrap="square" lIns="0" tIns="0" rIns="0" bIns="0" rtlCol="0" anchor="ctr"/>
+          <a:lstStyle/>
+          <a:p>
+            <a:pPr indent="0" marL="0">
+              <a:buNone/>
+            </a:pPr>
+            <a:r>
+              <a:rPr lang="en-US" sz="2200" b="1" dirty="0">
+                <a:solidFill>
+                  <a:srgbClr val="16305B"/>
+                </a:solidFill>
+                <a:latin typeface="Malgun Gothic" pitchFamily="34" charset="0"/>
+                <a:ea typeface="Malgun Gothic" pitchFamily="34" charset="-122"/>
+                <a:cs typeface="Malgun Gothic" pitchFamily="34" charset="-120"/>
+              </a:rPr>
+              <a:t>Icepak 해석 모델 GUI 설정 절차</a:t>
+            </a:r>
+            <a:endParaRPr lang="en-US" sz="2200" dirty="0"/>
+          </a:p>
+        </p:txBody>
+      </p:sp>
+      <p:sp>
+        <p:nvSpPr>
+          <p:cNvPr id="6" name="Shape 4"/>
+          <p:cNvSpPr/>
+          <p:nvPr/>
+        </p:nvSpPr>
+        <p:spPr>
+          <a:xfrm>
+            <a:off x="502920" y="1170432"/>
+            <a:ext cx="256032" cy="256032"/>
+          </a:xfrm>
+          <a:prstGeom prst="ellipse">
+            <a:avLst/>
+          </a:prstGeom>
+          <a:solidFill>
+            <a:srgbClr val="16305B"/>
+          </a:solidFill>
+          <a:ln w="12700">
+            <a:solidFill>
+              <a:srgbClr val="16305B"/>
+            </a:solidFill>
+            <a:prstDash val="solid"/>
+          </a:ln>
+        </p:spPr>
+      </p:sp>
+      <p:sp>
+        <p:nvSpPr>
+          <p:cNvPr id="7" name="Text 5"/>
+          <p:cNvSpPr txBox="1"/>
+          <p:nvPr/>
+        </p:nvSpPr>
+        <p:spPr>
+          <a:xfrm>
+            <a:off x="502920" y="1170432"/>
+            <a:ext cx="256032" cy="256032"/>
+          </a:xfrm>
+          <a:prstGeom prst="rect">
+            <a:avLst/>
+          </a:prstGeom>
+          <a:noFill/>
+          <a:ln/>
+        </p:spPr>
+        <p:txBody>
+          <a:bodyPr wrap="square" lIns="0" tIns="0" rIns="0" bIns="0" rtlCol="0" anchor="ctr"/>
+          <a:lstStyle/>
+          <a:p>
+            <a:pPr algn="ctr" indent="0" marL="0">
+              <a:buNone/>
+            </a:pPr>
+            <a:r>
+              <a:rPr lang="en-US" sz="900" b="1" dirty="0">
+                <a:solidFill>
+                  <a:srgbClr val="FFFFFF"/>
+                </a:solidFill>
+                <a:latin typeface="Malgun Gothic" pitchFamily="34" charset="0"/>
+                <a:ea typeface="Malgun Gothic" pitchFamily="34" charset="-122"/>
+                <a:cs typeface="Malgun Gothic" pitchFamily="34" charset="-120"/>
+              </a:rPr>
+              <a:t>1</a:t>
+            </a:r>
+            <a:endParaRPr lang="en-US" sz="900" dirty="0"/>
+          </a:p>
+        </p:txBody>
+      </p:sp>
+      <p:sp>
+        <p:nvSpPr>
+          <p:cNvPr id="8" name="Text 6"/>
+          <p:cNvSpPr txBox="1"/>
+          <p:nvPr/>
+        </p:nvSpPr>
+        <p:spPr>
+          <a:xfrm>
+            <a:off x="850392" y="1152144"/>
+            <a:ext cx="2267712" cy="292608"/>
+          </a:xfrm>
+          <a:prstGeom prst="rect">
+            <a:avLst/>
+          </a:prstGeom>
+          <a:noFill/>
+          <a:ln/>
+        </p:spPr>
+        <p:txBody>
+          <a:bodyPr wrap="square" lIns="0" tIns="0" rIns="0" bIns="0" rtlCol="0" anchor="ctr"/>
+          <a:lstStyle/>
+          <a:p>
+            <a:pPr indent="0" marL="0">
+              <a:buNone/>
+            </a:pPr>
+            <a:r>
+              <a:rPr lang="en-US" sz="1100" b="1" dirty="0">
+                <a:solidFill>
+                  <a:srgbClr val="16305B"/>
+                </a:solidFill>
+                <a:latin typeface="Malgun Gothic" pitchFamily="34" charset="0"/>
+                <a:ea typeface="Malgun Gothic" pitchFamily="34" charset="-122"/>
+                <a:cs typeface="Malgun Gothic" pitchFamily="34" charset="-120"/>
+              </a:rPr>
+              <a:t>프로젝트 생성</a:t>
+            </a:r>
+            <a:endParaRPr lang="en-US" sz="1100" dirty="0"/>
+          </a:p>
+        </p:txBody>
+      </p:sp>
+      <p:sp>
+        <p:nvSpPr>
+          <p:cNvPr id="9" name="Shape 7"/>
+          <p:cNvSpPr/>
+          <p:nvPr/>
+        </p:nvSpPr>
+        <p:spPr>
+          <a:xfrm>
+            <a:off x="502920" y="1536192"/>
+            <a:ext cx="2615184" cy="1874520"/>
+          </a:xfrm>
+          <a:prstGeom prst="roundRect">
+            <a:avLst>
+              <a:gd name="adj" fmla="val 2439"/>
+            </a:avLst>
+          </a:prstGeom>
+          <a:solidFill>
+            <a:srgbClr val="FFFFFF"/>
+          </a:solidFill>
+          <a:ln w="12700">
+            <a:solidFill>
+              <a:srgbClr val="C3CDDA"/>
+            </a:solidFill>
+            <a:prstDash val="dash"/>
+          </a:ln>
+        </p:spPr>
+      </p:sp>
+      <p:sp>
+        <p:nvSpPr>
+          <p:cNvPr id="10" name="Text 8"/>
+          <p:cNvSpPr txBox="1"/>
+          <p:nvPr/>
+        </p:nvSpPr>
+        <p:spPr>
+          <a:xfrm>
+            <a:off x="502920" y="1536192"/>
+            <a:ext cx="2615184" cy="1874520"/>
+          </a:xfrm>
+          <a:prstGeom prst="rect">
+            <a:avLst/>
+          </a:prstGeom>
+          <a:noFill/>
+          <a:ln/>
+        </p:spPr>
+        <p:txBody>
+          <a:bodyPr wrap="square" lIns="0" tIns="0" rIns="0" bIns="0" rtlCol="0" anchor="ctr"/>
+          <a:lstStyle/>
+          <a:p>
+            <a:pPr algn="ctr" indent="0" marL="0">
+              <a:buNone/>
+            </a:pPr>
+            <a:r>
+              <a:rPr lang="en-US" sz="1000" b="1" dirty="0">
+                <a:solidFill>
+                  <a:srgbClr val="B5C0CF"/>
+                </a:solidFill>
+                <a:latin typeface="Malgun Gothic" pitchFamily="34" charset="0"/>
+                <a:ea typeface="Malgun Gothic" pitchFamily="34" charset="-122"/>
+                <a:cs typeface="Malgun Gothic" pitchFamily="34" charset="-120"/>
+              </a:rPr>
+              <a:t>GUI 캡처</a:t>
+            </a:r>
+            <a:endParaRPr lang="en-US" sz="1000" dirty="0"/>
+          </a:p>
+        </p:txBody>
+      </p:sp>
+      <p:sp>
+        <p:nvSpPr>
+          <p:cNvPr id="11" name="Text 9"/>
+          <p:cNvSpPr txBox="1"/>
+          <p:nvPr/>
+        </p:nvSpPr>
+        <p:spPr>
+          <a:xfrm>
+            <a:off x="502920" y="3456432"/>
+            <a:ext cx="2615184" cy="274320"/>
+          </a:xfrm>
+          <a:prstGeom prst="rect">
+            <a:avLst/>
+          </a:prstGeom>
+          <a:noFill/>
+          <a:ln/>
+        </p:spPr>
+        <p:txBody>
+          <a:bodyPr wrap="square" lIns="0" tIns="0" rIns="0" bIns="0" rtlCol="0" anchor="ctr"/>
+          <a:lstStyle/>
+          <a:p>
+            <a:pPr indent="0" marL="0">
+              <a:buNone/>
+            </a:pPr>
+            <a:r>
+              <a:rPr lang="en-US" sz="900" dirty="0">
+                <a:solidFill>
+                  <a:srgbClr val="6B7A8F"/>
+                </a:solidFill>
+                <a:latin typeface="Malgun Gothic" pitchFamily="34" charset="0"/>
+                <a:ea typeface="Malgun Gothic" pitchFamily="34" charset="-122"/>
+                <a:cs typeface="Malgun Gothic" pitchFamily="34" charset="-120"/>
+              </a:rPr>
+              <a:t>새 프로젝트 · 디자인 생성</a:t>
+            </a:r>
+            <a:endParaRPr lang="en-US" sz="900" dirty="0"/>
+          </a:p>
+        </p:txBody>
+      </p:sp>
+      <p:sp>
+        <p:nvSpPr>
+          <p:cNvPr id="12" name="Shape 10"/>
+          <p:cNvSpPr/>
+          <p:nvPr/>
+        </p:nvSpPr>
+        <p:spPr>
+          <a:xfrm>
+            <a:off x="3358591" y="1170432"/>
+            <a:ext cx="256032" cy="256032"/>
+          </a:xfrm>
+          <a:prstGeom prst="ellipse">
+            <a:avLst/>
+          </a:prstGeom>
+          <a:solidFill>
+            <a:srgbClr val="16305B"/>
+          </a:solidFill>
+          <a:ln w="12700">
+            <a:solidFill>
+              <a:srgbClr val="16305B"/>
+            </a:solidFill>
+            <a:prstDash val="solid"/>
+          </a:ln>
+        </p:spPr>
+      </p:sp>
+      <p:sp>
+        <p:nvSpPr>
+          <p:cNvPr id="13" name="Text 11"/>
+          <p:cNvSpPr txBox="1"/>
+          <p:nvPr/>
+        </p:nvSpPr>
+        <p:spPr>
+          <a:xfrm>
+            <a:off x="3358591" y="1170432"/>
+            <a:ext cx="256032" cy="256032"/>
+          </a:xfrm>
+          <a:prstGeom prst="rect">
+            <a:avLst/>
+          </a:prstGeom>
+          <a:noFill/>
+          <a:ln/>
+        </p:spPr>
+        <p:txBody>
+          <a:bodyPr wrap="square" lIns="0" tIns="0" rIns="0" bIns="0" rtlCol="0" anchor="ctr"/>
+          <a:lstStyle/>
+          <a:p>
+            <a:pPr algn="ctr" indent="0" marL="0">
+              <a:buNone/>
+            </a:pPr>
+            <a:r>
+              <a:rPr lang="en-US" sz="900" b="1" dirty="0">
+                <a:solidFill>
+                  <a:srgbClr val="FFFFFF"/>
+                </a:solidFill>
+                <a:latin typeface="Malgun Gothic" pitchFamily="34" charset="0"/>
+                <a:ea typeface="Malgun Gothic" pitchFamily="34" charset="-122"/>
+                <a:cs typeface="Malgun Gothic" pitchFamily="34" charset="-120"/>
+              </a:rPr>
+              <a:t>2</a:t>
+            </a:r>
+            <a:endParaRPr lang="en-US" sz="900" dirty="0"/>
+          </a:p>
+        </p:txBody>
+      </p:sp>
+      <p:sp>
+        <p:nvSpPr>
+          <p:cNvPr id="14" name="Text 12"/>
+          <p:cNvSpPr txBox="1"/>
+          <p:nvPr/>
+        </p:nvSpPr>
+        <p:spPr>
+          <a:xfrm>
+            <a:off x="3706063" y="1152144"/>
+            <a:ext cx="2267712" cy="292608"/>
+          </a:xfrm>
+          <a:prstGeom prst="rect">
+            <a:avLst/>
+          </a:prstGeom>
+          <a:noFill/>
+          <a:ln/>
+        </p:spPr>
+        <p:txBody>
+          <a:bodyPr wrap="square" lIns="0" tIns="0" rIns="0" bIns="0" rtlCol="0" anchor="ctr"/>
+          <a:lstStyle/>
+          <a:p>
+            <a:pPr indent="0" marL="0">
+              <a:buNone/>
+            </a:pPr>
+            <a:r>
+              <a:rPr lang="en-US" sz="1100" b="1" dirty="0">
+                <a:solidFill>
+                  <a:srgbClr val="16305B"/>
+                </a:solidFill>
+                <a:latin typeface="Malgun Gothic" pitchFamily="34" charset="0"/>
+                <a:ea typeface="Malgun Gothic" pitchFamily="34" charset="-122"/>
+                <a:cs typeface="Malgun Gothic" pitchFamily="34" charset="-120"/>
+              </a:rPr>
+              <a:t>형상 불러오기</a:t>
+            </a:r>
+            <a:endParaRPr lang="en-US" sz="1100" dirty="0"/>
+          </a:p>
+        </p:txBody>
+      </p:sp>
+      <p:sp>
+        <p:nvSpPr>
+          <p:cNvPr id="15" name="Shape 13"/>
+          <p:cNvSpPr/>
+          <p:nvPr/>
+        </p:nvSpPr>
+        <p:spPr>
+          <a:xfrm>
+            <a:off x="3358591" y="1536192"/>
+            <a:ext cx="2615184" cy="1874520"/>
+          </a:xfrm>
+          <a:prstGeom prst="roundRect">
+            <a:avLst>
+              <a:gd name="adj" fmla="val 2439"/>
+            </a:avLst>
+          </a:prstGeom>
+          <a:solidFill>
+            <a:srgbClr val="FFFFFF"/>
+          </a:solidFill>
+          <a:ln w="12700">
+            <a:solidFill>
+              <a:srgbClr val="C3CDDA"/>
+            </a:solidFill>
+            <a:prstDash val="dash"/>
+          </a:ln>
+        </p:spPr>
+      </p:sp>
+      <p:sp>
+        <p:nvSpPr>
+          <p:cNvPr id="16" name="Text 14"/>
+          <p:cNvSpPr txBox="1"/>
+          <p:nvPr/>
+        </p:nvSpPr>
+        <p:spPr>
+          <a:xfrm>
+            <a:off x="3358591" y="1536192"/>
+            <a:ext cx="2615184" cy="1874520"/>
+          </a:xfrm>
+          <a:prstGeom prst="rect">
+            <a:avLst/>
+          </a:prstGeom>
+          <a:noFill/>
+          <a:ln/>
+        </p:spPr>
+        <p:txBody>
+          <a:bodyPr wrap="square" lIns="0" tIns="0" rIns="0" bIns="0" rtlCol="0" anchor="ctr"/>
+          <a:lstStyle/>
+          <a:p>
+            <a:pPr algn="ctr" indent="0" marL="0">
+              <a:buNone/>
+            </a:pPr>
+            <a:r>
+              <a:rPr lang="en-US" sz="1000" b="1" dirty="0">
+                <a:solidFill>
+                  <a:srgbClr val="B5C0CF"/>
+                </a:solidFill>
+                <a:latin typeface="Malgun Gothic" pitchFamily="34" charset="0"/>
+                <a:ea typeface="Malgun Gothic" pitchFamily="34" charset="-122"/>
+                <a:cs typeface="Malgun Gothic" pitchFamily="34" charset="-120"/>
+              </a:rPr>
+              <a:t>GUI 캡처</a:t>
+            </a:r>
+            <a:endParaRPr lang="en-US" sz="1000" dirty="0"/>
+          </a:p>
+        </p:txBody>
+      </p:sp>
+      <p:sp>
+        <p:nvSpPr>
+          <p:cNvPr id="17" name="Text 15"/>
+          <p:cNvSpPr txBox="1"/>
+          <p:nvPr/>
+        </p:nvSpPr>
+        <p:spPr>
+          <a:xfrm>
+            <a:off x="3358591" y="3456432"/>
+            <a:ext cx="2615184" cy="274320"/>
+          </a:xfrm>
+          <a:prstGeom prst="rect">
+            <a:avLst/>
+          </a:prstGeom>
+          <a:noFill/>
+          <a:ln/>
+        </p:spPr>
+        <p:txBody>
+          <a:bodyPr wrap="square" lIns="0" tIns="0" rIns="0" bIns="0" rtlCol="0" anchor="ctr"/>
+          <a:lstStyle/>
+          <a:p>
+            <a:pPr indent="0" marL="0">
+              <a:buNone/>
+            </a:pPr>
+            <a:r>
+              <a:rPr lang="en-US" sz="900" dirty="0">
+                <a:solidFill>
+                  <a:srgbClr val="6B7A8F"/>
+                </a:solidFill>
+                <a:latin typeface="Malgun Gothic" pitchFamily="34" charset="0"/>
+                <a:ea typeface="Malgun Gothic" pitchFamily="34" charset="-122"/>
+                <a:cs typeface="Malgun Gothic" pitchFamily="34" charset="-120"/>
+              </a:rPr>
+              <a:t>STEP 불러오기 · 부품 이름·재질 지정</a:t>
+            </a:r>
+            <a:endParaRPr lang="en-US" sz="900" dirty="0"/>
+          </a:p>
+        </p:txBody>
+      </p:sp>
+      <p:sp>
+        <p:nvSpPr>
+          <p:cNvPr id="18" name="Shape 16"/>
+          <p:cNvSpPr/>
+          <p:nvPr/>
+        </p:nvSpPr>
+        <p:spPr>
+          <a:xfrm>
+            <a:off x="6214262" y="1170432"/>
+            <a:ext cx="256032" cy="256032"/>
+          </a:xfrm>
+          <a:prstGeom prst="ellipse">
+            <a:avLst/>
+          </a:prstGeom>
+          <a:solidFill>
+            <a:srgbClr val="16305B"/>
+          </a:solidFill>
+          <a:ln w="12700">
+            <a:solidFill>
+              <a:srgbClr val="16305B"/>
+            </a:solidFill>
+            <a:prstDash val="solid"/>
+          </a:ln>
+        </p:spPr>
+      </p:sp>
+      <p:sp>
+        <p:nvSpPr>
+          <p:cNvPr id="19" name="Text 17"/>
+          <p:cNvSpPr txBox="1"/>
+          <p:nvPr/>
+        </p:nvSpPr>
+        <p:spPr>
+          <a:xfrm>
+            <a:off x="6214262" y="1170432"/>
+            <a:ext cx="256032" cy="256032"/>
+          </a:xfrm>
+          <a:prstGeom prst="rect">
+            <a:avLst/>
+          </a:prstGeom>
+          <a:noFill/>
+          <a:ln/>
+        </p:spPr>
+        <p:txBody>
+          <a:bodyPr wrap="square" lIns="0" tIns="0" rIns="0" bIns="0" rtlCol="0" anchor="ctr"/>
+          <a:lstStyle/>
+          <a:p>
+            <a:pPr algn="ctr" indent="0" marL="0">
+              <a:buNone/>
+            </a:pPr>
+            <a:r>
+              <a:rPr lang="en-US" sz="900" b="1" dirty="0">
+                <a:solidFill>
+                  <a:srgbClr val="FFFFFF"/>
+                </a:solidFill>
+                <a:latin typeface="Malgun Gothic" pitchFamily="34" charset="0"/>
+                <a:ea typeface="Malgun Gothic" pitchFamily="34" charset="-122"/>
+                <a:cs typeface="Malgun Gothic" pitchFamily="34" charset="-120"/>
+              </a:rPr>
+              <a:t>3</a:t>
+            </a:r>
+            <a:endParaRPr lang="en-US" sz="900" dirty="0"/>
+          </a:p>
+        </p:txBody>
+      </p:sp>
+      <p:sp>
+        <p:nvSpPr>
+          <p:cNvPr id="20" name="Text 18"/>
+          <p:cNvSpPr txBox="1"/>
+          <p:nvPr/>
+        </p:nvSpPr>
+        <p:spPr>
+          <a:xfrm>
+            <a:off x="6561734" y="1152144"/>
+            <a:ext cx="2267712" cy="292608"/>
+          </a:xfrm>
+          <a:prstGeom prst="rect">
+            <a:avLst/>
+          </a:prstGeom>
+          <a:noFill/>
+          <a:ln/>
+        </p:spPr>
+        <p:txBody>
+          <a:bodyPr wrap="square" lIns="0" tIns="0" rIns="0" bIns="0" rtlCol="0" anchor="ctr"/>
+          <a:lstStyle/>
+          <a:p>
+            <a:pPr indent="0" marL="0">
+              <a:buNone/>
+            </a:pPr>
+            <a:r>
+              <a:rPr lang="en-US" sz="1100" b="1" dirty="0">
+                <a:solidFill>
+                  <a:srgbClr val="16305B"/>
+                </a:solidFill>
+                <a:latin typeface="Malgun Gothic" pitchFamily="34" charset="0"/>
+                <a:ea typeface="Malgun Gothic" pitchFamily="34" charset="-122"/>
+                <a:cs typeface="Malgun Gothic" pitchFamily="34" charset="-120"/>
+              </a:rPr>
+              <a:t>유체 영역</a:t>
+            </a:r>
+            <a:endParaRPr lang="en-US" sz="1100" dirty="0"/>
+          </a:p>
+        </p:txBody>
+      </p:sp>
+      <p:sp>
+        <p:nvSpPr>
+          <p:cNvPr id="21" name="Shape 19"/>
+          <p:cNvSpPr/>
+          <p:nvPr/>
+        </p:nvSpPr>
+        <p:spPr>
+          <a:xfrm>
+            <a:off x="6214262" y="1536192"/>
+            <a:ext cx="2615184" cy="1874520"/>
+          </a:xfrm>
+          <a:prstGeom prst="roundRect">
+            <a:avLst>
+              <a:gd name="adj" fmla="val 2439"/>
+            </a:avLst>
+          </a:prstGeom>
+          <a:solidFill>
+            <a:srgbClr val="FFFFFF"/>
+          </a:solidFill>
+          <a:ln w="12700">
+            <a:solidFill>
+              <a:srgbClr val="C3CDDA"/>
+            </a:solidFill>
+            <a:prstDash val="dash"/>
+          </a:ln>
+        </p:spPr>
+      </p:sp>
+      <p:sp>
+        <p:nvSpPr>
+          <p:cNvPr id="22" name="Text 20"/>
+          <p:cNvSpPr txBox="1"/>
+          <p:nvPr/>
+        </p:nvSpPr>
+        <p:spPr>
+          <a:xfrm>
+            <a:off x="6214262" y="1536192"/>
+            <a:ext cx="2615184" cy="1874520"/>
+          </a:xfrm>
+          <a:prstGeom prst="rect">
+            <a:avLst/>
+          </a:prstGeom>
+          <a:noFill/>
+          <a:ln/>
+        </p:spPr>
+        <p:txBody>
+          <a:bodyPr wrap="square" lIns="0" tIns="0" rIns="0" bIns="0" rtlCol="0" anchor="ctr"/>
+          <a:lstStyle/>
+          <a:p>
+            <a:pPr algn="ctr" indent="0" marL="0">
+              <a:buNone/>
+            </a:pPr>
+            <a:r>
+              <a:rPr lang="en-US" sz="1000" b="1" dirty="0">
+                <a:solidFill>
+                  <a:srgbClr val="B5C0CF"/>
+                </a:solidFill>
+                <a:latin typeface="Malgun Gothic" pitchFamily="34" charset="0"/>
+                <a:ea typeface="Malgun Gothic" pitchFamily="34" charset="-122"/>
+                <a:cs typeface="Malgun Gothic" pitchFamily="34" charset="-120"/>
+              </a:rPr>
+              <a:t>GUI 캡처</a:t>
+            </a:r>
+            <a:endParaRPr lang="en-US" sz="1000" dirty="0"/>
+          </a:p>
+        </p:txBody>
+      </p:sp>
+      <p:sp>
+        <p:nvSpPr>
+          <p:cNvPr id="23" name="Text 21"/>
+          <p:cNvSpPr txBox="1"/>
+          <p:nvPr/>
+        </p:nvSpPr>
+        <p:spPr>
+          <a:xfrm>
+            <a:off x="6214262" y="3456432"/>
+            <a:ext cx="2615184" cy="274320"/>
+          </a:xfrm>
+          <a:prstGeom prst="rect">
+            <a:avLst/>
+          </a:prstGeom>
+          <a:noFill/>
+          <a:ln/>
+        </p:spPr>
+        <p:txBody>
+          <a:bodyPr wrap="square" lIns="0" tIns="0" rIns="0" bIns="0" rtlCol="0" anchor="ctr"/>
+          <a:lstStyle/>
+          <a:p>
+            <a:pPr indent="0" marL="0">
+              <a:buNone/>
+            </a:pPr>
+            <a:r>
+              <a:rPr lang="en-US" sz="900" dirty="0">
+                <a:solidFill>
+                  <a:srgbClr val="6B7A8F"/>
+                </a:solidFill>
+                <a:latin typeface="Malgun Gothic" pitchFamily="34" charset="0"/>
+                <a:ea typeface="Malgun Gothic" pitchFamily="34" charset="-122"/>
+                <a:cs typeface="Malgun Gothic" pitchFamily="34" charset="-120"/>
+              </a:rPr>
+              <a:t>박스 생성 → 형상 Subtract → 분리</a:t>
+            </a:r>
+            <a:endParaRPr lang="en-US" sz="900" dirty="0"/>
+          </a:p>
+        </p:txBody>
+      </p:sp>
+      <p:sp>
+        <p:nvSpPr>
+          <p:cNvPr id="24" name="Shape 22"/>
+          <p:cNvSpPr/>
+          <p:nvPr/>
+        </p:nvSpPr>
+        <p:spPr>
+          <a:xfrm>
+            <a:off x="9069934" y="1170432"/>
+            <a:ext cx="256032" cy="256032"/>
+          </a:xfrm>
+          <a:prstGeom prst="ellipse">
+            <a:avLst/>
+          </a:prstGeom>
+          <a:solidFill>
+            <a:srgbClr val="16305B"/>
+          </a:solidFill>
+          <a:ln w="12700">
+            <a:solidFill>
+              <a:srgbClr val="16305B"/>
+            </a:solidFill>
+            <a:prstDash val="solid"/>
+          </a:ln>
+        </p:spPr>
+      </p:sp>
+      <p:sp>
+        <p:nvSpPr>
+          <p:cNvPr id="25" name="Text 23"/>
+          <p:cNvSpPr txBox="1"/>
+          <p:nvPr/>
+        </p:nvSpPr>
+        <p:spPr>
+          <a:xfrm>
+            <a:off x="9069934" y="1170432"/>
+            <a:ext cx="256032" cy="256032"/>
+          </a:xfrm>
+          <a:prstGeom prst="rect">
+            <a:avLst/>
+          </a:prstGeom>
+          <a:noFill/>
+          <a:ln/>
+        </p:spPr>
+        <p:txBody>
+          <a:bodyPr wrap="square" lIns="0" tIns="0" rIns="0" bIns="0" rtlCol="0" anchor="ctr"/>
+          <a:lstStyle/>
+          <a:p>
+            <a:pPr algn="ctr" indent="0" marL="0">
+              <a:buNone/>
+            </a:pPr>
+            <a:r>
+              <a:rPr lang="en-US" sz="900" b="1" dirty="0">
+                <a:solidFill>
+                  <a:srgbClr val="FFFFFF"/>
+                </a:solidFill>
+                <a:latin typeface="Malgun Gothic" pitchFamily="34" charset="0"/>
+                <a:ea typeface="Malgun Gothic" pitchFamily="34" charset="-122"/>
+                <a:cs typeface="Malgun Gothic" pitchFamily="34" charset="-120"/>
+              </a:rPr>
+              <a:t>4</a:t>
+            </a:r>
+            <a:endParaRPr lang="en-US" sz="900" dirty="0"/>
+          </a:p>
+        </p:txBody>
+      </p:sp>
+      <p:sp>
+        <p:nvSpPr>
+          <p:cNvPr id="26" name="Text 24"/>
+          <p:cNvSpPr txBox="1"/>
+          <p:nvPr/>
+        </p:nvSpPr>
+        <p:spPr>
+          <a:xfrm>
+            <a:off x="9417406" y="1152144"/>
+            <a:ext cx="2267712" cy="292608"/>
+          </a:xfrm>
+          <a:prstGeom prst="rect">
+            <a:avLst/>
+          </a:prstGeom>
+          <a:noFill/>
+          <a:ln/>
+        </p:spPr>
+        <p:txBody>
+          <a:bodyPr wrap="square" lIns="0" tIns="0" rIns="0" bIns="0" rtlCol="0" anchor="ctr"/>
+          <a:lstStyle/>
+          <a:p>
+            <a:pPr indent="0" marL="0">
+              <a:buNone/>
+            </a:pPr>
+            <a:r>
+              <a:rPr lang="en-US" sz="1100" b="1" dirty="0">
+                <a:solidFill>
+                  <a:srgbClr val="16305B"/>
+                </a:solidFill>
+                <a:latin typeface="Malgun Gothic" pitchFamily="34" charset="0"/>
+                <a:ea typeface="Malgun Gothic" pitchFamily="34" charset="-122"/>
+                <a:cs typeface="Malgun Gothic" pitchFamily="34" charset="-120"/>
+              </a:rPr>
+              <a:t>경계조건</a:t>
+            </a:r>
+            <a:endParaRPr lang="en-US" sz="1100" dirty="0"/>
+          </a:p>
+        </p:txBody>
+      </p:sp>
+      <p:sp>
+        <p:nvSpPr>
+          <p:cNvPr id="27" name="Shape 25"/>
+          <p:cNvSpPr/>
+          <p:nvPr/>
+        </p:nvSpPr>
+        <p:spPr>
+          <a:xfrm>
+            <a:off x="9069934" y="1536192"/>
+            <a:ext cx="2615184" cy="1874520"/>
+          </a:xfrm>
+          <a:prstGeom prst="roundRect">
+            <a:avLst>
+              <a:gd name="adj" fmla="val 2439"/>
+            </a:avLst>
+          </a:prstGeom>
+          <a:solidFill>
+            <a:srgbClr val="FFFFFF"/>
+          </a:solidFill>
+          <a:ln w="12700">
+            <a:solidFill>
+              <a:srgbClr val="C3CDDA"/>
+            </a:solidFill>
+            <a:prstDash val="dash"/>
+          </a:ln>
+        </p:spPr>
+      </p:sp>
+      <p:sp>
+        <p:nvSpPr>
+          <p:cNvPr id="28" name="Text 26"/>
+          <p:cNvSpPr txBox="1"/>
+          <p:nvPr/>
+        </p:nvSpPr>
+        <p:spPr>
+          <a:xfrm>
+            <a:off x="9069934" y="1536192"/>
+            <a:ext cx="2615184" cy="1874520"/>
+          </a:xfrm>
+          <a:prstGeom prst="rect">
+            <a:avLst/>
+          </a:prstGeom>
+          <a:noFill/>
+          <a:ln/>
+        </p:spPr>
+        <p:txBody>
+          <a:bodyPr wrap="square" lIns="0" tIns="0" rIns="0" bIns="0" rtlCol="0" anchor="ctr"/>
+          <a:lstStyle/>
+          <a:p>
+            <a:pPr algn="ctr" indent="0" marL="0">
+              <a:buNone/>
+            </a:pPr>
+            <a:r>
+              <a:rPr lang="en-US" sz="1000" b="1" dirty="0">
+                <a:solidFill>
+                  <a:srgbClr val="B5C0CF"/>
+                </a:solidFill>
+                <a:latin typeface="Malgun Gothic" pitchFamily="34" charset="0"/>
+                <a:ea typeface="Malgun Gothic" pitchFamily="34" charset="-122"/>
+                <a:cs typeface="Malgun Gothic" pitchFamily="34" charset="-120"/>
+              </a:rPr>
+              <a:t>GUI 캡처</a:t>
+            </a:r>
+            <a:endParaRPr lang="en-US" sz="1000" dirty="0"/>
+          </a:p>
+        </p:txBody>
+      </p:sp>
+      <p:sp>
+        <p:nvSpPr>
+          <p:cNvPr id="29" name="Text 27"/>
+          <p:cNvSpPr txBox="1"/>
+          <p:nvPr/>
+        </p:nvSpPr>
+        <p:spPr>
+          <a:xfrm>
+            <a:off x="9069934" y="3456432"/>
+            <a:ext cx="2615184" cy="274320"/>
+          </a:xfrm>
+          <a:prstGeom prst="rect">
+            <a:avLst/>
+          </a:prstGeom>
+          <a:noFill/>
+          <a:ln/>
+        </p:spPr>
+        <p:txBody>
+          <a:bodyPr wrap="square" lIns="0" tIns="0" rIns="0" bIns="0" rtlCol="0" anchor="ctr"/>
+          <a:lstStyle/>
+          <a:p>
+            <a:pPr indent="0" marL="0">
+              <a:buNone/>
+            </a:pPr>
+            <a:r>
+              <a:rPr lang="en-US" sz="900" dirty="0">
+                <a:solidFill>
+                  <a:srgbClr val="6B7A8F"/>
+                </a:solidFill>
+                <a:latin typeface="Malgun Gothic" pitchFamily="34" charset="0"/>
+                <a:ea typeface="Malgun Gothic" pitchFamily="34" charset="-122"/>
+                <a:cs typeface="Malgun Gothic" pitchFamily="34" charset="-120"/>
+              </a:rPr>
+              <a:t>발열원 · 팬(입구) · 개구부(출구)</a:t>
+            </a:r>
+            <a:endParaRPr lang="en-US" sz="900" dirty="0"/>
+          </a:p>
+        </p:txBody>
+      </p:sp>
+      <p:sp>
+        <p:nvSpPr>
+          <p:cNvPr id="30" name="Shape 28"/>
+          <p:cNvSpPr/>
+          <p:nvPr/>
+        </p:nvSpPr>
+        <p:spPr>
+          <a:xfrm>
+            <a:off x="502920" y="3822192"/>
+            <a:ext cx="256032" cy="256032"/>
+          </a:xfrm>
+          <a:prstGeom prst="ellipse">
+            <a:avLst/>
+          </a:prstGeom>
+          <a:solidFill>
+            <a:srgbClr val="16305B"/>
+          </a:solidFill>
+          <a:ln w="12700">
+            <a:solidFill>
+              <a:srgbClr val="16305B"/>
+            </a:solidFill>
+            <a:prstDash val="solid"/>
+          </a:ln>
+        </p:spPr>
+      </p:sp>
+      <p:sp>
+        <p:nvSpPr>
+          <p:cNvPr id="31" name="Text 29"/>
+          <p:cNvSpPr txBox="1"/>
+          <p:nvPr/>
+        </p:nvSpPr>
+        <p:spPr>
+          <a:xfrm>
+            <a:off x="502920" y="3822192"/>
+            <a:ext cx="256032" cy="256032"/>
+          </a:xfrm>
+          <a:prstGeom prst="rect">
+            <a:avLst/>
+          </a:prstGeom>
+          <a:noFill/>
+          <a:ln/>
+        </p:spPr>
+        <p:txBody>
+          <a:bodyPr wrap="square" lIns="0" tIns="0" rIns="0" bIns="0" rtlCol="0" anchor="ctr"/>
+          <a:lstStyle/>
+          <a:p>
+            <a:pPr algn="ctr" indent="0" marL="0">
+              <a:buNone/>
+            </a:pPr>
+            <a:r>
+              <a:rPr lang="en-US" sz="900" b="1" dirty="0">
+                <a:solidFill>
+                  <a:srgbClr val="FFFFFF"/>
+                </a:solidFill>
+                <a:latin typeface="Malgun Gothic" pitchFamily="34" charset="0"/>
+                <a:ea typeface="Malgun Gothic" pitchFamily="34" charset="-122"/>
+                <a:cs typeface="Malgun Gothic" pitchFamily="34" charset="-120"/>
+              </a:rPr>
+              <a:t>5</a:t>
+            </a:r>
+            <a:endParaRPr lang="en-US" sz="900" dirty="0"/>
+          </a:p>
+        </p:txBody>
+      </p:sp>
+      <p:sp>
+        <p:nvSpPr>
+          <p:cNvPr id="32" name="Text 30"/>
+          <p:cNvSpPr txBox="1"/>
+          <p:nvPr/>
+        </p:nvSpPr>
+        <p:spPr>
+          <a:xfrm>
+            <a:off x="850392" y="3803904"/>
+            <a:ext cx="2267712" cy="292608"/>
+          </a:xfrm>
+          <a:prstGeom prst="rect">
+            <a:avLst/>
+          </a:prstGeom>
+          <a:noFill/>
+          <a:ln/>
+        </p:spPr>
+        <p:txBody>
+          <a:bodyPr wrap="square" lIns="0" tIns="0" rIns="0" bIns="0" rtlCol="0" anchor="ctr"/>
+          <a:lstStyle/>
+          <a:p>
+            <a:pPr indent="0" marL="0">
+              <a:buNone/>
+            </a:pPr>
+            <a:r>
+              <a:rPr lang="en-US" sz="1100" b="1" dirty="0">
+                <a:solidFill>
+                  <a:srgbClr val="16305B"/>
+                </a:solidFill>
+                <a:latin typeface="Malgun Gothic" pitchFamily="34" charset="0"/>
+                <a:ea typeface="Malgun Gothic" pitchFamily="34" charset="-122"/>
+                <a:cs typeface="Malgun Gothic" pitchFamily="34" charset="-120"/>
+              </a:rPr>
+              <a:t>메시</a:t>
+            </a:r>
+            <a:endParaRPr lang="en-US" sz="1100" dirty="0"/>
+          </a:p>
+        </p:txBody>
+      </p:sp>
+      <p:sp>
+        <p:nvSpPr>
+          <p:cNvPr id="33" name="Shape 31"/>
+          <p:cNvSpPr/>
+          <p:nvPr/>
+        </p:nvSpPr>
+        <p:spPr>
+          <a:xfrm>
+            <a:off x="502920" y="4187952"/>
+            <a:ext cx="2615184" cy="1874520"/>
+          </a:xfrm>
+          <a:prstGeom prst="roundRect">
+            <a:avLst>
+              <a:gd name="adj" fmla="val 2439"/>
+            </a:avLst>
+          </a:prstGeom>
+          <a:solidFill>
+            <a:srgbClr val="FFFFFF"/>
+          </a:solidFill>
+          <a:ln w="12700">
+            <a:solidFill>
+              <a:srgbClr val="C3CDDA"/>
+            </a:solidFill>
+            <a:prstDash val="dash"/>
+          </a:ln>
+        </p:spPr>
+      </p:sp>
+      <p:sp>
+        <p:nvSpPr>
+          <p:cNvPr id="34" name="Text 32"/>
+          <p:cNvSpPr txBox="1"/>
+          <p:nvPr/>
+        </p:nvSpPr>
+        <p:spPr>
+          <a:xfrm>
+            <a:off x="502920" y="4187952"/>
+            <a:ext cx="2615184" cy="1874520"/>
+          </a:xfrm>
+          <a:prstGeom prst="rect">
+            <a:avLst/>
+          </a:prstGeom>
+          <a:noFill/>
+          <a:ln/>
+        </p:spPr>
+        <p:txBody>
+          <a:bodyPr wrap="square" lIns="0" tIns="0" rIns="0" bIns="0" rtlCol="0" anchor="ctr"/>
+          <a:lstStyle/>
+          <a:p>
+            <a:pPr algn="ctr" indent="0" marL="0">
+              <a:buNone/>
+            </a:pPr>
+            <a:r>
+              <a:rPr lang="en-US" sz="1000" b="1" dirty="0">
+                <a:solidFill>
+                  <a:srgbClr val="B5C0CF"/>
+                </a:solidFill>
+                <a:latin typeface="Malgun Gothic" pitchFamily="34" charset="0"/>
+                <a:ea typeface="Malgun Gothic" pitchFamily="34" charset="-122"/>
+                <a:cs typeface="Malgun Gothic" pitchFamily="34" charset="-120"/>
+              </a:rPr>
+              <a:t>GUI 캡처</a:t>
+            </a:r>
+            <a:endParaRPr lang="en-US" sz="1000" dirty="0"/>
+          </a:p>
+        </p:txBody>
+      </p:sp>
+      <p:sp>
+        <p:nvSpPr>
+          <p:cNvPr id="35" name="Text 33"/>
+          <p:cNvSpPr txBox="1"/>
+          <p:nvPr/>
+        </p:nvSpPr>
+        <p:spPr>
+          <a:xfrm>
+            <a:off x="502920" y="6108192"/>
+            <a:ext cx="2615184" cy="274320"/>
+          </a:xfrm>
+          <a:prstGeom prst="rect">
+            <a:avLst/>
+          </a:prstGeom>
+          <a:noFill/>
+          <a:ln/>
+        </p:spPr>
+        <p:txBody>
+          <a:bodyPr wrap="square" lIns="0" tIns="0" rIns="0" bIns="0" rtlCol="0" anchor="ctr"/>
+          <a:lstStyle/>
+          <a:p>
+            <a:pPr indent="0" marL="0">
+              <a:buNone/>
+            </a:pPr>
+            <a:r>
+              <a:rPr lang="en-US" sz="900" dirty="0">
+                <a:solidFill>
+                  <a:srgbClr val="6B7A8F"/>
+                </a:solidFill>
+                <a:latin typeface="Malgun Gothic" pitchFamily="34" charset="0"/>
+                <a:ea typeface="Malgun Gothic" pitchFamily="34" charset="-122"/>
+                <a:cs typeface="Malgun Gothic" pitchFamily="34" charset="-120"/>
+              </a:rPr>
+              <a:t>유체 영역 로컬 메시 · 글로벌 메시</a:t>
+            </a:r>
+            <a:endParaRPr lang="en-US" sz="900" dirty="0"/>
+          </a:p>
+        </p:txBody>
+      </p:sp>
+      <p:sp>
+        <p:nvSpPr>
+          <p:cNvPr id="36" name="Shape 34"/>
+          <p:cNvSpPr/>
+          <p:nvPr/>
+        </p:nvSpPr>
+        <p:spPr>
+          <a:xfrm>
+            <a:off x="3358591" y="3822192"/>
+            <a:ext cx="256032" cy="256032"/>
+          </a:xfrm>
+          <a:prstGeom prst="ellipse">
+            <a:avLst/>
+          </a:prstGeom>
+          <a:solidFill>
+            <a:srgbClr val="16305B"/>
+          </a:solidFill>
+          <a:ln w="12700">
+            <a:solidFill>
+              <a:srgbClr val="16305B"/>
+            </a:solidFill>
+            <a:prstDash val="solid"/>
+          </a:ln>
+        </p:spPr>
+      </p:sp>
+      <p:sp>
+        <p:nvSpPr>
+          <p:cNvPr id="37" name="Text 35"/>
+          <p:cNvSpPr txBox="1"/>
+          <p:nvPr/>
+        </p:nvSpPr>
+        <p:spPr>
+          <a:xfrm>
+            <a:off x="3358591" y="3822192"/>
+            <a:ext cx="256032" cy="256032"/>
+          </a:xfrm>
+          <a:prstGeom prst="rect">
+            <a:avLst/>
+          </a:prstGeom>
+          <a:noFill/>
+          <a:ln/>
+        </p:spPr>
+        <p:txBody>
+          <a:bodyPr wrap="square" lIns="0" tIns="0" rIns="0" bIns="0" rtlCol="0" anchor="ctr"/>
+          <a:lstStyle/>
+          <a:p>
+            <a:pPr algn="ctr" indent="0" marL="0">
+              <a:buNone/>
+            </a:pPr>
+            <a:r>
+              <a:rPr lang="en-US" sz="900" b="1" dirty="0">
+                <a:solidFill>
+                  <a:srgbClr val="FFFFFF"/>
+                </a:solidFill>
+                <a:latin typeface="Malgun Gothic" pitchFamily="34" charset="0"/>
+                <a:ea typeface="Malgun Gothic" pitchFamily="34" charset="-122"/>
+                <a:cs typeface="Malgun Gothic" pitchFamily="34" charset="-120"/>
+              </a:rPr>
+              <a:t>6</a:t>
+            </a:r>
+            <a:endParaRPr lang="en-US" sz="900" dirty="0"/>
+          </a:p>
+        </p:txBody>
+      </p:sp>
+      <p:sp>
+        <p:nvSpPr>
+          <p:cNvPr id="38" name="Text 36"/>
+          <p:cNvSpPr txBox="1"/>
+          <p:nvPr/>
+        </p:nvSpPr>
+        <p:spPr>
+          <a:xfrm>
+            <a:off x="3706063" y="3803904"/>
+            <a:ext cx="2267712" cy="292608"/>
+          </a:xfrm>
+          <a:prstGeom prst="rect">
+            <a:avLst/>
+          </a:prstGeom>
+          <a:noFill/>
+          <a:ln/>
+        </p:spPr>
+        <p:txBody>
+          <a:bodyPr wrap="square" lIns="0" tIns="0" rIns="0" bIns="0" rtlCol="0" anchor="ctr"/>
+          <a:lstStyle/>
+          <a:p>
+            <a:pPr indent="0" marL="0">
+              <a:buNone/>
+            </a:pPr>
+            <a:r>
+              <a:rPr lang="en-US" sz="1100" b="1" dirty="0">
+                <a:solidFill>
+                  <a:srgbClr val="16305B"/>
+                </a:solidFill>
+                <a:latin typeface="Malgun Gothic" pitchFamily="34" charset="0"/>
+                <a:ea typeface="Malgun Gothic" pitchFamily="34" charset="-122"/>
+                <a:cs typeface="Malgun Gothic" pitchFamily="34" charset="-120"/>
+              </a:rPr>
+              <a:t>측정면</a:t>
+            </a:r>
+            <a:endParaRPr lang="en-US" sz="1100" dirty="0"/>
+          </a:p>
+        </p:txBody>
+      </p:sp>
+      <p:sp>
+        <p:nvSpPr>
+          <p:cNvPr id="39" name="Shape 37"/>
+          <p:cNvSpPr/>
+          <p:nvPr/>
+        </p:nvSpPr>
+        <p:spPr>
+          <a:xfrm>
+            <a:off x="3358591" y="4187952"/>
+            <a:ext cx="2615184" cy="1874520"/>
+          </a:xfrm>
+          <a:prstGeom prst="roundRect">
+            <a:avLst>
+              <a:gd name="adj" fmla="val 2439"/>
+            </a:avLst>
+          </a:prstGeom>
+          <a:solidFill>
+            <a:srgbClr val="FFFFFF"/>
+          </a:solidFill>
+          <a:ln w="12700">
+            <a:solidFill>
+              <a:srgbClr val="C3CDDA"/>
+            </a:solidFill>
+            <a:prstDash val="dash"/>
+          </a:ln>
+        </p:spPr>
+      </p:sp>
+      <p:sp>
+        <p:nvSpPr>
+          <p:cNvPr id="40" name="Text 38"/>
+          <p:cNvSpPr txBox="1"/>
+          <p:nvPr/>
+        </p:nvSpPr>
+        <p:spPr>
+          <a:xfrm>
+            <a:off x="3358591" y="4187952"/>
+            <a:ext cx="2615184" cy="1874520"/>
+          </a:xfrm>
+          <a:prstGeom prst="rect">
+            <a:avLst/>
+          </a:prstGeom>
+          <a:noFill/>
+          <a:ln/>
+        </p:spPr>
+        <p:txBody>
+          <a:bodyPr wrap="square" lIns="0" tIns="0" rIns="0" bIns="0" rtlCol="0" anchor="ctr"/>
+          <a:lstStyle/>
+          <a:p>
+            <a:pPr algn="ctr" indent="0" marL="0">
+              <a:buNone/>
+            </a:pPr>
+            <a:r>
+              <a:rPr lang="en-US" sz="1000" b="1" dirty="0">
+                <a:solidFill>
+                  <a:srgbClr val="B5C0CF"/>
+                </a:solidFill>
+                <a:latin typeface="Malgun Gothic" pitchFamily="34" charset="0"/>
+                <a:ea typeface="Malgun Gothic" pitchFamily="34" charset="-122"/>
+                <a:cs typeface="Malgun Gothic" pitchFamily="34" charset="-120"/>
+              </a:rPr>
+              <a:t>GUI 캡처</a:t>
+            </a:r>
+            <a:endParaRPr lang="en-US" sz="1000" dirty="0"/>
+          </a:p>
+        </p:txBody>
+      </p:sp>
+      <p:sp>
+        <p:nvSpPr>
+          <p:cNvPr id="41" name="Text 39"/>
+          <p:cNvSpPr txBox="1"/>
+          <p:nvPr/>
+        </p:nvSpPr>
+        <p:spPr>
+          <a:xfrm>
+            <a:off x="3358591" y="6108192"/>
+            <a:ext cx="2615184" cy="274320"/>
+          </a:xfrm>
+          <a:prstGeom prst="rect">
+            <a:avLst/>
+          </a:prstGeom>
+          <a:noFill/>
+          <a:ln/>
+        </p:spPr>
+        <p:txBody>
+          <a:bodyPr wrap="square" lIns="0" tIns="0" rIns="0" bIns="0" rtlCol="0" anchor="ctr"/>
+          <a:lstStyle/>
+          <a:p>
+            <a:pPr indent="0" marL="0">
+              <a:buNone/>
+            </a:pPr>
+            <a:r>
+              <a:rPr lang="en-US" sz="900" dirty="0">
+                <a:solidFill>
+                  <a:srgbClr val="6B7A8F"/>
+                </a:solidFill>
+                <a:latin typeface="Malgun Gothic" pitchFamily="34" charset="0"/>
+                <a:ea typeface="Malgun Gothic" pitchFamily="34" charset="-122"/>
+                <a:cs typeface="Malgun Gothic" pitchFamily="34" charset="-120"/>
+              </a:rPr>
+              <a:t>유로 단면 · 분기 입구 측정면 생성</a:t>
+            </a:r>
+            <a:endParaRPr lang="en-US" sz="900" dirty="0"/>
+          </a:p>
+        </p:txBody>
+      </p:sp>
+      <p:sp>
+        <p:nvSpPr>
+          <p:cNvPr id="42" name="Shape 40"/>
+          <p:cNvSpPr/>
+          <p:nvPr/>
+        </p:nvSpPr>
+        <p:spPr>
+          <a:xfrm>
+            <a:off x="6214262" y="3822192"/>
+            <a:ext cx="256032" cy="256032"/>
+          </a:xfrm>
+          <a:prstGeom prst="ellipse">
+            <a:avLst/>
+          </a:prstGeom>
+          <a:solidFill>
+            <a:srgbClr val="16305B"/>
+          </a:solidFill>
+          <a:ln w="12700">
+            <a:solidFill>
+              <a:srgbClr val="16305B"/>
+            </a:solidFill>
+            <a:prstDash val="solid"/>
+          </a:ln>
+        </p:spPr>
+      </p:sp>
+      <p:sp>
+        <p:nvSpPr>
+          <p:cNvPr id="43" name="Text 41"/>
+          <p:cNvSpPr txBox="1"/>
+          <p:nvPr/>
+        </p:nvSpPr>
+        <p:spPr>
+          <a:xfrm>
+            <a:off x="6214262" y="3822192"/>
+            <a:ext cx="256032" cy="256032"/>
+          </a:xfrm>
+          <a:prstGeom prst="rect">
+            <a:avLst/>
+          </a:prstGeom>
+          <a:noFill/>
+          <a:ln/>
+        </p:spPr>
+        <p:txBody>
+          <a:bodyPr wrap="square" lIns="0" tIns="0" rIns="0" bIns="0" rtlCol="0" anchor="ctr"/>
+          <a:lstStyle/>
+          <a:p>
+            <a:pPr algn="ctr" indent="0" marL="0">
+              <a:buNone/>
+            </a:pPr>
+            <a:r>
+              <a:rPr lang="en-US" sz="900" b="1" dirty="0">
+                <a:solidFill>
+                  <a:srgbClr val="FFFFFF"/>
+                </a:solidFill>
+                <a:latin typeface="Malgun Gothic" pitchFamily="34" charset="0"/>
+                <a:ea typeface="Malgun Gothic" pitchFamily="34" charset="-122"/>
+                <a:cs typeface="Malgun Gothic" pitchFamily="34" charset="-120"/>
+              </a:rPr>
+              <a:t>7</a:t>
+            </a:r>
+            <a:endParaRPr lang="en-US" sz="900" dirty="0"/>
+          </a:p>
+        </p:txBody>
+      </p:sp>
+      <p:sp>
+        <p:nvSpPr>
+          <p:cNvPr id="44" name="Text 42"/>
+          <p:cNvSpPr txBox="1"/>
+          <p:nvPr/>
+        </p:nvSpPr>
+        <p:spPr>
+          <a:xfrm>
+            <a:off x="6561734" y="3803904"/>
+            <a:ext cx="2267712" cy="292608"/>
+          </a:xfrm>
+          <a:prstGeom prst="rect">
+            <a:avLst/>
+          </a:prstGeom>
+          <a:noFill/>
+          <a:ln/>
+        </p:spPr>
+        <p:txBody>
+          <a:bodyPr wrap="square" lIns="0" tIns="0" rIns="0" bIns="0" rtlCol="0" anchor="ctr"/>
+          <a:lstStyle/>
+          <a:p>
+            <a:pPr indent="0" marL="0">
+              <a:buNone/>
+            </a:pPr>
+            <a:r>
+              <a:rPr lang="en-US" sz="1100" b="1" dirty="0">
+                <a:solidFill>
+                  <a:srgbClr val="16305B"/>
+                </a:solidFill>
+                <a:latin typeface="Malgun Gothic" pitchFamily="34" charset="0"/>
+                <a:ea typeface="Malgun Gothic" pitchFamily="34" charset="-122"/>
+                <a:cs typeface="Malgun Gothic" pitchFamily="34" charset="-120"/>
+              </a:rPr>
+              <a:t>해석 · 추출</a:t>
+            </a:r>
+            <a:endParaRPr lang="en-US" sz="1100" dirty="0"/>
+          </a:p>
+        </p:txBody>
+      </p:sp>
+      <p:sp>
+        <p:nvSpPr>
+          <p:cNvPr id="45" name="Shape 43"/>
+          <p:cNvSpPr/>
+          <p:nvPr/>
+        </p:nvSpPr>
+        <p:spPr>
+          <a:xfrm>
+            <a:off x="6214262" y="4187952"/>
+            <a:ext cx="2615184" cy="1874520"/>
+          </a:xfrm>
+          <a:prstGeom prst="roundRect">
+            <a:avLst>
+              <a:gd name="adj" fmla="val 2439"/>
+            </a:avLst>
+          </a:prstGeom>
+          <a:solidFill>
+            <a:srgbClr val="FFFFFF"/>
+          </a:solidFill>
+          <a:ln w="12700">
+            <a:solidFill>
+              <a:srgbClr val="C3CDDA"/>
+            </a:solidFill>
+            <a:prstDash val="dash"/>
+          </a:ln>
+        </p:spPr>
+      </p:sp>
+      <p:sp>
+        <p:nvSpPr>
+          <p:cNvPr id="46" name="Text 44"/>
+          <p:cNvSpPr txBox="1"/>
+          <p:nvPr/>
+        </p:nvSpPr>
+        <p:spPr>
+          <a:xfrm>
+            <a:off x="6214262" y="4187952"/>
+            <a:ext cx="2615184" cy="1874520"/>
+          </a:xfrm>
+          <a:prstGeom prst="rect">
+            <a:avLst/>
+          </a:prstGeom>
+          <a:noFill/>
+          <a:ln/>
+        </p:spPr>
+        <p:txBody>
+          <a:bodyPr wrap="square" lIns="0" tIns="0" rIns="0" bIns="0" rtlCol="0" anchor="ctr"/>
+          <a:lstStyle/>
+          <a:p>
+            <a:pPr algn="ctr" indent="0" marL="0">
+              <a:buNone/>
+            </a:pPr>
+            <a:r>
+              <a:rPr lang="en-US" sz="1000" b="1" dirty="0">
+                <a:solidFill>
+                  <a:srgbClr val="B5C0CF"/>
+                </a:solidFill>
+                <a:latin typeface="Malgun Gothic" pitchFamily="34" charset="0"/>
+                <a:ea typeface="Malgun Gothic" pitchFamily="34" charset="-122"/>
+                <a:cs typeface="Malgun Gothic" pitchFamily="34" charset="-120"/>
+              </a:rPr>
+              <a:t>GUI 캡처</a:t>
+            </a:r>
+            <a:endParaRPr lang="en-US" sz="1000" dirty="0"/>
+          </a:p>
+        </p:txBody>
+      </p:sp>
+      <p:sp>
+        <p:nvSpPr>
+          <p:cNvPr id="47" name="Text 45"/>
+          <p:cNvSpPr txBox="1"/>
+          <p:nvPr/>
+        </p:nvSpPr>
+        <p:spPr>
+          <a:xfrm>
+            <a:off x="6214262" y="6108192"/>
+            <a:ext cx="2615184" cy="274320"/>
+          </a:xfrm>
+          <a:prstGeom prst="rect">
+            <a:avLst/>
+          </a:prstGeom>
+          <a:noFill/>
+          <a:ln/>
+        </p:spPr>
+        <p:txBody>
+          <a:bodyPr wrap="square" lIns="0" tIns="0" rIns="0" bIns="0" rtlCol="0" anchor="ctr"/>
+          <a:lstStyle/>
+          <a:p>
+            <a:pPr indent="0" marL="0">
+              <a:buNone/>
+            </a:pPr>
+            <a:r>
+              <a:rPr lang="en-US" sz="900" dirty="0">
+                <a:solidFill>
+                  <a:srgbClr val="6B7A8F"/>
+                </a:solidFill>
+                <a:latin typeface="Malgun Gothic" pitchFamily="34" charset="0"/>
+                <a:ea typeface="Malgun Gothic" pitchFamily="34" charset="-122"/>
+                <a:cs typeface="Malgun Gothic" pitchFamily="34" charset="-120"/>
+              </a:rPr>
+              <a:t>정상상태 해석 → Fields Summary 추출</a:t>
+            </a:r>
+            <a:endParaRPr lang="en-US" sz="900" dirty="0"/>
+          </a:p>
+        </p:txBody>
+      </p:sp>
+      <p:sp>
+        <p:nvSpPr>
+          <p:cNvPr id="48" name="Shape 46"/>
+          <p:cNvSpPr/>
+          <p:nvPr/>
+        </p:nvSpPr>
+        <p:spPr>
+          <a:xfrm>
+            <a:off x="9069934" y="4187952"/>
+            <a:ext cx="2615184" cy="1874520"/>
+          </a:xfrm>
+          <a:prstGeom prst="roundRect">
+            <a:avLst>
+              <a:gd name="adj" fmla="val 2927"/>
+            </a:avLst>
+          </a:prstGeom>
+          <a:solidFill>
+            <a:srgbClr val="16305B"/>
+          </a:solidFill>
+          <a:ln w="12700">
+            <a:solidFill>
+              <a:srgbClr val="16305B"/>
+            </a:solidFill>
+            <a:prstDash val="solid"/>
+          </a:ln>
+        </p:spPr>
+      </p:sp>
+      <p:sp>
+        <p:nvSpPr>
+          <p:cNvPr id="49" name="Text 47"/>
+          <p:cNvSpPr txBox="1"/>
+          <p:nvPr/>
+        </p:nvSpPr>
+        <p:spPr>
+          <a:xfrm>
+            <a:off x="9252814" y="4187952"/>
+            <a:ext cx="2249424" cy="1874520"/>
+          </a:xfrm>
+          <a:prstGeom prst="rect">
+            <a:avLst/>
+          </a:prstGeom>
+          <a:noFill/>
+          <a:ln/>
+        </p:spPr>
+        <p:txBody>
+          <a:bodyPr wrap="square" lIns="0" tIns="0" rIns="0" bIns="0" rtlCol="0" anchor="ctr"/>
+          <a:lstStyle/>
+          <a:p>
+            <a:pPr algn="ctr" indent="0" marL="0">
+              <a:lnSpc>
+                <a:spcPct val="130000"/>
+              </a:lnSpc>
+              <a:buNone/>
+            </a:pPr>
+            <a:r>
+              <a:rPr lang="en-US" sz="1100" dirty="0">
+                <a:solidFill>
+                  <a:srgbClr val="FFFFFF"/>
+                </a:solidFill>
+                <a:latin typeface="Malgun Gothic" pitchFamily="34" charset="0"/>
+                <a:ea typeface="Malgun Gothic" pitchFamily="34" charset="-122"/>
+                <a:cs typeface="Malgun Gothic" pitchFamily="34" charset="-120"/>
+              </a:rPr>
+              <a:t>위 7단계를</a:t>
+            </a:r>
+            <a:endParaRPr lang="en-US" sz="1100" dirty="0"/>
+          </a:p>
+          <a:p>
+            <a:pPr algn="ctr" indent="0" marL="0">
+              <a:lnSpc>
+                <a:spcPct val="130000"/>
+              </a:lnSpc>
+              <a:buNone/>
+            </a:pPr>
+            <a:r>
+              <a:rPr lang="en-US" sz="1100" b="1" dirty="0">
+                <a:solidFill>
+                  <a:srgbClr val="FFFFFF"/>
+                </a:solidFill>
+                <a:latin typeface="Malgun Gothic" pitchFamily="34" charset="0"/>
+                <a:ea typeface="Malgun Gothic" pitchFamily="34" charset="-122"/>
+                <a:cs typeface="Malgun Gothic" pitchFamily="34" charset="-120"/>
+              </a:rPr>
+              <a:t>스크립트 리코더로 기록</a:t>
+            </a:r>
+            <a:endParaRPr lang="en-US" sz="1100" dirty="0"/>
+          </a:p>
+          <a:p>
+            <a:pPr algn="ctr" indent="0" marL="0">
+              <a:lnSpc>
+                <a:spcPct val="130000"/>
+              </a:lnSpc>
+              <a:buNone/>
+            </a:pPr>
+            <a:r>
+              <a:rPr lang="en-US" sz="1100" dirty="0">
+                <a:solidFill>
+                  <a:srgbClr val="FFFFFF"/>
+                </a:solidFill>
+                <a:latin typeface="Malgun Gothic" pitchFamily="34" charset="0"/>
+                <a:ea typeface="Malgun Gothic" pitchFamily="34" charset="-122"/>
+                <a:cs typeface="Malgun Gothic" pitchFamily="34" charset="-120"/>
+              </a:rPr>
+              <a:t>→ 코드화하여</a:t>
+            </a:r>
+            <a:endParaRPr lang="en-US" sz="1100" dirty="0"/>
+          </a:p>
+          <a:p>
+            <a:pPr algn="ctr" indent="0" marL="0">
+              <a:lnSpc>
+                <a:spcPct val="130000"/>
+              </a:lnSpc>
+              <a:buNone/>
+            </a:pPr>
+            <a:r>
+              <a:rPr lang="en-US" sz="1100" b="1" dirty="0">
+                <a:solidFill>
+                  <a:srgbClr val="7FD6E8"/>
+                </a:solidFill>
+                <a:latin typeface="Malgun Gothic" pitchFamily="34" charset="0"/>
+                <a:ea typeface="Malgun Gothic" pitchFamily="34" charset="-122"/>
+                <a:cs typeface="Malgun Gothic" pitchFamily="34" charset="-120"/>
+              </a:rPr>
+              <a:t>매 회차 자동 수행</a:t>
+            </a:r>
+            <a:endParaRPr lang="en-US" sz="1100" dirty="0"/>
+          </a:p>
+        </p:txBody>
+      </p:sp>
+      <p:sp>
+        <p:nvSpPr>
+          <p:cNvPr id="50" name="Text 48"/>
+          <p:cNvSpPr txBox="1"/>
+          <p:nvPr/>
+        </p:nvSpPr>
+        <p:spPr>
+          <a:xfrm>
+            <a:off x="9069934" y="6108192"/>
+            <a:ext cx="2615184" cy="274320"/>
+          </a:xfrm>
+          <a:prstGeom prst="rect">
+            <a:avLst/>
+          </a:prstGeom>
+          <a:noFill/>
+          <a:ln/>
+        </p:spPr>
+        <p:txBody>
+          <a:bodyPr wrap="square" lIns="0" tIns="0" rIns="0" bIns="0" rtlCol="0" anchor="ctr"/>
+          <a:lstStyle/>
+          <a:p>
+            <a:pPr indent="0" marL="0">
+              <a:buNone/>
+            </a:pPr>
+            <a:r>
+              <a:rPr lang="en-US" sz="900" dirty="0">
+                <a:solidFill>
+                  <a:srgbClr val="6B7A8F"/>
+                </a:solidFill>
+                <a:latin typeface="Malgun Gothic" pitchFamily="34" charset="0"/>
+                <a:ea typeface="Malgun Gothic" pitchFamily="34" charset="-122"/>
+                <a:cs typeface="Malgun Gothic" pitchFamily="34" charset="-120"/>
+              </a:rPr>
+              <a:t>대응 코드: 부록 A-2</a:t>
+            </a:r>
+            <a:endParaRPr lang="en-US" sz="900" dirty="0"/>
+          </a:p>
+        </p:txBody>
+      </p:sp>
+    </p:spTree>
+  </p:cSld>
+  <p:clrMapOvr>
+    <a:masterClrMapping/>
+  </p:clrMapOvr>
+</p:sld>
+</file>
+
 <file path=ppt/slides/slide2.xml><?xml version="1.0" encoding="utf-8"?>
 <p:sld xmlns:a="http://schemas.openxmlformats.org/drawingml/2006/main" xmlns:r="http://schemas.openxmlformats.org/officeDocument/2006/relationships" xmlns:p="http://schemas.openxmlformats.org/presentationml/2006/main">
   <p:cSld name="Slide 2">
@@ -10763,7 +12650,7 @@
                 <a:ea typeface="Malgun Gothic" pitchFamily="34" charset="-122"/>
                 <a:cs typeface="Malgun Gothic" pitchFamily="34" charset="-120"/>
               </a:rPr>
-              <a:t>부록   A-1  SolidWorks 제어 코드   ·   A-2  Icepak 제어 코드</a:t>
+              <a:t>부록   A-1  SolidWorks 제어 코드   ·   A-2  Icepak 제어 코드   ·   A-3  Icepak GUI 설정 절차</a:t>
             </a:r>
             <a:endParaRPr lang="en-US" sz="950" dirty="0"/>
           </a:p>
@@ -22744,7 +24631,7 @@
                 <a:ea typeface="Malgun Gothic" pitchFamily="34" charset="-122"/>
                 <a:cs typeface="Malgun Gothic" pitchFamily="34" charset="-120"/>
               </a:rPr>
-              <a:t>해석 모델 구성 절차</a:t>
+              <a:t>자동화 전환 과정</a:t>
             </a:r>
             <a:endParaRPr lang="en-US" sz="1300" dirty="0"/>
           </a:p>
@@ -22758,16 +24645,410 @@
         </p:nvSpPr>
         <p:spPr>
           <a:xfrm>
-            <a:off x="832104" y="1975104"/>
-            <a:ext cx="274320" cy="274320"/>
-          </a:xfrm>
-          <a:prstGeom prst="ellipse">
-            <a:avLst/>
+            <a:off x="813816" y="1901952"/>
+            <a:ext cx="4846320" cy="585216"/>
+          </a:xfrm>
+          <a:prstGeom prst="roundRect">
+            <a:avLst>
+              <a:gd name="adj" fmla="val 9375"/>
+            </a:avLst>
+          </a:prstGeom>
+          <a:solidFill>
+            <a:srgbClr val="EEF2F7"/>
+          </a:solidFill>
+          <a:ln w="9525">
+            <a:solidFill>
+              <a:srgbClr val="DDE3EB"/>
+            </a:solidFill>
+            <a:prstDash val="solid"/>
+          </a:ln>
+        </p:spPr>
+      </p:sp>
+      <p:sp>
+        <p:nvSpPr>
+          <p:cNvPr id="10" name="Text 8"/>
+          <p:cNvSpPr txBox="1"/>
+          <p:nvPr/>
+        </p:nvSpPr>
+        <p:spPr>
+          <a:xfrm>
+            <a:off x="923544" y="1901952"/>
+            <a:ext cx="310896" cy="585216"/>
+          </a:xfrm>
+          <a:prstGeom prst="rect">
+            <a:avLst/>
+          </a:prstGeom>
+          <a:noFill/>
+          <a:ln/>
+        </p:spPr>
+        <p:txBody>
+          <a:bodyPr wrap="square" lIns="0" tIns="0" rIns="0" bIns="0" rtlCol="0" anchor="ctr"/>
+          <a:lstStyle/>
+          <a:p>
+            <a:pPr indent="0" marL="0">
+              <a:buNone/>
+            </a:pPr>
+            <a:r>
+              <a:rPr lang="en-US" sz="1600" b="1" dirty="0">
+                <a:solidFill>
+                  <a:srgbClr val="00A3C4"/>
+                </a:solidFill>
+                <a:latin typeface="Malgun Gothic" pitchFamily="34" charset="0"/>
+                <a:ea typeface="Malgun Gothic" pitchFamily="34" charset="-122"/>
+                <a:cs typeface="Malgun Gothic" pitchFamily="34" charset="-120"/>
+              </a:rPr>
+              <a:t>1</a:t>
+            </a:r>
+            <a:endParaRPr lang="en-US" sz="1600" dirty="0"/>
+          </a:p>
+        </p:txBody>
+      </p:sp>
+      <p:sp>
+        <p:nvSpPr>
+          <p:cNvPr id="11" name="Text 9"/>
+          <p:cNvSpPr txBox="1"/>
+          <p:nvPr/>
+        </p:nvSpPr>
+        <p:spPr>
+          <a:xfrm>
+            <a:off x="1289304" y="1938528"/>
+            <a:ext cx="1737360" cy="512064"/>
+          </a:xfrm>
+          <a:prstGeom prst="rect">
+            <a:avLst/>
+          </a:prstGeom>
+          <a:noFill/>
+          <a:ln/>
+        </p:spPr>
+        <p:txBody>
+          <a:bodyPr wrap="square" lIns="0" tIns="0" rIns="0" bIns="0" rtlCol="0" anchor="ctr"/>
+          <a:lstStyle/>
+          <a:p>
+            <a:pPr indent="0" marL="0">
+              <a:buNone/>
+            </a:pPr>
+            <a:r>
+              <a:rPr lang="en-US" sz="1050" b="1" dirty="0">
+                <a:solidFill>
+                  <a:srgbClr val="16305B"/>
+                </a:solidFill>
+                <a:latin typeface="Malgun Gothic" pitchFamily="34" charset="0"/>
+                <a:ea typeface="Malgun Gothic" pitchFamily="34" charset="-122"/>
+                <a:cs typeface="Malgun Gothic" pitchFamily="34" charset="-120"/>
+              </a:rPr>
+              <a:t>GUI 수동 설정</a:t>
+            </a:r>
+            <a:endParaRPr lang="en-US" sz="1050" dirty="0"/>
+          </a:p>
+        </p:txBody>
+      </p:sp>
+      <p:sp>
+        <p:nvSpPr>
+          <p:cNvPr id="12" name="Text 10"/>
+          <p:cNvSpPr txBox="1"/>
+          <p:nvPr/>
+        </p:nvSpPr>
+        <p:spPr>
+          <a:xfrm>
+            <a:off x="2990088" y="1938528"/>
+            <a:ext cx="2596896" cy="512064"/>
+          </a:xfrm>
+          <a:prstGeom prst="rect">
+            <a:avLst/>
+          </a:prstGeom>
+          <a:noFill/>
+          <a:ln/>
+        </p:spPr>
+        <p:txBody>
+          <a:bodyPr wrap="square" lIns="0" tIns="0" rIns="0" bIns="0" rtlCol="0" anchor="ctr"/>
+          <a:lstStyle/>
+          <a:p>
+            <a:pPr indent="0" marL="0">
+              <a:lnSpc>
+                <a:spcPct val="110000"/>
+              </a:lnSpc>
+              <a:buNone/>
+            </a:pPr>
+            <a:r>
+              <a:rPr lang="en-US" sz="880" dirty="0">
+                <a:solidFill>
+                  <a:srgbClr val="1C2733"/>
+                </a:solidFill>
+                <a:latin typeface="Malgun Gothic" pitchFamily="34" charset="0"/>
+                <a:ea typeface="Malgun Gothic" pitchFamily="34" charset="-122"/>
+                <a:cs typeface="Malgun Gothic" pitchFamily="34" charset="-120"/>
+              </a:rPr>
+              <a:t>해석 모델을 GUI로 한 번 직접 구성</a:t>
+            </a:r>
+            <a:endParaRPr lang="en-US" sz="880" dirty="0"/>
+          </a:p>
+          <a:p>
+            <a:pPr indent="0" marL="0">
+              <a:lnSpc>
+                <a:spcPct val="110000"/>
+              </a:lnSpc>
+              <a:buNone/>
+            </a:pPr>
+            <a:r>
+              <a:rPr lang="en-US" sz="880" dirty="0">
+                <a:solidFill>
+                  <a:srgbClr val="1C2733"/>
+                </a:solidFill>
+                <a:latin typeface="Malgun Gothic" pitchFamily="34" charset="0"/>
+                <a:ea typeface="Malgun Gothic" pitchFamily="34" charset="-122"/>
+                <a:cs typeface="Malgun Gothic" pitchFamily="34" charset="-120"/>
+              </a:rPr>
+              <a:t>(프로젝트 생성 ~ 결과 추출 7단계)</a:t>
+            </a:r>
+            <a:endParaRPr lang="en-US" sz="880" dirty="0"/>
+          </a:p>
+        </p:txBody>
+      </p:sp>
+      <p:sp>
+        <p:nvSpPr>
+          <p:cNvPr id="13" name="Text 11"/>
+          <p:cNvSpPr txBox="1"/>
+          <p:nvPr/>
+        </p:nvSpPr>
+        <p:spPr>
+          <a:xfrm>
+            <a:off x="813816" y="2487168"/>
+            <a:ext cx="4846320" cy="182880"/>
+          </a:xfrm>
+          <a:prstGeom prst="rect">
+            <a:avLst/>
+          </a:prstGeom>
+          <a:noFill/>
+          <a:ln/>
+        </p:spPr>
+        <p:txBody>
+          <a:bodyPr wrap="square" lIns="0" tIns="0" rIns="0" bIns="0" rtlCol="0" anchor="ctr"/>
+          <a:lstStyle/>
+          <a:p>
+            <a:pPr algn="ctr" indent="0" marL="0">
+              <a:buNone/>
+            </a:pPr>
+            <a:r>
+              <a:rPr lang="en-US" sz="700" dirty="0">
+                <a:solidFill>
+                  <a:srgbClr val="6B7A8F"/>
+                </a:solidFill>
+                <a:latin typeface="Malgun Gothic" pitchFamily="34" charset="0"/>
+                <a:ea typeface="Malgun Gothic" pitchFamily="34" charset="-122"/>
+                <a:cs typeface="Malgun Gothic" pitchFamily="34" charset="-120"/>
+              </a:rPr>
+              <a:t>▼</a:t>
+            </a:r>
+            <a:endParaRPr lang="en-US" sz="700" dirty="0"/>
+          </a:p>
+        </p:txBody>
+      </p:sp>
+      <p:sp>
+        <p:nvSpPr>
+          <p:cNvPr id="14" name="Shape 12"/>
+          <p:cNvSpPr/>
+          <p:nvPr/>
+        </p:nvSpPr>
+        <p:spPr>
+          <a:xfrm>
+            <a:off x="813816" y="2670048"/>
+            <a:ext cx="4846320" cy="585216"/>
+          </a:xfrm>
+          <a:prstGeom prst="roundRect">
+            <a:avLst>
+              <a:gd name="adj" fmla="val 9375"/>
+            </a:avLst>
+          </a:prstGeom>
+          <a:solidFill>
+            <a:srgbClr val="EEF2F7"/>
+          </a:solidFill>
+          <a:ln w="9525">
+            <a:solidFill>
+              <a:srgbClr val="DDE3EB"/>
+            </a:solidFill>
+            <a:prstDash val="solid"/>
+          </a:ln>
+        </p:spPr>
+      </p:sp>
+      <p:sp>
+        <p:nvSpPr>
+          <p:cNvPr id="15" name="Text 13"/>
+          <p:cNvSpPr txBox="1"/>
+          <p:nvPr/>
+        </p:nvSpPr>
+        <p:spPr>
+          <a:xfrm>
+            <a:off x="923544" y="2670048"/>
+            <a:ext cx="310896" cy="585216"/>
+          </a:xfrm>
+          <a:prstGeom prst="rect">
+            <a:avLst/>
+          </a:prstGeom>
+          <a:noFill/>
+          <a:ln/>
+        </p:spPr>
+        <p:txBody>
+          <a:bodyPr wrap="square" lIns="0" tIns="0" rIns="0" bIns="0" rtlCol="0" anchor="ctr"/>
+          <a:lstStyle/>
+          <a:p>
+            <a:pPr indent="0" marL="0">
+              <a:buNone/>
+            </a:pPr>
+            <a:r>
+              <a:rPr lang="en-US" sz="1600" b="1" dirty="0">
+                <a:solidFill>
+                  <a:srgbClr val="00A3C4"/>
+                </a:solidFill>
+                <a:latin typeface="Malgun Gothic" pitchFamily="34" charset="0"/>
+                <a:ea typeface="Malgun Gothic" pitchFamily="34" charset="-122"/>
+                <a:cs typeface="Malgun Gothic" pitchFamily="34" charset="-120"/>
+              </a:rPr>
+              <a:t>2</a:t>
+            </a:r>
+            <a:endParaRPr lang="en-US" sz="1600" dirty="0"/>
+          </a:p>
+        </p:txBody>
+      </p:sp>
+      <p:sp>
+        <p:nvSpPr>
+          <p:cNvPr id="16" name="Text 14"/>
+          <p:cNvSpPr txBox="1"/>
+          <p:nvPr/>
+        </p:nvSpPr>
+        <p:spPr>
+          <a:xfrm>
+            <a:off x="1289304" y="2706624"/>
+            <a:ext cx="1737360" cy="512064"/>
+          </a:xfrm>
+          <a:prstGeom prst="rect">
+            <a:avLst/>
+          </a:prstGeom>
+          <a:noFill/>
+          <a:ln/>
+        </p:spPr>
+        <p:txBody>
+          <a:bodyPr wrap="square" lIns="0" tIns="0" rIns="0" bIns="0" rtlCol="0" anchor="ctr"/>
+          <a:lstStyle/>
+          <a:p>
+            <a:pPr indent="0" marL="0">
+              <a:buNone/>
+            </a:pPr>
+            <a:r>
+              <a:rPr lang="en-US" sz="1050" b="1" dirty="0">
+                <a:solidFill>
+                  <a:srgbClr val="16305B"/>
+                </a:solidFill>
+                <a:latin typeface="Malgun Gothic" pitchFamily="34" charset="0"/>
+                <a:ea typeface="Malgun Gothic" pitchFamily="34" charset="-122"/>
+                <a:cs typeface="Malgun Gothic" pitchFamily="34" charset="-120"/>
+              </a:rPr>
+              <a:t>스크립트 리코더 기록</a:t>
+            </a:r>
+            <a:endParaRPr lang="en-US" sz="1050" dirty="0"/>
+          </a:p>
+        </p:txBody>
+      </p:sp>
+      <p:sp>
+        <p:nvSpPr>
+          <p:cNvPr id="17" name="Text 15"/>
+          <p:cNvSpPr txBox="1"/>
+          <p:nvPr/>
+        </p:nvSpPr>
+        <p:spPr>
+          <a:xfrm>
+            <a:off x="2990088" y="2706624"/>
+            <a:ext cx="2596896" cy="512064"/>
+          </a:xfrm>
+          <a:prstGeom prst="rect">
+            <a:avLst/>
+          </a:prstGeom>
+          <a:noFill/>
+          <a:ln/>
+        </p:spPr>
+        <p:txBody>
+          <a:bodyPr wrap="square" lIns="0" tIns="0" rIns="0" bIns="0" rtlCol="0" anchor="ctr"/>
+          <a:lstStyle/>
+          <a:p>
+            <a:pPr indent="0" marL="0">
+              <a:lnSpc>
+                <a:spcPct val="110000"/>
+              </a:lnSpc>
+              <a:buNone/>
+            </a:pPr>
+            <a:r>
+              <a:rPr lang="en-US" sz="880" dirty="0">
+                <a:solidFill>
+                  <a:srgbClr val="1C2733"/>
+                </a:solidFill>
+                <a:latin typeface="Malgun Gothic" pitchFamily="34" charset="0"/>
+                <a:ea typeface="Malgun Gothic" pitchFamily="34" charset="-122"/>
+                <a:cs typeface="Malgun Gothic" pitchFamily="34" charset="-120"/>
+              </a:rPr>
+              <a:t>GUI 조작 과정을 Python 스크립트로 기록</a:t>
+            </a:r>
+            <a:endParaRPr lang="en-US" sz="880" dirty="0"/>
+          </a:p>
+        </p:txBody>
+      </p:sp>
+      <p:sp>
+        <p:nvSpPr>
+          <p:cNvPr id="18" name="Text 16"/>
+          <p:cNvSpPr txBox="1"/>
+          <p:nvPr/>
+        </p:nvSpPr>
+        <p:spPr>
+          <a:xfrm>
+            <a:off x="813816" y="3255264"/>
+            <a:ext cx="4846320" cy="182880"/>
+          </a:xfrm>
+          <a:prstGeom prst="rect">
+            <a:avLst/>
+          </a:prstGeom>
+          <a:noFill/>
+          <a:ln/>
+        </p:spPr>
+        <p:txBody>
+          <a:bodyPr wrap="square" lIns="0" tIns="0" rIns="0" bIns="0" rtlCol="0" anchor="ctr"/>
+          <a:lstStyle/>
+          <a:p>
+            <a:pPr algn="ctr" indent="0" marL="0">
+              <a:buNone/>
+            </a:pPr>
+            <a:r>
+              <a:rPr lang="en-US" sz="700" dirty="0">
+                <a:solidFill>
+                  <a:srgbClr val="6B7A8F"/>
+                </a:solidFill>
+                <a:latin typeface="Malgun Gothic" pitchFamily="34" charset="0"/>
+                <a:ea typeface="Malgun Gothic" pitchFamily="34" charset="-122"/>
+                <a:cs typeface="Malgun Gothic" pitchFamily="34" charset="-120"/>
+              </a:rPr>
+              <a:t>▼</a:t>
+            </a:r>
+            <a:endParaRPr lang="en-US" sz="700" dirty="0"/>
+          </a:p>
+        </p:txBody>
+      </p:sp>
+      <p:sp>
+        <p:nvSpPr>
+          <p:cNvPr id="19" name="Shape 17"/>
+          <p:cNvSpPr/>
+          <p:nvPr/>
+        </p:nvSpPr>
+        <p:spPr>
+          <a:xfrm>
+            <a:off x="813816" y="3438144"/>
+            <a:ext cx="4846320" cy="585216"/>
+          </a:xfrm>
+          <a:prstGeom prst="roundRect">
+            <a:avLst>
+              <a:gd name="adj" fmla="val 9375"/>
+            </a:avLst>
           </a:prstGeom>
           <a:solidFill>
             <a:srgbClr val="16305B"/>
           </a:solidFill>
-          <a:ln w="12700">
+          <a:ln w="9525">
             <a:solidFill>
               <a:srgbClr val="16305B"/>
             </a:solidFill>
@@ -22777,14 +25058,14 @@
       </p:sp>
       <p:sp>
         <p:nvSpPr>
-          <p:cNvPr id="10" name="Text 8"/>
+          <p:cNvPr id="20" name="Text 18"/>
           <p:cNvSpPr txBox="1"/>
           <p:nvPr/>
         </p:nvSpPr>
         <p:spPr>
           <a:xfrm>
-            <a:off x="832104" y="1975104"/>
-            <a:ext cx="274320" cy="274320"/>
+            <a:off x="923544" y="3438144"/>
+            <a:ext cx="310896" cy="585216"/>
           </a:xfrm>
           <a:prstGeom prst="rect">
             <a:avLst/>
@@ -22796,11 +25077,11 @@
           <a:bodyPr wrap="square" lIns="0" tIns="0" rIns="0" bIns="0" rtlCol="0" anchor="ctr"/>
           <a:lstStyle/>
           <a:p>
-            <a:pPr algn="ctr" indent="0" marL="0">
-              <a:buNone/>
-            </a:pPr>
-            <a:r>
-              <a:rPr lang="en-US" sz="900" b="1" dirty="0">
+            <a:pPr indent="0" marL="0">
+              <a:buNone/>
+            </a:pPr>
+            <a:r>
+              <a:rPr lang="en-US" sz="1600" b="1" dirty="0">
                 <a:solidFill>
                   <a:srgbClr val="FFFFFF"/>
                 </a:solidFill>
@@ -22808,22 +25089,22 @@
                 <a:ea typeface="Malgun Gothic" pitchFamily="34" charset="-122"/>
                 <a:cs typeface="Malgun Gothic" pitchFamily="34" charset="-120"/>
               </a:rPr>
-              <a:t>1</a:t>
-            </a:r>
-            <a:endParaRPr lang="en-US" sz="900" dirty="0"/>
+              <a:t>3</a:t>
+            </a:r>
+            <a:endParaRPr lang="en-US" sz="1600" dirty="0"/>
           </a:p>
         </p:txBody>
       </p:sp>
       <p:sp>
         <p:nvSpPr>
-          <p:cNvPr id="11" name="Text 9"/>
+          <p:cNvPr id="21" name="Text 19"/>
           <p:cNvSpPr txBox="1"/>
           <p:nvPr/>
         </p:nvSpPr>
         <p:spPr>
           <a:xfrm>
-            <a:off x="1234440" y="1920240"/>
-            <a:ext cx="1234440" cy="384048"/>
+            <a:off x="1289304" y="3474720"/>
+            <a:ext cx="1737360" cy="512064"/>
           </a:xfrm>
           <a:prstGeom prst="rect">
             <a:avLst/>
@@ -22839,30 +25120,30 @@
               <a:buNone/>
             </a:pPr>
             <a:r>
-              <a:rPr lang="en-US" sz="1000" b="1" dirty="0">
-                <a:solidFill>
-                  <a:srgbClr val="16305B"/>
+              <a:rPr lang="en-US" sz="1050" b="1" dirty="0">
+                <a:solidFill>
+                  <a:srgbClr val="FFFFFF"/>
                 </a:solidFill>
                 <a:latin typeface="Malgun Gothic" pitchFamily="34" charset="0"/>
                 <a:ea typeface="Malgun Gothic" pitchFamily="34" charset="-122"/>
                 <a:cs typeface="Malgun Gothic" pitchFamily="34" charset="-120"/>
               </a:rPr>
-              <a:t>프로젝트 생성</a:t>
-            </a:r>
-            <a:endParaRPr lang="en-US" sz="1000" dirty="0"/>
+              <a:t>AI 에이전트와 코드 정리</a:t>
+            </a:r>
+            <a:endParaRPr lang="en-US" sz="1050" dirty="0"/>
           </a:p>
         </p:txBody>
       </p:sp>
       <p:sp>
         <p:nvSpPr>
-          <p:cNvPr id="12" name="Text 10"/>
+          <p:cNvPr id="22" name="Text 20"/>
           <p:cNvSpPr txBox="1"/>
           <p:nvPr/>
         </p:nvSpPr>
         <p:spPr>
           <a:xfrm>
-            <a:off x="2468880" y="1920240"/>
-            <a:ext cx="3246120" cy="384048"/>
+            <a:off x="2990088" y="3474720"/>
+            <a:ext cx="2596896" cy="512064"/>
           </a:xfrm>
           <a:prstGeom prst="rect">
             <a:avLst/>
@@ -22875,81 +25156,56 @@
           <a:lstStyle/>
           <a:p>
             <a:pPr indent="0" marL="0">
-              <a:buNone/>
-            </a:pPr>
-            <a:r>
-              <a:rPr lang="en-US" sz="950" dirty="0">
-                <a:solidFill>
-                  <a:srgbClr val="1C2733"/>
+              <a:lnSpc>
+                <a:spcPct val="110000"/>
+              </a:lnSpc>
+              <a:buNone/>
+            </a:pPr>
+            <a:r>
+              <a:rPr lang="en-US" sz="880" dirty="0">
+                <a:solidFill>
+                  <a:srgbClr val="FFFFFF"/>
                 </a:solidFill>
                 <a:latin typeface="Malgun Gothic" pitchFamily="34" charset="0"/>
                 <a:ea typeface="Malgun Gothic" pitchFamily="34" charset="-122"/>
                 <a:cs typeface="Malgun Gothic" pitchFamily="34" charset="-120"/>
               </a:rPr>
-              <a:t>회차마다 새로 생성, 잔여·잠금 파일 정리</a:t>
-            </a:r>
-            <a:endParaRPr lang="en-US" sz="950" dirty="0"/>
+              <a:t>기록된 고정값을 설계변수 기반으로 치환하고</a:t>
+            </a:r>
+            <a:endParaRPr lang="en-US" sz="880" dirty="0"/>
+          </a:p>
+          <a:p>
+            <a:pPr indent="0" marL="0">
+              <a:lnSpc>
+                <a:spcPct val="110000"/>
+              </a:lnSpc>
+              <a:buNone/>
+            </a:pPr>
+            <a:r>
+              <a:rPr lang="en-US" sz="880" dirty="0">
+                <a:solidFill>
+                  <a:srgbClr val="FFFFFF"/>
+                </a:solidFill>
+                <a:latin typeface="Malgun Gothic" pitchFamily="34" charset="0"/>
+                <a:ea typeface="Malgun Gothic" pitchFamily="34" charset="-122"/>
+                <a:cs typeface="Malgun Gothic" pitchFamily="34" charset="-120"/>
+              </a:rPr>
+              <a:t>재사용 가능한 모듈로 구조화</a:t>
+            </a:r>
+            <a:endParaRPr lang="en-US" sz="880" dirty="0"/>
           </a:p>
         </p:txBody>
       </p:sp>
       <p:sp>
         <p:nvSpPr>
-          <p:cNvPr id="13" name="Shape 11"/>
-          <p:cNvSpPr/>
-          <p:nvPr/>
-        </p:nvSpPr>
-        <p:spPr>
-          <a:xfrm>
-            <a:off x="1234440" y="2350008"/>
-            <a:ext cx="4480560" cy="0"/>
-          </a:xfrm>
-          <a:prstGeom prst="line">
-            <a:avLst/>
-          </a:prstGeom>
-          <a:noFill/>
-          <a:ln w="6350">
-            <a:solidFill>
-              <a:srgbClr val="DDE3EB"/>
-            </a:solidFill>
-            <a:prstDash val="solid"/>
-          </a:ln>
-        </p:spPr>
-      </p:sp>
-      <p:sp>
-        <p:nvSpPr>
-          <p:cNvPr id="14" name="Shape 12"/>
-          <p:cNvSpPr/>
-          <p:nvPr/>
-        </p:nvSpPr>
-        <p:spPr>
-          <a:xfrm>
-            <a:off x="832104" y="2450592"/>
-            <a:ext cx="274320" cy="274320"/>
-          </a:xfrm>
-          <a:prstGeom prst="ellipse">
-            <a:avLst/>
-          </a:prstGeom>
-          <a:solidFill>
-            <a:srgbClr val="16305B"/>
-          </a:solidFill>
-          <a:ln w="12700">
-            <a:solidFill>
-              <a:srgbClr val="16305B"/>
-            </a:solidFill>
-            <a:prstDash val="solid"/>
-          </a:ln>
-        </p:spPr>
-      </p:sp>
-      <p:sp>
-        <p:nvSpPr>
-          <p:cNvPr id="15" name="Text 13"/>
+          <p:cNvPr id="23" name="Text 21"/>
           <p:cNvSpPr txBox="1"/>
           <p:nvPr/>
         </p:nvSpPr>
         <p:spPr>
           <a:xfrm>
-            <a:off x="832104" y="2450592"/>
-            <a:ext cx="274320" cy="274320"/>
+            <a:off x="813816" y="4023360"/>
+            <a:ext cx="4846320" cy="182880"/>
           </a:xfrm>
           <a:prstGeom prst="rect">
             <a:avLst/>
@@ -22965,285 +25221,19 @@
               <a:buNone/>
             </a:pPr>
             <a:r>
-              <a:rPr lang="en-US" sz="900" b="1" dirty="0">
-                <a:solidFill>
-                  <a:srgbClr val="FFFFFF"/>
+              <a:rPr lang="en-US" sz="700" dirty="0">
+                <a:solidFill>
+                  <a:srgbClr val="6B7A8F"/>
                 </a:solidFill>
                 <a:latin typeface="Malgun Gothic" pitchFamily="34" charset="0"/>
                 <a:ea typeface="Malgun Gothic" pitchFamily="34" charset="-122"/>
                 <a:cs typeface="Malgun Gothic" pitchFamily="34" charset="-120"/>
               </a:rPr>
-              <a:t>2</a:t>
-            </a:r>
-            <a:endParaRPr lang="en-US" sz="900" dirty="0"/>
+              <a:t>▼</a:t>
+            </a:r>
+            <a:endParaRPr lang="en-US" sz="700" dirty="0"/>
           </a:p>
         </p:txBody>
-      </p:sp>
-      <p:sp>
-        <p:nvSpPr>
-          <p:cNvPr id="16" name="Text 14"/>
-          <p:cNvSpPr txBox="1"/>
-          <p:nvPr/>
-        </p:nvSpPr>
-        <p:spPr>
-          <a:xfrm>
-            <a:off x="1234440" y="2395728"/>
-            <a:ext cx="1234440" cy="384048"/>
-          </a:xfrm>
-          <a:prstGeom prst="rect">
-            <a:avLst/>
-          </a:prstGeom>
-          <a:noFill/>
-          <a:ln/>
-        </p:spPr>
-        <p:txBody>
-          <a:bodyPr wrap="square" lIns="0" tIns="0" rIns="0" bIns="0" rtlCol="0" anchor="ctr"/>
-          <a:lstStyle/>
-          <a:p>
-            <a:pPr indent="0" marL="0">
-              <a:buNone/>
-            </a:pPr>
-            <a:r>
-              <a:rPr lang="en-US" sz="1000" b="1" dirty="0">
-                <a:solidFill>
-                  <a:srgbClr val="16305B"/>
-                </a:solidFill>
-                <a:latin typeface="Malgun Gothic" pitchFamily="34" charset="0"/>
-                <a:ea typeface="Malgun Gothic" pitchFamily="34" charset="-122"/>
-                <a:cs typeface="Malgun Gothic" pitchFamily="34" charset="-120"/>
-              </a:rPr>
-              <a:t>형상 불러오기</a:t>
-            </a:r>
-            <a:endParaRPr lang="en-US" sz="1000" dirty="0"/>
-          </a:p>
-        </p:txBody>
-      </p:sp>
-      <p:sp>
-        <p:nvSpPr>
-          <p:cNvPr id="17" name="Text 15"/>
-          <p:cNvSpPr txBox="1"/>
-          <p:nvPr/>
-        </p:nvSpPr>
-        <p:spPr>
-          <a:xfrm>
-            <a:off x="2468880" y="2395728"/>
-            <a:ext cx="3246120" cy="384048"/>
-          </a:xfrm>
-          <a:prstGeom prst="rect">
-            <a:avLst/>
-          </a:prstGeom>
-          <a:noFill/>
-          <a:ln/>
-        </p:spPr>
-        <p:txBody>
-          <a:bodyPr wrap="square" lIns="0" tIns="0" rIns="0" bIns="0" rtlCol="0" anchor="ctr"/>
-          <a:lstStyle/>
-          <a:p>
-            <a:pPr indent="0" marL="0">
-              <a:buNone/>
-            </a:pPr>
-            <a:r>
-              <a:rPr lang="en-US" sz="950" dirty="0">
-                <a:solidFill>
-                  <a:srgbClr val="1C2733"/>
-                </a:solidFill>
-                <a:latin typeface="Malgun Gothic" pitchFamily="34" charset="0"/>
-                <a:ea typeface="Malgun Gothic" pitchFamily="34" charset="-122"/>
-                <a:cs typeface="Malgun Gothic" pitchFamily="34" charset="-120"/>
-              </a:rPr>
-              <a:t>STEP 불러오기 → 부품 이름·재질 지정</a:t>
-            </a:r>
-            <a:endParaRPr lang="en-US" sz="950" dirty="0"/>
-          </a:p>
-        </p:txBody>
-      </p:sp>
-      <p:sp>
-        <p:nvSpPr>
-          <p:cNvPr id="18" name="Shape 16"/>
-          <p:cNvSpPr/>
-          <p:nvPr/>
-        </p:nvSpPr>
-        <p:spPr>
-          <a:xfrm>
-            <a:off x="1234440" y="2825496"/>
-            <a:ext cx="4480560" cy="0"/>
-          </a:xfrm>
-          <a:prstGeom prst="line">
-            <a:avLst/>
-          </a:prstGeom>
-          <a:noFill/>
-          <a:ln w="6350">
-            <a:solidFill>
-              <a:srgbClr val="DDE3EB"/>
-            </a:solidFill>
-            <a:prstDash val="solid"/>
-          </a:ln>
-        </p:spPr>
-      </p:sp>
-      <p:sp>
-        <p:nvSpPr>
-          <p:cNvPr id="19" name="Shape 17"/>
-          <p:cNvSpPr/>
-          <p:nvPr/>
-        </p:nvSpPr>
-        <p:spPr>
-          <a:xfrm>
-            <a:off x="832104" y="2926080"/>
-            <a:ext cx="274320" cy="274320"/>
-          </a:xfrm>
-          <a:prstGeom prst="ellipse">
-            <a:avLst/>
-          </a:prstGeom>
-          <a:solidFill>
-            <a:srgbClr val="16305B"/>
-          </a:solidFill>
-          <a:ln w="12700">
-            <a:solidFill>
-              <a:srgbClr val="16305B"/>
-            </a:solidFill>
-            <a:prstDash val="solid"/>
-          </a:ln>
-        </p:spPr>
-      </p:sp>
-      <p:sp>
-        <p:nvSpPr>
-          <p:cNvPr id="20" name="Text 18"/>
-          <p:cNvSpPr txBox="1"/>
-          <p:nvPr/>
-        </p:nvSpPr>
-        <p:spPr>
-          <a:xfrm>
-            <a:off x="832104" y="2926080"/>
-            <a:ext cx="274320" cy="274320"/>
-          </a:xfrm>
-          <a:prstGeom prst="rect">
-            <a:avLst/>
-          </a:prstGeom>
-          <a:noFill/>
-          <a:ln/>
-        </p:spPr>
-        <p:txBody>
-          <a:bodyPr wrap="square" lIns="0" tIns="0" rIns="0" bIns="0" rtlCol="0" anchor="ctr"/>
-          <a:lstStyle/>
-          <a:p>
-            <a:pPr algn="ctr" indent="0" marL="0">
-              <a:buNone/>
-            </a:pPr>
-            <a:r>
-              <a:rPr lang="en-US" sz="900" b="1" dirty="0">
-                <a:solidFill>
-                  <a:srgbClr val="FFFFFF"/>
-                </a:solidFill>
-                <a:latin typeface="Malgun Gothic" pitchFamily="34" charset="0"/>
-                <a:ea typeface="Malgun Gothic" pitchFamily="34" charset="-122"/>
-                <a:cs typeface="Malgun Gothic" pitchFamily="34" charset="-120"/>
-              </a:rPr>
-              <a:t>3</a:t>
-            </a:r>
-            <a:endParaRPr lang="en-US" sz="900" dirty="0"/>
-          </a:p>
-        </p:txBody>
-      </p:sp>
-      <p:sp>
-        <p:nvSpPr>
-          <p:cNvPr id="21" name="Text 19"/>
-          <p:cNvSpPr txBox="1"/>
-          <p:nvPr/>
-        </p:nvSpPr>
-        <p:spPr>
-          <a:xfrm>
-            <a:off x="1234440" y="2871216"/>
-            <a:ext cx="1234440" cy="384048"/>
-          </a:xfrm>
-          <a:prstGeom prst="rect">
-            <a:avLst/>
-          </a:prstGeom>
-          <a:noFill/>
-          <a:ln/>
-        </p:spPr>
-        <p:txBody>
-          <a:bodyPr wrap="square" lIns="0" tIns="0" rIns="0" bIns="0" rtlCol="0" anchor="ctr"/>
-          <a:lstStyle/>
-          <a:p>
-            <a:pPr indent="0" marL="0">
-              <a:buNone/>
-            </a:pPr>
-            <a:r>
-              <a:rPr lang="en-US" sz="1000" b="1" dirty="0">
-                <a:solidFill>
-                  <a:srgbClr val="16305B"/>
-                </a:solidFill>
-                <a:latin typeface="Malgun Gothic" pitchFamily="34" charset="0"/>
-                <a:ea typeface="Malgun Gothic" pitchFamily="34" charset="-122"/>
-                <a:cs typeface="Malgun Gothic" pitchFamily="34" charset="-120"/>
-              </a:rPr>
-              <a:t>유체 영역</a:t>
-            </a:r>
-            <a:endParaRPr lang="en-US" sz="1000" dirty="0"/>
-          </a:p>
-        </p:txBody>
-      </p:sp>
-      <p:sp>
-        <p:nvSpPr>
-          <p:cNvPr id="22" name="Text 20"/>
-          <p:cNvSpPr txBox="1"/>
-          <p:nvPr/>
-        </p:nvSpPr>
-        <p:spPr>
-          <a:xfrm>
-            <a:off x="2468880" y="2871216"/>
-            <a:ext cx="3246120" cy="384048"/>
-          </a:xfrm>
-          <a:prstGeom prst="rect">
-            <a:avLst/>
-          </a:prstGeom>
-          <a:noFill/>
-          <a:ln/>
-        </p:spPr>
-        <p:txBody>
-          <a:bodyPr wrap="square" lIns="0" tIns="0" rIns="0" bIns="0" rtlCol="0" anchor="ctr"/>
-          <a:lstStyle/>
-          <a:p>
-            <a:pPr indent="0" marL="0">
-              <a:buNone/>
-            </a:pPr>
-            <a:r>
-              <a:rPr lang="en-US" sz="950" dirty="0">
-                <a:solidFill>
-                  <a:srgbClr val="1C2733"/>
-                </a:solidFill>
-                <a:latin typeface="Malgun Gothic" pitchFamily="34" charset="0"/>
-                <a:ea typeface="Malgun Gothic" pitchFamily="34" charset="-122"/>
-                <a:cs typeface="Malgun Gothic" pitchFamily="34" charset="-120"/>
-              </a:rPr>
-              <a:t>박스에서 형상을 빼 냉각유(PAO) 영역 생성</a:t>
-            </a:r>
-            <a:endParaRPr lang="en-US" sz="950" dirty="0"/>
-          </a:p>
-        </p:txBody>
-      </p:sp>
-      <p:sp>
-        <p:nvSpPr>
-          <p:cNvPr id="23" name="Shape 21"/>
-          <p:cNvSpPr/>
-          <p:nvPr/>
-        </p:nvSpPr>
-        <p:spPr>
-          <a:xfrm>
-            <a:off x="1234440" y="3300984"/>
-            <a:ext cx="4480560" cy="0"/>
-          </a:xfrm>
-          <a:prstGeom prst="line">
-            <a:avLst/>
-          </a:prstGeom>
-          <a:noFill/>
-          <a:ln w="6350">
-            <a:solidFill>
-              <a:srgbClr val="DDE3EB"/>
-            </a:solidFill>
-            <a:prstDash val="solid"/>
-          </a:ln>
-        </p:spPr>
       </p:sp>
       <p:sp>
         <p:nvSpPr>
@@ -23253,511 +25243,18 @@
         </p:nvSpPr>
         <p:spPr>
           <a:xfrm>
-            <a:off x="832104" y="3401568"/>
-            <a:ext cx="274320" cy="274320"/>
-          </a:xfrm>
-          <a:prstGeom prst="ellipse">
-            <a:avLst/>
-          </a:prstGeom>
-          <a:solidFill>
-            <a:srgbClr val="16305B"/>
-          </a:solidFill>
-          <a:ln w="12700">
-            <a:solidFill>
-              <a:srgbClr val="16305B"/>
-            </a:solidFill>
-            <a:prstDash val="solid"/>
-          </a:ln>
-        </p:spPr>
-      </p:sp>
-      <p:sp>
-        <p:nvSpPr>
-          <p:cNvPr id="25" name="Text 23"/>
-          <p:cNvSpPr txBox="1"/>
-          <p:nvPr/>
-        </p:nvSpPr>
-        <p:spPr>
-          <a:xfrm>
-            <a:off x="832104" y="3401568"/>
-            <a:ext cx="274320" cy="274320"/>
-          </a:xfrm>
-          <a:prstGeom prst="rect">
-            <a:avLst/>
-          </a:prstGeom>
-          <a:noFill/>
-          <a:ln/>
-        </p:spPr>
-        <p:txBody>
-          <a:bodyPr wrap="square" lIns="0" tIns="0" rIns="0" bIns="0" rtlCol="0" anchor="ctr"/>
-          <a:lstStyle/>
-          <a:p>
-            <a:pPr algn="ctr" indent="0" marL="0">
-              <a:buNone/>
-            </a:pPr>
-            <a:r>
-              <a:rPr lang="en-US" sz="900" b="1" dirty="0">
-                <a:solidFill>
-                  <a:srgbClr val="FFFFFF"/>
-                </a:solidFill>
-                <a:latin typeface="Malgun Gothic" pitchFamily="34" charset="0"/>
-                <a:ea typeface="Malgun Gothic" pitchFamily="34" charset="-122"/>
-                <a:cs typeface="Malgun Gothic" pitchFamily="34" charset="-120"/>
-              </a:rPr>
-              <a:t>4</a:t>
-            </a:r>
-            <a:endParaRPr lang="en-US" sz="900" dirty="0"/>
-          </a:p>
-        </p:txBody>
-      </p:sp>
-      <p:sp>
-        <p:nvSpPr>
-          <p:cNvPr id="26" name="Text 24"/>
-          <p:cNvSpPr txBox="1"/>
-          <p:nvPr/>
-        </p:nvSpPr>
-        <p:spPr>
-          <a:xfrm>
-            <a:off x="1234440" y="3346704"/>
-            <a:ext cx="1234440" cy="384048"/>
-          </a:xfrm>
-          <a:prstGeom prst="rect">
-            <a:avLst/>
-          </a:prstGeom>
-          <a:noFill/>
-          <a:ln/>
-        </p:spPr>
-        <p:txBody>
-          <a:bodyPr wrap="square" lIns="0" tIns="0" rIns="0" bIns="0" rtlCol="0" anchor="ctr"/>
-          <a:lstStyle/>
-          <a:p>
-            <a:pPr indent="0" marL="0">
-              <a:buNone/>
-            </a:pPr>
-            <a:r>
-              <a:rPr lang="en-US" sz="1000" b="1" dirty="0">
-                <a:solidFill>
-                  <a:srgbClr val="16305B"/>
-                </a:solidFill>
-                <a:latin typeface="Malgun Gothic" pitchFamily="34" charset="0"/>
-                <a:ea typeface="Malgun Gothic" pitchFamily="34" charset="-122"/>
-                <a:cs typeface="Malgun Gothic" pitchFamily="34" charset="-120"/>
-              </a:rPr>
-              <a:t>경계조건</a:t>
-            </a:r>
-            <a:endParaRPr lang="en-US" sz="1000" dirty="0"/>
-          </a:p>
-        </p:txBody>
-      </p:sp>
-      <p:sp>
-        <p:nvSpPr>
-          <p:cNvPr id="27" name="Text 25"/>
-          <p:cNvSpPr txBox="1"/>
-          <p:nvPr/>
-        </p:nvSpPr>
-        <p:spPr>
-          <a:xfrm>
-            <a:off x="2468880" y="3346704"/>
-            <a:ext cx="3246120" cy="384048"/>
-          </a:xfrm>
-          <a:prstGeom prst="rect">
-            <a:avLst/>
-          </a:prstGeom>
-          <a:noFill/>
-          <a:ln/>
-        </p:spPr>
-        <p:txBody>
-          <a:bodyPr wrap="square" lIns="0" tIns="0" rIns="0" bIns="0" rtlCol="0" anchor="ctr"/>
-          <a:lstStyle/>
-          <a:p>
-            <a:pPr indent="0" marL="0">
-              <a:buNone/>
-            </a:pPr>
-            <a:r>
-              <a:rPr lang="en-US" sz="950" dirty="0">
-                <a:solidFill>
-                  <a:srgbClr val="1C2733"/>
-                </a:solidFill>
-                <a:latin typeface="Malgun Gothic" pitchFamily="34" charset="0"/>
-                <a:ea typeface="Malgun Gothic" pitchFamily="34" charset="-122"/>
-                <a:cs typeface="Malgun Gothic" pitchFamily="34" charset="-120"/>
-              </a:rPr>
-              <a:t>발열원 9개 · 팬(입구) · 개구부(출구) 지정</a:t>
-            </a:r>
-            <a:endParaRPr lang="en-US" sz="950" dirty="0"/>
-          </a:p>
-        </p:txBody>
-      </p:sp>
-      <p:sp>
-        <p:nvSpPr>
-          <p:cNvPr id="28" name="Shape 26"/>
-          <p:cNvSpPr/>
-          <p:nvPr/>
-        </p:nvSpPr>
-        <p:spPr>
-          <a:xfrm>
-            <a:off x="1234440" y="3776472"/>
-            <a:ext cx="4480560" cy="0"/>
-          </a:xfrm>
-          <a:prstGeom prst="line">
-            <a:avLst/>
-          </a:prstGeom>
-          <a:noFill/>
-          <a:ln w="6350">
-            <a:solidFill>
-              <a:srgbClr val="DDE3EB"/>
-            </a:solidFill>
-            <a:prstDash val="solid"/>
-          </a:ln>
-        </p:spPr>
-      </p:sp>
-      <p:sp>
-        <p:nvSpPr>
-          <p:cNvPr id="29" name="Shape 27"/>
-          <p:cNvSpPr/>
-          <p:nvPr/>
-        </p:nvSpPr>
-        <p:spPr>
-          <a:xfrm>
-            <a:off x="832104" y="3877056"/>
-            <a:ext cx="274320" cy="274320"/>
-          </a:xfrm>
-          <a:prstGeom prst="ellipse">
-            <a:avLst/>
-          </a:prstGeom>
-          <a:solidFill>
-            <a:srgbClr val="16305B"/>
-          </a:solidFill>
-          <a:ln w="12700">
-            <a:solidFill>
-              <a:srgbClr val="16305B"/>
-            </a:solidFill>
-            <a:prstDash val="solid"/>
-          </a:ln>
-        </p:spPr>
-      </p:sp>
-      <p:sp>
-        <p:nvSpPr>
-          <p:cNvPr id="30" name="Text 28"/>
-          <p:cNvSpPr txBox="1"/>
-          <p:nvPr/>
-        </p:nvSpPr>
-        <p:spPr>
-          <a:xfrm>
-            <a:off x="832104" y="3877056"/>
-            <a:ext cx="274320" cy="274320"/>
-          </a:xfrm>
-          <a:prstGeom prst="rect">
-            <a:avLst/>
-          </a:prstGeom>
-          <a:noFill/>
-          <a:ln/>
-        </p:spPr>
-        <p:txBody>
-          <a:bodyPr wrap="square" lIns="0" tIns="0" rIns="0" bIns="0" rtlCol="0" anchor="ctr"/>
-          <a:lstStyle/>
-          <a:p>
-            <a:pPr algn="ctr" indent="0" marL="0">
-              <a:buNone/>
-            </a:pPr>
-            <a:r>
-              <a:rPr lang="en-US" sz="900" b="1" dirty="0">
-                <a:solidFill>
-                  <a:srgbClr val="FFFFFF"/>
-                </a:solidFill>
-                <a:latin typeface="Malgun Gothic" pitchFamily="34" charset="0"/>
-                <a:ea typeface="Malgun Gothic" pitchFamily="34" charset="-122"/>
-                <a:cs typeface="Malgun Gothic" pitchFamily="34" charset="-120"/>
-              </a:rPr>
-              <a:t>5</a:t>
-            </a:r>
-            <a:endParaRPr lang="en-US" sz="900" dirty="0"/>
-          </a:p>
-        </p:txBody>
-      </p:sp>
-      <p:sp>
-        <p:nvSpPr>
-          <p:cNvPr id="31" name="Text 29"/>
-          <p:cNvSpPr txBox="1"/>
-          <p:nvPr/>
-        </p:nvSpPr>
-        <p:spPr>
-          <a:xfrm>
-            <a:off x="1234440" y="3822192"/>
-            <a:ext cx="1234440" cy="384048"/>
-          </a:xfrm>
-          <a:prstGeom prst="rect">
-            <a:avLst/>
-          </a:prstGeom>
-          <a:noFill/>
-          <a:ln/>
-        </p:spPr>
-        <p:txBody>
-          <a:bodyPr wrap="square" lIns="0" tIns="0" rIns="0" bIns="0" rtlCol="0" anchor="ctr"/>
-          <a:lstStyle/>
-          <a:p>
-            <a:pPr indent="0" marL="0">
-              <a:buNone/>
-            </a:pPr>
-            <a:r>
-              <a:rPr lang="en-US" sz="1000" b="1" dirty="0">
-                <a:solidFill>
-                  <a:srgbClr val="16305B"/>
-                </a:solidFill>
-                <a:latin typeface="Malgun Gothic" pitchFamily="34" charset="0"/>
-                <a:ea typeface="Malgun Gothic" pitchFamily="34" charset="-122"/>
-                <a:cs typeface="Malgun Gothic" pitchFamily="34" charset="-120"/>
-              </a:rPr>
-              <a:t>메시</a:t>
-            </a:r>
-            <a:endParaRPr lang="en-US" sz="1000" dirty="0"/>
-          </a:p>
-        </p:txBody>
-      </p:sp>
-      <p:sp>
-        <p:nvSpPr>
-          <p:cNvPr id="32" name="Text 30"/>
-          <p:cNvSpPr txBox="1"/>
-          <p:nvPr/>
-        </p:nvSpPr>
-        <p:spPr>
-          <a:xfrm>
-            <a:off x="2468880" y="3822192"/>
-            <a:ext cx="3246120" cy="384048"/>
-          </a:xfrm>
-          <a:prstGeom prst="rect">
-            <a:avLst/>
-          </a:prstGeom>
-          <a:noFill/>
-          <a:ln/>
-        </p:spPr>
-        <p:txBody>
-          <a:bodyPr wrap="square" lIns="0" tIns="0" rIns="0" bIns="0" rtlCol="0" anchor="ctr"/>
-          <a:lstStyle/>
-          <a:p>
-            <a:pPr indent="0" marL="0">
-              <a:buNone/>
-            </a:pPr>
-            <a:r>
-              <a:rPr lang="en-US" sz="950" dirty="0">
-                <a:solidFill>
-                  <a:srgbClr val="1C2733"/>
-                </a:solidFill>
-                <a:latin typeface="Malgun Gothic" pitchFamily="34" charset="0"/>
-                <a:ea typeface="Malgun Gothic" pitchFamily="34" charset="-122"/>
-                <a:cs typeface="Malgun Gothic" pitchFamily="34" charset="-120"/>
-              </a:rPr>
-              <a:t>유체 영역 로컬 메시 + 전체 글로벌 메시</a:t>
-            </a:r>
-            <a:endParaRPr lang="en-US" sz="950" dirty="0"/>
-          </a:p>
-        </p:txBody>
-      </p:sp>
-      <p:sp>
-        <p:nvSpPr>
-          <p:cNvPr id="33" name="Shape 31"/>
-          <p:cNvSpPr/>
-          <p:nvPr/>
-        </p:nvSpPr>
-        <p:spPr>
-          <a:xfrm>
-            <a:off x="1234440" y="4251960"/>
-            <a:ext cx="4480560" cy="0"/>
-          </a:xfrm>
-          <a:prstGeom prst="line">
-            <a:avLst/>
-          </a:prstGeom>
-          <a:noFill/>
-          <a:ln w="6350">
-            <a:solidFill>
-              <a:srgbClr val="DDE3EB"/>
-            </a:solidFill>
-            <a:prstDash val="solid"/>
-          </a:ln>
-        </p:spPr>
-      </p:sp>
-      <p:sp>
-        <p:nvSpPr>
-          <p:cNvPr id="34" name="Shape 32"/>
-          <p:cNvSpPr/>
-          <p:nvPr/>
-        </p:nvSpPr>
-        <p:spPr>
-          <a:xfrm>
-            <a:off x="832104" y="4352544"/>
-            <a:ext cx="274320" cy="274320"/>
-          </a:xfrm>
-          <a:prstGeom prst="ellipse">
-            <a:avLst/>
-          </a:prstGeom>
-          <a:solidFill>
-            <a:srgbClr val="16305B"/>
-          </a:solidFill>
-          <a:ln w="12700">
-            <a:solidFill>
-              <a:srgbClr val="16305B"/>
-            </a:solidFill>
-            <a:prstDash val="solid"/>
-          </a:ln>
-        </p:spPr>
-      </p:sp>
-      <p:sp>
-        <p:nvSpPr>
-          <p:cNvPr id="35" name="Text 33"/>
-          <p:cNvSpPr txBox="1"/>
-          <p:nvPr/>
-        </p:nvSpPr>
-        <p:spPr>
-          <a:xfrm>
-            <a:off x="832104" y="4352544"/>
-            <a:ext cx="274320" cy="274320"/>
-          </a:xfrm>
-          <a:prstGeom prst="rect">
-            <a:avLst/>
-          </a:prstGeom>
-          <a:noFill/>
-          <a:ln/>
-        </p:spPr>
-        <p:txBody>
-          <a:bodyPr wrap="square" lIns="0" tIns="0" rIns="0" bIns="0" rtlCol="0" anchor="ctr"/>
-          <a:lstStyle/>
-          <a:p>
-            <a:pPr algn="ctr" indent="0" marL="0">
-              <a:buNone/>
-            </a:pPr>
-            <a:r>
-              <a:rPr lang="en-US" sz="900" b="1" dirty="0">
-                <a:solidFill>
-                  <a:srgbClr val="FFFFFF"/>
-                </a:solidFill>
-                <a:latin typeface="Malgun Gothic" pitchFamily="34" charset="0"/>
-                <a:ea typeface="Malgun Gothic" pitchFamily="34" charset="-122"/>
-                <a:cs typeface="Malgun Gothic" pitchFamily="34" charset="-120"/>
-              </a:rPr>
-              <a:t>6</a:t>
-            </a:r>
-            <a:endParaRPr lang="en-US" sz="900" dirty="0"/>
-          </a:p>
-        </p:txBody>
-      </p:sp>
-      <p:sp>
-        <p:nvSpPr>
-          <p:cNvPr id="36" name="Text 34"/>
-          <p:cNvSpPr txBox="1"/>
-          <p:nvPr/>
-        </p:nvSpPr>
-        <p:spPr>
-          <a:xfrm>
-            <a:off x="1234440" y="4297680"/>
-            <a:ext cx="1234440" cy="384048"/>
-          </a:xfrm>
-          <a:prstGeom prst="rect">
-            <a:avLst/>
-          </a:prstGeom>
-          <a:noFill/>
-          <a:ln/>
-        </p:spPr>
-        <p:txBody>
-          <a:bodyPr wrap="square" lIns="0" tIns="0" rIns="0" bIns="0" rtlCol="0" anchor="ctr"/>
-          <a:lstStyle/>
-          <a:p>
-            <a:pPr indent="0" marL="0">
-              <a:buNone/>
-            </a:pPr>
-            <a:r>
-              <a:rPr lang="en-US" sz="1000" b="1" dirty="0">
-                <a:solidFill>
-                  <a:srgbClr val="16305B"/>
-                </a:solidFill>
-                <a:latin typeface="Malgun Gothic" pitchFamily="34" charset="0"/>
-                <a:ea typeface="Malgun Gothic" pitchFamily="34" charset="-122"/>
-                <a:cs typeface="Malgun Gothic" pitchFamily="34" charset="-120"/>
-              </a:rPr>
-              <a:t>측정면</a:t>
-            </a:r>
-            <a:endParaRPr lang="en-US" sz="1000" dirty="0"/>
-          </a:p>
-        </p:txBody>
-      </p:sp>
-      <p:sp>
-        <p:nvSpPr>
-          <p:cNvPr id="37" name="Text 35"/>
-          <p:cNvSpPr txBox="1"/>
-          <p:nvPr/>
-        </p:nvSpPr>
-        <p:spPr>
-          <a:xfrm>
-            <a:off x="2468880" y="4297680"/>
-            <a:ext cx="3246120" cy="384048"/>
-          </a:xfrm>
-          <a:prstGeom prst="rect">
-            <a:avLst/>
-          </a:prstGeom>
-          <a:noFill/>
-          <a:ln/>
-        </p:spPr>
-        <p:txBody>
-          <a:bodyPr wrap="square" lIns="0" tIns="0" rIns="0" bIns="0" rtlCol="0" anchor="ctr"/>
-          <a:lstStyle/>
-          <a:p>
-            <a:pPr indent="0" marL="0">
-              <a:buNone/>
-            </a:pPr>
-            <a:r>
-              <a:rPr lang="en-US" sz="950" dirty="0">
-                <a:solidFill>
-                  <a:srgbClr val="1C2733"/>
-                </a:solidFill>
-                <a:latin typeface="Malgun Gothic" pitchFamily="34" charset="0"/>
-                <a:ea typeface="Malgun Gothic" pitchFamily="34" charset="-122"/>
-                <a:cs typeface="Malgun Gothic" pitchFamily="34" charset="-120"/>
-              </a:rPr>
-              <a:t>설계변수에 따라 위치·개수 동적 생성</a:t>
-            </a:r>
-            <a:endParaRPr lang="en-US" sz="950" dirty="0"/>
-          </a:p>
-        </p:txBody>
-      </p:sp>
-      <p:sp>
-        <p:nvSpPr>
-          <p:cNvPr id="38" name="Shape 36"/>
-          <p:cNvSpPr/>
-          <p:nvPr/>
-        </p:nvSpPr>
-        <p:spPr>
-          <a:xfrm>
-            <a:off x="1234440" y="4727448"/>
-            <a:ext cx="4480560" cy="0"/>
-          </a:xfrm>
-          <a:prstGeom prst="line">
-            <a:avLst/>
-          </a:prstGeom>
-          <a:noFill/>
-          <a:ln w="6350">
-            <a:solidFill>
-              <a:srgbClr val="DDE3EB"/>
-            </a:solidFill>
-            <a:prstDash val="solid"/>
-          </a:ln>
-        </p:spPr>
-      </p:sp>
-      <p:sp>
-        <p:nvSpPr>
-          <p:cNvPr id="39" name="Shape 37"/>
-          <p:cNvSpPr/>
-          <p:nvPr/>
-        </p:nvSpPr>
-        <p:spPr>
-          <a:xfrm>
-            <a:off x="832104" y="4828032"/>
-            <a:ext cx="274320" cy="274320"/>
-          </a:xfrm>
-          <a:prstGeom prst="ellipse">
-            <a:avLst/>
+            <a:off x="813816" y="4206240"/>
+            <a:ext cx="4846320" cy="585216"/>
+          </a:xfrm>
+          <a:prstGeom prst="roundRect">
+            <a:avLst>
+              <a:gd name="adj" fmla="val 9375"/>
+            </a:avLst>
           </a:prstGeom>
           <a:solidFill>
             <a:srgbClr val="00A3C4"/>
           </a:solidFill>
-          <a:ln w="12700">
+          <a:ln w="9525">
             <a:solidFill>
               <a:srgbClr val="00A3C4"/>
             </a:solidFill>
@@ -23767,14 +25264,14 @@
       </p:sp>
       <p:sp>
         <p:nvSpPr>
-          <p:cNvPr id="40" name="Text 38"/>
+          <p:cNvPr id="25" name="Text 23"/>
           <p:cNvSpPr txBox="1"/>
           <p:nvPr/>
         </p:nvSpPr>
         <p:spPr>
           <a:xfrm>
-            <a:off x="832104" y="4828032"/>
-            <a:ext cx="274320" cy="274320"/>
+            <a:off x="923544" y="4206240"/>
+            <a:ext cx="310896" cy="585216"/>
           </a:xfrm>
           <a:prstGeom prst="rect">
             <a:avLst/>
@@ -23786,11 +25283,11 @@
           <a:bodyPr wrap="square" lIns="0" tIns="0" rIns="0" bIns="0" rtlCol="0" anchor="ctr"/>
           <a:lstStyle/>
           <a:p>
-            <a:pPr algn="ctr" indent="0" marL="0">
-              <a:buNone/>
-            </a:pPr>
-            <a:r>
-              <a:rPr lang="en-US" sz="900" b="1" dirty="0">
+            <a:pPr indent="0" marL="0">
+              <a:buNone/>
+            </a:pPr>
+            <a:r>
+              <a:rPr lang="en-US" sz="1600" b="1" dirty="0">
                 <a:solidFill>
                   <a:srgbClr val="FFFFFF"/>
                 </a:solidFill>
@@ -23798,22 +25295,22 @@
                 <a:ea typeface="Malgun Gothic" pitchFamily="34" charset="-122"/>
                 <a:cs typeface="Malgun Gothic" pitchFamily="34" charset="-120"/>
               </a:rPr>
-              <a:t>7</a:t>
-            </a:r>
-            <a:endParaRPr lang="en-US" sz="900" dirty="0"/>
+              <a:t>4</a:t>
+            </a:r>
+            <a:endParaRPr lang="en-US" sz="1600" dirty="0"/>
           </a:p>
         </p:txBody>
       </p:sp>
       <p:sp>
         <p:nvSpPr>
-          <p:cNvPr id="41" name="Text 39"/>
+          <p:cNvPr id="26" name="Text 24"/>
           <p:cNvSpPr txBox="1"/>
           <p:nvPr/>
         </p:nvSpPr>
         <p:spPr>
           <a:xfrm>
-            <a:off x="1234440" y="4773168"/>
-            <a:ext cx="1234440" cy="384048"/>
+            <a:off x="1289304" y="4242816"/>
+            <a:ext cx="1737360" cy="512064"/>
           </a:xfrm>
           <a:prstGeom prst="rect">
             <a:avLst/>
@@ -23829,30 +25326,30 @@
               <a:buNone/>
             </a:pPr>
             <a:r>
-              <a:rPr lang="en-US" sz="1000" b="1" dirty="0">
-                <a:solidFill>
-                  <a:srgbClr val="16305B"/>
+              <a:rPr lang="en-US" sz="1050" b="1" dirty="0">
+                <a:solidFill>
+                  <a:srgbClr val="FFFFFF"/>
                 </a:solidFill>
                 <a:latin typeface="Malgun Gothic" pitchFamily="34" charset="0"/>
                 <a:ea typeface="Malgun Gothic" pitchFamily="34" charset="-122"/>
                 <a:cs typeface="Malgun Gothic" pitchFamily="34" charset="-120"/>
               </a:rPr>
-              <a:t>해석 · 추출</a:t>
-            </a:r>
-            <a:endParaRPr lang="en-US" sz="1000" dirty="0"/>
+              <a:t>매 회차 자동 반복</a:t>
+            </a:r>
+            <a:endParaRPr lang="en-US" sz="1050" dirty="0"/>
           </a:p>
         </p:txBody>
       </p:sp>
       <p:sp>
         <p:nvSpPr>
-          <p:cNvPr id="42" name="Text 40"/>
+          <p:cNvPr id="27" name="Text 25"/>
           <p:cNvSpPr txBox="1"/>
           <p:nvPr/>
         </p:nvSpPr>
         <p:spPr>
           <a:xfrm>
-            <a:off x="2468880" y="4773168"/>
-            <a:ext cx="3246120" cy="384048"/>
+            <a:off x="2990088" y="4242816"/>
+            <a:ext cx="2596896" cy="512064"/>
           </a:xfrm>
           <a:prstGeom prst="rect">
             <a:avLst/>
@@ -23865,37 +25362,79 @@
           <a:lstStyle/>
           <a:p>
             <a:pPr indent="0" marL="0">
-              <a:buNone/>
-            </a:pPr>
-            <a:r>
-              <a:rPr lang="en-US" sz="950" dirty="0">
-                <a:solidFill>
-                  <a:srgbClr val="1C2733"/>
+              <a:lnSpc>
+                <a:spcPct val="110000"/>
+              </a:lnSpc>
+              <a:buNone/>
+            </a:pPr>
+            <a:r>
+              <a:rPr lang="en-US" sz="880" dirty="0">
+                <a:solidFill>
+                  <a:srgbClr val="FFFFFF"/>
                 </a:solidFill>
                 <a:latin typeface="Malgun Gothic" pitchFamily="34" charset="0"/>
                 <a:ea typeface="Malgun Gothic" pitchFamily="34" charset="-122"/>
                 <a:cs typeface="Malgun Gothic" pitchFamily="34" charset="-120"/>
               </a:rPr>
-              <a:t>정상상태 해석 → 온도·차압·유량 CSV 추출</a:t>
-            </a:r>
-            <a:endParaRPr lang="en-US" sz="950" dirty="0"/>
+              <a:t>형상(STEP)만 바뀌면 동일 절차를 코드가 재현</a:t>
+            </a:r>
+            <a:endParaRPr lang="en-US" sz="880" dirty="0"/>
           </a:p>
         </p:txBody>
       </p:sp>
       <p:sp>
         <p:nvSpPr>
-          <p:cNvPr id="43" name="Shape 41"/>
+          <p:cNvPr id="28" name="Text 26"/>
+          <p:cNvSpPr txBox="1"/>
+          <p:nvPr/>
+        </p:nvSpPr>
+        <p:spPr>
+          <a:xfrm>
+            <a:off x="813816" y="5029200"/>
+            <a:ext cx="4846320" cy="219456"/>
+          </a:xfrm>
+          <a:prstGeom prst="rect">
+            <a:avLst/>
+          </a:prstGeom>
+          <a:noFill/>
+          <a:ln/>
+        </p:spPr>
+        <p:txBody>
+          <a:bodyPr wrap="square" lIns="0" tIns="0" rIns="0" bIns="0" rtlCol="0" anchor="ctr"/>
+          <a:lstStyle/>
+          <a:p>
+            <a:pPr indent="0" marL="0">
+              <a:buNone/>
+            </a:pPr>
+            <a:r>
+              <a:rPr lang="en-US" sz="900" i="1" dirty="0">
+                <a:solidFill>
+                  <a:srgbClr val="6B7A8F"/>
+                </a:solidFill>
+                <a:latin typeface="Malgun Gothic" pitchFamily="34" charset="0"/>
+                <a:ea typeface="Malgun Gothic" pitchFamily="34" charset="-122"/>
+                <a:cs typeface="Malgun Gothic" pitchFamily="34" charset="-120"/>
+              </a:rPr>
+              <a:t>※ 단계별 GUI 설정은 부록 A-3, 코드는 부록 A-2 참고</a:t>
+            </a:r>
+            <a:endParaRPr lang="en-US" sz="900" dirty="0"/>
+          </a:p>
+        </p:txBody>
+      </p:sp>
+      <p:sp>
+        <p:nvSpPr>
+          <p:cNvPr id="29" name="Shape 27"/>
           <p:cNvSpPr/>
           <p:nvPr/>
         </p:nvSpPr>
         <p:spPr>
           <a:xfrm>
             <a:off x="6336792" y="1188720"/>
-            <a:ext cx="5440680" cy="4160520"/>
+            <a:ext cx="5440680" cy="2176272"/>
           </a:xfrm>
           <a:prstGeom prst="roundRect">
             <a:avLst>
-              <a:gd name="adj" fmla="val 1319"/>
+              <a:gd name="adj" fmla="val 2521"/>
             </a:avLst>
           </a:prstGeom>
           <a:solidFill>
@@ -23918,7 +25457,7 @@
       </p:sp>
       <p:sp>
         <p:nvSpPr>
-          <p:cNvPr id="44" name="Shape 42"/>
+          <p:cNvPr id="30" name="Shape 28"/>
           <p:cNvSpPr/>
           <p:nvPr/>
         </p:nvSpPr>
@@ -23943,7 +25482,7 @@
       </p:sp>
       <p:sp>
         <p:nvSpPr>
-          <p:cNvPr id="45" name="Text 43"/>
+          <p:cNvPr id="31" name="Text 29"/>
           <p:cNvSpPr txBox="1"/>
           <p:nvPr/>
         </p:nvSpPr>
@@ -23974,7 +25513,7 @@
                 <a:ea typeface="Malgun Gothic" pitchFamily="34" charset="-122"/>
                 <a:cs typeface="Malgun Gothic" pitchFamily="34" charset="-120"/>
               </a:rPr>
-              <a:t>측정 항목 및 결과 출력</a:t>
+              <a:t>GUI 수동 설정 vs 코드 자동 구성</a:t>
             </a:r>
             <a:endParaRPr lang="en-US" sz="1300" dirty="0"/>
           </a:p>
@@ -23995,7 +25534,7 @@
           </p:nvPr>
         </p:nvGraphicFramePr>
         <p:xfrm>
-          <a:off x="6647688" y="1920240"/>
+          <a:off x="6647688" y="1828800"/>
           <a:ext cx="4846320" cy="914400"/>
         </p:xfrm>
         <a:graphic>
@@ -24003,11 +25542,11 @@
             <a:tbl>
               <a:tblPr/>
               <a:tblGrid>
-                <a:gridCol w="1737360"/>
-                <a:gridCol w="1645920"/>
-                <a:gridCol w="1463040"/>
+                <a:gridCol w="1143000"/>
+                <a:gridCol w="1783080"/>
+                <a:gridCol w="1920240"/>
               </a:tblGrid>
-              <a:tr h="347472">
+              <a:tr h="292608">
                 <a:tc>
                   <a:txBody>
                     <a:bodyPr/>
@@ -24025,7 +25564,7 @@
                           <a:ea typeface="Malgun Gothic" pitchFamily="34" charset="-122"/>
                           <a:cs typeface="Malgun Gothic" pitchFamily="34" charset="-120"/>
                         </a:rPr>
-                        <a:t>측정 대상</a:t>
+                        <a:t>항목</a:t>
                       </a:r>
                       <a:endParaRPr lang="en-US" sz="950" dirty="0">
                         <a:latin typeface="Malgun Gothic" charset="0"/>
@@ -24075,7 +25614,7 @@
                           <a:ea typeface="Malgun Gothic" pitchFamily="34" charset="-122"/>
                           <a:cs typeface="Malgun Gothic" pitchFamily="34" charset="-120"/>
                         </a:rPr>
-                        <a:t>항목</a:t>
+                        <a:t>GUI 수동</a:t>
                       </a:r>
                       <a:endParaRPr lang="en-US" sz="950" dirty="0">
                         <a:latin typeface="Malgun Gothic" charset="0"/>
@@ -24125,7 +25664,7 @@
                           <a:ea typeface="Malgun Gothic" pitchFamily="34" charset="-122"/>
                           <a:cs typeface="Malgun Gothic" pitchFamily="34" charset="-120"/>
                         </a:rPr>
-                        <a:t>개수</a:t>
+                        <a:t>코드 자동</a:t>
                       </a:r>
                       <a:endParaRPr lang="en-US" sz="950" dirty="0">
                         <a:latin typeface="Malgun Gothic" charset="0"/>
@@ -24159,7 +25698,7 @@
                   </a:tcPr>
                 </a:tc>
               </a:tr>
-              <a:tr h="347472">
+              <a:tr h="292608">
                 <a:tc>
                   <a:txBody>
                     <a:bodyPr/>
@@ -24177,7 +25716,7 @@
                           <a:ea typeface="Malgun Gothic" pitchFamily="34" charset="-122"/>
                           <a:cs typeface="Malgun Gothic" pitchFamily="34" charset="-120"/>
                         </a:rPr>
-                        <a:t>발열원</a:t>
+                        <a:t>모델 구성</a:t>
                       </a:r>
                       <a:endParaRPr lang="en-US" sz="950" dirty="0">
                         <a:latin typeface="Malgun Gothic" charset="0"/>
@@ -24224,7 +25763,103 @@
                           <a:ea typeface="Malgun Gothic" pitchFamily="34" charset="-122"/>
                           <a:cs typeface="Malgun Gothic" pitchFamily="34" charset="-120"/>
                         </a:rPr>
-                        <a:t>최고 · 평균 온도</a:t>
+                        <a:t>7단계 매회 직접 설정</a:t>
+                      </a:r>
+                      <a:endParaRPr lang="en-US" sz="950" dirty="0">
+                        <a:latin typeface="Malgun Gothic" charset="0"/>
+                        <a:ea typeface="Malgun Gothic" charset="0"/>
+                        <a:cs typeface="Malgun Gothic" charset="0"/>
+                      </a:endParaRPr>
+                    </a:p>
+                  </a:txBody>
+                  <a:tcPr marL="50800" marR="50800" marT="25400" marB="25400" anchor="ctr">
+                    <a:lnL w="0" cap="flat" cmpd="sng" algn="ctr">
+                      <a:noFill/>
+                    </a:lnL>
+                    <a:lnR w="0" cap="flat" cmpd="sng" algn="ctr">
+                      <a:noFill/>
+                    </a:lnR>
+                    <a:lnT w="0" cap="flat" cmpd="sng" algn="ctr">
+                      <a:noFill/>
+                    </a:lnT>
+                    <a:lnB w="6350" cap="flat" cmpd="sng" algn="ctr">
+                      <a:solidFill>
+                        <a:srgbClr val="DDE3EB"/>
+                      </a:solidFill>
+                      <a:prstDash val="solid"/>
+                      <a:round/>
+                      <a:headEnd type="none" w="med" len="med"/>
+                      <a:tailEnd type="none" w="med" len="med"/>
+                    </a:lnB>
+                  </a:tcPr>
+                </a:tc>
+                <a:tc>
+                  <a:txBody>
+                    <a:bodyPr/>
+                    <a:lstStyle/>
+                    <a:p>
+                      <a:pPr indent="0" marL="0">
+                        <a:buNone/>
+                      </a:pPr>
+                      <a:r>
+                        <a:rPr lang="en-US" sz="950" b="1" dirty="0">
+                          <a:solidFill>
+                            <a:srgbClr val="16305B"/>
+                          </a:solidFill>
+                          <a:latin typeface="Malgun Gothic" pitchFamily="34" charset="0"/>
+                          <a:ea typeface="Malgun Gothic" pitchFamily="34" charset="-122"/>
+                          <a:cs typeface="Malgun Gothic" pitchFamily="34" charset="-120"/>
+                        </a:rPr>
+                        <a:t>스크립트 1회 실행</a:t>
+                      </a:r>
+                      <a:endParaRPr lang="en-US" sz="950" dirty="0">
+                        <a:latin typeface="Malgun Gothic" charset="0"/>
+                        <a:ea typeface="Malgun Gothic" charset="0"/>
+                        <a:cs typeface="Malgun Gothic" charset="0"/>
+                      </a:endParaRPr>
+                    </a:p>
+                  </a:txBody>
+                  <a:tcPr marL="50800" marR="50800" marT="25400" marB="25400" anchor="ctr">
+                    <a:lnL w="0" cap="flat" cmpd="sng" algn="ctr">
+                      <a:noFill/>
+                    </a:lnL>
+                    <a:lnR w="0" cap="flat" cmpd="sng" algn="ctr">
+                      <a:noFill/>
+                    </a:lnR>
+                    <a:lnT w="0" cap="flat" cmpd="sng" algn="ctr">
+                      <a:noFill/>
+                    </a:lnT>
+                    <a:lnB w="6350" cap="flat" cmpd="sng" algn="ctr">
+                      <a:solidFill>
+                        <a:srgbClr val="DDE3EB"/>
+                      </a:solidFill>
+                      <a:prstDash val="solid"/>
+                      <a:round/>
+                      <a:headEnd type="none" w="med" len="med"/>
+                      <a:tailEnd type="none" w="med" len="med"/>
+                    </a:lnB>
+                  </a:tcPr>
+                </a:tc>
+              </a:tr>
+              <a:tr h="292608">
+                <a:tc>
+                  <a:txBody>
+                    <a:bodyPr/>
+                    <a:lstStyle/>
+                    <a:p>
+                      <a:pPr indent="0" marL="0">
+                        <a:buNone/>
+                      </a:pPr>
+                      <a:r>
+                        <a:rPr lang="en-US" sz="950" dirty="0">
+                          <a:solidFill>
+                            <a:srgbClr val="1C2733"/>
+                          </a:solidFill>
+                          <a:latin typeface="Malgun Gothic" pitchFamily="34" charset="0"/>
+                          <a:ea typeface="Malgun Gothic" pitchFamily="34" charset="-122"/>
+                          <a:cs typeface="Malgun Gothic" pitchFamily="34" charset="-120"/>
+                        </a:rPr>
+                        <a:t>형상 변경 시</a:t>
                       </a:r>
                       <a:endParaRPr lang="en-US" sz="950" dirty="0">
                         <a:latin typeface="Malgun Gothic" charset="0"/>
@@ -24271,7 +25906,54 @@
                           <a:ea typeface="Malgun Gothic" pitchFamily="34" charset="-122"/>
                           <a:cs typeface="Malgun Gothic" pitchFamily="34" charset="-120"/>
                         </a:rPr>
-                        <a:t>9</a:t>
+                        <a:t>처음부터 재설정</a:t>
+                      </a:r>
+                      <a:endParaRPr lang="en-US" sz="950" dirty="0">
+                        <a:latin typeface="Malgun Gothic" charset="0"/>
+                        <a:ea typeface="Malgun Gothic" charset="0"/>
+                        <a:cs typeface="Malgun Gothic" charset="0"/>
+                      </a:endParaRPr>
+                    </a:p>
+                  </a:txBody>
+                  <a:tcPr marL="50800" marR="50800" marT="25400" marB="25400" anchor="ctr">
+                    <a:lnL w="0" cap="flat" cmpd="sng" algn="ctr">
+                      <a:noFill/>
+                    </a:lnL>
+                    <a:lnR w="0" cap="flat" cmpd="sng" algn="ctr">
+                      <a:noFill/>
+                    </a:lnR>
+                    <a:lnT w="0" cap="flat" cmpd="sng" algn="ctr">
+                      <a:noFill/>
+                    </a:lnT>
+                    <a:lnB w="6350" cap="flat" cmpd="sng" algn="ctr">
+                      <a:solidFill>
+                        <a:srgbClr val="DDE3EB"/>
+                      </a:solidFill>
+                      <a:prstDash val="solid"/>
+                      <a:round/>
+                      <a:headEnd type="none" w="med" len="med"/>
+                      <a:tailEnd type="none" w="med" len="med"/>
+                    </a:lnB>
+                  </a:tcPr>
+                </a:tc>
+                <a:tc>
+                  <a:txBody>
+                    <a:bodyPr/>
+                    <a:lstStyle/>
+                    <a:p>
+                      <a:pPr indent="0" marL="0">
+                        <a:buNone/>
+                      </a:pPr>
+                      <a:r>
+                        <a:rPr lang="en-US" sz="950" b="1" dirty="0">
+                          <a:solidFill>
+                            <a:srgbClr val="16305B"/>
+                          </a:solidFill>
+                          <a:latin typeface="Malgun Gothic" pitchFamily="34" charset="0"/>
+                          <a:ea typeface="Malgun Gothic" pitchFamily="34" charset="-122"/>
+                          <a:cs typeface="Malgun Gothic" pitchFamily="34" charset="-120"/>
+                        </a:rPr>
+                        <a:t>STEP 교체만으로 재구성</a:t>
                       </a:r>
                       <a:endParaRPr lang="en-US" sz="950" dirty="0">
                         <a:latin typeface="Malgun Gothic" charset="0"/>
@@ -24302,7 +25984,7 @@
                   </a:tcPr>
                 </a:tc>
               </a:tr>
-              <a:tr h="347472">
+              <a:tr h="292608">
                 <a:tc>
                   <a:txBody>
                     <a:bodyPr/>
@@ -24320,7 +26002,7 @@
                           <a:ea typeface="Malgun Gothic" pitchFamily="34" charset="-122"/>
                           <a:cs typeface="Malgun Gothic" pitchFamily="34" charset="-120"/>
                         </a:rPr>
-                        <a:t>팬 통과면</a:t>
+                        <a:t>측정면 배치</a:t>
                       </a:r>
                       <a:endParaRPr lang="en-US" sz="950" dirty="0">
                         <a:latin typeface="Malgun Gothic" charset="0"/>
@@ -24367,7 +26049,103 @@
                           <a:ea typeface="Malgun Gothic" pitchFamily="34" charset="-122"/>
                           <a:cs typeface="Malgun Gothic" pitchFamily="34" charset="-120"/>
                         </a:rPr>
-                        <a:t>차압</a:t>
+                        <a:t>유로마다 수작업</a:t>
+                      </a:r>
+                      <a:endParaRPr lang="en-US" sz="950" dirty="0">
+                        <a:latin typeface="Malgun Gothic" charset="0"/>
+                        <a:ea typeface="Malgun Gothic" charset="0"/>
+                        <a:cs typeface="Malgun Gothic" charset="0"/>
+                      </a:endParaRPr>
+                    </a:p>
+                  </a:txBody>
+                  <a:tcPr marL="50800" marR="50800" marT="25400" marB="25400" anchor="ctr">
+                    <a:lnL w="0" cap="flat" cmpd="sng" algn="ctr">
+                      <a:noFill/>
+                    </a:lnL>
+                    <a:lnR w="0" cap="flat" cmpd="sng" algn="ctr">
+                      <a:noFill/>
+                    </a:lnR>
+                    <a:lnT w="0" cap="flat" cmpd="sng" algn="ctr">
+                      <a:noFill/>
+                    </a:lnT>
+                    <a:lnB w="6350" cap="flat" cmpd="sng" algn="ctr">
+                      <a:solidFill>
+                        <a:srgbClr val="DDE3EB"/>
+                      </a:solidFill>
+                      <a:prstDash val="solid"/>
+                      <a:round/>
+                      <a:headEnd type="none" w="med" len="med"/>
+                      <a:tailEnd type="none" w="med" len="med"/>
+                    </a:lnB>
+                  </a:tcPr>
+                </a:tc>
+                <a:tc>
+                  <a:txBody>
+                    <a:bodyPr/>
+                    <a:lstStyle/>
+                    <a:p>
+                      <a:pPr indent="0" marL="0">
+                        <a:buNone/>
+                      </a:pPr>
+                      <a:r>
+                        <a:rPr lang="en-US" sz="950" b="1" dirty="0">
+                          <a:solidFill>
+                            <a:srgbClr val="16305B"/>
+                          </a:solidFill>
+                          <a:latin typeface="Malgun Gothic" pitchFamily="34" charset="0"/>
+                          <a:ea typeface="Malgun Gothic" pitchFamily="34" charset="-122"/>
+                          <a:cs typeface="Malgun Gothic" pitchFamily="34" charset="-120"/>
+                        </a:rPr>
+                        <a:t>핀 개수 따라 자동 계산</a:t>
+                      </a:r>
+                      <a:endParaRPr lang="en-US" sz="950" dirty="0">
+                        <a:latin typeface="Malgun Gothic" charset="0"/>
+                        <a:ea typeface="Malgun Gothic" charset="0"/>
+                        <a:cs typeface="Malgun Gothic" charset="0"/>
+                      </a:endParaRPr>
+                    </a:p>
+                  </a:txBody>
+                  <a:tcPr marL="50800" marR="50800" marT="25400" marB="25400" anchor="ctr">
+                    <a:lnL w="0" cap="flat" cmpd="sng" algn="ctr">
+                      <a:noFill/>
+                    </a:lnL>
+                    <a:lnR w="0" cap="flat" cmpd="sng" algn="ctr">
+                      <a:noFill/>
+                    </a:lnR>
+                    <a:lnT w="0" cap="flat" cmpd="sng" algn="ctr">
+                      <a:noFill/>
+                    </a:lnT>
+                    <a:lnB w="6350" cap="flat" cmpd="sng" algn="ctr">
+                      <a:solidFill>
+                        <a:srgbClr val="DDE3EB"/>
+                      </a:solidFill>
+                      <a:prstDash val="solid"/>
+                      <a:round/>
+                      <a:headEnd type="none" w="med" len="med"/>
+                      <a:tailEnd type="none" w="med" len="med"/>
+                    </a:lnB>
+                  </a:tcPr>
+                </a:tc>
+              </a:tr>
+              <a:tr h="292608">
+                <a:tc>
+                  <a:txBody>
+                    <a:bodyPr/>
+                    <a:lstStyle/>
+                    <a:p>
+                      <a:pPr indent="0" marL="0">
+                        <a:buNone/>
+                      </a:pPr>
+                      <a:r>
+                        <a:rPr lang="en-US" sz="950" dirty="0">
+                          <a:solidFill>
+                            <a:srgbClr val="1C2733"/>
+                          </a:solidFill>
+                          <a:latin typeface="Malgun Gothic" pitchFamily="34" charset="0"/>
+                          <a:ea typeface="Malgun Gothic" pitchFamily="34" charset="-122"/>
+                          <a:cs typeface="Malgun Gothic" pitchFamily="34" charset="-120"/>
+                        </a:rPr>
+                        <a:t>설정 일관성</a:t>
                       </a:r>
                       <a:endParaRPr lang="en-US" sz="950" dirty="0">
                         <a:latin typeface="Malgun Gothic" charset="0"/>
@@ -24414,56 +26192,7 @@
                           <a:ea typeface="Malgun Gothic" pitchFamily="34" charset="-122"/>
                           <a:cs typeface="Malgun Gothic" pitchFamily="34" charset="-120"/>
                         </a:rPr>
-                        <a:t>1</a:t>
-                      </a:r>
-                      <a:endParaRPr lang="en-US" sz="950" dirty="0">
-                        <a:latin typeface="Malgun Gothic" charset="0"/>
-                        <a:ea typeface="Malgun Gothic" charset="0"/>
-                        <a:cs typeface="Malgun Gothic" charset="0"/>
-                      </a:endParaRPr>
-                    </a:p>
-                  </a:txBody>
-                  <a:tcPr marL="50800" marR="50800" marT="25400" marB="25400" anchor="ctr">
-                    <a:lnL w="0" cap="flat" cmpd="sng" algn="ctr">
-                      <a:noFill/>
-                    </a:lnL>
-                    <a:lnR w="0" cap="flat" cmpd="sng" algn="ctr">
-                      <a:noFill/>
-                    </a:lnR>
-                    <a:lnT w="0" cap="flat" cmpd="sng" algn="ctr">
-                      <a:noFill/>
-                    </a:lnT>
-                    <a:lnB w="6350" cap="flat" cmpd="sng" algn="ctr">
-                      <a:solidFill>
-                        <a:srgbClr val="DDE3EB"/>
-                      </a:solidFill>
-                      <a:prstDash val="solid"/>
-                      <a:round/>
-                      <a:headEnd type="none" w="med" len="med"/>
-                      <a:tailEnd type="none" w="med" len="med"/>
-                    </a:lnB>
-                  </a:tcPr>
-                </a:tc>
-              </a:tr>
-              <a:tr h="347472">
-                <a:tc>
-                  <a:txBody>
-                    <a:bodyPr/>
-                    <a:lstStyle/>
-                    <a:p>
-                      <a:pPr indent="0" marL="0">
-                        <a:buNone/>
-                      </a:pPr>
-                      <a:r>
-                        <a:rPr lang="en-US" sz="950" dirty="0">
-                          <a:solidFill>
-                            <a:srgbClr val="1C2733"/>
-                          </a:solidFill>
-                          <a:latin typeface="Malgun Gothic" pitchFamily="34" charset="0"/>
-                          <a:ea typeface="Malgun Gothic" pitchFamily="34" charset="-122"/>
-                          <a:cs typeface="Malgun Gothic" pitchFamily="34" charset="-120"/>
-                        </a:rPr>
-                        <a:t>1차 통과 유로</a:t>
+                        <a:t>작업자·회차별 편차</a:t>
                       </a:r>
                       <a:endParaRPr lang="en-US" sz="950" dirty="0">
                         <a:latin typeface="Malgun Gothic" charset="0"/>
@@ -24502,7 +26231,337 @@
                         <a:buNone/>
                       </a:pPr>
                       <a:r>
-                        <a:rPr lang="en-US" sz="950" dirty="0">
+                        <a:rPr lang="en-US" sz="950" b="1" dirty="0">
+                          <a:solidFill>
+                            <a:srgbClr val="16305B"/>
+                          </a:solidFill>
+                          <a:latin typeface="Malgun Gothic" pitchFamily="34" charset="0"/>
+                          <a:ea typeface="Malgun Gothic" pitchFamily="34" charset="-122"/>
+                          <a:cs typeface="Malgun Gothic" pitchFamily="34" charset="-120"/>
+                        </a:rPr>
+                        <a:t>전 회차 동일 조건</a:t>
+                      </a:r>
+                      <a:endParaRPr lang="en-US" sz="950" dirty="0">
+                        <a:latin typeface="Malgun Gothic" charset="0"/>
+                        <a:ea typeface="Malgun Gothic" charset="0"/>
+                        <a:cs typeface="Malgun Gothic" charset="0"/>
+                      </a:endParaRPr>
+                    </a:p>
+                  </a:txBody>
+                  <a:tcPr marL="50800" marR="50800" marT="25400" marB="25400" anchor="ctr">
+                    <a:lnL w="0" cap="flat" cmpd="sng" algn="ctr">
+                      <a:noFill/>
+                    </a:lnL>
+                    <a:lnR w="0" cap="flat" cmpd="sng" algn="ctr">
+                      <a:noFill/>
+                    </a:lnR>
+                    <a:lnT w="0" cap="flat" cmpd="sng" algn="ctr">
+                      <a:noFill/>
+                    </a:lnT>
+                    <a:lnB w="6350" cap="flat" cmpd="sng" algn="ctr">
+                      <a:solidFill>
+                        <a:srgbClr val="DDE3EB"/>
+                      </a:solidFill>
+                      <a:prstDash val="solid"/>
+                      <a:round/>
+                      <a:headEnd type="none" w="med" len="med"/>
+                      <a:tailEnd type="none" w="med" len="med"/>
+                    </a:lnB>
+                  </a:tcPr>
+                </a:tc>
+              </a:tr>
+            </a:tbl>
+          </a:graphicData>
+        </a:graphic>
+      </p:graphicFrame>
+      <p:sp>
+        <p:nvSpPr>
+          <p:cNvPr id="33" name="Shape 30"/>
+          <p:cNvSpPr/>
+          <p:nvPr/>
+        </p:nvSpPr>
+        <p:spPr>
+          <a:xfrm>
+            <a:off x="6336792" y="3520440"/>
+            <a:ext cx="5440680" cy="1828800"/>
+          </a:xfrm>
+          <a:prstGeom prst="roundRect">
+            <a:avLst>
+              <a:gd name="adj" fmla="val 3000"/>
+            </a:avLst>
+          </a:prstGeom>
+          <a:solidFill>
+            <a:srgbClr val="FFFFFF"/>
+          </a:solidFill>
+          <a:ln w="9525">
+            <a:solidFill>
+              <a:srgbClr val="DDE3EB"/>
+            </a:solidFill>
+            <a:prstDash val="solid"/>
+          </a:ln>
+          <a:effectLst>
+            <a:outerShdw sx="100000" sy="100000" kx="0" ky="0" algn="bl" rotWithShape="0" blurRad="101600" dist="12700" dir="5400000">
+              <a:srgbClr val="9AA8BC">
+                <a:alpha val="18000"/>
+              </a:srgbClr>
+            </a:outerShdw>
+          </a:effectLst>
+        </p:spPr>
+      </p:sp>
+      <p:sp>
+        <p:nvSpPr>
+          <p:cNvPr id="34" name="Shape 31"/>
+          <p:cNvSpPr/>
+          <p:nvPr/>
+        </p:nvSpPr>
+        <p:spPr>
+          <a:xfrm>
+            <a:off x="6592824" y="3794760"/>
+            <a:ext cx="82296" cy="182880"/>
+          </a:xfrm>
+          <a:prstGeom prst="rect">
+            <a:avLst/>
+          </a:prstGeom>
+          <a:solidFill>
+            <a:srgbClr val="00A3C4"/>
+          </a:solidFill>
+          <a:ln w="12700">
+            <a:solidFill>
+              <a:srgbClr val="00A3C4"/>
+            </a:solidFill>
+            <a:prstDash val="solid"/>
+          </a:ln>
+        </p:spPr>
+      </p:sp>
+      <p:sp>
+        <p:nvSpPr>
+          <p:cNvPr id="35" name="Text 32"/>
+          <p:cNvSpPr txBox="1"/>
+          <p:nvPr/>
+        </p:nvSpPr>
+        <p:spPr>
+          <a:xfrm>
+            <a:off x="6757416" y="3703320"/>
+            <a:ext cx="4480560" cy="365760"/>
+          </a:xfrm>
+          <a:prstGeom prst="rect">
+            <a:avLst/>
+          </a:prstGeom>
+          <a:noFill/>
+          <a:ln/>
+        </p:spPr>
+        <p:txBody>
+          <a:bodyPr wrap="square" lIns="0" tIns="0" rIns="0" bIns="0" rtlCol="0" anchor="ctr"/>
+          <a:lstStyle/>
+          <a:p>
+            <a:pPr indent="0" marL="0">
+              <a:buNone/>
+            </a:pPr>
+            <a:r>
+              <a:rPr lang="en-US" sz="1300" b="1" dirty="0">
+                <a:solidFill>
+                  <a:srgbClr val="16305B"/>
+                </a:solidFill>
+                <a:latin typeface="Malgun Gothic" pitchFamily="34" charset="0"/>
+                <a:ea typeface="Malgun Gothic" pitchFamily="34" charset="-122"/>
+                <a:cs typeface="Malgun Gothic" pitchFamily="34" charset="-120"/>
+              </a:rPr>
+              <a:t>측정 항목 및 결과 출력</a:t>
+            </a:r>
+            <a:endParaRPr lang="en-US" sz="1300" dirty="0"/>
+          </a:p>
+        </p:txBody>
+      </p:sp>
+      <p:graphicFrame>
+        <p:nvGraphicFramePr>
+          <p:cNvPr id="19" name="Table 1"/>
+          <p:cNvGraphicFramePr>
+            <a:graphicFrameLocks noGrp="1"/>
+          </p:cNvGraphicFramePr>
+          <p:nvPr>
+            <p:extLst>
+              <p:ext uri="{D42A27DB-BD31-4B8C-83A1-F6EECF244321}">
+                <p14:modId xmlns:p14="http://schemas.microsoft.com/office/powerpoint/2010/main" val="1579011935"/>
+              </p:ext>
+            </p:extLst>
+          </p:nvPr>
+        </p:nvGraphicFramePr>
+        <p:xfrm>
+          <a:off x="6647688" y="4123944"/>
+          <a:ext cx="4846320" cy="914400"/>
+        </p:xfrm>
+        <a:graphic>
+          <a:graphicData uri="http://schemas.openxmlformats.org/drawingml/2006/table">
+            <a:tbl>
+              <a:tblPr/>
+              <a:tblGrid>
+                <a:gridCol w="1737360"/>
+                <a:gridCol w="1554480"/>
+                <a:gridCol w="1554480"/>
+              </a:tblGrid>
+              <a:tr h="237744">
+                <a:tc>
+                  <a:txBody>
+                    <a:bodyPr/>
+                    <a:lstStyle/>
+                    <a:p>
+                      <a:pPr indent="0" marL="0">
+                        <a:buNone/>
+                      </a:pPr>
+                      <a:r>
+                        <a:rPr lang="en-US" sz="900" b="1" dirty="0">
+                          <a:solidFill>
+                            <a:srgbClr val="16305B"/>
+                          </a:solidFill>
+                          <a:latin typeface="Malgun Gothic" pitchFamily="34" charset="0"/>
+                          <a:ea typeface="Malgun Gothic" pitchFamily="34" charset="-122"/>
+                          <a:cs typeface="Malgun Gothic" pitchFamily="34" charset="-120"/>
+                        </a:rPr>
+                        <a:t>측정 대상</a:t>
+                      </a:r>
+                      <a:endParaRPr lang="en-US" sz="900" dirty="0">
+                        <a:latin typeface="Malgun Gothic" charset="0"/>
+                        <a:ea typeface="Malgun Gothic" charset="0"/>
+                        <a:cs typeface="Malgun Gothic" charset="0"/>
+                      </a:endParaRPr>
+                    </a:p>
+                  </a:txBody>
+                  <a:tcPr marL="50800" marR="50800" marT="25400" marB="25400" anchor="ctr">
+                    <a:lnL w="0" cap="flat" cmpd="sng" algn="ctr">
+                      <a:noFill/>
+                    </a:lnL>
+                    <a:lnR w="0" cap="flat" cmpd="sng" algn="ctr">
+                      <a:noFill/>
+                    </a:lnR>
+                    <a:lnT w="0" cap="flat" cmpd="sng" algn="ctr">
+                      <a:noFill/>
+                    </a:lnT>
+                    <a:lnB w="6350" cap="flat" cmpd="sng" algn="ctr">
+                      <a:solidFill>
+                        <a:srgbClr val="DDE3EB"/>
+                      </a:solidFill>
+                      <a:prstDash val="solid"/>
+                      <a:round/>
+                      <a:headEnd type="none" w="med" len="med"/>
+                      <a:tailEnd type="none" w="med" len="med"/>
+                    </a:lnB>
+                    <a:solidFill>
+                      <a:srgbClr val="EEF2F7"/>
+                    </a:solidFill>
+                  </a:tcPr>
+                </a:tc>
+                <a:tc>
+                  <a:txBody>
+                    <a:bodyPr/>
+                    <a:lstStyle/>
+                    <a:p>
+                      <a:pPr indent="0" marL="0">
+                        <a:buNone/>
+                      </a:pPr>
+                      <a:r>
+                        <a:rPr lang="en-US" sz="900" b="1" dirty="0">
+                          <a:solidFill>
+                            <a:srgbClr val="16305B"/>
+                          </a:solidFill>
+                          <a:latin typeface="Malgun Gothic" pitchFamily="34" charset="0"/>
+                          <a:ea typeface="Malgun Gothic" pitchFamily="34" charset="-122"/>
+                          <a:cs typeface="Malgun Gothic" pitchFamily="34" charset="-120"/>
+                        </a:rPr>
+                        <a:t>항목</a:t>
+                      </a:r>
+                      <a:endParaRPr lang="en-US" sz="900" dirty="0">
+                        <a:latin typeface="Malgun Gothic" charset="0"/>
+                        <a:ea typeface="Malgun Gothic" charset="0"/>
+                        <a:cs typeface="Malgun Gothic" charset="0"/>
+                      </a:endParaRPr>
+                    </a:p>
+                  </a:txBody>
+                  <a:tcPr marL="50800" marR="50800" marT="25400" marB="25400" anchor="ctr">
+                    <a:lnL w="0" cap="flat" cmpd="sng" algn="ctr">
+                      <a:noFill/>
+                    </a:lnL>
+                    <a:lnR w="0" cap="flat" cmpd="sng" algn="ctr">
+                      <a:noFill/>
+                    </a:lnR>
+                    <a:lnT w="0" cap="flat" cmpd="sng" algn="ctr">
+                      <a:noFill/>
+                    </a:lnT>
+                    <a:lnB w="6350" cap="flat" cmpd="sng" algn="ctr">
+                      <a:solidFill>
+                        <a:srgbClr val="DDE3EB"/>
+                      </a:solidFill>
+                      <a:prstDash val="solid"/>
+                      <a:round/>
+                      <a:headEnd type="none" w="med" len="med"/>
+                      <a:tailEnd type="none" w="med" len="med"/>
+                    </a:lnB>
+                    <a:solidFill>
+                      <a:srgbClr val="EEF2F7"/>
+                    </a:solidFill>
+                  </a:tcPr>
+                </a:tc>
+                <a:tc>
+                  <a:txBody>
+                    <a:bodyPr/>
+                    <a:lstStyle/>
+                    <a:p>
+                      <a:pPr indent="0" marL="0">
+                        <a:buNone/>
+                      </a:pPr>
+                      <a:r>
+                        <a:rPr lang="en-US" sz="900" b="1" dirty="0">
+                          <a:solidFill>
+                            <a:srgbClr val="16305B"/>
+                          </a:solidFill>
+                          <a:latin typeface="Malgun Gothic" pitchFamily="34" charset="0"/>
+                          <a:ea typeface="Malgun Gothic" pitchFamily="34" charset="-122"/>
+                          <a:cs typeface="Malgun Gothic" pitchFamily="34" charset="-120"/>
+                        </a:rPr>
+                        <a:t>개수</a:t>
+                      </a:r>
+                      <a:endParaRPr lang="en-US" sz="900" dirty="0">
+                        <a:latin typeface="Malgun Gothic" charset="0"/>
+                        <a:ea typeface="Malgun Gothic" charset="0"/>
+                        <a:cs typeface="Malgun Gothic" charset="0"/>
+                      </a:endParaRPr>
+                    </a:p>
+                  </a:txBody>
+                  <a:tcPr marL="50800" marR="50800" marT="25400" marB="25400" anchor="ctr">
+                    <a:lnL w="0" cap="flat" cmpd="sng" algn="ctr">
+                      <a:noFill/>
+                    </a:lnL>
+                    <a:lnR w="0" cap="flat" cmpd="sng" algn="ctr">
+                      <a:noFill/>
+                    </a:lnR>
+                    <a:lnT w="0" cap="flat" cmpd="sng" algn="ctr">
+                      <a:noFill/>
+                    </a:lnT>
+                    <a:lnB w="6350" cap="flat" cmpd="sng" algn="ctr">
+                      <a:solidFill>
+                        <a:srgbClr val="DDE3EB"/>
+                      </a:solidFill>
+                      <a:prstDash val="solid"/>
+                      <a:round/>
+                      <a:headEnd type="none" w="med" len="med"/>
+                      <a:tailEnd type="none" w="med" len="med"/>
+                    </a:lnB>
+                    <a:solidFill>
+                      <a:srgbClr val="EEF2F7"/>
+                    </a:solidFill>
+                  </a:tcPr>
+                </a:tc>
+              </a:tr>
+              <a:tr h="237744">
+                <a:tc>
+                  <a:txBody>
+                    <a:bodyPr/>
+                    <a:lstStyle/>
+                    <a:p>
+                      <a:pPr indent="0" marL="0">
+                        <a:buNone/>
+                      </a:pPr>
+                      <a:r>
+                        <a:rPr lang="en-US" sz="900" dirty="0">
                           <a:solidFill>
                             <a:srgbClr val="1C2733"/>
                           </a:solidFill>
@@ -24510,9 +26569,9 @@
                           <a:ea typeface="Malgun Gothic" pitchFamily="34" charset="-122"/>
                           <a:cs typeface="Malgun Gothic" pitchFamily="34" charset="-120"/>
                         </a:rPr>
-                        <a:t>유량</a:t>
+                        <a:t>발열원</a:t>
                       </a:r>
-                      <a:endParaRPr lang="en-US" sz="950" dirty="0">
+                      <a:endParaRPr lang="en-US" sz="900" dirty="0">
                         <a:latin typeface="Malgun Gothic" charset="0"/>
                         <a:ea typeface="Malgun Gothic" charset="0"/>
                         <a:cs typeface="Malgun Gothic" charset="0"/>
@@ -24549,7 +26608,7 @@
                         <a:buNone/>
                       </a:pPr>
                       <a:r>
-                        <a:rPr lang="en-US" sz="950" dirty="0">
+                        <a:rPr lang="en-US" sz="900" dirty="0">
                           <a:solidFill>
                             <a:srgbClr val="1C2733"/>
                           </a:solidFill>
@@ -24557,58 +26616,9 @@
                           <a:ea typeface="Malgun Gothic" pitchFamily="34" charset="-122"/>
                           <a:cs typeface="Malgun Gothic" pitchFamily="34" charset="-120"/>
                         </a:rPr>
-                        <a:t>핀 개수 + 1</a:t>
+                        <a:t>최고 · 평균 온도</a:t>
                       </a:r>
-                      <a:endParaRPr lang="en-US" sz="950" dirty="0">
-                        <a:latin typeface="Malgun Gothic" charset="0"/>
-                        <a:ea typeface="Malgun Gothic" charset="0"/>
-                        <a:cs typeface="Malgun Gothic" charset="0"/>
-                      </a:endParaRPr>
-                    </a:p>
-                  </a:txBody>
-                  <a:tcPr marL="50800" marR="50800" marT="25400" marB="25400" anchor="ctr">
-                    <a:lnL w="0" cap="flat" cmpd="sng" algn="ctr">
-                      <a:noFill/>
-                    </a:lnL>
-                    <a:lnR w="0" cap="flat" cmpd="sng" algn="ctr">
-                      <a:noFill/>
-                    </a:lnR>
-                    <a:lnT w="0" cap="flat" cmpd="sng" algn="ctr">
-                      <a:noFill/>
-                    </a:lnT>
-                    <a:lnB w="6350" cap="flat" cmpd="sng" algn="ctr">
-                      <a:solidFill>
-                        <a:srgbClr val="DDE3EB"/>
-                      </a:solidFill>
-                      <a:prstDash val="solid"/>
-                      <a:round/>
-                      <a:headEnd type="none" w="med" len="med"/>
-                      <a:tailEnd type="none" w="med" len="med"/>
-                    </a:lnB>
-                  </a:tcPr>
-                </a:tc>
-              </a:tr>
-              <a:tr h="347472">
-                <a:tc>
-                  <a:txBody>
-                    <a:bodyPr/>
-                    <a:lstStyle/>
-                    <a:p>
-                      <a:pPr indent="0" marL="0">
-                        <a:buNone/>
-                      </a:pPr>
-                      <a:r>
-                        <a:rPr lang="en-US" sz="950" dirty="0">
-                          <a:solidFill>
-                            <a:srgbClr val="1C2733"/>
-                          </a:solidFill>
-                          <a:latin typeface="Malgun Gothic" pitchFamily="34" charset="0"/>
-                          <a:ea typeface="Malgun Gothic" pitchFamily="34" charset="-122"/>
-                          <a:cs typeface="Malgun Gothic" pitchFamily="34" charset="-120"/>
-                        </a:rPr>
-                        <a:t>2차 통과 유로</a:t>
-                      </a:r>
-                      <a:endParaRPr lang="en-US" sz="950" dirty="0">
+                      <a:endParaRPr lang="en-US" sz="900" dirty="0">
                         <a:latin typeface="Malgun Gothic" charset="0"/>
                         <a:ea typeface="Malgun Gothic" charset="0"/>
                         <a:cs typeface="Malgun Gothic" charset="0"/>
@@ -24645,7 +26655,7 @@
                         <a:buNone/>
                       </a:pPr>
                       <a:r>
-                        <a:rPr lang="en-US" sz="950" dirty="0">
+                        <a:rPr lang="en-US" sz="900" dirty="0">
                           <a:solidFill>
                             <a:srgbClr val="1C2733"/>
                           </a:solidFill>
@@ -24653,9 +26663,58 @@
                           <a:ea typeface="Malgun Gothic" pitchFamily="34" charset="-122"/>
                           <a:cs typeface="Malgun Gothic" pitchFamily="34" charset="-120"/>
                         </a:rPr>
-                        <a:t>유량</a:t>
+                        <a:t>9</a:t>
                       </a:r>
-                      <a:endParaRPr lang="en-US" sz="950" dirty="0">
+                      <a:endParaRPr lang="en-US" sz="900" dirty="0">
+                        <a:latin typeface="Malgun Gothic" charset="0"/>
+                        <a:ea typeface="Malgun Gothic" charset="0"/>
+                        <a:cs typeface="Malgun Gothic" charset="0"/>
+                      </a:endParaRPr>
+                    </a:p>
+                  </a:txBody>
+                  <a:tcPr marL="50800" marR="50800" marT="25400" marB="25400" anchor="ctr">
+                    <a:lnL w="0" cap="flat" cmpd="sng" algn="ctr">
+                      <a:noFill/>
+                    </a:lnL>
+                    <a:lnR w="0" cap="flat" cmpd="sng" algn="ctr">
+                      <a:noFill/>
+                    </a:lnR>
+                    <a:lnT w="0" cap="flat" cmpd="sng" algn="ctr">
+                      <a:noFill/>
+                    </a:lnT>
+                    <a:lnB w="6350" cap="flat" cmpd="sng" algn="ctr">
+                      <a:solidFill>
+                        <a:srgbClr val="DDE3EB"/>
+                      </a:solidFill>
+                      <a:prstDash val="solid"/>
+                      <a:round/>
+                      <a:headEnd type="none" w="med" len="med"/>
+                      <a:tailEnd type="none" w="med" len="med"/>
+                    </a:lnB>
+                  </a:tcPr>
+                </a:tc>
+              </a:tr>
+              <a:tr h="237744">
+                <a:tc>
+                  <a:txBody>
+                    <a:bodyPr/>
+                    <a:lstStyle/>
+                    <a:p>
+                      <a:pPr indent="0" marL="0">
+                        <a:buNone/>
+                      </a:pPr>
+                      <a:r>
+                        <a:rPr lang="en-US" sz="900" dirty="0">
+                          <a:solidFill>
+                            <a:srgbClr val="1C2733"/>
+                          </a:solidFill>
+                          <a:latin typeface="Malgun Gothic" pitchFamily="34" charset="0"/>
+                          <a:ea typeface="Malgun Gothic" pitchFamily="34" charset="-122"/>
+                          <a:cs typeface="Malgun Gothic" pitchFamily="34" charset="-120"/>
+                        </a:rPr>
+                        <a:t>팬 통과면</a:t>
+                      </a:r>
+                      <a:endParaRPr lang="en-US" sz="900" dirty="0">
                         <a:latin typeface="Malgun Gothic" charset="0"/>
                         <a:ea typeface="Malgun Gothic" charset="0"/>
                         <a:cs typeface="Malgun Gothic" charset="0"/>
@@ -24692,7 +26751,7 @@
                         <a:buNone/>
                       </a:pPr>
                       <a:r>
-                        <a:rPr lang="en-US" sz="950" dirty="0">
+                        <a:rPr lang="en-US" sz="900" dirty="0">
                           <a:solidFill>
                             <a:srgbClr val="1C2733"/>
                           </a:solidFill>
@@ -24700,58 +26759,9 @@
                           <a:ea typeface="Malgun Gothic" pitchFamily="34" charset="-122"/>
                           <a:cs typeface="Malgun Gothic" pitchFamily="34" charset="-120"/>
                         </a:rPr>
-                        <a:t>핀 개수 + 1</a:t>
+                        <a:t>차압</a:t>
                       </a:r>
-                      <a:endParaRPr lang="en-US" sz="950" dirty="0">
-                        <a:latin typeface="Malgun Gothic" charset="0"/>
-                        <a:ea typeface="Malgun Gothic" charset="0"/>
-                        <a:cs typeface="Malgun Gothic" charset="0"/>
-                      </a:endParaRPr>
-                    </a:p>
-                  </a:txBody>
-                  <a:tcPr marL="50800" marR="50800" marT="25400" marB="25400" anchor="ctr">
-                    <a:lnL w="0" cap="flat" cmpd="sng" algn="ctr">
-                      <a:noFill/>
-                    </a:lnL>
-                    <a:lnR w="0" cap="flat" cmpd="sng" algn="ctr">
-                      <a:noFill/>
-                    </a:lnR>
-                    <a:lnT w="0" cap="flat" cmpd="sng" algn="ctr">
-                      <a:noFill/>
-                    </a:lnT>
-                    <a:lnB w="6350" cap="flat" cmpd="sng" algn="ctr">
-                      <a:solidFill>
-                        <a:srgbClr val="DDE3EB"/>
-                      </a:solidFill>
-                      <a:prstDash val="solid"/>
-                      <a:round/>
-                      <a:headEnd type="none" w="med" len="med"/>
-                      <a:tailEnd type="none" w="med" len="med"/>
-                    </a:lnB>
-                  </a:tcPr>
-                </a:tc>
-              </a:tr>
-              <a:tr h="347472">
-                <a:tc>
-                  <a:txBody>
-                    <a:bodyPr/>
-                    <a:lstStyle/>
-                    <a:p>
-                      <a:pPr indent="0" marL="0">
-                        <a:buNone/>
-                      </a:pPr>
-                      <a:r>
-                        <a:rPr lang="en-US" sz="950" dirty="0">
-                          <a:solidFill>
-                            <a:srgbClr val="1C2733"/>
-                          </a:solidFill>
-                          <a:latin typeface="Malgun Gothic" pitchFamily="34" charset="0"/>
-                          <a:ea typeface="Malgun Gothic" pitchFamily="34" charset="-122"/>
-                          <a:cs typeface="Malgun Gothic" pitchFamily="34" charset="-120"/>
-                        </a:rPr>
-                        <a:t>전원모듈 분기 입구</a:t>
-                      </a:r>
-                      <a:endParaRPr lang="en-US" sz="950" dirty="0">
+                      <a:endParaRPr lang="en-US" sz="900" dirty="0">
                         <a:latin typeface="Malgun Gothic" charset="0"/>
                         <a:ea typeface="Malgun Gothic" charset="0"/>
                         <a:cs typeface="Malgun Gothic" charset="0"/>
@@ -24788,7 +26798,7 @@
                         <a:buNone/>
                       </a:pPr>
                       <a:r>
-                        <a:rPr lang="en-US" sz="950" dirty="0">
+                        <a:rPr lang="en-US" sz="900" dirty="0">
                           <a:solidFill>
                             <a:srgbClr val="1C2733"/>
                           </a:solidFill>
@@ -24796,9 +26806,58 @@
                           <a:ea typeface="Malgun Gothic" pitchFamily="34" charset="-122"/>
                           <a:cs typeface="Malgun Gothic" pitchFamily="34" charset="-120"/>
                         </a:rPr>
-                        <a:t>유량</a:t>
+                        <a:t>1</a:t>
                       </a:r>
-                      <a:endParaRPr lang="en-US" sz="950" dirty="0">
+                      <a:endParaRPr lang="en-US" sz="900" dirty="0">
+                        <a:latin typeface="Malgun Gothic" charset="0"/>
+                        <a:ea typeface="Malgun Gothic" charset="0"/>
+                        <a:cs typeface="Malgun Gothic" charset="0"/>
+                      </a:endParaRPr>
+                    </a:p>
+                  </a:txBody>
+                  <a:tcPr marL="50800" marR="50800" marT="25400" marB="25400" anchor="ctr">
+                    <a:lnL w="0" cap="flat" cmpd="sng" algn="ctr">
+                      <a:noFill/>
+                    </a:lnL>
+                    <a:lnR w="0" cap="flat" cmpd="sng" algn="ctr">
+                      <a:noFill/>
+                    </a:lnR>
+                    <a:lnT w="0" cap="flat" cmpd="sng" algn="ctr">
+                      <a:noFill/>
+                    </a:lnT>
+                    <a:lnB w="6350" cap="flat" cmpd="sng" algn="ctr">
+                      <a:solidFill>
+                        <a:srgbClr val="DDE3EB"/>
+                      </a:solidFill>
+                      <a:prstDash val="solid"/>
+                      <a:round/>
+                      <a:headEnd type="none" w="med" len="med"/>
+                      <a:tailEnd type="none" w="med" len="med"/>
+                    </a:lnB>
+                  </a:tcPr>
+                </a:tc>
+              </a:tr>
+              <a:tr h="237744">
+                <a:tc>
+                  <a:txBody>
+                    <a:bodyPr/>
+                    <a:lstStyle/>
+                    <a:p>
+                      <a:pPr indent="0" marL="0">
+                        <a:buNone/>
+                      </a:pPr>
+                      <a:r>
+                        <a:rPr lang="en-US" sz="900" dirty="0">
+                          <a:solidFill>
+                            <a:srgbClr val="1C2733"/>
+                          </a:solidFill>
+                          <a:latin typeface="Malgun Gothic" pitchFamily="34" charset="0"/>
+                          <a:ea typeface="Malgun Gothic" pitchFamily="34" charset="-122"/>
+                          <a:cs typeface="Malgun Gothic" pitchFamily="34" charset="-120"/>
+                        </a:rPr>
+                        <a:t>1·2차 통과 유로</a:t>
+                      </a:r>
+                      <a:endParaRPr lang="en-US" sz="900" dirty="0">
                         <a:latin typeface="Malgun Gothic" charset="0"/>
                         <a:ea typeface="Malgun Gothic" charset="0"/>
                         <a:cs typeface="Malgun Gothic" charset="0"/>
@@ -24835,7 +26894,197 @@
                         <a:buNone/>
                       </a:pPr>
                       <a:r>
-                        <a:rPr lang="en-US" sz="950" dirty="0">
+                        <a:rPr lang="en-US" sz="900" dirty="0">
+                          <a:solidFill>
+                            <a:srgbClr val="1C2733"/>
+                          </a:solidFill>
+                          <a:latin typeface="Malgun Gothic" pitchFamily="34" charset="0"/>
+                          <a:ea typeface="Malgun Gothic" pitchFamily="34" charset="-122"/>
+                          <a:cs typeface="Malgun Gothic" pitchFamily="34" charset="-120"/>
+                        </a:rPr>
+                        <a:t>유량</a:t>
+                      </a:r>
+                      <a:endParaRPr lang="en-US" sz="900" dirty="0">
+                        <a:latin typeface="Malgun Gothic" charset="0"/>
+                        <a:ea typeface="Malgun Gothic" charset="0"/>
+                        <a:cs typeface="Malgun Gothic" charset="0"/>
+                      </a:endParaRPr>
+                    </a:p>
+                  </a:txBody>
+                  <a:tcPr marL="50800" marR="50800" marT="25400" marB="25400" anchor="ctr">
+                    <a:lnL w="0" cap="flat" cmpd="sng" algn="ctr">
+                      <a:noFill/>
+                    </a:lnL>
+                    <a:lnR w="0" cap="flat" cmpd="sng" algn="ctr">
+                      <a:noFill/>
+                    </a:lnR>
+                    <a:lnT w="0" cap="flat" cmpd="sng" algn="ctr">
+                      <a:noFill/>
+                    </a:lnT>
+                    <a:lnB w="6350" cap="flat" cmpd="sng" algn="ctr">
+                      <a:solidFill>
+                        <a:srgbClr val="DDE3EB"/>
+                      </a:solidFill>
+                      <a:prstDash val="solid"/>
+                      <a:round/>
+                      <a:headEnd type="none" w="med" len="med"/>
+                      <a:tailEnd type="none" w="med" len="med"/>
+                    </a:lnB>
+                  </a:tcPr>
+                </a:tc>
+                <a:tc>
+                  <a:txBody>
+                    <a:bodyPr/>
+                    <a:lstStyle/>
+                    <a:p>
+                      <a:pPr indent="0" marL="0">
+                        <a:buNone/>
+                      </a:pPr>
+                      <a:r>
+                        <a:rPr lang="en-US" sz="900" dirty="0">
+                          <a:solidFill>
+                            <a:srgbClr val="1C2733"/>
+                          </a:solidFill>
+                          <a:latin typeface="Malgun Gothic" pitchFamily="34" charset="0"/>
+                          <a:ea typeface="Malgun Gothic" pitchFamily="34" charset="-122"/>
+                          <a:cs typeface="Malgun Gothic" pitchFamily="34" charset="-120"/>
+                        </a:rPr>
+                        <a:t>각 핀 개수 + 1</a:t>
+                      </a:r>
+                      <a:endParaRPr lang="en-US" sz="900" dirty="0">
+                        <a:latin typeface="Malgun Gothic" charset="0"/>
+                        <a:ea typeface="Malgun Gothic" charset="0"/>
+                        <a:cs typeface="Malgun Gothic" charset="0"/>
+                      </a:endParaRPr>
+                    </a:p>
+                  </a:txBody>
+                  <a:tcPr marL="50800" marR="50800" marT="25400" marB="25400" anchor="ctr">
+                    <a:lnL w="0" cap="flat" cmpd="sng" algn="ctr">
+                      <a:noFill/>
+                    </a:lnL>
+                    <a:lnR w="0" cap="flat" cmpd="sng" algn="ctr">
+                      <a:noFill/>
+                    </a:lnR>
+                    <a:lnT w="0" cap="flat" cmpd="sng" algn="ctr">
+                      <a:noFill/>
+                    </a:lnT>
+                    <a:lnB w="6350" cap="flat" cmpd="sng" algn="ctr">
+                      <a:solidFill>
+                        <a:srgbClr val="DDE3EB"/>
+                      </a:solidFill>
+                      <a:prstDash val="solid"/>
+                      <a:round/>
+                      <a:headEnd type="none" w="med" len="med"/>
+                      <a:tailEnd type="none" w="med" len="med"/>
+                    </a:lnB>
+                  </a:tcPr>
+                </a:tc>
+              </a:tr>
+              <a:tr h="237744">
+                <a:tc>
+                  <a:txBody>
+                    <a:bodyPr/>
+                    <a:lstStyle/>
+                    <a:p>
+                      <a:pPr indent="0" marL="0">
+                        <a:buNone/>
+                      </a:pPr>
+                      <a:r>
+                        <a:rPr lang="en-US" sz="900" dirty="0">
+                          <a:solidFill>
+                            <a:srgbClr val="1C2733"/>
+                          </a:solidFill>
+                          <a:latin typeface="Malgun Gothic" pitchFamily="34" charset="0"/>
+                          <a:ea typeface="Malgun Gothic" pitchFamily="34" charset="-122"/>
+                          <a:cs typeface="Malgun Gothic" pitchFamily="34" charset="-120"/>
+                        </a:rPr>
+                        <a:t>전원모듈 분기 입구</a:t>
+                      </a:r>
+                      <a:endParaRPr lang="en-US" sz="900" dirty="0">
+                        <a:latin typeface="Malgun Gothic" charset="0"/>
+                        <a:ea typeface="Malgun Gothic" charset="0"/>
+                        <a:cs typeface="Malgun Gothic" charset="0"/>
+                      </a:endParaRPr>
+                    </a:p>
+                  </a:txBody>
+                  <a:tcPr marL="50800" marR="50800" marT="25400" marB="25400" anchor="ctr">
+                    <a:lnL w="0" cap="flat" cmpd="sng" algn="ctr">
+                      <a:noFill/>
+                    </a:lnL>
+                    <a:lnR w="0" cap="flat" cmpd="sng" algn="ctr">
+                      <a:noFill/>
+                    </a:lnR>
+                    <a:lnT w="0" cap="flat" cmpd="sng" algn="ctr">
+                      <a:noFill/>
+                    </a:lnT>
+                    <a:lnB w="6350" cap="flat" cmpd="sng" algn="ctr">
+                      <a:solidFill>
+                        <a:srgbClr val="DDE3EB"/>
+                      </a:solidFill>
+                      <a:prstDash val="solid"/>
+                      <a:round/>
+                      <a:headEnd type="none" w="med" len="med"/>
+                      <a:tailEnd type="none" w="med" len="med"/>
+                    </a:lnB>
+                  </a:tcPr>
+                </a:tc>
+                <a:tc>
+                  <a:txBody>
+                    <a:bodyPr/>
+                    <a:lstStyle/>
+                    <a:p>
+                      <a:pPr indent="0" marL="0">
+                        <a:buNone/>
+                      </a:pPr>
+                      <a:r>
+                        <a:rPr lang="en-US" sz="900" dirty="0">
+                          <a:solidFill>
+                            <a:srgbClr val="1C2733"/>
+                          </a:solidFill>
+                          <a:latin typeface="Malgun Gothic" pitchFamily="34" charset="0"/>
+                          <a:ea typeface="Malgun Gothic" pitchFamily="34" charset="-122"/>
+                          <a:cs typeface="Malgun Gothic" pitchFamily="34" charset="-120"/>
+                        </a:rPr>
+                        <a:t>유량</a:t>
+                      </a:r>
+                      <a:endParaRPr lang="en-US" sz="900" dirty="0">
+                        <a:latin typeface="Malgun Gothic" charset="0"/>
+                        <a:ea typeface="Malgun Gothic" charset="0"/>
+                        <a:cs typeface="Malgun Gothic" charset="0"/>
+                      </a:endParaRPr>
+                    </a:p>
+                  </a:txBody>
+                  <a:tcPr marL="50800" marR="50800" marT="25400" marB="25400" anchor="ctr">
+                    <a:lnL w="0" cap="flat" cmpd="sng" algn="ctr">
+                      <a:noFill/>
+                    </a:lnL>
+                    <a:lnR w="0" cap="flat" cmpd="sng" algn="ctr">
+                      <a:noFill/>
+                    </a:lnR>
+                    <a:lnT w="0" cap="flat" cmpd="sng" algn="ctr">
+                      <a:noFill/>
+                    </a:lnT>
+                    <a:lnB w="6350" cap="flat" cmpd="sng" algn="ctr">
+                      <a:solidFill>
+                        <a:srgbClr val="DDE3EB"/>
+                      </a:solidFill>
+                      <a:prstDash val="solid"/>
+                      <a:round/>
+                      <a:headEnd type="none" w="med" len="med"/>
+                      <a:tailEnd type="none" w="med" len="med"/>
+                    </a:lnB>
+                  </a:tcPr>
+                </a:tc>
+                <a:tc>
+                  <a:txBody>
+                    <a:bodyPr/>
+                    <a:lstStyle/>
+                    <a:p>
+                      <a:pPr indent="0" marL="0">
+                        <a:buNone/>
+                      </a:pPr>
+                      <a:r>
+                        <a:rPr lang="en-US" sz="900" dirty="0">
                           <a:solidFill>
                             <a:srgbClr val="1C2733"/>
                           </a:solidFill>
@@ -24845,7 +27094,7 @@
                         </a:rPr>
                         <a:t>1</a:t>
                       </a:r>
-                      <a:endParaRPr lang="en-US" sz="950" dirty="0">
+                      <a:endParaRPr lang="en-US" sz="900" dirty="0">
                         <a:latin typeface="Malgun Gothic" charset="0"/>
                         <a:ea typeface="Malgun Gothic" charset="0"/>
                         <a:cs typeface="Malgun Gothic" charset="0"/>
@@ -24880,135 +27129,7 @@
       </p:graphicFrame>
       <p:sp>
         <p:nvSpPr>
-          <p:cNvPr id="47" name="Shape 44"/>
-          <p:cNvSpPr/>
-          <p:nvPr/>
-        </p:nvSpPr>
-        <p:spPr>
-          <a:xfrm>
-            <a:off x="6647688" y="4160520"/>
-            <a:ext cx="4846320" cy="713232"/>
-          </a:xfrm>
-          <a:prstGeom prst="roundRect">
-            <a:avLst>
-              <a:gd name="adj" fmla="val 7692"/>
-            </a:avLst>
-          </a:prstGeom>
-          <a:solidFill>
-            <a:srgbClr val="EEF2F7"/>
-          </a:solidFill>
-          <a:ln w="12700">
-            <a:solidFill>
-              <a:srgbClr val="EEF2F7"/>
-            </a:solidFill>
-            <a:prstDash val="solid"/>
-          </a:ln>
-        </p:spPr>
-      </p:sp>
-      <p:sp>
-        <p:nvSpPr>
-          <p:cNvPr id="48" name="Text 45"/>
-          <p:cNvSpPr txBox="1"/>
-          <p:nvPr/>
-        </p:nvSpPr>
-        <p:spPr>
-          <a:xfrm>
-            <a:off x="6775704" y="4160520"/>
-            <a:ext cx="4617720" cy="713232"/>
-          </a:xfrm>
-          <a:prstGeom prst="rect">
-            <a:avLst/>
-          </a:prstGeom>
-          <a:noFill/>
-          <a:ln/>
-        </p:spPr>
-        <p:txBody>
-          <a:bodyPr wrap="square" lIns="0" tIns="0" rIns="0" bIns="0" rtlCol="0" anchor="ctr"/>
-          <a:lstStyle/>
-          <a:p>
-            <a:pPr indent="0" marL="0">
-              <a:lnSpc>
-                <a:spcPct val="130000"/>
-              </a:lnSpc>
-              <a:buNone/>
-            </a:pPr>
-            <a:r>
-              <a:rPr lang="en-US" sz="950" b="1" dirty="0">
-                <a:solidFill>
-                  <a:srgbClr val="16305B"/>
-                </a:solidFill>
-                <a:latin typeface="Malgun Gothic" pitchFamily="34" charset="0"/>
-                <a:ea typeface="Malgun Gothic" pitchFamily="34" charset="-122"/>
-                <a:cs typeface="Malgun Gothic" pitchFamily="34" charset="-120"/>
-              </a:rPr>
-              <a:t>측정 순서 = 결과 CSV 행 순서</a:t>
-            </a:r>
-            <a:endParaRPr lang="en-US" sz="950" dirty="0"/>
-          </a:p>
-          <a:p>
-            <a:pPr indent="0" marL="0">
-              <a:lnSpc>
-                <a:spcPct val="130000"/>
-              </a:lnSpc>
-              <a:buNone/>
-            </a:pPr>
-            <a:r>
-              <a:rPr lang="en-US" sz="950" dirty="0">
-                <a:solidFill>
-                  <a:srgbClr val="1C2733"/>
-                </a:solidFill>
-                <a:latin typeface="Malgun Gothic" pitchFamily="34" charset="0"/>
-                <a:ea typeface="Malgun Gothic" pitchFamily="34" charset="-122"/>
-                <a:cs typeface="Malgun Gothic" pitchFamily="34" charset="-120"/>
-              </a:rPr>
-              <a:t>해석 완료 후 Fields Summary로 일괄 추출 → 파싱 모듈이 행 순서대로 해석</a:t>
-            </a:r>
-            <a:endParaRPr lang="en-US" sz="950" dirty="0"/>
-          </a:p>
-        </p:txBody>
-      </p:sp>
-      <p:sp>
-        <p:nvSpPr>
-          <p:cNvPr id="49" name="Text 46"/>
-          <p:cNvSpPr txBox="1"/>
-          <p:nvPr/>
-        </p:nvSpPr>
-        <p:spPr>
-          <a:xfrm>
-            <a:off x="6647688" y="4956048"/>
-            <a:ext cx="4846320" cy="237744"/>
-          </a:xfrm>
-          <a:prstGeom prst="rect">
-            <a:avLst/>
-          </a:prstGeom>
-          <a:noFill/>
-          <a:ln/>
-        </p:spPr>
-        <p:txBody>
-          <a:bodyPr wrap="square" lIns="0" tIns="0" rIns="0" bIns="0" rtlCol="0" anchor="ctr"/>
-          <a:lstStyle/>
-          <a:p>
-            <a:pPr indent="0" marL="0">
-              <a:buNone/>
-            </a:pPr>
-            <a:r>
-              <a:rPr lang="en-US" sz="900" i="1" dirty="0">
-                <a:solidFill>
-                  <a:srgbClr val="6B7A8F"/>
-                </a:solidFill>
-                <a:latin typeface="Malgun Gothic" pitchFamily="34" charset="0"/>
-                <a:ea typeface="Malgun Gothic" pitchFamily="34" charset="-122"/>
-                <a:cs typeface="Malgun Gothic" pitchFamily="34" charset="-120"/>
-              </a:rPr>
-              <a:t>※ 주요 코드는 부록 A-2 참고</a:t>
-            </a:r>
-            <a:endParaRPr lang="en-US" sz="900" dirty="0"/>
-          </a:p>
-        </p:txBody>
-      </p:sp>
-      <p:sp>
-        <p:nvSpPr>
-          <p:cNvPr id="50" name="Shape 47"/>
+          <p:cNvPr id="37" name="Shape 33"/>
           <p:cNvSpPr/>
           <p:nvPr/>
         </p:nvSpPr>
@@ -25042,7 +27163,7 @@
       </p:sp>
       <p:sp>
         <p:nvSpPr>
-          <p:cNvPr id="51" name="Shape 48"/>
+          <p:cNvPr id="38" name="Shape 34"/>
           <p:cNvSpPr/>
           <p:nvPr/>
         </p:nvSpPr>
@@ -25067,7 +27188,7 @@
       </p:sp>
       <p:sp>
         <p:nvSpPr>
-          <p:cNvPr id="52" name="Text 49"/>
+          <p:cNvPr id="39" name="Text 35"/>
           <p:cNvSpPr txBox="1"/>
           <p:nvPr/>
         </p:nvSpPr>
@@ -25106,7 +27227,7 @@
       </p:sp>
       <p:sp>
         <p:nvSpPr>
-          <p:cNvPr id="53" name="Text 50"/>
+          <p:cNvPr id="40" name="Text 36"/>
           <p:cNvSpPr txBox="1"/>
           <p:nvPr/>
         </p:nvSpPr>
@@ -25145,7 +27266,7 @@
       </p:sp>
       <p:sp>
         <p:nvSpPr>
-          <p:cNvPr id="54" name="Shape 51"/>
+          <p:cNvPr id="41" name="Shape 37"/>
           <p:cNvSpPr/>
           <p:nvPr/>
         </p:nvSpPr>
@@ -25170,7 +27291,7 @@
       </p:sp>
       <p:sp>
         <p:nvSpPr>
-          <p:cNvPr id="55" name="Text 52"/>
+          <p:cNvPr id="42" name="Text 38"/>
           <p:cNvSpPr txBox="1"/>
           <p:nvPr/>
         </p:nvSpPr>
@@ -25209,7 +27330,7 @@
       </p:sp>
       <p:sp>
         <p:nvSpPr>
-          <p:cNvPr id="56" name="Text 53"/>
+          <p:cNvPr id="43" name="Text 39"/>
           <p:cNvSpPr txBox="1"/>
           <p:nvPr/>
         </p:nvSpPr>
@@ -25248,7 +27369,7 @@
       </p:sp>
       <p:sp>
         <p:nvSpPr>
-          <p:cNvPr id="57" name="Shape 54"/>
+          <p:cNvPr id="44" name="Shape 40"/>
           <p:cNvSpPr/>
           <p:nvPr/>
         </p:nvSpPr>
@@ -25273,7 +27394,7 @@
       </p:sp>
       <p:sp>
         <p:nvSpPr>
-          <p:cNvPr id="58" name="Text 55"/>
+          <p:cNvPr id="45" name="Text 41"/>
           <p:cNvSpPr txBox="1"/>
           <p:nvPr/>
         </p:nvSpPr>
@@ -25312,7 +27433,7 @@
       </p:sp>
       <p:sp>
         <p:nvSpPr>
-          <p:cNvPr id="59" name="Text 56"/>
+          <p:cNvPr id="46" name="Text 42"/>
           <p:cNvSpPr txBox="1"/>
           <p:nvPr/>
         </p:nvSpPr>

--- a/1개월차_AI에이전트_활용방안_및_DOE결과.pptx
+++ b/1개월차_AI에이전트_활용방안_및_DOE결과.pptx
@@ -17,11 +17,9 @@
     <p:sldId id="265" r:id="rId11"/>
     <p:sldId id="266" r:id="rId12"/>
     <p:sldId id="267" r:id="rId13"/>
-    <p:sldId id="268" r:id="rId14"/>
-    <p:sldId id="269" r:id="rId15"/>
   </p:sldIdLst>
   <p:notesMasterIdLst>
-    <p:notesMasterId r:id="rId16"/>
+    <p:notesMasterId r:id="rId14"/>
   </p:notesMasterIdLst>
   <p:sldSz cx="12192000" cy="6858000"/>
   <p:notesSz cx="6858000" cy="12192000"/>
@@ -821,182 +819,6 @@
 </p:notes>
 </file>
 
-<file path=ppt/notesSlides/notesSlide13.xml><?xml version="1.0" encoding="utf-8"?>
-<p:notes xmlns:a="http://schemas.openxmlformats.org/drawingml/2006/main" xmlns:r="http://schemas.openxmlformats.org/officeDocument/2006/relationships" xmlns:p="http://schemas.openxmlformats.org/presentationml/2006/main">
-  <p:cSld>
-    <p:spTree>
-      <p:nvGrpSpPr>
-        <p:cNvPr id="1" name=""/>
-        <p:cNvGrpSpPr/>
-        <p:nvPr/>
-      </p:nvGrpSpPr>
-      <p:grpSpPr>
-        <a:xfrm>
-          <a:off x="0" y="0"/>
-          <a:ext cx="0" cy="0"/>
-          <a:chOff x="0" y="0"/>
-          <a:chExt cx="0" cy="0"/>
-        </a:xfrm>
-      </p:grpSpPr>
-      <p:sp>
-        <p:nvSpPr>
-          <p:cNvPr id="2" name="Slide Image Placeholder 1"/>
-          <p:cNvSpPr>
-            <a:spLocks noGrp="1" noRot="1" noChangeAspect="1"/>
-          </p:cNvSpPr>
-          <p:nvPr>
-            <p:ph type="sldImg"/>
-          </p:nvPr>
-        </p:nvSpPr>
-        <p:spPr/>
-      </p:sp>
-      <p:sp>
-        <p:nvSpPr>
-          <p:cNvPr id="3" name="Notes Placeholder 2"/>
-          <p:cNvSpPr>
-            <a:spLocks noGrp="1"/>
-          </p:cNvSpPr>
-          <p:nvPr>
-            <p:ph type="body" idx="1"/>
-          </p:nvPr>
-        </p:nvSpPr>
-        <p:spPr/>
-        <p:txBody>
-          <a:bodyPr/>
-          <a:lstStyle/>
-          <a:p>
-            <a:r>
-              <a:rPr lang="en-US" dirty="0"/>
-              <a:t/>
-            </a:r>
-            <a:endParaRPr lang="en-US" dirty="0"/>
-          </a:p>
-        </p:txBody>
-      </p:sp>
-      <p:sp>
-        <p:nvSpPr>
-          <p:cNvPr id="4" name="Slide Number Placeholder 3"/>
-          <p:cNvSpPr>
-            <a:spLocks noGrp="1"/>
-          </p:cNvSpPr>
-          <p:nvPr>
-            <p:ph type="sldNum" sz="quarter" idx="10"/>
-          </p:nvPr>
-        </p:nvSpPr>
-        <p:spPr/>
-        <p:txBody>
-          <a:bodyPr/>
-          <a:lstStyle/>
-          <a:p>
-            <a:fld id="{F7021451-1387-4CA6-816F-3879F97B5CBC}" type="slidenum">
-              <a:rPr lang="en-US"/>
-              <a:t>13</a:t>
-            </a:fld>
-            <a:endParaRPr lang="en-US"/>
-          </a:p>
-        </p:txBody>
-      </p:sp>
-    </p:spTree>
-    <p:extLst>
-      <p:ext uri="{BB962C8B-B14F-4D97-AF65-F5344CB8AC3E}">
-        <p14:creationId xmlns:p14="http://schemas.microsoft.com/office/powerpoint/2010/main" val="1024086991"/>
-      </p:ext>
-    </p:extLst>
-  </p:cSld>
-  <p:clrMapOvr>
-    <a:masterClrMapping/>
-  </p:clrMapOvr>
-</p:notes>
-</file>
-
-<file path=ppt/notesSlides/notesSlide14.xml><?xml version="1.0" encoding="utf-8"?>
-<p:notes xmlns:a="http://schemas.openxmlformats.org/drawingml/2006/main" xmlns:r="http://schemas.openxmlformats.org/officeDocument/2006/relationships" xmlns:p="http://schemas.openxmlformats.org/presentationml/2006/main">
-  <p:cSld>
-    <p:spTree>
-      <p:nvGrpSpPr>
-        <p:cNvPr id="1" name=""/>
-        <p:cNvGrpSpPr/>
-        <p:nvPr/>
-      </p:nvGrpSpPr>
-      <p:grpSpPr>
-        <a:xfrm>
-          <a:off x="0" y="0"/>
-          <a:ext cx="0" cy="0"/>
-          <a:chOff x="0" y="0"/>
-          <a:chExt cx="0" cy="0"/>
-        </a:xfrm>
-      </p:grpSpPr>
-      <p:sp>
-        <p:nvSpPr>
-          <p:cNvPr id="2" name="Slide Image Placeholder 1"/>
-          <p:cNvSpPr>
-            <a:spLocks noGrp="1" noRot="1" noChangeAspect="1"/>
-          </p:cNvSpPr>
-          <p:nvPr>
-            <p:ph type="sldImg"/>
-          </p:nvPr>
-        </p:nvSpPr>
-        <p:spPr/>
-      </p:sp>
-      <p:sp>
-        <p:nvSpPr>
-          <p:cNvPr id="3" name="Notes Placeholder 2"/>
-          <p:cNvSpPr>
-            <a:spLocks noGrp="1"/>
-          </p:cNvSpPr>
-          <p:nvPr>
-            <p:ph type="body" idx="1"/>
-          </p:nvPr>
-        </p:nvSpPr>
-        <p:spPr/>
-        <p:txBody>
-          <a:bodyPr/>
-          <a:lstStyle/>
-          <a:p>
-            <a:r>
-              <a:rPr lang="en-US" dirty="0"/>
-              <a:t/>
-            </a:r>
-            <a:endParaRPr lang="en-US" dirty="0"/>
-          </a:p>
-        </p:txBody>
-      </p:sp>
-      <p:sp>
-        <p:nvSpPr>
-          <p:cNvPr id="4" name="Slide Number Placeholder 3"/>
-          <p:cNvSpPr>
-            <a:spLocks noGrp="1"/>
-          </p:cNvSpPr>
-          <p:nvPr>
-            <p:ph type="sldNum" sz="quarter" idx="10"/>
-          </p:nvPr>
-        </p:nvSpPr>
-        <p:spPr/>
-        <p:txBody>
-          <a:bodyPr/>
-          <a:lstStyle/>
-          <a:p>
-            <a:fld id="{F7021451-1387-4CA6-816F-3879F97B5CBC}" type="slidenum">
-              <a:rPr lang="en-US"/>
-              <a:t>14</a:t>
-            </a:fld>
-            <a:endParaRPr lang="en-US"/>
-          </a:p>
-        </p:txBody>
-      </p:sp>
-    </p:spTree>
-    <p:extLst>
-      <p:ext uri="{BB962C8B-B14F-4D97-AF65-F5344CB8AC3E}">
-        <p14:creationId xmlns:p14="http://schemas.microsoft.com/office/powerpoint/2010/main" val="1024086991"/>
-      </p:ext>
-    </p:extLst>
-  </p:cSld>
-  <p:clrMapOvr>
-    <a:masterClrMapping/>
-  </p:clrMapOvr>
-</p:notes>
-</file>
-
 <file path=ppt/notesSlides/notesSlide2.xml><?xml version="1.0" encoding="utf-8"?>
 <p:notes xmlns:a="http://schemas.openxmlformats.org/drawingml/2006/main" xmlns:r="http://schemas.openxmlformats.org/officeDocument/2006/relationships" xmlns:p="http://schemas.openxmlformats.org/presentationml/2006/main">
   <p:cSld>
@@ -1571,7 +1393,7 @@
           <a:p>
             <a:r>
               <a:rPr lang="en-US" dirty="0"/>
-              <a:t>설계값을 Equation Manager 전역변수에 써넣고 리빌드한 뒤 질량 특성과 STEP 파일을 얻는 과정이다. 변수명이 어긋나면 즉시 중단해 형상이 바뀌지 않은 채 해석되는 사고를 막았고, 핀 간격처럼 다른 변수에서 결정되는 값은 CAD 수식에 맡겨 두 곳에서 따로 계산하지 않도록 했다. 주요 코드는 부록 A-1에 정리했다.</a:t>
+              <a:t>설계값을 Equation Manager 전역변수에 써넣고 리빌드한 뒤 질량 특성과 STEP 파일을 얻는 과정이다. 변수명이 어긋나면 즉시 중단해 형상이 바뀌지 않은 채 해석되는 사고를 막았고, 핀 간격처럼 다른 변수에서 결정되는 값은 CAD 수식에 맡겨 두 곳에서 따로 계산하지 않도록 했다.</a:t>
             </a:r>
             <a:endParaRPr lang="en-US" dirty="0"/>
           </a:p>
@@ -1659,7 +1481,7 @@
           <a:p>
             <a:r>
               <a:rPr lang="en-US" dirty="0"/>
-              <a:t>해석 모델은 처음에 GUI로 한 번 직접 구성하고, 그 과정을 스크립트 리코더로 기록했다. 기록된 스크립트는 형상 치수가 고정값으로 박혀 있어 그대로는 재사용할 수 없으므로, AI 에이전트와 함께 설계변수 기반 코드로 정리했다. 이후에는 형상 파일만 바뀌면 같은 절차를 코드가 매 회차 재현한다. 단계별 GUI 설정은 부록 A-3, 코드는 부록 A-2에 정리했다.</a:t>
+              <a:t>해석 모델은 처음에 GUI로 한 번 직접 구성하고, 그 과정을 스크립트 리코더로 기록했다. 기록된 스크립트는 형상 치수가 고정값으로 박혀 있어 그대로는 재사용할 수 없으므로, AI 에이전트와 함께 설계변수 기반 코드로 정리했다. 이후에는 형상 파일만 바뀌면 같은 절차를 코드가 매 회차 재현한다. 단계별 GUI 설정은 부록 A-1에 정리했다.</a:t>
             </a:r>
             <a:endParaRPr lang="en-US" dirty="0"/>
           </a:p>
@@ -6225,7 +6047,7 @@
                 <a:ea typeface="Malgun Gothic" pitchFamily="34" charset="-122"/>
                 <a:cs typeface="Malgun Gothic" pitchFamily="34" charset="-120"/>
               </a:rPr>
-              <a:t>SolidWorks 제어 코드 — 형상 빌드 · 질량 특성 · STEP 저장</a:t>
+              <a:t>Icepak 해석 모델 GUI 설정 절차</a:t>
             </a:r>
             <a:endParaRPr lang="en-US" sz="2200" dirty="0"/>
           </a:p>
@@ -6240,1793 +6062,9 @@
         <p:spPr>
           <a:xfrm>
             <a:off x="502920" y="1170432"/>
-            <a:ext cx="11183112" cy="5230368"/>
-          </a:xfrm>
-          <a:prstGeom prst="roundRect">
-            <a:avLst>
-              <a:gd name="adj" fmla="val 1049"/>
-            </a:avLst>
-          </a:prstGeom>
-          <a:solidFill>
-            <a:srgbClr val="1E2430"/>
-          </a:solidFill>
-          <a:ln w="12700">
-            <a:solidFill>
-              <a:srgbClr val="1E2430"/>
-            </a:solidFill>
-            <a:prstDash val="solid"/>
-          </a:ln>
-        </p:spPr>
-      </p:sp>
-      <p:sp>
-        <p:nvSpPr>
-          <p:cNvPr id="7" name="Shape 5"/>
-          <p:cNvSpPr/>
-          <p:nvPr/>
-        </p:nvSpPr>
-        <p:spPr>
-          <a:xfrm>
-            <a:off x="667512" y="1298448"/>
-            <a:ext cx="91440" cy="91440"/>
+            <a:ext cx="256032" cy="256032"/>
           </a:xfrm>
           <a:prstGeom prst="ellipse">
-            <a:avLst/>
-          </a:prstGeom>
-          <a:solidFill>
-            <a:srgbClr val="FF5F57"/>
-          </a:solidFill>
-          <a:ln w="12700">
-            <a:solidFill>
-              <a:srgbClr val="FF5F57"/>
-            </a:solidFill>
-            <a:prstDash val="solid"/>
-          </a:ln>
-        </p:spPr>
-      </p:sp>
-      <p:sp>
-        <p:nvSpPr>
-          <p:cNvPr id="8" name="Shape 6"/>
-          <p:cNvSpPr/>
-          <p:nvPr/>
-        </p:nvSpPr>
-        <p:spPr>
-          <a:xfrm>
-            <a:off x="822960" y="1298448"/>
-            <a:ext cx="91440" cy="91440"/>
-          </a:xfrm>
-          <a:prstGeom prst="ellipse">
-            <a:avLst/>
-          </a:prstGeom>
-          <a:solidFill>
-            <a:srgbClr val="FEBC2E"/>
-          </a:solidFill>
-          <a:ln w="12700">
-            <a:solidFill>
-              <a:srgbClr val="FEBC2E"/>
-            </a:solidFill>
-            <a:prstDash val="solid"/>
-          </a:ln>
-        </p:spPr>
-      </p:sp>
-      <p:sp>
-        <p:nvSpPr>
-          <p:cNvPr id="9" name="Shape 7"/>
-          <p:cNvSpPr/>
-          <p:nvPr/>
-        </p:nvSpPr>
-        <p:spPr>
-          <a:xfrm>
-            <a:off x="978408" y="1298448"/>
-            <a:ext cx="91440" cy="91440"/>
-          </a:xfrm>
-          <a:prstGeom prst="ellipse">
-            <a:avLst/>
-          </a:prstGeom>
-          <a:solidFill>
-            <a:srgbClr val="28C840"/>
-          </a:solidFill>
-          <a:ln w="12700">
-            <a:solidFill>
-              <a:srgbClr val="28C840"/>
-            </a:solidFill>
-            <a:prstDash val="solid"/>
-          </a:ln>
-        </p:spPr>
-      </p:sp>
-      <p:sp>
-        <p:nvSpPr>
-          <p:cNvPr id="10" name="Text 8"/>
-          <p:cNvSpPr txBox="1"/>
-          <p:nvPr/>
-        </p:nvSpPr>
-        <p:spPr>
-          <a:xfrm>
-            <a:off x="1161288" y="1234440"/>
-            <a:ext cx="10360152" cy="219456"/>
-          </a:xfrm>
-          <a:prstGeom prst="rect">
-            <a:avLst/>
-          </a:prstGeom>
-          <a:noFill/>
-          <a:ln/>
-        </p:spPr>
-        <p:txBody>
-          <a:bodyPr wrap="square" lIns="0" tIns="0" rIns="0" bIns="0" rtlCol="0" anchor="ctr"/>
-          <a:lstStyle/>
-          <a:p>
-            <a:pPr indent="0" marL="0">
-              <a:buNone/>
-            </a:pPr>
-            <a:r>
-              <a:rPr lang="en-US" sz="850" dirty="0">
-                <a:solidFill>
-                  <a:srgbClr val="8A94A6"/>
-                </a:solidFill>
-                <a:latin typeface="Consolas" pitchFamily="34" charset="0"/>
-                <a:ea typeface="Consolas" pitchFamily="34" charset="-122"/>
-                <a:cs typeface="Consolas" pitchFamily="34" charset="-120"/>
-              </a:rPr>
-              <a:t>Solidworks.py</a:t>
-            </a:r>
-            <a:endParaRPr lang="en-US" sz="850" dirty="0"/>
-          </a:p>
-        </p:txBody>
-      </p:sp>
-      <p:sp>
-        <p:nvSpPr>
-          <p:cNvPr id="11" name="Shape 9"/>
-          <p:cNvSpPr/>
-          <p:nvPr/>
-        </p:nvSpPr>
-        <p:spPr>
-          <a:xfrm>
-            <a:off x="502920" y="1517904"/>
-            <a:ext cx="11183112" cy="0"/>
-          </a:xfrm>
-          <a:prstGeom prst="line">
-            <a:avLst/>
-          </a:prstGeom>
-          <a:noFill/>
-          <a:ln w="9525">
-            <a:solidFill>
-              <a:srgbClr val="2E3645"/>
-            </a:solidFill>
-            <a:prstDash val="solid"/>
-          </a:ln>
-        </p:spPr>
-      </p:sp>
-      <p:sp>
-        <p:nvSpPr>
-          <p:cNvPr id="12" name="Text 10"/>
-          <p:cNvSpPr txBox="1"/>
-          <p:nvPr/>
-        </p:nvSpPr>
-        <p:spPr>
-          <a:xfrm>
-            <a:off x="685800" y="1627632"/>
-            <a:ext cx="10890504" cy="4663440"/>
-          </a:xfrm>
-          <a:prstGeom prst="rect">
-            <a:avLst/>
-          </a:prstGeom>
-          <a:noFill/>
-          <a:ln/>
-        </p:spPr>
-        <p:txBody>
-          <a:bodyPr wrap="square" lIns="0" tIns="0" rIns="0" bIns="0" rtlCol="0" anchor="t"/>
-          <a:lstStyle/>
-          <a:p>
-            <a:pPr indent="0" marL="0">
-              <a:lnSpc>
-                <a:spcPct val="108000"/>
-              </a:lnSpc>
-              <a:buNone/>
-            </a:pPr>
-            <a:r>
-              <a:rPr lang="en-US" sz="820" dirty="0">
-                <a:solidFill>
-                  <a:srgbClr val="C792EA"/>
-                </a:solidFill>
-                <a:latin typeface="Consolas" pitchFamily="34" charset="0"/>
-                <a:ea typeface="Consolas" pitchFamily="34" charset="-122"/>
-                <a:cs typeface="Consolas" pitchFamily="34" charset="-120"/>
-              </a:rPr>
-              <a:t>def</a:t>
-            </a:r>
-            <a:pPr indent="0" marL="0">
-              <a:lnSpc>
-                <a:spcPct val="108000"/>
-              </a:lnSpc>
-              <a:buNone/>
-            </a:pPr>
-            <a:r>
-              <a:rPr lang="en-US" sz="820" dirty="0">
-                <a:solidFill>
-                  <a:srgbClr val="D6DEEB"/>
-                </a:solidFill>
-                <a:latin typeface="Consolas" pitchFamily="34" charset="0"/>
-                <a:ea typeface="Consolas" pitchFamily="34" charset="-122"/>
-                <a:cs typeface="Consolas" pitchFamily="34" charset="-120"/>
-              </a:rPr>
-              <a:t> connect_sw():</a:t>
-            </a:r>
-            <a:endParaRPr lang="en-US" sz="820" dirty="0"/>
-          </a:p>
-          <a:p>
-            <a:pPr indent="0" marL="0">
-              <a:lnSpc>
-                <a:spcPct val="108000"/>
-              </a:lnSpc>
-              <a:buNone/>
-            </a:pPr>
-            <a:r>
-              <a:rPr lang="en-US" sz="820" dirty="0">
-                <a:solidFill>
-                  <a:srgbClr val="D6DEEB"/>
-                </a:solidFill>
-                <a:latin typeface="Consolas" pitchFamily="34" charset="0"/>
-                <a:ea typeface="Consolas" pitchFamily="34" charset="-122"/>
-                <a:cs typeface="Consolas" pitchFamily="34" charset="-120"/>
-              </a:rPr>
-              <a:t>    pythoncom.CoInitialize()</a:t>
-            </a:r>
-            <a:endParaRPr lang="en-US" sz="820" dirty="0"/>
-          </a:p>
-          <a:p>
-            <a:pPr indent="0" marL="0">
-              <a:lnSpc>
-                <a:spcPct val="108000"/>
-              </a:lnSpc>
-              <a:buNone/>
-            </a:pPr>
-            <a:r>
-              <a:rPr lang="en-US" sz="820" dirty="0">
-                <a:solidFill>
-                  <a:srgbClr val="D6DEEB"/>
-                </a:solidFill>
-                <a:latin typeface="Consolas" pitchFamily="34" charset="0"/>
-                <a:ea typeface="Consolas" pitchFamily="34" charset="-122"/>
-                <a:cs typeface="Consolas" pitchFamily="34" charset="-120"/>
-              </a:rPr>
-              <a:t>    app = win32com.client.Dispatch(</a:t>
-            </a:r>
-            <a:pPr indent="0" marL="0">
-              <a:lnSpc>
-                <a:spcPct val="108000"/>
-              </a:lnSpc>
-              <a:buNone/>
-            </a:pPr>
-            <a:r>
-              <a:rPr lang="en-US" sz="820" dirty="0">
-                <a:solidFill>
-                  <a:srgbClr val="E6A26B"/>
-                </a:solidFill>
-                <a:latin typeface="Consolas" pitchFamily="34" charset="0"/>
-                <a:ea typeface="Consolas" pitchFamily="34" charset="-122"/>
-                <a:cs typeface="Consolas" pitchFamily="34" charset="-120"/>
-              </a:rPr>
-              <a:t>"SldWorks.Application"</a:t>
-            </a:r>
-            <a:pPr indent="0" marL="0">
-              <a:lnSpc>
-                <a:spcPct val="108000"/>
-              </a:lnSpc>
-              <a:buNone/>
-            </a:pPr>
-            <a:r>
-              <a:rPr lang="en-US" sz="820" dirty="0">
-                <a:solidFill>
-                  <a:srgbClr val="D6DEEB"/>
-                </a:solidFill>
-                <a:latin typeface="Consolas" pitchFamily="34" charset="0"/>
-                <a:ea typeface="Consolas" pitchFamily="34" charset="-122"/>
-                <a:cs typeface="Consolas" pitchFamily="34" charset="-120"/>
-              </a:rPr>
-              <a:t>)</a:t>
-            </a:r>
-            <a:endParaRPr lang="en-US" sz="820" dirty="0"/>
-          </a:p>
-          <a:p>
-            <a:pPr indent="0" marL="0">
-              <a:lnSpc>
-                <a:spcPct val="108000"/>
-              </a:lnSpc>
-              <a:buNone/>
-            </a:pPr>
-            <a:r>
-              <a:rPr lang="en-US" sz="820" dirty="0">
-                <a:solidFill>
-                  <a:srgbClr val="D6DEEB"/>
-                </a:solidFill>
-                <a:latin typeface="Consolas" pitchFamily="34" charset="0"/>
-                <a:ea typeface="Consolas" pitchFamily="34" charset="-122"/>
-                <a:cs typeface="Consolas" pitchFamily="34" charset="-120"/>
-              </a:rPr>
-              <a:t>    app.Visible = False                                   </a:t>
-            </a:r>
-            <a:pPr indent="0" marL="0">
-              <a:lnSpc>
-                <a:spcPct val="108000"/>
-              </a:lnSpc>
-              <a:buNone/>
-            </a:pPr>
-            <a:r>
-              <a:rPr lang="en-US" sz="820" dirty="0">
-                <a:solidFill>
-                  <a:srgbClr val="7F9C7A"/>
-                </a:solidFill>
-                <a:latin typeface="Consolas" pitchFamily="34" charset="0"/>
-                <a:ea typeface="Consolas" pitchFamily="34" charset="-122"/>
-                <a:cs typeface="Consolas" pitchFamily="34" charset="-120"/>
-              </a:rPr>
-              <a:t># 무인 장기구동</a:t>
-            </a:r>
-            <a:endParaRPr lang="en-US" sz="820" dirty="0"/>
-          </a:p>
-          <a:p>
-            <a:pPr indent="0" marL="0">
-              <a:lnSpc>
-                <a:spcPct val="108000"/>
-              </a:lnSpc>
-              <a:buNone/>
-            </a:pPr>
-            <a:r>
-              <a:rPr lang="en-US" sz="820" dirty="0">
-                <a:solidFill>
-                  <a:srgbClr val="D6DEEB"/>
-                </a:solidFill>
-                <a:latin typeface="Consolas" pitchFamily="34" charset="0"/>
-                <a:ea typeface="Consolas" pitchFamily="34" charset="-122"/>
-                <a:cs typeface="Consolas" pitchFamily="34" charset="-120"/>
-              </a:rPr>
-              <a:t>    model = app.OpenDoc6(ASM_PATH, swDocASSEMBLY, 1, </a:t>
-            </a:r>
-            <a:pPr indent="0" marL="0">
-              <a:lnSpc>
-                <a:spcPct val="108000"/>
-              </a:lnSpc>
-              <a:buNone/>
-            </a:pPr>
-            <a:r>
-              <a:rPr lang="en-US" sz="820" dirty="0">
-                <a:solidFill>
-                  <a:srgbClr val="E6A26B"/>
-                </a:solidFill>
-                <a:latin typeface="Consolas" pitchFamily="34" charset="0"/>
-                <a:ea typeface="Consolas" pitchFamily="34" charset="-122"/>
-                <a:cs typeface="Consolas" pitchFamily="34" charset="-120"/>
-              </a:rPr>
-              <a:t>""</a:t>
-            </a:r>
-            <a:pPr indent="0" marL="0">
-              <a:lnSpc>
-                <a:spcPct val="108000"/>
-              </a:lnSpc>
-              <a:buNone/>
-            </a:pPr>
-            <a:r>
-              <a:rPr lang="en-US" sz="820" dirty="0">
-                <a:solidFill>
-                  <a:srgbClr val="D6DEEB"/>
-                </a:solidFill>
-                <a:latin typeface="Consolas" pitchFamily="34" charset="0"/>
-                <a:ea typeface="Consolas" pitchFamily="34" charset="-122"/>
-                <a:cs typeface="Consolas" pitchFamily="34" charset="-120"/>
-              </a:rPr>
-              <a:t>, errors, warnings)</a:t>
-            </a:r>
-            <a:endParaRPr lang="en-US" sz="820" dirty="0"/>
-          </a:p>
-          <a:p>
-            <a:pPr indent="0" marL="0">
-              <a:lnSpc>
-                <a:spcPct val="108000"/>
-              </a:lnSpc>
-              <a:buNone/>
-            </a:pPr>
-            <a:r>
-              <a:rPr lang="en-US" sz="820" dirty="0">
-                <a:solidFill>
-                  <a:srgbClr val="D6DEEB"/>
-                </a:solidFill>
-                <a:latin typeface="Consolas" pitchFamily="34" charset="0"/>
-                <a:ea typeface="Consolas" pitchFamily="34" charset="-122"/>
-                <a:cs typeface="Consolas" pitchFamily="34" charset="-120"/>
-              </a:rPr>
-              <a:t>    </a:t>
-            </a:r>
-            <a:pPr indent="0" marL="0">
-              <a:lnSpc>
-                <a:spcPct val="108000"/>
-              </a:lnSpc>
-              <a:buNone/>
-            </a:pPr>
-            <a:r>
-              <a:rPr lang="en-US" sz="820" dirty="0">
-                <a:solidFill>
-                  <a:srgbClr val="C792EA"/>
-                </a:solidFill>
-                <a:latin typeface="Consolas" pitchFamily="34" charset="0"/>
-                <a:ea typeface="Consolas" pitchFamily="34" charset="-122"/>
-                <a:cs typeface="Consolas" pitchFamily="34" charset="-120"/>
-              </a:rPr>
-              <a:t>return</a:t>
-            </a:r>
-            <a:pPr indent="0" marL="0">
-              <a:lnSpc>
-                <a:spcPct val="108000"/>
-              </a:lnSpc>
-              <a:buNone/>
-            </a:pPr>
-            <a:r>
-              <a:rPr lang="en-US" sz="820" dirty="0">
-                <a:solidFill>
-                  <a:srgbClr val="D6DEEB"/>
-                </a:solidFill>
-                <a:latin typeface="Consolas" pitchFamily="34" charset="0"/>
-                <a:ea typeface="Consolas" pitchFamily="34" charset="-122"/>
-                <a:cs typeface="Consolas" pitchFamily="34" charset="-120"/>
-              </a:rPr>
-              <a:t> app, errors, warnings</a:t>
-            </a:r>
-            <a:endParaRPr lang="en-US" sz="820" dirty="0"/>
-          </a:p>
-          <a:p>
-            <a:pPr indent="0" marL="0">
-              <a:lnSpc>
-                <a:spcPct val="108000"/>
-              </a:lnSpc>
-              <a:buNone/>
-            </a:pPr>
-            <a:r>
-              <a:rPr lang="en-US" sz="820" dirty="0">
-                <a:solidFill>
-                  <a:srgbClr val="C792EA"/>
-                </a:solidFill>
-                <a:latin typeface="Consolas" pitchFamily="34" charset="0"/>
-                <a:ea typeface="Consolas" pitchFamily="34" charset="-122"/>
-                <a:cs typeface="Consolas" pitchFamily="34" charset="-120"/>
-              </a:rPr>
-              <a:t>def</a:t>
-            </a:r>
-            <a:pPr indent="0" marL="0">
-              <a:lnSpc>
-                <a:spcPct val="108000"/>
-              </a:lnSpc>
-              <a:buNone/>
-            </a:pPr>
-            <a:r>
-              <a:rPr lang="en-US" sz="820" dirty="0">
-                <a:solidFill>
-                  <a:srgbClr val="D6DEEB"/>
-                </a:solidFill>
-                <a:latin typeface="Consolas" pitchFamily="34" charset="0"/>
-                <a:ea typeface="Consolas" pitchFamily="34" charset="-122"/>
-                <a:cs typeface="Consolas" pitchFamily="34" charset="-120"/>
-              </a:rPr>
-              <a:t> update_sw(app, errors, warnings, params):</a:t>
-            </a:r>
-            <a:endParaRPr lang="en-US" sz="820" dirty="0"/>
-          </a:p>
-          <a:p>
-            <a:pPr indent="0" marL="0">
-              <a:lnSpc>
-                <a:spcPct val="108000"/>
-              </a:lnSpc>
-              <a:buNone/>
-            </a:pPr>
-            <a:r>
-              <a:rPr lang="en-US" sz="820" dirty="0">
-                <a:solidFill>
-                  <a:srgbClr val="D6DEEB"/>
-                </a:solidFill>
-                <a:latin typeface="Consolas" pitchFamily="34" charset="0"/>
-                <a:ea typeface="Consolas" pitchFamily="34" charset="-122"/>
-                <a:cs typeface="Consolas" pitchFamily="34" charset="-120"/>
-              </a:rPr>
-              <a:t>    _validate(params)                                     </a:t>
-            </a:r>
-            <a:pPr indent="0" marL="0">
-              <a:lnSpc>
-                <a:spcPct val="108000"/>
-              </a:lnSpc>
-              <a:buNone/>
-            </a:pPr>
-            <a:r>
-              <a:rPr lang="en-US" sz="820" dirty="0">
-                <a:solidFill>
-                  <a:srgbClr val="7F9C7A"/>
-                </a:solidFill>
-                <a:latin typeface="Consolas" pitchFamily="34" charset="0"/>
-                <a:ea typeface="Consolas" pitchFamily="34" charset="-122"/>
-                <a:cs typeface="Consolas" pitchFamily="34" charset="-120"/>
-              </a:rPr>
-              <a:t># 누락 변수 · 정수 · 갭 제약 사전 검증</a:t>
-            </a:r>
-            <a:endParaRPr lang="en-US" sz="820" dirty="0"/>
-          </a:p>
-          <a:p>
-            <a:pPr indent="0" marL="0">
-              <a:lnSpc>
-                <a:spcPct val="108000"/>
-              </a:lnSpc>
-              <a:buNone/>
-            </a:pPr>
-            <a:r>
-              <a:rPr lang="en-US" sz="820" dirty="0">
-                <a:solidFill>
-                  <a:srgbClr val="D6DEEB"/>
-                </a:solidFill>
-                <a:latin typeface="Consolas" pitchFamily="34" charset="0"/>
-                <a:ea typeface="Consolas" pitchFamily="34" charset="-122"/>
-                <a:cs typeface="Consolas" pitchFamily="34" charset="-120"/>
-              </a:rPr>
-              <a:t>    part  = app.ActivateDoc3(PART_PATH, False, 0, errors)</a:t>
-            </a:r>
-            <a:endParaRPr lang="en-US" sz="820" dirty="0"/>
-          </a:p>
-          <a:p>
-            <a:pPr indent="0" marL="0">
-              <a:lnSpc>
-                <a:spcPct val="108000"/>
-              </a:lnSpc>
-              <a:buNone/>
-            </a:pPr>
-            <a:r>
-              <a:rPr lang="en-US" sz="820" dirty="0">
-                <a:solidFill>
-                  <a:srgbClr val="D6DEEB"/>
-                </a:solidFill>
-                <a:latin typeface="Consolas" pitchFamily="34" charset="0"/>
-                <a:ea typeface="Consolas" pitchFamily="34" charset="-122"/>
-                <a:cs typeface="Consolas" pitchFamily="34" charset="-120"/>
-              </a:rPr>
-              <a:t>    eqMgr = part.GetEquationMgr</a:t>
-            </a:r>
-            <a:endParaRPr lang="en-US" sz="820" dirty="0"/>
-          </a:p>
-          <a:p>
-            <a:pPr indent="0" marL="0">
-              <a:lnSpc>
-                <a:spcPct val="108000"/>
-              </a:lnSpc>
-              <a:buNone/>
-            </a:pPr>
-            <a:r>
-              <a:rPr lang="en-US" sz="820" dirty="0">
-                <a:solidFill>
-                  <a:srgbClr val="D6DEEB"/>
-                </a:solidFill>
-                <a:latin typeface="Consolas" pitchFamily="34" charset="0"/>
-                <a:ea typeface="Consolas" pitchFamily="34" charset="-122"/>
-                <a:cs typeface="Consolas" pitchFamily="34" charset="-120"/>
-              </a:rPr>
-              <a:t>    dispid = eqMgr._oleobj_.GetIDsOfNames(</a:t>
-            </a:r>
-            <a:pPr indent="0" marL="0">
-              <a:lnSpc>
-                <a:spcPct val="108000"/>
-              </a:lnSpc>
-              <a:buNone/>
-            </a:pPr>
-            <a:r>
-              <a:rPr lang="en-US" sz="820" dirty="0">
-                <a:solidFill>
-                  <a:srgbClr val="E6A26B"/>
-                </a:solidFill>
-                <a:latin typeface="Consolas" pitchFamily="34" charset="0"/>
-                <a:ea typeface="Consolas" pitchFamily="34" charset="-122"/>
-                <a:cs typeface="Consolas" pitchFamily="34" charset="-120"/>
-              </a:rPr>
-              <a:t>"Equation"</a:t>
-            </a:r>
-            <a:pPr indent="0" marL="0">
-              <a:lnSpc>
-                <a:spcPct val="108000"/>
-              </a:lnSpc>
-              <a:buNone/>
-            </a:pPr>
-            <a:r>
-              <a:rPr lang="en-US" sz="820" dirty="0">
-                <a:solidFill>
-                  <a:srgbClr val="D6DEEB"/>
-                </a:solidFill>
-                <a:latin typeface="Consolas" pitchFamily="34" charset="0"/>
-                <a:ea typeface="Consolas" pitchFamily="34" charset="-122"/>
-                <a:cs typeface="Consolas" pitchFamily="34" charset="-120"/>
-              </a:rPr>
-              <a:t>)</a:t>
-            </a:r>
-            <a:endParaRPr lang="en-US" sz="820" dirty="0"/>
-          </a:p>
-          <a:p>
-            <a:pPr indent="0" marL="0">
-              <a:lnSpc>
-                <a:spcPct val="108000"/>
-              </a:lnSpc>
-              <a:buNone/>
-            </a:pPr>
-            <a:r>
-              <a:rPr lang="en-US" sz="820" dirty="0">
-                <a:solidFill>
-                  <a:srgbClr val="D6DEEB"/>
-                </a:solidFill>
-                <a:latin typeface="Consolas" pitchFamily="34" charset="0"/>
-                <a:ea typeface="Consolas" pitchFamily="34" charset="-122"/>
-                <a:cs typeface="Consolas" pitchFamily="34" charset="-120"/>
-              </a:rPr>
-              <a:t> </a:t>
-            </a:r>
-            <a:endParaRPr lang="en-US" sz="820" dirty="0"/>
-          </a:p>
-          <a:p>
-            <a:pPr indent="0" marL="0">
-              <a:lnSpc>
-                <a:spcPct val="108000"/>
-              </a:lnSpc>
-              <a:buNone/>
-            </a:pPr>
-            <a:r>
-              <a:rPr lang="en-US" sz="820" dirty="0">
-                <a:solidFill>
-                  <a:srgbClr val="D6DEEB"/>
-                </a:solidFill>
-                <a:latin typeface="Consolas" pitchFamily="34" charset="0"/>
-                <a:ea typeface="Consolas" pitchFamily="34" charset="-122"/>
-                <a:cs typeface="Consolas" pitchFamily="34" charset="-120"/>
-              </a:rPr>
-              <a:t>    name_to_i = {}                                        </a:t>
-            </a:r>
-            <a:pPr indent="0" marL="0">
-              <a:lnSpc>
-                <a:spcPct val="108000"/>
-              </a:lnSpc>
-              <a:buNone/>
-            </a:pPr>
-            <a:r>
-              <a:rPr lang="en-US" sz="820" dirty="0">
-                <a:solidFill>
-                  <a:srgbClr val="7F9C7A"/>
-                </a:solidFill>
-                <a:latin typeface="Consolas" pitchFamily="34" charset="0"/>
-                <a:ea typeface="Consolas" pitchFamily="34" charset="-122"/>
-                <a:cs typeface="Consolas" pitchFamily="34" charset="-120"/>
-              </a:rPr>
-              <a:t># 수식 목록에서 변수명 → 인덱스 매핑</a:t>
-            </a:r>
-            <a:endParaRPr lang="en-US" sz="820" dirty="0"/>
-          </a:p>
-          <a:p>
-            <a:pPr indent="0" marL="0">
-              <a:lnSpc>
-                <a:spcPct val="108000"/>
-              </a:lnSpc>
-              <a:buNone/>
-            </a:pPr>
-            <a:r>
-              <a:rPr lang="en-US" sz="820" dirty="0">
-                <a:solidFill>
-                  <a:srgbClr val="D6DEEB"/>
-                </a:solidFill>
-                <a:latin typeface="Consolas" pitchFamily="34" charset="0"/>
-                <a:ea typeface="Consolas" pitchFamily="34" charset="-122"/>
-                <a:cs typeface="Consolas" pitchFamily="34" charset="-120"/>
-              </a:rPr>
-              <a:t>    </a:t>
-            </a:r>
-            <a:pPr indent="0" marL="0">
-              <a:lnSpc>
-                <a:spcPct val="108000"/>
-              </a:lnSpc>
-              <a:buNone/>
-            </a:pPr>
-            <a:r>
-              <a:rPr lang="en-US" sz="820" dirty="0">
-                <a:solidFill>
-                  <a:srgbClr val="C792EA"/>
-                </a:solidFill>
-                <a:latin typeface="Consolas" pitchFamily="34" charset="0"/>
-                <a:ea typeface="Consolas" pitchFamily="34" charset="-122"/>
-                <a:cs typeface="Consolas" pitchFamily="34" charset="-120"/>
-              </a:rPr>
-              <a:t>for</a:t>
-            </a:r>
-            <a:pPr indent="0" marL="0">
-              <a:lnSpc>
-                <a:spcPct val="108000"/>
-              </a:lnSpc>
-              <a:buNone/>
-            </a:pPr>
-            <a:r>
-              <a:rPr lang="en-US" sz="820" dirty="0">
-                <a:solidFill>
-                  <a:srgbClr val="D6DEEB"/>
-                </a:solidFill>
-                <a:latin typeface="Consolas" pitchFamily="34" charset="0"/>
-                <a:ea typeface="Consolas" pitchFamily="34" charset="-122"/>
-                <a:cs typeface="Consolas" pitchFamily="34" charset="-120"/>
-              </a:rPr>
-              <a:t> i </a:t>
-            </a:r>
-            <a:pPr indent="0" marL="0">
-              <a:lnSpc>
-                <a:spcPct val="108000"/>
-              </a:lnSpc>
-              <a:buNone/>
-            </a:pPr>
-            <a:r>
-              <a:rPr lang="en-US" sz="820" dirty="0">
-                <a:solidFill>
-                  <a:srgbClr val="C792EA"/>
-                </a:solidFill>
-                <a:latin typeface="Consolas" pitchFamily="34" charset="0"/>
-                <a:ea typeface="Consolas" pitchFamily="34" charset="-122"/>
-                <a:cs typeface="Consolas" pitchFamily="34" charset="-120"/>
-              </a:rPr>
-              <a:t>in</a:t>
-            </a:r>
-            <a:pPr indent="0" marL="0">
-              <a:lnSpc>
-                <a:spcPct val="108000"/>
-              </a:lnSpc>
-              <a:buNone/>
-            </a:pPr>
-            <a:r>
-              <a:rPr lang="en-US" sz="820" dirty="0">
-                <a:solidFill>
-                  <a:srgbClr val="D6DEEB"/>
-                </a:solidFill>
-                <a:latin typeface="Consolas" pitchFamily="34" charset="0"/>
-                <a:ea typeface="Consolas" pitchFamily="34" charset="-122"/>
-                <a:cs typeface="Consolas" pitchFamily="34" charset="-120"/>
-              </a:rPr>
-              <a:t> range(eqMgr.GetCount):</a:t>
-            </a:r>
-            <a:endParaRPr lang="en-US" sz="820" dirty="0"/>
-          </a:p>
-          <a:p>
-            <a:pPr indent="0" marL="0">
-              <a:lnSpc>
-                <a:spcPct val="108000"/>
-              </a:lnSpc>
-              <a:buNone/>
-            </a:pPr>
-            <a:r>
-              <a:rPr lang="en-US" sz="820" dirty="0">
-                <a:solidFill>
-                  <a:srgbClr val="D6DEEB"/>
-                </a:solidFill>
-                <a:latin typeface="Consolas" pitchFamily="34" charset="0"/>
-                <a:ea typeface="Consolas" pitchFamily="34" charset="-122"/>
-                <a:cs typeface="Consolas" pitchFamily="34" charset="-120"/>
-              </a:rPr>
-              <a:t>        lhs = eqMgr.Equation(i).split(</a:t>
-            </a:r>
-            <a:pPr indent="0" marL="0">
-              <a:lnSpc>
-                <a:spcPct val="108000"/>
-              </a:lnSpc>
-              <a:buNone/>
-            </a:pPr>
-            <a:r>
-              <a:rPr lang="en-US" sz="820" dirty="0">
-                <a:solidFill>
-                  <a:srgbClr val="E6A26B"/>
-                </a:solidFill>
-                <a:latin typeface="Consolas" pitchFamily="34" charset="0"/>
-                <a:ea typeface="Consolas" pitchFamily="34" charset="-122"/>
-                <a:cs typeface="Consolas" pitchFamily="34" charset="-120"/>
-              </a:rPr>
-              <a:t>"="</a:t>
-            </a:r>
-            <a:pPr indent="0" marL="0">
-              <a:lnSpc>
-                <a:spcPct val="108000"/>
-              </a:lnSpc>
-              <a:buNone/>
-            </a:pPr>
-            <a:r>
-              <a:rPr lang="en-US" sz="820" dirty="0">
-                <a:solidFill>
-                  <a:srgbClr val="D6DEEB"/>
-                </a:solidFill>
-                <a:latin typeface="Consolas" pitchFamily="34" charset="0"/>
-                <a:ea typeface="Consolas" pitchFamily="34" charset="-122"/>
-                <a:cs typeface="Consolas" pitchFamily="34" charset="-120"/>
-              </a:rPr>
-              <a:t>)[0].strip()</a:t>
-            </a:r>
-            <a:endParaRPr lang="en-US" sz="820" dirty="0"/>
-          </a:p>
-          <a:p>
-            <a:pPr indent="0" marL="0">
-              <a:lnSpc>
-                <a:spcPct val="108000"/>
-              </a:lnSpc>
-              <a:buNone/>
-            </a:pPr>
-            <a:r>
-              <a:rPr lang="en-US" sz="820" dirty="0">
-                <a:solidFill>
-                  <a:srgbClr val="D6DEEB"/>
-                </a:solidFill>
-                <a:latin typeface="Consolas" pitchFamily="34" charset="0"/>
-                <a:ea typeface="Consolas" pitchFamily="34" charset="-122"/>
-                <a:cs typeface="Consolas" pitchFamily="34" charset="-120"/>
-              </a:rPr>
-              <a:t>        name_to_i[lhs.strip(</a:t>
-            </a:r>
-            <a:pPr indent="0" marL="0">
-              <a:lnSpc>
-                <a:spcPct val="108000"/>
-              </a:lnSpc>
-              <a:buNone/>
-            </a:pPr>
-            <a:r>
-              <a:rPr lang="en-US" sz="820" dirty="0">
-                <a:solidFill>
-                  <a:srgbClr val="E6A26B"/>
-                </a:solidFill>
-                <a:latin typeface="Consolas" pitchFamily="34" charset="0"/>
-                <a:ea typeface="Consolas" pitchFamily="34" charset="-122"/>
-                <a:cs typeface="Consolas" pitchFamily="34" charset="-120"/>
-              </a:rPr>
-              <a:t>'"'</a:t>
-            </a:r>
-            <a:pPr indent="0" marL="0">
-              <a:lnSpc>
-                <a:spcPct val="108000"/>
-              </a:lnSpc>
-              <a:buNone/>
-            </a:pPr>
-            <a:r>
-              <a:rPr lang="en-US" sz="820" dirty="0">
-                <a:solidFill>
-                  <a:srgbClr val="D6DEEB"/>
-                </a:solidFill>
-                <a:latin typeface="Consolas" pitchFamily="34" charset="0"/>
-                <a:ea typeface="Consolas" pitchFamily="34" charset="-122"/>
-                <a:cs typeface="Consolas" pitchFamily="34" charset="-120"/>
-              </a:rPr>
-              <a:t>)] = i</a:t>
-            </a:r>
-            <a:endParaRPr lang="en-US" sz="820" dirty="0"/>
-          </a:p>
-          <a:p>
-            <a:pPr indent="0" marL="0">
-              <a:lnSpc>
-                <a:spcPct val="108000"/>
-              </a:lnSpc>
-              <a:buNone/>
-            </a:pPr>
-            <a:r>
-              <a:rPr lang="en-US" sz="820" dirty="0">
-                <a:solidFill>
-                  <a:srgbClr val="D6DEEB"/>
-                </a:solidFill>
-                <a:latin typeface="Consolas" pitchFamily="34" charset="0"/>
-                <a:ea typeface="Consolas" pitchFamily="34" charset="-122"/>
-                <a:cs typeface="Consolas" pitchFamily="34" charset="-120"/>
-              </a:rPr>
-              <a:t>    missing = [n </a:t>
-            </a:r>
-            <a:pPr indent="0" marL="0">
-              <a:lnSpc>
-                <a:spcPct val="108000"/>
-              </a:lnSpc>
-              <a:buNone/>
-            </a:pPr>
-            <a:r>
-              <a:rPr lang="en-US" sz="820" dirty="0">
-                <a:solidFill>
-                  <a:srgbClr val="C792EA"/>
-                </a:solidFill>
-                <a:latin typeface="Consolas" pitchFamily="34" charset="0"/>
-                <a:ea typeface="Consolas" pitchFamily="34" charset="-122"/>
-                <a:cs typeface="Consolas" pitchFamily="34" charset="-120"/>
-              </a:rPr>
-              <a:t>for</a:t>
-            </a:r>
-            <a:pPr indent="0" marL="0">
-              <a:lnSpc>
-                <a:spcPct val="108000"/>
-              </a:lnSpc>
-              <a:buNone/>
-            </a:pPr>
-            <a:r>
-              <a:rPr lang="en-US" sz="820" dirty="0">
-                <a:solidFill>
-                  <a:srgbClr val="D6DEEB"/>
-                </a:solidFill>
-                <a:latin typeface="Consolas" pitchFamily="34" charset="0"/>
-                <a:ea typeface="Consolas" pitchFamily="34" charset="-122"/>
-                <a:cs typeface="Consolas" pitchFamily="34" charset="-120"/>
-              </a:rPr>
-              <a:t> n </a:t>
-            </a:r>
-            <a:pPr indent="0" marL="0">
-              <a:lnSpc>
-                <a:spcPct val="108000"/>
-              </a:lnSpc>
-              <a:buNone/>
-            </a:pPr>
-            <a:r>
-              <a:rPr lang="en-US" sz="820" dirty="0">
-                <a:solidFill>
-                  <a:srgbClr val="C792EA"/>
-                </a:solidFill>
-                <a:latin typeface="Consolas" pitchFamily="34" charset="0"/>
-                <a:ea typeface="Consolas" pitchFamily="34" charset="-122"/>
-                <a:cs typeface="Consolas" pitchFamily="34" charset="-120"/>
-              </a:rPr>
-              <a:t>in</a:t>
-            </a:r>
-            <a:pPr indent="0" marL="0">
-              <a:lnSpc>
-                <a:spcPct val="108000"/>
-              </a:lnSpc>
-              <a:buNone/>
-            </a:pPr>
-            <a:r>
-              <a:rPr lang="en-US" sz="820" dirty="0">
-                <a:solidFill>
-                  <a:srgbClr val="D6DEEB"/>
-                </a:solidFill>
-                <a:latin typeface="Consolas" pitchFamily="34" charset="0"/>
-                <a:ea typeface="Consolas" pitchFamily="34" charset="-122"/>
-                <a:cs typeface="Consolas" pitchFamily="34" charset="-120"/>
-              </a:rPr>
-              <a:t> SW_PARAM_NAMES </a:t>
-            </a:r>
-            <a:pPr indent="0" marL="0">
-              <a:lnSpc>
-                <a:spcPct val="108000"/>
-              </a:lnSpc>
-              <a:buNone/>
-            </a:pPr>
-            <a:r>
-              <a:rPr lang="en-US" sz="820" dirty="0">
-                <a:solidFill>
-                  <a:srgbClr val="C792EA"/>
-                </a:solidFill>
-                <a:latin typeface="Consolas" pitchFamily="34" charset="0"/>
-                <a:ea typeface="Consolas" pitchFamily="34" charset="-122"/>
-                <a:cs typeface="Consolas" pitchFamily="34" charset="-120"/>
-              </a:rPr>
-              <a:t>if</a:t>
-            </a:r>
-            <a:pPr indent="0" marL="0">
-              <a:lnSpc>
-                <a:spcPct val="108000"/>
-              </a:lnSpc>
-              <a:buNone/>
-            </a:pPr>
-            <a:r>
-              <a:rPr lang="en-US" sz="820" dirty="0">
-                <a:solidFill>
-                  <a:srgbClr val="D6DEEB"/>
-                </a:solidFill>
-                <a:latin typeface="Consolas" pitchFamily="34" charset="0"/>
-                <a:ea typeface="Consolas" pitchFamily="34" charset="-122"/>
-                <a:cs typeface="Consolas" pitchFamily="34" charset="-120"/>
-              </a:rPr>
-              <a:t> n not </a:t>
-            </a:r>
-            <a:pPr indent="0" marL="0">
-              <a:lnSpc>
-                <a:spcPct val="108000"/>
-              </a:lnSpc>
-              <a:buNone/>
-            </a:pPr>
-            <a:r>
-              <a:rPr lang="en-US" sz="820" dirty="0">
-                <a:solidFill>
-                  <a:srgbClr val="C792EA"/>
-                </a:solidFill>
-                <a:latin typeface="Consolas" pitchFamily="34" charset="0"/>
-                <a:ea typeface="Consolas" pitchFamily="34" charset="-122"/>
-                <a:cs typeface="Consolas" pitchFamily="34" charset="-120"/>
-              </a:rPr>
-              <a:t>in</a:t>
-            </a:r>
-            <a:pPr indent="0" marL="0">
-              <a:lnSpc>
-                <a:spcPct val="108000"/>
-              </a:lnSpc>
-              <a:buNone/>
-            </a:pPr>
-            <a:r>
-              <a:rPr lang="en-US" sz="820" dirty="0">
-                <a:solidFill>
-                  <a:srgbClr val="D6DEEB"/>
-                </a:solidFill>
-                <a:latin typeface="Consolas" pitchFamily="34" charset="0"/>
-                <a:ea typeface="Consolas" pitchFamily="34" charset="-122"/>
-                <a:cs typeface="Consolas" pitchFamily="34" charset="-120"/>
-              </a:rPr>
-              <a:t> name_to_i]</a:t>
-            </a:r>
-            <a:endParaRPr lang="en-US" sz="820" dirty="0"/>
-          </a:p>
-          <a:p>
-            <a:pPr indent="0" marL="0">
-              <a:lnSpc>
-                <a:spcPct val="108000"/>
-              </a:lnSpc>
-              <a:buNone/>
-            </a:pPr>
-            <a:r>
-              <a:rPr lang="en-US" sz="820" dirty="0">
-                <a:solidFill>
-                  <a:srgbClr val="D6DEEB"/>
-                </a:solidFill>
-                <a:latin typeface="Consolas" pitchFamily="34" charset="0"/>
-                <a:ea typeface="Consolas" pitchFamily="34" charset="-122"/>
-                <a:cs typeface="Consolas" pitchFamily="34" charset="-120"/>
-              </a:rPr>
-              <a:t>    </a:t>
-            </a:r>
-            <a:pPr indent="0" marL="0">
-              <a:lnSpc>
-                <a:spcPct val="108000"/>
-              </a:lnSpc>
-              <a:buNone/>
-            </a:pPr>
-            <a:r>
-              <a:rPr lang="en-US" sz="820" dirty="0">
-                <a:solidFill>
-                  <a:srgbClr val="C792EA"/>
-                </a:solidFill>
-                <a:latin typeface="Consolas" pitchFamily="34" charset="0"/>
-                <a:ea typeface="Consolas" pitchFamily="34" charset="-122"/>
-                <a:cs typeface="Consolas" pitchFamily="34" charset="-120"/>
-              </a:rPr>
-              <a:t>if</a:t>
-            </a:r>
-            <a:pPr indent="0" marL="0">
-              <a:lnSpc>
-                <a:spcPct val="108000"/>
-              </a:lnSpc>
-              <a:buNone/>
-            </a:pPr>
-            <a:r>
-              <a:rPr lang="en-US" sz="820" dirty="0">
-                <a:solidFill>
-                  <a:srgbClr val="D6DEEB"/>
-                </a:solidFill>
-                <a:latin typeface="Consolas" pitchFamily="34" charset="0"/>
-                <a:ea typeface="Consolas" pitchFamily="34" charset="-122"/>
-                <a:cs typeface="Consolas" pitchFamily="34" charset="-120"/>
-              </a:rPr>
-              <a:t> missing: raise KeyError(</a:t>
-            </a:r>
-            <a:pPr indent="0" marL="0">
-              <a:lnSpc>
-                <a:spcPct val="108000"/>
-              </a:lnSpc>
-              <a:buNone/>
-            </a:pPr>
-            <a:r>
-              <a:rPr lang="en-US" sz="820" dirty="0">
-                <a:solidFill>
-                  <a:srgbClr val="E6A26B"/>
-                </a:solidFill>
-                <a:latin typeface="Consolas" pitchFamily="34" charset="0"/>
-                <a:ea typeface="Consolas" pitchFamily="34" charset="-122"/>
-                <a:cs typeface="Consolas" pitchFamily="34" charset="-120"/>
-              </a:rPr>
-              <a:t>f"SolidWorks에 없는 글로벌 변수: {missing}"</a:t>
-            </a:r>
-            <a:pPr indent="0" marL="0">
-              <a:lnSpc>
-                <a:spcPct val="108000"/>
-              </a:lnSpc>
-              <a:buNone/>
-            </a:pPr>
-            <a:r>
-              <a:rPr lang="en-US" sz="820" dirty="0">
-                <a:solidFill>
-                  <a:srgbClr val="D6DEEB"/>
-                </a:solidFill>
-                <a:latin typeface="Consolas" pitchFamily="34" charset="0"/>
-                <a:ea typeface="Consolas" pitchFamily="34" charset="-122"/>
-                <a:cs typeface="Consolas" pitchFamily="34" charset="-120"/>
-              </a:rPr>
-              <a:t>)</a:t>
-            </a:r>
-            <a:endParaRPr lang="en-US" sz="820" dirty="0"/>
-          </a:p>
-          <a:p>
-            <a:pPr indent="0" marL="0">
-              <a:lnSpc>
-                <a:spcPct val="108000"/>
-              </a:lnSpc>
-              <a:buNone/>
-            </a:pPr>
-            <a:r>
-              <a:rPr lang="en-US" sz="820" dirty="0">
-                <a:solidFill>
-                  <a:srgbClr val="D6DEEB"/>
-                </a:solidFill>
-                <a:latin typeface="Consolas" pitchFamily="34" charset="0"/>
-                <a:ea typeface="Consolas" pitchFamily="34" charset="-122"/>
-                <a:cs typeface="Consolas" pitchFamily="34" charset="-120"/>
-              </a:rPr>
-              <a:t> </a:t>
-            </a:r>
-            <a:endParaRPr lang="en-US" sz="820" dirty="0"/>
-          </a:p>
-          <a:p>
-            <a:pPr indent="0" marL="0">
-              <a:lnSpc>
-                <a:spcPct val="108000"/>
-              </a:lnSpc>
-              <a:buNone/>
-            </a:pPr>
-            <a:r>
-              <a:rPr lang="en-US" sz="820" dirty="0">
-                <a:solidFill>
-                  <a:srgbClr val="D6DEEB"/>
-                </a:solidFill>
-                <a:latin typeface="Consolas" pitchFamily="34" charset="0"/>
-                <a:ea typeface="Consolas" pitchFamily="34" charset="-122"/>
-                <a:cs typeface="Consolas" pitchFamily="34" charset="-120"/>
-              </a:rPr>
-              <a:t>    </a:t>
-            </a:r>
-            <a:pPr indent="0" marL="0">
-              <a:lnSpc>
-                <a:spcPct val="108000"/>
-              </a:lnSpc>
-              <a:buNone/>
-            </a:pPr>
-            <a:r>
-              <a:rPr lang="en-US" sz="820" dirty="0">
-                <a:solidFill>
-                  <a:srgbClr val="C792EA"/>
-                </a:solidFill>
-                <a:latin typeface="Consolas" pitchFamily="34" charset="0"/>
-                <a:ea typeface="Consolas" pitchFamily="34" charset="-122"/>
-                <a:cs typeface="Consolas" pitchFamily="34" charset="-120"/>
-              </a:rPr>
-              <a:t>for</a:t>
-            </a:r>
-            <a:pPr indent="0" marL="0">
-              <a:lnSpc>
-                <a:spcPct val="108000"/>
-              </a:lnSpc>
-              <a:buNone/>
-            </a:pPr>
-            <a:r>
-              <a:rPr lang="en-US" sz="820" dirty="0">
-                <a:solidFill>
-                  <a:srgbClr val="D6DEEB"/>
-                </a:solidFill>
-                <a:latin typeface="Consolas" pitchFamily="34" charset="0"/>
-                <a:ea typeface="Consolas" pitchFamily="34" charset="-122"/>
-                <a:cs typeface="Consolas" pitchFamily="34" charset="-120"/>
-              </a:rPr>
-              <a:t> name </a:t>
-            </a:r>
-            <a:pPr indent="0" marL="0">
-              <a:lnSpc>
-                <a:spcPct val="108000"/>
-              </a:lnSpc>
-              <a:buNone/>
-            </a:pPr>
-            <a:r>
-              <a:rPr lang="en-US" sz="820" dirty="0">
-                <a:solidFill>
-                  <a:srgbClr val="C792EA"/>
-                </a:solidFill>
-                <a:latin typeface="Consolas" pitchFamily="34" charset="0"/>
-                <a:ea typeface="Consolas" pitchFamily="34" charset="-122"/>
-                <a:cs typeface="Consolas" pitchFamily="34" charset="-120"/>
-              </a:rPr>
-              <a:t>in</a:t>
-            </a:r>
-            <a:pPr indent="0" marL="0">
-              <a:lnSpc>
-                <a:spcPct val="108000"/>
-              </a:lnSpc>
-              <a:buNone/>
-            </a:pPr>
-            <a:r>
-              <a:rPr lang="en-US" sz="820" dirty="0">
-                <a:solidFill>
-                  <a:srgbClr val="D6DEEB"/>
-                </a:solidFill>
-                <a:latin typeface="Consolas" pitchFamily="34" charset="0"/>
-                <a:ea typeface="Consolas" pitchFamily="34" charset="-122"/>
-                <a:cs typeface="Consolas" pitchFamily="34" charset="-120"/>
-              </a:rPr>
-              <a:t> SW_PARAM_NAMES:                           </a:t>
-            </a:r>
-            <a:pPr indent="0" marL="0">
-              <a:lnSpc>
-                <a:spcPct val="108000"/>
-              </a:lnSpc>
-              <a:buNone/>
-            </a:pPr>
-            <a:r>
-              <a:rPr lang="en-US" sz="820" dirty="0">
-                <a:solidFill>
-                  <a:srgbClr val="7F9C7A"/>
-                </a:solidFill>
-                <a:latin typeface="Consolas" pitchFamily="34" charset="0"/>
-                <a:ea typeface="Consolas" pitchFamily="34" charset="-122"/>
-                <a:cs typeface="Consolas" pitchFamily="34" charset="-120"/>
-              </a:rPr>
-              <a:t># 전역변수 값 치환 (COM 속성 쓰기)</a:t>
-            </a:r>
-            <a:endParaRPr lang="en-US" sz="820" dirty="0"/>
-          </a:p>
-          <a:p>
-            <a:pPr indent="0" marL="0">
-              <a:lnSpc>
-                <a:spcPct val="108000"/>
-              </a:lnSpc>
-              <a:buNone/>
-            </a:pPr>
-            <a:r>
-              <a:rPr lang="en-US" sz="820" dirty="0">
-                <a:solidFill>
-                  <a:srgbClr val="D6DEEB"/>
-                </a:solidFill>
-                <a:latin typeface="Consolas" pitchFamily="34" charset="0"/>
-                <a:ea typeface="Consolas" pitchFamily="34" charset="-122"/>
-                <a:cs typeface="Consolas" pitchFamily="34" charset="-120"/>
-              </a:rPr>
-              <a:t>        text = str(int(params[name])) </a:t>
-            </a:r>
-            <a:pPr indent="0" marL="0">
-              <a:lnSpc>
-                <a:spcPct val="108000"/>
-              </a:lnSpc>
-              <a:buNone/>
-            </a:pPr>
-            <a:r>
-              <a:rPr lang="en-US" sz="820" dirty="0">
-                <a:solidFill>
-                  <a:srgbClr val="C792EA"/>
-                </a:solidFill>
-                <a:latin typeface="Consolas" pitchFamily="34" charset="0"/>
-                <a:ea typeface="Consolas" pitchFamily="34" charset="-122"/>
-                <a:cs typeface="Consolas" pitchFamily="34" charset="-120"/>
-              </a:rPr>
-              <a:t>if</a:t>
-            </a:r>
-            <a:pPr indent="0" marL="0">
-              <a:lnSpc>
-                <a:spcPct val="108000"/>
-              </a:lnSpc>
-              <a:buNone/>
-            </a:pPr>
-            <a:r>
-              <a:rPr lang="en-US" sz="820" dirty="0">
-                <a:solidFill>
-                  <a:srgbClr val="D6DEEB"/>
-                </a:solidFill>
-                <a:latin typeface="Consolas" pitchFamily="34" charset="0"/>
-                <a:ea typeface="Consolas" pitchFamily="34" charset="-122"/>
-                <a:cs typeface="Consolas" pitchFamily="34" charset="-120"/>
-              </a:rPr>
-              <a:t> name </a:t>
-            </a:r>
-            <a:pPr indent="0" marL="0">
-              <a:lnSpc>
-                <a:spcPct val="108000"/>
-              </a:lnSpc>
-              <a:buNone/>
-            </a:pPr>
-            <a:r>
-              <a:rPr lang="en-US" sz="820" dirty="0">
-                <a:solidFill>
-                  <a:srgbClr val="C792EA"/>
-                </a:solidFill>
-                <a:latin typeface="Consolas" pitchFamily="34" charset="0"/>
-                <a:ea typeface="Consolas" pitchFamily="34" charset="-122"/>
-                <a:cs typeface="Consolas" pitchFamily="34" charset="-120"/>
-              </a:rPr>
-              <a:t>in</a:t>
-            </a:r>
-            <a:pPr indent="0" marL="0">
-              <a:lnSpc>
-                <a:spcPct val="108000"/>
-              </a:lnSpc>
-              <a:buNone/>
-            </a:pPr>
-            <a:r>
-              <a:rPr lang="en-US" sz="820" dirty="0">
-                <a:solidFill>
-                  <a:srgbClr val="D6DEEB"/>
-                </a:solidFill>
-                <a:latin typeface="Consolas" pitchFamily="34" charset="0"/>
-                <a:ea typeface="Consolas" pitchFamily="34" charset="-122"/>
-                <a:cs typeface="Consolas" pitchFamily="34" charset="-120"/>
-              </a:rPr>
-              <a:t> INT_PARAMS else str(params[name])</a:t>
-            </a:r>
-            <a:endParaRPr lang="en-US" sz="820" dirty="0"/>
-          </a:p>
-          <a:p>
-            <a:pPr indent="0" marL="0">
-              <a:lnSpc>
-                <a:spcPct val="108000"/>
-              </a:lnSpc>
-              <a:buNone/>
-            </a:pPr>
-            <a:r>
-              <a:rPr lang="en-US" sz="820" dirty="0">
-                <a:solidFill>
-                  <a:srgbClr val="D6DEEB"/>
-                </a:solidFill>
-                <a:latin typeface="Consolas" pitchFamily="34" charset="0"/>
-                <a:ea typeface="Consolas" pitchFamily="34" charset="-122"/>
-                <a:cs typeface="Consolas" pitchFamily="34" charset="-120"/>
-              </a:rPr>
-              <a:t>        eqMgr._oleobj_.Invoke(dispid, 0, pythoncom.DISPATCH_PROPERTYPUT,</a:t>
-            </a:r>
-            <a:endParaRPr lang="en-US" sz="820" dirty="0"/>
-          </a:p>
-          <a:p>
-            <a:pPr indent="0" marL="0">
-              <a:lnSpc>
-                <a:spcPct val="108000"/>
-              </a:lnSpc>
-              <a:buNone/>
-            </a:pPr>
-            <a:r>
-              <a:rPr lang="en-US" sz="820" dirty="0">
-                <a:solidFill>
-                  <a:srgbClr val="D6DEEB"/>
-                </a:solidFill>
-                <a:latin typeface="Consolas" pitchFamily="34" charset="0"/>
-                <a:ea typeface="Consolas" pitchFamily="34" charset="-122"/>
-                <a:cs typeface="Consolas" pitchFamily="34" charset="-120"/>
-              </a:rPr>
-              <a:t>                              False, name_to_i[name], </a:t>
-            </a:r>
-            <a:pPr indent="0" marL="0">
-              <a:lnSpc>
-                <a:spcPct val="108000"/>
-              </a:lnSpc>
-              <a:buNone/>
-            </a:pPr>
-            <a:r>
-              <a:rPr lang="en-US" sz="820" dirty="0">
-                <a:solidFill>
-                  <a:srgbClr val="E6A26B"/>
-                </a:solidFill>
-                <a:latin typeface="Consolas" pitchFamily="34" charset="0"/>
-                <a:ea typeface="Consolas" pitchFamily="34" charset="-122"/>
-                <a:cs typeface="Consolas" pitchFamily="34" charset="-120"/>
-              </a:rPr>
-              <a:t>'"%s" = %s'</a:t>
-            </a:r>
-            <a:pPr indent="0" marL="0">
-              <a:lnSpc>
-                <a:spcPct val="108000"/>
-              </a:lnSpc>
-              <a:buNone/>
-            </a:pPr>
-            <a:r>
-              <a:rPr lang="en-US" sz="820" dirty="0">
-                <a:solidFill>
-                  <a:srgbClr val="D6DEEB"/>
-                </a:solidFill>
-                <a:latin typeface="Consolas" pitchFamily="34" charset="0"/>
-                <a:ea typeface="Consolas" pitchFamily="34" charset="-122"/>
-                <a:cs typeface="Consolas" pitchFamily="34" charset="-120"/>
-              </a:rPr>
-              <a:t> % (name, text))</a:t>
-            </a:r>
-            <a:endParaRPr lang="en-US" sz="820" dirty="0"/>
-          </a:p>
-          <a:p>
-            <a:pPr indent="0" marL="0">
-              <a:lnSpc>
-                <a:spcPct val="108000"/>
-              </a:lnSpc>
-              <a:buNone/>
-            </a:pPr>
-            <a:r>
-              <a:rPr lang="en-US" sz="820" dirty="0">
-                <a:solidFill>
-                  <a:srgbClr val="D6DEEB"/>
-                </a:solidFill>
-                <a:latin typeface="Consolas" pitchFamily="34" charset="0"/>
-                <a:ea typeface="Consolas" pitchFamily="34" charset="-122"/>
-                <a:cs typeface="Consolas" pitchFamily="34" charset="-120"/>
-              </a:rPr>
-              <a:t> </a:t>
-            </a:r>
-            <a:endParaRPr lang="en-US" sz="820" dirty="0"/>
-          </a:p>
-          <a:p>
-            <a:pPr indent="0" marL="0">
-              <a:lnSpc>
-                <a:spcPct val="108000"/>
-              </a:lnSpc>
-              <a:buNone/>
-            </a:pPr>
-            <a:r>
-              <a:rPr lang="en-US" sz="820" dirty="0">
-                <a:solidFill>
-                  <a:srgbClr val="D6DEEB"/>
-                </a:solidFill>
-                <a:latin typeface="Consolas" pitchFamily="34" charset="0"/>
-                <a:ea typeface="Consolas" pitchFamily="34" charset="-122"/>
-                <a:cs typeface="Consolas" pitchFamily="34" charset="-120"/>
-              </a:rPr>
-              <a:t>    part.EditRebuild3;  part.Save3(1, errors, warnings)   </a:t>
-            </a:r>
-            <a:pPr indent="0" marL="0">
-              <a:lnSpc>
-                <a:spcPct val="108000"/>
-              </a:lnSpc>
-              <a:buNone/>
-            </a:pPr>
-            <a:r>
-              <a:rPr lang="en-US" sz="820" dirty="0">
-                <a:solidFill>
-                  <a:srgbClr val="7F9C7A"/>
-                </a:solidFill>
-                <a:latin typeface="Consolas" pitchFamily="34" charset="0"/>
-                <a:ea typeface="Consolas" pitchFamily="34" charset="-122"/>
-                <a:cs typeface="Consolas" pitchFamily="34" charset="-120"/>
-              </a:rPr>
-              <a:t># 파트 리빌드 · 저장</a:t>
-            </a:r>
-            <a:endParaRPr lang="en-US" sz="820" dirty="0"/>
-          </a:p>
-          <a:p>
-            <a:pPr indent="0" marL="0">
-              <a:lnSpc>
-                <a:spcPct val="108000"/>
-              </a:lnSpc>
-              <a:buNone/>
-            </a:pPr>
-            <a:r>
-              <a:rPr lang="en-US" sz="820" dirty="0">
-                <a:solidFill>
-                  <a:srgbClr val="D6DEEB"/>
-                </a:solidFill>
-                <a:latin typeface="Consolas" pitchFamily="34" charset="0"/>
-                <a:ea typeface="Consolas" pitchFamily="34" charset="-122"/>
-                <a:cs typeface="Consolas" pitchFamily="34" charset="-120"/>
-              </a:rPr>
-              <a:t>    asm = app.ActivateDoc3(ASM_PATH, False, 0, errors)</a:t>
-            </a:r>
-            <a:endParaRPr lang="en-US" sz="820" dirty="0"/>
-          </a:p>
-          <a:p>
-            <a:pPr indent="0" marL="0">
-              <a:lnSpc>
-                <a:spcPct val="108000"/>
-              </a:lnSpc>
-              <a:buNone/>
-            </a:pPr>
-            <a:r>
-              <a:rPr lang="en-US" sz="820" dirty="0">
-                <a:solidFill>
-                  <a:srgbClr val="D6DEEB"/>
-                </a:solidFill>
-                <a:latin typeface="Consolas" pitchFamily="34" charset="0"/>
-                <a:ea typeface="Consolas" pitchFamily="34" charset="-122"/>
-                <a:cs typeface="Consolas" pitchFamily="34" charset="-120"/>
-              </a:rPr>
-              <a:t>    asm.ForceRebuild3(False);  asm.Save3(1, errors, warnings)</a:t>
-            </a:r>
-            <a:endParaRPr lang="en-US" sz="820" dirty="0"/>
-          </a:p>
-          <a:p>
-            <a:pPr indent="0" marL="0">
-              <a:lnSpc>
-                <a:spcPct val="108000"/>
-              </a:lnSpc>
-              <a:buNone/>
-            </a:pPr>
-            <a:r>
-              <a:rPr lang="en-US" sz="820" dirty="0">
-                <a:solidFill>
-                  <a:srgbClr val="D6DEEB"/>
-                </a:solidFill>
-                <a:latin typeface="Consolas" pitchFamily="34" charset="0"/>
-                <a:ea typeface="Consolas" pitchFamily="34" charset="-122"/>
-                <a:cs typeface="Consolas" pitchFamily="34" charset="-120"/>
-              </a:rPr>
-              <a:t> </a:t>
-            </a:r>
-            <a:endParaRPr lang="en-US" sz="820" dirty="0"/>
-          </a:p>
-          <a:p>
-            <a:pPr indent="0" marL="0">
-              <a:lnSpc>
-                <a:spcPct val="108000"/>
-              </a:lnSpc>
-              <a:buNone/>
-            </a:pPr>
-            <a:r>
-              <a:rPr lang="en-US" sz="820" dirty="0">
-                <a:solidFill>
-                  <a:srgbClr val="D6DEEB"/>
-                </a:solidFill>
-                <a:latin typeface="Consolas" pitchFamily="34" charset="0"/>
-                <a:ea typeface="Consolas" pitchFamily="34" charset="-122"/>
-                <a:cs typeface="Consolas" pitchFamily="34" charset="-120"/>
-              </a:rPr>
-              <a:t>    mp = asm.GetMassProperties                            </a:t>
-            </a:r>
-            <a:pPr indent="0" marL="0">
-              <a:lnSpc>
-                <a:spcPct val="108000"/>
-              </a:lnSpc>
-              <a:buNone/>
-            </a:pPr>
-            <a:r>
-              <a:rPr lang="en-US" sz="820" dirty="0">
-                <a:solidFill>
-                  <a:srgbClr val="7F9C7A"/>
-                </a:solidFill>
-                <a:latin typeface="Consolas" pitchFamily="34" charset="0"/>
-                <a:ea typeface="Consolas" pitchFamily="34" charset="-122"/>
-                <a:cs typeface="Consolas" pitchFamily="34" charset="-120"/>
-              </a:rPr>
-              <a:t># [3] 부피(m³) · [5] 질량(kg)</a:t>
-            </a:r>
-            <a:endParaRPr lang="en-US" sz="820" dirty="0"/>
-          </a:p>
-          <a:p>
-            <a:pPr indent="0" marL="0">
-              <a:lnSpc>
-                <a:spcPct val="108000"/>
-              </a:lnSpc>
-              <a:buNone/>
-            </a:pPr>
-            <a:r>
-              <a:rPr lang="en-US" sz="820" dirty="0">
-                <a:solidFill>
-                  <a:srgbClr val="D6DEEB"/>
-                </a:solidFill>
-                <a:latin typeface="Consolas" pitchFamily="34" charset="0"/>
-                <a:ea typeface="Consolas" pitchFamily="34" charset="-122"/>
-                <a:cs typeface="Consolas" pitchFamily="34" charset="-120"/>
-              </a:rPr>
-              <a:t>    </a:t>
-            </a:r>
-            <a:pPr indent="0" marL="0">
-              <a:lnSpc>
-                <a:spcPct val="108000"/>
-              </a:lnSpc>
-              <a:buNone/>
-            </a:pPr>
-            <a:r>
-              <a:rPr lang="en-US" sz="820" dirty="0">
-                <a:solidFill>
-                  <a:srgbClr val="C792EA"/>
-                </a:solidFill>
-                <a:latin typeface="Consolas" pitchFamily="34" charset="0"/>
-                <a:ea typeface="Consolas" pitchFamily="34" charset="-122"/>
-                <a:cs typeface="Consolas" pitchFamily="34" charset="-120"/>
-              </a:rPr>
-              <a:t>return</a:t>
-            </a:r>
-            <a:pPr indent="0" marL="0">
-              <a:lnSpc>
-                <a:spcPct val="108000"/>
-              </a:lnSpc>
-              <a:buNone/>
-            </a:pPr>
-            <a:r>
-              <a:rPr lang="en-US" sz="820" dirty="0">
-                <a:solidFill>
-                  <a:srgbClr val="D6DEEB"/>
-                </a:solidFill>
-                <a:latin typeface="Consolas" pitchFamily="34" charset="0"/>
-                <a:ea typeface="Consolas" pitchFamily="34" charset="-122"/>
-                <a:cs typeface="Consolas" pitchFamily="34" charset="-120"/>
-              </a:rPr>
-              <a:t> float(mp[5]), float(mp[3]) * 1e9</a:t>
-            </a:r>
-            <a:endParaRPr lang="en-US" sz="820" dirty="0"/>
-          </a:p>
-          <a:p>
-            <a:pPr indent="0" marL="0">
-              <a:lnSpc>
-                <a:spcPct val="108000"/>
-              </a:lnSpc>
-              <a:buNone/>
-            </a:pPr>
-            <a:r>
-              <a:rPr lang="en-US" sz="820" dirty="0">
-                <a:solidFill>
-                  <a:srgbClr val="C792EA"/>
-                </a:solidFill>
-                <a:latin typeface="Consolas" pitchFamily="34" charset="0"/>
-                <a:ea typeface="Consolas" pitchFamily="34" charset="-122"/>
-                <a:cs typeface="Consolas" pitchFamily="34" charset="-120"/>
-              </a:rPr>
-              <a:t>def</a:t>
-            </a:r>
-            <a:pPr indent="0" marL="0">
-              <a:lnSpc>
-                <a:spcPct val="108000"/>
-              </a:lnSpc>
-              <a:buNone/>
-            </a:pPr>
-            <a:r>
-              <a:rPr lang="en-US" sz="820" dirty="0">
-                <a:solidFill>
-                  <a:srgbClr val="D6DEEB"/>
-                </a:solidFill>
-                <a:latin typeface="Consolas" pitchFamily="34" charset="0"/>
-                <a:ea typeface="Consolas" pitchFamily="34" charset="-122"/>
-                <a:cs typeface="Consolas" pitchFamily="34" charset="-120"/>
-              </a:rPr>
-              <a:t> export_step(app, errors, idx):</a:t>
-            </a:r>
-            <a:endParaRPr lang="en-US" sz="820" dirty="0"/>
-          </a:p>
-          <a:p>
-            <a:pPr indent="0" marL="0">
-              <a:lnSpc>
-                <a:spcPct val="108000"/>
-              </a:lnSpc>
-              <a:buNone/>
-            </a:pPr>
-            <a:r>
-              <a:rPr lang="en-US" sz="820" dirty="0">
-                <a:solidFill>
-                  <a:srgbClr val="D6DEEB"/>
-                </a:solidFill>
-                <a:latin typeface="Consolas" pitchFamily="34" charset="0"/>
-                <a:ea typeface="Consolas" pitchFamily="34" charset="-122"/>
-                <a:cs typeface="Consolas" pitchFamily="34" charset="-120"/>
-              </a:rPr>
-              <a:t>    asm = app.ActivateDoc3(ASM_PATH, False, 0, errors)</a:t>
-            </a:r>
-            <a:endParaRPr lang="en-US" sz="820" dirty="0"/>
-          </a:p>
-          <a:p>
-            <a:pPr indent="0" marL="0">
-              <a:lnSpc>
-                <a:spcPct val="108000"/>
-              </a:lnSpc>
-              <a:buNone/>
-            </a:pPr>
-            <a:r>
-              <a:rPr lang="en-US" sz="820" dirty="0">
-                <a:solidFill>
-                  <a:srgbClr val="D6DEEB"/>
-                </a:solidFill>
-                <a:latin typeface="Consolas" pitchFamily="34" charset="0"/>
-                <a:ea typeface="Consolas" pitchFamily="34" charset="-122"/>
-                <a:cs typeface="Consolas" pitchFamily="34" charset="-120"/>
-              </a:rPr>
-              <a:t>    asm.SaveAs3(os.path.join(STEP_DIR, </a:t>
-            </a:r>
-            <a:pPr indent="0" marL="0">
-              <a:lnSpc>
-                <a:spcPct val="108000"/>
-              </a:lnSpc>
-              <a:buNone/>
-            </a:pPr>
-            <a:r>
-              <a:rPr lang="en-US" sz="820" dirty="0">
-                <a:solidFill>
-                  <a:srgbClr val="E6A26B"/>
-                </a:solidFill>
-                <a:latin typeface="Consolas" pitchFamily="34" charset="0"/>
-                <a:ea typeface="Consolas" pitchFamily="34" charset="-122"/>
-                <a:cs typeface="Consolas" pitchFamily="34" charset="-120"/>
-              </a:rPr>
-              <a:t>f"flowpath_{idx:03d}.STEP"</a:t>
-            </a:r>
-            <a:pPr indent="0" marL="0">
-              <a:lnSpc>
-                <a:spcPct val="108000"/>
-              </a:lnSpc>
-              <a:buNone/>
-            </a:pPr>
-            <a:r>
-              <a:rPr lang="en-US" sz="820" dirty="0">
-                <a:solidFill>
-                  <a:srgbClr val="D6DEEB"/>
-                </a:solidFill>
-                <a:latin typeface="Consolas" pitchFamily="34" charset="0"/>
-                <a:ea typeface="Consolas" pitchFamily="34" charset="-122"/>
-                <a:cs typeface="Consolas" pitchFamily="34" charset="-120"/>
-              </a:rPr>
-              <a:t>), 0, 0)</a:t>
-            </a:r>
-            <a:endParaRPr lang="en-US" sz="820" dirty="0"/>
-          </a:p>
-        </p:txBody>
-      </p:sp>
-      <p:sp>
-        <p:nvSpPr>
-          <p:cNvPr id="13" name="Text 11"/>
-          <p:cNvSpPr txBox="1"/>
-          <p:nvPr/>
-        </p:nvSpPr>
-        <p:spPr>
-          <a:xfrm>
-            <a:off x="502920" y="6455664"/>
-            <a:ext cx="11183112" cy="219456"/>
-          </a:xfrm>
-          <a:prstGeom prst="rect">
-            <a:avLst/>
-          </a:prstGeom>
-          <a:noFill/>
-          <a:ln/>
-        </p:spPr>
-        <p:txBody>
-          <a:bodyPr wrap="square" lIns="0" tIns="0" rIns="0" bIns="0" rtlCol="0" anchor="ctr"/>
-          <a:lstStyle/>
-          <a:p>
-            <a:pPr indent="0" marL="0">
-              <a:buNone/>
-            </a:pPr>
-            <a:r>
-              <a:rPr lang="en-US" sz="850" i="1" dirty="0">
-                <a:solidFill>
-                  <a:srgbClr val="6B7A8F"/>
-                </a:solidFill>
-                <a:latin typeface="Malgun Gothic" pitchFamily="34" charset="0"/>
-                <a:ea typeface="Malgun Gothic" pitchFamily="34" charset="-122"/>
-                <a:cs typeface="Malgun Gothic" pitchFamily="34" charset="-120"/>
-              </a:rPr>
-              <a:t>※ 주요 흐름 위주로 발췌 · 일부 로그 출력 및 예외 처리 생략</a:t>
-            </a:r>
-            <a:endParaRPr lang="en-US" sz="850" dirty="0"/>
-          </a:p>
-        </p:txBody>
-      </p:sp>
-    </p:spTree>
-  </p:cSld>
-  <p:clrMapOvr>
-    <a:masterClrMapping/>
-  </p:clrMapOvr>
-</p:sld>
-</file>
-
-<file path=ppt/slides/slide13.xml><?xml version="1.0" encoding="utf-8"?>
-<p:sld xmlns:a="http://schemas.openxmlformats.org/drawingml/2006/main" xmlns:r="http://schemas.openxmlformats.org/officeDocument/2006/relationships" xmlns:p="http://schemas.openxmlformats.org/presentationml/2006/main">
-  <p:cSld name="Slide 13">
-    <p:bg>
-      <p:bgPr>
-        <a:solidFill>
-          <a:srgbClr val="F3F5F8"/>
-        </a:solidFill>
-      </p:bgPr>
-    </p:bg>
-    <p:spTree>
-      <p:nvGrpSpPr>
-        <p:cNvPr id="1" name=""/>
-        <p:cNvGrpSpPr/>
-        <p:nvPr/>
-      </p:nvGrpSpPr>
-      <p:grpSpPr>
-        <a:xfrm>
-          <a:off x="0" y="0"/>
-          <a:ext cx="0" cy="0"/>
-          <a:chOff x="0" y="0"/>
-          <a:chExt cx="0" cy="0"/>
-        </a:xfrm>
-      </p:grpSpPr>
-      <p:sp>
-        <p:nvSpPr>
-          <p:cNvPr id="2" name="Shape 0"/>
-          <p:cNvSpPr/>
-          <p:nvPr/>
-        </p:nvSpPr>
-        <p:spPr>
-          <a:xfrm>
-            <a:off x="502920" y="384048"/>
-            <a:ext cx="475488" cy="475488"/>
-          </a:xfrm>
-          <a:prstGeom prst="rect">
             <a:avLst/>
           </a:prstGeom>
           <a:solidFill>
@@ -8042,14 +6080,14 @@
       </p:sp>
       <p:sp>
         <p:nvSpPr>
-          <p:cNvPr id="3" name="Text 1"/>
+          <p:cNvPr id="7" name="Text 5"/>
           <p:cNvSpPr txBox="1"/>
           <p:nvPr/>
         </p:nvSpPr>
         <p:spPr>
           <a:xfrm>
-            <a:off x="502920" y="384048"/>
-            <a:ext cx="475488" cy="475488"/>
+            <a:off x="502920" y="1170432"/>
+            <a:ext cx="256032" cy="256032"/>
           </a:xfrm>
           <a:prstGeom prst="rect">
             <a:avLst/>
@@ -8065,7 +6103,7 @@
               <a:buNone/>
             </a:pPr>
             <a:r>
-              <a:rPr lang="en-US" sz="1600" b="1" dirty="0">
+              <a:rPr lang="en-US" sz="900" b="1" dirty="0">
                 <a:solidFill>
                   <a:srgbClr val="FFFFFF"/>
                 </a:solidFill>
@@ -8073,22 +6111,22 @@
                 <a:ea typeface="Malgun Gothic" pitchFamily="34" charset="-122"/>
                 <a:cs typeface="Malgun Gothic" pitchFamily="34" charset="-120"/>
               </a:rPr>
-              <a:t>A-2</a:t>
-            </a:r>
-            <a:endParaRPr lang="en-US" sz="1600" dirty="0"/>
-          </a:p>
-        </p:txBody>
-      </p:sp>
-      <p:sp>
-        <p:nvSpPr>
-          <p:cNvPr id="4" name="Text 2"/>
+              <a:t>1</a:t>
+            </a:r>
+            <a:endParaRPr lang="en-US" sz="900" dirty="0"/>
+          </a:p>
+        </p:txBody>
+      </p:sp>
+      <p:sp>
+        <p:nvSpPr>
+          <p:cNvPr id="8" name="Text 6"/>
           <p:cNvSpPr txBox="1"/>
           <p:nvPr/>
         </p:nvSpPr>
         <p:spPr>
           <a:xfrm>
-            <a:off x="1124712" y="365760"/>
-            <a:ext cx="7315200" cy="237744"/>
+            <a:off x="850392" y="1152144"/>
+            <a:ext cx="2267712" cy="292608"/>
           </a:xfrm>
           <a:prstGeom prst="rect">
             <a:avLst/>
@@ -8104,46 +6142,7 @@
               <a:buNone/>
             </a:pPr>
             <a:r>
-              <a:rPr lang="en-US" sz="1050" b="1" spc="100" kern="0" dirty="0">
-                <a:solidFill>
-                  <a:srgbClr val="00A3C4"/>
-                </a:solidFill>
-                <a:latin typeface="Malgun Gothic" pitchFamily="34" charset="0"/>
-                <a:ea typeface="Malgun Gothic" pitchFamily="34" charset="-122"/>
-                <a:cs typeface="Malgun Gothic" pitchFamily="34" charset="-120"/>
-              </a:rPr>
-              <a:t>부록</a:t>
-            </a:r>
-            <a:endParaRPr lang="en-US" sz="1050" dirty="0"/>
-          </a:p>
-        </p:txBody>
-      </p:sp>
-      <p:sp>
-        <p:nvSpPr>
-          <p:cNvPr id="5" name="Text 3"/>
-          <p:cNvSpPr txBox="1"/>
-          <p:nvPr/>
-        </p:nvSpPr>
-        <p:spPr>
-          <a:xfrm>
-            <a:off x="1124712" y="548640"/>
-            <a:ext cx="10607040" cy="384048"/>
-          </a:xfrm>
-          <a:prstGeom prst="rect">
-            <a:avLst/>
-          </a:prstGeom>
-          <a:noFill/>
-          <a:ln/>
-        </p:spPr>
-        <p:txBody>
-          <a:bodyPr wrap="square" lIns="0" tIns="0" rIns="0" bIns="0" rtlCol="0" anchor="ctr"/>
-          <a:lstStyle/>
-          <a:p>
-            <a:pPr indent="0" marL="0">
-              <a:buNone/>
-            </a:pPr>
-            <a:r>
-              <a:rPr lang="en-US" sz="2200" b="1" dirty="0">
+              <a:rPr lang="en-US" sz="1100" b="1" dirty="0">
                 <a:solidFill>
                   <a:srgbClr val="16305B"/>
                 </a:solidFill>
@@ -8151,111 +6150,36 @@
                 <a:ea typeface="Malgun Gothic" pitchFamily="34" charset="-122"/>
                 <a:cs typeface="Malgun Gothic" pitchFamily="34" charset="-120"/>
               </a:rPr>
-              <a:t>Icepak 제어 코드 — 해석 모델 구성 · 해석 실행 · 결과 추출</a:t>
-            </a:r>
-            <a:endParaRPr lang="en-US" sz="2200" dirty="0"/>
-          </a:p>
-        </p:txBody>
-      </p:sp>
-      <p:sp>
-        <p:nvSpPr>
-          <p:cNvPr id="6" name="Shape 4"/>
+              <a:t>프로젝트 생성</a:t>
+            </a:r>
+            <a:endParaRPr lang="en-US" sz="1100" dirty="0"/>
+          </a:p>
+        </p:txBody>
+      </p:sp>
+      <p:sp>
+        <p:nvSpPr>
+          <p:cNvPr id="9" name="Shape 7"/>
           <p:cNvSpPr/>
           <p:nvPr/>
         </p:nvSpPr>
         <p:spPr>
           <a:xfrm>
-            <a:off x="502920" y="1170432"/>
-            <a:ext cx="11183112" cy="5230368"/>
+            <a:off x="502920" y="1536192"/>
+            <a:ext cx="2615184" cy="1874520"/>
           </a:xfrm>
           <a:prstGeom prst="roundRect">
             <a:avLst>
-              <a:gd name="adj" fmla="val 1049"/>
+              <a:gd name="adj" fmla="val 2439"/>
             </a:avLst>
           </a:prstGeom>
           <a:solidFill>
-            <a:srgbClr val="1E2430"/>
+            <a:srgbClr val="FFFFFF"/>
           </a:solidFill>
           <a:ln w="12700">
             <a:solidFill>
-              <a:srgbClr val="1E2430"/>
+              <a:srgbClr val="C3CDDA"/>
             </a:solidFill>
-            <a:prstDash val="solid"/>
-          </a:ln>
-        </p:spPr>
-      </p:sp>
-      <p:sp>
-        <p:nvSpPr>
-          <p:cNvPr id="7" name="Shape 5"/>
-          <p:cNvSpPr/>
-          <p:nvPr/>
-        </p:nvSpPr>
-        <p:spPr>
-          <a:xfrm>
-            <a:off x="667512" y="1298448"/>
-            <a:ext cx="91440" cy="91440"/>
-          </a:xfrm>
-          <a:prstGeom prst="ellipse">
-            <a:avLst/>
-          </a:prstGeom>
-          <a:solidFill>
-            <a:srgbClr val="FF5F57"/>
-          </a:solidFill>
-          <a:ln w="12700">
-            <a:solidFill>
-              <a:srgbClr val="FF5F57"/>
-            </a:solidFill>
-            <a:prstDash val="solid"/>
-          </a:ln>
-        </p:spPr>
-      </p:sp>
-      <p:sp>
-        <p:nvSpPr>
-          <p:cNvPr id="8" name="Shape 6"/>
-          <p:cNvSpPr/>
-          <p:nvPr/>
-        </p:nvSpPr>
-        <p:spPr>
-          <a:xfrm>
-            <a:off x="822960" y="1298448"/>
-            <a:ext cx="91440" cy="91440"/>
-          </a:xfrm>
-          <a:prstGeom prst="ellipse">
-            <a:avLst/>
-          </a:prstGeom>
-          <a:solidFill>
-            <a:srgbClr val="FEBC2E"/>
-          </a:solidFill>
-          <a:ln w="12700">
-            <a:solidFill>
-              <a:srgbClr val="FEBC2E"/>
-            </a:solidFill>
-            <a:prstDash val="solid"/>
-          </a:ln>
-        </p:spPr>
-      </p:sp>
-      <p:sp>
-        <p:nvSpPr>
-          <p:cNvPr id="9" name="Shape 7"/>
-          <p:cNvSpPr/>
-          <p:nvPr/>
-        </p:nvSpPr>
-        <p:spPr>
-          <a:xfrm>
-            <a:off x="978408" y="1298448"/>
-            <a:ext cx="91440" cy="91440"/>
-          </a:xfrm>
-          <a:prstGeom prst="ellipse">
-            <a:avLst/>
-          </a:prstGeom>
-          <a:solidFill>
-            <a:srgbClr val="28C840"/>
-          </a:solidFill>
-          <a:ln w="12700">
-            <a:solidFill>
-              <a:srgbClr val="28C840"/>
-            </a:solidFill>
-            <a:prstDash val="solid"/>
+            <a:prstDash val="dash"/>
           </a:ln>
         </p:spPr>
       </p:sp>
@@ -8267,8 +6191,8 @@
         </p:nvSpPr>
         <p:spPr>
           <a:xfrm>
-            <a:off x="1161288" y="1234440"/>
-            <a:ext cx="10360152" cy="219456"/>
+            <a:off x="502920" y="1536192"/>
+            <a:ext cx="2615184" cy="1874520"/>
           </a:xfrm>
           <a:prstGeom prst="rect">
             <a:avLst/>
@@ -8280,57 +6204,34 @@
           <a:bodyPr wrap="square" lIns="0" tIns="0" rIns="0" bIns="0" rtlCol="0" anchor="ctr"/>
           <a:lstStyle/>
           <a:p>
-            <a:pPr indent="0" marL="0">
-              <a:buNone/>
-            </a:pPr>
-            <a:r>
-              <a:rPr lang="en-US" sz="850" dirty="0">
-                <a:solidFill>
-                  <a:srgbClr val="8A94A6"/>
-                </a:solidFill>
-                <a:latin typeface="Consolas" pitchFamily="34" charset="0"/>
-                <a:ea typeface="Consolas" pitchFamily="34" charset="-122"/>
-                <a:cs typeface="Consolas" pitchFamily="34" charset="-120"/>
-              </a:rPr>
-              <a:t>icepak.py — run_icepak()</a:t>
-            </a:r>
-            <a:endParaRPr lang="en-US" sz="850" dirty="0"/>
-          </a:p>
-        </p:txBody>
-      </p:sp>
-      <p:sp>
-        <p:nvSpPr>
-          <p:cNvPr id="11" name="Shape 9"/>
-          <p:cNvSpPr/>
-          <p:nvPr/>
-        </p:nvSpPr>
-        <p:spPr>
-          <a:xfrm>
-            <a:off x="502920" y="1517904"/>
-            <a:ext cx="11183112" cy="0"/>
-          </a:xfrm>
-          <a:prstGeom prst="line">
-            <a:avLst/>
-          </a:prstGeom>
-          <a:noFill/>
-          <a:ln w="9525">
-            <a:solidFill>
-              <a:srgbClr val="2E3645"/>
-            </a:solidFill>
-            <a:prstDash val="solid"/>
-          </a:ln>
-        </p:spPr>
-      </p:sp>
-      <p:sp>
-        <p:nvSpPr>
-          <p:cNvPr id="12" name="Text 10"/>
+            <a:pPr algn="ctr" indent="0" marL="0">
+              <a:buNone/>
+            </a:pPr>
+            <a:r>
+              <a:rPr lang="en-US" sz="1000" b="1" dirty="0">
+                <a:solidFill>
+                  <a:srgbClr val="B5C0CF"/>
+                </a:solidFill>
+                <a:latin typeface="Malgun Gothic" pitchFamily="34" charset="0"/>
+                <a:ea typeface="Malgun Gothic" pitchFamily="34" charset="-122"/>
+                <a:cs typeface="Malgun Gothic" pitchFamily="34" charset="-120"/>
+              </a:rPr>
+              <a:t>GUI 캡처</a:t>
+            </a:r>
+            <a:endParaRPr lang="en-US" sz="1000" dirty="0"/>
+          </a:p>
+        </p:txBody>
+      </p:sp>
+      <p:sp>
+        <p:nvSpPr>
+          <p:cNvPr id="11" name="Text 9"/>
           <p:cNvSpPr txBox="1"/>
           <p:nvPr/>
         </p:nvSpPr>
         <p:spPr>
           <a:xfrm>
-            <a:off x="685800" y="1627632"/>
-            <a:ext cx="10890504" cy="4663440"/>
+            <a:off x="502920" y="3456432"/>
+            <a:ext cx="2615184" cy="274320"/>
           </a:xfrm>
           <a:prstGeom prst="rect">
             <a:avLst/>
@@ -8339,1716 +6240,14 @@
           <a:ln/>
         </p:spPr>
         <p:txBody>
-          <a:bodyPr wrap="square" lIns="0" tIns="0" rIns="0" bIns="0" rtlCol="0" anchor="t"/>
+          <a:bodyPr wrap="square" lIns="0" tIns="0" rIns="0" bIns="0" rtlCol="0" anchor="ctr"/>
           <a:lstStyle/>
           <a:p>
             <a:pPr indent="0" marL="0">
-              <a:lnSpc>
-                <a:spcPct val="108000"/>
-              </a:lnSpc>
-              <a:buNone/>
-            </a:pPr>
-            <a:r>
-              <a:rPr lang="en-US" sz="850" dirty="0">
-                <a:solidFill>
-                  <a:srgbClr val="C792EA"/>
-                </a:solidFill>
-                <a:latin typeface="Consolas" pitchFamily="34" charset="0"/>
-                <a:ea typeface="Consolas" pitchFamily="34" charset="-122"/>
-                <a:cs typeface="Consolas" pitchFamily="34" charset="-120"/>
-              </a:rPr>
-              <a:t>def</a:t>
-            </a:r>
-            <a:pPr indent="0" marL="0">
-              <a:lnSpc>
-                <a:spcPct val="108000"/>
-              </a:lnSpc>
-              <a:buNone/>
-            </a:pPr>
-            <a:r>
-              <a:rPr lang="en-US" sz="850" dirty="0">
-                <a:solidFill>
-                  <a:srgbClr val="D6DEEB"/>
-                </a:solidFill>
-                <a:latin typeface="Consolas" pitchFamily="34" charset="0"/>
-                <a:ea typeface="Consolas" pitchFamily="34" charset="-122"/>
-                <a:cs typeface="Consolas" pitchFamily="34" charset="-120"/>
-              </a:rPr>
-              <a:t> run_icepak(desktop, ipk, step_file, idx, params):</a:t>
-            </a:r>
-            <a:endParaRPr lang="en-US" sz="850" dirty="0"/>
-          </a:p>
-          <a:p>
-            <a:pPr indent="0" marL="0">
-              <a:lnSpc>
-                <a:spcPct val="108000"/>
-              </a:lnSpc>
-              <a:buNone/>
-            </a:pPr>
-            <a:r>
-              <a:rPr lang="en-US" sz="850" dirty="0">
-                <a:solidFill>
-                  <a:srgbClr val="D6DEEB"/>
-                </a:solidFill>
-                <a:latin typeface="Consolas" pitchFamily="34" charset="0"/>
-                <a:ea typeface="Consolas" pitchFamily="34" charset="-122"/>
-                <a:cs typeface="Consolas" pitchFamily="34" charset="-120"/>
-              </a:rPr>
-              <a:t>    </a:t>
-            </a:r>
-            <a:pPr indent="0" marL="0">
-              <a:lnSpc>
-                <a:spcPct val="108000"/>
-              </a:lnSpc>
-              <a:buNone/>
-            </a:pPr>
-            <a:r>
-              <a:rPr lang="en-US" sz="850" dirty="0">
-                <a:solidFill>
-                  <a:srgbClr val="C792EA"/>
-                </a:solidFill>
-                <a:latin typeface="Consolas" pitchFamily="34" charset="0"/>
-                <a:ea typeface="Consolas" pitchFamily="34" charset="-122"/>
-                <a:cs typeface="Consolas" pitchFamily="34" charset="-120"/>
-              </a:rPr>
-              <a:t>if</a:t>
-            </a:r>
-            <a:pPr indent="0" marL="0">
-              <a:lnSpc>
-                <a:spcPct val="108000"/>
-              </a:lnSpc>
-              <a:buNone/>
-            </a:pPr>
-            <a:r>
-              <a:rPr lang="en-US" sz="850" dirty="0">
-                <a:solidFill>
-                  <a:srgbClr val="D6DEEB"/>
-                </a:solidFill>
-                <a:latin typeface="Consolas" pitchFamily="34" charset="0"/>
-                <a:ea typeface="Consolas" pitchFamily="34" charset="-122"/>
-                <a:cs typeface="Consolas" pitchFamily="34" charset="-120"/>
-              </a:rPr>
-              <a:t> ipk is not None:                                   </a:t>
-            </a:r>
-            <a:pPr indent="0" marL="0">
-              <a:lnSpc>
-                <a:spcPct val="108000"/>
-              </a:lnSpc>
-              <a:buNone/>
-            </a:pPr>
-            <a:r>
-              <a:rPr lang="en-US" sz="850" dirty="0">
-                <a:solidFill>
-                  <a:srgbClr val="7F9C7A"/>
-                </a:solidFill>
-                <a:latin typeface="Consolas" pitchFamily="34" charset="0"/>
-                <a:ea typeface="Consolas" pitchFamily="34" charset="-122"/>
-                <a:cs typeface="Consolas" pitchFamily="34" charset="-120"/>
-              </a:rPr>
-              <a:t># 이전 회차 프로젝트 닫기</a:t>
-            </a:r>
-            <a:endParaRPr lang="en-US" sz="850" dirty="0"/>
-          </a:p>
-          <a:p>
-            <a:pPr indent="0" marL="0">
-              <a:lnSpc>
-                <a:spcPct val="108000"/>
-              </a:lnSpc>
-              <a:buNone/>
-            </a:pPr>
-            <a:r>
-              <a:rPr lang="en-US" sz="850" dirty="0">
-                <a:solidFill>
-                  <a:srgbClr val="D6DEEB"/>
-                </a:solidFill>
-                <a:latin typeface="Consolas" pitchFamily="34" charset="0"/>
-                <a:ea typeface="Consolas" pitchFamily="34" charset="-122"/>
-                <a:cs typeface="Consolas" pitchFamily="34" charset="-120"/>
-              </a:rPr>
-              <a:t>        ipk.odesktop.CloseProject(ipk.project_name)</a:t>
-            </a:r>
-            <a:endParaRPr lang="en-US" sz="850" dirty="0"/>
-          </a:p>
-          <a:p>
-            <a:pPr indent="0" marL="0">
-              <a:lnSpc>
-                <a:spcPct val="108000"/>
-              </a:lnSpc>
-              <a:buNone/>
-            </a:pPr>
-            <a:r>
-              <a:rPr lang="en-US" sz="850" dirty="0">
-                <a:solidFill>
-                  <a:srgbClr val="D6DEEB"/>
-                </a:solidFill>
-                <a:latin typeface="Consolas" pitchFamily="34" charset="0"/>
-                <a:ea typeface="Consolas" pitchFamily="34" charset="-122"/>
-                <a:cs typeface="Consolas" pitchFamily="34" charset="-120"/>
-              </a:rPr>
-              <a:t>    </a:t>
-            </a:r>
-            <a:pPr indent="0" marL="0">
-              <a:lnSpc>
-                <a:spcPct val="108000"/>
-              </a:lnSpc>
-              <a:buNone/>
-            </a:pPr>
-            <a:r>
-              <a:rPr lang="en-US" sz="850" dirty="0">
-                <a:solidFill>
-                  <a:srgbClr val="C792EA"/>
-                </a:solidFill>
-                <a:latin typeface="Consolas" pitchFamily="34" charset="0"/>
-                <a:ea typeface="Consolas" pitchFamily="34" charset="-122"/>
-                <a:cs typeface="Consolas" pitchFamily="34" charset="-120"/>
-              </a:rPr>
-              <a:t>for</a:t>
-            </a:r>
-            <a:pPr indent="0" marL="0">
-              <a:lnSpc>
-                <a:spcPct val="108000"/>
-              </a:lnSpc>
-              <a:buNone/>
-            </a:pPr>
-            <a:r>
-              <a:rPr lang="en-US" sz="850" dirty="0">
-                <a:solidFill>
-                  <a:srgbClr val="D6DEEB"/>
-                </a:solidFill>
-                <a:latin typeface="Consolas" pitchFamily="34" charset="0"/>
-                <a:ea typeface="Consolas" pitchFamily="34" charset="-122"/>
-                <a:cs typeface="Consolas" pitchFamily="34" charset="-120"/>
-              </a:rPr>
-              <a:t> ext </a:t>
-            </a:r>
-            <a:pPr indent="0" marL="0">
-              <a:lnSpc>
-                <a:spcPct val="108000"/>
-              </a:lnSpc>
-              <a:buNone/>
-            </a:pPr>
-            <a:r>
-              <a:rPr lang="en-US" sz="850" dirty="0">
-                <a:solidFill>
-                  <a:srgbClr val="C792EA"/>
-                </a:solidFill>
-                <a:latin typeface="Consolas" pitchFamily="34" charset="0"/>
-                <a:ea typeface="Consolas" pitchFamily="34" charset="-122"/>
-                <a:cs typeface="Consolas" pitchFamily="34" charset="-120"/>
-              </a:rPr>
-              <a:t>in</a:t>
-            </a:r>
-            <a:pPr indent="0" marL="0">
-              <a:lnSpc>
-                <a:spcPct val="108000"/>
-              </a:lnSpc>
-              <a:buNone/>
-            </a:pPr>
-            <a:r>
-              <a:rPr lang="en-US" sz="850" dirty="0">
-                <a:solidFill>
-                  <a:srgbClr val="D6DEEB"/>
-                </a:solidFill>
-                <a:latin typeface="Consolas" pitchFamily="34" charset="0"/>
-                <a:ea typeface="Consolas" pitchFamily="34" charset="-122"/>
-                <a:cs typeface="Consolas" pitchFamily="34" charset="-120"/>
-              </a:rPr>
-              <a:t> (</a:t>
-            </a:r>
-            <a:pPr indent="0" marL="0">
-              <a:lnSpc>
-                <a:spcPct val="108000"/>
-              </a:lnSpc>
-              <a:buNone/>
-            </a:pPr>
-            <a:r>
-              <a:rPr lang="en-US" sz="850" dirty="0">
-                <a:solidFill>
-                  <a:srgbClr val="E6A26B"/>
-                </a:solidFill>
-                <a:latin typeface="Consolas" pitchFamily="34" charset="0"/>
-                <a:ea typeface="Consolas" pitchFamily="34" charset="-122"/>
-                <a:cs typeface="Consolas" pitchFamily="34" charset="-120"/>
-              </a:rPr>
-              <a:t>".aedt"</a:t>
-            </a:r>
-            <a:pPr indent="0" marL="0">
-              <a:lnSpc>
-                <a:spcPct val="108000"/>
-              </a:lnSpc>
-              <a:buNone/>
-            </a:pPr>
-            <a:r>
-              <a:rPr lang="en-US" sz="850" dirty="0">
-                <a:solidFill>
-                  <a:srgbClr val="D6DEEB"/>
-                </a:solidFill>
-                <a:latin typeface="Consolas" pitchFamily="34" charset="0"/>
-                <a:ea typeface="Consolas" pitchFamily="34" charset="-122"/>
-                <a:cs typeface="Consolas" pitchFamily="34" charset="-120"/>
-              </a:rPr>
-              <a:t>, </a:t>
-            </a:r>
-            <a:pPr indent="0" marL="0">
-              <a:lnSpc>
-                <a:spcPct val="108000"/>
-              </a:lnSpc>
-              <a:buNone/>
-            </a:pPr>
-            <a:r>
-              <a:rPr lang="en-US" sz="850" dirty="0">
-                <a:solidFill>
-                  <a:srgbClr val="E6A26B"/>
-                </a:solidFill>
-                <a:latin typeface="Consolas" pitchFamily="34" charset="0"/>
-                <a:ea typeface="Consolas" pitchFamily="34" charset="-122"/>
-                <a:cs typeface="Consolas" pitchFamily="34" charset="-120"/>
-              </a:rPr>
-              <a:t>".aedt.lock"</a:t>
-            </a:r>
-            <a:pPr indent="0" marL="0">
-              <a:lnSpc>
-                <a:spcPct val="108000"/>
-              </a:lnSpc>
-              <a:buNone/>
-            </a:pPr>
-            <a:r>
-              <a:rPr lang="en-US" sz="850" dirty="0">
-                <a:solidFill>
-                  <a:srgbClr val="D6DEEB"/>
-                </a:solidFill>
-                <a:latin typeface="Consolas" pitchFamily="34" charset="0"/>
-                <a:ea typeface="Consolas" pitchFamily="34" charset="-122"/>
-                <a:cs typeface="Consolas" pitchFamily="34" charset="-120"/>
-              </a:rPr>
-              <a:t>):                   </a:t>
-            </a:r>
-            <a:pPr indent="0" marL="0">
-              <a:lnSpc>
-                <a:spcPct val="108000"/>
-              </a:lnSpc>
-              <a:buNone/>
-            </a:pPr>
-            <a:r>
-              <a:rPr lang="en-US" sz="850" dirty="0">
-                <a:solidFill>
-                  <a:srgbClr val="7F9C7A"/>
-                </a:solidFill>
-                <a:latin typeface="Consolas" pitchFamily="34" charset="0"/>
-                <a:ea typeface="Consolas" pitchFamily="34" charset="-122"/>
-                <a:cs typeface="Consolas" pitchFamily="34" charset="-120"/>
-              </a:rPr>
-              <a:t># 잔여 · 잠금 파일 정리</a:t>
-            </a:r>
-            <a:endParaRPr lang="en-US" sz="850" dirty="0"/>
-          </a:p>
-          <a:p>
-            <a:pPr indent="0" marL="0">
-              <a:lnSpc>
-                <a:spcPct val="108000"/>
-              </a:lnSpc>
-              <a:buNone/>
-            </a:pPr>
-            <a:r>
-              <a:rPr lang="en-US" sz="850" dirty="0">
-                <a:solidFill>
-                  <a:srgbClr val="D6DEEB"/>
-                </a:solidFill>
-                <a:latin typeface="Consolas" pitchFamily="34" charset="0"/>
-                <a:ea typeface="Consolas" pitchFamily="34" charset="-122"/>
-                <a:cs typeface="Consolas" pitchFamily="34" charset="-120"/>
-              </a:rPr>
-              <a:t>        </a:t>
-            </a:r>
-            <a:pPr indent="0" marL="0">
-              <a:lnSpc>
-                <a:spcPct val="108000"/>
-              </a:lnSpc>
-              <a:buNone/>
-            </a:pPr>
-            <a:r>
-              <a:rPr lang="en-US" sz="850" dirty="0">
-                <a:solidFill>
-                  <a:srgbClr val="C792EA"/>
-                </a:solidFill>
-                <a:latin typeface="Consolas" pitchFamily="34" charset="0"/>
-                <a:ea typeface="Consolas" pitchFamily="34" charset="-122"/>
-                <a:cs typeface="Consolas" pitchFamily="34" charset="-120"/>
-              </a:rPr>
-              <a:t>if</a:t>
-            </a:r>
-            <a:pPr indent="0" marL="0">
-              <a:lnSpc>
-                <a:spcPct val="108000"/>
-              </a:lnSpc>
-              <a:buNone/>
-            </a:pPr>
-            <a:r>
-              <a:rPr lang="en-US" sz="850" dirty="0">
-                <a:solidFill>
-                  <a:srgbClr val="D6DEEB"/>
-                </a:solidFill>
-                <a:latin typeface="Consolas" pitchFamily="34" charset="0"/>
-                <a:ea typeface="Consolas" pitchFamily="34" charset="-122"/>
-                <a:cs typeface="Consolas" pitchFamily="34" charset="-120"/>
-              </a:rPr>
-              <a:t> os.path.exists(PROJ_PATH + ext): os.remove(PROJ_PATH + ext)</a:t>
-            </a:r>
-            <a:endParaRPr lang="en-US" sz="850" dirty="0"/>
-          </a:p>
-          <a:p>
-            <a:pPr indent="0" marL="0">
-              <a:lnSpc>
-                <a:spcPct val="108000"/>
-              </a:lnSpc>
-              <a:buNone/>
-            </a:pPr>
-            <a:r>
-              <a:rPr lang="en-US" sz="850" dirty="0">
-                <a:solidFill>
-                  <a:srgbClr val="D6DEEB"/>
-                </a:solidFill>
-                <a:latin typeface="Consolas" pitchFamily="34" charset="0"/>
-                <a:ea typeface="Consolas" pitchFamily="34" charset="-122"/>
-                <a:cs typeface="Consolas" pitchFamily="34" charset="-120"/>
-              </a:rPr>
-              <a:t> </a:t>
-            </a:r>
-            <a:endParaRPr lang="en-US" sz="850" dirty="0"/>
-          </a:p>
-          <a:p>
-            <a:pPr indent="0" marL="0">
-              <a:lnSpc>
-                <a:spcPct val="108000"/>
-              </a:lnSpc>
-              <a:buNone/>
-            </a:pPr>
-            <a:r>
-              <a:rPr lang="en-US" sz="850" dirty="0">
-                <a:solidFill>
-                  <a:srgbClr val="D6DEEB"/>
-                </a:solidFill>
-                <a:latin typeface="Consolas" pitchFamily="34" charset="0"/>
-                <a:ea typeface="Consolas" pitchFamily="34" charset="-122"/>
-                <a:cs typeface="Consolas" pitchFamily="34" charset="-120"/>
-              </a:rPr>
-              <a:t>    ipk = Icepak(project=PROJ_PATH, design=</a:t>
-            </a:r>
-            <a:pPr indent="0" marL="0">
-              <a:lnSpc>
-                <a:spcPct val="108000"/>
-              </a:lnSpc>
-              <a:buNone/>
-            </a:pPr>
-            <a:r>
-              <a:rPr lang="en-US" sz="850" dirty="0">
-                <a:solidFill>
-                  <a:srgbClr val="E6A26B"/>
-                </a:solidFill>
-                <a:latin typeface="Consolas" pitchFamily="34" charset="0"/>
-                <a:ea typeface="Consolas" pitchFamily="34" charset="-122"/>
-                <a:cs typeface="Consolas" pitchFamily="34" charset="-120"/>
-              </a:rPr>
-              <a:t>f"IcepakDesign_{idx:03d}"</a:t>
-            </a:r>
-            <a:pPr indent="0" marL="0">
-              <a:lnSpc>
-                <a:spcPct val="108000"/>
-              </a:lnSpc>
-              <a:buNone/>
-            </a:pPr>
-            <a:r>
-              <a:rPr lang="en-US" sz="850" dirty="0">
-                <a:solidFill>
-                  <a:srgbClr val="D6DEEB"/>
-                </a:solidFill>
-                <a:latin typeface="Consolas" pitchFamily="34" charset="0"/>
-                <a:ea typeface="Consolas" pitchFamily="34" charset="-122"/>
-                <a:cs typeface="Consolas" pitchFamily="34" charset="-120"/>
-              </a:rPr>
-              <a:t>,</a:t>
-            </a:r>
-            <a:endParaRPr lang="en-US" sz="850" dirty="0"/>
-          </a:p>
-          <a:p>
-            <a:pPr indent="0" marL="0">
-              <a:lnSpc>
-                <a:spcPct val="108000"/>
-              </a:lnSpc>
-              <a:buNone/>
-            </a:pPr>
-            <a:r>
-              <a:rPr lang="en-US" sz="850" dirty="0">
-                <a:solidFill>
-                  <a:srgbClr val="D6DEEB"/>
-                </a:solidFill>
-                <a:latin typeface="Consolas" pitchFamily="34" charset="0"/>
-                <a:ea typeface="Consolas" pitchFamily="34" charset="-122"/>
-                <a:cs typeface="Consolas" pitchFamily="34" charset="-120"/>
-              </a:rPr>
-              <a:t>                 new_desktop=False, close_on_exit=False)</a:t>
-            </a:r>
-            <a:endParaRPr lang="en-US" sz="850" dirty="0"/>
-          </a:p>
-          <a:p>
-            <a:pPr indent="0" marL="0">
-              <a:lnSpc>
-                <a:spcPct val="108000"/>
-              </a:lnSpc>
-              <a:buNone/>
-            </a:pPr>
-            <a:r>
-              <a:rPr lang="en-US" sz="850" dirty="0">
-                <a:solidFill>
-                  <a:srgbClr val="D6DEEB"/>
-                </a:solidFill>
-                <a:latin typeface="Consolas" pitchFamily="34" charset="0"/>
-                <a:ea typeface="Consolas" pitchFamily="34" charset="-122"/>
-                <a:cs typeface="Consolas" pitchFamily="34" charset="-120"/>
-              </a:rPr>
-              <a:t>    ipk.modeler.import_3d_cad(step_file)                  </a:t>
-            </a:r>
-            <a:pPr indent="0" marL="0">
-              <a:lnSpc>
-                <a:spcPct val="108000"/>
-              </a:lnSpc>
-              <a:buNone/>
-            </a:pPr>
-            <a:r>
-              <a:rPr lang="en-US" sz="850" dirty="0">
-                <a:solidFill>
-                  <a:srgbClr val="7F9C7A"/>
-                </a:solidFill>
-                <a:latin typeface="Consolas" pitchFamily="34" charset="0"/>
-                <a:ea typeface="Consolas" pitchFamily="34" charset="-122"/>
-                <a:cs typeface="Consolas" pitchFamily="34" charset="-120"/>
-              </a:rPr>
-              <a:t># STEP 불러오기</a:t>
-            </a:r>
-            <a:endParaRPr lang="en-US" sz="850" dirty="0"/>
-          </a:p>
-          <a:p>
-            <a:pPr indent="0" marL="0">
-              <a:lnSpc>
-                <a:spcPct val="108000"/>
-              </a:lnSpc>
-              <a:buNone/>
-            </a:pPr>
-            <a:r>
-              <a:rPr lang="en-US" sz="850" dirty="0">
-                <a:solidFill>
-                  <a:srgbClr val="D6DEEB"/>
-                </a:solidFill>
-                <a:latin typeface="Consolas" pitchFamily="34" charset="0"/>
-                <a:ea typeface="Consolas" pitchFamily="34" charset="-122"/>
-                <a:cs typeface="Consolas" pitchFamily="34" charset="-120"/>
-              </a:rPr>
-              <a:t>    oDesign = ipk.odesign</a:t>
-            </a:r>
-            <a:endParaRPr lang="en-US" sz="850" dirty="0"/>
-          </a:p>
-          <a:p>
-            <a:pPr indent="0" marL="0">
-              <a:lnSpc>
-                <a:spcPct val="108000"/>
-              </a:lnSpc>
-              <a:buNone/>
-            </a:pPr>
-            <a:r>
-              <a:rPr lang="en-US" sz="850" dirty="0">
-                <a:solidFill>
-                  <a:srgbClr val="D6DEEB"/>
-                </a:solidFill>
-                <a:latin typeface="Consolas" pitchFamily="34" charset="0"/>
-                <a:ea typeface="Consolas" pitchFamily="34" charset="-122"/>
-                <a:cs typeface="Consolas" pitchFamily="34" charset="-120"/>
-              </a:rPr>
-              <a:t>    oEditor = oDesign.SetActiveEditor(</a:t>
-            </a:r>
-            <a:pPr indent="0" marL="0">
-              <a:lnSpc>
-                <a:spcPct val="108000"/>
-              </a:lnSpc>
-              <a:buNone/>
-            </a:pPr>
-            <a:r>
-              <a:rPr lang="en-US" sz="850" dirty="0">
-                <a:solidFill>
-                  <a:srgbClr val="E6A26B"/>
-                </a:solidFill>
-                <a:latin typeface="Consolas" pitchFamily="34" charset="0"/>
-                <a:ea typeface="Consolas" pitchFamily="34" charset="-122"/>
-                <a:cs typeface="Consolas" pitchFamily="34" charset="-120"/>
-              </a:rPr>
-              <a:t>"3D Modeler"</a:t>
-            </a:r>
-            <a:pPr indent="0" marL="0">
-              <a:lnSpc>
-                <a:spcPct val="108000"/>
-              </a:lnSpc>
-              <a:buNone/>
-            </a:pPr>
-            <a:r>
-              <a:rPr lang="en-US" sz="850" dirty="0">
-                <a:solidFill>
-                  <a:srgbClr val="D6DEEB"/>
-                </a:solidFill>
-                <a:latin typeface="Consolas" pitchFamily="34" charset="0"/>
-                <a:ea typeface="Consolas" pitchFamily="34" charset="-122"/>
-                <a:cs typeface="Consolas" pitchFamily="34" charset="-120"/>
-              </a:rPr>
-              <a:t>)</a:t>
-            </a:r>
-            <a:endParaRPr lang="en-US" sz="850" dirty="0"/>
-          </a:p>
-          <a:p>
-            <a:pPr indent="0" marL="0">
-              <a:lnSpc>
-                <a:spcPct val="108000"/>
-              </a:lnSpc>
-              <a:buNone/>
-            </a:pPr>
-            <a:r>
-              <a:rPr lang="en-US" sz="850" dirty="0">
-                <a:solidFill>
-                  <a:srgbClr val="D6DEEB"/>
-                </a:solidFill>
-                <a:latin typeface="Consolas" pitchFamily="34" charset="0"/>
-                <a:ea typeface="Consolas" pitchFamily="34" charset="-122"/>
-                <a:cs typeface="Consolas" pitchFamily="34" charset="-120"/>
-              </a:rPr>
-              <a:t> </a:t>
-            </a:r>
-            <a:endParaRPr lang="en-US" sz="850" dirty="0"/>
-          </a:p>
-          <a:p>
-            <a:pPr indent="0" marL="0">
-              <a:lnSpc>
-                <a:spcPct val="108000"/>
-              </a:lnSpc>
-              <a:buNone/>
-            </a:pPr>
-            <a:r>
-              <a:rPr lang="en-US" sz="850" dirty="0">
-                <a:solidFill>
-                  <a:srgbClr val="D6DEEB"/>
-                </a:solidFill>
-                <a:latin typeface="Consolas" pitchFamily="34" charset="0"/>
-                <a:ea typeface="Consolas" pitchFamily="34" charset="-122"/>
-                <a:cs typeface="Consolas" pitchFamily="34" charset="-120"/>
-              </a:rPr>
-              <a:t>    oEditor.CreateBox(...)                                </a:t>
-            </a:r>
-            <a:pPr indent="0" marL="0">
-              <a:lnSpc>
-                <a:spcPct val="108000"/>
-              </a:lnSpc>
-              <a:buNone/>
-            </a:pPr>
-            <a:r>
-              <a:rPr lang="en-US" sz="850" dirty="0">
-                <a:solidFill>
-                  <a:srgbClr val="7F9C7A"/>
-                </a:solidFill>
-                <a:latin typeface="Consolas" pitchFamily="34" charset="0"/>
-                <a:ea typeface="Consolas" pitchFamily="34" charset="-122"/>
-                <a:cs typeface="Consolas" pitchFamily="34" charset="-120"/>
-              </a:rPr>
-              <a:t># 냉각유(PAO) 박스</a:t>
-            </a:r>
-            <a:endParaRPr lang="en-US" sz="850" dirty="0"/>
-          </a:p>
-          <a:p>
-            <a:pPr indent="0" marL="0">
-              <a:lnSpc>
-                <a:spcPct val="108000"/>
-              </a:lnSpc>
-              <a:buNone/>
-            </a:pPr>
-            <a:r>
-              <a:rPr lang="en-US" sz="850" dirty="0">
-                <a:solidFill>
-                  <a:srgbClr val="D6DEEB"/>
-                </a:solidFill>
-                <a:latin typeface="Consolas" pitchFamily="34" charset="0"/>
-                <a:ea typeface="Consolas" pitchFamily="34" charset="-122"/>
-                <a:cs typeface="Consolas" pitchFamily="34" charset="-120"/>
-              </a:rPr>
-              <a:t>    oEditor.Subtract(...);  oEditor.SeparateBody(...)     </a:t>
-            </a:r>
-            <a:pPr indent="0" marL="0">
-              <a:lnSpc>
-                <a:spcPct val="108000"/>
-              </a:lnSpc>
-              <a:buNone/>
-            </a:pPr>
-            <a:r>
-              <a:rPr lang="en-US" sz="850" dirty="0">
-                <a:solidFill>
-                  <a:srgbClr val="7F9C7A"/>
-                </a:solidFill>
-                <a:latin typeface="Consolas" pitchFamily="34" charset="0"/>
-                <a:ea typeface="Consolas" pitchFamily="34" charset="-122"/>
-                <a:cs typeface="Consolas" pitchFamily="34" charset="-120"/>
-              </a:rPr>
-              <a:t># 유체 영역 = 박스 − 형상</a:t>
-            </a:r>
-            <a:endParaRPr lang="en-US" sz="850" dirty="0"/>
-          </a:p>
-          <a:p>
-            <a:pPr indent="0" marL="0">
-              <a:lnSpc>
-                <a:spcPct val="108000"/>
-              </a:lnSpc>
-              <a:buNone/>
-            </a:pPr>
-            <a:r>
-              <a:rPr lang="en-US" sz="850" dirty="0">
-                <a:solidFill>
-                  <a:srgbClr val="D6DEEB"/>
-                </a:solidFill>
-                <a:latin typeface="Consolas" pitchFamily="34" charset="0"/>
-                <a:ea typeface="Consolas" pitchFamily="34" charset="-122"/>
-                <a:cs typeface="Consolas" pitchFamily="34" charset="-120"/>
-              </a:rPr>
-              <a:t>    </a:t>
-            </a:r>
-            <a:pPr indent="0" marL="0">
-              <a:lnSpc>
-                <a:spcPct val="108000"/>
-              </a:lnSpc>
-              <a:buNone/>
-            </a:pPr>
-            <a:r>
-              <a:rPr lang="en-US" sz="850" dirty="0">
-                <a:solidFill>
-                  <a:srgbClr val="C792EA"/>
-                </a:solidFill>
-                <a:latin typeface="Consolas" pitchFamily="34" charset="0"/>
-                <a:ea typeface="Consolas" pitchFamily="34" charset="-122"/>
-                <a:cs typeface="Consolas" pitchFamily="34" charset="-120"/>
-              </a:rPr>
-              <a:t>for</a:t>
-            </a:r>
-            <a:pPr indent="0" marL="0">
-              <a:lnSpc>
-                <a:spcPct val="108000"/>
-              </a:lnSpc>
-              <a:buNone/>
-            </a:pPr>
-            <a:r>
-              <a:rPr lang="en-US" sz="850" dirty="0">
-                <a:solidFill>
-                  <a:srgbClr val="D6DEEB"/>
-                </a:solidFill>
-                <a:latin typeface="Consolas" pitchFamily="34" charset="0"/>
-                <a:ea typeface="Consolas" pitchFamily="34" charset="-122"/>
-                <a:cs typeface="Consolas" pitchFamily="34" charset="-120"/>
-              </a:rPr>
-              <a:t> i </a:t>
-            </a:r>
-            <a:pPr indent="0" marL="0">
-              <a:lnSpc>
-                <a:spcPct val="108000"/>
-              </a:lnSpc>
-              <a:buNone/>
-            </a:pPr>
-            <a:r>
-              <a:rPr lang="en-US" sz="850" dirty="0">
-                <a:solidFill>
-                  <a:srgbClr val="C792EA"/>
-                </a:solidFill>
-                <a:latin typeface="Consolas" pitchFamily="34" charset="0"/>
-                <a:ea typeface="Consolas" pitchFamily="34" charset="-122"/>
-                <a:cs typeface="Consolas" pitchFamily="34" charset="-120"/>
-              </a:rPr>
-              <a:t>in</a:t>
-            </a:r>
-            <a:pPr indent="0" marL="0">
-              <a:lnSpc>
-                <a:spcPct val="108000"/>
-              </a:lnSpc>
-              <a:buNone/>
-            </a:pPr>
-            <a:r>
-              <a:rPr lang="en-US" sz="850" dirty="0">
-                <a:solidFill>
-                  <a:srgbClr val="D6DEEB"/>
-                </a:solidFill>
-                <a:latin typeface="Consolas" pitchFamily="34" charset="0"/>
-                <a:ea typeface="Consolas" pitchFamily="34" charset="-122"/>
-                <a:cs typeface="Consolas" pitchFamily="34" charset="-120"/>
-              </a:rPr>
-              <a:t> range(N_SOURCE):                             </a:t>
-            </a:r>
-            <a:pPr indent="0" marL="0">
-              <a:lnSpc>
-                <a:spcPct val="108000"/>
-              </a:lnSpc>
-              <a:buNone/>
-            </a:pPr>
-            <a:r>
-              <a:rPr lang="en-US" sz="850" dirty="0">
-                <a:solidFill>
-                  <a:srgbClr val="7F9C7A"/>
-                </a:solidFill>
-                <a:latin typeface="Consolas" pitchFamily="34" charset="0"/>
-                <a:ea typeface="Consolas" pitchFamily="34" charset="-122"/>
-                <a:cs typeface="Consolas" pitchFamily="34" charset="-120"/>
-              </a:rPr>
-              <a:t># 발열원 생성</a:t>
-            </a:r>
-            <a:endParaRPr lang="en-US" sz="850" dirty="0"/>
-          </a:p>
-          <a:p>
-            <a:pPr indent="0" marL="0">
-              <a:lnSpc>
-                <a:spcPct val="108000"/>
-              </a:lnSpc>
-              <a:buNone/>
-            </a:pPr>
-            <a:r>
-              <a:rPr lang="en-US" sz="850" dirty="0">
-                <a:solidFill>
-                  <a:srgbClr val="D6DEEB"/>
-                </a:solidFill>
-                <a:latin typeface="Consolas" pitchFamily="34" charset="0"/>
-                <a:ea typeface="Consolas" pitchFamily="34" charset="-122"/>
-                <a:cs typeface="Consolas" pitchFamily="34" charset="-120"/>
-              </a:rPr>
-              <a:t>        oEditor.CreateBox(...)</a:t>
-            </a:r>
-            <a:endParaRPr lang="en-US" sz="850" dirty="0"/>
-          </a:p>
-          <a:p>
-            <a:pPr indent="0" marL="0">
-              <a:lnSpc>
-                <a:spcPct val="108000"/>
-              </a:lnSpc>
-              <a:buNone/>
-            </a:pPr>
-            <a:r>
-              <a:rPr lang="en-US" sz="850" dirty="0">
-                <a:solidFill>
-                  <a:srgbClr val="D6DEEB"/>
-                </a:solidFill>
-                <a:latin typeface="Consolas" pitchFamily="34" charset="0"/>
-                <a:ea typeface="Consolas" pitchFamily="34" charset="-122"/>
-                <a:cs typeface="Consolas" pitchFamily="34" charset="-120"/>
-              </a:rPr>
-              <a:t> </a:t>
-            </a:r>
-            <a:endParaRPr lang="en-US" sz="850" dirty="0"/>
-          </a:p>
-          <a:p>
-            <a:pPr indent="0" marL="0">
-              <a:lnSpc>
-                <a:spcPct val="108000"/>
-              </a:lnSpc>
-              <a:buNone/>
-            </a:pPr>
-            <a:r>
-              <a:rPr lang="en-US" sz="850" dirty="0">
-                <a:solidFill>
-                  <a:srgbClr val="D6DEEB"/>
-                </a:solidFill>
-                <a:latin typeface="Consolas" pitchFamily="34" charset="0"/>
-                <a:ea typeface="Consolas" pitchFamily="34" charset="-122"/>
-                <a:cs typeface="Consolas" pitchFamily="34" charset="-120"/>
-              </a:rPr>
-              <a:t>    faces = [f </a:t>
-            </a:r>
-            <a:pPr indent="0" marL="0">
-              <a:lnSpc>
-                <a:spcPct val="108000"/>
-              </a:lnSpc>
-              <a:buNone/>
-            </a:pPr>
-            <a:r>
-              <a:rPr lang="en-US" sz="850" dirty="0">
-                <a:solidFill>
-                  <a:srgbClr val="C792EA"/>
-                </a:solidFill>
-                <a:latin typeface="Consolas" pitchFamily="34" charset="0"/>
-                <a:ea typeface="Consolas" pitchFamily="34" charset="-122"/>
-                <a:cs typeface="Consolas" pitchFamily="34" charset="-120"/>
-              </a:rPr>
-              <a:t>for</a:t>
-            </a:r>
-            <a:pPr indent="0" marL="0">
-              <a:lnSpc>
-                <a:spcPct val="108000"/>
-              </a:lnSpc>
-              <a:buNone/>
-            </a:pPr>
-            <a:r>
-              <a:rPr lang="en-US" sz="850" dirty="0">
-                <a:solidFill>
-                  <a:srgbClr val="D6DEEB"/>
-                </a:solidFill>
-                <a:latin typeface="Consolas" pitchFamily="34" charset="0"/>
-                <a:ea typeface="Consolas" pitchFamily="34" charset="-122"/>
-                <a:cs typeface="Consolas" pitchFamily="34" charset="-120"/>
-              </a:rPr>
-              <a:t> f </a:t>
-            </a:r>
-            <a:pPr indent="0" marL="0">
-              <a:lnSpc>
-                <a:spcPct val="108000"/>
-              </a:lnSpc>
-              <a:buNone/>
-            </a:pPr>
-            <a:r>
-              <a:rPr lang="en-US" sz="850" dirty="0">
-                <a:solidFill>
-                  <a:srgbClr val="C792EA"/>
-                </a:solidFill>
-                <a:latin typeface="Consolas" pitchFamily="34" charset="0"/>
-                <a:ea typeface="Consolas" pitchFamily="34" charset="-122"/>
-                <a:cs typeface="Consolas" pitchFamily="34" charset="-120"/>
-              </a:rPr>
-              <a:t>in</a:t>
-            </a:r>
-            <a:pPr indent="0" marL="0">
-              <a:lnSpc>
-                <a:spcPct val="108000"/>
-              </a:lnSpc>
-              <a:buNone/>
-            </a:pPr>
-            <a:r>
-              <a:rPr lang="en-US" sz="850" dirty="0">
-                <a:solidFill>
-                  <a:srgbClr val="D6DEEB"/>
-                </a:solidFill>
-                <a:latin typeface="Consolas" pitchFamily="34" charset="0"/>
-                <a:ea typeface="Consolas" pitchFamily="34" charset="-122"/>
-                <a:cs typeface="Consolas" pitchFamily="34" charset="-120"/>
-              </a:rPr>
-              <a:t> box.faces </a:t>
-            </a:r>
-            <a:pPr indent="0" marL="0">
-              <a:lnSpc>
-                <a:spcPct val="108000"/>
-              </a:lnSpc>
-              <a:buNone/>
-            </a:pPr>
-            <a:r>
-              <a:rPr lang="en-US" sz="850" dirty="0">
-                <a:solidFill>
-                  <a:srgbClr val="C792EA"/>
-                </a:solidFill>
-                <a:latin typeface="Consolas" pitchFamily="34" charset="0"/>
-                <a:ea typeface="Consolas" pitchFamily="34" charset="-122"/>
-                <a:cs typeface="Consolas" pitchFamily="34" charset="-120"/>
-              </a:rPr>
-              <a:t>if</a:t>
-            </a:r>
-            <a:pPr indent="0" marL="0">
-              <a:lnSpc>
-                <a:spcPct val="108000"/>
-              </a:lnSpc>
-              <a:buNone/>
-            </a:pPr>
-            <a:r>
-              <a:rPr lang="en-US" sz="850" dirty="0">
-                <a:solidFill>
-                  <a:srgbClr val="D6DEEB"/>
-                </a:solidFill>
-                <a:latin typeface="Consolas" pitchFamily="34" charset="0"/>
-                <a:ea typeface="Consolas" pitchFamily="34" charset="-122"/>
-                <a:cs typeface="Consolas" pitchFamily="34" charset="-120"/>
-              </a:rPr>
-              <a:t> abs(f.center[2] - z_top) &lt; 0.1]</a:t>
-            </a:r>
-            <a:endParaRPr lang="en-US" sz="850" dirty="0"/>
-          </a:p>
-          <a:p>
-            <a:pPr indent="0" marL="0">
-              <a:lnSpc>
-                <a:spcPct val="108000"/>
-              </a:lnSpc>
-              <a:buNone/>
-            </a:pPr>
-            <a:r>
-              <a:rPr lang="en-US" sz="850" dirty="0">
-                <a:solidFill>
-                  <a:srgbClr val="D6DEEB"/>
-                </a:solidFill>
-                <a:latin typeface="Consolas" pitchFamily="34" charset="0"/>
-                <a:ea typeface="Consolas" pitchFamily="34" charset="-122"/>
-                <a:cs typeface="Consolas" pitchFamily="34" charset="-120"/>
-              </a:rPr>
-              <a:t>    faces.sort(key=</a:t>
-            </a:r>
-            <a:pPr indent="0" marL="0">
-              <a:lnSpc>
-                <a:spcPct val="108000"/>
-              </a:lnSpc>
-              <a:buNone/>
-            </a:pPr>
-            <a:r>
-              <a:rPr lang="en-US" sz="850" dirty="0">
-                <a:solidFill>
-                  <a:srgbClr val="C792EA"/>
-                </a:solidFill>
-                <a:latin typeface="Consolas" pitchFamily="34" charset="0"/>
-                <a:ea typeface="Consolas" pitchFamily="34" charset="-122"/>
-                <a:cs typeface="Consolas" pitchFamily="34" charset="-120"/>
-              </a:rPr>
-              <a:t>lambda</a:t>
-            </a:r>
-            <a:pPr indent="0" marL="0">
-              <a:lnSpc>
-                <a:spcPct val="108000"/>
-              </a:lnSpc>
-              <a:buNone/>
-            </a:pPr>
-            <a:r>
-              <a:rPr lang="en-US" sz="850" dirty="0">
-                <a:solidFill>
-                  <a:srgbClr val="D6DEEB"/>
-                </a:solidFill>
-                <a:latin typeface="Consolas" pitchFamily="34" charset="0"/>
-                <a:ea typeface="Consolas" pitchFamily="34" charset="-122"/>
-                <a:cs typeface="Consolas" pitchFamily="34" charset="-120"/>
-              </a:rPr>
-              <a:t> f: f.center[0])                 </a:t>
-            </a:r>
-            <a:pPr indent="0" marL="0">
-              <a:lnSpc>
-                <a:spcPct val="108000"/>
-              </a:lnSpc>
-              <a:buNone/>
-            </a:pPr>
-            <a:r>
-              <a:rPr lang="en-US" sz="850" dirty="0">
-                <a:solidFill>
-                  <a:srgbClr val="7F9C7A"/>
-                </a:solidFill>
-                <a:latin typeface="Consolas" pitchFamily="34" charset="0"/>
-                <a:ea typeface="Consolas" pitchFamily="34" charset="-122"/>
-                <a:cs typeface="Consolas" pitchFamily="34" charset="-120"/>
-              </a:rPr>
-              <a:t># 팬 · 개구부 면 자동 탐지</a:t>
-            </a:r>
-            <a:endParaRPr lang="en-US" sz="850" dirty="0"/>
-          </a:p>
-          <a:p>
-            <a:pPr indent="0" marL="0">
-              <a:lnSpc>
-                <a:spcPct val="108000"/>
-              </a:lnSpc>
-              <a:buNone/>
-            </a:pPr>
-            <a:r>
-              <a:rPr lang="en-US" sz="850" dirty="0">
-                <a:solidFill>
-                  <a:srgbClr val="D6DEEB"/>
-                </a:solidFill>
-                <a:latin typeface="Consolas" pitchFamily="34" charset="0"/>
-                <a:ea typeface="Consolas" pitchFamily="34" charset="-122"/>
-                <a:cs typeface="Consolas" pitchFamily="34" charset="-120"/>
-              </a:rPr>
-              <a:t>    oEditor.InsertNativeComponent(...)                    </a:t>
-            </a:r>
-            <a:pPr indent="0" marL="0">
-              <a:lnSpc>
-                <a:spcPct val="108000"/>
-              </a:lnSpc>
-              <a:buNone/>
-            </a:pPr>
-            <a:r>
-              <a:rPr lang="en-US" sz="850" dirty="0">
-                <a:solidFill>
-                  <a:srgbClr val="7F9C7A"/>
-                </a:solidFill>
-                <a:latin typeface="Consolas" pitchFamily="34" charset="0"/>
-                <a:ea typeface="Consolas" pitchFamily="34" charset="-122"/>
-                <a:cs typeface="Consolas" pitchFamily="34" charset="-120"/>
-              </a:rPr>
-              <a:t># 팬(입구)</a:t>
-            </a:r>
-            <a:endParaRPr lang="en-US" sz="850" dirty="0"/>
-          </a:p>
-          <a:p>
-            <a:pPr indent="0" marL="0">
-              <a:lnSpc>
-                <a:spcPct val="108000"/>
-              </a:lnSpc>
-              <a:buNone/>
-            </a:pPr>
-            <a:r>
-              <a:rPr lang="en-US" sz="850" dirty="0">
-                <a:solidFill>
-                  <a:srgbClr val="D6DEEB"/>
-                </a:solidFill>
-                <a:latin typeface="Consolas" pitchFamily="34" charset="0"/>
-                <a:ea typeface="Consolas" pitchFamily="34" charset="-122"/>
-                <a:cs typeface="Consolas" pitchFamily="34" charset="-120"/>
-              </a:rPr>
-              <a:t>    oDesign.GetModule(</a:t>
-            </a:r>
-            <a:pPr indent="0" marL="0">
-              <a:lnSpc>
-                <a:spcPct val="108000"/>
-              </a:lnSpc>
-              <a:buNone/>
-            </a:pPr>
-            <a:r>
-              <a:rPr lang="en-US" sz="850" dirty="0">
-                <a:solidFill>
-                  <a:srgbClr val="E6A26B"/>
-                </a:solidFill>
-                <a:latin typeface="Consolas" pitchFamily="34" charset="0"/>
-                <a:ea typeface="Consolas" pitchFamily="34" charset="-122"/>
-                <a:cs typeface="Consolas" pitchFamily="34" charset="-120"/>
-              </a:rPr>
-              <a:t>"BoundarySetup"</a:t>
-            </a:r>
-            <a:pPr indent="0" marL="0">
-              <a:lnSpc>
-                <a:spcPct val="108000"/>
-              </a:lnSpc>
-              <a:buNone/>
-            </a:pPr>
-            <a:r>
-              <a:rPr lang="en-US" sz="850" dirty="0">
-                <a:solidFill>
-                  <a:srgbClr val="D6DEEB"/>
-                </a:solidFill>
-                <a:latin typeface="Consolas" pitchFamily="34" charset="0"/>
-                <a:ea typeface="Consolas" pitchFamily="34" charset="-122"/>
-                <a:cs typeface="Consolas" pitchFamily="34" charset="-120"/>
-              </a:rPr>
-              <a:t>).AssignOpeningBoundary(...)   </a:t>
-            </a:r>
-            <a:pPr indent="0" marL="0">
-              <a:lnSpc>
-                <a:spcPct val="108000"/>
-              </a:lnSpc>
-              <a:buNone/>
-            </a:pPr>
-            <a:r>
-              <a:rPr lang="en-US" sz="850" dirty="0">
-                <a:solidFill>
-                  <a:srgbClr val="7F9C7A"/>
-                </a:solidFill>
-                <a:latin typeface="Consolas" pitchFamily="34" charset="0"/>
-                <a:ea typeface="Consolas" pitchFamily="34" charset="-122"/>
-                <a:cs typeface="Consolas" pitchFamily="34" charset="-120"/>
-              </a:rPr>
-              <a:t># 개구부(출구)</a:t>
-            </a:r>
-            <a:endParaRPr lang="en-US" sz="850" dirty="0"/>
-          </a:p>
-          <a:p>
-            <a:pPr indent="0" marL="0">
-              <a:lnSpc>
-                <a:spcPct val="108000"/>
-              </a:lnSpc>
-              <a:buNone/>
-            </a:pPr>
-            <a:r>
-              <a:rPr lang="en-US" sz="850" dirty="0">
-                <a:solidFill>
-                  <a:srgbClr val="D6DEEB"/>
-                </a:solidFill>
-                <a:latin typeface="Consolas" pitchFamily="34" charset="0"/>
-                <a:ea typeface="Consolas" pitchFamily="34" charset="-122"/>
-                <a:cs typeface="Consolas" pitchFamily="34" charset="-120"/>
-              </a:rPr>
-              <a:t>    oDesign.GetModule(</a:t>
-            </a:r>
-            <a:pPr indent="0" marL="0">
-              <a:lnSpc>
-                <a:spcPct val="108000"/>
-              </a:lnSpc>
-              <a:buNone/>
-            </a:pPr>
-            <a:r>
-              <a:rPr lang="en-US" sz="850" dirty="0">
-                <a:solidFill>
-                  <a:srgbClr val="E6A26B"/>
-                </a:solidFill>
-                <a:latin typeface="Consolas" pitchFamily="34" charset="0"/>
-                <a:ea typeface="Consolas" pitchFamily="34" charset="-122"/>
-                <a:cs typeface="Consolas" pitchFamily="34" charset="-120"/>
-              </a:rPr>
-              <a:t>"MeshRegion"</a:t>
-            </a:r>
-            <a:pPr indent="0" marL="0">
-              <a:lnSpc>
-                <a:spcPct val="108000"/>
-              </a:lnSpc>
-              <a:buNone/>
-            </a:pPr>
-            <a:r>
-              <a:rPr lang="en-US" sz="850" dirty="0">
-                <a:solidFill>
-                  <a:srgbClr val="D6DEEB"/>
-                </a:solidFill>
-                <a:latin typeface="Consolas" pitchFamily="34" charset="0"/>
-                <a:ea typeface="Consolas" pitchFamily="34" charset="-122"/>
-                <a:cs typeface="Consolas" pitchFamily="34" charset="-120"/>
-              </a:rPr>
-              <a:t>).AssignMeshRegion(...)           </a:t>
-            </a:r>
-            <a:pPr indent="0" marL="0">
-              <a:lnSpc>
-                <a:spcPct val="108000"/>
-              </a:lnSpc>
-              <a:buNone/>
-            </a:pPr>
-            <a:r>
-              <a:rPr lang="en-US" sz="850" dirty="0">
-                <a:solidFill>
-                  <a:srgbClr val="7F9C7A"/>
-                </a:solidFill>
-                <a:latin typeface="Consolas" pitchFamily="34" charset="0"/>
-                <a:ea typeface="Consolas" pitchFamily="34" charset="-122"/>
-                <a:cs typeface="Consolas" pitchFamily="34" charset="-120"/>
-              </a:rPr>
-              <a:t># 로컬 메시</a:t>
-            </a:r>
-            <a:endParaRPr lang="en-US" sz="850" dirty="0"/>
-          </a:p>
-          <a:p>
-            <a:pPr indent="0" marL="0">
-              <a:lnSpc>
-                <a:spcPct val="108000"/>
-              </a:lnSpc>
-              <a:buNone/>
-            </a:pPr>
-            <a:r>
-              <a:rPr lang="en-US" sz="850" dirty="0">
-                <a:solidFill>
-                  <a:srgbClr val="D6DEEB"/>
-                </a:solidFill>
-                <a:latin typeface="Consolas" pitchFamily="34" charset="0"/>
-                <a:ea typeface="Consolas" pitchFamily="34" charset="-122"/>
-                <a:cs typeface="Consolas" pitchFamily="34" charset="-120"/>
-              </a:rPr>
-              <a:t> </a:t>
-            </a:r>
-            <a:endParaRPr lang="en-US" sz="850" dirty="0"/>
-          </a:p>
-          <a:p>
-            <a:pPr indent="0" marL="0">
-              <a:lnSpc>
-                <a:spcPct val="108000"/>
-              </a:lnSpc>
-              <a:buNone/>
-            </a:pPr>
-            <a:r>
-              <a:rPr lang="en-US" sz="850" dirty="0">
-                <a:solidFill>
-                  <a:srgbClr val="D6DEEB"/>
-                </a:solidFill>
-                <a:latin typeface="Consolas" pitchFamily="34" charset="0"/>
-                <a:ea typeface="Consolas" pitchFamily="34" charset="-122"/>
-                <a:cs typeface="Consolas" pitchFamily="34" charset="-120"/>
-              </a:rPr>
-              <a:t>    _create_lane_rectangles(oEditor, </a:t>
-            </a:r>
-            <a:pPr indent="0" marL="0">
-              <a:lnSpc>
-                <a:spcPct val="108000"/>
-              </a:lnSpc>
-              <a:buNone/>
-            </a:pPr>
-            <a:r>
-              <a:rPr lang="en-US" sz="850" dirty="0">
-                <a:solidFill>
-                  <a:srgbClr val="E6A26B"/>
-                </a:solidFill>
-                <a:latin typeface="Consolas" pitchFamily="34" charset="0"/>
-                <a:ea typeface="Consolas" pitchFamily="34" charset="-122"/>
-                <a:cs typeface="Consolas" pitchFamily="34" charset="-120"/>
-              </a:rPr>
-              <a:t>"V_inlet"</a:t>
-            </a:r>
-            <a:pPr indent="0" marL="0">
-              <a:lnSpc>
-                <a:spcPct val="108000"/>
-              </a:lnSpc>
-              <a:buNone/>
-            </a:pPr>
-            <a:r>
-              <a:rPr lang="en-US" sz="850" dirty="0">
-                <a:solidFill>
-                  <a:srgbClr val="D6DEEB"/>
-                </a:solidFill>
-                <a:latin typeface="Consolas" pitchFamily="34" charset="0"/>
-                <a:ea typeface="Consolas" pitchFamily="34" charset="-122"/>
-                <a:cs typeface="Consolas" pitchFamily="34" charset="-120"/>
-              </a:rPr>
-              <a:t>,  x_pos,  y_bank1, params)   </a:t>
-            </a:r>
-            <a:pPr indent="0" marL="0">
-              <a:lnSpc>
-                <a:spcPct val="108000"/>
-              </a:lnSpc>
-              <a:buNone/>
-            </a:pPr>
-            <a:r>
-              <a:rPr lang="en-US" sz="850" dirty="0">
-                <a:solidFill>
-                  <a:srgbClr val="7F9C7A"/>
-                </a:solidFill>
-                <a:latin typeface="Consolas" pitchFamily="34" charset="0"/>
-                <a:ea typeface="Consolas" pitchFamily="34" charset="-122"/>
-                <a:cs typeface="Consolas" pitchFamily="34" charset="-120"/>
-              </a:rPr>
-              <a:t># 측정면 동적 생성</a:t>
-            </a:r>
-            <a:endParaRPr lang="en-US" sz="850" dirty="0"/>
-          </a:p>
-          <a:p>
-            <a:pPr indent="0" marL="0">
-              <a:lnSpc>
-                <a:spcPct val="108000"/>
-              </a:lnSpc>
-              <a:buNone/>
-            </a:pPr>
-            <a:r>
-              <a:rPr lang="en-US" sz="850" dirty="0">
-                <a:solidFill>
-                  <a:srgbClr val="D6DEEB"/>
-                </a:solidFill>
-                <a:latin typeface="Consolas" pitchFamily="34" charset="0"/>
-                <a:ea typeface="Consolas" pitchFamily="34" charset="-122"/>
-                <a:cs typeface="Consolas" pitchFamily="34" charset="-120"/>
-              </a:rPr>
-              <a:t>    _create_lane_rectangles(oEditor, </a:t>
-            </a:r>
-            <a:pPr indent="0" marL="0">
-              <a:lnSpc>
-                <a:spcPct val="108000"/>
-              </a:lnSpc>
-              <a:buNone/>
-            </a:pPr>
-            <a:r>
-              <a:rPr lang="en-US" sz="850" dirty="0">
-                <a:solidFill>
-                  <a:srgbClr val="E6A26B"/>
-                </a:solidFill>
-                <a:latin typeface="Consolas" pitchFamily="34" charset="0"/>
-                <a:ea typeface="Consolas" pitchFamily="34" charset="-122"/>
-                <a:cs typeface="Consolas" pitchFamily="34" charset="-120"/>
-              </a:rPr>
-              <a:t>"V_inlet2"</a:t>
-            </a:r>
-            <a:pPr indent="0" marL="0">
-              <a:lnSpc>
-                <a:spcPct val="108000"/>
-              </a:lnSpc>
-              <a:buNone/>
-            </a:pPr>
-            <a:r>
-              <a:rPr lang="en-US" sz="850" dirty="0">
-                <a:solidFill>
-                  <a:srgbClr val="D6DEEB"/>
-                </a:solidFill>
-                <a:latin typeface="Consolas" pitchFamily="34" charset="0"/>
-                <a:ea typeface="Consolas" pitchFamily="34" charset="-122"/>
-                <a:cs typeface="Consolas" pitchFamily="34" charset="-120"/>
-              </a:rPr>
-              <a:t>, x_pos2, y_bank2, params)</a:t>
-            </a:r>
-            <a:endParaRPr lang="en-US" sz="850" dirty="0"/>
-          </a:p>
-          <a:p>
-            <a:pPr indent="0" marL="0">
-              <a:lnSpc>
-                <a:spcPct val="108000"/>
-              </a:lnSpc>
-              <a:buNone/>
-            </a:pPr>
-            <a:r>
-              <a:rPr lang="en-US" sz="850" dirty="0">
-                <a:solidFill>
-                  <a:srgbClr val="D6DEEB"/>
-                </a:solidFill>
-                <a:latin typeface="Consolas" pitchFamily="34" charset="0"/>
-                <a:ea typeface="Consolas" pitchFamily="34" charset="-122"/>
-                <a:cs typeface="Consolas" pitchFamily="34" charset="-120"/>
-              </a:rPr>
-              <a:t> </a:t>
-            </a:r>
-            <a:endParaRPr lang="en-US" sz="850" dirty="0"/>
-          </a:p>
-          <a:p>
-            <a:pPr indent="0" marL="0">
-              <a:lnSpc>
-                <a:spcPct val="108000"/>
-              </a:lnSpc>
-              <a:buNone/>
-            </a:pPr>
-            <a:r>
-              <a:rPr lang="en-US" sz="850" dirty="0">
-                <a:solidFill>
-                  <a:srgbClr val="D6DEEB"/>
-                </a:solidFill>
-                <a:latin typeface="Consolas" pitchFamily="34" charset="0"/>
-                <a:ea typeface="Consolas" pitchFamily="34" charset="-122"/>
-                <a:cs typeface="Consolas" pitchFamily="34" charset="-120"/>
-              </a:rPr>
-              <a:t>    oDesign.GetModule(</a:t>
-            </a:r>
-            <a:pPr indent="0" marL="0">
-              <a:lnSpc>
-                <a:spcPct val="108000"/>
-              </a:lnSpc>
-              <a:buNone/>
-            </a:pPr>
-            <a:r>
-              <a:rPr lang="en-US" sz="850" dirty="0">
-                <a:solidFill>
-                  <a:srgbClr val="E6A26B"/>
-                </a:solidFill>
-                <a:latin typeface="Consolas" pitchFamily="34" charset="0"/>
-                <a:ea typeface="Consolas" pitchFamily="34" charset="-122"/>
-                <a:cs typeface="Consolas" pitchFamily="34" charset="-120"/>
-              </a:rPr>
-              <a:t>"AnalysisSetup"</a:t>
-            </a:r>
-            <a:pPr indent="0" marL="0">
-              <a:lnSpc>
-                <a:spcPct val="108000"/>
-              </a:lnSpc>
-              <a:buNone/>
-            </a:pPr>
-            <a:r>
-              <a:rPr lang="en-US" sz="850" dirty="0">
-                <a:solidFill>
-                  <a:srgbClr val="D6DEEB"/>
-                </a:solidFill>
-                <a:latin typeface="Consolas" pitchFamily="34" charset="0"/>
-                <a:ea typeface="Consolas" pitchFamily="34" charset="-122"/>
-                <a:cs typeface="Consolas" pitchFamily="34" charset="-120"/>
-              </a:rPr>
-              <a:t>).InsertSetup(</a:t>
-            </a:r>
-            <a:pPr indent="0" marL="0">
-              <a:lnSpc>
-                <a:spcPct val="108000"/>
-              </a:lnSpc>
-              <a:buNone/>
-            </a:pPr>
-            <a:r>
-              <a:rPr lang="en-US" sz="850" dirty="0">
-                <a:solidFill>
-                  <a:srgbClr val="E6A26B"/>
-                </a:solidFill>
-                <a:latin typeface="Consolas" pitchFamily="34" charset="0"/>
-                <a:ea typeface="Consolas" pitchFamily="34" charset="-122"/>
-                <a:cs typeface="Consolas" pitchFamily="34" charset="-120"/>
-              </a:rPr>
-              <a:t>"IcepakSteadyState"</a:t>
-            </a:r>
-            <a:pPr indent="0" marL="0">
-              <a:lnSpc>
-                <a:spcPct val="108000"/>
-              </a:lnSpc>
-              <a:buNone/>
-            </a:pPr>
-            <a:r>
-              <a:rPr lang="en-US" sz="850" dirty="0">
-                <a:solidFill>
-                  <a:srgbClr val="D6DEEB"/>
-                </a:solidFill>
-                <a:latin typeface="Consolas" pitchFamily="34" charset="0"/>
-                <a:ea typeface="Consolas" pitchFamily="34" charset="-122"/>
-                <a:cs typeface="Consolas" pitchFamily="34" charset="-120"/>
-              </a:rPr>
-              <a:t>, [...])</a:t>
-            </a:r>
-            <a:endParaRPr lang="en-US" sz="850" dirty="0"/>
-          </a:p>
-          <a:p>
-            <a:pPr indent="0" marL="0">
-              <a:lnSpc>
-                <a:spcPct val="108000"/>
-              </a:lnSpc>
-              <a:buNone/>
-            </a:pPr>
-            <a:r>
-              <a:rPr lang="en-US" sz="850" dirty="0">
-                <a:solidFill>
-                  <a:srgbClr val="D6DEEB"/>
-                </a:solidFill>
-                <a:latin typeface="Consolas" pitchFamily="34" charset="0"/>
-                <a:ea typeface="Consolas" pitchFamily="34" charset="-122"/>
-                <a:cs typeface="Consolas" pitchFamily="34" charset="-120"/>
-              </a:rPr>
-              <a:t>    oDesign.AnalyzeAll()                                  </a:t>
-            </a:r>
-            <a:pPr indent="0" marL="0">
-              <a:lnSpc>
-                <a:spcPct val="108000"/>
-              </a:lnSpc>
-              <a:buNone/>
-            </a:pPr>
-            <a:r>
-              <a:rPr lang="en-US" sz="850" dirty="0">
-                <a:solidFill>
-                  <a:srgbClr val="7F9C7A"/>
-                </a:solidFill>
-                <a:latin typeface="Consolas" pitchFamily="34" charset="0"/>
-                <a:ea typeface="Consolas" pitchFamily="34" charset="-122"/>
-                <a:cs typeface="Consolas" pitchFamily="34" charset="-120"/>
-              </a:rPr>
-              <a:t># 메싱 + 솔브</a:t>
-            </a:r>
-            <a:endParaRPr lang="en-US" sz="850" dirty="0"/>
-          </a:p>
-          <a:p>
-            <a:pPr indent="0" marL="0">
-              <a:lnSpc>
-                <a:spcPct val="108000"/>
-              </a:lnSpc>
-              <a:buNone/>
-            </a:pPr>
-            <a:r>
-              <a:rPr lang="en-US" sz="850" dirty="0">
-                <a:solidFill>
-                  <a:srgbClr val="D6DEEB"/>
-                </a:solidFill>
-                <a:latin typeface="Consolas" pitchFamily="34" charset="0"/>
-                <a:ea typeface="Consolas" pitchFamily="34" charset="-122"/>
-                <a:cs typeface="Consolas" pitchFamily="34" charset="-120"/>
-              </a:rPr>
-              <a:t> </a:t>
-            </a:r>
-            <a:endParaRPr lang="en-US" sz="850" dirty="0"/>
-          </a:p>
-          <a:p>
-            <a:pPr indent="0" marL="0">
-              <a:lnSpc>
-                <a:spcPct val="108000"/>
-              </a:lnSpc>
-              <a:buNone/>
-            </a:pPr>
-            <a:r>
-              <a:rPr lang="en-US" sz="850" dirty="0">
-                <a:solidFill>
-                  <a:srgbClr val="D6DEEB"/>
-                </a:solidFill>
-                <a:latin typeface="Consolas" pitchFamily="34" charset="0"/>
-                <a:ea typeface="Consolas" pitchFamily="34" charset="-122"/>
-                <a:cs typeface="Consolas" pitchFamily="34" charset="-120"/>
-              </a:rPr>
-              <a:t>    oModule = oDesign.GetModule(</a:t>
-            </a:r>
-            <a:pPr indent="0" marL="0">
-              <a:lnSpc>
-                <a:spcPct val="108000"/>
-              </a:lnSpc>
-              <a:buNone/>
-            </a:pPr>
-            <a:r>
-              <a:rPr lang="en-US" sz="850" dirty="0">
-                <a:solidFill>
-                  <a:srgbClr val="E6A26B"/>
-                </a:solidFill>
-                <a:latin typeface="Consolas" pitchFamily="34" charset="0"/>
-                <a:ea typeface="Consolas" pitchFamily="34" charset="-122"/>
-                <a:cs typeface="Consolas" pitchFamily="34" charset="-120"/>
-              </a:rPr>
-              <a:t>"Solutions"</a:t>
-            </a:r>
-            <a:pPr indent="0" marL="0">
-              <a:lnSpc>
-                <a:spcPct val="108000"/>
-              </a:lnSpc>
-              <a:buNone/>
-            </a:pPr>
-            <a:r>
-              <a:rPr lang="en-US" sz="850" dirty="0">
-                <a:solidFill>
-                  <a:srgbClr val="D6DEEB"/>
-                </a:solidFill>
-                <a:latin typeface="Consolas" pitchFamily="34" charset="0"/>
-                <a:ea typeface="Consolas" pitchFamily="34" charset="-122"/>
-                <a:cs typeface="Consolas" pitchFamily="34" charset="-120"/>
-              </a:rPr>
-              <a:t>)</a:t>
-            </a:r>
-            <a:endParaRPr lang="en-US" sz="850" dirty="0"/>
-          </a:p>
-          <a:p>
-            <a:pPr indent="0" marL="0">
-              <a:lnSpc>
-                <a:spcPct val="108000"/>
-              </a:lnSpc>
-              <a:buNone/>
-            </a:pPr>
-            <a:r>
-              <a:rPr lang="en-US" sz="850" dirty="0">
-                <a:solidFill>
-                  <a:srgbClr val="D6DEEB"/>
-                </a:solidFill>
-                <a:latin typeface="Consolas" pitchFamily="34" charset="0"/>
-                <a:ea typeface="Consolas" pitchFamily="34" charset="-122"/>
-                <a:cs typeface="Consolas" pitchFamily="34" charset="-120"/>
-              </a:rPr>
-              <a:t>    oModule.EditFieldsSummarySetting(calc_args)           </a:t>
-            </a:r>
-            <a:pPr indent="0" marL="0">
-              <a:lnSpc>
-                <a:spcPct val="108000"/>
-              </a:lnSpc>
-              <a:buNone/>
-            </a:pPr>
-            <a:r>
-              <a:rPr lang="en-US" sz="850" dirty="0">
-                <a:solidFill>
-                  <a:srgbClr val="7F9C7A"/>
-                </a:solidFill>
-                <a:latin typeface="Consolas" pitchFamily="34" charset="0"/>
-                <a:ea typeface="Consolas" pitchFamily="34" charset="-122"/>
-                <a:cs typeface="Consolas" pitchFamily="34" charset="-120"/>
-              </a:rPr>
-              <a:t># 측정 순서 = CSV 행 순서</a:t>
-            </a:r>
-            <a:endParaRPr lang="en-US" sz="850" dirty="0"/>
-          </a:p>
-          <a:p>
-            <a:pPr indent="0" marL="0">
-              <a:lnSpc>
-                <a:spcPct val="108000"/>
-              </a:lnSpc>
-              <a:buNone/>
-            </a:pPr>
-            <a:r>
-              <a:rPr lang="en-US" sz="850" dirty="0">
-                <a:solidFill>
-                  <a:srgbClr val="D6DEEB"/>
-                </a:solidFill>
-                <a:latin typeface="Consolas" pitchFamily="34" charset="0"/>
-                <a:ea typeface="Consolas" pitchFamily="34" charset="-122"/>
-                <a:cs typeface="Consolas" pitchFamily="34" charset="-120"/>
-              </a:rPr>
-              <a:t>    oModule.ExportFieldsSummary([..., </a:t>
-            </a:r>
-            <a:pPr indent="0" marL="0">
-              <a:lnSpc>
-                <a:spcPct val="108000"/>
-              </a:lnSpc>
-              <a:buNone/>
-            </a:pPr>
-            <a:r>
-              <a:rPr lang="en-US" sz="850" dirty="0">
-                <a:solidFill>
-                  <a:srgbClr val="E6A26B"/>
-                </a:solidFill>
-                <a:latin typeface="Consolas" pitchFamily="34" charset="0"/>
-                <a:ea typeface="Consolas" pitchFamily="34" charset="-122"/>
-                <a:cs typeface="Consolas" pitchFamily="34" charset="-120"/>
-              </a:rPr>
-              <a:t>"ExportFileName:="</a:t>
-            </a:r>
-            <a:pPr indent="0" marL="0">
-              <a:lnSpc>
-                <a:spcPct val="108000"/>
-              </a:lnSpc>
-              <a:buNone/>
-            </a:pPr>
-            <a:r>
-              <a:rPr lang="en-US" sz="850" dirty="0">
-                <a:solidFill>
-                  <a:srgbClr val="D6DEEB"/>
-                </a:solidFill>
-                <a:latin typeface="Consolas" pitchFamily="34" charset="0"/>
-                <a:ea typeface="Consolas" pitchFamily="34" charset="-122"/>
-                <a:cs typeface="Consolas" pitchFamily="34" charset="-120"/>
-              </a:rPr>
-              <a:t>, result_path])</a:t>
-            </a:r>
-            <a:endParaRPr lang="en-US" sz="850" dirty="0"/>
-          </a:p>
-          <a:p>
-            <a:pPr indent="0" marL="0">
-              <a:lnSpc>
-                <a:spcPct val="108000"/>
-              </a:lnSpc>
-              <a:buNone/>
-            </a:pPr>
-            <a:r>
-              <a:rPr lang="en-US" sz="850" dirty="0">
-                <a:solidFill>
-                  <a:srgbClr val="D6DEEB"/>
-                </a:solidFill>
-                <a:latin typeface="Consolas" pitchFamily="34" charset="0"/>
-                <a:ea typeface="Consolas" pitchFamily="34" charset="-122"/>
-                <a:cs typeface="Consolas" pitchFamily="34" charset="-120"/>
-              </a:rPr>
-              <a:t>    </a:t>
-            </a:r>
-            <a:pPr indent="0" marL="0">
-              <a:lnSpc>
-                <a:spcPct val="108000"/>
-              </a:lnSpc>
-              <a:buNone/>
-            </a:pPr>
-            <a:r>
-              <a:rPr lang="en-US" sz="850" dirty="0">
-                <a:solidFill>
-                  <a:srgbClr val="C792EA"/>
-                </a:solidFill>
-                <a:latin typeface="Consolas" pitchFamily="34" charset="0"/>
-                <a:ea typeface="Consolas" pitchFamily="34" charset="-122"/>
-                <a:cs typeface="Consolas" pitchFamily="34" charset="-120"/>
-              </a:rPr>
-              <a:t>return</a:t>
-            </a:r>
-            <a:pPr indent="0" marL="0">
-              <a:lnSpc>
-                <a:spcPct val="108000"/>
-              </a:lnSpc>
-              <a:buNone/>
-            </a:pPr>
-            <a:r>
-              <a:rPr lang="en-US" sz="850" dirty="0">
-                <a:solidFill>
-                  <a:srgbClr val="D6DEEB"/>
-                </a:solidFill>
-                <a:latin typeface="Consolas" pitchFamily="34" charset="0"/>
-                <a:ea typeface="Consolas" pitchFamily="34" charset="-122"/>
-                <a:cs typeface="Consolas" pitchFamily="34" charset="-120"/>
-              </a:rPr>
-              <a:t> ipk, result_path, pao_volume_mm3</a:t>
-            </a:r>
-            <a:endParaRPr lang="en-US" sz="850" dirty="0"/>
-          </a:p>
-        </p:txBody>
-      </p:sp>
-      <p:sp>
-        <p:nvSpPr>
-          <p:cNvPr id="13" name="Text 11"/>
-          <p:cNvSpPr txBox="1"/>
-          <p:nvPr/>
-        </p:nvSpPr>
-        <p:spPr>
-          <a:xfrm>
-            <a:off x="502920" y="6455664"/>
-            <a:ext cx="11183112" cy="219456"/>
-          </a:xfrm>
-          <a:prstGeom prst="rect">
-            <a:avLst/>
-          </a:prstGeom>
-          <a:noFill/>
-          <a:ln/>
-        </p:spPr>
-        <p:txBody>
-          <a:bodyPr wrap="square" lIns="0" tIns="0" rIns="0" bIns="0" rtlCol="0" anchor="ctr"/>
-          <a:lstStyle/>
-          <a:p>
-            <a:pPr indent="0" marL="0">
-              <a:buNone/>
-            </a:pPr>
-            <a:r>
-              <a:rPr lang="en-US" sz="850" i="1" dirty="0">
+              <a:buNone/>
+            </a:pPr>
+            <a:r>
+              <a:rPr lang="en-US" sz="900" dirty="0">
                 <a:solidFill>
                   <a:srgbClr val="6B7A8F"/>
                 </a:solidFill>
@@ -10056,56 +6255,24 @@
                 <a:ea typeface="Malgun Gothic" pitchFamily="34" charset="-122"/>
                 <a:cs typeface="Malgun Gothic" pitchFamily="34" charset="-120"/>
               </a:rPr>
-              <a:t>※ 주요 흐름 위주로 발췌 · 긴 인자 목록은 (...)로 생략, 설계 치수는 변수명으로 대체</a:t>
-            </a:r>
-            <a:endParaRPr lang="en-US" sz="850" dirty="0"/>
-          </a:p>
-        </p:txBody>
-      </p:sp>
-    </p:spTree>
-  </p:cSld>
-  <p:clrMapOvr>
-    <a:masterClrMapping/>
-  </p:clrMapOvr>
-</p:sld>
-</file>
-
-<file path=ppt/slides/slide14.xml><?xml version="1.0" encoding="utf-8"?>
-<p:sld xmlns:a="http://schemas.openxmlformats.org/drawingml/2006/main" xmlns:r="http://schemas.openxmlformats.org/officeDocument/2006/relationships" xmlns:p="http://schemas.openxmlformats.org/presentationml/2006/main">
-  <p:cSld name="Slide 14">
-    <p:bg>
-      <p:bgPr>
-        <a:solidFill>
-          <a:srgbClr val="F3F5F8"/>
-        </a:solidFill>
-      </p:bgPr>
-    </p:bg>
-    <p:spTree>
-      <p:nvGrpSpPr>
-        <p:cNvPr id="1" name=""/>
-        <p:cNvGrpSpPr/>
-        <p:nvPr/>
-      </p:nvGrpSpPr>
-      <p:grpSpPr>
-        <a:xfrm>
-          <a:off x="0" y="0"/>
-          <a:ext cx="0" cy="0"/>
-          <a:chOff x="0" y="0"/>
-          <a:chExt cx="0" cy="0"/>
-        </a:xfrm>
-      </p:grpSpPr>
-      <p:sp>
-        <p:nvSpPr>
-          <p:cNvPr id="2" name="Shape 0"/>
+              <a:t>새 프로젝트 · 디자인 생성</a:t>
+            </a:r>
+            <a:endParaRPr lang="en-US" sz="900" dirty="0"/>
+          </a:p>
+        </p:txBody>
+      </p:sp>
+      <p:sp>
+        <p:nvSpPr>
+          <p:cNvPr id="12" name="Shape 10"/>
           <p:cNvSpPr/>
           <p:nvPr/>
         </p:nvSpPr>
         <p:spPr>
           <a:xfrm>
-            <a:off x="502920" y="384048"/>
-            <a:ext cx="475488" cy="475488"/>
-          </a:xfrm>
-          <a:prstGeom prst="rect">
+            <a:off x="3358591" y="1170432"/>
+            <a:ext cx="256032" cy="256032"/>
+          </a:xfrm>
+          <a:prstGeom prst="ellipse">
             <a:avLst/>
           </a:prstGeom>
           <a:solidFill>
@@ -10121,14 +6288,14 @@
       </p:sp>
       <p:sp>
         <p:nvSpPr>
-          <p:cNvPr id="3" name="Text 1"/>
+          <p:cNvPr id="13" name="Text 11"/>
           <p:cNvSpPr txBox="1"/>
           <p:nvPr/>
         </p:nvSpPr>
         <p:spPr>
           <a:xfrm>
-            <a:off x="502920" y="384048"/>
-            <a:ext cx="475488" cy="475488"/>
+            <a:off x="3358591" y="1170432"/>
+            <a:ext cx="256032" cy="256032"/>
           </a:xfrm>
           <a:prstGeom prst="rect">
             <a:avLst/>
@@ -10144,7 +6311,7 @@
               <a:buNone/>
             </a:pPr>
             <a:r>
-              <a:rPr lang="en-US" sz="1600" b="1" dirty="0">
+              <a:rPr lang="en-US" sz="900" b="1" dirty="0">
                 <a:solidFill>
                   <a:srgbClr val="FFFFFF"/>
                 </a:solidFill>
@@ -10152,22 +6319,22 @@
                 <a:ea typeface="Malgun Gothic" pitchFamily="34" charset="-122"/>
                 <a:cs typeface="Malgun Gothic" pitchFamily="34" charset="-120"/>
               </a:rPr>
-              <a:t>A-3</a:t>
-            </a:r>
-            <a:endParaRPr lang="en-US" sz="1600" dirty="0"/>
-          </a:p>
-        </p:txBody>
-      </p:sp>
-      <p:sp>
-        <p:nvSpPr>
-          <p:cNvPr id="4" name="Text 2"/>
+              <a:t>2</a:t>
+            </a:r>
+            <a:endParaRPr lang="en-US" sz="900" dirty="0"/>
+          </a:p>
+        </p:txBody>
+      </p:sp>
+      <p:sp>
+        <p:nvSpPr>
+          <p:cNvPr id="14" name="Text 12"/>
           <p:cNvSpPr txBox="1"/>
           <p:nvPr/>
         </p:nvSpPr>
         <p:spPr>
           <a:xfrm>
-            <a:off x="1124712" y="365760"/>
-            <a:ext cx="7315200" cy="237744"/>
+            <a:off x="3706063" y="1152144"/>
+            <a:ext cx="2267712" cy="292608"/>
           </a:xfrm>
           <a:prstGeom prst="rect">
             <a:avLst/>
@@ -10183,30 +6350,57 @@
               <a:buNone/>
             </a:pPr>
             <a:r>
-              <a:rPr lang="en-US" sz="1050" b="1" spc="100" kern="0" dirty="0">
-                <a:solidFill>
-                  <a:srgbClr val="00A3C4"/>
-                </a:solidFill>
-                <a:latin typeface="Malgun Gothic" pitchFamily="34" charset="0"/>
-                <a:ea typeface="Malgun Gothic" pitchFamily="34" charset="-122"/>
-                <a:cs typeface="Malgun Gothic" pitchFamily="34" charset="-120"/>
-              </a:rPr>
-              <a:t>부록</a:t>
-            </a:r>
-            <a:endParaRPr lang="en-US" sz="1050" dirty="0"/>
-          </a:p>
-        </p:txBody>
-      </p:sp>
-      <p:sp>
-        <p:nvSpPr>
-          <p:cNvPr id="5" name="Text 3"/>
+              <a:rPr lang="en-US" sz="1100" b="1" dirty="0">
+                <a:solidFill>
+                  <a:srgbClr val="16305B"/>
+                </a:solidFill>
+                <a:latin typeface="Malgun Gothic" pitchFamily="34" charset="0"/>
+                <a:ea typeface="Malgun Gothic" pitchFamily="34" charset="-122"/>
+                <a:cs typeface="Malgun Gothic" pitchFamily="34" charset="-120"/>
+              </a:rPr>
+              <a:t>형상 불러오기</a:t>
+            </a:r>
+            <a:endParaRPr lang="en-US" sz="1100" dirty="0"/>
+          </a:p>
+        </p:txBody>
+      </p:sp>
+      <p:sp>
+        <p:nvSpPr>
+          <p:cNvPr id="15" name="Shape 13"/>
+          <p:cNvSpPr/>
+          <p:nvPr/>
+        </p:nvSpPr>
+        <p:spPr>
+          <a:xfrm>
+            <a:off x="3358591" y="1536192"/>
+            <a:ext cx="2615184" cy="1874520"/>
+          </a:xfrm>
+          <a:prstGeom prst="roundRect">
+            <a:avLst>
+              <a:gd name="adj" fmla="val 2439"/>
+            </a:avLst>
+          </a:prstGeom>
+          <a:solidFill>
+            <a:srgbClr val="FFFFFF"/>
+          </a:solidFill>
+          <a:ln w="12700">
+            <a:solidFill>
+              <a:srgbClr val="C3CDDA"/>
+            </a:solidFill>
+            <a:prstDash val="dash"/>
+          </a:ln>
+        </p:spPr>
+      </p:sp>
+      <p:sp>
+        <p:nvSpPr>
+          <p:cNvPr id="16" name="Text 14"/>
           <p:cNvSpPr txBox="1"/>
           <p:nvPr/>
         </p:nvSpPr>
         <p:spPr>
           <a:xfrm>
-            <a:off x="1124712" y="548640"/>
-            <a:ext cx="10607040" cy="384048"/>
+            <a:off x="3358591" y="1536192"/>
+            <a:ext cx="2615184" cy="1874520"/>
           </a:xfrm>
           <a:prstGeom prst="rect">
             <a:avLst/>
@@ -10218,33 +6412,72 @@
           <a:bodyPr wrap="square" lIns="0" tIns="0" rIns="0" bIns="0" rtlCol="0" anchor="ctr"/>
           <a:lstStyle/>
           <a:p>
+            <a:pPr algn="ctr" indent="0" marL="0">
+              <a:buNone/>
+            </a:pPr>
+            <a:r>
+              <a:rPr lang="en-US" sz="1000" b="1" dirty="0">
+                <a:solidFill>
+                  <a:srgbClr val="B5C0CF"/>
+                </a:solidFill>
+                <a:latin typeface="Malgun Gothic" pitchFamily="34" charset="0"/>
+                <a:ea typeface="Malgun Gothic" pitchFamily="34" charset="-122"/>
+                <a:cs typeface="Malgun Gothic" pitchFamily="34" charset="-120"/>
+              </a:rPr>
+              <a:t>GUI 캡처</a:t>
+            </a:r>
+            <a:endParaRPr lang="en-US" sz="1000" dirty="0"/>
+          </a:p>
+        </p:txBody>
+      </p:sp>
+      <p:sp>
+        <p:nvSpPr>
+          <p:cNvPr id="17" name="Text 15"/>
+          <p:cNvSpPr txBox="1"/>
+          <p:nvPr/>
+        </p:nvSpPr>
+        <p:spPr>
+          <a:xfrm>
+            <a:off x="3358591" y="3456432"/>
+            <a:ext cx="2615184" cy="274320"/>
+          </a:xfrm>
+          <a:prstGeom prst="rect">
+            <a:avLst/>
+          </a:prstGeom>
+          <a:noFill/>
+          <a:ln/>
+        </p:spPr>
+        <p:txBody>
+          <a:bodyPr wrap="square" lIns="0" tIns="0" rIns="0" bIns="0" rtlCol="0" anchor="ctr"/>
+          <a:lstStyle/>
+          <a:p>
             <a:pPr indent="0" marL="0">
               <a:buNone/>
             </a:pPr>
             <a:r>
-              <a:rPr lang="en-US" sz="2200" b="1" dirty="0">
-                <a:solidFill>
-                  <a:srgbClr val="16305B"/>
-                </a:solidFill>
-                <a:latin typeface="Malgun Gothic" pitchFamily="34" charset="0"/>
-                <a:ea typeface="Malgun Gothic" pitchFamily="34" charset="-122"/>
-                <a:cs typeface="Malgun Gothic" pitchFamily="34" charset="-120"/>
-              </a:rPr>
-              <a:t>Icepak 해석 모델 GUI 설정 절차</a:t>
-            </a:r>
-            <a:endParaRPr lang="en-US" sz="2200" dirty="0"/>
-          </a:p>
-        </p:txBody>
-      </p:sp>
-      <p:sp>
-        <p:nvSpPr>
-          <p:cNvPr id="6" name="Shape 4"/>
+              <a:rPr lang="en-US" sz="900" dirty="0">
+                <a:solidFill>
+                  <a:srgbClr val="6B7A8F"/>
+                </a:solidFill>
+                <a:latin typeface="Malgun Gothic" pitchFamily="34" charset="0"/>
+                <a:ea typeface="Malgun Gothic" pitchFamily="34" charset="-122"/>
+                <a:cs typeface="Malgun Gothic" pitchFamily="34" charset="-120"/>
+              </a:rPr>
+              <a:t>STEP 불러오기 · 부품 이름·재질 지정</a:t>
+            </a:r>
+            <a:endParaRPr lang="en-US" sz="900" dirty="0"/>
+          </a:p>
+        </p:txBody>
+      </p:sp>
+      <p:sp>
+        <p:nvSpPr>
+          <p:cNvPr id="18" name="Shape 16"/>
           <p:cNvSpPr/>
           <p:nvPr/>
         </p:nvSpPr>
         <p:spPr>
           <a:xfrm>
-            <a:off x="502920" y="1170432"/>
+            <a:off x="6214262" y="1170432"/>
             <a:ext cx="256032" cy="256032"/>
           </a:xfrm>
           <a:prstGeom prst="ellipse">
@@ -10263,13 +6496,13 @@
       </p:sp>
       <p:sp>
         <p:nvSpPr>
-          <p:cNvPr id="7" name="Text 5"/>
+          <p:cNvPr id="19" name="Text 17"/>
           <p:cNvSpPr txBox="1"/>
           <p:nvPr/>
         </p:nvSpPr>
         <p:spPr>
           <a:xfrm>
-            <a:off x="502920" y="1170432"/>
+            <a:off x="6214262" y="1170432"/>
             <a:ext cx="256032" cy="256032"/>
           </a:xfrm>
           <a:prstGeom prst="rect">
@@ -10294,7 +6527,7 @@
                 <a:ea typeface="Malgun Gothic" pitchFamily="34" charset="-122"/>
                 <a:cs typeface="Malgun Gothic" pitchFamily="34" charset="-120"/>
               </a:rPr>
-              <a:t>1</a:t>
+              <a:t>3</a:t>
             </a:r>
             <a:endParaRPr lang="en-US" sz="900" dirty="0"/>
           </a:p>
@@ -10302,13 +6535,13 @@
       </p:sp>
       <p:sp>
         <p:nvSpPr>
-          <p:cNvPr id="8" name="Text 6"/>
+          <p:cNvPr id="20" name="Text 18"/>
           <p:cNvSpPr txBox="1"/>
           <p:nvPr/>
         </p:nvSpPr>
         <p:spPr>
           <a:xfrm>
-            <a:off x="850392" y="1152144"/>
+            <a:off x="6561734" y="1152144"/>
             <a:ext cx="2267712" cy="292608"/>
           </a:xfrm>
           <a:prstGeom prst="rect">
@@ -10333,7 +6566,7 @@
                 <a:ea typeface="Malgun Gothic" pitchFamily="34" charset="-122"/>
                 <a:cs typeface="Malgun Gothic" pitchFamily="34" charset="-120"/>
               </a:rPr>
-              <a:t>프로젝트 생성</a:t>
+              <a:t>유체 영역</a:t>
             </a:r>
             <a:endParaRPr lang="en-US" sz="1100" dirty="0"/>
           </a:p>
@@ -10341,13 +6574,13 @@
       </p:sp>
       <p:sp>
         <p:nvSpPr>
-          <p:cNvPr id="9" name="Shape 7"/>
+          <p:cNvPr id="21" name="Shape 19"/>
           <p:cNvSpPr/>
           <p:nvPr/>
         </p:nvSpPr>
         <p:spPr>
           <a:xfrm>
-            <a:off x="502920" y="1536192"/>
+            <a:off x="6214262" y="1536192"/>
             <a:ext cx="2615184" cy="1874520"/>
           </a:xfrm>
           <a:prstGeom prst="roundRect">
@@ -10368,13 +6601,13 @@
       </p:sp>
       <p:sp>
         <p:nvSpPr>
-          <p:cNvPr id="10" name="Text 8"/>
+          <p:cNvPr id="22" name="Text 20"/>
           <p:cNvSpPr txBox="1"/>
           <p:nvPr/>
         </p:nvSpPr>
         <p:spPr>
           <a:xfrm>
-            <a:off x="502920" y="1536192"/>
+            <a:off x="6214262" y="1536192"/>
             <a:ext cx="2615184" cy="1874520"/>
           </a:xfrm>
           <a:prstGeom prst="rect">
@@ -10407,13 +6640,13 @@
       </p:sp>
       <p:sp>
         <p:nvSpPr>
-          <p:cNvPr id="11" name="Text 9"/>
+          <p:cNvPr id="23" name="Text 21"/>
           <p:cNvSpPr txBox="1"/>
           <p:nvPr/>
         </p:nvSpPr>
         <p:spPr>
           <a:xfrm>
-            <a:off x="502920" y="3456432"/>
+            <a:off x="6214262" y="3456432"/>
             <a:ext cx="2615184" cy="274320"/>
           </a:xfrm>
           <a:prstGeom prst="rect">
@@ -10438,7 +6671,7 @@
                 <a:ea typeface="Malgun Gothic" pitchFamily="34" charset="-122"/>
                 <a:cs typeface="Malgun Gothic" pitchFamily="34" charset="-120"/>
               </a:rPr>
-              <a:t>새 프로젝트 · 디자인 생성</a:t>
+              <a:t>박스 생성 → 형상 Subtract → 분리</a:t>
             </a:r>
             <a:endParaRPr lang="en-US" sz="900" dirty="0"/>
           </a:p>
@@ -10446,13 +6679,13 @@
       </p:sp>
       <p:sp>
         <p:nvSpPr>
-          <p:cNvPr id="12" name="Shape 10"/>
+          <p:cNvPr id="24" name="Shape 22"/>
           <p:cNvSpPr/>
           <p:nvPr/>
         </p:nvSpPr>
         <p:spPr>
           <a:xfrm>
-            <a:off x="3358591" y="1170432"/>
+            <a:off x="9069934" y="1170432"/>
             <a:ext cx="256032" cy="256032"/>
           </a:xfrm>
           <a:prstGeom prst="ellipse">
@@ -10471,13 +6704,13 @@
       </p:sp>
       <p:sp>
         <p:nvSpPr>
-          <p:cNvPr id="13" name="Text 11"/>
+          <p:cNvPr id="25" name="Text 23"/>
           <p:cNvSpPr txBox="1"/>
           <p:nvPr/>
         </p:nvSpPr>
         <p:spPr>
           <a:xfrm>
-            <a:off x="3358591" y="1170432"/>
+            <a:off x="9069934" y="1170432"/>
             <a:ext cx="256032" cy="256032"/>
           </a:xfrm>
           <a:prstGeom prst="rect">
@@ -10502,7 +6735,7 @@
                 <a:ea typeface="Malgun Gothic" pitchFamily="34" charset="-122"/>
                 <a:cs typeface="Malgun Gothic" pitchFamily="34" charset="-120"/>
               </a:rPr>
-              <a:t>2</a:t>
+              <a:t>4</a:t>
             </a:r>
             <a:endParaRPr lang="en-US" sz="900" dirty="0"/>
           </a:p>
@@ -10510,13 +6743,13 @@
       </p:sp>
       <p:sp>
         <p:nvSpPr>
-          <p:cNvPr id="14" name="Text 12"/>
+          <p:cNvPr id="26" name="Text 24"/>
           <p:cNvSpPr txBox="1"/>
           <p:nvPr/>
         </p:nvSpPr>
         <p:spPr>
           <a:xfrm>
-            <a:off x="3706063" y="1152144"/>
+            <a:off x="9417406" y="1152144"/>
             <a:ext cx="2267712" cy="292608"/>
           </a:xfrm>
           <a:prstGeom prst="rect">
@@ -10541,7 +6774,7 @@
                 <a:ea typeface="Malgun Gothic" pitchFamily="34" charset="-122"/>
                 <a:cs typeface="Malgun Gothic" pitchFamily="34" charset="-120"/>
               </a:rPr>
-              <a:t>형상 불러오기</a:t>
+              <a:t>경계조건</a:t>
             </a:r>
             <a:endParaRPr lang="en-US" sz="1100" dirty="0"/>
           </a:p>
@@ -10549,13 +6782,13 @@
       </p:sp>
       <p:sp>
         <p:nvSpPr>
-          <p:cNvPr id="15" name="Shape 13"/>
+          <p:cNvPr id="27" name="Shape 25"/>
           <p:cNvSpPr/>
           <p:nvPr/>
         </p:nvSpPr>
         <p:spPr>
           <a:xfrm>
-            <a:off x="3358591" y="1536192"/>
+            <a:off x="9069934" y="1536192"/>
             <a:ext cx="2615184" cy="1874520"/>
           </a:xfrm>
           <a:prstGeom prst="roundRect">
@@ -10576,13 +6809,13 @@
       </p:sp>
       <p:sp>
         <p:nvSpPr>
-          <p:cNvPr id="16" name="Text 14"/>
+          <p:cNvPr id="28" name="Text 26"/>
           <p:cNvSpPr txBox="1"/>
           <p:nvPr/>
         </p:nvSpPr>
         <p:spPr>
           <a:xfrm>
-            <a:off x="3358591" y="1536192"/>
+            <a:off x="9069934" y="1536192"/>
             <a:ext cx="2615184" cy="1874520"/>
           </a:xfrm>
           <a:prstGeom prst="rect">
@@ -10615,13 +6848,13 @@
       </p:sp>
       <p:sp>
         <p:nvSpPr>
-          <p:cNvPr id="17" name="Text 15"/>
+          <p:cNvPr id="29" name="Text 27"/>
           <p:cNvSpPr txBox="1"/>
           <p:nvPr/>
         </p:nvSpPr>
         <p:spPr>
           <a:xfrm>
-            <a:off x="3358591" y="3456432"/>
+            <a:off x="9069934" y="3456432"/>
             <a:ext cx="2615184" cy="274320"/>
           </a:xfrm>
           <a:prstGeom prst="rect">
@@ -10646,7 +6879,7 @@
                 <a:ea typeface="Malgun Gothic" pitchFamily="34" charset="-122"/>
                 <a:cs typeface="Malgun Gothic" pitchFamily="34" charset="-120"/>
               </a:rPr>
-              <a:t>STEP 불러오기 · 부품 이름·재질 지정</a:t>
+              <a:t>발열원 · 팬(입구) · 개구부(출구)</a:t>
             </a:r>
             <a:endParaRPr lang="en-US" sz="900" dirty="0"/>
           </a:p>
@@ -10654,13 +6887,13 @@
       </p:sp>
       <p:sp>
         <p:nvSpPr>
-          <p:cNvPr id="18" name="Shape 16"/>
+          <p:cNvPr id="30" name="Shape 28"/>
           <p:cNvSpPr/>
           <p:nvPr/>
         </p:nvSpPr>
         <p:spPr>
           <a:xfrm>
-            <a:off x="6214262" y="1170432"/>
+            <a:off x="502920" y="3822192"/>
             <a:ext cx="256032" cy="256032"/>
           </a:xfrm>
           <a:prstGeom prst="ellipse">
@@ -10679,13 +6912,13 @@
       </p:sp>
       <p:sp>
         <p:nvSpPr>
-          <p:cNvPr id="19" name="Text 17"/>
+          <p:cNvPr id="31" name="Text 29"/>
           <p:cNvSpPr txBox="1"/>
           <p:nvPr/>
         </p:nvSpPr>
         <p:spPr>
           <a:xfrm>
-            <a:off x="6214262" y="1170432"/>
+            <a:off x="502920" y="3822192"/>
             <a:ext cx="256032" cy="256032"/>
           </a:xfrm>
           <a:prstGeom prst="rect">
@@ -10710,7 +6943,7 @@
                 <a:ea typeface="Malgun Gothic" pitchFamily="34" charset="-122"/>
                 <a:cs typeface="Malgun Gothic" pitchFamily="34" charset="-120"/>
               </a:rPr>
-              <a:t>3</a:t>
+              <a:t>5</a:t>
             </a:r>
             <a:endParaRPr lang="en-US" sz="900" dirty="0"/>
           </a:p>
@@ -10718,13 +6951,13 @@
       </p:sp>
       <p:sp>
         <p:nvSpPr>
-          <p:cNvPr id="20" name="Text 18"/>
+          <p:cNvPr id="32" name="Text 30"/>
           <p:cNvSpPr txBox="1"/>
           <p:nvPr/>
         </p:nvSpPr>
         <p:spPr>
           <a:xfrm>
-            <a:off x="6561734" y="1152144"/>
+            <a:off x="850392" y="3803904"/>
             <a:ext cx="2267712" cy="292608"/>
           </a:xfrm>
           <a:prstGeom prst="rect">
@@ -10749,7 +6982,7 @@
                 <a:ea typeface="Malgun Gothic" pitchFamily="34" charset="-122"/>
                 <a:cs typeface="Malgun Gothic" pitchFamily="34" charset="-120"/>
               </a:rPr>
-              <a:t>유체 영역</a:t>
+              <a:t>메시</a:t>
             </a:r>
             <a:endParaRPr lang="en-US" sz="1100" dirty="0"/>
           </a:p>
@@ -10757,13 +6990,13 @@
       </p:sp>
       <p:sp>
         <p:nvSpPr>
-          <p:cNvPr id="21" name="Shape 19"/>
+          <p:cNvPr id="33" name="Shape 31"/>
           <p:cNvSpPr/>
           <p:nvPr/>
         </p:nvSpPr>
         <p:spPr>
           <a:xfrm>
-            <a:off x="6214262" y="1536192"/>
+            <a:off x="502920" y="4187952"/>
             <a:ext cx="2615184" cy="1874520"/>
           </a:xfrm>
           <a:prstGeom prst="roundRect">
@@ -10784,13 +7017,13 @@
       </p:sp>
       <p:sp>
         <p:nvSpPr>
-          <p:cNvPr id="22" name="Text 20"/>
+          <p:cNvPr id="34" name="Text 32"/>
           <p:cNvSpPr txBox="1"/>
           <p:nvPr/>
         </p:nvSpPr>
         <p:spPr>
           <a:xfrm>
-            <a:off x="6214262" y="1536192"/>
+            <a:off x="502920" y="4187952"/>
             <a:ext cx="2615184" cy="1874520"/>
           </a:xfrm>
           <a:prstGeom prst="rect">
@@ -10823,13 +7056,13 @@
       </p:sp>
       <p:sp>
         <p:nvSpPr>
-          <p:cNvPr id="23" name="Text 21"/>
+          <p:cNvPr id="35" name="Text 33"/>
           <p:cNvSpPr txBox="1"/>
           <p:nvPr/>
         </p:nvSpPr>
         <p:spPr>
           <a:xfrm>
-            <a:off x="6214262" y="3456432"/>
+            <a:off x="502920" y="6108192"/>
             <a:ext cx="2615184" cy="274320"/>
           </a:xfrm>
           <a:prstGeom prst="rect">
@@ -10854,7 +7087,7 @@
                 <a:ea typeface="Malgun Gothic" pitchFamily="34" charset="-122"/>
                 <a:cs typeface="Malgun Gothic" pitchFamily="34" charset="-120"/>
               </a:rPr>
-              <a:t>박스 생성 → 형상 Subtract → 분리</a:t>
+              <a:t>유체 영역 로컬 메시 · 글로벌 메시</a:t>
             </a:r>
             <a:endParaRPr lang="en-US" sz="900" dirty="0"/>
           </a:p>
@@ -10862,13 +7095,13 @@
       </p:sp>
       <p:sp>
         <p:nvSpPr>
-          <p:cNvPr id="24" name="Shape 22"/>
+          <p:cNvPr id="36" name="Shape 34"/>
           <p:cNvSpPr/>
           <p:nvPr/>
         </p:nvSpPr>
         <p:spPr>
           <a:xfrm>
-            <a:off x="9069934" y="1170432"/>
+            <a:off x="3358591" y="3822192"/>
             <a:ext cx="256032" cy="256032"/>
           </a:xfrm>
           <a:prstGeom prst="ellipse">
@@ -10887,13 +7120,13 @@
       </p:sp>
       <p:sp>
         <p:nvSpPr>
-          <p:cNvPr id="25" name="Text 23"/>
+          <p:cNvPr id="37" name="Text 35"/>
           <p:cNvSpPr txBox="1"/>
           <p:nvPr/>
         </p:nvSpPr>
         <p:spPr>
           <a:xfrm>
-            <a:off x="9069934" y="1170432"/>
+            <a:off x="3358591" y="3822192"/>
             <a:ext cx="256032" cy="256032"/>
           </a:xfrm>
           <a:prstGeom prst="rect">
@@ -10918,7 +7151,7 @@
                 <a:ea typeface="Malgun Gothic" pitchFamily="34" charset="-122"/>
                 <a:cs typeface="Malgun Gothic" pitchFamily="34" charset="-120"/>
               </a:rPr>
-              <a:t>4</a:t>
+              <a:t>6</a:t>
             </a:r>
             <a:endParaRPr lang="en-US" sz="900" dirty="0"/>
           </a:p>
@@ -10926,13 +7159,13 @@
       </p:sp>
       <p:sp>
         <p:nvSpPr>
-          <p:cNvPr id="26" name="Text 24"/>
+          <p:cNvPr id="38" name="Text 36"/>
           <p:cNvSpPr txBox="1"/>
           <p:nvPr/>
         </p:nvSpPr>
         <p:spPr>
           <a:xfrm>
-            <a:off x="9417406" y="1152144"/>
+            <a:off x="3706063" y="3803904"/>
             <a:ext cx="2267712" cy="292608"/>
           </a:xfrm>
           <a:prstGeom prst="rect">
@@ -10957,7 +7190,7 @@
                 <a:ea typeface="Malgun Gothic" pitchFamily="34" charset="-122"/>
                 <a:cs typeface="Malgun Gothic" pitchFamily="34" charset="-120"/>
               </a:rPr>
-              <a:t>경계조건</a:t>
+              <a:t>측정면</a:t>
             </a:r>
             <a:endParaRPr lang="en-US" sz="1100" dirty="0"/>
           </a:p>
@@ -10965,13 +7198,13 @@
       </p:sp>
       <p:sp>
         <p:nvSpPr>
-          <p:cNvPr id="27" name="Shape 25"/>
+          <p:cNvPr id="39" name="Shape 37"/>
           <p:cNvSpPr/>
           <p:nvPr/>
         </p:nvSpPr>
         <p:spPr>
           <a:xfrm>
-            <a:off x="9069934" y="1536192"/>
+            <a:off x="3358591" y="4187952"/>
             <a:ext cx="2615184" cy="1874520"/>
           </a:xfrm>
           <a:prstGeom prst="roundRect">
@@ -10992,13 +7225,13 @@
       </p:sp>
       <p:sp>
         <p:nvSpPr>
-          <p:cNvPr id="28" name="Text 26"/>
+          <p:cNvPr id="40" name="Text 38"/>
           <p:cNvSpPr txBox="1"/>
           <p:nvPr/>
         </p:nvSpPr>
         <p:spPr>
           <a:xfrm>
-            <a:off x="9069934" y="1536192"/>
+            <a:off x="3358591" y="4187952"/>
             <a:ext cx="2615184" cy="1874520"/>
           </a:xfrm>
           <a:prstGeom prst="rect">
@@ -11031,13 +7264,13 @@
       </p:sp>
       <p:sp>
         <p:nvSpPr>
-          <p:cNvPr id="29" name="Text 27"/>
+          <p:cNvPr id="41" name="Text 39"/>
           <p:cNvSpPr txBox="1"/>
           <p:nvPr/>
         </p:nvSpPr>
         <p:spPr>
           <a:xfrm>
-            <a:off x="9069934" y="3456432"/>
+            <a:off x="3358591" y="6108192"/>
             <a:ext cx="2615184" cy="274320"/>
           </a:xfrm>
           <a:prstGeom prst="rect">
@@ -11062,7 +7295,7 @@
                 <a:ea typeface="Malgun Gothic" pitchFamily="34" charset="-122"/>
                 <a:cs typeface="Malgun Gothic" pitchFamily="34" charset="-120"/>
               </a:rPr>
-              <a:t>발열원 · 팬(입구) · 개구부(출구)</a:t>
+              <a:t>유로 단면 · 분기 입구 측정면 생성</a:t>
             </a:r>
             <a:endParaRPr lang="en-US" sz="900" dirty="0"/>
           </a:p>
@@ -11070,13 +7303,13 @@
       </p:sp>
       <p:sp>
         <p:nvSpPr>
-          <p:cNvPr id="30" name="Shape 28"/>
+          <p:cNvPr id="42" name="Shape 40"/>
           <p:cNvSpPr/>
           <p:nvPr/>
         </p:nvSpPr>
         <p:spPr>
           <a:xfrm>
-            <a:off x="502920" y="3822192"/>
+            <a:off x="6214262" y="3822192"/>
             <a:ext cx="256032" cy="256032"/>
           </a:xfrm>
           <a:prstGeom prst="ellipse">
@@ -11095,13 +7328,13 @@
       </p:sp>
       <p:sp>
         <p:nvSpPr>
-          <p:cNvPr id="31" name="Text 29"/>
+          <p:cNvPr id="43" name="Text 41"/>
           <p:cNvSpPr txBox="1"/>
           <p:nvPr/>
         </p:nvSpPr>
         <p:spPr>
           <a:xfrm>
-            <a:off x="502920" y="3822192"/>
+            <a:off x="6214262" y="3822192"/>
             <a:ext cx="256032" cy="256032"/>
           </a:xfrm>
           <a:prstGeom prst="rect">
@@ -11126,7 +7359,7 @@
                 <a:ea typeface="Malgun Gothic" pitchFamily="34" charset="-122"/>
                 <a:cs typeface="Malgun Gothic" pitchFamily="34" charset="-120"/>
               </a:rPr>
-              <a:t>5</a:t>
+              <a:t>7</a:t>
             </a:r>
             <a:endParaRPr lang="en-US" sz="900" dirty="0"/>
           </a:p>
@@ -11134,13 +7367,13 @@
       </p:sp>
       <p:sp>
         <p:nvSpPr>
-          <p:cNvPr id="32" name="Text 30"/>
+          <p:cNvPr id="44" name="Text 42"/>
           <p:cNvSpPr txBox="1"/>
           <p:nvPr/>
         </p:nvSpPr>
         <p:spPr>
           <a:xfrm>
-            <a:off x="850392" y="3803904"/>
+            <a:off x="6561734" y="3803904"/>
             <a:ext cx="2267712" cy="292608"/>
           </a:xfrm>
           <a:prstGeom prst="rect">
@@ -11165,7 +7398,7 @@
                 <a:ea typeface="Malgun Gothic" pitchFamily="34" charset="-122"/>
                 <a:cs typeface="Malgun Gothic" pitchFamily="34" charset="-120"/>
               </a:rPr>
-              <a:t>메시</a:t>
+              <a:t>해석 · 추출</a:t>
             </a:r>
             <a:endParaRPr lang="en-US" sz="1100" dirty="0"/>
           </a:p>
@@ -11173,13 +7406,13 @@
       </p:sp>
       <p:sp>
         <p:nvSpPr>
-          <p:cNvPr id="33" name="Shape 31"/>
+          <p:cNvPr id="45" name="Shape 43"/>
           <p:cNvSpPr/>
           <p:nvPr/>
         </p:nvSpPr>
         <p:spPr>
           <a:xfrm>
-            <a:off x="502920" y="4187952"/>
+            <a:off x="6214262" y="4187952"/>
             <a:ext cx="2615184" cy="1874520"/>
           </a:xfrm>
           <a:prstGeom prst="roundRect">
@@ -11200,13 +7433,13 @@
       </p:sp>
       <p:sp>
         <p:nvSpPr>
-          <p:cNvPr id="34" name="Text 32"/>
+          <p:cNvPr id="46" name="Text 44"/>
           <p:cNvSpPr txBox="1"/>
           <p:nvPr/>
         </p:nvSpPr>
         <p:spPr>
           <a:xfrm>
-            <a:off x="502920" y="4187952"/>
+            <a:off x="6214262" y="4187952"/>
             <a:ext cx="2615184" cy="1874520"/>
           </a:xfrm>
           <a:prstGeom prst="rect">
@@ -11239,13 +7472,13 @@
       </p:sp>
       <p:sp>
         <p:nvSpPr>
-          <p:cNvPr id="35" name="Text 33"/>
+          <p:cNvPr id="47" name="Text 45"/>
           <p:cNvSpPr txBox="1"/>
           <p:nvPr/>
         </p:nvSpPr>
         <p:spPr>
           <a:xfrm>
-            <a:off x="502920" y="6108192"/>
+            <a:off x="6214262" y="6108192"/>
             <a:ext cx="2615184" cy="274320"/>
           </a:xfrm>
           <a:prstGeom prst="rect">
@@ -11270,7 +7503,7 @@
                 <a:ea typeface="Malgun Gothic" pitchFamily="34" charset="-122"/>
                 <a:cs typeface="Malgun Gothic" pitchFamily="34" charset="-120"/>
               </a:rPr>
-              <a:t>유체 영역 로컬 메시 · 글로벌 메시</a:t>
+              <a:t>정상상태 해석 → Fields Summary 추출</a:t>
             </a:r>
             <a:endParaRPr lang="en-US" sz="900" dirty="0"/>
           </a:p>
@@ -11278,17 +7511,19 @@
       </p:sp>
       <p:sp>
         <p:nvSpPr>
-          <p:cNvPr id="36" name="Shape 34"/>
+          <p:cNvPr id="48" name="Shape 46"/>
           <p:cNvSpPr/>
           <p:nvPr/>
         </p:nvSpPr>
         <p:spPr>
           <a:xfrm>
-            <a:off x="3358591" y="3822192"/>
-            <a:ext cx="256032" cy="256032"/>
-          </a:xfrm>
-          <a:prstGeom prst="ellipse">
-            <a:avLst/>
+            <a:off x="9069934" y="4187952"/>
+            <a:ext cx="2615184" cy="1874520"/>
+          </a:xfrm>
+          <a:prstGeom prst="roundRect">
+            <a:avLst>
+              <a:gd name="adj" fmla="val 2927"/>
+            </a:avLst>
           </a:prstGeom>
           <a:solidFill>
             <a:srgbClr val="16305B"/>
@@ -11303,424 +7538,6 @@
       </p:sp>
       <p:sp>
         <p:nvSpPr>
-          <p:cNvPr id="37" name="Text 35"/>
-          <p:cNvSpPr txBox="1"/>
-          <p:nvPr/>
-        </p:nvSpPr>
-        <p:spPr>
-          <a:xfrm>
-            <a:off x="3358591" y="3822192"/>
-            <a:ext cx="256032" cy="256032"/>
-          </a:xfrm>
-          <a:prstGeom prst="rect">
-            <a:avLst/>
-          </a:prstGeom>
-          <a:noFill/>
-          <a:ln/>
-        </p:spPr>
-        <p:txBody>
-          <a:bodyPr wrap="square" lIns="0" tIns="0" rIns="0" bIns="0" rtlCol="0" anchor="ctr"/>
-          <a:lstStyle/>
-          <a:p>
-            <a:pPr algn="ctr" indent="0" marL="0">
-              <a:buNone/>
-            </a:pPr>
-            <a:r>
-              <a:rPr lang="en-US" sz="900" b="1" dirty="0">
-                <a:solidFill>
-                  <a:srgbClr val="FFFFFF"/>
-                </a:solidFill>
-                <a:latin typeface="Malgun Gothic" pitchFamily="34" charset="0"/>
-                <a:ea typeface="Malgun Gothic" pitchFamily="34" charset="-122"/>
-                <a:cs typeface="Malgun Gothic" pitchFamily="34" charset="-120"/>
-              </a:rPr>
-              <a:t>6</a:t>
-            </a:r>
-            <a:endParaRPr lang="en-US" sz="900" dirty="0"/>
-          </a:p>
-        </p:txBody>
-      </p:sp>
-      <p:sp>
-        <p:nvSpPr>
-          <p:cNvPr id="38" name="Text 36"/>
-          <p:cNvSpPr txBox="1"/>
-          <p:nvPr/>
-        </p:nvSpPr>
-        <p:spPr>
-          <a:xfrm>
-            <a:off x="3706063" y="3803904"/>
-            <a:ext cx="2267712" cy="292608"/>
-          </a:xfrm>
-          <a:prstGeom prst="rect">
-            <a:avLst/>
-          </a:prstGeom>
-          <a:noFill/>
-          <a:ln/>
-        </p:spPr>
-        <p:txBody>
-          <a:bodyPr wrap="square" lIns="0" tIns="0" rIns="0" bIns="0" rtlCol="0" anchor="ctr"/>
-          <a:lstStyle/>
-          <a:p>
-            <a:pPr indent="0" marL="0">
-              <a:buNone/>
-            </a:pPr>
-            <a:r>
-              <a:rPr lang="en-US" sz="1100" b="1" dirty="0">
-                <a:solidFill>
-                  <a:srgbClr val="16305B"/>
-                </a:solidFill>
-                <a:latin typeface="Malgun Gothic" pitchFamily="34" charset="0"/>
-                <a:ea typeface="Malgun Gothic" pitchFamily="34" charset="-122"/>
-                <a:cs typeface="Malgun Gothic" pitchFamily="34" charset="-120"/>
-              </a:rPr>
-              <a:t>측정면</a:t>
-            </a:r>
-            <a:endParaRPr lang="en-US" sz="1100" dirty="0"/>
-          </a:p>
-        </p:txBody>
-      </p:sp>
-      <p:sp>
-        <p:nvSpPr>
-          <p:cNvPr id="39" name="Shape 37"/>
-          <p:cNvSpPr/>
-          <p:nvPr/>
-        </p:nvSpPr>
-        <p:spPr>
-          <a:xfrm>
-            <a:off x="3358591" y="4187952"/>
-            <a:ext cx="2615184" cy="1874520"/>
-          </a:xfrm>
-          <a:prstGeom prst="roundRect">
-            <a:avLst>
-              <a:gd name="adj" fmla="val 2439"/>
-            </a:avLst>
-          </a:prstGeom>
-          <a:solidFill>
-            <a:srgbClr val="FFFFFF"/>
-          </a:solidFill>
-          <a:ln w="12700">
-            <a:solidFill>
-              <a:srgbClr val="C3CDDA"/>
-            </a:solidFill>
-            <a:prstDash val="dash"/>
-          </a:ln>
-        </p:spPr>
-      </p:sp>
-      <p:sp>
-        <p:nvSpPr>
-          <p:cNvPr id="40" name="Text 38"/>
-          <p:cNvSpPr txBox="1"/>
-          <p:nvPr/>
-        </p:nvSpPr>
-        <p:spPr>
-          <a:xfrm>
-            <a:off x="3358591" y="4187952"/>
-            <a:ext cx="2615184" cy="1874520"/>
-          </a:xfrm>
-          <a:prstGeom prst="rect">
-            <a:avLst/>
-          </a:prstGeom>
-          <a:noFill/>
-          <a:ln/>
-        </p:spPr>
-        <p:txBody>
-          <a:bodyPr wrap="square" lIns="0" tIns="0" rIns="0" bIns="0" rtlCol="0" anchor="ctr"/>
-          <a:lstStyle/>
-          <a:p>
-            <a:pPr algn="ctr" indent="0" marL="0">
-              <a:buNone/>
-            </a:pPr>
-            <a:r>
-              <a:rPr lang="en-US" sz="1000" b="1" dirty="0">
-                <a:solidFill>
-                  <a:srgbClr val="B5C0CF"/>
-                </a:solidFill>
-                <a:latin typeface="Malgun Gothic" pitchFamily="34" charset="0"/>
-                <a:ea typeface="Malgun Gothic" pitchFamily="34" charset="-122"/>
-                <a:cs typeface="Malgun Gothic" pitchFamily="34" charset="-120"/>
-              </a:rPr>
-              <a:t>GUI 캡처</a:t>
-            </a:r>
-            <a:endParaRPr lang="en-US" sz="1000" dirty="0"/>
-          </a:p>
-        </p:txBody>
-      </p:sp>
-      <p:sp>
-        <p:nvSpPr>
-          <p:cNvPr id="41" name="Text 39"/>
-          <p:cNvSpPr txBox="1"/>
-          <p:nvPr/>
-        </p:nvSpPr>
-        <p:spPr>
-          <a:xfrm>
-            <a:off x="3358591" y="6108192"/>
-            <a:ext cx="2615184" cy="274320"/>
-          </a:xfrm>
-          <a:prstGeom prst="rect">
-            <a:avLst/>
-          </a:prstGeom>
-          <a:noFill/>
-          <a:ln/>
-        </p:spPr>
-        <p:txBody>
-          <a:bodyPr wrap="square" lIns="0" tIns="0" rIns="0" bIns="0" rtlCol="0" anchor="ctr"/>
-          <a:lstStyle/>
-          <a:p>
-            <a:pPr indent="0" marL="0">
-              <a:buNone/>
-            </a:pPr>
-            <a:r>
-              <a:rPr lang="en-US" sz="900" dirty="0">
-                <a:solidFill>
-                  <a:srgbClr val="6B7A8F"/>
-                </a:solidFill>
-                <a:latin typeface="Malgun Gothic" pitchFamily="34" charset="0"/>
-                <a:ea typeface="Malgun Gothic" pitchFamily="34" charset="-122"/>
-                <a:cs typeface="Malgun Gothic" pitchFamily="34" charset="-120"/>
-              </a:rPr>
-              <a:t>유로 단면 · 분기 입구 측정면 생성</a:t>
-            </a:r>
-            <a:endParaRPr lang="en-US" sz="900" dirty="0"/>
-          </a:p>
-        </p:txBody>
-      </p:sp>
-      <p:sp>
-        <p:nvSpPr>
-          <p:cNvPr id="42" name="Shape 40"/>
-          <p:cNvSpPr/>
-          <p:nvPr/>
-        </p:nvSpPr>
-        <p:spPr>
-          <a:xfrm>
-            <a:off x="6214262" y="3822192"/>
-            <a:ext cx="256032" cy="256032"/>
-          </a:xfrm>
-          <a:prstGeom prst="ellipse">
-            <a:avLst/>
-          </a:prstGeom>
-          <a:solidFill>
-            <a:srgbClr val="16305B"/>
-          </a:solidFill>
-          <a:ln w="12700">
-            <a:solidFill>
-              <a:srgbClr val="16305B"/>
-            </a:solidFill>
-            <a:prstDash val="solid"/>
-          </a:ln>
-        </p:spPr>
-      </p:sp>
-      <p:sp>
-        <p:nvSpPr>
-          <p:cNvPr id="43" name="Text 41"/>
-          <p:cNvSpPr txBox="1"/>
-          <p:nvPr/>
-        </p:nvSpPr>
-        <p:spPr>
-          <a:xfrm>
-            <a:off x="6214262" y="3822192"/>
-            <a:ext cx="256032" cy="256032"/>
-          </a:xfrm>
-          <a:prstGeom prst="rect">
-            <a:avLst/>
-          </a:prstGeom>
-          <a:noFill/>
-          <a:ln/>
-        </p:spPr>
-        <p:txBody>
-          <a:bodyPr wrap="square" lIns="0" tIns="0" rIns="0" bIns="0" rtlCol="0" anchor="ctr"/>
-          <a:lstStyle/>
-          <a:p>
-            <a:pPr algn="ctr" indent="0" marL="0">
-              <a:buNone/>
-            </a:pPr>
-            <a:r>
-              <a:rPr lang="en-US" sz="900" b="1" dirty="0">
-                <a:solidFill>
-                  <a:srgbClr val="FFFFFF"/>
-                </a:solidFill>
-                <a:latin typeface="Malgun Gothic" pitchFamily="34" charset="0"/>
-                <a:ea typeface="Malgun Gothic" pitchFamily="34" charset="-122"/>
-                <a:cs typeface="Malgun Gothic" pitchFamily="34" charset="-120"/>
-              </a:rPr>
-              <a:t>7</a:t>
-            </a:r>
-            <a:endParaRPr lang="en-US" sz="900" dirty="0"/>
-          </a:p>
-        </p:txBody>
-      </p:sp>
-      <p:sp>
-        <p:nvSpPr>
-          <p:cNvPr id="44" name="Text 42"/>
-          <p:cNvSpPr txBox="1"/>
-          <p:nvPr/>
-        </p:nvSpPr>
-        <p:spPr>
-          <a:xfrm>
-            <a:off x="6561734" y="3803904"/>
-            <a:ext cx="2267712" cy="292608"/>
-          </a:xfrm>
-          <a:prstGeom prst="rect">
-            <a:avLst/>
-          </a:prstGeom>
-          <a:noFill/>
-          <a:ln/>
-        </p:spPr>
-        <p:txBody>
-          <a:bodyPr wrap="square" lIns="0" tIns="0" rIns="0" bIns="0" rtlCol="0" anchor="ctr"/>
-          <a:lstStyle/>
-          <a:p>
-            <a:pPr indent="0" marL="0">
-              <a:buNone/>
-            </a:pPr>
-            <a:r>
-              <a:rPr lang="en-US" sz="1100" b="1" dirty="0">
-                <a:solidFill>
-                  <a:srgbClr val="16305B"/>
-                </a:solidFill>
-                <a:latin typeface="Malgun Gothic" pitchFamily="34" charset="0"/>
-                <a:ea typeface="Malgun Gothic" pitchFamily="34" charset="-122"/>
-                <a:cs typeface="Malgun Gothic" pitchFamily="34" charset="-120"/>
-              </a:rPr>
-              <a:t>해석 · 추출</a:t>
-            </a:r>
-            <a:endParaRPr lang="en-US" sz="1100" dirty="0"/>
-          </a:p>
-        </p:txBody>
-      </p:sp>
-      <p:sp>
-        <p:nvSpPr>
-          <p:cNvPr id="45" name="Shape 43"/>
-          <p:cNvSpPr/>
-          <p:nvPr/>
-        </p:nvSpPr>
-        <p:spPr>
-          <a:xfrm>
-            <a:off x="6214262" y="4187952"/>
-            <a:ext cx="2615184" cy="1874520"/>
-          </a:xfrm>
-          <a:prstGeom prst="roundRect">
-            <a:avLst>
-              <a:gd name="adj" fmla="val 2439"/>
-            </a:avLst>
-          </a:prstGeom>
-          <a:solidFill>
-            <a:srgbClr val="FFFFFF"/>
-          </a:solidFill>
-          <a:ln w="12700">
-            <a:solidFill>
-              <a:srgbClr val="C3CDDA"/>
-            </a:solidFill>
-            <a:prstDash val="dash"/>
-          </a:ln>
-        </p:spPr>
-      </p:sp>
-      <p:sp>
-        <p:nvSpPr>
-          <p:cNvPr id="46" name="Text 44"/>
-          <p:cNvSpPr txBox="1"/>
-          <p:nvPr/>
-        </p:nvSpPr>
-        <p:spPr>
-          <a:xfrm>
-            <a:off x="6214262" y="4187952"/>
-            <a:ext cx="2615184" cy="1874520"/>
-          </a:xfrm>
-          <a:prstGeom prst="rect">
-            <a:avLst/>
-          </a:prstGeom>
-          <a:noFill/>
-          <a:ln/>
-        </p:spPr>
-        <p:txBody>
-          <a:bodyPr wrap="square" lIns="0" tIns="0" rIns="0" bIns="0" rtlCol="0" anchor="ctr"/>
-          <a:lstStyle/>
-          <a:p>
-            <a:pPr algn="ctr" indent="0" marL="0">
-              <a:buNone/>
-            </a:pPr>
-            <a:r>
-              <a:rPr lang="en-US" sz="1000" b="1" dirty="0">
-                <a:solidFill>
-                  <a:srgbClr val="B5C0CF"/>
-                </a:solidFill>
-                <a:latin typeface="Malgun Gothic" pitchFamily="34" charset="0"/>
-                <a:ea typeface="Malgun Gothic" pitchFamily="34" charset="-122"/>
-                <a:cs typeface="Malgun Gothic" pitchFamily="34" charset="-120"/>
-              </a:rPr>
-              <a:t>GUI 캡처</a:t>
-            </a:r>
-            <a:endParaRPr lang="en-US" sz="1000" dirty="0"/>
-          </a:p>
-        </p:txBody>
-      </p:sp>
-      <p:sp>
-        <p:nvSpPr>
-          <p:cNvPr id="47" name="Text 45"/>
-          <p:cNvSpPr txBox="1"/>
-          <p:nvPr/>
-        </p:nvSpPr>
-        <p:spPr>
-          <a:xfrm>
-            <a:off x="6214262" y="6108192"/>
-            <a:ext cx="2615184" cy="274320"/>
-          </a:xfrm>
-          <a:prstGeom prst="rect">
-            <a:avLst/>
-          </a:prstGeom>
-          <a:noFill/>
-          <a:ln/>
-        </p:spPr>
-        <p:txBody>
-          <a:bodyPr wrap="square" lIns="0" tIns="0" rIns="0" bIns="0" rtlCol="0" anchor="ctr"/>
-          <a:lstStyle/>
-          <a:p>
-            <a:pPr indent="0" marL="0">
-              <a:buNone/>
-            </a:pPr>
-            <a:r>
-              <a:rPr lang="en-US" sz="900" dirty="0">
-                <a:solidFill>
-                  <a:srgbClr val="6B7A8F"/>
-                </a:solidFill>
-                <a:latin typeface="Malgun Gothic" pitchFamily="34" charset="0"/>
-                <a:ea typeface="Malgun Gothic" pitchFamily="34" charset="-122"/>
-                <a:cs typeface="Malgun Gothic" pitchFamily="34" charset="-120"/>
-              </a:rPr>
-              <a:t>정상상태 해석 → Fields Summary 추출</a:t>
-            </a:r>
-            <a:endParaRPr lang="en-US" sz="900" dirty="0"/>
-          </a:p>
-        </p:txBody>
-      </p:sp>
-      <p:sp>
-        <p:nvSpPr>
-          <p:cNvPr id="48" name="Shape 46"/>
-          <p:cNvSpPr/>
-          <p:nvPr/>
-        </p:nvSpPr>
-        <p:spPr>
-          <a:xfrm>
-            <a:off x="9069934" y="4187952"/>
-            <a:ext cx="2615184" cy="1874520"/>
-          </a:xfrm>
-          <a:prstGeom prst="roundRect">
-            <a:avLst>
-              <a:gd name="adj" fmla="val 2927"/>
-            </a:avLst>
-          </a:prstGeom>
-          <a:solidFill>
-            <a:srgbClr val="16305B"/>
-          </a:solidFill>
-          <a:ln w="12700">
-            <a:solidFill>
-              <a:srgbClr val="16305B"/>
-            </a:solidFill>
-            <a:prstDash val="solid"/>
-          </a:ln>
-        </p:spPr>
-      </p:sp>
-      <p:sp>
-        <p:nvSpPr>
           <p:cNvPr id="49" name="Text 47"/>
           <p:cNvSpPr txBox="1"/>
           <p:nvPr/>
@@ -11818,45 +7635,6 @@
               <a:t>매 회차 자동 수행</a:t>
             </a:r>
             <a:endParaRPr lang="en-US" sz="1100" dirty="0"/>
-          </a:p>
-        </p:txBody>
-      </p:sp>
-      <p:sp>
-        <p:nvSpPr>
-          <p:cNvPr id="50" name="Text 48"/>
-          <p:cNvSpPr txBox="1"/>
-          <p:nvPr/>
-        </p:nvSpPr>
-        <p:spPr>
-          <a:xfrm>
-            <a:off x="9069934" y="6108192"/>
-            <a:ext cx="2615184" cy="274320"/>
-          </a:xfrm>
-          <a:prstGeom prst="rect">
-            <a:avLst/>
-          </a:prstGeom>
-          <a:noFill/>
-          <a:ln/>
-        </p:spPr>
-        <p:txBody>
-          <a:bodyPr wrap="square" lIns="0" tIns="0" rIns="0" bIns="0" rtlCol="0" anchor="ctr"/>
-          <a:lstStyle/>
-          <a:p>
-            <a:pPr indent="0" marL="0">
-              <a:buNone/>
-            </a:pPr>
-            <a:r>
-              <a:rPr lang="en-US" sz="900" dirty="0">
-                <a:solidFill>
-                  <a:srgbClr val="6B7A8F"/>
-                </a:solidFill>
-                <a:latin typeface="Malgun Gothic" pitchFamily="34" charset="0"/>
-                <a:ea typeface="Malgun Gothic" pitchFamily="34" charset="-122"/>
-                <a:cs typeface="Malgun Gothic" pitchFamily="34" charset="-120"/>
-              </a:rPr>
-              <a:t>대응 코드: 부록 A-2</a:t>
-            </a:r>
-            <a:endParaRPr lang="en-US" sz="900" dirty="0"/>
           </a:p>
         </p:txBody>
       </p:sp>
@@ -12650,7 +8428,7 @@
                 <a:ea typeface="Malgun Gothic" pitchFamily="34" charset="-122"/>
                 <a:cs typeface="Malgun Gothic" pitchFamily="34" charset="-120"/>
               </a:rPr>
-              <a:t>부록   A-1  SolidWorks 제어 코드   ·   A-2  Icepak 제어 코드   ·   A-3  Icepak GUI 설정 절차</a:t>
+              <a:t>부록   A-1  Icepak 해석 모델 GUI 설정 절차</a:t>
             </a:r>
             <a:endParaRPr lang="en-US" sz="950" dirty="0"/>
           </a:p>
@@ -23985,46 +19763,7 @@
       </p:graphicFrame>
       <p:sp>
         <p:nvSpPr>
-          <p:cNvPr id="26" name="Text 22"/>
-          <p:cNvSpPr txBox="1"/>
-          <p:nvPr/>
-        </p:nvSpPr>
-        <p:spPr>
-          <a:xfrm>
-            <a:off x="6647688" y="4956048"/>
-            <a:ext cx="4846320" cy="237744"/>
-          </a:xfrm>
-          <a:prstGeom prst="rect">
-            <a:avLst/>
-          </a:prstGeom>
-          <a:noFill/>
-          <a:ln/>
-        </p:spPr>
-        <p:txBody>
-          <a:bodyPr wrap="square" lIns="0" tIns="0" rIns="0" bIns="0" rtlCol="0" anchor="ctr"/>
-          <a:lstStyle/>
-          <a:p>
-            <a:pPr indent="0" marL="0">
-              <a:buNone/>
-            </a:pPr>
-            <a:r>
-              <a:rPr lang="en-US" sz="900" i="1" dirty="0">
-                <a:solidFill>
-                  <a:srgbClr val="6B7A8F"/>
-                </a:solidFill>
-                <a:latin typeface="Malgun Gothic" pitchFamily="34" charset="0"/>
-                <a:ea typeface="Malgun Gothic" pitchFamily="34" charset="-122"/>
-                <a:cs typeface="Malgun Gothic" pitchFamily="34" charset="-120"/>
-              </a:rPr>
-              <a:t>※ 주요 코드는 부록 A-1 참고</a:t>
-            </a:r>
-            <a:endParaRPr lang="en-US" sz="900" dirty="0"/>
-          </a:p>
-        </p:txBody>
-      </p:sp>
-      <p:sp>
-        <p:nvSpPr>
-          <p:cNvPr id="27" name="Shape 23"/>
+          <p:cNvPr id="26" name="Shape 22"/>
           <p:cNvSpPr/>
           <p:nvPr/>
         </p:nvSpPr>
@@ -24058,7 +19797,7 @@
       </p:sp>
       <p:sp>
         <p:nvSpPr>
-          <p:cNvPr id="28" name="Shape 24"/>
+          <p:cNvPr id="27" name="Shape 23"/>
           <p:cNvSpPr/>
           <p:nvPr/>
         </p:nvSpPr>
@@ -24083,14 +19822,53 @@
       </p:sp>
       <p:sp>
         <p:nvSpPr>
+          <p:cNvPr id="28" name="Text 24"/>
+          <p:cNvSpPr txBox="1"/>
+          <p:nvPr/>
+        </p:nvSpPr>
+        <p:spPr>
+          <a:xfrm>
+            <a:off x="978408" y="5669280"/>
+            <a:ext cx="3291840" cy="256032"/>
+          </a:xfrm>
+          <a:prstGeom prst="rect">
+            <a:avLst/>
+          </a:prstGeom>
+          <a:noFill/>
+          <a:ln/>
+        </p:spPr>
+        <p:txBody>
+          <a:bodyPr wrap="square" lIns="0" tIns="0" rIns="0" bIns="0" rtlCol="0" anchor="ctr"/>
+          <a:lstStyle/>
+          <a:p>
+            <a:pPr indent="0" marL="0">
+              <a:buNone/>
+            </a:pPr>
+            <a:r>
+              <a:rPr lang="en-US" sz="1050" b="1" dirty="0">
+                <a:solidFill>
+                  <a:srgbClr val="16305B"/>
+                </a:solidFill>
+                <a:latin typeface="Malgun Gothic" pitchFamily="34" charset="0"/>
+                <a:ea typeface="Malgun Gothic" pitchFamily="34" charset="-122"/>
+                <a:cs typeface="Malgun Gothic" pitchFamily="34" charset="-120"/>
+              </a:rPr>
+              <a:t>변수명 검증</a:t>
+            </a:r>
+            <a:endParaRPr lang="en-US" sz="1050" dirty="0"/>
+          </a:p>
+        </p:txBody>
+      </p:sp>
+      <p:sp>
+        <p:nvSpPr>
           <p:cNvPr id="29" name="Text 25"/>
           <p:cNvSpPr txBox="1"/>
           <p:nvPr/>
         </p:nvSpPr>
         <p:spPr>
           <a:xfrm>
-            <a:off x="978408" y="5669280"/>
-            <a:ext cx="3291840" cy="256032"/>
+            <a:off x="978408" y="5943600"/>
+            <a:ext cx="3383280" cy="310896"/>
           </a:xfrm>
           <a:prstGeom prst="rect">
             <a:avLst/>
@@ -24106,45 +19884,6 @@
               <a:buNone/>
             </a:pPr>
             <a:r>
-              <a:rPr lang="en-US" sz="1050" b="1" dirty="0">
-                <a:solidFill>
-                  <a:srgbClr val="16305B"/>
-                </a:solidFill>
-                <a:latin typeface="Malgun Gothic" pitchFamily="34" charset="0"/>
-                <a:ea typeface="Malgun Gothic" pitchFamily="34" charset="-122"/>
-                <a:cs typeface="Malgun Gothic" pitchFamily="34" charset="-120"/>
-              </a:rPr>
-              <a:t>변수명 검증</a:t>
-            </a:r>
-            <a:endParaRPr lang="en-US" sz="1050" dirty="0"/>
-          </a:p>
-        </p:txBody>
-      </p:sp>
-      <p:sp>
-        <p:nvSpPr>
-          <p:cNvPr id="30" name="Text 26"/>
-          <p:cNvSpPr txBox="1"/>
-          <p:nvPr/>
-        </p:nvSpPr>
-        <p:spPr>
-          <a:xfrm>
-            <a:off x="978408" y="5943600"/>
-            <a:ext cx="3383280" cy="310896"/>
-          </a:xfrm>
-          <a:prstGeom prst="rect">
-            <a:avLst/>
-          </a:prstGeom>
-          <a:noFill/>
-          <a:ln/>
-        </p:spPr>
-        <p:txBody>
-          <a:bodyPr wrap="square" lIns="0" tIns="0" rIns="0" bIns="0" rtlCol="0" anchor="ctr"/>
-          <a:lstStyle/>
-          <a:p>
-            <a:pPr indent="0" marL="0">
-              <a:buNone/>
-            </a:pPr>
-            <a:r>
               <a:rPr lang="en-US" sz="950" dirty="0">
                 <a:solidFill>
                   <a:srgbClr val="6B7A8F"/>
@@ -24161,7 +19900,7 @@
       </p:sp>
       <p:sp>
         <p:nvSpPr>
-          <p:cNvPr id="31" name="Shape 27"/>
+          <p:cNvPr id="30" name="Shape 26"/>
           <p:cNvSpPr/>
           <p:nvPr/>
         </p:nvSpPr>
@@ -24186,14 +19925,53 @@
       </p:sp>
       <p:sp>
         <p:nvSpPr>
+          <p:cNvPr id="31" name="Text 27"/>
+          <p:cNvSpPr txBox="1"/>
+          <p:nvPr/>
+        </p:nvSpPr>
+        <p:spPr>
+          <a:xfrm>
+            <a:off x="4636008" y="5669280"/>
+            <a:ext cx="3291840" cy="256032"/>
+          </a:xfrm>
+          <a:prstGeom prst="rect">
+            <a:avLst/>
+          </a:prstGeom>
+          <a:noFill/>
+          <a:ln/>
+        </p:spPr>
+        <p:txBody>
+          <a:bodyPr wrap="square" lIns="0" tIns="0" rIns="0" bIns="0" rtlCol="0" anchor="ctr"/>
+          <a:lstStyle/>
+          <a:p>
+            <a:pPr indent="0" marL="0">
+              <a:buNone/>
+            </a:pPr>
+            <a:r>
+              <a:rPr lang="en-US" sz="1050" b="1" dirty="0">
+                <a:solidFill>
+                  <a:srgbClr val="16305B"/>
+                </a:solidFill>
+                <a:latin typeface="Malgun Gothic" pitchFamily="34" charset="0"/>
+                <a:ea typeface="Malgun Gothic" pitchFamily="34" charset="-122"/>
+                <a:cs typeface="Malgun Gothic" pitchFamily="34" charset="-120"/>
+              </a:rPr>
+              <a:t>종속값 CAD 위임</a:t>
+            </a:r>
+            <a:endParaRPr lang="en-US" sz="1050" dirty="0"/>
+          </a:p>
+        </p:txBody>
+      </p:sp>
+      <p:sp>
+        <p:nvSpPr>
           <p:cNvPr id="32" name="Text 28"/>
           <p:cNvSpPr txBox="1"/>
           <p:nvPr/>
         </p:nvSpPr>
         <p:spPr>
           <a:xfrm>
-            <a:off x="4636008" y="5669280"/>
-            <a:ext cx="3291840" cy="256032"/>
+            <a:off x="4636008" y="5943600"/>
+            <a:ext cx="3383280" cy="310896"/>
           </a:xfrm>
           <a:prstGeom prst="rect">
             <a:avLst/>
@@ -24209,45 +19987,6 @@
               <a:buNone/>
             </a:pPr>
             <a:r>
-              <a:rPr lang="en-US" sz="1050" b="1" dirty="0">
-                <a:solidFill>
-                  <a:srgbClr val="16305B"/>
-                </a:solidFill>
-                <a:latin typeface="Malgun Gothic" pitchFamily="34" charset="0"/>
-                <a:ea typeface="Malgun Gothic" pitchFamily="34" charset="-122"/>
-                <a:cs typeface="Malgun Gothic" pitchFamily="34" charset="-120"/>
-              </a:rPr>
-              <a:t>종속값 CAD 위임</a:t>
-            </a:r>
-            <a:endParaRPr lang="en-US" sz="1050" dirty="0"/>
-          </a:p>
-        </p:txBody>
-      </p:sp>
-      <p:sp>
-        <p:nvSpPr>
-          <p:cNvPr id="33" name="Text 29"/>
-          <p:cNvSpPr txBox="1"/>
-          <p:nvPr/>
-        </p:nvSpPr>
-        <p:spPr>
-          <a:xfrm>
-            <a:off x="4636008" y="5943600"/>
-            <a:ext cx="3383280" cy="310896"/>
-          </a:xfrm>
-          <a:prstGeom prst="rect">
-            <a:avLst/>
-          </a:prstGeom>
-          <a:noFill/>
-          <a:ln/>
-        </p:spPr>
-        <p:txBody>
-          <a:bodyPr wrap="square" lIns="0" tIns="0" rIns="0" bIns="0" rtlCol="0" anchor="ctr"/>
-          <a:lstStyle/>
-          <a:p>
-            <a:pPr indent="0" marL="0">
-              <a:buNone/>
-            </a:pPr>
-            <a:r>
               <a:rPr lang="en-US" sz="950" dirty="0">
                 <a:solidFill>
                   <a:srgbClr val="6B7A8F"/>
@@ -24264,7 +20003,7 @@
       </p:sp>
       <p:sp>
         <p:nvSpPr>
-          <p:cNvPr id="34" name="Shape 30"/>
+          <p:cNvPr id="33" name="Shape 29"/>
           <p:cNvSpPr/>
           <p:nvPr/>
         </p:nvSpPr>
@@ -24289,7 +20028,7 @@
       </p:sp>
       <p:sp>
         <p:nvSpPr>
-          <p:cNvPr id="35" name="Text 31"/>
+          <p:cNvPr id="34" name="Text 30"/>
           <p:cNvSpPr txBox="1"/>
           <p:nvPr/>
         </p:nvSpPr>
@@ -24328,7 +20067,7 @@
       </p:sp>
       <p:sp>
         <p:nvSpPr>
-          <p:cNvPr id="36" name="Text 32"/>
+          <p:cNvPr id="35" name="Text 31"/>
           <p:cNvSpPr txBox="1"/>
           <p:nvPr/>
         </p:nvSpPr>
@@ -25415,7 +21154,7 @@
                 <a:ea typeface="Malgun Gothic" pitchFamily="34" charset="-122"/>
                 <a:cs typeface="Malgun Gothic" pitchFamily="34" charset="-120"/>
               </a:rPr>
-              <a:t>※ 단계별 GUI 설정은 부록 A-3, 코드는 부록 A-2 참고</a:t>
+              <a:t>※ 단계별 GUI 설정은 부록 A-1 참고</a:t>
             </a:r>
             <a:endParaRPr lang="en-US" sz="900" dirty="0"/>
           </a:p>

--- a/1개월차_AI에이전트_활용방안_및_DOE결과.pptx
+++ b/1개월차_AI에이전트_활용방안_및_DOE결과.pptx
@@ -17,9 +17,10 @@
     <p:sldId id="265" r:id="rId11"/>
     <p:sldId id="266" r:id="rId12"/>
     <p:sldId id="267" r:id="rId13"/>
+    <p:sldId id="268" r:id="rId14"/>
   </p:sldIdLst>
   <p:notesMasterIdLst>
-    <p:notesMasterId r:id="rId14"/>
+    <p:notesMasterId r:id="rId15"/>
   </p:notesMasterIdLst>
   <p:sldSz cx="12192000" cy="6858000"/>
   <p:notesSz cx="6858000" cy="12192000"/>
@@ -601,7 +602,7 @@
           <a:p>
             <a:r>
               <a:rPr lang="en-US" dirty="0"/>
-              <a:t>1회 해석에 수십 분이 걸리므로 무인 연속 운전이 전제 조건. 사람이 붙어 있지 않아도 데이터가 쌓이는 구조를 만든 것이 이번 달의 실질적 성과.</a:t>
+              <a:t>해석 모델은 처음에 GUI로 한 번 직접 구성하고, 그 과정을 스크립트 리코더로 기록했다. 기록된 스크립트는 형상 치수가 고정값으로 박혀 있어 그대로는 재사용할 수 없으므로, AI 에이전트와 함께 설계변수 기반 코드로 정리했다. 이후에는 형상 파일만 바뀌면 같은 절차를 코드가 매 회차 재현한다. 단계별 GUI 설정은 부록 A-1에 정리했다.</a:t>
             </a:r>
             <a:endParaRPr lang="en-US" dirty="0"/>
           </a:p>
@@ -689,7 +690,7 @@
           <a:p>
             <a:r>
               <a:rPr lang="en-US" dirty="0"/>
-              <a:t>이번 달은 데이터 생산 설비를 만들고 초기 데이터셋을 확보한 단계. 다음 달부터 이 데이터를 학습시킨다.</a:t>
+              <a:t>1회 해석에 수십 분이 걸리므로 무인 연속 운전이 전제 조건. 사람이 붙어 있지 않아도 데이터가 쌓이는 구조를 만든 것이 이번 달의 실질적 성과.</a:t>
             </a:r>
             <a:endParaRPr lang="en-US" dirty="0"/>
           </a:p>
@@ -777,7 +778,7 @@
           <a:p>
             <a:r>
               <a:rPr lang="en-US" dirty="0"/>
-              <a:t/>
+              <a:t>이번 달은 데이터 생산 설비를 만들고 초기 데이터셋을 확보한 단계. 다음 달부터 이 데이터를 학습시킨다.</a:t>
             </a:r>
             <a:endParaRPr lang="en-US" dirty="0"/>
           </a:p>
@@ -801,6 +802,94 @@
             <a:fld id="{F7021451-1387-4CA6-816F-3879F97B5CBC}" type="slidenum">
               <a:rPr lang="en-US"/>
               <a:t>12</a:t>
+            </a:fld>
+            <a:endParaRPr lang="en-US"/>
+          </a:p>
+        </p:txBody>
+      </p:sp>
+    </p:spTree>
+    <p:extLst>
+      <p:ext uri="{BB962C8B-B14F-4D97-AF65-F5344CB8AC3E}">
+        <p14:creationId xmlns:p14="http://schemas.microsoft.com/office/powerpoint/2010/main" val="1024086991"/>
+      </p:ext>
+    </p:extLst>
+  </p:cSld>
+  <p:clrMapOvr>
+    <a:masterClrMapping/>
+  </p:clrMapOvr>
+</p:notes>
+</file>
+
+<file path=ppt/notesSlides/notesSlide13.xml><?xml version="1.0" encoding="utf-8"?>
+<p:notes xmlns:a="http://schemas.openxmlformats.org/drawingml/2006/main" xmlns:r="http://schemas.openxmlformats.org/officeDocument/2006/relationships" xmlns:p="http://schemas.openxmlformats.org/presentationml/2006/main">
+  <p:cSld>
+    <p:spTree>
+      <p:nvGrpSpPr>
+        <p:cNvPr id="1" name=""/>
+        <p:cNvGrpSpPr/>
+        <p:nvPr/>
+      </p:nvGrpSpPr>
+      <p:grpSpPr>
+        <a:xfrm>
+          <a:off x="0" y="0"/>
+          <a:ext cx="0" cy="0"/>
+          <a:chOff x="0" y="0"/>
+          <a:chExt cx="0" cy="0"/>
+        </a:xfrm>
+      </p:grpSpPr>
+      <p:sp>
+        <p:nvSpPr>
+          <p:cNvPr id="2" name="Slide Image Placeholder 1"/>
+          <p:cNvSpPr>
+            <a:spLocks noGrp="1" noRot="1" noChangeAspect="1"/>
+          </p:cNvSpPr>
+          <p:nvPr>
+            <p:ph type="sldImg"/>
+          </p:nvPr>
+        </p:nvSpPr>
+        <p:spPr/>
+      </p:sp>
+      <p:sp>
+        <p:nvSpPr>
+          <p:cNvPr id="3" name="Notes Placeholder 2"/>
+          <p:cNvSpPr>
+            <a:spLocks noGrp="1"/>
+          </p:cNvSpPr>
+          <p:nvPr>
+            <p:ph type="body" idx="1"/>
+          </p:nvPr>
+        </p:nvSpPr>
+        <p:spPr/>
+        <p:txBody>
+          <a:bodyPr/>
+          <a:lstStyle/>
+          <a:p>
+            <a:r>
+              <a:rPr lang="en-US" dirty="0"/>
+              <a:t/>
+            </a:r>
+            <a:endParaRPr lang="en-US" dirty="0"/>
+          </a:p>
+        </p:txBody>
+      </p:sp>
+      <p:sp>
+        <p:nvSpPr>
+          <p:cNvPr id="4" name="Slide Number Placeholder 3"/>
+          <p:cNvSpPr>
+            <a:spLocks noGrp="1"/>
+          </p:cNvSpPr>
+          <p:nvPr>
+            <p:ph type="sldNum" sz="quarter" idx="10"/>
+          </p:nvPr>
+        </p:nvSpPr>
+        <p:spPr/>
+        <p:txBody>
+          <a:bodyPr/>
+          <a:lstStyle/>
+          <a:p>
+            <a:fld id="{F7021451-1387-4CA6-816F-3879F97B5CBC}" type="slidenum">
+              <a:rPr lang="en-US"/>
+              <a:t>13</a:t>
             </a:fld>
             <a:endParaRPr lang="en-US"/>
           </a:p>
@@ -1393,7 +1482,7 @@
           <a:p>
             <a:r>
               <a:rPr lang="en-US" dirty="0"/>
-              <a:t>설계값을 Equation Manager 전역변수에 써넣고 리빌드한 뒤 질량 특성과 STEP 파일을 얻는 과정이다. 변수명이 어긋나면 즉시 중단해 형상이 바뀌지 않은 채 해석되는 사고를 막았고, 핀 간격처럼 다른 변수에서 결정되는 값은 CAD 수식에 맡겨 두 곳에서 따로 계산하지 않도록 했다.</a:t>
+              <a:t>자동해석은 7개 파일로 구성된다. main.py가 전체 루프를 돌리면서 실험점 생성, 형상 빌드, 해석, 결과 저장 모듈을 순서대로 호출하고, 경로는 paths.py 한 곳에서 관리한다. 프로그램별로 모듈을 나눠 두었기 때문에 한쪽을 고쳐도 다른 쪽에 영향이 없다.</a:t>
             </a:r>
             <a:endParaRPr lang="en-US" dirty="0"/>
           </a:p>
@@ -1481,7 +1570,7 @@
           <a:p>
             <a:r>
               <a:rPr lang="en-US" dirty="0"/>
-              <a:t>해석 모델은 처음에 GUI로 한 번 직접 구성하고, 그 과정을 스크립트 리코더로 기록했다. 기록된 스크립트는 형상 치수가 고정값으로 박혀 있어 그대로는 재사용할 수 없으므로, AI 에이전트와 함께 설계변수 기반 코드로 정리했다. 이후에는 형상 파일만 바뀌면 같은 절차를 코드가 매 회차 재현한다. 단계별 GUI 설정은 부록 A-1에 정리했다.</a:t>
+              <a:t>설계값을 Equation Manager 전역변수에 써넣고 리빌드한 뒤 질량 특성과 STEP 파일을 얻는 과정이다. 변수명이 어긋나면 즉시 중단해 형상이 바뀌지 않은 채 해석되는 사고를 막았고, 핀 간격처럼 다른 변수에서 결정되는 값은 CAD 수식에 맡겨 두 곳에서 따로 계산하지 않도록 했다.</a:t>
             </a:r>
             <a:endParaRPr lang="en-US" dirty="0"/>
           </a:p>
@@ -2364,7 +2453,7 @@
                 <a:ea typeface="Malgun Gothic" pitchFamily="34" charset="-122"/>
                 <a:cs typeface="Malgun Gothic" pitchFamily="34" charset="-120"/>
               </a:rPr>
-              <a:t>DOE 기법 선정 및 무인 자동 해석 루프</a:t>
+              <a:t>해석 모델 자동 구성 및 결과 추출 — Icepak</a:t>
             </a:r>
             <a:endParaRPr lang="en-US" sz="2200" dirty="0"/>
           </a:p>
@@ -2379,11 +2468,11 @@
         <p:spPr>
           <a:xfrm>
             <a:off x="502920" y="1188720"/>
-            <a:ext cx="5440680" cy="2487168"/>
+            <a:ext cx="5440680" cy="4160520"/>
           </a:xfrm>
           <a:prstGeom prst="roundRect">
             <a:avLst>
-              <a:gd name="adj" fmla="val 2206"/>
+              <a:gd name="adj" fmla="val 1319"/>
             </a:avLst>
           </a:prstGeom>
           <a:solidFill>
@@ -2462,7 +2551,889 @@
                 <a:ea typeface="Malgun Gothic" pitchFamily="34" charset="-122"/>
                 <a:cs typeface="Malgun Gothic" pitchFamily="34" charset="-120"/>
               </a:rPr>
-              <a:t>DOE 기법 선정</a:t>
+              <a:t>자동화 전환 과정</a:t>
+            </a:r>
+            <a:endParaRPr lang="en-US" sz="1300" dirty="0"/>
+          </a:p>
+        </p:txBody>
+      </p:sp>
+      <p:sp>
+        <p:nvSpPr>
+          <p:cNvPr id="9" name="Shape 7"/>
+          <p:cNvSpPr/>
+          <p:nvPr/>
+        </p:nvSpPr>
+        <p:spPr>
+          <a:xfrm>
+            <a:off x="813816" y="1901952"/>
+            <a:ext cx="4846320" cy="585216"/>
+          </a:xfrm>
+          <a:prstGeom prst="roundRect">
+            <a:avLst>
+              <a:gd name="adj" fmla="val 9375"/>
+            </a:avLst>
+          </a:prstGeom>
+          <a:solidFill>
+            <a:srgbClr val="EEF2F7"/>
+          </a:solidFill>
+          <a:ln w="9525">
+            <a:solidFill>
+              <a:srgbClr val="DDE3EB"/>
+            </a:solidFill>
+            <a:prstDash val="solid"/>
+          </a:ln>
+        </p:spPr>
+      </p:sp>
+      <p:sp>
+        <p:nvSpPr>
+          <p:cNvPr id="10" name="Text 8"/>
+          <p:cNvSpPr txBox="1"/>
+          <p:nvPr/>
+        </p:nvSpPr>
+        <p:spPr>
+          <a:xfrm>
+            <a:off x="923544" y="1901952"/>
+            <a:ext cx="310896" cy="585216"/>
+          </a:xfrm>
+          <a:prstGeom prst="rect">
+            <a:avLst/>
+          </a:prstGeom>
+          <a:noFill/>
+          <a:ln/>
+        </p:spPr>
+        <p:txBody>
+          <a:bodyPr wrap="square" lIns="0" tIns="0" rIns="0" bIns="0" rtlCol="0" anchor="ctr"/>
+          <a:lstStyle/>
+          <a:p>
+            <a:pPr indent="0" marL="0">
+              <a:buNone/>
+            </a:pPr>
+            <a:r>
+              <a:rPr lang="en-US" sz="1600" b="1" dirty="0">
+                <a:solidFill>
+                  <a:srgbClr val="00A3C4"/>
+                </a:solidFill>
+                <a:latin typeface="Malgun Gothic" pitchFamily="34" charset="0"/>
+                <a:ea typeface="Malgun Gothic" pitchFamily="34" charset="-122"/>
+                <a:cs typeface="Malgun Gothic" pitchFamily="34" charset="-120"/>
+              </a:rPr>
+              <a:t>1</a:t>
+            </a:r>
+            <a:endParaRPr lang="en-US" sz="1600" dirty="0"/>
+          </a:p>
+        </p:txBody>
+      </p:sp>
+      <p:sp>
+        <p:nvSpPr>
+          <p:cNvPr id="11" name="Text 9"/>
+          <p:cNvSpPr txBox="1"/>
+          <p:nvPr/>
+        </p:nvSpPr>
+        <p:spPr>
+          <a:xfrm>
+            <a:off x="1289304" y="1938528"/>
+            <a:ext cx="1737360" cy="512064"/>
+          </a:xfrm>
+          <a:prstGeom prst="rect">
+            <a:avLst/>
+          </a:prstGeom>
+          <a:noFill/>
+          <a:ln/>
+        </p:spPr>
+        <p:txBody>
+          <a:bodyPr wrap="square" lIns="0" tIns="0" rIns="0" bIns="0" rtlCol="0" anchor="ctr"/>
+          <a:lstStyle/>
+          <a:p>
+            <a:pPr indent="0" marL="0">
+              <a:buNone/>
+            </a:pPr>
+            <a:r>
+              <a:rPr lang="en-US" sz="1050" b="1" dirty="0">
+                <a:solidFill>
+                  <a:srgbClr val="16305B"/>
+                </a:solidFill>
+                <a:latin typeface="Malgun Gothic" pitchFamily="34" charset="0"/>
+                <a:ea typeface="Malgun Gothic" pitchFamily="34" charset="-122"/>
+                <a:cs typeface="Malgun Gothic" pitchFamily="34" charset="-120"/>
+              </a:rPr>
+              <a:t>GUI 수동 설정</a:t>
+            </a:r>
+            <a:endParaRPr lang="en-US" sz="1050" dirty="0"/>
+          </a:p>
+        </p:txBody>
+      </p:sp>
+      <p:sp>
+        <p:nvSpPr>
+          <p:cNvPr id="12" name="Text 10"/>
+          <p:cNvSpPr txBox="1"/>
+          <p:nvPr/>
+        </p:nvSpPr>
+        <p:spPr>
+          <a:xfrm>
+            <a:off x="2990088" y="1938528"/>
+            <a:ext cx="2596896" cy="512064"/>
+          </a:xfrm>
+          <a:prstGeom prst="rect">
+            <a:avLst/>
+          </a:prstGeom>
+          <a:noFill/>
+          <a:ln/>
+        </p:spPr>
+        <p:txBody>
+          <a:bodyPr wrap="square" lIns="0" tIns="0" rIns="0" bIns="0" rtlCol="0" anchor="ctr"/>
+          <a:lstStyle/>
+          <a:p>
+            <a:pPr indent="0" marL="0">
+              <a:lnSpc>
+                <a:spcPct val="110000"/>
+              </a:lnSpc>
+              <a:buNone/>
+            </a:pPr>
+            <a:r>
+              <a:rPr lang="en-US" sz="880" dirty="0">
+                <a:solidFill>
+                  <a:srgbClr val="1C2733"/>
+                </a:solidFill>
+                <a:latin typeface="Malgun Gothic" pitchFamily="34" charset="0"/>
+                <a:ea typeface="Malgun Gothic" pitchFamily="34" charset="-122"/>
+                <a:cs typeface="Malgun Gothic" pitchFamily="34" charset="-120"/>
+              </a:rPr>
+              <a:t>해석 모델을 GUI로 한 번 직접 구성</a:t>
+            </a:r>
+            <a:endParaRPr lang="en-US" sz="880" dirty="0"/>
+          </a:p>
+          <a:p>
+            <a:pPr indent="0" marL="0">
+              <a:lnSpc>
+                <a:spcPct val="110000"/>
+              </a:lnSpc>
+              <a:buNone/>
+            </a:pPr>
+            <a:r>
+              <a:rPr lang="en-US" sz="880" dirty="0">
+                <a:solidFill>
+                  <a:srgbClr val="1C2733"/>
+                </a:solidFill>
+                <a:latin typeface="Malgun Gothic" pitchFamily="34" charset="0"/>
+                <a:ea typeface="Malgun Gothic" pitchFamily="34" charset="-122"/>
+                <a:cs typeface="Malgun Gothic" pitchFamily="34" charset="-120"/>
+              </a:rPr>
+              <a:t>(프로젝트 생성 ~ 결과 추출 7단계)</a:t>
+            </a:r>
+            <a:endParaRPr lang="en-US" sz="880" dirty="0"/>
+          </a:p>
+        </p:txBody>
+      </p:sp>
+      <p:sp>
+        <p:nvSpPr>
+          <p:cNvPr id="13" name="Text 11"/>
+          <p:cNvSpPr txBox="1"/>
+          <p:nvPr/>
+        </p:nvSpPr>
+        <p:spPr>
+          <a:xfrm>
+            <a:off x="813816" y="2487168"/>
+            <a:ext cx="4846320" cy="182880"/>
+          </a:xfrm>
+          <a:prstGeom prst="rect">
+            <a:avLst/>
+          </a:prstGeom>
+          <a:noFill/>
+          <a:ln/>
+        </p:spPr>
+        <p:txBody>
+          <a:bodyPr wrap="square" lIns="0" tIns="0" rIns="0" bIns="0" rtlCol="0" anchor="ctr"/>
+          <a:lstStyle/>
+          <a:p>
+            <a:pPr algn="ctr" indent="0" marL="0">
+              <a:buNone/>
+            </a:pPr>
+            <a:r>
+              <a:rPr lang="en-US" sz="700" dirty="0">
+                <a:solidFill>
+                  <a:srgbClr val="6B7A8F"/>
+                </a:solidFill>
+                <a:latin typeface="Malgun Gothic" pitchFamily="34" charset="0"/>
+                <a:ea typeface="Malgun Gothic" pitchFamily="34" charset="-122"/>
+                <a:cs typeface="Malgun Gothic" pitchFamily="34" charset="-120"/>
+              </a:rPr>
+              <a:t>▼</a:t>
+            </a:r>
+            <a:endParaRPr lang="en-US" sz="700" dirty="0"/>
+          </a:p>
+        </p:txBody>
+      </p:sp>
+      <p:sp>
+        <p:nvSpPr>
+          <p:cNvPr id="14" name="Shape 12"/>
+          <p:cNvSpPr/>
+          <p:nvPr/>
+        </p:nvSpPr>
+        <p:spPr>
+          <a:xfrm>
+            <a:off x="813816" y="2670048"/>
+            <a:ext cx="4846320" cy="585216"/>
+          </a:xfrm>
+          <a:prstGeom prst="roundRect">
+            <a:avLst>
+              <a:gd name="adj" fmla="val 9375"/>
+            </a:avLst>
+          </a:prstGeom>
+          <a:solidFill>
+            <a:srgbClr val="EEF2F7"/>
+          </a:solidFill>
+          <a:ln w="9525">
+            <a:solidFill>
+              <a:srgbClr val="DDE3EB"/>
+            </a:solidFill>
+            <a:prstDash val="solid"/>
+          </a:ln>
+        </p:spPr>
+      </p:sp>
+      <p:sp>
+        <p:nvSpPr>
+          <p:cNvPr id="15" name="Text 13"/>
+          <p:cNvSpPr txBox="1"/>
+          <p:nvPr/>
+        </p:nvSpPr>
+        <p:spPr>
+          <a:xfrm>
+            <a:off x="923544" y="2670048"/>
+            <a:ext cx="310896" cy="585216"/>
+          </a:xfrm>
+          <a:prstGeom prst="rect">
+            <a:avLst/>
+          </a:prstGeom>
+          <a:noFill/>
+          <a:ln/>
+        </p:spPr>
+        <p:txBody>
+          <a:bodyPr wrap="square" lIns="0" tIns="0" rIns="0" bIns="0" rtlCol="0" anchor="ctr"/>
+          <a:lstStyle/>
+          <a:p>
+            <a:pPr indent="0" marL="0">
+              <a:buNone/>
+            </a:pPr>
+            <a:r>
+              <a:rPr lang="en-US" sz="1600" b="1" dirty="0">
+                <a:solidFill>
+                  <a:srgbClr val="00A3C4"/>
+                </a:solidFill>
+                <a:latin typeface="Malgun Gothic" pitchFamily="34" charset="0"/>
+                <a:ea typeface="Malgun Gothic" pitchFamily="34" charset="-122"/>
+                <a:cs typeface="Malgun Gothic" pitchFamily="34" charset="-120"/>
+              </a:rPr>
+              <a:t>2</a:t>
+            </a:r>
+            <a:endParaRPr lang="en-US" sz="1600" dirty="0"/>
+          </a:p>
+        </p:txBody>
+      </p:sp>
+      <p:sp>
+        <p:nvSpPr>
+          <p:cNvPr id="16" name="Text 14"/>
+          <p:cNvSpPr txBox="1"/>
+          <p:nvPr/>
+        </p:nvSpPr>
+        <p:spPr>
+          <a:xfrm>
+            <a:off x="1289304" y="2706624"/>
+            <a:ext cx="1737360" cy="512064"/>
+          </a:xfrm>
+          <a:prstGeom prst="rect">
+            <a:avLst/>
+          </a:prstGeom>
+          <a:noFill/>
+          <a:ln/>
+        </p:spPr>
+        <p:txBody>
+          <a:bodyPr wrap="square" lIns="0" tIns="0" rIns="0" bIns="0" rtlCol="0" anchor="ctr"/>
+          <a:lstStyle/>
+          <a:p>
+            <a:pPr indent="0" marL="0">
+              <a:buNone/>
+            </a:pPr>
+            <a:r>
+              <a:rPr lang="en-US" sz="1050" b="1" dirty="0">
+                <a:solidFill>
+                  <a:srgbClr val="16305B"/>
+                </a:solidFill>
+                <a:latin typeface="Malgun Gothic" pitchFamily="34" charset="0"/>
+                <a:ea typeface="Malgun Gothic" pitchFamily="34" charset="-122"/>
+                <a:cs typeface="Malgun Gothic" pitchFamily="34" charset="-120"/>
+              </a:rPr>
+              <a:t>스크립트 리코더 기록</a:t>
+            </a:r>
+            <a:endParaRPr lang="en-US" sz="1050" dirty="0"/>
+          </a:p>
+        </p:txBody>
+      </p:sp>
+      <p:sp>
+        <p:nvSpPr>
+          <p:cNvPr id="17" name="Text 15"/>
+          <p:cNvSpPr txBox="1"/>
+          <p:nvPr/>
+        </p:nvSpPr>
+        <p:spPr>
+          <a:xfrm>
+            <a:off x="2990088" y="2706624"/>
+            <a:ext cx="2596896" cy="512064"/>
+          </a:xfrm>
+          <a:prstGeom prst="rect">
+            <a:avLst/>
+          </a:prstGeom>
+          <a:noFill/>
+          <a:ln/>
+        </p:spPr>
+        <p:txBody>
+          <a:bodyPr wrap="square" lIns="0" tIns="0" rIns="0" bIns="0" rtlCol="0" anchor="ctr"/>
+          <a:lstStyle/>
+          <a:p>
+            <a:pPr indent="0" marL="0">
+              <a:lnSpc>
+                <a:spcPct val="110000"/>
+              </a:lnSpc>
+              <a:buNone/>
+            </a:pPr>
+            <a:r>
+              <a:rPr lang="en-US" sz="880" dirty="0">
+                <a:solidFill>
+                  <a:srgbClr val="1C2733"/>
+                </a:solidFill>
+                <a:latin typeface="Malgun Gothic" pitchFamily="34" charset="0"/>
+                <a:ea typeface="Malgun Gothic" pitchFamily="34" charset="-122"/>
+                <a:cs typeface="Malgun Gothic" pitchFamily="34" charset="-120"/>
+              </a:rPr>
+              <a:t>GUI 조작 과정을 Python 스크립트로 기록</a:t>
+            </a:r>
+            <a:endParaRPr lang="en-US" sz="880" dirty="0"/>
+          </a:p>
+        </p:txBody>
+      </p:sp>
+      <p:sp>
+        <p:nvSpPr>
+          <p:cNvPr id="18" name="Text 16"/>
+          <p:cNvSpPr txBox="1"/>
+          <p:nvPr/>
+        </p:nvSpPr>
+        <p:spPr>
+          <a:xfrm>
+            <a:off x="813816" y="3255264"/>
+            <a:ext cx="4846320" cy="182880"/>
+          </a:xfrm>
+          <a:prstGeom prst="rect">
+            <a:avLst/>
+          </a:prstGeom>
+          <a:noFill/>
+          <a:ln/>
+        </p:spPr>
+        <p:txBody>
+          <a:bodyPr wrap="square" lIns="0" tIns="0" rIns="0" bIns="0" rtlCol="0" anchor="ctr"/>
+          <a:lstStyle/>
+          <a:p>
+            <a:pPr algn="ctr" indent="0" marL="0">
+              <a:buNone/>
+            </a:pPr>
+            <a:r>
+              <a:rPr lang="en-US" sz="700" dirty="0">
+                <a:solidFill>
+                  <a:srgbClr val="6B7A8F"/>
+                </a:solidFill>
+                <a:latin typeface="Malgun Gothic" pitchFamily="34" charset="0"/>
+                <a:ea typeface="Malgun Gothic" pitchFamily="34" charset="-122"/>
+                <a:cs typeface="Malgun Gothic" pitchFamily="34" charset="-120"/>
+              </a:rPr>
+              <a:t>▼</a:t>
+            </a:r>
+            <a:endParaRPr lang="en-US" sz="700" dirty="0"/>
+          </a:p>
+        </p:txBody>
+      </p:sp>
+      <p:sp>
+        <p:nvSpPr>
+          <p:cNvPr id="19" name="Shape 17"/>
+          <p:cNvSpPr/>
+          <p:nvPr/>
+        </p:nvSpPr>
+        <p:spPr>
+          <a:xfrm>
+            <a:off x="813816" y="3438144"/>
+            <a:ext cx="4846320" cy="585216"/>
+          </a:xfrm>
+          <a:prstGeom prst="roundRect">
+            <a:avLst>
+              <a:gd name="adj" fmla="val 9375"/>
+            </a:avLst>
+          </a:prstGeom>
+          <a:solidFill>
+            <a:srgbClr val="16305B"/>
+          </a:solidFill>
+          <a:ln w="9525">
+            <a:solidFill>
+              <a:srgbClr val="16305B"/>
+            </a:solidFill>
+            <a:prstDash val="solid"/>
+          </a:ln>
+        </p:spPr>
+      </p:sp>
+      <p:sp>
+        <p:nvSpPr>
+          <p:cNvPr id="20" name="Text 18"/>
+          <p:cNvSpPr txBox="1"/>
+          <p:nvPr/>
+        </p:nvSpPr>
+        <p:spPr>
+          <a:xfrm>
+            <a:off x="923544" y="3438144"/>
+            <a:ext cx="310896" cy="585216"/>
+          </a:xfrm>
+          <a:prstGeom prst="rect">
+            <a:avLst/>
+          </a:prstGeom>
+          <a:noFill/>
+          <a:ln/>
+        </p:spPr>
+        <p:txBody>
+          <a:bodyPr wrap="square" lIns="0" tIns="0" rIns="0" bIns="0" rtlCol="0" anchor="ctr"/>
+          <a:lstStyle/>
+          <a:p>
+            <a:pPr indent="0" marL="0">
+              <a:buNone/>
+            </a:pPr>
+            <a:r>
+              <a:rPr lang="en-US" sz="1600" b="1" dirty="0">
+                <a:solidFill>
+                  <a:srgbClr val="FFFFFF"/>
+                </a:solidFill>
+                <a:latin typeface="Malgun Gothic" pitchFamily="34" charset="0"/>
+                <a:ea typeface="Malgun Gothic" pitchFamily="34" charset="-122"/>
+                <a:cs typeface="Malgun Gothic" pitchFamily="34" charset="-120"/>
+              </a:rPr>
+              <a:t>3</a:t>
+            </a:r>
+            <a:endParaRPr lang="en-US" sz="1600" dirty="0"/>
+          </a:p>
+        </p:txBody>
+      </p:sp>
+      <p:sp>
+        <p:nvSpPr>
+          <p:cNvPr id="21" name="Text 19"/>
+          <p:cNvSpPr txBox="1"/>
+          <p:nvPr/>
+        </p:nvSpPr>
+        <p:spPr>
+          <a:xfrm>
+            <a:off x="1289304" y="3474720"/>
+            <a:ext cx="1737360" cy="512064"/>
+          </a:xfrm>
+          <a:prstGeom prst="rect">
+            <a:avLst/>
+          </a:prstGeom>
+          <a:noFill/>
+          <a:ln/>
+        </p:spPr>
+        <p:txBody>
+          <a:bodyPr wrap="square" lIns="0" tIns="0" rIns="0" bIns="0" rtlCol="0" anchor="ctr"/>
+          <a:lstStyle/>
+          <a:p>
+            <a:pPr indent="0" marL="0">
+              <a:buNone/>
+            </a:pPr>
+            <a:r>
+              <a:rPr lang="en-US" sz="1050" b="1" dirty="0">
+                <a:solidFill>
+                  <a:srgbClr val="FFFFFF"/>
+                </a:solidFill>
+                <a:latin typeface="Malgun Gothic" pitchFamily="34" charset="0"/>
+                <a:ea typeface="Malgun Gothic" pitchFamily="34" charset="-122"/>
+                <a:cs typeface="Malgun Gothic" pitchFamily="34" charset="-120"/>
+              </a:rPr>
+              <a:t>AI 에이전트와 코드 정리</a:t>
+            </a:r>
+            <a:endParaRPr lang="en-US" sz="1050" dirty="0"/>
+          </a:p>
+        </p:txBody>
+      </p:sp>
+      <p:sp>
+        <p:nvSpPr>
+          <p:cNvPr id="22" name="Text 20"/>
+          <p:cNvSpPr txBox="1"/>
+          <p:nvPr/>
+        </p:nvSpPr>
+        <p:spPr>
+          <a:xfrm>
+            <a:off x="2990088" y="3474720"/>
+            <a:ext cx="2596896" cy="512064"/>
+          </a:xfrm>
+          <a:prstGeom prst="rect">
+            <a:avLst/>
+          </a:prstGeom>
+          <a:noFill/>
+          <a:ln/>
+        </p:spPr>
+        <p:txBody>
+          <a:bodyPr wrap="square" lIns="0" tIns="0" rIns="0" bIns="0" rtlCol="0" anchor="ctr"/>
+          <a:lstStyle/>
+          <a:p>
+            <a:pPr indent="0" marL="0">
+              <a:lnSpc>
+                <a:spcPct val="110000"/>
+              </a:lnSpc>
+              <a:buNone/>
+            </a:pPr>
+            <a:r>
+              <a:rPr lang="en-US" sz="880" dirty="0">
+                <a:solidFill>
+                  <a:srgbClr val="FFFFFF"/>
+                </a:solidFill>
+                <a:latin typeface="Malgun Gothic" pitchFamily="34" charset="0"/>
+                <a:ea typeface="Malgun Gothic" pitchFamily="34" charset="-122"/>
+                <a:cs typeface="Malgun Gothic" pitchFamily="34" charset="-120"/>
+              </a:rPr>
+              <a:t>기록된 고정값을 설계변수 기반으로 치환하고</a:t>
+            </a:r>
+            <a:endParaRPr lang="en-US" sz="880" dirty="0"/>
+          </a:p>
+          <a:p>
+            <a:pPr indent="0" marL="0">
+              <a:lnSpc>
+                <a:spcPct val="110000"/>
+              </a:lnSpc>
+              <a:buNone/>
+            </a:pPr>
+            <a:r>
+              <a:rPr lang="en-US" sz="880" dirty="0">
+                <a:solidFill>
+                  <a:srgbClr val="FFFFFF"/>
+                </a:solidFill>
+                <a:latin typeface="Malgun Gothic" pitchFamily="34" charset="0"/>
+                <a:ea typeface="Malgun Gothic" pitchFamily="34" charset="-122"/>
+                <a:cs typeface="Malgun Gothic" pitchFamily="34" charset="-120"/>
+              </a:rPr>
+              <a:t>재사용 가능한 모듈로 구조화</a:t>
+            </a:r>
+            <a:endParaRPr lang="en-US" sz="880" dirty="0"/>
+          </a:p>
+        </p:txBody>
+      </p:sp>
+      <p:sp>
+        <p:nvSpPr>
+          <p:cNvPr id="23" name="Text 21"/>
+          <p:cNvSpPr txBox="1"/>
+          <p:nvPr/>
+        </p:nvSpPr>
+        <p:spPr>
+          <a:xfrm>
+            <a:off x="813816" y="4023360"/>
+            <a:ext cx="4846320" cy="182880"/>
+          </a:xfrm>
+          <a:prstGeom prst="rect">
+            <a:avLst/>
+          </a:prstGeom>
+          <a:noFill/>
+          <a:ln/>
+        </p:spPr>
+        <p:txBody>
+          <a:bodyPr wrap="square" lIns="0" tIns="0" rIns="0" bIns="0" rtlCol="0" anchor="ctr"/>
+          <a:lstStyle/>
+          <a:p>
+            <a:pPr algn="ctr" indent="0" marL="0">
+              <a:buNone/>
+            </a:pPr>
+            <a:r>
+              <a:rPr lang="en-US" sz="700" dirty="0">
+                <a:solidFill>
+                  <a:srgbClr val="6B7A8F"/>
+                </a:solidFill>
+                <a:latin typeface="Malgun Gothic" pitchFamily="34" charset="0"/>
+                <a:ea typeface="Malgun Gothic" pitchFamily="34" charset="-122"/>
+                <a:cs typeface="Malgun Gothic" pitchFamily="34" charset="-120"/>
+              </a:rPr>
+              <a:t>▼</a:t>
+            </a:r>
+            <a:endParaRPr lang="en-US" sz="700" dirty="0"/>
+          </a:p>
+        </p:txBody>
+      </p:sp>
+      <p:sp>
+        <p:nvSpPr>
+          <p:cNvPr id="24" name="Shape 22"/>
+          <p:cNvSpPr/>
+          <p:nvPr/>
+        </p:nvSpPr>
+        <p:spPr>
+          <a:xfrm>
+            <a:off x="813816" y="4206240"/>
+            <a:ext cx="4846320" cy="585216"/>
+          </a:xfrm>
+          <a:prstGeom prst="roundRect">
+            <a:avLst>
+              <a:gd name="adj" fmla="val 9375"/>
+            </a:avLst>
+          </a:prstGeom>
+          <a:solidFill>
+            <a:srgbClr val="00A3C4"/>
+          </a:solidFill>
+          <a:ln w="9525">
+            <a:solidFill>
+              <a:srgbClr val="00A3C4"/>
+            </a:solidFill>
+            <a:prstDash val="solid"/>
+          </a:ln>
+        </p:spPr>
+      </p:sp>
+      <p:sp>
+        <p:nvSpPr>
+          <p:cNvPr id="25" name="Text 23"/>
+          <p:cNvSpPr txBox="1"/>
+          <p:nvPr/>
+        </p:nvSpPr>
+        <p:spPr>
+          <a:xfrm>
+            <a:off x="923544" y="4206240"/>
+            <a:ext cx="310896" cy="585216"/>
+          </a:xfrm>
+          <a:prstGeom prst="rect">
+            <a:avLst/>
+          </a:prstGeom>
+          <a:noFill/>
+          <a:ln/>
+        </p:spPr>
+        <p:txBody>
+          <a:bodyPr wrap="square" lIns="0" tIns="0" rIns="0" bIns="0" rtlCol="0" anchor="ctr"/>
+          <a:lstStyle/>
+          <a:p>
+            <a:pPr indent="0" marL="0">
+              <a:buNone/>
+            </a:pPr>
+            <a:r>
+              <a:rPr lang="en-US" sz="1600" b="1" dirty="0">
+                <a:solidFill>
+                  <a:srgbClr val="FFFFFF"/>
+                </a:solidFill>
+                <a:latin typeface="Malgun Gothic" pitchFamily="34" charset="0"/>
+                <a:ea typeface="Malgun Gothic" pitchFamily="34" charset="-122"/>
+                <a:cs typeface="Malgun Gothic" pitchFamily="34" charset="-120"/>
+              </a:rPr>
+              <a:t>4</a:t>
+            </a:r>
+            <a:endParaRPr lang="en-US" sz="1600" dirty="0"/>
+          </a:p>
+        </p:txBody>
+      </p:sp>
+      <p:sp>
+        <p:nvSpPr>
+          <p:cNvPr id="26" name="Text 24"/>
+          <p:cNvSpPr txBox="1"/>
+          <p:nvPr/>
+        </p:nvSpPr>
+        <p:spPr>
+          <a:xfrm>
+            <a:off x="1289304" y="4242816"/>
+            <a:ext cx="1737360" cy="512064"/>
+          </a:xfrm>
+          <a:prstGeom prst="rect">
+            <a:avLst/>
+          </a:prstGeom>
+          <a:noFill/>
+          <a:ln/>
+        </p:spPr>
+        <p:txBody>
+          <a:bodyPr wrap="square" lIns="0" tIns="0" rIns="0" bIns="0" rtlCol="0" anchor="ctr"/>
+          <a:lstStyle/>
+          <a:p>
+            <a:pPr indent="0" marL="0">
+              <a:buNone/>
+            </a:pPr>
+            <a:r>
+              <a:rPr lang="en-US" sz="1050" b="1" dirty="0">
+                <a:solidFill>
+                  <a:srgbClr val="FFFFFF"/>
+                </a:solidFill>
+                <a:latin typeface="Malgun Gothic" pitchFamily="34" charset="0"/>
+                <a:ea typeface="Malgun Gothic" pitchFamily="34" charset="-122"/>
+                <a:cs typeface="Malgun Gothic" pitchFamily="34" charset="-120"/>
+              </a:rPr>
+              <a:t>매 회차 자동 반복</a:t>
+            </a:r>
+            <a:endParaRPr lang="en-US" sz="1050" dirty="0"/>
+          </a:p>
+        </p:txBody>
+      </p:sp>
+      <p:sp>
+        <p:nvSpPr>
+          <p:cNvPr id="27" name="Text 25"/>
+          <p:cNvSpPr txBox="1"/>
+          <p:nvPr/>
+        </p:nvSpPr>
+        <p:spPr>
+          <a:xfrm>
+            <a:off x="2990088" y="4242816"/>
+            <a:ext cx="2596896" cy="512064"/>
+          </a:xfrm>
+          <a:prstGeom prst="rect">
+            <a:avLst/>
+          </a:prstGeom>
+          <a:noFill/>
+          <a:ln/>
+        </p:spPr>
+        <p:txBody>
+          <a:bodyPr wrap="square" lIns="0" tIns="0" rIns="0" bIns="0" rtlCol="0" anchor="ctr"/>
+          <a:lstStyle/>
+          <a:p>
+            <a:pPr indent="0" marL="0">
+              <a:lnSpc>
+                <a:spcPct val="110000"/>
+              </a:lnSpc>
+              <a:buNone/>
+            </a:pPr>
+            <a:r>
+              <a:rPr lang="en-US" sz="880" dirty="0">
+                <a:solidFill>
+                  <a:srgbClr val="FFFFFF"/>
+                </a:solidFill>
+                <a:latin typeface="Malgun Gothic" pitchFamily="34" charset="0"/>
+                <a:ea typeface="Malgun Gothic" pitchFamily="34" charset="-122"/>
+                <a:cs typeface="Malgun Gothic" pitchFamily="34" charset="-120"/>
+              </a:rPr>
+              <a:t>형상(STEP)만 바뀌면 동일 절차를 코드가 재현</a:t>
+            </a:r>
+            <a:endParaRPr lang="en-US" sz="880" dirty="0"/>
+          </a:p>
+        </p:txBody>
+      </p:sp>
+      <p:sp>
+        <p:nvSpPr>
+          <p:cNvPr id="28" name="Text 26"/>
+          <p:cNvSpPr txBox="1"/>
+          <p:nvPr/>
+        </p:nvSpPr>
+        <p:spPr>
+          <a:xfrm>
+            <a:off x="813816" y="5029200"/>
+            <a:ext cx="4846320" cy="219456"/>
+          </a:xfrm>
+          <a:prstGeom prst="rect">
+            <a:avLst/>
+          </a:prstGeom>
+          <a:noFill/>
+          <a:ln/>
+        </p:spPr>
+        <p:txBody>
+          <a:bodyPr wrap="square" lIns="0" tIns="0" rIns="0" bIns="0" rtlCol="0" anchor="ctr"/>
+          <a:lstStyle/>
+          <a:p>
+            <a:pPr indent="0" marL="0">
+              <a:buNone/>
+            </a:pPr>
+            <a:r>
+              <a:rPr lang="en-US" sz="900" i="1" dirty="0">
+                <a:solidFill>
+                  <a:srgbClr val="6B7A8F"/>
+                </a:solidFill>
+                <a:latin typeface="Malgun Gothic" pitchFamily="34" charset="0"/>
+                <a:ea typeface="Malgun Gothic" pitchFamily="34" charset="-122"/>
+                <a:cs typeface="Malgun Gothic" pitchFamily="34" charset="-120"/>
+              </a:rPr>
+              <a:t>※ 단계별 GUI 설정은 부록 A-1 참고</a:t>
+            </a:r>
+            <a:endParaRPr lang="en-US" sz="900" dirty="0"/>
+          </a:p>
+        </p:txBody>
+      </p:sp>
+      <p:sp>
+        <p:nvSpPr>
+          <p:cNvPr id="29" name="Shape 27"/>
+          <p:cNvSpPr/>
+          <p:nvPr/>
+        </p:nvSpPr>
+        <p:spPr>
+          <a:xfrm>
+            <a:off x="6336792" y="1188720"/>
+            <a:ext cx="5440680" cy="2176272"/>
+          </a:xfrm>
+          <a:prstGeom prst="roundRect">
+            <a:avLst>
+              <a:gd name="adj" fmla="val 2521"/>
+            </a:avLst>
+          </a:prstGeom>
+          <a:solidFill>
+            <a:srgbClr val="FFFFFF"/>
+          </a:solidFill>
+          <a:ln w="9525">
+            <a:solidFill>
+              <a:srgbClr val="DDE3EB"/>
+            </a:solidFill>
+            <a:prstDash val="solid"/>
+          </a:ln>
+          <a:effectLst>
+            <a:outerShdw sx="100000" sy="100000" kx="0" ky="0" algn="bl" rotWithShape="0" blurRad="101600" dist="12700" dir="5400000">
+              <a:srgbClr val="9AA8BC">
+                <a:alpha val="18000"/>
+              </a:srgbClr>
+            </a:outerShdw>
+          </a:effectLst>
+        </p:spPr>
+      </p:sp>
+      <p:sp>
+        <p:nvSpPr>
+          <p:cNvPr id="30" name="Shape 28"/>
+          <p:cNvSpPr/>
+          <p:nvPr/>
+        </p:nvSpPr>
+        <p:spPr>
+          <a:xfrm>
+            <a:off x="6592824" y="1463040"/>
+            <a:ext cx="82296" cy="182880"/>
+          </a:xfrm>
+          <a:prstGeom prst="rect">
+            <a:avLst/>
+          </a:prstGeom>
+          <a:solidFill>
+            <a:srgbClr val="00A3C4"/>
+          </a:solidFill>
+          <a:ln w="12700">
+            <a:solidFill>
+              <a:srgbClr val="00A3C4"/>
+            </a:solidFill>
+            <a:prstDash val="solid"/>
+          </a:ln>
+        </p:spPr>
+      </p:sp>
+      <p:sp>
+        <p:nvSpPr>
+          <p:cNvPr id="31" name="Text 29"/>
+          <p:cNvSpPr txBox="1"/>
+          <p:nvPr/>
+        </p:nvSpPr>
+        <p:spPr>
+          <a:xfrm>
+            <a:off x="6757416" y="1371600"/>
+            <a:ext cx="4480560" cy="365760"/>
+          </a:xfrm>
+          <a:prstGeom prst="rect">
+            <a:avLst/>
+          </a:prstGeom>
+          <a:noFill/>
+          <a:ln/>
+        </p:spPr>
+        <p:txBody>
+          <a:bodyPr wrap="square" lIns="0" tIns="0" rIns="0" bIns="0" rtlCol="0" anchor="ctr"/>
+          <a:lstStyle/>
+          <a:p>
+            <a:pPr indent="0" marL="0">
+              <a:buNone/>
+            </a:pPr>
+            <a:r>
+              <a:rPr lang="en-US" sz="1300" b="1" dirty="0">
+                <a:solidFill>
+                  <a:srgbClr val="16305B"/>
+                </a:solidFill>
+                <a:latin typeface="Malgun Gothic" pitchFamily="34" charset="0"/>
+                <a:ea typeface="Malgun Gothic" pitchFamily="34" charset="-122"/>
+                <a:cs typeface="Malgun Gothic" pitchFamily="34" charset="-120"/>
+              </a:rPr>
+              <a:t>GUI 수동 설정 vs 코드 자동 구성</a:t>
             </a:r>
             <a:endParaRPr lang="en-US" sz="1300" dirty="0"/>
           </a:p>
@@ -2471,6 +3442,2229 @@
       <p:graphicFrame>
         <p:nvGraphicFramePr>
           <p:cNvPr id="11" name="Table 0"/>
+          <p:cNvGraphicFramePr>
+            <a:graphicFrameLocks noGrp="1"/>
+          </p:cNvGraphicFramePr>
+          <p:nvPr>
+            <p:extLst>
+              <p:ext uri="{D42A27DB-BD31-4B8C-83A1-F6EECF244321}">
+                <p14:modId xmlns:p14="http://schemas.microsoft.com/office/powerpoint/2010/main" val="1579011935"/>
+              </p:ext>
+            </p:extLst>
+          </p:nvPr>
+        </p:nvGraphicFramePr>
+        <p:xfrm>
+          <a:off x="6647688" y="1828800"/>
+          <a:ext cx="4846320" cy="914400"/>
+        </p:xfrm>
+        <a:graphic>
+          <a:graphicData uri="http://schemas.openxmlformats.org/drawingml/2006/table">
+            <a:tbl>
+              <a:tblPr/>
+              <a:tblGrid>
+                <a:gridCol w="1143000"/>
+                <a:gridCol w="1783080"/>
+                <a:gridCol w="1920240"/>
+              </a:tblGrid>
+              <a:tr h="292608">
+                <a:tc>
+                  <a:txBody>
+                    <a:bodyPr/>
+                    <a:lstStyle/>
+                    <a:p>
+                      <a:pPr indent="0" marL="0">
+                        <a:buNone/>
+                      </a:pPr>
+                      <a:r>
+                        <a:rPr lang="en-US" sz="950" b="1" dirty="0">
+                          <a:solidFill>
+                            <a:srgbClr val="16305B"/>
+                          </a:solidFill>
+                          <a:latin typeface="Malgun Gothic" pitchFamily="34" charset="0"/>
+                          <a:ea typeface="Malgun Gothic" pitchFamily="34" charset="-122"/>
+                          <a:cs typeface="Malgun Gothic" pitchFamily="34" charset="-120"/>
+                        </a:rPr>
+                        <a:t>항목</a:t>
+                      </a:r>
+                      <a:endParaRPr lang="en-US" sz="950" dirty="0">
+                        <a:latin typeface="Malgun Gothic" charset="0"/>
+                        <a:ea typeface="Malgun Gothic" charset="0"/>
+                        <a:cs typeface="Malgun Gothic" charset="0"/>
+                      </a:endParaRPr>
+                    </a:p>
+                  </a:txBody>
+                  <a:tcPr marL="50800" marR="50800" marT="25400" marB="25400" anchor="ctr">
+                    <a:lnL w="0" cap="flat" cmpd="sng" algn="ctr">
+                      <a:noFill/>
+                    </a:lnL>
+                    <a:lnR w="0" cap="flat" cmpd="sng" algn="ctr">
+                      <a:noFill/>
+                    </a:lnR>
+                    <a:lnT w="0" cap="flat" cmpd="sng" algn="ctr">
+                      <a:noFill/>
+                    </a:lnT>
+                    <a:lnB w="6350" cap="flat" cmpd="sng" algn="ctr">
+                      <a:solidFill>
+                        <a:srgbClr val="DDE3EB"/>
+                      </a:solidFill>
+                      <a:prstDash val="solid"/>
+                      <a:round/>
+                      <a:headEnd type="none" w="med" len="med"/>
+                      <a:tailEnd type="none" w="med" len="med"/>
+                    </a:lnB>
+                    <a:solidFill>
+                      <a:srgbClr val="EEF2F7"/>
+                    </a:solidFill>
+                  </a:tcPr>
+                </a:tc>
+                <a:tc>
+                  <a:txBody>
+                    <a:bodyPr/>
+                    <a:lstStyle/>
+                    <a:p>
+                      <a:pPr indent="0" marL="0">
+                        <a:buNone/>
+                      </a:pPr>
+                      <a:r>
+                        <a:rPr lang="en-US" sz="950" b="1" dirty="0">
+                          <a:solidFill>
+                            <a:srgbClr val="16305B"/>
+                          </a:solidFill>
+                          <a:latin typeface="Malgun Gothic" pitchFamily="34" charset="0"/>
+                          <a:ea typeface="Malgun Gothic" pitchFamily="34" charset="-122"/>
+                          <a:cs typeface="Malgun Gothic" pitchFamily="34" charset="-120"/>
+                        </a:rPr>
+                        <a:t>GUI 수동</a:t>
+                      </a:r>
+                      <a:endParaRPr lang="en-US" sz="950" dirty="0">
+                        <a:latin typeface="Malgun Gothic" charset="0"/>
+                        <a:ea typeface="Malgun Gothic" charset="0"/>
+                        <a:cs typeface="Malgun Gothic" charset="0"/>
+                      </a:endParaRPr>
+                    </a:p>
+                  </a:txBody>
+                  <a:tcPr marL="50800" marR="50800" marT="25400" marB="25400" anchor="ctr">
+                    <a:lnL w="0" cap="flat" cmpd="sng" algn="ctr">
+                      <a:noFill/>
+                    </a:lnL>
+                    <a:lnR w="0" cap="flat" cmpd="sng" algn="ctr">
+                      <a:noFill/>
+                    </a:lnR>
+                    <a:lnT w="0" cap="flat" cmpd="sng" algn="ctr">
+                      <a:noFill/>
+                    </a:lnT>
+                    <a:lnB w="6350" cap="flat" cmpd="sng" algn="ctr">
+                      <a:solidFill>
+                        <a:srgbClr val="DDE3EB"/>
+                      </a:solidFill>
+                      <a:prstDash val="solid"/>
+                      <a:round/>
+                      <a:headEnd type="none" w="med" len="med"/>
+                      <a:tailEnd type="none" w="med" len="med"/>
+                    </a:lnB>
+                    <a:solidFill>
+                      <a:srgbClr val="EEF2F7"/>
+                    </a:solidFill>
+                  </a:tcPr>
+                </a:tc>
+                <a:tc>
+                  <a:txBody>
+                    <a:bodyPr/>
+                    <a:lstStyle/>
+                    <a:p>
+                      <a:pPr indent="0" marL="0">
+                        <a:buNone/>
+                      </a:pPr>
+                      <a:r>
+                        <a:rPr lang="en-US" sz="950" b="1" dirty="0">
+                          <a:solidFill>
+                            <a:srgbClr val="16305B"/>
+                          </a:solidFill>
+                          <a:latin typeface="Malgun Gothic" pitchFamily="34" charset="0"/>
+                          <a:ea typeface="Malgun Gothic" pitchFamily="34" charset="-122"/>
+                          <a:cs typeface="Malgun Gothic" pitchFamily="34" charset="-120"/>
+                        </a:rPr>
+                        <a:t>코드 자동</a:t>
+                      </a:r>
+                      <a:endParaRPr lang="en-US" sz="950" dirty="0">
+                        <a:latin typeface="Malgun Gothic" charset="0"/>
+                        <a:ea typeface="Malgun Gothic" charset="0"/>
+                        <a:cs typeface="Malgun Gothic" charset="0"/>
+                      </a:endParaRPr>
+                    </a:p>
+                  </a:txBody>
+                  <a:tcPr marL="50800" marR="50800" marT="25400" marB="25400" anchor="ctr">
+                    <a:lnL w="0" cap="flat" cmpd="sng" algn="ctr">
+                      <a:noFill/>
+                    </a:lnL>
+                    <a:lnR w="0" cap="flat" cmpd="sng" algn="ctr">
+                      <a:noFill/>
+                    </a:lnR>
+                    <a:lnT w="0" cap="flat" cmpd="sng" algn="ctr">
+                      <a:noFill/>
+                    </a:lnT>
+                    <a:lnB w="6350" cap="flat" cmpd="sng" algn="ctr">
+                      <a:solidFill>
+                        <a:srgbClr val="DDE3EB"/>
+                      </a:solidFill>
+                      <a:prstDash val="solid"/>
+                      <a:round/>
+                      <a:headEnd type="none" w="med" len="med"/>
+                      <a:tailEnd type="none" w="med" len="med"/>
+                    </a:lnB>
+                    <a:solidFill>
+                      <a:srgbClr val="EEF2F7"/>
+                    </a:solidFill>
+                  </a:tcPr>
+                </a:tc>
+              </a:tr>
+              <a:tr h="292608">
+                <a:tc>
+                  <a:txBody>
+                    <a:bodyPr/>
+                    <a:lstStyle/>
+                    <a:p>
+                      <a:pPr indent="0" marL="0">
+                        <a:buNone/>
+                      </a:pPr>
+                      <a:r>
+                        <a:rPr lang="en-US" sz="950" dirty="0">
+                          <a:solidFill>
+                            <a:srgbClr val="1C2733"/>
+                          </a:solidFill>
+                          <a:latin typeface="Malgun Gothic" pitchFamily="34" charset="0"/>
+                          <a:ea typeface="Malgun Gothic" pitchFamily="34" charset="-122"/>
+                          <a:cs typeface="Malgun Gothic" pitchFamily="34" charset="-120"/>
+                        </a:rPr>
+                        <a:t>모델 구성</a:t>
+                      </a:r>
+                      <a:endParaRPr lang="en-US" sz="950" dirty="0">
+                        <a:latin typeface="Malgun Gothic" charset="0"/>
+                        <a:ea typeface="Malgun Gothic" charset="0"/>
+                        <a:cs typeface="Malgun Gothic" charset="0"/>
+                      </a:endParaRPr>
+                    </a:p>
+                  </a:txBody>
+                  <a:tcPr marL="50800" marR="50800" marT="25400" marB="25400" anchor="ctr">
+                    <a:lnL w="0" cap="flat" cmpd="sng" algn="ctr">
+                      <a:noFill/>
+                    </a:lnL>
+                    <a:lnR w="0" cap="flat" cmpd="sng" algn="ctr">
+                      <a:noFill/>
+                    </a:lnR>
+                    <a:lnT w="0" cap="flat" cmpd="sng" algn="ctr">
+                      <a:noFill/>
+                    </a:lnT>
+                    <a:lnB w="6350" cap="flat" cmpd="sng" algn="ctr">
+                      <a:solidFill>
+                        <a:srgbClr val="DDE3EB"/>
+                      </a:solidFill>
+                      <a:prstDash val="solid"/>
+                      <a:round/>
+                      <a:headEnd type="none" w="med" len="med"/>
+                      <a:tailEnd type="none" w="med" len="med"/>
+                    </a:lnB>
+                  </a:tcPr>
+                </a:tc>
+                <a:tc>
+                  <a:txBody>
+                    <a:bodyPr/>
+                    <a:lstStyle/>
+                    <a:p>
+                      <a:pPr indent="0" marL="0">
+                        <a:buNone/>
+                      </a:pPr>
+                      <a:r>
+                        <a:rPr lang="en-US" sz="950" dirty="0">
+                          <a:solidFill>
+                            <a:srgbClr val="1C2733"/>
+                          </a:solidFill>
+                          <a:latin typeface="Malgun Gothic" pitchFamily="34" charset="0"/>
+                          <a:ea typeface="Malgun Gothic" pitchFamily="34" charset="-122"/>
+                          <a:cs typeface="Malgun Gothic" pitchFamily="34" charset="-120"/>
+                        </a:rPr>
+                        <a:t>7단계 매회 직접 설정</a:t>
+                      </a:r>
+                      <a:endParaRPr lang="en-US" sz="950" dirty="0">
+                        <a:latin typeface="Malgun Gothic" charset="0"/>
+                        <a:ea typeface="Malgun Gothic" charset="0"/>
+                        <a:cs typeface="Malgun Gothic" charset="0"/>
+                      </a:endParaRPr>
+                    </a:p>
+                  </a:txBody>
+                  <a:tcPr marL="50800" marR="50800" marT="25400" marB="25400" anchor="ctr">
+                    <a:lnL w="0" cap="flat" cmpd="sng" algn="ctr">
+                      <a:noFill/>
+                    </a:lnL>
+                    <a:lnR w="0" cap="flat" cmpd="sng" algn="ctr">
+                      <a:noFill/>
+                    </a:lnR>
+                    <a:lnT w="0" cap="flat" cmpd="sng" algn="ctr">
+                      <a:noFill/>
+                    </a:lnT>
+                    <a:lnB w="6350" cap="flat" cmpd="sng" algn="ctr">
+                      <a:solidFill>
+                        <a:srgbClr val="DDE3EB"/>
+                      </a:solidFill>
+                      <a:prstDash val="solid"/>
+                      <a:round/>
+                      <a:headEnd type="none" w="med" len="med"/>
+                      <a:tailEnd type="none" w="med" len="med"/>
+                    </a:lnB>
+                  </a:tcPr>
+                </a:tc>
+                <a:tc>
+                  <a:txBody>
+                    <a:bodyPr/>
+                    <a:lstStyle/>
+                    <a:p>
+                      <a:pPr indent="0" marL="0">
+                        <a:buNone/>
+                      </a:pPr>
+                      <a:r>
+                        <a:rPr lang="en-US" sz="950" b="1" dirty="0">
+                          <a:solidFill>
+                            <a:srgbClr val="16305B"/>
+                          </a:solidFill>
+                          <a:latin typeface="Malgun Gothic" pitchFamily="34" charset="0"/>
+                          <a:ea typeface="Malgun Gothic" pitchFamily="34" charset="-122"/>
+                          <a:cs typeface="Malgun Gothic" pitchFamily="34" charset="-120"/>
+                        </a:rPr>
+                        <a:t>스크립트 1회 실행</a:t>
+                      </a:r>
+                      <a:endParaRPr lang="en-US" sz="950" dirty="0">
+                        <a:latin typeface="Malgun Gothic" charset="0"/>
+                        <a:ea typeface="Malgun Gothic" charset="0"/>
+                        <a:cs typeface="Malgun Gothic" charset="0"/>
+                      </a:endParaRPr>
+                    </a:p>
+                  </a:txBody>
+                  <a:tcPr marL="50800" marR="50800" marT="25400" marB="25400" anchor="ctr">
+                    <a:lnL w="0" cap="flat" cmpd="sng" algn="ctr">
+                      <a:noFill/>
+                    </a:lnL>
+                    <a:lnR w="0" cap="flat" cmpd="sng" algn="ctr">
+                      <a:noFill/>
+                    </a:lnR>
+                    <a:lnT w="0" cap="flat" cmpd="sng" algn="ctr">
+                      <a:noFill/>
+                    </a:lnT>
+                    <a:lnB w="6350" cap="flat" cmpd="sng" algn="ctr">
+                      <a:solidFill>
+                        <a:srgbClr val="DDE3EB"/>
+                      </a:solidFill>
+                      <a:prstDash val="solid"/>
+                      <a:round/>
+                      <a:headEnd type="none" w="med" len="med"/>
+                      <a:tailEnd type="none" w="med" len="med"/>
+                    </a:lnB>
+                  </a:tcPr>
+                </a:tc>
+              </a:tr>
+              <a:tr h="292608">
+                <a:tc>
+                  <a:txBody>
+                    <a:bodyPr/>
+                    <a:lstStyle/>
+                    <a:p>
+                      <a:pPr indent="0" marL="0">
+                        <a:buNone/>
+                      </a:pPr>
+                      <a:r>
+                        <a:rPr lang="en-US" sz="950" dirty="0">
+                          <a:solidFill>
+                            <a:srgbClr val="1C2733"/>
+                          </a:solidFill>
+                          <a:latin typeface="Malgun Gothic" pitchFamily="34" charset="0"/>
+                          <a:ea typeface="Malgun Gothic" pitchFamily="34" charset="-122"/>
+                          <a:cs typeface="Malgun Gothic" pitchFamily="34" charset="-120"/>
+                        </a:rPr>
+                        <a:t>형상 변경 시</a:t>
+                      </a:r>
+                      <a:endParaRPr lang="en-US" sz="950" dirty="0">
+                        <a:latin typeface="Malgun Gothic" charset="0"/>
+                        <a:ea typeface="Malgun Gothic" charset="0"/>
+                        <a:cs typeface="Malgun Gothic" charset="0"/>
+                      </a:endParaRPr>
+                    </a:p>
+                  </a:txBody>
+                  <a:tcPr marL="50800" marR="50800" marT="25400" marB="25400" anchor="ctr">
+                    <a:lnL w="0" cap="flat" cmpd="sng" algn="ctr">
+                      <a:noFill/>
+                    </a:lnL>
+                    <a:lnR w="0" cap="flat" cmpd="sng" algn="ctr">
+                      <a:noFill/>
+                    </a:lnR>
+                    <a:lnT w="0" cap="flat" cmpd="sng" algn="ctr">
+                      <a:noFill/>
+                    </a:lnT>
+                    <a:lnB w="6350" cap="flat" cmpd="sng" algn="ctr">
+                      <a:solidFill>
+                        <a:srgbClr val="DDE3EB"/>
+                      </a:solidFill>
+                      <a:prstDash val="solid"/>
+                      <a:round/>
+                      <a:headEnd type="none" w="med" len="med"/>
+                      <a:tailEnd type="none" w="med" len="med"/>
+                    </a:lnB>
+                  </a:tcPr>
+                </a:tc>
+                <a:tc>
+                  <a:txBody>
+                    <a:bodyPr/>
+                    <a:lstStyle/>
+                    <a:p>
+                      <a:pPr indent="0" marL="0">
+                        <a:buNone/>
+                      </a:pPr>
+                      <a:r>
+                        <a:rPr lang="en-US" sz="950" dirty="0">
+                          <a:solidFill>
+                            <a:srgbClr val="1C2733"/>
+                          </a:solidFill>
+                          <a:latin typeface="Malgun Gothic" pitchFamily="34" charset="0"/>
+                          <a:ea typeface="Malgun Gothic" pitchFamily="34" charset="-122"/>
+                          <a:cs typeface="Malgun Gothic" pitchFamily="34" charset="-120"/>
+                        </a:rPr>
+                        <a:t>처음부터 재설정</a:t>
+                      </a:r>
+                      <a:endParaRPr lang="en-US" sz="950" dirty="0">
+                        <a:latin typeface="Malgun Gothic" charset="0"/>
+                        <a:ea typeface="Malgun Gothic" charset="0"/>
+                        <a:cs typeface="Malgun Gothic" charset="0"/>
+                      </a:endParaRPr>
+                    </a:p>
+                  </a:txBody>
+                  <a:tcPr marL="50800" marR="50800" marT="25400" marB="25400" anchor="ctr">
+                    <a:lnL w="0" cap="flat" cmpd="sng" algn="ctr">
+                      <a:noFill/>
+                    </a:lnL>
+                    <a:lnR w="0" cap="flat" cmpd="sng" algn="ctr">
+                      <a:noFill/>
+                    </a:lnR>
+                    <a:lnT w="0" cap="flat" cmpd="sng" algn="ctr">
+                      <a:noFill/>
+                    </a:lnT>
+                    <a:lnB w="6350" cap="flat" cmpd="sng" algn="ctr">
+                      <a:solidFill>
+                        <a:srgbClr val="DDE3EB"/>
+                      </a:solidFill>
+                      <a:prstDash val="solid"/>
+                      <a:round/>
+                      <a:headEnd type="none" w="med" len="med"/>
+                      <a:tailEnd type="none" w="med" len="med"/>
+                    </a:lnB>
+                  </a:tcPr>
+                </a:tc>
+                <a:tc>
+                  <a:txBody>
+                    <a:bodyPr/>
+                    <a:lstStyle/>
+                    <a:p>
+                      <a:pPr indent="0" marL="0">
+                        <a:buNone/>
+                      </a:pPr>
+                      <a:r>
+                        <a:rPr lang="en-US" sz="950" b="1" dirty="0">
+                          <a:solidFill>
+                            <a:srgbClr val="16305B"/>
+                          </a:solidFill>
+                          <a:latin typeface="Malgun Gothic" pitchFamily="34" charset="0"/>
+                          <a:ea typeface="Malgun Gothic" pitchFamily="34" charset="-122"/>
+                          <a:cs typeface="Malgun Gothic" pitchFamily="34" charset="-120"/>
+                        </a:rPr>
+                        <a:t>STEP 교체만으로 재구성</a:t>
+                      </a:r>
+                      <a:endParaRPr lang="en-US" sz="950" dirty="0">
+                        <a:latin typeface="Malgun Gothic" charset="0"/>
+                        <a:ea typeface="Malgun Gothic" charset="0"/>
+                        <a:cs typeface="Malgun Gothic" charset="0"/>
+                      </a:endParaRPr>
+                    </a:p>
+                  </a:txBody>
+                  <a:tcPr marL="50800" marR="50800" marT="25400" marB="25400" anchor="ctr">
+                    <a:lnL w="0" cap="flat" cmpd="sng" algn="ctr">
+                      <a:noFill/>
+                    </a:lnL>
+                    <a:lnR w="0" cap="flat" cmpd="sng" algn="ctr">
+                      <a:noFill/>
+                    </a:lnR>
+                    <a:lnT w="0" cap="flat" cmpd="sng" algn="ctr">
+                      <a:noFill/>
+                    </a:lnT>
+                    <a:lnB w="6350" cap="flat" cmpd="sng" algn="ctr">
+                      <a:solidFill>
+                        <a:srgbClr val="DDE3EB"/>
+                      </a:solidFill>
+                      <a:prstDash val="solid"/>
+                      <a:round/>
+                      <a:headEnd type="none" w="med" len="med"/>
+                      <a:tailEnd type="none" w="med" len="med"/>
+                    </a:lnB>
+                  </a:tcPr>
+                </a:tc>
+              </a:tr>
+              <a:tr h="292608">
+                <a:tc>
+                  <a:txBody>
+                    <a:bodyPr/>
+                    <a:lstStyle/>
+                    <a:p>
+                      <a:pPr indent="0" marL="0">
+                        <a:buNone/>
+                      </a:pPr>
+                      <a:r>
+                        <a:rPr lang="en-US" sz="950" dirty="0">
+                          <a:solidFill>
+                            <a:srgbClr val="1C2733"/>
+                          </a:solidFill>
+                          <a:latin typeface="Malgun Gothic" pitchFamily="34" charset="0"/>
+                          <a:ea typeface="Malgun Gothic" pitchFamily="34" charset="-122"/>
+                          <a:cs typeface="Malgun Gothic" pitchFamily="34" charset="-120"/>
+                        </a:rPr>
+                        <a:t>측정면 배치</a:t>
+                      </a:r>
+                      <a:endParaRPr lang="en-US" sz="950" dirty="0">
+                        <a:latin typeface="Malgun Gothic" charset="0"/>
+                        <a:ea typeface="Malgun Gothic" charset="0"/>
+                        <a:cs typeface="Malgun Gothic" charset="0"/>
+                      </a:endParaRPr>
+                    </a:p>
+                  </a:txBody>
+                  <a:tcPr marL="50800" marR="50800" marT="25400" marB="25400" anchor="ctr">
+                    <a:lnL w="0" cap="flat" cmpd="sng" algn="ctr">
+                      <a:noFill/>
+                    </a:lnL>
+                    <a:lnR w="0" cap="flat" cmpd="sng" algn="ctr">
+                      <a:noFill/>
+                    </a:lnR>
+                    <a:lnT w="0" cap="flat" cmpd="sng" algn="ctr">
+                      <a:noFill/>
+                    </a:lnT>
+                    <a:lnB w="6350" cap="flat" cmpd="sng" algn="ctr">
+                      <a:solidFill>
+                        <a:srgbClr val="DDE3EB"/>
+                      </a:solidFill>
+                      <a:prstDash val="solid"/>
+                      <a:round/>
+                      <a:headEnd type="none" w="med" len="med"/>
+                      <a:tailEnd type="none" w="med" len="med"/>
+                    </a:lnB>
+                  </a:tcPr>
+                </a:tc>
+                <a:tc>
+                  <a:txBody>
+                    <a:bodyPr/>
+                    <a:lstStyle/>
+                    <a:p>
+                      <a:pPr indent="0" marL="0">
+                        <a:buNone/>
+                      </a:pPr>
+                      <a:r>
+                        <a:rPr lang="en-US" sz="950" dirty="0">
+                          <a:solidFill>
+                            <a:srgbClr val="1C2733"/>
+                          </a:solidFill>
+                          <a:latin typeface="Malgun Gothic" pitchFamily="34" charset="0"/>
+                          <a:ea typeface="Malgun Gothic" pitchFamily="34" charset="-122"/>
+                          <a:cs typeface="Malgun Gothic" pitchFamily="34" charset="-120"/>
+                        </a:rPr>
+                        <a:t>유로마다 수작업</a:t>
+                      </a:r>
+                      <a:endParaRPr lang="en-US" sz="950" dirty="0">
+                        <a:latin typeface="Malgun Gothic" charset="0"/>
+                        <a:ea typeface="Malgun Gothic" charset="0"/>
+                        <a:cs typeface="Malgun Gothic" charset="0"/>
+                      </a:endParaRPr>
+                    </a:p>
+                  </a:txBody>
+                  <a:tcPr marL="50800" marR="50800" marT="25400" marB="25400" anchor="ctr">
+                    <a:lnL w="0" cap="flat" cmpd="sng" algn="ctr">
+                      <a:noFill/>
+                    </a:lnL>
+                    <a:lnR w="0" cap="flat" cmpd="sng" algn="ctr">
+                      <a:noFill/>
+                    </a:lnR>
+                    <a:lnT w="0" cap="flat" cmpd="sng" algn="ctr">
+                      <a:noFill/>
+                    </a:lnT>
+                    <a:lnB w="6350" cap="flat" cmpd="sng" algn="ctr">
+                      <a:solidFill>
+                        <a:srgbClr val="DDE3EB"/>
+                      </a:solidFill>
+                      <a:prstDash val="solid"/>
+                      <a:round/>
+                      <a:headEnd type="none" w="med" len="med"/>
+                      <a:tailEnd type="none" w="med" len="med"/>
+                    </a:lnB>
+                  </a:tcPr>
+                </a:tc>
+                <a:tc>
+                  <a:txBody>
+                    <a:bodyPr/>
+                    <a:lstStyle/>
+                    <a:p>
+                      <a:pPr indent="0" marL="0">
+                        <a:buNone/>
+                      </a:pPr>
+                      <a:r>
+                        <a:rPr lang="en-US" sz="950" b="1" dirty="0">
+                          <a:solidFill>
+                            <a:srgbClr val="16305B"/>
+                          </a:solidFill>
+                          <a:latin typeface="Malgun Gothic" pitchFamily="34" charset="0"/>
+                          <a:ea typeface="Malgun Gothic" pitchFamily="34" charset="-122"/>
+                          <a:cs typeface="Malgun Gothic" pitchFamily="34" charset="-120"/>
+                        </a:rPr>
+                        <a:t>핀 개수 따라 자동 계산</a:t>
+                      </a:r>
+                      <a:endParaRPr lang="en-US" sz="950" dirty="0">
+                        <a:latin typeface="Malgun Gothic" charset="0"/>
+                        <a:ea typeface="Malgun Gothic" charset="0"/>
+                        <a:cs typeface="Malgun Gothic" charset="0"/>
+                      </a:endParaRPr>
+                    </a:p>
+                  </a:txBody>
+                  <a:tcPr marL="50800" marR="50800" marT="25400" marB="25400" anchor="ctr">
+                    <a:lnL w="0" cap="flat" cmpd="sng" algn="ctr">
+                      <a:noFill/>
+                    </a:lnL>
+                    <a:lnR w="0" cap="flat" cmpd="sng" algn="ctr">
+                      <a:noFill/>
+                    </a:lnR>
+                    <a:lnT w="0" cap="flat" cmpd="sng" algn="ctr">
+                      <a:noFill/>
+                    </a:lnT>
+                    <a:lnB w="6350" cap="flat" cmpd="sng" algn="ctr">
+                      <a:solidFill>
+                        <a:srgbClr val="DDE3EB"/>
+                      </a:solidFill>
+                      <a:prstDash val="solid"/>
+                      <a:round/>
+                      <a:headEnd type="none" w="med" len="med"/>
+                      <a:tailEnd type="none" w="med" len="med"/>
+                    </a:lnB>
+                  </a:tcPr>
+                </a:tc>
+              </a:tr>
+              <a:tr h="292608">
+                <a:tc>
+                  <a:txBody>
+                    <a:bodyPr/>
+                    <a:lstStyle/>
+                    <a:p>
+                      <a:pPr indent="0" marL="0">
+                        <a:buNone/>
+                      </a:pPr>
+                      <a:r>
+                        <a:rPr lang="en-US" sz="950" dirty="0">
+                          <a:solidFill>
+                            <a:srgbClr val="1C2733"/>
+                          </a:solidFill>
+                          <a:latin typeface="Malgun Gothic" pitchFamily="34" charset="0"/>
+                          <a:ea typeface="Malgun Gothic" pitchFamily="34" charset="-122"/>
+                          <a:cs typeface="Malgun Gothic" pitchFamily="34" charset="-120"/>
+                        </a:rPr>
+                        <a:t>설정 일관성</a:t>
+                      </a:r>
+                      <a:endParaRPr lang="en-US" sz="950" dirty="0">
+                        <a:latin typeface="Malgun Gothic" charset="0"/>
+                        <a:ea typeface="Malgun Gothic" charset="0"/>
+                        <a:cs typeface="Malgun Gothic" charset="0"/>
+                      </a:endParaRPr>
+                    </a:p>
+                  </a:txBody>
+                  <a:tcPr marL="50800" marR="50800" marT="25400" marB="25400" anchor="ctr">
+                    <a:lnL w="0" cap="flat" cmpd="sng" algn="ctr">
+                      <a:noFill/>
+                    </a:lnL>
+                    <a:lnR w="0" cap="flat" cmpd="sng" algn="ctr">
+                      <a:noFill/>
+                    </a:lnR>
+                    <a:lnT w="0" cap="flat" cmpd="sng" algn="ctr">
+                      <a:noFill/>
+                    </a:lnT>
+                    <a:lnB w="6350" cap="flat" cmpd="sng" algn="ctr">
+                      <a:solidFill>
+                        <a:srgbClr val="DDE3EB"/>
+                      </a:solidFill>
+                      <a:prstDash val="solid"/>
+                      <a:round/>
+                      <a:headEnd type="none" w="med" len="med"/>
+                      <a:tailEnd type="none" w="med" len="med"/>
+                    </a:lnB>
+                  </a:tcPr>
+                </a:tc>
+                <a:tc>
+                  <a:txBody>
+                    <a:bodyPr/>
+                    <a:lstStyle/>
+                    <a:p>
+                      <a:pPr indent="0" marL="0">
+                        <a:buNone/>
+                      </a:pPr>
+                      <a:r>
+                        <a:rPr lang="en-US" sz="950" dirty="0">
+                          <a:solidFill>
+                            <a:srgbClr val="1C2733"/>
+                          </a:solidFill>
+                          <a:latin typeface="Malgun Gothic" pitchFamily="34" charset="0"/>
+                          <a:ea typeface="Malgun Gothic" pitchFamily="34" charset="-122"/>
+                          <a:cs typeface="Malgun Gothic" pitchFamily="34" charset="-120"/>
+                        </a:rPr>
+                        <a:t>작업자·회차별 편차</a:t>
+                      </a:r>
+                      <a:endParaRPr lang="en-US" sz="950" dirty="0">
+                        <a:latin typeface="Malgun Gothic" charset="0"/>
+                        <a:ea typeface="Malgun Gothic" charset="0"/>
+                        <a:cs typeface="Malgun Gothic" charset="0"/>
+                      </a:endParaRPr>
+                    </a:p>
+                  </a:txBody>
+                  <a:tcPr marL="50800" marR="50800" marT="25400" marB="25400" anchor="ctr">
+                    <a:lnL w="0" cap="flat" cmpd="sng" algn="ctr">
+                      <a:noFill/>
+                    </a:lnL>
+                    <a:lnR w="0" cap="flat" cmpd="sng" algn="ctr">
+                      <a:noFill/>
+                    </a:lnR>
+                    <a:lnT w="0" cap="flat" cmpd="sng" algn="ctr">
+                      <a:noFill/>
+                    </a:lnT>
+                    <a:lnB w="6350" cap="flat" cmpd="sng" algn="ctr">
+                      <a:solidFill>
+                        <a:srgbClr val="DDE3EB"/>
+                      </a:solidFill>
+                      <a:prstDash val="solid"/>
+                      <a:round/>
+                      <a:headEnd type="none" w="med" len="med"/>
+                      <a:tailEnd type="none" w="med" len="med"/>
+                    </a:lnB>
+                  </a:tcPr>
+                </a:tc>
+                <a:tc>
+                  <a:txBody>
+                    <a:bodyPr/>
+                    <a:lstStyle/>
+                    <a:p>
+                      <a:pPr indent="0" marL="0">
+                        <a:buNone/>
+                      </a:pPr>
+                      <a:r>
+                        <a:rPr lang="en-US" sz="950" b="1" dirty="0">
+                          <a:solidFill>
+                            <a:srgbClr val="16305B"/>
+                          </a:solidFill>
+                          <a:latin typeface="Malgun Gothic" pitchFamily="34" charset="0"/>
+                          <a:ea typeface="Malgun Gothic" pitchFamily="34" charset="-122"/>
+                          <a:cs typeface="Malgun Gothic" pitchFamily="34" charset="-120"/>
+                        </a:rPr>
+                        <a:t>전 회차 동일 조건</a:t>
+                      </a:r>
+                      <a:endParaRPr lang="en-US" sz="950" dirty="0">
+                        <a:latin typeface="Malgun Gothic" charset="0"/>
+                        <a:ea typeface="Malgun Gothic" charset="0"/>
+                        <a:cs typeface="Malgun Gothic" charset="0"/>
+                      </a:endParaRPr>
+                    </a:p>
+                  </a:txBody>
+                  <a:tcPr marL="50800" marR="50800" marT="25400" marB="25400" anchor="ctr">
+                    <a:lnL w="0" cap="flat" cmpd="sng" algn="ctr">
+                      <a:noFill/>
+                    </a:lnL>
+                    <a:lnR w="0" cap="flat" cmpd="sng" algn="ctr">
+                      <a:noFill/>
+                    </a:lnR>
+                    <a:lnT w="0" cap="flat" cmpd="sng" algn="ctr">
+                      <a:noFill/>
+                    </a:lnT>
+                    <a:lnB w="6350" cap="flat" cmpd="sng" algn="ctr">
+                      <a:solidFill>
+                        <a:srgbClr val="DDE3EB"/>
+                      </a:solidFill>
+                      <a:prstDash val="solid"/>
+                      <a:round/>
+                      <a:headEnd type="none" w="med" len="med"/>
+                      <a:tailEnd type="none" w="med" len="med"/>
+                    </a:lnB>
+                  </a:tcPr>
+                </a:tc>
+              </a:tr>
+            </a:tbl>
+          </a:graphicData>
+        </a:graphic>
+      </p:graphicFrame>
+      <p:sp>
+        <p:nvSpPr>
+          <p:cNvPr id="33" name="Shape 30"/>
+          <p:cNvSpPr/>
+          <p:nvPr/>
+        </p:nvSpPr>
+        <p:spPr>
+          <a:xfrm>
+            <a:off x="6336792" y="3520440"/>
+            <a:ext cx="5440680" cy="1828800"/>
+          </a:xfrm>
+          <a:prstGeom prst="roundRect">
+            <a:avLst>
+              <a:gd name="adj" fmla="val 3000"/>
+            </a:avLst>
+          </a:prstGeom>
+          <a:solidFill>
+            <a:srgbClr val="FFFFFF"/>
+          </a:solidFill>
+          <a:ln w="9525">
+            <a:solidFill>
+              <a:srgbClr val="DDE3EB"/>
+            </a:solidFill>
+            <a:prstDash val="solid"/>
+          </a:ln>
+          <a:effectLst>
+            <a:outerShdw sx="100000" sy="100000" kx="0" ky="0" algn="bl" rotWithShape="0" blurRad="101600" dist="12700" dir="5400000">
+              <a:srgbClr val="9AA8BC">
+                <a:alpha val="18000"/>
+              </a:srgbClr>
+            </a:outerShdw>
+          </a:effectLst>
+        </p:spPr>
+      </p:sp>
+      <p:sp>
+        <p:nvSpPr>
+          <p:cNvPr id="34" name="Shape 31"/>
+          <p:cNvSpPr/>
+          <p:nvPr/>
+        </p:nvSpPr>
+        <p:spPr>
+          <a:xfrm>
+            <a:off x="6592824" y="3794760"/>
+            <a:ext cx="82296" cy="182880"/>
+          </a:xfrm>
+          <a:prstGeom prst="rect">
+            <a:avLst/>
+          </a:prstGeom>
+          <a:solidFill>
+            <a:srgbClr val="00A3C4"/>
+          </a:solidFill>
+          <a:ln w="12700">
+            <a:solidFill>
+              <a:srgbClr val="00A3C4"/>
+            </a:solidFill>
+            <a:prstDash val="solid"/>
+          </a:ln>
+        </p:spPr>
+      </p:sp>
+      <p:sp>
+        <p:nvSpPr>
+          <p:cNvPr id="35" name="Text 32"/>
+          <p:cNvSpPr txBox="1"/>
+          <p:nvPr/>
+        </p:nvSpPr>
+        <p:spPr>
+          <a:xfrm>
+            <a:off x="6757416" y="3703320"/>
+            <a:ext cx="4480560" cy="365760"/>
+          </a:xfrm>
+          <a:prstGeom prst="rect">
+            <a:avLst/>
+          </a:prstGeom>
+          <a:noFill/>
+          <a:ln/>
+        </p:spPr>
+        <p:txBody>
+          <a:bodyPr wrap="square" lIns="0" tIns="0" rIns="0" bIns="0" rtlCol="0" anchor="ctr"/>
+          <a:lstStyle/>
+          <a:p>
+            <a:pPr indent="0" marL="0">
+              <a:buNone/>
+            </a:pPr>
+            <a:r>
+              <a:rPr lang="en-US" sz="1300" b="1" dirty="0">
+                <a:solidFill>
+                  <a:srgbClr val="16305B"/>
+                </a:solidFill>
+                <a:latin typeface="Malgun Gothic" pitchFamily="34" charset="0"/>
+                <a:ea typeface="Malgun Gothic" pitchFamily="34" charset="-122"/>
+                <a:cs typeface="Malgun Gothic" pitchFamily="34" charset="-120"/>
+              </a:rPr>
+              <a:t>측정 항목 및 결과 출력</a:t>
+            </a:r>
+            <a:endParaRPr lang="en-US" sz="1300" dirty="0"/>
+          </a:p>
+        </p:txBody>
+      </p:sp>
+      <p:graphicFrame>
+        <p:nvGraphicFramePr>
+          <p:cNvPr id="21" name="Table 1"/>
+          <p:cNvGraphicFramePr>
+            <a:graphicFrameLocks noGrp="1"/>
+          </p:cNvGraphicFramePr>
+          <p:nvPr>
+            <p:extLst>
+              <p:ext uri="{D42A27DB-BD31-4B8C-83A1-F6EECF244321}">
+                <p14:modId xmlns:p14="http://schemas.microsoft.com/office/powerpoint/2010/main" val="1579011935"/>
+              </p:ext>
+            </p:extLst>
+          </p:nvPr>
+        </p:nvGraphicFramePr>
+        <p:xfrm>
+          <a:off x="6647688" y="4123944"/>
+          <a:ext cx="4846320" cy="914400"/>
+        </p:xfrm>
+        <a:graphic>
+          <a:graphicData uri="http://schemas.openxmlformats.org/drawingml/2006/table">
+            <a:tbl>
+              <a:tblPr/>
+              <a:tblGrid>
+                <a:gridCol w="1737360"/>
+                <a:gridCol w="1554480"/>
+                <a:gridCol w="1554480"/>
+              </a:tblGrid>
+              <a:tr h="237744">
+                <a:tc>
+                  <a:txBody>
+                    <a:bodyPr/>
+                    <a:lstStyle/>
+                    <a:p>
+                      <a:pPr indent="0" marL="0">
+                        <a:buNone/>
+                      </a:pPr>
+                      <a:r>
+                        <a:rPr lang="en-US" sz="900" b="1" dirty="0">
+                          <a:solidFill>
+                            <a:srgbClr val="16305B"/>
+                          </a:solidFill>
+                          <a:latin typeface="Malgun Gothic" pitchFamily="34" charset="0"/>
+                          <a:ea typeface="Malgun Gothic" pitchFamily="34" charset="-122"/>
+                          <a:cs typeface="Malgun Gothic" pitchFamily="34" charset="-120"/>
+                        </a:rPr>
+                        <a:t>측정 대상</a:t>
+                      </a:r>
+                      <a:endParaRPr lang="en-US" sz="900" dirty="0">
+                        <a:latin typeface="Malgun Gothic" charset="0"/>
+                        <a:ea typeface="Malgun Gothic" charset="0"/>
+                        <a:cs typeface="Malgun Gothic" charset="0"/>
+                      </a:endParaRPr>
+                    </a:p>
+                  </a:txBody>
+                  <a:tcPr marL="50800" marR="50800" marT="25400" marB="25400" anchor="ctr">
+                    <a:lnL w="0" cap="flat" cmpd="sng" algn="ctr">
+                      <a:noFill/>
+                    </a:lnL>
+                    <a:lnR w="0" cap="flat" cmpd="sng" algn="ctr">
+                      <a:noFill/>
+                    </a:lnR>
+                    <a:lnT w="0" cap="flat" cmpd="sng" algn="ctr">
+                      <a:noFill/>
+                    </a:lnT>
+                    <a:lnB w="6350" cap="flat" cmpd="sng" algn="ctr">
+                      <a:solidFill>
+                        <a:srgbClr val="DDE3EB"/>
+                      </a:solidFill>
+                      <a:prstDash val="solid"/>
+                      <a:round/>
+                      <a:headEnd type="none" w="med" len="med"/>
+                      <a:tailEnd type="none" w="med" len="med"/>
+                    </a:lnB>
+                    <a:solidFill>
+                      <a:srgbClr val="EEF2F7"/>
+                    </a:solidFill>
+                  </a:tcPr>
+                </a:tc>
+                <a:tc>
+                  <a:txBody>
+                    <a:bodyPr/>
+                    <a:lstStyle/>
+                    <a:p>
+                      <a:pPr indent="0" marL="0">
+                        <a:buNone/>
+                      </a:pPr>
+                      <a:r>
+                        <a:rPr lang="en-US" sz="900" b="1" dirty="0">
+                          <a:solidFill>
+                            <a:srgbClr val="16305B"/>
+                          </a:solidFill>
+                          <a:latin typeface="Malgun Gothic" pitchFamily="34" charset="0"/>
+                          <a:ea typeface="Malgun Gothic" pitchFamily="34" charset="-122"/>
+                          <a:cs typeface="Malgun Gothic" pitchFamily="34" charset="-120"/>
+                        </a:rPr>
+                        <a:t>항목</a:t>
+                      </a:r>
+                      <a:endParaRPr lang="en-US" sz="900" dirty="0">
+                        <a:latin typeface="Malgun Gothic" charset="0"/>
+                        <a:ea typeface="Malgun Gothic" charset="0"/>
+                        <a:cs typeface="Malgun Gothic" charset="0"/>
+                      </a:endParaRPr>
+                    </a:p>
+                  </a:txBody>
+                  <a:tcPr marL="50800" marR="50800" marT="25400" marB="25400" anchor="ctr">
+                    <a:lnL w="0" cap="flat" cmpd="sng" algn="ctr">
+                      <a:noFill/>
+                    </a:lnL>
+                    <a:lnR w="0" cap="flat" cmpd="sng" algn="ctr">
+                      <a:noFill/>
+                    </a:lnR>
+                    <a:lnT w="0" cap="flat" cmpd="sng" algn="ctr">
+                      <a:noFill/>
+                    </a:lnT>
+                    <a:lnB w="6350" cap="flat" cmpd="sng" algn="ctr">
+                      <a:solidFill>
+                        <a:srgbClr val="DDE3EB"/>
+                      </a:solidFill>
+                      <a:prstDash val="solid"/>
+                      <a:round/>
+                      <a:headEnd type="none" w="med" len="med"/>
+                      <a:tailEnd type="none" w="med" len="med"/>
+                    </a:lnB>
+                    <a:solidFill>
+                      <a:srgbClr val="EEF2F7"/>
+                    </a:solidFill>
+                  </a:tcPr>
+                </a:tc>
+                <a:tc>
+                  <a:txBody>
+                    <a:bodyPr/>
+                    <a:lstStyle/>
+                    <a:p>
+                      <a:pPr indent="0" marL="0">
+                        <a:buNone/>
+                      </a:pPr>
+                      <a:r>
+                        <a:rPr lang="en-US" sz="900" b="1" dirty="0">
+                          <a:solidFill>
+                            <a:srgbClr val="16305B"/>
+                          </a:solidFill>
+                          <a:latin typeface="Malgun Gothic" pitchFamily="34" charset="0"/>
+                          <a:ea typeface="Malgun Gothic" pitchFamily="34" charset="-122"/>
+                          <a:cs typeface="Malgun Gothic" pitchFamily="34" charset="-120"/>
+                        </a:rPr>
+                        <a:t>개수</a:t>
+                      </a:r>
+                      <a:endParaRPr lang="en-US" sz="900" dirty="0">
+                        <a:latin typeface="Malgun Gothic" charset="0"/>
+                        <a:ea typeface="Malgun Gothic" charset="0"/>
+                        <a:cs typeface="Malgun Gothic" charset="0"/>
+                      </a:endParaRPr>
+                    </a:p>
+                  </a:txBody>
+                  <a:tcPr marL="50800" marR="50800" marT="25400" marB="25400" anchor="ctr">
+                    <a:lnL w="0" cap="flat" cmpd="sng" algn="ctr">
+                      <a:noFill/>
+                    </a:lnL>
+                    <a:lnR w="0" cap="flat" cmpd="sng" algn="ctr">
+                      <a:noFill/>
+                    </a:lnR>
+                    <a:lnT w="0" cap="flat" cmpd="sng" algn="ctr">
+                      <a:noFill/>
+                    </a:lnT>
+                    <a:lnB w="6350" cap="flat" cmpd="sng" algn="ctr">
+                      <a:solidFill>
+                        <a:srgbClr val="DDE3EB"/>
+                      </a:solidFill>
+                      <a:prstDash val="solid"/>
+                      <a:round/>
+                      <a:headEnd type="none" w="med" len="med"/>
+                      <a:tailEnd type="none" w="med" len="med"/>
+                    </a:lnB>
+                    <a:solidFill>
+                      <a:srgbClr val="EEF2F7"/>
+                    </a:solidFill>
+                  </a:tcPr>
+                </a:tc>
+              </a:tr>
+              <a:tr h="237744">
+                <a:tc>
+                  <a:txBody>
+                    <a:bodyPr/>
+                    <a:lstStyle/>
+                    <a:p>
+                      <a:pPr indent="0" marL="0">
+                        <a:buNone/>
+                      </a:pPr>
+                      <a:r>
+                        <a:rPr lang="en-US" sz="900" dirty="0">
+                          <a:solidFill>
+                            <a:srgbClr val="1C2733"/>
+                          </a:solidFill>
+                          <a:latin typeface="Malgun Gothic" pitchFamily="34" charset="0"/>
+                          <a:ea typeface="Malgun Gothic" pitchFamily="34" charset="-122"/>
+                          <a:cs typeface="Malgun Gothic" pitchFamily="34" charset="-120"/>
+                        </a:rPr>
+                        <a:t>발열원</a:t>
+                      </a:r>
+                      <a:endParaRPr lang="en-US" sz="900" dirty="0">
+                        <a:latin typeface="Malgun Gothic" charset="0"/>
+                        <a:ea typeface="Malgun Gothic" charset="0"/>
+                        <a:cs typeface="Malgun Gothic" charset="0"/>
+                      </a:endParaRPr>
+                    </a:p>
+                  </a:txBody>
+                  <a:tcPr marL="50800" marR="50800" marT="25400" marB="25400" anchor="ctr">
+                    <a:lnL w="0" cap="flat" cmpd="sng" algn="ctr">
+                      <a:noFill/>
+                    </a:lnL>
+                    <a:lnR w="0" cap="flat" cmpd="sng" algn="ctr">
+                      <a:noFill/>
+                    </a:lnR>
+                    <a:lnT w="0" cap="flat" cmpd="sng" algn="ctr">
+                      <a:noFill/>
+                    </a:lnT>
+                    <a:lnB w="6350" cap="flat" cmpd="sng" algn="ctr">
+                      <a:solidFill>
+                        <a:srgbClr val="DDE3EB"/>
+                      </a:solidFill>
+                      <a:prstDash val="solid"/>
+                      <a:round/>
+                      <a:headEnd type="none" w="med" len="med"/>
+                      <a:tailEnd type="none" w="med" len="med"/>
+                    </a:lnB>
+                  </a:tcPr>
+                </a:tc>
+                <a:tc>
+                  <a:txBody>
+                    <a:bodyPr/>
+                    <a:lstStyle/>
+                    <a:p>
+                      <a:pPr indent="0" marL="0">
+                        <a:buNone/>
+                      </a:pPr>
+                      <a:r>
+                        <a:rPr lang="en-US" sz="900" dirty="0">
+                          <a:solidFill>
+                            <a:srgbClr val="1C2733"/>
+                          </a:solidFill>
+                          <a:latin typeface="Malgun Gothic" pitchFamily="34" charset="0"/>
+                          <a:ea typeface="Malgun Gothic" pitchFamily="34" charset="-122"/>
+                          <a:cs typeface="Malgun Gothic" pitchFamily="34" charset="-120"/>
+                        </a:rPr>
+                        <a:t>최고 · 평균 온도</a:t>
+                      </a:r>
+                      <a:endParaRPr lang="en-US" sz="900" dirty="0">
+                        <a:latin typeface="Malgun Gothic" charset="0"/>
+                        <a:ea typeface="Malgun Gothic" charset="0"/>
+                        <a:cs typeface="Malgun Gothic" charset="0"/>
+                      </a:endParaRPr>
+                    </a:p>
+                  </a:txBody>
+                  <a:tcPr marL="50800" marR="50800" marT="25400" marB="25400" anchor="ctr">
+                    <a:lnL w="0" cap="flat" cmpd="sng" algn="ctr">
+                      <a:noFill/>
+                    </a:lnL>
+                    <a:lnR w="0" cap="flat" cmpd="sng" algn="ctr">
+                      <a:noFill/>
+                    </a:lnR>
+                    <a:lnT w="0" cap="flat" cmpd="sng" algn="ctr">
+                      <a:noFill/>
+                    </a:lnT>
+                    <a:lnB w="6350" cap="flat" cmpd="sng" algn="ctr">
+                      <a:solidFill>
+                        <a:srgbClr val="DDE3EB"/>
+                      </a:solidFill>
+                      <a:prstDash val="solid"/>
+                      <a:round/>
+                      <a:headEnd type="none" w="med" len="med"/>
+                      <a:tailEnd type="none" w="med" len="med"/>
+                    </a:lnB>
+                  </a:tcPr>
+                </a:tc>
+                <a:tc>
+                  <a:txBody>
+                    <a:bodyPr/>
+                    <a:lstStyle/>
+                    <a:p>
+                      <a:pPr indent="0" marL="0">
+                        <a:buNone/>
+                      </a:pPr>
+                      <a:r>
+                        <a:rPr lang="en-US" sz="900" dirty="0">
+                          <a:solidFill>
+                            <a:srgbClr val="1C2733"/>
+                          </a:solidFill>
+                          <a:latin typeface="Malgun Gothic" pitchFamily="34" charset="0"/>
+                          <a:ea typeface="Malgun Gothic" pitchFamily="34" charset="-122"/>
+                          <a:cs typeface="Malgun Gothic" pitchFamily="34" charset="-120"/>
+                        </a:rPr>
+                        <a:t>9</a:t>
+                      </a:r>
+                      <a:endParaRPr lang="en-US" sz="900" dirty="0">
+                        <a:latin typeface="Malgun Gothic" charset="0"/>
+                        <a:ea typeface="Malgun Gothic" charset="0"/>
+                        <a:cs typeface="Malgun Gothic" charset="0"/>
+                      </a:endParaRPr>
+                    </a:p>
+                  </a:txBody>
+                  <a:tcPr marL="50800" marR="50800" marT="25400" marB="25400" anchor="ctr">
+                    <a:lnL w="0" cap="flat" cmpd="sng" algn="ctr">
+                      <a:noFill/>
+                    </a:lnL>
+                    <a:lnR w="0" cap="flat" cmpd="sng" algn="ctr">
+                      <a:noFill/>
+                    </a:lnR>
+                    <a:lnT w="0" cap="flat" cmpd="sng" algn="ctr">
+                      <a:noFill/>
+                    </a:lnT>
+                    <a:lnB w="6350" cap="flat" cmpd="sng" algn="ctr">
+                      <a:solidFill>
+                        <a:srgbClr val="DDE3EB"/>
+                      </a:solidFill>
+                      <a:prstDash val="solid"/>
+                      <a:round/>
+                      <a:headEnd type="none" w="med" len="med"/>
+                      <a:tailEnd type="none" w="med" len="med"/>
+                    </a:lnB>
+                  </a:tcPr>
+                </a:tc>
+              </a:tr>
+              <a:tr h="237744">
+                <a:tc>
+                  <a:txBody>
+                    <a:bodyPr/>
+                    <a:lstStyle/>
+                    <a:p>
+                      <a:pPr indent="0" marL="0">
+                        <a:buNone/>
+                      </a:pPr>
+                      <a:r>
+                        <a:rPr lang="en-US" sz="900" dirty="0">
+                          <a:solidFill>
+                            <a:srgbClr val="1C2733"/>
+                          </a:solidFill>
+                          <a:latin typeface="Malgun Gothic" pitchFamily="34" charset="0"/>
+                          <a:ea typeface="Malgun Gothic" pitchFamily="34" charset="-122"/>
+                          <a:cs typeface="Malgun Gothic" pitchFamily="34" charset="-120"/>
+                        </a:rPr>
+                        <a:t>팬 통과면</a:t>
+                      </a:r>
+                      <a:endParaRPr lang="en-US" sz="900" dirty="0">
+                        <a:latin typeface="Malgun Gothic" charset="0"/>
+                        <a:ea typeface="Malgun Gothic" charset="0"/>
+                        <a:cs typeface="Malgun Gothic" charset="0"/>
+                      </a:endParaRPr>
+                    </a:p>
+                  </a:txBody>
+                  <a:tcPr marL="50800" marR="50800" marT="25400" marB="25400" anchor="ctr">
+                    <a:lnL w="0" cap="flat" cmpd="sng" algn="ctr">
+                      <a:noFill/>
+                    </a:lnL>
+                    <a:lnR w="0" cap="flat" cmpd="sng" algn="ctr">
+                      <a:noFill/>
+                    </a:lnR>
+                    <a:lnT w="0" cap="flat" cmpd="sng" algn="ctr">
+                      <a:noFill/>
+                    </a:lnT>
+                    <a:lnB w="6350" cap="flat" cmpd="sng" algn="ctr">
+                      <a:solidFill>
+                        <a:srgbClr val="DDE3EB"/>
+                      </a:solidFill>
+                      <a:prstDash val="solid"/>
+                      <a:round/>
+                      <a:headEnd type="none" w="med" len="med"/>
+                      <a:tailEnd type="none" w="med" len="med"/>
+                    </a:lnB>
+                  </a:tcPr>
+                </a:tc>
+                <a:tc>
+                  <a:txBody>
+                    <a:bodyPr/>
+                    <a:lstStyle/>
+                    <a:p>
+                      <a:pPr indent="0" marL="0">
+                        <a:buNone/>
+                      </a:pPr>
+                      <a:r>
+                        <a:rPr lang="en-US" sz="900" dirty="0">
+                          <a:solidFill>
+                            <a:srgbClr val="1C2733"/>
+                          </a:solidFill>
+                          <a:latin typeface="Malgun Gothic" pitchFamily="34" charset="0"/>
+                          <a:ea typeface="Malgun Gothic" pitchFamily="34" charset="-122"/>
+                          <a:cs typeface="Malgun Gothic" pitchFamily="34" charset="-120"/>
+                        </a:rPr>
+                        <a:t>차압</a:t>
+                      </a:r>
+                      <a:endParaRPr lang="en-US" sz="900" dirty="0">
+                        <a:latin typeface="Malgun Gothic" charset="0"/>
+                        <a:ea typeface="Malgun Gothic" charset="0"/>
+                        <a:cs typeface="Malgun Gothic" charset="0"/>
+                      </a:endParaRPr>
+                    </a:p>
+                  </a:txBody>
+                  <a:tcPr marL="50800" marR="50800" marT="25400" marB="25400" anchor="ctr">
+                    <a:lnL w="0" cap="flat" cmpd="sng" algn="ctr">
+                      <a:noFill/>
+                    </a:lnL>
+                    <a:lnR w="0" cap="flat" cmpd="sng" algn="ctr">
+                      <a:noFill/>
+                    </a:lnR>
+                    <a:lnT w="0" cap="flat" cmpd="sng" algn="ctr">
+                      <a:noFill/>
+                    </a:lnT>
+                    <a:lnB w="6350" cap="flat" cmpd="sng" algn="ctr">
+                      <a:solidFill>
+                        <a:srgbClr val="DDE3EB"/>
+                      </a:solidFill>
+                      <a:prstDash val="solid"/>
+                      <a:round/>
+                      <a:headEnd type="none" w="med" len="med"/>
+                      <a:tailEnd type="none" w="med" len="med"/>
+                    </a:lnB>
+                  </a:tcPr>
+                </a:tc>
+                <a:tc>
+                  <a:txBody>
+                    <a:bodyPr/>
+                    <a:lstStyle/>
+                    <a:p>
+                      <a:pPr indent="0" marL="0">
+                        <a:buNone/>
+                      </a:pPr>
+                      <a:r>
+                        <a:rPr lang="en-US" sz="900" dirty="0">
+                          <a:solidFill>
+                            <a:srgbClr val="1C2733"/>
+                          </a:solidFill>
+                          <a:latin typeface="Malgun Gothic" pitchFamily="34" charset="0"/>
+                          <a:ea typeface="Malgun Gothic" pitchFamily="34" charset="-122"/>
+                          <a:cs typeface="Malgun Gothic" pitchFamily="34" charset="-120"/>
+                        </a:rPr>
+                        <a:t>1</a:t>
+                      </a:r>
+                      <a:endParaRPr lang="en-US" sz="900" dirty="0">
+                        <a:latin typeface="Malgun Gothic" charset="0"/>
+                        <a:ea typeface="Malgun Gothic" charset="0"/>
+                        <a:cs typeface="Malgun Gothic" charset="0"/>
+                      </a:endParaRPr>
+                    </a:p>
+                  </a:txBody>
+                  <a:tcPr marL="50800" marR="50800" marT="25400" marB="25400" anchor="ctr">
+                    <a:lnL w="0" cap="flat" cmpd="sng" algn="ctr">
+                      <a:noFill/>
+                    </a:lnL>
+                    <a:lnR w="0" cap="flat" cmpd="sng" algn="ctr">
+                      <a:noFill/>
+                    </a:lnR>
+                    <a:lnT w="0" cap="flat" cmpd="sng" algn="ctr">
+                      <a:noFill/>
+                    </a:lnT>
+                    <a:lnB w="6350" cap="flat" cmpd="sng" algn="ctr">
+                      <a:solidFill>
+                        <a:srgbClr val="DDE3EB"/>
+                      </a:solidFill>
+                      <a:prstDash val="solid"/>
+                      <a:round/>
+                      <a:headEnd type="none" w="med" len="med"/>
+                      <a:tailEnd type="none" w="med" len="med"/>
+                    </a:lnB>
+                  </a:tcPr>
+                </a:tc>
+              </a:tr>
+              <a:tr h="237744">
+                <a:tc>
+                  <a:txBody>
+                    <a:bodyPr/>
+                    <a:lstStyle/>
+                    <a:p>
+                      <a:pPr indent="0" marL="0">
+                        <a:buNone/>
+                      </a:pPr>
+                      <a:r>
+                        <a:rPr lang="en-US" sz="900" dirty="0">
+                          <a:solidFill>
+                            <a:srgbClr val="1C2733"/>
+                          </a:solidFill>
+                          <a:latin typeface="Malgun Gothic" pitchFamily="34" charset="0"/>
+                          <a:ea typeface="Malgun Gothic" pitchFamily="34" charset="-122"/>
+                          <a:cs typeface="Malgun Gothic" pitchFamily="34" charset="-120"/>
+                        </a:rPr>
+                        <a:t>1·2차 통과 유로</a:t>
+                      </a:r>
+                      <a:endParaRPr lang="en-US" sz="900" dirty="0">
+                        <a:latin typeface="Malgun Gothic" charset="0"/>
+                        <a:ea typeface="Malgun Gothic" charset="0"/>
+                        <a:cs typeface="Malgun Gothic" charset="0"/>
+                      </a:endParaRPr>
+                    </a:p>
+                  </a:txBody>
+                  <a:tcPr marL="50800" marR="50800" marT="25400" marB="25400" anchor="ctr">
+                    <a:lnL w="0" cap="flat" cmpd="sng" algn="ctr">
+                      <a:noFill/>
+                    </a:lnL>
+                    <a:lnR w="0" cap="flat" cmpd="sng" algn="ctr">
+                      <a:noFill/>
+                    </a:lnR>
+                    <a:lnT w="0" cap="flat" cmpd="sng" algn="ctr">
+                      <a:noFill/>
+                    </a:lnT>
+                    <a:lnB w="6350" cap="flat" cmpd="sng" algn="ctr">
+                      <a:solidFill>
+                        <a:srgbClr val="DDE3EB"/>
+                      </a:solidFill>
+                      <a:prstDash val="solid"/>
+                      <a:round/>
+                      <a:headEnd type="none" w="med" len="med"/>
+                      <a:tailEnd type="none" w="med" len="med"/>
+                    </a:lnB>
+                  </a:tcPr>
+                </a:tc>
+                <a:tc>
+                  <a:txBody>
+                    <a:bodyPr/>
+                    <a:lstStyle/>
+                    <a:p>
+                      <a:pPr indent="0" marL="0">
+                        <a:buNone/>
+                      </a:pPr>
+                      <a:r>
+                        <a:rPr lang="en-US" sz="900" dirty="0">
+                          <a:solidFill>
+                            <a:srgbClr val="1C2733"/>
+                          </a:solidFill>
+                          <a:latin typeface="Malgun Gothic" pitchFamily="34" charset="0"/>
+                          <a:ea typeface="Malgun Gothic" pitchFamily="34" charset="-122"/>
+                          <a:cs typeface="Malgun Gothic" pitchFamily="34" charset="-120"/>
+                        </a:rPr>
+                        <a:t>유량</a:t>
+                      </a:r>
+                      <a:endParaRPr lang="en-US" sz="900" dirty="0">
+                        <a:latin typeface="Malgun Gothic" charset="0"/>
+                        <a:ea typeface="Malgun Gothic" charset="0"/>
+                        <a:cs typeface="Malgun Gothic" charset="0"/>
+                      </a:endParaRPr>
+                    </a:p>
+                  </a:txBody>
+                  <a:tcPr marL="50800" marR="50800" marT="25400" marB="25400" anchor="ctr">
+                    <a:lnL w="0" cap="flat" cmpd="sng" algn="ctr">
+                      <a:noFill/>
+                    </a:lnL>
+                    <a:lnR w="0" cap="flat" cmpd="sng" algn="ctr">
+                      <a:noFill/>
+                    </a:lnR>
+                    <a:lnT w="0" cap="flat" cmpd="sng" algn="ctr">
+                      <a:noFill/>
+                    </a:lnT>
+                    <a:lnB w="6350" cap="flat" cmpd="sng" algn="ctr">
+                      <a:solidFill>
+                        <a:srgbClr val="DDE3EB"/>
+                      </a:solidFill>
+                      <a:prstDash val="solid"/>
+                      <a:round/>
+                      <a:headEnd type="none" w="med" len="med"/>
+                      <a:tailEnd type="none" w="med" len="med"/>
+                    </a:lnB>
+                  </a:tcPr>
+                </a:tc>
+                <a:tc>
+                  <a:txBody>
+                    <a:bodyPr/>
+                    <a:lstStyle/>
+                    <a:p>
+                      <a:pPr indent="0" marL="0">
+                        <a:buNone/>
+                      </a:pPr>
+                      <a:r>
+                        <a:rPr lang="en-US" sz="900" dirty="0">
+                          <a:solidFill>
+                            <a:srgbClr val="1C2733"/>
+                          </a:solidFill>
+                          <a:latin typeface="Malgun Gothic" pitchFamily="34" charset="0"/>
+                          <a:ea typeface="Malgun Gothic" pitchFamily="34" charset="-122"/>
+                          <a:cs typeface="Malgun Gothic" pitchFamily="34" charset="-120"/>
+                        </a:rPr>
+                        <a:t>각 핀 개수 + 1</a:t>
+                      </a:r>
+                      <a:endParaRPr lang="en-US" sz="900" dirty="0">
+                        <a:latin typeface="Malgun Gothic" charset="0"/>
+                        <a:ea typeface="Malgun Gothic" charset="0"/>
+                        <a:cs typeface="Malgun Gothic" charset="0"/>
+                      </a:endParaRPr>
+                    </a:p>
+                  </a:txBody>
+                  <a:tcPr marL="50800" marR="50800" marT="25400" marB="25400" anchor="ctr">
+                    <a:lnL w="0" cap="flat" cmpd="sng" algn="ctr">
+                      <a:noFill/>
+                    </a:lnL>
+                    <a:lnR w="0" cap="flat" cmpd="sng" algn="ctr">
+                      <a:noFill/>
+                    </a:lnR>
+                    <a:lnT w="0" cap="flat" cmpd="sng" algn="ctr">
+                      <a:noFill/>
+                    </a:lnT>
+                    <a:lnB w="6350" cap="flat" cmpd="sng" algn="ctr">
+                      <a:solidFill>
+                        <a:srgbClr val="DDE3EB"/>
+                      </a:solidFill>
+                      <a:prstDash val="solid"/>
+                      <a:round/>
+                      <a:headEnd type="none" w="med" len="med"/>
+                      <a:tailEnd type="none" w="med" len="med"/>
+                    </a:lnB>
+                  </a:tcPr>
+                </a:tc>
+              </a:tr>
+              <a:tr h="237744">
+                <a:tc>
+                  <a:txBody>
+                    <a:bodyPr/>
+                    <a:lstStyle/>
+                    <a:p>
+                      <a:pPr indent="0" marL="0">
+                        <a:buNone/>
+                      </a:pPr>
+                      <a:r>
+                        <a:rPr lang="en-US" sz="900" dirty="0">
+                          <a:solidFill>
+                            <a:srgbClr val="1C2733"/>
+                          </a:solidFill>
+                          <a:latin typeface="Malgun Gothic" pitchFamily="34" charset="0"/>
+                          <a:ea typeface="Malgun Gothic" pitchFamily="34" charset="-122"/>
+                          <a:cs typeface="Malgun Gothic" pitchFamily="34" charset="-120"/>
+                        </a:rPr>
+                        <a:t>전원모듈 분기 입구</a:t>
+                      </a:r>
+                      <a:endParaRPr lang="en-US" sz="900" dirty="0">
+                        <a:latin typeface="Malgun Gothic" charset="0"/>
+                        <a:ea typeface="Malgun Gothic" charset="0"/>
+                        <a:cs typeface="Malgun Gothic" charset="0"/>
+                      </a:endParaRPr>
+                    </a:p>
+                  </a:txBody>
+                  <a:tcPr marL="50800" marR="50800" marT="25400" marB="25400" anchor="ctr">
+                    <a:lnL w="0" cap="flat" cmpd="sng" algn="ctr">
+                      <a:noFill/>
+                    </a:lnL>
+                    <a:lnR w="0" cap="flat" cmpd="sng" algn="ctr">
+                      <a:noFill/>
+                    </a:lnR>
+                    <a:lnT w="0" cap="flat" cmpd="sng" algn="ctr">
+                      <a:noFill/>
+                    </a:lnT>
+                    <a:lnB w="6350" cap="flat" cmpd="sng" algn="ctr">
+                      <a:solidFill>
+                        <a:srgbClr val="DDE3EB"/>
+                      </a:solidFill>
+                      <a:prstDash val="solid"/>
+                      <a:round/>
+                      <a:headEnd type="none" w="med" len="med"/>
+                      <a:tailEnd type="none" w="med" len="med"/>
+                    </a:lnB>
+                  </a:tcPr>
+                </a:tc>
+                <a:tc>
+                  <a:txBody>
+                    <a:bodyPr/>
+                    <a:lstStyle/>
+                    <a:p>
+                      <a:pPr indent="0" marL="0">
+                        <a:buNone/>
+                      </a:pPr>
+                      <a:r>
+                        <a:rPr lang="en-US" sz="900" dirty="0">
+                          <a:solidFill>
+                            <a:srgbClr val="1C2733"/>
+                          </a:solidFill>
+                          <a:latin typeface="Malgun Gothic" pitchFamily="34" charset="0"/>
+                          <a:ea typeface="Malgun Gothic" pitchFamily="34" charset="-122"/>
+                          <a:cs typeface="Malgun Gothic" pitchFamily="34" charset="-120"/>
+                        </a:rPr>
+                        <a:t>유량</a:t>
+                      </a:r>
+                      <a:endParaRPr lang="en-US" sz="900" dirty="0">
+                        <a:latin typeface="Malgun Gothic" charset="0"/>
+                        <a:ea typeface="Malgun Gothic" charset="0"/>
+                        <a:cs typeface="Malgun Gothic" charset="0"/>
+                      </a:endParaRPr>
+                    </a:p>
+                  </a:txBody>
+                  <a:tcPr marL="50800" marR="50800" marT="25400" marB="25400" anchor="ctr">
+                    <a:lnL w="0" cap="flat" cmpd="sng" algn="ctr">
+                      <a:noFill/>
+                    </a:lnL>
+                    <a:lnR w="0" cap="flat" cmpd="sng" algn="ctr">
+                      <a:noFill/>
+                    </a:lnR>
+                    <a:lnT w="0" cap="flat" cmpd="sng" algn="ctr">
+                      <a:noFill/>
+                    </a:lnT>
+                    <a:lnB w="6350" cap="flat" cmpd="sng" algn="ctr">
+                      <a:solidFill>
+                        <a:srgbClr val="DDE3EB"/>
+                      </a:solidFill>
+                      <a:prstDash val="solid"/>
+                      <a:round/>
+                      <a:headEnd type="none" w="med" len="med"/>
+                      <a:tailEnd type="none" w="med" len="med"/>
+                    </a:lnB>
+                  </a:tcPr>
+                </a:tc>
+                <a:tc>
+                  <a:txBody>
+                    <a:bodyPr/>
+                    <a:lstStyle/>
+                    <a:p>
+                      <a:pPr indent="0" marL="0">
+                        <a:buNone/>
+                      </a:pPr>
+                      <a:r>
+                        <a:rPr lang="en-US" sz="900" dirty="0">
+                          <a:solidFill>
+                            <a:srgbClr val="1C2733"/>
+                          </a:solidFill>
+                          <a:latin typeface="Malgun Gothic" pitchFamily="34" charset="0"/>
+                          <a:ea typeface="Malgun Gothic" pitchFamily="34" charset="-122"/>
+                          <a:cs typeface="Malgun Gothic" pitchFamily="34" charset="-120"/>
+                        </a:rPr>
+                        <a:t>1</a:t>
+                      </a:r>
+                      <a:endParaRPr lang="en-US" sz="900" dirty="0">
+                        <a:latin typeface="Malgun Gothic" charset="0"/>
+                        <a:ea typeface="Malgun Gothic" charset="0"/>
+                        <a:cs typeface="Malgun Gothic" charset="0"/>
+                      </a:endParaRPr>
+                    </a:p>
+                  </a:txBody>
+                  <a:tcPr marL="50800" marR="50800" marT="25400" marB="25400" anchor="ctr">
+                    <a:lnL w="0" cap="flat" cmpd="sng" algn="ctr">
+                      <a:noFill/>
+                    </a:lnL>
+                    <a:lnR w="0" cap="flat" cmpd="sng" algn="ctr">
+                      <a:noFill/>
+                    </a:lnR>
+                    <a:lnT w="0" cap="flat" cmpd="sng" algn="ctr">
+                      <a:noFill/>
+                    </a:lnT>
+                    <a:lnB w="6350" cap="flat" cmpd="sng" algn="ctr">
+                      <a:solidFill>
+                        <a:srgbClr val="DDE3EB"/>
+                      </a:solidFill>
+                      <a:prstDash val="solid"/>
+                      <a:round/>
+                      <a:headEnd type="none" w="med" len="med"/>
+                      <a:tailEnd type="none" w="med" len="med"/>
+                    </a:lnB>
+                  </a:tcPr>
+                </a:tc>
+              </a:tr>
+            </a:tbl>
+          </a:graphicData>
+        </a:graphic>
+      </p:graphicFrame>
+      <p:sp>
+        <p:nvSpPr>
+          <p:cNvPr id="37" name="Shape 33"/>
+          <p:cNvSpPr/>
+          <p:nvPr/>
+        </p:nvSpPr>
+        <p:spPr>
+          <a:xfrm>
+            <a:off x="502920" y="5541264"/>
+            <a:ext cx="11183112" cy="841248"/>
+          </a:xfrm>
+          <a:prstGeom prst="roundRect">
+            <a:avLst>
+              <a:gd name="adj" fmla="val 6522"/>
+            </a:avLst>
+          </a:prstGeom>
+          <a:solidFill>
+            <a:srgbClr val="FFFFFF"/>
+          </a:solidFill>
+          <a:ln w="9525">
+            <a:solidFill>
+              <a:srgbClr val="DDE3EB"/>
+            </a:solidFill>
+            <a:prstDash val="solid"/>
+          </a:ln>
+          <a:effectLst>
+            <a:outerShdw sx="100000" sy="100000" kx="0" ky="0" algn="bl" rotWithShape="0" blurRad="101600" dist="12700" dir="5400000">
+              <a:srgbClr val="9AA8BC">
+                <a:alpha val="18000"/>
+              </a:srgbClr>
+            </a:outerShdw>
+          </a:effectLst>
+        </p:spPr>
+      </p:sp>
+      <p:sp>
+        <p:nvSpPr>
+          <p:cNvPr id="38" name="Shape 34"/>
+          <p:cNvSpPr/>
+          <p:nvPr/>
+        </p:nvSpPr>
+        <p:spPr>
+          <a:xfrm>
+            <a:off x="832104" y="5724144"/>
+            <a:ext cx="64008" cy="164592"/>
+          </a:xfrm>
+          <a:prstGeom prst="rect">
+            <a:avLst/>
+          </a:prstGeom>
+          <a:solidFill>
+            <a:srgbClr val="00A3C4"/>
+          </a:solidFill>
+          <a:ln w="12700">
+            <a:solidFill>
+              <a:srgbClr val="00A3C4"/>
+            </a:solidFill>
+            <a:prstDash val="solid"/>
+          </a:ln>
+        </p:spPr>
+      </p:sp>
+      <p:sp>
+        <p:nvSpPr>
+          <p:cNvPr id="39" name="Text 35"/>
+          <p:cNvSpPr txBox="1"/>
+          <p:nvPr/>
+        </p:nvSpPr>
+        <p:spPr>
+          <a:xfrm>
+            <a:off x="978408" y="5669280"/>
+            <a:ext cx="3291840" cy="256032"/>
+          </a:xfrm>
+          <a:prstGeom prst="rect">
+            <a:avLst/>
+          </a:prstGeom>
+          <a:noFill/>
+          <a:ln/>
+        </p:spPr>
+        <p:txBody>
+          <a:bodyPr wrap="square" lIns="0" tIns="0" rIns="0" bIns="0" rtlCol="0" anchor="ctr"/>
+          <a:lstStyle/>
+          <a:p>
+            <a:pPr indent="0" marL="0">
+              <a:buNone/>
+            </a:pPr>
+            <a:r>
+              <a:rPr lang="en-US" sz="1050" b="1" dirty="0">
+                <a:solidFill>
+                  <a:srgbClr val="16305B"/>
+                </a:solidFill>
+                <a:latin typeface="Malgun Gothic" pitchFamily="34" charset="0"/>
+                <a:ea typeface="Malgun Gothic" pitchFamily="34" charset="-122"/>
+                <a:cs typeface="Malgun Gothic" pitchFamily="34" charset="-120"/>
+              </a:rPr>
+              <a:t>회차별 새 프로젝트</a:t>
+            </a:r>
+            <a:endParaRPr lang="en-US" sz="1050" dirty="0"/>
+          </a:p>
+        </p:txBody>
+      </p:sp>
+      <p:sp>
+        <p:nvSpPr>
+          <p:cNvPr id="40" name="Text 36"/>
+          <p:cNvSpPr txBox="1"/>
+          <p:nvPr/>
+        </p:nvSpPr>
+        <p:spPr>
+          <a:xfrm>
+            <a:off x="978408" y="5943600"/>
+            <a:ext cx="3383280" cy="310896"/>
+          </a:xfrm>
+          <a:prstGeom prst="rect">
+            <a:avLst/>
+          </a:prstGeom>
+          <a:noFill/>
+          <a:ln/>
+        </p:spPr>
+        <p:txBody>
+          <a:bodyPr wrap="square" lIns="0" tIns="0" rIns="0" bIns="0" rtlCol="0" anchor="ctr"/>
+          <a:lstStyle/>
+          <a:p>
+            <a:pPr indent="0" marL="0">
+              <a:buNone/>
+            </a:pPr>
+            <a:r>
+              <a:rPr lang="en-US" sz="950" dirty="0">
+                <a:solidFill>
+                  <a:srgbClr val="6B7A8F"/>
+                </a:solidFill>
+                <a:latin typeface="Malgun Gothic" pitchFamily="34" charset="0"/>
+                <a:ea typeface="Malgun Gothic" pitchFamily="34" charset="-122"/>
+                <a:cs typeface="Malgun Gothic" pitchFamily="34" charset="-120"/>
+              </a:rPr>
+              <a:t>이전 회차 설정 간섭·잠금 파일로 인한 정지 방지</a:t>
+            </a:r>
+            <a:endParaRPr lang="en-US" sz="950" dirty="0"/>
+          </a:p>
+        </p:txBody>
+      </p:sp>
+      <p:sp>
+        <p:nvSpPr>
+          <p:cNvPr id="41" name="Shape 37"/>
+          <p:cNvSpPr/>
+          <p:nvPr/>
+        </p:nvSpPr>
+        <p:spPr>
+          <a:xfrm>
+            <a:off x="4489704" y="5724144"/>
+            <a:ext cx="64008" cy="164592"/>
+          </a:xfrm>
+          <a:prstGeom prst="rect">
+            <a:avLst/>
+          </a:prstGeom>
+          <a:solidFill>
+            <a:srgbClr val="00A3C4"/>
+          </a:solidFill>
+          <a:ln w="12700">
+            <a:solidFill>
+              <a:srgbClr val="00A3C4"/>
+            </a:solidFill>
+            <a:prstDash val="solid"/>
+          </a:ln>
+        </p:spPr>
+      </p:sp>
+      <p:sp>
+        <p:nvSpPr>
+          <p:cNvPr id="42" name="Text 38"/>
+          <p:cNvSpPr txBox="1"/>
+          <p:nvPr/>
+        </p:nvSpPr>
+        <p:spPr>
+          <a:xfrm>
+            <a:off x="4636008" y="5669280"/>
+            <a:ext cx="3291840" cy="256032"/>
+          </a:xfrm>
+          <a:prstGeom prst="rect">
+            <a:avLst/>
+          </a:prstGeom>
+          <a:noFill/>
+          <a:ln/>
+        </p:spPr>
+        <p:txBody>
+          <a:bodyPr wrap="square" lIns="0" tIns="0" rIns="0" bIns="0" rtlCol="0" anchor="ctr"/>
+          <a:lstStyle/>
+          <a:p>
+            <a:pPr indent="0" marL="0">
+              <a:buNone/>
+            </a:pPr>
+            <a:r>
+              <a:rPr lang="en-US" sz="1050" b="1" dirty="0">
+                <a:solidFill>
+                  <a:srgbClr val="16305B"/>
+                </a:solidFill>
+                <a:latin typeface="Malgun Gothic" pitchFamily="34" charset="0"/>
+                <a:ea typeface="Malgun Gothic" pitchFamily="34" charset="-122"/>
+                <a:cs typeface="Malgun Gothic" pitchFamily="34" charset="-120"/>
+              </a:rPr>
+              <a:t>경계면 자동 탐지</a:t>
+            </a:r>
+            <a:endParaRPr lang="en-US" sz="1050" dirty="0"/>
+          </a:p>
+        </p:txBody>
+      </p:sp>
+      <p:sp>
+        <p:nvSpPr>
+          <p:cNvPr id="43" name="Text 39"/>
+          <p:cNvSpPr txBox="1"/>
+          <p:nvPr/>
+        </p:nvSpPr>
+        <p:spPr>
+          <a:xfrm>
+            <a:off x="4636008" y="5943600"/>
+            <a:ext cx="3383280" cy="310896"/>
+          </a:xfrm>
+          <a:prstGeom prst="rect">
+            <a:avLst/>
+          </a:prstGeom>
+          <a:noFill/>
+          <a:ln/>
+        </p:spPr>
+        <p:txBody>
+          <a:bodyPr wrap="square" lIns="0" tIns="0" rIns="0" bIns="0" rtlCol="0" anchor="ctr"/>
+          <a:lstStyle/>
+          <a:p>
+            <a:pPr indent="0" marL="0">
+              <a:buNone/>
+            </a:pPr>
+            <a:r>
+              <a:rPr lang="en-US" sz="950" dirty="0">
+                <a:solidFill>
+                  <a:srgbClr val="6B7A8F"/>
+                </a:solidFill>
+                <a:latin typeface="Malgun Gothic" pitchFamily="34" charset="0"/>
+                <a:ea typeface="Malgun Gothic" pitchFamily="34" charset="-122"/>
+                <a:cs typeface="Malgun Gothic" pitchFamily="34" charset="-120"/>
+              </a:rPr>
+              <a:t>형상이 바뀌어도 팬·개구부 면을 좌표로 식별</a:t>
+            </a:r>
+            <a:endParaRPr lang="en-US" sz="950" dirty="0"/>
+          </a:p>
+        </p:txBody>
+      </p:sp>
+      <p:sp>
+        <p:nvSpPr>
+          <p:cNvPr id="44" name="Shape 40"/>
+          <p:cNvSpPr/>
+          <p:nvPr/>
+        </p:nvSpPr>
+        <p:spPr>
+          <a:xfrm>
+            <a:off x="8147304" y="5724144"/>
+            <a:ext cx="64008" cy="164592"/>
+          </a:xfrm>
+          <a:prstGeom prst="rect">
+            <a:avLst/>
+          </a:prstGeom>
+          <a:solidFill>
+            <a:srgbClr val="00A3C4"/>
+          </a:solidFill>
+          <a:ln w="12700">
+            <a:solidFill>
+              <a:srgbClr val="00A3C4"/>
+            </a:solidFill>
+            <a:prstDash val="solid"/>
+          </a:ln>
+        </p:spPr>
+      </p:sp>
+      <p:sp>
+        <p:nvSpPr>
+          <p:cNvPr id="45" name="Text 41"/>
+          <p:cNvSpPr txBox="1"/>
+          <p:nvPr/>
+        </p:nvSpPr>
+        <p:spPr>
+          <a:xfrm>
+            <a:off x="8293608" y="5669280"/>
+            <a:ext cx="3291840" cy="256032"/>
+          </a:xfrm>
+          <a:prstGeom prst="rect">
+            <a:avLst/>
+          </a:prstGeom>
+          <a:noFill/>
+          <a:ln/>
+        </p:spPr>
+        <p:txBody>
+          <a:bodyPr wrap="square" lIns="0" tIns="0" rIns="0" bIns="0" rtlCol="0" anchor="ctr"/>
+          <a:lstStyle/>
+          <a:p>
+            <a:pPr indent="0" marL="0">
+              <a:buNone/>
+            </a:pPr>
+            <a:r>
+              <a:rPr lang="en-US" sz="1050" b="1" dirty="0">
+                <a:solidFill>
+                  <a:srgbClr val="16305B"/>
+                </a:solidFill>
+                <a:latin typeface="Malgun Gothic" pitchFamily="34" charset="0"/>
+                <a:ea typeface="Malgun Gothic" pitchFamily="34" charset="-122"/>
+                <a:cs typeface="Malgun Gothic" pitchFamily="34" charset="-120"/>
+              </a:rPr>
+              <a:t>측정면 동적 생성</a:t>
+            </a:r>
+            <a:endParaRPr lang="en-US" sz="1050" dirty="0"/>
+          </a:p>
+        </p:txBody>
+      </p:sp>
+      <p:sp>
+        <p:nvSpPr>
+          <p:cNvPr id="46" name="Text 42"/>
+          <p:cNvSpPr txBox="1"/>
+          <p:nvPr/>
+        </p:nvSpPr>
+        <p:spPr>
+          <a:xfrm>
+            <a:off x="8293608" y="5943600"/>
+            <a:ext cx="3383280" cy="310896"/>
+          </a:xfrm>
+          <a:prstGeom prst="rect">
+            <a:avLst/>
+          </a:prstGeom>
+          <a:noFill/>
+          <a:ln/>
+        </p:spPr>
+        <p:txBody>
+          <a:bodyPr wrap="square" lIns="0" tIns="0" rIns="0" bIns="0" rtlCol="0" anchor="ctr"/>
+          <a:lstStyle/>
+          <a:p>
+            <a:pPr indent="0" marL="0">
+              <a:buNone/>
+            </a:pPr>
+            <a:r>
+              <a:rPr lang="en-US" sz="950" dirty="0">
+                <a:solidFill>
+                  <a:srgbClr val="6B7A8F"/>
+                </a:solidFill>
+                <a:latin typeface="Malgun Gothic" pitchFamily="34" charset="0"/>
+                <a:ea typeface="Malgun Gothic" pitchFamily="34" charset="-122"/>
+                <a:cs typeface="Malgun Gothic" pitchFamily="34" charset="-120"/>
+              </a:rPr>
+              <a:t>핀 개수 변화에 맞춰 유로 전체 측정면 자동 배치</a:t>
+            </a:r>
+            <a:endParaRPr lang="en-US" sz="950" dirty="0"/>
+          </a:p>
+        </p:txBody>
+      </p:sp>
+    </p:spTree>
+  </p:cSld>
+  <p:clrMapOvr>
+    <a:masterClrMapping/>
+  </p:clrMapOvr>
+</p:sld>
+</file>
+
+<file path=ppt/slides/slide11.xml><?xml version="1.0" encoding="utf-8"?>
+<p:sld xmlns:a="http://schemas.openxmlformats.org/drawingml/2006/main" xmlns:r="http://schemas.openxmlformats.org/officeDocument/2006/relationships" xmlns:p="http://schemas.openxmlformats.org/presentationml/2006/main">
+  <p:cSld name="Slide 11">
+    <p:bg>
+      <p:bgPr>
+        <a:solidFill>
+          <a:srgbClr val="F3F5F8"/>
+        </a:solidFill>
+      </p:bgPr>
+    </p:bg>
+    <p:spTree>
+      <p:nvGrpSpPr>
+        <p:cNvPr id="1" name=""/>
+        <p:cNvGrpSpPr/>
+        <p:nvPr/>
+      </p:nvGrpSpPr>
+      <p:grpSpPr>
+        <a:xfrm>
+          <a:off x="0" y="0"/>
+          <a:ext cx="0" cy="0"/>
+          <a:chOff x="0" y="0"/>
+          <a:chExt cx="0" cy="0"/>
+        </a:xfrm>
+      </p:grpSpPr>
+      <p:sp>
+        <p:nvSpPr>
+          <p:cNvPr id="2" name="Shape 0"/>
+          <p:cNvSpPr/>
+          <p:nvPr/>
+        </p:nvSpPr>
+        <p:spPr>
+          <a:xfrm>
+            <a:off x="502920" y="384048"/>
+            <a:ext cx="475488" cy="475488"/>
+          </a:xfrm>
+          <a:prstGeom prst="rect">
+            <a:avLst/>
+          </a:prstGeom>
+          <a:solidFill>
+            <a:srgbClr val="16305B"/>
+          </a:solidFill>
+          <a:ln w="12700">
+            <a:solidFill>
+              <a:srgbClr val="16305B"/>
+            </a:solidFill>
+            <a:prstDash val="solid"/>
+          </a:ln>
+        </p:spPr>
+      </p:sp>
+      <p:sp>
+        <p:nvSpPr>
+          <p:cNvPr id="3" name="Text 1"/>
+          <p:cNvSpPr txBox="1"/>
+          <p:nvPr/>
+        </p:nvSpPr>
+        <p:spPr>
+          <a:xfrm>
+            <a:off x="502920" y="384048"/>
+            <a:ext cx="475488" cy="475488"/>
+          </a:xfrm>
+          <a:prstGeom prst="rect">
+            <a:avLst/>
+          </a:prstGeom>
+          <a:noFill/>
+          <a:ln/>
+        </p:spPr>
+        <p:txBody>
+          <a:bodyPr wrap="square" lIns="0" tIns="0" rIns="0" bIns="0" rtlCol="0" anchor="ctr"/>
+          <a:lstStyle/>
+          <a:p>
+            <a:pPr algn="ctr" indent="0" marL="0">
+              <a:buNone/>
+            </a:pPr>
+            <a:r>
+              <a:rPr lang="en-US" sz="1600" b="1" dirty="0">
+                <a:solidFill>
+                  <a:srgbClr val="FFFFFF"/>
+                </a:solidFill>
+                <a:latin typeface="Malgun Gothic" pitchFamily="34" charset="0"/>
+                <a:ea typeface="Malgun Gothic" pitchFamily="34" charset="-122"/>
+                <a:cs typeface="Malgun Gothic" pitchFamily="34" charset="-120"/>
+              </a:rPr>
+              <a:t>03</a:t>
+            </a:r>
+            <a:endParaRPr lang="en-US" sz="1600" dirty="0"/>
+          </a:p>
+        </p:txBody>
+      </p:sp>
+      <p:sp>
+        <p:nvSpPr>
+          <p:cNvPr id="4" name="Text 2"/>
+          <p:cNvSpPr txBox="1"/>
+          <p:nvPr/>
+        </p:nvSpPr>
+        <p:spPr>
+          <a:xfrm>
+            <a:off x="1124712" y="365760"/>
+            <a:ext cx="7315200" cy="237744"/>
+          </a:xfrm>
+          <a:prstGeom prst="rect">
+            <a:avLst/>
+          </a:prstGeom>
+          <a:noFill/>
+          <a:ln/>
+        </p:spPr>
+        <p:txBody>
+          <a:bodyPr wrap="square" lIns="0" tIns="0" rIns="0" bIns="0" rtlCol="0" anchor="ctr"/>
+          <a:lstStyle/>
+          <a:p>
+            <a:pPr indent="0" marL="0">
+              <a:buNone/>
+            </a:pPr>
+            <a:r>
+              <a:rPr lang="en-US" sz="1050" b="1" spc="100" kern="0" dirty="0">
+                <a:solidFill>
+                  <a:srgbClr val="00A3C4"/>
+                </a:solidFill>
+                <a:latin typeface="Malgun Gothic" pitchFamily="34" charset="0"/>
+                <a:ea typeface="Malgun Gothic" pitchFamily="34" charset="-122"/>
+                <a:cs typeface="Malgun Gothic" pitchFamily="34" charset="-120"/>
+              </a:rPr>
+              <a:t>실험계획법 기반 자동해석 수행 및 데이터 확보</a:t>
+            </a:r>
+            <a:endParaRPr lang="en-US" sz="1050" dirty="0"/>
+          </a:p>
+        </p:txBody>
+      </p:sp>
+      <p:sp>
+        <p:nvSpPr>
+          <p:cNvPr id="5" name="Text 3"/>
+          <p:cNvSpPr txBox="1"/>
+          <p:nvPr/>
+        </p:nvSpPr>
+        <p:spPr>
+          <a:xfrm>
+            <a:off x="1124712" y="548640"/>
+            <a:ext cx="10607040" cy="384048"/>
+          </a:xfrm>
+          <a:prstGeom prst="rect">
+            <a:avLst/>
+          </a:prstGeom>
+          <a:noFill/>
+          <a:ln/>
+        </p:spPr>
+        <p:txBody>
+          <a:bodyPr wrap="square" lIns="0" tIns="0" rIns="0" bIns="0" rtlCol="0" anchor="ctr"/>
+          <a:lstStyle/>
+          <a:p>
+            <a:pPr indent="0" marL="0">
+              <a:buNone/>
+            </a:pPr>
+            <a:r>
+              <a:rPr lang="en-US" sz="2200" b="1" dirty="0">
+                <a:solidFill>
+                  <a:srgbClr val="16305B"/>
+                </a:solidFill>
+                <a:latin typeface="Malgun Gothic" pitchFamily="34" charset="0"/>
+                <a:ea typeface="Malgun Gothic" pitchFamily="34" charset="-122"/>
+                <a:cs typeface="Malgun Gothic" pitchFamily="34" charset="-120"/>
+              </a:rPr>
+              <a:t>DOE 기법 선정 및 무인 자동 해석 루프</a:t>
+            </a:r>
+            <a:endParaRPr lang="en-US" sz="2200" dirty="0"/>
+          </a:p>
+        </p:txBody>
+      </p:sp>
+      <p:sp>
+        <p:nvSpPr>
+          <p:cNvPr id="6" name="Shape 4"/>
+          <p:cNvSpPr/>
+          <p:nvPr/>
+        </p:nvSpPr>
+        <p:spPr>
+          <a:xfrm>
+            <a:off x="502920" y="1188720"/>
+            <a:ext cx="5440680" cy="2487168"/>
+          </a:xfrm>
+          <a:prstGeom prst="roundRect">
+            <a:avLst>
+              <a:gd name="adj" fmla="val 2206"/>
+            </a:avLst>
+          </a:prstGeom>
+          <a:solidFill>
+            <a:srgbClr val="FFFFFF"/>
+          </a:solidFill>
+          <a:ln w="9525">
+            <a:solidFill>
+              <a:srgbClr val="DDE3EB"/>
+            </a:solidFill>
+            <a:prstDash val="solid"/>
+          </a:ln>
+          <a:effectLst>
+            <a:outerShdw sx="100000" sy="100000" kx="0" ky="0" algn="bl" rotWithShape="0" blurRad="101600" dist="12700" dir="5400000">
+              <a:srgbClr val="9AA8BC">
+                <a:alpha val="18000"/>
+              </a:srgbClr>
+            </a:outerShdw>
+          </a:effectLst>
+        </p:spPr>
+      </p:sp>
+      <p:sp>
+        <p:nvSpPr>
+          <p:cNvPr id="7" name="Shape 5"/>
+          <p:cNvSpPr/>
+          <p:nvPr/>
+        </p:nvSpPr>
+        <p:spPr>
+          <a:xfrm>
+            <a:off x="758952" y="1463040"/>
+            <a:ext cx="82296" cy="182880"/>
+          </a:xfrm>
+          <a:prstGeom prst="rect">
+            <a:avLst/>
+          </a:prstGeom>
+          <a:solidFill>
+            <a:srgbClr val="00A3C4"/>
+          </a:solidFill>
+          <a:ln w="12700">
+            <a:solidFill>
+              <a:srgbClr val="00A3C4"/>
+            </a:solidFill>
+            <a:prstDash val="solid"/>
+          </a:ln>
+        </p:spPr>
+      </p:sp>
+      <p:sp>
+        <p:nvSpPr>
+          <p:cNvPr id="8" name="Text 6"/>
+          <p:cNvSpPr txBox="1"/>
+          <p:nvPr/>
+        </p:nvSpPr>
+        <p:spPr>
+          <a:xfrm>
+            <a:off x="923544" y="1371600"/>
+            <a:ext cx="4480560" cy="365760"/>
+          </a:xfrm>
+          <a:prstGeom prst="rect">
+            <a:avLst/>
+          </a:prstGeom>
+          <a:noFill/>
+          <a:ln/>
+        </p:spPr>
+        <p:txBody>
+          <a:bodyPr wrap="square" lIns="0" tIns="0" rIns="0" bIns="0" rtlCol="0" anchor="ctr"/>
+          <a:lstStyle/>
+          <a:p>
+            <a:pPr indent="0" marL="0">
+              <a:buNone/>
+            </a:pPr>
+            <a:r>
+              <a:rPr lang="en-US" sz="1300" b="1" dirty="0">
+                <a:solidFill>
+                  <a:srgbClr val="16305B"/>
+                </a:solidFill>
+                <a:latin typeface="Malgun Gothic" pitchFamily="34" charset="0"/>
+                <a:ea typeface="Malgun Gothic" pitchFamily="34" charset="-122"/>
+                <a:cs typeface="Malgun Gothic" pitchFamily="34" charset="-120"/>
+              </a:rPr>
+              <a:t>DOE 기법 선정</a:t>
+            </a:r>
+            <a:endParaRPr lang="en-US" sz="1300" dirty="0"/>
+          </a:p>
+        </p:txBody>
+      </p:sp>
+      <p:graphicFrame>
+        <p:nvGraphicFramePr>
+          <p:cNvPr id="12" name="Table 0"/>
           <p:cNvGraphicFramePr>
             <a:graphicFrameLocks noGrp="1"/>
           </p:cNvGraphicFramePr>
@@ -3874,7 +7068,7 @@
       </p:sp>
       <p:graphicFrame>
         <p:nvGraphicFramePr>
-          <p:cNvPr id="21" name="Table 1"/>
+          <p:cNvPr id="23" name="Table 1"/>
           <p:cNvGraphicFramePr>
             <a:graphicFrameLocks noGrp="1"/>
           </p:cNvGraphicFramePr>
@@ -4339,9 +7533,9 @@
 </p:sld>
 </file>
 
-<file path=ppt/slides/slide11.xml><?xml version="1.0" encoding="utf-8"?>
+<file path=ppt/slides/slide12.xml><?xml version="1.0" encoding="utf-8"?>
 <p:sld xmlns:a="http://schemas.openxmlformats.org/drawingml/2006/main" xmlns:r="http://schemas.openxmlformats.org/officeDocument/2006/relationships" xmlns:p="http://schemas.openxmlformats.org/presentationml/2006/main">
-  <p:cSld name="Slide 11">
+  <p:cSld name="Slide 12">
     <p:bg>
       <p:bgPr>
         <a:solidFill>
@@ -5109,7 +8303,7 @@
       </p:sp>
       <p:graphicFrame>
         <p:nvGraphicFramePr>
-          <p:cNvPr id="12" name="Table 0"/>
+          <p:cNvPr id="13" name="Table 0"/>
           <p:cNvGraphicFramePr>
             <a:graphicFrameLocks noGrp="1"/>
           </p:cNvGraphicFramePr>
@@ -5887,9 +9081,9 @@
 </p:sld>
 </file>
 
-<file path=ppt/slides/slide12.xml><?xml version="1.0" encoding="utf-8"?>
+<file path=ppt/slides/slide13.xml><?xml version="1.0" encoding="utf-8"?>
 <p:sld xmlns:a="http://schemas.openxmlformats.org/drawingml/2006/main" xmlns:r="http://schemas.openxmlformats.org/officeDocument/2006/relationships" xmlns:p="http://schemas.openxmlformats.org/presentationml/2006/main">
-  <p:cSld name="Slide 12">
+  <p:cSld name="Slide 13">
     <p:bg>
       <p:bgPr>
         <a:solidFill>
@@ -8329,7 +11523,7 @@
                 <a:ea typeface="Malgun Gothic" pitchFamily="34" charset="-122"/>
                 <a:cs typeface="Malgun Gothic" pitchFamily="34" charset="-120"/>
               </a:rPr>
-              <a:t>1.  형상 자동 빌드 및 중량 산출 (SolidWorks)</a:t>
+              <a:t>1.  자동해석 코드 구성</a:t>
             </a:r>
             <a:endParaRPr lang="en-US" sz="1100" dirty="0"/>
           </a:p>
@@ -8349,7 +11543,7 @@
                 <a:ea typeface="Malgun Gothic" pitchFamily="34" charset="-122"/>
                 <a:cs typeface="Malgun Gothic" pitchFamily="34" charset="-120"/>
               </a:rPr>
-              <a:t>2.  해석 모델 자동 구성 및 결과 추출 (Icepak)</a:t>
+              <a:t>2.  형상 자동 빌드 및 중량 산출 (SolidWorks)</a:t>
             </a:r>
             <a:endParaRPr lang="en-US" sz="1100" dirty="0"/>
           </a:p>
@@ -8369,7 +11563,7 @@
                 <a:ea typeface="Malgun Gothic" pitchFamily="34" charset="-122"/>
                 <a:cs typeface="Malgun Gothic" pitchFamily="34" charset="-120"/>
               </a:rPr>
-              <a:t>3.  DOE 기법 및 무인 자동 해석 루프</a:t>
+              <a:t>3.  해석 모델 자동 구성 및 결과 추출 (Icepak)</a:t>
             </a:r>
             <a:endParaRPr lang="en-US" sz="1100" dirty="0"/>
           </a:p>
@@ -8389,7 +11583,27 @@
                 <a:ea typeface="Malgun Gothic" pitchFamily="34" charset="-122"/>
                 <a:cs typeface="Malgun Gothic" pitchFamily="34" charset="-120"/>
               </a:rPr>
-              <a:t>4.  DOE 데이터 확보 현황</a:t>
+              <a:t>4.  DOE 기법 및 무인 자동 해석 루프</a:t>
+            </a:r>
+            <a:endParaRPr lang="en-US" sz="1100" dirty="0"/>
+          </a:p>
+          <a:p>
+            <a:pPr indent="0" marL="0">
+              <a:lnSpc>
+                <a:spcPct val="145000"/>
+              </a:lnSpc>
+              <a:buNone/>
+            </a:pPr>
+            <a:r>
+              <a:rPr lang="en-US" sz="1100" dirty="0">
+                <a:solidFill>
+                  <a:srgbClr val="1C2733"/>
+                </a:solidFill>
+                <a:latin typeface="Malgun Gothic" pitchFamily="34" charset="0"/>
+                <a:ea typeface="Malgun Gothic" pitchFamily="34" charset="-122"/>
+                <a:cs typeface="Malgun Gothic" pitchFamily="34" charset="-120"/>
+              </a:rPr>
+              <a:t>5.  DOE 데이터 확보 현황</a:t>
             </a:r>
             <a:endParaRPr lang="en-US" sz="1100" dirty="0"/>
           </a:p>
@@ -17986,7 +21200,7 @@
                 <a:ea typeface="Malgun Gothic" pitchFamily="34" charset="-122"/>
                 <a:cs typeface="Malgun Gothic" pitchFamily="34" charset="-120"/>
               </a:rPr>
-              <a:t>형상 자동 빌드 및 중량 산출 — SolidWorks</a:t>
+              <a:t>자동해석 코드 구성</a:t>
             </a:r>
             <a:endParaRPr lang="en-US" sz="2200" dirty="0"/>
           </a:p>
@@ -18001,11 +21215,11 @@
         <p:spPr>
           <a:xfrm>
             <a:off x="502920" y="1188720"/>
-            <a:ext cx="5440680" cy="4160520"/>
+            <a:ext cx="11183112" cy="2029968"/>
           </a:xfrm>
           <a:prstGeom prst="roundRect">
             <a:avLst>
-              <a:gd name="adj" fmla="val 1319"/>
+              <a:gd name="adj" fmla="val 2703"/>
             </a:avLst>
           </a:prstGeom>
           <a:solidFill>
@@ -18084,6 +21298,2656 @@
                 <a:ea typeface="Malgun Gothic" pitchFamily="34" charset="-122"/>
                 <a:cs typeface="Malgun Gothic" pitchFamily="34" charset="-120"/>
               </a:rPr>
+              <a:t>실행 흐름</a:t>
+            </a:r>
+            <a:endParaRPr lang="en-US" sz="1300" dirty="0"/>
+          </a:p>
+        </p:txBody>
+      </p:sp>
+      <p:sp>
+        <p:nvSpPr>
+          <p:cNvPr id="9" name="Shape 7"/>
+          <p:cNvSpPr/>
+          <p:nvPr/>
+        </p:nvSpPr>
+        <p:spPr>
+          <a:xfrm>
+            <a:off x="813816" y="1847088"/>
+            <a:ext cx="1371600" cy="932688"/>
+          </a:xfrm>
+          <a:prstGeom prst="roundRect">
+            <a:avLst>
+              <a:gd name="adj" fmla="val 6863"/>
+            </a:avLst>
+          </a:prstGeom>
+          <a:solidFill>
+            <a:srgbClr val="16305B"/>
+          </a:solidFill>
+          <a:ln w="12700">
+            <a:solidFill>
+              <a:srgbClr val="16305B"/>
+            </a:solidFill>
+            <a:prstDash val="solid"/>
+          </a:ln>
+        </p:spPr>
+      </p:sp>
+      <p:sp>
+        <p:nvSpPr>
+          <p:cNvPr id="10" name="Text 8"/>
+          <p:cNvSpPr txBox="1"/>
+          <p:nvPr/>
+        </p:nvSpPr>
+        <p:spPr>
+          <a:xfrm>
+            <a:off x="813816" y="1847088"/>
+            <a:ext cx="1371600" cy="932688"/>
+          </a:xfrm>
+          <a:prstGeom prst="rect">
+            <a:avLst/>
+          </a:prstGeom>
+          <a:noFill/>
+          <a:ln/>
+        </p:spPr>
+        <p:txBody>
+          <a:bodyPr wrap="square" lIns="0" tIns="0" rIns="0" bIns="0" rtlCol="0" anchor="ctr"/>
+          <a:lstStyle/>
+          <a:p>
+            <a:pPr algn="ctr" indent="0" marL="0">
+              <a:lnSpc>
+                <a:spcPct val="120000"/>
+              </a:lnSpc>
+              <a:buNone/>
+            </a:pPr>
+            <a:r>
+              <a:rPr lang="en-US" sz="1100" b="1" dirty="0">
+                <a:solidFill>
+                  <a:srgbClr val="FFFFFF"/>
+                </a:solidFill>
+                <a:latin typeface="Consolas" pitchFamily="34" charset="0"/>
+                <a:ea typeface="Consolas" pitchFamily="34" charset="-122"/>
+                <a:cs typeface="Consolas" pitchFamily="34" charset="-120"/>
+              </a:rPr>
+              <a:t>main.py</a:t>
+            </a:r>
+            <a:endParaRPr lang="en-US" sz="1100" dirty="0"/>
+          </a:p>
+          <a:p>
+            <a:pPr algn="ctr" indent="0" marL="0">
+              <a:lnSpc>
+                <a:spcPct val="120000"/>
+              </a:lnSpc>
+              <a:buNone/>
+            </a:pPr>
+            <a:r>
+              <a:rPr lang="en-US" sz="900" dirty="0">
+                <a:solidFill>
+                  <a:srgbClr val="CFE0F2"/>
+                </a:solidFill>
+                <a:latin typeface="Malgun Gothic" pitchFamily="34" charset="0"/>
+                <a:ea typeface="Malgun Gothic" pitchFamily="34" charset="-122"/>
+                <a:cs typeface="Malgun Gothic" pitchFamily="34" charset="-120"/>
+              </a:rPr>
+              <a:t>루프 제어</a:t>
+            </a:r>
+            <a:endParaRPr lang="en-US" sz="1100" dirty="0"/>
+          </a:p>
+        </p:txBody>
+      </p:sp>
+      <p:sp>
+        <p:nvSpPr>
+          <p:cNvPr id="11" name="Text 9"/>
+          <p:cNvSpPr txBox="1"/>
+          <p:nvPr/>
+        </p:nvSpPr>
+        <p:spPr>
+          <a:xfrm>
+            <a:off x="2185416" y="1847088"/>
+            <a:ext cx="329184" cy="932688"/>
+          </a:xfrm>
+          <a:prstGeom prst="rect">
+            <a:avLst/>
+          </a:prstGeom>
+          <a:noFill/>
+          <a:ln/>
+        </p:spPr>
+        <p:txBody>
+          <a:bodyPr wrap="square" lIns="0" tIns="0" rIns="0" bIns="0" rtlCol="0" anchor="ctr"/>
+          <a:lstStyle/>
+          <a:p>
+            <a:pPr algn="ctr" indent="0" marL="0">
+              <a:buNone/>
+            </a:pPr>
+            <a:r>
+              <a:rPr lang="en-US" sz="1100" dirty="0">
+                <a:solidFill>
+                  <a:srgbClr val="00A3C4"/>
+                </a:solidFill>
+                <a:latin typeface="Malgun Gothic" pitchFamily="34" charset="0"/>
+                <a:ea typeface="Malgun Gothic" pitchFamily="34" charset="-122"/>
+                <a:cs typeface="Malgun Gothic" pitchFamily="34" charset="-120"/>
+              </a:rPr>
+              <a:t>▶</a:t>
+            </a:r>
+            <a:endParaRPr lang="en-US" sz="1100" dirty="0"/>
+          </a:p>
+        </p:txBody>
+      </p:sp>
+      <p:sp>
+        <p:nvSpPr>
+          <p:cNvPr id="12" name="Shape 10"/>
+          <p:cNvSpPr/>
+          <p:nvPr/>
+        </p:nvSpPr>
+        <p:spPr>
+          <a:xfrm>
+            <a:off x="2514600" y="1847088"/>
+            <a:ext cx="2011680" cy="932688"/>
+          </a:xfrm>
+          <a:prstGeom prst="roundRect">
+            <a:avLst>
+              <a:gd name="adj" fmla="val 6863"/>
+            </a:avLst>
+          </a:prstGeom>
+          <a:solidFill>
+            <a:srgbClr val="F7F9FC"/>
+          </a:solidFill>
+          <a:ln w="9525">
+            <a:solidFill>
+              <a:srgbClr val="DDE3EB"/>
+            </a:solidFill>
+            <a:prstDash val="solid"/>
+          </a:ln>
+        </p:spPr>
+      </p:sp>
+      <p:sp>
+        <p:nvSpPr>
+          <p:cNvPr id="13" name="Shape 11"/>
+          <p:cNvSpPr/>
+          <p:nvPr/>
+        </p:nvSpPr>
+        <p:spPr>
+          <a:xfrm>
+            <a:off x="2514600" y="1847088"/>
+            <a:ext cx="2011680" cy="310896"/>
+          </a:xfrm>
+          <a:prstGeom prst="rect">
+            <a:avLst/>
+          </a:prstGeom>
+          <a:solidFill>
+            <a:srgbClr val="DCE6F2"/>
+          </a:solidFill>
+          <a:ln w="12700">
+            <a:solidFill>
+              <a:srgbClr val="DCE6F2"/>
+            </a:solidFill>
+            <a:prstDash val="solid"/>
+          </a:ln>
+        </p:spPr>
+      </p:sp>
+      <p:sp>
+        <p:nvSpPr>
+          <p:cNvPr id="14" name="Text 12"/>
+          <p:cNvSpPr txBox="1"/>
+          <p:nvPr/>
+        </p:nvSpPr>
+        <p:spPr>
+          <a:xfrm>
+            <a:off x="2514600" y="1847088"/>
+            <a:ext cx="2011680" cy="310896"/>
+          </a:xfrm>
+          <a:prstGeom prst="rect">
+            <a:avLst/>
+          </a:prstGeom>
+          <a:noFill/>
+          <a:ln/>
+        </p:spPr>
+        <p:txBody>
+          <a:bodyPr wrap="square" lIns="0" tIns="0" rIns="0" bIns="0" rtlCol="0" anchor="ctr"/>
+          <a:lstStyle/>
+          <a:p>
+            <a:pPr algn="ctr" indent="0" marL="0">
+              <a:buNone/>
+            </a:pPr>
+            <a:r>
+              <a:rPr lang="en-US" sz="1000" b="1" dirty="0">
+                <a:solidFill>
+                  <a:srgbClr val="16305B"/>
+                </a:solidFill>
+                <a:latin typeface="Malgun Gothic" pitchFamily="34" charset="0"/>
+                <a:ea typeface="Malgun Gothic" pitchFamily="34" charset="-122"/>
+                <a:cs typeface="Malgun Gothic" pitchFamily="34" charset="-120"/>
+              </a:rPr>
+              <a:t>1  실험점 생성</a:t>
+            </a:r>
+            <a:endParaRPr lang="en-US" sz="1000" dirty="0"/>
+          </a:p>
+        </p:txBody>
+      </p:sp>
+      <p:sp>
+        <p:nvSpPr>
+          <p:cNvPr id="15" name="Text 13"/>
+          <p:cNvSpPr txBox="1"/>
+          <p:nvPr/>
+        </p:nvSpPr>
+        <p:spPr>
+          <a:xfrm>
+            <a:off x="2514600" y="2194560"/>
+            <a:ext cx="2011680" cy="274320"/>
+          </a:xfrm>
+          <a:prstGeom prst="rect">
+            <a:avLst/>
+          </a:prstGeom>
+          <a:noFill/>
+          <a:ln/>
+        </p:spPr>
+        <p:txBody>
+          <a:bodyPr wrap="square" lIns="0" tIns="0" rIns="0" bIns="0" rtlCol="0" anchor="ctr"/>
+          <a:lstStyle/>
+          <a:p>
+            <a:pPr algn="ctr" indent="0" marL="0">
+              <a:buNone/>
+            </a:pPr>
+            <a:r>
+              <a:rPr lang="en-US" sz="950" b="1" dirty="0">
+                <a:solidFill>
+                  <a:srgbClr val="16305B"/>
+                </a:solidFill>
+                <a:latin typeface="Consolas" pitchFamily="34" charset="0"/>
+                <a:ea typeface="Consolas" pitchFamily="34" charset="-122"/>
+                <a:cs typeface="Consolas" pitchFamily="34" charset="-120"/>
+              </a:rPr>
+              <a:t>OLHD.py · fins.py</a:t>
+            </a:r>
+            <a:endParaRPr lang="en-US" sz="950" dirty="0"/>
+          </a:p>
+        </p:txBody>
+      </p:sp>
+      <p:sp>
+        <p:nvSpPr>
+          <p:cNvPr id="16" name="Text 14"/>
+          <p:cNvSpPr txBox="1"/>
+          <p:nvPr/>
+        </p:nvSpPr>
+        <p:spPr>
+          <a:xfrm>
+            <a:off x="2514600" y="2450592"/>
+            <a:ext cx="2011680" cy="274320"/>
+          </a:xfrm>
+          <a:prstGeom prst="rect">
+            <a:avLst/>
+          </a:prstGeom>
+          <a:noFill/>
+          <a:ln/>
+        </p:spPr>
+        <p:txBody>
+          <a:bodyPr wrap="square" lIns="0" tIns="0" rIns="0" bIns="0" rtlCol="0" anchor="ctr"/>
+          <a:lstStyle/>
+          <a:p>
+            <a:pPr algn="ctr" indent="0" marL="0">
+              <a:buNone/>
+            </a:pPr>
+            <a:r>
+              <a:rPr lang="en-US" sz="880" dirty="0">
+                <a:solidFill>
+                  <a:srgbClr val="6B7A8F"/>
+                </a:solidFill>
+                <a:latin typeface="Malgun Gothic" pitchFamily="34" charset="0"/>
+                <a:ea typeface="Malgun Gothic" pitchFamily="34" charset="-122"/>
+                <a:cs typeface="Malgun Gothic" pitchFamily="34" charset="-120"/>
+              </a:rPr>
+              <a:t>설계변수 9종 · 갭 제약</a:t>
+            </a:r>
+            <a:endParaRPr lang="en-US" sz="880" dirty="0"/>
+          </a:p>
+        </p:txBody>
+      </p:sp>
+      <p:sp>
+        <p:nvSpPr>
+          <p:cNvPr id="17" name="Text 15"/>
+          <p:cNvSpPr txBox="1"/>
+          <p:nvPr/>
+        </p:nvSpPr>
+        <p:spPr>
+          <a:xfrm>
+            <a:off x="4526280" y="1847088"/>
+            <a:ext cx="237744" cy="932688"/>
+          </a:xfrm>
+          <a:prstGeom prst="rect">
+            <a:avLst/>
+          </a:prstGeom>
+          <a:noFill/>
+          <a:ln/>
+        </p:spPr>
+        <p:txBody>
+          <a:bodyPr wrap="square" lIns="0" tIns="0" rIns="0" bIns="0" rtlCol="0" anchor="ctr"/>
+          <a:lstStyle/>
+          <a:p>
+            <a:pPr algn="ctr" indent="0" marL="0">
+              <a:buNone/>
+            </a:pPr>
+            <a:r>
+              <a:rPr lang="en-US" sz="900" dirty="0">
+                <a:solidFill>
+                  <a:srgbClr val="00A3C4"/>
+                </a:solidFill>
+                <a:latin typeface="Malgun Gothic" pitchFamily="34" charset="0"/>
+                <a:ea typeface="Malgun Gothic" pitchFamily="34" charset="-122"/>
+                <a:cs typeface="Malgun Gothic" pitchFamily="34" charset="-120"/>
+              </a:rPr>
+              <a:t>▶</a:t>
+            </a:r>
+            <a:endParaRPr lang="en-US" sz="900" dirty="0"/>
+          </a:p>
+        </p:txBody>
+      </p:sp>
+      <p:sp>
+        <p:nvSpPr>
+          <p:cNvPr id="18" name="Shape 16"/>
+          <p:cNvSpPr/>
+          <p:nvPr/>
+        </p:nvSpPr>
+        <p:spPr>
+          <a:xfrm>
+            <a:off x="4764024" y="1847088"/>
+            <a:ext cx="2011680" cy="932688"/>
+          </a:xfrm>
+          <a:prstGeom prst="roundRect">
+            <a:avLst>
+              <a:gd name="adj" fmla="val 6863"/>
+            </a:avLst>
+          </a:prstGeom>
+          <a:solidFill>
+            <a:srgbClr val="F7F9FC"/>
+          </a:solidFill>
+          <a:ln w="9525">
+            <a:solidFill>
+              <a:srgbClr val="DDE3EB"/>
+            </a:solidFill>
+            <a:prstDash val="solid"/>
+          </a:ln>
+        </p:spPr>
+      </p:sp>
+      <p:sp>
+        <p:nvSpPr>
+          <p:cNvPr id="19" name="Shape 17"/>
+          <p:cNvSpPr/>
+          <p:nvPr/>
+        </p:nvSpPr>
+        <p:spPr>
+          <a:xfrm>
+            <a:off x="4764024" y="1847088"/>
+            <a:ext cx="2011680" cy="310896"/>
+          </a:xfrm>
+          <a:prstGeom prst="rect">
+            <a:avLst/>
+          </a:prstGeom>
+          <a:solidFill>
+            <a:srgbClr val="DCE6F2"/>
+          </a:solidFill>
+          <a:ln w="12700">
+            <a:solidFill>
+              <a:srgbClr val="DCE6F2"/>
+            </a:solidFill>
+            <a:prstDash val="solid"/>
+          </a:ln>
+        </p:spPr>
+      </p:sp>
+      <p:sp>
+        <p:nvSpPr>
+          <p:cNvPr id="20" name="Text 18"/>
+          <p:cNvSpPr txBox="1"/>
+          <p:nvPr/>
+        </p:nvSpPr>
+        <p:spPr>
+          <a:xfrm>
+            <a:off x="4764024" y="1847088"/>
+            <a:ext cx="2011680" cy="310896"/>
+          </a:xfrm>
+          <a:prstGeom prst="rect">
+            <a:avLst/>
+          </a:prstGeom>
+          <a:noFill/>
+          <a:ln/>
+        </p:spPr>
+        <p:txBody>
+          <a:bodyPr wrap="square" lIns="0" tIns="0" rIns="0" bIns="0" rtlCol="0" anchor="ctr"/>
+          <a:lstStyle/>
+          <a:p>
+            <a:pPr algn="ctr" indent="0" marL="0">
+              <a:buNone/>
+            </a:pPr>
+            <a:r>
+              <a:rPr lang="en-US" sz="1000" b="1" dirty="0">
+                <a:solidFill>
+                  <a:srgbClr val="16305B"/>
+                </a:solidFill>
+                <a:latin typeface="Malgun Gothic" pitchFamily="34" charset="0"/>
+                <a:ea typeface="Malgun Gothic" pitchFamily="34" charset="-122"/>
+                <a:cs typeface="Malgun Gothic" pitchFamily="34" charset="-120"/>
+              </a:rPr>
+              <a:t>2  형상 빌드</a:t>
+            </a:r>
+            <a:endParaRPr lang="en-US" sz="1000" dirty="0"/>
+          </a:p>
+        </p:txBody>
+      </p:sp>
+      <p:sp>
+        <p:nvSpPr>
+          <p:cNvPr id="21" name="Text 19"/>
+          <p:cNvSpPr txBox="1"/>
+          <p:nvPr/>
+        </p:nvSpPr>
+        <p:spPr>
+          <a:xfrm>
+            <a:off x="4764024" y="2194560"/>
+            <a:ext cx="2011680" cy="274320"/>
+          </a:xfrm>
+          <a:prstGeom prst="rect">
+            <a:avLst/>
+          </a:prstGeom>
+          <a:noFill/>
+          <a:ln/>
+        </p:spPr>
+        <p:txBody>
+          <a:bodyPr wrap="square" lIns="0" tIns="0" rIns="0" bIns="0" rtlCol="0" anchor="ctr"/>
+          <a:lstStyle/>
+          <a:p>
+            <a:pPr algn="ctr" indent="0" marL="0">
+              <a:buNone/>
+            </a:pPr>
+            <a:r>
+              <a:rPr lang="en-US" sz="950" b="1" dirty="0">
+                <a:solidFill>
+                  <a:srgbClr val="16305B"/>
+                </a:solidFill>
+                <a:latin typeface="Consolas" pitchFamily="34" charset="0"/>
+                <a:ea typeface="Consolas" pitchFamily="34" charset="-122"/>
+                <a:cs typeface="Consolas" pitchFamily="34" charset="-120"/>
+              </a:rPr>
+              <a:t>Solidworks.py</a:t>
+            </a:r>
+            <a:endParaRPr lang="en-US" sz="950" dirty="0"/>
+          </a:p>
+        </p:txBody>
+      </p:sp>
+      <p:sp>
+        <p:nvSpPr>
+          <p:cNvPr id="22" name="Text 20"/>
+          <p:cNvSpPr txBox="1"/>
+          <p:nvPr/>
+        </p:nvSpPr>
+        <p:spPr>
+          <a:xfrm>
+            <a:off x="4764024" y="2450592"/>
+            <a:ext cx="2011680" cy="274320"/>
+          </a:xfrm>
+          <a:prstGeom prst="rect">
+            <a:avLst/>
+          </a:prstGeom>
+          <a:noFill/>
+          <a:ln/>
+        </p:spPr>
+        <p:txBody>
+          <a:bodyPr wrap="square" lIns="0" tIns="0" rIns="0" bIns="0" rtlCol="0" anchor="ctr"/>
+          <a:lstStyle/>
+          <a:p>
+            <a:pPr algn="ctr" indent="0" marL="0">
+              <a:buNone/>
+            </a:pPr>
+            <a:r>
+              <a:rPr lang="en-US" sz="880" dirty="0">
+                <a:solidFill>
+                  <a:srgbClr val="6B7A8F"/>
+                </a:solidFill>
+                <a:latin typeface="Malgun Gothic" pitchFamily="34" charset="0"/>
+                <a:ea typeface="Malgun Gothic" pitchFamily="34" charset="-122"/>
+                <a:cs typeface="Malgun Gothic" pitchFamily="34" charset="-120"/>
+              </a:rPr>
+              <a:t>STEP · 질량 · 부피</a:t>
+            </a:r>
+            <a:endParaRPr lang="en-US" sz="880" dirty="0"/>
+          </a:p>
+        </p:txBody>
+      </p:sp>
+      <p:sp>
+        <p:nvSpPr>
+          <p:cNvPr id="23" name="Text 21"/>
+          <p:cNvSpPr txBox="1"/>
+          <p:nvPr/>
+        </p:nvSpPr>
+        <p:spPr>
+          <a:xfrm>
+            <a:off x="6775704" y="1847088"/>
+            <a:ext cx="237744" cy="932688"/>
+          </a:xfrm>
+          <a:prstGeom prst="rect">
+            <a:avLst/>
+          </a:prstGeom>
+          <a:noFill/>
+          <a:ln/>
+        </p:spPr>
+        <p:txBody>
+          <a:bodyPr wrap="square" lIns="0" tIns="0" rIns="0" bIns="0" rtlCol="0" anchor="ctr"/>
+          <a:lstStyle/>
+          <a:p>
+            <a:pPr algn="ctr" indent="0" marL="0">
+              <a:buNone/>
+            </a:pPr>
+            <a:r>
+              <a:rPr lang="en-US" sz="900" dirty="0">
+                <a:solidFill>
+                  <a:srgbClr val="00A3C4"/>
+                </a:solidFill>
+                <a:latin typeface="Malgun Gothic" pitchFamily="34" charset="0"/>
+                <a:ea typeface="Malgun Gothic" pitchFamily="34" charset="-122"/>
+                <a:cs typeface="Malgun Gothic" pitchFamily="34" charset="-120"/>
+              </a:rPr>
+              <a:t>▶</a:t>
+            </a:r>
+            <a:endParaRPr lang="en-US" sz="900" dirty="0"/>
+          </a:p>
+        </p:txBody>
+      </p:sp>
+      <p:sp>
+        <p:nvSpPr>
+          <p:cNvPr id="24" name="Shape 22"/>
+          <p:cNvSpPr/>
+          <p:nvPr/>
+        </p:nvSpPr>
+        <p:spPr>
+          <a:xfrm>
+            <a:off x="7013448" y="1847088"/>
+            <a:ext cx="2011680" cy="932688"/>
+          </a:xfrm>
+          <a:prstGeom prst="roundRect">
+            <a:avLst>
+              <a:gd name="adj" fmla="val 6863"/>
+            </a:avLst>
+          </a:prstGeom>
+          <a:solidFill>
+            <a:srgbClr val="F7F9FC"/>
+          </a:solidFill>
+          <a:ln w="9525">
+            <a:solidFill>
+              <a:srgbClr val="DDE3EB"/>
+            </a:solidFill>
+            <a:prstDash val="solid"/>
+          </a:ln>
+        </p:spPr>
+      </p:sp>
+      <p:sp>
+        <p:nvSpPr>
+          <p:cNvPr id="25" name="Shape 23"/>
+          <p:cNvSpPr/>
+          <p:nvPr/>
+        </p:nvSpPr>
+        <p:spPr>
+          <a:xfrm>
+            <a:off x="7013448" y="1847088"/>
+            <a:ext cx="2011680" cy="310896"/>
+          </a:xfrm>
+          <a:prstGeom prst="rect">
+            <a:avLst/>
+          </a:prstGeom>
+          <a:solidFill>
+            <a:srgbClr val="DCE6F2"/>
+          </a:solidFill>
+          <a:ln w="12700">
+            <a:solidFill>
+              <a:srgbClr val="DCE6F2"/>
+            </a:solidFill>
+            <a:prstDash val="solid"/>
+          </a:ln>
+        </p:spPr>
+      </p:sp>
+      <p:sp>
+        <p:nvSpPr>
+          <p:cNvPr id="26" name="Text 24"/>
+          <p:cNvSpPr txBox="1"/>
+          <p:nvPr/>
+        </p:nvSpPr>
+        <p:spPr>
+          <a:xfrm>
+            <a:off x="7013448" y="1847088"/>
+            <a:ext cx="2011680" cy="310896"/>
+          </a:xfrm>
+          <a:prstGeom prst="rect">
+            <a:avLst/>
+          </a:prstGeom>
+          <a:noFill/>
+          <a:ln/>
+        </p:spPr>
+        <p:txBody>
+          <a:bodyPr wrap="square" lIns="0" tIns="0" rIns="0" bIns="0" rtlCol="0" anchor="ctr"/>
+          <a:lstStyle/>
+          <a:p>
+            <a:pPr algn="ctr" indent="0" marL="0">
+              <a:buNone/>
+            </a:pPr>
+            <a:r>
+              <a:rPr lang="en-US" sz="1000" b="1" dirty="0">
+                <a:solidFill>
+                  <a:srgbClr val="16305B"/>
+                </a:solidFill>
+                <a:latin typeface="Malgun Gothic" pitchFamily="34" charset="0"/>
+                <a:ea typeface="Malgun Gothic" pitchFamily="34" charset="-122"/>
+                <a:cs typeface="Malgun Gothic" pitchFamily="34" charset="-120"/>
+              </a:rPr>
+              <a:t>3  해석</a:t>
+            </a:r>
+            <a:endParaRPr lang="en-US" sz="1000" dirty="0"/>
+          </a:p>
+        </p:txBody>
+      </p:sp>
+      <p:sp>
+        <p:nvSpPr>
+          <p:cNvPr id="27" name="Text 25"/>
+          <p:cNvSpPr txBox="1"/>
+          <p:nvPr/>
+        </p:nvSpPr>
+        <p:spPr>
+          <a:xfrm>
+            <a:off x="7013448" y="2194560"/>
+            <a:ext cx="2011680" cy="274320"/>
+          </a:xfrm>
+          <a:prstGeom prst="rect">
+            <a:avLst/>
+          </a:prstGeom>
+          <a:noFill/>
+          <a:ln/>
+        </p:spPr>
+        <p:txBody>
+          <a:bodyPr wrap="square" lIns="0" tIns="0" rIns="0" bIns="0" rtlCol="0" anchor="ctr"/>
+          <a:lstStyle/>
+          <a:p>
+            <a:pPr algn="ctr" indent="0" marL="0">
+              <a:buNone/>
+            </a:pPr>
+            <a:r>
+              <a:rPr lang="en-US" sz="950" b="1" dirty="0">
+                <a:solidFill>
+                  <a:srgbClr val="16305B"/>
+                </a:solidFill>
+                <a:latin typeface="Consolas" pitchFamily="34" charset="0"/>
+                <a:ea typeface="Consolas" pitchFamily="34" charset="-122"/>
+                <a:cs typeface="Consolas" pitchFamily="34" charset="-120"/>
+              </a:rPr>
+              <a:t>icepak.py</a:t>
+            </a:r>
+            <a:endParaRPr lang="en-US" sz="950" dirty="0"/>
+          </a:p>
+        </p:txBody>
+      </p:sp>
+      <p:sp>
+        <p:nvSpPr>
+          <p:cNvPr id="28" name="Text 26"/>
+          <p:cNvSpPr txBox="1"/>
+          <p:nvPr/>
+        </p:nvSpPr>
+        <p:spPr>
+          <a:xfrm>
+            <a:off x="7013448" y="2450592"/>
+            <a:ext cx="2011680" cy="274320"/>
+          </a:xfrm>
+          <a:prstGeom prst="rect">
+            <a:avLst/>
+          </a:prstGeom>
+          <a:noFill/>
+          <a:ln/>
+        </p:spPr>
+        <p:txBody>
+          <a:bodyPr wrap="square" lIns="0" tIns="0" rIns="0" bIns="0" rtlCol="0" anchor="ctr"/>
+          <a:lstStyle/>
+          <a:p>
+            <a:pPr algn="ctr" indent="0" marL="0">
+              <a:buNone/>
+            </a:pPr>
+            <a:r>
+              <a:rPr lang="en-US" sz="880" dirty="0">
+                <a:solidFill>
+                  <a:srgbClr val="6B7A8F"/>
+                </a:solidFill>
+                <a:latin typeface="Malgun Gothic" pitchFamily="34" charset="0"/>
+                <a:ea typeface="Malgun Gothic" pitchFamily="34" charset="-122"/>
+                <a:cs typeface="Malgun Gothic" pitchFamily="34" charset="-120"/>
+              </a:rPr>
+              <a:t>결과 CSV</a:t>
+            </a:r>
+            <a:endParaRPr lang="en-US" sz="880" dirty="0"/>
+          </a:p>
+        </p:txBody>
+      </p:sp>
+      <p:sp>
+        <p:nvSpPr>
+          <p:cNvPr id="29" name="Text 27"/>
+          <p:cNvSpPr txBox="1"/>
+          <p:nvPr/>
+        </p:nvSpPr>
+        <p:spPr>
+          <a:xfrm>
+            <a:off x="9025128" y="1847088"/>
+            <a:ext cx="237744" cy="932688"/>
+          </a:xfrm>
+          <a:prstGeom prst="rect">
+            <a:avLst/>
+          </a:prstGeom>
+          <a:noFill/>
+          <a:ln/>
+        </p:spPr>
+        <p:txBody>
+          <a:bodyPr wrap="square" lIns="0" tIns="0" rIns="0" bIns="0" rtlCol="0" anchor="ctr"/>
+          <a:lstStyle/>
+          <a:p>
+            <a:pPr algn="ctr" indent="0" marL="0">
+              <a:buNone/>
+            </a:pPr>
+            <a:r>
+              <a:rPr lang="en-US" sz="900" dirty="0">
+                <a:solidFill>
+                  <a:srgbClr val="00A3C4"/>
+                </a:solidFill>
+                <a:latin typeface="Malgun Gothic" pitchFamily="34" charset="0"/>
+                <a:ea typeface="Malgun Gothic" pitchFamily="34" charset="-122"/>
+                <a:cs typeface="Malgun Gothic" pitchFamily="34" charset="-120"/>
+              </a:rPr>
+              <a:t>▶</a:t>
+            </a:r>
+            <a:endParaRPr lang="en-US" sz="900" dirty="0"/>
+          </a:p>
+        </p:txBody>
+      </p:sp>
+      <p:sp>
+        <p:nvSpPr>
+          <p:cNvPr id="30" name="Shape 28"/>
+          <p:cNvSpPr/>
+          <p:nvPr/>
+        </p:nvSpPr>
+        <p:spPr>
+          <a:xfrm>
+            <a:off x="9262872" y="1847088"/>
+            <a:ext cx="2011680" cy="932688"/>
+          </a:xfrm>
+          <a:prstGeom prst="roundRect">
+            <a:avLst>
+              <a:gd name="adj" fmla="val 6863"/>
+            </a:avLst>
+          </a:prstGeom>
+          <a:solidFill>
+            <a:srgbClr val="F7F9FC"/>
+          </a:solidFill>
+          <a:ln w="9525">
+            <a:solidFill>
+              <a:srgbClr val="DDE3EB"/>
+            </a:solidFill>
+            <a:prstDash val="solid"/>
+          </a:ln>
+        </p:spPr>
+      </p:sp>
+      <p:sp>
+        <p:nvSpPr>
+          <p:cNvPr id="31" name="Shape 29"/>
+          <p:cNvSpPr/>
+          <p:nvPr/>
+        </p:nvSpPr>
+        <p:spPr>
+          <a:xfrm>
+            <a:off x="9262872" y="1847088"/>
+            <a:ext cx="2011680" cy="310896"/>
+          </a:xfrm>
+          <a:prstGeom prst="rect">
+            <a:avLst/>
+          </a:prstGeom>
+          <a:solidFill>
+            <a:srgbClr val="00A3C4"/>
+          </a:solidFill>
+          <a:ln w="12700">
+            <a:solidFill>
+              <a:srgbClr val="00A3C4"/>
+            </a:solidFill>
+            <a:prstDash val="solid"/>
+          </a:ln>
+        </p:spPr>
+      </p:sp>
+      <p:sp>
+        <p:nvSpPr>
+          <p:cNvPr id="32" name="Text 30"/>
+          <p:cNvSpPr txBox="1"/>
+          <p:nvPr/>
+        </p:nvSpPr>
+        <p:spPr>
+          <a:xfrm>
+            <a:off x="9262872" y="1847088"/>
+            <a:ext cx="2011680" cy="310896"/>
+          </a:xfrm>
+          <a:prstGeom prst="rect">
+            <a:avLst/>
+          </a:prstGeom>
+          <a:noFill/>
+          <a:ln/>
+        </p:spPr>
+        <p:txBody>
+          <a:bodyPr wrap="square" lIns="0" tIns="0" rIns="0" bIns="0" rtlCol="0" anchor="ctr"/>
+          <a:lstStyle/>
+          <a:p>
+            <a:pPr algn="ctr" indent="0" marL="0">
+              <a:buNone/>
+            </a:pPr>
+            <a:r>
+              <a:rPr lang="en-US" sz="1000" b="1" dirty="0">
+                <a:solidFill>
+                  <a:srgbClr val="FFFFFF"/>
+                </a:solidFill>
+                <a:latin typeface="Malgun Gothic" pitchFamily="34" charset="0"/>
+                <a:ea typeface="Malgun Gothic" pitchFamily="34" charset="-122"/>
+                <a:cs typeface="Malgun Gothic" pitchFamily="34" charset="-120"/>
+              </a:rPr>
+              <a:t>4  결과 저장</a:t>
+            </a:r>
+            <a:endParaRPr lang="en-US" sz="1000" dirty="0"/>
+          </a:p>
+        </p:txBody>
+      </p:sp>
+      <p:sp>
+        <p:nvSpPr>
+          <p:cNvPr id="33" name="Text 31"/>
+          <p:cNvSpPr txBox="1"/>
+          <p:nvPr/>
+        </p:nvSpPr>
+        <p:spPr>
+          <a:xfrm>
+            <a:off x="9262872" y="2194560"/>
+            <a:ext cx="2011680" cy="274320"/>
+          </a:xfrm>
+          <a:prstGeom prst="rect">
+            <a:avLst/>
+          </a:prstGeom>
+          <a:noFill/>
+          <a:ln/>
+        </p:spPr>
+        <p:txBody>
+          <a:bodyPr wrap="square" lIns="0" tIns="0" rIns="0" bIns="0" rtlCol="0" anchor="ctr"/>
+          <a:lstStyle/>
+          <a:p>
+            <a:pPr algn="ctr" indent="0" marL="0">
+              <a:buNone/>
+            </a:pPr>
+            <a:r>
+              <a:rPr lang="en-US" sz="950" b="1" dirty="0">
+                <a:solidFill>
+                  <a:srgbClr val="16305B"/>
+                </a:solidFill>
+                <a:latin typeface="Consolas" pitchFamily="34" charset="0"/>
+                <a:ea typeface="Consolas" pitchFamily="34" charset="-122"/>
+                <a:cs typeface="Consolas" pitchFamily="34" charset="-120"/>
+              </a:rPr>
+              <a:t>result_parser.py</a:t>
+            </a:r>
+            <a:endParaRPr lang="en-US" sz="950" dirty="0"/>
+          </a:p>
+        </p:txBody>
+      </p:sp>
+      <p:sp>
+        <p:nvSpPr>
+          <p:cNvPr id="34" name="Text 32"/>
+          <p:cNvSpPr txBox="1"/>
+          <p:nvPr/>
+        </p:nvSpPr>
+        <p:spPr>
+          <a:xfrm>
+            <a:off x="9262872" y="2450592"/>
+            <a:ext cx="2011680" cy="274320"/>
+          </a:xfrm>
+          <a:prstGeom prst="rect">
+            <a:avLst/>
+          </a:prstGeom>
+          <a:noFill/>
+          <a:ln/>
+        </p:spPr>
+        <p:txBody>
+          <a:bodyPr wrap="square" lIns="0" tIns="0" rIns="0" bIns="0" rtlCol="0" anchor="ctr"/>
+          <a:lstStyle/>
+          <a:p>
+            <a:pPr algn="ctr" indent="0" marL="0">
+              <a:buNone/>
+            </a:pPr>
+            <a:r>
+              <a:rPr lang="en-US" sz="880" dirty="0">
+                <a:solidFill>
+                  <a:srgbClr val="6B7A8F"/>
+                </a:solidFill>
+                <a:latin typeface="Malgun Gothic" pitchFamily="34" charset="0"/>
+                <a:ea typeface="Malgun Gothic" pitchFamily="34" charset="-122"/>
+                <a:cs typeface="Malgun Gothic" pitchFamily="34" charset="-120"/>
+              </a:rPr>
+              <a:t>차압 · 온도 · 유량 · 중량</a:t>
+            </a:r>
+            <a:endParaRPr lang="en-US" sz="880" dirty="0"/>
+          </a:p>
+        </p:txBody>
+      </p:sp>
+      <p:sp>
+        <p:nvSpPr>
+          <p:cNvPr id="35" name="Shape 33"/>
+          <p:cNvSpPr/>
+          <p:nvPr/>
+        </p:nvSpPr>
+        <p:spPr>
+          <a:xfrm>
+            <a:off x="2514600" y="2889504"/>
+            <a:ext cx="8759952" cy="256032"/>
+          </a:xfrm>
+          <a:prstGeom prst="roundRect">
+            <a:avLst>
+              <a:gd name="adj" fmla="val 17857"/>
+            </a:avLst>
+          </a:prstGeom>
+          <a:solidFill>
+            <a:srgbClr val="EEF2F7"/>
+          </a:solidFill>
+          <a:ln w="12700">
+            <a:solidFill>
+              <a:srgbClr val="EEF2F7"/>
+            </a:solidFill>
+            <a:prstDash val="solid"/>
+          </a:ln>
+        </p:spPr>
+      </p:sp>
+      <p:sp>
+        <p:nvSpPr>
+          <p:cNvPr id="36" name="Text 34"/>
+          <p:cNvSpPr txBox="1"/>
+          <p:nvPr/>
+        </p:nvSpPr>
+        <p:spPr>
+          <a:xfrm>
+            <a:off x="2651760" y="2889504"/>
+            <a:ext cx="8485632" cy="256032"/>
+          </a:xfrm>
+          <a:prstGeom prst="rect">
+            <a:avLst/>
+          </a:prstGeom>
+          <a:noFill/>
+          <a:ln/>
+        </p:spPr>
+        <p:txBody>
+          <a:bodyPr wrap="square" lIns="0" tIns="0" rIns="0" bIns="0" rtlCol="0" anchor="ctr"/>
+          <a:lstStyle/>
+          <a:p>
+            <a:pPr indent="0" marL="0">
+              <a:buNone/>
+            </a:pPr>
+            <a:r>
+              <a:rPr lang="en-US" sz="900" b="1" dirty="0">
+                <a:solidFill>
+                  <a:srgbClr val="16305B"/>
+                </a:solidFill>
+                <a:latin typeface="Consolas" pitchFamily="34" charset="0"/>
+                <a:ea typeface="Consolas" pitchFamily="34" charset="-122"/>
+                <a:cs typeface="Consolas" pitchFamily="34" charset="-120"/>
+              </a:rPr>
+              <a:t>paths.py</a:t>
+            </a:r>
+            <a:pPr indent="0" marL="0">
+              <a:buNone/>
+            </a:pPr>
+            <a:r>
+              <a:rPr lang="en-US" sz="900" dirty="0">
+                <a:solidFill>
+                  <a:srgbClr val="1C2733"/>
+                </a:solidFill>
+                <a:latin typeface="Malgun Gothic" pitchFamily="34" charset="0"/>
+                <a:ea typeface="Malgun Gothic" pitchFamily="34" charset="-122"/>
+                <a:cs typeface="Malgun Gothic" pitchFamily="34" charset="-120"/>
+              </a:rPr>
+              <a:t>   작업폴더 · 모델 파일 · 결과 파일 경로를 한 곳에서 관리</a:t>
+            </a:r>
+            <a:endParaRPr lang="en-US" sz="900" dirty="0"/>
+          </a:p>
+        </p:txBody>
+      </p:sp>
+      <p:sp>
+        <p:nvSpPr>
+          <p:cNvPr id="37" name="Shape 35"/>
+          <p:cNvSpPr/>
+          <p:nvPr/>
+        </p:nvSpPr>
+        <p:spPr>
+          <a:xfrm>
+            <a:off x="502920" y="3374136"/>
+            <a:ext cx="11183112" cy="2011680"/>
+          </a:xfrm>
+          <a:prstGeom prst="roundRect">
+            <a:avLst>
+              <a:gd name="adj" fmla="val 2727"/>
+            </a:avLst>
+          </a:prstGeom>
+          <a:solidFill>
+            <a:srgbClr val="FFFFFF"/>
+          </a:solidFill>
+          <a:ln w="9525">
+            <a:solidFill>
+              <a:srgbClr val="DDE3EB"/>
+            </a:solidFill>
+            <a:prstDash val="solid"/>
+          </a:ln>
+          <a:effectLst>
+            <a:outerShdw sx="100000" sy="100000" kx="0" ky="0" algn="bl" rotWithShape="0" blurRad="101600" dist="12700" dir="5400000">
+              <a:srgbClr val="9AA8BC">
+                <a:alpha val="18000"/>
+              </a:srgbClr>
+            </a:outerShdw>
+          </a:effectLst>
+        </p:spPr>
+      </p:sp>
+      <p:sp>
+        <p:nvSpPr>
+          <p:cNvPr id="38" name="Shape 36"/>
+          <p:cNvSpPr/>
+          <p:nvPr/>
+        </p:nvSpPr>
+        <p:spPr>
+          <a:xfrm>
+            <a:off x="758952" y="3648456"/>
+            <a:ext cx="82296" cy="182880"/>
+          </a:xfrm>
+          <a:prstGeom prst="rect">
+            <a:avLst/>
+          </a:prstGeom>
+          <a:solidFill>
+            <a:srgbClr val="00A3C4"/>
+          </a:solidFill>
+          <a:ln w="12700">
+            <a:solidFill>
+              <a:srgbClr val="00A3C4"/>
+            </a:solidFill>
+            <a:prstDash val="solid"/>
+          </a:ln>
+        </p:spPr>
+      </p:sp>
+      <p:sp>
+        <p:nvSpPr>
+          <p:cNvPr id="39" name="Text 37"/>
+          <p:cNvSpPr txBox="1"/>
+          <p:nvPr/>
+        </p:nvSpPr>
+        <p:spPr>
+          <a:xfrm>
+            <a:off x="923544" y="3557016"/>
+            <a:ext cx="4480560" cy="365760"/>
+          </a:xfrm>
+          <a:prstGeom prst="rect">
+            <a:avLst/>
+          </a:prstGeom>
+          <a:noFill/>
+          <a:ln/>
+        </p:spPr>
+        <p:txBody>
+          <a:bodyPr wrap="square" lIns="0" tIns="0" rIns="0" bIns="0" rtlCol="0" anchor="ctr"/>
+          <a:lstStyle/>
+          <a:p>
+            <a:pPr indent="0" marL="0">
+              <a:buNone/>
+            </a:pPr>
+            <a:r>
+              <a:rPr lang="en-US" sz="1300" b="1" dirty="0">
+                <a:solidFill>
+                  <a:srgbClr val="16305B"/>
+                </a:solidFill>
+                <a:latin typeface="Malgun Gothic" pitchFamily="34" charset="0"/>
+                <a:ea typeface="Malgun Gothic" pitchFamily="34" charset="-122"/>
+                <a:cs typeface="Malgun Gothic" pitchFamily="34" charset="-120"/>
+              </a:rPr>
+              <a:t>파일별 역할</a:t>
+            </a:r>
+            <a:endParaRPr lang="en-US" sz="1300" dirty="0"/>
+          </a:p>
+        </p:txBody>
+      </p:sp>
+      <p:graphicFrame>
+        <p:nvGraphicFramePr>
+          <p:cNvPr id="9" name="Table 0"/>
+          <p:cNvGraphicFramePr>
+            <a:graphicFrameLocks noGrp="1"/>
+          </p:cNvGraphicFramePr>
+          <p:nvPr>
+            <p:extLst>
+              <p:ext uri="{D42A27DB-BD31-4B8C-83A1-F6EECF244321}">
+                <p14:modId xmlns:p14="http://schemas.microsoft.com/office/powerpoint/2010/main" val="1579011935"/>
+              </p:ext>
+            </p:extLst>
+          </p:nvPr>
+        </p:nvGraphicFramePr>
+        <p:xfrm>
+          <a:off x="813816" y="3922776"/>
+          <a:ext cx="5257800" cy="914400"/>
+        </p:xfrm>
+        <a:graphic>
+          <a:graphicData uri="http://schemas.openxmlformats.org/drawingml/2006/table">
+            <a:tbl>
+              <a:tblPr/>
+              <a:tblGrid>
+                <a:gridCol w="1371600"/>
+                <a:gridCol w="3886200"/>
+              </a:tblGrid>
+              <a:tr h="274320">
+                <a:tc>
+                  <a:txBody>
+                    <a:bodyPr/>
+                    <a:lstStyle/>
+                    <a:p>
+                      <a:pPr indent="0" marL="0">
+                        <a:buNone/>
+                      </a:pPr>
+                      <a:r>
+                        <a:rPr lang="en-US" sz="950" b="1" dirty="0">
+                          <a:solidFill>
+                            <a:srgbClr val="16305B"/>
+                          </a:solidFill>
+                          <a:latin typeface="Malgun Gothic" pitchFamily="34" charset="0"/>
+                          <a:ea typeface="Malgun Gothic" pitchFamily="34" charset="-122"/>
+                          <a:cs typeface="Malgun Gothic" pitchFamily="34" charset="-120"/>
+                        </a:rPr>
+                        <a:t>파일</a:t>
+                      </a:r>
+                      <a:endParaRPr lang="en-US" sz="950" dirty="0">
+                        <a:latin typeface="Malgun Gothic" charset="0"/>
+                        <a:ea typeface="Malgun Gothic" charset="0"/>
+                        <a:cs typeface="Malgun Gothic" charset="0"/>
+                      </a:endParaRPr>
+                    </a:p>
+                  </a:txBody>
+                  <a:tcPr marL="50800" marR="50800" marT="25400" marB="25400" anchor="ctr">
+                    <a:lnL w="0" cap="flat" cmpd="sng" algn="ctr">
+                      <a:noFill/>
+                    </a:lnL>
+                    <a:lnR w="0" cap="flat" cmpd="sng" algn="ctr">
+                      <a:noFill/>
+                    </a:lnR>
+                    <a:lnT w="0" cap="flat" cmpd="sng" algn="ctr">
+                      <a:noFill/>
+                    </a:lnT>
+                    <a:lnB w="6350" cap="flat" cmpd="sng" algn="ctr">
+                      <a:solidFill>
+                        <a:srgbClr val="DDE3EB"/>
+                      </a:solidFill>
+                      <a:prstDash val="solid"/>
+                      <a:round/>
+                      <a:headEnd type="none" w="med" len="med"/>
+                      <a:tailEnd type="none" w="med" len="med"/>
+                    </a:lnB>
+                    <a:solidFill>
+                      <a:srgbClr val="EEF2F7"/>
+                    </a:solidFill>
+                  </a:tcPr>
+                </a:tc>
+                <a:tc>
+                  <a:txBody>
+                    <a:bodyPr/>
+                    <a:lstStyle/>
+                    <a:p>
+                      <a:pPr indent="0" marL="0">
+                        <a:buNone/>
+                      </a:pPr>
+                      <a:r>
+                        <a:rPr lang="en-US" sz="950" b="1" dirty="0">
+                          <a:solidFill>
+                            <a:srgbClr val="16305B"/>
+                          </a:solidFill>
+                          <a:latin typeface="Malgun Gothic" pitchFamily="34" charset="0"/>
+                          <a:ea typeface="Malgun Gothic" pitchFamily="34" charset="-122"/>
+                          <a:cs typeface="Malgun Gothic" pitchFamily="34" charset="-120"/>
+                        </a:rPr>
+                        <a:t>역할</a:t>
+                      </a:r>
+                      <a:endParaRPr lang="en-US" sz="950" dirty="0">
+                        <a:latin typeface="Malgun Gothic" charset="0"/>
+                        <a:ea typeface="Malgun Gothic" charset="0"/>
+                        <a:cs typeface="Malgun Gothic" charset="0"/>
+                      </a:endParaRPr>
+                    </a:p>
+                  </a:txBody>
+                  <a:tcPr marL="50800" marR="50800" marT="25400" marB="25400" anchor="ctr">
+                    <a:lnL w="0" cap="flat" cmpd="sng" algn="ctr">
+                      <a:noFill/>
+                    </a:lnL>
+                    <a:lnR w="0" cap="flat" cmpd="sng" algn="ctr">
+                      <a:noFill/>
+                    </a:lnR>
+                    <a:lnT w="0" cap="flat" cmpd="sng" algn="ctr">
+                      <a:noFill/>
+                    </a:lnT>
+                    <a:lnB w="6350" cap="flat" cmpd="sng" algn="ctr">
+                      <a:solidFill>
+                        <a:srgbClr val="DDE3EB"/>
+                      </a:solidFill>
+                      <a:prstDash val="solid"/>
+                      <a:round/>
+                      <a:headEnd type="none" w="med" len="med"/>
+                      <a:tailEnd type="none" w="med" len="med"/>
+                    </a:lnB>
+                    <a:solidFill>
+                      <a:srgbClr val="EEF2F7"/>
+                    </a:solidFill>
+                  </a:tcPr>
+                </a:tc>
+              </a:tr>
+              <a:tr h="274320">
+                <a:tc>
+                  <a:txBody>
+                    <a:bodyPr/>
+                    <a:lstStyle/>
+                    <a:p>
+                      <a:pPr indent="0" marL="0">
+                        <a:buNone/>
+                      </a:pPr>
+                      <a:r>
+                        <a:rPr lang="en-US" sz="950" b="1" dirty="0">
+                          <a:solidFill>
+                            <a:srgbClr val="16305B"/>
+                          </a:solidFill>
+                          <a:latin typeface="Consolas" pitchFamily="34" charset="0"/>
+                          <a:ea typeface="Consolas" pitchFamily="34" charset="-122"/>
+                          <a:cs typeface="Consolas" pitchFamily="34" charset="-120"/>
+                        </a:rPr>
+                        <a:t>main.py</a:t>
+                      </a:r>
+                      <a:endParaRPr lang="en-US" sz="950" dirty="0">
+                        <a:latin typeface="Consolas" charset="0"/>
+                        <a:ea typeface="Consolas" charset="0"/>
+                        <a:cs typeface="Consolas" charset="0"/>
+                      </a:endParaRPr>
+                    </a:p>
+                  </a:txBody>
+                  <a:tcPr marL="50800" marR="50800" marT="25400" marB="25400" anchor="ctr">
+                    <a:lnL w="0" cap="flat" cmpd="sng" algn="ctr">
+                      <a:noFill/>
+                    </a:lnL>
+                    <a:lnR w="0" cap="flat" cmpd="sng" algn="ctr">
+                      <a:noFill/>
+                    </a:lnR>
+                    <a:lnT w="0" cap="flat" cmpd="sng" algn="ctr">
+                      <a:noFill/>
+                    </a:lnT>
+                    <a:lnB w="6350" cap="flat" cmpd="sng" algn="ctr">
+                      <a:solidFill>
+                        <a:srgbClr val="DDE3EB"/>
+                      </a:solidFill>
+                      <a:prstDash val="solid"/>
+                      <a:round/>
+                      <a:headEnd type="none" w="med" len="med"/>
+                      <a:tailEnd type="none" w="med" len="med"/>
+                    </a:lnB>
+                  </a:tcPr>
+                </a:tc>
+                <a:tc>
+                  <a:txBody>
+                    <a:bodyPr/>
+                    <a:lstStyle/>
+                    <a:p>
+                      <a:pPr indent="0" marL="0">
+                        <a:buNone/>
+                      </a:pPr>
+                      <a:r>
+                        <a:rPr lang="en-US" sz="950" dirty="0">
+                          <a:solidFill>
+                            <a:srgbClr val="1C2733"/>
+                          </a:solidFill>
+                          <a:latin typeface="Malgun Gothic" pitchFamily="34" charset="0"/>
+                          <a:ea typeface="Malgun Gothic" pitchFamily="34" charset="-122"/>
+                          <a:cs typeface="Malgun Gothic" pitchFamily="34" charset="-120"/>
+                        </a:rPr>
+                        <a:t>실험점 → 형상 → 해석 → 저장 반복, 실패 시 기록 후 다음 점</a:t>
+                      </a:r>
+                      <a:endParaRPr lang="en-US" sz="950" dirty="0">
+                        <a:latin typeface="Malgun Gothic" charset="0"/>
+                        <a:ea typeface="Malgun Gothic" charset="0"/>
+                        <a:cs typeface="Malgun Gothic" charset="0"/>
+                      </a:endParaRPr>
+                    </a:p>
+                  </a:txBody>
+                  <a:tcPr marL="50800" marR="50800" marT="25400" marB="25400" anchor="ctr">
+                    <a:lnL w="0" cap="flat" cmpd="sng" algn="ctr">
+                      <a:noFill/>
+                    </a:lnL>
+                    <a:lnR w="0" cap="flat" cmpd="sng" algn="ctr">
+                      <a:noFill/>
+                    </a:lnR>
+                    <a:lnT w="0" cap="flat" cmpd="sng" algn="ctr">
+                      <a:noFill/>
+                    </a:lnT>
+                    <a:lnB w="6350" cap="flat" cmpd="sng" algn="ctr">
+                      <a:solidFill>
+                        <a:srgbClr val="DDE3EB"/>
+                      </a:solidFill>
+                      <a:prstDash val="solid"/>
+                      <a:round/>
+                      <a:headEnd type="none" w="med" len="med"/>
+                      <a:tailEnd type="none" w="med" len="med"/>
+                    </a:lnB>
+                  </a:tcPr>
+                </a:tc>
+              </a:tr>
+              <a:tr h="274320">
+                <a:tc>
+                  <a:txBody>
+                    <a:bodyPr/>
+                    <a:lstStyle/>
+                    <a:p>
+                      <a:pPr indent="0" marL="0">
+                        <a:buNone/>
+                      </a:pPr>
+                      <a:r>
+                        <a:rPr lang="en-US" sz="950" b="1" dirty="0">
+                          <a:solidFill>
+                            <a:srgbClr val="16305B"/>
+                          </a:solidFill>
+                          <a:latin typeface="Consolas" pitchFamily="34" charset="0"/>
+                          <a:ea typeface="Consolas" pitchFamily="34" charset="-122"/>
+                          <a:cs typeface="Consolas" pitchFamily="34" charset="-120"/>
+                        </a:rPr>
+                        <a:t>OLHD.py</a:t>
+                      </a:r>
+                      <a:endParaRPr lang="en-US" sz="950" dirty="0">
+                        <a:latin typeface="Consolas" charset="0"/>
+                        <a:ea typeface="Consolas" charset="0"/>
+                        <a:cs typeface="Consolas" charset="0"/>
+                      </a:endParaRPr>
+                    </a:p>
+                  </a:txBody>
+                  <a:tcPr marL="50800" marR="50800" marT="25400" marB="25400" anchor="ctr">
+                    <a:lnL w="0" cap="flat" cmpd="sng" algn="ctr">
+                      <a:noFill/>
+                    </a:lnL>
+                    <a:lnR w="0" cap="flat" cmpd="sng" algn="ctr">
+                      <a:noFill/>
+                    </a:lnR>
+                    <a:lnT w="0" cap="flat" cmpd="sng" algn="ctr">
+                      <a:noFill/>
+                    </a:lnT>
+                    <a:lnB w="6350" cap="flat" cmpd="sng" algn="ctr">
+                      <a:solidFill>
+                        <a:srgbClr val="DDE3EB"/>
+                      </a:solidFill>
+                      <a:prstDash val="solid"/>
+                      <a:round/>
+                      <a:headEnd type="none" w="med" len="med"/>
+                      <a:tailEnd type="none" w="med" len="med"/>
+                    </a:lnB>
+                  </a:tcPr>
+                </a:tc>
+                <a:tc>
+                  <a:txBody>
+                    <a:bodyPr/>
+                    <a:lstStyle/>
+                    <a:p>
+                      <a:pPr indent="0" marL="0">
+                        <a:buNone/>
+                      </a:pPr>
+                      <a:r>
+                        <a:rPr lang="en-US" sz="950" dirty="0">
+                          <a:solidFill>
+                            <a:srgbClr val="1C2733"/>
+                          </a:solidFill>
+                          <a:latin typeface="Malgun Gothic" pitchFamily="34" charset="0"/>
+                          <a:ea typeface="Malgun Gothic" pitchFamily="34" charset="-122"/>
+                          <a:cs typeface="Malgun Gothic" pitchFamily="34" charset="-120"/>
+                        </a:rPr>
+                        <a:t>설계변수 정의(단일 위치) · 초기 실험점 90개 생성</a:t>
+                      </a:r>
+                      <a:endParaRPr lang="en-US" sz="950" dirty="0">
+                        <a:latin typeface="Malgun Gothic" charset="0"/>
+                        <a:ea typeface="Malgun Gothic" charset="0"/>
+                        <a:cs typeface="Malgun Gothic" charset="0"/>
+                      </a:endParaRPr>
+                    </a:p>
+                  </a:txBody>
+                  <a:tcPr marL="50800" marR="50800" marT="25400" marB="25400" anchor="ctr">
+                    <a:lnL w="0" cap="flat" cmpd="sng" algn="ctr">
+                      <a:noFill/>
+                    </a:lnL>
+                    <a:lnR w="0" cap="flat" cmpd="sng" algn="ctr">
+                      <a:noFill/>
+                    </a:lnR>
+                    <a:lnT w="0" cap="flat" cmpd="sng" algn="ctr">
+                      <a:noFill/>
+                    </a:lnT>
+                    <a:lnB w="6350" cap="flat" cmpd="sng" algn="ctr">
+                      <a:solidFill>
+                        <a:srgbClr val="DDE3EB"/>
+                      </a:solidFill>
+                      <a:prstDash val="solid"/>
+                      <a:round/>
+                      <a:headEnd type="none" w="med" len="med"/>
+                      <a:tailEnd type="none" w="med" len="med"/>
+                    </a:lnB>
+                  </a:tcPr>
+                </a:tc>
+              </a:tr>
+              <a:tr h="274320">
+                <a:tc>
+                  <a:txBody>
+                    <a:bodyPr/>
+                    <a:lstStyle/>
+                    <a:p>
+                      <a:pPr indent="0" marL="0">
+                        <a:buNone/>
+                      </a:pPr>
+                      <a:r>
+                        <a:rPr lang="en-US" sz="950" b="1" dirty="0">
+                          <a:solidFill>
+                            <a:srgbClr val="16305B"/>
+                          </a:solidFill>
+                          <a:latin typeface="Consolas" pitchFamily="34" charset="0"/>
+                          <a:ea typeface="Consolas" pitchFamily="34" charset="-122"/>
+                          <a:cs typeface="Consolas" pitchFamily="34" charset="-120"/>
+                        </a:rPr>
+                        <a:t>fins.py</a:t>
+                      </a:r>
+                      <a:endParaRPr lang="en-US" sz="950" dirty="0">
+                        <a:latin typeface="Consolas" charset="0"/>
+                        <a:ea typeface="Consolas" charset="0"/>
+                        <a:cs typeface="Consolas" charset="0"/>
+                      </a:endParaRPr>
+                    </a:p>
+                  </a:txBody>
+                  <a:tcPr marL="50800" marR="50800" marT="25400" marB="25400" anchor="ctr">
+                    <a:lnL w="0" cap="flat" cmpd="sng" algn="ctr">
+                      <a:noFill/>
+                    </a:lnL>
+                    <a:lnR w="0" cap="flat" cmpd="sng" algn="ctr">
+                      <a:noFill/>
+                    </a:lnR>
+                    <a:lnT w="0" cap="flat" cmpd="sng" algn="ctr">
+                      <a:noFill/>
+                    </a:lnT>
+                    <a:lnB w="6350" cap="flat" cmpd="sng" algn="ctr">
+                      <a:solidFill>
+                        <a:srgbClr val="DDE3EB"/>
+                      </a:solidFill>
+                      <a:prstDash val="solid"/>
+                      <a:round/>
+                      <a:headEnd type="none" w="med" len="med"/>
+                      <a:tailEnd type="none" w="med" len="med"/>
+                    </a:lnB>
+                  </a:tcPr>
+                </a:tc>
+                <a:tc>
+                  <a:txBody>
+                    <a:bodyPr/>
+                    <a:lstStyle/>
+                    <a:p>
+                      <a:pPr indent="0" marL="0">
+                        <a:buNone/>
+                      </a:pPr>
+                      <a:r>
+                        <a:rPr lang="en-US" sz="950" dirty="0">
+                          <a:solidFill>
+                            <a:srgbClr val="1C2733"/>
+                          </a:solidFill>
+                          <a:latin typeface="Malgun Gothic" pitchFamily="34" charset="0"/>
+                          <a:ea typeface="Malgun Gothic" pitchFamily="34" charset="-122"/>
+                          <a:cs typeface="Malgun Gothic" pitchFamily="34" charset="-120"/>
+                        </a:rPr>
+                        <a:t>핀 두께·개수로 갭 계산, 갭 ≥ 2.5mm 제약 판정</a:t>
+                      </a:r>
+                      <a:endParaRPr lang="en-US" sz="950" dirty="0">
+                        <a:latin typeface="Malgun Gothic" charset="0"/>
+                        <a:ea typeface="Malgun Gothic" charset="0"/>
+                        <a:cs typeface="Malgun Gothic" charset="0"/>
+                      </a:endParaRPr>
+                    </a:p>
+                  </a:txBody>
+                  <a:tcPr marL="50800" marR="50800" marT="25400" marB="25400" anchor="ctr">
+                    <a:lnL w="0" cap="flat" cmpd="sng" algn="ctr">
+                      <a:noFill/>
+                    </a:lnL>
+                    <a:lnR w="0" cap="flat" cmpd="sng" algn="ctr">
+                      <a:noFill/>
+                    </a:lnR>
+                    <a:lnT w="0" cap="flat" cmpd="sng" algn="ctr">
+                      <a:noFill/>
+                    </a:lnT>
+                    <a:lnB w="6350" cap="flat" cmpd="sng" algn="ctr">
+                      <a:solidFill>
+                        <a:srgbClr val="DDE3EB"/>
+                      </a:solidFill>
+                      <a:prstDash val="solid"/>
+                      <a:round/>
+                      <a:headEnd type="none" w="med" len="med"/>
+                      <a:tailEnd type="none" w="med" len="med"/>
+                    </a:lnB>
+                  </a:tcPr>
+                </a:tc>
+              </a:tr>
+              <a:tr h="274320">
+                <a:tc>
+                  <a:txBody>
+                    <a:bodyPr/>
+                    <a:lstStyle/>
+                    <a:p>
+                      <a:pPr indent="0" marL="0">
+                        <a:buNone/>
+                      </a:pPr>
+                      <a:r>
+                        <a:rPr lang="en-US" sz="950" b="1" dirty="0">
+                          <a:solidFill>
+                            <a:srgbClr val="16305B"/>
+                          </a:solidFill>
+                          <a:latin typeface="Consolas" pitchFamily="34" charset="0"/>
+                          <a:ea typeface="Consolas" pitchFamily="34" charset="-122"/>
+                          <a:cs typeface="Consolas" pitchFamily="34" charset="-120"/>
+                        </a:rPr>
+                        <a:t>paths.py</a:t>
+                      </a:r>
+                      <a:endParaRPr lang="en-US" sz="950" dirty="0">
+                        <a:latin typeface="Consolas" charset="0"/>
+                        <a:ea typeface="Consolas" charset="0"/>
+                        <a:cs typeface="Consolas" charset="0"/>
+                      </a:endParaRPr>
+                    </a:p>
+                  </a:txBody>
+                  <a:tcPr marL="50800" marR="50800" marT="25400" marB="25400" anchor="ctr">
+                    <a:lnL w="0" cap="flat" cmpd="sng" algn="ctr">
+                      <a:noFill/>
+                    </a:lnL>
+                    <a:lnR w="0" cap="flat" cmpd="sng" algn="ctr">
+                      <a:noFill/>
+                    </a:lnR>
+                    <a:lnT w="0" cap="flat" cmpd="sng" algn="ctr">
+                      <a:noFill/>
+                    </a:lnT>
+                    <a:lnB w="6350" cap="flat" cmpd="sng" algn="ctr">
+                      <a:solidFill>
+                        <a:srgbClr val="DDE3EB"/>
+                      </a:solidFill>
+                      <a:prstDash val="solid"/>
+                      <a:round/>
+                      <a:headEnd type="none" w="med" len="med"/>
+                      <a:tailEnd type="none" w="med" len="med"/>
+                    </a:lnB>
+                  </a:tcPr>
+                </a:tc>
+                <a:tc>
+                  <a:txBody>
+                    <a:bodyPr/>
+                    <a:lstStyle/>
+                    <a:p>
+                      <a:pPr indent="0" marL="0">
+                        <a:buNone/>
+                      </a:pPr>
+                      <a:r>
+                        <a:rPr lang="en-US" sz="950" dirty="0">
+                          <a:solidFill>
+                            <a:srgbClr val="1C2733"/>
+                          </a:solidFill>
+                          <a:latin typeface="Malgun Gothic" pitchFamily="34" charset="0"/>
+                          <a:ea typeface="Malgun Gothic" pitchFamily="34" charset="-122"/>
+                          <a:cs typeface="Malgun Gothic" pitchFamily="34" charset="-120"/>
+                        </a:rPr>
+                        <a:t>모든 경로를 한 곳에서 관리</a:t>
+                      </a:r>
+                      <a:endParaRPr lang="en-US" sz="950" dirty="0">
+                        <a:latin typeface="Malgun Gothic" charset="0"/>
+                        <a:ea typeface="Malgun Gothic" charset="0"/>
+                        <a:cs typeface="Malgun Gothic" charset="0"/>
+                      </a:endParaRPr>
+                    </a:p>
+                  </a:txBody>
+                  <a:tcPr marL="50800" marR="50800" marT="25400" marB="25400" anchor="ctr">
+                    <a:lnL w="0" cap="flat" cmpd="sng" algn="ctr">
+                      <a:noFill/>
+                    </a:lnL>
+                    <a:lnR w="0" cap="flat" cmpd="sng" algn="ctr">
+                      <a:noFill/>
+                    </a:lnR>
+                    <a:lnT w="0" cap="flat" cmpd="sng" algn="ctr">
+                      <a:noFill/>
+                    </a:lnT>
+                    <a:lnB w="6350" cap="flat" cmpd="sng" algn="ctr">
+                      <a:solidFill>
+                        <a:srgbClr val="DDE3EB"/>
+                      </a:solidFill>
+                      <a:prstDash val="solid"/>
+                      <a:round/>
+                      <a:headEnd type="none" w="med" len="med"/>
+                      <a:tailEnd type="none" w="med" len="med"/>
+                    </a:lnB>
+                  </a:tcPr>
+                </a:tc>
+              </a:tr>
+            </a:tbl>
+          </a:graphicData>
+        </a:graphic>
+      </p:graphicFrame>
+      <p:graphicFrame>
+        <p:nvGraphicFramePr>
+          <p:cNvPr id="17" name="Table 1"/>
+          <p:cNvGraphicFramePr>
+            <a:graphicFrameLocks noGrp="1"/>
+          </p:cNvGraphicFramePr>
+          <p:nvPr>
+            <p:extLst>
+              <p:ext uri="{D42A27DB-BD31-4B8C-83A1-F6EECF244321}">
+                <p14:modId xmlns:p14="http://schemas.microsoft.com/office/powerpoint/2010/main" val="1579011935"/>
+              </p:ext>
+            </p:extLst>
+          </p:nvPr>
+        </p:nvGraphicFramePr>
+        <p:xfrm>
+          <a:off x="6300216" y="3922776"/>
+          <a:ext cx="5074920" cy="914400"/>
+        </p:xfrm>
+        <a:graphic>
+          <a:graphicData uri="http://schemas.openxmlformats.org/drawingml/2006/table">
+            <a:tbl>
+              <a:tblPr/>
+              <a:tblGrid>
+                <a:gridCol w="1463040"/>
+                <a:gridCol w="3611880"/>
+              </a:tblGrid>
+              <a:tr h="274320">
+                <a:tc>
+                  <a:txBody>
+                    <a:bodyPr/>
+                    <a:lstStyle/>
+                    <a:p>
+                      <a:pPr indent="0" marL="0">
+                        <a:buNone/>
+                      </a:pPr>
+                      <a:r>
+                        <a:rPr lang="en-US" sz="950" b="1" dirty="0">
+                          <a:solidFill>
+                            <a:srgbClr val="16305B"/>
+                          </a:solidFill>
+                          <a:latin typeface="Malgun Gothic" pitchFamily="34" charset="0"/>
+                          <a:ea typeface="Malgun Gothic" pitchFamily="34" charset="-122"/>
+                          <a:cs typeface="Malgun Gothic" pitchFamily="34" charset="-120"/>
+                        </a:rPr>
+                        <a:t>파일</a:t>
+                      </a:r>
+                      <a:endParaRPr lang="en-US" sz="950" dirty="0">
+                        <a:latin typeface="Malgun Gothic" charset="0"/>
+                        <a:ea typeface="Malgun Gothic" charset="0"/>
+                        <a:cs typeface="Malgun Gothic" charset="0"/>
+                      </a:endParaRPr>
+                    </a:p>
+                  </a:txBody>
+                  <a:tcPr marL="50800" marR="50800" marT="25400" marB="25400" anchor="ctr">
+                    <a:lnL w="0" cap="flat" cmpd="sng" algn="ctr">
+                      <a:noFill/>
+                    </a:lnL>
+                    <a:lnR w="0" cap="flat" cmpd="sng" algn="ctr">
+                      <a:noFill/>
+                    </a:lnR>
+                    <a:lnT w="0" cap="flat" cmpd="sng" algn="ctr">
+                      <a:noFill/>
+                    </a:lnT>
+                    <a:lnB w="6350" cap="flat" cmpd="sng" algn="ctr">
+                      <a:solidFill>
+                        <a:srgbClr val="DDE3EB"/>
+                      </a:solidFill>
+                      <a:prstDash val="solid"/>
+                      <a:round/>
+                      <a:headEnd type="none" w="med" len="med"/>
+                      <a:tailEnd type="none" w="med" len="med"/>
+                    </a:lnB>
+                    <a:solidFill>
+                      <a:srgbClr val="EEF2F7"/>
+                    </a:solidFill>
+                  </a:tcPr>
+                </a:tc>
+                <a:tc>
+                  <a:txBody>
+                    <a:bodyPr/>
+                    <a:lstStyle/>
+                    <a:p>
+                      <a:pPr indent="0" marL="0">
+                        <a:buNone/>
+                      </a:pPr>
+                      <a:r>
+                        <a:rPr lang="en-US" sz="950" b="1" dirty="0">
+                          <a:solidFill>
+                            <a:srgbClr val="16305B"/>
+                          </a:solidFill>
+                          <a:latin typeface="Malgun Gothic" pitchFamily="34" charset="0"/>
+                          <a:ea typeface="Malgun Gothic" pitchFamily="34" charset="-122"/>
+                          <a:cs typeface="Malgun Gothic" pitchFamily="34" charset="-120"/>
+                        </a:rPr>
+                        <a:t>역할</a:t>
+                      </a:r>
+                      <a:endParaRPr lang="en-US" sz="950" dirty="0">
+                        <a:latin typeface="Malgun Gothic" charset="0"/>
+                        <a:ea typeface="Malgun Gothic" charset="0"/>
+                        <a:cs typeface="Malgun Gothic" charset="0"/>
+                      </a:endParaRPr>
+                    </a:p>
+                  </a:txBody>
+                  <a:tcPr marL="50800" marR="50800" marT="25400" marB="25400" anchor="ctr">
+                    <a:lnL w="0" cap="flat" cmpd="sng" algn="ctr">
+                      <a:noFill/>
+                    </a:lnL>
+                    <a:lnR w="0" cap="flat" cmpd="sng" algn="ctr">
+                      <a:noFill/>
+                    </a:lnR>
+                    <a:lnT w="0" cap="flat" cmpd="sng" algn="ctr">
+                      <a:noFill/>
+                    </a:lnT>
+                    <a:lnB w="6350" cap="flat" cmpd="sng" algn="ctr">
+                      <a:solidFill>
+                        <a:srgbClr val="DDE3EB"/>
+                      </a:solidFill>
+                      <a:prstDash val="solid"/>
+                      <a:round/>
+                      <a:headEnd type="none" w="med" len="med"/>
+                      <a:tailEnd type="none" w="med" len="med"/>
+                    </a:lnB>
+                    <a:solidFill>
+                      <a:srgbClr val="EEF2F7"/>
+                    </a:solidFill>
+                  </a:tcPr>
+                </a:tc>
+              </a:tr>
+              <a:tr h="274320">
+                <a:tc>
+                  <a:txBody>
+                    <a:bodyPr/>
+                    <a:lstStyle/>
+                    <a:p>
+                      <a:pPr indent="0" marL="0">
+                        <a:buNone/>
+                      </a:pPr>
+                      <a:r>
+                        <a:rPr lang="en-US" sz="950" b="1" dirty="0">
+                          <a:solidFill>
+                            <a:srgbClr val="16305B"/>
+                          </a:solidFill>
+                          <a:latin typeface="Consolas" pitchFamily="34" charset="0"/>
+                          <a:ea typeface="Consolas" pitchFamily="34" charset="-122"/>
+                          <a:cs typeface="Consolas" pitchFamily="34" charset="-120"/>
+                        </a:rPr>
+                        <a:t>Solidworks.py</a:t>
+                      </a:r>
+                      <a:endParaRPr lang="en-US" sz="950" dirty="0">
+                        <a:latin typeface="Consolas" charset="0"/>
+                        <a:ea typeface="Consolas" charset="0"/>
+                        <a:cs typeface="Consolas" charset="0"/>
+                      </a:endParaRPr>
+                    </a:p>
+                  </a:txBody>
+                  <a:tcPr marL="50800" marR="50800" marT="25400" marB="25400" anchor="ctr">
+                    <a:lnL w="0" cap="flat" cmpd="sng" algn="ctr">
+                      <a:noFill/>
+                    </a:lnL>
+                    <a:lnR w="0" cap="flat" cmpd="sng" algn="ctr">
+                      <a:noFill/>
+                    </a:lnR>
+                    <a:lnT w="0" cap="flat" cmpd="sng" algn="ctr">
+                      <a:noFill/>
+                    </a:lnT>
+                    <a:lnB w="6350" cap="flat" cmpd="sng" algn="ctr">
+                      <a:solidFill>
+                        <a:srgbClr val="DDE3EB"/>
+                      </a:solidFill>
+                      <a:prstDash val="solid"/>
+                      <a:round/>
+                      <a:headEnd type="none" w="med" len="med"/>
+                      <a:tailEnd type="none" w="med" len="med"/>
+                    </a:lnB>
+                  </a:tcPr>
+                </a:tc>
+                <a:tc>
+                  <a:txBody>
+                    <a:bodyPr/>
+                    <a:lstStyle/>
+                    <a:p>
+                      <a:pPr indent="0" marL="0">
+                        <a:buNone/>
+                      </a:pPr>
+                      <a:r>
+                        <a:rPr lang="en-US" sz="950" dirty="0">
+                          <a:solidFill>
+                            <a:srgbClr val="1C2733"/>
+                          </a:solidFill>
+                          <a:latin typeface="Malgun Gothic" pitchFamily="34" charset="0"/>
+                          <a:ea typeface="Malgun Gothic" pitchFamily="34" charset="-122"/>
+                          <a:cs typeface="Malgun Gothic" pitchFamily="34" charset="-120"/>
+                        </a:rPr>
+                        <a:t>전역변수 갱신 → 리빌드 → 질량·부피 취득 → STEP 저장</a:t>
+                      </a:r>
+                      <a:endParaRPr lang="en-US" sz="950" dirty="0">
+                        <a:latin typeface="Malgun Gothic" charset="0"/>
+                        <a:ea typeface="Malgun Gothic" charset="0"/>
+                        <a:cs typeface="Malgun Gothic" charset="0"/>
+                      </a:endParaRPr>
+                    </a:p>
+                  </a:txBody>
+                  <a:tcPr marL="50800" marR="50800" marT="25400" marB="25400" anchor="ctr">
+                    <a:lnL w="0" cap="flat" cmpd="sng" algn="ctr">
+                      <a:noFill/>
+                    </a:lnL>
+                    <a:lnR w="0" cap="flat" cmpd="sng" algn="ctr">
+                      <a:noFill/>
+                    </a:lnR>
+                    <a:lnT w="0" cap="flat" cmpd="sng" algn="ctr">
+                      <a:noFill/>
+                    </a:lnT>
+                    <a:lnB w="6350" cap="flat" cmpd="sng" algn="ctr">
+                      <a:solidFill>
+                        <a:srgbClr val="DDE3EB"/>
+                      </a:solidFill>
+                      <a:prstDash val="solid"/>
+                      <a:round/>
+                      <a:headEnd type="none" w="med" len="med"/>
+                      <a:tailEnd type="none" w="med" len="med"/>
+                    </a:lnB>
+                  </a:tcPr>
+                </a:tc>
+              </a:tr>
+              <a:tr h="274320">
+                <a:tc>
+                  <a:txBody>
+                    <a:bodyPr/>
+                    <a:lstStyle/>
+                    <a:p>
+                      <a:pPr indent="0" marL="0">
+                        <a:buNone/>
+                      </a:pPr>
+                      <a:r>
+                        <a:rPr lang="en-US" sz="950" b="1" dirty="0">
+                          <a:solidFill>
+                            <a:srgbClr val="16305B"/>
+                          </a:solidFill>
+                          <a:latin typeface="Consolas" pitchFamily="34" charset="0"/>
+                          <a:ea typeface="Consolas" pitchFamily="34" charset="-122"/>
+                          <a:cs typeface="Consolas" pitchFamily="34" charset="-120"/>
+                        </a:rPr>
+                        <a:t>icepak.py</a:t>
+                      </a:r>
+                      <a:endParaRPr lang="en-US" sz="950" dirty="0">
+                        <a:latin typeface="Consolas" charset="0"/>
+                        <a:ea typeface="Consolas" charset="0"/>
+                        <a:cs typeface="Consolas" charset="0"/>
+                      </a:endParaRPr>
+                    </a:p>
+                  </a:txBody>
+                  <a:tcPr marL="50800" marR="50800" marT="25400" marB="25400" anchor="ctr">
+                    <a:lnL w="0" cap="flat" cmpd="sng" algn="ctr">
+                      <a:noFill/>
+                    </a:lnL>
+                    <a:lnR w="0" cap="flat" cmpd="sng" algn="ctr">
+                      <a:noFill/>
+                    </a:lnR>
+                    <a:lnT w="0" cap="flat" cmpd="sng" algn="ctr">
+                      <a:noFill/>
+                    </a:lnT>
+                    <a:lnB w="6350" cap="flat" cmpd="sng" algn="ctr">
+                      <a:solidFill>
+                        <a:srgbClr val="DDE3EB"/>
+                      </a:solidFill>
+                      <a:prstDash val="solid"/>
+                      <a:round/>
+                      <a:headEnd type="none" w="med" len="med"/>
+                      <a:tailEnd type="none" w="med" len="med"/>
+                    </a:lnB>
+                  </a:tcPr>
+                </a:tc>
+                <a:tc>
+                  <a:txBody>
+                    <a:bodyPr/>
+                    <a:lstStyle/>
+                    <a:p>
+                      <a:pPr indent="0" marL="0">
+                        <a:buNone/>
+                      </a:pPr>
+                      <a:r>
+                        <a:rPr lang="en-US" sz="950" dirty="0">
+                          <a:solidFill>
+                            <a:srgbClr val="1C2733"/>
+                          </a:solidFill>
+                          <a:latin typeface="Malgun Gothic" pitchFamily="34" charset="0"/>
+                          <a:ea typeface="Malgun Gothic" pitchFamily="34" charset="-122"/>
+                          <a:cs typeface="Malgun Gothic" pitchFamily="34" charset="-120"/>
+                        </a:rPr>
+                        <a:t>해석 모델 구성 → 해석 실행 → 결과 CSV 추출</a:t>
+                      </a:r>
+                      <a:endParaRPr lang="en-US" sz="950" dirty="0">
+                        <a:latin typeface="Malgun Gothic" charset="0"/>
+                        <a:ea typeface="Malgun Gothic" charset="0"/>
+                        <a:cs typeface="Malgun Gothic" charset="0"/>
+                      </a:endParaRPr>
+                    </a:p>
+                  </a:txBody>
+                  <a:tcPr marL="50800" marR="50800" marT="25400" marB="25400" anchor="ctr">
+                    <a:lnL w="0" cap="flat" cmpd="sng" algn="ctr">
+                      <a:noFill/>
+                    </a:lnL>
+                    <a:lnR w="0" cap="flat" cmpd="sng" algn="ctr">
+                      <a:noFill/>
+                    </a:lnR>
+                    <a:lnT w="0" cap="flat" cmpd="sng" algn="ctr">
+                      <a:noFill/>
+                    </a:lnT>
+                    <a:lnB w="6350" cap="flat" cmpd="sng" algn="ctr">
+                      <a:solidFill>
+                        <a:srgbClr val="DDE3EB"/>
+                      </a:solidFill>
+                      <a:prstDash val="solid"/>
+                      <a:round/>
+                      <a:headEnd type="none" w="med" len="med"/>
+                      <a:tailEnd type="none" w="med" len="med"/>
+                    </a:lnB>
+                  </a:tcPr>
+                </a:tc>
+              </a:tr>
+              <a:tr h="274320">
+                <a:tc>
+                  <a:txBody>
+                    <a:bodyPr/>
+                    <a:lstStyle/>
+                    <a:p>
+                      <a:pPr indent="0" marL="0">
+                        <a:buNone/>
+                      </a:pPr>
+                      <a:r>
+                        <a:rPr lang="en-US" sz="950" b="1" dirty="0">
+                          <a:solidFill>
+                            <a:srgbClr val="16305B"/>
+                          </a:solidFill>
+                          <a:latin typeface="Consolas" pitchFamily="34" charset="0"/>
+                          <a:ea typeface="Consolas" pitchFamily="34" charset="-122"/>
+                          <a:cs typeface="Consolas" pitchFamily="34" charset="-120"/>
+                        </a:rPr>
+                        <a:t>result_parser.py</a:t>
+                      </a:r>
+                      <a:endParaRPr lang="en-US" sz="950" dirty="0">
+                        <a:latin typeface="Consolas" charset="0"/>
+                        <a:ea typeface="Consolas" charset="0"/>
+                        <a:cs typeface="Consolas" charset="0"/>
+                      </a:endParaRPr>
+                    </a:p>
+                  </a:txBody>
+                  <a:tcPr marL="50800" marR="50800" marT="25400" marB="25400" anchor="ctr">
+                    <a:lnL w="0" cap="flat" cmpd="sng" algn="ctr">
+                      <a:noFill/>
+                    </a:lnL>
+                    <a:lnR w="0" cap="flat" cmpd="sng" algn="ctr">
+                      <a:noFill/>
+                    </a:lnR>
+                    <a:lnT w="0" cap="flat" cmpd="sng" algn="ctr">
+                      <a:noFill/>
+                    </a:lnT>
+                    <a:lnB w="6350" cap="flat" cmpd="sng" algn="ctr">
+                      <a:solidFill>
+                        <a:srgbClr val="DDE3EB"/>
+                      </a:solidFill>
+                      <a:prstDash val="solid"/>
+                      <a:round/>
+                      <a:headEnd type="none" w="med" len="med"/>
+                      <a:tailEnd type="none" w="med" len="med"/>
+                    </a:lnB>
+                  </a:tcPr>
+                </a:tc>
+                <a:tc>
+                  <a:txBody>
+                    <a:bodyPr/>
+                    <a:lstStyle/>
+                    <a:p>
+                      <a:pPr indent="0" marL="0">
+                        <a:buNone/>
+                      </a:pPr>
+                      <a:r>
+                        <a:rPr lang="en-US" sz="950" dirty="0">
+                          <a:solidFill>
+                            <a:srgbClr val="1C2733"/>
+                          </a:solidFill>
+                          <a:latin typeface="Malgun Gothic" pitchFamily="34" charset="0"/>
+                          <a:ea typeface="Malgun Gothic" pitchFamily="34" charset="-122"/>
+                          <a:cs typeface="Malgun Gothic" pitchFamily="34" charset="-120"/>
+                        </a:rPr>
+                        <a:t>결과 CSV에서 차압·온도·유량·중량 산출 후 누적 저장</a:t>
+                      </a:r>
+                      <a:endParaRPr lang="en-US" sz="950" dirty="0">
+                        <a:latin typeface="Malgun Gothic" charset="0"/>
+                        <a:ea typeface="Malgun Gothic" charset="0"/>
+                        <a:cs typeface="Malgun Gothic" charset="0"/>
+                      </a:endParaRPr>
+                    </a:p>
+                  </a:txBody>
+                  <a:tcPr marL="50800" marR="50800" marT="25400" marB="25400" anchor="ctr">
+                    <a:lnL w="0" cap="flat" cmpd="sng" algn="ctr">
+                      <a:noFill/>
+                    </a:lnL>
+                    <a:lnR w="0" cap="flat" cmpd="sng" algn="ctr">
+                      <a:noFill/>
+                    </a:lnR>
+                    <a:lnT w="0" cap="flat" cmpd="sng" algn="ctr">
+                      <a:noFill/>
+                    </a:lnT>
+                    <a:lnB w="6350" cap="flat" cmpd="sng" algn="ctr">
+                      <a:solidFill>
+                        <a:srgbClr val="DDE3EB"/>
+                      </a:solidFill>
+                      <a:prstDash val="solid"/>
+                      <a:round/>
+                      <a:headEnd type="none" w="med" len="med"/>
+                      <a:tailEnd type="none" w="med" len="med"/>
+                    </a:lnB>
+                  </a:tcPr>
+                </a:tc>
+              </a:tr>
+            </a:tbl>
+          </a:graphicData>
+        </a:graphic>
+      </p:graphicFrame>
+      <p:sp>
+        <p:nvSpPr>
+          <p:cNvPr id="42" name="Shape 38"/>
+          <p:cNvSpPr/>
+          <p:nvPr/>
+        </p:nvSpPr>
+        <p:spPr>
+          <a:xfrm>
+            <a:off x="502920" y="5541264"/>
+            <a:ext cx="11183112" cy="841248"/>
+          </a:xfrm>
+          <a:prstGeom prst="roundRect">
+            <a:avLst>
+              <a:gd name="adj" fmla="val 6522"/>
+            </a:avLst>
+          </a:prstGeom>
+          <a:solidFill>
+            <a:srgbClr val="FFFFFF"/>
+          </a:solidFill>
+          <a:ln w="9525">
+            <a:solidFill>
+              <a:srgbClr val="DDE3EB"/>
+            </a:solidFill>
+            <a:prstDash val="solid"/>
+          </a:ln>
+          <a:effectLst>
+            <a:outerShdw sx="100000" sy="100000" kx="0" ky="0" algn="bl" rotWithShape="0" blurRad="101600" dist="12700" dir="5400000">
+              <a:srgbClr val="9AA8BC">
+                <a:alpha val="18000"/>
+              </a:srgbClr>
+            </a:outerShdw>
+          </a:effectLst>
+        </p:spPr>
+      </p:sp>
+      <p:sp>
+        <p:nvSpPr>
+          <p:cNvPr id="43" name="Shape 39"/>
+          <p:cNvSpPr/>
+          <p:nvPr/>
+        </p:nvSpPr>
+        <p:spPr>
+          <a:xfrm>
+            <a:off x="832104" y="5724144"/>
+            <a:ext cx="64008" cy="164592"/>
+          </a:xfrm>
+          <a:prstGeom prst="rect">
+            <a:avLst/>
+          </a:prstGeom>
+          <a:solidFill>
+            <a:srgbClr val="00A3C4"/>
+          </a:solidFill>
+          <a:ln w="12700">
+            <a:solidFill>
+              <a:srgbClr val="00A3C4"/>
+            </a:solidFill>
+            <a:prstDash val="solid"/>
+          </a:ln>
+        </p:spPr>
+      </p:sp>
+      <p:sp>
+        <p:nvSpPr>
+          <p:cNvPr id="44" name="Text 40"/>
+          <p:cNvSpPr txBox="1"/>
+          <p:nvPr/>
+        </p:nvSpPr>
+        <p:spPr>
+          <a:xfrm>
+            <a:off x="978408" y="5669280"/>
+            <a:ext cx="3291840" cy="256032"/>
+          </a:xfrm>
+          <a:prstGeom prst="rect">
+            <a:avLst/>
+          </a:prstGeom>
+          <a:noFill/>
+          <a:ln/>
+        </p:spPr>
+        <p:txBody>
+          <a:bodyPr wrap="square" lIns="0" tIns="0" rIns="0" bIns="0" rtlCol="0" anchor="ctr"/>
+          <a:lstStyle/>
+          <a:p>
+            <a:pPr indent="0" marL="0">
+              <a:buNone/>
+            </a:pPr>
+            <a:r>
+              <a:rPr lang="en-US" sz="1050" b="1" dirty="0">
+                <a:solidFill>
+                  <a:srgbClr val="16305B"/>
+                </a:solidFill>
+                <a:latin typeface="Malgun Gothic" pitchFamily="34" charset="0"/>
+                <a:ea typeface="Malgun Gothic" pitchFamily="34" charset="-122"/>
+                <a:cs typeface="Malgun Gothic" pitchFamily="34" charset="-120"/>
+              </a:rPr>
+              <a:t>프로그램별 모듈 분리</a:t>
+            </a:r>
+            <a:endParaRPr lang="en-US" sz="1050" dirty="0"/>
+          </a:p>
+        </p:txBody>
+      </p:sp>
+      <p:sp>
+        <p:nvSpPr>
+          <p:cNvPr id="45" name="Text 41"/>
+          <p:cNvSpPr txBox="1"/>
+          <p:nvPr/>
+        </p:nvSpPr>
+        <p:spPr>
+          <a:xfrm>
+            <a:off x="978408" y="5943600"/>
+            <a:ext cx="3383280" cy="310896"/>
+          </a:xfrm>
+          <a:prstGeom prst="rect">
+            <a:avLst/>
+          </a:prstGeom>
+          <a:noFill/>
+          <a:ln/>
+        </p:spPr>
+        <p:txBody>
+          <a:bodyPr wrap="square" lIns="0" tIns="0" rIns="0" bIns="0" rtlCol="0" anchor="ctr"/>
+          <a:lstStyle/>
+          <a:p>
+            <a:pPr indent="0" marL="0">
+              <a:buNone/>
+            </a:pPr>
+            <a:r>
+              <a:rPr lang="en-US" sz="950" dirty="0">
+                <a:solidFill>
+                  <a:srgbClr val="6B7A8F"/>
+                </a:solidFill>
+                <a:latin typeface="Malgun Gothic" pitchFamily="34" charset="0"/>
+                <a:ea typeface="Malgun Gothic" pitchFamily="34" charset="-122"/>
+                <a:cs typeface="Malgun Gothic" pitchFamily="34" charset="-120"/>
+              </a:rPr>
+              <a:t>CAD·해석 제어를 각각 독립 모듈로 구성</a:t>
+            </a:r>
+            <a:endParaRPr lang="en-US" sz="950" dirty="0"/>
+          </a:p>
+        </p:txBody>
+      </p:sp>
+      <p:sp>
+        <p:nvSpPr>
+          <p:cNvPr id="46" name="Shape 42"/>
+          <p:cNvSpPr/>
+          <p:nvPr/>
+        </p:nvSpPr>
+        <p:spPr>
+          <a:xfrm>
+            <a:off x="4489704" y="5724144"/>
+            <a:ext cx="64008" cy="164592"/>
+          </a:xfrm>
+          <a:prstGeom prst="rect">
+            <a:avLst/>
+          </a:prstGeom>
+          <a:solidFill>
+            <a:srgbClr val="00A3C4"/>
+          </a:solidFill>
+          <a:ln w="12700">
+            <a:solidFill>
+              <a:srgbClr val="00A3C4"/>
+            </a:solidFill>
+            <a:prstDash val="solid"/>
+          </a:ln>
+        </p:spPr>
+      </p:sp>
+      <p:sp>
+        <p:nvSpPr>
+          <p:cNvPr id="47" name="Text 43"/>
+          <p:cNvSpPr txBox="1"/>
+          <p:nvPr/>
+        </p:nvSpPr>
+        <p:spPr>
+          <a:xfrm>
+            <a:off x="4636008" y="5669280"/>
+            <a:ext cx="3291840" cy="256032"/>
+          </a:xfrm>
+          <a:prstGeom prst="rect">
+            <a:avLst/>
+          </a:prstGeom>
+          <a:noFill/>
+          <a:ln/>
+        </p:spPr>
+        <p:txBody>
+          <a:bodyPr wrap="square" lIns="0" tIns="0" rIns="0" bIns="0" rtlCol="0" anchor="ctr"/>
+          <a:lstStyle/>
+          <a:p>
+            <a:pPr indent="0" marL="0">
+              <a:buNone/>
+            </a:pPr>
+            <a:r>
+              <a:rPr lang="en-US" sz="1050" b="1" dirty="0">
+                <a:solidFill>
+                  <a:srgbClr val="16305B"/>
+                </a:solidFill>
+                <a:latin typeface="Malgun Gothic" pitchFamily="34" charset="0"/>
+                <a:ea typeface="Malgun Gothic" pitchFamily="34" charset="-122"/>
+                <a:cs typeface="Malgun Gothic" pitchFamily="34" charset="-120"/>
+              </a:rPr>
+              <a:t>단일 출처</a:t>
+            </a:r>
+            <a:endParaRPr lang="en-US" sz="1050" dirty="0"/>
+          </a:p>
+        </p:txBody>
+      </p:sp>
+      <p:sp>
+        <p:nvSpPr>
+          <p:cNvPr id="48" name="Text 44"/>
+          <p:cNvSpPr txBox="1"/>
+          <p:nvPr/>
+        </p:nvSpPr>
+        <p:spPr>
+          <a:xfrm>
+            <a:off x="4636008" y="5943600"/>
+            <a:ext cx="3383280" cy="310896"/>
+          </a:xfrm>
+          <a:prstGeom prst="rect">
+            <a:avLst/>
+          </a:prstGeom>
+          <a:noFill/>
+          <a:ln/>
+        </p:spPr>
+        <p:txBody>
+          <a:bodyPr wrap="square" lIns="0" tIns="0" rIns="0" bIns="0" rtlCol="0" anchor="ctr"/>
+          <a:lstStyle/>
+          <a:p>
+            <a:pPr indent="0" marL="0">
+              <a:buNone/>
+            </a:pPr>
+            <a:r>
+              <a:rPr lang="en-US" sz="950" dirty="0">
+                <a:solidFill>
+                  <a:srgbClr val="6B7A8F"/>
+                </a:solidFill>
+                <a:latin typeface="Malgun Gothic" pitchFamily="34" charset="0"/>
+                <a:ea typeface="Malgun Gothic" pitchFamily="34" charset="-122"/>
+                <a:cs typeface="Malgun Gothic" pitchFamily="34" charset="-120"/>
+              </a:rPr>
+              <a:t>설계변수·경로 등은 한 파일에서만 정의</a:t>
+            </a:r>
+            <a:endParaRPr lang="en-US" sz="950" dirty="0"/>
+          </a:p>
+        </p:txBody>
+      </p:sp>
+      <p:sp>
+        <p:nvSpPr>
+          <p:cNvPr id="49" name="Shape 45"/>
+          <p:cNvSpPr/>
+          <p:nvPr/>
+        </p:nvSpPr>
+        <p:spPr>
+          <a:xfrm>
+            <a:off x="8147304" y="5724144"/>
+            <a:ext cx="64008" cy="164592"/>
+          </a:xfrm>
+          <a:prstGeom prst="rect">
+            <a:avLst/>
+          </a:prstGeom>
+          <a:solidFill>
+            <a:srgbClr val="00A3C4"/>
+          </a:solidFill>
+          <a:ln w="12700">
+            <a:solidFill>
+              <a:srgbClr val="00A3C4"/>
+            </a:solidFill>
+            <a:prstDash val="solid"/>
+          </a:ln>
+        </p:spPr>
+      </p:sp>
+      <p:sp>
+        <p:nvSpPr>
+          <p:cNvPr id="50" name="Text 46"/>
+          <p:cNvSpPr txBox="1"/>
+          <p:nvPr/>
+        </p:nvSpPr>
+        <p:spPr>
+          <a:xfrm>
+            <a:off x="8293608" y="5669280"/>
+            <a:ext cx="3291840" cy="256032"/>
+          </a:xfrm>
+          <a:prstGeom prst="rect">
+            <a:avLst/>
+          </a:prstGeom>
+          <a:noFill/>
+          <a:ln/>
+        </p:spPr>
+        <p:txBody>
+          <a:bodyPr wrap="square" lIns="0" tIns="0" rIns="0" bIns="0" rtlCol="0" anchor="ctr"/>
+          <a:lstStyle/>
+          <a:p>
+            <a:pPr indent="0" marL="0">
+              <a:buNone/>
+            </a:pPr>
+            <a:r>
+              <a:rPr lang="en-US" sz="1050" b="1" dirty="0">
+                <a:solidFill>
+                  <a:srgbClr val="16305B"/>
+                </a:solidFill>
+                <a:latin typeface="Malgun Gothic" pitchFamily="34" charset="0"/>
+                <a:ea typeface="Malgun Gothic" pitchFamily="34" charset="-122"/>
+                <a:cs typeface="Malgun Gothic" pitchFamily="34" charset="-120"/>
+              </a:rPr>
+              <a:t>실패 격리</a:t>
+            </a:r>
+            <a:endParaRPr lang="en-US" sz="1050" dirty="0"/>
+          </a:p>
+        </p:txBody>
+      </p:sp>
+      <p:sp>
+        <p:nvSpPr>
+          <p:cNvPr id="51" name="Text 47"/>
+          <p:cNvSpPr txBox="1"/>
+          <p:nvPr/>
+        </p:nvSpPr>
+        <p:spPr>
+          <a:xfrm>
+            <a:off x="8293608" y="5943600"/>
+            <a:ext cx="3383280" cy="310896"/>
+          </a:xfrm>
+          <a:prstGeom prst="rect">
+            <a:avLst/>
+          </a:prstGeom>
+          <a:noFill/>
+          <a:ln/>
+        </p:spPr>
+        <p:txBody>
+          <a:bodyPr wrap="square" lIns="0" tIns="0" rIns="0" bIns="0" rtlCol="0" anchor="ctr"/>
+          <a:lstStyle/>
+          <a:p>
+            <a:pPr indent="0" marL="0">
+              <a:buNone/>
+            </a:pPr>
+            <a:r>
+              <a:rPr lang="en-US" sz="950" dirty="0">
+                <a:solidFill>
+                  <a:srgbClr val="6B7A8F"/>
+                </a:solidFill>
+                <a:latin typeface="Malgun Gothic" pitchFamily="34" charset="0"/>
+                <a:ea typeface="Malgun Gothic" pitchFamily="34" charset="-122"/>
+                <a:cs typeface="Malgun Gothic" pitchFamily="34" charset="-120"/>
+              </a:rPr>
+              <a:t>한 점이 실패해도 기록 후 다음 점으로 진행</a:t>
+            </a:r>
+            <a:endParaRPr lang="en-US" sz="950" dirty="0"/>
+          </a:p>
+        </p:txBody>
+      </p:sp>
+    </p:spTree>
+  </p:cSld>
+  <p:clrMapOvr>
+    <a:masterClrMapping/>
+  </p:clrMapOvr>
+</p:sld>
+</file>
+
+<file path=ppt/slides/slide9.xml><?xml version="1.0" encoding="utf-8"?>
+<p:sld xmlns:a="http://schemas.openxmlformats.org/drawingml/2006/main" xmlns:r="http://schemas.openxmlformats.org/officeDocument/2006/relationships" xmlns:p="http://schemas.openxmlformats.org/presentationml/2006/main">
+  <p:cSld name="Slide 9">
+    <p:bg>
+      <p:bgPr>
+        <a:solidFill>
+          <a:srgbClr val="F3F5F8"/>
+        </a:solidFill>
+      </p:bgPr>
+    </p:bg>
+    <p:spTree>
+      <p:nvGrpSpPr>
+        <p:cNvPr id="1" name=""/>
+        <p:cNvGrpSpPr/>
+        <p:nvPr/>
+      </p:nvGrpSpPr>
+      <p:grpSpPr>
+        <a:xfrm>
+          <a:off x="0" y="0"/>
+          <a:ext cx="0" cy="0"/>
+          <a:chOff x="0" y="0"/>
+          <a:chExt cx="0" cy="0"/>
+        </a:xfrm>
+      </p:grpSpPr>
+      <p:sp>
+        <p:nvSpPr>
+          <p:cNvPr id="2" name="Shape 0"/>
+          <p:cNvSpPr/>
+          <p:nvPr/>
+        </p:nvSpPr>
+        <p:spPr>
+          <a:xfrm>
+            <a:off x="502920" y="384048"/>
+            <a:ext cx="475488" cy="475488"/>
+          </a:xfrm>
+          <a:prstGeom prst="rect">
+            <a:avLst/>
+          </a:prstGeom>
+          <a:solidFill>
+            <a:srgbClr val="16305B"/>
+          </a:solidFill>
+          <a:ln w="12700">
+            <a:solidFill>
+              <a:srgbClr val="16305B"/>
+            </a:solidFill>
+            <a:prstDash val="solid"/>
+          </a:ln>
+        </p:spPr>
+      </p:sp>
+      <p:sp>
+        <p:nvSpPr>
+          <p:cNvPr id="3" name="Text 1"/>
+          <p:cNvSpPr txBox="1"/>
+          <p:nvPr/>
+        </p:nvSpPr>
+        <p:spPr>
+          <a:xfrm>
+            <a:off x="502920" y="384048"/>
+            <a:ext cx="475488" cy="475488"/>
+          </a:xfrm>
+          <a:prstGeom prst="rect">
+            <a:avLst/>
+          </a:prstGeom>
+          <a:noFill/>
+          <a:ln/>
+        </p:spPr>
+        <p:txBody>
+          <a:bodyPr wrap="square" lIns="0" tIns="0" rIns="0" bIns="0" rtlCol="0" anchor="ctr"/>
+          <a:lstStyle/>
+          <a:p>
+            <a:pPr algn="ctr" indent="0" marL="0">
+              <a:buNone/>
+            </a:pPr>
+            <a:r>
+              <a:rPr lang="en-US" sz="1600" b="1" dirty="0">
+                <a:solidFill>
+                  <a:srgbClr val="FFFFFF"/>
+                </a:solidFill>
+                <a:latin typeface="Malgun Gothic" pitchFamily="34" charset="0"/>
+                <a:ea typeface="Malgun Gothic" pitchFamily="34" charset="-122"/>
+                <a:cs typeface="Malgun Gothic" pitchFamily="34" charset="-120"/>
+              </a:rPr>
+              <a:t>03</a:t>
+            </a:r>
+            <a:endParaRPr lang="en-US" sz="1600" dirty="0"/>
+          </a:p>
+        </p:txBody>
+      </p:sp>
+      <p:sp>
+        <p:nvSpPr>
+          <p:cNvPr id="4" name="Text 2"/>
+          <p:cNvSpPr txBox="1"/>
+          <p:nvPr/>
+        </p:nvSpPr>
+        <p:spPr>
+          <a:xfrm>
+            <a:off x="1124712" y="365760"/>
+            <a:ext cx="7315200" cy="237744"/>
+          </a:xfrm>
+          <a:prstGeom prst="rect">
+            <a:avLst/>
+          </a:prstGeom>
+          <a:noFill/>
+          <a:ln/>
+        </p:spPr>
+        <p:txBody>
+          <a:bodyPr wrap="square" lIns="0" tIns="0" rIns="0" bIns="0" rtlCol="0" anchor="ctr"/>
+          <a:lstStyle/>
+          <a:p>
+            <a:pPr indent="0" marL="0">
+              <a:buNone/>
+            </a:pPr>
+            <a:r>
+              <a:rPr lang="en-US" sz="1050" b="1" spc="100" kern="0" dirty="0">
+                <a:solidFill>
+                  <a:srgbClr val="00A3C4"/>
+                </a:solidFill>
+                <a:latin typeface="Malgun Gothic" pitchFamily="34" charset="0"/>
+                <a:ea typeface="Malgun Gothic" pitchFamily="34" charset="-122"/>
+                <a:cs typeface="Malgun Gothic" pitchFamily="34" charset="-120"/>
+              </a:rPr>
+              <a:t>실험계획법 기반 자동해석 수행 및 데이터 확보</a:t>
+            </a:r>
+            <a:endParaRPr lang="en-US" sz="1050" dirty="0"/>
+          </a:p>
+        </p:txBody>
+      </p:sp>
+      <p:sp>
+        <p:nvSpPr>
+          <p:cNvPr id="5" name="Text 3"/>
+          <p:cNvSpPr txBox="1"/>
+          <p:nvPr/>
+        </p:nvSpPr>
+        <p:spPr>
+          <a:xfrm>
+            <a:off x="1124712" y="548640"/>
+            <a:ext cx="10607040" cy="384048"/>
+          </a:xfrm>
+          <a:prstGeom prst="rect">
+            <a:avLst/>
+          </a:prstGeom>
+          <a:noFill/>
+          <a:ln/>
+        </p:spPr>
+        <p:txBody>
+          <a:bodyPr wrap="square" lIns="0" tIns="0" rIns="0" bIns="0" rtlCol="0" anchor="ctr"/>
+          <a:lstStyle/>
+          <a:p>
+            <a:pPr indent="0" marL="0">
+              <a:buNone/>
+            </a:pPr>
+            <a:r>
+              <a:rPr lang="en-US" sz="2200" b="1" dirty="0">
+                <a:solidFill>
+                  <a:srgbClr val="16305B"/>
+                </a:solidFill>
+                <a:latin typeface="Malgun Gothic" pitchFamily="34" charset="0"/>
+                <a:ea typeface="Malgun Gothic" pitchFamily="34" charset="-122"/>
+                <a:cs typeface="Malgun Gothic" pitchFamily="34" charset="-120"/>
+              </a:rPr>
+              <a:t>형상 자동 빌드 및 중량 산출 — SolidWorks</a:t>
+            </a:r>
+            <a:endParaRPr lang="en-US" sz="2200" dirty="0"/>
+          </a:p>
+        </p:txBody>
+      </p:sp>
+      <p:sp>
+        <p:nvSpPr>
+          <p:cNvPr id="6" name="Shape 4"/>
+          <p:cNvSpPr/>
+          <p:nvPr/>
+        </p:nvSpPr>
+        <p:spPr>
+          <a:xfrm>
+            <a:off x="502920" y="1188720"/>
+            <a:ext cx="5440680" cy="4160520"/>
+          </a:xfrm>
+          <a:prstGeom prst="roundRect">
+            <a:avLst>
+              <a:gd name="adj" fmla="val 1319"/>
+            </a:avLst>
+          </a:prstGeom>
+          <a:solidFill>
+            <a:srgbClr val="FFFFFF"/>
+          </a:solidFill>
+          <a:ln w="9525">
+            <a:solidFill>
+              <a:srgbClr val="DDE3EB"/>
+            </a:solidFill>
+            <a:prstDash val="solid"/>
+          </a:ln>
+          <a:effectLst>
+            <a:outerShdw sx="100000" sy="100000" kx="0" ky="0" algn="bl" rotWithShape="0" blurRad="101600" dist="12700" dir="5400000">
+              <a:srgbClr val="9AA8BC">
+                <a:alpha val="18000"/>
+              </a:srgbClr>
+            </a:outerShdw>
+          </a:effectLst>
+        </p:spPr>
+      </p:sp>
+      <p:sp>
+        <p:nvSpPr>
+          <p:cNvPr id="7" name="Shape 5"/>
+          <p:cNvSpPr/>
+          <p:nvPr/>
+        </p:nvSpPr>
+        <p:spPr>
+          <a:xfrm>
+            <a:off x="758952" y="1463040"/>
+            <a:ext cx="82296" cy="182880"/>
+          </a:xfrm>
+          <a:prstGeom prst="rect">
+            <a:avLst/>
+          </a:prstGeom>
+          <a:solidFill>
+            <a:srgbClr val="00A3C4"/>
+          </a:solidFill>
+          <a:ln w="12700">
+            <a:solidFill>
+              <a:srgbClr val="00A3C4"/>
+            </a:solidFill>
+            <a:prstDash val="solid"/>
+          </a:ln>
+        </p:spPr>
+      </p:sp>
+      <p:sp>
+        <p:nvSpPr>
+          <p:cNvPr id="8" name="Text 6"/>
+          <p:cNvSpPr txBox="1"/>
+          <p:nvPr/>
+        </p:nvSpPr>
+        <p:spPr>
+          <a:xfrm>
+            <a:off x="923544" y="1371600"/>
+            <a:ext cx="4480560" cy="365760"/>
+          </a:xfrm>
+          <a:prstGeom prst="rect">
+            <a:avLst/>
+          </a:prstGeom>
+          <a:noFill/>
+          <a:ln/>
+        </p:spPr>
+        <p:txBody>
+          <a:bodyPr wrap="square" lIns="0" tIns="0" rIns="0" bIns="0" rtlCol="0" anchor="ctr"/>
+          <a:lstStyle/>
+          <a:p>
+            <a:pPr indent="0" marL="0">
+              <a:buNone/>
+            </a:pPr>
+            <a:r>
+              <a:rPr lang="en-US" sz="1300" b="1" dirty="0">
+                <a:solidFill>
+                  <a:srgbClr val="16305B"/>
+                </a:solidFill>
+                <a:latin typeface="Malgun Gothic" pitchFamily="34" charset="0"/>
+                <a:ea typeface="Malgun Gothic" pitchFamily="34" charset="-122"/>
+                <a:cs typeface="Malgun Gothic" pitchFamily="34" charset="-120"/>
+              </a:rPr>
               <a:t>Equation Manager 기반 형상 빌드</a:t>
             </a:r>
             <a:endParaRPr lang="en-US" sz="1300" dirty="0"/>
@@ -18368,7 +24232,7 @@
       </p:sp>
       <p:graphicFrame>
         <p:nvGraphicFramePr>
-          <p:cNvPr id="9" name="Table 0"/>
+          <p:cNvPr id="10" name="Table 0"/>
           <p:cNvGraphicFramePr>
             <a:graphicFrameLocks noGrp="1"/>
           </p:cNvGraphicFramePr>
@@ -19247,7 +25111,7 @@
       </p:sp>
       <p:graphicFrame>
         <p:nvGraphicFramePr>
-          <p:cNvPr id="17" name="Table 1"/>
+          <p:cNvPr id="19" name="Table 1"/>
           <p:cNvGraphicFramePr>
             <a:graphicFrameLocks noGrp="1"/>
           </p:cNvGraphicFramePr>
@@ -20099,3111 +25963,6 @@
                 <a:cs typeface="Malgun Gothic" pitchFamily="34" charset="-120"/>
               </a:rPr>
               <a:t>미문서화 반환값을 GUI 패널과 대조해 확정</a:t>
-            </a:r>
-            <a:endParaRPr lang="en-US" sz="950" dirty="0"/>
-          </a:p>
-        </p:txBody>
-      </p:sp>
-    </p:spTree>
-  </p:cSld>
-  <p:clrMapOvr>
-    <a:masterClrMapping/>
-  </p:clrMapOvr>
-</p:sld>
-</file>
-
-<file path=ppt/slides/slide9.xml><?xml version="1.0" encoding="utf-8"?>
-<p:sld xmlns:a="http://schemas.openxmlformats.org/drawingml/2006/main" xmlns:r="http://schemas.openxmlformats.org/officeDocument/2006/relationships" xmlns:p="http://schemas.openxmlformats.org/presentationml/2006/main">
-  <p:cSld name="Slide 9">
-    <p:bg>
-      <p:bgPr>
-        <a:solidFill>
-          <a:srgbClr val="F3F5F8"/>
-        </a:solidFill>
-      </p:bgPr>
-    </p:bg>
-    <p:spTree>
-      <p:nvGrpSpPr>
-        <p:cNvPr id="1" name=""/>
-        <p:cNvGrpSpPr/>
-        <p:nvPr/>
-      </p:nvGrpSpPr>
-      <p:grpSpPr>
-        <a:xfrm>
-          <a:off x="0" y="0"/>
-          <a:ext cx="0" cy="0"/>
-          <a:chOff x="0" y="0"/>
-          <a:chExt cx="0" cy="0"/>
-        </a:xfrm>
-      </p:grpSpPr>
-      <p:sp>
-        <p:nvSpPr>
-          <p:cNvPr id="2" name="Shape 0"/>
-          <p:cNvSpPr/>
-          <p:nvPr/>
-        </p:nvSpPr>
-        <p:spPr>
-          <a:xfrm>
-            <a:off x="502920" y="384048"/>
-            <a:ext cx="475488" cy="475488"/>
-          </a:xfrm>
-          <a:prstGeom prst="rect">
-            <a:avLst/>
-          </a:prstGeom>
-          <a:solidFill>
-            <a:srgbClr val="16305B"/>
-          </a:solidFill>
-          <a:ln w="12700">
-            <a:solidFill>
-              <a:srgbClr val="16305B"/>
-            </a:solidFill>
-            <a:prstDash val="solid"/>
-          </a:ln>
-        </p:spPr>
-      </p:sp>
-      <p:sp>
-        <p:nvSpPr>
-          <p:cNvPr id="3" name="Text 1"/>
-          <p:cNvSpPr txBox="1"/>
-          <p:nvPr/>
-        </p:nvSpPr>
-        <p:spPr>
-          <a:xfrm>
-            <a:off x="502920" y="384048"/>
-            <a:ext cx="475488" cy="475488"/>
-          </a:xfrm>
-          <a:prstGeom prst="rect">
-            <a:avLst/>
-          </a:prstGeom>
-          <a:noFill/>
-          <a:ln/>
-        </p:spPr>
-        <p:txBody>
-          <a:bodyPr wrap="square" lIns="0" tIns="0" rIns="0" bIns="0" rtlCol="0" anchor="ctr"/>
-          <a:lstStyle/>
-          <a:p>
-            <a:pPr algn="ctr" indent="0" marL="0">
-              <a:buNone/>
-            </a:pPr>
-            <a:r>
-              <a:rPr lang="en-US" sz="1600" b="1" dirty="0">
-                <a:solidFill>
-                  <a:srgbClr val="FFFFFF"/>
-                </a:solidFill>
-                <a:latin typeface="Malgun Gothic" pitchFamily="34" charset="0"/>
-                <a:ea typeface="Malgun Gothic" pitchFamily="34" charset="-122"/>
-                <a:cs typeface="Malgun Gothic" pitchFamily="34" charset="-120"/>
-              </a:rPr>
-              <a:t>03</a:t>
-            </a:r>
-            <a:endParaRPr lang="en-US" sz="1600" dirty="0"/>
-          </a:p>
-        </p:txBody>
-      </p:sp>
-      <p:sp>
-        <p:nvSpPr>
-          <p:cNvPr id="4" name="Text 2"/>
-          <p:cNvSpPr txBox="1"/>
-          <p:nvPr/>
-        </p:nvSpPr>
-        <p:spPr>
-          <a:xfrm>
-            <a:off x="1124712" y="365760"/>
-            <a:ext cx="7315200" cy="237744"/>
-          </a:xfrm>
-          <a:prstGeom prst="rect">
-            <a:avLst/>
-          </a:prstGeom>
-          <a:noFill/>
-          <a:ln/>
-        </p:spPr>
-        <p:txBody>
-          <a:bodyPr wrap="square" lIns="0" tIns="0" rIns="0" bIns="0" rtlCol="0" anchor="ctr"/>
-          <a:lstStyle/>
-          <a:p>
-            <a:pPr indent="0" marL="0">
-              <a:buNone/>
-            </a:pPr>
-            <a:r>
-              <a:rPr lang="en-US" sz="1050" b="1" spc="100" kern="0" dirty="0">
-                <a:solidFill>
-                  <a:srgbClr val="00A3C4"/>
-                </a:solidFill>
-                <a:latin typeface="Malgun Gothic" pitchFamily="34" charset="0"/>
-                <a:ea typeface="Malgun Gothic" pitchFamily="34" charset="-122"/>
-                <a:cs typeface="Malgun Gothic" pitchFamily="34" charset="-120"/>
-              </a:rPr>
-              <a:t>실험계획법 기반 자동해석 수행 및 데이터 확보</a:t>
-            </a:r>
-            <a:endParaRPr lang="en-US" sz="1050" dirty="0"/>
-          </a:p>
-        </p:txBody>
-      </p:sp>
-      <p:sp>
-        <p:nvSpPr>
-          <p:cNvPr id="5" name="Text 3"/>
-          <p:cNvSpPr txBox="1"/>
-          <p:nvPr/>
-        </p:nvSpPr>
-        <p:spPr>
-          <a:xfrm>
-            <a:off x="1124712" y="548640"/>
-            <a:ext cx="10607040" cy="384048"/>
-          </a:xfrm>
-          <a:prstGeom prst="rect">
-            <a:avLst/>
-          </a:prstGeom>
-          <a:noFill/>
-          <a:ln/>
-        </p:spPr>
-        <p:txBody>
-          <a:bodyPr wrap="square" lIns="0" tIns="0" rIns="0" bIns="0" rtlCol="0" anchor="ctr"/>
-          <a:lstStyle/>
-          <a:p>
-            <a:pPr indent="0" marL="0">
-              <a:buNone/>
-            </a:pPr>
-            <a:r>
-              <a:rPr lang="en-US" sz="2200" b="1" dirty="0">
-                <a:solidFill>
-                  <a:srgbClr val="16305B"/>
-                </a:solidFill>
-                <a:latin typeface="Malgun Gothic" pitchFamily="34" charset="0"/>
-                <a:ea typeface="Malgun Gothic" pitchFamily="34" charset="-122"/>
-                <a:cs typeface="Malgun Gothic" pitchFamily="34" charset="-120"/>
-              </a:rPr>
-              <a:t>해석 모델 자동 구성 및 결과 추출 — Icepak</a:t>
-            </a:r>
-            <a:endParaRPr lang="en-US" sz="2200" dirty="0"/>
-          </a:p>
-        </p:txBody>
-      </p:sp>
-      <p:sp>
-        <p:nvSpPr>
-          <p:cNvPr id="6" name="Shape 4"/>
-          <p:cNvSpPr/>
-          <p:nvPr/>
-        </p:nvSpPr>
-        <p:spPr>
-          <a:xfrm>
-            <a:off x="502920" y="1188720"/>
-            <a:ext cx="5440680" cy="4160520"/>
-          </a:xfrm>
-          <a:prstGeom prst="roundRect">
-            <a:avLst>
-              <a:gd name="adj" fmla="val 1319"/>
-            </a:avLst>
-          </a:prstGeom>
-          <a:solidFill>
-            <a:srgbClr val="FFFFFF"/>
-          </a:solidFill>
-          <a:ln w="9525">
-            <a:solidFill>
-              <a:srgbClr val="DDE3EB"/>
-            </a:solidFill>
-            <a:prstDash val="solid"/>
-          </a:ln>
-          <a:effectLst>
-            <a:outerShdw sx="100000" sy="100000" kx="0" ky="0" algn="bl" rotWithShape="0" blurRad="101600" dist="12700" dir="5400000">
-              <a:srgbClr val="9AA8BC">
-                <a:alpha val="18000"/>
-              </a:srgbClr>
-            </a:outerShdw>
-          </a:effectLst>
-        </p:spPr>
-      </p:sp>
-      <p:sp>
-        <p:nvSpPr>
-          <p:cNvPr id="7" name="Shape 5"/>
-          <p:cNvSpPr/>
-          <p:nvPr/>
-        </p:nvSpPr>
-        <p:spPr>
-          <a:xfrm>
-            <a:off x="758952" y="1463040"/>
-            <a:ext cx="82296" cy="182880"/>
-          </a:xfrm>
-          <a:prstGeom prst="rect">
-            <a:avLst/>
-          </a:prstGeom>
-          <a:solidFill>
-            <a:srgbClr val="00A3C4"/>
-          </a:solidFill>
-          <a:ln w="12700">
-            <a:solidFill>
-              <a:srgbClr val="00A3C4"/>
-            </a:solidFill>
-            <a:prstDash val="solid"/>
-          </a:ln>
-        </p:spPr>
-      </p:sp>
-      <p:sp>
-        <p:nvSpPr>
-          <p:cNvPr id="8" name="Text 6"/>
-          <p:cNvSpPr txBox="1"/>
-          <p:nvPr/>
-        </p:nvSpPr>
-        <p:spPr>
-          <a:xfrm>
-            <a:off x="923544" y="1371600"/>
-            <a:ext cx="4480560" cy="365760"/>
-          </a:xfrm>
-          <a:prstGeom prst="rect">
-            <a:avLst/>
-          </a:prstGeom>
-          <a:noFill/>
-          <a:ln/>
-        </p:spPr>
-        <p:txBody>
-          <a:bodyPr wrap="square" lIns="0" tIns="0" rIns="0" bIns="0" rtlCol="0" anchor="ctr"/>
-          <a:lstStyle/>
-          <a:p>
-            <a:pPr indent="0" marL="0">
-              <a:buNone/>
-            </a:pPr>
-            <a:r>
-              <a:rPr lang="en-US" sz="1300" b="1" dirty="0">
-                <a:solidFill>
-                  <a:srgbClr val="16305B"/>
-                </a:solidFill>
-                <a:latin typeface="Malgun Gothic" pitchFamily="34" charset="0"/>
-                <a:ea typeface="Malgun Gothic" pitchFamily="34" charset="-122"/>
-                <a:cs typeface="Malgun Gothic" pitchFamily="34" charset="-120"/>
-              </a:rPr>
-              <a:t>자동화 전환 과정</a:t>
-            </a:r>
-            <a:endParaRPr lang="en-US" sz="1300" dirty="0"/>
-          </a:p>
-        </p:txBody>
-      </p:sp>
-      <p:sp>
-        <p:nvSpPr>
-          <p:cNvPr id="9" name="Shape 7"/>
-          <p:cNvSpPr/>
-          <p:nvPr/>
-        </p:nvSpPr>
-        <p:spPr>
-          <a:xfrm>
-            <a:off x="813816" y="1901952"/>
-            <a:ext cx="4846320" cy="585216"/>
-          </a:xfrm>
-          <a:prstGeom prst="roundRect">
-            <a:avLst>
-              <a:gd name="adj" fmla="val 9375"/>
-            </a:avLst>
-          </a:prstGeom>
-          <a:solidFill>
-            <a:srgbClr val="EEF2F7"/>
-          </a:solidFill>
-          <a:ln w="9525">
-            <a:solidFill>
-              <a:srgbClr val="DDE3EB"/>
-            </a:solidFill>
-            <a:prstDash val="solid"/>
-          </a:ln>
-        </p:spPr>
-      </p:sp>
-      <p:sp>
-        <p:nvSpPr>
-          <p:cNvPr id="10" name="Text 8"/>
-          <p:cNvSpPr txBox="1"/>
-          <p:nvPr/>
-        </p:nvSpPr>
-        <p:spPr>
-          <a:xfrm>
-            <a:off x="923544" y="1901952"/>
-            <a:ext cx="310896" cy="585216"/>
-          </a:xfrm>
-          <a:prstGeom prst="rect">
-            <a:avLst/>
-          </a:prstGeom>
-          <a:noFill/>
-          <a:ln/>
-        </p:spPr>
-        <p:txBody>
-          <a:bodyPr wrap="square" lIns="0" tIns="0" rIns="0" bIns="0" rtlCol="0" anchor="ctr"/>
-          <a:lstStyle/>
-          <a:p>
-            <a:pPr indent="0" marL="0">
-              <a:buNone/>
-            </a:pPr>
-            <a:r>
-              <a:rPr lang="en-US" sz="1600" b="1" dirty="0">
-                <a:solidFill>
-                  <a:srgbClr val="00A3C4"/>
-                </a:solidFill>
-                <a:latin typeface="Malgun Gothic" pitchFamily="34" charset="0"/>
-                <a:ea typeface="Malgun Gothic" pitchFamily="34" charset="-122"/>
-                <a:cs typeface="Malgun Gothic" pitchFamily="34" charset="-120"/>
-              </a:rPr>
-              <a:t>1</a:t>
-            </a:r>
-            <a:endParaRPr lang="en-US" sz="1600" dirty="0"/>
-          </a:p>
-        </p:txBody>
-      </p:sp>
-      <p:sp>
-        <p:nvSpPr>
-          <p:cNvPr id="11" name="Text 9"/>
-          <p:cNvSpPr txBox="1"/>
-          <p:nvPr/>
-        </p:nvSpPr>
-        <p:spPr>
-          <a:xfrm>
-            <a:off x="1289304" y="1938528"/>
-            <a:ext cx="1737360" cy="512064"/>
-          </a:xfrm>
-          <a:prstGeom prst="rect">
-            <a:avLst/>
-          </a:prstGeom>
-          <a:noFill/>
-          <a:ln/>
-        </p:spPr>
-        <p:txBody>
-          <a:bodyPr wrap="square" lIns="0" tIns="0" rIns="0" bIns="0" rtlCol="0" anchor="ctr"/>
-          <a:lstStyle/>
-          <a:p>
-            <a:pPr indent="0" marL="0">
-              <a:buNone/>
-            </a:pPr>
-            <a:r>
-              <a:rPr lang="en-US" sz="1050" b="1" dirty="0">
-                <a:solidFill>
-                  <a:srgbClr val="16305B"/>
-                </a:solidFill>
-                <a:latin typeface="Malgun Gothic" pitchFamily="34" charset="0"/>
-                <a:ea typeface="Malgun Gothic" pitchFamily="34" charset="-122"/>
-                <a:cs typeface="Malgun Gothic" pitchFamily="34" charset="-120"/>
-              </a:rPr>
-              <a:t>GUI 수동 설정</a:t>
-            </a:r>
-            <a:endParaRPr lang="en-US" sz="1050" dirty="0"/>
-          </a:p>
-        </p:txBody>
-      </p:sp>
-      <p:sp>
-        <p:nvSpPr>
-          <p:cNvPr id="12" name="Text 10"/>
-          <p:cNvSpPr txBox="1"/>
-          <p:nvPr/>
-        </p:nvSpPr>
-        <p:spPr>
-          <a:xfrm>
-            <a:off x="2990088" y="1938528"/>
-            <a:ext cx="2596896" cy="512064"/>
-          </a:xfrm>
-          <a:prstGeom prst="rect">
-            <a:avLst/>
-          </a:prstGeom>
-          <a:noFill/>
-          <a:ln/>
-        </p:spPr>
-        <p:txBody>
-          <a:bodyPr wrap="square" lIns="0" tIns="0" rIns="0" bIns="0" rtlCol="0" anchor="ctr"/>
-          <a:lstStyle/>
-          <a:p>
-            <a:pPr indent="0" marL="0">
-              <a:lnSpc>
-                <a:spcPct val="110000"/>
-              </a:lnSpc>
-              <a:buNone/>
-            </a:pPr>
-            <a:r>
-              <a:rPr lang="en-US" sz="880" dirty="0">
-                <a:solidFill>
-                  <a:srgbClr val="1C2733"/>
-                </a:solidFill>
-                <a:latin typeface="Malgun Gothic" pitchFamily="34" charset="0"/>
-                <a:ea typeface="Malgun Gothic" pitchFamily="34" charset="-122"/>
-                <a:cs typeface="Malgun Gothic" pitchFamily="34" charset="-120"/>
-              </a:rPr>
-              <a:t>해석 모델을 GUI로 한 번 직접 구성</a:t>
-            </a:r>
-            <a:endParaRPr lang="en-US" sz="880" dirty="0"/>
-          </a:p>
-          <a:p>
-            <a:pPr indent="0" marL="0">
-              <a:lnSpc>
-                <a:spcPct val="110000"/>
-              </a:lnSpc>
-              <a:buNone/>
-            </a:pPr>
-            <a:r>
-              <a:rPr lang="en-US" sz="880" dirty="0">
-                <a:solidFill>
-                  <a:srgbClr val="1C2733"/>
-                </a:solidFill>
-                <a:latin typeface="Malgun Gothic" pitchFamily="34" charset="0"/>
-                <a:ea typeface="Malgun Gothic" pitchFamily="34" charset="-122"/>
-                <a:cs typeface="Malgun Gothic" pitchFamily="34" charset="-120"/>
-              </a:rPr>
-              <a:t>(프로젝트 생성 ~ 결과 추출 7단계)</a:t>
-            </a:r>
-            <a:endParaRPr lang="en-US" sz="880" dirty="0"/>
-          </a:p>
-        </p:txBody>
-      </p:sp>
-      <p:sp>
-        <p:nvSpPr>
-          <p:cNvPr id="13" name="Text 11"/>
-          <p:cNvSpPr txBox="1"/>
-          <p:nvPr/>
-        </p:nvSpPr>
-        <p:spPr>
-          <a:xfrm>
-            <a:off x="813816" y="2487168"/>
-            <a:ext cx="4846320" cy="182880"/>
-          </a:xfrm>
-          <a:prstGeom prst="rect">
-            <a:avLst/>
-          </a:prstGeom>
-          <a:noFill/>
-          <a:ln/>
-        </p:spPr>
-        <p:txBody>
-          <a:bodyPr wrap="square" lIns="0" tIns="0" rIns="0" bIns="0" rtlCol="0" anchor="ctr"/>
-          <a:lstStyle/>
-          <a:p>
-            <a:pPr algn="ctr" indent="0" marL="0">
-              <a:buNone/>
-            </a:pPr>
-            <a:r>
-              <a:rPr lang="en-US" sz="700" dirty="0">
-                <a:solidFill>
-                  <a:srgbClr val="6B7A8F"/>
-                </a:solidFill>
-                <a:latin typeface="Malgun Gothic" pitchFamily="34" charset="0"/>
-                <a:ea typeface="Malgun Gothic" pitchFamily="34" charset="-122"/>
-                <a:cs typeface="Malgun Gothic" pitchFamily="34" charset="-120"/>
-              </a:rPr>
-              <a:t>▼</a:t>
-            </a:r>
-            <a:endParaRPr lang="en-US" sz="700" dirty="0"/>
-          </a:p>
-        </p:txBody>
-      </p:sp>
-      <p:sp>
-        <p:nvSpPr>
-          <p:cNvPr id="14" name="Shape 12"/>
-          <p:cNvSpPr/>
-          <p:nvPr/>
-        </p:nvSpPr>
-        <p:spPr>
-          <a:xfrm>
-            <a:off x="813816" y="2670048"/>
-            <a:ext cx="4846320" cy="585216"/>
-          </a:xfrm>
-          <a:prstGeom prst="roundRect">
-            <a:avLst>
-              <a:gd name="adj" fmla="val 9375"/>
-            </a:avLst>
-          </a:prstGeom>
-          <a:solidFill>
-            <a:srgbClr val="EEF2F7"/>
-          </a:solidFill>
-          <a:ln w="9525">
-            <a:solidFill>
-              <a:srgbClr val="DDE3EB"/>
-            </a:solidFill>
-            <a:prstDash val="solid"/>
-          </a:ln>
-        </p:spPr>
-      </p:sp>
-      <p:sp>
-        <p:nvSpPr>
-          <p:cNvPr id="15" name="Text 13"/>
-          <p:cNvSpPr txBox="1"/>
-          <p:nvPr/>
-        </p:nvSpPr>
-        <p:spPr>
-          <a:xfrm>
-            <a:off x="923544" y="2670048"/>
-            <a:ext cx="310896" cy="585216"/>
-          </a:xfrm>
-          <a:prstGeom prst="rect">
-            <a:avLst/>
-          </a:prstGeom>
-          <a:noFill/>
-          <a:ln/>
-        </p:spPr>
-        <p:txBody>
-          <a:bodyPr wrap="square" lIns="0" tIns="0" rIns="0" bIns="0" rtlCol="0" anchor="ctr"/>
-          <a:lstStyle/>
-          <a:p>
-            <a:pPr indent="0" marL="0">
-              <a:buNone/>
-            </a:pPr>
-            <a:r>
-              <a:rPr lang="en-US" sz="1600" b="1" dirty="0">
-                <a:solidFill>
-                  <a:srgbClr val="00A3C4"/>
-                </a:solidFill>
-                <a:latin typeface="Malgun Gothic" pitchFamily="34" charset="0"/>
-                <a:ea typeface="Malgun Gothic" pitchFamily="34" charset="-122"/>
-                <a:cs typeface="Malgun Gothic" pitchFamily="34" charset="-120"/>
-              </a:rPr>
-              <a:t>2</a:t>
-            </a:r>
-            <a:endParaRPr lang="en-US" sz="1600" dirty="0"/>
-          </a:p>
-        </p:txBody>
-      </p:sp>
-      <p:sp>
-        <p:nvSpPr>
-          <p:cNvPr id="16" name="Text 14"/>
-          <p:cNvSpPr txBox="1"/>
-          <p:nvPr/>
-        </p:nvSpPr>
-        <p:spPr>
-          <a:xfrm>
-            <a:off x="1289304" y="2706624"/>
-            <a:ext cx="1737360" cy="512064"/>
-          </a:xfrm>
-          <a:prstGeom prst="rect">
-            <a:avLst/>
-          </a:prstGeom>
-          <a:noFill/>
-          <a:ln/>
-        </p:spPr>
-        <p:txBody>
-          <a:bodyPr wrap="square" lIns="0" tIns="0" rIns="0" bIns="0" rtlCol="0" anchor="ctr"/>
-          <a:lstStyle/>
-          <a:p>
-            <a:pPr indent="0" marL="0">
-              <a:buNone/>
-            </a:pPr>
-            <a:r>
-              <a:rPr lang="en-US" sz="1050" b="1" dirty="0">
-                <a:solidFill>
-                  <a:srgbClr val="16305B"/>
-                </a:solidFill>
-                <a:latin typeface="Malgun Gothic" pitchFamily="34" charset="0"/>
-                <a:ea typeface="Malgun Gothic" pitchFamily="34" charset="-122"/>
-                <a:cs typeface="Malgun Gothic" pitchFamily="34" charset="-120"/>
-              </a:rPr>
-              <a:t>스크립트 리코더 기록</a:t>
-            </a:r>
-            <a:endParaRPr lang="en-US" sz="1050" dirty="0"/>
-          </a:p>
-        </p:txBody>
-      </p:sp>
-      <p:sp>
-        <p:nvSpPr>
-          <p:cNvPr id="17" name="Text 15"/>
-          <p:cNvSpPr txBox="1"/>
-          <p:nvPr/>
-        </p:nvSpPr>
-        <p:spPr>
-          <a:xfrm>
-            <a:off x="2990088" y="2706624"/>
-            <a:ext cx="2596896" cy="512064"/>
-          </a:xfrm>
-          <a:prstGeom prst="rect">
-            <a:avLst/>
-          </a:prstGeom>
-          <a:noFill/>
-          <a:ln/>
-        </p:spPr>
-        <p:txBody>
-          <a:bodyPr wrap="square" lIns="0" tIns="0" rIns="0" bIns="0" rtlCol="0" anchor="ctr"/>
-          <a:lstStyle/>
-          <a:p>
-            <a:pPr indent="0" marL="0">
-              <a:lnSpc>
-                <a:spcPct val="110000"/>
-              </a:lnSpc>
-              <a:buNone/>
-            </a:pPr>
-            <a:r>
-              <a:rPr lang="en-US" sz="880" dirty="0">
-                <a:solidFill>
-                  <a:srgbClr val="1C2733"/>
-                </a:solidFill>
-                <a:latin typeface="Malgun Gothic" pitchFamily="34" charset="0"/>
-                <a:ea typeface="Malgun Gothic" pitchFamily="34" charset="-122"/>
-                <a:cs typeface="Malgun Gothic" pitchFamily="34" charset="-120"/>
-              </a:rPr>
-              <a:t>GUI 조작 과정을 Python 스크립트로 기록</a:t>
-            </a:r>
-            <a:endParaRPr lang="en-US" sz="880" dirty="0"/>
-          </a:p>
-        </p:txBody>
-      </p:sp>
-      <p:sp>
-        <p:nvSpPr>
-          <p:cNvPr id="18" name="Text 16"/>
-          <p:cNvSpPr txBox="1"/>
-          <p:nvPr/>
-        </p:nvSpPr>
-        <p:spPr>
-          <a:xfrm>
-            <a:off x="813816" y="3255264"/>
-            <a:ext cx="4846320" cy="182880"/>
-          </a:xfrm>
-          <a:prstGeom prst="rect">
-            <a:avLst/>
-          </a:prstGeom>
-          <a:noFill/>
-          <a:ln/>
-        </p:spPr>
-        <p:txBody>
-          <a:bodyPr wrap="square" lIns="0" tIns="0" rIns="0" bIns="0" rtlCol="0" anchor="ctr"/>
-          <a:lstStyle/>
-          <a:p>
-            <a:pPr algn="ctr" indent="0" marL="0">
-              <a:buNone/>
-            </a:pPr>
-            <a:r>
-              <a:rPr lang="en-US" sz="700" dirty="0">
-                <a:solidFill>
-                  <a:srgbClr val="6B7A8F"/>
-                </a:solidFill>
-                <a:latin typeface="Malgun Gothic" pitchFamily="34" charset="0"/>
-                <a:ea typeface="Malgun Gothic" pitchFamily="34" charset="-122"/>
-                <a:cs typeface="Malgun Gothic" pitchFamily="34" charset="-120"/>
-              </a:rPr>
-              <a:t>▼</a:t>
-            </a:r>
-            <a:endParaRPr lang="en-US" sz="700" dirty="0"/>
-          </a:p>
-        </p:txBody>
-      </p:sp>
-      <p:sp>
-        <p:nvSpPr>
-          <p:cNvPr id="19" name="Shape 17"/>
-          <p:cNvSpPr/>
-          <p:nvPr/>
-        </p:nvSpPr>
-        <p:spPr>
-          <a:xfrm>
-            <a:off x="813816" y="3438144"/>
-            <a:ext cx="4846320" cy="585216"/>
-          </a:xfrm>
-          <a:prstGeom prst="roundRect">
-            <a:avLst>
-              <a:gd name="adj" fmla="val 9375"/>
-            </a:avLst>
-          </a:prstGeom>
-          <a:solidFill>
-            <a:srgbClr val="16305B"/>
-          </a:solidFill>
-          <a:ln w="9525">
-            <a:solidFill>
-              <a:srgbClr val="16305B"/>
-            </a:solidFill>
-            <a:prstDash val="solid"/>
-          </a:ln>
-        </p:spPr>
-      </p:sp>
-      <p:sp>
-        <p:nvSpPr>
-          <p:cNvPr id="20" name="Text 18"/>
-          <p:cNvSpPr txBox="1"/>
-          <p:nvPr/>
-        </p:nvSpPr>
-        <p:spPr>
-          <a:xfrm>
-            <a:off x="923544" y="3438144"/>
-            <a:ext cx="310896" cy="585216"/>
-          </a:xfrm>
-          <a:prstGeom prst="rect">
-            <a:avLst/>
-          </a:prstGeom>
-          <a:noFill/>
-          <a:ln/>
-        </p:spPr>
-        <p:txBody>
-          <a:bodyPr wrap="square" lIns="0" tIns="0" rIns="0" bIns="0" rtlCol="0" anchor="ctr"/>
-          <a:lstStyle/>
-          <a:p>
-            <a:pPr indent="0" marL="0">
-              <a:buNone/>
-            </a:pPr>
-            <a:r>
-              <a:rPr lang="en-US" sz="1600" b="1" dirty="0">
-                <a:solidFill>
-                  <a:srgbClr val="FFFFFF"/>
-                </a:solidFill>
-                <a:latin typeface="Malgun Gothic" pitchFamily="34" charset="0"/>
-                <a:ea typeface="Malgun Gothic" pitchFamily="34" charset="-122"/>
-                <a:cs typeface="Malgun Gothic" pitchFamily="34" charset="-120"/>
-              </a:rPr>
-              <a:t>3</a:t>
-            </a:r>
-            <a:endParaRPr lang="en-US" sz="1600" dirty="0"/>
-          </a:p>
-        </p:txBody>
-      </p:sp>
-      <p:sp>
-        <p:nvSpPr>
-          <p:cNvPr id="21" name="Text 19"/>
-          <p:cNvSpPr txBox="1"/>
-          <p:nvPr/>
-        </p:nvSpPr>
-        <p:spPr>
-          <a:xfrm>
-            <a:off x="1289304" y="3474720"/>
-            <a:ext cx="1737360" cy="512064"/>
-          </a:xfrm>
-          <a:prstGeom prst="rect">
-            <a:avLst/>
-          </a:prstGeom>
-          <a:noFill/>
-          <a:ln/>
-        </p:spPr>
-        <p:txBody>
-          <a:bodyPr wrap="square" lIns="0" tIns="0" rIns="0" bIns="0" rtlCol="0" anchor="ctr"/>
-          <a:lstStyle/>
-          <a:p>
-            <a:pPr indent="0" marL="0">
-              <a:buNone/>
-            </a:pPr>
-            <a:r>
-              <a:rPr lang="en-US" sz="1050" b="1" dirty="0">
-                <a:solidFill>
-                  <a:srgbClr val="FFFFFF"/>
-                </a:solidFill>
-                <a:latin typeface="Malgun Gothic" pitchFamily="34" charset="0"/>
-                <a:ea typeface="Malgun Gothic" pitchFamily="34" charset="-122"/>
-                <a:cs typeface="Malgun Gothic" pitchFamily="34" charset="-120"/>
-              </a:rPr>
-              <a:t>AI 에이전트와 코드 정리</a:t>
-            </a:r>
-            <a:endParaRPr lang="en-US" sz="1050" dirty="0"/>
-          </a:p>
-        </p:txBody>
-      </p:sp>
-      <p:sp>
-        <p:nvSpPr>
-          <p:cNvPr id="22" name="Text 20"/>
-          <p:cNvSpPr txBox="1"/>
-          <p:nvPr/>
-        </p:nvSpPr>
-        <p:spPr>
-          <a:xfrm>
-            <a:off x="2990088" y="3474720"/>
-            <a:ext cx="2596896" cy="512064"/>
-          </a:xfrm>
-          <a:prstGeom prst="rect">
-            <a:avLst/>
-          </a:prstGeom>
-          <a:noFill/>
-          <a:ln/>
-        </p:spPr>
-        <p:txBody>
-          <a:bodyPr wrap="square" lIns="0" tIns="0" rIns="0" bIns="0" rtlCol="0" anchor="ctr"/>
-          <a:lstStyle/>
-          <a:p>
-            <a:pPr indent="0" marL="0">
-              <a:lnSpc>
-                <a:spcPct val="110000"/>
-              </a:lnSpc>
-              <a:buNone/>
-            </a:pPr>
-            <a:r>
-              <a:rPr lang="en-US" sz="880" dirty="0">
-                <a:solidFill>
-                  <a:srgbClr val="FFFFFF"/>
-                </a:solidFill>
-                <a:latin typeface="Malgun Gothic" pitchFamily="34" charset="0"/>
-                <a:ea typeface="Malgun Gothic" pitchFamily="34" charset="-122"/>
-                <a:cs typeface="Malgun Gothic" pitchFamily="34" charset="-120"/>
-              </a:rPr>
-              <a:t>기록된 고정값을 설계변수 기반으로 치환하고</a:t>
-            </a:r>
-            <a:endParaRPr lang="en-US" sz="880" dirty="0"/>
-          </a:p>
-          <a:p>
-            <a:pPr indent="0" marL="0">
-              <a:lnSpc>
-                <a:spcPct val="110000"/>
-              </a:lnSpc>
-              <a:buNone/>
-            </a:pPr>
-            <a:r>
-              <a:rPr lang="en-US" sz="880" dirty="0">
-                <a:solidFill>
-                  <a:srgbClr val="FFFFFF"/>
-                </a:solidFill>
-                <a:latin typeface="Malgun Gothic" pitchFamily="34" charset="0"/>
-                <a:ea typeface="Malgun Gothic" pitchFamily="34" charset="-122"/>
-                <a:cs typeface="Malgun Gothic" pitchFamily="34" charset="-120"/>
-              </a:rPr>
-              <a:t>재사용 가능한 모듈로 구조화</a:t>
-            </a:r>
-            <a:endParaRPr lang="en-US" sz="880" dirty="0"/>
-          </a:p>
-        </p:txBody>
-      </p:sp>
-      <p:sp>
-        <p:nvSpPr>
-          <p:cNvPr id="23" name="Text 21"/>
-          <p:cNvSpPr txBox="1"/>
-          <p:nvPr/>
-        </p:nvSpPr>
-        <p:spPr>
-          <a:xfrm>
-            <a:off x="813816" y="4023360"/>
-            <a:ext cx="4846320" cy="182880"/>
-          </a:xfrm>
-          <a:prstGeom prst="rect">
-            <a:avLst/>
-          </a:prstGeom>
-          <a:noFill/>
-          <a:ln/>
-        </p:spPr>
-        <p:txBody>
-          <a:bodyPr wrap="square" lIns="0" tIns="0" rIns="0" bIns="0" rtlCol="0" anchor="ctr"/>
-          <a:lstStyle/>
-          <a:p>
-            <a:pPr algn="ctr" indent="0" marL="0">
-              <a:buNone/>
-            </a:pPr>
-            <a:r>
-              <a:rPr lang="en-US" sz="700" dirty="0">
-                <a:solidFill>
-                  <a:srgbClr val="6B7A8F"/>
-                </a:solidFill>
-                <a:latin typeface="Malgun Gothic" pitchFamily="34" charset="0"/>
-                <a:ea typeface="Malgun Gothic" pitchFamily="34" charset="-122"/>
-                <a:cs typeface="Malgun Gothic" pitchFamily="34" charset="-120"/>
-              </a:rPr>
-              <a:t>▼</a:t>
-            </a:r>
-            <a:endParaRPr lang="en-US" sz="700" dirty="0"/>
-          </a:p>
-        </p:txBody>
-      </p:sp>
-      <p:sp>
-        <p:nvSpPr>
-          <p:cNvPr id="24" name="Shape 22"/>
-          <p:cNvSpPr/>
-          <p:nvPr/>
-        </p:nvSpPr>
-        <p:spPr>
-          <a:xfrm>
-            <a:off x="813816" y="4206240"/>
-            <a:ext cx="4846320" cy="585216"/>
-          </a:xfrm>
-          <a:prstGeom prst="roundRect">
-            <a:avLst>
-              <a:gd name="adj" fmla="val 9375"/>
-            </a:avLst>
-          </a:prstGeom>
-          <a:solidFill>
-            <a:srgbClr val="00A3C4"/>
-          </a:solidFill>
-          <a:ln w="9525">
-            <a:solidFill>
-              <a:srgbClr val="00A3C4"/>
-            </a:solidFill>
-            <a:prstDash val="solid"/>
-          </a:ln>
-        </p:spPr>
-      </p:sp>
-      <p:sp>
-        <p:nvSpPr>
-          <p:cNvPr id="25" name="Text 23"/>
-          <p:cNvSpPr txBox="1"/>
-          <p:nvPr/>
-        </p:nvSpPr>
-        <p:spPr>
-          <a:xfrm>
-            <a:off x="923544" y="4206240"/>
-            <a:ext cx="310896" cy="585216"/>
-          </a:xfrm>
-          <a:prstGeom prst="rect">
-            <a:avLst/>
-          </a:prstGeom>
-          <a:noFill/>
-          <a:ln/>
-        </p:spPr>
-        <p:txBody>
-          <a:bodyPr wrap="square" lIns="0" tIns="0" rIns="0" bIns="0" rtlCol="0" anchor="ctr"/>
-          <a:lstStyle/>
-          <a:p>
-            <a:pPr indent="0" marL="0">
-              <a:buNone/>
-            </a:pPr>
-            <a:r>
-              <a:rPr lang="en-US" sz="1600" b="1" dirty="0">
-                <a:solidFill>
-                  <a:srgbClr val="FFFFFF"/>
-                </a:solidFill>
-                <a:latin typeface="Malgun Gothic" pitchFamily="34" charset="0"/>
-                <a:ea typeface="Malgun Gothic" pitchFamily="34" charset="-122"/>
-                <a:cs typeface="Malgun Gothic" pitchFamily="34" charset="-120"/>
-              </a:rPr>
-              <a:t>4</a:t>
-            </a:r>
-            <a:endParaRPr lang="en-US" sz="1600" dirty="0"/>
-          </a:p>
-        </p:txBody>
-      </p:sp>
-      <p:sp>
-        <p:nvSpPr>
-          <p:cNvPr id="26" name="Text 24"/>
-          <p:cNvSpPr txBox="1"/>
-          <p:nvPr/>
-        </p:nvSpPr>
-        <p:spPr>
-          <a:xfrm>
-            <a:off x="1289304" y="4242816"/>
-            <a:ext cx="1737360" cy="512064"/>
-          </a:xfrm>
-          <a:prstGeom prst="rect">
-            <a:avLst/>
-          </a:prstGeom>
-          <a:noFill/>
-          <a:ln/>
-        </p:spPr>
-        <p:txBody>
-          <a:bodyPr wrap="square" lIns="0" tIns="0" rIns="0" bIns="0" rtlCol="0" anchor="ctr"/>
-          <a:lstStyle/>
-          <a:p>
-            <a:pPr indent="0" marL="0">
-              <a:buNone/>
-            </a:pPr>
-            <a:r>
-              <a:rPr lang="en-US" sz="1050" b="1" dirty="0">
-                <a:solidFill>
-                  <a:srgbClr val="FFFFFF"/>
-                </a:solidFill>
-                <a:latin typeface="Malgun Gothic" pitchFamily="34" charset="0"/>
-                <a:ea typeface="Malgun Gothic" pitchFamily="34" charset="-122"/>
-                <a:cs typeface="Malgun Gothic" pitchFamily="34" charset="-120"/>
-              </a:rPr>
-              <a:t>매 회차 자동 반복</a:t>
-            </a:r>
-            <a:endParaRPr lang="en-US" sz="1050" dirty="0"/>
-          </a:p>
-        </p:txBody>
-      </p:sp>
-      <p:sp>
-        <p:nvSpPr>
-          <p:cNvPr id="27" name="Text 25"/>
-          <p:cNvSpPr txBox="1"/>
-          <p:nvPr/>
-        </p:nvSpPr>
-        <p:spPr>
-          <a:xfrm>
-            <a:off x="2990088" y="4242816"/>
-            <a:ext cx="2596896" cy="512064"/>
-          </a:xfrm>
-          <a:prstGeom prst="rect">
-            <a:avLst/>
-          </a:prstGeom>
-          <a:noFill/>
-          <a:ln/>
-        </p:spPr>
-        <p:txBody>
-          <a:bodyPr wrap="square" lIns="0" tIns="0" rIns="0" bIns="0" rtlCol="0" anchor="ctr"/>
-          <a:lstStyle/>
-          <a:p>
-            <a:pPr indent="0" marL="0">
-              <a:lnSpc>
-                <a:spcPct val="110000"/>
-              </a:lnSpc>
-              <a:buNone/>
-            </a:pPr>
-            <a:r>
-              <a:rPr lang="en-US" sz="880" dirty="0">
-                <a:solidFill>
-                  <a:srgbClr val="FFFFFF"/>
-                </a:solidFill>
-                <a:latin typeface="Malgun Gothic" pitchFamily="34" charset="0"/>
-                <a:ea typeface="Malgun Gothic" pitchFamily="34" charset="-122"/>
-                <a:cs typeface="Malgun Gothic" pitchFamily="34" charset="-120"/>
-              </a:rPr>
-              <a:t>형상(STEP)만 바뀌면 동일 절차를 코드가 재현</a:t>
-            </a:r>
-            <a:endParaRPr lang="en-US" sz="880" dirty="0"/>
-          </a:p>
-        </p:txBody>
-      </p:sp>
-      <p:sp>
-        <p:nvSpPr>
-          <p:cNvPr id="28" name="Text 26"/>
-          <p:cNvSpPr txBox="1"/>
-          <p:nvPr/>
-        </p:nvSpPr>
-        <p:spPr>
-          <a:xfrm>
-            <a:off x="813816" y="5029200"/>
-            <a:ext cx="4846320" cy="219456"/>
-          </a:xfrm>
-          <a:prstGeom prst="rect">
-            <a:avLst/>
-          </a:prstGeom>
-          <a:noFill/>
-          <a:ln/>
-        </p:spPr>
-        <p:txBody>
-          <a:bodyPr wrap="square" lIns="0" tIns="0" rIns="0" bIns="0" rtlCol="0" anchor="ctr"/>
-          <a:lstStyle/>
-          <a:p>
-            <a:pPr indent="0" marL="0">
-              <a:buNone/>
-            </a:pPr>
-            <a:r>
-              <a:rPr lang="en-US" sz="900" i="1" dirty="0">
-                <a:solidFill>
-                  <a:srgbClr val="6B7A8F"/>
-                </a:solidFill>
-                <a:latin typeface="Malgun Gothic" pitchFamily="34" charset="0"/>
-                <a:ea typeface="Malgun Gothic" pitchFamily="34" charset="-122"/>
-                <a:cs typeface="Malgun Gothic" pitchFamily="34" charset="-120"/>
-              </a:rPr>
-              <a:t>※ 단계별 GUI 설정은 부록 A-1 참고</a:t>
-            </a:r>
-            <a:endParaRPr lang="en-US" sz="900" dirty="0"/>
-          </a:p>
-        </p:txBody>
-      </p:sp>
-      <p:sp>
-        <p:nvSpPr>
-          <p:cNvPr id="29" name="Shape 27"/>
-          <p:cNvSpPr/>
-          <p:nvPr/>
-        </p:nvSpPr>
-        <p:spPr>
-          <a:xfrm>
-            <a:off x="6336792" y="1188720"/>
-            <a:ext cx="5440680" cy="2176272"/>
-          </a:xfrm>
-          <a:prstGeom prst="roundRect">
-            <a:avLst>
-              <a:gd name="adj" fmla="val 2521"/>
-            </a:avLst>
-          </a:prstGeom>
-          <a:solidFill>
-            <a:srgbClr val="FFFFFF"/>
-          </a:solidFill>
-          <a:ln w="9525">
-            <a:solidFill>
-              <a:srgbClr val="DDE3EB"/>
-            </a:solidFill>
-            <a:prstDash val="solid"/>
-          </a:ln>
-          <a:effectLst>
-            <a:outerShdw sx="100000" sy="100000" kx="0" ky="0" algn="bl" rotWithShape="0" blurRad="101600" dist="12700" dir="5400000">
-              <a:srgbClr val="9AA8BC">
-                <a:alpha val="18000"/>
-              </a:srgbClr>
-            </a:outerShdw>
-          </a:effectLst>
-        </p:spPr>
-      </p:sp>
-      <p:sp>
-        <p:nvSpPr>
-          <p:cNvPr id="30" name="Shape 28"/>
-          <p:cNvSpPr/>
-          <p:nvPr/>
-        </p:nvSpPr>
-        <p:spPr>
-          <a:xfrm>
-            <a:off x="6592824" y="1463040"/>
-            <a:ext cx="82296" cy="182880"/>
-          </a:xfrm>
-          <a:prstGeom prst="rect">
-            <a:avLst/>
-          </a:prstGeom>
-          <a:solidFill>
-            <a:srgbClr val="00A3C4"/>
-          </a:solidFill>
-          <a:ln w="12700">
-            <a:solidFill>
-              <a:srgbClr val="00A3C4"/>
-            </a:solidFill>
-            <a:prstDash val="solid"/>
-          </a:ln>
-        </p:spPr>
-      </p:sp>
-      <p:sp>
-        <p:nvSpPr>
-          <p:cNvPr id="31" name="Text 29"/>
-          <p:cNvSpPr txBox="1"/>
-          <p:nvPr/>
-        </p:nvSpPr>
-        <p:spPr>
-          <a:xfrm>
-            <a:off x="6757416" y="1371600"/>
-            <a:ext cx="4480560" cy="365760"/>
-          </a:xfrm>
-          <a:prstGeom prst="rect">
-            <a:avLst/>
-          </a:prstGeom>
-          <a:noFill/>
-          <a:ln/>
-        </p:spPr>
-        <p:txBody>
-          <a:bodyPr wrap="square" lIns="0" tIns="0" rIns="0" bIns="0" rtlCol="0" anchor="ctr"/>
-          <a:lstStyle/>
-          <a:p>
-            <a:pPr indent="0" marL="0">
-              <a:buNone/>
-            </a:pPr>
-            <a:r>
-              <a:rPr lang="en-US" sz="1300" b="1" dirty="0">
-                <a:solidFill>
-                  <a:srgbClr val="16305B"/>
-                </a:solidFill>
-                <a:latin typeface="Malgun Gothic" pitchFamily="34" charset="0"/>
-                <a:ea typeface="Malgun Gothic" pitchFamily="34" charset="-122"/>
-                <a:cs typeface="Malgun Gothic" pitchFamily="34" charset="-120"/>
-              </a:rPr>
-              <a:t>GUI 수동 설정 vs 코드 자동 구성</a:t>
-            </a:r>
-            <a:endParaRPr lang="en-US" sz="1300" dirty="0"/>
-          </a:p>
-        </p:txBody>
-      </p:sp>
-      <p:graphicFrame>
-        <p:nvGraphicFramePr>
-          <p:cNvPr id="10" name="Table 0"/>
-          <p:cNvGraphicFramePr>
-            <a:graphicFrameLocks noGrp="1"/>
-          </p:cNvGraphicFramePr>
-          <p:nvPr>
-            <p:extLst>
-              <p:ext uri="{D42A27DB-BD31-4B8C-83A1-F6EECF244321}">
-                <p14:modId xmlns:p14="http://schemas.microsoft.com/office/powerpoint/2010/main" val="1579011935"/>
-              </p:ext>
-            </p:extLst>
-          </p:nvPr>
-        </p:nvGraphicFramePr>
-        <p:xfrm>
-          <a:off x="6647688" y="1828800"/>
-          <a:ext cx="4846320" cy="914400"/>
-        </p:xfrm>
-        <a:graphic>
-          <a:graphicData uri="http://schemas.openxmlformats.org/drawingml/2006/table">
-            <a:tbl>
-              <a:tblPr/>
-              <a:tblGrid>
-                <a:gridCol w="1143000"/>
-                <a:gridCol w="1783080"/>
-                <a:gridCol w="1920240"/>
-              </a:tblGrid>
-              <a:tr h="292608">
-                <a:tc>
-                  <a:txBody>
-                    <a:bodyPr/>
-                    <a:lstStyle/>
-                    <a:p>
-                      <a:pPr indent="0" marL="0">
-                        <a:buNone/>
-                      </a:pPr>
-                      <a:r>
-                        <a:rPr lang="en-US" sz="950" b="1" dirty="0">
-                          <a:solidFill>
-                            <a:srgbClr val="16305B"/>
-                          </a:solidFill>
-                          <a:latin typeface="Malgun Gothic" pitchFamily="34" charset="0"/>
-                          <a:ea typeface="Malgun Gothic" pitchFamily="34" charset="-122"/>
-                          <a:cs typeface="Malgun Gothic" pitchFamily="34" charset="-120"/>
-                        </a:rPr>
-                        <a:t>항목</a:t>
-                      </a:r>
-                      <a:endParaRPr lang="en-US" sz="950" dirty="0">
-                        <a:latin typeface="Malgun Gothic" charset="0"/>
-                        <a:ea typeface="Malgun Gothic" charset="0"/>
-                        <a:cs typeface="Malgun Gothic" charset="0"/>
-                      </a:endParaRPr>
-                    </a:p>
-                  </a:txBody>
-                  <a:tcPr marL="50800" marR="50800" marT="25400" marB="25400" anchor="ctr">
-                    <a:lnL w="0" cap="flat" cmpd="sng" algn="ctr">
-                      <a:noFill/>
-                    </a:lnL>
-                    <a:lnR w="0" cap="flat" cmpd="sng" algn="ctr">
-                      <a:noFill/>
-                    </a:lnR>
-                    <a:lnT w="0" cap="flat" cmpd="sng" algn="ctr">
-                      <a:noFill/>
-                    </a:lnT>
-                    <a:lnB w="6350" cap="flat" cmpd="sng" algn="ctr">
-                      <a:solidFill>
-                        <a:srgbClr val="DDE3EB"/>
-                      </a:solidFill>
-                      <a:prstDash val="solid"/>
-                      <a:round/>
-                      <a:headEnd type="none" w="med" len="med"/>
-                      <a:tailEnd type="none" w="med" len="med"/>
-                    </a:lnB>
-                    <a:solidFill>
-                      <a:srgbClr val="EEF2F7"/>
-                    </a:solidFill>
-                  </a:tcPr>
-                </a:tc>
-                <a:tc>
-                  <a:txBody>
-                    <a:bodyPr/>
-                    <a:lstStyle/>
-                    <a:p>
-                      <a:pPr indent="0" marL="0">
-                        <a:buNone/>
-                      </a:pPr>
-                      <a:r>
-                        <a:rPr lang="en-US" sz="950" b="1" dirty="0">
-                          <a:solidFill>
-                            <a:srgbClr val="16305B"/>
-                          </a:solidFill>
-                          <a:latin typeface="Malgun Gothic" pitchFamily="34" charset="0"/>
-                          <a:ea typeface="Malgun Gothic" pitchFamily="34" charset="-122"/>
-                          <a:cs typeface="Malgun Gothic" pitchFamily="34" charset="-120"/>
-                        </a:rPr>
-                        <a:t>GUI 수동</a:t>
-                      </a:r>
-                      <a:endParaRPr lang="en-US" sz="950" dirty="0">
-                        <a:latin typeface="Malgun Gothic" charset="0"/>
-                        <a:ea typeface="Malgun Gothic" charset="0"/>
-                        <a:cs typeface="Malgun Gothic" charset="0"/>
-                      </a:endParaRPr>
-                    </a:p>
-                  </a:txBody>
-                  <a:tcPr marL="50800" marR="50800" marT="25400" marB="25400" anchor="ctr">
-                    <a:lnL w="0" cap="flat" cmpd="sng" algn="ctr">
-                      <a:noFill/>
-                    </a:lnL>
-                    <a:lnR w="0" cap="flat" cmpd="sng" algn="ctr">
-                      <a:noFill/>
-                    </a:lnR>
-                    <a:lnT w="0" cap="flat" cmpd="sng" algn="ctr">
-                      <a:noFill/>
-                    </a:lnT>
-                    <a:lnB w="6350" cap="flat" cmpd="sng" algn="ctr">
-                      <a:solidFill>
-                        <a:srgbClr val="DDE3EB"/>
-                      </a:solidFill>
-                      <a:prstDash val="solid"/>
-                      <a:round/>
-                      <a:headEnd type="none" w="med" len="med"/>
-                      <a:tailEnd type="none" w="med" len="med"/>
-                    </a:lnB>
-                    <a:solidFill>
-                      <a:srgbClr val="EEF2F7"/>
-                    </a:solidFill>
-                  </a:tcPr>
-                </a:tc>
-                <a:tc>
-                  <a:txBody>
-                    <a:bodyPr/>
-                    <a:lstStyle/>
-                    <a:p>
-                      <a:pPr indent="0" marL="0">
-                        <a:buNone/>
-                      </a:pPr>
-                      <a:r>
-                        <a:rPr lang="en-US" sz="950" b="1" dirty="0">
-                          <a:solidFill>
-                            <a:srgbClr val="16305B"/>
-                          </a:solidFill>
-                          <a:latin typeface="Malgun Gothic" pitchFamily="34" charset="0"/>
-                          <a:ea typeface="Malgun Gothic" pitchFamily="34" charset="-122"/>
-                          <a:cs typeface="Malgun Gothic" pitchFamily="34" charset="-120"/>
-                        </a:rPr>
-                        <a:t>코드 자동</a:t>
-                      </a:r>
-                      <a:endParaRPr lang="en-US" sz="950" dirty="0">
-                        <a:latin typeface="Malgun Gothic" charset="0"/>
-                        <a:ea typeface="Malgun Gothic" charset="0"/>
-                        <a:cs typeface="Malgun Gothic" charset="0"/>
-                      </a:endParaRPr>
-                    </a:p>
-                  </a:txBody>
-                  <a:tcPr marL="50800" marR="50800" marT="25400" marB="25400" anchor="ctr">
-                    <a:lnL w="0" cap="flat" cmpd="sng" algn="ctr">
-                      <a:noFill/>
-                    </a:lnL>
-                    <a:lnR w="0" cap="flat" cmpd="sng" algn="ctr">
-                      <a:noFill/>
-                    </a:lnR>
-                    <a:lnT w="0" cap="flat" cmpd="sng" algn="ctr">
-                      <a:noFill/>
-                    </a:lnT>
-                    <a:lnB w="6350" cap="flat" cmpd="sng" algn="ctr">
-                      <a:solidFill>
-                        <a:srgbClr val="DDE3EB"/>
-                      </a:solidFill>
-                      <a:prstDash val="solid"/>
-                      <a:round/>
-                      <a:headEnd type="none" w="med" len="med"/>
-                      <a:tailEnd type="none" w="med" len="med"/>
-                    </a:lnB>
-                    <a:solidFill>
-                      <a:srgbClr val="EEF2F7"/>
-                    </a:solidFill>
-                  </a:tcPr>
-                </a:tc>
-              </a:tr>
-              <a:tr h="292608">
-                <a:tc>
-                  <a:txBody>
-                    <a:bodyPr/>
-                    <a:lstStyle/>
-                    <a:p>
-                      <a:pPr indent="0" marL="0">
-                        <a:buNone/>
-                      </a:pPr>
-                      <a:r>
-                        <a:rPr lang="en-US" sz="950" dirty="0">
-                          <a:solidFill>
-                            <a:srgbClr val="1C2733"/>
-                          </a:solidFill>
-                          <a:latin typeface="Malgun Gothic" pitchFamily="34" charset="0"/>
-                          <a:ea typeface="Malgun Gothic" pitchFamily="34" charset="-122"/>
-                          <a:cs typeface="Malgun Gothic" pitchFamily="34" charset="-120"/>
-                        </a:rPr>
-                        <a:t>모델 구성</a:t>
-                      </a:r>
-                      <a:endParaRPr lang="en-US" sz="950" dirty="0">
-                        <a:latin typeface="Malgun Gothic" charset="0"/>
-                        <a:ea typeface="Malgun Gothic" charset="0"/>
-                        <a:cs typeface="Malgun Gothic" charset="0"/>
-                      </a:endParaRPr>
-                    </a:p>
-                  </a:txBody>
-                  <a:tcPr marL="50800" marR="50800" marT="25400" marB="25400" anchor="ctr">
-                    <a:lnL w="0" cap="flat" cmpd="sng" algn="ctr">
-                      <a:noFill/>
-                    </a:lnL>
-                    <a:lnR w="0" cap="flat" cmpd="sng" algn="ctr">
-                      <a:noFill/>
-                    </a:lnR>
-                    <a:lnT w="0" cap="flat" cmpd="sng" algn="ctr">
-                      <a:noFill/>
-                    </a:lnT>
-                    <a:lnB w="6350" cap="flat" cmpd="sng" algn="ctr">
-                      <a:solidFill>
-                        <a:srgbClr val="DDE3EB"/>
-                      </a:solidFill>
-                      <a:prstDash val="solid"/>
-                      <a:round/>
-                      <a:headEnd type="none" w="med" len="med"/>
-                      <a:tailEnd type="none" w="med" len="med"/>
-                    </a:lnB>
-                  </a:tcPr>
-                </a:tc>
-                <a:tc>
-                  <a:txBody>
-                    <a:bodyPr/>
-                    <a:lstStyle/>
-                    <a:p>
-                      <a:pPr indent="0" marL="0">
-                        <a:buNone/>
-                      </a:pPr>
-                      <a:r>
-                        <a:rPr lang="en-US" sz="950" dirty="0">
-                          <a:solidFill>
-                            <a:srgbClr val="1C2733"/>
-                          </a:solidFill>
-                          <a:latin typeface="Malgun Gothic" pitchFamily="34" charset="0"/>
-                          <a:ea typeface="Malgun Gothic" pitchFamily="34" charset="-122"/>
-                          <a:cs typeface="Malgun Gothic" pitchFamily="34" charset="-120"/>
-                        </a:rPr>
-                        <a:t>7단계 매회 직접 설정</a:t>
-                      </a:r>
-                      <a:endParaRPr lang="en-US" sz="950" dirty="0">
-                        <a:latin typeface="Malgun Gothic" charset="0"/>
-                        <a:ea typeface="Malgun Gothic" charset="0"/>
-                        <a:cs typeface="Malgun Gothic" charset="0"/>
-                      </a:endParaRPr>
-                    </a:p>
-                  </a:txBody>
-                  <a:tcPr marL="50800" marR="50800" marT="25400" marB="25400" anchor="ctr">
-                    <a:lnL w="0" cap="flat" cmpd="sng" algn="ctr">
-                      <a:noFill/>
-                    </a:lnL>
-                    <a:lnR w="0" cap="flat" cmpd="sng" algn="ctr">
-                      <a:noFill/>
-                    </a:lnR>
-                    <a:lnT w="0" cap="flat" cmpd="sng" algn="ctr">
-                      <a:noFill/>
-                    </a:lnT>
-                    <a:lnB w="6350" cap="flat" cmpd="sng" algn="ctr">
-                      <a:solidFill>
-                        <a:srgbClr val="DDE3EB"/>
-                      </a:solidFill>
-                      <a:prstDash val="solid"/>
-                      <a:round/>
-                      <a:headEnd type="none" w="med" len="med"/>
-                      <a:tailEnd type="none" w="med" len="med"/>
-                    </a:lnB>
-                  </a:tcPr>
-                </a:tc>
-                <a:tc>
-                  <a:txBody>
-                    <a:bodyPr/>
-                    <a:lstStyle/>
-                    <a:p>
-                      <a:pPr indent="0" marL="0">
-                        <a:buNone/>
-                      </a:pPr>
-                      <a:r>
-                        <a:rPr lang="en-US" sz="950" b="1" dirty="0">
-                          <a:solidFill>
-                            <a:srgbClr val="16305B"/>
-                          </a:solidFill>
-                          <a:latin typeface="Malgun Gothic" pitchFamily="34" charset="0"/>
-                          <a:ea typeface="Malgun Gothic" pitchFamily="34" charset="-122"/>
-                          <a:cs typeface="Malgun Gothic" pitchFamily="34" charset="-120"/>
-                        </a:rPr>
-                        <a:t>스크립트 1회 실행</a:t>
-                      </a:r>
-                      <a:endParaRPr lang="en-US" sz="950" dirty="0">
-                        <a:latin typeface="Malgun Gothic" charset="0"/>
-                        <a:ea typeface="Malgun Gothic" charset="0"/>
-                        <a:cs typeface="Malgun Gothic" charset="0"/>
-                      </a:endParaRPr>
-                    </a:p>
-                  </a:txBody>
-                  <a:tcPr marL="50800" marR="50800" marT="25400" marB="25400" anchor="ctr">
-                    <a:lnL w="0" cap="flat" cmpd="sng" algn="ctr">
-                      <a:noFill/>
-                    </a:lnL>
-                    <a:lnR w="0" cap="flat" cmpd="sng" algn="ctr">
-                      <a:noFill/>
-                    </a:lnR>
-                    <a:lnT w="0" cap="flat" cmpd="sng" algn="ctr">
-                      <a:noFill/>
-                    </a:lnT>
-                    <a:lnB w="6350" cap="flat" cmpd="sng" algn="ctr">
-                      <a:solidFill>
-                        <a:srgbClr val="DDE3EB"/>
-                      </a:solidFill>
-                      <a:prstDash val="solid"/>
-                      <a:round/>
-                      <a:headEnd type="none" w="med" len="med"/>
-                      <a:tailEnd type="none" w="med" len="med"/>
-                    </a:lnB>
-                  </a:tcPr>
-                </a:tc>
-              </a:tr>
-              <a:tr h="292608">
-                <a:tc>
-                  <a:txBody>
-                    <a:bodyPr/>
-                    <a:lstStyle/>
-                    <a:p>
-                      <a:pPr indent="0" marL="0">
-                        <a:buNone/>
-                      </a:pPr>
-                      <a:r>
-                        <a:rPr lang="en-US" sz="950" dirty="0">
-                          <a:solidFill>
-                            <a:srgbClr val="1C2733"/>
-                          </a:solidFill>
-                          <a:latin typeface="Malgun Gothic" pitchFamily="34" charset="0"/>
-                          <a:ea typeface="Malgun Gothic" pitchFamily="34" charset="-122"/>
-                          <a:cs typeface="Malgun Gothic" pitchFamily="34" charset="-120"/>
-                        </a:rPr>
-                        <a:t>형상 변경 시</a:t>
-                      </a:r>
-                      <a:endParaRPr lang="en-US" sz="950" dirty="0">
-                        <a:latin typeface="Malgun Gothic" charset="0"/>
-                        <a:ea typeface="Malgun Gothic" charset="0"/>
-                        <a:cs typeface="Malgun Gothic" charset="0"/>
-                      </a:endParaRPr>
-                    </a:p>
-                  </a:txBody>
-                  <a:tcPr marL="50800" marR="50800" marT="25400" marB="25400" anchor="ctr">
-                    <a:lnL w="0" cap="flat" cmpd="sng" algn="ctr">
-                      <a:noFill/>
-                    </a:lnL>
-                    <a:lnR w="0" cap="flat" cmpd="sng" algn="ctr">
-                      <a:noFill/>
-                    </a:lnR>
-                    <a:lnT w="0" cap="flat" cmpd="sng" algn="ctr">
-                      <a:noFill/>
-                    </a:lnT>
-                    <a:lnB w="6350" cap="flat" cmpd="sng" algn="ctr">
-                      <a:solidFill>
-                        <a:srgbClr val="DDE3EB"/>
-                      </a:solidFill>
-                      <a:prstDash val="solid"/>
-                      <a:round/>
-                      <a:headEnd type="none" w="med" len="med"/>
-                      <a:tailEnd type="none" w="med" len="med"/>
-                    </a:lnB>
-                  </a:tcPr>
-                </a:tc>
-                <a:tc>
-                  <a:txBody>
-                    <a:bodyPr/>
-                    <a:lstStyle/>
-                    <a:p>
-                      <a:pPr indent="0" marL="0">
-                        <a:buNone/>
-                      </a:pPr>
-                      <a:r>
-                        <a:rPr lang="en-US" sz="950" dirty="0">
-                          <a:solidFill>
-                            <a:srgbClr val="1C2733"/>
-                          </a:solidFill>
-                          <a:latin typeface="Malgun Gothic" pitchFamily="34" charset="0"/>
-                          <a:ea typeface="Malgun Gothic" pitchFamily="34" charset="-122"/>
-                          <a:cs typeface="Malgun Gothic" pitchFamily="34" charset="-120"/>
-                        </a:rPr>
-                        <a:t>처음부터 재설정</a:t>
-                      </a:r>
-                      <a:endParaRPr lang="en-US" sz="950" dirty="0">
-                        <a:latin typeface="Malgun Gothic" charset="0"/>
-                        <a:ea typeface="Malgun Gothic" charset="0"/>
-                        <a:cs typeface="Malgun Gothic" charset="0"/>
-                      </a:endParaRPr>
-                    </a:p>
-                  </a:txBody>
-                  <a:tcPr marL="50800" marR="50800" marT="25400" marB="25400" anchor="ctr">
-                    <a:lnL w="0" cap="flat" cmpd="sng" algn="ctr">
-                      <a:noFill/>
-                    </a:lnL>
-                    <a:lnR w="0" cap="flat" cmpd="sng" algn="ctr">
-                      <a:noFill/>
-                    </a:lnR>
-                    <a:lnT w="0" cap="flat" cmpd="sng" algn="ctr">
-                      <a:noFill/>
-                    </a:lnT>
-                    <a:lnB w="6350" cap="flat" cmpd="sng" algn="ctr">
-                      <a:solidFill>
-                        <a:srgbClr val="DDE3EB"/>
-                      </a:solidFill>
-                      <a:prstDash val="solid"/>
-                      <a:round/>
-                      <a:headEnd type="none" w="med" len="med"/>
-                      <a:tailEnd type="none" w="med" len="med"/>
-                    </a:lnB>
-                  </a:tcPr>
-                </a:tc>
-                <a:tc>
-                  <a:txBody>
-                    <a:bodyPr/>
-                    <a:lstStyle/>
-                    <a:p>
-                      <a:pPr indent="0" marL="0">
-                        <a:buNone/>
-                      </a:pPr>
-                      <a:r>
-                        <a:rPr lang="en-US" sz="950" b="1" dirty="0">
-                          <a:solidFill>
-                            <a:srgbClr val="16305B"/>
-                          </a:solidFill>
-                          <a:latin typeface="Malgun Gothic" pitchFamily="34" charset="0"/>
-                          <a:ea typeface="Malgun Gothic" pitchFamily="34" charset="-122"/>
-                          <a:cs typeface="Malgun Gothic" pitchFamily="34" charset="-120"/>
-                        </a:rPr>
-                        <a:t>STEP 교체만으로 재구성</a:t>
-                      </a:r>
-                      <a:endParaRPr lang="en-US" sz="950" dirty="0">
-                        <a:latin typeface="Malgun Gothic" charset="0"/>
-                        <a:ea typeface="Malgun Gothic" charset="0"/>
-                        <a:cs typeface="Malgun Gothic" charset="0"/>
-                      </a:endParaRPr>
-                    </a:p>
-                  </a:txBody>
-                  <a:tcPr marL="50800" marR="50800" marT="25400" marB="25400" anchor="ctr">
-                    <a:lnL w="0" cap="flat" cmpd="sng" algn="ctr">
-                      <a:noFill/>
-                    </a:lnL>
-                    <a:lnR w="0" cap="flat" cmpd="sng" algn="ctr">
-                      <a:noFill/>
-                    </a:lnR>
-                    <a:lnT w="0" cap="flat" cmpd="sng" algn="ctr">
-                      <a:noFill/>
-                    </a:lnT>
-                    <a:lnB w="6350" cap="flat" cmpd="sng" algn="ctr">
-                      <a:solidFill>
-                        <a:srgbClr val="DDE3EB"/>
-                      </a:solidFill>
-                      <a:prstDash val="solid"/>
-                      <a:round/>
-                      <a:headEnd type="none" w="med" len="med"/>
-                      <a:tailEnd type="none" w="med" len="med"/>
-                    </a:lnB>
-                  </a:tcPr>
-                </a:tc>
-              </a:tr>
-              <a:tr h="292608">
-                <a:tc>
-                  <a:txBody>
-                    <a:bodyPr/>
-                    <a:lstStyle/>
-                    <a:p>
-                      <a:pPr indent="0" marL="0">
-                        <a:buNone/>
-                      </a:pPr>
-                      <a:r>
-                        <a:rPr lang="en-US" sz="950" dirty="0">
-                          <a:solidFill>
-                            <a:srgbClr val="1C2733"/>
-                          </a:solidFill>
-                          <a:latin typeface="Malgun Gothic" pitchFamily="34" charset="0"/>
-                          <a:ea typeface="Malgun Gothic" pitchFamily="34" charset="-122"/>
-                          <a:cs typeface="Malgun Gothic" pitchFamily="34" charset="-120"/>
-                        </a:rPr>
-                        <a:t>측정면 배치</a:t>
-                      </a:r>
-                      <a:endParaRPr lang="en-US" sz="950" dirty="0">
-                        <a:latin typeface="Malgun Gothic" charset="0"/>
-                        <a:ea typeface="Malgun Gothic" charset="0"/>
-                        <a:cs typeface="Malgun Gothic" charset="0"/>
-                      </a:endParaRPr>
-                    </a:p>
-                  </a:txBody>
-                  <a:tcPr marL="50800" marR="50800" marT="25400" marB="25400" anchor="ctr">
-                    <a:lnL w="0" cap="flat" cmpd="sng" algn="ctr">
-                      <a:noFill/>
-                    </a:lnL>
-                    <a:lnR w="0" cap="flat" cmpd="sng" algn="ctr">
-                      <a:noFill/>
-                    </a:lnR>
-                    <a:lnT w="0" cap="flat" cmpd="sng" algn="ctr">
-                      <a:noFill/>
-                    </a:lnT>
-                    <a:lnB w="6350" cap="flat" cmpd="sng" algn="ctr">
-                      <a:solidFill>
-                        <a:srgbClr val="DDE3EB"/>
-                      </a:solidFill>
-                      <a:prstDash val="solid"/>
-                      <a:round/>
-                      <a:headEnd type="none" w="med" len="med"/>
-                      <a:tailEnd type="none" w="med" len="med"/>
-                    </a:lnB>
-                  </a:tcPr>
-                </a:tc>
-                <a:tc>
-                  <a:txBody>
-                    <a:bodyPr/>
-                    <a:lstStyle/>
-                    <a:p>
-                      <a:pPr indent="0" marL="0">
-                        <a:buNone/>
-                      </a:pPr>
-                      <a:r>
-                        <a:rPr lang="en-US" sz="950" dirty="0">
-                          <a:solidFill>
-                            <a:srgbClr val="1C2733"/>
-                          </a:solidFill>
-                          <a:latin typeface="Malgun Gothic" pitchFamily="34" charset="0"/>
-                          <a:ea typeface="Malgun Gothic" pitchFamily="34" charset="-122"/>
-                          <a:cs typeface="Malgun Gothic" pitchFamily="34" charset="-120"/>
-                        </a:rPr>
-                        <a:t>유로마다 수작업</a:t>
-                      </a:r>
-                      <a:endParaRPr lang="en-US" sz="950" dirty="0">
-                        <a:latin typeface="Malgun Gothic" charset="0"/>
-                        <a:ea typeface="Malgun Gothic" charset="0"/>
-                        <a:cs typeface="Malgun Gothic" charset="0"/>
-                      </a:endParaRPr>
-                    </a:p>
-                  </a:txBody>
-                  <a:tcPr marL="50800" marR="50800" marT="25400" marB="25400" anchor="ctr">
-                    <a:lnL w="0" cap="flat" cmpd="sng" algn="ctr">
-                      <a:noFill/>
-                    </a:lnL>
-                    <a:lnR w="0" cap="flat" cmpd="sng" algn="ctr">
-                      <a:noFill/>
-                    </a:lnR>
-                    <a:lnT w="0" cap="flat" cmpd="sng" algn="ctr">
-                      <a:noFill/>
-                    </a:lnT>
-                    <a:lnB w="6350" cap="flat" cmpd="sng" algn="ctr">
-                      <a:solidFill>
-                        <a:srgbClr val="DDE3EB"/>
-                      </a:solidFill>
-                      <a:prstDash val="solid"/>
-                      <a:round/>
-                      <a:headEnd type="none" w="med" len="med"/>
-                      <a:tailEnd type="none" w="med" len="med"/>
-                    </a:lnB>
-                  </a:tcPr>
-                </a:tc>
-                <a:tc>
-                  <a:txBody>
-                    <a:bodyPr/>
-                    <a:lstStyle/>
-                    <a:p>
-                      <a:pPr indent="0" marL="0">
-                        <a:buNone/>
-                      </a:pPr>
-                      <a:r>
-                        <a:rPr lang="en-US" sz="950" b="1" dirty="0">
-                          <a:solidFill>
-                            <a:srgbClr val="16305B"/>
-                          </a:solidFill>
-                          <a:latin typeface="Malgun Gothic" pitchFamily="34" charset="0"/>
-                          <a:ea typeface="Malgun Gothic" pitchFamily="34" charset="-122"/>
-                          <a:cs typeface="Malgun Gothic" pitchFamily="34" charset="-120"/>
-                        </a:rPr>
-                        <a:t>핀 개수 따라 자동 계산</a:t>
-                      </a:r>
-                      <a:endParaRPr lang="en-US" sz="950" dirty="0">
-                        <a:latin typeface="Malgun Gothic" charset="0"/>
-                        <a:ea typeface="Malgun Gothic" charset="0"/>
-                        <a:cs typeface="Malgun Gothic" charset="0"/>
-                      </a:endParaRPr>
-                    </a:p>
-                  </a:txBody>
-                  <a:tcPr marL="50800" marR="50800" marT="25400" marB="25400" anchor="ctr">
-                    <a:lnL w="0" cap="flat" cmpd="sng" algn="ctr">
-                      <a:noFill/>
-                    </a:lnL>
-                    <a:lnR w="0" cap="flat" cmpd="sng" algn="ctr">
-                      <a:noFill/>
-                    </a:lnR>
-                    <a:lnT w="0" cap="flat" cmpd="sng" algn="ctr">
-                      <a:noFill/>
-                    </a:lnT>
-                    <a:lnB w="6350" cap="flat" cmpd="sng" algn="ctr">
-                      <a:solidFill>
-                        <a:srgbClr val="DDE3EB"/>
-                      </a:solidFill>
-                      <a:prstDash val="solid"/>
-                      <a:round/>
-                      <a:headEnd type="none" w="med" len="med"/>
-                      <a:tailEnd type="none" w="med" len="med"/>
-                    </a:lnB>
-                  </a:tcPr>
-                </a:tc>
-              </a:tr>
-              <a:tr h="292608">
-                <a:tc>
-                  <a:txBody>
-                    <a:bodyPr/>
-                    <a:lstStyle/>
-                    <a:p>
-                      <a:pPr indent="0" marL="0">
-                        <a:buNone/>
-                      </a:pPr>
-                      <a:r>
-                        <a:rPr lang="en-US" sz="950" dirty="0">
-                          <a:solidFill>
-                            <a:srgbClr val="1C2733"/>
-                          </a:solidFill>
-                          <a:latin typeface="Malgun Gothic" pitchFamily="34" charset="0"/>
-                          <a:ea typeface="Malgun Gothic" pitchFamily="34" charset="-122"/>
-                          <a:cs typeface="Malgun Gothic" pitchFamily="34" charset="-120"/>
-                        </a:rPr>
-                        <a:t>설정 일관성</a:t>
-                      </a:r>
-                      <a:endParaRPr lang="en-US" sz="950" dirty="0">
-                        <a:latin typeface="Malgun Gothic" charset="0"/>
-                        <a:ea typeface="Malgun Gothic" charset="0"/>
-                        <a:cs typeface="Malgun Gothic" charset="0"/>
-                      </a:endParaRPr>
-                    </a:p>
-                  </a:txBody>
-                  <a:tcPr marL="50800" marR="50800" marT="25400" marB="25400" anchor="ctr">
-                    <a:lnL w="0" cap="flat" cmpd="sng" algn="ctr">
-                      <a:noFill/>
-                    </a:lnL>
-                    <a:lnR w="0" cap="flat" cmpd="sng" algn="ctr">
-                      <a:noFill/>
-                    </a:lnR>
-                    <a:lnT w="0" cap="flat" cmpd="sng" algn="ctr">
-                      <a:noFill/>
-                    </a:lnT>
-                    <a:lnB w="6350" cap="flat" cmpd="sng" algn="ctr">
-                      <a:solidFill>
-                        <a:srgbClr val="DDE3EB"/>
-                      </a:solidFill>
-                      <a:prstDash val="solid"/>
-                      <a:round/>
-                      <a:headEnd type="none" w="med" len="med"/>
-                      <a:tailEnd type="none" w="med" len="med"/>
-                    </a:lnB>
-                  </a:tcPr>
-                </a:tc>
-                <a:tc>
-                  <a:txBody>
-                    <a:bodyPr/>
-                    <a:lstStyle/>
-                    <a:p>
-                      <a:pPr indent="0" marL="0">
-                        <a:buNone/>
-                      </a:pPr>
-                      <a:r>
-                        <a:rPr lang="en-US" sz="950" dirty="0">
-                          <a:solidFill>
-                            <a:srgbClr val="1C2733"/>
-                          </a:solidFill>
-                          <a:latin typeface="Malgun Gothic" pitchFamily="34" charset="0"/>
-                          <a:ea typeface="Malgun Gothic" pitchFamily="34" charset="-122"/>
-                          <a:cs typeface="Malgun Gothic" pitchFamily="34" charset="-120"/>
-                        </a:rPr>
-                        <a:t>작업자·회차별 편차</a:t>
-                      </a:r>
-                      <a:endParaRPr lang="en-US" sz="950" dirty="0">
-                        <a:latin typeface="Malgun Gothic" charset="0"/>
-                        <a:ea typeface="Malgun Gothic" charset="0"/>
-                        <a:cs typeface="Malgun Gothic" charset="0"/>
-                      </a:endParaRPr>
-                    </a:p>
-                  </a:txBody>
-                  <a:tcPr marL="50800" marR="50800" marT="25400" marB="25400" anchor="ctr">
-                    <a:lnL w="0" cap="flat" cmpd="sng" algn="ctr">
-                      <a:noFill/>
-                    </a:lnL>
-                    <a:lnR w="0" cap="flat" cmpd="sng" algn="ctr">
-                      <a:noFill/>
-                    </a:lnR>
-                    <a:lnT w="0" cap="flat" cmpd="sng" algn="ctr">
-                      <a:noFill/>
-                    </a:lnT>
-                    <a:lnB w="6350" cap="flat" cmpd="sng" algn="ctr">
-                      <a:solidFill>
-                        <a:srgbClr val="DDE3EB"/>
-                      </a:solidFill>
-                      <a:prstDash val="solid"/>
-                      <a:round/>
-                      <a:headEnd type="none" w="med" len="med"/>
-                      <a:tailEnd type="none" w="med" len="med"/>
-                    </a:lnB>
-                  </a:tcPr>
-                </a:tc>
-                <a:tc>
-                  <a:txBody>
-                    <a:bodyPr/>
-                    <a:lstStyle/>
-                    <a:p>
-                      <a:pPr indent="0" marL="0">
-                        <a:buNone/>
-                      </a:pPr>
-                      <a:r>
-                        <a:rPr lang="en-US" sz="950" b="1" dirty="0">
-                          <a:solidFill>
-                            <a:srgbClr val="16305B"/>
-                          </a:solidFill>
-                          <a:latin typeface="Malgun Gothic" pitchFamily="34" charset="0"/>
-                          <a:ea typeface="Malgun Gothic" pitchFamily="34" charset="-122"/>
-                          <a:cs typeface="Malgun Gothic" pitchFamily="34" charset="-120"/>
-                        </a:rPr>
-                        <a:t>전 회차 동일 조건</a:t>
-                      </a:r>
-                      <a:endParaRPr lang="en-US" sz="950" dirty="0">
-                        <a:latin typeface="Malgun Gothic" charset="0"/>
-                        <a:ea typeface="Malgun Gothic" charset="0"/>
-                        <a:cs typeface="Malgun Gothic" charset="0"/>
-                      </a:endParaRPr>
-                    </a:p>
-                  </a:txBody>
-                  <a:tcPr marL="50800" marR="50800" marT="25400" marB="25400" anchor="ctr">
-                    <a:lnL w="0" cap="flat" cmpd="sng" algn="ctr">
-                      <a:noFill/>
-                    </a:lnL>
-                    <a:lnR w="0" cap="flat" cmpd="sng" algn="ctr">
-                      <a:noFill/>
-                    </a:lnR>
-                    <a:lnT w="0" cap="flat" cmpd="sng" algn="ctr">
-                      <a:noFill/>
-                    </a:lnT>
-                    <a:lnB w="6350" cap="flat" cmpd="sng" algn="ctr">
-                      <a:solidFill>
-                        <a:srgbClr val="DDE3EB"/>
-                      </a:solidFill>
-                      <a:prstDash val="solid"/>
-                      <a:round/>
-                      <a:headEnd type="none" w="med" len="med"/>
-                      <a:tailEnd type="none" w="med" len="med"/>
-                    </a:lnB>
-                  </a:tcPr>
-                </a:tc>
-              </a:tr>
-            </a:tbl>
-          </a:graphicData>
-        </a:graphic>
-      </p:graphicFrame>
-      <p:sp>
-        <p:nvSpPr>
-          <p:cNvPr id="33" name="Shape 30"/>
-          <p:cNvSpPr/>
-          <p:nvPr/>
-        </p:nvSpPr>
-        <p:spPr>
-          <a:xfrm>
-            <a:off x="6336792" y="3520440"/>
-            <a:ext cx="5440680" cy="1828800"/>
-          </a:xfrm>
-          <a:prstGeom prst="roundRect">
-            <a:avLst>
-              <a:gd name="adj" fmla="val 3000"/>
-            </a:avLst>
-          </a:prstGeom>
-          <a:solidFill>
-            <a:srgbClr val="FFFFFF"/>
-          </a:solidFill>
-          <a:ln w="9525">
-            <a:solidFill>
-              <a:srgbClr val="DDE3EB"/>
-            </a:solidFill>
-            <a:prstDash val="solid"/>
-          </a:ln>
-          <a:effectLst>
-            <a:outerShdw sx="100000" sy="100000" kx="0" ky="0" algn="bl" rotWithShape="0" blurRad="101600" dist="12700" dir="5400000">
-              <a:srgbClr val="9AA8BC">
-                <a:alpha val="18000"/>
-              </a:srgbClr>
-            </a:outerShdw>
-          </a:effectLst>
-        </p:spPr>
-      </p:sp>
-      <p:sp>
-        <p:nvSpPr>
-          <p:cNvPr id="34" name="Shape 31"/>
-          <p:cNvSpPr/>
-          <p:nvPr/>
-        </p:nvSpPr>
-        <p:spPr>
-          <a:xfrm>
-            <a:off x="6592824" y="3794760"/>
-            <a:ext cx="82296" cy="182880"/>
-          </a:xfrm>
-          <a:prstGeom prst="rect">
-            <a:avLst/>
-          </a:prstGeom>
-          <a:solidFill>
-            <a:srgbClr val="00A3C4"/>
-          </a:solidFill>
-          <a:ln w="12700">
-            <a:solidFill>
-              <a:srgbClr val="00A3C4"/>
-            </a:solidFill>
-            <a:prstDash val="solid"/>
-          </a:ln>
-        </p:spPr>
-      </p:sp>
-      <p:sp>
-        <p:nvSpPr>
-          <p:cNvPr id="35" name="Text 32"/>
-          <p:cNvSpPr txBox="1"/>
-          <p:nvPr/>
-        </p:nvSpPr>
-        <p:spPr>
-          <a:xfrm>
-            <a:off x="6757416" y="3703320"/>
-            <a:ext cx="4480560" cy="365760"/>
-          </a:xfrm>
-          <a:prstGeom prst="rect">
-            <a:avLst/>
-          </a:prstGeom>
-          <a:noFill/>
-          <a:ln/>
-        </p:spPr>
-        <p:txBody>
-          <a:bodyPr wrap="square" lIns="0" tIns="0" rIns="0" bIns="0" rtlCol="0" anchor="ctr"/>
-          <a:lstStyle/>
-          <a:p>
-            <a:pPr indent="0" marL="0">
-              <a:buNone/>
-            </a:pPr>
-            <a:r>
-              <a:rPr lang="en-US" sz="1300" b="1" dirty="0">
-                <a:solidFill>
-                  <a:srgbClr val="16305B"/>
-                </a:solidFill>
-                <a:latin typeface="Malgun Gothic" pitchFamily="34" charset="0"/>
-                <a:ea typeface="Malgun Gothic" pitchFamily="34" charset="-122"/>
-                <a:cs typeface="Malgun Gothic" pitchFamily="34" charset="-120"/>
-              </a:rPr>
-              <a:t>측정 항목 및 결과 출력</a:t>
-            </a:r>
-            <a:endParaRPr lang="en-US" sz="1300" dirty="0"/>
-          </a:p>
-        </p:txBody>
-      </p:sp>
-      <p:graphicFrame>
-        <p:nvGraphicFramePr>
-          <p:cNvPr id="19" name="Table 1"/>
-          <p:cNvGraphicFramePr>
-            <a:graphicFrameLocks noGrp="1"/>
-          </p:cNvGraphicFramePr>
-          <p:nvPr>
-            <p:extLst>
-              <p:ext uri="{D42A27DB-BD31-4B8C-83A1-F6EECF244321}">
-                <p14:modId xmlns:p14="http://schemas.microsoft.com/office/powerpoint/2010/main" val="1579011935"/>
-              </p:ext>
-            </p:extLst>
-          </p:nvPr>
-        </p:nvGraphicFramePr>
-        <p:xfrm>
-          <a:off x="6647688" y="4123944"/>
-          <a:ext cx="4846320" cy="914400"/>
-        </p:xfrm>
-        <a:graphic>
-          <a:graphicData uri="http://schemas.openxmlformats.org/drawingml/2006/table">
-            <a:tbl>
-              <a:tblPr/>
-              <a:tblGrid>
-                <a:gridCol w="1737360"/>
-                <a:gridCol w="1554480"/>
-                <a:gridCol w="1554480"/>
-              </a:tblGrid>
-              <a:tr h="237744">
-                <a:tc>
-                  <a:txBody>
-                    <a:bodyPr/>
-                    <a:lstStyle/>
-                    <a:p>
-                      <a:pPr indent="0" marL="0">
-                        <a:buNone/>
-                      </a:pPr>
-                      <a:r>
-                        <a:rPr lang="en-US" sz="900" b="1" dirty="0">
-                          <a:solidFill>
-                            <a:srgbClr val="16305B"/>
-                          </a:solidFill>
-                          <a:latin typeface="Malgun Gothic" pitchFamily="34" charset="0"/>
-                          <a:ea typeface="Malgun Gothic" pitchFamily="34" charset="-122"/>
-                          <a:cs typeface="Malgun Gothic" pitchFamily="34" charset="-120"/>
-                        </a:rPr>
-                        <a:t>측정 대상</a:t>
-                      </a:r>
-                      <a:endParaRPr lang="en-US" sz="900" dirty="0">
-                        <a:latin typeface="Malgun Gothic" charset="0"/>
-                        <a:ea typeface="Malgun Gothic" charset="0"/>
-                        <a:cs typeface="Malgun Gothic" charset="0"/>
-                      </a:endParaRPr>
-                    </a:p>
-                  </a:txBody>
-                  <a:tcPr marL="50800" marR="50800" marT="25400" marB="25400" anchor="ctr">
-                    <a:lnL w="0" cap="flat" cmpd="sng" algn="ctr">
-                      <a:noFill/>
-                    </a:lnL>
-                    <a:lnR w="0" cap="flat" cmpd="sng" algn="ctr">
-                      <a:noFill/>
-                    </a:lnR>
-                    <a:lnT w="0" cap="flat" cmpd="sng" algn="ctr">
-                      <a:noFill/>
-                    </a:lnT>
-                    <a:lnB w="6350" cap="flat" cmpd="sng" algn="ctr">
-                      <a:solidFill>
-                        <a:srgbClr val="DDE3EB"/>
-                      </a:solidFill>
-                      <a:prstDash val="solid"/>
-                      <a:round/>
-                      <a:headEnd type="none" w="med" len="med"/>
-                      <a:tailEnd type="none" w="med" len="med"/>
-                    </a:lnB>
-                    <a:solidFill>
-                      <a:srgbClr val="EEF2F7"/>
-                    </a:solidFill>
-                  </a:tcPr>
-                </a:tc>
-                <a:tc>
-                  <a:txBody>
-                    <a:bodyPr/>
-                    <a:lstStyle/>
-                    <a:p>
-                      <a:pPr indent="0" marL="0">
-                        <a:buNone/>
-                      </a:pPr>
-                      <a:r>
-                        <a:rPr lang="en-US" sz="900" b="1" dirty="0">
-                          <a:solidFill>
-                            <a:srgbClr val="16305B"/>
-                          </a:solidFill>
-                          <a:latin typeface="Malgun Gothic" pitchFamily="34" charset="0"/>
-                          <a:ea typeface="Malgun Gothic" pitchFamily="34" charset="-122"/>
-                          <a:cs typeface="Malgun Gothic" pitchFamily="34" charset="-120"/>
-                        </a:rPr>
-                        <a:t>항목</a:t>
-                      </a:r>
-                      <a:endParaRPr lang="en-US" sz="900" dirty="0">
-                        <a:latin typeface="Malgun Gothic" charset="0"/>
-                        <a:ea typeface="Malgun Gothic" charset="0"/>
-                        <a:cs typeface="Malgun Gothic" charset="0"/>
-                      </a:endParaRPr>
-                    </a:p>
-                  </a:txBody>
-                  <a:tcPr marL="50800" marR="50800" marT="25400" marB="25400" anchor="ctr">
-                    <a:lnL w="0" cap="flat" cmpd="sng" algn="ctr">
-                      <a:noFill/>
-                    </a:lnL>
-                    <a:lnR w="0" cap="flat" cmpd="sng" algn="ctr">
-                      <a:noFill/>
-                    </a:lnR>
-                    <a:lnT w="0" cap="flat" cmpd="sng" algn="ctr">
-                      <a:noFill/>
-                    </a:lnT>
-                    <a:lnB w="6350" cap="flat" cmpd="sng" algn="ctr">
-                      <a:solidFill>
-                        <a:srgbClr val="DDE3EB"/>
-                      </a:solidFill>
-                      <a:prstDash val="solid"/>
-                      <a:round/>
-                      <a:headEnd type="none" w="med" len="med"/>
-                      <a:tailEnd type="none" w="med" len="med"/>
-                    </a:lnB>
-                    <a:solidFill>
-                      <a:srgbClr val="EEF2F7"/>
-                    </a:solidFill>
-                  </a:tcPr>
-                </a:tc>
-                <a:tc>
-                  <a:txBody>
-                    <a:bodyPr/>
-                    <a:lstStyle/>
-                    <a:p>
-                      <a:pPr indent="0" marL="0">
-                        <a:buNone/>
-                      </a:pPr>
-                      <a:r>
-                        <a:rPr lang="en-US" sz="900" b="1" dirty="0">
-                          <a:solidFill>
-                            <a:srgbClr val="16305B"/>
-                          </a:solidFill>
-                          <a:latin typeface="Malgun Gothic" pitchFamily="34" charset="0"/>
-                          <a:ea typeface="Malgun Gothic" pitchFamily="34" charset="-122"/>
-                          <a:cs typeface="Malgun Gothic" pitchFamily="34" charset="-120"/>
-                        </a:rPr>
-                        <a:t>개수</a:t>
-                      </a:r>
-                      <a:endParaRPr lang="en-US" sz="900" dirty="0">
-                        <a:latin typeface="Malgun Gothic" charset="0"/>
-                        <a:ea typeface="Malgun Gothic" charset="0"/>
-                        <a:cs typeface="Malgun Gothic" charset="0"/>
-                      </a:endParaRPr>
-                    </a:p>
-                  </a:txBody>
-                  <a:tcPr marL="50800" marR="50800" marT="25400" marB="25400" anchor="ctr">
-                    <a:lnL w="0" cap="flat" cmpd="sng" algn="ctr">
-                      <a:noFill/>
-                    </a:lnL>
-                    <a:lnR w="0" cap="flat" cmpd="sng" algn="ctr">
-                      <a:noFill/>
-                    </a:lnR>
-                    <a:lnT w="0" cap="flat" cmpd="sng" algn="ctr">
-                      <a:noFill/>
-                    </a:lnT>
-                    <a:lnB w="6350" cap="flat" cmpd="sng" algn="ctr">
-                      <a:solidFill>
-                        <a:srgbClr val="DDE3EB"/>
-                      </a:solidFill>
-                      <a:prstDash val="solid"/>
-                      <a:round/>
-                      <a:headEnd type="none" w="med" len="med"/>
-                      <a:tailEnd type="none" w="med" len="med"/>
-                    </a:lnB>
-                    <a:solidFill>
-                      <a:srgbClr val="EEF2F7"/>
-                    </a:solidFill>
-                  </a:tcPr>
-                </a:tc>
-              </a:tr>
-              <a:tr h="237744">
-                <a:tc>
-                  <a:txBody>
-                    <a:bodyPr/>
-                    <a:lstStyle/>
-                    <a:p>
-                      <a:pPr indent="0" marL="0">
-                        <a:buNone/>
-                      </a:pPr>
-                      <a:r>
-                        <a:rPr lang="en-US" sz="900" dirty="0">
-                          <a:solidFill>
-                            <a:srgbClr val="1C2733"/>
-                          </a:solidFill>
-                          <a:latin typeface="Malgun Gothic" pitchFamily="34" charset="0"/>
-                          <a:ea typeface="Malgun Gothic" pitchFamily="34" charset="-122"/>
-                          <a:cs typeface="Malgun Gothic" pitchFamily="34" charset="-120"/>
-                        </a:rPr>
-                        <a:t>발열원</a:t>
-                      </a:r>
-                      <a:endParaRPr lang="en-US" sz="900" dirty="0">
-                        <a:latin typeface="Malgun Gothic" charset="0"/>
-                        <a:ea typeface="Malgun Gothic" charset="0"/>
-                        <a:cs typeface="Malgun Gothic" charset="0"/>
-                      </a:endParaRPr>
-                    </a:p>
-                  </a:txBody>
-                  <a:tcPr marL="50800" marR="50800" marT="25400" marB="25400" anchor="ctr">
-                    <a:lnL w="0" cap="flat" cmpd="sng" algn="ctr">
-                      <a:noFill/>
-                    </a:lnL>
-                    <a:lnR w="0" cap="flat" cmpd="sng" algn="ctr">
-                      <a:noFill/>
-                    </a:lnR>
-                    <a:lnT w="0" cap="flat" cmpd="sng" algn="ctr">
-                      <a:noFill/>
-                    </a:lnT>
-                    <a:lnB w="6350" cap="flat" cmpd="sng" algn="ctr">
-                      <a:solidFill>
-                        <a:srgbClr val="DDE3EB"/>
-                      </a:solidFill>
-                      <a:prstDash val="solid"/>
-                      <a:round/>
-                      <a:headEnd type="none" w="med" len="med"/>
-                      <a:tailEnd type="none" w="med" len="med"/>
-                    </a:lnB>
-                  </a:tcPr>
-                </a:tc>
-                <a:tc>
-                  <a:txBody>
-                    <a:bodyPr/>
-                    <a:lstStyle/>
-                    <a:p>
-                      <a:pPr indent="0" marL="0">
-                        <a:buNone/>
-                      </a:pPr>
-                      <a:r>
-                        <a:rPr lang="en-US" sz="900" dirty="0">
-                          <a:solidFill>
-                            <a:srgbClr val="1C2733"/>
-                          </a:solidFill>
-                          <a:latin typeface="Malgun Gothic" pitchFamily="34" charset="0"/>
-                          <a:ea typeface="Malgun Gothic" pitchFamily="34" charset="-122"/>
-                          <a:cs typeface="Malgun Gothic" pitchFamily="34" charset="-120"/>
-                        </a:rPr>
-                        <a:t>최고 · 평균 온도</a:t>
-                      </a:r>
-                      <a:endParaRPr lang="en-US" sz="900" dirty="0">
-                        <a:latin typeface="Malgun Gothic" charset="0"/>
-                        <a:ea typeface="Malgun Gothic" charset="0"/>
-                        <a:cs typeface="Malgun Gothic" charset="0"/>
-                      </a:endParaRPr>
-                    </a:p>
-                  </a:txBody>
-                  <a:tcPr marL="50800" marR="50800" marT="25400" marB="25400" anchor="ctr">
-                    <a:lnL w="0" cap="flat" cmpd="sng" algn="ctr">
-                      <a:noFill/>
-                    </a:lnL>
-                    <a:lnR w="0" cap="flat" cmpd="sng" algn="ctr">
-                      <a:noFill/>
-                    </a:lnR>
-                    <a:lnT w="0" cap="flat" cmpd="sng" algn="ctr">
-                      <a:noFill/>
-                    </a:lnT>
-                    <a:lnB w="6350" cap="flat" cmpd="sng" algn="ctr">
-                      <a:solidFill>
-                        <a:srgbClr val="DDE3EB"/>
-                      </a:solidFill>
-                      <a:prstDash val="solid"/>
-                      <a:round/>
-                      <a:headEnd type="none" w="med" len="med"/>
-                      <a:tailEnd type="none" w="med" len="med"/>
-                    </a:lnB>
-                  </a:tcPr>
-                </a:tc>
-                <a:tc>
-                  <a:txBody>
-                    <a:bodyPr/>
-                    <a:lstStyle/>
-                    <a:p>
-                      <a:pPr indent="0" marL="0">
-                        <a:buNone/>
-                      </a:pPr>
-                      <a:r>
-                        <a:rPr lang="en-US" sz="900" dirty="0">
-                          <a:solidFill>
-                            <a:srgbClr val="1C2733"/>
-                          </a:solidFill>
-                          <a:latin typeface="Malgun Gothic" pitchFamily="34" charset="0"/>
-                          <a:ea typeface="Malgun Gothic" pitchFamily="34" charset="-122"/>
-                          <a:cs typeface="Malgun Gothic" pitchFamily="34" charset="-120"/>
-                        </a:rPr>
-                        <a:t>9</a:t>
-                      </a:r>
-                      <a:endParaRPr lang="en-US" sz="900" dirty="0">
-                        <a:latin typeface="Malgun Gothic" charset="0"/>
-                        <a:ea typeface="Malgun Gothic" charset="0"/>
-                        <a:cs typeface="Malgun Gothic" charset="0"/>
-                      </a:endParaRPr>
-                    </a:p>
-                  </a:txBody>
-                  <a:tcPr marL="50800" marR="50800" marT="25400" marB="25400" anchor="ctr">
-                    <a:lnL w="0" cap="flat" cmpd="sng" algn="ctr">
-                      <a:noFill/>
-                    </a:lnL>
-                    <a:lnR w="0" cap="flat" cmpd="sng" algn="ctr">
-                      <a:noFill/>
-                    </a:lnR>
-                    <a:lnT w="0" cap="flat" cmpd="sng" algn="ctr">
-                      <a:noFill/>
-                    </a:lnT>
-                    <a:lnB w="6350" cap="flat" cmpd="sng" algn="ctr">
-                      <a:solidFill>
-                        <a:srgbClr val="DDE3EB"/>
-                      </a:solidFill>
-                      <a:prstDash val="solid"/>
-                      <a:round/>
-                      <a:headEnd type="none" w="med" len="med"/>
-                      <a:tailEnd type="none" w="med" len="med"/>
-                    </a:lnB>
-                  </a:tcPr>
-                </a:tc>
-              </a:tr>
-              <a:tr h="237744">
-                <a:tc>
-                  <a:txBody>
-                    <a:bodyPr/>
-                    <a:lstStyle/>
-                    <a:p>
-                      <a:pPr indent="0" marL="0">
-                        <a:buNone/>
-                      </a:pPr>
-                      <a:r>
-                        <a:rPr lang="en-US" sz="900" dirty="0">
-                          <a:solidFill>
-                            <a:srgbClr val="1C2733"/>
-                          </a:solidFill>
-                          <a:latin typeface="Malgun Gothic" pitchFamily="34" charset="0"/>
-                          <a:ea typeface="Malgun Gothic" pitchFamily="34" charset="-122"/>
-                          <a:cs typeface="Malgun Gothic" pitchFamily="34" charset="-120"/>
-                        </a:rPr>
-                        <a:t>팬 통과면</a:t>
-                      </a:r>
-                      <a:endParaRPr lang="en-US" sz="900" dirty="0">
-                        <a:latin typeface="Malgun Gothic" charset="0"/>
-                        <a:ea typeface="Malgun Gothic" charset="0"/>
-                        <a:cs typeface="Malgun Gothic" charset="0"/>
-                      </a:endParaRPr>
-                    </a:p>
-                  </a:txBody>
-                  <a:tcPr marL="50800" marR="50800" marT="25400" marB="25400" anchor="ctr">
-                    <a:lnL w="0" cap="flat" cmpd="sng" algn="ctr">
-                      <a:noFill/>
-                    </a:lnL>
-                    <a:lnR w="0" cap="flat" cmpd="sng" algn="ctr">
-                      <a:noFill/>
-                    </a:lnR>
-                    <a:lnT w="0" cap="flat" cmpd="sng" algn="ctr">
-                      <a:noFill/>
-                    </a:lnT>
-                    <a:lnB w="6350" cap="flat" cmpd="sng" algn="ctr">
-                      <a:solidFill>
-                        <a:srgbClr val="DDE3EB"/>
-                      </a:solidFill>
-                      <a:prstDash val="solid"/>
-                      <a:round/>
-                      <a:headEnd type="none" w="med" len="med"/>
-                      <a:tailEnd type="none" w="med" len="med"/>
-                    </a:lnB>
-                  </a:tcPr>
-                </a:tc>
-                <a:tc>
-                  <a:txBody>
-                    <a:bodyPr/>
-                    <a:lstStyle/>
-                    <a:p>
-                      <a:pPr indent="0" marL="0">
-                        <a:buNone/>
-                      </a:pPr>
-                      <a:r>
-                        <a:rPr lang="en-US" sz="900" dirty="0">
-                          <a:solidFill>
-                            <a:srgbClr val="1C2733"/>
-                          </a:solidFill>
-                          <a:latin typeface="Malgun Gothic" pitchFamily="34" charset="0"/>
-                          <a:ea typeface="Malgun Gothic" pitchFamily="34" charset="-122"/>
-                          <a:cs typeface="Malgun Gothic" pitchFamily="34" charset="-120"/>
-                        </a:rPr>
-                        <a:t>차압</a:t>
-                      </a:r>
-                      <a:endParaRPr lang="en-US" sz="900" dirty="0">
-                        <a:latin typeface="Malgun Gothic" charset="0"/>
-                        <a:ea typeface="Malgun Gothic" charset="0"/>
-                        <a:cs typeface="Malgun Gothic" charset="0"/>
-                      </a:endParaRPr>
-                    </a:p>
-                  </a:txBody>
-                  <a:tcPr marL="50800" marR="50800" marT="25400" marB="25400" anchor="ctr">
-                    <a:lnL w="0" cap="flat" cmpd="sng" algn="ctr">
-                      <a:noFill/>
-                    </a:lnL>
-                    <a:lnR w="0" cap="flat" cmpd="sng" algn="ctr">
-                      <a:noFill/>
-                    </a:lnR>
-                    <a:lnT w="0" cap="flat" cmpd="sng" algn="ctr">
-                      <a:noFill/>
-                    </a:lnT>
-                    <a:lnB w="6350" cap="flat" cmpd="sng" algn="ctr">
-                      <a:solidFill>
-                        <a:srgbClr val="DDE3EB"/>
-                      </a:solidFill>
-                      <a:prstDash val="solid"/>
-                      <a:round/>
-                      <a:headEnd type="none" w="med" len="med"/>
-                      <a:tailEnd type="none" w="med" len="med"/>
-                    </a:lnB>
-                  </a:tcPr>
-                </a:tc>
-                <a:tc>
-                  <a:txBody>
-                    <a:bodyPr/>
-                    <a:lstStyle/>
-                    <a:p>
-                      <a:pPr indent="0" marL="0">
-                        <a:buNone/>
-                      </a:pPr>
-                      <a:r>
-                        <a:rPr lang="en-US" sz="900" dirty="0">
-                          <a:solidFill>
-                            <a:srgbClr val="1C2733"/>
-                          </a:solidFill>
-                          <a:latin typeface="Malgun Gothic" pitchFamily="34" charset="0"/>
-                          <a:ea typeface="Malgun Gothic" pitchFamily="34" charset="-122"/>
-                          <a:cs typeface="Malgun Gothic" pitchFamily="34" charset="-120"/>
-                        </a:rPr>
-                        <a:t>1</a:t>
-                      </a:r>
-                      <a:endParaRPr lang="en-US" sz="900" dirty="0">
-                        <a:latin typeface="Malgun Gothic" charset="0"/>
-                        <a:ea typeface="Malgun Gothic" charset="0"/>
-                        <a:cs typeface="Malgun Gothic" charset="0"/>
-                      </a:endParaRPr>
-                    </a:p>
-                  </a:txBody>
-                  <a:tcPr marL="50800" marR="50800" marT="25400" marB="25400" anchor="ctr">
-                    <a:lnL w="0" cap="flat" cmpd="sng" algn="ctr">
-                      <a:noFill/>
-                    </a:lnL>
-                    <a:lnR w="0" cap="flat" cmpd="sng" algn="ctr">
-                      <a:noFill/>
-                    </a:lnR>
-                    <a:lnT w="0" cap="flat" cmpd="sng" algn="ctr">
-                      <a:noFill/>
-                    </a:lnT>
-                    <a:lnB w="6350" cap="flat" cmpd="sng" algn="ctr">
-                      <a:solidFill>
-                        <a:srgbClr val="DDE3EB"/>
-                      </a:solidFill>
-                      <a:prstDash val="solid"/>
-                      <a:round/>
-                      <a:headEnd type="none" w="med" len="med"/>
-                      <a:tailEnd type="none" w="med" len="med"/>
-                    </a:lnB>
-                  </a:tcPr>
-                </a:tc>
-              </a:tr>
-              <a:tr h="237744">
-                <a:tc>
-                  <a:txBody>
-                    <a:bodyPr/>
-                    <a:lstStyle/>
-                    <a:p>
-                      <a:pPr indent="0" marL="0">
-                        <a:buNone/>
-                      </a:pPr>
-                      <a:r>
-                        <a:rPr lang="en-US" sz="900" dirty="0">
-                          <a:solidFill>
-                            <a:srgbClr val="1C2733"/>
-                          </a:solidFill>
-                          <a:latin typeface="Malgun Gothic" pitchFamily="34" charset="0"/>
-                          <a:ea typeface="Malgun Gothic" pitchFamily="34" charset="-122"/>
-                          <a:cs typeface="Malgun Gothic" pitchFamily="34" charset="-120"/>
-                        </a:rPr>
-                        <a:t>1·2차 통과 유로</a:t>
-                      </a:r>
-                      <a:endParaRPr lang="en-US" sz="900" dirty="0">
-                        <a:latin typeface="Malgun Gothic" charset="0"/>
-                        <a:ea typeface="Malgun Gothic" charset="0"/>
-                        <a:cs typeface="Malgun Gothic" charset="0"/>
-                      </a:endParaRPr>
-                    </a:p>
-                  </a:txBody>
-                  <a:tcPr marL="50800" marR="50800" marT="25400" marB="25400" anchor="ctr">
-                    <a:lnL w="0" cap="flat" cmpd="sng" algn="ctr">
-                      <a:noFill/>
-                    </a:lnL>
-                    <a:lnR w="0" cap="flat" cmpd="sng" algn="ctr">
-                      <a:noFill/>
-                    </a:lnR>
-                    <a:lnT w="0" cap="flat" cmpd="sng" algn="ctr">
-                      <a:noFill/>
-                    </a:lnT>
-                    <a:lnB w="6350" cap="flat" cmpd="sng" algn="ctr">
-                      <a:solidFill>
-                        <a:srgbClr val="DDE3EB"/>
-                      </a:solidFill>
-                      <a:prstDash val="solid"/>
-                      <a:round/>
-                      <a:headEnd type="none" w="med" len="med"/>
-                      <a:tailEnd type="none" w="med" len="med"/>
-                    </a:lnB>
-                  </a:tcPr>
-                </a:tc>
-                <a:tc>
-                  <a:txBody>
-                    <a:bodyPr/>
-                    <a:lstStyle/>
-                    <a:p>
-                      <a:pPr indent="0" marL="0">
-                        <a:buNone/>
-                      </a:pPr>
-                      <a:r>
-                        <a:rPr lang="en-US" sz="900" dirty="0">
-                          <a:solidFill>
-                            <a:srgbClr val="1C2733"/>
-                          </a:solidFill>
-                          <a:latin typeface="Malgun Gothic" pitchFamily="34" charset="0"/>
-                          <a:ea typeface="Malgun Gothic" pitchFamily="34" charset="-122"/>
-                          <a:cs typeface="Malgun Gothic" pitchFamily="34" charset="-120"/>
-                        </a:rPr>
-                        <a:t>유량</a:t>
-                      </a:r>
-                      <a:endParaRPr lang="en-US" sz="900" dirty="0">
-                        <a:latin typeface="Malgun Gothic" charset="0"/>
-                        <a:ea typeface="Malgun Gothic" charset="0"/>
-                        <a:cs typeface="Malgun Gothic" charset="0"/>
-                      </a:endParaRPr>
-                    </a:p>
-                  </a:txBody>
-                  <a:tcPr marL="50800" marR="50800" marT="25400" marB="25400" anchor="ctr">
-                    <a:lnL w="0" cap="flat" cmpd="sng" algn="ctr">
-                      <a:noFill/>
-                    </a:lnL>
-                    <a:lnR w="0" cap="flat" cmpd="sng" algn="ctr">
-                      <a:noFill/>
-                    </a:lnR>
-                    <a:lnT w="0" cap="flat" cmpd="sng" algn="ctr">
-                      <a:noFill/>
-                    </a:lnT>
-                    <a:lnB w="6350" cap="flat" cmpd="sng" algn="ctr">
-                      <a:solidFill>
-                        <a:srgbClr val="DDE3EB"/>
-                      </a:solidFill>
-                      <a:prstDash val="solid"/>
-                      <a:round/>
-                      <a:headEnd type="none" w="med" len="med"/>
-                      <a:tailEnd type="none" w="med" len="med"/>
-                    </a:lnB>
-                  </a:tcPr>
-                </a:tc>
-                <a:tc>
-                  <a:txBody>
-                    <a:bodyPr/>
-                    <a:lstStyle/>
-                    <a:p>
-                      <a:pPr indent="0" marL="0">
-                        <a:buNone/>
-                      </a:pPr>
-                      <a:r>
-                        <a:rPr lang="en-US" sz="900" dirty="0">
-                          <a:solidFill>
-                            <a:srgbClr val="1C2733"/>
-                          </a:solidFill>
-                          <a:latin typeface="Malgun Gothic" pitchFamily="34" charset="0"/>
-                          <a:ea typeface="Malgun Gothic" pitchFamily="34" charset="-122"/>
-                          <a:cs typeface="Malgun Gothic" pitchFamily="34" charset="-120"/>
-                        </a:rPr>
-                        <a:t>각 핀 개수 + 1</a:t>
-                      </a:r>
-                      <a:endParaRPr lang="en-US" sz="900" dirty="0">
-                        <a:latin typeface="Malgun Gothic" charset="0"/>
-                        <a:ea typeface="Malgun Gothic" charset="0"/>
-                        <a:cs typeface="Malgun Gothic" charset="0"/>
-                      </a:endParaRPr>
-                    </a:p>
-                  </a:txBody>
-                  <a:tcPr marL="50800" marR="50800" marT="25400" marB="25400" anchor="ctr">
-                    <a:lnL w="0" cap="flat" cmpd="sng" algn="ctr">
-                      <a:noFill/>
-                    </a:lnL>
-                    <a:lnR w="0" cap="flat" cmpd="sng" algn="ctr">
-                      <a:noFill/>
-                    </a:lnR>
-                    <a:lnT w="0" cap="flat" cmpd="sng" algn="ctr">
-                      <a:noFill/>
-                    </a:lnT>
-                    <a:lnB w="6350" cap="flat" cmpd="sng" algn="ctr">
-                      <a:solidFill>
-                        <a:srgbClr val="DDE3EB"/>
-                      </a:solidFill>
-                      <a:prstDash val="solid"/>
-                      <a:round/>
-                      <a:headEnd type="none" w="med" len="med"/>
-                      <a:tailEnd type="none" w="med" len="med"/>
-                    </a:lnB>
-                  </a:tcPr>
-                </a:tc>
-              </a:tr>
-              <a:tr h="237744">
-                <a:tc>
-                  <a:txBody>
-                    <a:bodyPr/>
-                    <a:lstStyle/>
-                    <a:p>
-                      <a:pPr indent="0" marL="0">
-                        <a:buNone/>
-                      </a:pPr>
-                      <a:r>
-                        <a:rPr lang="en-US" sz="900" dirty="0">
-                          <a:solidFill>
-                            <a:srgbClr val="1C2733"/>
-                          </a:solidFill>
-                          <a:latin typeface="Malgun Gothic" pitchFamily="34" charset="0"/>
-                          <a:ea typeface="Malgun Gothic" pitchFamily="34" charset="-122"/>
-                          <a:cs typeface="Malgun Gothic" pitchFamily="34" charset="-120"/>
-                        </a:rPr>
-                        <a:t>전원모듈 분기 입구</a:t>
-                      </a:r>
-                      <a:endParaRPr lang="en-US" sz="900" dirty="0">
-                        <a:latin typeface="Malgun Gothic" charset="0"/>
-                        <a:ea typeface="Malgun Gothic" charset="0"/>
-                        <a:cs typeface="Malgun Gothic" charset="0"/>
-                      </a:endParaRPr>
-                    </a:p>
-                  </a:txBody>
-                  <a:tcPr marL="50800" marR="50800" marT="25400" marB="25400" anchor="ctr">
-                    <a:lnL w="0" cap="flat" cmpd="sng" algn="ctr">
-                      <a:noFill/>
-                    </a:lnL>
-                    <a:lnR w="0" cap="flat" cmpd="sng" algn="ctr">
-                      <a:noFill/>
-                    </a:lnR>
-                    <a:lnT w="0" cap="flat" cmpd="sng" algn="ctr">
-                      <a:noFill/>
-                    </a:lnT>
-                    <a:lnB w="6350" cap="flat" cmpd="sng" algn="ctr">
-                      <a:solidFill>
-                        <a:srgbClr val="DDE3EB"/>
-                      </a:solidFill>
-                      <a:prstDash val="solid"/>
-                      <a:round/>
-                      <a:headEnd type="none" w="med" len="med"/>
-                      <a:tailEnd type="none" w="med" len="med"/>
-                    </a:lnB>
-                  </a:tcPr>
-                </a:tc>
-                <a:tc>
-                  <a:txBody>
-                    <a:bodyPr/>
-                    <a:lstStyle/>
-                    <a:p>
-                      <a:pPr indent="0" marL="0">
-                        <a:buNone/>
-                      </a:pPr>
-                      <a:r>
-                        <a:rPr lang="en-US" sz="900" dirty="0">
-                          <a:solidFill>
-                            <a:srgbClr val="1C2733"/>
-                          </a:solidFill>
-                          <a:latin typeface="Malgun Gothic" pitchFamily="34" charset="0"/>
-                          <a:ea typeface="Malgun Gothic" pitchFamily="34" charset="-122"/>
-                          <a:cs typeface="Malgun Gothic" pitchFamily="34" charset="-120"/>
-                        </a:rPr>
-                        <a:t>유량</a:t>
-                      </a:r>
-                      <a:endParaRPr lang="en-US" sz="900" dirty="0">
-                        <a:latin typeface="Malgun Gothic" charset="0"/>
-                        <a:ea typeface="Malgun Gothic" charset="0"/>
-                        <a:cs typeface="Malgun Gothic" charset="0"/>
-                      </a:endParaRPr>
-                    </a:p>
-                  </a:txBody>
-                  <a:tcPr marL="50800" marR="50800" marT="25400" marB="25400" anchor="ctr">
-                    <a:lnL w="0" cap="flat" cmpd="sng" algn="ctr">
-                      <a:noFill/>
-                    </a:lnL>
-                    <a:lnR w="0" cap="flat" cmpd="sng" algn="ctr">
-                      <a:noFill/>
-                    </a:lnR>
-                    <a:lnT w="0" cap="flat" cmpd="sng" algn="ctr">
-                      <a:noFill/>
-                    </a:lnT>
-                    <a:lnB w="6350" cap="flat" cmpd="sng" algn="ctr">
-                      <a:solidFill>
-                        <a:srgbClr val="DDE3EB"/>
-                      </a:solidFill>
-                      <a:prstDash val="solid"/>
-                      <a:round/>
-                      <a:headEnd type="none" w="med" len="med"/>
-                      <a:tailEnd type="none" w="med" len="med"/>
-                    </a:lnB>
-                  </a:tcPr>
-                </a:tc>
-                <a:tc>
-                  <a:txBody>
-                    <a:bodyPr/>
-                    <a:lstStyle/>
-                    <a:p>
-                      <a:pPr indent="0" marL="0">
-                        <a:buNone/>
-                      </a:pPr>
-                      <a:r>
-                        <a:rPr lang="en-US" sz="900" dirty="0">
-                          <a:solidFill>
-                            <a:srgbClr val="1C2733"/>
-                          </a:solidFill>
-                          <a:latin typeface="Malgun Gothic" pitchFamily="34" charset="0"/>
-                          <a:ea typeface="Malgun Gothic" pitchFamily="34" charset="-122"/>
-                          <a:cs typeface="Malgun Gothic" pitchFamily="34" charset="-120"/>
-                        </a:rPr>
-                        <a:t>1</a:t>
-                      </a:r>
-                      <a:endParaRPr lang="en-US" sz="900" dirty="0">
-                        <a:latin typeface="Malgun Gothic" charset="0"/>
-                        <a:ea typeface="Malgun Gothic" charset="0"/>
-                        <a:cs typeface="Malgun Gothic" charset="0"/>
-                      </a:endParaRPr>
-                    </a:p>
-                  </a:txBody>
-                  <a:tcPr marL="50800" marR="50800" marT="25400" marB="25400" anchor="ctr">
-                    <a:lnL w="0" cap="flat" cmpd="sng" algn="ctr">
-                      <a:noFill/>
-                    </a:lnL>
-                    <a:lnR w="0" cap="flat" cmpd="sng" algn="ctr">
-                      <a:noFill/>
-                    </a:lnR>
-                    <a:lnT w="0" cap="flat" cmpd="sng" algn="ctr">
-                      <a:noFill/>
-                    </a:lnT>
-                    <a:lnB w="6350" cap="flat" cmpd="sng" algn="ctr">
-                      <a:solidFill>
-                        <a:srgbClr val="DDE3EB"/>
-                      </a:solidFill>
-                      <a:prstDash val="solid"/>
-                      <a:round/>
-                      <a:headEnd type="none" w="med" len="med"/>
-                      <a:tailEnd type="none" w="med" len="med"/>
-                    </a:lnB>
-                  </a:tcPr>
-                </a:tc>
-              </a:tr>
-            </a:tbl>
-          </a:graphicData>
-        </a:graphic>
-      </p:graphicFrame>
-      <p:sp>
-        <p:nvSpPr>
-          <p:cNvPr id="37" name="Shape 33"/>
-          <p:cNvSpPr/>
-          <p:nvPr/>
-        </p:nvSpPr>
-        <p:spPr>
-          <a:xfrm>
-            <a:off x="502920" y="5541264"/>
-            <a:ext cx="11183112" cy="841248"/>
-          </a:xfrm>
-          <a:prstGeom prst="roundRect">
-            <a:avLst>
-              <a:gd name="adj" fmla="val 6522"/>
-            </a:avLst>
-          </a:prstGeom>
-          <a:solidFill>
-            <a:srgbClr val="FFFFFF"/>
-          </a:solidFill>
-          <a:ln w="9525">
-            <a:solidFill>
-              <a:srgbClr val="DDE3EB"/>
-            </a:solidFill>
-            <a:prstDash val="solid"/>
-          </a:ln>
-          <a:effectLst>
-            <a:outerShdw sx="100000" sy="100000" kx="0" ky="0" algn="bl" rotWithShape="0" blurRad="101600" dist="12700" dir="5400000">
-              <a:srgbClr val="9AA8BC">
-                <a:alpha val="18000"/>
-              </a:srgbClr>
-            </a:outerShdw>
-          </a:effectLst>
-        </p:spPr>
-      </p:sp>
-      <p:sp>
-        <p:nvSpPr>
-          <p:cNvPr id="38" name="Shape 34"/>
-          <p:cNvSpPr/>
-          <p:nvPr/>
-        </p:nvSpPr>
-        <p:spPr>
-          <a:xfrm>
-            <a:off x="832104" y="5724144"/>
-            <a:ext cx="64008" cy="164592"/>
-          </a:xfrm>
-          <a:prstGeom prst="rect">
-            <a:avLst/>
-          </a:prstGeom>
-          <a:solidFill>
-            <a:srgbClr val="00A3C4"/>
-          </a:solidFill>
-          <a:ln w="12700">
-            <a:solidFill>
-              <a:srgbClr val="00A3C4"/>
-            </a:solidFill>
-            <a:prstDash val="solid"/>
-          </a:ln>
-        </p:spPr>
-      </p:sp>
-      <p:sp>
-        <p:nvSpPr>
-          <p:cNvPr id="39" name="Text 35"/>
-          <p:cNvSpPr txBox="1"/>
-          <p:nvPr/>
-        </p:nvSpPr>
-        <p:spPr>
-          <a:xfrm>
-            <a:off x="978408" y="5669280"/>
-            <a:ext cx="3291840" cy="256032"/>
-          </a:xfrm>
-          <a:prstGeom prst="rect">
-            <a:avLst/>
-          </a:prstGeom>
-          <a:noFill/>
-          <a:ln/>
-        </p:spPr>
-        <p:txBody>
-          <a:bodyPr wrap="square" lIns="0" tIns="0" rIns="0" bIns="0" rtlCol="0" anchor="ctr"/>
-          <a:lstStyle/>
-          <a:p>
-            <a:pPr indent="0" marL="0">
-              <a:buNone/>
-            </a:pPr>
-            <a:r>
-              <a:rPr lang="en-US" sz="1050" b="1" dirty="0">
-                <a:solidFill>
-                  <a:srgbClr val="16305B"/>
-                </a:solidFill>
-                <a:latin typeface="Malgun Gothic" pitchFamily="34" charset="0"/>
-                <a:ea typeface="Malgun Gothic" pitchFamily="34" charset="-122"/>
-                <a:cs typeface="Malgun Gothic" pitchFamily="34" charset="-120"/>
-              </a:rPr>
-              <a:t>회차별 새 프로젝트</a:t>
-            </a:r>
-            <a:endParaRPr lang="en-US" sz="1050" dirty="0"/>
-          </a:p>
-        </p:txBody>
-      </p:sp>
-      <p:sp>
-        <p:nvSpPr>
-          <p:cNvPr id="40" name="Text 36"/>
-          <p:cNvSpPr txBox="1"/>
-          <p:nvPr/>
-        </p:nvSpPr>
-        <p:spPr>
-          <a:xfrm>
-            <a:off x="978408" y="5943600"/>
-            <a:ext cx="3383280" cy="310896"/>
-          </a:xfrm>
-          <a:prstGeom prst="rect">
-            <a:avLst/>
-          </a:prstGeom>
-          <a:noFill/>
-          <a:ln/>
-        </p:spPr>
-        <p:txBody>
-          <a:bodyPr wrap="square" lIns="0" tIns="0" rIns="0" bIns="0" rtlCol="0" anchor="ctr"/>
-          <a:lstStyle/>
-          <a:p>
-            <a:pPr indent="0" marL="0">
-              <a:buNone/>
-            </a:pPr>
-            <a:r>
-              <a:rPr lang="en-US" sz="950" dirty="0">
-                <a:solidFill>
-                  <a:srgbClr val="6B7A8F"/>
-                </a:solidFill>
-                <a:latin typeface="Malgun Gothic" pitchFamily="34" charset="0"/>
-                <a:ea typeface="Malgun Gothic" pitchFamily="34" charset="-122"/>
-                <a:cs typeface="Malgun Gothic" pitchFamily="34" charset="-120"/>
-              </a:rPr>
-              <a:t>이전 회차 설정 간섭·잠금 파일로 인한 정지 방지</a:t>
-            </a:r>
-            <a:endParaRPr lang="en-US" sz="950" dirty="0"/>
-          </a:p>
-        </p:txBody>
-      </p:sp>
-      <p:sp>
-        <p:nvSpPr>
-          <p:cNvPr id="41" name="Shape 37"/>
-          <p:cNvSpPr/>
-          <p:nvPr/>
-        </p:nvSpPr>
-        <p:spPr>
-          <a:xfrm>
-            <a:off x="4489704" y="5724144"/>
-            <a:ext cx="64008" cy="164592"/>
-          </a:xfrm>
-          <a:prstGeom prst="rect">
-            <a:avLst/>
-          </a:prstGeom>
-          <a:solidFill>
-            <a:srgbClr val="00A3C4"/>
-          </a:solidFill>
-          <a:ln w="12700">
-            <a:solidFill>
-              <a:srgbClr val="00A3C4"/>
-            </a:solidFill>
-            <a:prstDash val="solid"/>
-          </a:ln>
-        </p:spPr>
-      </p:sp>
-      <p:sp>
-        <p:nvSpPr>
-          <p:cNvPr id="42" name="Text 38"/>
-          <p:cNvSpPr txBox="1"/>
-          <p:nvPr/>
-        </p:nvSpPr>
-        <p:spPr>
-          <a:xfrm>
-            <a:off x="4636008" y="5669280"/>
-            <a:ext cx="3291840" cy="256032"/>
-          </a:xfrm>
-          <a:prstGeom prst="rect">
-            <a:avLst/>
-          </a:prstGeom>
-          <a:noFill/>
-          <a:ln/>
-        </p:spPr>
-        <p:txBody>
-          <a:bodyPr wrap="square" lIns="0" tIns="0" rIns="0" bIns="0" rtlCol="0" anchor="ctr"/>
-          <a:lstStyle/>
-          <a:p>
-            <a:pPr indent="0" marL="0">
-              <a:buNone/>
-            </a:pPr>
-            <a:r>
-              <a:rPr lang="en-US" sz="1050" b="1" dirty="0">
-                <a:solidFill>
-                  <a:srgbClr val="16305B"/>
-                </a:solidFill>
-                <a:latin typeface="Malgun Gothic" pitchFamily="34" charset="0"/>
-                <a:ea typeface="Malgun Gothic" pitchFamily="34" charset="-122"/>
-                <a:cs typeface="Malgun Gothic" pitchFamily="34" charset="-120"/>
-              </a:rPr>
-              <a:t>경계면 자동 탐지</a:t>
-            </a:r>
-            <a:endParaRPr lang="en-US" sz="1050" dirty="0"/>
-          </a:p>
-        </p:txBody>
-      </p:sp>
-      <p:sp>
-        <p:nvSpPr>
-          <p:cNvPr id="43" name="Text 39"/>
-          <p:cNvSpPr txBox="1"/>
-          <p:nvPr/>
-        </p:nvSpPr>
-        <p:spPr>
-          <a:xfrm>
-            <a:off x="4636008" y="5943600"/>
-            <a:ext cx="3383280" cy="310896"/>
-          </a:xfrm>
-          <a:prstGeom prst="rect">
-            <a:avLst/>
-          </a:prstGeom>
-          <a:noFill/>
-          <a:ln/>
-        </p:spPr>
-        <p:txBody>
-          <a:bodyPr wrap="square" lIns="0" tIns="0" rIns="0" bIns="0" rtlCol="0" anchor="ctr"/>
-          <a:lstStyle/>
-          <a:p>
-            <a:pPr indent="0" marL="0">
-              <a:buNone/>
-            </a:pPr>
-            <a:r>
-              <a:rPr lang="en-US" sz="950" dirty="0">
-                <a:solidFill>
-                  <a:srgbClr val="6B7A8F"/>
-                </a:solidFill>
-                <a:latin typeface="Malgun Gothic" pitchFamily="34" charset="0"/>
-                <a:ea typeface="Malgun Gothic" pitchFamily="34" charset="-122"/>
-                <a:cs typeface="Malgun Gothic" pitchFamily="34" charset="-120"/>
-              </a:rPr>
-              <a:t>형상이 바뀌어도 팬·개구부 면을 좌표로 식별</a:t>
-            </a:r>
-            <a:endParaRPr lang="en-US" sz="950" dirty="0"/>
-          </a:p>
-        </p:txBody>
-      </p:sp>
-      <p:sp>
-        <p:nvSpPr>
-          <p:cNvPr id="44" name="Shape 40"/>
-          <p:cNvSpPr/>
-          <p:nvPr/>
-        </p:nvSpPr>
-        <p:spPr>
-          <a:xfrm>
-            <a:off x="8147304" y="5724144"/>
-            <a:ext cx="64008" cy="164592"/>
-          </a:xfrm>
-          <a:prstGeom prst="rect">
-            <a:avLst/>
-          </a:prstGeom>
-          <a:solidFill>
-            <a:srgbClr val="00A3C4"/>
-          </a:solidFill>
-          <a:ln w="12700">
-            <a:solidFill>
-              <a:srgbClr val="00A3C4"/>
-            </a:solidFill>
-            <a:prstDash val="solid"/>
-          </a:ln>
-        </p:spPr>
-      </p:sp>
-      <p:sp>
-        <p:nvSpPr>
-          <p:cNvPr id="45" name="Text 41"/>
-          <p:cNvSpPr txBox="1"/>
-          <p:nvPr/>
-        </p:nvSpPr>
-        <p:spPr>
-          <a:xfrm>
-            <a:off x="8293608" y="5669280"/>
-            <a:ext cx="3291840" cy="256032"/>
-          </a:xfrm>
-          <a:prstGeom prst="rect">
-            <a:avLst/>
-          </a:prstGeom>
-          <a:noFill/>
-          <a:ln/>
-        </p:spPr>
-        <p:txBody>
-          <a:bodyPr wrap="square" lIns="0" tIns="0" rIns="0" bIns="0" rtlCol="0" anchor="ctr"/>
-          <a:lstStyle/>
-          <a:p>
-            <a:pPr indent="0" marL="0">
-              <a:buNone/>
-            </a:pPr>
-            <a:r>
-              <a:rPr lang="en-US" sz="1050" b="1" dirty="0">
-                <a:solidFill>
-                  <a:srgbClr val="16305B"/>
-                </a:solidFill>
-                <a:latin typeface="Malgun Gothic" pitchFamily="34" charset="0"/>
-                <a:ea typeface="Malgun Gothic" pitchFamily="34" charset="-122"/>
-                <a:cs typeface="Malgun Gothic" pitchFamily="34" charset="-120"/>
-              </a:rPr>
-              <a:t>측정면 동적 생성</a:t>
-            </a:r>
-            <a:endParaRPr lang="en-US" sz="1050" dirty="0"/>
-          </a:p>
-        </p:txBody>
-      </p:sp>
-      <p:sp>
-        <p:nvSpPr>
-          <p:cNvPr id="46" name="Text 42"/>
-          <p:cNvSpPr txBox="1"/>
-          <p:nvPr/>
-        </p:nvSpPr>
-        <p:spPr>
-          <a:xfrm>
-            <a:off x="8293608" y="5943600"/>
-            <a:ext cx="3383280" cy="310896"/>
-          </a:xfrm>
-          <a:prstGeom prst="rect">
-            <a:avLst/>
-          </a:prstGeom>
-          <a:noFill/>
-          <a:ln/>
-        </p:spPr>
-        <p:txBody>
-          <a:bodyPr wrap="square" lIns="0" tIns="0" rIns="0" bIns="0" rtlCol="0" anchor="ctr"/>
-          <a:lstStyle/>
-          <a:p>
-            <a:pPr indent="0" marL="0">
-              <a:buNone/>
-            </a:pPr>
-            <a:r>
-              <a:rPr lang="en-US" sz="950" dirty="0">
-                <a:solidFill>
-                  <a:srgbClr val="6B7A8F"/>
-                </a:solidFill>
-                <a:latin typeface="Malgun Gothic" pitchFamily="34" charset="0"/>
-                <a:ea typeface="Malgun Gothic" pitchFamily="34" charset="-122"/>
-                <a:cs typeface="Malgun Gothic" pitchFamily="34" charset="-120"/>
-              </a:rPr>
-              <a:t>핀 개수 변화에 맞춰 유로 전체 측정면 자동 배치</a:t>
             </a:r>
             <a:endParaRPr lang="en-US" sz="950" dirty="0"/>
           </a:p>

--- a/1개월차_AI에이전트_활용방안_및_DOE결과.pptx
+++ b/1개월차_AI에이전트_활용방안_및_DOE결과.pptx
@@ -1482,7 +1482,7 @@
           <a:p>
             <a:r>
               <a:rPr lang="en-US" dirty="0"/>
-              <a:t>자동해석은 7개 파일로 구성된다. main.py가 전체 루프를 돌리면서 실험점 생성, 형상 빌드, 해석, 결과 저장 모듈을 순서대로 호출하고, 경로는 paths.py 한 곳에서 관리한다. 프로그램별로 모듈을 나눠 두었기 때문에 한쪽을 고쳐도 다른 쪽에 영향이 없다.</a:t>
+              <a:t>자동해석은 7개 파일로 구성된다. main.py가 실험점마다 실험점 생성, 형상 빌드, 해석, 결과 저장 모듈을 순서대로 호출하고, 모듈 사이에는 설계값, STEP 파일, 결과 CSV가 전달된다. SolidWorks는 COM API로, Icepak은 PyAEDT로 제어하며, 경로는 paths.py 한 곳에서 관리한다.</a:t>
             </a:r>
             <a:endParaRPr lang="en-US" dirty="0"/>
           </a:p>
@@ -21215,11 +21215,11 @@
         <p:spPr>
           <a:xfrm>
             <a:off x="502920" y="1188720"/>
-            <a:ext cx="11183112" cy="2029968"/>
+            <a:ext cx="11183112" cy="4160520"/>
           </a:xfrm>
           <a:prstGeom prst="roundRect">
             <a:avLst>
-              <a:gd name="adj" fmla="val 2703"/>
+              <a:gd name="adj" fmla="val 1319"/>
             </a:avLst>
           </a:prstGeom>
           <a:solidFill>
@@ -21298,7 +21298,7 @@
                 <a:ea typeface="Malgun Gothic" pitchFamily="34" charset="-122"/>
                 <a:cs typeface="Malgun Gothic" pitchFamily="34" charset="-120"/>
               </a:rPr>
-              <a:t>실행 흐름</a:t>
+              <a:t>모듈 구성 및 실행 흐름</a:t>
             </a:r>
             <a:endParaRPr lang="en-US" sz="1300" dirty="0"/>
           </a:p>
@@ -21313,11 +21313,11 @@
         <p:spPr>
           <a:xfrm>
             <a:off x="813816" y="1847088"/>
-            <a:ext cx="1371600" cy="932688"/>
+            <a:ext cx="10561320" cy="512064"/>
           </a:xfrm>
           <a:prstGeom prst="roundRect">
             <a:avLst>
-              <a:gd name="adj" fmla="val 6863"/>
+              <a:gd name="adj" fmla="val 12500"/>
             </a:avLst>
           </a:prstGeom>
           <a:solidFill>
@@ -21339,27 +21339,24 @@
         </p:nvSpPr>
         <p:spPr>
           <a:xfrm>
-            <a:off x="813816" y="1847088"/>
-            <a:ext cx="1371600" cy="932688"/>
-          </a:xfrm>
-          <a:prstGeom prst="rect">
-            <a:avLst/>
-          </a:prstGeom>
-          <a:noFill/>
-          <a:ln/>
-        </p:spPr>
-        <p:txBody>
-          <a:bodyPr wrap="square" lIns="0" tIns="0" rIns="0" bIns="0" rtlCol="0" anchor="ctr"/>
-          <a:lstStyle/>
-          <a:p>
-            <a:pPr algn="ctr" indent="0" marL="0">
-              <a:lnSpc>
-                <a:spcPct val="120000"/>
-              </a:lnSpc>
-              <a:buNone/>
-            </a:pPr>
-            <a:r>
-              <a:rPr lang="en-US" sz="1100" b="1" dirty="0">
+            <a:off x="1042416" y="1847088"/>
+            <a:ext cx="8732520" cy="512064"/>
+          </a:xfrm>
+          <a:prstGeom prst="rect">
+            <a:avLst/>
+          </a:prstGeom>
+          <a:noFill/>
+          <a:ln/>
+        </p:spPr>
+        <p:txBody>
+          <a:bodyPr wrap="square" lIns="0" tIns="0" rIns="0" bIns="0" rtlCol="0" anchor="ctr"/>
+          <a:lstStyle/>
+          <a:p>
+            <a:pPr indent="0" marL="0">
+              <a:buNone/>
+            </a:pPr>
+            <a:r>
+              <a:rPr lang="en-US" sz="1250" b="1" dirty="0">
                 <a:solidFill>
                   <a:srgbClr val="FFFFFF"/>
                 </a:solidFill>
@@ -21369,17 +21366,11 @@
               </a:rPr>
               <a:t>main.py</a:t>
             </a:r>
-            <a:endParaRPr lang="en-US" sz="1100" dirty="0"/>
-          </a:p>
-          <a:p>
-            <a:pPr algn="ctr" indent="0" marL="0">
-              <a:lnSpc>
-                <a:spcPct val="120000"/>
-              </a:lnSpc>
-              <a:buNone/>
-            </a:pPr>
-            <a:r>
-              <a:rPr lang="en-US" sz="900" dirty="0">
+            <a:pPr indent="0" marL="0">
+              <a:buNone/>
+            </a:pPr>
+            <a:r>
+              <a:rPr lang="en-US" sz="1000" dirty="0">
                 <a:solidFill>
                   <a:srgbClr val="CFE0F2"/>
                 </a:solidFill>
@@ -21387,715 +21378,27 @@
                 <a:ea typeface="Malgun Gothic" pitchFamily="34" charset="-122"/>
                 <a:cs typeface="Malgun Gothic" pitchFamily="34" charset="-120"/>
               </a:rPr>
-              <a:t>루프 제어</a:t>
-            </a:r>
-            <a:endParaRPr lang="en-US" sz="1100" dirty="0"/>
-          </a:p>
-        </p:txBody>
-      </p:sp>
-      <p:sp>
-        <p:nvSpPr>
-          <p:cNvPr id="11" name="Text 9"/>
-          <p:cNvSpPr txBox="1"/>
-          <p:nvPr/>
-        </p:nvSpPr>
-        <p:spPr>
-          <a:xfrm>
-            <a:off x="2185416" y="1847088"/>
-            <a:ext cx="329184" cy="932688"/>
-          </a:xfrm>
-          <a:prstGeom prst="rect">
-            <a:avLst/>
-          </a:prstGeom>
-          <a:noFill/>
-          <a:ln/>
-        </p:spPr>
-        <p:txBody>
-          <a:bodyPr wrap="square" lIns="0" tIns="0" rIns="0" bIns="0" rtlCol="0" anchor="ctr"/>
-          <a:lstStyle/>
-          <a:p>
-            <a:pPr algn="ctr" indent="0" marL="0">
-              <a:buNone/>
-            </a:pPr>
-            <a:r>
-              <a:rPr lang="en-US" sz="1100" dirty="0">
-                <a:solidFill>
-                  <a:srgbClr val="00A3C4"/>
-                </a:solidFill>
-                <a:latin typeface="Malgun Gothic" pitchFamily="34" charset="0"/>
-                <a:ea typeface="Malgun Gothic" pitchFamily="34" charset="-122"/>
-                <a:cs typeface="Malgun Gothic" pitchFamily="34" charset="-120"/>
-              </a:rPr>
-              <a:t>▶</a:t>
-            </a:r>
-            <a:endParaRPr lang="en-US" sz="1100" dirty="0"/>
-          </a:p>
-        </p:txBody>
-      </p:sp>
-      <p:sp>
-        <p:nvSpPr>
-          <p:cNvPr id="12" name="Shape 10"/>
+              <a:t>     루프 제어  —  실험점마다 아래 4단계를 순서대로 호출, 실패 시 기록 후 다음 점</a:t>
+            </a:r>
+            <a:endParaRPr lang="en-US" sz="1250" dirty="0"/>
+          </a:p>
+        </p:txBody>
+      </p:sp>
+      <p:sp>
+        <p:nvSpPr>
+          <p:cNvPr id="11" name="Shape 9"/>
           <p:cNvSpPr/>
           <p:nvPr/>
         </p:nvSpPr>
         <p:spPr>
           <a:xfrm>
-            <a:off x="2514600" y="1847088"/>
-            <a:ext cx="2011680" cy="932688"/>
+            <a:off x="9957816" y="1947672"/>
+            <a:ext cx="1234440" cy="310896"/>
           </a:xfrm>
           <a:prstGeom prst="roundRect">
             <a:avLst>
-              <a:gd name="adj" fmla="val 6863"/>
+              <a:gd name="adj" fmla="val 29412"/>
             </a:avLst>
-          </a:prstGeom>
-          <a:solidFill>
-            <a:srgbClr val="F7F9FC"/>
-          </a:solidFill>
-          <a:ln w="9525">
-            <a:solidFill>
-              <a:srgbClr val="DDE3EB"/>
-            </a:solidFill>
-            <a:prstDash val="solid"/>
-          </a:ln>
-        </p:spPr>
-      </p:sp>
-      <p:sp>
-        <p:nvSpPr>
-          <p:cNvPr id="13" name="Shape 11"/>
-          <p:cNvSpPr/>
-          <p:nvPr/>
-        </p:nvSpPr>
-        <p:spPr>
-          <a:xfrm>
-            <a:off x="2514600" y="1847088"/>
-            <a:ext cx="2011680" cy="310896"/>
-          </a:xfrm>
-          <a:prstGeom prst="rect">
-            <a:avLst/>
-          </a:prstGeom>
-          <a:solidFill>
-            <a:srgbClr val="DCE6F2"/>
-          </a:solidFill>
-          <a:ln w="12700">
-            <a:solidFill>
-              <a:srgbClr val="DCE6F2"/>
-            </a:solidFill>
-            <a:prstDash val="solid"/>
-          </a:ln>
-        </p:spPr>
-      </p:sp>
-      <p:sp>
-        <p:nvSpPr>
-          <p:cNvPr id="14" name="Text 12"/>
-          <p:cNvSpPr txBox="1"/>
-          <p:nvPr/>
-        </p:nvSpPr>
-        <p:spPr>
-          <a:xfrm>
-            <a:off x="2514600" y="1847088"/>
-            <a:ext cx="2011680" cy="310896"/>
-          </a:xfrm>
-          <a:prstGeom prst="rect">
-            <a:avLst/>
-          </a:prstGeom>
-          <a:noFill/>
-          <a:ln/>
-        </p:spPr>
-        <p:txBody>
-          <a:bodyPr wrap="square" lIns="0" tIns="0" rIns="0" bIns="0" rtlCol="0" anchor="ctr"/>
-          <a:lstStyle/>
-          <a:p>
-            <a:pPr algn="ctr" indent="0" marL="0">
-              <a:buNone/>
-            </a:pPr>
-            <a:r>
-              <a:rPr lang="en-US" sz="1000" b="1" dirty="0">
-                <a:solidFill>
-                  <a:srgbClr val="16305B"/>
-                </a:solidFill>
-                <a:latin typeface="Malgun Gothic" pitchFamily="34" charset="0"/>
-                <a:ea typeface="Malgun Gothic" pitchFamily="34" charset="-122"/>
-                <a:cs typeface="Malgun Gothic" pitchFamily="34" charset="-120"/>
-              </a:rPr>
-              <a:t>1  실험점 생성</a:t>
-            </a:r>
-            <a:endParaRPr lang="en-US" sz="1000" dirty="0"/>
-          </a:p>
-        </p:txBody>
-      </p:sp>
-      <p:sp>
-        <p:nvSpPr>
-          <p:cNvPr id="15" name="Text 13"/>
-          <p:cNvSpPr txBox="1"/>
-          <p:nvPr/>
-        </p:nvSpPr>
-        <p:spPr>
-          <a:xfrm>
-            <a:off x="2514600" y="2194560"/>
-            <a:ext cx="2011680" cy="274320"/>
-          </a:xfrm>
-          <a:prstGeom prst="rect">
-            <a:avLst/>
-          </a:prstGeom>
-          <a:noFill/>
-          <a:ln/>
-        </p:spPr>
-        <p:txBody>
-          <a:bodyPr wrap="square" lIns="0" tIns="0" rIns="0" bIns="0" rtlCol="0" anchor="ctr"/>
-          <a:lstStyle/>
-          <a:p>
-            <a:pPr algn="ctr" indent="0" marL="0">
-              <a:buNone/>
-            </a:pPr>
-            <a:r>
-              <a:rPr lang="en-US" sz="950" b="1" dirty="0">
-                <a:solidFill>
-                  <a:srgbClr val="16305B"/>
-                </a:solidFill>
-                <a:latin typeface="Consolas" pitchFamily="34" charset="0"/>
-                <a:ea typeface="Consolas" pitchFamily="34" charset="-122"/>
-                <a:cs typeface="Consolas" pitchFamily="34" charset="-120"/>
-              </a:rPr>
-              <a:t>OLHD.py · fins.py</a:t>
-            </a:r>
-            <a:endParaRPr lang="en-US" sz="950" dirty="0"/>
-          </a:p>
-        </p:txBody>
-      </p:sp>
-      <p:sp>
-        <p:nvSpPr>
-          <p:cNvPr id="16" name="Text 14"/>
-          <p:cNvSpPr txBox="1"/>
-          <p:nvPr/>
-        </p:nvSpPr>
-        <p:spPr>
-          <a:xfrm>
-            <a:off x="2514600" y="2450592"/>
-            <a:ext cx="2011680" cy="274320"/>
-          </a:xfrm>
-          <a:prstGeom prst="rect">
-            <a:avLst/>
-          </a:prstGeom>
-          <a:noFill/>
-          <a:ln/>
-        </p:spPr>
-        <p:txBody>
-          <a:bodyPr wrap="square" lIns="0" tIns="0" rIns="0" bIns="0" rtlCol="0" anchor="ctr"/>
-          <a:lstStyle/>
-          <a:p>
-            <a:pPr algn="ctr" indent="0" marL="0">
-              <a:buNone/>
-            </a:pPr>
-            <a:r>
-              <a:rPr lang="en-US" sz="880" dirty="0">
-                <a:solidFill>
-                  <a:srgbClr val="6B7A8F"/>
-                </a:solidFill>
-                <a:latin typeface="Malgun Gothic" pitchFamily="34" charset="0"/>
-                <a:ea typeface="Malgun Gothic" pitchFamily="34" charset="-122"/>
-                <a:cs typeface="Malgun Gothic" pitchFamily="34" charset="-120"/>
-              </a:rPr>
-              <a:t>설계변수 9종 · 갭 제약</a:t>
-            </a:r>
-            <a:endParaRPr lang="en-US" sz="880" dirty="0"/>
-          </a:p>
-        </p:txBody>
-      </p:sp>
-      <p:sp>
-        <p:nvSpPr>
-          <p:cNvPr id="17" name="Text 15"/>
-          <p:cNvSpPr txBox="1"/>
-          <p:nvPr/>
-        </p:nvSpPr>
-        <p:spPr>
-          <a:xfrm>
-            <a:off x="4526280" y="1847088"/>
-            <a:ext cx="237744" cy="932688"/>
-          </a:xfrm>
-          <a:prstGeom prst="rect">
-            <a:avLst/>
-          </a:prstGeom>
-          <a:noFill/>
-          <a:ln/>
-        </p:spPr>
-        <p:txBody>
-          <a:bodyPr wrap="square" lIns="0" tIns="0" rIns="0" bIns="0" rtlCol="0" anchor="ctr"/>
-          <a:lstStyle/>
-          <a:p>
-            <a:pPr algn="ctr" indent="0" marL="0">
-              <a:buNone/>
-            </a:pPr>
-            <a:r>
-              <a:rPr lang="en-US" sz="900" dirty="0">
-                <a:solidFill>
-                  <a:srgbClr val="00A3C4"/>
-                </a:solidFill>
-                <a:latin typeface="Malgun Gothic" pitchFamily="34" charset="0"/>
-                <a:ea typeface="Malgun Gothic" pitchFamily="34" charset="-122"/>
-                <a:cs typeface="Malgun Gothic" pitchFamily="34" charset="-120"/>
-              </a:rPr>
-              <a:t>▶</a:t>
-            </a:r>
-            <a:endParaRPr lang="en-US" sz="900" dirty="0"/>
-          </a:p>
-        </p:txBody>
-      </p:sp>
-      <p:sp>
-        <p:nvSpPr>
-          <p:cNvPr id="18" name="Shape 16"/>
-          <p:cNvSpPr/>
-          <p:nvPr/>
-        </p:nvSpPr>
-        <p:spPr>
-          <a:xfrm>
-            <a:off x="4764024" y="1847088"/>
-            <a:ext cx="2011680" cy="932688"/>
-          </a:xfrm>
-          <a:prstGeom prst="roundRect">
-            <a:avLst>
-              <a:gd name="adj" fmla="val 6863"/>
-            </a:avLst>
-          </a:prstGeom>
-          <a:solidFill>
-            <a:srgbClr val="F7F9FC"/>
-          </a:solidFill>
-          <a:ln w="9525">
-            <a:solidFill>
-              <a:srgbClr val="DDE3EB"/>
-            </a:solidFill>
-            <a:prstDash val="solid"/>
-          </a:ln>
-        </p:spPr>
-      </p:sp>
-      <p:sp>
-        <p:nvSpPr>
-          <p:cNvPr id="19" name="Shape 17"/>
-          <p:cNvSpPr/>
-          <p:nvPr/>
-        </p:nvSpPr>
-        <p:spPr>
-          <a:xfrm>
-            <a:off x="4764024" y="1847088"/>
-            <a:ext cx="2011680" cy="310896"/>
-          </a:xfrm>
-          <a:prstGeom prst="rect">
-            <a:avLst/>
-          </a:prstGeom>
-          <a:solidFill>
-            <a:srgbClr val="DCE6F2"/>
-          </a:solidFill>
-          <a:ln w="12700">
-            <a:solidFill>
-              <a:srgbClr val="DCE6F2"/>
-            </a:solidFill>
-            <a:prstDash val="solid"/>
-          </a:ln>
-        </p:spPr>
-      </p:sp>
-      <p:sp>
-        <p:nvSpPr>
-          <p:cNvPr id="20" name="Text 18"/>
-          <p:cNvSpPr txBox="1"/>
-          <p:nvPr/>
-        </p:nvSpPr>
-        <p:spPr>
-          <a:xfrm>
-            <a:off x="4764024" y="1847088"/>
-            <a:ext cx="2011680" cy="310896"/>
-          </a:xfrm>
-          <a:prstGeom prst="rect">
-            <a:avLst/>
-          </a:prstGeom>
-          <a:noFill/>
-          <a:ln/>
-        </p:spPr>
-        <p:txBody>
-          <a:bodyPr wrap="square" lIns="0" tIns="0" rIns="0" bIns="0" rtlCol="0" anchor="ctr"/>
-          <a:lstStyle/>
-          <a:p>
-            <a:pPr algn="ctr" indent="0" marL="0">
-              <a:buNone/>
-            </a:pPr>
-            <a:r>
-              <a:rPr lang="en-US" sz="1000" b="1" dirty="0">
-                <a:solidFill>
-                  <a:srgbClr val="16305B"/>
-                </a:solidFill>
-                <a:latin typeface="Malgun Gothic" pitchFamily="34" charset="0"/>
-                <a:ea typeface="Malgun Gothic" pitchFamily="34" charset="-122"/>
-                <a:cs typeface="Malgun Gothic" pitchFamily="34" charset="-120"/>
-              </a:rPr>
-              <a:t>2  형상 빌드</a:t>
-            </a:r>
-            <a:endParaRPr lang="en-US" sz="1000" dirty="0"/>
-          </a:p>
-        </p:txBody>
-      </p:sp>
-      <p:sp>
-        <p:nvSpPr>
-          <p:cNvPr id="21" name="Text 19"/>
-          <p:cNvSpPr txBox="1"/>
-          <p:nvPr/>
-        </p:nvSpPr>
-        <p:spPr>
-          <a:xfrm>
-            <a:off x="4764024" y="2194560"/>
-            <a:ext cx="2011680" cy="274320"/>
-          </a:xfrm>
-          <a:prstGeom prst="rect">
-            <a:avLst/>
-          </a:prstGeom>
-          <a:noFill/>
-          <a:ln/>
-        </p:spPr>
-        <p:txBody>
-          <a:bodyPr wrap="square" lIns="0" tIns="0" rIns="0" bIns="0" rtlCol="0" anchor="ctr"/>
-          <a:lstStyle/>
-          <a:p>
-            <a:pPr algn="ctr" indent="0" marL="0">
-              <a:buNone/>
-            </a:pPr>
-            <a:r>
-              <a:rPr lang="en-US" sz="950" b="1" dirty="0">
-                <a:solidFill>
-                  <a:srgbClr val="16305B"/>
-                </a:solidFill>
-                <a:latin typeface="Consolas" pitchFamily="34" charset="0"/>
-                <a:ea typeface="Consolas" pitchFamily="34" charset="-122"/>
-                <a:cs typeface="Consolas" pitchFamily="34" charset="-120"/>
-              </a:rPr>
-              <a:t>Solidworks.py</a:t>
-            </a:r>
-            <a:endParaRPr lang="en-US" sz="950" dirty="0"/>
-          </a:p>
-        </p:txBody>
-      </p:sp>
-      <p:sp>
-        <p:nvSpPr>
-          <p:cNvPr id="22" name="Text 20"/>
-          <p:cNvSpPr txBox="1"/>
-          <p:nvPr/>
-        </p:nvSpPr>
-        <p:spPr>
-          <a:xfrm>
-            <a:off x="4764024" y="2450592"/>
-            <a:ext cx="2011680" cy="274320"/>
-          </a:xfrm>
-          <a:prstGeom prst="rect">
-            <a:avLst/>
-          </a:prstGeom>
-          <a:noFill/>
-          <a:ln/>
-        </p:spPr>
-        <p:txBody>
-          <a:bodyPr wrap="square" lIns="0" tIns="0" rIns="0" bIns="0" rtlCol="0" anchor="ctr"/>
-          <a:lstStyle/>
-          <a:p>
-            <a:pPr algn="ctr" indent="0" marL="0">
-              <a:buNone/>
-            </a:pPr>
-            <a:r>
-              <a:rPr lang="en-US" sz="880" dirty="0">
-                <a:solidFill>
-                  <a:srgbClr val="6B7A8F"/>
-                </a:solidFill>
-                <a:latin typeface="Malgun Gothic" pitchFamily="34" charset="0"/>
-                <a:ea typeface="Malgun Gothic" pitchFamily="34" charset="-122"/>
-                <a:cs typeface="Malgun Gothic" pitchFamily="34" charset="-120"/>
-              </a:rPr>
-              <a:t>STEP · 질량 · 부피</a:t>
-            </a:r>
-            <a:endParaRPr lang="en-US" sz="880" dirty="0"/>
-          </a:p>
-        </p:txBody>
-      </p:sp>
-      <p:sp>
-        <p:nvSpPr>
-          <p:cNvPr id="23" name="Text 21"/>
-          <p:cNvSpPr txBox="1"/>
-          <p:nvPr/>
-        </p:nvSpPr>
-        <p:spPr>
-          <a:xfrm>
-            <a:off x="6775704" y="1847088"/>
-            <a:ext cx="237744" cy="932688"/>
-          </a:xfrm>
-          <a:prstGeom prst="rect">
-            <a:avLst/>
-          </a:prstGeom>
-          <a:noFill/>
-          <a:ln/>
-        </p:spPr>
-        <p:txBody>
-          <a:bodyPr wrap="square" lIns="0" tIns="0" rIns="0" bIns="0" rtlCol="0" anchor="ctr"/>
-          <a:lstStyle/>
-          <a:p>
-            <a:pPr algn="ctr" indent="0" marL="0">
-              <a:buNone/>
-            </a:pPr>
-            <a:r>
-              <a:rPr lang="en-US" sz="900" dirty="0">
-                <a:solidFill>
-                  <a:srgbClr val="00A3C4"/>
-                </a:solidFill>
-                <a:latin typeface="Malgun Gothic" pitchFamily="34" charset="0"/>
-                <a:ea typeface="Malgun Gothic" pitchFamily="34" charset="-122"/>
-                <a:cs typeface="Malgun Gothic" pitchFamily="34" charset="-120"/>
-              </a:rPr>
-              <a:t>▶</a:t>
-            </a:r>
-            <a:endParaRPr lang="en-US" sz="900" dirty="0"/>
-          </a:p>
-        </p:txBody>
-      </p:sp>
-      <p:sp>
-        <p:nvSpPr>
-          <p:cNvPr id="24" name="Shape 22"/>
-          <p:cNvSpPr/>
-          <p:nvPr/>
-        </p:nvSpPr>
-        <p:spPr>
-          <a:xfrm>
-            <a:off x="7013448" y="1847088"/>
-            <a:ext cx="2011680" cy="932688"/>
-          </a:xfrm>
-          <a:prstGeom prst="roundRect">
-            <a:avLst>
-              <a:gd name="adj" fmla="val 6863"/>
-            </a:avLst>
-          </a:prstGeom>
-          <a:solidFill>
-            <a:srgbClr val="F7F9FC"/>
-          </a:solidFill>
-          <a:ln w="9525">
-            <a:solidFill>
-              <a:srgbClr val="DDE3EB"/>
-            </a:solidFill>
-            <a:prstDash val="solid"/>
-          </a:ln>
-        </p:spPr>
-      </p:sp>
-      <p:sp>
-        <p:nvSpPr>
-          <p:cNvPr id="25" name="Shape 23"/>
-          <p:cNvSpPr/>
-          <p:nvPr/>
-        </p:nvSpPr>
-        <p:spPr>
-          <a:xfrm>
-            <a:off x="7013448" y="1847088"/>
-            <a:ext cx="2011680" cy="310896"/>
-          </a:xfrm>
-          <a:prstGeom prst="rect">
-            <a:avLst/>
-          </a:prstGeom>
-          <a:solidFill>
-            <a:srgbClr val="DCE6F2"/>
-          </a:solidFill>
-          <a:ln w="12700">
-            <a:solidFill>
-              <a:srgbClr val="DCE6F2"/>
-            </a:solidFill>
-            <a:prstDash val="solid"/>
-          </a:ln>
-        </p:spPr>
-      </p:sp>
-      <p:sp>
-        <p:nvSpPr>
-          <p:cNvPr id="26" name="Text 24"/>
-          <p:cNvSpPr txBox="1"/>
-          <p:nvPr/>
-        </p:nvSpPr>
-        <p:spPr>
-          <a:xfrm>
-            <a:off x="7013448" y="1847088"/>
-            <a:ext cx="2011680" cy="310896"/>
-          </a:xfrm>
-          <a:prstGeom prst="rect">
-            <a:avLst/>
-          </a:prstGeom>
-          <a:noFill/>
-          <a:ln/>
-        </p:spPr>
-        <p:txBody>
-          <a:bodyPr wrap="square" lIns="0" tIns="0" rIns="0" bIns="0" rtlCol="0" anchor="ctr"/>
-          <a:lstStyle/>
-          <a:p>
-            <a:pPr algn="ctr" indent="0" marL="0">
-              <a:buNone/>
-            </a:pPr>
-            <a:r>
-              <a:rPr lang="en-US" sz="1000" b="1" dirty="0">
-                <a:solidFill>
-                  <a:srgbClr val="16305B"/>
-                </a:solidFill>
-                <a:latin typeface="Malgun Gothic" pitchFamily="34" charset="0"/>
-                <a:ea typeface="Malgun Gothic" pitchFamily="34" charset="-122"/>
-                <a:cs typeface="Malgun Gothic" pitchFamily="34" charset="-120"/>
-              </a:rPr>
-              <a:t>3  해석</a:t>
-            </a:r>
-            <a:endParaRPr lang="en-US" sz="1000" dirty="0"/>
-          </a:p>
-        </p:txBody>
-      </p:sp>
-      <p:sp>
-        <p:nvSpPr>
-          <p:cNvPr id="27" name="Text 25"/>
-          <p:cNvSpPr txBox="1"/>
-          <p:nvPr/>
-        </p:nvSpPr>
-        <p:spPr>
-          <a:xfrm>
-            <a:off x="7013448" y="2194560"/>
-            <a:ext cx="2011680" cy="274320"/>
-          </a:xfrm>
-          <a:prstGeom prst="rect">
-            <a:avLst/>
-          </a:prstGeom>
-          <a:noFill/>
-          <a:ln/>
-        </p:spPr>
-        <p:txBody>
-          <a:bodyPr wrap="square" lIns="0" tIns="0" rIns="0" bIns="0" rtlCol="0" anchor="ctr"/>
-          <a:lstStyle/>
-          <a:p>
-            <a:pPr algn="ctr" indent="0" marL="0">
-              <a:buNone/>
-            </a:pPr>
-            <a:r>
-              <a:rPr lang="en-US" sz="950" b="1" dirty="0">
-                <a:solidFill>
-                  <a:srgbClr val="16305B"/>
-                </a:solidFill>
-                <a:latin typeface="Consolas" pitchFamily="34" charset="0"/>
-                <a:ea typeface="Consolas" pitchFamily="34" charset="-122"/>
-                <a:cs typeface="Consolas" pitchFamily="34" charset="-120"/>
-              </a:rPr>
-              <a:t>icepak.py</a:t>
-            </a:r>
-            <a:endParaRPr lang="en-US" sz="950" dirty="0"/>
-          </a:p>
-        </p:txBody>
-      </p:sp>
-      <p:sp>
-        <p:nvSpPr>
-          <p:cNvPr id="28" name="Text 26"/>
-          <p:cNvSpPr txBox="1"/>
-          <p:nvPr/>
-        </p:nvSpPr>
-        <p:spPr>
-          <a:xfrm>
-            <a:off x="7013448" y="2450592"/>
-            <a:ext cx="2011680" cy="274320"/>
-          </a:xfrm>
-          <a:prstGeom prst="rect">
-            <a:avLst/>
-          </a:prstGeom>
-          <a:noFill/>
-          <a:ln/>
-        </p:spPr>
-        <p:txBody>
-          <a:bodyPr wrap="square" lIns="0" tIns="0" rIns="0" bIns="0" rtlCol="0" anchor="ctr"/>
-          <a:lstStyle/>
-          <a:p>
-            <a:pPr algn="ctr" indent="0" marL="0">
-              <a:buNone/>
-            </a:pPr>
-            <a:r>
-              <a:rPr lang="en-US" sz="880" dirty="0">
-                <a:solidFill>
-                  <a:srgbClr val="6B7A8F"/>
-                </a:solidFill>
-                <a:latin typeface="Malgun Gothic" pitchFamily="34" charset="0"/>
-                <a:ea typeface="Malgun Gothic" pitchFamily="34" charset="-122"/>
-                <a:cs typeface="Malgun Gothic" pitchFamily="34" charset="-120"/>
-              </a:rPr>
-              <a:t>결과 CSV</a:t>
-            </a:r>
-            <a:endParaRPr lang="en-US" sz="880" dirty="0"/>
-          </a:p>
-        </p:txBody>
-      </p:sp>
-      <p:sp>
-        <p:nvSpPr>
-          <p:cNvPr id="29" name="Text 27"/>
-          <p:cNvSpPr txBox="1"/>
-          <p:nvPr/>
-        </p:nvSpPr>
-        <p:spPr>
-          <a:xfrm>
-            <a:off x="9025128" y="1847088"/>
-            <a:ext cx="237744" cy="932688"/>
-          </a:xfrm>
-          <a:prstGeom prst="rect">
-            <a:avLst/>
-          </a:prstGeom>
-          <a:noFill/>
-          <a:ln/>
-        </p:spPr>
-        <p:txBody>
-          <a:bodyPr wrap="square" lIns="0" tIns="0" rIns="0" bIns="0" rtlCol="0" anchor="ctr"/>
-          <a:lstStyle/>
-          <a:p>
-            <a:pPr algn="ctr" indent="0" marL="0">
-              <a:buNone/>
-            </a:pPr>
-            <a:r>
-              <a:rPr lang="en-US" sz="900" dirty="0">
-                <a:solidFill>
-                  <a:srgbClr val="00A3C4"/>
-                </a:solidFill>
-                <a:latin typeface="Malgun Gothic" pitchFamily="34" charset="0"/>
-                <a:ea typeface="Malgun Gothic" pitchFamily="34" charset="-122"/>
-                <a:cs typeface="Malgun Gothic" pitchFamily="34" charset="-120"/>
-              </a:rPr>
-              <a:t>▶</a:t>
-            </a:r>
-            <a:endParaRPr lang="en-US" sz="900" dirty="0"/>
-          </a:p>
-        </p:txBody>
-      </p:sp>
-      <p:sp>
-        <p:nvSpPr>
-          <p:cNvPr id="30" name="Shape 28"/>
-          <p:cNvSpPr/>
-          <p:nvPr/>
-        </p:nvSpPr>
-        <p:spPr>
-          <a:xfrm>
-            <a:off x="9262872" y="1847088"/>
-            <a:ext cx="2011680" cy="932688"/>
-          </a:xfrm>
-          <a:prstGeom prst="roundRect">
-            <a:avLst>
-              <a:gd name="adj" fmla="val 6863"/>
-            </a:avLst>
-          </a:prstGeom>
-          <a:solidFill>
-            <a:srgbClr val="F7F9FC"/>
-          </a:solidFill>
-          <a:ln w="9525">
-            <a:solidFill>
-              <a:srgbClr val="DDE3EB"/>
-            </a:solidFill>
-            <a:prstDash val="solid"/>
-          </a:ln>
-        </p:spPr>
-      </p:sp>
-      <p:sp>
-        <p:nvSpPr>
-          <p:cNvPr id="31" name="Shape 29"/>
-          <p:cNvSpPr/>
-          <p:nvPr/>
-        </p:nvSpPr>
-        <p:spPr>
-          <a:xfrm>
-            <a:off x="9262872" y="1847088"/>
-            <a:ext cx="2011680" cy="310896"/>
-          </a:xfrm>
-          <a:prstGeom prst="rect">
-            <a:avLst/>
           </a:prstGeom>
           <a:solidFill>
             <a:srgbClr val="00A3C4"/>
@@ -22110,14 +21413,14 @@
       </p:sp>
       <p:sp>
         <p:nvSpPr>
-          <p:cNvPr id="32" name="Text 30"/>
-          <p:cNvSpPr txBox="1"/>
-          <p:nvPr/>
-        </p:nvSpPr>
-        <p:spPr>
-          <a:xfrm>
-            <a:off x="9262872" y="1847088"/>
-            <a:ext cx="2011680" cy="310896"/>
+          <p:cNvPr id="12" name="Text 10"/>
+          <p:cNvSpPr txBox="1"/>
+          <p:nvPr/>
+        </p:nvSpPr>
+        <p:spPr>
+          <a:xfrm>
+            <a:off x="9957816" y="1947672"/>
+            <a:ext cx="1234440" cy="310896"/>
           </a:xfrm>
           <a:prstGeom prst="rect">
             <a:avLst/>
@@ -22133,7 +21436,7 @@
               <a:buNone/>
             </a:pPr>
             <a:r>
-              <a:rPr lang="en-US" sz="1000" b="1" dirty="0">
+              <a:rPr lang="en-US" sz="950" b="1" dirty="0">
                 <a:solidFill>
                   <a:srgbClr val="FFFFFF"/>
                 </a:solidFill>
@@ -22141,22 +21444,105 @@
                 <a:ea typeface="Malgun Gothic" pitchFamily="34" charset="-122"/>
                 <a:cs typeface="Malgun Gothic" pitchFamily="34" charset="-120"/>
               </a:rPr>
-              <a:t>4  결과 저장</a:t>
-            </a:r>
-            <a:endParaRPr lang="en-US" sz="1000" dirty="0"/>
-          </a:p>
-        </p:txBody>
-      </p:sp>
-      <p:sp>
-        <p:nvSpPr>
-          <p:cNvPr id="33" name="Text 31"/>
-          <p:cNvSpPr txBox="1"/>
-          <p:nvPr/>
-        </p:nvSpPr>
-        <p:spPr>
-          <a:xfrm>
-            <a:off x="9262872" y="2194560"/>
-            <a:ext cx="2011680" cy="274320"/>
+              <a:t>90회 반복</a:t>
+            </a:r>
+            <a:endParaRPr lang="en-US" sz="950" dirty="0"/>
+          </a:p>
+        </p:txBody>
+      </p:sp>
+      <p:sp>
+        <p:nvSpPr>
+          <p:cNvPr id="13" name="Shape 11"/>
+          <p:cNvSpPr/>
+          <p:nvPr/>
+        </p:nvSpPr>
+        <p:spPr>
+          <a:xfrm>
+            <a:off x="1979676" y="2359152"/>
+            <a:ext cx="0" cy="310896"/>
+          </a:xfrm>
+          <a:prstGeom prst="line">
+            <a:avLst/>
+          </a:prstGeom>
+          <a:noFill/>
+          <a:ln w="12700">
+            <a:solidFill>
+              <a:srgbClr val="9FB0C6"/>
+            </a:solidFill>
+            <a:prstDash val="solid"/>
+            <a:tailEnd type="triangle"/>
+          </a:ln>
+        </p:spPr>
+      </p:sp>
+      <p:sp>
+        <p:nvSpPr>
+          <p:cNvPr id="14" name="Shape 12"/>
+          <p:cNvSpPr/>
+          <p:nvPr/>
+        </p:nvSpPr>
+        <p:spPr>
+          <a:xfrm>
+            <a:off x="813816" y="2670048"/>
+            <a:ext cx="2331720" cy="1243584"/>
+          </a:xfrm>
+          <a:prstGeom prst="roundRect">
+            <a:avLst>
+              <a:gd name="adj" fmla="val 5147"/>
+            </a:avLst>
+          </a:prstGeom>
+          <a:solidFill>
+            <a:srgbClr val="FFFFFF"/>
+          </a:solidFill>
+          <a:ln w="15875">
+            <a:solidFill>
+              <a:srgbClr val="B9C7D8"/>
+            </a:solidFill>
+            <a:prstDash val="solid"/>
+          </a:ln>
+          <a:effectLst>
+            <a:outerShdw sx="100000" sy="100000" kx="0" ky="0" algn="bl" rotWithShape="0" blurRad="101600" dist="12700" dir="5400000">
+              <a:srgbClr val="9AA8BC">
+                <a:alpha val="18000"/>
+              </a:srgbClr>
+            </a:outerShdw>
+          </a:effectLst>
+        </p:spPr>
+      </p:sp>
+      <p:sp>
+        <p:nvSpPr>
+          <p:cNvPr id="15" name="Shape 13"/>
+          <p:cNvSpPr/>
+          <p:nvPr/>
+        </p:nvSpPr>
+        <p:spPr>
+          <a:xfrm>
+            <a:off x="941832" y="2798064"/>
+            <a:ext cx="274320" cy="274320"/>
+          </a:xfrm>
+          <a:prstGeom prst="ellipse">
+            <a:avLst/>
+          </a:prstGeom>
+          <a:solidFill>
+            <a:srgbClr val="16305B"/>
+          </a:solidFill>
+          <a:ln w="12700">
+            <a:solidFill>
+              <a:srgbClr val="16305B"/>
+            </a:solidFill>
+            <a:prstDash val="solid"/>
+          </a:ln>
+        </p:spPr>
+      </p:sp>
+      <p:sp>
+        <p:nvSpPr>
+          <p:cNvPr id="16" name="Text 14"/>
+          <p:cNvSpPr txBox="1"/>
+          <p:nvPr/>
+        </p:nvSpPr>
+        <p:spPr>
+          <a:xfrm>
+            <a:off x="941832" y="2798064"/>
+            <a:ext cx="274320" cy="274320"/>
           </a:xfrm>
           <a:prstGeom prst="rect">
             <a:avLst/>
@@ -22174,13 +21560,91 @@
             <a:r>
               <a:rPr lang="en-US" sz="950" b="1" dirty="0">
                 <a:solidFill>
+                  <a:srgbClr val="FFFFFF"/>
+                </a:solidFill>
+                <a:latin typeface="Malgun Gothic" pitchFamily="34" charset="0"/>
+                <a:ea typeface="Malgun Gothic" pitchFamily="34" charset="-122"/>
+                <a:cs typeface="Malgun Gothic" pitchFamily="34" charset="-120"/>
+              </a:rPr>
+              <a:t>1</a:t>
+            </a:r>
+            <a:endParaRPr lang="en-US" sz="950" dirty="0"/>
+          </a:p>
+        </p:txBody>
+      </p:sp>
+      <p:sp>
+        <p:nvSpPr>
+          <p:cNvPr id="17" name="Text 15"/>
+          <p:cNvSpPr txBox="1"/>
+          <p:nvPr/>
+        </p:nvSpPr>
+        <p:spPr>
+          <a:xfrm>
+            <a:off x="1289304" y="2779776"/>
+            <a:ext cx="1783080" cy="310896"/>
+          </a:xfrm>
+          <a:prstGeom prst="rect">
+            <a:avLst/>
+          </a:prstGeom>
+          <a:noFill/>
+          <a:ln/>
+        </p:spPr>
+        <p:txBody>
+          <a:bodyPr wrap="square" lIns="0" tIns="0" rIns="0" bIns="0" rtlCol="0" anchor="ctr"/>
+          <a:lstStyle/>
+          <a:p>
+            <a:pPr indent="0" marL="0">
+              <a:buNone/>
+            </a:pPr>
+            <a:r>
+              <a:rPr lang="en-US" sz="1100" b="1" dirty="0">
+                <a:solidFill>
                   <a:srgbClr val="16305B"/>
+                </a:solidFill>
+                <a:latin typeface="Malgun Gothic" pitchFamily="34" charset="0"/>
+                <a:ea typeface="Malgun Gothic" pitchFamily="34" charset="-122"/>
+                <a:cs typeface="Malgun Gothic" pitchFamily="34" charset="-120"/>
+              </a:rPr>
+              <a:t>실험점 생성</a:t>
+            </a:r>
+            <a:endParaRPr lang="en-US" sz="1100" dirty="0"/>
+          </a:p>
+        </p:txBody>
+      </p:sp>
+      <p:sp>
+        <p:nvSpPr>
+          <p:cNvPr id="18" name="Text 16"/>
+          <p:cNvSpPr txBox="1"/>
+          <p:nvPr/>
+        </p:nvSpPr>
+        <p:spPr>
+          <a:xfrm>
+            <a:off x="941832" y="3145536"/>
+            <a:ext cx="2075688" cy="237744"/>
+          </a:xfrm>
+          <a:prstGeom prst="rect">
+            <a:avLst/>
+          </a:prstGeom>
+          <a:noFill/>
+          <a:ln/>
+        </p:spPr>
+        <p:txBody>
+          <a:bodyPr wrap="square" lIns="0" tIns="0" rIns="0" bIns="0" rtlCol="0" anchor="ctr"/>
+          <a:lstStyle/>
+          <a:p>
+            <a:pPr indent="0" marL="0">
+              <a:buNone/>
+            </a:pPr>
+            <a:r>
+              <a:rPr lang="en-US" sz="950" b="1" dirty="0">
+                <a:solidFill>
+                  <a:srgbClr val="2C4E82"/>
                 </a:solidFill>
                 <a:latin typeface="Consolas" pitchFamily="34" charset="0"/>
                 <a:ea typeface="Consolas" pitchFamily="34" charset="-122"/>
                 <a:cs typeface="Consolas" pitchFamily="34" charset="-120"/>
               </a:rPr>
-              <a:t>result_parser.py</a:t>
+              <a:t>OLHD.py · fins.py</a:t>
             </a:r>
             <a:endParaRPr lang="en-US" sz="950" dirty="0"/>
           </a:p>
@@ -22188,14 +21652,100 @@
       </p:sp>
       <p:sp>
         <p:nvSpPr>
-          <p:cNvPr id="34" name="Text 32"/>
-          <p:cNvSpPr txBox="1"/>
-          <p:nvPr/>
-        </p:nvSpPr>
-        <p:spPr>
-          <a:xfrm>
-            <a:off x="9262872" y="2450592"/>
-            <a:ext cx="2011680" cy="274320"/>
+          <p:cNvPr id="19" name="Text 17"/>
+          <p:cNvSpPr txBox="1"/>
+          <p:nvPr/>
+        </p:nvSpPr>
+        <p:spPr>
+          <a:xfrm>
+            <a:off x="941832" y="3401568"/>
+            <a:ext cx="2075688" cy="457200"/>
+          </a:xfrm>
+          <a:prstGeom prst="rect">
+            <a:avLst/>
+          </a:prstGeom>
+          <a:noFill/>
+          <a:ln/>
+        </p:spPr>
+        <p:txBody>
+          <a:bodyPr wrap="square" lIns="0" tIns="0" rIns="0" bIns="0" rtlCol="0" anchor="ctr"/>
+          <a:lstStyle/>
+          <a:p>
+            <a:pPr indent="0" marL="0">
+              <a:lnSpc>
+                <a:spcPct val="115000"/>
+              </a:lnSpc>
+              <a:buNone/>
+            </a:pPr>
+            <a:r>
+              <a:rPr lang="en-US" sz="880" dirty="0">
+                <a:solidFill>
+                  <a:srgbClr val="1C2733"/>
+                </a:solidFill>
+                <a:latin typeface="Malgun Gothic" pitchFamily="34" charset="0"/>
+                <a:ea typeface="Malgun Gothic" pitchFamily="34" charset="-122"/>
+                <a:cs typeface="Malgun Gothic" pitchFamily="34" charset="-120"/>
+              </a:rPr>
+              <a:t>설계변수 정의 · 실험점 생성</a:t>
+            </a:r>
+            <a:endParaRPr lang="en-US" sz="880" dirty="0"/>
+          </a:p>
+          <a:p>
+            <a:pPr indent="0" marL="0">
+              <a:lnSpc>
+                <a:spcPct val="115000"/>
+              </a:lnSpc>
+              <a:buNone/>
+            </a:pPr>
+            <a:r>
+              <a:rPr lang="en-US" sz="880" dirty="0">
+                <a:solidFill>
+                  <a:srgbClr val="1C2733"/>
+                </a:solidFill>
+                <a:latin typeface="Malgun Gothic" pitchFamily="34" charset="0"/>
+                <a:ea typeface="Malgun Gothic" pitchFamily="34" charset="-122"/>
+                <a:cs typeface="Malgun Gothic" pitchFamily="34" charset="-120"/>
+              </a:rPr>
+              <a:t>갭 가공 제약 반영</a:t>
+            </a:r>
+            <a:endParaRPr lang="en-US" sz="880" dirty="0"/>
+          </a:p>
+        </p:txBody>
+      </p:sp>
+      <p:sp>
+        <p:nvSpPr>
+          <p:cNvPr id="20" name="Shape 18"/>
+          <p:cNvSpPr/>
+          <p:nvPr/>
+        </p:nvSpPr>
+        <p:spPr>
+          <a:xfrm>
+            <a:off x="3191256" y="3291840"/>
+            <a:ext cx="320040" cy="0"/>
+          </a:xfrm>
+          <a:prstGeom prst="line">
+            <a:avLst/>
+          </a:prstGeom>
+          <a:noFill/>
+          <a:ln w="19050">
+            <a:solidFill>
+              <a:srgbClr val="00A3C4"/>
+            </a:solidFill>
+            <a:prstDash val="solid"/>
+            <a:tailEnd type="triangle"/>
+          </a:ln>
+        </p:spPr>
+      </p:sp>
+      <p:sp>
+        <p:nvSpPr>
+          <p:cNvPr id="21" name="Text 19"/>
+          <p:cNvSpPr txBox="1"/>
+          <p:nvPr/>
+        </p:nvSpPr>
+        <p:spPr>
+          <a:xfrm>
+            <a:off x="3054096" y="3017520"/>
+            <a:ext cx="594360" cy="219456"/>
           </a:xfrm>
           <a:prstGeom prst="rect">
             <a:avLst/>
@@ -22211,42 +21761,98 @@
               <a:buNone/>
             </a:pPr>
             <a:r>
-              <a:rPr lang="en-US" sz="880" dirty="0">
-                <a:solidFill>
-                  <a:srgbClr val="6B7A8F"/>
-                </a:solidFill>
-                <a:latin typeface="Malgun Gothic" pitchFamily="34" charset="0"/>
-                <a:ea typeface="Malgun Gothic" pitchFamily="34" charset="-122"/>
-                <a:cs typeface="Malgun Gothic" pitchFamily="34" charset="-120"/>
-              </a:rPr>
-              <a:t>차압 · 온도 · 유량 · 중량</a:t>
-            </a:r>
-            <a:endParaRPr lang="en-US" sz="880" dirty="0"/>
-          </a:p>
-        </p:txBody>
-      </p:sp>
-      <p:sp>
-        <p:nvSpPr>
-          <p:cNvPr id="35" name="Shape 33"/>
+              <a:rPr lang="en-US" sz="850" b="1" dirty="0">
+                <a:solidFill>
+                  <a:srgbClr val="0088A6"/>
+                </a:solidFill>
+                <a:latin typeface="Malgun Gothic" pitchFamily="34" charset="0"/>
+                <a:ea typeface="Malgun Gothic" pitchFamily="34" charset="-122"/>
+                <a:cs typeface="Malgun Gothic" pitchFamily="34" charset="-120"/>
+              </a:rPr>
+              <a:t>설계값</a:t>
+            </a:r>
+            <a:endParaRPr lang="en-US" sz="850" dirty="0"/>
+          </a:p>
+        </p:txBody>
+      </p:sp>
+      <p:sp>
+        <p:nvSpPr>
+          <p:cNvPr id="22" name="Shape 20"/>
           <p:cNvSpPr/>
           <p:nvPr/>
         </p:nvSpPr>
         <p:spPr>
           <a:xfrm>
-            <a:off x="2514600" y="2889504"/>
-            <a:ext cx="8759952" cy="256032"/>
+            <a:off x="4722876" y="2359152"/>
+            <a:ext cx="0" cy="310896"/>
+          </a:xfrm>
+          <a:prstGeom prst="line">
+            <a:avLst/>
+          </a:prstGeom>
+          <a:noFill/>
+          <a:ln w="12700">
+            <a:solidFill>
+              <a:srgbClr val="9FB0C6"/>
+            </a:solidFill>
+            <a:prstDash val="solid"/>
+            <a:tailEnd type="triangle"/>
+          </a:ln>
+        </p:spPr>
+      </p:sp>
+      <p:sp>
+        <p:nvSpPr>
+          <p:cNvPr id="23" name="Shape 21"/>
+          <p:cNvSpPr/>
+          <p:nvPr/>
+        </p:nvSpPr>
+        <p:spPr>
+          <a:xfrm>
+            <a:off x="3557016" y="2670048"/>
+            <a:ext cx="2331720" cy="1243584"/>
           </a:xfrm>
           <a:prstGeom prst="roundRect">
             <a:avLst>
-              <a:gd name="adj" fmla="val 17857"/>
+              <a:gd name="adj" fmla="val 5147"/>
             </a:avLst>
           </a:prstGeom>
           <a:solidFill>
-            <a:srgbClr val="EEF2F7"/>
+            <a:srgbClr val="FFFFFF"/>
+          </a:solidFill>
+          <a:ln w="15875">
+            <a:solidFill>
+              <a:srgbClr val="B9C7D8"/>
+            </a:solidFill>
+            <a:prstDash val="solid"/>
+          </a:ln>
+          <a:effectLst>
+            <a:outerShdw sx="100000" sy="100000" kx="0" ky="0" algn="bl" rotWithShape="0" blurRad="101600" dist="12700" dir="5400000">
+              <a:srgbClr val="9AA8BC">
+                <a:alpha val="18000"/>
+              </a:srgbClr>
+            </a:outerShdw>
+          </a:effectLst>
+        </p:spPr>
+      </p:sp>
+      <p:sp>
+        <p:nvSpPr>
+          <p:cNvPr id="24" name="Shape 22"/>
+          <p:cNvSpPr/>
+          <p:nvPr/>
+        </p:nvSpPr>
+        <p:spPr>
+          <a:xfrm>
+            <a:off x="3685032" y="2798064"/>
+            <a:ext cx="274320" cy="274320"/>
+          </a:xfrm>
+          <a:prstGeom prst="ellipse">
+            <a:avLst/>
+          </a:prstGeom>
+          <a:solidFill>
+            <a:srgbClr val="16305B"/>
           </a:solidFill>
           <a:ln w="12700">
             <a:solidFill>
-              <a:srgbClr val="EEF2F7"/>
+              <a:srgbClr val="16305B"/>
             </a:solidFill>
             <a:prstDash val="solid"/>
           </a:ln>
@@ -22254,14 +21860,53 @@
       </p:sp>
       <p:sp>
         <p:nvSpPr>
-          <p:cNvPr id="36" name="Text 34"/>
-          <p:cNvSpPr txBox="1"/>
-          <p:nvPr/>
-        </p:nvSpPr>
-        <p:spPr>
-          <a:xfrm>
-            <a:off x="2651760" y="2889504"/>
-            <a:ext cx="8485632" cy="256032"/>
+          <p:cNvPr id="25" name="Text 23"/>
+          <p:cNvSpPr txBox="1"/>
+          <p:nvPr/>
+        </p:nvSpPr>
+        <p:spPr>
+          <a:xfrm>
+            <a:off x="3685032" y="2798064"/>
+            <a:ext cx="274320" cy="274320"/>
+          </a:xfrm>
+          <a:prstGeom prst="rect">
+            <a:avLst/>
+          </a:prstGeom>
+          <a:noFill/>
+          <a:ln/>
+        </p:spPr>
+        <p:txBody>
+          <a:bodyPr wrap="square" lIns="0" tIns="0" rIns="0" bIns="0" rtlCol="0" anchor="ctr"/>
+          <a:lstStyle/>
+          <a:p>
+            <a:pPr algn="ctr" indent="0" marL="0">
+              <a:buNone/>
+            </a:pPr>
+            <a:r>
+              <a:rPr lang="en-US" sz="950" b="1" dirty="0">
+                <a:solidFill>
+                  <a:srgbClr val="FFFFFF"/>
+                </a:solidFill>
+                <a:latin typeface="Malgun Gothic" pitchFamily="34" charset="0"/>
+                <a:ea typeface="Malgun Gothic" pitchFamily="34" charset="-122"/>
+                <a:cs typeface="Malgun Gothic" pitchFamily="34" charset="-120"/>
+              </a:rPr>
+              <a:t>2</a:t>
+            </a:r>
+            <a:endParaRPr lang="en-US" sz="950" dirty="0"/>
+          </a:p>
+        </p:txBody>
+      </p:sp>
+      <p:sp>
+        <p:nvSpPr>
+          <p:cNvPr id="26" name="Text 24"/>
+          <p:cNvSpPr txBox="1"/>
+          <p:nvPr/>
+        </p:nvSpPr>
+        <p:spPr>
+          <a:xfrm>
+            <a:off x="4032504" y="2779776"/>
+            <a:ext cx="1783080" cy="310896"/>
           </a:xfrm>
           <a:prstGeom prst="rect">
             <a:avLst/>
@@ -22277,21 +21922,88 @@
               <a:buNone/>
             </a:pPr>
             <a:r>
-              <a:rPr lang="en-US" sz="900" b="1" dirty="0">
+              <a:rPr lang="en-US" sz="1100" b="1" dirty="0">
                 <a:solidFill>
                   <a:srgbClr val="16305B"/>
+                </a:solidFill>
+                <a:latin typeface="Malgun Gothic" pitchFamily="34" charset="0"/>
+                <a:ea typeface="Malgun Gothic" pitchFamily="34" charset="-122"/>
+                <a:cs typeface="Malgun Gothic" pitchFamily="34" charset="-120"/>
+              </a:rPr>
+              <a:t>형상 빌드</a:t>
+            </a:r>
+            <a:endParaRPr lang="en-US" sz="1100" dirty="0"/>
+          </a:p>
+        </p:txBody>
+      </p:sp>
+      <p:sp>
+        <p:nvSpPr>
+          <p:cNvPr id="27" name="Text 25"/>
+          <p:cNvSpPr txBox="1"/>
+          <p:nvPr/>
+        </p:nvSpPr>
+        <p:spPr>
+          <a:xfrm>
+            <a:off x="3685032" y="3145536"/>
+            <a:ext cx="2075688" cy="237744"/>
+          </a:xfrm>
+          <a:prstGeom prst="rect">
+            <a:avLst/>
+          </a:prstGeom>
+          <a:noFill/>
+          <a:ln/>
+        </p:spPr>
+        <p:txBody>
+          <a:bodyPr wrap="square" lIns="0" tIns="0" rIns="0" bIns="0" rtlCol="0" anchor="ctr"/>
+          <a:lstStyle/>
+          <a:p>
+            <a:pPr indent="0" marL="0">
+              <a:buNone/>
+            </a:pPr>
+            <a:r>
+              <a:rPr lang="en-US" sz="950" b="1" dirty="0">
+                <a:solidFill>
+                  <a:srgbClr val="2C4E82"/>
                 </a:solidFill>
                 <a:latin typeface="Consolas" pitchFamily="34" charset="0"/>
                 <a:ea typeface="Consolas" pitchFamily="34" charset="-122"/>
                 <a:cs typeface="Consolas" pitchFamily="34" charset="-120"/>
               </a:rPr>
-              <a:t>paths.py</a:t>
-            </a:r>
+              <a:t>Solidworks.py</a:t>
+            </a:r>
+            <a:endParaRPr lang="en-US" sz="950" dirty="0"/>
+          </a:p>
+        </p:txBody>
+      </p:sp>
+      <p:sp>
+        <p:nvSpPr>
+          <p:cNvPr id="28" name="Text 26"/>
+          <p:cNvSpPr txBox="1"/>
+          <p:nvPr/>
+        </p:nvSpPr>
+        <p:spPr>
+          <a:xfrm>
+            <a:off x="3685032" y="3401568"/>
+            <a:ext cx="2075688" cy="457200"/>
+          </a:xfrm>
+          <a:prstGeom prst="rect">
+            <a:avLst/>
+          </a:prstGeom>
+          <a:noFill/>
+          <a:ln/>
+        </p:spPr>
+        <p:txBody>
+          <a:bodyPr wrap="square" lIns="0" tIns="0" rIns="0" bIns="0" rtlCol="0" anchor="ctr"/>
+          <a:lstStyle/>
+          <a:p>
             <a:pPr indent="0" marL="0">
-              <a:buNone/>
-            </a:pPr>
-            <a:r>
-              <a:rPr lang="en-US" sz="900" dirty="0">
+              <a:lnSpc>
+                <a:spcPct val="115000"/>
+              </a:lnSpc>
+              <a:buNone/>
+            </a:pPr>
+            <a:r>
+              <a:rPr lang="en-US" sz="880" dirty="0">
                 <a:solidFill>
                   <a:srgbClr val="1C2733"/>
                 </a:solidFill>
@@ -22299,26 +22011,1212 @@
                 <a:ea typeface="Malgun Gothic" pitchFamily="34" charset="-122"/>
                 <a:cs typeface="Malgun Gothic" pitchFamily="34" charset="-120"/>
               </a:rPr>
-              <a:t>   작업폴더 · 모델 파일 · 결과 파일 경로를 한 곳에서 관리</a:t>
-            </a:r>
-            <a:endParaRPr lang="en-US" sz="900" dirty="0"/>
-          </a:p>
-        </p:txBody>
-      </p:sp>
-      <p:sp>
-        <p:nvSpPr>
-          <p:cNvPr id="37" name="Shape 35"/>
+              <a:t>전역변수 갱신 → 리빌드</a:t>
+            </a:r>
+            <a:endParaRPr lang="en-US" sz="880" dirty="0"/>
+          </a:p>
+          <a:p>
+            <a:pPr indent="0" marL="0">
+              <a:lnSpc>
+                <a:spcPct val="115000"/>
+              </a:lnSpc>
+              <a:buNone/>
+            </a:pPr>
+            <a:r>
+              <a:rPr lang="en-US" sz="880" dirty="0">
+                <a:solidFill>
+                  <a:srgbClr val="1C2733"/>
+                </a:solidFill>
+                <a:latin typeface="Malgun Gothic" pitchFamily="34" charset="0"/>
+                <a:ea typeface="Malgun Gothic" pitchFamily="34" charset="-122"/>
+                <a:cs typeface="Malgun Gothic" pitchFamily="34" charset="-120"/>
+              </a:rPr>
+              <a:t>질량 · 부피 취득</a:t>
+            </a:r>
+            <a:endParaRPr lang="en-US" sz="880" dirty="0"/>
+          </a:p>
+        </p:txBody>
+      </p:sp>
+      <p:sp>
+        <p:nvSpPr>
+          <p:cNvPr id="29" name="Shape 27"/>
           <p:cNvSpPr/>
           <p:nvPr/>
         </p:nvSpPr>
         <p:spPr>
           <a:xfrm>
-            <a:off x="502920" y="3374136"/>
-            <a:ext cx="11183112" cy="2011680"/>
+            <a:off x="5934456" y="3291840"/>
+            <a:ext cx="320040" cy="0"/>
+          </a:xfrm>
+          <a:prstGeom prst="line">
+            <a:avLst/>
+          </a:prstGeom>
+          <a:noFill/>
+          <a:ln w="19050">
+            <a:solidFill>
+              <a:srgbClr val="00A3C4"/>
+            </a:solidFill>
+            <a:prstDash val="solid"/>
+            <a:tailEnd type="triangle"/>
+          </a:ln>
+        </p:spPr>
+      </p:sp>
+      <p:sp>
+        <p:nvSpPr>
+          <p:cNvPr id="30" name="Text 28"/>
+          <p:cNvSpPr txBox="1"/>
+          <p:nvPr/>
+        </p:nvSpPr>
+        <p:spPr>
+          <a:xfrm>
+            <a:off x="5797296" y="3017520"/>
+            <a:ext cx="594360" cy="219456"/>
+          </a:xfrm>
+          <a:prstGeom prst="rect">
+            <a:avLst/>
+          </a:prstGeom>
+          <a:noFill/>
+          <a:ln/>
+        </p:spPr>
+        <p:txBody>
+          <a:bodyPr wrap="square" lIns="0" tIns="0" rIns="0" bIns="0" rtlCol="0" anchor="ctr"/>
+          <a:lstStyle/>
+          <a:p>
+            <a:pPr algn="ctr" indent="0" marL="0">
+              <a:buNone/>
+            </a:pPr>
+            <a:r>
+              <a:rPr lang="en-US" sz="850" b="1" dirty="0">
+                <a:solidFill>
+                  <a:srgbClr val="0088A6"/>
+                </a:solidFill>
+                <a:latin typeface="Malgun Gothic" pitchFamily="34" charset="0"/>
+                <a:ea typeface="Malgun Gothic" pitchFamily="34" charset="-122"/>
+                <a:cs typeface="Malgun Gothic" pitchFamily="34" charset="-120"/>
+              </a:rPr>
+              <a:t>STEP</a:t>
+            </a:r>
+            <a:endParaRPr lang="en-US" sz="850" dirty="0"/>
+          </a:p>
+        </p:txBody>
+      </p:sp>
+      <p:sp>
+        <p:nvSpPr>
+          <p:cNvPr id="31" name="Shape 29"/>
+          <p:cNvSpPr/>
+          <p:nvPr/>
+        </p:nvSpPr>
+        <p:spPr>
+          <a:xfrm>
+            <a:off x="7466076" y="2359152"/>
+            <a:ext cx="0" cy="310896"/>
+          </a:xfrm>
+          <a:prstGeom prst="line">
+            <a:avLst/>
+          </a:prstGeom>
+          <a:noFill/>
+          <a:ln w="12700">
+            <a:solidFill>
+              <a:srgbClr val="9FB0C6"/>
+            </a:solidFill>
+            <a:prstDash val="solid"/>
+            <a:tailEnd type="triangle"/>
+          </a:ln>
+        </p:spPr>
+      </p:sp>
+      <p:sp>
+        <p:nvSpPr>
+          <p:cNvPr id="32" name="Shape 30"/>
+          <p:cNvSpPr/>
+          <p:nvPr/>
+        </p:nvSpPr>
+        <p:spPr>
+          <a:xfrm>
+            <a:off x="6300216" y="2670048"/>
+            <a:ext cx="2331720" cy="1243584"/>
           </a:xfrm>
           <a:prstGeom prst="roundRect">
             <a:avLst>
-              <a:gd name="adj" fmla="val 2727"/>
+              <a:gd name="adj" fmla="val 5147"/>
+            </a:avLst>
+          </a:prstGeom>
+          <a:solidFill>
+            <a:srgbClr val="FFFFFF"/>
+          </a:solidFill>
+          <a:ln w="15875">
+            <a:solidFill>
+              <a:srgbClr val="B9C7D8"/>
+            </a:solidFill>
+            <a:prstDash val="solid"/>
+          </a:ln>
+          <a:effectLst>
+            <a:outerShdw sx="100000" sy="100000" kx="0" ky="0" algn="bl" rotWithShape="0" blurRad="101600" dist="12700" dir="5400000">
+              <a:srgbClr val="9AA8BC">
+                <a:alpha val="18000"/>
+              </a:srgbClr>
+            </a:outerShdw>
+          </a:effectLst>
+        </p:spPr>
+      </p:sp>
+      <p:sp>
+        <p:nvSpPr>
+          <p:cNvPr id="33" name="Shape 31"/>
+          <p:cNvSpPr/>
+          <p:nvPr/>
+        </p:nvSpPr>
+        <p:spPr>
+          <a:xfrm>
+            <a:off x="6428232" y="2798064"/>
+            <a:ext cx="274320" cy="274320"/>
+          </a:xfrm>
+          <a:prstGeom prst="ellipse">
+            <a:avLst/>
+          </a:prstGeom>
+          <a:solidFill>
+            <a:srgbClr val="16305B"/>
+          </a:solidFill>
+          <a:ln w="12700">
+            <a:solidFill>
+              <a:srgbClr val="16305B"/>
+            </a:solidFill>
+            <a:prstDash val="solid"/>
+          </a:ln>
+        </p:spPr>
+      </p:sp>
+      <p:sp>
+        <p:nvSpPr>
+          <p:cNvPr id="34" name="Text 32"/>
+          <p:cNvSpPr txBox="1"/>
+          <p:nvPr/>
+        </p:nvSpPr>
+        <p:spPr>
+          <a:xfrm>
+            <a:off x="6428232" y="2798064"/>
+            <a:ext cx="274320" cy="274320"/>
+          </a:xfrm>
+          <a:prstGeom prst="rect">
+            <a:avLst/>
+          </a:prstGeom>
+          <a:noFill/>
+          <a:ln/>
+        </p:spPr>
+        <p:txBody>
+          <a:bodyPr wrap="square" lIns="0" tIns="0" rIns="0" bIns="0" rtlCol="0" anchor="ctr"/>
+          <a:lstStyle/>
+          <a:p>
+            <a:pPr algn="ctr" indent="0" marL="0">
+              <a:buNone/>
+            </a:pPr>
+            <a:r>
+              <a:rPr lang="en-US" sz="950" b="1" dirty="0">
+                <a:solidFill>
+                  <a:srgbClr val="FFFFFF"/>
+                </a:solidFill>
+                <a:latin typeface="Malgun Gothic" pitchFamily="34" charset="0"/>
+                <a:ea typeface="Malgun Gothic" pitchFamily="34" charset="-122"/>
+                <a:cs typeface="Malgun Gothic" pitchFamily="34" charset="-120"/>
+              </a:rPr>
+              <a:t>3</a:t>
+            </a:r>
+            <a:endParaRPr lang="en-US" sz="950" dirty="0"/>
+          </a:p>
+        </p:txBody>
+      </p:sp>
+      <p:sp>
+        <p:nvSpPr>
+          <p:cNvPr id="35" name="Text 33"/>
+          <p:cNvSpPr txBox="1"/>
+          <p:nvPr/>
+        </p:nvSpPr>
+        <p:spPr>
+          <a:xfrm>
+            <a:off x="6775704" y="2779776"/>
+            <a:ext cx="1783080" cy="310896"/>
+          </a:xfrm>
+          <a:prstGeom prst="rect">
+            <a:avLst/>
+          </a:prstGeom>
+          <a:noFill/>
+          <a:ln/>
+        </p:spPr>
+        <p:txBody>
+          <a:bodyPr wrap="square" lIns="0" tIns="0" rIns="0" bIns="0" rtlCol="0" anchor="ctr"/>
+          <a:lstStyle/>
+          <a:p>
+            <a:pPr indent="0" marL="0">
+              <a:buNone/>
+            </a:pPr>
+            <a:r>
+              <a:rPr lang="en-US" sz="1100" b="1" dirty="0">
+                <a:solidFill>
+                  <a:srgbClr val="16305B"/>
+                </a:solidFill>
+                <a:latin typeface="Malgun Gothic" pitchFamily="34" charset="0"/>
+                <a:ea typeface="Malgun Gothic" pitchFamily="34" charset="-122"/>
+                <a:cs typeface="Malgun Gothic" pitchFamily="34" charset="-120"/>
+              </a:rPr>
+              <a:t>해석</a:t>
+            </a:r>
+            <a:endParaRPr lang="en-US" sz="1100" dirty="0"/>
+          </a:p>
+        </p:txBody>
+      </p:sp>
+      <p:sp>
+        <p:nvSpPr>
+          <p:cNvPr id="36" name="Text 34"/>
+          <p:cNvSpPr txBox="1"/>
+          <p:nvPr/>
+        </p:nvSpPr>
+        <p:spPr>
+          <a:xfrm>
+            <a:off x="6428232" y="3145536"/>
+            <a:ext cx="2075688" cy="237744"/>
+          </a:xfrm>
+          <a:prstGeom prst="rect">
+            <a:avLst/>
+          </a:prstGeom>
+          <a:noFill/>
+          <a:ln/>
+        </p:spPr>
+        <p:txBody>
+          <a:bodyPr wrap="square" lIns="0" tIns="0" rIns="0" bIns="0" rtlCol="0" anchor="ctr"/>
+          <a:lstStyle/>
+          <a:p>
+            <a:pPr indent="0" marL="0">
+              <a:buNone/>
+            </a:pPr>
+            <a:r>
+              <a:rPr lang="en-US" sz="950" b="1" dirty="0">
+                <a:solidFill>
+                  <a:srgbClr val="2C4E82"/>
+                </a:solidFill>
+                <a:latin typeface="Consolas" pitchFamily="34" charset="0"/>
+                <a:ea typeface="Consolas" pitchFamily="34" charset="-122"/>
+                <a:cs typeface="Consolas" pitchFamily="34" charset="-120"/>
+              </a:rPr>
+              <a:t>icepak.py</a:t>
+            </a:r>
+            <a:endParaRPr lang="en-US" sz="950" dirty="0"/>
+          </a:p>
+        </p:txBody>
+      </p:sp>
+      <p:sp>
+        <p:nvSpPr>
+          <p:cNvPr id="37" name="Text 35"/>
+          <p:cNvSpPr txBox="1"/>
+          <p:nvPr/>
+        </p:nvSpPr>
+        <p:spPr>
+          <a:xfrm>
+            <a:off x="6428232" y="3401568"/>
+            <a:ext cx="2075688" cy="457200"/>
+          </a:xfrm>
+          <a:prstGeom prst="rect">
+            <a:avLst/>
+          </a:prstGeom>
+          <a:noFill/>
+          <a:ln/>
+        </p:spPr>
+        <p:txBody>
+          <a:bodyPr wrap="square" lIns="0" tIns="0" rIns="0" bIns="0" rtlCol="0" anchor="ctr"/>
+          <a:lstStyle/>
+          <a:p>
+            <a:pPr indent="0" marL="0">
+              <a:lnSpc>
+                <a:spcPct val="115000"/>
+              </a:lnSpc>
+              <a:buNone/>
+            </a:pPr>
+            <a:r>
+              <a:rPr lang="en-US" sz="880" dirty="0">
+                <a:solidFill>
+                  <a:srgbClr val="1C2733"/>
+                </a:solidFill>
+                <a:latin typeface="Malgun Gothic" pitchFamily="34" charset="0"/>
+                <a:ea typeface="Malgun Gothic" pitchFamily="34" charset="-122"/>
+                <a:cs typeface="Malgun Gothic" pitchFamily="34" charset="-120"/>
+              </a:rPr>
+              <a:t>해석 모델 구성 → 해석</a:t>
+            </a:r>
+            <a:endParaRPr lang="en-US" sz="880" dirty="0"/>
+          </a:p>
+          <a:p>
+            <a:pPr indent="0" marL="0">
+              <a:lnSpc>
+                <a:spcPct val="115000"/>
+              </a:lnSpc>
+              <a:buNone/>
+            </a:pPr>
+            <a:r>
+              <a:rPr lang="en-US" sz="880" dirty="0">
+                <a:solidFill>
+                  <a:srgbClr val="1C2733"/>
+                </a:solidFill>
+                <a:latin typeface="Malgun Gothic" pitchFamily="34" charset="0"/>
+                <a:ea typeface="Malgun Gothic" pitchFamily="34" charset="-122"/>
+                <a:cs typeface="Malgun Gothic" pitchFamily="34" charset="-120"/>
+              </a:rPr>
+              <a:t>결과 추출</a:t>
+            </a:r>
+            <a:endParaRPr lang="en-US" sz="880" dirty="0"/>
+          </a:p>
+        </p:txBody>
+      </p:sp>
+      <p:sp>
+        <p:nvSpPr>
+          <p:cNvPr id="38" name="Shape 36"/>
+          <p:cNvSpPr/>
+          <p:nvPr/>
+        </p:nvSpPr>
+        <p:spPr>
+          <a:xfrm>
+            <a:off x="8677656" y="3291840"/>
+            <a:ext cx="320040" cy="0"/>
+          </a:xfrm>
+          <a:prstGeom prst="line">
+            <a:avLst/>
+          </a:prstGeom>
+          <a:noFill/>
+          <a:ln w="19050">
+            <a:solidFill>
+              <a:srgbClr val="00A3C4"/>
+            </a:solidFill>
+            <a:prstDash val="solid"/>
+            <a:tailEnd type="triangle"/>
+          </a:ln>
+        </p:spPr>
+      </p:sp>
+      <p:sp>
+        <p:nvSpPr>
+          <p:cNvPr id="39" name="Text 37"/>
+          <p:cNvSpPr txBox="1"/>
+          <p:nvPr/>
+        </p:nvSpPr>
+        <p:spPr>
+          <a:xfrm>
+            <a:off x="8540496" y="3017520"/>
+            <a:ext cx="594360" cy="219456"/>
+          </a:xfrm>
+          <a:prstGeom prst="rect">
+            <a:avLst/>
+          </a:prstGeom>
+          <a:noFill/>
+          <a:ln/>
+        </p:spPr>
+        <p:txBody>
+          <a:bodyPr wrap="square" lIns="0" tIns="0" rIns="0" bIns="0" rtlCol="0" anchor="ctr"/>
+          <a:lstStyle/>
+          <a:p>
+            <a:pPr algn="ctr" indent="0" marL="0">
+              <a:buNone/>
+            </a:pPr>
+            <a:r>
+              <a:rPr lang="en-US" sz="850" b="1" dirty="0">
+                <a:solidFill>
+                  <a:srgbClr val="0088A6"/>
+                </a:solidFill>
+                <a:latin typeface="Malgun Gothic" pitchFamily="34" charset="0"/>
+                <a:ea typeface="Malgun Gothic" pitchFamily="34" charset="-122"/>
+                <a:cs typeface="Malgun Gothic" pitchFamily="34" charset="-120"/>
+              </a:rPr>
+              <a:t>CSV</a:t>
+            </a:r>
+            <a:endParaRPr lang="en-US" sz="850" dirty="0"/>
+          </a:p>
+        </p:txBody>
+      </p:sp>
+      <p:sp>
+        <p:nvSpPr>
+          <p:cNvPr id="40" name="Shape 38"/>
+          <p:cNvSpPr/>
+          <p:nvPr/>
+        </p:nvSpPr>
+        <p:spPr>
+          <a:xfrm>
+            <a:off x="10209276" y="2359152"/>
+            <a:ext cx="0" cy="310896"/>
+          </a:xfrm>
+          <a:prstGeom prst="line">
+            <a:avLst/>
+          </a:prstGeom>
+          <a:noFill/>
+          <a:ln w="12700">
+            <a:solidFill>
+              <a:srgbClr val="9FB0C6"/>
+            </a:solidFill>
+            <a:prstDash val="solid"/>
+            <a:tailEnd type="triangle"/>
+          </a:ln>
+        </p:spPr>
+      </p:sp>
+      <p:sp>
+        <p:nvSpPr>
+          <p:cNvPr id="41" name="Shape 39"/>
+          <p:cNvSpPr/>
+          <p:nvPr/>
+        </p:nvSpPr>
+        <p:spPr>
+          <a:xfrm>
+            <a:off x="9043416" y="2670048"/>
+            <a:ext cx="2331720" cy="1243584"/>
+          </a:xfrm>
+          <a:prstGeom prst="roundRect">
+            <a:avLst>
+              <a:gd name="adj" fmla="val 5147"/>
+            </a:avLst>
+          </a:prstGeom>
+          <a:solidFill>
+            <a:srgbClr val="FFFFFF"/>
+          </a:solidFill>
+          <a:ln w="15875">
+            <a:solidFill>
+              <a:srgbClr val="00A3C4"/>
+            </a:solidFill>
+            <a:prstDash val="solid"/>
+          </a:ln>
+          <a:effectLst>
+            <a:outerShdw sx="100000" sy="100000" kx="0" ky="0" algn="bl" rotWithShape="0" blurRad="101600" dist="12700" dir="5400000">
+              <a:srgbClr val="9AA8BC">
+                <a:alpha val="18000"/>
+              </a:srgbClr>
+            </a:outerShdw>
+          </a:effectLst>
+        </p:spPr>
+      </p:sp>
+      <p:sp>
+        <p:nvSpPr>
+          <p:cNvPr id="42" name="Shape 40"/>
+          <p:cNvSpPr/>
+          <p:nvPr/>
+        </p:nvSpPr>
+        <p:spPr>
+          <a:xfrm>
+            <a:off x="9171432" y="2798064"/>
+            <a:ext cx="274320" cy="274320"/>
+          </a:xfrm>
+          <a:prstGeom prst="ellipse">
+            <a:avLst/>
+          </a:prstGeom>
+          <a:solidFill>
+            <a:srgbClr val="00A3C4"/>
+          </a:solidFill>
+          <a:ln w="12700">
+            <a:solidFill>
+              <a:srgbClr val="00A3C4"/>
+            </a:solidFill>
+            <a:prstDash val="solid"/>
+          </a:ln>
+        </p:spPr>
+      </p:sp>
+      <p:sp>
+        <p:nvSpPr>
+          <p:cNvPr id="43" name="Text 41"/>
+          <p:cNvSpPr txBox="1"/>
+          <p:nvPr/>
+        </p:nvSpPr>
+        <p:spPr>
+          <a:xfrm>
+            <a:off x="9171432" y="2798064"/>
+            <a:ext cx="274320" cy="274320"/>
+          </a:xfrm>
+          <a:prstGeom prst="rect">
+            <a:avLst/>
+          </a:prstGeom>
+          <a:noFill/>
+          <a:ln/>
+        </p:spPr>
+        <p:txBody>
+          <a:bodyPr wrap="square" lIns="0" tIns="0" rIns="0" bIns="0" rtlCol="0" anchor="ctr"/>
+          <a:lstStyle/>
+          <a:p>
+            <a:pPr algn="ctr" indent="0" marL="0">
+              <a:buNone/>
+            </a:pPr>
+            <a:r>
+              <a:rPr lang="en-US" sz="950" b="1" dirty="0">
+                <a:solidFill>
+                  <a:srgbClr val="FFFFFF"/>
+                </a:solidFill>
+                <a:latin typeface="Malgun Gothic" pitchFamily="34" charset="0"/>
+                <a:ea typeface="Malgun Gothic" pitchFamily="34" charset="-122"/>
+                <a:cs typeface="Malgun Gothic" pitchFamily="34" charset="-120"/>
+              </a:rPr>
+              <a:t>4</a:t>
+            </a:r>
+            <a:endParaRPr lang="en-US" sz="950" dirty="0"/>
+          </a:p>
+        </p:txBody>
+      </p:sp>
+      <p:sp>
+        <p:nvSpPr>
+          <p:cNvPr id="44" name="Text 42"/>
+          <p:cNvSpPr txBox="1"/>
+          <p:nvPr/>
+        </p:nvSpPr>
+        <p:spPr>
+          <a:xfrm>
+            <a:off x="9518904" y="2779776"/>
+            <a:ext cx="1783080" cy="310896"/>
+          </a:xfrm>
+          <a:prstGeom prst="rect">
+            <a:avLst/>
+          </a:prstGeom>
+          <a:noFill/>
+          <a:ln/>
+        </p:spPr>
+        <p:txBody>
+          <a:bodyPr wrap="square" lIns="0" tIns="0" rIns="0" bIns="0" rtlCol="0" anchor="ctr"/>
+          <a:lstStyle/>
+          <a:p>
+            <a:pPr indent="0" marL="0">
+              <a:buNone/>
+            </a:pPr>
+            <a:r>
+              <a:rPr lang="en-US" sz="1100" b="1" dirty="0">
+                <a:solidFill>
+                  <a:srgbClr val="16305B"/>
+                </a:solidFill>
+                <a:latin typeface="Malgun Gothic" pitchFamily="34" charset="0"/>
+                <a:ea typeface="Malgun Gothic" pitchFamily="34" charset="-122"/>
+                <a:cs typeface="Malgun Gothic" pitchFamily="34" charset="-120"/>
+              </a:rPr>
+              <a:t>결과 저장</a:t>
+            </a:r>
+            <a:endParaRPr lang="en-US" sz="1100" dirty="0"/>
+          </a:p>
+        </p:txBody>
+      </p:sp>
+      <p:sp>
+        <p:nvSpPr>
+          <p:cNvPr id="45" name="Text 43"/>
+          <p:cNvSpPr txBox="1"/>
+          <p:nvPr/>
+        </p:nvSpPr>
+        <p:spPr>
+          <a:xfrm>
+            <a:off x="9171432" y="3145536"/>
+            <a:ext cx="2075688" cy="237744"/>
+          </a:xfrm>
+          <a:prstGeom prst="rect">
+            <a:avLst/>
+          </a:prstGeom>
+          <a:noFill/>
+          <a:ln/>
+        </p:spPr>
+        <p:txBody>
+          <a:bodyPr wrap="square" lIns="0" tIns="0" rIns="0" bIns="0" rtlCol="0" anchor="ctr"/>
+          <a:lstStyle/>
+          <a:p>
+            <a:pPr indent="0" marL="0">
+              <a:buNone/>
+            </a:pPr>
+            <a:r>
+              <a:rPr lang="en-US" sz="950" b="1" dirty="0">
+                <a:solidFill>
+                  <a:srgbClr val="0088A6"/>
+                </a:solidFill>
+                <a:latin typeface="Consolas" pitchFamily="34" charset="0"/>
+                <a:ea typeface="Consolas" pitchFamily="34" charset="-122"/>
+                <a:cs typeface="Consolas" pitchFamily="34" charset="-120"/>
+              </a:rPr>
+              <a:t>result_parser.py</a:t>
+            </a:r>
+            <a:endParaRPr lang="en-US" sz="950" dirty="0"/>
+          </a:p>
+        </p:txBody>
+      </p:sp>
+      <p:sp>
+        <p:nvSpPr>
+          <p:cNvPr id="46" name="Text 44"/>
+          <p:cNvSpPr txBox="1"/>
+          <p:nvPr/>
+        </p:nvSpPr>
+        <p:spPr>
+          <a:xfrm>
+            <a:off x="9171432" y="3401568"/>
+            <a:ext cx="2075688" cy="457200"/>
+          </a:xfrm>
+          <a:prstGeom prst="rect">
+            <a:avLst/>
+          </a:prstGeom>
+          <a:noFill/>
+          <a:ln/>
+        </p:spPr>
+        <p:txBody>
+          <a:bodyPr wrap="square" lIns="0" tIns="0" rIns="0" bIns="0" rtlCol="0" anchor="ctr"/>
+          <a:lstStyle/>
+          <a:p>
+            <a:pPr indent="0" marL="0">
+              <a:lnSpc>
+                <a:spcPct val="115000"/>
+              </a:lnSpc>
+              <a:buNone/>
+            </a:pPr>
+            <a:r>
+              <a:rPr lang="en-US" sz="880" dirty="0">
+                <a:solidFill>
+                  <a:srgbClr val="1C2733"/>
+                </a:solidFill>
+                <a:latin typeface="Malgun Gothic" pitchFamily="34" charset="0"/>
+                <a:ea typeface="Malgun Gothic" pitchFamily="34" charset="-122"/>
+                <a:cs typeface="Malgun Gothic" pitchFamily="34" charset="-120"/>
+              </a:rPr>
+              <a:t>차압 · 온도 · 유량 · 중량 산출</a:t>
+            </a:r>
+            <a:endParaRPr lang="en-US" sz="880" dirty="0"/>
+          </a:p>
+          <a:p>
+            <a:pPr indent="0" marL="0">
+              <a:lnSpc>
+                <a:spcPct val="115000"/>
+              </a:lnSpc>
+              <a:buNone/>
+            </a:pPr>
+            <a:r>
+              <a:rPr lang="en-US" sz="880" dirty="0">
+                <a:solidFill>
+                  <a:srgbClr val="1C2733"/>
+                </a:solidFill>
+                <a:latin typeface="Malgun Gothic" pitchFamily="34" charset="0"/>
+                <a:ea typeface="Malgun Gothic" pitchFamily="34" charset="-122"/>
+                <a:cs typeface="Malgun Gothic" pitchFamily="34" charset="-120"/>
+              </a:rPr>
+              <a:t>결과 누적 저장</a:t>
+            </a:r>
+            <a:endParaRPr lang="en-US" sz="880" dirty="0"/>
+          </a:p>
+        </p:txBody>
+      </p:sp>
+      <p:sp>
+        <p:nvSpPr>
+          <p:cNvPr id="47" name="Shape 45"/>
+          <p:cNvSpPr/>
+          <p:nvPr/>
+        </p:nvSpPr>
+        <p:spPr>
+          <a:xfrm>
+            <a:off x="1979676" y="3913632"/>
+            <a:ext cx="0" cy="274320"/>
+          </a:xfrm>
+          <a:prstGeom prst="line">
+            <a:avLst/>
+          </a:prstGeom>
+          <a:noFill/>
+          <a:ln w="12700">
+            <a:solidFill>
+              <a:srgbClr val="C3CDDA"/>
+            </a:solidFill>
+            <a:prstDash val="dash"/>
+            <a:tailEnd type="triangle"/>
+          </a:ln>
+        </p:spPr>
+      </p:sp>
+      <p:sp>
+        <p:nvSpPr>
+          <p:cNvPr id="48" name="Shape 46"/>
+          <p:cNvSpPr/>
+          <p:nvPr/>
+        </p:nvSpPr>
+        <p:spPr>
+          <a:xfrm>
+            <a:off x="996696" y="4187952"/>
+            <a:ext cx="1965960" cy="420624"/>
+          </a:xfrm>
+          <a:prstGeom prst="roundRect">
+            <a:avLst>
+              <a:gd name="adj" fmla="val 17391"/>
+            </a:avLst>
+          </a:prstGeom>
+          <a:solidFill>
+            <a:srgbClr val="F7F9FC"/>
+          </a:solidFill>
+          <a:ln w="9525">
+            <a:solidFill>
+              <a:srgbClr val="DDE3EB"/>
+            </a:solidFill>
+            <a:prstDash val="dash"/>
+          </a:ln>
+        </p:spPr>
+      </p:sp>
+      <p:sp>
+        <p:nvSpPr>
+          <p:cNvPr id="49" name="Text 47"/>
+          <p:cNvSpPr txBox="1"/>
+          <p:nvPr/>
+        </p:nvSpPr>
+        <p:spPr>
+          <a:xfrm>
+            <a:off x="996696" y="4187952"/>
+            <a:ext cx="1965960" cy="420624"/>
+          </a:xfrm>
+          <a:prstGeom prst="rect">
+            <a:avLst/>
+          </a:prstGeom>
+          <a:noFill/>
+          <a:ln/>
+        </p:spPr>
+        <p:txBody>
+          <a:bodyPr wrap="square" lIns="0" tIns="0" rIns="0" bIns="0" rtlCol="0" anchor="ctr"/>
+          <a:lstStyle/>
+          <a:p>
+            <a:pPr algn="ctr" indent="0" marL="0">
+              <a:buNone/>
+            </a:pPr>
+            <a:r>
+              <a:rPr lang="en-US" sz="950" b="1" dirty="0">
+                <a:solidFill>
+                  <a:srgbClr val="16305B"/>
+                </a:solidFill>
+                <a:latin typeface="Malgun Gothic" pitchFamily="34" charset="0"/>
+                <a:ea typeface="Malgun Gothic" pitchFamily="34" charset="-122"/>
+                <a:cs typeface="Malgun Gothic" pitchFamily="34" charset="-120"/>
+              </a:rPr>
+              <a:t>초기 실험점 90개</a:t>
+            </a:r>
+            <a:endParaRPr lang="en-US" sz="950" dirty="0"/>
+          </a:p>
+        </p:txBody>
+      </p:sp>
+      <p:sp>
+        <p:nvSpPr>
+          <p:cNvPr id="50" name="Shape 48"/>
+          <p:cNvSpPr/>
+          <p:nvPr/>
+        </p:nvSpPr>
+        <p:spPr>
+          <a:xfrm>
+            <a:off x="4722876" y="3913632"/>
+            <a:ext cx="0" cy="274320"/>
+          </a:xfrm>
+          <a:prstGeom prst="line">
+            <a:avLst/>
+          </a:prstGeom>
+          <a:noFill/>
+          <a:ln w="12700">
+            <a:solidFill>
+              <a:srgbClr val="16305B"/>
+            </a:solidFill>
+            <a:prstDash val="solid"/>
+            <a:headEnd type="triangle"/>
+            <a:tailEnd type="triangle"/>
+          </a:ln>
+        </p:spPr>
+      </p:sp>
+      <p:sp>
+        <p:nvSpPr>
+          <p:cNvPr id="51" name="Text 49"/>
+          <p:cNvSpPr txBox="1"/>
+          <p:nvPr/>
+        </p:nvSpPr>
+        <p:spPr>
+          <a:xfrm>
+            <a:off x="4796028" y="3931920"/>
+            <a:ext cx="1097280" cy="237744"/>
+          </a:xfrm>
+          <a:prstGeom prst="rect">
+            <a:avLst/>
+          </a:prstGeom>
+          <a:noFill/>
+          <a:ln/>
+        </p:spPr>
+        <p:txBody>
+          <a:bodyPr wrap="square" lIns="0" tIns="0" rIns="0" bIns="0" rtlCol="0" anchor="ctr"/>
+          <a:lstStyle/>
+          <a:p>
+            <a:pPr indent="0" marL="0">
+              <a:buNone/>
+            </a:pPr>
+            <a:r>
+              <a:rPr lang="en-US" sz="800" dirty="0">
+                <a:solidFill>
+                  <a:srgbClr val="6B7A8F"/>
+                </a:solidFill>
+                <a:latin typeface="Consolas" pitchFamily="34" charset="0"/>
+                <a:ea typeface="Consolas" pitchFamily="34" charset="-122"/>
+                <a:cs typeface="Consolas" pitchFamily="34" charset="-120"/>
+              </a:rPr>
+              <a:t>COM API</a:t>
+            </a:r>
+            <a:endParaRPr lang="en-US" sz="800" dirty="0"/>
+          </a:p>
+        </p:txBody>
+      </p:sp>
+      <p:sp>
+        <p:nvSpPr>
+          <p:cNvPr id="52" name="Shape 50"/>
+          <p:cNvSpPr/>
+          <p:nvPr/>
+        </p:nvSpPr>
+        <p:spPr>
+          <a:xfrm>
+            <a:off x="3739896" y="4187952"/>
+            <a:ext cx="1965960" cy="420624"/>
+          </a:xfrm>
+          <a:prstGeom prst="roundRect">
+            <a:avLst>
+              <a:gd name="adj" fmla="val 17391"/>
+            </a:avLst>
+          </a:prstGeom>
+          <a:solidFill>
+            <a:srgbClr val="E4EAF2"/>
+          </a:solidFill>
+          <a:ln w="9525">
+            <a:solidFill>
+              <a:srgbClr val="B9C7D8"/>
+            </a:solidFill>
+            <a:prstDash val="solid"/>
+          </a:ln>
+        </p:spPr>
+      </p:sp>
+      <p:sp>
+        <p:nvSpPr>
+          <p:cNvPr id="53" name="Text 51"/>
+          <p:cNvSpPr txBox="1"/>
+          <p:nvPr/>
+        </p:nvSpPr>
+        <p:spPr>
+          <a:xfrm>
+            <a:off x="3739896" y="4187952"/>
+            <a:ext cx="1965960" cy="420624"/>
+          </a:xfrm>
+          <a:prstGeom prst="rect">
+            <a:avLst/>
+          </a:prstGeom>
+          <a:noFill/>
+          <a:ln/>
+        </p:spPr>
+        <p:txBody>
+          <a:bodyPr wrap="square" lIns="0" tIns="0" rIns="0" bIns="0" rtlCol="0" anchor="ctr"/>
+          <a:lstStyle/>
+          <a:p>
+            <a:pPr algn="ctr" indent="0" marL="0">
+              <a:buNone/>
+            </a:pPr>
+            <a:r>
+              <a:rPr lang="en-US" sz="950" b="1" dirty="0">
+                <a:solidFill>
+                  <a:srgbClr val="16305B"/>
+                </a:solidFill>
+                <a:latin typeface="Malgun Gothic" pitchFamily="34" charset="0"/>
+                <a:ea typeface="Malgun Gothic" pitchFamily="34" charset="-122"/>
+                <a:cs typeface="Malgun Gothic" pitchFamily="34" charset="-120"/>
+              </a:rPr>
+              <a:t>SolidWorks</a:t>
+            </a:r>
+            <a:endParaRPr lang="en-US" sz="950" dirty="0"/>
+          </a:p>
+        </p:txBody>
+      </p:sp>
+      <p:sp>
+        <p:nvSpPr>
+          <p:cNvPr id="54" name="Shape 52"/>
+          <p:cNvSpPr/>
+          <p:nvPr/>
+        </p:nvSpPr>
+        <p:spPr>
+          <a:xfrm>
+            <a:off x="7466076" y="3913632"/>
+            <a:ext cx="0" cy="274320"/>
+          </a:xfrm>
+          <a:prstGeom prst="line">
+            <a:avLst/>
+          </a:prstGeom>
+          <a:noFill/>
+          <a:ln w="12700">
+            <a:solidFill>
+              <a:srgbClr val="16305B"/>
+            </a:solidFill>
+            <a:prstDash val="solid"/>
+            <a:headEnd type="triangle"/>
+            <a:tailEnd type="triangle"/>
+          </a:ln>
+        </p:spPr>
+      </p:sp>
+      <p:sp>
+        <p:nvSpPr>
+          <p:cNvPr id="55" name="Text 53"/>
+          <p:cNvSpPr txBox="1"/>
+          <p:nvPr/>
+        </p:nvSpPr>
+        <p:spPr>
+          <a:xfrm>
+            <a:off x="7539228" y="3931920"/>
+            <a:ext cx="1097280" cy="237744"/>
+          </a:xfrm>
+          <a:prstGeom prst="rect">
+            <a:avLst/>
+          </a:prstGeom>
+          <a:noFill/>
+          <a:ln/>
+        </p:spPr>
+        <p:txBody>
+          <a:bodyPr wrap="square" lIns="0" tIns="0" rIns="0" bIns="0" rtlCol="0" anchor="ctr"/>
+          <a:lstStyle/>
+          <a:p>
+            <a:pPr indent="0" marL="0">
+              <a:buNone/>
+            </a:pPr>
+            <a:r>
+              <a:rPr lang="en-US" sz="800" dirty="0">
+                <a:solidFill>
+                  <a:srgbClr val="6B7A8F"/>
+                </a:solidFill>
+                <a:latin typeface="Consolas" pitchFamily="34" charset="0"/>
+                <a:ea typeface="Consolas" pitchFamily="34" charset="-122"/>
+                <a:cs typeface="Consolas" pitchFamily="34" charset="-120"/>
+              </a:rPr>
+              <a:t>PyAEDT</a:t>
+            </a:r>
+            <a:endParaRPr lang="en-US" sz="800" dirty="0"/>
+          </a:p>
+        </p:txBody>
+      </p:sp>
+      <p:sp>
+        <p:nvSpPr>
+          <p:cNvPr id="56" name="Shape 54"/>
+          <p:cNvSpPr/>
+          <p:nvPr/>
+        </p:nvSpPr>
+        <p:spPr>
+          <a:xfrm>
+            <a:off x="6483096" y="4187952"/>
+            <a:ext cx="1965960" cy="420624"/>
+          </a:xfrm>
+          <a:prstGeom prst="roundRect">
+            <a:avLst>
+              <a:gd name="adj" fmla="val 17391"/>
+            </a:avLst>
+          </a:prstGeom>
+          <a:solidFill>
+            <a:srgbClr val="E4EAF2"/>
+          </a:solidFill>
+          <a:ln w="9525">
+            <a:solidFill>
+              <a:srgbClr val="B9C7D8"/>
+            </a:solidFill>
+            <a:prstDash val="solid"/>
+          </a:ln>
+        </p:spPr>
+      </p:sp>
+      <p:sp>
+        <p:nvSpPr>
+          <p:cNvPr id="57" name="Text 55"/>
+          <p:cNvSpPr txBox="1"/>
+          <p:nvPr/>
+        </p:nvSpPr>
+        <p:spPr>
+          <a:xfrm>
+            <a:off x="6483096" y="4187952"/>
+            <a:ext cx="1965960" cy="420624"/>
+          </a:xfrm>
+          <a:prstGeom prst="rect">
+            <a:avLst/>
+          </a:prstGeom>
+          <a:noFill/>
+          <a:ln/>
+        </p:spPr>
+        <p:txBody>
+          <a:bodyPr wrap="square" lIns="0" tIns="0" rIns="0" bIns="0" rtlCol="0" anchor="ctr"/>
+          <a:lstStyle/>
+          <a:p>
+            <a:pPr algn="ctr" indent="0" marL="0">
+              <a:buNone/>
+            </a:pPr>
+            <a:r>
+              <a:rPr lang="en-US" sz="950" b="1" dirty="0">
+                <a:solidFill>
+                  <a:srgbClr val="16305B"/>
+                </a:solidFill>
+                <a:latin typeface="Malgun Gothic" pitchFamily="34" charset="0"/>
+                <a:ea typeface="Malgun Gothic" pitchFamily="34" charset="-122"/>
+                <a:cs typeface="Malgun Gothic" pitchFamily="34" charset="-120"/>
+              </a:rPr>
+              <a:t>Ansys Icepak</a:t>
+            </a:r>
+            <a:endParaRPr lang="en-US" sz="950" dirty="0"/>
+          </a:p>
+        </p:txBody>
+      </p:sp>
+      <p:sp>
+        <p:nvSpPr>
+          <p:cNvPr id="58" name="Shape 56"/>
+          <p:cNvSpPr/>
+          <p:nvPr/>
+        </p:nvSpPr>
+        <p:spPr>
+          <a:xfrm>
+            <a:off x="10209276" y="3913632"/>
+            <a:ext cx="0" cy="274320"/>
+          </a:xfrm>
+          <a:prstGeom prst="line">
+            <a:avLst/>
+          </a:prstGeom>
+          <a:noFill/>
+          <a:ln w="12700">
+            <a:solidFill>
+              <a:srgbClr val="C3CDDA"/>
+            </a:solidFill>
+            <a:prstDash val="dash"/>
+            <a:tailEnd type="triangle"/>
+          </a:ln>
+        </p:spPr>
+      </p:sp>
+      <p:sp>
+        <p:nvSpPr>
+          <p:cNvPr id="59" name="Shape 57"/>
+          <p:cNvSpPr/>
+          <p:nvPr/>
+        </p:nvSpPr>
+        <p:spPr>
+          <a:xfrm>
+            <a:off x="9226296" y="4187952"/>
+            <a:ext cx="1965960" cy="420624"/>
+          </a:xfrm>
+          <a:prstGeom prst="roundRect">
+            <a:avLst>
+              <a:gd name="adj" fmla="val 17391"/>
+            </a:avLst>
+          </a:prstGeom>
+          <a:solidFill>
+            <a:srgbClr val="E8F6FA"/>
+          </a:solidFill>
+          <a:ln w="9525">
+            <a:solidFill>
+              <a:srgbClr val="00A3C4"/>
+            </a:solidFill>
+            <a:prstDash val="dash"/>
+          </a:ln>
+        </p:spPr>
+      </p:sp>
+      <p:sp>
+        <p:nvSpPr>
+          <p:cNvPr id="60" name="Text 58"/>
+          <p:cNvSpPr txBox="1"/>
+          <p:nvPr/>
+        </p:nvSpPr>
+        <p:spPr>
+          <a:xfrm>
+            <a:off x="9226296" y="4187952"/>
+            <a:ext cx="1965960" cy="420624"/>
+          </a:xfrm>
+          <a:prstGeom prst="rect">
+            <a:avLst/>
+          </a:prstGeom>
+          <a:noFill/>
+          <a:ln/>
+        </p:spPr>
+        <p:txBody>
+          <a:bodyPr wrap="square" lIns="0" tIns="0" rIns="0" bIns="0" rtlCol="0" anchor="ctr"/>
+          <a:lstStyle/>
+          <a:p>
+            <a:pPr algn="ctr" indent="0" marL="0">
+              <a:buNone/>
+            </a:pPr>
+            <a:r>
+              <a:rPr lang="en-US" sz="950" b="1" dirty="0">
+                <a:solidFill>
+                  <a:srgbClr val="0088A6"/>
+                </a:solidFill>
+                <a:latin typeface="Malgun Gothic" pitchFamily="34" charset="0"/>
+                <a:ea typeface="Malgun Gothic" pitchFamily="34" charset="-122"/>
+                <a:cs typeface="Malgun Gothic" pitchFamily="34" charset="-120"/>
+              </a:rPr>
+              <a:t>결과 데이터셋 (CSV 누적)</a:t>
+            </a:r>
+            <a:endParaRPr lang="en-US" sz="950" dirty="0"/>
+          </a:p>
+        </p:txBody>
+      </p:sp>
+      <p:sp>
+        <p:nvSpPr>
+          <p:cNvPr id="61" name="Shape 59"/>
+          <p:cNvSpPr/>
+          <p:nvPr/>
+        </p:nvSpPr>
+        <p:spPr>
+          <a:xfrm>
+            <a:off x="813816" y="4782312"/>
+            <a:ext cx="10561320" cy="0"/>
+          </a:xfrm>
+          <a:prstGeom prst="line">
+            <a:avLst/>
+          </a:prstGeom>
+          <a:noFill/>
+          <a:ln w="9525">
+            <a:solidFill>
+              <a:srgbClr val="DDE3EB"/>
+            </a:solidFill>
+            <a:prstDash val="solid"/>
+          </a:ln>
+        </p:spPr>
+      </p:sp>
+      <p:sp>
+        <p:nvSpPr>
+          <p:cNvPr id="62" name="Text 60"/>
+          <p:cNvSpPr txBox="1"/>
+          <p:nvPr/>
+        </p:nvSpPr>
+        <p:spPr>
+          <a:xfrm>
+            <a:off x="813816" y="4873752"/>
+            <a:ext cx="10561320" cy="292608"/>
+          </a:xfrm>
+          <a:prstGeom prst="rect">
+            <a:avLst/>
+          </a:prstGeom>
+          <a:noFill/>
+          <a:ln/>
+        </p:spPr>
+        <p:txBody>
+          <a:bodyPr wrap="square" lIns="0" tIns="0" rIns="0" bIns="0" rtlCol="0" anchor="ctr"/>
+          <a:lstStyle/>
+          <a:p>
+            <a:pPr indent="0" marL="0">
+              <a:buNone/>
+            </a:pPr>
+            <a:r>
+              <a:rPr lang="en-US" sz="950" b="1" dirty="0">
+                <a:solidFill>
+                  <a:srgbClr val="16305B"/>
+                </a:solidFill>
+                <a:latin typeface="Consolas" pitchFamily="34" charset="0"/>
+                <a:ea typeface="Consolas" pitchFamily="34" charset="-122"/>
+                <a:cs typeface="Consolas" pitchFamily="34" charset="-120"/>
+              </a:rPr>
+              <a:t>paths.py</a:t>
+            </a:r>
+            <a:pPr indent="0" marL="0">
+              <a:buNone/>
+            </a:pPr>
+            <a:r>
+              <a:rPr lang="en-US" sz="950" dirty="0">
+                <a:solidFill>
+                  <a:srgbClr val="6B7A8F"/>
+                </a:solidFill>
+                <a:latin typeface="Malgun Gothic" pitchFamily="34" charset="0"/>
+                <a:ea typeface="Malgun Gothic" pitchFamily="34" charset="-122"/>
+                <a:cs typeface="Malgun Gothic" pitchFamily="34" charset="-120"/>
+              </a:rPr>
+              <a:t>   작업폴더 · 모델 파일 · 결과 파일 경로를 한 곳에서 관리 — 모든 모듈이 참조</a:t>
+            </a:r>
+            <a:endParaRPr lang="en-US" sz="950" dirty="0"/>
+          </a:p>
+        </p:txBody>
+      </p:sp>
+      <p:sp>
+        <p:nvSpPr>
+          <p:cNvPr id="63" name="Shape 61"/>
+          <p:cNvSpPr/>
+          <p:nvPr/>
+        </p:nvSpPr>
+        <p:spPr>
+          <a:xfrm>
+            <a:off x="502920" y="5541264"/>
+            <a:ext cx="11183112" cy="841248"/>
+          </a:xfrm>
+          <a:prstGeom prst="roundRect">
+            <a:avLst>
+              <a:gd name="adj" fmla="val 6522"/>
             </a:avLst>
           </a:prstGeom>
           <a:solidFill>
@@ -22341,14 +23239,14 @@
       </p:sp>
       <p:sp>
         <p:nvSpPr>
-          <p:cNvPr id="38" name="Shape 36"/>
+          <p:cNvPr id="64" name="Shape 62"/>
           <p:cNvSpPr/>
           <p:nvPr/>
         </p:nvSpPr>
         <p:spPr>
           <a:xfrm>
-            <a:off x="758952" y="3648456"/>
-            <a:ext cx="82296" cy="182880"/>
+            <a:off x="832104" y="5724144"/>
+            <a:ext cx="64008" cy="164592"/>
           </a:xfrm>
           <a:prstGeom prst="rect">
             <a:avLst/>
@@ -22366,14 +23264,14 @@
       </p:sp>
       <p:sp>
         <p:nvSpPr>
-          <p:cNvPr id="39" name="Text 37"/>
-          <p:cNvSpPr txBox="1"/>
-          <p:nvPr/>
-        </p:nvSpPr>
-        <p:spPr>
-          <a:xfrm>
-            <a:off x="923544" y="3557016"/>
-            <a:ext cx="4480560" cy="365760"/>
+          <p:cNvPr id="65" name="Text 63"/>
+          <p:cNvSpPr txBox="1"/>
+          <p:nvPr/>
+        </p:nvSpPr>
+        <p:spPr>
+          <a:xfrm>
+            <a:off x="978408" y="5669280"/>
+            <a:ext cx="3291840" cy="256032"/>
           </a:xfrm>
           <a:prstGeom prst="rect">
             <a:avLst/>
@@ -22389,7 +23287,7 @@
               <a:buNone/>
             </a:pPr>
             <a:r>
-              <a:rPr lang="en-US" sz="1300" b="1" dirty="0">
+              <a:rPr lang="en-US" sz="1050" b="1" dirty="0">
                 <a:solidFill>
                   <a:srgbClr val="16305B"/>
                 </a:solidFill>
@@ -22397,991 +23295,60 @@
                 <a:ea typeface="Malgun Gothic" pitchFamily="34" charset="-122"/>
                 <a:cs typeface="Malgun Gothic" pitchFamily="34" charset="-120"/>
               </a:rPr>
-              <a:t>파일별 역할</a:t>
-            </a:r>
-            <a:endParaRPr lang="en-US" sz="1300" dirty="0"/>
-          </a:p>
-        </p:txBody>
-      </p:sp>
-      <p:graphicFrame>
-        <p:nvGraphicFramePr>
-          <p:cNvPr id="9" name="Table 0"/>
-          <p:cNvGraphicFramePr>
-            <a:graphicFrameLocks noGrp="1"/>
-          </p:cNvGraphicFramePr>
-          <p:nvPr>
-            <p:extLst>
-              <p:ext uri="{D42A27DB-BD31-4B8C-83A1-F6EECF244321}">
-                <p14:modId xmlns:p14="http://schemas.microsoft.com/office/powerpoint/2010/main" val="1579011935"/>
-              </p:ext>
-            </p:extLst>
-          </p:nvPr>
-        </p:nvGraphicFramePr>
-        <p:xfrm>
-          <a:off x="813816" y="3922776"/>
-          <a:ext cx="5257800" cy="914400"/>
-        </p:xfrm>
-        <a:graphic>
-          <a:graphicData uri="http://schemas.openxmlformats.org/drawingml/2006/table">
-            <a:tbl>
-              <a:tblPr/>
-              <a:tblGrid>
-                <a:gridCol w="1371600"/>
-                <a:gridCol w="3886200"/>
-              </a:tblGrid>
-              <a:tr h="274320">
-                <a:tc>
-                  <a:txBody>
-                    <a:bodyPr/>
-                    <a:lstStyle/>
-                    <a:p>
-                      <a:pPr indent="0" marL="0">
-                        <a:buNone/>
-                      </a:pPr>
-                      <a:r>
-                        <a:rPr lang="en-US" sz="950" b="1" dirty="0">
-                          <a:solidFill>
-                            <a:srgbClr val="16305B"/>
-                          </a:solidFill>
-                          <a:latin typeface="Malgun Gothic" pitchFamily="34" charset="0"/>
-                          <a:ea typeface="Malgun Gothic" pitchFamily="34" charset="-122"/>
-                          <a:cs typeface="Malgun Gothic" pitchFamily="34" charset="-120"/>
-                        </a:rPr>
-                        <a:t>파일</a:t>
-                      </a:r>
-                      <a:endParaRPr lang="en-US" sz="950" dirty="0">
-                        <a:latin typeface="Malgun Gothic" charset="0"/>
-                        <a:ea typeface="Malgun Gothic" charset="0"/>
-                        <a:cs typeface="Malgun Gothic" charset="0"/>
-                      </a:endParaRPr>
-                    </a:p>
-                  </a:txBody>
-                  <a:tcPr marL="50800" marR="50800" marT="25400" marB="25400" anchor="ctr">
-                    <a:lnL w="0" cap="flat" cmpd="sng" algn="ctr">
-                      <a:noFill/>
-                    </a:lnL>
-                    <a:lnR w="0" cap="flat" cmpd="sng" algn="ctr">
-                      <a:noFill/>
-                    </a:lnR>
-                    <a:lnT w="0" cap="flat" cmpd="sng" algn="ctr">
-                      <a:noFill/>
-                    </a:lnT>
-                    <a:lnB w="6350" cap="flat" cmpd="sng" algn="ctr">
-                      <a:solidFill>
-                        <a:srgbClr val="DDE3EB"/>
-                      </a:solidFill>
-                      <a:prstDash val="solid"/>
-                      <a:round/>
-                      <a:headEnd type="none" w="med" len="med"/>
-                      <a:tailEnd type="none" w="med" len="med"/>
-                    </a:lnB>
-                    <a:solidFill>
-                      <a:srgbClr val="EEF2F7"/>
-                    </a:solidFill>
-                  </a:tcPr>
-                </a:tc>
-                <a:tc>
-                  <a:txBody>
-                    <a:bodyPr/>
-                    <a:lstStyle/>
-                    <a:p>
-                      <a:pPr indent="0" marL="0">
-                        <a:buNone/>
-                      </a:pPr>
-                      <a:r>
-                        <a:rPr lang="en-US" sz="950" b="1" dirty="0">
-                          <a:solidFill>
-                            <a:srgbClr val="16305B"/>
-                          </a:solidFill>
-                          <a:latin typeface="Malgun Gothic" pitchFamily="34" charset="0"/>
-                          <a:ea typeface="Malgun Gothic" pitchFamily="34" charset="-122"/>
-                          <a:cs typeface="Malgun Gothic" pitchFamily="34" charset="-120"/>
-                        </a:rPr>
-                        <a:t>역할</a:t>
-                      </a:r>
-                      <a:endParaRPr lang="en-US" sz="950" dirty="0">
-                        <a:latin typeface="Malgun Gothic" charset="0"/>
-                        <a:ea typeface="Malgun Gothic" charset="0"/>
-                        <a:cs typeface="Malgun Gothic" charset="0"/>
-                      </a:endParaRPr>
-                    </a:p>
-                  </a:txBody>
-                  <a:tcPr marL="50800" marR="50800" marT="25400" marB="25400" anchor="ctr">
-                    <a:lnL w="0" cap="flat" cmpd="sng" algn="ctr">
-                      <a:noFill/>
-                    </a:lnL>
-                    <a:lnR w="0" cap="flat" cmpd="sng" algn="ctr">
-                      <a:noFill/>
-                    </a:lnR>
-                    <a:lnT w="0" cap="flat" cmpd="sng" algn="ctr">
-                      <a:noFill/>
-                    </a:lnT>
-                    <a:lnB w="6350" cap="flat" cmpd="sng" algn="ctr">
-                      <a:solidFill>
-                        <a:srgbClr val="DDE3EB"/>
-                      </a:solidFill>
-                      <a:prstDash val="solid"/>
-                      <a:round/>
-                      <a:headEnd type="none" w="med" len="med"/>
-                      <a:tailEnd type="none" w="med" len="med"/>
-                    </a:lnB>
-                    <a:solidFill>
-                      <a:srgbClr val="EEF2F7"/>
-                    </a:solidFill>
-                  </a:tcPr>
-                </a:tc>
-              </a:tr>
-              <a:tr h="274320">
-                <a:tc>
-                  <a:txBody>
-                    <a:bodyPr/>
-                    <a:lstStyle/>
-                    <a:p>
-                      <a:pPr indent="0" marL="0">
-                        <a:buNone/>
-                      </a:pPr>
-                      <a:r>
-                        <a:rPr lang="en-US" sz="950" b="1" dirty="0">
-                          <a:solidFill>
-                            <a:srgbClr val="16305B"/>
-                          </a:solidFill>
-                          <a:latin typeface="Consolas" pitchFamily="34" charset="0"/>
-                          <a:ea typeface="Consolas" pitchFamily="34" charset="-122"/>
-                          <a:cs typeface="Consolas" pitchFamily="34" charset="-120"/>
-                        </a:rPr>
-                        <a:t>main.py</a:t>
-                      </a:r>
-                      <a:endParaRPr lang="en-US" sz="950" dirty="0">
-                        <a:latin typeface="Consolas" charset="0"/>
-                        <a:ea typeface="Consolas" charset="0"/>
-                        <a:cs typeface="Consolas" charset="0"/>
-                      </a:endParaRPr>
-                    </a:p>
-                  </a:txBody>
-                  <a:tcPr marL="50800" marR="50800" marT="25400" marB="25400" anchor="ctr">
-                    <a:lnL w="0" cap="flat" cmpd="sng" algn="ctr">
-                      <a:noFill/>
-                    </a:lnL>
-                    <a:lnR w="0" cap="flat" cmpd="sng" algn="ctr">
-                      <a:noFill/>
-                    </a:lnR>
-                    <a:lnT w="0" cap="flat" cmpd="sng" algn="ctr">
-                      <a:noFill/>
-                    </a:lnT>
-                    <a:lnB w="6350" cap="flat" cmpd="sng" algn="ctr">
-                      <a:solidFill>
-                        <a:srgbClr val="DDE3EB"/>
-                      </a:solidFill>
-                      <a:prstDash val="solid"/>
-                      <a:round/>
-                      <a:headEnd type="none" w="med" len="med"/>
-                      <a:tailEnd type="none" w="med" len="med"/>
-                    </a:lnB>
-                  </a:tcPr>
-                </a:tc>
-                <a:tc>
-                  <a:txBody>
-                    <a:bodyPr/>
-                    <a:lstStyle/>
-                    <a:p>
-                      <a:pPr indent="0" marL="0">
-                        <a:buNone/>
-                      </a:pPr>
-                      <a:r>
-                        <a:rPr lang="en-US" sz="950" dirty="0">
-                          <a:solidFill>
-                            <a:srgbClr val="1C2733"/>
-                          </a:solidFill>
-                          <a:latin typeface="Malgun Gothic" pitchFamily="34" charset="0"/>
-                          <a:ea typeface="Malgun Gothic" pitchFamily="34" charset="-122"/>
-                          <a:cs typeface="Malgun Gothic" pitchFamily="34" charset="-120"/>
-                        </a:rPr>
-                        <a:t>실험점 → 형상 → 해석 → 저장 반복, 실패 시 기록 후 다음 점</a:t>
-                      </a:r>
-                      <a:endParaRPr lang="en-US" sz="950" dirty="0">
-                        <a:latin typeface="Malgun Gothic" charset="0"/>
-                        <a:ea typeface="Malgun Gothic" charset="0"/>
-                        <a:cs typeface="Malgun Gothic" charset="0"/>
-                      </a:endParaRPr>
-                    </a:p>
-                  </a:txBody>
-                  <a:tcPr marL="50800" marR="50800" marT="25400" marB="25400" anchor="ctr">
-                    <a:lnL w="0" cap="flat" cmpd="sng" algn="ctr">
-                      <a:noFill/>
-                    </a:lnL>
-                    <a:lnR w="0" cap="flat" cmpd="sng" algn="ctr">
-                      <a:noFill/>
-                    </a:lnR>
-                    <a:lnT w="0" cap="flat" cmpd="sng" algn="ctr">
-                      <a:noFill/>
-                    </a:lnT>
-                    <a:lnB w="6350" cap="flat" cmpd="sng" algn="ctr">
-                      <a:solidFill>
-                        <a:srgbClr val="DDE3EB"/>
-                      </a:solidFill>
-                      <a:prstDash val="solid"/>
-                      <a:round/>
-                      <a:headEnd type="none" w="med" len="med"/>
-                      <a:tailEnd type="none" w="med" len="med"/>
-                    </a:lnB>
-                  </a:tcPr>
-                </a:tc>
-              </a:tr>
-              <a:tr h="274320">
-                <a:tc>
-                  <a:txBody>
-                    <a:bodyPr/>
-                    <a:lstStyle/>
-                    <a:p>
-                      <a:pPr indent="0" marL="0">
-                        <a:buNone/>
-                      </a:pPr>
-                      <a:r>
-                        <a:rPr lang="en-US" sz="950" b="1" dirty="0">
-                          <a:solidFill>
-                            <a:srgbClr val="16305B"/>
-                          </a:solidFill>
-                          <a:latin typeface="Consolas" pitchFamily="34" charset="0"/>
-                          <a:ea typeface="Consolas" pitchFamily="34" charset="-122"/>
-                          <a:cs typeface="Consolas" pitchFamily="34" charset="-120"/>
-                        </a:rPr>
-                        <a:t>OLHD.py</a:t>
-                      </a:r>
-                      <a:endParaRPr lang="en-US" sz="950" dirty="0">
-                        <a:latin typeface="Consolas" charset="0"/>
-                        <a:ea typeface="Consolas" charset="0"/>
-                        <a:cs typeface="Consolas" charset="0"/>
-                      </a:endParaRPr>
-                    </a:p>
-                  </a:txBody>
-                  <a:tcPr marL="50800" marR="50800" marT="25400" marB="25400" anchor="ctr">
-                    <a:lnL w="0" cap="flat" cmpd="sng" algn="ctr">
-                      <a:noFill/>
-                    </a:lnL>
-                    <a:lnR w="0" cap="flat" cmpd="sng" algn="ctr">
-                      <a:noFill/>
-                    </a:lnR>
-                    <a:lnT w="0" cap="flat" cmpd="sng" algn="ctr">
-                      <a:noFill/>
-                    </a:lnT>
-                    <a:lnB w="6350" cap="flat" cmpd="sng" algn="ctr">
-                      <a:solidFill>
-                        <a:srgbClr val="DDE3EB"/>
-                      </a:solidFill>
-                      <a:prstDash val="solid"/>
-                      <a:round/>
-                      <a:headEnd type="none" w="med" len="med"/>
-                      <a:tailEnd type="none" w="med" len="med"/>
-                    </a:lnB>
-                  </a:tcPr>
-                </a:tc>
-                <a:tc>
-                  <a:txBody>
-                    <a:bodyPr/>
-                    <a:lstStyle/>
-                    <a:p>
-                      <a:pPr indent="0" marL="0">
-                        <a:buNone/>
-                      </a:pPr>
-                      <a:r>
-                        <a:rPr lang="en-US" sz="950" dirty="0">
-                          <a:solidFill>
-                            <a:srgbClr val="1C2733"/>
-                          </a:solidFill>
-                          <a:latin typeface="Malgun Gothic" pitchFamily="34" charset="0"/>
-                          <a:ea typeface="Malgun Gothic" pitchFamily="34" charset="-122"/>
-                          <a:cs typeface="Malgun Gothic" pitchFamily="34" charset="-120"/>
-                        </a:rPr>
-                        <a:t>설계변수 정의(단일 위치) · 초기 실험점 90개 생성</a:t>
-                      </a:r>
-                      <a:endParaRPr lang="en-US" sz="950" dirty="0">
-                        <a:latin typeface="Malgun Gothic" charset="0"/>
-                        <a:ea typeface="Malgun Gothic" charset="0"/>
-                        <a:cs typeface="Malgun Gothic" charset="0"/>
-                      </a:endParaRPr>
-                    </a:p>
-                  </a:txBody>
-                  <a:tcPr marL="50800" marR="50800" marT="25400" marB="25400" anchor="ctr">
-                    <a:lnL w="0" cap="flat" cmpd="sng" algn="ctr">
-                      <a:noFill/>
-                    </a:lnL>
-                    <a:lnR w="0" cap="flat" cmpd="sng" algn="ctr">
-                      <a:noFill/>
-                    </a:lnR>
-                    <a:lnT w="0" cap="flat" cmpd="sng" algn="ctr">
-                      <a:noFill/>
-                    </a:lnT>
-                    <a:lnB w="6350" cap="flat" cmpd="sng" algn="ctr">
-                      <a:solidFill>
-                        <a:srgbClr val="DDE3EB"/>
-                      </a:solidFill>
-                      <a:prstDash val="solid"/>
-                      <a:round/>
-                      <a:headEnd type="none" w="med" len="med"/>
-                      <a:tailEnd type="none" w="med" len="med"/>
-                    </a:lnB>
-                  </a:tcPr>
-                </a:tc>
-              </a:tr>
-              <a:tr h="274320">
-                <a:tc>
-                  <a:txBody>
-                    <a:bodyPr/>
-                    <a:lstStyle/>
-                    <a:p>
-                      <a:pPr indent="0" marL="0">
-                        <a:buNone/>
-                      </a:pPr>
-                      <a:r>
-                        <a:rPr lang="en-US" sz="950" b="1" dirty="0">
-                          <a:solidFill>
-                            <a:srgbClr val="16305B"/>
-                          </a:solidFill>
-                          <a:latin typeface="Consolas" pitchFamily="34" charset="0"/>
-                          <a:ea typeface="Consolas" pitchFamily="34" charset="-122"/>
-                          <a:cs typeface="Consolas" pitchFamily="34" charset="-120"/>
-                        </a:rPr>
-                        <a:t>fins.py</a:t>
-                      </a:r>
-                      <a:endParaRPr lang="en-US" sz="950" dirty="0">
-                        <a:latin typeface="Consolas" charset="0"/>
-                        <a:ea typeface="Consolas" charset="0"/>
-                        <a:cs typeface="Consolas" charset="0"/>
-                      </a:endParaRPr>
-                    </a:p>
-                  </a:txBody>
-                  <a:tcPr marL="50800" marR="50800" marT="25400" marB="25400" anchor="ctr">
-                    <a:lnL w="0" cap="flat" cmpd="sng" algn="ctr">
-                      <a:noFill/>
-                    </a:lnL>
-                    <a:lnR w="0" cap="flat" cmpd="sng" algn="ctr">
-                      <a:noFill/>
-                    </a:lnR>
-                    <a:lnT w="0" cap="flat" cmpd="sng" algn="ctr">
-                      <a:noFill/>
-                    </a:lnT>
-                    <a:lnB w="6350" cap="flat" cmpd="sng" algn="ctr">
-                      <a:solidFill>
-                        <a:srgbClr val="DDE3EB"/>
-                      </a:solidFill>
-                      <a:prstDash val="solid"/>
-                      <a:round/>
-                      <a:headEnd type="none" w="med" len="med"/>
-                      <a:tailEnd type="none" w="med" len="med"/>
-                    </a:lnB>
-                  </a:tcPr>
-                </a:tc>
-                <a:tc>
-                  <a:txBody>
-                    <a:bodyPr/>
-                    <a:lstStyle/>
-                    <a:p>
-                      <a:pPr indent="0" marL="0">
-                        <a:buNone/>
-                      </a:pPr>
-                      <a:r>
-                        <a:rPr lang="en-US" sz="950" dirty="0">
-                          <a:solidFill>
-                            <a:srgbClr val="1C2733"/>
-                          </a:solidFill>
-                          <a:latin typeface="Malgun Gothic" pitchFamily="34" charset="0"/>
-                          <a:ea typeface="Malgun Gothic" pitchFamily="34" charset="-122"/>
-                          <a:cs typeface="Malgun Gothic" pitchFamily="34" charset="-120"/>
-                        </a:rPr>
-                        <a:t>핀 두께·개수로 갭 계산, 갭 ≥ 2.5mm 제약 판정</a:t>
-                      </a:r>
-                      <a:endParaRPr lang="en-US" sz="950" dirty="0">
-                        <a:latin typeface="Malgun Gothic" charset="0"/>
-                        <a:ea typeface="Malgun Gothic" charset="0"/>
-                        <a:cs typeface="Malgun Gothic" charset="0"/>
-                      </a:endParaRPr>
-                    </a:p>
-                  </a:txBody>
-                  <a:tcPr marL="50800" marR="50800" marT="25400" marB="25400" anchor="ctr">
-                    <a:lnL w="0" cap="flat" cmpd="sng" algn="ctr">
-                      <a:noFill/>
-                    </a:lnL>
-                    <a:lnR w="0" cap="flat" cmpd="sng" algn="ctr">
-                      <a:noFill/>
-                    </a:lnR>
-                    <a:lnT w="0" cap="flat" cmpd="sng" algn="ctr">
-                      <a:noFill/>
-                    </a:lnT>
-                    <a:lnB w="6350" cap="flat" cmpd="sng" algn="ctr">
-                      <a:solidFill>
-                        <a:srgbClr val="DDE3EB"/>
-                      </a:solidFill>
-                      <a:prstDash val="solid"/>
-                      <a:round/>
-                      <a:headEnd type="none" w="med" len="med"/>
-                      <a:tailEnd type="none" w="med" len="med"/>
-                    </a:lnB>
-                  </a:tcPr>
-                </a:tc>
-              </a:tr>
-              <a:tr h="274320">
-                <a:tc>
-                  <a:txBody>
-                    <a:bodyPr/>
-                    <a:lstStyle/>
-                    <a:p>
-                      <a:pPr indent="0" marL="0">
-                        <a:buNone/>
-                      </a:pPr>
-                      <a:r>
-                        <a:rPr lang="en-US" sz="950" b="1" dirty="0">
-                          <a:solidFill>
-                            <a:srgbClr val="16305B"/>
-                          </a:solidFill>
-                          <a:latin typeface="Consolas" pitchFamily="34" charset="0"/>
-                          <a:ea typeface="Consolas" pitchFamily="34" charset="-122"/>
-                          <a:cs typeface="Consolas" pitchFamily="34" charset="-120"/>
-                        </a:rPr>
-                        <a:t>paths.py</a:t>
-                      </a:r>
-                      <a:endParaRPr lang="en-US" sz="950" dirty="0">
-                        <a:latin typeface="Consolas" charset="0"/>
-                        <a:ea typeface="Consolas" charset="0"/>
-                        <a:cs typeface="Consolas" charset="0"/>
-                      </a:endParaRPr>
-                    </a:p>
-                  </a:txBody>
-                  <a:tcPr marL="50800" marR="50800" marT="25400" marB="25400" anchor="ctr">
-                    <a:lnL w="0" cap="flat" cmpd="sng" algn="ctr">
-                      <a:noFill/>
-                    </a:lnL>
-                    <a:lnR w="0" cap="flat" cmpd="sng" algn="ctr">
-                      <a:noFill/>
-                    </a:lnR>
-                    <a:lnT w="0" cap="flat" cmpd="sng" algn="ctr">
-                      <a:noFill/>
-                    </a:lnT>
-                    <a:lnB w="6350" cap="flat" cmpd="sng" algn="ctr">
-                      <a:solidFill>
-                        <a:srgbClr val="DDE3EB"/>
-                      </a:solidFill>
-                      <a:prstDash val="solid"/>
-                      <a:round/>
-                      <a:headEnd type="none" w="med" len="med"/>
-                      <a:tailEnd type="none" w="med" len="med"/>
-                    </a:lnB>
-                  </a:tcPr>
-                </a:tc>
-                <a:tc>
-                  <a:txBody>
-                    <a:bodyPr/>
-                    <a:lstStyle/>
-                    <a:p>
-                      <a:pPr indent="0" marL="0">
-                        <a:buNone/>
-                      </a:pPr>
-                      <a:r>
-                        <a:rPr lang="en-US" sz="950" dirty="0">
-                          <a:solidFill>
-                            <a:srgbClr val="1C2733"/>
-                          </a:solidFill>
-                          <a:latin typeface="Malgun Gothic" pitchFamily="34" charset="0"/>
-                          <a:ea typeface="Malgun Gothic" pitchFamily="34" charset="-122"/>
-                          <a:cs typeface="Malgun Gothic" pitchFamily="34" charset="-120"/>
-                        </a:rPr>
-                        <a:t>모든 경로를 한 곳에서 관리</a:t>
-                      </a:r>
-                      <a:endParaRPr lang="en-US" sz="950" dirty="0">
-                        <a:latin typeface="Malgun Gothic" charset="0"/>
-                        <a:ea typeface="Malgun Gothic" charset="0"/>
-                        <a:cs typeface="Malgun Gothic" charset="0"/>
-                      </a:endParaRPr>
-                    </a:p>
-                  </a:txBody>
-                  <a:tcPr marL="50800" marR="50800" marT="25400" marB="25400" anchor="ctr">
-                    <a:lnL w="0" cap="flat" cmpd="sng" algn="ctr">
-                      <a:noFill/>
-                    </a:lnL>
-                    <a:lnR w="0" cap="flat" cmpd="sng" algn="ctr">
-                      <a:noFill/>
-                    </a:lnR>
-                    <a:lnT w="0" cap="flat" cmpd="sng" algn="ctr">
-                      <a:noFill/>
-                    </a:lnT>
-                    <a:lnB w="6350" cap="flat" cmpd="sng" algn="ctr">
-                      <a:solidFill>
-                        <a:srgbClr val="DDE3EB"/>
-                      </a:solidFill>
-                      <a:prstDash val="solid"/>
-                      <a:round/>
-                      <a:headEnd type="none" w="med" len="med"/>
-                      <a:tailEnd type="none" w="med" len="med"/>
-                    </a:lnB>
-                  </a:tcPr>
-                </a:tc>
-              </a:tr>
-            </a:tbl>
-          </a:graphicData>
-        </a:graphic>
-      </p:graphicFrame>
-      <p:graphicFrame>
-        <p:nvGraphicFramePr>
-          <p:cNvPr id="17" name="Table 1"/>
-          <p:cNvGraphicFramePr>
-            <a:graphicFrameLocks noGrp="1"/>
-          </p:cNvGraphicFramePr>
-          <p:nvPr>
-            <p:extLst>
-              <p:ext uri="{D42A27DB-BD31-4B8C-83A1-F6EECF244321}">
-                <p14:modId xmlns:p14="http://schemas.microsoft.com/office/powerpoint/2010/main" val="1579011935"/>
-              </p:ext>
-            </p:extLst>
-          </p:nvPr>
-        </p:nvGraphicFramePr>
-        <p:xfrm>
-          <a:off x="6300216" y="3922776"/>
-          <a:ext cx="5074920" cy="914400"/>
-        </p:xfrm>
-        <a:graphic>
-          <a:graphicData uri="http://schemas.openxmlformats.org/drawingml/2006/table">
-            <a:tbl>
-              <a:tblPr/>
-              <a:tblGrid>
-                <a:gridCol w="1463040"/>
-                <a:gridCol w="3611880"/>
-              </a:tblGrid>
-              <a:tr h="274320">
-                <a:tc>
-                  <a:txBody>
-                    <a:bodyPr/>
-                    <a:lstStyle/>
-                    <a:p>
-                      <a:pPr indent="0" marL="0">
-                        <a:buNone/>
-                      </a:pPr>
-                      <a:r>
-                        <a:rPr lang="en-US" sz="950" b="1" dirty="0">
-                          <a:solidFill>
-                            <a:srgbClr val="16305B"/>
-                          </a:solidFill>
-                          <a:latin typeface="Malgun Gothic" pitchFamily="34" charset="0"/>
-                          <a:ea typeface="Malgun Gothic" pitchFamily="34" charset="-122"/>
-                          <a:cs typeface="Malgun Gothic" pitchFamily="34" charset="-120"/>
-                        </a:rPr>
-                        <a:t>파일</a:t>
-                      </a:r>
-                      <a:endParaRPr lang="en-US" sz="950" dirty="0">
-                        <a:latin typeface="Malgun Gothic" charset="0"/>
-                        <a:ea typeface="Malgun Gothic" charset="0"/>
-                        <a:cs typeface="Malgun Gothic" charset="0"/>
-                      </a:endParaRPr>
-                    </a:p>
-                  </a:txBody>
-                  <a:tcPr marL="50800" marR="50800" marT="25400" marB="25400" anchor="ctr">
-                    <a:lnL w="0" cap="flat" cmpd="sng" algn="ctr">
-                      <a:noFill/>
-                    </a:lnL>
-                    <a:lnR w="0" cap="flat" cmpd="sng" algn="ctr">
-                      <a:noFill/>
-                    </a:lnR>
-                    <a:lnT w="0" cap="flat" cmpd="sng" algn="ctr">
-                      <a:noFill/>
-                    </a:lnT>
-                    <a:lnB w="6350" cap="flat" cmpd="sng" algn="ctr">
-                      <a:solidFill>
-                        <a:srgbClr val="DDE3EB"/>
-                      </a:solidFill>
-                      <a:prstDash val="solid"/>
-                      <a:round/>
-                      <a:headEnd type="none" w="med" len="med"/>
-                      <a:tailEnd type="none" w="med" len="med"/>
-                    </a:lnB>
-                    <a:solidFill>
-                      <a:srgbClr val="EEF2F7"/>
-                    </a:solidFill>
-                  </a:tcPr>
-                </a:tc>
-                <a:tc>
-                  <a:txBody>
-                    <a:bodyPr/>
-                    <a:lstStyle/>
-                    <a:p>
-                      <a:pPr indent="0" marL="0">
-                        <a:buNone/>
-                      </a:pPr>
-                      <a:r>
-                        <a:rPr lang="en-US" sz="950" b="1" dirty="0">
-                          <a:solidFill>
-                            <a:srgbClr val="16305B"/>
-                          </a:solidFill>
-                          <a:latin typeface="Malgun Gothic" pitchFamily="34" charset="0"/>
-                          <a:ea typeface="Malgun Gothic" pitchFamily="34" charset="-122"/>
-                          <a:cs typeface="Malgun Gothic" pitchFamily="34" charset="-120"/>
-                        </a:rPr>
-                        <a:t>역할</a:t>
-                      </a:r>
-                      <a:endParaRPr lang="en-US" sz="950" dirty="0">
-                        <a:latin typeface="Malgun Gothic" charset="0"/>
-                        <a:ea typeface="Malgun Gothic" charset="0"/>
-                        <a:cs typeface="Malgun Gothic" charset="0"/>
-                      </a:endParaRPr>
-                    </a:p>
-                  </a:txBody>
-                  <a:tcPr marL="50800" marR="50800" marT="25400" marB="25400" anchor="ctr">
-                    <a:lnL w="0" cap="flat" cmpd="sng" algn="ctr">
-                      <a:noFill/>
-                    </a:lnL>
-                    <a:lnR w="0" cap="flat" cmpd="sng" algn="ctr">
-                      <a:noFill/>
-                    </a:lnR>
-                    <a:lnT w="0" cap="flat" cmpd="sng" algn="ctr">
-                      <a:noFill/>
-                    </a:lnT>
-                    <a:lnB w="6350" cap="flat" cmpd="sng" algn="ctr">
-                      <a:solidFill>
-                        <a:srgbClr val="DDE3EB"/>
-                      </a:solidFill>
-                      <a:prstDash val="solid"/>
-                      <a:round/>
-                      <a:headEnd type="none" w="med" len="med"/>
-                      <a:tailEnd type="none" w="med" len="med"/>
-                    </a:lnB>
-                    <a:solidFill>
-                      <a:srgbClr val="EEF2F7"/>
-                    </a:solidFill>
-                  </a:tcPr>
-                </a:tc>
-              </a:tr>
-              <a:tr h="274320">
-                <a:tc>
-                  <a:txBody>
-                    <a:bodyPr/>
-                    <a:lstStyle/>
-                    <a:p>
-                      <a:pPr indent="0" marL="0">
-                        <a:buNone/>
-                      </a:pPr>
-                      <a:r>
-                        <a:rPr lang="en-US" sz="950" b="1" dirty="0">
-                          <a:solidFill>
-                            <a:srgbClr val="16305B"/>
-                          </a:solidFill>
-                          <a:latin typeface="Consolas" pitchFamily="34" charset="0"/>
-                          <a:ea typeface="Consolas" pitchFamily="34" charset="-122"/>
-                          <a:cs typeface="Consolas" pitchFamily="34" charset="-120"/>
-                        </a:rPr>
-                        <a:t>Solidworks.py</a:t>
-                      </a:r>
-                      <a:endParaRPr lang="en-US" sz="950" dirty="0">
-                        <a:latin typeface="Consolas" charset="0"/>
-                        <a:ea typeface="Consolas" charset="0"/>
-                        <a:cs typeface="Consolas" charset="0"/>
-                      </a:endParaRPr>
-                    </a:p>
-                  </a:txBody>
-                  <a:tcPr marL="50800" marR="50800" marT="25400" marB="25400" anchor="ctr">
-                    <a:lnL w="0" cap="flat" cmpd="sng" algn="ctr">
-                      <a:noFill/>
-                    </a:lnL>
-                    <a:lnR w="0" cap="flat" cmpd="sng" algn="ctr">
-                      <a:noFill/>
-                    </a:lnR>
-                    <a:lnT w="0" cap="flat" cmpd="sng" algn="ctr">
-                      <a:noFill/>
-                    </a:lnT>
-                    <a:lnB w="6350" cap="flat" cmpd="sng" algn="ctr">
-                      <a:solidFill>
-                        <a:srgbClr val="DDE3EB"/>
-                      </a:solidFill>
-                      <a:prstDash val="solid"/>
-                      <a:round/>
-                      <a:headEnd type="none" w="med" len="med"/>
-                      <a:tailEnd type="none" w="med" len="med"/>
-                    </a:lnB>
-                  </a:tcPr>
-                </a:tc>
-                <a:tc>
-                  <a:txBody>
-                    <a:bodyPr/>
-                    <a:lstStyle/>
-                    <a:p>
-                      <a:pPr indent="0" marL="0">
-                        <a:buNone/>
-                      </a:pPr>
-                      <a:r>
-                        <a:rPr lang="en-US" sz="950" dirty="0">
-                          <a:solidFill>
-                            <a:srgbClr val="1C2733"/>
-                          </a:solidFill>
-                          <a:latin typeface="Malgun Gothic" pitchFamily="34" charset="0"/>
-                          <a:ea typeface="Malgun Gothic" pitchFamily="34" charset="-122"/>
-                          <a:cs typeface="Malgun Gothic" pitchFamily="34" charset="-120"/>
-                        </a:rPr>
-                        <a:t>전역변수 갱신 → 리빌드 → 질량·부피 취득 → STEP 저장</a:t>
-                      </a:r>
-                      <a:endParaRPr lang="en-US" sz="950" dirty="0">
-                        <a:latin typeface="Malgun Gothic" charset="0"/>
-                        <a:ea typeface="Malgun Gothic" charset="0"/>
-                        <a:cs typeface="Malgun Gothic" charset="0"/>
-                      </a:endParaRPr>
-                    </a:p>
-                  </a:txBody>
-                  <a:tcPr marL="50800" marR="50800" marT="25400" marB="25400" anchor="ctr">
-                    <a:lnL w="0" cap="flat" cmpd="sng" algn="ctr">
-                      <a:noFill/>
-                    </a:lnL>
-                    <a:lnR w="0" cap="flat" cmpd="sng" algn="ctr">
-                      <a:noFill/>
-                    </a:lnR>
-                    <a:lnT w="0" cap="flat" cmpd="sng" algn="ctr">
-                      <a:noFill/>
-                    </a:lnT>
-                    <a:lnB w="6350" cap="flat" cmpd="sng" algn="ctr">
-                      <a:solidFill>
-                        <a:srgbClr val="DDE3EB"/>
-                      </a:solidFill>
-                      <a:prstDash val="solid"/>
-                      <a:round/>
-                      <a:headEnd type="none" w="med" len="med"/>
-                      <a:tailEnd type="none" w="med" len="med"/>
-                    </a:lnB>
-                  </a:tcPr>
-                </a:tc>
-              </a:tr>
-              <a:tr h="274320">
-                <a:tc>
-                  <a:txBody>
-                    <a:bodyPr/>
-                    <a:lstStyle/>
-                    <a:p>
-                      <a:pPr indent="0" marL="0">
-                        <a:buNone/>
-                      </a:pPr>
-                      <a:r>
-                        <a:rPr lang="en-US" sz="950" b="1" dirty="0">
-                          <a:solidFill>
-                            <a:srgbClr val="16305B"/>
-                          </a:solidFill>
-                          <a:latin typeface="Consolas" pitchFamily="34" charset="0"/>
-                          <a:ea typeface="Consolas" pitchFamily="34" charset="-122"/>
-                          <a:cs typeface="Consolas" pitchFamily="34" charset="-120"/>
-                        </a:rPr>
-                        <a:t>icepak.py</a:t>
-                      </a:r>
-                      <a:endParaRPr lang="en-US" sz="950" dirty="0">
-                        <a:latin typeface="Consolas" charset="0"/>
-                        <a:ea typeface="Consolas" charset="0"/>
-                        <a:cs typeface="Consolas" charset="0"/>
-                      </a:endParaRPr>
-                    </a:p>
-                  </a:txBody>
-                  <a:tcPr marL="50800" marR="50800" marT="25400" marB="25400" anchor="ctr">
-                    <a:lnL w="0" cap="flat" cmpd="sng" algn="ctr">
-                      <a:noFill/>
-                    </a:lnL>
-                    <a:lnR w="0" cap="flat" cmpd="sng" algn="ctr">
-                      <a:noFill/>
-                    </a:lnR>
-                    <a:lnT w="0" cap="flat" cmpd="sng" algn="ctr">
-                      <a:noFill/>
-                    </a:lnT>
-                    <a:lnB w="6350" cap="flat" cmpd="sng" algn="ctr">
-                      <a:solidFill>
-                        <a:srgbClr val="DDE3EB"/>
-                      </a:solidFill>
-                      <a:prstDash val="solid"/>
-                      <a:round/>
-                      <a:headEnd type="none" w="med" len="med"/>
-                      <a:tailEnd type="none" w="med" len="med"/>
-                    </a:lnB>
-                  </a:tcPr>
-                </a:tc>
-                <a:tc>
-                  <a:txBody>
-                    <a:bodyPr/>
-                    <a:lstStyle/>
-                    <a:p>
-                      <a:pPr indent="0" marL="0">
-                        <a:buNone/>
-                      </a:pPr>
-                      <a:r>
-                        <a:rPr lang="en-US" sz="950" dirty="0">
-                          <a:solidFill>
-                            <a:srgbClr val="1C2733"/>
-                          </a:solidFill>
-                          <a:latin typeface="Malgun Gothic" pitchFamily="34" charset="0"/>
-                          <a:ea typeface="Malgun Gothic" pitchFamily="34" charset="-122"/>
-                          <a:cs typeface="Malgun Gothic" pitchFamily="34" charset="-120"/>
-                        </a:rPr>
-                        <a:t>해석 모델 구성 → 해석 실행 → 결과 CSV 추출</a:t>
-                      </a:r>
-                      <a:endParaRPr lang="en-US" sz="950" dirty="0">
-                        <a:latin typeface="Malgun Gothic" charset="0"/>
-                        <a:ea typeface="Malgun Gothic" charset="0"/>
-                        <a:cs typeface="Malgun Gothic" charset="0"/>
-                      </a:endParaRPr>
-                    </a:p>
-                  </a:txBody>
-                  <a:tcPr marL="50800" marR="50800" marT="25400" marB="25400" anchor="ctr">
-                    <a:lnL w="0" cap="flat" cmpd="sng" algn="ctr">
-                      <a:noFill/>
-                    </a:lnL>
-                    <a:lnR w="0" cap="flat" cmpd="sng" algn="ctr">
-                      <a:noFill/>
-                    </a:lnR>
-                    <a:lnT w="0" cap="flat" cmpd="sng" algn="ctr">
-                      <a:noFill/>
-                    </a:lnT>
-                    <a:lnB w="6350" cap="flat" cmpd="sng" algn="ctr">
-                      <a:solidFill>
-                        <a:srgbClr val="DDE3EB"/>
-                      </a:solidFill>
-                      <a:prstDash val="solid"/>
-                      <a:round/>
-                      <a:headEnd type="none" w="med" len="med"/>
-                      <a:tailEnd type="none" w="med" len="med"/>
-                    </a:lnB>
-                  </a:tcPr>
-                </a:tc>
-              </a:tr>
-              <a:tr h="274320">
-                <a:tc>
-                  <a:txBody>
-                    <a:bodyPr/>
-                    <a:lstStyle/>
-                    <a:p>
-                      <a:pPr indent="0" marL="0">
-                        <a:buNone/>
-                      </a:pPr>
-                      <a:r>
-                        <a:rPr lang="en-US" sz="950" b="1" dirty="0">
-                          <a:solidFill>
-                            <a:srgbClr val="16305B"/>
-                          </a:solidFill>
-                          <a:latin typeface="Consolas" pitchFamily="34" charset="0"/>
-                          <a:ea typeface="Consolas" pitchFamily="34" charset="-122"/>
-                          <a:cs typeface="Consolas" pitchFamily="34" charset="-120"/>
-                        </a:rPr>
-                        <a:t>result_parser.py</a:t>
-                      </a:r>
-                      <a:endParaRPr lang="en-US" sz="950" dirty="0">
-                        <a:latin typeface="Consolas" charset="0"/>
-                        <a:ea typeface="Consolas" charset="0"/>
-                        <a:cs typeface="Consolas" charset="0"/>
-                      </a:endParaRPr>
-                    </a:p>
-                  </a:txBody>
-                  <a:tcPr marL="50800" marR="50800" marT="25400" marB="25400" anchor="ctr">
-                    <a:lnL w="0" cap="flat" cmpd="sng" algn="ctr">
-                      <a:noFill/>
-                    </a:lnL>
-                    <a:lnR w="0" cap="flat" cmpd="sng" algn="ctr">
-                      <a:noFill/>
-                    </a:lnR>
-                    <a:lnT w="0" cap="flat" cmpd="sng" algn="ctr">
-                      <a:noFill/>
-                    </a:lnT>
-                    <a:lnB w="6350" cap="flat" cmpd="sng" algn="ctr">
-                      <a:solidFill>
-                        <a:srgbClr val="DDE3EB"/>
-                      </a:solidFill>
-                      <a:prstDash val="solid"/>
-                      <a:round/>
-                      <a:headEnd type="none" w="med" len="med"/>
-                      <a:tailEnd type="none" w="med" len="med"/>
-                    </a:lnB>
-                  </a:tcPr>
-                </a:tc>
-                <a:tc>
-                  <a:txBody>
-                    <a:bodyPr/>
-                    <a:lstStyle/>
-                    <a:p>
-                      <a:pPr indent="0" marL="0">
-                        <a:buNone/>
-                      </a:pPr>
-                      <a:r>
-                        <a:rPr lang="en-US" sz="950" dirty="0">
-                          <a:solidFill>
-                            <a:srgbClr val="1C2733"/>
-                          </a:solidFill>
-                          <a:latin typeface="Malgun Gothic" pitchFamily="34" charset="0"/>
-                          <a:ea typeface="Malgun Gothic" pitchFamily="34" charset="-122"/>
-                          <a:cs typeface="Malgun Gothic" pitchFamily="34" charset="-120"/>
-                        </a:rPr>
-                        <a:t>결과 CSV에서 차압·온도·유량·중량 산출 후 누적 저장</a:t>
-                      </a:r>
-                      <a:endParaRPr lang="en-US" sz="950" dirty="0">
-                        <a:latin typeface="Malgun Gothic" charset="0"/>
-                        <a:ea typeface="Malgun Gothic" charset="0"/>
-                        <a:cs typeface="Malgun Gothic" charset="0"/>
-                      </a:endParaRPr>
-                    </a:p>
-                  </a:txBody>
-                  <a:tcPr marL="50800" marR="50800" marT="25400" marB="25400" anchor="ctr">
-                    <a:lnL w="0" cap="flat" cmpd="sng" algn="ctr">
-                      <a:noFill/>
-                    </a:lnL>
-                    <a:lnR w="0" cap="flat" cmpd="sng" algn="ctr">
-                      <a:noFill/>
-                    </a:lnR>
-                    <a:lnT w="0" cap="flat" cmpd="sng" algn="ctr">
-                      <a:noFill/>
-                    </a:lnT>
-                    <a:lnB w="6350" cap="flat" cmpd="sng" algn="ctr">
-                      <a:solidFill>
-                        <a:srgbClr val="DDE3EB"/>
-                      </a:solidFill>
-                      <a:prstDash val="solid"/>
-                      <a:round/>
-                      <a:headEnd type="none" w="med" len="med"/>
-                      <a:tailEnd type="none" w="med" len="med"/>
-                    </a:lnB>
-                  </a:tcPr>
-                </a:tc>
-              </a:tr>
-            </a:tbl>
-          </a:graphicData>
-        </a:graphic>
-      </p:graphicFrame>
-      <p:sp>
-        <p:nvSpPr>
-          <p:cNvPr id="42" name="Shape 38"/>
+              <a:t>프로그램별 모듈 분리</a:t>
+            </a:r>
+            <a:endParaRPr lang="en-US" sz="1050" dirty="0"/>
+          </a:p>
+        </p:txBody>
+      </p:sp>
+      <p:sp>
+        <p:nvSpPr>
+          <p:cNvPr id="66" name="Text 64"/>
+          <p:cNvSpPr txBox="1"/>
+          <p:nvPr/>
+        </p:nvSpPr>
+        <p:spPr>
+          <a:xfrm>
+            <a:off x="978408" y="5943600"/>
+            <a:ext cx="3383280" cy="310896"/>
+          </a:xfrm>
+          <a:prstGeom prst="rect">
+            <a:avLst/>
+          </a:prstGeom>
+          <a:noFill/>
+          <a:ln/>
+        </p:spPr>
+        <p:txBody>
+          <a:bodyPr wrap="square" lIns="0" tIns="0" rIns="0" bIns="0" rtlCol="0" anchor="ctr"/>
+          <a:lstStyle/>
+          <a:p>
+            <a:pPr indent="0" marL="0">
+              <a:buNone/>
+            </a:pPr>
+            <a:r>
+              <a:rPr lang="en-US" sz="950" dirty="0">
+                <a:solidFill>
+                  <a:srgbClr val="6B7A8F"/>
+                </a:solidFill>
+                <a:latin typeface="Malgun Gothic" pitchFamily="34" charset="0"/>
+                <a:ea typeface="Malgun Gothic" pitchFamily="34" charset="-122"/>
+                <a:cs typeface="Malgun Gothic" pitchFamily="34" charset="-120"/>
+              </a:rPr>
+              <a:t>CAD·해석 제어를 독립 모듈로 구성해 서로 영향 없음</a:t>
+            </a:r>
+            <a:endParaRPr lang="en-US" sz="950" dirty="0"/>
+          </a:p>
+        </p:txBody>
+      </p:sp>
+      <p:sp>
+        <p:nvSpPr>
+          <p:cNvPr id="67" name="Shape 65"/>
           <p:cNvSpPr/>
           <p:nvPr/>
         </p:nvSpPr>
         <p:spPr>
           <a:xfrm>
-            <a:off x="502920" y="5541264"/>
-            <a:ext cx="11183112" cy="841248"/>
-          </a:xfrm>
-          <a:prstGeom prst="roundRect">
-            <a:avLst>
-              <a:gd name="adj" fmla="val 6522"/>
-            </a:avLst>
-          </a:prstGeom>
-          <a:solidFill>
-            <a:srgbClr val="FFFFFF"/>
-          </a:solidFill>
-          <a:ln w="9525">
-            <a:solidFill>
-              <a:srgbClr val="DDE3EB"/>
-            </a:solidFill>
-            <a:prstDash val="solid"/>
-          </a:ln>
-          <a:effectLst>
-            <a:outerShdw sx="100000" sy="100000" kx="0" ky="0" algn="bl" rotWithShape="0" blurRad="101600" dist="12700" dir="5400000">
-              <a:srgbClr val="9AA8BC">
-                <a:alpha val="18000"/>
-              </a:srgbClr>
-            </a:outerShdw>
-          </a:effectLst>
-        </p:spPr>
-      </p:sp>
-      <p:sp>
-        <p:nvSpPr>
-          <p:cNvPr id="43" name="Shape 39"/>
-          <p:cNvSpPr/>
-          <p:nvPr/>
-        </p:nvSpPr>
-        <p:spPr>
-          <a:xfrm>
-            <a:off x="832104" y="5724144"/>
+            <a:off x="4489704" y="5724144"/>
             <a:ext cx="64008" cy="164592"/>
           </a:xfrm>
           <a:prstGeom prst="rect">
@@ -23400,13 +23367,13 @@
       </p:sp>
       <p:sp>
         <p:nvSpPr>
-          <p:cNvPr id="44" name="Text 40"/>
-          <p:cNvSpPr txBox="1"/>
-          <p:nvPr/>
-        </p:nvSpPr>
-        <p:spPr>
-          <a:xfrm>
-            <a:off x="978408" y="5669280"/>
+          <p:cNvPr id="68" name="Text 66"/>
+          <p:cNvSpPr txBox="1"/>
+          <p:nvPr/>
+        </p:nvSpPr>
+        <p:spPr>
+          <a:xfrm>
+            <a:off x="4636008" y="5669280"/>
             <a:ext cx="3291840" cy="256032"/>
           </a:xfrm>
           <a:prstGeom prst="rect">
@@ -23431,7 +23398,7 @@
                 <a:ea typeface="Malgun Gothic" pitchFamily="34" charset="-122"/>
                 <a:cs typeface="Malgun Gothic" pitchFamily="34" charset="-120"/>
               </a:rPr>
-              <a:t>프로그램별 모듈 분리</a:t>
+              <a:t>단일 출처</a:t>
             </a:r>
             <a:endParaRPr lang="en-US" sz="1050" dirty="0"/>
           </a:p>
@@ -23439,13 +23406,13 @@
       </p:sp>
       <p:sp>
         <p:nvSpPr>
-          <p:cNvPr id="45" name="Text 41"/>
-          <p:cNvSpPr txBox="1"/>
-          <p:nvPr/>
-        </p:nvSpPr>
-        <p:spPr>
-          <a:xfrm>
-            <a:off x="978408" y="5943600"/>
+          <p:cNvPr id="69" name="Text 67"/>
+          <p:cNvSpPr txBox="1"/>
+          <p:nvPr/>
+        </p:nvSpPr>
+        <p:spPr>
+          <a:xfrm>
+            <a:off x="4636008" y="5943600"/>
             <a:ext cx="3383280" cy="310896"/>
           </a:xfrm>
           <a:prstGeom prst="rect">
@@ -23470,7 +23437,7 @@
                 <a:ea typeface="Malgun Gothic" pitchFamily="34" charset="-122"/>
                 <a:cs typeface="Malgun Gothic" pitchFamily="34" charset="-120"/>
               </a:rPr>
-              <a:t>CAD·해석 제어를 각각 독립 모듈로 구성</a:t>
+              <a:t>설계변수·경로는 한 파일에서만 정의하고 나머지는 참조</a:t>
             </a:r>
             <a:endParaRPr lang="en-US" sz="950" dirty="0"/>
           </a:p>
@@ -23478,13 +23445,13 @@
       </p:sp>
       <p:sp>
         <p:nvSpPr>
-          <p:cNvPr id="46" name="Shape 42"/>
+          <p:cNvPr id="70" name="Shape 68"/>
           <p:cNvSpPr/>
           <p:nvPr/>
         </p:nvSpPr>
         <p:spPr>
           <a:xfrm>
-            <a:off x="4489704" y="5724144"/>
+            <a:off x="8147304" y="5724144"/>
             <a:ext cx="64008" cy="164592"/>
           </a:xfrm>
           <a:prstGeom prst="rect">
@@ -23503,110 +23470,7 @@
       </p:sp>
       <p:sp>
         <p:nvSpPr>
-          <p:cNvPr id="47" name="Text 43"/>
-          <p:cNvSpPr txBox="1"/>
-          <p:nvPr/>
-        </p:nvSpPr>
-        <p:spPr>
-          <a:xfrm>
-            <a:off x="4636008" y="5669280"/>
-            <a:ext cx="3291840" cy="256032"/>
-          </a:xfrm>
-          <a:prstGeom prst="rect">
-            <a:avLst/>
-          </a:prstGeom>
-          <a:noFill/>
-          <a:ln/>
-        </p:spPr>
-        <p:txBody>
-          <a:bodyPr wrap="square" lIns="0" tIns="0" rIns="0" bIns="0" rtlCol="0" anchor="ctr"/>
-          <a:lstStyle/>
-          <a:p>
-            <a:pPr indent="0" marL="0">
-              <a:buNone/>
-            </a:pPr>
-            <a:r>
-              <a:rPr lang="en-US" sz="1050" b="1" dirty="0">
-                <a:solidFill>
-                  <a:srgbClr val="16305B"/>
-                </a:solidFill>
-                <a:latin typeface="Malgun Gothic" pitchFamily="34" charset="0"/>
-                <a:ea typeface="Malgun Gothic" pitchFamily="34" charset="-122"/>
-                <a:cs typeface="Malgun Gothic" pitchFamily="34" charset="-120"/>
-              </a:rPr>
-              <a:t>단일 출처</a:t>
-            </a:r>
-            <a:endParaRPr lang="en-US" sz="1050" dirty="0"/>
-          </a:p>
-        </p:txBody>
-      </p:sp>
-      <p:sp>
-        <p:nvSpPr>
-          <p:cNvPr id="48" name="Text 44"/>
-          <p:cNvSpPr txBox="1"/>
-          <p:nvPr/>
-        </p:nvSpPr>
-        <p:spPr>
-          <a:xfrm>
-            <a:off x="4636008" y="5943600"/>
-            <a:ext cx="3383280" cy="310896"/>
-          </a:xfrm>
-          <a:prstGeom prst="rect">
-            <a:avLst/>
-          </a:prstGeom>
-          <a:noFill/>
-          <a:ln/>
-        </p:spPr>
-        <p:txBody>
-          <a:bodyPr wrap="square" lIns="0" tIns="0" rIns="0" bIns="0" rtlCol="0" anchor="ctr"/>
-          <a:lstStyle/>
-          <a:p>
-            <a:pPr indent="0" marL="0">
-              <a:buNone/>
-            </a:pPr>
-            <a:r>
-              <a:rPr lang="en-US" sz="950" dirty="0">
-                <a:solidFill>
-                  <a:srgbClr val="6B7A8F"/>
-                </a:solidFill>
-                <a:latin typeface="Malgun Gothic" pitchFamily="34" charset="0"/>
-                <a:ea typeface="Malgun Gothic" pitchFamily="34" charset="-122"/>
-                <a:cs typeface="Malgun Gothic" pitchFamily="34" charset="-120"/>
-              </a:rPr>
-              <a:t>설계변수·경로 등은 한 파일에서만 정의</a:t>
-            </a:r>
-            <a:endParaRPr lang="en-US" sz="950" dirty="0"/>
-          </a:p>
-        </p:txBody>
-      </p:sp>
-      <p:sp>
-        <p:nvSpPr>
-          <p:cNvPr id="49" name="Shape 45"/>
-          <p:cNvSpPr/>
-          <p:nvPr/>
-        </p:nvSpPr>
-        <p:spPr>
-          <a:xfrm>
-            <a:off x="8147304" y="5724144"/>
-            <a:ext cx="64008" cy="164592"/>
-          </a:xfrm>
-          <a:prstGeom prst="rect">
-            <a:avLst/>
-          </a:prstGeom>
-          <a:solidFill>
-            <a:srgbClr val="00A3C4"/>
-          </a:solidFill>
-          <a:ln w="12700">
-            <a:solidFill>
-              <a:srgbClr val="00A3C4"/>
-            </a:solidFill>
-            <a:prstDash val="solid"/>
-          </a:ln>
-        </p:spPr>
-      </p:sp>
-      <p:sp>
-        <p:nvSpPr>
-          <p:cNvPr id="50" name="Text 46"/>
+          <p:cNvPr id="71" name="Text 69"/>
           <p:cNvSpPr txBox="1"/>
           <p:nvPr/>
         </p:nvSpPr>
@@ -23645,7 +23509,7 @@
       </p:sp>
       <p:sp>
         <p:nvSpPr>
-          <p:cNvPr id="51" name="Text 47"/>
+          <p:cNvPr id="72" name="Text 70"/>
           <p:cNvSpPr txBox="1"/>
           <p:nvPr/>
         </p:nvSpPr>
